--- a/docs/decks/L09.pptx
+++ b/docs/decks/L09.pptx
@@ -29,9 +29,11 @@
     <p:sldId id="277" r:id="rId23"/>
     <p:sldId id="278" r:id="rId24"/>
     <p:sldId id="279" r:id="rId25"/>
+    <p:sldId id="280" r:id="rId26"/>
+    <p:sldId id="281" r:id="rId27"/>
   </p:sldIdLst>
   <p:notesMasterIdLst>
-    <p:notesMasterId r:id="rId26"/>
+    <p:notesMasterId r:id="rId28"/>
   </p:notesMasterIdLst>
   <p:sldSz cx="12192000" cy="6858000"/>
   <p:notesSz cx="6858000" cy="12192000"/>
@@ -1957,6 +1959,182 @@
             <a:fld id="{F7021451-1387-4CA6-816F-3879F97B5CBC}" type="slidenum">
               <a:rPr lang="en-US"/>
               <a:t>24</a:t>
+            </a:fld>
+            <a:endParaRPr lang="en-US"/>
+          </a:p>
+        </p:txBody>
+      </p:sp>
+    </p:spTree>
+    <p:extLst>
+      <p:ext uri="{BB962C8B-B14F-4D97-AF65-F5344CB8AC3E}">
+        <p14:creationId xmlns:p14="http://schemas.microsoft.com/office/powerpoint/2010/main" val="1024086991"/>
+      </p:ext>
+    </p:extLst>
+  </p:cSld>
+  <p:clrMapOvr>
+    <a:masterClrMapping/>
+  </p:clrMapOvr>
+</p:notes>
+</file>
+
+<file path=ppt/notesSlides/notesSlide25.xml><?xml version="1.0" encoding="utf-8"?>
+<p:notes xmlns:a="http://schemas.openxmlformats.org/drawingml/2006/main" xmlns:r="http://schemas.openxmlformats.org/officeDocument/2006/relationships" xmlns:p="http://schemas.openxmlformats.org/presentationml/2006/main">
+  <p:cSld>
+    <p:spTree>
+      <p:nvGrpSpPr>
+        <p:cNvPr id="1" name=""/>
+        <p:cNvGrpSpPr/>
+        <p:nvPr/>
+      </p:nvGrpSpPr>
+      <p:grpSpPr>
+        <a:xfrm>
+          <a:off x="0" y="0"/>
+          <a:ext cx="0" cy="0"/>
+          <a:chOff x="0" y="0"/>
+          <a:chExt cx="0" cy="0"/>
+        </a:xfrm>
+      </p:grpSpPr>
+      <p:sp>
+        <p:nvSpPr>
+          <p:cNvPr id="2" name="Slide Image Placeholder 1"/>
+          <p:cNvSpPr>
+            <a:spLocks noGrp="1" noRot="1" noChangeAspect="1"/>
+          </p:cNvSpPr>
+          <p:nvPr>
+            <p:ph type="sldImg"/>
+          </p:nvPr>
+        </p:nvSpPr>
+        <p:spPr/>
+      </p:sp>
+      <p:sp>
+        <p:nvSpPr>
+          <p:cNvPr id="3" name="Notes Placeholder 2"/>
+          <p:cNvSpPr>
+            <a:spLocks noGrp="1"/>
+          </p:cNvSpPr>
+          <p:nvPr>
+            <p:ph type="body" idx="1"/>
+          </p:nvPr>
+        </p:nvSpPr>
+        <p:spPr/>
+        <p:txBody>
+          <a:bodyPr/>
+          <a:lstStyle/>
+          <a:p>
+            <a:r>
+              <a:rPr lang="en-US" dirty="0"/>
+              <a:t/>
+            </a:r>
+            <a:endParaRPr lang="en-US" dirty="0"/>
+          </a:p>
+        </p:txBody>
+      </p:sp>
+      <p:sp>
+        <p:nvSpPr>
+          <p:cNvPr id="4" name="Slide Number Placeholder 3"/>
+          <p:cNvSpPr>
+            <a:spLocks noGrp="1"/>
+          </p:cNvSpPr>
+          <p:nvPr>
+            <p:ph type="sldNum" sz="quarter" idx="10"/>
+          </p:nvPr>
+        </p:nvSpPr>
+        <p:spPr/>
+        <p:txBody>
+          <a:bodyPr/>
+          <a:lstStyle/>
+          <a:p>
+            <a:fld id="{F7021451-1387-4CA6-816F-3879F97B5CBC}" type="slidenum">
+              <a:rPr lang="en-US"/>
+              <a:t>25</a:t>
+            </a:fld>
+            <a:endParaRPr lang="en-US"/>
+          </a:p>
+        </p:txBody>
+      </p:sp>
+    </p:spTree>
+    <p:extLst>
+      <p:ext uri="{BB962C8B-B14F-4D97-AF65-F5344CB8AC3E}">
+        <p14:creationId xmlns:p14="http://schemas.microsoft.com/office/powerpoint/2010/main" val="1024086991"/>
+      </p:ext>
+    </p:extLst>
+  </p:cSld>
+  <p:clrMapOvr>
+    <a:masterClrMapping/>
+  </p:clrMapOvr>
+</p:notes>
+</file>
+
+<file path=ppt/notesSlides/notesSlide26.xml><?xml version="1.0" encoding="utf-8"?>
+<p:notes xmlns:a="http://schemas.openxmlformats.org/drawingml/2006/main" xmlns:r="http://schemas.openxmlformats.org/officeDocument/2006/relationships" xmlns:p="http://schemas.openxmlformats.org/presentationml/2006/main">
+  <p:cSld>
+    <p:spTree>
+      <p:nvGrpSpPr>
+        <p:cNvPr id="1" name=""/>
+        <p:cNvGrpSpPr/>
+        <p:nvPr/>
+      </p:nvGrpSpPr>
+      <p:grpSpPr>
+        <a:xfrm>
+          <a:off x="0" y="0"/>
+          <a:ext cx="0" cy="0"/>
+          <a:chOff x="0" y="0"/>
+          <a:chExt cx="0" cy="0"/>
+        </a:xfrm>
+      </p:grpSpPr>
+      <p:sp>
+        <p:nvSpPr>
+          <p:cNvPr id="2" name="Slide Image Placeholder 1"/>
+          <p:cNvSpPr>
+            <a:spLocks noGrp="1" noRot="1" noChangeAspect="1"/>
+          </p:cNvSpPr>
+          <p:nvPr>
+            <p:ph type="sldImg"/>
+          </p:nvPr>
+        </p:nvSpPr>
+        <p:spPr/>
+      </p:sp>
+      <p:sp>
+        <p:nvSpPr>
+          <p:cNvPr id="3" name="Notes Placeholder 2"/>
+          <p:cNvSpPr>
+            <a:spLocks noGrp="1"/>
+          </p:cNvSpPr>
+          <p:nvPr>
+            <p:ph type="body" idx="1"/>
+          </p:nvPr>
+        </p:nvSpPr>
+        <p:spPr/>
+        <p:txBody>
+          <a:bodyPr/>
+          <a:lstStyle/>
+          <a:p>
+            <a:r>
+              <a:rPr lang="en-US" dirty="0"/>
+              <a:t/>
+            </a:r>
+            <a:endParaRPr lang="en-US" dirty="0"/>
+          </a:p>
+        </p:txBody>
+      </p:sp>
+      <p:sp>
+        <p:nvSpPr>
+          <p:cNvPr id="4" name="Slide Number Placeholder 3"/>
+          <p:cNvSpPr>
+            <a:spLocks noGrp="1"/>
+          </p:cNvSpPr>
+          <p:nvPr>
+            <p:ph type="sldNum" sz="quarter" idx="10"/>
+          </p:nvPr>
+        </p:nvSpPr>
+        <p:spPr/>
+        <p:txBody>
+          <a:bodyPr/>
+          <a:lstStyle/>
+          <a:p>
+            <a:fld id="{F7021451-1387-4CA6-816F-3879F97B5CBC}" type="slidenum">
+              <a:rPr lang="en-US"/>
+              <a:t>26</a:t>
             </a:fld>
             <a:endParaRPr lang="en-US"/>
           </a:p>
@@ -10114,7 +10292,7 @@
                 <a:ea typeface="Calibri" pitchFamily="34" charset="-122"/>
                 <a:cs typeface="Calibri" pitchFamily="34" charset="-120"/>
               </a:rPr>
-              <a:t>Трейс, спани — і чого не має бути в лозі</a:t>
+              <a:t>Трейс і спани: коли одного request_id мало</a:t>
             </a:r>
             <a:endParaRPr lang="en-US" sz="2500" dirty="0"/>
           </a:p>
@@ -10612,11 +10790,11 @@
         <p:spPr>
           <a:xfrm>
             <a:off x="566928" y="2926080"/>
-            <a:ext cx="3520440" cy="1737360"/>
+            <a:ext cx="3520440" cy="1600200"/>
           </a:xfrm>
           <a:prstGeom prst="roundRect">
             <a:avLst>
-              <a:gd name="adj" fmla="val 6316"/>
+              <a:gd name="adj" fmla="val 6857"/>
             </a:avLst>
           </a:prstGeom>
           <a:solidFill>
@@ -10722,7 +10900,7 @@
                 <a:ea typeface="Calibri" pitchFamily="34" charset="-122"/>
                 <a:cs typeface="Calibri" pitchFamily="34" charset="-120"/>
               </a:rPr>
-              <a:t>Повні тіла — не за замовчуванням</a:t>
+              <a:t>Трейс</a:t>
             </a:r>
             <a:endParaRPr lang="en-US" sz="1450" dirty="0"/>
           </a:p>
@@ -10737,7 +10915,7 @@
         <p:spPr>
           <a:xfrm>
             <a:off x="768096" y="3611880"/>
-            <a:ext cx="3118104" cy="896112"/>
+            <a:ext cx="3118104" cy="758952"/>
           </a:xfrm>
           <a:prstGeom prst="rect">
             <a:avLst/>
@@ -10761,7 +10939,7 @@
                 <a:ea typeface="Calibri" pitchFamily="34" charset="-122"/>
                 <a:cs typeface="Calibri" pitchFamily="34" charset="-120"/>
               </a:rPr>
-              <a:t>текст запиту й відповіді роздувають лог і тягнуть за собою PII</a:t>
+              <a:t>усе, що сталося в межах одного звернення користувача</a:t>
             </a:r>
             <a:endParaRPr lang="en-US" sz="1200" dirty="0"/>
           </a:p>
@@ -10776,11 +10954,11 @@
         <p:spPr>
           <a:xfrm>
             <a:off x="4270248" y="2926080"/>
-            <a:ext cx="3520440" cy="1737360"/>
+            <a:ext cx="3520440" cy="1600200"/>
           </a:xfrm>
           <a:prstGeom prst="roundRect">
             <a:avLst>
-              <a:gd name="adj" fmla="val 6316"/>
+              <a:gd name="adj" fmla="val 6857"/>
             </a:avLst>
           </a:prstGeom>
           <a:solidFill>
@@ -10886,7 +11064,7 @@
                 <a:ea typeface="Calibri" pitchFamily="34" charset="-122"/>
                 <a:cs typeface="Calibri" pitchFamily="34" charset="-120"/>
               </a:rPr>
-              <a:t>Тіла — семпл із терміном життя</a:t>
+              <a:t>Спан</a:t>
             </a:r>
             <a:endParaRPr lang="en-US" sz="1450" dirty="0"/>
           </a:p>
@@ -10901,7 +11079,7 @@
         <p:spPr>
           <a:xfrm>
             <a:off x="4471416" y="3611880"/>
-            <a:ext cx="3118104" cy="896112"/>
+            <a:ext cx="3118104" cy="758952"/>
           </a:xfrm>
           <a:prstGeom prst="rect">
             <a:avLst/>
@@ -10925,7 +11103,7 @@
                 <a:ea typeface="Calibri" pitchFamily="34" charset="-122"/>
                 <a:cs typeface="Calibri" pitchFamily="34" charset="-120"/>
               </a:rPr>
-              <a:t>невелика частка, обмежений час зберігання, доступ за потреби</a:t>
+              <a:t>один крок усередині: виклик моделі, інструмент, guardrail — зі своїм початком, тривалістю і статусом</a:t>
             </a:r>
             <a:endParaRPr lang="en-US" sz="1200" dirty="0"/>
           </a:p>
@@ -10940,17 +11118,22 @@
         <p:spPr>
           <a:xfrm>
             <a:off x="7973568" y="2926080"/>
-            <a:ext cx="3520440" cy="1737360"/>
+            <a:ext cx="3520440" cy="1600200"/>
           </a:xfrm>
           <a:prstGeom prst="roundRect">
             <a:avLst>
-              <a:gd name="adj" fmla="val 6316"/>
+              <a:gd name="adj" fmla="val 6857"/>
             </a:avLst>
           </a:prstGeom>
           <a:solidFill>
-            <a:srgbClr val="F9E9E8"/>
+            <a:srgbClr val="FFFFFF"/>
           </a:solidFill>
-          <a:ln/>
+          <a:ln w="12700">
+            <a:solidFill>
+              <a:srgbClr val="E4E6EC"/>
+            </a:solidFill>
+            <a:prstDash val="solid"/>
+          </a:ln>
         </p:spPr>
       </p:sp>
       <p:sp>
@@ -10968,7 +11151,7 @@
             <a:avLst/>
           </a:prstGeom>
           <a:solidFill>
-            <a:srgbClr val="B3261E"/>
+            <a:srgbClr val="1B1D23"/>
           </a:solidFill>
           <a:ln/>
         </p:spPr>
@@ -11000,7 +11183,7 @@
             <a:r>
               <a:rPr lang="en-US" sz="1200" b="1" dirty="0">
                 <a:solidFill>
-                  <a:srgbClr val="F9E9E8"/>
+                  <a:srgbClr val="FFFFFF"/>
                 </a:solidFill>
                 <a:latin typeface="Courier New" pitchFamily="34" charset="0"/>
                 <a:ea typeface="Courier New" pitchFamily="34" charset="-122"/>
@@ -11039,13 +11222,13 @@
             <a:r>
               <a:rPr lang="en-US" sz="1450" b="1" dirty="0">
                 <a:solidFill>
-                  <a:srgbClr val="B3261E"/>
+                  <a:srgbClr val="1B1D23"/>
                 </a:solidFill>
                 <a:latin typeface="Calibri" pitchFamily="34" charset="0"/>
                 <a:ea typeface="Calibri" pitchFamily="34" charset="-122"/>
                 <a:cs typeface="Calibri" pitchFamily="34" charset="-120"/>
               </a:rPr>
-              <a:t>Секрети й ключі — ніколи</a:t>
+              <a:t>Дерево спанів</a:t>
             </a:r>
             <a:endParaRPr lang="en-US" sz="1450" dirty="0"/>
           </a:p>
@@ -11060,7 +11243,7 @@
         <p:spPr>
           <a:xfrm>
             <a:off x="8174736" y="3611880"/>
-            <a:ext cx="3118104" cy="896112"/>
+            <a:ext cx="3118104" cy="758952"/>
           </a:xfrm>
           <a:prstGeom prst="rect">
             <a:avLst/>
@@ -11078,13 +11261,13 @@
             <a:r>
               <a:rPr lang="en-US" sz="1200" dirty="0">
                 <a:solidFill>
-                  <a:srgbClr val="1B1D23"/>
+                  <a:srgbClr val="565C6B"/>
                 </a:solidFill>
                 <a:latin typeface="Calibri" pitchFamily="34" charset="0"/>
                 <a:ea typeface="Calibri" pitchFamily="34" charset="-122"/>
                 <a:cs typeface="Calibri" pitchFamily="34" charset="-120"/>
               </a:rPr>
-              <a:t>залогував — вважай, що поширив; чистити заднім числом пізно</a:t>
+              <a:t>у кожного є батько — видно не лише «що було», а й «що з чого виросло»</a:t>
             </a:r>
             <a:endParaRPr lang="en-US" sz="1200" dirty="0"/>
           </a:p>
@@ -11098,16 +11281,16 @@
         </p:nvSpPr>
         <p:spPr>
           <a:xfrm>
-            <a:off x="566928" y="4937760"/>
-            <a:ext cx="11064240" cy="914400"/>
+            <a:off x="566928" y="4800600"/>
+            <a:ext cx="11064240" cy="1051560"/>
           </a:xfrm>
           <a:prstGeom prst="roundRect">
             <a:avLst>
-              <a:gd name="adj" fmla="val 12000"/>
+              <a:gd name="adj" fmla="val 10435"/>
             </a:avLst>
           </a:prstGeom>
           <a:solidFill>
-            <a:srgbClr val="F8F0E2"/>
+            <a:srgbClr val="E9F3EE"/>
           </a:solidFill>
           <a:ln/>
         </p:spPr>
@@ -11120,8 +11303,47 @@
         </p:nvSpPr>
         <p:spPr>
           <a:xfrm>
-            <a:off x="786384" y="5084064"/>
-            <a:ext cx="10625328" cy="621792"/>
+            <a:off x="786384" y="4928616"/>
+            <a:ext cx="10625328" cy="219456"/>
+          </a:xfrm>
+          <a:prstGeom prst="rect">
+            <a:avLst/>
+          </a:prstGeom>
+          <a:noFill/>
+          <a:ln/>
+        </p:spPr>
+        <p:txBody>
+          <a:bodyPr wrap="square" lIns="0" tIns="0" rIns="0" bIns="0" rtlCol="0" anchor="ctr"/>
+          <a:lstStyle/>
+          <a:p>
+            <a:pPr indent="0" marL="0">
+              <a:buNone/>
+            </a:pPr>
+            <a:r>
+              <a:rPr lang="en-US" sz="950" b="1" spc="150" kern="0" dirty="0">
+                <a:solidFill>
+                  <a:srgbClr val="177245"/>
+                </a:solidFill>
+                <a:latin typeface="Courier New" pitchFamily="34" charset="0"/>
+                <a:ea typeface="Courier New" pitchFamily="34" charset="-122"/>
+                <a:cs typeface="Courier New" pitchFamily="34" charset="-120"/>
+              </a:rPr>
+              <a:t>ЗАКЛАДІТЬ ВІДРАЗУ</a:t>
+            </a:r>
+            <a:endParaRPr lang="en-US" sz="950" dirty="0"/>
+          </a:p>
+        </p:txBody>
+      </p:sp>
+      <p:sp>
+        <p:nvSpPr>
+          <p:cNvPr id="38" name="Text 36"/>
+          <p:cNvSpPr/>
+          <p:nvPr/>
+        </p:nvSpPr>
+        <p:spPr>
+          <a:xfrm>
+            <a:off x="786384" y="5184648"/>
+            <a:ext cx="10625328" cy="539496"/>
           </a:xfrm>
           <a:prstGeom prst="rect">
             <a:avLst/>
@@ -11145,7 +11367,7 @@
                 <a:ea typeface="Calibri" pitchFamily="34" charset="-122"/>
                 <a:cs typeface="Calibri" pitchFamily="34" charset="-120"/>
               </a:rPr>
-              <a:t>Зі стрімінгом змінюються самі метрики: замість «часу відповіді» — час до першого токена і швидкість генерації.</a:t>
+              <a:t>Ідентифікатор народжується на вході, передається у все, що ви кличете, і стоїть у кожному рядку лога — включно з невдалими спробами. Дописати його потім — це переписати всі логи, які вже накопичилися.</a:t>
             </a:r>
             <a:endParaRPr lang="en-US" sz="1300" dirty="0"/>
           </a:p>
@@ -11264,7 +11486,7 @@
                 <a:ea typeface="Courier New" pitchFamily="34" charset="-122"/>
                 <a:cs typeface="Courier New" pitchFamily="34" charset="-120"/>
               </a:rPr>
-              <a:t>10</a:t>
+              <a:t>09</a:t>
             </a:r>
             <a:endParaRPr lang="en-US" sz="2600" dirty="0"/>
           </a:p>
@@ -11303,7 +11525,7 @@
                 <a:ea typeface="Calibri" pitchFamily="34" charset="-122"/>
                 <a:cs typeface="Calibri" pitchFamily="34" charset="-120"/>
               </a:rPr>
-              <a:t>У продукті чи індустріальний стек</a:t>
+              <a:t>Стрімінг змінює самі метрики</a:t>
             </a:r>
             <a:endParaRPr lang="en-US" sz="2500" dirty="0"/>
           </a:p>
@@ -11311,7 +11533,46 @@
       </p:sp>
       <p:sp>
         <p:nvSpPr>
-          <p:cNvPr id="4" name="Shape 2"/>
+          <p:cNvPr id="4" name="Text 2"/>
+          <p:cNvSpPr/>
+          <p:nvPr/>
+        </p:nvSpPr>
+        <p:spPr>
+          <a:xfrm>
+            <a:off x="1225296" y="1005840"/>
+            <a:ext cx="8223199" cy="292608"/>
+          </a:xfrm>
+          <a:prstGeom prst="rect">
+            <a:avLst/>
+          </a:prstGeom>
+          <a:noFill/>
+          <a:ln/>
+        </p:spPr>
+        <p:txBody>
+          <a:bodyPr wrap="square" lIns="0" tIns="0" rIns="0" bIns="0" rtlCol="0" anchor="t"/>
+          <a:lstStyle/>
+          <a:p>
+            <a:pPr indent="0" marL="0">
+              <a:buNone/>
+            </a:pPr>
+            <a:r>
+              <a:rPr lang="en-US" sz="1300" dirty="0">
+                <a:solidFill>
+                  <a:srgbClr val="565C6B"/>
+                </a:solidFill>
+                <a:latin typeface="Calibri" pitchFamily="34" charset="0"/>
+                <a:ea typeface="Calibri" pitchFamily="34" charset="-122"/>
+                <a:cs typeface="Calibri" pitchFamily="34" charset="-120"/>
+              </a:rPr>
+              <a:t>Знати заздалегідь дешевше, ніж переробляти лог</a:t>
+            </a:r>
+            <a:endParaRPr lang="en-US" sz="1300" dirty="0"/>
+          </a:p>
+        </p:txBody>
+      </p:sp>
+      <p:sp>
+        <p:nvSpPr>
+          <p:cNvPr id="5" name="Shape 3"/>
           <p:cNvSpPr/>
           <p:nvPr/>
         </p:nvSpPr>
@@ -11333,7 +11594,7 @@
       </p:sp>
       <p:sp>
         <p:nvSpPr>
-          <p:cNvPr id="5" name="Text 3"/>
+          <p:cNvPr id="6" name="Text 4"/>
           <p:cNvSpPr/>
           <p:nvPr/>
         </p:nvSpPr>
@@ -11372,7 +11633,7 @@
       </p:sp>
       <p:sp>
         <p:nvSpPr>
-          <p:cNvPr id="6" name="Text 4"/>
+          <p:cNvPr id="7" name="Text 5"/>
           <p:cNvSpPr/>
           <p:nvPr/>
         </p:nvSpPr>
@@ -11411,18 +11672,505 @@
       </p:sp>
       <p:sp>
         <p:nvSpPr>
-          <p:cNvPr id="7" name="Shape 5"/>
-          <p:cNvSpPr/>
-          <p:nvPr/>
-        </p:nvSpPr>
-        <p:spPr>
-          <a:xfrm>
-            <a:off x="566928" y="1828800"/>
-            <a:ext cx="5349240" cy="1783080"/>
+          <p:cNvPr id="8" name="Shape 6"/>
+          <p:cNvSpPr/>
+          <p:nvPr/>
+        </p:nvSpPr>
+        <p:spPr>
+          <a:xfrm>
+            <a:off x="566928" y="1920240"/>
+            <a:ext cx="3520440" cy="2103120"/>
           </a:xfrm>
           <a:prstGeom prst="roundRect">
             <a:avLst>
-              <a:gd name="adj" fmla="val 6154"/>
+              <a:gd name="adj" fmla="val 5217"/>
+            </a:avLst>
+          </a:prstGeom>
+          <a:solidFill>
+            <a:srgbClr val="FFFFFF"/>
+          </a:solidFill>
+          <a:ln w="12700">
+            <a:solidFill>
+              <a:srgbClr val="E4E6EC"/>
+            </a:solidFill>
+            <a:prstDash val="solid"/>
+          </a:ln>
+        </p:spPr>
+      </p:sp>
+      <p:sp>
+        <p:nvSpPr>
+          <p:cNvPr id="9" name="Shape 7"/>
+          <p:cNvSpPr/>
+          <p:nvPr/>
+        </p:nvSpPr>
+        <p:spPr>
+          <a:xfrm>
+            <a:off x="768096" y="2103120"/>
+            <a:ext cx="384048" cy="384048"/>
+          </a:xfrm>
+          <a:prstGeom prst="ellipse">
+            <a:avLst/>
+          </a:prstGeom>
+          <a:solidFill>
+            <a:srgbClr val="1B1D23"/>
+          </a:solidFill>
+          <a:ln/>
+        </p:spPr>
+      </p:sp>
+      <p:sp>
+        <p:nvSpPr>
+          <p:cNvPr id="10" name="Text 8"/>
+          <p:cNvSpPr/>
+          <p:nvPr/>
+        </p:nvSpPr>
+        <p:spPr>
+          <a:xfrm>
+            <a:off x="768096" y="2103120"/>
+            <a:ext cx="384048" cy="384048"/>
+          </a:xfrm>
+          <a:prstGeom prst="rect">
+            <a:avLst/>
+          </a:prstGeom>
+          <a:noFill/>
+          <a:ln/>
+        </p:spPr>
+        <p:txBody>
+          <a:bodyPr wrap="square" lIns="0" tIns="0" rIns="0" bIns="0" rtlCol="0" anchor="ctr"/>
+          <a:lstStyle/>
+          <a:p>
+            <a:pPr algn="ctr" indent="0" marL="0">
+              <a:buNone/>
+            </a:pPr>
+            <a:r>
+              <a:rPr lang="en-US" sz="1200" b="1" dirty="0">
+                <a:solidFill>
+                  <a:srgbClr val="FFFFFF"/>
+                </a:solidFill>
+                <a:latin typeface="Courier New" pitchFamily="34" charset="0"/>
+                <a:ea typeface="Courier New" pitchFamily="34" charset="-122"/>
+                <a:cs typeface="Courier New" pitchFamily="34" charset="-120"/>
+              </a:rPr>
+              <a:t>1</a:t>
+            </a:r>
+            <a:endParaRPr lang="en-US" sz="1200" dirty="0"/>
+          </a:p>
+        </p:txBody>
+      </p:sp>
+      <p:sp>
+        <p:nvSpPr>
+          <p:cNvPr id="11" name="Text 9"/>
+          <p:cNvSpPr/>
+          <p:nvPr/>
+        </p:nvSpPr>
+        <p:spPr>
+          <a:xfrm>
+            <a:off x="1280160" y="2075688"/>
+            <a:ext cx="2606040" cy="438912"/>
+          </a:xfrm>
+          <a:prstGeom prst="rect">
+            <a:avLst/>
+          </a:prstGeom>
+          <a:noFill/>
+          <a:ln/>
+        </p:spPr>
+        <p:txBody>
+          <a:bodyPr wrap="square" lIns="0" tIns="0" rIns="0" bIns="0" rtlCol="0" anchor="ctr"/>
+          <a:lstStyle/>
+          <a:p>
+            <a:pPr indent="0" marL="0">
+              <a:buNone/>
+            </a:pPr>
+            <a:r>
+              <a:rPr lang="en-US" sz="1450" b="1" dirty="0">
+                <a:solidFill>
+                  <a:srgbClr val="1B1D23"/>
+                </a:solidFill>
+                <a:latin typeface="Calibri" pitchFamily="34" charset="0"/>
+                <a:ea typeface="Calibri" pitchFamily="34" charset="-122"/>
+                <a:cs typeface="Calibri" pitchFamily="34" charset="-120"/>
+              </a:rPr>
+              <a:t>Один час стає трьома</a:t>
+            </a:r>
+            <a:endParaRPr lang="en-US" sz="1450" dirty="0"/>
+          </a:p>
+        </p:txBody>
+      </p:sp>
+      <p:sp>
+        <p:nvSpPr>
+          <p:cNvPr id="12" name="Text 10"/>
+          <p:cNvSpPr/>
+          <p:nvPr/>
+        </p:nvSpPr>
+        <p:spPr>
+          <a:xfrm>
+            <a:off x="768096" y="2606040"/>
+            <a:ext cx="3118104" cy="1261872"/>
+          </a:xfrm>
+          <a:prstGeom prst="rect">
+            <a:avLst/>
+          </a:prstGeom>
+          <a:noFill/>
+          <a:ln/>
+        </p:spPr>
+        <p:txBody>
+          <a:bodyPr wrap="square" lIns="0" tIns="0" rIns="0" bIns="0" rtlCol="0" anchor="t"/>
+          <a:lstStyle/>
+          <a:p>
+            <a:pPr indent="0" marL="0">
+              <a:buNone/>
+            </a:pPr>
+            <a:r>
+              <a:rPr lang="en-US" sz="1200" dirty="0">
+                <a:solidFill>
+                  <a:srgbClr val="565C6B"/>
+                </a:solidFill>
+                <a:latin typeface="Calibri" pitchFamily="34" charset="0"/>
+                <a:ea typeface="Calibri" pitchFamily="34" charset="-122"/>
+                <a:cs typeface="Calibri" pitchFamily="34" charset="-120"/>
+              </a:rPr>
+              <a:t>час до першого токена, повна генерація, час до останнього байта — мірити треба перший і третій</a:t>
+            </a:r>
+            <a:endParaRPr lang="en-US" sz="1200" dirty="0"/>
+          </a:p>
+        </p:txBody>
+      </p:sp>
+      <p:sp>
+        <p:nvSpPr>
+          <p:cNvPr id="13" name="Shape 11"/>
+          <p:cNvSpPr/>
+          <p:nvPr/>
+        </p:nvSpPr>
+        <p:spPr>
+          <a:xfrm>
+            <a:off x="4270248" y="1920240"/>
+            <a:ext cx="3520440" cy="2103120"/>
+          </a:xfrm>
+          <a:prstGeom prst="roundRect">
+            <a:avLst>
+              <a:gd name="adj" fmla="val 5217"/>
+            </a:avLst>
+          </a:prstGeom>
+          <a:solidFill>
+            <a:srgbClr val="F9E9E8"/>
+          </a:solidFill>
+          <a:ln/>
+        </p:spPr>
+      </p:sp>
+      <p:sp>
+        <p:nvSpPr>
+          <p:cNvPr id="14" name="Shape 12"/>
+          <p:cNvSpPr/>
+          <p:nvPr/>
+        </p:nvSpPr>
+        <p:spPr>
+          <a:xfrm>
+            <a:off x="4471416" y="2103120"/>
+            <a:ext cx="384048" cy="384048"/>
+          </a:xfrm>
+          <a:prstGeom prst="ellipse">
+            <a:avLst/>
+          </a:prstGeom>
+          <a:solidFill>
+            <a:srgbClr val="B3261E"/>
+          </a:solidFill>
+          <a:ln/>
+        </p:spPr>
+      </p:sp>
+      <p:sp>
+        <p:nvSpPr>
+          <p:cNvPr id="15" name="Text 13"/>
+          <p:cNvSpPr/>
+          <p:nvPr/>
+        </p:nvSpPr>
+        <p:spPr>
+          <a:xfrm>
+            <a:off x="4471416" y="2103120"/>
+            <a:ext cx="384048" cy="384048"/>
+          </a:xfrm>
+          <a:prstGeom prst="rect">
+            <a:avLst/>
+          </a:prstGeom>
+          <a:noFill/>
+          <a:ln/>
+        </p:spPr>
+        <p:txBody>
+          <a:bodyPr wrap="square" lIns="0" tIns="0" rIns="0" bIns="0" rtlCol="0" anchor="ctr"/>
+          <a:lstStyle/>
+          <a:p>
+            <a:pPr algn="ctr" indent="0" marL="0">
+              <a:buNone/>
+            </a:pPr>
+            <a:r>
+              <a:rPr lang="en-US" sz="1200" b="1" dirty="0">
+                <a:solidFill>
+                  <a:srgbClr val="F9E9E8"/>
+                </a:solidFill>
+                <a:latin typeface="Courier New" pitchFamily="34" charset="0"/>
+                <a:ea typeface="Courier New" pitchFamily="34" charset="-122"/>
+                <a:cs typeface="Courier New" pitchFamily="34" charset="-120"/>
+              </a:rPr>
+              <a:t>2</a:t>
+            </a:r>
+            <a:endParaRPr lang="en-US" sz="1200" dirty="0"/>
+          </a:p>
+        </p:txBody>
+      </p:sp>
+      <p:sp>
+        <p:nvSpPr>
+          <p:cNvPr id="16" name="Text 14"/>
+          <p:cNvSpPr/>
+          <p:nvPr/>
+        </p:nvSpPr>
+        <p:spPr>
+          <a:xfrm>
+            <a:off x="4983480" y="2075688"/>
+            <a:ext cx="2606040" cy="438912"/>
+          </a:xfrm>
+          <a:prstGeom prst="rect">
+            <a:avLst/>
+          </a:prstGeom>
+          <a:noFill/>
+          <a:ln/>
+        </p:spPr>
+        <p:txBody>
+          <a:bodyPr wrap="square" lIns="0" tIns="0" rIns="0" bIns="0" rtlCol="0" anchor="ctr"/>
+          <a:lstStyle/>
+          <a:p>
+            <a:pPr indent="0" marL="0">
+              <a:buNone/>
+            </a:pPr>
+            <a:r>
+              <a:rPr lang="en-US" sz="1450" b="1" dirty="0">
+                <a:solidFill>
+                  <a:srgbClr val="B3261E"/>
+                </a:solidFill>
+                <a:latin typeface="Calibri" pitchFamily="34" charset="0"/>
+                <a:ea typeface="Calibri" pitchFamily="34" charset="-122"/>
+                <a:cs typeface="Calibri" pitchFamily="34" charset="-120"/>
+              </a:rPr>
+              <a:t>Помилка посеред успіху</a:t>
+            </a:r>
+            <a:endParaRPr lang="en-US" sz="1450" dirty="0"/>
+          </a:p>
+        </p:txBody>
+      </p:sp>
+      <p:sp>
+        <p:nvSpPr>
+          <p:cNvPr id="17" name="Text 15"/>
+          <p:cNvSpPr/>
+          <p:nvPr/>
+        </p:nvSpPr>
+        <p:spPr>
+          <a:xfrm>
+            <a:off x="4471416" y="2606040"/>
+            <a:ext cx="3118104" cy="1261872"/>
+          </a:xfrm>
+          <a:prstGeom prst="rect">
+            <a:avLst/>
+          </a:prstGeom>
+          <a:noFill/>
+          <a:ln/>
+        </p:spPr>
+        <p:txBody>
+          <a:bodyPr wrap="square" lIns="0" tIns="0" rIns="0" bIns="0" rtlCol="0" anchor="t"/>
+          <a:lstStyle/>
+          <a:p>
+            <a:pPr indent="0" marL="0">
+              <a:buNone/>
+            </a:pPr>
+            <a:r>
+              <a:rPr lang="en-US" sz="1200" dirty="0">
+                <a:solidFill>
+                  <a:srgbClr val="1B1D23"/>
+                </a:solidFill>
+                <a:latin typeface="Calibri" pitchFamily="34" charset="0"/>
+                <a:ea typeface="Calibri" pitchFamily="34" charset="-122"/>
+                <a:cs typeface="Calibri" pitchFamily="34" charset="-120"/>
+              </a:rPr>
+              <a:t>стрім почався з 200 і обірвався на середині: для HTTP усе гаразд, для користувача — зламано</a:t>
+            </a:r>
+            <a:endParaRPr lang="en-US" sz="1200" dirty="0"/>
+          </a:p>
+        </p:txBody>
+      </p:sp>
+      <p:sp>
+        <p:nvSpPr>
+          <p:cNvPr id="18" name="Shape 16"/>
+          <p:cNvSpPr/>
+          <p:nvPr/>
+        </p:nvSpPr>
+        <p:spPr>
+          <a:xfrm>
+            <a:off x="7973568" y="1920240"/>
+            <a:ext cx="3520440" cy="2103120"/>
+          </a:xfrm>
+          <a:prstGeom prst="roundRect">
+            <a:avLst>
+              <a:gd name="adj" fmla="val 5217"/>
+            </a:avLst>
+          </a:prstGeom>
+          <a:solidFill>
+            <a:srgbClr val="FFFFFF"/>
+          </a:solidFill>
+          <a:ln w="12700">
+            <a:solidFill>
+              <a:srgbClr val="E4E6EC"/>
+            </a:solidFill>
+            <a:prstDash val="solid"/>
+          </a:ln>
+        </p:spPr>
+      </p:sp>
+      <p:sp>
+        <p:nvSpPr>
+          <p:cNvPr id="19" name="Shape 17"/>
+          <p:cNvSpPr/>
+          <p:nvPr/>
+        </p:nvSpPr>
+        <p:spPr>
+          <a:xfrm>
+            <a:off x="8174736" y="2103120"/>
+            <a:ext cx="384048" cy="384048"/>
+          </a:xfrm>
+          <a:prstGeom prst="ellipse">
+            <a:avLst/>
+          </a:prstGeom>
+          <a:solidFill>
+            <a:srgbClr val="1B1D23"/>
+          </a:solidFill>
+          <a:ln/>
+        </p:spPr>
+      </p:sp>
+      <p:sp>
+        <p:nvSpPr>
+          <p:cNvPr id="20" name="Text 18"/>
+          <p:cNvSpPr/>
+          <p:nvPr/>
+        </p:nvSpPr>
+        <p:spPr>
+          <a:xfrm>
+            <a:off x="8174736" y="2103120"/>
+            <a:ext cx="384048" cy="384048"/>
+          </a:xfrm>
+          <a:prstGeom prst="rect">
+            <a:avLst/>
+          </a:prstGeom>
+          <a:noFill/>
+          <a:ln/>
+        </p:spPr>
+        <p:txBody>
+          <a:bodyPr wrap="square" lIns="0" tIns="0" rIns="0" bIns="0" rtlCol="0" anchor="ctr"/>
+          <a:lstStyle/>
+          <a:p>
+            <a:pPr algn="ctr" indent="0" marL="0">
+              <a:buNone/>
+            </a:pPr>
+            <a:r>
+              <a:rPr lang="en-US" sz="1200" b="1" dirty="0">
+                <a:solidFill>
+                  <a:srgbClr val="FFFFFF"/>
+                </a:solidFill>
+                <a:latin typeface="Courier New" pitchFamily="34" charset="0"/>
+                <a:ea typeface="Courier New" pitchFamily="34" charset="-122"/>
+                <a:cs typeface="Courier New" pitchFamily="34" charset="-120"/>
+              </a:rPr>
+              <a:t>3</a:t>
+            </a:r>
+            <a:endParaRPr lang="en-US" sz="1200" dirty="0"/>
+          </a:p>
+        </p:txBody>
+      </p:sp>
+      <p:sp>
+        <p:nvSpPr>
+          <p:cNvPr id="21" name="Text 19"/>
+          <p:cNvSpPr/>
+          <p:nvPr/>
+        </p:nvSpPr>
+        <p:spPr>
+          <a:xfrm>
+            <a:off x="8686800" y="2075688"/>
+            <a:ext cx="2606040" cy="438912"/>
+          </a:xfrm>
+          <a:prstGeom prst="rect">
+            <a:avLst/>
+          </a:prstGeom>
+          <a:noFill/>
+          <a:ln/>
+        </p:spPr>
+        <p:txBody>
+          <a:bodyPr wrap="square" lIns="0" tIns="0" rIns="0" bIns="0" rtlCol="0" anchor="ctr"/>
+          <a:lstStyle/>
+          <a:p>
+            <a:pPr indent="0" marL="0">
+              <a:buNone/>
+            </a:pPr>
+            <a:r>
+              <a:rPr lang="en-US" sz="1450" b="1" dirty="0">
+                <a:solidFill>
+                  <a:srgbClr val="1B1D23"/>
+                </a:solidFill>
+                <a:latin typeface="Calibri" pitchFamily="34" charset="0"/>
+                <a:ea typeface="Calibri" pitchFamily="34" charset="-122"/>
+                <a:cs typeface="Calibri" pitchFamily="34" charset="-120"/>
+              </a:rPr>
+              <a:t>Кеш і guardrails складнішають</a:t>
+            </a:r>
+            <a:endParaRPr lang="en-US" sz="1450" dirty="0"/>
+          </a:p>
+        </p:txBody>
+      </p:sp>
+      <p:sp>
+        <p:nvSpPr>
+          <p:cNvPr id="22" name="Text 20"/>
+          <p:cNvSpPr/>
+          <p:nvPr/>
+        </p:nvSpPr>
+        <p:spPr>
+          <a:xfrm>
+            <a:off x="8174736" y="2606040"/>
+            <a:ext cx="3118104" cy="1261872"/>
+          </a:xfrm>
+          <a:prstGeom prst="rect">
+            <a:avLst/>
+          </a:prstGeom>
+          <a:noFill/>
+          <a:ln/>
+        </p:spPr>
+        <p:txBody>
+          <a:bodyPr wrap="square" lIns="0" tIns="0" rIns="0" bIns="0" rtlCol="0" anchor="t"/>
+          <a:lstStyle/>
+          <a:p>
+            <a:pPr indent="0" marL="0">
+              <a:buNone/>
+            </a:pPr>
+            <a:r>
+              <a:rPr lang="en-US" sz="1200" dirty="0">
+                <a:solidFill>
+                  <a:srgbClr val="565C6B"/>
+                </a:solidFill>
+                <a:latin typeface="Calibri" pitchFamily="34" charset="0"/>
+                <a:ea typeface="Calibri" pitchFamily="34" charset="-122"/>
+                <a:cs typeface="Calibri" pitchFamily="34" charset="-120"/>
+              </a:rPr>
+              <a:t>кешувати можна лише зібрану відповідь; вихідна перевірка мусить уміти обірвати потік</a:t>
+            </a:r>
+            <a:endParaRPr lang="en-US" sz="1200" dirty="0"/>
+          </a:p>
+        </p:txBody>
+      </p:sp>
+      <p:sp>
+        <p:nvSpPr>
+          <p:cNvPr id="23" name="Shape 21"/>
+          <p:cNvSpPr/>
+          <p:nvPr/>
+        </p:nvSpPr>
+        <p:spPr>
+          <a:xfrm>
+            <a:off x="566928" y="4297680"/>
+            <a:ext cx="11064240" cy="1600200"/>
+          </a:xfrm>
+          <a:prstGeom prst="roundRect">
+            <a:avLst>
+              <a:gd name="adj" fmla="val 6857"/>
             </a:avLst>
           </a:prstGeom>
           <a:solidFill>
@@ -11433,14 +12181,14 @@
       </p:sp>
       <p:sp>
         <p:nvSpPr>
-          <p:cNvPr id="8" name="Text 6"/>
-          <p:cNvSpPr/>
-          <p:nvPr/>
-        </p:nvSpPr>
-        <p:spPr>
-          <a:xfrm>
-            <a:off x="768096" y="1984248"/>
-            <a:ext cx="4946904" cy="438912"/>
+          <p:cNvPr id="24" name="Text 22"/>
+          <p:cNvSpPr/>
+          <p:nvPr/>
+        </p:nvSpPr>
+        <p:spPr>
+          <a:xfrm>
+            <a:off x="786384" y="4425696"/>
+            <a:ext cx="10625328" cy="219456"/>
           </a:xfrm>
           <a:prstGeom prst="rect">
             <a:avLst/>
@@ -11456,315 +12204,54 @@
               <a:buNone/>
             </a:pPr>
             <a:r>
-              <a:rPr lang="en-US" sz="1450" b="1" dirty="0">
+              <a:rPr lang="en-US" sz="950" b="1" spc="150" kern="0" dirty="0">
                 <a:solidFill>
                   <a:srgbClr val="4038C4"/>
+                </a:solidFill>
+                <a:latin typeface="Courier New" pitchFamily="34" charset="0"/>
+                <a:ea typeface="Courier New" pitchFamily="34" charset="-122"/>
+                <a:cs typeface="Courier New" pitchFamily="34" charset="-120"/>
+              </a:rPr>
+              <a:t>ПРАКТИЧНИЙ ВИСНОВОК НА СЬОГОДНІ</a:t>
+            </a:r>
+            <a:endParaRPr lang="en-US" sz="950" dirty="0"/>
+          </a:p>
+        </p:txBody>
+      </p:sp>
+      <p:sp>
+        <p:nvSpPr>
+          <p:cNvPr id="25" name="Text 23"/>
+          <p:cNvSpPr/>
+          <p:nvPr/>
+        </p:nvSpPr>
+        <p:spPr>
+          <a:xfrm>
+            <a:off x="786384" y="4681728"/>
+            <a:ext cx="10625328" cy="1088136"/>
+          </a:xfrm>
+          <a:prstGeom prst="rect">
+            <a:avLst/>
+          </a:prstGeom>
+          <a:noFill/>
+          <a:ln/>
+        </p:spPr>
+        <p:txBody>
+          <a:bodyPr wrap="square" lIns="0" tIns="0" rIns="0" bIns="0" rtlCol="0" anchor="ctr"/>
+          <a:lstStyle/>
+          <a:p>
+            <a:pPr indent="0" marL="0">
+              <a:buNone/>
+            </a:pPr>
+            <a:r>
+              <a:rPr lang="en-US" sz="1300" dirty="0">
+                <a:solidFill>
+                  <a:srgbClr val="1B1D23"/>
                 </a:solidFill>
                 <a:latin typeface="Calibri" pitchFamily="34" charset="0"/>
                 <a:ea typeface="Calibri" pitchFamily="34" charset="-122"/>
                 <a:cs typeface="Calibri" pitchFamily="34" charset="-120"/>
               </a:rPr>
-              <a:t>Обов'язкова доріжка: у продукті</a:t>
-            </a:r>
-            <a:endParaRPr lang="en-US" sz="1450" dirty="0"/>
-          </a:p>
-        </p:txBody>
-      </p:sp>
-      <p:sp>
-        <p:nvSpPr>
-          <p:cNvPr id="9" name="Text 7"/>
-          <p:cNvSpPr/>
-          <p:nvPr/>
-        </p:nvSpPr>
-        <p:spPr>
-          <a:xfrm>
-            <a:off x="768096" y="2514600"/>
-            <a:ext cx="4946904" cy="941832"/>
-          </a:xfrm>
-          <a:prstGeom prst="rect">
-            <a:avLst/>
-          </a:prstGeom>
-          <a:noFill/>
-          <a:ln/>
-        </p:spPr>
-        <p:txBody>
-          <a:bodyPr wrap="square" lIns="0" tIns="0" rIns="0" bIns="0" rtlCol="0" anchor="t"/>
-          <a:lstStyle/>
-          <a:p>
-            <a:pPr indent="0" marL="0">
-              <a:buNone/>
-            </a:pPr>
-            <a:r>
-              <a:rPr lang="en-US" sz="1200" dirty="0">
-                <a:solidFill>
-                  <a:srgbClr val="1B1D23"/>
-                </a:solidFill>
-                <a:latin typeface="Calibri" pitchFamily="34" charset="0"/>
-                <a:ea typeface="Calibri" pitchFamily="34" charset="-122"/>
-                <a:cs typeface="Calibri" pitchFamily="34" charset="-120"/>
-              </a:rPr>
-              <a:t>метрики живуть усередині системи, поверх власного лога: жодної нової інфраструктури</a:t>
-            </a:r>
-            <a:endParaRPr lang="en-US" sz="1200" dirty="0"/>
-          </a:p>
-        </p:txBody>
-      </p:sp>
-      <p:sp>
-        <p:nvSpPr>
-          <p:cNvPr id="10" name="Shape 8"/>
-          <p:cNvSpPr/>
-          <p:nvPr/>
-        </p:nvSpPr>
-        <p:spPr>
-          <a:xfrm>
-            <a:off x="6281928" y="1828800"/>
-            <a:ext cx="5349240" cy="1783080"/>
-          </a:xfrm>
-          <a:prstGeom prst="roundRect">
-            <a:avLst>
-              <a:gd name="adj" fmla="val 6154"/>
-            </a:avLst>
-          </a:prstGeom>
-          <a:solidFill>
-            <a:srgbClr val="F8F0E2"/>
-          </a:solidFill>
-          <a:ln/>
-        </p:spPr>
-      </p:sp>
-      <p:sp>
-        <p:nvSpPr>
-          <p:cNvPr id="11" name="Text 9"/>
-          <p:cNvSpPr/>
-          <p:nvPr/>
-        </p:nvSpPr>
-        <p:spPr>
-          <a:xfrm>
-            <a:off x="6483096" y="1984248"/>
-            <a:ext cx="4946904" cy="438912"/>
-          </a:xfrm>
-          <a:prstGeom prst="rect">
-            <a:avLst/>
-          </a:prstGeom>
-          <a:noFill/>
-          <a:ln/>
-        </p:spPr>
-        <p:txBody>
-          <a:bodyPr wrap="square" lIns="0" tIns="0" rIns="0" bIns="0" rtlCol="0" anchor="ctr"/>
-          <a:lstStyle/>
-          <a:p>
-            <a:pPr indent="0" marL="0">
-              <a:buNone/>
-            </a:pPr>
-            <a:r>
-              <a:rPr lang="en-US" sz="1450" b="1" dirty="0">
-                <a:solidFill>
-                  <a:srgbClr val="9A5B12"/>
-                </a:solidFill>
-                <a:latin typeface="Calibri" pitchFamily="34" charset="0"/>
-                <a:ea typeface="Calibri" pitchFamily="34" charset="-122"/>
-                <a:cs typeface="Calibri" pitchFamily="34" charset="-120"/>
-              </a:rPr>
-              <a:t>Індустріальний стек — надбудова</a:t>
-            </a:r>
-            <a:endParaRPr lang="en-US" sz="1450" dirty="0"/>
-          </a:p>
-        </p:txBody>
-      </p:sp>
-      <p:sp>
-        <p:nvSpPr>
-          <p:cNvPr id="12" name="Text 10"/>
-          <p:cNvSpPr/>
-          <p:nvPr/>
-        </p:nvSpPr>
-        <p:spPr>
-          <a:xfrm>
-            <a:off x="6483096" y="2514600"/>
-            <a:ext cx="4946904" cy="941832"/>
-          </a:xfrm>
-          <a:prstGeom prst="rect">
-            <a:avLst/>
-          </a:prstGeom>
-          <a:noFill/>
-          <a:ln/>
-        </p:spPr>
-        <p:txBody>
-          <a:bodyPr wrap="square" lIns="0" tIns="0" rIns="0" bIns="0" rtlCol="0" anchor="t"/>
-          <a:lstStyle/>
-          <a:p>
-            <a:pPr indent="0" marL="0">
-              <a:buNone/>
-            </a:pPr>
-            <a:r>
-              <a:rPr lang="en-US" sz="1200" dirty="0">
-                <a:solidFill>
-                  <a:srgbClr val="1B1D23"/>
-                </a:solidFill>
-                <a:latin typeface="Calibri" pitchFamily="34" charset="0"/>
-                <a:ea typeface="Calibri" pitchFamily="34" charset="-122"/>
-                <a:cs typeface="Calibri" pitchFamily="34" charset="-120"/>
-              </a:rPr>
-              <a:t>/metrics і зовнішні дашборди піднімаються поруч, коли питання виходять за межі системи</a:t>
-            </a:r>
-            <a:endParaRPr lang="en-US" sz="1200" dirty="0"/>
-          </a:p>
-        </p:txBody>
-      </p:sp>
-      <p:sp>
-        <p:nvSpPr>
-          <p:cNvPr id="13" name="Shape 11"/>
-          <p:cNvSpPr/>
-          <p:nvPr/>
-        </p:nvSpPr>
-        <p:spPr>
-          <a:xfrm>
-            <a:off x="566928" y="3886200"/>
-            <a:ext cx="11064240" cy="1097280"/>
-          </a:xfrm>
-          <a:prstGeom prst="roundRect">
-            <a:avLst>
-              <a:gd name="adj" fmla="val 10000"/>
-            </a:avLst>
-          </a:prstGeom>
-          <a:solidFill>
-            <a:srgbClr val="F8F0E2"/>
-          </a:solidFill>
-          <a:ln/>
-        </p:spPr>
-      </p:sp>
-      <p:sp>
-        <p:nvSpPr>
-          <p:cNvPr id="14" name="Text 12"/>
-          <p:cNvSpPr/>
-          <p:nvPr/>
-        </p:nvSpPr>
-        <p:spPr>
-          <a:xfrm>
-            <a:off x="786384" y="4014216"/>
-            <a:ext cx="10625328" cy="219456"/>
-          </a:xfrm>
-          <a:prstGeom prst="rect">
-            <a:avLst/>
-          </a:prstGeom>
-          <a:noFill/>
-          <a:ln/>
-        </p:spPr>
-        <p:txBody>
-          <a:bodyPr wrap="square" lIns="0" tIns="0" rIns="0" bIns="0" rtlCol="0" anchor="ctr"/>
-          <a:lstStyle/>
-          <a:p>
-            <a:pPr indent="0" marL="0">
-              <a:buNone/>
-            </a:pPr>
-            <a:r>
-              <a:rPr lang="en-US" sz="950" b="1" spc="150" kern="0" dirty="0">
-                <a:solidFill>
-                  <a:srgbClr val="9A5B12"/>
-                </a:solidFill>
-                <a:latin typeface="Courier New" pitchFamily="34" charset="0"/>
-                <a:ea typeface="Courier New" pitchFamily="34" charset="-122"/>
-                <a:cs typeface="Courier New" pitchFamily="34" charset="-120"/>
-              </a:rPr>
-              <a:t>ЛАЙФХАК</a:t>
-            </a:r>
-            <a:endParaRPr lang="en-US" sz="950" dirty="0"/>
-          </a:p>
-        </p:txBody>
-      </p:sp>
-      <p:sp>
-        <p:nvSpPr>
-          <p:cNvPr id="15" name="Text 13"/>
-          <p:cNvSpPr/>
-          <p:nvPr/>
-        </p:nvSpPr>
-        <p:spPr>
-          <a:xfrm>
-            <a:off x="786384" y="4270248"/>
-            <a:ext cx="10625328" cy="585216"/>
-          </a:xfrm>
-          <a:prstGeom prst="rect">
-            <a:avLst/>
-          </a:prstGeom>
-          <a:noFill/>
-          <a:ln/>
-        </p:spPr>
-        <p:txBody>
-          <a:bodyPr wrap="square" lIns="0" tIns="0" rIns="0" bIns="0" rtlCol="0" anchor="ctr"/>
-          <a:lstStyle/>
-          <a:p>
-            <a:pPr indent="0" marL="0">
-              <a:buNone/>
-            </a:pPr>
-            <a:r>
-              <a:rPr lang="en-US" sz="1300" dirty="0">
-                <a:solidFill>
-                  <a:srgbClr val="1B1D23"/>
-                </a:solidFill>
-                <a:latin typeface="Calibri" pitchFamily="34" charset="0"/>
-                <a:ea typeface="Calibri" pitchFamily="34" charset="-122"/>
-                <a:cs typeface="Calibri" pitchFamily="34" charset="-120"/>
-              </a:rPr>
-              <a:t>Раз на тиждень звіряйте плитку з SQL руками. Розбіжність — це або баг агрегації, або зміна, про яку ви не знали.</a:t>
-            </a:r>
-            <a:endParaRPr lang="en-US" sz="1300" dirty="0"/>
-          </a:p>
-        </p:txBody>
-      </p:sp>
-      <p:sp>
-        <p:nvSpPr>
-          <p:cNvPr id="16" name="Shape 14"/>
-          <p:cNvSpPr/>
-          <p:nvPr/>
-        </p:nvSpPr>
-        <p:spPr>
-          <a:xfrm>
-            <a:off x="566928" y="5120640"/>
-            <a:ext cx="11064240" cy="731520"/>
-          </a:xfrm>
-          <a:prstGeom prst="roundRect">
-            <a:avLst>
-              <a:gd name="adj" fmla="val 15000"/>
-            </a:avLst>
-          </a:prstGeom>
-          <a:solidFill>
-            <a:srgbClr val="FFFFFF"/>
-          </a:solidFill>
-          <a:ln/>
-        </p:spPr>
-      </p:sp>
-      <p:sp>
-        <p:nvSpPr>
-          <p:cNvPr id="17" name="Text 15"/>
-          <p:cNvSpPr/>
-          <p:nvPr/>
-        </p:nvSpPr>
-        <p:spPr>
-          <a:xfrm>
-            <a:off x="786384" y="5266944"/>
-            <a:ext cx="10625328" cy="438912"/>
-          </a:xfrm>
-          <a:prstGeom prst="rect">
-            <a:avLst/>
-          </a:prstGeom>
-          <a:noFill/>
-          <a:ln/>
-        </p:spPr>
-        <p:txBody>
-          <a:bodyPr wrap="square" lIns="0" tIns="0" rIns="0" bIns="0" rtlCol="0" anchor="ctr"/>
-          <a:lstStyle/>
-          <a:p>
-            <a:pPr indent="0" marL="0">
-              <a:buNone/>
-            </a:pPr>
-            <a:r>
-              <a:rPr lang="en-US" sz="1300" dirty="0">
-                <a:solidFill>
-                  <a:srgbClr val="1B1D23"/>
-                </a:solidFill>
-                <a:latin typeface="Calibri" pitchFamily="34" charset="0"/>
-                <a:ea typeface="Calibri" pitchFamily="34" charset="-122"/>
-                <a:cs typeface="Calibri" pitchFamily="34" charset="-120"/>
-              </a:rPr>
-              <a:t>Порядок правильний: спершу видимість у продукті, потім — стек, якщо він справді потрібен.</a:t>
+              <a:t>Мисліть latency_ms і status як «характеристику завершення відповіді», а не як код HTTP. Тоді стрімінг стане розширенням лога, а не його переписуванням.</a:t>
             </a:r>
             <a:endParaRPr lang="en-US" sz="1300" dirty="0"/>
           </a:p>
@@ -11858,8 +12345,47 @@
         </p:nvSpPr>
         <p:spPr>
           <a:xfrm>
-            <a:off x="566928" y="365760"/>
-            <a:ext cx="8881567" cy="603504"/>
+            <a:off x="566928" y="384048"/>
+            <a:ext cx="566928" cy="566928"/>
+          </a:xfrm>
+          <a:prstGeom prst="rect">
+            <a:avLst/>
+          </a:prstGeom>
+          <a:noFill/>
+          <a:ln/>
+        </p:spPr>
+        <p:txBody>
+          <a:bodyPr wrap="square" lIns="0" tIns="0" rIns="0" bIns="0" rtlCol="0" anchor="ctr"/>
+          <a:lstStyle/>
+          <a:p>
+            <a:pPr algn="l" indent="0" marL="0">
+              <a:buNone/>
+            </a:pPr>
+            <a:r>
+              <a:rPr lang="en-US" sz="2600" b="1" dirty="0">
+                <a:solidFill>
+                  <a:srgbClr val="C9C5F2"/>
+                </a:solidFill>
+                <a:latin typeface="Courier New" pitchFamily="34" charset="0"/>
+                <a:ea typeface="Courier New" pitchFamily="34" charset="-122"/>
+                <a:cs typeface="Courier New" pitchFamily="34" charset="-120"/>
+              </a:rPr>
+              <a:t>09</a:t>
+            </a:r>
+            <a:endParaRPr lang="en-US" sz="2600" dirty="0"/>
+          </a:p>
+        </p:txBody>
+      </p:sp>
+      <p:sp>
+        <p:nvSpPr>
+          <p:cNvPr id="3" name="Text 1"/>
+          <p:cNvSpPr/>
+          <p:nvPr/>
+        </p:nvSpPr>
+        <p:spPr>
+          <a:xfrm>
+            <a:off x="1225296" y="365760"/>
+            <a:ext cx="8223199" cy="603504"/>
           </a:xfrm>
           <a:prstGeom prst="rect">
             <a:avLst/>
@@ -11883,7 +12409,7 @@
                 <a:ea typeface="Calibri" pitchFamily="34" charset="-122"/>
                 <a:cs typeface="Calibri" pitchFamily="34" charset="-120"/>
               </a:rPr>
-              <a:t>Зараз ви побачите — і навіщо</a:t>
+              <a:t>Чого не має бути в лозі</a:t>
             </a:r>
             <a:endParaRPr lang="en-US" sz="2500" dirty="0"/>
           </a:p>
@@ -11891,7 +12417,46 @@
       </p:sp>
       <p:sp>
         <p:nvSpPr>
-          <p:cNvPr id="3" name="Shape 1"/>
+          <p:cNvPr id="4" name="Text 2"/>
+          <p:cNvSpPr/>
+          <p:nvPr/>
+        </p:nvSpPr>
+        <p:spPr>
+          <a:xfrm>
+            <a:off x="1225296" y="1005840"/>
+            <a:ext cx="8223199" cy="292608"/>
+          </a:xfrm>
+          <a:prstGeom prst="rect">
+            <a:avLst/>
+          </a:prstGeom>
+          <a:noFill/>
+          <a:ln/>
+        </p:spPr>
+        <p:txBody>
+          <a:bodyPr wrap="square" lIns="0" tIns="0" rIns="0" bIns="0" rtlCol="0" anchor="t"/>
+          <a:lstStyle/>
+          <a:p>
+            <a:pPr indent="0" marL="0">
+              <a:buNone/>
+            </a:pPr>
+            <a:r>
+              <a:rPr lang="en-US" sz="1300" dirty="0">
+                <a:solidFill>
+                  <a:srgbClr val="565C6B"/>
+                </a:solidFill>
+                <a:latin typeface="Calibri" pitchFamily="34" charset="0"/>
+                <a:ea typeface="Calibri" pitchFamily="34" charset="-122"/>
+                <a:cs typeface="Calibri" pitchFamily="34" charset="-120"/>
+              </a:rPr>
+              <a:t>Логувати все — найпростіший спосіб зробити з лога сховище персональних даних</a:t>
+            </a:r>
+            <a:endParaRPr lang="en-US" sz="1300" dirty="0"/>
+          </a:p>
+        </p:txBody>
+      </p:sp>
+      <p:sp>
+        <p:nvSpPr>
+          <p:cNvPr id="5" name="Shape 3"/>
           <p:cNvSpPr/>
           <p:nvPr/>
         </p:nvSpPr>
@@ -11906,14 +12471,14 @@
             </a:avLst>
           </a:prstGeom>
           <a:solidFill>
-            <a:srgbClr val="E9F3EE"/>
+            <a:srgbClr val="ECEBFB"/>
           </a:solidFill>
           <a:ln/>
         </p:spPr>
       </p:sp>
       <p:sp>
         <p:nvSpPr>
-          <p:cNvPr id="4" name="Text 2"/>
+          <p:cNvPr id="6" name="Text 4"/>
           <p:cNvSpPr/>
           <p:nvPr/>
         </p:nvSpPr>
@@ -11938,13 +12503,13 @@
             <a:r>
               <a:rPr lang="en-US" sz="900" b="1" spc="100" kern="0" dirty="0">
                 <a:solidFill>
-                  <a:srgbClr val="177245"/>
+                  <a:srgbClr val="4038C4"/>
                 </a:solidFill>
                 <a:latin typeface="Courier New" pitchFamily="34" charset="0"/>
                 <a:ea typeface="Courier New" pitchFamily="34" charset="-122"/>
                 <a:cs typeface="Courier New" pitchFamily="34" charset="-120"/>
               </a:rPr>
-              <a:t>ПРАКТИКА</a:t>
+              <a:t>ТЕОРІЯ</a:t>
             </a:r>
             <a:endParaRPr lang="en-US" sz="900" dirty="0"/>
           </a:p>
@@ -11952,7 +12517,7 @@
       </p:sp>
       <p:sp>
         <p:nvSpPr>
-          <p:cNvPr id="5" name="Text 3"/>
+          <p:cNvPr id="7" name="Text 5"/>
           <p:cNvSpPr/>
           <p:nvPr/>
         </p:nvSpPr>
@@ -11991,18 +12556,505 @@
       </p:sp>
       <p:sp>
         <p:nvSpPr>
-          <p:cNvPr id="6" name="Shape 4"/>
-          <p:cNvSpPr/>
-          <p:nvPr/>
-        </p:nvSpPr>
-        <p:spPr>
-          <a:xfrm>
-            <a:off x="566928" y="1737360"/>
-            <a:ext cx="5532120" cy="1463040"/>
+          <p:cNvPr id="8" name="Shape 6"/>
+          <p:cNvSpPr/>
+          <p:nvPr/>
+        </p:nvSpPr>
+        <p:spPr>
+          <a:xfrm>
+            <a:off x="566928" y="1920240"/>
+            <a:ext cx="3520440" cy="2103120"/>
           </a:xfrm>
           <a:prstGeom prst="roundRect">
             <a:avLst>
-              <a:gd name="adj" fmla="val 7500"/>
+              <a:gd name="adj" fmla="val 5217"/>
+            </a:avLst>
+          </a:prstGeom>
+          <a:solidFill>
+            <a:srgbClr val="FFFFFF"/>
+          </a:solidFill>
+          <a:ln w="12700">
+            <a:solidFill>
+              <a:srgbClr val="E4E6EC"/>
+            </a:solidFill>
+            <a:prstDash val="solid"/>
+          </a:ln>
+        </p:spPr>
+      </p:sp>
+      <p:sp>
+        <p:nvSpPr>
+          <p:cNvPr id="9" name="Shape 7"/>
+          <p:cNvSpPr/>
+          <p:nvPr/>
+        </p:nvSpPr>
+        <p:spPr>
+          <a:xfrm>
+            <a:off x="768096" y="2103120"/>
+            <a:ext cx="384048" cy="384048"/>
+          </a:xfrm>
+          <a:prstGeom prst="ellipse">
+            <a:avLst/>
+          </a:prstGeom>
+          <a:solidFill>
+            <a:srgbClr val="1B1D23"/>
+          </a:solidFill>
+          <a:ln/>
+        </p:spPr>
+      </p:sp>
+      <p:sp>
+        <p:nvSpPr>
+          <p:cNvPr id="10" name="Text 8"/>
+          <p:cNvSpPr/>
+          <p:nvPr/>
+        </p:nvSpPr>
+        <p:spPr>
+          <a:xfrm>
+            <a:off x="768096" y="2103120"/>
+            <a:ext cx="384048" cy="384048"/>
+          </a:xfrm>
+          <a:prstGeom prst="rect">
+            <a:avLst/>
+          </a:prstGeom>
+          <a:noFill/>
+          <a:ln/>
+        </p:spPr>
+        <p:txBody>
+          <a:bodyPr wrap="square" lIns="0" tIns="0" rIns="0" bIns="0" rtlCol="0" anchor="ctr"/>
+          <a:lstStyle/>
+          <a:p>
+            <a:pPr algn="ctr" indent="0" marL="0">
+              <a:buNone/>
+            </a:pPr>
+            <a:r>
+              <a:rPr lang="en-US" sz="1200" b="1" dirty="0">
+                <a:solidFill>
+                  <a:srgbClr val="FFFFFF"/>
+                </a:solidFill>
+                <a:latin typeface="Courier New" pitchFamily="34" charset="0"/>
+                <a:ea typeface="Courier New" pitchFamily="34" charset="-122"/>
+                <a:cs typeface="Courier New" pitchFamily="34" charset="-120"/>
+              </a:rPr>
+              <a:t>1</a:t>
+            </a:r>
+            <a:endParaRPr lang="en-US" sz="1200" dirty="0"/>
+          </a:p>
+        </p:txBody>
+      </p:sp>
+      <p:sp>
+        <p:nvSpPr>
+          <p:cNvPr id="11" name="Text 9"/>
+          <p:cNvSpPr/>
+          <p:nvPr/>
+        </p:nvSpPr>
+        <p:spPr>
+          <a:xfrm>
+            <a:off x="1280160" y="2075688"/>
+            <a:ext cx="2606040" cy="438912"/>
+          </a:xfrm>
+          <a:prstGeom prst="rect">
+            <a:avLst/>
+          </a:prstGeom>
+          <a:noFill/>
+          <a:ln/>
+        </p:spPr>
+        <p:txBody>
+          <a:bodyPr wrap="square" lIns="0" tIns="0" rIns="0" bIns="0" rtlCol="0" anchor="ctr"/>
+          <a:lstStyle/>
+          <a:p>
+            <a:pPr indent="0" marL="0">
+              <a:buNone/>
+            </a:pPr>
+            <a:r>
+              <a:rPr lang="en-US" sz="1450" b="1" dirty="0">
+                <a:solidFill>
+                  <a:srgbClr val="1B1D23"/>
+                </a:solidFill>
+                <a:latin typeface="Calibri" pitchFamily="34" charset="0"/>
+                <a:ea typeface="Calibri" pitchFamily="34" charset="-122"/>
+                <a:cs typeface="Calibri" pitchFamily="34" charset="-120"/>
+              </a:rPr>
+              <a:t>Повні тіла — не за замовчуванням</a:t>
+            </a:r>
+            <a:endParaRPr lang="en-US" sz="1450" dirty="0"/>
+          </a:p>
+        </p:txBody>
+      </p:sp>
+      <p:sp>
+        <p:nvSpPr>
+          <p:cNvPr id="12" name="Text 10"/>
+          <p:cNvSpPr/>
+          <p:nvPr/>
+        </p:nvSpPr>
+        <p:spPr>
+          <a:xfrm>
+            <a:off x="768096" y="2606040"/>
+            <a:ext cx="3118104" cy="1261872"/>
+          </a:xfrm>
+          <a:prstGeom prst="rect">
+            <a:avLst/>
+          </a:prstGeom>
+          <a:noFill/>
+          <a:ln/>
+        </p:spPr>
+        <p:txBody>
+          <a:bodyPr wrap="square" lIns="0" tIns="0" rIns="0" bIns="0" rtlCol="0" anchor="t"/>
+          <a:lstStyle/>
+          <a:p>
+            <a:pPr indent="0" marL="0">
+              <a:buNone/>
+            </a:pPr>
+            <a:r>
+              <a:rPr lang="en-US" sz="1200" dirty="0">
+                <a:solidFill>
+                  <a:srgbClr val="565C6B"/>
+                </a:solidFill>
+                <a:latin typeface="Calibri" pitchFamily="34" charset="0"/>
+                <a:ea typeface="Calibri" pitchFamily="34" charset="-122"/>
+                <a:cs typeface="Calibri" pitchFamily="34" charset="-120"/>
+              </a:rPr>
+              <a:t>ознак досить: довжина, токени, finish_reason, спрацювання guardrail, які інструменти кликали</a:t>
+            </a:r>
+            <a:endParaRPr lang="en-US" sz="1200" dirty="0"/>
+          </a:p>
+        </p:txBody>
+      </p:sp>
+      <p:sp>
+        <p:nvSpPr>
+          <p:cNvPr id="13" name="Shape 11"/>
+          <p:cNvSpPr/>
+          <p:nvPr/>
+        </p:nvSpPr>
+        <p:spPr>
+          <a:xfrm>
+            <a:off x="4270248" y="1920240"/>
+            <a:ext cx="3520440" cy="2103120"/>
+          </a:xfrm>
+          <a:prstGeom prst="roundRect">
+            <a:avLst>
+              <a:gd name="adj" fmla="val 5217"/>
+            </a:avLst>
+          </a:prstGeom>
+          <a:solidFill>
+            <a:srgbClr val="FFFFFF"/>
+          </a:solidFill>
+          <a:ln w="12700">
+            <a:solidFill>
+              <a:srgbClr val="E4E6EC"/>
+            </a:solidFill>
+            <a:prstDash val="solid"/>
+          </a:ln>
+        </p:spPr>
+      </p:sp>
+      <p:sp>
+        <p:nvSpPr>
+          <p:cNvPr id="14" name="Shape 12"/>
+          <p:cNvSpPr/>
+          <p:nvPr/>
+        </p:nvSpPr>
+        <p:spPr>
+          <a:xfrm>
+            <a:off x="4471416" y="2103120"/>
+            <a:ext cx="384048" cy="384048"/>
+          </a:xfrm>
+          <a:prstGeom prst="ellipse">
+            <a:avLst/>
+          </a:prstGeom>
+          <a:solidFill>
+            <a:srgbClr val="1B1D23"/>
+          </a:solidFill>
+          <a:ln/>
+        </p:spPr>
+      </p:sp>
+      <p:sp>
+        <p:nvSpPr>
+          <p:cNvPr id="15" name="Text 13"/>
+          <p:cNvSpPr/>
+          <p:nvPr/>
+        </p:nvSpPr>
+        <p:spPr>
+          <a:xfrm>
+            <a:off x="4471416" y="2103120"/>
+            <a:ext cx="384048" cy="384048"/>
+          </a:xfrm>
+          <a:prstGeom prst="rect">
+            <a:avLst/>
+          </a:prstGeom>
+          <a:noFill/>
+          <a:ln/>
+        </p:spPr>
+        <p:txBody>
+          <a:bodyPr wrap="square" lIns="0" tIns="0" rIns="0" bIns="0" rtlCol="0" anchor="ctr"/>
+          <a:lstStyle/>
+          <a:p>
+            <a:pPr algn="ctr" indent="0" marL="0">
+              <a:buNone/>
+            </a:pPr>
+            <a:r>
+              <a:rPr lang="en-US" sz="1200" b="1" dirty="0">
+                <a:solidFill>
+                  <a:srgbClr val="FFFFFF"/>
+                </a:solidFill>
+                <a:latin typeface="Courier New" pitchFamily="34" charset="0"/>
+                <a:ea typeface="Courier New" pitchFamily="34" charset="-122"/>
+                <a:cs typeface="Courier New" pitchFamily="34" charset="-120"/>
+              </a:rPr>
+              <a:t>2</a:t>
+            </a:r>
+            <a:endParaRPr lang="en-US" sz="1200" dirty="0"/>
+          </a:p>
+        </p:txBody>
+      </p:sp>
+      <p:sp>
+        <p:nvSpPr>
+          <p:cNvPr id="16" name="Text 14"/>
+          <p:cNvSpPr/>
+          <p:nvPr/>
+        </p:nvSpPr>
+        <p:spPr>
+          <a:xfrm>
+            <a:off x="4983480" y="2075688"/>
+            <a:ext cx="2606040" cy="438912"/>
+          </a:xfrm>
+          <a:prstGeom prst="rect">
+            <a:avLst/>
+          </a:prstGeom>
+          <a:noFill/>
+          <a:ln/>
+        </p:spPr>
+        <p:txBody>
+          <a:bodyPr wrap="square" lIns="0" tIns="0" rIns="0" bIns="0" rtlCol="0" anchor="ctr"/>
+          <a:lstStyle/>
+          <a:p>
+            <a:pPr indent="0" marL="0">
+              <a:buNone/>
+            </a:pPr>
+            <a:r>
+              <a:rPr lang="en-US" sz="1450" b="1" dirty="0">
+                <a:solidFill>
+                  <a:srgbClr val="1B1D23"/>
+                </a:solidFill>
+                <a:latin typeface="Calibri" pitchFamily="34" charset="0"/>
+                <a:ea typeface="Calibri" pitchFamily="34" charset="-122"/>
+                <a:cs typeface="Calibri" pitchFamily="34" charset="-120"/>
+              </a:rPr>
+              <a:t>Тіла — семпл із терміном життя</a:t>
+            </a:r>
+            <a:endParaRPr lang="en-US" sz="1450" dirty="0"/>
+          </a:p>
+        </p:txBody>
+      </p:sp>
+      <p:sp>
+        <p:nvSpPr>
+          <p:cNvPr id="17" name="Text 15"/>
+          <p:cNvSpPr/>
+          <p:nvPr/>
+        </p:nvSpPr>
+        <p:spPr>
+          <a:xfrm>
+            <a:off x="4471416" y="2606040"/>
+            <a:ext cx="3118104" cy="1261872"/>
+          </a:xfrm>
+          <a:prstGeom prst="rect">
+            <a:avLst/>
+          </a:prstGeom>
+          <a:noFill/>
+          <a:ln/>
+        </p:spPr>
+        <p:txBody>
+          <a:bodyPr wrap="square" lIns="0" tIns="0" rIns="0" bIns="0" rtlCol="0" anchor="t"/>
+          <a:lstStyle/>
+          <a:p>
+            <a:pPr indent="0" marL="0">
+              <a:buNone/>
+            </a:pPr>
+            <a:r>
+              <a:rPr lang="en-US" sz="1200" dirty="0">
+                <a:solidFill>
+                  <a:srgbClr val="565C6B"/>
+                </a:solidFill>
+                <a:latin typeface="Calibri" pitchFamily="34" charset="0"/>
+                <a:ea typeface="Calibri" pitchFamily="34" charset="-122"/>
+                <a:cs typeface="Calibri" pitchFamily="34" charset="-120"/>
+              </a:rPr>
+              <a:t>невелика частка, окреме сховище, автоматичне видалення</a:t>
+            </a:r>
+            <a:endParaRPr lang="en-US" sz="1200" dirty="0"/>
+          </a:p>
+        </p:txBody>
+      </p:sp>
+      <p:sp>
+        <p:nvSpPr>
+          <p:cNvPr id="18" name="Shape 16"/>
+          <p:cNvSpPr/>
+          <p:nvPr/>
+        </p:nvSpPr>
+        <p:spPr>
+          <a:xfrm>
+            <a:off x="7973568" y="1920240"/>
+            <a:ext cx="3520440" cy="2103120"/>
+          </a:xfrm>
+          <a:prstGeom prst="roundRect">
+            <a:avLst>
+              <a:gd name="adj" fmla="val 5217"/>
+            </a:avLst>
+          </a:prstGeom>
+          <a:solidFill>
+            <a:srgbClr val="F9E9E8"/>
+          </a:solidFill>
+          <a:ln/>
+        </p:spPr>
+      </p:sp>
+      <p:sp>
+        <p:nvSpPr>
+          <p:cNvPr id="19" name="Shape 17"/>
+          <p:cNvSpPr/>
+          <p:nvPr/>
+        </p:nvSpPr>
+        <p:spPr>
+          <a:xfrm>
+            <a:off x="8174736" y="2103120"/>
+            <a:ext cx="384048" cy="384048"/>
+          </a:xfrm>
+          <a:prstGeom prst="ellipse">
+            <a:avLst/>
+          </a:prstGeom>
+          <a:solidFill>
+            <a:srgbClr val="B3261E"/>
+          </a:solidFill>
+          <a:ln/>
+        </p:spPr>
+      </p:sp>
+      <p:sp>
+        <p:nvSpPr>
+          <p:cNvPr id="20" name="Text 18"/>
+          <p:cNvSpPr/>
+          <p:nvPr/>
+        </p:nvSpPr>
+        <p:spPr>
+          <a:xfrm>
+            <a:off x="8174736" y="2103120"/>
+            <a:ext cx="384048" cy="384048"/>
+          </a:xfrm>
+          <a:prstGeom prst="rect">
+            <a:avLst/>
+          </a:prstGeom>
+          <a:noFill/>
+          <a:ln/>
+        </p:spPr>
+        <p:txBody>
+          <a:bodyPr wrap="square" lIns="0" tIns="0" rIns="0" bIns="0" rtlCol="0" anchor="ctr"/>
+          <a:lstStyle/>
+          <a:p>
+            <a:pPr algn="ctr" indent="0" marL="0">
+              <a:buNone/>
+            </a:pPr>
+            <a:r>
+              <a:rPr lang="en-US" sz="1200" b="1" dirty="0">
+                <a:solidFill>
+                  <a:srgbClr val="F9E9E8"/>
+                </a:solidFill>
+                <a:latin typeface="Courier New" pitchFamily="34" charset="0"/>
+                <a:ea typeface="Courier New" pitchFamily="34" charset="-122"/>
+                <a:cs typeface="Courier New" pitchFamily="34" charset="-120"/>
+              </a:rPr>
+              <a:t>3</a:t>
+            </a:r>
+            <a:endParaRPr lang="en-US" sz="1200" dirty="0"/>
+          </a:p>
+        </p:txBody>
+      </p:sp>
+      <p:sp>
+        <p:nvSpPr>
+          <p:cNvPr id="21" name="Text 19"/>
+          <p:cNvSpPr/>
+          <p:nvPr/>
+        </p:nvSpPr>
+        <p:spPr>
+          <a:xfrm>
+            <a:off x="8686800" y="2075688"/>
+            <a:ext cx="2606040" cy="438912"/>
+          </a:xfrm>
+          <a:prstGeom prst="rect">
+            <a:avLst/>
+          </a:prstGeom>
+          <a:noFill/>
+          <a:ln/>
+        </p:spPr>
+        <p:txBody>
+          <a:bodyPr wrap="square" lIns="0" tIns="0" rIns="0" bIns="0" rtlCol="0" anchor="ctr"/>
+          <a:lstStyle/>
+          <a:p>
+            <a:pPr indent="0" marL="0">
+              <a:buNone/>
+            </a:pPr>
+            <a:r>
+              <a:rPr lang="en-US" sz="1450" b="1" dirty="0">
+                <a:solidFill>
+                  <a:srgbClr val="B3261E"/>
+                </a:solidFill>
+                <a:latin typeface="Calibri" pitchFamily="34" charset="0"/>
+                <a:ea typeface="Calibri" pitchFamily="34" charset="-122"/>
+                <a:cs typeface="Calibri" pitchFamily="34" charset="-120"/>
+              </a:rPr>
+              <a:t>Секрети й ключі — ніколи</a:t>
+            </a:r>
+            <a:endParaRPr lang="en-US" sz="1450" dirty="0"/>
+          </a:p>
+        </p:txBody>
+      </p:sp>
+      <p:sp>
+        <p:nvSpPr>
+          <p:cNvPr id="22" name="Text 20"/>
+          <p:cNvSpPr/>
+          <p:nvPr/>
+        </p:nvSpPr>
+        <p:spPr>
+          <a:xfrm>
+            <a:off x="8174736" y="2606040"/>
+            <a:ext cx="3118104" cy="1261872"/>
+          </a:xfrm>
+          <a:prstGeom prst="rect">
+            <a:avLst/>
+          </a:prstGeom>
+          <a:noFill/>
+          <a:ln/>
+        </p:spPr>
+        <p:txBody>
+          <a:bodyPr wrap="square" lIns="0" tIns="0" rIns="0" bIns="0" rtlCol="0" anchor="t"/>
+          <a:lstStyle/>
+          <a:p>
+            <a:pPr indent="0" marL="0">
+              <a:buNone/>
+            </a:pPr>
+            <a:r>
+              <a:rPr lang="en-US" sz="1200" dirty="0">
+                <a:solidFill>
+                  <a:srgbClr val="1B1D23"/>
+                </a:solidFill>
+                <a:latin typeface="Calibri" pitchFamily="34" charset="0"/>
+                <a:ea typeface="Calibri" pitchFamily="34" charset="-122"/>
+                <a:cs typeface="Calibri" pitchFamily="34" charset="-120"/>
+              </a:rPr>
+              <a:t>потрапляють через дампи запитів «для дебагу», трейси помилок і повні заголовки</a:t>
+            </a:r>
+            <a:endParaRPr lang="en-US" sz="1200" dirty="0"/>
+          </a:p>
+        </p:txBody>
+      </p:sp>
+      <p:sp>
+        <p:nvSpPr>
+          <p:cNvPr id="23" name="Shape 21"/>
+          <p:cNvSpPr/>
+          <p:nvPr/>
+        </p:nvSpPr>
+        <p:spPr>
+          <a:xfrm>
+            <a:off x="566928" y="4297680"/>
+            <a:ext cx="11064240" cy="1600200"/>
+          </a:xfrm>
+          <a:prstGeom prst="roundRect">
+            <a:avLst>
+              <a:gd name="adj" fmla="val 6857"/>
             </a:avLst>
           </a:prstGeom>
           <a:solidFill>
@@ -12013,73 +13065,53 @@
       </p:sp>
       <p:sp>
         <p:nvSpPr>
-          <p:cNvPr id="7" name="Shape 5"/>
-          <p:cNvSpPr/>
-          <p:nvPr/>
-        </p:nvSpPr>
-        <p:spPr>
-          <a:xfrm>
-            <a:off x="768096" y="1920240"/>
-            <a:ext cx="384048" cy="384048"/>
-          </a:xfrm>
-          <a:prstGeom prst="ellipse">
-            <a:avLst/>
-          </a:prstGeom>
-          <a:solidFill>
-            <a:srgbClr val="177245"/>
-          </a:solidFill>
-          <a:ln/>
-        </p:spPr>
-      </p:sp>
-      <p:sp>
-        <p:nvSpPr>
-          <p:cNvPr id="8" name="Text 6"/>
-          <p:cNvSpPr/>
-          <p:nvPr/>
-        </p:nvSpPr>
-        <p:spPr>
-          <a:xfrm>
-            <a:off x="768096" y="1920240"/>
-            <a:ext cx="384048" cy="384048"/>
-          </a:xfrm>
-          <a:prstGeom prst="rect">
-            <a:avLst/>
-          </a:prstGeom>
-          <a:noFill/>
-          <a:ln/>
-        </p:spPr>
-        <p:txBody>
-          <a:bodyPr wrap="square" lIns="0" tIns="0" rIns="0" bIns="0" rtlCol="0" anchor="ctr"/>
-          <a:lstStyle/>
-          <a:p>
-            <a:pPr algn="ctr" indent="0" marL="0">
-              <a:buNone/>
-            </a:pPr>
-            <a:r>
-              <a:rPr lang="en-US" sz="1200" b="1" dirty="0">
-                <a:solidFill>
-                  <a:srgbClr val="E9F3EE"/>
+          <p:cNvPr id="24" name="Text 22"/>
+          <p:cNvSpPr/>
+          <p:nvPr/>
+        </p:nvSpPr>
+        <p:spPr>
+          <a:xfrm>
+            <a:off x="786384" y="4425696"/>
+            <a:ext cx="10625328" cy="219456"/>
+          </a:xfrm>
+          <a:prstGeom prst="rect">
+            <a:avLst/>
+          </a:prstGeom>
+          <a:noFill/>
+          <a:ln/>
+        </p:spPr>
+        <p:txBody>
+          <a:bodyPr wrap="square" lIns="0" tIns="0" rIns="0" bIns="0" rtlCol="0" anchor="ctr"/>
+          <a:lstStyle/>
+          <a:p>
+            <a:pPr indent="0" marL="0">
+              <a:buNone/>
+            </a:pPr>
+            <a:r>
+              <a:rPr lang="en-US" sz="950" b="1" spc="150" kern="0" dirty="0">
+                <a:solidFill>
+                  <a:srgbClr val="177245"/>
                 </a:solidFill>
                 <a:latin typeface="Courier New" pitchFamily="34" charset="0"/>
                 <a:ea typeface="Courier New" pitchFamily="34" charset="-122"/>
                 <a:cs typeface="Courier New" pitchFamily="34" charset="-120"/>
               </a:rPr>
-              <a:t>1</a:t>
-            </a:r>
-            <a:endParaRPr lang="en-US" sz="1200" dirty="0"/>
-          </a:p>
-        </p:txBody>
-      </p:sp>
-      <p:sp>
-        <p:nvSpPr>
-          <p:cNvPr id="9" name="Text 7"/>
-          <p:cNvSpPr/>
-          <p:nvPr/>
-        </p:nvSpPr>
-        <p:spPr>
-          <a:xfrm>
-            <a:off x="1280160" y="1892808"/>
-            <a:ext cx="4617720" cy="438912"/>
+              <a:t>ПРАВИЛО ДЛЯ КОЖНОГО НОВОГО ПОЛЯ</a:t>
+            </a:r>
+            <a:endParaRPr lang="en-US" sz="950" dirty="0"/>
+          </a:p>
+        </p:txBody>
+      </p:sp>
+      <p:sp>
+        <p:nvSpPr>
+          <p:cNvPr id="25" name="Text 23"/>
+          <p:cNvSpPr/>
+          <p:nvPr/>
+        </p:nvSpPr>
+        <p:spPr>
+          <a:xfrm>
+            <a:off x="786384" y="4681728"/>
+            <a:ext cx="10625328" cy="1088136"/>
           </a:xfrm>
           <a:prstGeom prst="rect">
             <a:avLst/>
@@ -12095,631 +13127,15 @@
               <a:buNone/>
             </a:pPr>
             <a:r>
-              <a:rPr lang="en-US" sz="1450" b="1" dirty="0">
-                <a:solidFill>
-                  <a:srgbClr val="177245"/>
+              <a:rPr lang="en-US" sz="1300" dirty="0">
+                <a:solidFill>
+                  <a:srgbClr val="1B1D23"/>
                 </a:solidFill>
                 <a:latin typeface="Calibri" pitchFamily="34" charset="0"/>
                 <a:ea typeface="Calibri" pitchFamily="34" charset="-122"/>
                 <a:cs typeface="Calibri" pitchFamily="34" charset="-120"/>
               </a:rPr>
-              <a:t>psql-агрегати руками</a:t>
-            </a:r>
-            <a:endParaRPr lang="en-US" sz="1450" dirty="0"/>
-          </a:p>
-        </p:txBody>
-      </p:sp>
-      <p:sp>
-        <p:nvSpPr>
-          <p:cNvPr id="10" name="Text 8"/>
-          <p:cNvSpPr/>
-          <p:nvPr/>
-        </p:nvSpPr>
-        <p:spPr>
-          <a:xfrm>
-            <a:off x="768096" y="2423160"/>
-            <a:ext cx="5129784" cy="621792"/>
-          </a:xfrm>
-          <a:prstGeom prst="rect">
-            <a:avLst/>
-          </a:prstGeom>
-          <a:noFill/>
-          <a:ln/>
-        </p:spPr>
-        <p:txBody>
-          <a:bodyPr wrap="square" lIns="0" tIns="0" rIns="0" bIns="0" rtlCol="0" anchor="t"/>
-          <a:lstStyle/>
-          <a:p>
-            <a:pPr indent="0" marL="0">
-              <a:buNone/>
-            </a:pPr>
-            <a:r>
-              <a:rPr lang="en-US" sz="1200" dirty="0">
-                <a:solidFill>
-                  <a:srgbClr val="1B1D23"/>
-                </a:solidFill>
-                <a:latin typeface="Calibri" pitchFamily="34" charset="0"/>
-                <a:ea typeface="Calibri" pitchFamily="34" charset="-122"/>
-                <a:cs typeface="Calibri" pitchFamily="34" charset="-120"/>
-              </a:rPr>
-              <a:t>count, p95, error rate — одним запитом</a:t>
-            </a:r>
-            <a:endParaRPr lang="en-US" sz="1200" dirty="0"/>
-          </a:p>
-        </p:txBody>
-      </p:sp>
-      <p:sp>
-        <p:nvSpPr>
-          <p:cNvPr id="11" name="Shape 9"/>
-          <p:cNvSpPr/>
-          <p:nvPr/>
-        </p:nvSpPr>
-        <p:spPr>
-          <a:xfrm>
-            <a:off x="6281928" y="1737360"/>
-            <a:ext cx="5532120" cy="1463040"/>
-          </a:xfrm>
-          <a:prstGeom prst="roundRect">
-            <a:avLst>
-              <a:gd name="adj" fmla="val 7500"/>
-            </a:avLst>
-          </a:prstGeom>
-          <a:solidFill>
-            <a:srgbClr val="E9F3EE"/>
-          </a:solidFill>
-          <a:ln/>
-        </p:spPr>
-      </p:sp>
-      <p:sp>
-        <p:nvSpPr>
-          <p:cNvPr id="12" name="Shape 10"/>
-          <p:cNvSpPr/>
-          <p:nvPr/>
-        </p:nvSpPr>
-        <p:spPr>
-          <a:xfrm>
-            <a:off x="6483096" y="1920240"/>
-            <a:ext cx="384048" cy="384048"/>
-          </a:xfrm>
-          <a:prstGeom prst="ellipse">
-            <a:avLst/>
-          </a:prstGeom>
-          <a:solidFill>
-            <a:srgbClr val="177245"/>
-          </a:solidFill>
-          <a:ln/>
-        </p:spPr>
-      </p:sp>
-      <p:sp>
-        <p:nvSpPr>
-          <p:cNvPr id="13" name="Text 11"/>
-          <p:cNvSpPr/>
-          <p:nvPr/>
-        </p:nvSpPr>
-        <p:spPr>
-          <a:xfrm>
-            <a:off x="6483096" y="1920240"/>
-            <a:ext cx="384048" cy="384048"/>
-          </a:xfrm>
-          <a:prstGeom prst="rect">
-            <a:avLst/>
-          </a:prstGeom>
-          <a:noFill/>
-          <a:ln/>
-        </p:spPr>
-        <p:txBody>
-          <a:bodyPr wrap="square" lIns="0" tIns="0" rIns="0" bIns="0" rtlCol="0" anchor="ctr"/>
-          <a:lstStyle/>
-          <a:p>
-            <a:pPr algn="ctr" indent="0" marL="0">
-              <a:buNone/>
-            </a:pPr>
-            <a:r>
-              <a:rPr lang="en-US" sz="1200" b="1" dirty="0">
-                <a:solidFill>
-                  <a:srgbClr val="E9F3EE"/>
-                </a:solidFill>
-                <a:latin typeface="Courier New" pitchFamily="34" charset="0"/>
-                <a:ea typeface="Courier New" pitchFamily="34" charset="-122"/>
-                <a:cs typeface="Courier New" pitchFamily="34" charset="-120"/>
-              </a:rPr>
-              <a:t>2</a:t>
-            </a:r>
-            <a:endParaRPr lang="en-US" sz="1200" dirty="0"/>
-          </a:p>
-        </p:txBody>
-      </p:sp>
-      <p:sp>
-        <p:nvSpPr>
-          <p:cNvPr id="14" name="Text 12"/>
-          <p:cNvSpPr/>
-          <p:nvPr/>
-        </p:nvSpPr>
-        <p:spPr>
-          <a:xfrm>
-            <a:off x="6995160" y="1892808"/>
-            <a:ext cx="4617720" cy="438912"/>
-          </a:xfrm>
-          <a:prstGeom prst="rect">
-            <a:avLst/>
-          </a:prstGeom>
-          <a:noFill/>
-          <a:ln/>
-        </p:spPr>
-        <p:txBody>
-          <a:bodyPr wrap="square" lIns="0" tIns="0" rIns="0" bIns="0" rtlCol="0" anchor="ctr"/>
-          <a:lstStyle/>
-          <a:p>
-            <a:pPr indent="0" marL="0">
-              <a:buNone/>
-            </a:pPr>
-            <a:r>
-              <a:rPr lang="en-US" sz="1450" b="1" dirty="0">
-                <a:solidFill>
-                  <a:srgbClr val="177245"/>
-                </a:solidFill>
-                <a:latin typeface="Calibri" pitchFamily="34" charset="0"/>
-                <a:ea typeface="Calibri" pitchFamily="34" charset="-122"/>
-                <a:cs typeface="Calibri" pitchFamily="34" charset="-120"/>
-              </a:rPr>
-              <a:t>GET /observability</a:t>
-            </a:r>
-            <a:endParaRPr lang="en-US" sz="1450" dirty="0"/>
-          </a:p>
-        </p:txBody>
-      </p:sp>
-      <p:sp>
-        <p:nvSpPr>
-          <p:cNvPr id="15" name="Text 13"/>
-          <p:cNvSpPr/>
-          <p:nvPr/>
-        </p:nvSpPr>
-        <p:spPr>
-          <a:xfrm>
-            <a:off x="6483096" y="2423160"/>
-            <a:ext cx="5129784" cy="621792"/>
-          </a:xfrm>
-          <a:prstGeom prst="rect">
-            <a:avLst/>
-          </a:prstGeom>
-          <a:noFill/>
-          <a:ln/>
-        </p:spPr>
-        <p:txBody>
-          <a:bodyPr wrap="square" lIns="0" tIns="0" rIns="0" bIns="0" rtlCol="0" anchor="t"/>
-          <a:lstStyle/>
-          <a:p>
-            <a:pPr indent="0" marL="0">
-              <a:buNone/>
-            </a:pPr>
-            <a:r>
-              <a:rPr lang="en-US" sz="1200" dirty="0">
-                <a:solidFill>
-                  <a:srgbClr val="1B1D23"/>
-                </a:solidFill>
-                <a:latin typeface="Calibri" pitchFamily="34" charset="0"/>
-                <a:ea typeface="Calibri" pitchFamily="34" charset="-122"/>
-                <a:cs typeface="Calibri" pitchFamily="34" charset="-120"/>
-              </a:rPr>
-              <a:t>ті самі цифри + cache-hit і fallback</a:t>
-            </a:r>
-            <a:endParaRPr lang="en-US" sz="1200" dirty="0"/>
-          </a:p>
-        </p:txBody>
-      </p:sp>
-      <p:sp>
-        <p:nvSpPr>
-          <p:cNvPr id="16" name="Shape 14"/>
-          <p:cNvSpPr/>
-          <p:nvPr/>
-        </p:nvSpPr>
-        <p:spPr>
-          <a:xfrm>
-            <a:off x="566928" y="3383280"/>
-            <a:ext cx="5532120" cy="1463040"/>
-          </a:xfrm>
-          <a:prstGeom prst="roundRect">
-            <a:avLst>
-              <a:gd name="adj" fmla="val 7500"/>
-            </a:avLst>
-          </a:prstGeom>
-          <a:solidFill>
-            <a:srgbClr val="E9F3EE"/>
-          </a:solidFill>
-          <a:ln/>
-        </p:spPr>
-      </p:sp>
-      <p:sp>
-        <p:nvSpPr>
-          <p:cNvPr id="17" name="Shape 15"/>
-          <p:cNvSpPr/>
-          <p:nvPr/>
-        </p:nvSpPr>
-        <p:spPr>
-          <a:xfrm>
-            <a:off x="768096" y="3566160"/>
-            <a:ext cx="384048" cy="384048"/>
-          </a:xfrm>
-          <a:prstGeom prst="ellipse">
-            <a:avLst/>
-          </a:prstGeom>
-          <a:solidFill>
-            <a:srgbClr val="177245"/>
-          </a:solidFill>
-          <a:ln/>
-        </p:spPr>
-      </p:sp>
-      <p:sp>
-        <p:nvSpPr>
-          <p:cNvPr id="18" name="Text 16"/>
-          <p:cNvSpPr/>
-          <p:nvPr/>
-        </p:nvSpPr>
-        <p:spPr>
-          <a:xfrm>
-            <a:off x="768096" y="3566160"/>
-            <a:ext cx="384048" cy="384048"/>
-          </a:xfrm>
-          <a:prstGeom prst="rect">
-            <a:avLst/>
-          </a:prstGeom>
-          <a:noFill/>
-          <a:ln/>
-        </p:spPr>
-        <p:txBody>
-          <a:bodyPr wrap="square" lIns="0" tIns="0" rIns="0" bIns="0" rtlCol="0" anchor="ctr"/>
-          <a:lstStyle/>
-          <a:p>
-            <a:pPr algn="ctr" indent="0" marL="0">
-              <a:buNone/>
-            </a:pPr>
-            <a:r>
-              <a:rPr lang="en-US" sz="1200" b="1" dirty="0">
-                <a:solidFill>
-                  <a:srgbClr val="E9F3EE"/>
-                </a:solidFill>
-                <a:latin typeface="Courier New" pitchFamily="34" charset="0"/>
-                <a:ea typeface="Courier New" pitchFamily="34" charset="-122"/>
-                <a:cs typeface="Courier New" pitchFamily="34" charset="-120"/>
-              </a:rPr>
-              <a:t>3</a:t>
-            </a:r>
-            <a:endParaRPr lang="en-US" sz="1200" dirty="0"/>
-          </a:p>
-        </p:txBody>
-      </p:sp>
-      <p:sp>
-        <p:nvSpPr>
-          <p:cNvPr id="19" name="Text 17"/>
-          <p:cNvSpPr/>
-          <p:nvPr/>
-        </p:nvSpPr>
-        <p:spPr>
-          <a:xfrm>
-            <a:off x="1280160" y="3538728"/>
-            <a:ext cx="4617720" cy="438912"/>
-          </a:xfrm>
-          <a:prstGeom prst="rect">
-            <a:avLst/>
-          </a:prstGeom>
-          <a:noFill/>
-          <a:ln/>
-        </p:spPr>
-        <p:txBody>
-          <a:bodyPr wrap="square" lIns="0" tIns="0" rIns="0" bIns="0" rtlCol="0" anchor="ctr"/>
-          <a:lstStyle/>
-          <a:p>
-            <a:pPr indent="0" marL="0">
-              <a:buNone/>
-            </a:pPr>
-            <a:r>
-              <a:rPr lang="en-US" sz="1450" b="1" dirty="0">
-                <a:solidFill>
-                  <a:srgbClr val="177245"/>
-                </a:solidFill>
-                <a:latin typeface="Calibri" pitchFamily="34" charset="0"/>
-                <a:ea typeface="Calibri" pitchFamily="34" charset="-122"/>
-                <a:cs typeface="Calibri" pitchFamily="34" charset="-120"/>
-              </a:rPr>
-              <a:t>консоль: усі шість плиток</a:t>
-            </a:r>
-            <a:endParaRPr lang="en-US" sz="1450" dirty="0"/>
-          </a:p>
-        </p:txBody>
-      </p:sp>
-      <p:sp>
-        <p:nvSpPr>
-          <p:cNvPr id="20" name="Text 18"/>
-          <p:cNvSpPr/>
-          <p:nvPr/>
-        </p:nvSpPr>
-        <p:spPr>
-          <a:xfrm>
-            <a:off x="768096" y="4069080"/>
-            <a:ext cx="5129784" cy="621792"/>
-          </a:xfrm>
-          <a:prstGeom prst="rect">
-            <a:avLst/>
-          </a:prstGeom>
-          <a:noFill/>
-          <a:ln/>
-        </p:spPr>
-        <p:txBody>
-          <a:bodyPr wrap="square" lIns="0" tIns="0" rIns="0" bIns="0" rtlCol="0" anchor="t"/>
-          <a:lstStyle/>
-          <a:p>
-            <a:pPr indent="0" marL="0">
-              <a:buNone/>
-            </a:pPr>
-            <a:r>
-              <a:rPr lang="en-US" sz="1200" dirty="0">
-                <a:solidFill>
-                  <a:srgbClr val="1B1D23"/>
-                </a:solidFill>
-                <a:latin typeface="Calibri" pitchFamily="34" charset="0"/>
-                <a:ea typeface="Calibri" pitchFamily="34" charset="-122"/>
-                <a:cs typeface="Calibri" pitchFamily="34" charset="-120"/>
-              </a:rPr>
-              <a:t>живі, з числами замість «—»</a:t>
-            </a:r>
-            <a:endParaRPr lang="en-US" sz="1200" dirty="0"/>
-          </a:p>
-        </p:txBody>
-      </p:sp>
-      <p:sp>
-        <p:nvSpPr>
-          <p:cNvPr id="21" name="Shape 19"/>
-          <p:cNvSpPr/>
-          <p:nvPr/>
-        </p:nvSpPr>
-        <p:spPr>
-          <a:xfrm>
-            <a:off x="6281928" y="3383280"/>
-            <a:ext cx="5532120" cy="1463040"/>
-          </a:xfrm>
-          <a:prstGeom prst="roundRect">
-            <a:avLst>
-              <a:gd name="adj" fmla="val 7500"/>
-            </a:avLst>
-          </a:prstGeom>
-          <a:solidFill>
-            <a:srgbClr val="F9E9E8"/>
-          </a:solidFill>
-          <a:ln/>
-        </p:spPr>
-      </p:sp>
-      <p:sp>
-        <p:nvSpPr>
-          <p:cNvPr id="22" name="Shape 20"/>
-          <p:cNvSpPr/>
-          <p:nvPr/>
-        </p:nvSpPr>
-        <p:spPr>
-          <a:xfrm>
-            <a:off x="6483096" y="3566160"/>
-            <a:ext cx="384048" cy="384048"/>
-          </a:xfrm>
-          <a:prstGeom prst="ellipse">
-            <a:avLst/>
-          </a:prstGeom>
-          <a:solidFill>
-            <a:srgbClr val="B3261E"/>
-          </a:solidFill>
-          <a:ln/>
-        </p:spPr>
-      </p:sp>
-      <p:sp>
-        <p:nvSpPr>
-          <p:cNvPr id="23" name="Text 21"/>
-          <p:cNvSpPr/>
-          <p:nvPr/>
-        </p:nvSpPr>
-        <p:spPr>
-          <a:xfrm>
-            <a:off x="6483096" y="3566160"/>
-            <a:ext cx="384048" cy="384048"/>
-          </a:xfrm>
-          <a:prstGeom prst="rect">
-            <a:avLst/>
-          </a:prstGeom>
-          <a:noFill/>
-          <a:ln/>
-        </p:spPr>
-        <p:txBody>
-          <a:bodyPr wrap="square" lIns="0" tIns="0" rIns="0" bIns="0" rtlCol="0" anchor="ctr"/>
-          <a:lstStyle/>
-          <a:p>
-            <a:pPr algn="ctr" indent="0" marL="0">
-              <a:buNone/>
-            </a:pPr>
-            <a:r>
-              <a:rPr lang="en-US" sz="1200" b="1" dirty="0">
-                <a:solidFill>
-                  <a:srgbClr val="F9E9E8"/>
-                </a:solidFill>
-                <a:latin typeface="Courier New" pitchFamily="34" charset="0"/>
-                <a:ea typeface="Courier New" pitchFamily="34" charset="-122"/>
-                <a:cs typeface="Courier New" pitchFamily="34" charset="-120"/>
-              </a:rPr>
-              <a:t>4</a:t>
-            </a:r>
-            <a:endParaRPr lang="en-US" sz="1200" dirty="0"/>
-          </a:p>
-        </p:txBody>
-      </p:sp>
-      <p:sp>
-        <p:nvSpPr>
-          <p:cNvPr id="24" name="Text 22"/>
-          <p:cNvSpPr/>
-          <p:nvPr/>
-        </p:nvSpPr>
-        <p:spPr>
-          <a:xfrm>
-            <a:off x="6995160" y="3538728"/>
-            <a:ext cx="4617720" cy="438912"/>
-          </a:xfrm>
-          <a:prstGeom prst="rect">
-            <a:avLst/>
-          </a:prstGeom>
-          <a:noFill/>
-          <a:ln/>
-        </p:spPr>
-        <p:txBody>
-          <a:bodyPr wrap="square" lIns="0" tIns="0" rIns="0" bIns="0" rtlCol="0" anchor="ctr"/>
-          <a:lstStyle/>
-          <a:p>
-            <a:pPr indent="0" marL="0">
-              <a:buNone/>
-            </a:pPr>
-            <a:r>
-              <a:rPr lang="en-US" sz="1450" b="1" dirty="0">
-                <a:solidFill>
-                  <a:srgbClr val="B3261E"/>
-                </a:solidFill>
-                <a:latin typeface="Calibri" pitchFamily="34" charset="0"/>
-                <a:ea typeface="Calibri" pitchFamily="34" charset="-122"/>
-                <a:cs typeface="Calibri" pitchFamily="34" charset="-120"/>
-              </a:rPr>
-              <a:t>«детектив»: серія __fail_503</a:t>
-            </a:r>
-            <a:endParaRPr lang="en-US" sz="1450" dirty="0"/>
-          </a:p>
-        </p:txBody>
-      </p:sp>
-      <p:sp>
-        <p:nvSpPr>
-          <p:cNvPr id="25" name="Text 23"/>
-          <p:cNvSpPr/>
-          <p:nvPr/>
-        </p:nvSpPr>
-        <p:spPr>
-          <a:xfrm>
-            <a:off x="6483096" y="4069080"/>
-            <a:ext cx="5129784" cy="621792"/>
-          </a:xfrm>
-          <a:prstGeom prst="rect">
-            <a:avLst/>
-          </a:prstGeom>
-          <a:noFill/>
-          <a:ln/>
-        </p:spPr>
-        <p:txBody>
-          <a:bodyPr wrap="square" lIns="0" tIns="0" rIns="0" bIns="0" rtlCol="0" anchor="t"/>
-          <a:lstStyle/>
-          <a:p>
-            <a:pPr indent="0" marL="0">
-              <a:buNone/>
-            </a:pPr>
-            <a:r>
-              <a:rPr lang="en-US" sz="1200" dirty="0">
-                <a:solidFill>
-                  <a:srgbClr val="1B1D23"/>
-                </a:solidFill>
-                <a:latin typeface="Calibri" pitchFamily="34" charset="0"/>
-                <a:ea typeface="Calibri" pitchFamily="34" charset="-122"/>
-                <a:cs typeface="Calibri" pitchFamily="34" charset="-120"/>
-              </a:rPr>
-              <a:t>fallback і error rate ростуть, користувач не бачить 500</a:t>
-            </a:r>
-            <a:endParaRPr lang="en-US" sz="1200" dirty="0"/>
-          </a:p>
-        </p:txBody>
-      </p:sp>
-      <p:sp>
-        <p:nvSpPr>
-          <p:cNvPr id="26" name="Shape 24"/>
-          <p:cNvSpPr/>
-          <p:nvPr/>
-        </p:nvSpPr>
-        <p:spPr>
-          <a:xfrm>
-            <a:off x="566928" y="5074920"/>
-            <a:ext cx="11064240" cy="1051560"/>
-          </a:xfrm>
-          <a:prstGeom prst="roundRect">
-            <a:avLst>
-              <a:gd name="adj" fmla="val 10435"/>
-            </a:avLst>
-          </a:prstGeom>
-          <a:solidFill>
-            <a:srgbClr val="ECEBFB"/>
-          </a:solidFill>
-          <a:ln/>
-        </p:spPr>
-      </p:sp>
-      <p:sp>
-        <p:nvSpPr>
-          <p:cNvPr id="27" name="Text 25"/>
-          <p:cNvSpPr/>
-          <p:nvPr/>
-        </p:nvSpPr>
-        <p:spPr>
-          <a:xfrm>
-            <a:off x="786384" y="5202936"/>
-            <a:ext cx="10625328" cy="219456"/>
-          </a:xfrm>
-          <a:prstGeom prst="rect">
-            <a:avLst/>
-          </a:prstGeom>
-          <a:noFill/>
-          <a:ln/>
-        </p:spPr>
-        <p:txBody>
-          <a:bodyPr wrap="square" lIns="0" tIns="0" rIns="0" bIns="0" rtlCol="0" anchor="ctr"/>
-          <a:lstStyle/>
-          <a:p>
-            <a:pPr indent="0" marL="0">
-              <a:buNone/>
-            </a:pPr>
-            <a:r>
-              <a:rPr lang="en-US" sz="950" b="1" spc="150" kern="0" dirty="0">
-                <a:solidFill>
-                  <a:srgbClr val="4038C4"/>
-                </a:solidFill>
-                <a:latin typeface="Courier New" pitchFamily="34" charset="0"/>
-                <a:ea typeface="Courier New" pitchFamily="34" charset="-122"/>
-                <a:cs typeface="Courier New" pitchFamily="34" charset="-120"/>
-              </a:rPr>
-              <a:t>НАВІЩО</a:t>
-            </a:r>
-            <a:endParaRPr lang="en-US" sz="950" dirty="0"/>
-          </a:p>
-        </p:txBody>
-      </p:sp>
-      <p:sp>
-        <p:nvSpPr>
-          <p:cNvPr id="28" name="Text 26"/>
-          <p:cNvSpPr/>
-          <p:nvPr/>
-        </p:nvSpPr>
-        <p:spPr>
-          <a:xfrm>
-            <a:off x="786384" y="5458968"/>
-            <a:ext cx="10625328" cy="539496"/>
-          </a:xfrm>
-          <a:prstGeom prst="rect">
-            <a:avLst/>
-          </a:prstGeom>
-          <a:noFill/>
-          <a:ln/>
-        </p:spPr>
-        <p:txBody>
-          <a:bodyPr wrap="square" lIns="0" tIns="0" rIns="0" bIns="0" rtlCol="0" anchor="ctr"/>
-          <a:lstStyle/>
-          <a:p>
-            <a:pPr indent="0" marL="0">
-              <a:buNone/>
-            </a:pPr>
-            <a:r>
-              <a:rPr lang="en-US" sz="1300" dirty="0">
-                <a:solidFill>
-                  <a:srgbClr val="1B1D23"/>
-                </a:solidFill>
-                <a:latin typeface="Calibri" pitchFamily="34" charset="0"/>
-                <a:ea typeface="Calibri" pitchFamily="34" charset="-122"/>
-                <a:cs typeface="Calibri" pitchFamily="34" charset="-120"/>
-              </a:rPr>
-              <a:t>Побачити, що моніторинг LLM-системи — це SQL по власному лозі плюс кілька лічильників. І навчитися впізнавати тихий інцидент — той, якого не видно в жодному uptime.</a:t>
+              <a:t>Усе, що ви залогували, ви тепер зобов'язані захищати. Лог — не блокнот, а база даних із тим самим режимом доступу, що й інші ваші дані.</a:t>
             </a:r>
             <a:endParaRPr lang="en-US" sz="1300" dirty="0"/>
           </a:p>
@@ -12813,8 +13229,47 @@
         </p:nvSpPr>
         <p:spPr>
           <a:xfrm>
-            <a:off x="566928" y="365760"/>
-            <a:ext cx="8881567" cy="603504"/>
+            <a:off x="566928" y="384048"/>
+            <a:ext cx="566928" cy="566928"/>
+          </a:xfrm>
+          <a:prstGeom prst="rect">
+            <a:avLst/>
+          </a:prstGeom>
+          <a:noFill/>
+          <a:ln/>
+        </p:spPr>
+        <p:txBody>
+          <a:bodyPr wrap="square" lIns="0" tIns="0" rIns="0" bIns="0" rtlCol="0" anchor="ctr"/>
+          <a:lstStyle/>
+          <a:p>
+            <a:pPr algn="l" indent="0" marL="0">
+              <a:buNone/>
+            </a:pPr>
+            <a:r>
+              <a:rPr lang="en-US" sz="2600" b="1" dirty="0">
+                <a:solidFill>
+                  <a:srgbClr val="C9C5F2"/>
+                </a:solidFill>
+                <a:latin typeface="Courier New" pitchFamily="34" charset="0"/>
+                <a:ea typeface="Courier New" pitchFamily="34" charset="-122"/>
+                <a:cs typeface="Courier New" pitchFamily="34" charset="-120"/>
+              </a:rPr>
+              <a:t>10</a:t>
+            </a:r>
+            <a:endParaRPr lang="en-US" sz="2600" dirty="0"/>
+          </a:p>
+        </p:txBody>
+      </p:sp>
+      <p:sp>
+        <p:nvSpPr>
+          <p:cNvPr id="3" name="Text 1"/>
+          <p:cNvSpPr/>
+          <p:nvPr/>
+        </p:nvSpPr>
+        <p:spPr>
+          <a:xfrm>
+            <a:off x="1225296" y="365760"/>
+            <a:ext cx="8223199" cy="603504"/>
           </a:xfrm>
           <a:prstGeom prst="rect">
             <a:avLst/>
@@ -12838,7 +13293,7 @@
                 <a:ea typeface="Calibri" pitchFamily="34" charset="-122"/>
                 <a:cs typeface="Calibri" pitchFamily="34" charset="-120"/>
               </a:rPr>
-              <a:t>Лабораторна: чотири кроки + опційний</a:t>
+              <a:t>У продукті чи індустріальний стек</a:t>
             </a:r>
             <a:endParaRPr lang="en-US" sz="2500" dirty="0"/>
           </a:p>
@@ -12846,7 +13301,7 @@
       </p:sp>
       <p:sp>
         <p:nvSpPr>
-          <p:cNvPr id="3" name="Shape 1"/>
+          <p:cNvPr id="4" name="Shape 2"/>
           <p:cNvSpPr/>
           <p:nvPr/>
         </p:nvSpPr>
@@ -12861,14 +13316,14 @@
             </a:avLst>
           </a:prstGeom>
           <a:solidFill>
-            <a:srgbClr val="E9F3EE"/>
+            <a:srgbClr val="ECEBFB"/>
           </a:solidFill>
           <a:ln/>
         </p:spPr>
       </p:sp>
       <p:sp>
         <p:nvSpPr>
-          <p:cNvPr id="4" name="Text 2"/>
+          <p:cNvPr id="5" name="Text 3"/>
           <p:cNvSpPr/>
           <p:nvPr/>
         </p:nvSpPr>
@@ -12893,13 +13348,13 @@
             <a:r>
               <a:rPr lang="en-US" sz="900" b="1" spc="100" kern="0" dirty="0">
                 <a:solidFill>
-                  <a:srgbClr val="177245"/>
+                  <a:srgbClr val="4038C4"/>
                 </a:solidFill>
                 <a:latin typeface="Courier New" pitchFamily="34" charset="0"/>
                 <a:ea typeface="Courier New" pitchFamily="34" charset="-122"/>
                 <a:cs typeface="Courier New" pitchFamily="34" charset="-120"/>
               </a:rPr>
-              <a:t>ПРАКТИКА</a:t>
+              <a:t>ТЕОРІЯ</a:t>
             </a:r>
             <a:endParaRPr lang="en-US" sz="900" dirty="0"/>
           </a:p>
@@ -12907,7 +13362,7 @@
       </p:sp>
       <p:sp>
         <p:nvSpPr>
-          <p:cNvPr id="5" name="Text 3"/>
+          <p:cNvPr id="6" name="Text 4"/>
           <p:cNvSpPr/>
           <p:nvPr/>
         </p:nvSpPr>
@@ -12946,73 +13401,275 @@
       </p:sp>
       <p:sp>
         <p:nvSpPr>
-          <p:cNvPr id="6" name="Shape 4"/>
+          <p:cNvPr id="7" name="Shape 5"/>
           <p:cNvSpPr/>
           <p:nvPr/>
         </p:nvSpPr>
         <p:spPr>
           <a:xfrm>
             <a:off x="566928" y="1828800"/>
-            <a:ext cx="457200" cy="457200"/>
-          </a:xfrm>
-          <a:prstGeom prst="ellipse">
-            <a:avLst/>
+            <a:ext cx="5349240" cy="1783080"/>
+          </a:xfrm>
+          <a:prstGeom prst="roundRect">
+            <a:avLst>
+              <a:gd name="adj" fmla="val 6154"/>
+            </a:avLst>
           </a:prstGeom>
           <a:solidFill>
-            <a:srgbClr val="4038C4"/>
+            <a:srgbClr val="ECEBFB"/>
           </a:solidFill>
           <a:ln/>
         </p:spPr>
       </p:sp>
       <p:sp>
         <p:nvSpPr>
-          <p:cNvPr id="7" name="Text 5"/>
-          <p:cNvSpPr/>
-          <p:nvPr/>
-        </p:nvSpPr>
-        <p:spPr>
-          <a:xfrm>
-            <a:off x="566928" y="1828800"/>
-            <a:ext cx="457200" cy="457200"/>
-          </a:xfrm>
-          <a:prstGeom prst="rect">
-            <a:avLst/>
-          </a:prstGeom>
-          <a:noFill/>
-          <a:ln/>
-        </p:spPr>
-        <p:txBody>
-          <a:bodyPr wrap="square" lIns="0" tIns="0" rIns="0" bIns="0" rtlCol="0" anchor="ctr"/>
-          <a:lstStyle/>
-          <a:p>
-            <a:pPr algn="ctr" indent="0" marL="0">
-              <a:buNone/>
-            </a:pPr>
-            <a:r>
-              <a:rPr lang="en-US" sz="1300" b="1" dirty="0">
-                <a:solidFill>
-                  <a:srgbClr val="FFFFFF"/>
+          <p:cNvPr id="8" name="Text 6"/>
+          <p:cNvSpPr/>
+          <p:nvPr/>
+        </p:nvSpPr>
+        <p:spPr>
+          <a:xfrm>
+            <a:off x="768096" y="1984248"/>
+            <a:ext cx="4946904" cy="438912"/>
+          </a:xfrm>
+          <a:prstGeom prst="rect">
+            <a:avLst/>
+          </a:prstGeom>
+          <a:noFill/>
+          <a:ln/>
+        </p:spPr>
+        <p:txBody>
+          <a:bodyPr wrap="square" lIns="0" tIns="0" rIns="0" bIns="0" rtlCol="0" anchor="ctr"/>
+          <a:lstStyle/>
+          <a:p>
+            <a:pPr indent="0" marL="0">
+              <a:buNone/>
+            </a:pPr>
+            <a:r>
+              <a:rPr lang="en-US" sz="1450" b="1" dirty="0">
+                <a:solidFill>
+                  <a:srgbClr val="4038C4"/>
+                </a:solidFill>
+                <a:latin typeface="Calibri" pitchFamily="34" charset="0"/>
+                <a:ea typeface="Calibri" pitchFamily="34" charset="-122"/>
+                <a:cs typeface="Calibri" pitchFamily="34" charset="-120"/>
+              </a:rPr>
+              <a:t>Обов'язкова доріжка: у продукті</a:t>
+            </a:r>
+            <a:endParaRPr lang="en-US" sz="1450" dirty="0"/>
+          </a:p>
+        </p:txBody>
+      </p:sp>
+      <p:sp>
+        <p:nvSpPr>
+          <p:cNvPr id="9" name="Text 7"/>
+          <p:cNvSpPr/>
+          <p:nvPr/>
+        </p:nvSpPr>
+        <p:spPr>
+          <a:xfrm>
+            <a:off x="768096" y="2514600"/>
+            <a:ext cx="4946904" cy="941832"/>
+          </a:xfrm>
+          <a:prstGeom prst="rect">
+            <a:avLst/>
+          </a:prstGeom>
+          <a:noFill/>
+          <a:ln/>
+        </p:spPr>
+        <p:txBody>
+          <a:bodyPr wrap="square" lIns="0" tIns="0" rIns="0" bIns="0" rtlCol="0" anchor="t"/>
+          <a:lstStyle/>
+          <a:p>
+            <a:pPr indent="0" marL="0">
+              <a:buNone/>
+            </a:pPr>
+            <a:r>
+              <a:rPr lang="en-US" sz="1200" dirty="0">
+                <a:solidFill>
+                  <a:srgbClr val="1B1D23"/>
+                </a:solidFill>
+                <a:latin typeface="Calibri" pitchFamily="34" charset="0"/>
+                <a:ea typeface="Calibri" pitchFamily="34" charset="-122"/>
+                <a:cs typeface="Calibri" pitchFamily="34" charset="-120"/>
+              </a:rPr>
+              <a:t>метрики живуть усередині системи, поверх власного лога: жодної нової інфраструктури</a:t>
+            </a:r>
+            <a:endParaRPr lang="en-US" sz="1200" dirty="0"/>
+          </a:p>
+        </p:txBody>
+      </p:sp>
+      <p:sp>
+        <p:nvSpPr>
+          <p:cNvPr id="10" name="Shape 8"/>
+          <p:cNvSpPr/>
+          <p:nvPr/>
+        </p:nvSpPr>
+        <p:spPr>
+          <a:xfrm>
+            <a:off x="6281928" y="1828800"/>
+            <a:ext cx="5349240" cy="1783080"/>
+          </a:xfrm>
+          <a:prstGeom prst="roundRect">
+            <a:avLst>
+              <a:gd name="adj" fmla="val 6154"/>
+            </a:avLst>
+          </a:prstGeom>
+          <a:solidFill>
+            <a:srgbClr val="F8F0E2"/>
+          </a:solidFill>
+          <a:ln/>
+        </p:spPr>
+      </p:sp>
+      <p:sp>
+        <p:nvSpPr>
+          <p:cNvPr id="11" name="Text 9"/>
+          <p:cNvSpPr/>
+          <p:nvPr/>
+        </p:nvSpPr>
+        <p:spPr>
+          <a:xfrm>
+            <a:off x="6483096" y="1984248"/>
+            <a:ext cx="4946904" cy="438912"/>
+          </a:xfrm>
+          <a:prstGeom prst="rect">
+            <a:avLst/>
+          </a:prstGeom>
+          <a:noFill/>
+          <a:ln/>
+        </p:spPr>
+        <p:txBody>
+          <a:bodyPr wrap="square" lIns="0" tIns="0" rIns="0" bIns="0" rtlCol="0" anchor="ctr"/>
+          <a:lstStyle/>
+          <a:p>
+            <a:pPr indent="0" marL="0">
+              <a:buNone/>
+            </a:pPr>
+            <a:r>
+              <a:rPr lang="en-US" sz="1450" b="1" dirty="0">
+                <a:solidFill>
+                  <a:srgbClr val="9A5B12"/>
+                </a:solidFill>
+                <a:latin typeface="Calibri" pitchFamily="34" charset="0"/>
+                <a:ea typeface="Calibri" pitchFamily="34" charset="-122"/>
+                <a:cs typeface="Calibri" pitchFamily="34" charset="-120"/>
+              </a:rPr>
+              <a:t>Індустріальний стек — надбудова</a:t>
+            </a:r>
+            <a:endParaRPr lang="en-US" sz="1450" dirty="0"/>
+          </a:p>
+        </p:txBody>
+      </p:sp>
+      <p:sp>
+        <p:nvSpPr>
+          <p:cNvPr id="12" name="Text 10"/>
+          <p:cNvSpPr/>
+          <p:nvPr/>
+        </p:nvSpPr>
+        <p:spPr>
+          <a:xfrm>
+            <a:off x="6483096" y="2514600"/>
+            <a:ext cx="4946904" cy="941832"/>
+          </a:xfrm>
+          <a:prstGeom prst="rect">
+            <a:avLst/>
+          </a:prstGeom>
+          <a:noFill/>
+          <a:ln/>
+        </p:spPr>
+        <p:txBody>
+          <a:bodyPr wrap="square" lIns="0" tIns="0" rIns="0" bIns="0" rtlCol="0" anchor="t"/>
+          <a:lstStyle/>
+          <a:p>
+            <a:pPr indent="0" marL="0">
+              <a:buNone/>
+            </a:pPr>
+            <a:r>
+              <a:rPr lang="en-US" sz="1200" dirty="0">
+                <a:solidFill>
+                  <a:srgbClr val="1B1D23"/>
+                </a:solidFill>
+                <a:latin typeface="Calibri" pitchFamily="34" charset="0"/>
+                <a:ea typeface="Calibri" pitchFamily="34" charset="-122"/>
+                <a:cs typeface="Calibri" pitchFamily="34" charset="-120"/>
+              </a:rPr>
+              <a:t>/metrics і зовнішні дашборди піднімаються поруч, коли питання виходять за межі системи</a:t>
+            </a:r>
+            <a:endParaRPr lang="en-US" sz="1200" dirty="0"/>
+          </a:p>
+        </p:txBody>
+      </p:sp>
+      <p:sp>
+        <p:nvSpPr>
+          <p:cNvPr id="13" name="Shape 11"/>
+          <p:cNvSpPr/>
+          <p:nvPr/>
+        </p:nvSpPr>
+        <p:spPr>
+          <a:xfrm>
+            <a:off x="566928" y="3886200"/>
+            <a:ext cx="11064240" cy="1097280"/>
+          </a:xfrm>
+          <a:prstGeom prst="roundRect">
+            <a:avLst>
+              <a:gd name="adj" fmla="val 10000"/>
+            </a:avLst>
+          </a:prstGeom>
+          <a:solidFill>
+            <a:srgbClr val="F8F0E2"/>
+          </a:solidFill>
+          <a:ln/>
+        </p:spPr>
+      </p:sp>
+      <p:sp>
+        <p:nvSpPr>
+          <p:cNvPr id="14" name="Text 12"/>
+          <p:cNvSpPr/>
+          <p:nvPr/>
+        </p:nvSpPr>
+        <p:spPr>
+          <a:xfrm>
+            <a:off x="786384" y="4014216"/>
+            <a:ext cx="10625328" cy="219456"/>
+          </a:xfrm>
+          <a:prstGeom prst="rect">
+            <a:avLst/>
+          </a:prstGeom>
+          <a:noFill/>
+          <a:ln/>
+        </p:spPr>
+        <p:txBody>
+          <a:bodyPr wrap="square" lIns="0" tIns="0" rIns="0" bIns="0" rtlCol="0" anchor="ctr"/>
+          <a:lstStyle/>
+          <a:p>
+            <a:pPr indent="0" marL="0">
+              <a:buNone/>
+            </a:pPr>
+            <a:r>
+              <a:rPr lang="en-US" sz="950" b="1" spc="150" kern="0" dirty="0">
+                <a:solidFill>
+                  <a:srgbClr val="9A5B12"/>
                 </a:solidFill>
                 <a:latin typeface="Courier New" pitchFamily="34" charset="0"/>
                 <a:ea typeface="Courier New" pitchFamily="34" charset="-122"/>
                 <a:cs typeface="Courier New" pitchFamily="34" charset="-120"/>
               </a:rPr>
-              <a:t>1</a:t>
-            </a:r>
-            <a:endParaRPr lang="en-US" sz="1300" dirty="0"/>
-          </a:p>
-        </p:txBody>
-      </p:sp>
-      <p:sp>
-        <p:nvSpPr>
-          <p:cNvPr id="8" name="Text 6"/>
-          <p:cNvSpPr/>
-          <p:nvPr/>
-        </p:nvSpPr>
-        <p:spPr>
-          <a:xfrm>
-            <a:off x="1188720" y="1828800"/>
-            <a:ext cx="10424160" cy="457200"/>
+              <a:t>ЛАЙФХАК</a:t>
+            </a:r>
+            <a:endParaRPr lang="en-US" sz="950" dirty="0"/>
+          </a:p>
+        </p:txBody>
+      </p:sp>
+      <p:sp>
+        <p:nvSpPr>
+          <p:cNvPr id="15" name="Text 13"/>
+          <p:cNvSpPr/>
+          <p:nvPr/>
+        </p:nvSpPr>
+        <p:spPr>
+          <a:xfrm>
+            <a:off x="786384" y="4270248"/>
+            <a:ext cx="10625328" cy="585216"/>
           </a:xfrm>
           <a:prstGeom prst="rect">
             <a:avLst/>
@@ -13028,7 +13685,7 @@
               <a:buNone/>
             </a:pPr>
             <a:r>
-              <a:rPr lang="en-US" sz="1400" b="1" dirty="0">
+              <a:rPr lang="en-US" sz="1300" dirty="0">
                 <a:solidFill>
                   <a:srgbClr val="1B1D23"/>
                 </a:solidFill>
@@ -13036,471 +13693,70 @@
                 <a:ea typeface="Calibri" pitchFamily="34" charset="-122"/>
                 <a:cs typeface="Calibri" pitchFamily="34" charset="-120"/>
               </a:rPr>
-              <a:t>Порахувати руками  </a:t>
-            </a:r>
+              <a:t>Раз на тиждень звіряйте плитку з SQL руками. Розбіжність — це або баг агрегації, або зміна, про яку ви не знали.</a:t>
+            </a:r>
+            <a:endParaRPr lang="en-US" sz="1300" dirty="0"/>
+          </a:p>
+        </p:txBody>
+      </p:sp>
+      <p:sp>
+        <p:nvSpPr>
+          <p:cNvPr id="16" name="Shape 14"/>
+          <p:cNvSpPr/>
+          <p:nvPr/>
+        </p:nvSpPr>
+        <p:spPr>
+          <a:xfrm>
+            <a:off x="566928" y="5120640"/>
+            <a:ext cx="11064240" cy="731520"/>
+          </a:xfrm>
+          <a:prstGeom prst="roundRect">
+            <a:avLst>
+              <a:gd name="adj" fmla="val 15000"/>
+            </a:avLst>
+          </a:prstGeom>
+          <a:solidFill>
+            <a:srgbClr val="FFFFFF"/>
+          </a:solidFill>
+          <a:ln/>
+        </p:spPr>
+      </p:sp>
+      <p:sp>
+        <p:nvSpPr>
+          <p:cNvPr id="17" name="Text 15"/>
+          <p:cNvSpPr/>
+          <p:nvPr/>
+        </p:nvSpPr>
+        <p:spPr>
+          <a:xfrm>
+            <a:off x="786384" y="5266944"/>
+            <a:ext cx="10625328" cy="438912"/>
+          </a:xfrm>
+          <a:prstGeom prst="rect">
+            <a:avLst/>
+          </a:prstGeom>
+          <a:noFill/>
+          <a:ln/>
+        </p:spPr>
+        <p:txBody>
+          <a:bodyPr wrap="square" lIns="0" tIns="0" rIns="0" bIns="0" rtlCol="0" anchor="ctr"/>
+          <a:lstStyle/>
+          <a:p>
             <a:pPr indent="0" marL="0">
               <a:buNone/>
             </a:pPr>
             <a:r>
-              <a:rPr lang="en-US" sz="1200" dirty="0">
-                <a:solidFill>
-                  <a:srgbClr val="565C6B"/>
+              <a:rPr lang="en-US" sz="1300" dirty="0">
+                <a:solidFill>
+                  <a:srgbClr val="1B1D23"/>
                 </a:solidFill>
                 <a:latin typeface="Calibri" pitchFamily="34" charset="0"/>
                 <a:ea typeface="Calibri" pitchFamily="34" charset="-122"/>
                 <a:cs typeface="Calibri" pitchFamily="34" charset="-120"/>
               </a:rPr>
-              <a:t>psql: count, p95, error rate по сьогоднішньому дню</a:t>
-            </a:r>
-            <a:endParaRPr lang="en-US" sz="1400" dirty="0"/>
-          </a:p>
-        </p:txBody>
-      </p:sp>
-      <p:sp>
-        <p:nvSpPr>
-          <p:cNvPr id="9" name="Shape 7"/>
-          <p:cNvSpPr/>
-          <p:nvPr/>
-        </p:nvSpPr>
-        <p:spPr>
-          <a:xfrm>
-            <a:off x="566928" y="2670048"/>
-            <a:ext cx="457200" cy="457200"/>
-          </a:xfrm>
-          <a:prstGeom prst="ellipse">
-            <a:avLst/>
-          </a:prstGeom>
-          <a:solidFill>
-            <a:srgbClr val="4038C4"/>
-          </a:solidFill>
-          <a:ln/>
-        </p:spPr>
-      </p:sp>
-      <p:sp>
-        <p:nvSpPr>
-          <p:cNvPr id="10" name="Text 8"/>
-          <p:cNvSpPr/>
-          <p:nvPr/>
-        </p:nvSpPr>
-        <p:spPr>
-          <a:xfrm>
-            <a:off x="566928" y="2670048"/>
-            <a:ext cx="457200" cy="457200"/>
-          </a:xfrm>
-          <a:prstGeom prst="rect">
-            <a:avLst/>
-          </a:prstGeom>
-          <a:noFill/>
-          <a:ln/>
-        </p:spPr>
-        <p:txBody>
-          <a:bodyPr wrap="square" lIns="0" tIns="0" rIns="0" bIns="0" rtlCol="0" anchor="ctr"/>
-          <a:lstStyle/>
-          <a:p>
-            <a:pPr algn="ctr" indent="0" marL="0">
-              <a:buNone/>
-            </a:pPr>
-            <a:r>
-              <a:rPr lang="en-US" sz="1300" b="1" dirty="0">
-                <a:solidFill>
-                  <a:srgbClr val="FFFFFF"/>
-                </a:solidFill>
-                <a:latin typeface="Courier New" pitchFamily="34" charset="0"/>
-                <a:ea typeface="Courier New" pitchFamily="34" charset="-122"/>
-                <a:cs typeface="Courier New" pitchFamily="34" charset="-120"/>
-              </a:rPr>
-              <a:t>2</a:t>
+              <a:t>Порядок правильний: спершу видимість у продукті, потім — стек, якщо він справді потрібен.</a:t>
             </a:r>
             <a:endParaRPr lang="en-US" sz="1300" dirty="0"/>
-          </a:p>
-        </p:txBody>
-      </p:sp>
-      <p:sp>
-        <p:nvSpPr>
-          <p:cNvPr id="11" name="Text 9"/>
-          <p:cNvSpPr/>
-          <p:nvPr/>
-        </p:nvSpPr>
-        <p:spPr>
-          <a:xfrm>
-            <a:off x="1188720" y="2670048"/>
-            <a:ext cx="10424160" cy="457200"/>
-          </a:xfrm>
-          <a:prstGeom prst="rect">
-            <a:avLst/>
-          </a:prstGeom>
-          <a:noFill/>
-          <a:ln/>
-        </p:spPr>
-        <p:txBody>
-          <a:bodyPr wrap="square" lIns="0" tIns="0" rIns="0" bIns="0" rtlCol="0" anchor="ctr"/>
-          <a:lstStyle/>
-          <a:p>
-            <a:pPr indent="0" marL="0">
-              <a:buNone/>
-            </a:pPr>
-            <a:r>
-              <a:rPr lang="en-US" sz="1400" b="1" dirty="0">
-                <a:solidFill>
-                  <a:srgbClr val="1B1D23"/>
-                </a:solidFill>
-                <a:latin typeface="Calibri" pitchFamily="34" charset="0"/>
-                <a:ea typeface="Calibri" pitchFamily="34" charset="-122"/>
-                <a:cs typeface="Calibri" pitchFamily="34" charset="-120"/>
-              </a:rPr>
-              <a:t>Оживити /observability  </a:t>
-            </a:r>
-            <a:pPr indent="0" marL="0">
-              <a:buNone/>
-            </a:pPr>
-            <a:r>
-              <a:rPr lang="en-US" sz="1200" dirty="0">
-                <a:solidFill>
-                  <a:srgbClr val="565C6B"/>
-                </a:solidFill>
-                <a:latin typeface="Calibri" pitchFamily="34" charset="0"/>
-                <a:ea typeface="Calibri" pitchFamily="34" charset="-122"/>
-                <a:cs typeface="Calibri" pitchFamily="34" charset="-120"/>
-              </a:rPr>
-              <a:t>SQL-агрегати + лічильники в один ендпоінт</a:t>
-            </a:r>
-            <a:endParaRPr lang="en-US" sz="1400" dirty="0"/>
-          </a:p>
-        </p:txBody>
-      </p:sp>
-      <p:sp>
-        <p:nvSpPr>
-          <p:cNvPr id="12" name="Shape 10"/>
-          <p:cNvSpPr/>
-          <p:nvPr/>
-        </p:nvSpPr>
-        <p:spPr>
-          <a:xfrm>
-            <a:off x="566928" y="3511296"/>
-            <a:ext cx="457200" cy="457200"/>
-          </a:xfrm>
-          <a:prstGeom prst="ellipse">
-            <a:avLst/>
-          </a:prstGeom>
-          <a:solidFill>
-            <a:srgbClr val="4038C4"/>
-          </a:solidFill>
-          <a:ln/>
-        </p:spPr>
-      </p:sp>
-      <p:sp>
-        <p:nvSpPr>
-          <p:cNvPr id="13" name="Text 11"/>
-          <p:cNvSpPr/>
-          <p:nvPr/>
-        </p:nvSpPr>
-        <p:spPr>
-          <a:xfrm>
-            <a:off x="566928" y="3511296"/>
-            <a:ext cx="457200" cy="457200"/>
-          </a:xfrm>
-          <a:prstGeom prst="rect">
-            <a:avLst/>
-          </a:prstGeom>
-          <a:noFill/>
-          <a:ln/>
-        </p:spPr>
-        <p:txBody>
-          <a:bodyPr wrap="square" lIns="0" tIns="0" rIns="0" bIns="0" rtlCol="0" anchor="ctr"/>
-          <a:lstStyle/>
-          <a:p>
-            <a:pPr algn="ctr" indent="0" marL="0">
-              <a:buNone/>
-            </a:pPr>
-            <a:r>
-              <a:rPr lang="en-US" sz="1300" b="1" dirty="0">
-                <a:solidFill>
-                  <a:srgbClr val="FFFFFF"/>
-                </a:solidFill>
-                <a:latin typeface="Courier New" pitchFamily="34" charset="0"/>
-                <a:ea typeface="Courier New" pitchFamily="34" charset="-122"/>
-                <a:cs typeface="Courier New" pitchFamily="34" charset="-120"/>
-              </a:rPr>
-              <a:t>3</a:t>
-            </a:r>
-            <a:endParaRPr lang="en-US" sz="1300" dirty="0"/>
-          </a:p>
-        </p:txBody>
-      </p:sp>
-      <p:sp>
-        <p:nvSpPr>
-          <p:cNvPr id="14" name="Text 12"/>
-          <p:cNvSpPr/>
-          <p:nvPr/>
-        </p:nvSpPr>
-        <p:spPr>
-          <a:xfrm>
-            <a:off x="1188720" y="3511296"/>
-            <a:ext cx="10424160" cy="457200"/>
-          </a:xfrm>
-          <a:prstGeom prst="rect">
-            <a:avLst/>
-          </a:prstGeom>
-          <a:noFill/>
-          <a:ln/>
-        </p:spPr>
-        <p:txBody>
-          <a:bodyPr wrap="square" lIns="0" tIns="0" rIns="0" bIns="0" rtlCol="0" anchor="ctr"/>
-          <a:lstStyle/>
-          <a:p>
-            <a:pPr indent="0" marL="0">
-              <a:buNone/>
-            </a:pPr>
-            <a:r>
-              <a:rPr lang="en-US" sz="1400" b="1" dirty="0">
-                <a:solidFill>
-                  <a:srgbClr val="1B1D23"/>
-                </a:solidFill>
-                <a:latin typeface="Calibri" pitchFamily="34" charset="0"/>
-                <a:ea typeface="Calibri" pitchFamily="34" charset="-122"/>
-                <a:cs typeface="Calibri" pitchFamily="34" charset="-120"/>
-              </a:rPr>
-              <a:t>Звірити плитки з SQL  </a:t>
-            </a:r>
-            <a:pPr indent="0" marL="0">
-              <a:buNone/>
-            </a:pPr>
-            <a:r>
-              <a:rPr lang="en-US" sz="1200" dirty="0">
-                <a:solidFill>
-                  <a:srgbClr val="565C6B"/>
-                </a:solidFill>
-                <a:latin typeface="Calibri" pitchFamily="34" charset="0"/>
-                <a:ea typeface="Calibri" pitchFamily="34" charset="-122"/>
-                <a:cs typeface="Calibri" pitchFamily="34" charset="-120"/>
-              </a:rPr>
-              <a:t>шість плиток показують те саме, що запит</a:t>
-            </a:r>
-            <a:endParaRPr lang="en-US" sz="1400" dirty="0"/>
-          </a:p>
-        </p:txBody>
-      </p:sp>
-      <p:sp>
-        <p:nvSpPr>
-          <p:cNvPr id="15" name="Shape 13"/>
-          <p:cNvSpPr/>
-          <p:nvPr/>
-        </p:nvSpPr>
-        <p:spPr>
-          <a:xfrm>
-            <a:off x="566928" y="4352544"/>
-            <a:ext cx="457200" cy="457200"/>
-          </a:xfrm>
-          <a:prstGeom prst="ellipse">
-            <a:avLst/>
-          </a:prstGeom>
-          <a:solidFill>
-            <a:srgbClr val="4038C4"/>
-          </a:solidFill>
-          <a:ln/>
-        </p:spPr>
-      </p:sp>
-      <p:sp>
-        <p:nvSpPr>
-          <p:cNvPr id="16" name="Text 14"/>
-          <p:cNvSpPr/>
-          <p:nvPr/>
-        </p:nvSpPr>
-        <p:spPr>
-          <a:xfrm>
-            <a:off x="566928" y="4352544"/>
-            <a:ext cx="457200" cy="457200"/>
-          </a:xfrm>
-          <a:prstGeom prst="rect">
-            <a:avLst/>
-          </a:prstGeom>
-          <a:noFill/>
-          <a:ln/>
-        </p:spPr>
-        <p:txBody>
-          <a:bodyPr wrap="square" lIns="0" tIns="0" rIns="0" bIns="0" rtlCol="0" anchor="ctr"/>
-          <a:lstStyle/>
-          <a:p>
-            <a:pPr algn="ctr" indent="0" marL="0">
-              <a:buNone/>
-            </a:pPr>
-            <a:r>
-              <a:rPr lang="en-US" sz="1300" b="1" dirty="0">
-                <a:solidFill>
-                  <a:srgbClr val="FFFFFF"/>
-                </a:solidFill>
-                <a:latin typeface="Courier New" pitchFamily="34" charset="0"/>
-                <a:ea typeface="Courier New" pitchFamily="34" charset="-122"/>
-                <a:cs typeface="Courier New" pitchFamily="34" charset="-120"/>
-              </a:rPr>
-              <a:t>4</a:t>
-            </a:r>
-            <a:endParaRPr lang="en-US" sz="1300" dirty="0"/>
-          </a:p>
-        </p:txBody>
-      </p:sp>
-      <p:sp>
-        <p:nvSpPr>
-          <p:cNvPr id="17" name="Text 15"/>
-          <p:cNvSpPr/>
-          <p:nvPr/>
-        </p:nvSpPr>
-        <p:spPr>
-          <a:xfrm>
-            <a:off x="1188720" y="4352544"/>
-            <a:ext cx="10424160" cy="457200"/>
-          </a:xfrm>
-          <a:prstGeom prst="rect">
-            <a:avLst/>
-          </a:prstGeom>
-          <a:noFill/>
-          <a:ln/>
-        </p:spPr>
-        <p:txBody>
-          <a:bodyPr wrap="square" lIns="0" tIns="0" rIns="0" bIns="0" rtlCol="0" anchor="ctr"/>
-          <a:lstStyle/>
-          <a:p>
-            <a:pPr indent="0" marL="0">
-              <a:buNone/>
-            </a:pPr>
-            <a:r>
-              <a:rPr lang="en-US" sz="1400" b="1" dirty="0">
-                <a:solidFill>
-                  <a:srgbClr val="1B1D23"/>
-                </a:solidFill>
-                <a:latin typeface="Calibri" pitchFamily="34" charset="0"/>
-                <a:ea typeface="Calibri" pitchFamily="34" charset="-122"/>
-                <a:cs typeface="Calibri" pitchFamily="34" charset="-120"/>
-              </a:rPr>
-              <a:t>Відтворити «детектива»  </a:t>
-            </a:r>
-            <a:pPr indent="0" marL="0">
-              <a:buNone/>
-            </a:pPr>
-            <a:r>
-              <a:rPr lang="en-US" sz="1200" dirty="0">
-                <a:solidFill>
-                  <a:srgbClr val="565C6B"/>
-                </a:solidFill>
-                <a:latin typeface="Calibri" pitchFamily="34" charset="0"/>
-                <a:ea typeface="Calibri" pitchFamily="34" charset="-122"/>
-                <a:cs typeface="Calibri" pitchFamily="34" charset="-120"/>
-              </a:rPr>
-              <a:t>серія __fail_503 → метрики ростуть без 500 користувачу</a:t>
-            </a:r>
-            <a:endParaRPr lang="en-US" sz="1400" dirty="0"/>
-          </a:p>
-        </p:txBody>
-      </p:sp>
-      <p:sp>
-        <p:nvSpPr>
-          <p:cNvPr id="18" name="Shape 16"/>
-          <p:cNvSpPr/>
-          <p:nvPr/>
-        </p:nvSpPr>
-        <p:spPr>
-          <a:xfrm>
-            <a:off x="566928" y="5193792"/>
-            <a:ext cx="457200" cy="457200"/>
-          </a:xfrm>
-          <a:prstGeom prst="ellipse">
-            <a:avLst/>
-          </a:prstGeom>
-          <a:solidFill>
-            <a:srgbClr val="9A5B12"/>
-          </a:solidFill>
-          <a:ln/>
-        </p:spPr>
-      </p:sp>
-      <p:sp>
-        <p:nvSpPr>
-          <p:cNvPr id="19" name="Text 17"/>
-          <p:cNvSpPr/>
-          <p:nvPr/>
-        </p:nvSpPr>
-        <p:spPr>
-          <a:xfrm>
-            <a:off x="566928" y="5193792"/>
-            <a:ext cx="457200" cy="457200"/>
-          </a:xfrm>
-          <a:prstGeom prst="rect">
-            <a:avLst/>
-          </a:prstGeom>
-          <a:noFill/>
-          <a:ln/>
-        </p:spPr>
-        <p:txBody>
-          <a:bodyPr wrap="square" lIns="0" tIns="0" rIns="0" bIns="0" rtlCol="0" anchor="ctr"/>
-          <a:lstStyle/>
-          <a:p>
-            <a:pPr algn="ctr" indent="0" marL="0">
-              <a:buNone/>
-            </a:pPr>
-            <a:r>
-              <a:rPr lang="en-US" sz="1300" b="1" dirty="0">
-                <a:solidFill>
-                  <a:srgbClr val="FFFFFF"/>
-                </a:solidFill>
-                <a:latin typeface="Courier New" pitchFamily="34" charset="0"/>
-                <a:ea typeface="Courier New" pitchFamily="34" charset="-122"/>
-                <a:cs typeface="Courier New" pitchFamily="34" charset="-120"/>
-              </a:rPr>
-              <a:t>5</a:t>
-            </a:r>
-            <a:endParaRPr lang="en-US" sz="1300" dirty="0"/>
-          </a:p>
-        </p:txBody>
-      </p:sp>
-      <p:sp>
-        <p:nvSpPr>
-          <p:cNvPr id="20" name="Text 18"/>
-          <p:cNvSpPr/>
-          <p:nvPr/>
-        </p:nvSpPr>
-        <p:spPr>
-          <a:xfrm>
-            <a:off x="1188720" y="5193792"/>
-            <a:ext cx="10424160" cy="457200"/>
-          </a:xfrm>
-          <a:prstGeom prst="rect">
-            <a:avLst/>
-          </a:prstGeom>
-          <a:noFill/>
-          <a:ln/>
-        </p:spPr>
-        <p:txBody>
-          <a:bodyPr wrap="square" lIns="0" tIns="0" rIns="0" bIns="0" rtlCol="0" anchor="ctr"/>
-          <a:lstStyle/>
-          <a:p>
-            <a:pPr indent="0" marL="0">
-              <a:buNone/>
-            </a:pPr>
-            <a:r>
-              <a:rPr lang="en-US" sz="1400" b="1" dirty="0">
-                <a:solidFill>
-                  <a:srgbClr val="9A5B12"/>
-                </a:solidFill>
-                <a:latin typeface="Calibri" pitchFamily="34" charset="0"/>
-                <a:ea typeface="Calibri" pitchFamily="34" charset="-122"/>
-                <a:cs typeface="Calibri" pitchFamily="34" charset="-120"/>
-              </a:rPr>
-              <a:t>Таксономія помилок · опційно  </a:t>
-            </a:r>
-            <a:pPr indent="0" marL="0">
-              <a:buNone/>
-            </a:pPr>
-            <a:r>
-              <a:rPr lang="en-US" sz="1200" dirty="0">
-                <a:solidFill>
-                  <a:srgbClr val="565C6B"/>
-                </a:solidFill>
-                <a:latin typeface="Calibri" pitchFamily="34" charset="0"/>
-                <a:ea typeface="Calibri" pitchFamily="34" charset="-122"/>
-                <a:cs typeface="Calibri" pitchFamily="34" charset="-120"/>
-              </a:rPr>
-              <a:t>окремі лічильники за причинами</a:t>
-            </a:r>
-            <a:endParaRPr lang="en-US" sz="1400" dirty="0"/>
           </a:p>
         </p:txBody>
       </p:sp>
@@ -14695,7 +14951,7 @@
                 <a:ea typeface="Calibri" pitchFamily="34" charset="-122"/>
                 <a:cs typeface="Calibri" pitchFamily="34" charset="-120"/>
               </a:rPr>
-              <a:t>Що це довело</a:t>
+              <a:t>Зараз ви побачите — і навіщо</a:t>
             </a:r>
             <a:endParaRPr lang="en-US" sz="2500" dirty="0"/>
           </a:p>
@@ -14718,7 +14974,7 @@
             </a:avLst>
           </a:prstGeom>
           <a:solidFill>
-            <a:srgbClr val="ECEBFB"/>
+            <a:srgbClr val="E9F3EE"/>
           </a:solidFill>
           <a:ln/>
         </p:spPr>
@@ -14750,13 +15006,13 @@
             <a:r>
               <a:rPr lang="en-US" sz="900" b="1" spc="100" kern="0" dirty="0">
                 <a:solidFill>
-                  <a:srgbClr val="4038C4"/>
+                  <a:srgbClr val="177245"/>
                 </a:solidFill>
                 <a:latin typeface="Courier New" pitchFamily="34" charset="0"/>
                 <a:ea typeface="Courier New" pitchFamily="34" charset="-122"/>
                 <a:cs typeface="Courier New" pitchFamily="34" charset="-120"/>
               </a:rPr>
-              <a:t>ТЕОРІЯ</a:t>
+              <a:t>ПРАКТИКА</a:t>
             </a:r>
             <a:endParaRPr lang="en-US" sz="900" dirty="0"/>
           </a:p>
@@ -14810,11 +15066,11 @@
         <p:spPr>
           <a:xfrm>
             <a:off x="566928" y="1737360"/>
-            <a:ext cx="3566160" cy="1828800"/>
+            <a:ext cx="5532120" cy="1463040"/>
           </a:xfrm>
           <a:prstGeom prst="roundRect">
             <a:avLst>
-              <a:gd name="adj" fmla="val 6000"/>
+              <a:gd name="adj" fmla="val 7500"/>
             </a:avLst>
           </a:prstGeom>
           <a:solidFill>
@@ -14825,14 +15081,73 @@
       </p:sp>
       <p:sp>
         <p:nvSpPr>
-          <p:cNvPr id="7" name="Text 5"/>
-          <p:cNvSpPr/>
-          <p:nvPr/>
-        </p:nvSpPr>
-        <p:spPr>
-          <a:xfrm>
-            <a:off x="768096" y="1892808"/>
-            <a:ext cx="3163824" cy="438912"/>
+          <p:cNvPr id="7" name="Shape 5"/>
+          <p:cNvSpPr/>
+          <p:nvPr/>
+        </p:nvSpPr>
+        <p:spPr>
+          <a:xfrm>
+            <a:off x="768096" y="1920240"/>
+            <a:ext cx="384048" cy="384048"/>
+          </a:xfrm>
+          <a:prstGeom prst="ellipse">
+            <a:avLst/>
+          </a:prstGeom>
+          <a:solidFill>
+            <a:srgbClr val="177245"/>
+          </a:solidFill>
+          <a:ln/>
+        </p:spPr>
+      </p:sp>
+      <p:sp>
+        <p:nvSpPr>
+          <p:cNvPr id="8" name="Text 6"/>
+          <p:cNvSpPr/>
+          <p:nvPr/>
+        </p:nvSpPr>
+        <p:spPr>
+          <a:xfrm>
+            <a:off x="768096" y="1920240"/>
+            <a:ext cx="384048" cy="384048"/>
+          </a:xfrm>
+          <a:prstGeom prst="rect">
+            <a:avLst/>
+          </a:prstGeom>
+          <a:noFill/>
+          <a:ln/>
+        </p:spPr>
+        <p:txBody>
+          <a:bodyPr wrap="square" lIns="0" tIns="0" rIns="0" bIns="0" rtlCol="0" anchor="ctr"/>
+          <a:lstStyle/>
+          <a:p>
+            <a:pPr algn="ctr" indent="0" marL="0">
+              <a:buNone/>
+            </a:pPr>
+            <a:r>
+              <a:rPr lang="en-US" sz="1200" b="1" dirty="0">
+                <a:solidFill>
+                  <a:srgbClr val="E9F3EE"/>
+                </a:solidFill>
+                <a:latin typeface="Courier New" pitchFamily="34" charset="0"/>
+                <a:ea typeface="Courier New" pitchFamily="34" charset="-122"/>
+                <a:cs typeface="Courier New" pitchFamily="34" charset="-120"/>
+              </a:rPr>
+              <a:t>1</a:t>
+            </a:r>
+            <a:endParaRPr lang="en-US" sz="1200" dirty="0"/>
+          </a:p>
+        </p:txBody>
+      </p:sp>
+      <p:sp>
+        <p:nvSpPr>
+          <p:cNvPr id="9" name="Text 7"/>
+          <p:cNvSpPr/>
+          <p:nvPr/>
+        </p:nvSpPr>
+        <p:spPr>
+          <a:xfrm>
+            <a:off x="1280160" y="1892808"/>
+            <a:ext cx="4617720" cy="438912"/>
           </a:xfrm>
           <a:prstGeom prst="rect">
             <a:avLst/>
@@ -14856,7 +15171,7 @@
                 <a:ea typeface="Calibri" pitchFamily="34" charset="-122"/>
                 <a:cs typeface="Calibri" pitchFamily="34" charset="-120"/>
               </a:rPr>
-              <a:t>Моніторинг — це ваш лог</a:t>
+              <a:t>psql-агрегати руками</a:t>
             </a:r>
             <a:endParaRPr lang="en-US" sz="1450" dirty="0"/>
           </a:p>
@@ -14864,14 +15179,14 @@
       </p:sp>
       <p:sp>
         <p:nvSpPr>
-          <p:cNvPr id="8" name="Text 6"/>
+          <p:cNvPr id="10" name="Text 8"/>
           <p:cNvSpPr/>
           <p:nvPr/>
         </p:nvSpPr>
         <p:spPr>
           <a:xfrm>
             <a:off x="768096" y="2423160"/>
-            <a:ext cx="3163824" cy="987552"/>
+            <a:ext cx="5129784" cy="621792"/>
           </a:xfrm>
           <a:prstGeom prst="rect">
             <a:avLst/>
@@ -14895,7 +15210,7 @@
                 <a:ea typeface="Calibri" pitchFamily="34" charset="-122"/>
                 <a:cs typeface="Calibri" pitchFamily="34" charset="-120"/>
               </a:rPr>
-              <a:t>SQL по таблиці, яку ви писали з першого уроку</a:t>
+              <a:t>count, p95, error rate — одним запитом</a:t>
             </a:r>
             <a:endParaRPr lang="en-US" sz="1200" dirty="0"/>
           </a:p>
@@ -14903,18 +15218,495 @@
       </p:sp>
       <p:sp>
         <p:nvSpPr>
-          <p:cNvPr id="9" name="Shape 7"/>
-          <p:cNvSpPr/>
-          <p:nvPr/>
-        </p:nvSpPr>
-        <p:spPr>
-          <a:xfrm>
-            <a:off x="4315968" y="1737360"/>
-            <a:ext cx="3566160" cy="1828800"/>
+          <p:cNvPr id="11" name="Shape 9"/>
+          <p:cNvSpPr/>
+          <p:nvPr/>
+        </p:nvSpPr>
+        <p:spPr>
+          <a:xfrm>
+            <a:off x="6281928" y="1737360"/>
+            <a:ext cx="5532120" cy="1463040"/>
           </a:xfrm>
           <a:prstGeom prst="roundRect">
             <a:avLst>
-              <a:gd name="adj" fmla="val 6000"/>
+              <a:gd name="adj" fmla="val 7500"/>
+            </a:avLst>
+          </a:prstGeom>
+          <a:solidFill>
+            <a:srgbClr val="E9F3EE"/>
+          </a:solidFill>
+          <a:ln/>
+        </p:spPr>
+      </p:sp>
+      <p:sp>
+        <p:nvSpPr>
+          <p:cNvPr id="12" name="Shape 10"/>
+          <p:cNvSpPr/>
+          <p:nvPr/>
+        </p:nvSpPr>
+        <p:spPr>
+          <a:xfrm>
+            <a:off x="6483096" y="1920240"/>
+            <a:ext cx="384048" cy="384048"/>
+          </a:xfrm>
+          <a:prstGeom prst="ellipse">
+            <a:avLst/>
+          </a:prstGeom>
+          <a:solidFill>
+            <a:srgbClr val="177245"/>
+          </a:solidFill>
+          <a:ln/>
+        </p:spPr>
+      </p:sp>
+      <p:sp>
+        <p:nvSpPr>
+          <p:cNvPr id="13" name="Text 11"/>
+          <p:cNvSpPr/>
+          <p:nvPr/>
+        </p:nvSpPr>
+        <p:spPr>
+          <a:xfrm>
+            <a:off x="6483096" y="1920240"/>
+            <a:ext cx="384048" cy="384048"/>
+          </a:xfrm>
+          <a:prstGeom prst="rect">
+            <a:avLst/>
+          </a:prstGeom>
+          <a:noFill/>
+          <a:ln/>
+        </p:spPr>
+        <p:txBody>
+          <a:bodyPr wrap="square" lIns="0" tIns="0" rIns="0" bIns="0" rtlCol="0" anchor="ctr"/>
+          <a:lstStyle/>
+          <a:p>
+            <a:pPr algn="ctr" indent="0" marL="0">
+              <a:buNone/>
+            </a:pPr>
+            <a:r>
+              <a:rPr lang="en-US" sz="1200" b="1" dirty="0">
+                <a:solidFill>
+                  <a:srgbClr val="E9F3EE"/>
+                </a:solidFill>
+                <a:latin typeface="Courier New" pitchFamily="34" charset="0"/>
+                <a:ea typeface="Courier New" pitchFamily="34" charset="-122"/>
+                <a:cs typeface="Courier New" pitchFamily="34" charset="-120"/>
+              </a:rPr>
+              <a:t>2</a:t>
+            </a:r>
+            <a:endParaRPr lang="en-US" sz="1200" dirty="0"/>
+          </a:p>
+        </p:txBody>
+      </p:sp>
+      <p:sp>
+        <p:nvSpPr>
+          <p:cNvPr id="14" name="Text 12"/>
+          <p:cNvSpPr/>
+          <p:nvPr/>
+        </p:nvSpPr>
+        <p:spPr>
+          <a:xfrm>
+            <a:off x="6995160" y="1892808"/>
+            <a:ext cx="4617720" cy="438912"/>
+          </a:xfrm>
+          <a:prstGeom prst="rect">
+            <a:avLst/>
+          </a:prstGeom>
+          <a:noFill/>
+          <a:ln/>
+        </p:spPr>
+        <p:txBody>
+          <a:bodyPr wrap="square" lIns="0" tIns="0" rIns="0" bIns="0" rtlCol="0" anchor="ctr"/>
+          <a:lstStyle/>
+          <a:p>
+            <a:pPr indent="0" marL="0">
+              <a:buNone/>
+            </a:pPr>
+            <a:r>
+              <a:rPr lang="en-US" sz="1450" b="1" dirty="0">
+                <a:solidFill>
+                  <a:srgbClr val="177245"/>
+                </a:solidFill>
+                <a:latin typeface="Calibri" pitchFamily="34" charset="0"/>
+                <a:ea typeface="Calibri" pitchFamily="34" charset="-122"/>
+                <a:cs typeface="Calibri" pitchFamily="34" charset="-120"/>
+              </a:rPr>
+              <a:t>GET /observability</a:t>
+            </a:r>
+            <a:endParaRPr lang="en-US" sz="1450" dirty="0"/>
+          </a:p>
+        </p:txBody>
+      </p:sp>
+      <p:sp>
+        <p:nvSpPr>
+          <p:cNvPr id="15" name="Text 13"/>
+          <p:cNvSpPr/>
+          <p:nvPr/>
+        </p:nvSpPr>
+        <p:spPr>
+          <a:xfrm>
+            <a:off x="6483096" y="2423160"/>
+            <a:ext cx="5129784" cy="621792"/>
+          </a:xfrm>
+          <a:prstGeom prst="rect">
+            <a:avLst/>
+          </a:prstGeom>
+          <a:noFill/>
+          <a:ln/>
+        </p:spPr>
+        <p:txBody>
+          <a:bodyPr wrap="square" lIns="0" tIns="0" rIns="0" bIns="0" rtlCol="0" anchor="t"/>
+          <a:lstStyle/>
+          <a:p>
+            <a:pPr indent="0" marL="0">
+              <a:buNone/>
+            </a:pPr>
+            <a:r>
+              <a:rPr lang="en-US" sz="1200" dirty="0">
+                <a:solidFill>
+                  <a:srgbClr val="1B1D23"/>
+                </a:solidFill>
+                <a:latin typeface="Calibri" pitchFamily="34" charset="0"/>
+                <a:ea typeface="Calibri" pitchFamily="34" charset="-122"/>
+                <a:cs typeface="Calibri" pitchFamily="34" charset="-120"/>
+              </a:rPr>
+              <a:t>ті самі цифри + cache-hit і fallback</a:t>
+            </a:r>
+            <a:endParaRPr lang="en-US" sz="1200" dirty="0"/>
+          </a:p>
+        </p:txBody>
+      </p:sp>
+      <p:sp>
+        <p:nvSpPr>
+          <p:cNvPr id="16" name="Shape 14"/>
+          <p:cNvSpPr/>
+          <p:nvPr/>
+        </p:nvSpPr>
+        <p:spPr>
+          <a:xfrm>
+            <a:off x="566928" y="3383280"/>
+            <a:ext cx="5532120" cy="1463040"/>
+          </a:xfrm>
+          <a:prstGeom prst="roundRect">
+            <a:avLst>
+              <a:gd name="adj" fmla="val 7500"/>
+            </a:avLst>
+          </a:prstGeom>
+          <a:solidFill>
+            <a:srgbClr val="E9F3EE"/>
+          </a:solidFill>
+          <a:ln/>
+        </p:spPr>
+      </p:sp>
+      <p:sp>
+        <p:nvSpPr>
+          <p:cNvPr id="17" name="Shape 15"/>
+          <p:cNvSpPr/>
+          <p:nvPr/>
+        </p:nvSpPr>
+        <p:spPr>
+          <a:xfrm>
+            <a:off x="768096" y="3566160"/>
+            <a:ext cx="384048" cy="384048"/>
+          </a:xfrm>
+          <a:prstGeom prst="ellipse">
+            <a:avLst/>
+          </a:prstGeom>
+          <a:solidFill>
+            <a:srgbClr val="177245"/>
+          </a:solidFill>
+          <a:ln/>
+        </p:spPr>
+      </p:sp>
+      <p:sp>
+        <p:nvSpPr>
+          <p:cNvPr id="18" name="Text 16"/>
+          <p:cNvSpPr/>
+          <p:nvPr/>
+        </p:nvSpPr>
+        <p:spPr>
+          <a:xfrm>
+            <a:off x="768096" y="3566160"/>
+            <a:ext cx="384048" cy="384048"/>
+          </a:xfrm>
+          <a:prstGeom prst="rect">
+            <a:avLst/>
+          </a:prstGeom>
+          <a:noFill/>
+          <a:ln/>
+        </p:spPr>
+        <p:txBody>
+          <a:bodyPr wrap="square" lIns="0" tIns="0" rIns="0" bIns="0" rtlCol="0" anchor="ctr"/>
+          <a:lstStyle/>
+          <a:p>
+            <a:pPr algn="ctr" indent="0" marL="0">
+              <a:buNone/>
+            </a:pPr>
+            <a:r>
+              <a:rPr lang="en-US" sz="1200" b="1" dirty="0">
+                <a:solidFill>
+                  <a:srgbClr val="E9F3EE"/>
+                </a:solidFill>
+                <a:latin typeface="Courier New" pitchFamily="34" charset="0"/>
+                <a:ea typeface="Courier New" pitchFamily="34" charset="-122"/>
+                <a:cs typeface="Courier New" pitchFamily="34" charset="-120"/>
+              </a:rPr>
+              <a:t>3</a:t>
+            </a:r>
+            <a:endParaRPr lang="en-US" sz="1200" dirty="0"/>
+          </a:p>
+        </p:txBody>
+      </p:sp>
+      <p:sp>
+        <p:nvSpPr>
+          <p:cNvPr id="19" name="Text 17"/>
+          <p:cNvSpPr/>
+          <p:nvPr/>
+        </p:nvSpPr>
+        <p:spPr>
+          <a:xfrm>
+            <a:off x="1280160" y="3538728"/>
+            <a:ext cx="4617720" cy="438912"/>
+          </a:xfrm>
+          <a:prstGeom prst="rect">
+            <a:avLst/>
+          </a:prstGeom>
+          <a:noFill/>
+          <a:ln/>
+        </p:spPr>
+        <p:txBody>
+          <a:bodyPr wrap="square" lIns="0" tIns="0" rIns="0" bIns="0" rtlCol="0" anchor="ctr"/>
+          <a:lstStyle/>
+          <a:p>
+            <a:pPr indent="0" marL="0">
+              <a:buNone/>
+            </a:pPr>
+            <a:r>
+              <a:rPr lang="en-US" sz="1450" b="1" dirty="0">
+                <a:solidFill>
+                  <a:srgbClr val="177245"/>
+                </a:solidFill>
+                <a:latin typeface="Calibri" pitchFamily="34" charset="0"/>
+                <a:ea typeface="Calibri" pitchFamily="34" charset="-122"/>
+                <a:cs typeface="Calibri" pitchFamily="34" charset="-120"/>
+              </a:rPr>
+              <a:t>консоль: усі шість плиток</a:t>
+            </a:r>
+            <a:endParaRPr lang="en-US" sz="1450" dirty="0"/>
+          </a:p>
+        </p:txBody>
+      </p:sp>
+      <p:sp>
+        <p:nvSpPr>
+          <p:cNvPr id="20" name="Text 18"/>
+          <p:cNvSpPr/>
+          <p:nvPr/>
+        </p:nvSpPr>
+        <p:spPr>
+          <a:xfrm>
+            <a:off x="768096" y="4069080"/>
+            <a:ext cx="5129784" cy="621792"/>
+          </a:xfrm>
+          <a:prstGeom prst="rect">
+            <a:avLst/>
+          </a:prstGeom>
+          <a:noFill/>
+          <a:ln/>
+        </p:spPr>
+        <p:txBody>
+          <a:bodyPr wrap="square" lIns="0" tIns="0" rIns="0" bIns="0" rtlCol="0" anchor="t"/>
+          <a:lstStyle/>
+          <a:p>
+            <a:pPr indent="0" marL="0">
+              <a:buNone/>
+            </a:pPr>
+            <a:r>
+              <a:rPr lang="en-US" sz="1200" dirty="0">
+                <a:solidFill>
+                  <a:srgbClr val="1B1D23"/>
+                </a:solidFill>
+                <a:latin typeface="Calibri" pitchFamily="34" charset="0"/>
+                <a:ea typeface="Calibri" pitchFamily="34" charset="-122"/>
+                <a:cs typeface="Calibri" pitchFamily="34" charset="-120"/>
+              </a:rPr>
+              <a:t>живі, з числами замість «—»</a:t>
+            </a:r>
+            <a:endParaRPr lang="en-US" sz="1200" dirty="0"/>
+          </a:p>
+        </p:txBody>
+      </p:sp>
+      <p:sp>
+        <p:nvSpPr>
+          <p:cNvPr id="21" name="Shape 19"/>
+          <p:cNvSpPr/>
+          <p:nvPr/>
+        </p:nvSpPr>
+        <p:spPr>
+          <a:xfrm>
+            <a:off x="6281928" y="3383280"/>
+            <a:ext cx="5532120" cy="1463040"/>
+          </a:xfrm>
+          <a:prstGeom prst="roundRect">
+            <a:avLst>
+              <a:gd name="adj" fmla="val 7500"/>
+            </a:avLst>
+          </a:prstGeom>
+          <a:solidFill>
+            <a:srgbClr val="F9E9E8"/>
+          </a:solidFill>
+          <a:ln/>
+        </p:spPr>
+      </p:sp>
+      <p:sp>
+        <p:nvSpPr>
+          <p:cNvPr id="22" name="Shape 20"/>
+          <p:cNvSpPr/>
+          <p:nvPr/>
+        </p:nvSpPr>
+        <p:spPr>
+          <a:xfrm>
+            <a:off x="6483096" y="3566160"/>
+            <a:ext cx="384048" cy="384048"/>
+          </a:xfrm>
+          <a:prstGeom prst="ellipse">
+            <a:avLst/>
+          </a:prstGeom>
+          <a:solidFill>
+            <a:srgbClr val="B3261E"/>
+          </a:solidFill>
+          <a:ln/>
+        </p:spPr>
+      </p:sp>
+      <p:sp>
+        <p:nvSpPr>
+          <p:cNvPr id="23" name="Text 21"/>
+          <p:cNvSpPr/>
+          <p:nvPr/>
+        </p:nvSpPr>
+        <p:spPr>
+          <a:xfrm>
+            <a:off x="6483096" y="3566160"/>
+            <a:ext cx="384048" cy="384048"/>
+          </a:xfrm>
+          <a:prstGeom prst="rect">
+            <a:avLst/>
+          </a:prstGeom>
+          <a:noFill/>
+          <a:ln/>
+        </p:spPr>
+        <p:txBody>
+          <a:bodyPr wrap="square" lIns="0" tIns="0" rIns="0" bIns="0" rtlCol="0" anchor="ctr"/>
+          <a:lstStyle/>
+          <a:p>
+            <a:pPr algn="ctr" indent="0" marL="0">
+              <a:buNone/>
+            </a:pPr>
+            <a:r>
+              <a:rPr lang="en-US" sz="1200" b="1" dirty="0">
+                <a:solidFill>
+                  <a:srgbClr val="F9E9E8"/>
+                </a:solidFill>
+                <a:latin typeface="Courier New" pitchFamily="34" charset="0"/>
+                <a:ea typeface="Courier New" pitchFamily="34" charset="-122"/>
+                <a:cs typeface="Courier New" pitchFamily="34" charset="-120"/>
+              </a:rPr>
+              <a:t>4</a:t>
+            </a:r>
+            <a:endParaRPr lang="en-US" sz="1200" dirty="0"/>
+          </a:p>
+        </p:txBody>
+      </p:sp>
+      <p:sp>
+        <p:nvSpPr>
+          <p:cNvPr id="24" name="Text 22"/>
+          <p:cNvSpPr/>
+          <p:nvPr/>
+        </p:nvSpPr>
+        <p:spPr>
+          <a:xfrm>
+            <a:off x="6995160" y="3538728"/>
+            <a:ext cx="4617720" cy="438912"/>
+          </a:xfrm>
+          <a:prstGeom prst="rect">
+            <a:avLst/>
+          </a:prstGeom>
+          <a:noFill/>
+          <a:ln/>
+        </p:spPr>
+        <p:txBody>
+          <a:bodyPr wrap="square" lIns="0" tIns="0" rIns="0" bIns="0" rtlCol="0" anchor="ctr"/>
+          <a:lstStyle/>
+          <a:p>
+            <a:pPr indent="0" marL="0">
+              <a:buNone/>
+            </a:pPr>
+            <a:r>
+              <a:rPr lang="en-US" sz="1450" b="1" dirty="0">
+                <a:solidFill>
+                  <a:srgbClr val="B3261E"/>
+                </a:solidFill>
+                <a:latin typeface="Calibri" pitchFamily="34" charset="0"/>
+                <a:ea typeface="Calibri" pitchFamily="34" charset="-122"/>
+                <a:cs typeface="Calibri" pitchFamily="34" charset="-120"/>
+              </a:rPr>
+              <a:t>«детектив»: серія __fail_503</a:t>
+            </a:r>
+            <a:endParaRPr lang="en-US" sz="1450" dirty="0"/>
+          </a:p>
+        </p:txBody>
+      </p:sp>
+      <p:sp>
+        <p:nvSpPr>
+          <p:cNvPr id="25" name="Text 23"/>
+          <p:cNvSpPr/>
+          <p:nvPr/>
+        </p:nvSpPr>
+        <p:spPr>
+          <a:xfrm>
+            <a:off x="6483096" y="4069080"/>
+            <a:ext cx="5129784" cy="621792"/>
+          </a:xfrm>
+          <a:prstGeom prst="rect">
+            <a:avLst/>
+          </a:prstGeom>
+          <a:noFill/>
+          <a:ln/>
+        </p:spPr>
+        <p:txBody>
+          <a:bodyPr wrap="square" lIns="0" tIns="0" rIns="0" bIns="0" rtlCol="0" anchor="t"/>
+          <a:lstStyle/>
+          <a:p>
+            <a:pPr indent="0" marL="0">
+              <a:buNone/>
+            </a:pPr>
+            <a:r>
+              <a:rPr lang="en-US" sz="1200" dirty="0">
+                <a:solidFill>
+                  <a:srgbClr val="1B1D23"/>
+                </a:solidFill>
+                <a:latin typeface="Calibri" pitchFamily="34" charset="0"/>
+                <a:ea typeface="Calibri" pitchFamily="34" charset="-122"/>
+                <a:cs typeface="Calibri" pitchFamily="34" charset="-120"/>
+              </a:rPr>
+              <a:t>fallback і error rate ростуть, користувач не бачить 500</a:t>
+            </a:r>
+            <a:endParaRPr lang="en-US" sz="1200" dirty="0"/>
+          </a:p>
+        </p:txBody>
+      </p:sp>
+      <p:sp>
+        <p:nvSpPr>
+          <p:cNvPr id="26" name="Shape 24"/>
+          <p:cNvSpPr/>
+          <p:nvPr/>
+        </p:nvSpPr>
+        <p:spPr>
+          <a:xfrm>
+            <a:off x="566928" y="5074920"/>
+            <a:ext cx="11064240" cy="1051560"/>
+          </a:xfrm>
+          <a:prstGeom prst="roundRect">
+            <a:avLst>
+              <a:gd name="adj" fmla="val 10435"/>
             </a:avLst>
           </a:prstGeom>
           <a:solidFill>
@@ -14925,14 +15717,14 @@
       </p:sp>
       <p:sp>
         <p:nvSpPr>
-          <p:cNvPr id="10" name="Text 8"/>
-          <p:cNvSpPr/>
-          <p:nvPr/>
-        </p:nvSpPr>
-        <p:spPr>
-          <a:xfrm>
-            <a:off x="4517136" y="1892808"/>
-            <a:ext cx="3163824" cy="438912"/>
+          <p:cNvPr id="27" name="Text 25"/>
+          <p:cNvSpPr/>
+          <p:nvPr/>
+        </p:nvSpPr>
+        <p:spPr>
+          <a:xfrm>
+            <a:off x="786384" y="5202936"/>
+            <a:ext cx="10625328" cy="219456"/>
           </a:xfrm>
           <a:prstGeom prst="rect">
             <a:avLst/>
@@ -14948,215 +15740,54 @@
               <a:buNone/>
             </a:pPr>
             <a:r>
-              <a:rPr lang="en-US" sz="1450" b="1" dirty="0">
+              <a:rPr lang="en-US" sz="950" b="1" spc="150" kern="0" dirty="0">
                 <a:solidFill>
                   <a:srgbClr val="4038C4"/>
+                </a:solidFill>
+                <a:latin typeface="Courier New" pitchFamily="34" charset="0"/>
+                <a:ea typeface="Courier New" pitchFamily="34" charset="-122"/>
+                <a:cs typeface="Courier New" pitchFamily="34" charset="-120"/>
+              </a:rPr>
+              <a:t>НАВІЩО</a:t>
+            </a:r>
+            <a:endParaRPr lang="en-US" sz="950" dirty="0"/>
+          </a:p>
+        </p:txBody>
+      </p:sp>
+      <p:sp>
+        <p:nvSpPr>
+          <p:cNvPr id="28" name="Text 26"/>
+          <p:cNvSpPr/>
+          <p:nvPr/>
+        </p:nvSpPr>
+        <p:spPr>
+          <a:xfrm>
+            <a:off x="786384" y="5458968"/>
+            <a:ext cx="10625328" cy="539496"/>
+          </a:xfrm>
+          <a:prstGeom prst="rect">
+            <a:avLst/>
+          </a:prstGeom>
+          <a:noFill/>
+          <a:ln/>
+        </p:spPr>
+        <p:txBody>
+          <a:bodyPr wrap="square" lIns="0" tIns="0" rIns="0" bIns="0" rtlCol="0" anchor="ctr"/>
+          <a:lstStyle/>
+          <a:p>
+            <a:pPr indent="0" marL="0">
+              <a:buNone/>
+            </a:pPr>
+            <a:r>
+              <a:rPr lang="en-US" sz="1300" dirty="0">
+                <a:solidFill>
+                  <a:srgbClr val="1B1D23"/>
                 </a:solidFill>
                 <a:latin typeface="Calibri" pitchFamily="34" charset="0"/>
                 <a:ea typeface="Calibri" pitchFamily="34" charset="-122"/>
                 <a:cs typeface="Calibri" pitchFamily="34" charset="-120"/>
               </a:rPr>
-              <a:t>Плитки відповідають на питання</a:t>
-            </a:r>
-            <a:endParaRPr lang="en-US" sz="1450" dirty="0"/>
-          </a:p>
-        </p:txBody>
-      </p:sp>
-      <p:sp>
-        <p:nvSpPr>
-          <p:cNvPr id="11" name="Text 9"/>
-          <p:cNvSpPr/>
-          <p:nvPr/>
-        </p:nvSpPr>
-        <p:spPr>
-          <a:xfrm>
-            <a:off x="4517136" y="2423160"/>
-            <a:ext cx="3163824" cy="987552"/>
-          </a:xfrm>
-          <a:prstGeom prst="rect">
-            <a:avLst/>
-          </a:prstGeom>
-          <a:noFill/>
-          <a:ln/>
-        </p:spPr>
-        <p:txBody>
-          <a:bodyPr wrap="square" lIns="0" tIns="0" rIns="0" bIns="0" rtlCol="0" anchor="t"/>
-          <a:lstStyle/>
-          <a:p>
-            <a:pPr indent="0" marL="0">
-              <a:buNone/>
-            </a:pPr>
-            <a:r>
-              <a:rPr lang="en-US" sz="1200" dirty="0">
-                <a:solidFill>
-                  <a:srgbClr val="1B1D23"/>
-                </a:solidFill>
-                <a:latin typeface="Calibri" pitchFamily="34" charset="0"/>
-                <a:ea typeface="Calibri" pitchFamily="34" charset="-122"/>
-                <a:cs typeface="Calibri" pitchFamily="34" charset="-120"/>
-              </a:rPr>
-              <a:t>шість цифр, кожна з приводу, а не для краси</a:t>
-            </a:r>
-            <a:endParaRPr lang="en-US" sz="1200" dirty="0"/>
-          </a:p>
-        </p:txBody>
-      </p:sp>
-      <p:sp>
-        <p:nvSpPr>
-          <p:cNvPr id="12" name="Shape 10"/>
-          <p:cNvSpPr/>
-          <p:nvPr/>
-        </p:nvSpPr>
-        <p:spPr>
-          <a:xfrm>
-            <a:off x="8065008" y="1737360"/>
-            <a:ext cx="3566160" cy="1828800"/>
-          </a:xfrm>
-          <a:prstGeom prst="roundRect">
-            <a:avLst>
-              <a:gd name="adj" fmla="val 6000"/>
-            </a:avLst>
-          </a:prstGeom>
-          <a:solidFill>
-            <a:srgbClr val="F9E9E8"/>
-          </a:solidFill>
-          <a:ln/>
-        </p:spPr>
-      </p:sp>
-      <p:sp>
-        <p:nvSpPr>
-          <p:cNvPr id="13" name="Text 11"/>
-          <p:cNvSpPr/>
-          <p:nvPr/>
-        </p:nvSpPr>
-        <p:spPr>
-          <a:xfrm>
-            <a:off x="8266176" y="1892808"/>
-            <a:ext cx="3163824" cy="438912"/>
-          </a:xfrm>
-          <a:prstGeom prst="rect">
-            <a:avLst/>
-          </a:prstGeom>
-          <a:noFill/>
-          <a:ln/>
-        </p:spPr>
-        <p:txBody>
-          <a:bodyPr wrap="square" lIns="0" tIns="0" rIns="0" bIns="0" rtlCol="0" anchor="ctr"/>
-          <a:lstStyle/>
-          <a:p>
-            <a:pPr indent="0" marL="0">
-              <a:buNone/>
-            </a:pPr>
-            <a:r>
-              <a:rPr lang="en-US" sz="1450" b="1" dirty="0">
-                <a:solidFill>
-                  <a:srgbClr val="B3261E"/>
-                </a:solidFill>
-                <a:latin typeface="Calibri" pitchFamily="34" charset="0"/>
-                <a:ea typeface="Calibri" pitchFamily="34" charset="-122"/>
-                <a:cs typeface="Calibri" pitchFamily="34" charset="-120"/>
-              </a:rPr>
-              <a:t>Тихий інцидент видно</a:t>
-            </a:r>
-            <a:endParaRPr lang="en-US" sz="1450" dirty="0"/>
-          </a:p>
-        </p:txBody>
-      </p:sp>
-      <p:sp>
-        <p:nvSpPr>
-          <p:cNvPr id="14" name="Text 12"/>
-          <p:cNvSpPr/>
-          <p:nvPr/>
-        </p:nvSpPr>
-        <p:spPr>
-          <a:xfrm>
-            <a:off x="8266176" y="2423160"/>
-            <a:ext cx="3163824" cy="987552"/>
-          </a:xfrm>
-          <a:prstGeom prst="rect">
-            <a:avLst/>
-          </a:prstGeom>
-          <a:noFill/>
-          <a:ln/>
-        </p:spPr>
-        <p:txBody>
-          <a:bodyPr wrap="square" lIns="0" tIns="0" rIns="0" bIns="0" rtlCol="0" anchor="t"/>
-          <a:lstStyle/>
-          <a:p>
-            <a:pPr indent="0" marL="0">
-              <a:buNone/>
-            </a:pPr>
-            <a:r>
-              <a:rPr lang="en-US" sz="1200" dirty="0">
-                <a:solidFill>
-                  <a:srgbClr val="1B1D23"/>
-                </a:solidFill>
-                <a:latin typeface="Calibri" pitchFamily="34" charset="0"/>
-                <a:ea typeface="Calibri" pitchFamily="34" charset="-122"/>
-                <a:cs typeface="Calibri" pitchFamily="34" charset="-120"/>
-              </a:rPr>
-              <a:t>fallback і error rate ростуть, поки uptime зелений</a:t>
-            </a:r>
-            <a:endParaRPr lang="en-US" sz="1200" dirty="0"/>
-          </a:p>
-        </p:txBody>
-      </p:sp>
-      <p:sp>
-        <p:nvSpPr>
-          <p:cNvPr id="15" name="Shape 13"/>
-          <p:cNvSpPr/>
-          <p:nvPr/>
-        </p:nvSpPr>
-        <p:spPr>
-          <a:xfrm>
-            <a:off x="566928" y="3977640"/>
-            <a:ext cx="11064240" cy="1234440"/>
-          </a:xfrm>
-          <a:prstGeom prst="roundRect">
-            <a:avLst>
-              <a:gd name="adj" fmla="val 8889"/>
-            </a:avLst>
-          </a:prstGeom>
-          <a:solidFill>
-            <a:srgbClr val="FFFFFF"/>
-          </a:solidFill>
-          <a:ln/>
-        </p:spPr>
-      </p:sp>
-      <p:sp>
-        <p:nvSpPr>
-          <p:cNvPr id="16" name="Text 14"/>
-          <p:cNvSpPr/>
-          <p:nvPr/>
-        </p:nvSpPr>
-        <p:spPr>
-          <a:xfrm>
-            <a:off x="786384" y="4123944"/>
-            <a:ext cx="10625328" cy="941832"/>
-          </a:xfrm>
-          <a:prstGeom prst="rect">
-            <a:avLst/>
-          </a:prstGeom>
-          <a:noFill/>
-          <a:ln/>
-        </p:spPr>
-        <p:txBody>
-          <a:bodyPr wrap="square" lIns="0" tIns="0" rIns="0" bIns="0" rtlCol="0" anchor="ctr"/>
-          <a:lstStyle/>
-          <a:p>
-            <a:pPr indent="0" marL="0">
-              <a:buNone/>
-            </a:pPr>
-            <a:r>
-              <a:rPr lang="en-US" sz="1300" dirty="0">
-                <a:solidFill>
-                  <a:srgbClr val="1B1D23"/>
-                </a:solidFill>
-                <a:latin typeface="Calibri" pitchFamily="34" charset="0"/>
-                <a:ea typeface="Calibri" pitchFamily="34" charset="-122"/>
-                <a:cs typeface="Calibri" pitchFamily="34" charset="-120"/>
-              </a:rPr>
-              <a:t>Видимість є. Наступного уроку до неї додається судження: не «скільки запитів», а «чи стали відповіді гіршими» — і це вже перевірки якості.</a:t>
+              <a:t>Побачити, що моніторинг LLM-системи — це SQL по власному лозі плюс кілька лічильників. І навчитися впізнавати тихий інцидент — той, якого не видно в жодному uptime.</a:t>
             </a:r>
             <a:endParaRPr lang="en-US" sz="1300" dirty="0"/>
           </a:p>
@@ -15275,7 +15906,7 @@
                 <a:ea typeface="Calibri" pitchFamily="34" charset="-122"/>
                 <a:cs typeface="Calibri" pitchFamily="34" charset="-120"/>
               </a:rPr>
-              <a:t>Перевір себе</a:t>
+              <a:t>Лабораторна: чотири кроки + опційний</a:t>
             </a:r>
             <a:endParaRPr lang="en-US" sz="2500" dirty="0"/>
           </a:p>
@@ -15298,7 +15929,7 @@
             </a:avLst>
           </a:prstGeom>
           <a:solidFill>
-            <a:srgbClr val="F8F0E2"/>
+            <a:srgbClr val="E9F3EE"/>
           </a:solidFill>
           <a:ln/>
         </p:spPr>
@@ -15330,13 +15961,13 @@
             <a:r>
               <a:rPr lang="en-US" sz="900" b="1" spc="100" kern="0" dirty="0">
                 <a:solidFill>
-                  <a:srgbClr val="9A5B12"/>
+                  <a:srgbClr val="177245"/>
                 </a:solidFill>
                 <a:latin typeface="Courier New" pitchFamily="34" charset="0"/>
                 <a:ea typeface="Courier New" pitchFamily="34" charset="-122"/>
                 <a:cs typeface="Courier New" pitchFamily="34" charset="-120"/>
               </a:rPr>
-              <a:t>РЕФЛЕКСІЯ</a:t>
+              <a:t>ПРАКТИКА</a:t>
             </a:r>
             <a:endParaRPr lang="en-US" sz="900" dirty="0"/>
           </a:p>
@@ -15389,51 +16020,56 @@
         </p:nvSpPr>
         <p:spPr>
           <a:xfrm>
-            <a:off x="566928" y="1783080"/>
-            <a:ext cx="11064240" cy="1874520"/>
-          </a:xfrm>
-          <a:prstGeom prst="roundRect">
-            <a:avLst>
-              <a:gd name="adj" fmla="val 5854"/>
-            </a:avLst>
+            <a:off x="566928" y="1828800"/>
+            <a:ext cx="457200" cy="457200"/>
+          </a:xfrm>
+          <a:prstGeom prst="ellipse">
+            <a:avLst/>
           </a:prstGeom>
           <a:solidFill>
-            <a:srgbClr val="FFFFFF"/>
+            <a:srgbClr val="4038C4"/>
           </a:solidFill>
-          <a:ln w="12700">
-            <a:solidFill>
-              <a:srgbClr val="E4E6EC"/>
-            </a:solidFill>
-            <a:prstDash val="solid"/>
-          </a:ln>
-        </p:spPr>
-      </p:sp>
-      <p:sp>
-        <p:nvSpPr>
-          <p:cNvPr id="7" name="Shape 5"/>
-          <p:cNvSpPr/>
-          <p:nvPr/>
-        </p:nvSpPr>
-        <p:spPr>
-          <a:xfrm>
-            <a:off x="978408" y="2157984"/>
-            <a:ext cx="256032" cy="256032"/>
-          </a:xfrm>
-          <a:prstGeom prst="roundRect">
-            <a:avLst>
-              <a:gd name="adj" fmla="val 21429"/>
-            </a:avLst>
-          </a:prstGeom>
-          <a:solidFill>
-            <a:srgbClr val="E9F3EE"/>
-          </a:solidFill>
-          <a:ln w="12700">
-            <a:solidFill>
-              <a:srgbClr val="177245"/>
-            </a:solidFill>
-            <a:prstDash val="solid"/>
-          </a:ln>
-        </p:spPr>
+          <a:ln/>
+        </p:spPr>
+      </p:sp>
+      <p:sp>
+        <p:nvSpPr>
+          <p:cNvPr id="7" name="Text 5"/>
+          <p:cNvSpPr/>
+          <p:nvPr/>
+        </p:nvSpPr>
+        <p:spPr>
+          <a:xfrm>
+            <a:off x="566928" y="1828800"/>
+            <a:ext cx="457200" cy="457200"/>
+          </a:xfrm>
+          <a:prstGeom prst="rect">
+            <a:avLst/>
+          </a:prstGeom>
+          <a:noFill/>
+          <a:ln/>
+        </p:spPr>
+        <p:txBody>
+          <a:bodyPr wrap="square" lIns="0" tIns="0" rIns="0" bIns="0" rtlCol="0" anchor="ctr"/>
+          <a:lstStyle/>
+          <a:p>
+            <a:pPr algn="ctr" indent="0" marL="0">
+              <a:buNone/>
+            </a:pPr>
+            <a:r>
+              <a:rPr lang="en-US" sz="1300" b="1" dirty="0">
+                <a:solidFill>
+                  <a:srgbClr val="FFFFFF"/>
+                </a:solidFill>
+                <a:latin typeface="Courier New" pitchFamily="34" charset="0"/>
+                <a:ea typeface="Courier New" pitchFamily="34" charset="-122"/>
+                <a:cs typeface="Courier New" pitchFamily="34" charset="-120"/>
+              </a:rPr>
+              <a:t>1</a:t>
+            </a:r>
+            <a:endParaRPr lang="en-US" sz="1300" dirty="0"/>
+          </a:p>
+        </p:txBody>
       </p:sp>
       <p:sp>
         <p:nvSpPr>
@@ -15443,102 +16079,109 @@
         </p:nvSpPr>
         <p:spPr>
           <a:xfrm>
-            <a:off x="978408" y="2157984"/>
-            <a:ext cx="256032" cy="256032"/>
-          </a:xfrm>
-          <a:prstGeom prst="rect">
-            <a:avLst/>
-          </a:prstGeom>
-          <a:noFill/>
-          <a:ln/>
-        </p:spPr>
-        <p:txBody>
-          <a:bodyPr wrap="square" lIns="0" tIns="0" rIns="0" bIns="0" rtlCol="0" anchor="ctr"/>
-          <a:lstStyle/>
-          <a:p>
-            <a:pPr algn="ctr" indent="0" marL="0">
-              <a:buNone/>
-            </a:pPr>
-            <a:r>
-              <a:rPr lang="en-US" sz="1000" b="1" dirty="0">
-                <a:solidFill>
-                  <a:srgbClr val="177245"/>
+            <a:off x="1188720" y="1828800"/>
+            <a:ext cx="10424160" cy="457200"/>
+          </a:xfrm>
+          <a:prstGeom prst="rect">
+            <a:avLst/>
+          </a:prstGeom>
+          <a:noFill/>
+          <a:ln/>
+        </p:spPr>
+        <p:txBody>
+          <a:bodyPr wrap="square" lIns="0" tIns="0" rIns="0" bIns="0" rtlCol="0" anchor="ctr"/>
+          <a:lstStyle/>
+          <a:p>
+            <a:pPr indent="0" marL="0">
+              <a:buNone/>
+            </a:pPr>
+            <a:r>
+              <a:rPr lang="en-US" sz="1400" b="1" dirty="0">
+                <a:solidFill>
+                  <a:srgbClr val="1B1D23"/>
                 </a:solidFill>
                 <a:latin typeface="Calibri" pitchFamily="34" charset="0"/>
                 <a:ea typeface="Calibri" pitchFamily="34" charset="-122"/>
                 <a:cs typeface="Calibri" pitchFamily="34" charset="-120"/>
               </a:rPr>
-              <a:t>✓</a:t>
-            </a:r>
-            <a:endParaRPr lang="en-US" sz="1000" dirty="0"/>
-          </a:p>
-        </p:txBody>
-      </p:sp>
-      <p:sp>
-        <p:nvSpPr>
-          <p:cNvPr id="9" name="Text 7"/>
-          <p:cNvSpPr/>
-          <p:nvPr/>
-        </p:nvSpPr>
-        <p:spPr>
-          <a:xfrm>
-            <a:off x="1362456" y="2103120"/>
-            <a:ext cx="4617720" cy="384048"/>
-          </a:xfrm>
-          <a:prstGeom prst="rect">
-            <a:avLst/>
-          </a:prstGeom>
-          <a:noFill/>
-          <a:ln/>
-        </p:spPr>
-        <p:txBody>
-          <a:bodyPr wrap="square" lIns="0" tIns="0" rIns="0" bIns="0" rtlCol="0" anchor="ctr"/>
-          <a:lstStyle/>
-          <a:p>
+              <a:t>Порахувати руками  </a:t>
+            </a:r>
             <a:pPr indent="0" marL="0">
               <a:buNone/>
             </a:pPr>
             <a:r>
-              <a:rPr lang="en-US" sz="1250" dirty="0">
-                <a:solidFill>
-                  <a:srgbClr val="1B1D23"/>
+              <a:rPr lang="en-US" sz="1200" dirty="0">
+                <a:solidFill>
+                  <a:srgbClr val="565C6B"/>
                 </a:solidFill>
                 <a:latin typeface="Calibri" pitchFamily="34" charset="0"/>
                 <a:ea typeface="Calibri" pitchFamily="34" charset="-122"/>
                 <a:cs typeface="Calibri" pitchFamily="34" charset="-120"/>
               </a:rPr>
-              <a:t>усі шість плиток живі й звірені з SQL</a:t>
-            </a:r>
-            <a:endParaRPr lang="en-US" sz="1250" dirty="0"/>
-          </a:p>
-        </p:txBody>
-      </p:sp>
-      <p:sp>
-        <p:nvSpPr>
-          <p:cNvPr id="10" name="Shape 8"/>
-          <p:cNvSpPr/>
-          <p:nvPr/>
-        </p:nvSpPr>
-        <p:spPr>
-          <a:xfrm>
-            <a:off x="978408" y="2724912"/>
-            <a:ext cx="256032" cy="256032"/>
-          </a:xfrm>
-          <a:prstGeom prst="roundRect">
-            <a:avLst>
-              <a:gd name="adj" fmla="val 21429"/>
-            </a:avLst>
+              <a:t>psql: count, p95, error rate по сьогоднішньому дню</a:t>
+            </a:r>
+            <a:endParaRPr lang="en-US" sz="1400" dirty="0"/>
+          </a:p>
+        </p:txBody>
+      </p:sp>
+      <p:sp>
+        <p:nvSpPr>
+          <p:cNvPr id="9" name="Shape 7"/>
+          <p:cNvSpPr/>
+          <p:nvPr/>
+        </p:nvSpPr>
+        <p:spPr>
+          <a:xfrm>
+            <a:off x="566928" y="2670048"/>
+            <a:ext cx="457200" cy="457200"/>
+          </a:xfrm>
+          <a:prstGeom prst="ellipse">
+            <a:avLst/>
           </a:prstGeom>
           <a:solidFill>
-            <a:srgbClr val="E9F3EE"/>
+            <a:srgbClr val="4038C4"/>
           </a:solidFill>
-          <a:ln w="12700">
-            <a:solidFill>
-              <a:srgbClr val="177245"/>
-            </a:solidFill>
-            <a:prstDash val="solid"/>
-          </a:ln>
-        </p:spPr>
+          <a:ln/>
+        </p:spPr>
+      </p:sp>
+      <p:sp>
+        <p:nvSpPr>
+          <p:cNvPr id="10" name="Text 8"/>
+          <p:cNvSpPr/>
+          <p:nvPr/>
+        </p:nvSpPr>
+        <p:spPr>
+          <a:xfrm>
+            <a:off x="566928" y="2670048"/>
+            <a:ext cx="457200" cy="457200"/>
+          </a:xfrm>
+          <a:prstGeom prst="rect">
+            <a:avLst/>
+          </a:prstGeom>
+          <a:noFill/>
+          <a:ln/>
+        </p:spPr>
+        <p:txBody>
+          <a:bodyPr wrap="square" lIns="0" tIns="0" rIns="0" bIns="0" rtlCol="0" anchor="ctr"/>
+          <a:lstStyle/>
+          <a:p>
+            <a:pPr algn="ctr" indent="0" marL="0">
+              <a:buNone/>
+            </a:pPr>
+            <a:r>
+              <a:rPr lang="en-US" sz="1300" b="1" dirty="0">
+                <a:solidFill>
+                  <a:srgbClr val="FFFFFF"/>
+                </a:solidFill>
+                <a:latin typeface="Courier New" pitchFamily="34" charset="0"/>
+                <a:ea typeface="Courier New" pitchFamily="34" charset="-122"/>
+                <a:cs typeface="Courier New" pitchFamily="34" charset="-120"/>
+              </a:rPr>
+              <a:t>2</a:t>
+            </a:r>
+            <a:endParaRPr lang="en-US" sz="1300" dirty="0"/>
+          </a:p>
+        </p:txBody>
       </p:sp>
       <p:sp>
         <p:nvSpPr>
@@ -15548,102 +16191,109 @@
         </p:nvSpPr>
         <p:spPr>
           <a:xfrm>
-            <a:off x="978408" y="2724912"/>
-            <a:ext cx="256032" cy="256032"/>
-          </a:xfrm>
-          <a:prstGeom prst="rect">
-            <a:avLst/>
-          </a:prstGeom>
-          <a:noFill/>
-          <a:ln/>
-        </p:spPr>
-        <p:txBody>
-          <a:bodyPr wrap="square" lIns="0" tIns="0" rIns="0" bIns="0" rtlCol="0" anchor="ctr"/>
-          <a:lstStyle/>
-          <a:p>
-            <a:pPr algn="ctr" indent="0" marL="0">
-              <a:buNone/>
-            </a:pPr>
-            <a:r>
-              <a:rPr lang="en-US" sz="1000" b="1" dirty="0">
-                <a:solidFill>
-                  <a:srgbClr val="177245"/>
+            <a:off x="1188720" y="2670048"/>
+            <a:ext cx="10424160" cy="457200"/>
+          </a:xfrm>
+          <a:prstGeom prst="rect">
+            <a:avLst/>
+          </a:prstGeom>
+          <a:noFill/>
+          <a:ln/>
+        </p:spPr>
+        <p:txBody>
+          <a:bodyPr wrap="square" lIns="0" tIns="0" rIns="0" bIns="0" rtlCol="0" anchor="ctr"/>
+          <a:lstStyle/>
+          <a:p>
+            <a:pPr indent="0" marL="0">
+              <a:buNone/>
+            </a:pPr>
+            <a:r>
+              <a:rPr lang="en-US" sz="1400" b="1" dirty="0">
+                <a:solidFill>
+                  <a:srgbClr val="1B1D23"/>
                 </a:solidFill>
                 <a:latin typeface="Calibri" pitchFamily="34" charset="0"/>
                 <a:ea typeface="Calibri" pitchFamily="34" charset="-122"/>
                 <a:cs typeface="Calibri" pitchFamily="34" charset="-120"/>
               </a:rPr>
-              <a:t>✓</a:t>
-            </a:r>
-            <a:endParaRPr lang="en-US" sz="1000" dirty="0"/>
-          </a:p>
-        </p:txBody>
-      </p:sp>
-      <p:sp>
-        <p:nvSpPr>
-          <p:cNvPr id="12" name="Text 10"/>
-          <p:cNvSpPr/>
-          <p:nvPr/>
-        </p:nvSpPr>
-        <p:spPr>
-          <a:xfrm>
-            <a:off x="1362456" y="2670048"/>
-            <a:ext cx="4617720" cy="384048"/>
-          </a:xfrm>
-          <a:prstGeom prst="rect">
-            <a:avLst/>
-          </a:prstGeom>
-          <a:noFill/>
-          <a:ln/>
-        </p:spPr>
-        <p:txBody>
-          <a:bodyPr wrap="square" lIns="0" tIns="0" rIns="0" bIns="0" rtlCol="0" anchor="ctr"/>
-          <a:lstStyle/>
-          <a:p>
+              <a:t>Оживити /observability  </a:t>
+            </a:r>
             <a:pPr indent="0" marL="0">
               <a:buNone/>
             </a:pPr>
             <a:r>
-              <a:rPr lang="en-US" sz="1250" dirty="0">
-                <a:solidFill>
-                  <a:srgbClr val="1B1D23"/>
+              <a:rPr lang="en-US" sz="1200" dirty="0">
+                <a:solidFill>
+                  <a:srgbClr val="565C6B"/>
                 </a:solidFill>
                 <a:latin typeface="Calibri" pitchFamily="34" charset="0"/>
                 <a:ea typeface="Calibri" pitchFamily="34" charset="-122"/>
                 <a:cs typeface="Calibri" pitchFamily="34" charset="-120"/>
               </a:rPr>
-              <a:t>поясню, чому алерти на p95, а не на середнє</a:t>
-            </a:r>
-            <a:endParaRPr lang="en-US" sz="1250" dirty="0"/>
-          </a:p>
-        </p:txBody>
-      </p:sp>
-      <p:sp>
-        <p:nvSpPr>
-          <p:cNvPr id="13" name="Shape 11"/>
-          <p:cNvSpPr/>
-          <p:nvPr/>
-        </p:nvSpPr>
-        <p:spPr>
-          <a:xfrm>
-            <a:off x="6144768" y="2157984"/>
-            <a:ext cx="256032" cy="256032"/>
-          </a:xfrm>
-          <a:prstGeom prst="roundRect">
-            <a:avLst>
-              <a:gd name="adj" fmla="val 21429"/>
-            </a:avLst>
+              <a:t>SQL-агрегати + лічильники в один ендпоінт</a:t>
+            </a:r>
+            <a:endParaRPr lang="en-US" sz="1400" dirty="0"/>
+          </a:p>
+        </p:txBody>
+      </p:sp>
+      <p:sp>
+        <p:nvSpPr>
+          <p:cNvPr id="12" name="Shape 10"/>
+          <p:cNvSpPr/>
+          <p:nvPr/>
+        </p:nvSpPr>
+        <p:spPr>
+          <a:xfrm>
+            <a:off x="566928" y="3511296"/>
+            <a:ext cx="457200" cy="457200"/>
+          </a:xfrm>
+          <a:prstGeom prst="ellipse">
+            <a:avLst/>
           </a:prstGeom>
           <a:solidFill>
-            <a:srgbClr val="E9F3EE"/>
+            <a:srgbClr val="4038C4"/>
           </a:solidFill>
-          <a:ln w="12700">
-            <a:solidFill>
-              <a:srgbClr val="177245"/>
-            </a:solidFill>
-            <a:prstDash val="solid"/>
-          </a:ln>
-        </p:spPr>
+          <a:ln/>
+        </p:spPr>
+      </p:sp>
+      <p:sp>
+        <p:nvSpPr>
+          <p:cNvPr id="13" name="Text 11"/>
+          <p:cNvSpPr/>
+          <p:nvPr/>
+        </p:nvSpPr>
+        <p:spPr>
+          <a:xfrm>
+            <a:off x="566928" y="3511296"/>
+            <a:ext cx="457200" cy="457200"/>
+          </a:xfrm>
+          <a:prstGeom prst="rect">
+            <a:avLst/>
+          </a:prstGeom>
+          <a:noFill/>
+          <a:ln/>
+        </p:spPr>
+        <p:txBody>
+          <a:bodyPr wrap="square" lIns="0" tIns="0" rIns="0" bIns="0" rtlCol="0" anchor="ctr"/>
+          <a:lstStyle/>
+          <a:p>
+            <a:pPr algn="ctr" indent="0" marL="0">
+              <a:buNone/>
+            </a:pPr>
+            <a:r>
+              <a:rPr lang="en-US" sz="1300" b="1" dirty="0">
+                <a:solidFill>
+                  <a:srgbClr val="FFFFFF"/>
+                </a:solidFill>
+                <a:latin typeface="Courier New" pitchFamily="34" charset="0"/>
+                <a:ea typeface="Courier New" pitchFamily="34" charset="-122"/>
+                <a:cs typeface="Courier New" pitchFamily="34" charset="-120"/>
+              </a:rPr>
+              <a:t>3</a:t>
+            </a:r>
+            <a:endParaRPr lang="en-US" sz="1300" dirty="0"/>
+          </a:p>
+        </p:txBody>
       </p:sp>
       <p:sp>
         <p:nvSpPr>
@@ -15653,102 +16303,109 @@
         </p:nvSpPr>
         <p:spPr>
           <a:xfrm>
-            <a:off x="6144768" y="2157984"/>
-            <a:ext cx="256032" cy="256032"/>
-          </a:xfrm>
-          <a:prstGeom prst="rect">
-            <a:avLst/>
-          </a:prstGeom>
-          <a:noFill/>
-          <a:ln/>
-        </p:spPr>
-        <p:txBody>
-          <a:bodyPr wrap="square" lIns="0" tIns="0" rIns="0" bIns="0" rtlCol="0" anchor="ctr"/>
-          <a:lstStyle/>
-          <a:p>
-            <a:pPr algn="ctr" indent="0" marL="0">
-              <a:buNone/>
-            </a:pPr>
-            <a:r>
-              <a:rPr lang="en-US" sz="1000" b="1" dirty="0">
-                <a:solidFill>
-                  <a:srgbClr val="177245"/>
+            <a:off x="1188720" y="3511296"/>
+            <a:ext cx="10424160" cy="457200"/>
+          </a:xfrm>
+          <a:prstGeom prst="rect">
+            <a:avLst/>
+          </a:prstGeom>
+          <a:noFill/>
+          <a:ln/>
+        </p:spPr>
+        <p:txBody>
+          <a:bodyPr wrap="square" lIns="0" tIns="0" rIns="0" bIns="0" rtlCol="0" anchor="ctr"/>
+          <a:lstStyle/>
+          <a:p>
+            <a:pPr indent="0" marL="0">
+              <a:buNone/>
+            </a:pPr>
+            <a:r>
+              <a:rPr lang="en-US" sz="1400" b="1" dirty="0">
+                <a:solidFill>
+                  <a:srgbClr val="1B1D23"/>
                 </a:solidFill>
                 <a:latin typeface="Calibri" pitchFamily="34" charset="0"/>
                 <a:ea typeface="Calibri" pitchFamily="34" charset="-122"/>
                 <a:cs typeface="Calibri" pitchFamily="34" charset="-120"/>
               </a:rPr>
-              <a:t>✓</a:t>
-            </a:r>
-            <a:endParaRPr lang="en-US" sz="1000" dirty="0"/>
-          </a:p>
-        </p:txBody>
-      </p:sp>
-      <p:sp>
-        <p:nvSpPr>
-          <p:cNvPr id="15" name="Text 13"/>
-          <p:cNvSpPr/>
-          <p:nvPr/>
-        </p:nvSpPr>
-        <p:spPr>
-          <a:xfrm>
-            <a:off x="6528816" y="2103120"/>
-            <a:ext cx="4617720" cy="384048"/>
-          </a:xfrm>
-          <a:prstGeom prst="rect">
-            <a:avLst/>
-          </a:prstGeom>
-          <a:noFill/>
-          <a:ln/>
-        </p:spPr>
-        <p:txBody>
-          <a:bodyPr wrap="square" lIns="0" tIns="0" rIns="0" bIns="0" rtlCol="0" anchor="ctr"/>
-          <a:lstStyle/>
-          <a:p>
+              <a:t>Звірити плитки з SQL  </a:t>
+            </a:r>
             <a:pPr indent="0" marL="0">
               <a:buNone/>
             </a:pPr>
             <a:r>
-              <a:rPr lang="en-US" sz="1250" dirty="0">
-                <a:solidFill>
-                  <a:srgbClr val="1B1D23"/>
+              <a:rPr lang="en-US" sz="1200" dirty="0">
+                <a:solidFill>
+                  <a:srgbClr val="565C6B"/>
                 </a:solidFill>
                 <a:latin typeface="Calibri" pitchFamily="34" charset="0"/>
                 <a:ea typeface="Calibri" pitchFamily="34" charset="-122"/>
                 <a:cs typeface="Calibri" pitchFamily="34" charset="-120"/>
               </a:rPr>
-              <a:t>відтворю тихий інцидент і покажу його в метриках</a:t>
-            </a:r>
-            <a:endParaRPr lang="en-US" sz="1250" dirty="0"/>
-          </a:p>
-        </p:txBody>
-      </p:sp>
-      <p:sp>
-        <p:nvSpPr>
-          <p:cNvPr id="16" name="Shape 14"/>
-          <p:cNvSpPr/>
-          <p:nvPr/>
-        </p:nvSpPr>
-        <p:spPr>
-          <a:xfrm>
-            <a:off x="6144768" y="2724912"/>
-            <a:ext cx="256032" cy="256032"/>
-          </a:xfrm>
-          <a:prstGeom prst="roundRect">
-            <a:avLst>
-              <a:gd name="adj" fmla="val 21429"/>
-            </a:avLst>
+              <a:t>шість плиток показують те саме, що запит</a:t>
+            </a:r>
+            <a:endParaRPr lang="en-US" sz="1400" dirty="0"/>
+          </a:p>
+        </p:txBody>
+      </p:sp>
+      <p:sp>
+        <p:nvSpPr>
+          <p:cNvPr id="15" name="Shape 13"/>
+          <p:cNvSpPr/>
+          <p:nvPr/>
+        </p:nvSpPr>
+        <p:spPr>
+          <a:xfrm>
+            <a:off x="566928" y="4352544"/>
+            <a:ext cx="457200" cy="457200"/>
+          </a:xfrm>
+          <a:prstGeom prst="ellipse">
+            <a:avLst/>
           </a:prstGeom>
           <a:solidFill>
-            <a:srgbClr val="E9F3EE"/>
+            <a:srgbClr val="4038C4"/>
           </a:solidFill>
-          <a:ln w="12700">
-            <a:solidFill>
-              <a:srgbClr val="177245"/>
-            </a:solidFill>
-            <a:prstDash val="solid"/>
-          </a:ln>
-        </p:spPr>
+          <a:ln/>
+        </p:spPr>
+      </p:sp>
+      <p:sp>
+        <p:nvSpPr>
+          <p:cNvPr id="16" name="Text 14"/>
+          <p:cNvSpPr/>
+          <p:nvPr/>
+        </p:nvSpPr>
+        <p:spPr>
+          <a:xfrm>
+            <a:off x="566928" y="4352544"/>
+            <a:ext cx="457200" cy="457200"/>
+          </a:xfrm>
+          <a:prstGeom prst="rect">
+            <a:avLst/>
+          </a:prstGeom>
+          <a:noFill/>
+          <a:ln/>
+        </p:spPr>
+        <p:txBody>
+          <a:bodyPr wrap="square" lIns="0" tIns="0" rIns="0" bIns="0" rtlCol="0" anchor="ctr"/>
+          <a:lstStyle/>
+          <a:p>
+            <a:pPr algn="ctr" indent="0" marL="0">
+              <a:buNone/>
+            </a:pPr>
+            <a:r>
+              <a:rPr lang="en-US" sz="1300" b="1" dirty="0">
+                <a:solidFill>
+                  <a:srgbClr val="FFFFFF"/>
+                </a:solidFill>
+                <a:latin typeface="Courier New" pitchFamily="34" charset="0"/>
+                <a:ea typeface="Courier New" pitchFamily="34" charset="-122"/>
+                <a:cs typeface="Courier New" pitchFamily="34" charset="-120"/>
+              </a:rPr>
+              <a:t>4</a:t>
+            </a:r>
+            <a:endParaRPr lang="en-US" sz="1300" dirty="0"/>
+          </a:p>
+        </p:txBody>
       </p:sp>
       <p:sp>
         <p:nvSpPr>
@@ -15758,75 +16415,70 @@
         </p:nvSpPr>
         <p:spPr>
           <a:xfrm>
-            <a:off x="6144768" y="2724912"/>
-            <a:ext cx="256032" cy="256032"/>
-          </a:xfrm>
-          <a:prstGeom prst="rect">
-            <a:avLst/>
-          </a:prstGeom>
-          <a:noFill/>
-          <a:ln/>
-        </p:spPr>
-        <p:txBody>
-          <a:bodyPr wrap="square" lIns="0" tIns="0" rIns="0" bIns="0" rtlCol="0" anchor="ctr"/>
-          <a:lstStyle/>
-          <a:p>
-            <a:pPr algn="ctr" indent="0" marL="0">
-              <a:buNone/>
-            </a:pPr>
-            <a:r>
-              <a:rPr lang="en-US" sz="1000" b="1" dirty="0">
-                <a:solidFill>
-                  <a:srgbClr val="177245"/>
+            <a:off x="1188720" y="4352544"/>
+            <a:ext cx="10424160" cy="457200"/>
+          </a:xfrm>
+          <a:prstGeom prst="rect">
+            <a:avLst/>
+          </a:prstGeom>
+          <a:noFill/>
+          <a:ln/>
+        </p:spPr>
+        <p:txBody>
+          <a:bodyPr wrap="square" lIns="0" tIns="0" rIns="0" bIns="0" rtlCol="0" anchor="ctr"/>
+          <a:lstStyle/>
+          <a:p>
+            <a:pPr indent="0" marL="0">
+              <a:buNone/>
+            </a:pPr>
+            <a:r>
+              <a:rPr lang="en-US" sz="1400" b="1" dirty="0">
+                <a:solidFill>
+                  <a:srgbClr val="1B1D23"/>
                 </a:solidFill>
                 <a:latin typeface="Calibri" pitchFamily="34" charset="0"/>
                 <a:ea typeface="Calibri" pitchFamily="34" charset="-122"/>
                 <a:cs typeface="Calibri" pitchFamily="34" charset="-120"/>
               </a:rPr>
-              <a:t>✓</a:t>
-            </a:r>
-            <a:endParaRPr lang="en-US" sz="1000" dirty="0"/>
-          </a:p>
-        </p:txBody>
-      </p:sp>
-      <p:sp>
-        <p:nvSpPr>
-          <p:cNvPr id="18" name="Text 16"/>
-          <p:cNvSpPr/>
-          <p:nvPr/>
-        </p:nvSpPr>
-        <p:spPr>
-          <a:xfrm>
-            <a:off x="6528816" y="2670048"/>
-            <a:ext cx="4617720" cy="384048"/>
-          </a:xfrm>
-          <a:prstGeom prst="rect">
-            <a:avLst/>
-          </a:prstGeom>
-          <a:noFill/>
-          <a:ln/>
-        </p:spPr>
-        <p:txBody>
-          <a:bodyPr wrap="square" lIns="0" tIns="0" rIns="0" bIns="0" rtlCol="0" anchor="ctr"/>
-          <a:lstStyle/>
-          <a:p>
+              <a:t>Відтворити «детектива»  </a:t>
+            </a:r>
             <a:pPr indent="0" marL="0">
               <a:buNone/>
             </a:pPr>
             <a:r>
-              <a:rPr lang="en-US" sz="1250" dirty="0">
-                <a:solidFill>
-                  <a:srgbClr val="1B1D23"/>
+              <a:rPr lang="en-US" sz="1200" dirty="0">
+                <a:solidFill>
+                  <a:srgbClr val="565C6B"/>
                 </a:solidFill>
                 <a:latin typeface="Calibri" pitchFamily="34" charset="0"/>
                 <a:ea typeface="Calibri" pitchFamily="34" charset="-122"/>
                 <a:cs typeface="Calibri" pitchFamily="34" charset="-120"/>
               </a:rPr>
-              <a:t>назву, що додати в лог для зрізу по тенантах</a:t>
-            </a:r>
-            <a:endParaRPr lang="en-US" sz="1250" dirty="0"/>
-          </a:p>
-        </p:txBody>
+              <a:t>серія __fail_503 → метрики ростуть без 500 користувачу</a:t>
+            </a:r>
+            <a:endParaRPr lang="en-US" sz="1400" dirty="0"/>
+          </a:p>
+        </p:txBody>
+      </p:sp>
+      <p:sp>
+        <p:nvSpPr>
+          <p:cNvPr id="18" name="Shape 16"/>
+          <p:cNvSpPr/>
+          <p:nvPr/>
+        </p:nvSpPr>
+        <p:spPr>
+          <a:xfrm>
+            <a:off x="566928" y="5193792"/>
+            <a:ext cx="457200" cy="457200"/>
+          </a:xfrm>
+          <a:prstGeom prst="ellipse">
+            <a:avLst/>
+          </a:prstGeom>
+          <a:solidFill>
+            <a:srgbClr val="9A5B12"/>
+          </a:solidFill>
+          <a:ln/>
+        </p:spPr>
       </p:sp>
       <p:sp>
         <p:nvSpPr>
@@ -15836,8 +16488,47 @@
         </p:nvSpPr>
         <p:spPr>
           <a:xfrm>
-            <a:off x="566928" y="3886200"/>
-            <a:ext cx="10972800" cy="320040"/>
+            <a:off x="566928" y="5193792"/>
+            <a:ext cx="457200" cy="457200"/>
+          </a:xfrm>
+          <a:prstGeom prst="rect">
+            <a:avLst/>
+          </a:prstGeom>
+          <a:noFill/>
+          <a:ln/>
+        </p:spPr>
+        <p:txBody>
+          <a:bodyPr wrap="square" lIns="0" tIns="0" rIns="0" bIns="0" rtlCol="0" anchor="ctr"/>
+          <a:lstStyle/>
+          <a:p>
+            <a:pPr algn="ctr" indent="0" marL="0">
+              <a:buNone/>
+            </a:pPr>
+            <a:r>
+              <a:rPr lang="en-US" sz="1300" b="1" dirty="0">
+                <a:solidFill>
+                  <a:srgbClr val="FFFFFF"/>
+                </a:solidFill>
+                <a:latin typeface="Courier New" pitchFamily="34" charset="0"/>
+                <a:ea typeface="Courier New" pitchFamily="34" charset="-122"/>
+                <a:cs typeface="Courier New" pitchFamily="34" charset="-120"/>
+              </a:rPr>
+              <a:t>5</a:t>
+            </a:r>
+            <a:endParaRPr lang="en-US" sz="1300" dirty="0"/>
+          </a:p>
+        </p:txBody>
+      </p:sp>
+      <p:sp>
+        <p:nvSpPr>
+          <p:cNvPr id="20" name="Text 18"/>
+          <p:cNvSpPr/>
+          <p:nvPr/>
+        </p:nvSpPr>
+        <p:spPr>
+          <a:xfrm>
+            <a:off x="1188720" y="5193792"/>
+            <a:ext cx="10424160" cy="457200"/>
           </a:xfrm>
           <a:prstGeom prst="rect">
             <a:avLst/>
@@ -15853,17 +16544,31 @@
               <a:buNone/>
             </a:pPr>
             <a:r>
-              <a:rPr lang="en-US" sz="1200" i="1" dirty="0">
-                <a:solidFill>
-                  <a:srgbClr val="8A90A0"/>
+              <a:rPr lang="en-US" sz="1400" b="1" dirty="0">
+                <a:solidFill>
+                  <a:srgbClr val="9A5B12"/>
                 </a:solidFill>
                 <a:latin typeface="Calibri" pitchFamily="34" charset="0"/>
                 <a:ea typeface="Calibri" pitchFamily="34" charset="-122"/>
                 <a:cs typeface="Calibri" pitchFamily="34" charset="-120"/>
               </a:rPr>
-              <a:t>Де завагалися — туди і повертайтеся. Питання — у канал потоку або на Q&amp;A.</a:t>
-            </a:r>
-            <a:endParaRPr lang="en-US" sz="1200" dirty="0"/>
+              <a:t>Таксономія помилок · опційно  </a:t>
+            </a:r>
+            <a:pPr indent="0" marL="0">
+              <a:buNone/>
+            </a:pPr>
+            <a:r>
+              <a:rPr lang="en-US" sz="1200" dirty="0">
+                <a:solidFill>
+                  <a:srgbClr val="565C6B"/>
+                </a:solidFill>
+                <a:latin typeface="Calibri" pitchFamily="34" charset="0"/>
+                <a:ea typeface="Calibri" pitchFamily="34" charset="-122"/>
+                <a:cs typeface="Calibri" pitchFamily="34" charset="-120"/>
+              </a:rPr>
+              <a:t>окремі лічильники за причинами</a:t>
+            </a:r>
+            <a:endParaRPr lang="en-US" sz="1400" dirty="0"/>
           </a:p>
         </p:txBody>
       </p:sp>
@@ -15980,7 +16685,7 @@
                 <a:ea typeface="Calibri" pitchFamily="34" charset="-122"/>
                 <a:cs typeface="Calibri" pitchFamily="34" charset="-120"/>
               </a:rPr>
-              <a:t>Антипатерни тижня</a:t>
+              <a:t>Що це довело</a:t>
             </a:r>
             <a:endParaRPr lang="en-US" sz="2500" dirty="0"/>
           </a:p>
@@ -16003,7 +16708,7 @@
             </a:avLst>
           </a:prstGeom>
           <a:solidFill>
-            <a:srgbClr val="ECEBFB"/>
+            <a:srgbClr val="F8F0E2"/>
           </a:solidFill>
           <a:ln/>
         </p:spPr>
@@ -16035,13 +16740,13 @@
             <a:r>
               <a:rPr lang="en-US" sz="900" b="1" spc="100" kern="0" dirty="0">
                 <a:solidFill>
-                  <a:srgbClr val="4038C4"/>
+                  <a:srgbClr val="9A5B12"/>
                 </a:solidFill>
                 <a:latin typeface="Courier New" pitchFamily="34" charset="0"/>
                 <a:ea typeface="Courier New" pitchFamily="34" charset="-122"/>
                 <a:cs typeface="Courier New" pitchFamily="34" charset="-120"/>
               </a:rPr>
-              <a:t>ТЕОРІЯ</a:t>
+              <a:t>РЕФЛЕКСІЯ</a:t>
             </a:r>
             <a:endParaRPr lang="en-US" sz="900" dirty="0"/>
           </a:p>
@@ -16094,688 +16799,354 @@
         </p:nvSpPr>
         <p:spPr>
           <a:xfrm>
-            <a:off x="566928" y="1783080"/>
-            <a:ext cx="11064240" cy="731520"/>
+            <a:off x="566928" y="1737360"/>
+            <a:ext cx="3566160" cy="1828800"/>
           </a:xfrm>
           <a:prstGeom prst="roundRect">
             <a:avLst>
-              <a:gd name="adj" fmla="val 12500"/>
+              <a:gd name="adj" fmla="val 6000"/>
+            </a:avLst>
+          </a:prstGeom>
+          <a:solidFill>
+            <a:srgbClr val="E9F3EE"/>
+          </a:solidFill>
+          <a:ln/>
+        </p:spPr>
+      </p:sp>
+      <p:sp>
+        <p:nvSpPr>
+          <p:cNvPr id="7" name="Text 5"/>
+          <p:cNvSpPr/>
+          <p:nvPr/>
+        </p:nvSpPr>
+        <p:spPr>
+          <a:xfrm>
+            <a:off x="768096" y="1892808"/>
+            <a:ext cx="3163824" cy="438912"/>
+          </a:xfrm>
+          <a:prstGeom prst="rect">
+            <a:avLst/>
+          </a:prstGeom>
+          <a:noFill/>
+          <a:ln/>
+        </p:spPr>
+        <p:txBody>
+          <a:bodyPr wrap="square" lIns="0" tIns="0" rIns="0" bIns="0" rtlCol="0" anchor="ctr"/>
+          <a:lstStyle/>
+          <a:p>
+            <a:pPr indent="0" marL="0">
+              <a:buNone/>
+            </a:pPr>
+            <a:r>
+              <a:rPr lang="en-US" sz="1450" b="1" dirty="0">
+                <a:solidFill>
+                  <a:srgbClr val="177245"/>
+                </a:solidFill>
+                <a:latin typeface="Calibri" pitchFamily="34" charset="0"/>
+                <a:ea typeface="Calibri" pitchFamily="34" charset="-122"/>
+                <a:cs typeface="Calibri" pitchFamily="34" charset="-120"/>
+              </a:rPr>
+              <a:t>Моніторинг — це ваш лог</a:t>
+            </a:r>
+            <a:endParaRPr lang="en-US" sz="1450" dirty="0"/>
+          </a:p>
+        </p:txBody>
+      </p:sp>
+      <p:sp>
+        <p:nvSpPr>
+          <p:cNvPr id="8" name="Text 6"/>
+          <p:cNvSpPr/>
+          <p:nvPr/>
+        </p:nvSpPr>
+        <p:spPr>
+          <a:xfrm>
+            <a:off x="768096" y="2423160"/>
+            <a:ext cx="3163824" cy="987552"/>
+          </a:xfrm>
+          <a:prstGeom prst="rect">
+            <a:avLst/>
+          </a:prstGeom>
+          <a:noFill/>
+          <a:ln/>
+        </p:spPr>
+        <p:txBody>
+          <a:bodyPr wrap="square" lIns="0" tIns="0" rIns="0" bIns="0" rtlCol="0" anchor="t"/>
+          <a:lstStyle/>
+          <a:p>
+            <a:pPr indent="0" marL="0">
+              <a:buNone/>
+            </a:pPr>
+            <a:r>
+              <a:rPr lang="en-US" sz="1200" dirty="0">
+                <a:solidFill>
+                  <a:srgbClr val="1B1D23"/>
+                </a:solidFill>
+                <a:latin typeface="Calibri" pitchFamily="34" charset="0"/>
+                <a:ea typeface="Calibri" pitchFamily="34" charset="-122"/>
+                <a:cs typeface="Calibri" pitchFamily="34" charset="-120"/>
+              </a:rPr>
+              <a:t>SQL по таблиці, яку ви писали з першого уроку</a:t>
+            </a:r>
+            <a:endParaRPr lang="en-US" sz="1200" dirty="0"/>
+          </a:p>
+        </p:txBody>
+      </p:sp>
+      <p:sp>
+        <p:nvSpPr>
+          <p:cNvPr id="9" name="Shape 7"/>
+          <p:cNvSpPr/>
+          <p:nvPr/>
+        </p:nvSpPr>
+        <p:spPr>
+          <a:xfrm>
+            <a:off x="4315968" y="1737360"/>
+            <a:ext cx="3566160" cy="1828800"/>
+          </a:xfrm>
+          <a:prstGeom prst="roundRect">
+            <a:avLst>
+              <a:gd name="adj" fmla="val 6000"/>
+            </a:avLst>
+          </a:prstGeom>
+          <a:solidFill>
+            <a:srgbClr val="ECEBFB"/>
+          </a:solidFill>
+          <a:ln/>
+        </p:spPr>
+      </p:sp>
+      <p:sp>
+        <p:nvSpPr>
+          <p:cNvPr id="10" name="Text 8"/>
+          <p:cNvSpPr/>
+          <p:nvPr/>
+        </p:nvSpPr>
+        <p:spPr>
+          <a:xfrm>
+            <a:off x="4517136" y="1892808"/>
+            <a:ext cx="3163824" cy="438912"/>
+          </a:xfrm>
+          <a:prstGeom prst="rect">
+            <a:avLst/>
+          </a:prstGeom>
+          <a:noFill/>
+          <a:ln/>
+        </p:spPr>
+        <p:txBody>
+          <a:bodyPr wrap="square" lIns="0" tIns="0" rIns="0" bIns="0" rtlCol="0" anchor="ctr"/>
+          <a:lstStyle/>
+          <a:p>
+            <a:pPr indent="0" marL="0">
+              <a:buNone/>
+            </a:pPr>
+            <a:r>
+              <a:rPr lang="en-US" sz="1450" b="1" dirty="0">
+                <a:solidFill>
+                  <a:srgbClr val="4038C4"/>
+                </a:solidFill>
+                <a:latin typeface="Calibri" pitchFamily="34" charset="0"/>
+                <a:ea typeface="Calibri" pitchFamily="34" charset="-122"/>
+                <a:cs typeface="Calibri" pitchFamily="34" charset="-120"/>
+              </a:rPr>
+              <a:t>Плитки відповідають на питання</a:t>
+            </a:r>
+            <a:endParaRPr lang="en-US" sz="1450" dirty="0"/>
+          </a:p>
+        </p:txBody>
+      </p:sp>
+      <p:sp>
+        <p:nvSpPr>
+          <p:cNvPr id="11" name="Text 9"/>
+          <p:cNvSpPr/>
+          <p:nvPr/>
+        </p:nvSpPr>
+        <p:spPr>
+          <a:xfrm>
+            <a:off x="4517136" y="2423160"/>
+            <a:ext cx="3163824" cy="987552"/>
+          </a:xfrm>
+          <a:prstGeom prst="rect">
+            <a:avLst/>
+          </a:prstGeom>
+          <a:noFill/>
+          <a:ln/>
+        </p:spPr>
+        <p:txBody>
+          <a:bodyPr wrap="square" lIns="0" tIns="0" rIns="0" bIns="0" rtlCol="0" anchor="t"/>
+          <a:lstStyle/>
+          <a:p>
+            <a:pPr indent="0" marL="0">
+              <a:buNone/>
+            </a:pPr>
+            <a:r>
+              <a:rPr lang="en-US" sz="1200" dirty="0">
+                <a:solidFill>
+                  <a:srgbClr val="1B1D23"/>
+                </a:solidFill>
+                <a:latin typeface="Calibri" pitchFamily="34" charset="0"/>
+                <a:ea typeface="Calibri" pitchFamily="34" charset="-122"/>
+                <a:cs typeface="Calibri" pitchFamily="34" charset="-120"/>
+              </a:rPr>
+              <a:t>шість цифр, кожна з приводу, а не для краси</a:t>
+            </a:r>
+            <a:endParaRPr lang="en-US" sz="1200" dirty="0"/>
+          </a:p>
+        </p:txBody>
+      </p:sp>
+      <p:sp>
+        <p:nvSpPr>
+          <p:cNvPr id="12" name="Shape 10"/>
+          <p:cNvSpPr/>
+          <p:nvPr/>
+        </p:nvSpPr>
+        <p:spPr>
+          <a:xfrm>
+            <a:off x="8065008" y="1737360"/>
+            <a:ext cx="3566160" cy="1828800"/>
+          </a:xfrm>
+          <a:prstGeom prst="roundRect">
+            <a:avLst>
+              <a:gd name="adj" fmla="val 6000"/>
+            </a:avLst>
+          </a:prstGeom>
+          <a:solidFill>
+            <a:srgbClr val="F9E9E8"/>
+          </a:solidFill>
+          <a:ln/>
+        </p:spPr>
+      </p:sp>
+      <p:sp>
+        <p:nvSpPr>
+          <p:cNvPr id="13" name="Text 11"/>
+          <p:cNvSpPr/>
+          <p:nvPr/>
+        </p:nvSpPr>
+        <p:spPr>
+          <a:xfrm>
+            <a:off x="8266176" y="1892808"/>
+            <a:ext cx="3163824" cy="438912"/>
+          </a:xfrm>
+          <a:prstGeom prst="rect">
+            <a:avLst/>
+          </a:prstGeom>
+          <a:noFill/>
+          <a:ln/>
+        </p:spPr>
+        <p:txBody>
+          <a:bodyPr wrap="square" lIns="0" tIns="0" rIns="0" bIns="0" rtlCol="0" anchor="ctr"/>
+          <a:lstStyle/>
+          <a:p>
+            <a:pPr indent="0" marL="0">
+              <a:buNone/>
+            </a:pPr>
+            <a:r>
+              <a:rPr lang="en-US" sz="1450" b="1" dirty="0">
+                <a:solidFill>
+                  <a:srgbClr val="B3261E"/>
+                </a:solidFill>
+                <a:latin typeface="Calibri" pitchFamily="34" charset="0"/>
+                <a:ea typeface="Calibri" pitchFamily="34" charset="-122"/>
+                <a:cs typeface="Calibri" pitchFamily="34" charset="-120"/>
+              </a:rPr>
+              <a:t>Тихий інцидент видно</a:t>
+            </a:r>
+            <a:endParaRPr lang="en-US" sz="1450" dirty="0"/>
+          </a:p>
+        </p:txBody>
+      </p:sp>
+      <p:sp>
+        <p:nvSpPr>
+          <p:cNvPr id="14" name="Text 12"/>
+          <p:cNvSpPr/>
+          <p:nvPr/>
+        </p:nvSpPr>
+        <p:spPr>
+          <a:xfrm>
+            <a:off x="8266176" y="2423160"/>
+            <a:ext cx="3163824" cy="987552"/>
+          </a:xfrm>
+          <a:prstGeom prst="rect">
+            <a:avLst/>
+          </a:prstGeom>
+          <a:noFill/>
+          <a:ln/>
+        </p:spPr>
+        <p:txBody>
+          <a:bodyPr wrap="square" lIns="0" tIns="0" rIns="0" bIns="0" rtlCol="0" anchor="t"/>
+          <a:lstStyle/>
+          <a:p>
+            <a:pPr indent="0" marL="0">
+              <a:buNone/>
+            </a:pPr>
+            <a:r>
+              <a:rPr lang="en-US" sz="1200" dirty="0">
+                <a:solidFill>
+                  <a:srgbClr val="1B1D23"/>
+                </a:solidFill>
+                <a:latin typeface="Calibri" pitchFamily="34" charset="0"/>
+                <a:ea typeface="Calibri" pitchFamily="34" charset="-122"/>
+                <a:cs typeface="Calibri" pitchFamily="34" charset="-120"/>
+              </a:rPr>
+              <a:t>fallback і error rate ростуть, поки uptime зелений</a:t>
+            </a:r>
+            <a:endParaRPr lang="en-US" sz="1200" dirty="0"/>
+          </a:p>
+        </p:txBody>
+      </p:sp>
+      <p:sp>
+        <p:nvSpPr>
+          <p:cNvPr id="15" name="Shape 13"/>
+          <p:cNvSpPr/>
+          <p:nvPr/>
+        </p:nvSpPr>
+        <p:spPr>
+          <a:xfrm>
+            <a:off x="566928" y="3977640"/>
+            <a:ext cx="11064240" cy="1234440"/>
+          </a:xfrm>
+          <a:prstGeom prst="roundRect">
+            <a:avLst>
+              <a:gd name="adj" fmla="val 8889"/>
             </a:avLst>
           </a:prstGeom>
           <a:solidFill>
             <a:srgbClr val="FFFFFF"/>
           </a:solidFill>
-          <a:ln w="12700">
-            <a:solidFill>
-              <a:srgbClr val="E4E6EC"/>
-            </a:solidFill>
-            <a:prstDash val="solid"/>
-          </a:ln>
-        </p:spPr>
-      </p:sp>
-      <p:sp>
-        <p:nvSpPr>
-          <p:cNvPr id="7" name="Shape 5"/>
-          <p:cNvSpPr/>
-          <p:nvPr/>
-        </p:nvSpPr>
-        <p:spPr>
-          <a:xfrm>
-            <a:off x="768096" y="1956816"/>
-            <a:ext cx="384048" cy="384048"/>
-          </a:xfrm>
-          <a:prstGeom prst="ellipse">
-            <a:avLst/>
-          </a:prstGeom>
-          <a:solidFill>
-            <a:srgbClr val="F9E9E8"/>
-          </a:solidFill>
-          <a:ln/>
-        </p:spPr>
-      </p:sp>
-      <p:sp>
-        <p:nvSpPr>
-          <p:cNvPr id="8" name="Text 6"/>
-          <p:cNvSpPr/>
-          <p:nvPr/>
-        </p:nvSpPr>
-        <p:spPr>
-          <a:xfrm>
-            <a:off x="768096" y="1956816"/>
-            <a:ext cx="384048" cy="384048"/>
-          </a:xfrm>
-          <a:prstGeom prst="rect">
-            <a:avLst/>
-          </a:prstGeom>
-          <a:noFill/>
-          <a:ln/>
-        </p:spPr>
-        <p:txBody>
-          <a:bodyPr wrap="square" lIns="0" tIns="0" rIns="0" bIns="0" rtlCol="0" anchor="ctr"/>
-          <a:lstStyle/>
-          <a:p>
-            <a:pPr algn="ctr" indent="0" marL="0">
-              <a:buNone/>
-            </a:pPr>
-            <a:r>
-              <a:rPr lang="en-US" sz="1300" b="1" dirty="0">
-                <a:solidFill>
-                  <a:srgbClr val="B3261E"/>
+          <a:ln/>
+        </p:spPr>
+      </p:sp>
+      <p:sp>
+        <p:nvSpPr>
+          <p:cNvPr id="16" name="Text 14"/>
+          <p:cNvSpPr/>
+          <p:nvPr/>
+        </p:nvSpPr>
+        <p:spPr>
+          <a:xfrm>
+            <a:off x="786384" y="4123944"/>
+            <a:ext cx="10625328" cy="941832"/>
+          </a:xfrm>
+          <a:prstGeom prst="rect">
+            <a:avLst/>
+          </a:prstGeom>
+          <a:noFill/>
+          <a:ln/>
+        </p:spPr>
+        <p:txBody>
+          <a:bodyPr wrap="square" lIns="0" tIns="0" rIns="0" bIns="0" rtlCol="0" anchor="ctr"/>
+          <a:lstStyle/>
+          <a:p>
+            <a:pPr indent="0" marL="0">
+              <a:buNone/>
+            </a:pPr>
+            <a:r>
+              <a:rPr lang="en-US" sz="1300" dirty="0">
+                <a:solidFill>
+                  <a:srgbClr val="1B1D23"/>
                 </a:solidFill>
                 <a:latin typeface="Calibri" pitchFamily="34" charset="0"/>
                 <a:ea typeface="Calibri" pitchFamily="34" charset="-122"/>
                 <a:cs typeface="Calibri" pitchFamily="34" charset="-120"/>
               </a:rPr>
-              <a:t>✕</a:t>
-            </a:r>
-            <a:endParaRPr lang="en-US" sz="1300" dirty="0"/>
-          </a:p>
-        </p:txBody>
-      </p:sp>
-      <p:sp>
-        <p:nvSpPr>
-          <p:cNvPr id="9" name="Text 7"/>
-          <p:cNvSpPr/>
-          <p:nvPr/>
-        </p:nvSpPr>
-        <p:spPr>
-          <a:xfrm>
-            <a:off x="1298448" y="1783080"/>
-            <a:ext cx="10149840" cy="731520"/>
-          </a:xfrm>
-          <a:prstGeom prst="rect">
-            <a:avLst/>
-          </a:prstGeom>
-          <a:noFill/>
-          <a:ln/>
-        </p:spPr>
-        <p:txBody>
-          <a:bodyPr wrap="square" lIns="0" tIns="0" rIns="0" bIns="0" rtlCol="0" anchor="ctr"/>
-          <a:lstStyle/>
-          <a:p>
-            <a:pPr indent="0" marL="0">
-              <a:buNone/>
-            </a:pPr>
-            <a:r>
-              <a:rPr lang="en-US" sz="1300" b="1" dirty="0">
-                <a:solidFill>
-                  <a:srgbClr val="1B1D23"/>
-                </a:solidFill>
-                <a:latin typeface="Calibri" pitchFamily="34" charset="0"/>
-                <a:ea typeface="Calibri" pitchFamily="34" charset="-122"/>
-                <a:cs typeface="Calibri" pitchFamily="34" charset="-120"/>
-              </a:rPr>
-              <a:t>Алерт на середню latency   </a:t>
-            </a:r>
-            <a:pPr indent="0" marL="0">
-              <a:buNone/>
-            </a:pPr>
-            <a:r>
-              <a:rPr lang="en-US" sz="1150" dirty="0">
-                <a:solidFill>
-                  <a:srgbClr val="565C6B"/>
-                </a:solidFill>
-                <a:latin typeface="Calibri" pitchFamily="34" charset="0"/>
-                <a:ea typeface="Calibri" pitchFamily="34" charset="-122"/>
-                <a:cs typeface="Calibri" pitchFamily="34" charset="-120"/>
-              </a:rPr>
-              <a:t>згладить і сплеск таймаутів, і деградацію провайдера</a:t>
-            </a:r>
-            <a:endParaRPr lang="en-US" sz="1300" dirty="0"/>
-          </a:p>
-        </p:txBody>
-      </p:sp>
-      <p:sp>
-        <p:nvSpPr>
-          <p:cNvPr id="10" name="Shape 8"/>
-          <p:cNvSpPr/>
-          <p:nvPr/>
-        </p:nvSpPr>
-        <p:spPr>
-          <a:xfrm>
-            <a:off x="566928" y="2651760"/>
-            <a:ext cx="11064240" cy="731520"/>
-          </a:xfrm>
-          <a:prstGeom prst="roundRect">
-            <a:avLst>
-              <a:gd name="adj" fmla="val 12500"/>
-            </a:avLst>
-          </a:prstGeom>
-          <a:solidFill>
-            <a:srgbClr val="FFFFFF"/>
-          </a:solidFill>
-          <a:ln w="12700">
-            <a:solidFill>
-              <a:srgbClr val="E4E6EC"/>
-            </a:solidFill>
-            <a:prstDash val="solid"/>
-          </a:ln>
-        </p:spPr>
-      </p:sp>
-      <p:sp>
-        <p:nvSpPr>
-          <p:cNvPr id="11" name="Shape 9"/>
-          <p:cNvSpPr/>
-          <p:nvPr/>
-        </p:nvSpPr>
-        <p:spPr>
-          <a:xfrm>
-            <a:off x="768096" y="2825496"/>
-            <a:ext cx="384048" cy="384048"/>
-          </a:xfrm>
-          <a:prstGeom prst="ellipse">
-            <a:avLst/>
-          </a:prstGeom>
-          <a:solidFill>
-            <a:srgbClr val="F9E9E8"/>
-          </a:solidFill>
-          <a:ln/>
-        </p:spPr>
-      </p:sp>
-      <p:sp>
-        <p:nvSpPr>
-          <p:cNvPr id="12" name="Text 10"/>
-          <p:cNvSpPr/>
-          <p:nvPr/>
-        </p:nvSpPr>
-        <p:spPr>
-          <a:xfrm>
-            <a:off x="768096" y="2825496"/>
-            <a:ext cx="384048" cy="384048"/>
-          </a:xfrm>
-          <a:prstGeom prst="rect">
-            <a:avLst/>
-          </a:prstGeom>
-          <a:noFill/>
-          <a:ln/>
-        </p:spPr>
-        <p:txBody>
-          <a:bodyPr wrap="square" lIns="0" tIns="0" rIns="0" bIns="0" rtlCol="0" anchor="ctr"/>
-          <a:lstStyle/>
-          <a:p>
-            <a:pPr algn="ctr" indent="0" marL="0">
-              <a:buNone/>
-            </a:pPr>
-            <a:r>
-              <a:rPr lang="en-US" sz="1300" b="1" dirty="0">
-                <a:solidFill>
-                  <a:srgbClr val="B3261E"/>
-                </a:solidFill>
-                <a:latin typeface="Calibri" pitchFamily="34" charset="0"/>
-                <a:ea typeface="Calibri" pitchFamily="34" charset="-122"/>
-                <a:cs typeface="Calibri" pitchFamily="34" charset="-120"/>
-              </a:rPr>
-              <a:t>✕</a:t>
-            </a:r>
-            <a:endParaRPr lang="en-US" sz="1300" dirty="0"/>
-          </a:p>
-        </p:txBody>
-      </p:sp>
-      <p:sp>
-        <p:nvSpPr>
-          <p:cNvPr id="13" name="Text 11"/>
-          <p:cNvSpPr/>
-          <p:nvPr/>
-        </p:nvSpPr>
-        <p:spPr>
-          <a:xfrm>
-            <a:off x="1298448" y="2651760"/>
-            <a:ext cx="10149840" cy="731520"/>
-          </a:xfrm>
-          <a:prstGeom prst="rect">
-            <a:avLst/>
-          </a:prstGeom>
-          <a:noFill/>
-          <a:ln/>
-        </p:spPr>
-        <p:txBody>
-          <a:bodyPr wrap="square" lIns="0" tIns="0" rIns="0" bIns="0" rtlCol="0" anchor="ctr"/>
-          <a:lstStyle/>
-          <a:p>
-            <a:pPr indent="0" marL="0">
-              <a:buNone/>
-            </a:pPr>
-            <a:r>
-              <a:rPr lang="en-US" sz="1300" b="1" dirty="0">
-                <a:solidFill>
-                  <a:srgbClr val="1B1D23"/>
-                </a:solidFill>
-                <a:latin typeface="Calibri" pitchFamily="34" charset="0"/>
-                <a:ea typeface="Calibri" pitchFamily="34" charset="-122"/>
-                <a:cs typeface="Calibri" pitchFamily="34" charset="-120"/>
-              </a:rPr>
-              <a:t>Алерт на кожну помилку   </a:t>
-            </a:r>
-            <a:pPr indent="0" marL="0">
-              <a:buNone/>
-            </a:pPr>
-            <a:r>
-              <a:rPr lang="en-US" sz="1150" dirty="0">
-                <a:solidFill>
-                  <a:srgbClr val="565C6B"/>
-                </a:solidFill>
-                <a:latin typeface="Calibri" pitchFamily="34" charset="0"/>
-                <a:ea typeface="Calibri" pitchFamily="34" charset="-122"/>
-                <a:cs typeface="Calibri" pitchFamily="34" charset="-120"/>
-              </a:rPr>
-              <a:t>десять повідомлень щодня і жодної реакції</a:t>
-            </a:r>
-            <a:endParaRPr lang="en-US" sz="1300" dirty="0"/>
-          </a:p>
-        </p:txBody>
-      </p:sp>
-      <p:sp>
-        <p:nvSpPr>
-          <p:cNvPr id="14" name="Shape 12"/>
-          <p:cNvSpPr/>
-          <p:nvPr/>
-        </p:nvSpPr>
-        <p:spPr>
-          <a:xfrm>
-            <a:off x="566928" y="3520440"/>
-            <a:ext cx="11064240" cy="731520"/>
-          </a:xfrm>
-          <a:prstGeom prst="roundRect">
-            <a:avLst>
-              <a:gd name="adj" fmla="val 12500"/>
-            </a:avLst>
-          </a:prstGeom>
-          <a:solidFill>
-            <a:srgbClr val="FFFFFF"/>
-          </a:solidFill>
-          <a:ln w="12700">
-            <a:solidFill>
-              <a:srgbClr val="E4E6EC"/>
-            </a:solidFill>
-            <a:prstDash val="solid"/>
-          </a:ln>
-        </p:spPr>
-      </p:sp>
-      <p:sp>
-        <p:nvSpPr>
-          <p:cNvPr id="15" name="Shape 13"/>
-          <p:cNvSpPr/>
-          <p:nvPr/>
-        </p:nvSpPr>
-        <p:spPr>
-          <a:xfrm>
-            <a:off x="768096" y="3694176"/>
-            <a:ext cx="384048" cy="384048"/>
-          </a:xfrm>
-          <a:prstGeom prst="ellipse">
-            <a:avLst/>
-          </a:prstGeom>
-          <a:solidFill>
-            <a:srgbClr val="F9E9E8"/>
-          </a:solidFill>
-          <a:ln/>
-        </p:spPr>
-      </p:sp>
-      <p:sp>
-        <p:nvSpPr>
-          <p:cNvPr id="16" name="Text 14"/>
-          <p:cNvSpPr/>
-          <p:nvPr/>
-        </p:nvSpPr>
-        <p:spPr>
-          <a:xfrm>
-            <a:off x="768096" y="3694176"/>
-            <a:ext cx="384048" cy="384048"/>
-          </a:xfrm>
-          <a:prstGeom prst="rect">
-            <a:avLst/>
-          </a:prstGeom>
-          <a:noFill/>
-          <a:ln/>
-        </p:spPr>
-        <p:txBody>
-          <a:bodyPr wrap="square" lIns="0" tIns="0" rIns="0" bIns="0" rtlCol="0" anchor="ctr"/>
-          <a:lstStyle/>
-          <a:p>
-            <a:pPr algn="ctr" indent="0" marL="0">
-              <a:buNone/>
-            </a:pPr>
-            <a:r>
-              <a:rPr lang="en-US" sz="1300" b="1" dirty="0">
-                <a:solidFill>
-                  <a:srgbClr val="B3261E"/>
-                </a:solidFill>
-                <a:latin typeface="Calibri" pitchFamily="34" charset="0"/>
-                <a:ea typeface="Calibri" pitchFamily="34" charset="-122"/>
-                <a:cs typeface="Calibri" pitchFamily="34" charset="-120"/>
-              </a:rPr>
-              <a:t>✕</a:t>
-            </a:r>
-            <a:endParaRPr lang="en-US" sz="1300" dirty="0"/>
-          </a:p>
-        </p:txBody>
-      </p:sp>
-      <p:sp>
-        <p:nvSpPr>
-          <p:cNvPr id="17" name="Text 15"/>
-          <p:cNvSpPr/>
-          <p:nvPr/>
-        </p:nvSpPr>
-        <p:spPr>
-          <a:xfrm>
-            <a:off x="1298448" y="3520440"/>
-            <a:ext cx="10149840" cy="731520"/>
-          </a:xfrm>
-          <a:prstGeom prst="rect">
-            <a:avLst/>
-          </a:prstGeom>
-          <a:noFill/>
-          <a:ln/>
-        </p:spPr>
-        <p:txBody>
-          <a:bodyPr wrap="square" lIns="0" tIns="0" rIns="0" bIns="0" rtlCol="0" anchor="ctr"/>
-          <a:lstStyle/>
-          <a:p>
-            <a:pPr indent="0" marL="0">
-              <a:buNone/>
-            </a:pPr>
-            <a:r>
-              <a:rPr lang="en-US" sz="1300" b="1" dirty="0">
-                <a:solidFill>
-                  <a:srgbClr val="1B1D23"/>
-                </a:solidFill>
-                <a:latin typeface="Calibri" pitchFamily="34" charset="0"/>
-                <a:ea typeface="Calibri" pitchFamily="34" charset="-122"/>
-                <a:cs typeface="Calibri" pitchFamily="34" charset="-120"/>
-              </a:rPr>
-              <a:t>Плитка без питання   </a:t>
-            </a:r>
-            <a:pPr indent="0" marL="0">
-              <a:buNone/>
-            </a:pPr>
-            <a:r>
-              <a:rPr lang="en-US" sz="1150" dirty="0">
-                <a:solidFill>
-                  <a:srgbClr val="565C6B"/>
-                </a:solidFill>
-                <a:latin typeface="Calibri" pitchFamily="34" charset="0"/>
-                <a:ea typeface="Calibri" pitchFamily="34" charset="-122"/>
-                <a:cs typeface="Calibri" pitchFamily="34" charset="-120"/>
-              </a:rPr>
-              <a:t>прикраса, яку перестають помічати за тиждень</a:t>
-            </a:r>
-            <a:endParaRPr lang="en-US" sz="1300" dirty="0"/>
-          </a:p>
-        </p:txBody>
-      </p:sp>
-      <p:sp>
-        <p:nvSpPr>
-          <p:cNvPr id="18" name="Shape 16"/>
-          <p:cNvSpPr/>
-          <p:nvPr/>
-        </p:nvSpPr>
-        <p:spPr>
-          <a:xfrm>
-            <a:off x="566928" y="4389120"/>
-            <a:ext cx="11064240" cy="731520"/>
-          </a:xfrm>
-          <a:prstGeom prst="roundRect">
-            <a:avLst>
-              <a:gd name="adj" fmla="val 12500"/>
-            </a:avLst>
-          </a:prstGeom>
-          <a:solidFill>
-            <a:srgbClr val="FFFFFF"/>
-          </a:solidFill>
-          <a:ln w="12700">
-            <a:solidFill>
-              <a:srgbClr val="E4E6EC"/>
-            </a:solidFill>
-            <a:prstDash val="solid"/>
-          </a:ln>
-        </p:spPr>
-      </p:sp>
-      <p:sp>
-        <p:nvSpPr>
-          <p:cNvPr id="19" name="Shape 17"/>
-          <p:cNvSpPr/>
-          <p:nvPr/>
-        </p:nvSpPr>
-        <p:spPr>
-          <a:xfrm>
-            <a:off x="768096" y="4562856"/>
-            <a:ext cx="384048" cy="384048"/>
-          </a:xfrm>
-          <a:prstGeom prst="ellipse">
-            <a:avLst/>
-          </a:prstGeom>
-          <a:solidFill>
-            <a:srgbClr val="F9E9E8"/>
-          </a:solidFill>
-          <a:ln/>
-        </p:spPr>
-      </p:sp>
-      <p:sp>
-        <p:nvSpPr>
-          <p:cNvPr id="20" name="Text 18"/>
-          <p:cNvSpPr/>
-          <p:nvPr/>
-        </p:nvSpPr>
-        <p:spPr>
-          <a:xfrm>
-            <a:off x="768096" y="4562856"/>
-            <a:ext cx="384048" cy="384048"/>
-          </a:xfrm>
-          <a:prstGeom prst="rect">
-            <a:avLst/>
-          </a:prstGeom>
-          <a:noFill/>
-          <a:ln/>
-        </p:spPr>
-        <p:txBody>
-          <a:bodyPr wrap="square" lIns="0" tIns="0" rIns="0" bIns="0" rtlCol="0" anchor="ctr"/>
-          <a:lstStyle/>
-          <a:p>
-            <a:pPr algn="ctr" indent="0" marL="0">
-              <a:buNone/>
-            </a:pPr>
-            <a:r>
-              <a:rPr lang="en-US" sz="1300" b="1" dirty="0">
-                <a:solidFill>
-                  <a:srgbClr val="B3261E"/>
-                </a:solidFill>
-                <a:latin typeface="Calibri" pitchFamily="34" charset="0"/>
-                <a:ea typeface="Calibri" pitchFamily="34" charset="-122"/>
-                <a:cs typeface="Calibri" pitchFamily="34" charset="-120"/>
-              </a:rPr>
-              <a:t>✕</a:t>
-            </a:r>
-            <a:endParaRPr lang="en-US" sz="1300" dirty="0"/>
-          </a:p>
-        </p:txBody>
-      </p:sp>
-      <p:sp>
-        <p:nvSpPr>
-          <p:cNvPr id="21" name="Text 19"/>
-          <p:cNvSpPr/>
-          <p:nvPr/>
-        </p:nvSpPr>
-        <p:spPr>
-          <a:xfrm>
-            <a:off x="1298448" y="4389120"/>
-            <a:ext cx="10149840" cy="731520"/>
-          </a:xfrm>
-          <a:prstGeom prst="rect">
-            <a:avLst/>
-          </a:prstGeom>
-          <a:noFill/>
-          <a:ln/>
-        </p:spPr>
-        <p:txBody>
-          <a:bodyPr wrap="square" lIns="0" tIns="0" rIns="0" bIns="0" rtlCol="0" anchor="ctr"/>
-          <a:lstStyle/>
-          <a:p>
-            <a:pPr indent="0" marL="0">
-              <a:buNone/>
-            </a:pPr>
-            <a:r>
-              <a:rPr lang="en-US" sz="1300" b="1" dirty="0">
-                <a:solidFill>
-                  <a:srgbClr val="1B1D23"/>
-                </a:solidFill>
-                <a:latin typeface="Calibri" pitchFamily="34" charset="0"/>
-                <a:ea typeface="Calibri" pitchFamily="34" charset="-122"/>
-                <a:cs typeface="Calibri" pitchFamily="34" charset="-120"/>
-              </a:rPr>
-              <a:t>Статус провайдера прибитий до «ok»   </a:t>
-            </a:r>
-            <a:pPr indent="0" marL="0">
-              <a:buNone/>
-            </a:pPr>
-            <a:r>
-              <a:rPr lang="en-US" sz="1150" dirty="0">
-                <a:solidFill>
-                  <a:srgbClr val="565C6B"/>
-                </a:solidFill>
-                <a:latin typeface="Calibri" pitchFamily="34" charset="0"/>
-                <a:ea typeface="Calibri" pitchFamily="34" charset="-122"/>
-                <a:cs typeface="Calibri" pitchFamily="34" charset="-120"/>
-              </a:rPr>
-              <a:t>брехня рівно в момент, коли правда потрібна</a:t>
-            </a:r>
-            <a:endParaRPr lang="en-US" sz="1300" dirty="0"/>
-          </a:p>
-        </p:txBody>
-      </p:sp>
-      <p:sp>
-        <p:nvSpPr>
-          <p:cNvPr id="22" name="Shape 20"/>
-          <p:cNvSpPr/>
-          <p:nvPr/>
-        </p:nvSpPr>
-        <p:spPr>
-          <a:xfrm>
-            <a:off x="566928" y="5257800"/>
-            <a:ext cx="11064240" cy="731520"/>
-          </a:xfrm>
-          <a:prstGeom prst="roundRect">
-            <a:avLst>
-              <a:gd name="adj" fmla="val 12500"/>
-            </a:avLst>
-          </a:prstGeom>
-          <a:solidFill>
-            <a:srgbClr val="FFFFFF"/>
-          </a:solidFill>
-          <a:ln w="12700">
-            <a:solidFill>
-              <a:srgbClr val="E4E6EC"/>
-            </a:solidFill>
-            <a:prstDash val="solid"/>
-          </a:ln>
-        </p:spPr>
-      </p:sp>
-      <p:sp>
-        <p:nvSpPr>
-          <p:cNvPr id="23" name="Shape 21"/>
-          <p:cNvSpPr/>
-          <p:nvPr/>
-        </p:nvSpPr>
-        <p:spPr>
-          <a:xfrm>
-            <a:off x="768096" y="5431536"/>
-            <a:ext cx="384048" cy="384048"/>
-          </a:xfrm>
-          <a:prstGeom prst="ellipse">
-            <a:avLst/>
-          </a:prstGeom>
-          <a:solidFill>
-            <a:srgbClr val="F9E9E8"/>
-          </a:solidFill>
-          <a:ln/>
-        </p:spPr>
-      </p:sp>
-      <p:sp>
-        <p:nvSpPr>
-          <p:cNvPr id="24" name="Text 22"/>
-          <p:cNvSpPr/>
-          <p:nvPr/>
-        </p:nvSpPr>
-        <p:spPr>
-          <a:xfrm>
-            <a:off x="768096" y="5431536"/>
-            <a:ext cx="384048" cy="384048"/>
-          </a:xfrm>
-          <a:prstGeom prst="rect">
-            <a:avLst/>
-          </a:prstGeom>
-          <a:noFill/>
-          <a:ln/>
-        </p:spPr>
-        <p:txBody>
-          <a:bodyPr wrap="square" lIns="0" tIns="0" rIns="0" bIns="0" rtlCol="0" anchor="ctr"/>
-          <a:lstStyle/>
-          <a:p>
-            <a:pPr algn="ctr" indent="0" marL="0">
-              <a:buNone/>
-            </a:pPr>
-            <a:r>
-              <a:rPr lang="en-US" sz="1300" b="1" dirty="0">
-                <a:solidFill>
-                  <a:srgbClr val="B3261E"/>
-                </a:solidFill>
-                <a:latin typeface="Calibri" pitchFamily="34" charset="0"/>
-                <a:ea typeface="Calibri" pitchFamily="34" charset="-122"/>
-                <a:cs typeface="Calibri" pitchFamily="34" charset="-120"/>
-              </a:rPr>
-              <a:t>✕</a:t>
-            </a:r>
-            <a:endParaRPr lang="en-US" sz="1300" dirty="0"/>
-          </a:p>
-        </p:txBody>
-      </p:sp>
-      <p:sp>
-        <p:nvSpPr>
-          <p:cNvPr id="25" name="Text 23"/>
-          <p:cNvSpPr/>
-          <p:nvPr/>
-        </p:nvSpPr>
-        <p:spPr>
-          <a:xfrm>
-            <a:off x="1298448" y="5257800"/>
-            <a:ext cx="10149840" cy="731520"/>
-          </a:xfrm>
-          <a:prstGeom prst="rect">
-            <a:avLst/>
-          </a:prstGeom>
-          <a:noFill/>
-          <a:ln/>
-        </p:spPr>
-        <p:txBody>
-          <a:bodyPr wrap="square" lIns="0" tIns="0" rIns="0" bIns="0" rtlCol="0" anchor="ctr"/>
-          <a:lstStyle/>
-          <a:p>
-            <a:pPr indent="0" marL="0">
-              <a:buNone/>
-            </a:pPr>
-            <a:r>
-              <a:rPr lang="en-US" sz="1300" b="1" dirty="0">
-                <a:solidFill>
-                  <a:srgbClr val="1B1D23"/>
-                </a:solidFill>
-                <a:latin typeface="Calibri" pitchFamily="34" charset="0"/>
-                <a:ea typeface="Calibri" pitchFamily="34" charset="-122"/>
-                <a:cs typeface="Calibri" pitchFamily="34" charset="-120"/>
-              </a:rPr>
-              <a:t>User_id у мітках метрик   </a:t>
-            </a:r>
-            <a:pPr indent="0" marL="0">
-              <a:buNone/>
-            </a:pPr>
-            <a:r>
-              <a:rPr lang="en-US" sz="1150" dirty="0">
-                <a:solidFill>
-                  <a:srgbClr val="565C6B"/>
-                </a:solidFill>
-                <a:latin typeface="Calibri" pitchFamily="34" charset="0"/>
-                <a:ea typeface="Calibri" pitchFamily="34" charset="-122"/>
-                <a:cs typeface="Calibri" pitchFamily="34" charset="-120"/>
-              </a:rPr>
-              <a:t>сховище метрик вибухає на кардинальності</a:t>
+              <a:t>Видимість є. Наступного уроку до неї додається судження: не «скільки запитів», а «чи стали відповіді гіршими» — і це вже перевірки якості.</a:t>
             </a:r>
             <a:endParaRPr lang="en-US" sz="1300" dirty="0"/>
           </a:p>
@@ -16894,7 +17265,7 @@
                 <a:ea typeface="Calibri" pitchFamily="34" charset="-122"/>
                 <a:cs typeface="Calibri" pitchFamily="34" charset="-120"/>
               </a:rPr>
-              <a:t>Домашнє завдання</a:t>
+              <a:t>Перевір себе</a:t>
             </a:r>
             <a:endParaRPr lang="en-US" sz="2500" dirty="0"/>
           </a:p>
@@ -16917,7 +17288,7 @@
             </a:avLst>
           </a:prstGeom>
           <a:solidFill>
-            <a:srgbClr val="E9F3EE"/>
+            <a:srgbClr val="F8F0E2"/>
           </a:solidFill>
           <a:ln/>
         </p:spPr>
@@ -16949,13 +17320,13 @@
             <a:r>
               <a:rPr lang="en-US" sz="900" b="1" spc="100" kern="0" dirty="0">
                 <a:solidFill>
-                  <a:srgbClr val="177245"/>
+                  <a:srgbClr val="9A5B12"/>
                 </a:solidFill>
                 <a:latin typeface="Courier New" pitchFamily="34" charset="0"/>
                 <a:ea typeface="Courier New" pitchFamily="34" charset="-122"/>
                 <a:cs typeface="Courier New" pitchFamily="34" charset="-120"/>
               </a:rPr>
-              <a:t>ПРАКТИКА</a:t>
+              <a:t>РЕФЛЕКСІЯ</a:t>
             </a:r>
             <a:endParaRPr lang="en-US" sz="900" dirty="0"/>
           </a:p>
@@ -17008,12 +17379,12 @@
         </p:nvSpPr>
         <p:spPr>
           <a:xfrm>
-            <a:off x="566928" y="1737360"/>
-            <a:ext cx="5349240" cy="2194560"/>
+            <a:off x="566928" y="1783080"/>
+            <a:ext cx="11064240" cy="1874520"/>
           </a:xfrm>
           <a:prstGeom prst="roundRect">
             <a:avLst>
-              <a:gd name="adj" fmla="val 5000"/>
+              <a:gd name="adj" fmla="val 5854"/>
             </a:avLst>
           </a:prstGeom>
           <a:solidFill>
@@ -17029,215 +17400,306 @@
       </p:sp>
       <p:sp>
         <p:nvSpPr>
-          <p:cNvPr id="7" name="Text 5"/>
-          <p:cNvSpPr/>
-          <p:nvPr/>
-        </p:nvSpPr>
-        <p:spPr>
-          <a:xfrm>
-            <a:off x="768096" y="1892808"/>
-            <a:ext cx="4946904" cy="438912"/>
-          </a:xfrm>
-          <a:prstGeom prst="rect">
-            <a:avLst/>
-          </a:prstGeom>
-          <a:noFill/>
-          <a:ln/>
-        </p:spPr>
-        <p:txBody>
-          <a:bodyPr wrap="square" lIns="0" tIns="0" rIns="0" bIns="0" rtlCol="0" anchor="ctr"/>
-          <a:lstStyle/>
-          <a:p>
-            <a:pPr indent="0" marL="0">
-              <a:buNone/>
-            </a:pPr>
-            <a:r>
-              <a:rPr lang="en-US" sz="1450" b="1" dirty="0">
-                <a:solidFill>
-                  <a:srgbClr val="1B1D23"/>
+          <p:cNvPr id="7" name="Shape 5"/>
+          <p:cNvSpPr/>
+          <p:nvPr/>
+        </p:nvSpPr>
+        <p:spPr>
+          <a:xfrm>
+            <a:off x="978408" y="2157984"/>
+            <a:ext cx="256032" cy="256032"/>
+          </a:xfrm>
+          <a:prstGeom prst="roundRect">
+            <a:avLst>
+              <a:gd name="adj" fmla="val 21429"/>
+            </a:avLst>
+          </a:prstGeom>
+          <a:solidFill>
+            <a:srgbClr val="E9F3EE"/>
+          </a:solidFill>
+          <a:ln w="12700">
+            <a:solidFill>
+              <a:srgbClr val="177245"/>
+            </a:solidFill>
+            <a:prstDash val="solid"/>
+          </a:ln>
+        </p:spPr>
+      </p:sp>
+      <p:sp>
+        <p:nvSpPr>
+          <p:cNvPr id="8" name="Text 6"/>
+          <p:cNvSpPr/>
+          <p:nvPr/>
+        </p:nvSpPr>
+        <p:spPr>
+          <a:xfrm>
+            <a:off x="978408" y="2157984"/>
+            <a:ext cx="256032" cy="256032"/>
+          </a:xfrm>
+          <a:prstGeom prst="rect">
+            <a:avLst/>
+          </a:prstGeom>
+          <a:noFill/>
+          <a:ln/>
+        </p:spPr>
+        <p:txBody>
+          <a:bodyPr wrap="square" lIns="0" tIns="0" rIns="0" bIns="0" rtlCol="0" anchor="ctr"/>
+          <a:lstStyle/>
+          <a:p>
+            <a:pPr algn="ctr" indent="0" marL="0">
+              <a:buNone/>
+            </a:pPr>
+            <a:r>
+              <a:rPr lang="en-US" sz="1000" b="1" dirty="0">
+                <a:solidFill>
+                  <a:srgbClr val="177245"/>
                 </a:solidFill>
                 <a:latin typeface="Calibri" pitchFamily="34" charset="0"/>
                 <a:ea typeface="Calibri" pitchFamily="34" charset="-122"/>
                 <a:cs typeface="Calibri" pitchFamily="34" charset="-120"/>
               </a:rPr>
-              <a:t>Обов'язково — без здачі</a:t>
-            </a:r>
-            <a:endParaRPr lang="en-US" sz="1450" dirty="0"/>
-          </a:p>
-        </p:txBody>
-      </p:sp>
-      <p:sp>
-        <p:nvSpPr>
-          <p:cNvPr id="8" name="Text 6"/>
-          <p:cNvSpPr/>
-          <p:nvPr/>
-        </p:nvSpPr>
-        <p:spPr>
-          <a:xfrm>
-            <a:off x="768096" y="2423160"/>
-            <a:ext cx="4946904" cy="1353312"/>
-          </a:xfrm>
-          <a:prstGeom prst="rect">
-            <a:avLst/>
-          </a:prstGeom>
-          <a:noFill/>
-          <a:ln/>
-        </p:spPr>
-        <p:txBody>
-          <a:bodyPr wrap="square" lIns="0" tIns="0" rIns="0" bIns="0" rtlCol="0" anchor="t"/>
+              <a:t>✓</a:t>
+            </a:r>
+            <a:endParaRPr lang="en-US" sz="1000" dirty="0"/>
+          </a:p>
+        </p:txBody>
+      </p:sp>
+      <p:sp>
+        <p:nvSpPr>
+          <p:cNvPr id="9" name="Text 7"/>
+          <p:cNvSpPr/>
+          <p:nvPr/>
+        </p:nvSpPr>
+        <p:spPr>
+          <a:xfrm>
+            <a:off x="1362456" y="2103120"/>
+            <a:ext cx="4617720" cy="384048"/>
+          </a:xfrm>
+          <a:prstGeom prst="rect">
+            <a:avLst/>
+          </a:prstGeom>
+          <a:noFill/>
+          <a:ln/>
+        </p:spPr>
+        <p:txBody>
+          <a:bodyPr wrap="square" lIns="0" tIns="0" rIns="0" bIns="0" rtlCol="0" anchor="ctr"/>
           <a:lstStyle/>
           <a:p>
             <a:pPr indent="0" marL="0">
               <a:buNone/>
             </a:pPr>
             <a:r>
-              <a:rPr lang="en-US" sz="1200" dirty="0">
-                <a:solidFill>
-                  <a:srgbClr val="565C6B"/>
+              <a:rPr lang="en-US" sz="1250" dirty="0">
+                <a:solidFill>
+                  <a:srgbClr val="1B1D23"/>
                 </a:solidFill>
                 <a:latin typeface="Calibri" pitchFamily="34" charset="0"/>
                 <a:ea typeface="Calibri" pitchFamily="34" charset="-122"/>
                 <a:cs typeface="Calibri" pitchFamily="34" charset="-120"/>
               </a:rPr>
-              <a:t>• закріпити лабу: всі шість плиток живі, звірені з SQL</a:t>
-            </a:r>
-            <a:endParaRPr lang="en-US" sz="1200" dirty="0"/>
-          </a:p>
-          <a:p>
-            <a:pPr indent="0" marL="0">
-              <a:buNone/>
-            </a:pPr>
-            <a:endParaRPr lang="en-US" sz="1200" dirty="0"/>
-          </a:p>
-          <a:p>
-            <a:pPr indent="0" marL="0">
-              <a:buNone/>
-            </a:pPr>
-            <a:r>
-              <a:rPr lang="en-US" sz="1200" dirty="0">
-                <a:solidFill>
-                  <a:srgbClr val="565C6B"/>
+              <a:t>усі шість плиток живі й звірені з SQL</a:t>
+            </a:r>
+            <a:endParaRPr lang="en-US" sz="1250" dirty="0"/>
+          </a:p>
+        </p:txBody>
+      </p:sp>
+      <p:sp>
+        <p:nvSpPr>
+          <p:cNvPr id="10" name="Shape 8"/>
+          <p:cNvSpPr/>
+          <p:nvPr/>
+        </p:nvSpPr>
+        <p:spPr>
+          <a:xfrm>
+            <a:off x="978408" y="2724912"/>
+            <a:ext cx="256032" cy="256032"/>
+          </a:xfrm>
+          <a:prstGeom prst="roundRect">
+            <a:avLst>
+              <a:gd name="adj" fmla="val 21429"/>
+            </a:avLst>
+          </a:prstGeom>
+          <a:solidFill>
+            <a:srgbClr val="E9F3EE"/>
+          </a:solidFill>
+          <a:ln w="12700">
+            <a:solidFill>
+              <a:srgbClr val="177245"/>
+            </a:solidFill>
+            <a:prstDash val="solid"/>
+          </a:ln>
+        </p:spPr>
+      </p:sp>
+      <p:sp>
+        <p:nvSpPr>
+          <p:cNvPr id="11" name="Text 9"/>
+          <p:cNvSpPr/>
+          <p:nvPr/>
+        </p:nvSpPr>
+        <p:spPr>
+          <a:xfrm>
+            <a:off x="978408" y="2724912"/>
+            <a:ext cx="256032" cy="256032"/>
+          </a:xfrm>
+          <a:prstGeom prst="rect">
+            <a:avLst/>
+          </a:prstGeom>
+          <a:noFill/>
+          <a:ln/>
+        </p:spPr>
+        <p:txBody>
+          <a:bodyPr wrap="square" lIns="0" tIns="0" rIns="0" bIns="0" rtlCol="0" anchor="ctr"/>
+          <a:lstStyle/>
+          <a:p>
+            <a:pPr algn="ctr" indent="0" marL="0">
+              <a:buNone/>
+            </a:pPr>
+            <a:r>
+              <a:rPr lang="en-US" sz="1000" b="1" dirty="0">
+                <a:solidFill>
+                  <a:srgbClr val="177245"/>
                 </a:solidFill>
                 <a:latin typeface="Calibri" pitchFamily="34" charset="0"/>
                 <a:ea typeface="Calibri" pitchFamily="34" charset="-122"/>
                 <a:cs typeface="Calibri" pitchFamily="34" charset="-120"/>
               </a:rPr>
-              <a:t>• відтворити «детектива»: інцидент видно в метриках, користувач не бачить 500</a:t>
-            </a:r>
-            <a:endParaRPr lang="en-US" sz="1200" dirty="0"/>
-          </a:p>
+              <a:t>✓</a:t>
+            </a:r>
+            <a:endParaRPr lang="en-US" sz="1000" dirty="0"/>
+          </a:p>
+        </p:txBody>
+      </p:sp>
+      <p:sp>
+        <p:nvSpPr>
+          <p:cNvPr id="12" name="Text 10"/>
+          <p:cNvSpPr/>
+          <p:nvPr/>
+        </p:nvSpPr>
+        <p:spPr>
+          <a:xfrm>
+            <a:off x="1362456" y="2670048"/>
+            <a:ext cx="4617720" cy="384048"/>
+          </a:xfrm>
+          <a:prstGeom prst="rect">
+            <a:avLst/>
+          </a:prstGeom>
+          <a:noFill/>
+          <a:ln/>
+        </p:spPr>
+        <p:txBody>
+          <a:bodyPr wrap="square" lIns="0" tIns="0" rIns="0" bIns="0" rtlCol="0" anchor="ctr"/>
+          <a:lstStyle/>
           <a:p>
             <a:pPr indent="0" marL="0">
               <a:buNone/>
             </a:pPr>
-            <a:endParaRPr lang="en-US" sz="1200" dirty="0"/>
-          </a:p>
-          <a:p>
-            <a:pPr indent="0" marL="0">
-              <a:buNone/>
-            </a:pPr>
-            <a:r>
-              <a:rPr lang="en-US" sz="1200" dirty="0">
-                <a:solidFill>
-                  <a:srgbClr val="565C6B"/>
+            <a:r>
+              <a:rPr lang="en-US" sz="1250" dirty="0">
+                <a:solidFill>
+                  <a:srgbClr val="1B1D23"/>
                 </a:solidFill>
                 <a:latin typeface="Calibri" pitchFamily="34" charset="0"/>
                 <a:ea typeface="Calibri" pitchFamily="34" charset="-122"/>
                 <a:cs typeface="Calibri" pitchFamily="34" charset="-120"/>
               </a:rPr>
-              <a:t>• сформулювати по одному операційному питанню на кожну плитку</a:t>
-            </a:r>
-            <a:endParaRPr lang="en-US" sz="1200" dirty="0"/>
-          </a:p>
-        </p:txBody>
-      </p:sp>
-      <p:sp>
-        <p:nvSpPr>
-          <p:cNvPr id="9" name="Shape 7"/>
-          <p:cNvSpPr/>
-          <p:nvPr/>
-        </p:nvSpPr>
-        <p:spPr>
-          <a:xfrm>
-            <a:off x="6281928" y="1737360"/>
-            <a:ext cx="5349240" cy="2194560"/>
+              <a:t>поясню, чому алерти на p95, а не на середнє</a:t>
+            </a:r>
+            <a:endParaRPr lang="en-US" sz="1250" dirty="0"/>
+          </a:p>
+        </p:txBody>
+      </p:sp>
+      <p:sp>
+        <p:nvSpPr>
+          <p:cNvPr id="13" name="Shape 11"/>
+          <p:cNvSpPr/>
+          <p:nvPr/>
+        </p:nvSpPr>
+        <p:spPr>
+          <a:xfrm>
+            <a:off x="6144768" y="2157984"/>
+            <a:ext cx="256032" cy="256032"/>
           </a:xfrm>
           <a:prstGeom prst="roundRect">
             <a:avLst>
-              <a:gd name="adj" fmla="val 5000"/>
+              <a:gd name="adj" fmla="val 21429"/>
             </a:avLst>
           </a:prstGeom>
           <a:solidFill>
-            <a:srgbClr val="F8F0E2"/>
+            <a:srgbClr val="E9F3EE"/>
           </a:solidFill>
-          <a:ln/>
-        </p:spPr>
-      </p:sp>
-      <p:sp>
-        <p:nvSpPr>
-          <p:cNvPr id="10" name="Text 8"/>
-          <p:cNvSpPr/>
-          <p:nvPr/>
-        </p:nvSpPr>
-        <p:spPr>
-          <a:xfrm>
-            <a:off x="6483096" y="1892808"/>
-            <a:ext cx="4946904" cy="438912"/>
-          </a:xfrm>
-          <a:prstGeom prst="rect">
-            <a:avLst/>
-          </a:prstGeom>
-          <a:noFill/>
-          <a:ln/>
-        </p:spPr>
-        <p:txBody>
-          <a:bodyPr wrap="square" lIns="0" tIns="0" rIns="0" bIns="0" rtlCol="0" anchor="ctr"/>
-          <a:lstStyle/>
-          <a:p>
-            <a:pPr indent="0" marL="0">
-              <a:buNone/>
-            </a:pPr>
-            <a:r>
-              <a:rPr lang="en-US" sz="1450" b="1" dirty="0">
-                <a:solidFill>
-                  <a:srgbClr val="9A5B12"/>
+          <a:ln w="12700">
+            <a:solidFill>
+              <a:srgbClr val="177245"/>
+            </a:solidFill>
+            <a:prstDash val="solid"/>
+          </a:ln>
+        </p:spPr>
+      </p:sp>
+      <p:sp>
+        <p:nvSpPr>
+          <p:cNvPr id="14" name="Text 12"/>
+          <p:cNvSpPr/>
+          <p:nvPr/>
+        </p:nvSpPr>
+        <p:spPr>
+          <a:xfrm>
+            <a:off x="6144768" y="2157984"/>
+            <a:ext cx="256032" cy="256032"/>
+          </a:xfrm>
+          <a:prstGeom prst="rect">
+            <a:avLst/>
+          </a:prstGeom>
+          <a:noFill/>
+          <a:ln/>
+        </p:spPr>
+        <p:txBody>
+          <a:bodyPr wrap="square" lIns="0" tIns="0" rIns="0" bIns="0" rtlCol="0" anchor="ctr"/>
+          <a:lstStyle/>
+          <a:p>
+            <a:pPr algn="ctr" indent="0" marL="0">
+              <a:buNone/>
+            </a:pPr>
+            <a:r>
+              <a:rPr lang="en-US" sz="1000" b="1" dirty="0">
+                <a:solidFill>
+                  <a:srgbClr val="177245"/>
                 </a:solidFill>
                 <a:latin typeface="Calibri" pitchFamily="34" charset="0"/>
                 <a:ea typeface="Calibri" pitchFamily="34" charset="-122"/>
                 <a:cs typeface="Calibri" pitchFamily="34" charset="-120"/>
               </a:rPr>
-              <a:t>Опційно</a:t>
-            </a:r>
-            <a:endParaRPr lang="en-US" sz="1450" dirty="0"/>
-          </a:p>
-        </p:txBody>
-      </p:sp>
-      <p:sp>
-        <p:nvSpPr>
-          <p:cNvPr id="11" name="Text 9"/>
-          <p:cNvSpPr/>
-          <p:nvPr/>
-        </p:nvSpPr>
-        <p:spPr>
-          <a:xfrm>
-            <a:off x="6483096" y="2423160"/>
-            <a:ext cx="4946904" cy="1353312"/>
-          </a:xfrm>
-          <a:prstGeom prst="rect">
-            <a:avLst/>
-          </a:prstGeom>
-          <a:noFill/>
-          <a:ln/>
-        </p:spPr>
-        <p:txBody>
-          <a:bodyPr wrap="square" lIns="0" tIns="0" rIns="0" bIns="0" rtlCol="0" anchor="t"/>
+              <a:t>✓</a:t>
+            </a:r>
+            <a:endParaRPr lang="en-US" sz="1000" dirty="0"/>
+          </a:p>
+        </p:txBody>
+      </p:sp>
+      <p:sp>
+        <p:nvSpPr>
+          <p:cNvPr id="15" name="Text 13"/>
+          <p:cNvSpPr/>
+          <p:nvPr/>
+        </p:nvSpPr>
+        <p:spPr>
+          <a:xfrm>
+            <a:off x="6528816" y="2103120"/>
+            <a:ext cx="4617720" cy="384048"/>
+          </a:xfrm>
+          <a:prstGeom prst="rect">
+            <a:avLst/>
+          </a:prstGeom>
+          <a:noFill/>
+          <a:ln/>
+        </p:spPr>
+        <p:txBody>
+          <a:bodyPr wrap="square" lIns="0" tIns="0" rIns="0" bIns="0" rtlCol="0" anchor="ctr"/>
           <a:lstStyle/>
           <a:p>
             <a:pPr indent="0" marL="0">
               <a:buNone/>
             </a:pPr>
             <a:r>
-              <a:rPr lang="en-US" sz="1200" dirty="0">
+              <a:rPr lang="en-US" sz="1250" dirty="0">
                 <a:solidFill>
                   <a:srgbClr val="1B1D23"/>
                 </a:solidFill>
@@ -17245,34 +17707,34 @@
                 <a:ea typeface="Calibri" pitchFamily="34" charset="-122"/>
                 <a:cs typeface="Calibri" pitchFamily="34" charset="-120"/>
               </a:rPr>
-              <a:t>• таксономія помилок: окремі лічильники за причинами (429 провайдера, timeout інструмента, відмова guardrail)</a:t>
-            </a:r>
-            <a:endParaRPr lang="en-US" sz="1200" dirty="0"/>
-          </a:p>
-        </p:txBody>
-      </p:sp>
-      <p:sp>
-        <p:nvSpPr>
-          <p:cNvPr id="12" name="Shape 10"/>
-          <p:cNvSpPr/>
-          <p:nvPr/>
-        </p:nvSpPr>
-        <p:spPr>
-          <a:xfrm>
-            <a:off x="566928" y="4206240"/>
-            <a:ext cx="11064240" cy="1463040"/>
+              <a:t>відтворю тихий інцидент і покажу його в метриках</a:t>
+            </a:r>
+            <a:endParaRPr lang="en-US" sz="1250" dirty="0"/>
+          </a:p>
+        </p:txBody>
+      </p:sp>
+      <p:sp>
+        <p:nvSpPr>
+          <p:cNvPr id="16" name="Shape 14"/>
+          <p:cNvSpPr/>
+          <p:nvPr/>
+        </p:nvSpPr>
+        <p:spPr>
+          <a:xfrm>
+            <a:off x="6144768" y="2724912"/>
+            <a:ext cx="256032" cy="256032"/>
           </a:xfrm>
           <a:prstGeom prst="roundRect">
             <a:avLst>
-              <a:gd name="adj" fmla="val 8750"/>
+              <a:gd name="adj" fmla="val 21429"/>
             </a:avLst>
           </a:prstGeom>
           <a:solidFill>
-            <a:srgbClr val="FFFFFF"/>
+            <a:srgbClr val="E9F3EE"/>
           </a:solidFill>
-          <a:ln w="19050">
+          <a:ln w="12700">
             <a:solidFill>
-              <a:srgbClr val="4038C4"/>
+              <a:srgbClr val="177245"/>
             </a:solidFill>
             <a:prstDash val="solid"/>
           </a:ln>
@@ -17280,62 +17742,62 @@
       </p:sp>
       <p:sp>
         <p:nvSpPr>
-          <p:cNvPr id="13" name="Text 11"/>
-          <p:cNvSpPr/>
-          <p:nvPr/>
-        </p:nvSpPr>
-        <p:spPr>
-          <a:xfrm>
-            <a:off x="841248" y="4389120"/>
-            <a:ext cx="10515600" cy="365760"/>
-          </a:xfrm>
-          <a:prstGeom prst="rect">
-            <a:avLst/>
-          </a:prstGeom>
-          <a:noFill/>
-          <a:ln/>
-        </p:spPr>
-        <p:txBody>
-          <a:bodyPr wrap="square" lIns="0" tIns="0" rIns="0" bIns="0" rtlCol="0" anchor="ctr"/>
-          <a:lstStyle/>
-          <a:p>
-            <a:pPr indent="0" marL="0">
-              <a:buNone/>
-            </a:pPr>
-            <a:r>
-              <a:rPr lang="en-US" sz="1500" b="1" dirty="0">
-                <a:solidFill>
-                  <a:srgbClr val="4038C4"/>
+          <p:cNvPr id="17" name="Text 15"/>
+          <p:cNvSpPr/>
+          <p:nvPr/>
+        </p:nvSpPr>
+        <p:spPr>
+          <a:xfrm>
+            <a:off x="6144768" y="2724912"/>
+            <a:ext cx="256032" cy="256032"/>
+          </a:xfrm>
+          <a:prstGeom prst="rect">
+            <a:avLst/>
+          </a:prstGeom>
+          <a:noFill/>
+          <a:ln/>
+        </p:spPr>
+        <p:txBody>
+          <a:bodyPr wrap="square" lIns="0" tIns="0" rIns="0" bIns="0" rtlCol="0" anchor="ctr"/>
+          <a:lstStyle/>
+          <a:p>
+            <a:pPr algn="ctr" indent="0" marL="0">
+              <a:buNone/>
+            </a:pPr>
+            <a:r>
+              <a:rPr lang="en-US" sz="1000" b="1" dirty="0">
+                <a:solidFill>
+                  <a:srgbClr val="177245"/>
                 </a:solidFill>
                 <a:latin typeface="Calibri" pitchFamily="34" charset="0"/>
                 <a:ea typeface="Calibri" pitchFamily="34" charset="-122"/>
                 <a:cs typeface="Calibri" pitchFamily="34" charset="-120"/>
               </a:rPr>
-              <a:t>ДЗ тижня 5 — після наступного уроку</a:t>
-            </a:r>
-            <a:endParaRPr lang="en-US" sz="1500" dirty="0"/>
-          </a:p>
-        </p:txBody>
-      </p:sp>
-      <p:sp>
-        <p:nvSpPr>
-          <p:cNvPr id="14" name="Text 12"/>
-          <p:cNvSpPr/>
-          <p:nvPr/>
-        </p:nvSpPr>
-        <p:spPr>
-          <a:xfrm>
-            <a:off x="841248" y="4800600"/>
-            <a:ext cx="10515600" cy="731520"/>
-          </a:xfrm>
-          <a:prstGeom prst="rect">
-            <a:avLst/>
-          </a:prstGeom>
-          <a:noFill/>
-          <a:ln/>
-        </p:spPr>
-        <p:txBody>
-          <a:bodyPr wrap="square" lIns="0" tIns="0" rIns="0" bIns="0" rtlCol="0" anchor="t"/>
+              <a:t>✓</a:t>
+            </a:r>
+            <a:endParaRPr lang="en-US" sz="1000" dirty="0"/>
+          </a:p>
+        </p:txBody>
+      </p:sp>
+      <p:sp>
+        <p:nvSpPr>
+          <p:cNvPr id="18" name="Text 16"/>
+          <p:cNvSpPr/>
+          <p:nvPr/>
+        </p:nvSpPr>
+        <p:spPr>
+          <a:xfrm>
+            <a:off x="6528816" y="2670048"/>
+            <a:ext cx="4617720" cy="384048"/>
+          </a:xfrm>
+          <a:prstGeom prst="rect">
+            <a:avLst/>
+          </a:prstGeom>
+          <a:noFill/>
+          <a:ln/>
+        </p:spPr>
+        <p:txBody>
+          <a:bodyPr wrap="square" lIns="0" tIns="0" rIns="0" bIns="0" rtlCol="0" anchor="ctr"/>
           <a:lstStyle/>
           <a:p>
             <a:pPr indent="0" marL="0">
@@ -17350,9 +17812,48 @@
                 <a:ea typeface="Calibri" pitchFamily="34" charset="-122"/>
                 <a:cs typeface="Calibri" pitchFamily="34" charset="-120"/>
               </a:rPr>
-              <a:t>Воно об'єднує спостережуваність і evals: сьогоднішні ендпоінти вже у вас в руках; після наступного уроку додадуться власні eval-кейси в golden dataset — і тиждень здається одним PR.</a:t>
+              <a:t>назву, що додати в лог для зрізу по тенантах</a:t>
             </a:r>
             <a:endParaRPr lang="en-US" sz="1250" dirty="0"/>
+          </a:p>
+        </p:txBody>
+      </p:sp>
+      <p:sp>
+        <p:nvSpPr>
+          <p:cNvPr id="19" name="Text 17"/>
+          <p:cNvSpPr/>
+          <p:nvPr/>
+        </p:nvSpPr>
+        <p:spPr>
+          <a:xfrm>
+            <a:off x="566928" y="3886200"/>
+            <a:ext cx="10972800" cy="320040"/>
+          </a:xfrm>
+          <a:prstGeom prst="rect">
+            <a:avLst/>
+          </a:prstGeom>
+          <a:noFill/>
+          <a:ln/>
+        </p:spPr>
+        <p:txBody>
+          <a:bodyPr wrap="square" lIns="0" tIns="0" rIns="0" bIns="0" rtlCol="0" anchor="ctr"/>
+          <a:lstStyle/>
+          <a:p>
+            <a:pPr indent="0" marL="0">
+              <a:buNone/>
+            </a:pPr>
+            <a:r>
+              <a:rPr lang="en-US" sz="1200" i="1" dirty="0">
+                <a:solidFill>
+                  <a:srgbClr val="8A90A0"/>
+                </a:solidFill>
+                <a:latin typeface="Calibri" pitchFamily="34" charset="0"/>
+                <a:ea typeface="Calibri" pitchFamily="34" charset="-122"/>
+                <a:cs typeface="Calibri" pitchFamily="34" charset="-120"/>
+              </a:rPr>
+              <a:t>Де завагалися — туди і повертайтеся. Питання — у канал потоку або на Q&amp;A.</a:t>
+            </a:r>
+            <a:endParaRPr lang="en-US" sz="1200" dirty="0"/>
           </a:p>
         </p:txBody>
       </p:sp>
@@ -17415,6 +17916,1495 @@
 <file path=ppt/slides/slide24.xml><?xml version="1.0" encoding="utf-8"?>
 <p:sld xmlns:a="http://schemas.openxmlformats.org/drawingml/2006/main" xmlns:r="http://schemas.openxmlformats.org/officeDocument/2006/relationships" xmlns:p="http://schemas.openxmlformats.org/presentationml/2006/main">
   <p:cSld name="Slide 24">
+    <p:bg>
+      <p:bgPr>
+        <a:solidFill>
+          <a:srgbClr val="F6F7F9"/>
+        </a:solidFill>
+      </p:bgPr>
+    </p:bg>
+    <p:spTree>
+      <p:nvGrpSpPr>
+        <p:cNvPr id="1" name=""/>
+        <p:cNvGrpSpPr/>
+        <p:nvPr/>
+      </p:nvGrpSpPr>
+      <p:grpSpPr>
+        <a:xfrm>
+          <a:off x="0" y="0"/>
+          <a:ext cx="0" cy="0"/>
+          <a:chOff x="0" y="0"/>
+          <a:chExt cx="0" cy="0"/>
+        </a:xfrm>
+      </p:grpSpPr>
+      <p:sp>
+        <p:nvSpPr>
+          <p:cNvPr id="2" name="Text 0"/>
+          <p:cNvSpPr/>
+          <p:nvPr/>
+        </p:nvSpPr>
+        <p:spPr>
+          <a:xfrm>
+            <a:off x="566928" y="365760"/>
+            <a:ext cx="8881567" cy="603504"/>
+          </a:xfrm>
+          <a:prstGeom prst="rect">
+            <a:avLst/>
+          </a:prstGeom>
+          <a:noFill/>
+          <a:ln/>
+        </p:spPr>
+        <p:txBody>
+          <a:bodyPr wrap="square" lIns="0" tIns="0" rIns="0" bIns="0" rtlCol="0" anchor="ctr"/>
+          <a:lstStyle/>
+          <a:p>
+            <a:pPr indent="0" marL="0">
+              <a:buNone/>
+            </a:pPr>
+            <a:r>
+              <a:rPr lang="en-US" sz="2500" b="1" dirty="0">
+                <a:solidFill>
+                  <a:srgbClr val="1B1D23"/>
+                </a:solidFill>
+                <a:latin typeface="Calibri" pitchFamily="34" charset="0"/>
+                <a:ea typeface="Calibri" pitchFamily="34" charset="-122"/>
+                <a:cs typeface="Calibri" pitchFamily="34" charset="-120"/>
+              </a:rPr>
+              <a:t>Антипатерни тижня</a:t>
+            </a:r>
+            <a:endParaRPr lang="en-US" sz="2500" dirty="0"/>
+          </a:p>
+        </p:txBody>
+      </p:sp>
+      <p:sp>
+        <p:nvSpPr>
+          <p:cNvPr id="3" name="Shape 1"/>
+          <p:cNvSpPr/>
+          <p:nvPr/>
+        </p:nvSpPr>
+        <p:spPr>
+          <a:xfrm>
+            <a:off x="10481767" y="530352"/>
+            <a:ext cx="1143000" cy="274320"/>
+          </a:xfrm>
+          <a:prstGeom prst="roundRect">
+            <a:avLst>
+              <a:gd name="adj" fmla="val 50000"/>
+            </a:avLst>
+          </a:prstGeom>
+          <a:solidFill>
+            <a:srgbClr val="F8F0E2"/>
+          </a:solidFill>
+          <a:ln/>
+        </p:spPr>
+      </p:sp>
+      <p:sp>
+        <p:nvSpPr>
+          <p:cNvPr id="4" name="Text 2"/>
+          <p:cNvSpPr/>
+          <p:nvPr/>
+        </p:nvSpPr>
+        <p:spPr>
+          <a:xfrm>
+            <a:off x="10481767" y="530352"/>
+            <a:ext cx="1143000" cy="274320"/>
+          </a:xfrm>
+          <a:prstGeom prst="rect">
+            <a:avLst/>
+          </a:prstGeom>
+          <a:noFill/>
+          <a:ln/>
+        </p:spPr>
+        <p:txBody>
+          <a:bodyPr wrap="square" lIns="0" tIns="0" rIns="0" bIns="0" rtlCol="0" anchor="ctr"/>
+          <a:lstStyle/>
+          <a:p>
+            <a:pPr algn="ctr" indent="0" marL="0">
+              <a:buNone/>
+            </a:pPr>
+            <a:r>
+              <a:rPr lang="en-US" sz="900" b="1" spc="100" kern="0" dirty="0">
+                <a:solidFill>
+                  <a:srgbClr val="9A5B12"/>
+                </a:solidFill>
+                <a:latin typeface="Courier New" pitchFamily="34" charset="0"/>
+                <a:ea typeface="Courier New" pitchFamily="34" charset="-122"/>
+                <a:cs typeface="Courier New" pitchFamily="34" charset="-120"/>
+              </a:rPr>
+              <a:t>РЕФЛЕКСІЯ</a:t>
+            </a:r>
+            <a:endParaRPr lang="en-US" sz="900" dirty="0"/>
+          </a:p>
+        </p:txBody>
+      </p:sp>
+      <p:sp>
+        <p:nvSpPr>
+          <p:cNvPr id="5" name="Text 3"/>
+          <p:cNvSpPr/>
+          <p:nvPr/>
+        </p:nvSpPr>
+        <p:spPr>
+          <a:xfrm>
+            <a:off x="566928" y="6455664"/>
+            <a:ext cx="5486400" cy="274320"/>
+          </a:xfrm>
+          <a:prstGeom prst="rect">
+            <a:avLst/>
+          </a:prstGeom>
+          <a:noFill/>
+          <a:ln/>
+        </p:spPr>
+        <p:txBody>
+          <a:bodyPr wrap="square" lIns="0" tIns="0" rIns="0" bIns="0" rtlCol="0" anchor="ctr"/>
+          <a:lstStyle/>
+          <a:p>
+            <a:pPr indent="0" marL="0">
+              <a:buNone/>
+            </a:pPr>
+            <a:r>
+              <a:rPr lang="en-US" sz="850" dirty="0">
+                <a:solidFill>
+                  <a:srgbClr val="8A90A0"/>
+                </a:solidFill>
+                <a:latin typeface="Courier New" pitchFamily="34" charset="0"/>
+                <a:ea typeface="Courier New" pitchFamily="34" charset="-122"/>
+                <a:cs typeface="Courier New" pitchFamily="34" charset="-120"/>
+              </a:rPr>
+              <a:t>SupportGW · LLMOps Bootcamp · Урок 9 з 12</a:t>
+            </a:r>
+            <a:endParaRPr lang="en-US" sz="850" dirty="0"/>
+          </a:p>
+        </p:txBody>
+      </p:sp>
+      <p:sp>
+        <p:nvSpPr>
+          <p:cNvPr id="6" name="Shape 4"/>
+          <p:cNvSpPr/>
+          <p:nvPr/>
+        </p:nvSpPr>
+        <p:spPr>
+          <a:xfrm>
+            <a:off x="566928" y="1783080"/>
+            <a:ext cx="11064240" cy="731520"/>
+          </a:xfrm>
+          <a:prstGeom prst="roundRect">
+            <a:avLst>
+              <a:gd name="adj" fmla="val 12500"/>
+            </a:avLst>
+          </a:prstGeom>
+          <a:solidFill>
+            <a:srgbClr val="FFFFFF"/>
+          </a:solidFill>
+          <a:ln w="12700">
+            <a:solidFill>
+              <a:srgbClr val="E4E6EC"/>
+            </a:solidFill>
+            <a:prstDash val="solid"/>
+          </a:ln>
+        </p:spPr>
+      </p:sp>
+      <p:sp>
+        <p:nvSpPr>
+          <p:cNvPr id="7" name="Shape 5"/>
+          <p:cNvSpPr/>
+          <p:nvPr/>
+        </p:nvSpPr>
+        <p:spPr>
+          <a:xfrm>
+            <a:off x="768096" y="1956816"/>
+            <a:ext cx="384048" cy="384048"/>
+          </a:xfrm>
+          <a:prstGeom prst="ellipse">
+            <a:avLst/>
+          </a:prstGeom>
+          <a:solidFill>
+            <a:srgbClr val="F9E9E8"/>
+          </a:solidFill>
+          <a:ln/>
+        </p:spPr>
+      </p:sp>
+      <p:sp>
+        <p:nvSpPr>
+          <p:cNvPr id="8" name="Text 6"/>
+          <p:cNvSpPr/>
+          <p:nvPr/>
+        </p:nvSpPr>
+        <p:spPr>
+          <a:xfrm>
+            <a:off x="768096" y="1956816"/>
+            <a:ext cx="384048" cy="384048"/>
+          </a:xfrm>
+          <a:prstGeom prst="rect">
+            <a:avLst/>
+          </a:prstGeom>
+          <a:noFill/>
+          <a:ln/>
+        </p:spPr>
+        <p:txBody>
+          <a:bodyPr wrap="square" lIns="0" tIns="0" rIns="0" bIns="0" rtlCol="0" anchor="ctr"/>
+          <a:lstStyle/>
+          <a:p>
+            <a:pPr algn="ctr" indent="0" marL="0">
+              <a:buNone/>
+            </a:pPr>
+            <a:r>
+              <a:rPr lang="en-US" sz="1300" b="1" dirty="0">
+                <a:solidFill>
+                  <a:srgbClr val="B3261E"/>
+                </a:solidFill>
+                <a:latin typeface="Calibri" pitchFamily="34" charset="0"/>
+                <a:ea typeface="Calibri" pitchFamily="34" charset="-122"/>
+                <a:cs typeface="Calibri" pitchFamily="34" charset="-120"/>
+              </a:rPr>
+              <a:t>✕</a:t>
+            </a:r>
+            <a:endParaRPr lang="en-US" sz="1300" dirty="0"/>
+          </a:p>
+        </p:txBody>
+      </p:sp>
+      <p:sp>
+        <p:nvSpPr>
+          <p:cNvPr id="9" name="Text 7"/>
+          <p:cNvSpPr/>
+          <p:nvPr/>
+        </p:nvSpPr>
+        <p:spPr>
+          <a:xfrm>
+            <a:off x="1298448" y="1783080"/>
+            <a:ext cx="10149840" cy="731520"/>
+          </a:xfrm>
+          <a:prstGeom prst="rect">
+            <a:avLst/>
+          </a:prstGeom>
+          <a:noFill/>
+          <a:ln/>
+        </p:spPr>
+        <p:txBody>
+          <a:bodyPr wrap="square" lIns="0" tIns="0" rIns="0" bIns="0" rtlCol="0" anchor="ctr"/>
+          <a:lstStyle/>
+          <a:p>
+            <a:pPr indent="0" marL="0">
+              <a:buNone/>
+            </a:pPr>
+            <a:r>
+              <a:rPr lang="en-US" sz="1300" b="1" dirty="0">
+                <a:solidFill>
+                  <a:srgbClr val="1B1D23"/>
+                </a:solidFill>
+                <a:latin typeface="Calibri" pitchFamily="34" charset="0"/>
+                <a:ea typeface="Calibri" pitchFamily="34" charset="-122"/>
+                <a:cs typeface="Calibri" pitchFamily="34" charset="-120"/>
+              </a:rPr>
+              <a:t>Алерт на середню latency   </a:t>
+            </a:r>
+            <a:pPr indent="0" marL="0">
+              <a:buNone/>
+            </a:pPr>
+            <a:r>
+              <a:rPr lang="en-US" sz="1150" dirty="0">
+                <a:solidFill>
+                  <a:srgbClr val="565C6B"/>
+                </a:solidFill>
+                <a:latin typeface="Calibri" pitchFamily="34" charset="0"/>
+                <a:ea typeface="Calibri" pitchFamily="34" charset="-122"/>
+                <a:cs typeface="Calibri" pitchFamily="34" charset="-120"/>
+              </a:rPr>
+              <a:t>згладить і сплеск таймаутів, і деградацію провайдера</a:t>
+            </a:r>
+            <a:endParaRPr lang="en-US" sz="1300" dirty="0"/>
+          </a:p>
+        </p:txBody>
+      </p:sp>
+      <p:sp>
+        <p:nvSpPr>
+          <p:cNvPr id="10" name="Shape 8"/>
+          <p:cNvSpPr/>
+          <p:nvPr/>
+        </p:nvSpPr>
+        <p:spPr>
+          <a:xfrm>
+            <a:off x="566928" y="2651760"/>
+            <a:ext cx="11064240" cy="731520"/>
+          </a:xfrm>
+          <a:prstGeom prst="roundRect">
+            <a:avLst>
+              <a:gd name="adj" fmla="val 12500"/>
+            </a:avLst>
+          </a:prstGeom>
+          <a:solidFill>
+            <a:srgbClr val="FFFFFF"/>
+          </a:solidFill>
+          <a:ln w="12700">
+            <a:solidFill>
+              <a:srgbClr val="E4E6EC"/>
+            </a:solidFill>
+            <a:prstDash val="solid"/>
+          </a:ln>
+        </p:spPr>
+      </p:sp>
+      <p:sp>
+        <p:nvSpPr>
+          <p:cNvPr id="11" name="Shape 9"/>
+          <p:cNvSpPr/>
+          <p:nvPr/>
+        </p:nvSpPr>
+        <p:spPr>
+          <a:xfrm>
+            <a:off x="768096" y="2825496"/>
+            <a:ext cx="384048" cy="384048"/>
+          </a:xfrm>
+          <a:prstGeom prst="ellipse">
+            <a:avLst/>
+          </a:prstGeom>
+          <a:solidFill>
+            <a:srgbClr val="F9E9E8"/>
+          </a:solidFill>
+          <a:ln/>
+        </p:spPr>
+      </p:sp>
+      <p:sp>
+        <p:nvSpPr>
+          <p:cNvPr id="12" name="Text 10"/>
+          <p:cNvSpPr/>
+          <p:nvPr/>
+        </p:nvSpPr>
+        <p:spPr>
+          <a:xfrm>
+            <a:off x="768096" y="2825496"/>
+            <a:ext cx="384048" cy="384048"/>
+          </a:xfrm>
+          <a:prstGeom prst="rect">
+            <a:avLst/>
+          </a:prstGeom>
+          <a:noFill/>
+          <a:ln/>
+        </p:spPr>
+        <p:txBody>
+          <a:bodyPr wrap="square" lIns="0" tIns="0" rIns="0" bIns="0" rtlCol="0" anchor="ctr"/>
+          <a:lstStyle/>
+          <a:p>
+            <a:pPr algn="ctr" indent="0" marL="0">
+              <a:buNone/>
+            </a:pPr>
+            <a:r>
+              <a:rPr lang="en-US" sz="1300" b="1" dirty="0">
+                <a:solidFill>
+                  <a:srgbClr val="B3261E"/>
+                </a:solidFill>
+                <a:latin typeface="Calibri" pitchFamily="34" charset="0"/>
+                <a:ea typeface="Calibri" pitchFamily="34" charset="-122"/>
+                <a:cs typeface="Calibri" pitchFamily="34" charset="-120"/>
+              </a:rPr>
+              <a:t>✕</a:t>
+            </a:r>
+            <a:endParaRPr lang="en-US" sz="1300" dirty="0"/>
+          </a:p>
+        </p:txBody>
+      </p:sp>
+      <p:sp>
+        <p:nvSpPr>
+          <p:cNvPr id="13" name="Text 11"/>
+          <p:cNvSpPr/>
+          <p:nvPr/>
+        </p:nvSpPr>
+        <p:spPr>
+          <a:xfrm>
+            <a:off x="1298448" y="2651760"/>
+            <a:ext cx="10149840" cy="731520"/>
+          </a:xfrm>
+          <a:prstGeom prst="rect">
+            <a:avLst/>
+          </a:prstGeom>
+          <a:noFill/>
+          <a:ln/>
+        </p:spPr>
+        <p:txBody>
+          <a:bodyPr wrap="square" lIns="0" tIns="0" rIns="0" bIns="0" rtlCol="0" anchor="ctr"/>
+          <a:lstStyle/>
+          <a:p>
+            <a:pPr indent="0" marL="0">
+              <a:buNone/>
+            </a:pPr>
+            <a:r>
+              <a:rPr lang="en-US" sz="1300" b="1" dirty="0">
+                <a:solidFill>
+                  <a:srgbClr val="1B1D23"/>
+                </a:solidFill>
+                <a:latin typeface="Calibri" pitchFamily="34" charset="0"/>
+                <a:ea typeface="Calibri" pitchFamily="34" charset="-122"/>
+                <a:cs typeface="Calibri" pitchFamily="34" charset="-120"/>
+              </a:rPr>
+              <a:t>Алерт на кожну помилку   </a:t>
+            </a:r>
+            <a:pPr indent="0" marL="0">
+              <a:buNone/>
+            </a:pPr>
+            <a:r>
+              <a:rPr lang="en-US" sz="1150" dirty="0">
+                <a:solidFill>
+                  <a:srgbClr val="565C6B"/>
+                </a:solidFill>
+                <a:latin typeface="Calibri" pitchFamily="34" charset="0"/>
+                <a:ea typeface="Calibri" pitchFamily="34" charset="-122"/>
+                <a:cs typeface="Calibri" pitchFamily="34" charset="-120"/>
+              </a:rPr>
+              <a:t>десять повідомлень щодня і жодної реакції</a:t>
+            </a:r>
+            <a:endParaRPr lang="en-US" sz="1300" dirty="0"/>
+          </a:p>
+        </p:txBody>
+      </p:sp>
+      <p:sp>
+        <p:nvSpPr>
+          <p:cNvPr id="14" name="Shape 12"/>
+          <p:cNvSpPr/>
+          <p:nvPr/>
+        </p:nvSpPr>
+        <p:spPr>
+          <a:xfrm>
+            <a:off x="566928" y="3520440"/>
+            <a:ext cx="11064240" cy="731520"/>
+          </a:xfrm>
+          <a:prstGeom prst="roundRect">
+            <a:avLst>
+              <a:gd name="adj" fmla="val 12500"/>
+            </a:avLst>
+          </a:prstGeom>
+          <a:solidFill>
+            <a:srgbClr val="FFFFFF"/>
+          </a:solidFill>
+          <a:ln w="12700">
+            <a:solidFill>
+              <a:srgbClr val="E4E6EC"/>
+            </a:solidFill>
+            <a:prstDash val="solid"/>
+          </a:ln>
+        </p:spPr>
+      </p:sp>
+      <p:sp>
+        <p:nvSpPr>
+          <p:cNvPr id="15" name="Shape 13"/>
+          <p:cNvSpPr/>
+          <p:nvPr/>
+        </p:nvSpPr>
+        <p:spPr>
+          <a:xfrm>
+            <a:off x="768096" y="3694176"/>
+            <a:ext cx="384048" cy="384048"/>
+          </a:xfrm>
+          <a:prstGeom prst="ellipse">
+            <a:avLst/>
+          </a:prstGeom>
+          <a:solidFill>
+            <a:srgbClr val="F9E9E8"/>
+          </a:solidFill>
+          <a:ln/>
+        </p:spPr>
+      </p:sp>
+      <p:sp>
+        <p:nvSpPr>
+          <p:cNvPr id="16" name="Text 14"/>
+          <p:cNvSpPr/>
+          <p:nvPr/>
+        </p:nvSpPr>
+        <p:spPr>
+          <a:xfrm>
+            <a:off x="768096" y="3694176"/>
+            <a:ext cx="384048" cy="384048"/>
+          </a:xfrm>
+          <a:prstGeom prst="rect">
+            <a:avLst/>
+          </a:prstGeom>
+          <a:noFill/>
+          <a:ln/>
+        </p:spPr>
+        <p:txBody>
+          <a:bodyPr wrap="square" lIns="0" tIns="0" rIns="0" bIns="0" rtlCol="0" anchor="ctr"/>
+          <a:lstStyle/>
+          <a:p>
+            <a:pPr algn="ctr" indent="0" marL="0">
+              <a:buNone/>
+            </a:pPr>
+            <a:r>
+              <a:rPr lang="en-US" sz="1300" b="1" dirty="0">
+                <a:solidFill>
+                  <a:srgbClr val="B3261E"/>
+                </a:solidFill>
+                <a:latin typeface="Calibri" pitchFamily="34" charset="0"/>
+                <a:ea typeface="Calibri" pitchFamily="34" charset="-122"/>
+                <a:cs typeface="Calibri" pitchFamily="34" charset="-120"/>
+              </a:rPr>
+              <a:t>✕</a:t>
+            </a:r>
+            <a:endParaRPr lang="en-US" sz="1300" dirty="0"/>
+          </a:p>
+        </p:txBody>
+      </p:sp>
+      <p:sp>
+        <p:nvSpPr>
+          <p:cNvPr id="17" name="Text 15"/>
+          <p:cNvSpPr/>
+          <p:nvPr/>
+        </p:nvSpPr>
+        <p:spPr>
+          <a:xfrm>
+            <a:off x="1298448" y="3520440"/>
+            <a:ext cx="10149840" cy="731520"/>
+          </a:xfrm>
+          <a:prstGeom prst="rect">
+            <a:avLst/>
+          </a:prstGeom>
+          <a:noFill/>
+          <a:ln/>
+        </p:spPr>
+        <p:txBody>
+          <a:bodyPr wrap="square" lIns="0" tIns="0" rIns="0" bIns="0" rtlCol="0" anchor="ctr"/>
+          <a:lstStyle/>
+          <a:p>
+            <a:pPr indent="0" marL="0">
+              <a:buNone/>
+            </a:pPr>
+            <a:r>
+              <a:rPr lang="en-US" sz="1300" b="1" dirty="0">
+                <a:solidFill>
+                  <a:srgbClr val="1B1D23"/>
+                </a:solidFill>
+                <a:latin typeface="Calibri" pitchFamily="34" charset="0"/>
+                <a:ea typeface="Calibri" pitchFamily="34" charset="-122"/>
+                <a:cs typeface="Calibri" pitchFamily="34" charset="-120"/>
+              </a:rPr>
+              <a:t>Плитка без питання   </a:t>
+            </a:r>
+            <a:pPr indent="0" marL="0">
+              <a:buNone/>
+            </a:pPr>
+            <a:r>
+              <a:rPr lang="en-US" sz="1150" dirty="0">
+                <a:solidFill>
+                  <a:srgbClr val="565C6B"/>
+                </a:solidFill>
+                <a:latin typeface="Calibri" pitchFamily="34" charset="0"/>
+                <a:ea typeface="Calibri" pitchFamily="34" charset="-122"/>
+                <a:cs typeface="Calibri" pitchFamily="34" charset="-120"/>
+              </a:rPr>
+              <a:t>прикраса, яку перестають помічати за тиждень</a:t>
+            </a:r>
+            <a:endParaRPr lang="en-US" sz="1300" dirty="0"/>
+          </a:p>
+        </p:txBody>
+      </p:sp>
+      <p:sp>
+        <p:nvSpPr>
+          <p:cNvPr id="18" name="Shape 16"/>
+          <p:cNvSpPr/>
+          <p:nvPr/>
+        </p:nvSpPr>
+        <p:spPr>
+          <a:xfrm>
+            <a:off x="566928" y="4389120"/>
+            <a:ext cx="11064240" cy="731520"/>
+          </a:xfrm>
+          <a:prstGeom prst="roundRect">
+            <a:avLst>
+              <a:gd name="adj" fmla="val 12500"/>
+            </a:avLst>
+          </a:prstGeom>
+          <a:solidFill>
+            <a:srgbClr val="FFFFFF"/>
+          </a:solidFill>
+          <a:ln w="12700">
+            <a:solidFill>
+              <a:srgbClr val="E4E6EC"/>
+            </a:solidFill>
+            <a:prstDash val="solid"/>
+          </a:ln>
+        </p:spPr>
+      </p:sp>
+      <p:sp>
+        <p:nvSpPr>
+          <p:cNvPr id="19" name="Shape 17"/>
+          <p:cNvSpPr/>
+          <p:nvPr/>
+        </p:nvSpPr>
+        <p:spPr>
+          <a:xfrm>
+            <a:off x="768096" y="4562856"/>
+            <a:ext cx="384048" cy="384048"/>
+          </a:xfrm>
+          <a:prstGeom prst="ellipse">
+            <a:avLst/>
+          </a:prstGeom>
+          <a:solidFill>
+            <a:srgbClr val="F9E9E8"/>
+          </a:solidFill>
+          <a:ln/>
+        </p:spPr>
+      </p:sp>
+      <p:sp>
+        <p:nvSpPr>
+          <p:cNvPr id="20" name="Text 18"/>
+          <p:cNvSpPr/>
+          <p:nvPr/>
+        </p:nvSpPr>
+        <p:spPr>
+          <a:xfrm>
+            <a:off x="768096" y="4562856"/>
+            <a:ext cx="384048" cy="384048"/>
+          </a:xfrm>
+          <a:prstGeom prst="rect">
+            <a:avLst/>
+          </a:prstGeom>
+          <a:noFill/>
+          <a:ln/>
+        </p:spPr>
+        <p:txBody>
+          <a:bodyPr wrap="square" lIns="0" tIns="0" rIns="0" bIns="0" rtlCol="0" anchor="ctr"/>
+          <a:lstStyle/>
+          <a:p>
+            <a:pPr algn="ctr" indent="0" marL="0">
+              <a:buNone/>
+            </a:pPr>
+            <a:r>
+              <a:rPr lang="en-US" sz="1300" b="1" dirty="0">
+                <a:solidFill>
+                  <a:srgbClr val="B3261E"/>
+                </a:solidFill>
+                <a:latin typeface="Calibri" pitchFamily="34" charset="0"/>
+                <a:ea typeface="Calibri" pitchFamily="34" charset="-122"/>
+                <a:cs typeface="Calibri" pitchFamily="34" charset="-120"/>
+              </a:rPr>
+              <a:t>✕</a:t>
+            </a:r>
+            <a:endParaRPr lang="en-US" sz="1300" dirty="0"/>
+          </a:p>
+        </p:txBody>
+      </p:sp>
+      <p:sp>
+        <p:nvSpPr>
+          <p:cNvPr id="21" name="Text 19"/>
+          <p:cNvSpPr/>
+          <p:nvPr/>
+        </p:nvSpPr>
+        <p:spPr>
+          <a:xfrm>
+            <a:off x="1298448" y="4389120"/>
+            <a:ext cx="10149840" cy="731520"/>
+          </a:xfrm>
+          <a:prstGeom prst="rect">
+            <a:avLst/>
+          </a:prstGeom>
+          <a:noFill/>
+          <a:ln/>
+        </p:spPr>
+        <p:txBody>
+          <a:bodyPr wrap="square" lIns="0" tIns="0" rIns="0" bIns="0" rtlCol="0" anchor="ctr"/>
+          <a:lstStyle/>
+          <a:p>
+            <a:pPr indent="0" marL="0">
+              <a:buNone/>
+            </a:pPr>
+            <a:r>
+              <a:rPr lang="en-US" sz="1300" b="1" dirty="0">
+                <a:solidFill>
+                  <a:srgbClr val="1B1D23"/>
+                </a:solidFill>
+                <a:latin typeface="Calibri" pitchFamily="34" charset="0"/>
+                <a:ea typeface="Calibri" pitchFamily="34" charset="-122"/>
+                <a:cs typeface="Calibri" pitchFamily="34" charset="-120"/>
+              </a:rPr>
+              <a:t>Статус провайдера прибитий до «ok»   </a:t>
+            </a:r>
+            <a:pPr indent="0" marL="0">
+              <a:buNone/>
+            </a:pPr>
+            <a:r>
+              <a:rPr lang="en-US" sz="1150" dirty="0">
+                <a:solidFill>
+                  <a:srgbClr val="565C6B"/>
+                </a:solidFill>
+                <a:latin typeface="Calibri" pitchFamily="34" charset="0"/>
+                <a:ea typeface="Calibri" pitchFamily="34" charset="-122"/>
+                <a:cs typeface="Calibri" pitchFamily="34" charset="-120"/>
+              </a:rPr>
+              <a:t>брехня рівно в момент, коли правда потрібна</a:t>
+            </a:r>
+            <a:endParaRPr lang="en-US" sz="1300" dirty="0"/>
+          </a:p>
+        </p:txBody>
+      </p:sp>
+      <p:sp>
+        <p:nvSpPr>
+          <p:cNvPr id="22" name="Shape 20"/>
+          <p:cNvSpPr/>
+          <p:nvPr/>
+        </p:nvSpPr>
+        <p:spPr>
+          <a:xfrm>
+            <a:off x="566928" y="5257800"/>
+            <a:ext cx="11064240" cy="731520"/>
+          </a:xfrm>
+          <a:prstGeom prst="roundRect">
+            <a:avLst>
+              <a:gd name="adj" fmla="val 12500"/>
+            </a:avLst>
+          </a:prstGeom>
+          <a:solidFill>
+            <a:srgbClr val="FFFFFF"/>
+          </a:solidFill>
+          <a:ln w="12700">
+            <a:solidFill>
+              <a:srgbClr val="E4E6EC"/>
+            </a:solidFill>
+            <a:prstDash val="solid"/>
+          </a:ln>
+        </p:spPr>
+      </p:sp>
+      <p:sp>
+        <p:nvSpPr>
+          <p:cNvPr id="23" name="Shape 21"/>
+          <p:cNvSpPr/>
+          <p:nvPr/>
+        </p:nvSpPr>
+        <p:spPr>
+          <a:xfrm>
+            <a:off x="768096" y="5431536"/>
+            <a:ext cx="384048" cy="384048"/>
+          </a:xfrm>
+          <a:prstGeom prst="ellipse">
+            <a:avLst/>
+          </a:prstGeom>
+          <a:solidFill>
+            <a:srgbClr val="F9E9E8"/>
+          </a:solidFill>
+          <a:ln/>
+        </p:spPr>
+      </p:sp>
+      <p:sp>
+        <p:nvSpPr>
+          <p:cNvPr id="24" name="Text 22"/>
+          <p:cNvSpPr/>
+          <p:nvPr/>
+        </p:nvSpPr>
+        <p:spPr>
+          <a:xfrm>
+            <a:off x="768096" y="5431536"/>
+            <a:ext cx="384048" cy="384048"/>
+          </a:xfrm>
+          <a:prstGeom prst="rect">
+            <a:avLst/>
+          </a:prstGeom>
+          <a:noFill/>
+          <a:ln/>
+        </p:spPr>
+        <p:txBody>
+          <a:bodyPr wrap="square" lIns="0" tIns="0" rIns="0" bIns="0" rtlCol="0" anchor="ctr"/>
+          <a:lstStyle/>
+          <a:p>
+            <a:pPr algn="ctr" indent="0" marL="0">
+              <a:buNone/>
+            </a:pPr>
+            <a:r>
+              <a:rPr lang="en-US" sz="1300" b="1" dirty="0">
+                <a:solidFill>
+                  <a:srgbClr val="B3261E"/>
+                </a:solidFill>
+                <a:latin typeface="Calibri" pitchFamily="34" charset="0"/>
+                <a:ea typeface="Calibri" pitchFamily="34" charset="-122"/>
+                <a:cs typeface="Calibri" pitchFamily="34" charset="-120"/>
+              </a:rPr>
+              <a:t>✕</a:t>
+            </a:r>
+            <a:endParaRPr lang="en-US" sz="1300" dirty="0"/>
+          </a:p>
+        </p:txBody>
+      </p:sp>
+      <p:sp>
+        <p:nvSpPr>
+          <p:cNvPr id="25" name="Text 23"/>
+          <p:cNvSpPr/>
+          <p:nvPr/>
+        </p:nvSpPr>
+        <p:spPr>
+          <a:xfrm>
+            <a:off x="1298448" y="5257800"/>
+            <a:ext cx="10149840" cy="731520"/>
+          </a:xfrm>
+          <a:prstGeom prst="rect">
+            <a:avLst/>
+          </a:prstGeom>
+          <a:noFill/>
+          <a:ln/>
+        </p:spPr>
+        <p:txBody>
+          <a:bodyPr wrap="square" lIns="0" tIns="0" rIns="0" bIns="0" rtlCol="0" anchor="ctr"/>
+          <a:lstStyle/>
+          <a:p>
+            <a:pPr indent="0" marL="0">
+              <a:buNone/>
+            </a:pPr>
+            <a:r>
+              <a:rPr lang="en-US" sz="1300" b="1" dirty="0">
+                <a:solidFill>
+                  <a:srgbClr val="1B1D23"/>
+                </a:solidFill>
+                <a:latin typeface="Calibri" pitchFamily="34" charset="0"/>
+                <a:ea typeface="Calibri" pitchFamily="34" charset="-122"/>
+                <a:cs typeface="Calibri" pitchFamily="34" charset="-120"/>
+              </a:rPr>
+              <a:t>User_id у мітках метрик   </a:t>
+            </a:r>
+            <a:pPr indent="0" marL="0">
+              <a:buNone/>
+            </a:pPr>
+            <a:r>
+              <a:rPr lang="en-US" sz="1150" dirty="0">
+                <a:solidFill>
+                  <a:srgbClr val="565C6B"/>
+                </a:solidFill>
+                <a:latin typeface="Calibri" pitchFamily="34" charset="0"/>
+                <a:ea typeface="Calibri" pitchFamily="34" charset="-122"/>
+                <a:cs typeface="Calibri" pitchFamily="34" charset="-120"/>
+              </a:rPr>
+              <a:t>сховище метрик вибухає на кардинальності</a:t>
+            </a:r>
+            <a:endParaRPr lang="en-US" sz="1300" dirty="0"/>
+          </a:p>
+        </p:txBody>
+      </p:sp>
+      <p:sp>
+        <p:nvSpPr>
+          <p:cNvPr id="25" name="Slide Number Placeholder 0"/>
+          <p:cNvSpPr>
+            <a:spLocks noGrp="1"/>
+          </p:cNvSpPr>
+          <p:nvPr>
+            <p:ph type="sldNum" sz="quarter" idx="4294967295"/>
+          </p:nvPr>
+        </p:nvSpPr>
+        <p:spPr>
+          <a:xfrm>
+            <a:off x="11323015" y="6455664"/>
+            <a:ext cx="365760" cy="274320"/>
+          </a:xfrm>
+          <a:prstGeom prst="rect">
+            <a:avLst/>
+          </a:prstGeom>
+          <a:extLst>
+            <a:ext uri="{C572A759-6A51-4108-AA02-DFA0A04FC94B}">
+              <ma14:wrappingTextBoxFlag xmlns:ma14="http://schemas.microsoft.com/office/mac/drawingml/2011/main" val="0"/>
+            </a:ext>
+          </a:extLst>
+        </p:spPr>
+        <p:txBody>
+          <a:bodyPr/>
+          <a:lstStyle>
+            <a:lvl1pPr>
+              <a:defRPr sz="850">
+                <a:solidFill>
+                  <a:srgbClr val="8A90A0"/>
+                </a:solidFill>
+                <a:latin typeface="Courier New"/>
+                <a:ea typeface="Courier New"/>
+                <a:cs typeface="Courier New"/>
+              </a:defRPr>
+            </a:lvl1pPr>
+          </a:lstStyle>
+          <a:p>
+            <a:pPr algn="l"/>
+            <a:fld id="{F7021451-1387-4CA6-816F-3879F97B5CBC}" type="slidenum">
+              <a:rPr b="0" lang="en-US"/>
+              <a:t>24</a:t>
+            </a:fld>
+            <a:endParaRPr lang="en-US"/>
+          </a:p>
+        </p:txBody>
+      </p:sp>
+    </p:spTree>
+  </p:cSld>
+  <p:clrMapOvr>
+    <a:masterClrMapping/>
+  </p:clrMapOvr>
+</p:sld>
+</file>
+
+<file path=ppt/slides/slide25.xml><?xml version="1.0" encoding="utf-8"?>
+<p:sld xmlns:a="http://schemas.openxmlformats.org/drawingml/2006/main" xmlns:r="http://schemas.openxmlformats.org/officeDocument/2006/relationships" xmlns:p="http://schemas.openxmlformats.org/presentationml/2006/main">
+  <p:cSld name="Slide 25">
+    <p:bg>
+      <p:bgPr>
+        <a:solidFill>
+          <a:srgbClr val="F6F7F9"/>
+        </a:solidFill>
+      </p:bgPr>
+    </p:bg>
+    <p:spTree>
+      <p:nvGrpSpPr>
+        <p:cNvPr id="1" name=""/>
+        <p:cNvGrpSpPr/>
+        <p:nvPr/>
+      </p:nvGrpSpPr>
+      <p:grpSpPr>
+        <a:xfrm>
+          <a:off x="0" y="0"/>
+          <a:ext cx="0" cy="0"/>
+          <a:chOff x="0" y="0"/>
+          <a:chExt cx="0" cy="0"/>
+        </a:xfrm>
+      </p:grpSpPr>
+      <p:sp>
+        <p:nvSpPr>
+          <p:cNvPr id="2" name="Text 0"/>
+          <p:cNvSpPr/>
+          <p:nvPr/>
+        </p:nvSpPr>
+        <p:spPr>
+          <a:xfrm>
+            <a:off x="566928" y="365760"/>
+            <a:ext cx="8881567" cy="603504"/>
+          </a:xfrm>
+          <a:prstGeom prst="rect">
+            <a:avLst/>
+          </a:prstGeom>
+          <a:noFill/>
+          <a:ln/>
+        </p:spPr>
+        <p:txBody>
+          <a:bodyPr wrap="square" lIns="0" tIns="0" rIns="0" bIns="0" rtlCol="0" anchor="ctr"/>
+          <a:lstStyle/>
+          <a:p>
+            <a:pPr indent="0" marL="0">
+              <a:buNone/>
+            </a:pPr>
+            <a:r>
+              <a:rPr lang="en-US" sz="2500" b="1" dirty="0">
+                <a:solidFill>
+                  <a:srgbClr val="1B1D23"/>
+                </a:solidFill>
+                <a:latin typeface="Calibri" pitchFamily="34" charset="0"/>
+                <a:ea typeface="Calibri" pitchFamily="34" charset="-122"/>
+                <a:cs typeface="Calibri" pitchFamily="34" charset="-120"/>
+              </a:rPr>
+              <a:t>Домашнє завдання</a:t>
+            </a:r>
+            <a:endParaRPr lang="en-US" sz="2500" dirty="0"/>
+          </a:p>
+        </p:txBody>
+      </p:sp>
+      <p:sp>
+        <p:nvSpPr>
+          <p:cNvPr id="3" name="Shape 1"/>
+          <p:cNvSpPr/>
+          <p:nvPr/>
+        </p:nvSpPr>
+        <p:spPr>
+          <a:xfrm>
+            <a:off x="10481767" y="530352"/>
+            <a:ext cx="1143000" cy="274320"/>
+          </a:xfrm>
+          <a:prstGeom prst="roundRect">
+            <a:avLst>
+              <a:gd name="adj" fmla="val 50000"/>
+            </a:avLst>
+          </a:prstGeom>
+          <a:solidFill>
+            <a:srgbClr val="E9F3EE"/>
+          </a:solidFill>
+          <a:ln/>
+        </p:spPr>
+      </p:sp>
+      <p:sp>
+        <p:nvSpPr>
+          <p:cNvPr id="4" name="Text 2"/>
+          <p:cNvSpPr/>
+          <p:nvPr/>
+        </p:nvSpPr>
+        <p:spPr>
+          <a:xfrm>
+            <a:off x="10481767" y="530352"/>
+            <a:ext cx="1143000" cy="274320"/>
+          </a:xfrm>
+          <a:prstGeom prst="rect">
+            <a:avLst/>
+          </a:prstGeom>
+          <a:noFill/>
+          <a:ln/>
+        </p:spPr>
+        <p:txBody>
+          <a:bodyPr wrap="square" lIns="0" tIns="0" rIns="0" bIns="0" rtlCol="0" anchor="ctr"/>
+          <a:lstStyle/>
+          <a:p>
+            <a:pPr algn="ctr" indent="0" marL="0">
+              <a:buNone/>
+            </a:pPr>
+            <a:r>
+              <a:rPr lang="en-US" sz="900" b="1" spc="100" kern="0" dirty="0">
+                <a:solidFill>
+                  <a:srgbClr val="177245"/>
+                </a:solidFill>
+                <a:latin typeface="Courier New" pitchFamily="34" charset="0"/>
+                <a:ea typeface="Courier New" pitchFamily="34" charset="-122"/>
+                <a:cs typeface="Courier New" pitchFamily="34" charset="-120"/>
+              </a:rPr>
+              <a:t>ПРАКТИКА</a:t>
+            </a:r>
+            <a:endParaRPr lang="en-US" sz="900" dirty="0"/>
+          </a:p>
+        </p:txBody>
+      </p:sp>
+      <p:sp>
+        <p:nvSpPr>
+          <p:cNvPr id="5" name="Text 3"/>
+          <p:cNvSpPr/>
+          <p:nvPr/>
+        </p:nvSpPr>
+        <p:spPr>
+          <a:xfrm>
+            <a:off x="566928" y="6455664"/>
+            <a:ext cx="5486400" cy="274320"/>
+          </a:xfrm>
+          <a:prstGeom prst="rect">
+            <a:avLst/>
+          </a:prstGeom>
+          <a:noFill/>
+          <a:ln/>
+        </p:spPr>
+        <p:txBody>
+          <a:bodyPr wrap="square" lIns="0" tIns="0" rIns="0" bIns="0" rtlCol="0" anchor="ctr"/>
+          <a:lstStyle/>
+          <a:p>
+            <a:pPr indent="0" marL="0">
+              <a:buNone/>
+            </a:pPr>
+            <a:r>
+              <a:rPr lang="en-US" sz="850" dirty="0">
+                <a:solidFill>
+                  <a:srgbClr val="8A90A0"/>
+                </a:solidFill>
+                <a:latin typeface="Courier New" pitchFamily="34" charset="0"/>
+                <a:ea typeface="Courier New" pitchFamily="34" charset="-122"/>
+                <a:cs typeface="Courier New" pitchFamily="34" charset="-120"/>
+              </a:rPr>
+              <a:t>SupportGW · LLMOps Bootcamp · Урок 9 з 12</a:t>
+            </a:r>
+            <a:endParaRPr lang="en-US" sz="850" dirty="0"/>
+          </a:p>
+        </p:txBody>
+      </p:sp>
+      <p:sp>
+        <p:nvSpPr>
+          <p:cNvPr id="6" name="Shape 4"/>
+          <p:cNvSpPr/>
+          <p:nvPr/>
+        </p:nvSpPr>
+        <p:spPr>
+          <a:xfrm>
+            <a:off x="566928" y="1737360"/>
+            <a:ext cx="5349240" cy="2194560"/>
+          </a:xfrm>
+          <a:prstGeom prst="roundRect">
+            <a:avLst>
+              <a:gd name="adj" fmla="val 5000"/>
+            </a:avLst>
+          </a:prstGeom>
+          <a:solidFill>
+            <a:srgbClr val="FFFFFF"/>
+          </a:solidFill>
+          <a:ln w="12700">
+            <a:solidFill>
+              <a:srgbClr val="E4E6EC"/>
+            </a:solidFill>
+            <a:prstDash val="solid"/>
+          </a:ln>
+        </p:spPr>
+      </p:sp>
+      <p:sp>
+        <p:nvSpPr>
+          <p:cNvPr id="7" name="Text 5"/>
+          <p:cNvSpPr/>
+          <p:nvPr/>
+        </p:nvSpPr>
+        <p:spPr>
+          <a:xfrm>
+            <a:off x="768096" y="1892808"/>
+            <a:ext cx="4946904" cy="438912"/>
+          </a:xfrm>
+          <a:prstGeom prst="rect">
+            <a:avLst/>
+          </a:prstGeom>
+          <a:noFill/>
+          <a:ln/>
+        </p:spPr>
+        <p:txBody>
+          <a:bodyPr wrap="square" lIns="0" tIns="0" rIns="0" bIns="0" rtlCol="0" anchor="ctr"/>
+          <a:lstStyle/>
+          <a:p>
+            <a:pPr indent="0" marL="0">
+              <a:buNone/>
+            </a:pPr>
+            <a:r>
+              <a:rPr lang="en-US" sz="1450" b="1" dirty="0">
+                <a:solidFill>
+                  <a:srgbClr val="1B1D23"/>
+                </a:solidFill>
+                <a:latin typeface="Calibri" pitchFamily="34" charset="0"/>
+                <a:ea typeface="Calibri" pitchFamily="34" charset="-122"/>
+                <a:cs typeface="Calibri" pitchFamily="34" charset="-120"/>
+              </a:rPr>
+              <a:t>Обов'язково — без здачі</a:t>
+            </a:r>
+            <a:endParaRPr lang="en-US" sz="1450" dirty="0"/>
+          </a:p>
+        </p:txBody>
+      </p:sp>
+      <p:sp>
+        <p:nvSpPr>
+          <p:cNvPr id="8" name="Text 6"/>
+          <p:cNvSpPr/>
+          <p:nvPr/>
+        </p:nvSpPr>
+        <p:spPr>
+          <a:xfrm>
+            <a:off x="768096" y="2423160"/>
+            <a:ext cx="4946904" cy="1353312"/>
+          </a:xfrm>
+          <a:prstGeom prst="rect">
+            <a:avLst/>
+          </a:prstGeom>
+          <a:noFill/>
+          <a:ln/>
+        </p:spPr>
+        <p:txBody>
+          <a:bodyPr wrap="square" lIns="0" tIns="0" rIns="0" bIns="0" rtlCol="0" anchor="t"/>
+          <a:lstStyle/>
+          <a:p>
+            <a:pPr indent="0" marL="0">
+              <a:buNone/>
+            </a:pPr>
+            <a:r>
+              <a:rPr lang="en-US" sz="1200" dirty="0">
+                <a:solidFill>
+                  <a:srgbClr val="565C6B"/>
+                </a:solidFill>
+                <a:latin typeface="Calibri" pitchFamily="34" charset="0"/>
+                <a:ea typeface="Calibri" pitchFamily="34" charset="-122"/>
+                <a:cs typeface="Calibri" pitchFamily="34" charset="-120"/>
+              </a:rPr>
+              <a:t>• закріпити лабу: всі шість плиток живі, звірені з SQL</a:t>
+            </a:r>
+            <a:endParaRPr lang="en-US" sz="1200" dirty="0"/>
+          </a:p>
+          <a:p>
+            <a:pPr indent="0" marL="0">
+              <a:buNone/>
+            </a:pPr>
+            <a:endParaRPr lang="en-US" sz="1200" dirty="0"/>
+          </a:p>
+          <a:p>
+            <a:pPr indent="0" marL="0">
+              <a:buNone/>
+            </a:pPr>
+            <a:r>
+              <a:rPr lang="en-US" sz="1200" dirty="0">
+                <a:solidFill>
+                  <a:srgbClr val="565C6B"/>
+                </a:solidFill>
+                <a:latin typeface="Calibri" pitchFamily="34" charset="0"/>
+                <a:ea typeface="Calibri" pitchFamily="34" charset="-122"/>
+                <a:cs typeface="Calibri" pitchFamily="34" charset="-120"/>
+              </a:rPr>
+              <a:t>• відтворити «детектива»: інцидент видно в метриках, користувач не бачить 500</a:t>
+            </a:r>
+            <a:endParaRPr lang="en-US" sz="1200" dirty="0"/>
+          </a:p>
+          <a:p>
+            <a:pPr indent="0" marL="0">
+              <a:buNone/>
+            </a:pPr>
+            <a:endParaRPr lang="en-US" sz="1200" dirty="0"/>
+          </a:p>
+          <a:p>
+            <a:pPr indent="0" marL="0">
+              <a:buNone/>
+            </a:pPr>
+            <a:r>
+              <a:rPr lang="en-US" sz="1200" dirty="0">
+                <a:solidFill>
+                  <a:srgbClr val="565C6B"/>
+                </a:solidFill>
+                <a:latin typeface="Calibri" pitchFamily="34" charset="0"/>
+                <a:ea typeface="Calibri" pitchFamily="34" charset="-122"/>
+                <a:cs typeface="Calibri" pitchFamily="34" charset="-120"/>
+              </a:rPr>
+              <a:t>• сформулювати по одному операційному питанню на кожну плитку</a:t>
+            </a:r>
+            <a:endParaRPr lang="en-US" sz="1200" dirty="0"/>
+          </a:p>
+        </p:txBody>
+      </p:sp>
+      <p:sp>
+        <p:nvSpPr>
+          <p:cNvPr id="9" name="Shape 7"/>
+          <p:cNvSpPr/>
+          <p:nvPr/>
+        </p:nvSpPr>
+        <p:spPr>
+          <a:xfrm>
+            <a:off x="6281928" y="1737360"/>
+            <a:ext cx="5349240" cy="2194560"/>
+          </a:xfrm>
+          <a:prstGeom prst="roundRect">
+            <a:avLst>
+              <a:gd name="adj" fmla="val 5000"/>
+            </a:avLst>
+          </a:prstGeom>
+          <a:solidFill>
+            <a:srgbClr val="F8F0E2"/>
+          </a:solidFill>
+          <a:ln/>
+        </p:spPr>
+      </p:sp>
+      <p:sp>
+        <p:nvSpPr>
+          <p:cNvPr id="10" name="Text 8"/>
+          <p:cNvSpPr/>
+          <p:nvPr/>
+        </p:nvSpPr>
+        <p:spPr>
+          <a:xfrm>
+            <a:off x="6483096" y="1892808"/>
+            <a:ext cx="4946904" cy="438912"/>
+          </a:xfrm>
+          <a:prstGeom prst="rect">
+            <a:avLst/>
+          </a:prstGeom>
+          <a:noFill/>
+          <a:ln/>
+        </p:spPr>
+        <p:txBody>
+          <a:bodyPr wrap="square" lIns="0" tIns="0" rIns="0" bIns="0" rtlCol="0" anchor="ctr"/>
+          <a:lstStyle/>
+          <a:p>
+            <a:pPr indent="0" marL="0">
+              <a:buNone/>
+            </a:pPr>
+            <a:r>
+              <a:rPr lang="en-US" sz="1450" b="1" dirty="0">
+                <a:solidFill>
+                  <a:srgbClr val="9A5B12"/>
+                </a:solidFill>
+                <a:latin typeface="Calibri" pitchFamily="34" charset="0"/>
+                <a:ea typeface="Calibri" pitchFamily="34" charset="-122"/>
+                <a:cs typeface="Calibri" pitchFamily="34" charset="-120"/>
+              </a:rPr>
+              <a:t>Опційно</a:t>
+            </a:r>
+            <a:endParaRPr lang="en-US" sz="1450" dirty="0"/>
+          </a:p>
+        </p:txBody>
+      </p:sp>
+      <p:sp>
+        <p:nvSpPr>
+          <p:cNvPr id="11" name="Text 9"/>
+          <p:cNvSpPr/>
+          <p:nvPr/>
+        </p:nvSpPr>
+        <p:spPr>
+          <a:xfrm>
+            <a:off x="6483096" y="2423160"/>
+            <a:ext cx="4946904" cy="1353312"/>
+          </a:xfrm>
+          <a:prstGeom prst="rect">
+            <a:avLst/>
+          </a:prstGeom>
+          <a:noFill/>
+          <a:ln/>
+        </p:spPr>
+        <p:txBody>
+          <a:bodyPr wrap="square" lIns="0" tIns="0" rIns="0" bIns="0" rtlCol="0" anchor="t"/>
+          <a:lstStyle/>
+          <a:p>
+            <a:pPr indent="0" marL="0">
+              <a:buNone/>
+            </a:pPr>
+            <a:r>
+              <a:rPr lang="en-US" sz="1200" dirty="0">
+                <a:solidFill>
+                  <a:srgbClr val="1B1D23"/>
+                </a:solidFill>
+                <a:latin typeface="Calibri" pitchFamily="34" charset="0"/>
+                <a:ea typeface="Calibri" pitchFamily="34" charset="-122"/>
+                <a:cs typeface="Calibri" pitchFamily="34" charset="-120"/>
+              </a:rPr>
+              <a:t>• таксономія помилок: окремі лічильники за причинами (429 провайдера, timeout інструмента, відмова guardrail)</a:t>
+            </a:r>
+            <a:endParaRPr lang="en-US" sz="1200" dirty="0"/>
+          </a:p>
+        </p:txBody>
+      </p:sp>
+      <p:sp>
+        <p:nvSpPr>
+          <p:cNvPr id="12" name="Shape 10"/>
+          <p:cNvSpPr/>
+          <p:nvPr/>
+        </p:nvSpPr>
+        <p:spPr>
+          <a:xfrm>
+            <a:off x="566928" y="4206240"/>
+            <a:ext cx="11064240" cy="1463040"/>
+          </a:xfrm>
+          <a:prstGeom prst="roundRect">
+            <a:avLst>
+              <a:gd name="adj" fmla="val 8750"/>
+            </a:avLst>
+          </a:prstGeom>
+          <a:solidFill>
+            <a:srgbClr val="FFFFFF"/>
+          </a:solidFill>
+          <a:ln w="19050">
+            <a:solidFill>
+              <a:srgbClr val="4038C4"/>
+            </a:solidFill>
+            <a:prstDash val="solid"/>
+          </a:ln>
+        </p:spPr>
+      </p:sp>
+      <p:sp>
+        <p:nvSpPr>
+          <p:cNvPr id="13" name="Text 11"/>
+          <p:cNvSpPr/>
+          <p:nvPr/>
+        </p:nvSpPr>
+        <p:spPr>
+          <a:xfrm>
+            <a:off x="841248" y="4389120"/>
+            <a:ext cx="10515600" cy="365760"/>
+          </a:xfrm>
+          <a:prstGeom prst="rect">
+            <a:avLst/>
+          </a:prstGeom>
+          <a:noFill/>
+          <a:ln/>
+        </p:spPr>
+        <p:txBody>
+          <a:bodyPr wrap="square" lIns="0" tIns="0" rIns="0" bIns="0" rtlCol="0" anchor="ctr"/>
+          <a:lstStyle/>
+          <a:p>
+            <a:pPr indent="0" marL="0">
+              <a:buNone/>
+            </a:pPr>
+            <a:r>
+              <a:rPr lang="en-US" sz="1500" b="1" dirty="0">
+                <a:solidFill>
+                  <a:srgbClr val="4038C4"/>
+                </a:solidFill>
+                <a:latin typeface="Calibri" pitchFamily="34" charset="0"/>
+                <a:ea typeface="Calibri" pitchFamily="34" charset="-122"/>
+                <a:cs typeface="Calibri" pitchFamily="34" charset="-120"/>
+              </a:rPr>
+              <a:t>ДЗ тижня 5 — після наступного уроку</a:t>
+            </a:r>
+            <a:endParaRPr lang="en-US" sz="1500" dirty="0"/>
+          </a:p>
+        </p:txBody>
+      </p:sp>
+      <p:sp>
+        <p:nvSpPr>
+          <p:cNvPr id="14" name="Text 12"/>
+          <p:cNvSpPr/>
+          <p:nvPr/>
+        </p:nvSpPr>
+        <p:spPr>
+          <a:xfrm>
+            <a:off x="841248" y="4800600"/>
+            <a:ext cx="10515600" cy="731520"/>
+          </a:xfrm>
+          <a:prstGeom prst="rect">
+            <a:avLst/>
+          </a:prstGeom>
+          <a:noFill/>
+          <a:ln/>
+        </p:spPr>
+        <p:txBody>
+          <a:bodyPr wrap="square" lIns="0" tIns="0" rIns="0" bIns="0" rtlCol="0" anchor="t"/>
+          <a:lstStyle/>
+          <a:p>
+            <a:pPr indent="0" marL="0">
+              <a:buNone/>
+            </a:pPr>
+            <a:r>
+              <a:rPr lang="en-US" sz="1250" dirty="0">
+                <a:solidFill>
+                  <a:srgbClr val="1B1D23"/>
+                </a:solidFill>
+                <a:latin typeface="Calibri" pitchFamily="34" charset="0"/>
+                <a:ea typeface="Calibri" pitchFamily="34" charset="-122"/>
+                <a:cs typeface="Calibri" pitchFamily="34" charset="-120"/>
+              </a:rPr>
+              <a:t>Воно об'єднує спостережуваність і evals: сьогоднішні ендпоінти вже у вас в руках; після наступного уроку додадуться власні eval-кейси в golden dataset — і тиждень здається одним PR.</a:t>
+            </a:r>
+            <a:endParaRPr lang="en-US" sz="1250" dirty="0"/>
+          </a:p>
+        </p:txBody>
+      </p:sp>
+      <p:sp>
+        <p:nvSpPr>
+          <p:cNvPr id="25" name="Slide Number Placeholder 0"/>
+          <p:cNvSpPr>
+            <a:spLocks noGrp="1"/>
+          </p:cNvSpPr>
+          <p:nvPr>
+            <p:ph type="sldNum" sz="quarter" idx="4294967295"/>
+          </p:nvPr>
+        </p:nvSpPr>
+        <p:spPr>
+          <a:xfrm>
+            <a:off x="11323015" y="6455664"/>
+            <a:ext cx="365760" cy="274320"/>
+          </a:xfrm>
+          <a:prstGeom prst="rect">
+            <a:avLst/>
+          </a:prstGeom>
+          <a:extLst>
+            <a:ext uri="{C572A759-6A51-4108-AA02-DFA0A04FC94B}">
+              <ma14:wrappingTextBoxFlag xmlns:ma14="http://schemas.microsoft.com/office/mac/drawingml/2011/main" val="0"/>
+            </a:ext>
+          </a:extLst>
+        </p:spPr>
+        <p:txBody>
+          <a:bodyPr/>
+          <a:lstStyle>
+            <a:lvl1pPr>
+              <a:defRPr sz="850">
+                <a:solidFill>
+                  <a:srgbClr val="8A90A0"/>
+                </a:solidFill>
+                <a:latin typeface="Courier New"/>
+                <a:ea typeface="Courier New"/>
+                <a:cs typeface="Courier New"/>
+              </a:defRPr>
+            </a:lvl1pPr>
+          </a:lstStyle>
+          <a:p>
+            <a:pPr algn="l"/>
+            <a:fld id="{F7021451-1387-4CA6-816F-3879F97B5CBC}" type="slidenum">
+              <a:rPr b="0" lang="en-US"/>
+              <a:t>25</a:t>
+            </a:fld>
+            <a:endParaRPr lang="en-US"/>
+          </a:p>
+        </p:txBody>
+      </p:sp>
+    </p:spTree>
+  </p:cSld>
+  <p:clrMapOvr>
+    <a:masterClrMapping/>
+  </p:clrMapOvr>
+</p:sld>
+</file>
+
+<file path=ppt/slides/slide26.xml><?xml version="1.0" encoding="utf-8"?>
+<p:sld xmlns:a="http://schemas.openxmlformats.org/drawingml/2006/main" xmlns:r="http://schemas.openxmlformats.org/officeDocument/2006/relationships" xmlns:p="http://schemas.openxmlformats.org/presentationml/2006/main">
+  <p:cSld name="Slide 26">
     <p:bg>
       <p:bgPr>
         <a:solidFill>

--- a/docs/decks/L09.pptx
+++ b/docs/decks/L09.pptx
@@ -20087,9 +20087,14 @@
             </a:avLst>
           </a:prstGeom>
           <a:solidFill>
-            <a:srgbClr val="ECEBFB"/>
+            <a:srgbClr val="FFFFFF"/>
           </a:solidFill>
-          <a:ln/>
+          <a:ln w="12700">
+            <a:solidFill>
+              <a:srgbClr val="E4E6EC"/>
+            </a:solidFill>
+            <a:prstDash val="solid"/>
+          </a:ln>
         </p:spPr>
       </p:sp>
       <p:sp>
@@ -20107,7 +20112,7 @@
             <a:avLst/>
           </a:prstGeom>
           <a:solidFill>
-            <a:srgbClr val="4038C4"/>
+            <a:srgbClr val="1B1D23"/>
           </a:solidFill>
           <a:ln/>
         </p:spPr>
@@ -20139,7 +20144,7 @@
             <a:r>
               <a:rPr lang="en-US" sz="1200" b="1" dirty="0">
                 <a:solidFill>
-                  <a:srgbClr val="ECEBFB"/>
+                  <a:srgbClr val="FFFFFF"/>
                 </a:solidFill>
                 <a:latin typeface="Courier New" pitchFamily="34" charset="0"/>
                 <a:ea typeface="Courier New" pitchFamily="34" charset="-122"/>
@@ -20178,7 +20183,7 @@
             <a:r>
               <a:rPr lang="en-US" sz="1450" b="1" dirty="0">
                 <a:solidFill>
-                  <a:srgbClr val="4038C4"/>
+                  <a:srgbClr val="1B1D23"/>
                 </a:solidFill>
                 <a:latin typeface="Calibri" pitchFamily="34" charset="0"/>
                 <a:ea typeface="Calibri" pitchFamily="34" charset="-122"/>
@@ -20207,9 +20212,14 @@
             </a:avLst>
           </a:prstGeom>
           <a:solidFill>
-            <a:srgbClr val="ECEBFB"/>
+            <a:srgbClr val="FFFFFF"/>
           </a:solidFill>
-          <a:ln/>
+          <a:ln w="12700">
+            <a:solidFill>
+              <a:srgbClr val="E4E6EC"/>
+            </a:solidFill>
+            <a:prstDash val="solid"/>
+          </a:ln>
         </p:spPr>
       </p:sp>
       <p:sp>
@@ -20227,7 +20237,7 @@
             <a:avLst/>
           </a:prstGeom>
           <a:solidFill>
-            <a:srgbClr val="4038C4"/>
+            <a:srgbClr val="1B1D23"/>
           </a:solidFill>
           <a:ln/>
         </p:spPr>
@@ -20259,7 +20269,7 @@
             <a:r>
               <a:rPr lang="en-US" sz="1200" b="1" dirty="0">
                 <a:solidFill>
-                  <a:srgbClr val="ECEBFB"/>
+                  <a:srgbClr val="FFFFFF"/>
                 </a:solidFill>
                 <a:latin typeface="Courier New" pitchFamily="34" charset="0"/>
                 <a:ea typeface="Courier New" pitchFamily="34" charset="-122"/>
@@ -20298,7 +20308,7 @@
             <a:r>
               <a:rPr lang="en-US" sz="1450" b="1" dirty="0">
                 <a:solidFill>
-                  <a:srgbClr val="4038C4"/>
+                  <a:srgbClr val="1B1D23"/>
                 </a:solidFill>
                 <a:latin typeface="Calibri" pitchFamily="34" charset="0"/>
                 <a:ea typeface="Calibri" pitchFamily="34" charset="-122"/>
@@ -20327,9 +20337,14 @@
             </a:avLst>
           </a:prstGeom>
           <a:solidFill>
-            <a:srgbClr val="ECEBFB"/>
+            <a:srgbClr val="FFFFFF"/>
           </a:solidFill>
-          <a:ln/>
+          <a:ln w="12700">
+            <a:solidFill>
+              <a:srgbClr val="E4E6EC"/>
+            </a:solidFill>
+            <a:prstDash val="solid"/>
+          </a:ln>
         </p:spPr>
       </p:sp>
       <p:sp>
@@ -20347,7 +20362,7 @@
             <a:avLst/>
           </a:prstGeom>
           <a:solidFill>
-            <a:srgbClr val="4038C4"/>
+            <a:srgbClr val="1B1D23"/>
           </a:solidFill>
           <a:ln/>
         </p:spPr>
@@ -20379,7 +20394,7 @@
             <a:r>
               <a:rPr lang="en-US" sz="1200" b="1" dirty="0">
                 <a:solidFill>
-                  <a:srgbClr val="ECEBFB"/>
+                  <a:srgbClr val="FFFFFF"/>
                 </a:solidFill>
                 <a:latin typeface="Courier New" pitchFamily="34" charset="0"/>
                 <a:ea typeface="Courier New" pitchFamily="34" charset="-122"/>
@@ -20418,7 +20433,7 @@
             <a:r>
               <a:rPr lang="en-US" sz="1450" b="1" dirty="0">
                 <a:solidFill>
-                  <a:srgbClr val="4038C4"/>
+                  <a:srgbClr val="1B1D23"/>
                 </a:solidFill>
                 <a:latin typeface="Calibri" pitchFamily="34" charset="0"/>
                 <a:ea typeface="Calibri" pitchFamily="34" charset="-122"/>
@@ -20447,9 +20462,14 @@
             </a:avLst>
           </a:prstGeom>
           <a:solidFill>
-            <a:srgbClr val="ECEBFB"/>
+            <a:srgbClr val="FFFFFF"/>
           </a:solidFill>
-          <a:ln/>
+          <a:ln w="12700">
+            <a:solidFill>
+              <a:srgbClr val="E4E6EC"/>
+            </a:solidFill>
+            <a:prstDash val="solid"/>
+          </a:ln>
         </p:spPr>
       </p:sp>
       <p:sp>
@@ -20467,7 +20487,7 @@
             <a:avLst/>
           </a:prstGeom>
           <a:solidFill>
-            <a:srgbClr val="4038C4"/>
+            <a:srgbClr val="1B1D23"/>
           </a:solidFill>
           <a:ln/>
         </p:spPr>
@@ -20499,7 +20519,7 @@
             <a:r>
               <a:rPr lang="en-US" sz="1200" b="1" dirty="0">
                 <a:solidFill>
-                  <a:srgbClr val="ECEBFB"/>
+                  <a:srgbClr val="FFFFFF"/>
                 </a:solidFill>
                 <a:latin typeface="Courier New" pitchFamily="34" charset="0"/>
                 <a:ea typeface="Courier New" pitchFamily="34" charset="-122"/>
@@ -20538,7 +20558,7 @@
             <a:r>
               <a:rPr lang="en-US" sz="1450" b="1" dirty="0">
                 <a:solidFill>
-                  <a:srgbClr val="4038C4"/>
+                  <a:srgbClr val="1B1D23"/>
                 </a:solidFill>
                 <a:latin typeface="Calibri" pitchFamily="34" charset="0"/>
                 <a:ea typeface="Calibri" pitchFamily="34" charset="-122"/>
@@ -20567,9 +20587,14 @@
             </a:avLst>
           </a:prstGeom>
           <a:solidFill>
-            <a:srgbClr val="ECEBFB"/>
+            <a:srgbClr val="FFFFFF"/>
           </a:solidFill>
-          <a:ln/>
+          <a:ln w="12700">
+            <a:solidFill>
+              <a:srgbClr val="E4E6EC"/>
+            </a:solidFill>
+            <a:prstDash val="solid"/>
+          </a:ln>
         </p:spPr>
       </p:sp>
       <p:sp>
@@ -20587,7 +20612,7 @@
             <a:avLst/>
           </a:prstGeom>
           <a:solidFill>
-            <a:srgbClr val="4038C4"/>
+            <a:srgbClr val="1B1D23"/>
           </a:solidFill>
           <a:ln/>
         </p:spPr>
@@ -20619,7 +20644,7 @@
             <a:r>
               <a:rPr lang="en-US" sz="1200" b="1" dirty="0">
                 <a:solidFill>
-                  <a:srgbClr val="ECEBFB"/>
+                  <a:srgbClr val="FFFFFF"/>
                 </a:solidFill>
                 <a:latin typeface="Courier New" pitchFamily="34" charset="0"/>
                 <a:ea typeface="Courier New" pitchFamily="34" charset="-122"/>
@@ -20658,7 +20683,7 @@
             <a:r>
               <a:rPr lang="en-US" sz="1450" b="1" dirty="0">
                 <a:solidFill>
-                  <a:srgbClr val="4038C4"/>
+                  <a:srgbClr val="1B1D23"/>
                 </a:solidFill>
                 <a:latin typeface="Calibri" pitchFamily="34" charset="0"/>
                 <a:ea typeface="Calibri" pitchFamily="34" charset="-122"/>

--- a/docs/decks/L09.pptx
+++ b/docs/decks/L09.pptx
@@ -24095,9 +24095,14 @@
             </a:avLst>
           </a:prstGeom>
           <a:solidFill>
-            <a:srgbClr val="141018"/>
+            <a:srgbClr val="F5F4FA"/>
           </a:solidFill>
-          <a:ln/>
+          <a:ln w="12700">
+            <a:solidFill>
+              <a:srgbClr val="E6E7EC"/>
+            </a:solidFill>
+            <a:prstDash val="solid"/>
+          </a:ln>
         </p:spPr>
       </p:sp>
       <p:sp>
@@ -24130,7 +24135,7 @@
             <a:r>
               <a:rPr lang="en-US" sz="1250" dirty="0">
                 <a:solidFill>
-                  <a:srgbClr val="82AAFF"/>
+                  <a:srgbClr val="5A05F4"/>
                 </a:solidFill>
                 <a:latin typeface="Courier New" pitchFamily="34" charset="0"/>
                 <a:ea typeface="Courier New" pitchFamily="34" charset="-122"/>
@@ -27138,9 +27143,14 @@
             </a:avLst>
           </a:prstGeom>
           <a:solidFill>
-            <a:srgbClr val="141018"/>
+            <a:srgbClr val="F5F4FA"/>
           </a:solidFill>
-          <a:ln/>
+          <a:ln w="12700">
+            <a:solidFill>
+              <a:srgbClr val="E6E7EC"/>
+            </a:solidFill>
+            <a:prstDash val="solid"/>
+          </a:ln>
         </p:spPr>
       </p:sp>
       <p:sp>
@@ -27173,7 +27183,7 @@
             <a:r>
               <a:rPr lang="en-US" sz="1150" dirty="0">
                 <a:solidFill>
-                  <a:srgbClr val="82AAFF"/>
+                  <a:srgbClr val="5A05F4"/>
                 </a:solidFill>
                 <a:latin typeface="Courier New" pitchFamily="34" charset="0"/>
                 <a:ea typeface="Courier New" pitchFamily="34" charset="-122"/>
@@ -27193,7 +27203,7 @@
             <a:r>
               <a:rPr lang="en-US" sz="1150" dirty="0">
                 <a:solidFill>
-                  <a:srgbClr val="ECE8F6"/>
+                  <a:srgbClr val="23262F"/>
                 </a:solidFill>
                 <a:latin typeface="Courier New" pitchFamily="34" charset="0"/>
                 <a:ea typeface="Courier New" pitchFamily="34" charset="-122"/>
@@ -27213,7 +27223,7 @@
             <a:r>
               <a:rPr lang="en-US" sz="1150" dirty="0">
                 <a:solidFill>
-                  <a:srgbClr val="ECE8F6"/>
+                  <a:srgbClr val="23262F"/>
                 </a:solidFill>
                 <a:latin typeface="Courier New" pitchFamily="34" charset="0"/>
                 <a:ea typeface="Courier New" pitchFamily="34" charset="-122"/>
@@ -27233,7 +27243,7 @@
             <a:r>
               <a:rPr lang="en-US" sz="1150" dirty="0">
                 <a:solidFill>
-                  <a:srgbClr val="82AAFF"/>
+                  <a:srgbClr val="5A05F4"/>
                 </a:solidFill>
                 <a:latin typeface="Courier New" pitchFamily="34" charset="0"/>
                 <a:ea typeface="Courier New" pitchFamily="34" charset="-122"/>

--- a/docs/decks/L09.pptx
+++ b/docs/decks/L09.pptx
@@ -527,7 +527,7 @@
           <a:p>
             <a:r>
               <a:rPr lang="en-US" dirty="0"/>
-              <a:t/>
+              <a:t>Вітаю на дев'ятому уроці — починаємо п'ятий тиждень, «Observability + evals». За чотири тижні ви збудували роутер, облік вартості, кеш, fallback і безпеку — і кожен із цих механізмів продукує цифри. Сьогодні ці цифри вперше збираються в одному місці й стають тим, на що дивиться оператор: консоль оживає повністю. Але головна тема уроку не плитки. Головна тема — інциденти, які не дають жодної помилки: якість просіла — 200, вартість виросла втричі — 200, трафік поповз на слабшу модель — 200. Uptime зелений, користувачі нещасні. Розберемо, чому один лог-рядок з першого уроку виявляється трейсом, метрикою і аудитом одночасно; чому алерти ставлять на p95, а не на середнє; що таке SLO і бюджет помилок; і зіграємо в детектива — інцидент, який видно тільки в метриках. Курс переходить від «будуємо механізми» до «керуємо системою».</a:t>
             </a:r>
             <a:endParaRPr lang="en-US" dirty="0"/>
           </a:p>
@@ -615,7 +615,7 @@
           <a:p>
             <a:r>
               <a:rPr lang="en-US" dirty="0"/>
-              <a:t/>
+              <a:t>І консоль оживає повністю. Пройдімося по плитках так, як ми проєктували кожен механізм, — від питання. Requests today: яке навантаження зараз? Count по лозі. Вартість сьогодні: скільки палимо і чи в бюджеті? Сума cost_usd — механізм з уроку 4. P95 latency: що бачать найневдаліші користувачі? Перцентиль по лозі. Error rate: яка частка запитів ламається? Частка не-200. Cache-hit: чи окупається кеш? Лічильники з уроку 5. І fallback: чи живемо ми на плані Б? Лічильник з уроку 7. Зверніть увагу: кожна плитка — це механізм, який ви вже збудували, просто тепер його цифра стоїть перед очима оператора. І принцип, який відрізняє робочий дашборд від прикраси: кожен елемент має відповідати на конкретне операційне питання. Тест простий — сформулюйте питання вголос; не формулюється — плитку геть. Дашборд, який «просто показує все», не читає ніхто. У лабі я попрошу вас пройти по кожній плитці й проговорити її питання своїми словами — це і є третій пункт сьогоднішнього ДЗ.</a:t>
             </a:r>
             <a:endParaRPr lang="en-US" dirty="0"/>
           </a:p>
@@ -703,7 +703,7 @@
           <a:p>
             <a:r>
               <a:rPr lang="en-US" dirty="0"/>
-              <a:t/>
+              <a:t>GET /providers додає останній шматок — статус провайдерів. На mock у штатному режимі він «ok», але форма бойова: плитка не має права зеленіти посеред інциденту, тому статус, прибитий цвяхом до «ok», — не спрощення, а брехня рівно в той момент, коли на плитку дивляться. Джерело сигналу для core-доріжки у вас уже є: лічильник збоїв fallback-ланцюга з тижня 4. N поспіль збоїв темнять статус до «degraded», перший успішний виклик повертає «ok». Саме це — обов'язкова частина ДЗ тижня 5. Хто зробив опційний circuit breaker — бере готовий стан breaker'а як джерело, так робить еталон: статус темніє, щойно breaker відкритий. І стик механізмів, який варто знати: breaker оновлюється лише на реальних викликах, а cache-hit у ланцюг не заходить. Тому після інциденту плитка може показувати «down» як завгодно довго, поки трафік обслуговується з кешу. «Відпустило чи ні» перевіряйте питанням, якого немає в кеші. Тільки тримайте в голові урок, здобутий на реальній платформі: проба «чи живий процес» і проба «чи здорові залежності» — різні ендпоінти з різними споживачами. Нам довелося заводити окремий полегшений probe, який свідомо оминає діагностику залежностей: health-check, що тягне зовнішні перевірки, оголошує сервіс «мертвим» щоразу, коли чхнула чужа система, — і оркестратор рестартить цілком здоровий процес. Живість — про процес; здоров'я залежностей — про діагностику. [Ведучому: після одужання провайдера плитка може ще ~30 с показувати degraded, поки не спливе breaker резервного елемента ланцюга, — це гранулярність breaker'ів, не баг; для кадру «зазеленіла» зачекати пів хвилини або зняти другим дублем.]</a:t>
             </a:r>
             <a:endParaRPr lang="en-US" dirty="0"/>
           </a:p>
@@ -791,7 +791,7 @@
           <a:p>
             <a:r>
               <a:rPr lang="en-US" dirty="0"/>
-              <a:t/>
+              <a:t>Цифра на плитці — це стан на зараз. Але тихі інциденти видають себе не станом, а рухом. Fallback_events дорівнює одиниці — подія, буває. Fallback росте щогодини — інцидент, що повзе: основна модель деградує, і ви поки що цього «не бачите», бо відповіді йдуть. Cache-hit повільно падає тиждень — хтось зламав ключ кешу правкою, або змінився профіль трафіку; обидва варіанти варті розслідування. Розподіл моделей поїхав у бік strong — або ескалацій справді більше, або роутер зламаний, і бюджет згорає вдвічі швидше. Саме тому питання з блока 04 — «що переселити з пам'яті в базу» — має відповідь: усе, за чим хочеться стежити в часі. Снапшот показує, що зараз; тренд показує, куди воно йде — а реагувати треба на «куди». Від тренду один крок до алерту, і в правильного алерту чотири обов'язкові частини: метрика, поріг, тривалість, адресат. Тривалість пропускають найчастіше: алерт на миттєве значення блимає на кожному сплеску, черговий звикає закривати його не читаючи — і пропускає справжній. Поріг каже «це погано», тривалість каже «це не випадковість». У нашому контурі алертів ще немає — але формула знадобиться вже наступного тижня, коли писатимете rollback-критерії: у них та сама анатомія. І для тренду не потрібен окремий інструмент — той самий лог із групуванням по днях: один запит, і у вас тижнева динаміка навантаження, грошей і помилок.</a:t>
             </a:r>
             <a:endParaRPr lang="en-US" dirty="0"/>
           </a:p>
@@ -879,7 +879,7 @@
           <a:p>
             <a:r>
               <a:rPr lang="en-US" dirty="0"/>
-              <a:t/>
+              <a:t>Плитки показують числа, але число саме по собі не каже, чи все гаразд: p95 1800 мілісекунд — це добре чи погано? Error rate 2% — привід прокинутися чи звичайний вівторок? Поки немає домовленості, кожен інцидент починається зі спору «а чи це взагалі інцидент». Термінологія проста і варта точності. SLI — показник, який ви міряєте: частка успішних відповідей, p95 latency. SLO — цільове значення, про яке ви домовилися: «99% звернень обслуговуються успішно», «p95 не перевищує 3 секунд». Ключове слово — домовилися: SLO не виводиться з техніки, він приходить із того, що потрібно користувачу і що ви готові обіцяти. І найкорисніша конструкція операційної практики — бюджет помилок. Якщо SLO 99%, то один відсоток невдач вам дозволено. Це не сором, а ресурс: за тиждень із 10 000 звернень бюджет — 100 невдач. Поки не витратили — можна котити зміни й ризикувати; витратили за три дні — решту тижня займаєтеся стабільністю. Замість вічної суперечки «швидко чи надійно» з'являється число, яке її закриває. SLO має бути на те, що відчуває користувач: «uptime 99.9%» — марна обіцянка, сервіс може бути живий і роздавати заглушки. Робочий SLI — «частка звернень зі змістовною відповіддю», і чесно визнаймо: ваш лог поки що цього не порахує — заглушка graceful degradation пише той самий 503, що й реальний збій. Потрібна ще одна колонка — ознака деградації; вона ж робить чесним error rate під інцидентом. Рівно той випадок «новий зріз = нова колонка». Обов'язкова доріжка тижня — ендпоінти й живі плитки; сформулювати один SLO і порахувати тижневий бюджет — окремий пункт опційної частини ДЗ тижня 5, хвилин п'ятнадцять. На останньому уроці ця цифра стане аргументом у KPI-розмові.</a:t>
             </a:r>
             <a:endParaRPr lang="en-US" dirty="0"/>
           </a:p>
@@ -967,7 +967,7 @@
           <a:p>
             <a:r>
               <a:rPr lang="en-US" dirty="0"/>
-              <a:t/>
+              <a:t>Метрики без алертів — це графіки, у які ніхто не дивиться в потрібний момент. Алерти без дисципліни — гірше: команда вчиться їх ігнорувати, і тоді не працює вся система спостережуваності. Три правила, які тримають це в порядку. Перше: алерт на симптом, а не на причину. «Частка успішних відповідей упала нижче SLO» — симптом, його варто побачити завжди. «Кількість 429 зросла» — причина: сама по собі вона може не мати наслідків для користувача, fallback відпрацював — і будити через неї людину нечесно. Друге: розділяйте «прокинутися» і «подивитися вранці». Прокидатися варто лише через те, що зараз шкодить користувачам і потребує людини; усе інше — черга завдань. Якщо ця межа не проведена явно, вона проведеться сама — через вигорання й ігнорування. Третє: кожен алерт має інструкцію. Спрацював — що робити першим? Той, хто прийшов на чергування вперше, мусить зрозуміти. Це і є runbook, до якого ми дійдемо на останньому уроці. Типова помилка — алерт на кожну помилку: у недетермінованій системі на чужій інфраструктурі окремі 5xx і таймаути — нормальний фон. Алерт має спрацьовувати на відхилення від норми, витримане в часі, — інакше канал з десятьма повідомленнями щодня, жодної реакції, і справжній інцидент проїде незауваженим. І практична деталь, яка ламає метрики найчастіше: мітки. User_id чи текст запиту в метриці — вибух комбінацій: сховище роздувається, дашборди не відкриваються. Мітки — невелика кількість заздалегідь відомих значень: модель, маршрут, категорія помилки. Усе різноманітне живе в лозі.</a:t>
             </a:r>
             <a:endParaRPr lang="en-US" dirty="0"/>
           </a:p>
@@ -1055,7 +1055,7 @@
           <a:p>
             <a:r>
               <a:rPr lang="en-US" dirty="0"/>
-              <a:t/>
+              <a:t>Це опційне поглиблення тижня — воно ж опційна частина ДЗ тижня 5. «Error rate 6%» — це початок питання, а не відповідь. За цими шістьма відсотками можуть ховатися зовсім різні історії: 429 від провайдера — треба знижувати темп або міняти ліміти; timeout інструмента — винна зовнішня система; відмова guardrail'а — це взагалі не помилка, а робота захисту; збій БД — ваша інфраструктура. Різні причини — різні дії — різні відповідальні. Мінімум у нас уже є: поле status у лозі розрізняє 429, 503 і timeout. Дорослий рівень — явна таксономія: provider_429, tool_timeout, guardrail_refusal, db_error — окремі лічильники, окремі тренди, а на проді — окремі алерти з різними адресатами. І корисна дисципліна при проєктуванні таксономії: категорія має визначати дію. Якщо дві категорії ведуть до однієї дії — зливайте їх; якщо в одній категорії дві різні дії — діліть. Таксономія заради таблички нікому не потрібна.</a:t>
             </a:r>
             <a:endParaRPr lang="en-US" dirty="0"/>
           </a:p>
@@ -1143,7 +1143,7 @@
           <a:p>
             <a:r>
               <a:rPr lang="en-US" dirty="0"/>
-              <a:t/>
+              <a:t>Сьогоднішня консоль стоїть на одному лог-рядку — і цього достатньо, поки одне звернення користувача це один виклик моделі. Але ми знаємо з уроку 4, що так буває тільки на старті: у дорослому контурі одне звернення розгортається в ретрай, fallback, tool-виклик і повторний виклик моделі з результатом. Питання «що сталося з цим запитом» перетворюється з «покажи рядок» на «покажи послідовність». Термінологія запозичена з класичної спостережуваності. Трейс — усе, що сталося в межах одного звернення. Спан — один крок усередині нього: виклик моделі, виклик інструмента, перевірка guardrail — зі своїми початком, тривалістю і статусом. Спани складаються в дерево: у кожного є батько, тому видно не лише «що було», а й «що з чого виросло». Мінімальна версія не потребує жодної нової системи: до request_id — він і є ідентифікатор трейсу — додати два поля: step і attempt. Одразу стають можливі питання, на які раніше відповіді не було: скільки кроків у середньому потребує одне звернення, які кроки найдовші, скільки викликів було марними — спроби, що не дійшли до користувача. І принцип, який варто закласти відразу: ідентифікатор народжується на вході, передається у все, що ви кличете, і присутній у кожному рядку лога, включно з невдалими спробами. Дописати його потім — це переписати всі логи, які вже накопичилися. На платформі, яку я супроводжую, найдорожчі години розслідувань витрачалися саме там, де ланцюжок ідентифікаторів обривався — фонова обробка створювала «новий» контекст замість продовження попереднього. Формально всі логи були на місці; фактично неможливо було сказати, що з чим пов'язане. Полагодилося не інструментом, а домовленістю: ідентифікатор передається завжди, і жоден крок не має права почати новий.</a:t>
             </a:r>
             <a:endParaRPr lang="en-US" dirty="0"/>
           </a:p>
@@ -1231,7 +1231,7 @@
           <a:p>
             <a:r>
               <a:rPr lang="en-US" dirty="0"/>
-              <a:t/>
+              <a:t>У нашому контурі відповідь приходить цілком, тому latency_ms однозначний. Щойно ви віддаєте токени потоком — а це перше, що просять продуктові команди, — метрики перестають бути однозначними, і краще знати про це заздалегідь, ніж переробляти лог. Перше: один час перетворюється на три. Час до першого токена — його й відчуває користувач; повний час генерації; і час до останнього байта. Мірити треба перший і третій; середній не означає нічого. Друге: помилка приїжджає посеред успіху. Стрім почався зі статусом 200, а обірвався на середині — з погляду HTTP усе гаразд, з погляду користувача відповідь зламана. У лозі потрібне окреме поле «стрім завершився нормально», інакше error rate брехатиме на вашу користь. Третє: кеш і guardrails ускладнюються. Кешувати можна лише повністю зібрану відповідь — а зібрати її треба на своєму боці. Вихідна перевірка або чекає кінця генерації, і тоді сенс стріму частково втрачається, або працює по частинах і мусить уміти обірвати вже початий потік. Практичний висновок для сьогодні один: поля latency_ms і status варто одразу мислити як «характеристику завершення відповіді», а не як «код HTTP». Тоді додати стрімінг буде розширенням лога, а не його переписуванням.</a:t>
             </a:r>
             <a:endParaRPr lang="en-US" dirty="0"/>
           </a:p>
@@ -1319,7 +1319,7 @@
           <a:p>
             <a:r>
               <a:rPr lang="en-US" dirty="0"/>
-              <a:t/>
+              <a:t>Спостережуваність спокушає логувати все: повний промпт, повну відповідь, увесь контекст — «раптом знадобиться». І це найпростіший спосіб перетворити лог на сховище персональних даних, до якого має доступ вся команда, яке потрапляє в бекапи й живе роками. Три правила. Перше: не пишіть повні тіла запитів і відповідей за замовчуванням. Ознак зазвичай достатньо: довжина, кількість токенів, finish_reason, чи спрацював guardrail, які інструменти викликалися — це відповідає на 90% операційних питань. Друге: якщо тіла таки потрібні для розбору якості — робіть це вибірково і з терміном життя: невеликий семпл, окреме сховище, автоматичне видалення. Саме такий семпл, до речі, стає золотим набором для eval'ів — наступний урок; тобто в цього рішення є друга, корисна причина. Третє: ніколи не логуйте секрети й ключі — і пам'ятайте, що вони потрапляють у логи не через Console.WriteLine з ключем, а через дампи запитів «для дебагу», трейси помилок і повні заголовки. І формулювання, яке варто мати в голові щоразу, коли додаєте нове поле в лог: усе, що ви залогували, ви тепер зобов'язані захищати. Лог — це не блокнот, це база даних із тим самим режимом доступу, що й інші ваші дані.</a:t>
             </a:r>
             <a:endParaRPr lang="en-US" dirty="0"/>
           </a:p>
@@ -1407,7 +1407,7 @@
           <a:p>
             <a:r>
               <a:rPr lang="en-US" dirty="0"/>
-              <a:t/>
+              <a:t>Помітили архітектурний хід? Спостережуваність у нас — розділ у самому продукті: ендпоінти сервісу поверх власного лога, консоль як вітрина. Жодного окремого Prometheus, жодної Grafana в обов'язковій доріжці. Це свідомо, і не лише з навчальних міркувань. Індустріальний стек метрик — чудова річ, коли у вас багато сервісів і команда, яка ним володіє. Але він не безкоштовний: інфраструктура, конфіги, ще одна система, яка може зламатись. А головне — він не додає даних: усе, що покаже дашборд, має спершу з'явитись у ваших логах і лічильниках. Налагодьте джерело — а вітрин може бути скільки завгодно: наша консоль сьогодні, /metrics для зовнішніх дашбордів — опційна тема фінального тижня. Ще одна дрібниця з практики, яка вирішує, чи взагалі буде що дивитися. На платформі, яку я супроводжую, нам довелося окремим рішенням підняти рівень логів життєвого циклу — «почав узгодження стану», «завершив», «зупинив останнього агента» — з debug до info. Причина проста: у проді debug вимкнений, тому найцінніші події існували в коді, але не існували в реальності — і кожне розслідування починалося з «а давайте задеплоїмо збірку з увімкненим debug». Ключові переходи стану — це не діагностика для розробника, це операційні дані; вони мусять бути видимі за замовчуванням. І лайфхак на щодень: звірка чесності даних за десять секунд. Цифра на плитці Requests мусить збігатися з SELECT count(*) за сьогодні. Якщо консоль показує одне, а SQL інше — у вас дві правди, і скоро ви перестанете вірити обом.</a:t>
             </a:r>
             <a:endParaRPr lang="en-US" dirty="0"/>
           </a:p>
@@ -1495,7 +1495,7 @@
           <a:p>
             <a:r>
               <a:rPr lang="en-US" dirty="0"/>
-              <a:t/>
+              <a:t>Домовимось про результат уроку — конкретними діями. Після сьогоднішнього заняття ви зможете: порахувати count, p95 і error rate одним SQL-запитом по власному логу — жодної магії, штатна функція Postgres; оживити GET /observability і GET /providers так, щоб усі шість плиток консолі показували числа; пояснити, чому алерти і SLO ставлять на перцентилі, а не на середнє, — і чому перцентилі не можна усереднювати; відтворити тихий інцидент — fallback і error rate ростуть, а користувач не бачить жодного 500; сформулювати SLO для своєї системи і порахувати тижневий бюджет помилок; і назвати, що саме додати в лог, коли завтра спитають «а покажи по тенантах» — нову колонку, а не нову систему. Кожен пункт ви перевірите руками — у лабораторній або в ДЗ тижня.</a:t>
             </a:r>
             <a:endParaRPr lang="en-US" dirty="0"/>
           </a:p>
@@ -1583,7 +1583,7 @@
           <a:p>
             <a:r>
               <a:rPr lang="en-US" dirty="0"/>
-              <a:t/>
+              <a:t>Перш ніж перейти до екрана — що саме ви зараз побачите і навіщо. Послідовність така: спершу агрегати руками в psql — count, p95, error rate одним запитом, щоб побачити, що жодної магії немає. Потім GET /observability — ті самі цифри плюс cache-hit і fallback з лічильників, уже як ендпоінт. Далі консоль: усі шість плиток живі, з числами. І фінал — «детектив»: серія __fail_503, fallback і error rate ростуть, а користувач не бачить жодного 500 — тихий інцидент, який видно тільки в метриках. Навіщо це все: побачити, що моніторинг LLM-системи — це SQL по власному логу плюс кілька лічильників, а не окрема система; і навчитися впізнавати інцидент, якого не видно в жодному uptime. [Ведучому: ДО запису прогнати пре-рол трафіку — після down -v база порожня: 3–4 звичайні питання, 2 повтори того самого (кеш), 1–2 __fail_503, плюс 1–2 ескалації («поверніть гроші, терміново») — інакше плитка вартості покаже $0.0000: уся вартість на mock сидить у mock-strong, а today_usd округлюється до 4 знаків. На камері плитки вже живі — докидається лише серія збоїв для «детектива». Термінал і psql — збільшений шрифт.]</a:t>
             </a:r>
             <a:endParaRPr lang="en-US" dirty="0"/>
           </a:p>
@@ -1671,7 +1671,7 @@
           <a:p>
             <a:r>
               <a:rPr lang="en-US" dirty="0"/>
-              <a:t/>
+              <a:t>Крок перший: SQL руками. У psql написати запит: count, percentile_cont(0.95) по latency, частка не-200 за сьогодні. Спершу руками — щоб побачити, що жодної магії немає. Повна команда підключення: docker compose exec postgres psql -U llmops -d llmops — так само, як шукали свій перший запит на уроці 1. Крок другий: загорнути в ендпоінт. GET /observability — агрегати з БД плюс cache-hit % і fallback з лічильників сервісу. GET /providers — статус провайдерів: у штатному режимі «ok»; «degraded» після N поспіль збоїв fallback-ланцюга — core, або при відкритому circuit breaker — опційна доріжка; логіку розбирали у блоці 05. Крок третій: оживити консоль. Згенерувати трафік: звичайні питання, повтор того самого — кеш, __fail_503 — fallback. Усі шість плиток — з числами. І пройти по кожній: на яке операційне питання вона відповідає? Крок четвертий: детектив. Симулювати тиху деградацію: серія __fail_503 — fallback і error rate ростуть, без жодного 500 користувачу: урок 7 відпрацював. Проговоріть: як виглядав би цей самий інцидент на дашборді, де є тільки uptime? І опційний п'ятий: таксономія — розділити помилки за причинами: 429, timeout, guardrail, БД — і завести окремі лічильники. Це заготовка під опційну частину ДЗ тижня 5.</a:t>
             </a:r>
             <a:endParaRPr lang="en-US" dirty="0"/>
           </a:p>
@@ -1759,7 +1759,7 @@
           <a:p>
             <a:r>
               <a:rPr lang="en-US" dirty="0"/>
-              <a:t/>
+              <a:t>Зафіксуємо, що ми щойно побачили — і що це доводить. Перше: моніторинг LLM-системи — це SQL по власному логу плюс кілька лічильників. Жодної нової системи, жодної магії: percentile_cont — штатна функція Postgres, а таблиця requests пишеться з першого уроку. Лог, закладений заздалегідь, сьогодні окупився повністю. Друге: усі шість плиток живі, і кожна відповідає на конкретне операційне питання — навантаження, гроші, хвіст латентності, частка збоїв, окупність кешу, життя на плані Б. Це і є момент, коли механізми чотирьох тижнів стають системою, якою керує оператор. Третє — найважливіше: ви бачили тихий інцидент. Серія збоїв, fallback і error rate ростуть — а користувач не отримав жодного 500, бо урок 7 відпрацював. На дашборді з самим лише uptime цього інциденту не існує. Саме заради цієї картинки й будувався весь сьогоднішній шар: інцидент видно в метриках, а не в скаргах.</a:t>
             </a:r>
             <a:endParaRPr lang="en-US" dirty="0"/>
           </a:p>
@@ -1847,7 +1847,7 @@
           <a:p>
             <a:r>
               <a:rPr lang="en-US" dirty="0"/>
-              <a:t/>
+              <a:t>Перш ніж розійтися — чесна перевірка обов'язкової доріжки, без оцінок. Чотири пункти. Перший: всі плитки консолі показують числа — і ви знаєте, звідки береться кожне: що з бази, що з лічильників у пам'яті, і чим ці джерела відрізняються. Другий: можете пояснити, чому p95, а не середнє. Якщо відповідь починається з «дев'ять запитів по триста мілісекунд і один на вісім секунд» — усе засвоєно. Третій: ви бачили інцидент — fallback росте, error rate росте — без жодної помилки назовні. Це головна картинка уроку: тихі інциденти видно тільки у власних метриках. І четвертий: розумієте, що додати в лог, якщо завтра спитають «а по тенантах?». Відповідь коротка — колонку, а не систему; і додати її треба сьогодні, бо колонка через місяць — це місяць даних, яких не буде. Де завагалися — туди і повертайтеся в матеріалі уроку. Питання — у канал потоку або на Q&amp;A.</a:t>
             </a:r>
             <a:endParaRPr lang="en-US" dirty="0"/>
           </a:p>
@@ -1935,7 +1935,7 @@
           <a:p>
             <a:r>
               <a:rPr lang="en-US" dirty="0"/>
-              <a:t/>
+              <a:t>П'ять способів звести нанівець сьогоднішній шар — усі перевірені чужими граблями. Моніторити лише uptime і latency: «у нас все зелене» — поки скарги не стануть четвертим виміром замість якості. Середні замість перцентилів: середнє ховає саме тих користувачів, які пишуть скарги, — ми бачили це на цифрах у блоці 03. Дашборд заради дашборда: плитка без операційного питання — шум, який привчає не дивитися; тест «сформулюй питання вголос» безжальний, застосовуйте його. Дивитись метрики лише під час інцидентів: тихі деградації видно тільки тому, хто бачив «норму» — тренд читається лише проти фону звички. І окрема система моніторингу до того, як налагоджені власні логи: вітрина без джерела показує порожнечу — красиво і безкорисно. Спершу лог і лічильники, потім будь-які дашборди.</a:t>
             </a:r>
             <a:endParaRPr lang="en-US" dirty="0"/>
           </a:p>
@@ -2023,7 +2023,7 @@
           <a:p>
             <a:r>
               <a:rPr lang="en-US" dirty="0"/>
-              <a:t/>
+              <a:t>Обов'язково — до наступного уроку, без здачі. Перше: закріпити лабу — усі шість плиток живі й звірені з SQL; це та сама звірка, яку варто робити раз на тиждень і на своїй робочій системі. Друге: відтворити «детектива» — серія __fail_503, після якої інцидент видно в метриках, а користувач не бачить жодної 500. Третє, і воно найкорисніше: сформулювати по одному операційному питанню на кожну плитку — своїми словами. Плитка, під яку не знайшлося питання, — прикраса, і її треба або переробити, або прибрати. Опційно: таксономія помилок — окремі лічильники за причинами: 429 провайдера, timeout інструмента, відмова guardrail. Це опційний блок сьогоднішнього уроку і опційна частина ДЗ тижня. І про ДЗ тижня: воно здається після наступного уроку. ДЗ тижня 5 об'єднує спостережуваність і evals — сьогоднішні ендпоінти вже у вас в руках, після наступного уроку додадуться власні кейси в golden dataset, і тиждень здається одним PR. Критерії приймання будуть у файлі ДЗ після наступного уроку.</a:t>
             </a:r>
             <a:endParaRPr lang="en-US" dirty="0"/>
           </a:p>
@@ -2111,7 +2111,7 @@
           <a:p>
             <a:r>
               <a:rPr lang="en-US" dirty="0"/>
-              <a:t/>
+              <a:t>Підсумуємо. Найдорожчі інциденти LLM-систем не дають жодної помилки: uptime зелений, п'ятірок немає, а система тихо відповідає гірше, дорожче або не те. Саме тому чотири виміри — доступність, latency, вартість і якість — і саме тому третій та четвертий не видно жодному звичайному моніторингу. Весь моніторинг ядра при цьому — це SQL по власному лозі плюс кілька лічильників у пам'яті: percentile_cont — штатна функція бази, а не магія, і жодної нової системи сьогодні не з'явилося. Дивимося на p95, а не на середнє: скарги живуть у хвості розподілу, а середнє їх згладжує — і пам'ятайте, що перцентилі не усереднюються, тому p95 за тиждень не рахується як середнє денних. Плитка існує, лише якщо відповідає на питання, яке хтось справді ставить; решта — графіки, у які перестають дивитися. А SLO ставиться на те, що відчуває користувач, і має бюджет помилок — інакше «скільки це нормально» кожен вирішує сам, і зазвичай уночі. Наступний урок дає якості число. Ви бачите, що система робить, але «відповіді стали гіршими» не покаже жодна з шести плиток: далі — golden dataset, grader, поріг і exit code, той самий, що на тижні 6 стане гейтом у CI. До зустрічі.</a:t>
             </a:r>
             <a:endParaRPr lang="en-US" dirty="0"/>
           </a:p>
@@ -2199,7 +2199,7 @@
           <a:p>
             <a:r>
               <a:rPr lang="en-US" dirty="0"/>
-              <a:t/>
+              <a:t>Маршрут такий. Перша третина — проблема і фундамент: тихі інциденти й чотири виміри спостережуваності; лог-рядок з уроку 1, який виявляється трейсом, метрикою і аудитом одночасно; і чому p95, а не середнє. Друга третина — розтин сьогоднішньої роботи: SQL-агрегати і ендпоінт /observability з двома джерелами, /providers і шість плиток консолі, тренд проти снапшота. Далі — операційна рамка: SLI, SLO і бюджет помилок, дисципліна алертів; опційний блок про таксономію помилок; трейси і спани на виріст — разом із тим, чого в лозі бути не має. І архітектурне питання: чому спостережуваність у нас — розділ у продукті, а не окремий індустріальний стек. Потім лабораторна на п'ять кроків — від psql до «детектива», антипатерни тижня і домашнє завдання. [Ведучому: блоки 01–03 — без коду; на блоці 03 корисно проговорити приклад з дев'ятьма швидкими запитами вголос, цифри тримають увагу краще за означення.]</a:t>
             </a:r>
             <a:endParaRPr lang="en-US" dirty="0"/>
           </a:p>
@@ -2287,7 +2287,7 @@
           <a:p>
             <a:r>
               <a:rPr lang="en-US" dirty="0"/>
-              <a:t/>
+              <a:t>Домовимось про шість слів. p95 — перцентиль: час, у який вкладаються дев'яносто п'ять відсотків запитів; саме він показує досвід найневдаліших користувачів. Error rate — частка запитів, що завершилися не двохсоткою. Cache-hit відсоток і fallback — наші власні лічильники з уроків 5 і 7. SLI — показник, який ви міряєте; SLO — цільове значення, про яке домовилися; а бюджет помилок — скільки невдач ви можете собі дозволити в межах цього SLO. Трейс — відновлений шлях одного запиту за його ідентифікатором. І тихий інцидент — збій, який не дає жодної помилки користувачу: система відповідає, метрики зелені, а всередині щось поїхало. Саме заради нього все це будується.</a:t>
             </a:r>
             <a:endParaRPr lang="en-US" dirty="0"/>
           </a:p>
@@ -2375,7 +2375,7 @@
           <a:p>
             <a:r>
               <a:rPr lang="en-US" dirty="0"/>
-              <a:t/>
+              <a:t>Класичний моніторинг відповідає на питання «сервіс живий?». Для LLM-системи це питання майже нічого не варте: сервіс може бути живий на всі сто — і при цьому відповідати гірше, коштувати дорожче і дедалі частіше падати у fallback. Жоден health-check цього не покаже. Найнеприємніші інциденти LLM-систем — тихі. Вони не дають 5xx. Якість просіла після зміни промпта — 200. Вартість виросла втричі, бо хтось зламав ключ кешу, — 200. Трафік поповз на слабшу модель через fallback — 200, 200, 200. Той голосовий агент з уроку 7, що замовкав посеред розмови, теж був «зеленим» за всіма стандартними метриками — його знайшли по слідах у поведінці, а не по алерту. Звідси головна теза уроку: спостережуваність LLM-системи — це чотири виміри разом. Доступність і latency знайомі кожному, хто працював з веб-сервісами. Вартість і якість — те, чим LLMOps відрізняється від просто Ops. Дивитися тільки на перші два — значить моніторити чужу половину системи. І навіщо цей шар саме зараз: усі механізми чотирьох тижнів продукують цифри — роутер розподіл, облік вартість, кеш hit ratio, fallback лічильник переходів. Сьогодні вони збираються в одному місці. Курс переходить від «будуємо механізми» до «керуємо системою».</a:t>
             </a:r>
             <a:endParaRPr lang="en-US" dirty="0"/>
           </a:p>
@@ -2463,7 +2463,7 @@
           <a:p>
             <a:r>
               <a:rPr lang="en-US" dirty="0"/>
-              <a:t/>
+              <a:t>Пам'ятаєте обіцянку з уроку 1 — «лог з'являється першим, усе інше — надбудови над ним»? Сьогодні день розплати, у хорошому сенсі. Таблиця requests, яку ви ведете з першої лаби, виявляється одночасно трьома речами. Трейсом: по request_id відновлюється шлях конкретного запиту — яка модель, яка версія промпта, скільки тривало. Метрикою: p95 — це перцентиль по latency_ms, error rate — частка не-200, вартість дня — сума cost_usd. І аудитом: хто, коли, якою версією, з яким результатом. Ніякої магії, ніякого окремого «стека спостережуваності» для ядра: SQL по таблиці, яку ви й так пишете. Уявіть на секунду, що на першому тижні ми полінувалися: сьогодні довелося б спершу два тижні збирати дані, перш ніж побачити першу цифру. Лог, закладений заздалегідь, — це різниця між «подивімось» і «почекаймо місяць».</a:t>
             </a:r>
             <a:endParaRPr lang="en-US" dirty="0"/>
           </a:p>
@@ -2551,7 +2551,7 @@
           <a:p>
             <a:r>
               <a:rPr lang="en-US" dirty="0"/>
-              <a:t/>
+              <a:t>З «лог — джерело всього» випливає відповідь на питання «як розширювати спостережуваність». Не новою системою — новою колонкою. Захочете зрізи по тенантах — додайте tenant_id у лог-рядок у момент запиту; по фічах — feature; по операторах approvals — хто підтвердив. Кожна колонка, записана в момент події, — це майбутній GROUP BY, який коштує нуль. А колонка, про яку згадали через місяць, — це місяць даних, яких уже не буде. Єдине застереження — кардинальність зрізів. Зріз корисний, коли груп у ньому можна охопити оком: моделі — одиниці, версії промпта — десятки, тенанти — сотні, і це вже на межі. GROUP BY по унікальному ідентифікатору користувача дасть мільйон рядків, у яких не видно нічого. Правило: записуйте в лог детально — конкретний user_id потрібен для трейсів і аудиту, — а агрегуйте по вимірах з осяжною кількістю значень. Колонка і зріз — різні рішення: перше про можливість, друге про читабельність.</a:t>
             </a:r>
             <a:endParaRPr lang="en-US" dirty="0"/>
           </a:p>
@@ -2639,7 +2639,7 @@
           <a:p>
             <a:r>
               <a:rPr lang="en-US" dirty="0"/>
-              <a:t/>
+              <a:t>Одна метрика заслуговує окремої зупинки. Середня latency — цифра, що бреше в очі: дев'ять запитів по 300 мілісекунд і один на 8 секунд дають середнє близько 1.1 секунди — «прийнятно». А тепер згадайте, хто з цих десяти користувачів напише в підтримку. Правильно — десятий. І його досвід у середньому розчинився. Перцентилі дивляться на розподіл з боку найневдаліших запитів: p95 — це «95 відсотків запитів швидші за цю цифру», чесна межа того, що бачить помітна частина користувачів; p99 — те саме для найгіршого відсотка. Для LLM-систем це особливо важливо: latency генерації нестабільна за природою — довжина відповіді, черги провайдера, ретраї, — розподіл має довгий хвіст, і саме у хвості живуть скарги. Типова помилка — алерт на середню latency: вона згладить і сплеск таймаутів, і деградацію провайдера; ви дізнаєтесь про проблему зі скарг, а алерт так і не спрацює. І математична пастка: перцентилі не можна усереднювати. «Середнє з p95 за кожну годину» — це не p95 за день. Поки лог зберігає кожен запит, будь-який перцентиль за будь-яке вікно — один чесний запит до бази. Згадка на виріст: щойно з'явиться streaming, до p95 повної відповіді додасться time-to-first-token — наш latency_ms цієї різниці не бачить; детальніше в блоці 09.</a:t>
             </a:r>
             <a:endParaRPr lang="en-US" dirty="0"/>
           </a:p>
@@ -2727,7 +2727,7 @@
           <a:p>
             <a:r>
               <a:rPr lang="en-US" dirty="0"/>
-              <a:t/>
+              <a:t>Серце сьогоднішньої роботи — один SQL-запит і один ендпоінт. Спершу агрегати з бази: count, percentile_cont нуль-дев'яносто-п'ять по latency_ms і частка не-200 — три цифри одним проходом. percentile_cont — штатна функція Postgres; ваша «система моніторингу» — це буквально один рядок SQL. COALESCE тут не косметика: на порожній таблиці агрегати повертають NULL, читання в типізовану змінну падає — і свіжий стек після down -v віддає 500 ще до першого запиту. Далі ендпоінт збирає гібрид, і зверніть увагу на два джерела. Requests, p95 і error rate — з бази: переживають рестарт, історичні. Cache-hit і fallback — з лічильників у пам'яті: швидкі, але обнуляються з рестартом. А «рестарт» у робочому циклі трапляється частіше, ніж здається: кожен docker compose up --build -d service — тобто кожна правка коду — обнуляє лічильники. Після ребілду плитки покажуть requests з БД і нульові cache-hit/fallback — це не баг, а ціна компромісу. Хто хоче стежити за цими цифрами в часі — переселяє їх у базу, і тоді звірка вітрини з джерелом працює для всіх плиток. Питання на подумати: які з цих цифр ви б переселили першими і чому? Підказка: ті, за якими захочеться дивитися тренд, — блок 06.</a:t>
             </a:r>
             <a:endParaRPr lang="en-US" dirty="0"/>
           </a:p>
@@ -5512,13 +5512,13 @@
       </p:graphicFrame>
       <p:sp>
         <p:nvSpPr>
-          <p:cNvPr id="8" name="Shape 4"/>
-          <p:cNvSpPr/>
-          <p:nvPr/>
-        </p:nvSpPr>
-        <p:spPr>
-          <a:xfrm>
-            <a:off x="566928" y="5120640"/>
+          <p:cNvPr id="9" name="Shape 4"/>
+          <p:cNvSpPr/>
+          <p:nvPr/>
+        </p:nvSpPr>
+        <p:spPr>
+          <a:xfrm>
+            <a:off x="566928" y="5303520"/>
             <a:ext cx="11064240" cy="822960"/>
           </a:xfrm>
           <a:prstGeom prst="roundRect">
@@ -5534,13 +5534,13 @@
       </p:sp>
       <p:sp>
         <p:nvSpPr>
-          <p:cNvPr id="9" name="Text 5"/>
-          <p:cNvSpPr/>
-          <p:nvPr/>
-        </p:nvSpPr>
-        <p:spPr>
-          <a:xfrm>
-            <a:off x="786384" y="5248656"/>
+          <p:cNvPr id="10" name="Text 5"/>
+          <p:cNvSpPr/>
+          <p:nvPr/>
+        </p:nvSpPr>
+        <p:spPr>
+          <a:xfrm>
+            <a:off x="786384" y="5431536"/>
             <a:ext cx="10625328" cy="219456"/>
           </a:xfrm>
           <a:prstGeom prst="rect">
@@ -5573,13 +5573,13 @@
       </p:sp>
       <p:sp>
         <p:nvSpPr>
-          <p:cNvPr id="10" name="Text 6"/>
-          <p:cNvSpPr/>
-          <p:nvPr/>
-        </p:nvSpPr>
-        <p:spPr>
-          <a:xfrm>
-            <a:off x="786384" y="5504688"/>
+          <p:cNvPr id="11" name="Text 6"/>
+          <p:cNvSpPr/>
+          <p:nvPr/>
+        </p:nvSpPr>
+        <p:spPr>
+          <a:xfrm>
+            <a:off x="786384" y="5687568"/>
             <a:ext cx="10625328" cy="310896"/>
           </a:xfrm>
           <a:prstGeom prst="rect">
@@ -5779,7 +5779,7 @@
         </p:nvSpPr>
         <p:spPr>
           <a:xfrm>
-            <a:off x="1280160" y="1024128"/>
+            <a:off x="1280160" y="1193140"/>
             <a:ext cx="777240" cy="256032"/>
           </a:xfrm>
           <a:prstGeom prst="roundRect">
@@ -5801,7 +5801,7 @@
         </p:nvSpPr>
         <p:spPr>
           <a:xfrm>
-            <a:off x="1280160" y="1024128"/>
+            <a:off x="1280160" y="1193140"/>
             <a:ext cx="777240" cy="256032"/>
           </a:xfrm>
           <a:prstGeom prst="rect">
@@ -5858,7 +5858,7 @@
       </p:pic>
       <p:sp>
         <p:nvSpPr>
-          <p:cNvPr id="7" name="Shape 4"/>
+          <p:cNvPr id="8" name="Shape 4"/>
           <p:cNvSpPr/>
           <p:nvPr/>
         </p:nvSpPr>
@@ -5883,7 +5883,7 @@
       </p:sp>
       <p:sp>
         <p:nvSpPr>
-          <p:cNvPr id="8" name="Text 5"/>
+          <p:cNvPr id="9" name="Text 5"/>
           <p:cNvSpPr/>
           <p:nvPr/>
         </p:nvSpPr>
@@ -5922,7 +5922,7 @@
       </p:sp>
       <p:sp>
         <p:nvSpPr>
-          <p:cNvPr id="9" name="Text 6"/>
+          <p:cNvPr id="10" name="Text 6"/>
           <p:cNvSpPr/>
           <p:nvPr/>
         </p:nvSpPr>
@@ -5961,7 +5961,7 @@
       </p:sp>
       <p:sp>
         <p:nvSpPr>
-          <p:cNvPr id="10" name="Shape 7"/>
+          <p:cNvPr id="11" name="Shape 7"/>
           <p:cNvSpPr/>
           <p:nvPr/>
         </p:nvSpPr>
@@ -5984,7 +5984,7 @@
       </p:sp>
       <p:sp>
         <p:nvSpPr>
-          <p:cNvPr id="11" name="Shape 8"/>
+          <p:cNvPr id="12" name="Shape 8"/>
           <p:cNvSpPr/>
           <p:nvPr/>
         </p:nvSpPr>
@@ -6004,7 +6004,7 @@
       </p:sp>
       <p:sp>
         <p:nvSpPr>
-          <p:cNvPr id="12" name="Text 9"/>
+          <p:cNvPr id="13" name="Text 9"/>
           <p:cNvSpPr/>
           <p:nvPr/>
         </p:nvSpPr>
@@ -6043,7 +6043,7 @@
       </p:sp>
       <p:sp>
         <p:nvSpPr>
-          <p:cNvPr id="13" name="Shape 10"/>
+          <p:cNvPr id="14" name="Shape 10"/>
           <p:cNvSpPr/>
           <p:nvPr/>
         </p:nvSpPr>
@@ -6068,7 +6068,7 @@
       </p:sp>
       <p:sp>
         <p:nvSpPr>
-          <p:cNvPr id="14" name="Text 11"/>
+          <p:cNvPr id="15" name="Text 11"/>
           <p:cNvSpPr/>
           <p:nvPr/>
         </p:nvSpPr>
@@ -6107,7 +6107,7 @@
       </p:sp>
       <p:sp>
         <p:nvSpPr>
-          <p:cNvPr id="15" name="Text 12"/>
+          <p:cNvPr id="16" name="Text 12"/>
           <p:cNvSpPr/>
           <p:nvPr/>
         </p:nvSpPr>
@@ -6146,7 +6146,7 @@
       </p:sp>
       <p:sp>
         <p:nvSpPr>
-          <p:cNvPr id="16" name="Shape 13"/>
+          <p:cNvPr id="17" name="Shape 13"/>
           <p:cNvSpPr/>
           <p:nvPr/>
         </p:nvSpPr>
@@ -6168,7 +6168,7 @@
       </p:sp>
       <p:sp>
         <p:nvSpPr>
-          <p:cNvPr id="17" name="Text 14"/>
+          <p:cNvPr id="18" name="Text 14"/>
           <p:cNvSpPr/>
           <p:nvPr/>
         </p:nvSpPr>
@@ -6207,7 +6207,7 @@
       </p:sp>
       <p:sp>
         <p:nvSpPr>
-          <p:cNvPr id="18" name="Text 15"/>
+          <p:cNvPr id="19" name="Text 15"/>
           <p:cNvSpPr/>
           <p:nvPr/>
         </p:nvSpPr>
@@ -6249,7 +6249,7 @@
       </p:sp>
       <p:sp>
         <p:nvSpPr>
-          <p:cNvPr id="19" name="Shape 16"/>
+          <p:cNvPr id="20" name="Shape 16"/>
           <p:cNvSpPr/>
           <p:nvPr/>
         </p:nvSpPr>
@@ -6271,7 +6271,7 @@
       </p:sp>
       <p:sp>
         <p:nvSpPr>
-          <p:cNvPr id="20" name="Text 17"/>
+          <p:cNvPr id="21" name="Text 17"/>
           <p:cNvSpPr/>
           <p:nvPr/>
         </p:nvSpPr>
@@ -6310,7 +6310,7 @@
       </p:sp>
       <p:sp>
         <p:nvSpPr>
-          <p:cNvPr id="21" name="Text 18"/>
+          <p:cNvPr id="22" name="Text 18"/>
           <p:cNvSpPr/>
           <p:nvPr/>
         </p:nvSpPr>
@@ -6344,7 +6344,7 @@
                 <a:ea typeface="Montserrat" pitchFamily="34" charset="-122"/>
                 <a:cs typeface="Montserrat" pitchFamily="34" charset="-120"/>
               </a:rPr>
-              <a:t>Breaker оновлюється лише на реальних викликах, а cache-hit у ланцюг не заходить: після інциденту плитка може показувати «down» довше, ніж триває проблема.</a:t>
+              <a:t>Breaker оновлюється лише на реальних викликах — «down» триває довше за проблему.</a:t>
             </a:r>
             <a:endParaRPr lang="en-US" sz="1300" dirty="0"/>
           </a:p>
@@ -6352,7 +6352,7 @@
       </p:sp>
       <p:sp>
         <p:nvSpPr>
-          <p:cNvPr id="22" name="Shape 19"/>
+          <p:cNvPr id="23" name="Shape 19"/>
           <p:cNvSpPr/>
           <p:nvPr/>
         </p:nvSpPr>
@@ -6379,7 +6379,7 @@
       </p:sp>
       <p:sp>
         <p:nvSpPr>
-          <p:cNvPr id="23" name="Text 20"/>
+          <p:cNvPr id="24" name="Text 20"/>
           <p:cNvSpPr/>
           <p:nvPr/>
         </p:nvSpPr>
@@ -6413,7 +6413,7 @@
                 <a:ea typeface="Montserrat" pitchFamily="34" charset="-122"/>
                 <a:cs typeface="Montserrat" pitchFamily="34" charset="-120"/>
               </a:rPr>
-              <a:t>Статус, прибитий цвяхом до «ok», — не спрощення, а брехня рівно в момент, коли правда потрібна.</a:t>
+              <a:t>Статус, прибитий до «ok», — брехня рівно в момент, коли правда потрібна.</a:t>
             </a:r>
             <a:endParaRPr lang="en-US" sz="1300" dirty="0"/>
           </a:p>
@@ -6664,7 +6664,7 @@
       </p:pic>
       <p:sp>
         <p:nvSpPr>
-          <p:cNvPr id="7" name="Shape 4"/>
+          <p:cNvPr id="8" name="Shape 4"/>
           <p:cNvSpPr/>
           <p:nvPr/>
         </p:nvSpPr>
@@ -6686,7 +6686,7 @@
       </p:sp>
       <p:sp>
         <p:nvSpPr>
-          <p:cNvPr id="8" name="Shape 5"/>
+          <p:cNvPr id="9" name="Shape 5"/>
           <p:cNvSpPr/>
           <p:nvPr/>
         </p:nvSpPr>
@@ -6706,7 +6706,7 @@
       </p:sp>
       <p:sp>
         <p:nvSpPr>
-          <p:cNvPr id="9" name="Text 6"/>
+          <p:cNvPr id="10" name="Text 6"/>
           <p:cNvSpPr/>
           <p:nvPr/>
         </p:nvSpPr>
@@ -6745,7 +6745,7 @@
       </p:sp>
       <p:sp>
         <p:nvSpPr>
-          <p:cNvPr id="10" name="Text 7"/>
+          <p:cNvPr id="11" name="Text 7"/>
           <p:cNvSpPr/>
           <p:nvPr/>
         </p:nvSpPr>
@@ -6784,7 +6784,7 @@
       </p:sp>
       <p:sp>
         <p:nvSpPr>
-          <p:cNvPr id="11" name="Text 8"/>
+          <p:cNvPr id="12" name="Text 8"/>
           <p:cNvSpPr/>
           <p:nvPr/>
         </p:nvSpPr>
@@ -6826,7 +6826,7 @@
       </p:sp>
       <p:sp>
         <p:nvSpPr>
-          <p:cNvPr id="12" name="Shape 9"/>
+          <p:cNvPr id="13" name="Shape 9"/>
           <p:cNvSpPr/>
           <p:nvPr/>
         </p:nvSpPr>
@@ -6848,7 +6848,7 @@
       </p:sp>
       <p:sp>
         <p:nvSpPr>
-          <p:cNvPr id="13" name="Shape 10"/>
+          <p:cNvPr id="14" name="Shape 10"/>
           <p:cNvSpPr/>
           <p:nvPr/>
         </p:nvSpPr>
@@ -6868,7 +6868,7 @@
       </p:sp>
       <p:sp>
         <p:nvSpPr>
-          <p:cNvPr id="14" name="Text 11"/>
+          <p:cNvPr id="15" name="Text 11"/>
           <p:cNvSpPr/>
           <p:nvPr/>
         </p:nvSpPr>
@@ -6907,7 +6907,7 @@
       </p:sp>
       <p:sp>
         <p:nvSpPr>
-          <p:cNvPr id="15" name="Text 12"/>
+          <p:cNvPr id="16" name="Text 12"/>
           <p:cNvSpPr/>
           <p:nvPr/>
         </p:nvSpPr>
@@ -6946,7 +6946,7 @@
       </p:sp>
       <p:sp>
         <p:nvSpPr>
-          <p:cNvPr id="16" name="Text 13"/>
+          <p:cNvPr id="17" name="Text 13"/>
           <p:cNvSpPr/>
           <p:nvPr/>
         </p:nvSpPr>
@@ -6988,7 +6988,7 @@
       </p:sp>
       <p:sp>
         <p:nvSpPr>
-          <p:cNvPr id="17" name="Shape 14"/>
+          <p:cNvPr id="18" name="Shape 14"/>
           <p:cNvSpPr/>
           <p:nvPr/>
         </p:nvSpPr>
@@ -7010,7 +7010,7 @@
       </p:sp>
       <p:sp>
         <p:nvSpPr>
-          <p:cNvPr id="18" name="Shape 15"/>
+          <p:cNvPr id="19" name="Shape 15"/>
           <p:cNvSpPr/>
           <p:nvPr/>
         </p:nvSpPr>
@@ -7030,7 +7030,7 @@
       </p:sp>
       <p:sp>
         <p:nvSpPr>
-          <p:cNvPr id="19" name="Text 16"/>
+          <p:cNvPr id="20" name="Text 16"/>
           <p:cNvSpPr/>
           <p:nvPr/>
         </p:nvSpPr>
@@ -7069,7 +7069,7 @@
       </p:sp>
       <p:sp>
         <p:nvSpPr>
-          <p:cNvPr id="20" name="Text 17"/>
+          <p:cNvPr id="21" name="Text 17"/>
           <p:cNvSpPr/>
           <p:nvPr/>
         </p:nvSpPr>
@@ -7108,7 +7108,7 @@
       </p:sp>
       <p:sp>
         <p:nvSpPr>
-          <p:cNvPr id="21" name="Text 18"/>
+          <p:cNvPr id="22" name="Text 18"/>
           <p:cNvSpPr/>
           <p:nvPr/>
         </p:nvSpPr>
@@ -7150,7 +7150,7 @@
       </p:sp>
       <p:sp>
         <p:nvSpPr>
-          <p:cNvPr id="22" name="Shape 19"/>
+          <p:cNvPr id="23" name="Shape 19"/>
           <p:cNvSpPr/>
           <p:nvPr/>
         </p:nvSpPr>
@@ -7172,7 +7172,7 @@
       </p:sp>
       <p:sp>
         <p:nvSpPr>
-          <p:cNvPr id="23" name="Text 20"/>
+          <p:cNvPr id="24" name="Text 20"/>
           <p:cNvSpPr/>
           <p:nvPr/>
         </p:nvSpPr>
@@ -7211,7 +7211,7 @@
       </p:sp>
       <p:sp>
         <p:nvSpPr>
-          <p:cNvPr id="24" name="Text 21"/>
+          <p:cNvPr id="25" name="Text 21"/>
           <p:cNvSpPr/>
           <p:nvPr/>
         </p:nvSpPr>
@@ -7253,7 +7253,7 @@
       </p:sp>
       <p:sp>
         <p:nvSpPr>
-          <p:cNvPr id="25" name="Shape 22"/>
+          <p:cNvPr id="26" name="Shape 22"/>
           <p:cNvSpPr/>
           <p:nvPr/>
         </p:nvSpPr>
@@ -7280,7 +7280,7 @@
       </p:sp>
       <p:sp>
         <p:nvSpPr>
-          <p:cNvPr id="26" name="Text 23"/>
+          <p:cNvPr id="27" name="Text 23"/>
           <p:cNvSpPr/>
           <p:nvPr/>
         </p:nvSpPr>
@@ -7486,7 +7486,7 @@
         </p:nvSpPr>
         <p:spPr>
           <a:xfrm>
-            <a:off x="1280160" y="1024128"/>
+            <a:off x="1280160" y="1193140"/>
             <a:ext cx="777240" cy="256032"/>
           </a:xfrm>
           <a:prstGeom prst="roundRect">
@@ -7508,7 +7508,7 @@
         </p:nvSpPr>
         <p:spPr>
           <a:xfrm>
-            <a:off x="1280160" y="1024128"/>
+            <a:off x="1280160" y="1193140"/>
             <a:ext cx="777240" cy="256032"/>
           </a:xfrm>
           <a:prstGeom prst="rect">
@@ -7565,7 +7565,7 @@
       </p:pic>
       <p:sp>
         <p:nvSpPr>
-          <p:cNvPr id="7" name="Shape 4"/>
+          <p:cNvPr id="8" name="Shape 4"/>
           <p:cNvSpPr/>
           <p:nvPr/>
         </p:nvSpPr>
@@ -7592,7 +7592,7 @@
       </p:sp>
       <p:sp>
         <p:nvSpPr>
-          <p:cNvPr id="8" name="Text 5"/>
+          <p:cNvPr id="9" name="Text 5"/>
           <p:cNvSpPr/>
           <p:nvPr/>
         </p:nvSpPr>
@@ -7631,7 +7631,7 @@
       </p:sp>
       <p:sp>
         <p:nvSpPr>
-          <p:cNvPr id="9" name="Text 6"/>
+          <p:cNvPr id="10" name="Text 6"/>
           <p:cNvSpPr/>
           <p:nvPr/>
         </p:nvSpPr>
@@ -7670,7 +7670,7 @@
       </p:sp>
       <p:sp>
         <p:nvSpPr>
-          <p:cNvPr id="10" name="Shape 7"/>
+          <p:cNvPr id="11" name="Shape 7"/>
           <p:cNvSpPr/>
           <p:nvPr/>
         </p:nvSpPr>
@@ -7692,7 +7692,7 @@
       </p:sp>
       <p:sp>
         <p:nvSpPr>
-          <p:cNvPr id="11" name="Text 8"/>
+          <p:cNvPr id="12" name="Text 8"/>
           <p:cNvSpPr/>
           <p:nvPr/>
         </p:nvSpPr>
@@ -7731,7 +7731,7 @@
       </p:sp>
       <p:sp>
         <p:nvSpPr>
-          <p:cNvPr id="12" name="Text 9"/>
+          <p:cNvPr id="13" name="Text 9"/>
           <p:cNvSpPr/>
           <p:nvPr/>
         </p:nvSpPr>
@@ -7770,7 +7770,7 @@
       </p:sp>
       <p:sp>
         <p:nvSpPr>
-          <p:cNvPr id="13" name="Shape 10"/>
+          <p:cNvPr id="14" name="Shape 10"/>
           <p:cNvSpPr/>
           <p:nvPr/>
         </p:nvSpPr>
@@ -7792,7 +7792,7 @@
       </p:sp>
       <p:sp>
         <p:nvSpPr>
-          <p:cNvPr id="14" name="Text 11"/>
+          <p:cNvPr id="15" name="Text 11"/>
           <p:cNvSpPr/>
           <p:nvPr/>
         </p:nvSpPr>
@@ -7831,7 +7831,7 @@
       </p:sp>
       <p:sp>
         <p:nvSpPr>
-          <p:cNvPr id="15" name="Text 12"/>
+          <p:cNvPr id="16" name="Text 12"/>
           <p:cNvSpPr/>
           <p:nvPr/>
         </p:nvSpPr>
@@ -7870,7 +7870,7 @@
       </p:sp>
       <p:sp>
         <p:nvSpPr>
-          <p:cNvPr id="16" name="Shape 13"/>
+          <p:cNvPr id="17" name="Shape 13"/>
           <p:cNvSpPr/>
           <p:nvPr/>
         </p:nvSpPr>
@@ -7892,7 +7892,7 @@
       </p:sp>
       <p:sp>
         <p:nvSpPr>
-          <p:cNvPr id="17" name="Text 14"/>
+          <p:cNvPr id="18" name="Text 14"/>
           <p:cNvSpPr/>
           <p:nvPr/>
         </p:nvSpPr>
@@ -7931,7 +7931,7 @@
       </p:sp>
       <p:sp>
         <p:nvSpPr>
-          <p:cNvPr id="18" name="Text 15"/>
+          <p:cNvPr id="19" name="Text 15"/>
           <p:cNvSpPr/>
           <p:nvPr/>
         </p:nvSpPr>
@@ -7965,7 +7965,7 @@
                 <a:ea typeface="Montserrat" pitchFamily="34" charset="-122"/>
                 <a:cs typeface="Montserrat" pitchFamily="34" charset="-120"/>
               </a:rPr>
-              <a:t>SLO — на те, що відчуває користувач. «Uptime 99.9%» — марна обіцянка: сервіс живий і роздає заглушки. Робочий SLI — частка звернень зі змістовною відповіддю.</a:t>
+              <a:t>«Uptime 99.9%» — марна обіцянка. Робочий SLI — частка змістовних відповідей.</a:t>
             </a:r>
             <a:endParaRPr lang="en-US" sz="1300" dirty="0"/>
           </a:p>
@@ -7973,7 +7973,7 @@
       </p:sp>
       <p:sp>
         <p:nvSpPr>
-          <p:cNvPr id="19" name="Shape 16"/>
+          <p:cNvPr id="20" name="Shape 16"/>
           <p:cNvSpPr/>
           <p:nvPr/>
         </p:nvSpPr>
@@ -7995,7 +7995,7 @@
       </p:sp>
       <p:sp>
         <p:nvSpPr>
-          <p:cNvPr id="20" name="Text 17"/>
+          <p:cNvPr id="21" name="Text 17"/>
           <p:cNvSpPr/>
           <p:nvPr/>
         </p:nvSpPr>
@@ -8029,7 +8029,7 @@
                 <a:ea typeface="Montserrat" pitchFamily="34" charset="-122"/>
                 <a:cs typeface="Montserrat" pitchFamily="34" charset="-120"/>
               </a:rPr>
-              <a:t>Ваш лог його поки не порахує: заглушка деградації пише той самий 503 — потрібна колонка-ознака.</a:t>
+              <a:t>Ваш лог його поки не порахує: заглушка пише той самий 503.</a:t>
             </a:r>
             <a:endParaRPr lang="en-US" sz="1300" dirty="0"/>
           </a:p>
@@ -8280,7 +8280,7 @@
       </p:pic>
       <p:sp>
         <p:nvSpPr>
-          <p:cNvPr id="7" name="Shape 4"/>
+          <p:cNvPr id="8" name="Shape 4"/>
           <p:cNvSpPr/>
           <p:nvPr/>
         </p:nvSpPr>
@@ -8302,7 +8302,7 @@
       </p:sp>
       <p:sp>
         <p:nvSpPr>
-          <p:cNvPr id="8" name="Shape 5"/>
+          <p:cNvPr id="9" name="Shape 5"/>
           <p:cNvSpPr/>
           <p:nvPr/>
         </p:nvSpPr>
@@ -8322,7 +8322,7 @@
       </p:sp>
       <p:sp>
         <p:nvSpPr>
-          <p:cNvPr id="9" name="Text 6"/>
+          <p:cNvPr id="10" name="Text 6"/>
           <p:cNvSpPr/>
           <p:nvPr/>
         </p:nvSpPr>
@@ -8361,7 +8361,7 @@
       </p:sp>
       <p:sp>
         <p:nvSpPr>
-          <p:cNvPr id="10" name="Text 7"/>
+          <p:cNvPr id="11" name="Text 7"/>
           <p:cNvSpPr/>
           <p:nvPr/>
         </p:nvSpPr>
@@ -8400,7 +8400,7 @@
       </p:sp>
       <p:sp>
         <p:nvSpPr>
-          <p:cNvPr id="11" name="Text 8"/>
+          <p:cNvPr id="12" name="Text 8"/>
           <p:cNvSpPr/>
           <p:nvPr/>
         </p:nvSpPr>
@@ -8442,7 +8442,7 @@
       </p:sp>
       <p:sp>
         <p:nvSpPr>
-          <p:cNvPr id="12" name="Shape 9"/>
+          <p:cNvPr id="13" name="Shape 9"/>
           <p:cNvSpPr/>
           <p:nvPr/>
         </p:nvSpPr>
@@ -8464,7 +8464,7 @@
       </p:sp>
       <p:sp>
         <p:nvSpPr>
-          <p:cNvPr id="13" name="Shape 10"/>
+          <p:cNvPr id="14" name="Shape 10"/>
           <p:cNvSpPr/>
           <p:nvPr/>
         </p:nvSpPr>
@@ -8484,7 +8484,7 @@
       </p:sp>
       <p:sp>
         <p:nvSpPr>
-          <p:cNvPr id="14" name="Text 11"/>
+          <p:cNvPr id="15" name="Text 11"/>
           <p:cNvSpPr/>
           <p:nvPr/>
         </p:nvSpPr>
@@ -8523,7 +8523,7 @@
       </p:sp>
       <p:sp>
         <p:nvSpPr>
-          <p:cNvPr id="15" name="Text 12"/>
+          <p:cNvPr id="16" name="Text 12"/>
           <p:cNvSpPr/>
           <p:nvPr/>
         </p:nvSpPr>
@@ -8562,7 +8562,7 @@
       </p:sp>
       <p:sp>
         <p:nvSpPr>
-          <p:cNvPr id="16" name="Text 13"/>
+          <p:cNvPr id="17" name="Text 13"/>
           <p:cNvSpPr/>
           <p:nvPr/>
         </p:nvSpPr>
@@ -8604,7 +8604,7 @@
       </p:sp>
       <p:sp>
         <p:nvSpPr>
-          <p:cNvPr id="17" name="Shape 14"/>
+          <p:cNvPr id="18" name="Shape 14"/>
           <p:cNvSpPr/>
           <p:nvPr/>
         </p:nvSpPr>
@@ -8626,7 +8626,7 @@
       </p:sp>
       <p:sp>
         <p:nvSpPr>
-          <p:cNvPr id="18" name="Shape 15"/>
+          <p:cNvPr id="19" name="Shape 15"/>
           <p:cNvSpPr/>
           <p:nvPr/>
         </p:nvSpPr>
@@ -8646,7 +8646,7 @@
       </p:sp>
       <p:sp>
         <p:nvSpPr>
-          <p:cNvPr id="19" name="Text 16"/>
+          <p:cNvPr id="20" name="Text 16"/>
           <p:cNvSpPr/>
           <p:nvPr/>
         </p:nvSpPr>
@@ -8685,7 +8685,7 @@
       </p:sp>
       <p:sp>
         <p:nvSpPr>
-          <p:cNvPr id="20" name="Text 17"/>
+          <p:cNvPr id="21" name="Text 17"/>
           <p:cNvSpPr/>
           <p:nvPr/>
         </p:nvSpPr>
@@ -8724,7 +8724,7 @@
       </p:sp>
       <p:sp>
         <p:nvSpPr>
-          <p:cNvPr id="21" name="Text 18"/>
+          <p:cNvPr id="22" name="Text 18"/>
           <p:cNvSpPr/>
           <p:nvPr/>
         </p:nvSpPr>
@@ -8766,7 +8766,7 @@
       </p:sp>
       <p:sp>
         <p:nvSpPr>
-          <p:cNvPr id="22" name="Shape 19"/>
+          <p:cNvPr id="23" name="Shape 19"/>
           <p:cNvSpPr/>
           <p:nvPr/>
         </p:nvSpPr>
@@ -8788,7 +8788,7 @@
       </p:sp>
       <p:sp>
         <p:nvSpPr>
-          <p:cNvPr id="23" name="Text 20"/>
+          <p:cNvPr id="24" name="Text 20"/>
           <p:cNvSpPr/>
           <p:nvPr/>
         </p:nvSpPr>
@@ -8827,7 +8827,7 @@
       </p:sp>
       <p:sp>
         <p:nvSpPr>
-          <p:cNvPr id="24" name="Text 21"/>
+          <p:cNvPr id="25" name="Text 21"/>
           <p:cNvSpPr/>
           <p:nvPr/>
         </p:nvSpPr>
@@ -8861,7 +8861,7 @@
                 <a:ea typeface="Montserrat" pitchFamily="34" charset="-122"/>
                 <a:cs typeface="Montserrat" pitchFamily="34" charset="-120"/>
               </a:rPr>
-              <a:t>Алерт на кожну помилку. Окремі 5xx і таймаути — нормальний фон недетермінованої системи на чужій інфраструктурі: спрацьовування на відхилення, витримане в часі.</a:t>
+              <a:t>Окремі 5xx і таймаути — нормальний фон. Алерт — на відхилення в часі.</a:t>
             </a:r>
             <a:endParaRPr lang="en-US" sz="1300" dirty="0"/>
           </a:p>
@@ -8869,7 +8869,7 @@
       </p:sp>
       <p:sp>
         <p:nvSpPr>
-          <p:cNvPr id="25" name="Shape 22"/>
+          <p:cNvPr id="26" name="Shape 22"/>
           <p:cNvSpPr/>
           <p:nvPr/>
         </p:nvSpPr>
@@ -8896,7 +8896,7 @@
       </p:sp>
       <p:sp>
         <p:nvSpPr>
-          <p:cNvPr id="26" name="Text 23"/>
+          <p:cNvPr id="27" name="Text 23"/>
           <p:cNvSpPr/>
           <p:nvPr/>
         </p:nvSpPr>
@@ -8930,7 +8930,7 @@
                 <a:ea typeface="Montserrat" pitchFamily="34" charset="-122"/>
                 <a:cs typeface="Montserrat" pitchFamily="34" charset="-120"/>
               </a:rPr>
-              <a:t>Мітки — тільки осяжні: модель, маршрут, категорія помилки. User_id живе в лозі, не в метриках.</a:t>
+              <a:t>Мітки — тільки осяжні. User_id живе в лозі, не в метриках.</a:t>
             </a:r>
             <a:endParaRPr lang="en-US" sz="1300" dirty="0"/>
           </a:p>
@@ -9102,7 +9102,7 @@
         </p:nvSpPr>
         <p:spPr>
           <a:xfrm>
-            <a:off x="1280160" y="1024128"/>
+            <a:off x="1280160" y="1193140"/>
             <a:ext cx="777240" cy="256032"/>
           </a:xfrm>
           <a:prstGeom prst="roundRect">
@@ -9124,7 +9124,7 @@
         </p:nvSpPr>
         <p:spPr>
           <a:xfrm>
-            <a:off x="1280160" y="1024128"/>
+            <a:off x="1280160" y="1193140"/>
             <a:ext cx="777240" cy="256032"/>
           </a:xfrm>
           <a:prstGeom prst="rect">
@@ -9163,7 +9163,7 @@
         </p:nvSpPr>
         <p:spPr>
           <a:xfrm>
-            <a:off x="2167128" y="1024128"/>
+            <a:off x="2167128" y="1193140"/>
             <a:ext cx="864108" cy="256032"/>
           </a:xfrm>
           <a:prstGeom prst="roundRect">
@@ -9185,7 +9185,7 @@
         </p:nvSpPr>
         <p:spPr>
           <a:xfrm>
-            <a:off x="2167128" y="1024128"/>
+            <a:off x="2167128" y="1193140"/>
             <a:ext cx="864108" cy="256032"/>
           </a:xfrm>
           <a:prstGeom prst="rect">
@@ -10097,7 +10097,7 @@
       </p:graphicFrame>
       <p:sp>
         <p:nvSpPr>
-          <p:cNvPr id="10" name="Shape 6"/>
+          <p:cNvPr id="11" name="Shape 6"/>
           <p:cNvSpPr/>
           <p:nvPr/>
         </p:nvSpPr>
@@ -10119,7 +10119,7 @@
       </p:sp>
       <p:sp>
         <p:nvSpPr>
-          <p:cNvPr id="11" name="Text 7"/>
+          <p:cNvPr id="12" name="Text 7"/>
           <p:cNvSpPr/>
           <p:nvPr/>
         </p:nvSpPr>
@@ -10325,7 +10325,7 @@
         </p:nvSpPr>
         <p:spPr>
           <a:xfrm>
-            <a:off x="1280160" y="1024128"/>
+            <a:off x="1280160" y="1193140"/>
             <a:ext cx="777240" cy="256032"/>
           </a:xfrm>
           <a:prstGeom prst="roundRect">
@@ -10347,7 +10347,7 @@
         </p:nvSpPr>
         <p:spPr>
           <a:xfrm>
-            <a:off x="1280160" y="1024128"/>
+            <a:off x="1280160" y="1193140"/>
             <a:ext cx="777240" cy="256032"/>
           </a:xfrm>
           <a:prstGeom prst="rect">
@@ -10404,7 +10404,7 @@
       </p:pic>
       <p:sp>
         <p:nvSpPr>
-          <p:cNvPr id="7" name="Shape 4"/>
+          <p:cNvPr id="8" name="Shape 4"/>
           <p:cNvSpPr/>
           <p:nvPr/>
         </p:nvSpPr>
@@ -10426,7 +10426,7 @@
       </p:sp>
       <p:sp>
         <p:nvSpPr>
-          <p:cNvPr id="8" name="Text 5"/>
+          <p:cNvPr id="9" name="Text 5"/>
           <p:cNvSpPr/>
           <p:nvPr/>
         </p:nvSpPr>
@@ -10465,7 +10465,7 @@
       </p:sp>
       <p:sp>
         <p:nvSpPr>
-          <p:cNvPr id="9" name="Shape 6"/>
+          <p:cNvPr id="10" name="Shape 6"/>
           <p:cNvSpPr/>
           <p:nvPr/>
         </p:nvSpPr>
@@ -10488,7 +10488,7 @@
       </p:sp>
       <p:sp>
         <p:nvSpPr>
-          <p:cNvPr id="10" name="Shape 7"/>
+          <p:cNvPr id="11" name="Shape 7"/>
           <p:cNvSpPr/>
           <p:nvPr/>
         </p:nvSpPr>
@@ -10508,7 +10508,7 @@
       </p:sp>
       <p:sp>
         <p:nvSpPr>
-          <p:cNvPr id="11" name="Shape 8"/>
+          <p:cNvPr id="12" name="Shape 8"/>
           <p:cNvSpPr/>
           <p:nvPr/>
         </p:nvSpPr>
@@ -10535,7 +10535,7 @@
       </p:sp>
       <p:sp>
         <p:nvSpPr>
-          <p:cNvPr id="12" name="Text 9"/>
+          <p:cNvPr id="13" name="Text 9"/>
           <p:cNvSpPr/>
           <p:nvPr/>
         </p:nvSpPr>
@@ -10574,7 +10574,7 @@
       </p:sp>
       <p:sp>
         <p:nvSpPr>
-          <p:cNvPr id="13" name="Shape 10"/>
+          <p:cNvPr id="14" name="Shape 10"/>
           <p:cNvSpPr/>
           <p:nvPr/>
         </p:nvSpPr>
@@ -10597,7 +10597,7 @@
       </p:sp>
       <p:sp>
         <p:nvSpPr>
-          <p:cNvPr id="14" name="Shape 11"/>
+          <p:cNvPr id="15" name="Shape 11"/>
           <p:cNvSpPr/>
           <p:nvPr/>
         </p:nvSpPr>
@@ -10617,7 +10617,7 @@
       </p:sp>
       <p:sp>
         <p:nvSpPr>
-          <p:cNvPr id="15" name="Shape 12"/>
+          <p:cNvPr id="16" name="Shape 12"/>
           <p:cNvSpPr/>
           <p:nvPr/>
         </p:nvSpPr>
@@ -10644,7 +10644,7 @@
       </p:sp>
       <p:sp>
         <p:nvSpPr>
-          <p:cNvPr id="16" name="Text 13"/>
+          <p:cNvPr id="17" name="Text 13"/>
           <p:cNvSpPr/>
           <p:nvPr/>
         </p:nvSpPr>
@@ -10683,7 +10683,7 @@
       </p:sp>
       <p:sp>
         <p:nvSpPr>
-          <p:cNvPr id="17" name="Shape 14"/>
+          <p:cNvPr id="18" name="Shape 14"/>
           <p:cNvSpPr/>
           <p:nvPr/>
         </p:nvSpPr>
@@ -10706,7 +10706,7 @@
       </p:sp>
       <p:sp>
         <p:nvSpPr>
-          <p:cNvPr id="18" name="Shape 15"/>
+          <p:cNvPr id="19" name="Shape 15"/>
           <p:cNvSpPr/>
           <p:nvPr/>
         </p:nvSpPr>
@@ -10726,7 +10726,7 @@
       </p:sp>
       <p:sp>
         <p:nvSpPr>
-          <p:cNvPr id="19" name="Shape 16"/>
+          <p:cNvPr id="20" name="Shape 16"/>
           <p:cNvSpPr/>
           <p:nvPr/>
         </p:nvSpPr>
@@ -10748,7 +10748,7 @@
       </p:sp>
       <p:sp>
         <p:nvSpPr>
-          <p:cNvPr id="20" name="Text 17"/>
+          <p:cNvPr id="21" name="Text 17"/>
           <p:cNvSpPr/>
           <p:nvPr/>
         </p:nvSpPr>
@@ -10787,7 +10787,7 @@
       </p:sp>
       <p:sp>
         <p:nvSpPr>
-          <p:cNvPr id="21" name="Shape 18"/>
+          <p:cNvPr id="22" name="Shape 18"/>
           <p:cNvSpPr/>
           <p:nvPr/>
         </p:nvSpPr>
@@ -10814,7 +10814,7 @@
       </p:sp>
       <p:sp>
         <p:nvSpPr>
-          <p:cNvPr id="22" name="Shape 19"/>
+          <p:cNvPr id="23" name="Shape 19"/>
           <p:cNvSpPr/>
           <p:nvPr/>
         </p:nvSpPr>
@@ -10834,7 +10834,7 @@
       </p:sp>
       <p:sp>
         <p:nvSpPr>
-          <p:cNvPr id="23" name="Text 20"/>
+          <p:cNvPr id="24" name="Text 20"/>
           <p:cNvSpPr/>
           <p:nvPr/>
         </p:nvSpPr>
@@ -10873,7 +10873,7 @@
       </p:sp>
       <p:sp>
         <p:nvSpPr>
-          <p:cNvPr id="24" name="Text 21"/>
+          <p:cNvPr id="25" name="Text 21"/>
           <p:cNvSpPr/>
           <p:nvPr/>
         </p:nvSpPr>
@@ -10912,7 +10912,7 @@
       </p:sp>
       <p:sp>
         <p:nvSpPr>
-          <p:cNvPr id="25" name="Text 22"/>
+          <p:cNvPr id="26" name="Text 22"/>
           <p:cNvSpPr/>
           <p:nvPr/>
         </p:nvSpPr>
@@ -10954,7 +10954,7 @@
       </p:sp>
       <p:sp>
         <p:nvSpPr>
-          <p:cNvPr id="26" name="Shape 23"/>
+          <p:cNvPr id="27" name="Shape 23"/>
           <p:cNvSpPr/>
           <p:nvPr/>
         </p:nvSpPr>
@@ -10981,7 +10981,7 @@
       </p:sp>
       <p:sp>
         <p:nvSpPr>
-          <p:cNvPr id="27" name="Shape 24"/>
+          <p:cNvPr id="28" name="Shape 24"/>
           <p:cNvSpPr/>
           <p:nvPr/>
         </p:nvSpPr>
@@ -11001,7 +11001,7 @@
       </p:sp>
       <p:sp>
         <p:nvSpPr>
-          <p:cNvPr id="28" name="Text 25"/>
+          <p:cNvPr id="29" name="Text 25"/>
           <p:cNvSpPr/>
           <p:nvPr/>
         </p:nvSpPr>
@@ -11040,7 +11040,7 @@
       </p:sp>
       <p:sp>
         <p:nvSpPr>
-          <p:cNvPr id="29" name="Text 26"/>
+          <p:cNvPr id="30" name="Text 26"/>
           <p:cNvSpPr/>
           <p:nvPr/>
         </p:nvSpPr>
@@ -11079,7 +11079,7 @@
       </p:sp>
       <p:sp>
         <p:nvSpPr>
-          <p:cNvPr id="30" name="Text 27"/>
+          <p:cNvPr id="31" name="Text 27"/>
           <p:cNvSpPr/>
           <p:nvPr/>
         </p:nvSpPr>
@@ -11113,7 +11113,7 @@
                 <a:ea typeface="Montserrat" pitchFamily="34" charset="-122"/>
                 <a:cs typeface="Montserrat" pitchFamily="34" charset="-120"/>
               </a:rPr>
-              <a:t>один крок усередині: виклик моделі, інструмент, guardrail — зі своїм початком, тривалістю і статусом</a:t>
+              <a:t>один крок усередині: виклик, інструмент, guardrail — зі своїм статусом</a:t>
             </a:r>
             <a:endParaRPr lang="en-US" sz="1200" dirty="0"/>
           </a:p>
@@ -11121,7 +11121,7 @@
       </p:sp>
       <p:sp>
         <p:nvSpPr>
-          <p:cNvPr id="31" name="Shape 28"/>
+          <p:cNvPr id="32" name="Shape 28"/>
           <p:cNvSpPr/>
           <p:nvPr/>
         </p:nvSpPr>
@@ -11148,7 +11148,7 @@
       </p:sp>
       <p:sp>
         <p:nvSpPr>
-          <p:cNvPr id="32" name="Shape 29"/>
+          <p:cNvPr id="33" name="Shape 29"/>
           <p:cNvSpPr/>
           <p:nvPr/>
         </p:nvSpPr>
@@ -11168,7 +11168,7 @@
       </p:sp>
       <p:sp>
         <p:nvSpPr>
-          <p:cNvPr id="33" name="Text 30"/>
+          <p:cNvPr id="34" name="Text 30"/>
           <p:cNvSpPr/>
           <p:nvPr/>
         </p:nvSpPr>
@@ -11207,7 +11207,7 @@
       </p:sp>
       <p:sp>
         <p:nvSpPr>
-          <p:cNvPr id="34" name="Text 31"/>
+          <p:cNvPr id="35" name="Text 31"/>
           <p:cNvSpPr/>
           <p:nvPr/>
         </p:nvSpPr>
@@ -11246,7 +11246,7 @@
       </p:sp>
       <p:sp>
         <p:nvSpPr>
-          <p:cNvPr id="35" name="Text 32"/>
+          <p:cNvPr id="36" name="Text 32"/>
           <p:cNvSpPr/>
           <p:nvPr/>
         </p:nvSpPr>
@@ -11288,7 +11288,7 @@
       </p:sp>
       <p:sp>
         <p:nvSpPr>
-          <p:cNvPr id="36" name="Shape 33"/>
+          <p:cNvPr id="37" name="Shape 33"/>
           <p:cNvSpPr/>
           <p:nvPr/>
         </p:nvSpPr>
@@ -11310,7 +11310,7 @@
       </p:sp>
       <p:sp>
         <p:nvSpPr>
-          <p:cNvPr id="37" name="Text 34"/>
+          <p:cNvPr id="38" name="Text 34"/>
           <p:cNvSpPr/>
           <p:nvPr/>
         </p:nvSpPr>
@@ -11349,7 +11349,7 @@
       </p:sp>
       <p:sp>
         <p:nvSpPr>
-          <p:cNvPr id="38" name="Text 35"/>
+          <p:cNvPr id="39" name="Text 35"/>
           <p:cNvSpPr/>
           <p:nvPr/>
         </p:nvSpPr>
@@ -11383,7 +11383,7 @@
                 <a:ea typeface="Montserrat" pitchFamily="34" charset="-122"/>
                 <a:cs typeface="Montserrat" pitchFamily="34" charset="-120"/>
               </a:rPr>
-              <a:t>Ідентифікатор народжується на вході, передається у все, що ви кличете, і стоїть у кожному рядку лога — включно з невдалими спробами. Дописати його потім — це переписати всі логи, які вже накопичилися.</a:t>
+              <a:t>Ідентифікатор народжується на вході й стоїть у кожному рядку лога.</a:t>
             </a:r>
             <a:endParaRPr lang="en-US" sz="1300" dirty="0"/>
           </a:p>
@@ -11676,7 +11676,7 @@
       </p:pic>
       <p:sp>
         <p:nvSpPr>
-          <p:cNvPr id="8" name="Shape 5"/>
+          <p:cNvPr id="9" name="Shape 5"/>
           <p:cNvSpPr/>
           <p:nvPr/>
         </p:nvSpPr>
@@ -11703,7 +11703,7 @@
       </p:sp>
       <p:sp>
         <p:nvSpPr>
-          <p:cNvPr id="9" name="Shape 6"/>
+          <p:cNvPr id="10" name="Shape 6"/>
           <p:cNvSpPr/>
           <p:nvPr/>
         </p:nvSpPr>
@@ -11723,7 +11723,7 @@
       </p:sp>
       <p:sp>
         <p:nvSpPr>
-          <p:cNvPr id="10" name="Text 7"/>
+          <p:cNvPr id="11" name="Text 7"/>
           <p:cNvSpPr/>
           <p:nvPr/>
         </p:nvSpPr>
@@ -11762,7 +11762,7 @@
       </p:sp>
       <p:sp>
         <p:nvSpPr>
-          <p:cNvPr id="11" name="Text 8"/>
+          <p:cNvPr id="12" name="Text 8"/>
           <p:cNvSpPr/>
           <p:nvPr/>
         </p:nvSpPr>
@@ -11801,7 +11801,7 @@
       </p:sp>
       <p:sp>
         <p:nvSpPr>
-          <p:cNvPr id="12" name="Text 9"/>
+          <p:cNvPr id="13" name="Text 9"/>
           <p:cNvSpPr/>
           <p:nvPr/>
         </p:nvSpPr>
@@ -11835,7 +11835,7 @@
                 <a:ea typeface="Montserrat" pitchFamily="34" charset="-122"/>
                 <a:cs typeface="Montserrat" pitchFamily="34" charset="-120"/>
               </a:rPr>
-              <a:t>час до першого токена, повна генерація, час до останнього байта — мірити треба перший і третій</a:t>
+              <a:t>час до першого токена, повна генерація, час до останнього байта</a:t>
             </a:r>
             <a:endParaRPr lang="en-US" sz="1200" dirty="0"/>
           </a:p>
@@ -11843,7 +11843,7 @@
       </p:sp>
       <p:sp>
         <p:nvSpPr>
-          <p:cNvPr id="13" name="Shape 10"/>
+          <p:cNvPr id="14" name="Shape 10"/>
           <p:cNvSpPr/>
           <p:nvPr/>
         </p:nvSpPr>
@@ -11865,7 +11865,7 @@
       </p:sp>
       <p:sp>
         <p:nvSpPr>
-          <p:cNvPr id="14" name="Shape 11"/>
+          <p:cNvPr id="15" name="Shape 11"/>
           <p:cNvSpPr/>
           <p:nvPr/>
         </p:nvSpPr>
@@ -11885,7 +11885,7 @@
       </p:sp>
       <p:sp>
         <p:nvSpPr>
-          <p:cNvPr id="15" name="Text 12"/>
+          <p:cNvPr id="16" name="Text 12"/>
           <p:cNvSpPr/>
           <p:nvPr/>
         </p:nvSpPr>
@@ -11924,7 +11924,7 @@
       </p:sp>
       <p:sp>
         <p:nvSpPr>
-          <p:cNvPr id="16" name="Text 13"/>
+          <p:cNvPr id="17" name="Text 13"/>
           <p:cNvSpPr/>
           <p:nvPr/>
         </p:nvSpPr>
@@ -11963,7 +11963,7 @@
       </p:sp>
       <p:sp>
         <p:nvSpPr>
-          <p:cNvPr id="17" name="Text 14"/>
+          <p:cNvPr id="18" name="Text 14"/>
           <p:cNvSpPr/>
           <p:nvPr/>
         </p:nvSpPr>
@@ -11997,7 +11997,7 @@
                 <a:ea typeface="Montserrat" pitchFamily="34" charset="-122"/>
                 <a:cs typeface="Montserrat" pitchFamily="34" charset="-120"/>
               </a:rPr>
-              <a:t>стрім почався з 200 і обірвався на середині: для HTTP усе гаразд, для користувача — зламано</a:t>
+              <a:t>стрім почався з 200 і обірвався: для HTTP гаразд, для користувача — ні</a:t>
             </a:r>
             <a:endParaRPr lang="en-US" sz="1200" dirty="0"/>
           </a:p>
@@ -12005,7 +12005,7 @@
       </p:sp>
       <p:sp>
         <p:nvSpPr>
-          <p:cNvPr id="18" name="Shape 15"/>
+          <p:cNvPr id="19" name="Shape 15"/>
           <p:cNvSpPr/>
           <p:nvPr/>
         </p:nvSpPr>
@@ -12032,7 +12032,7 @@
       </p:sp>
       <p:sp>
         <p:nvSpPr>
-          <p:cNvPr id="19" name="Shape 16"/>
+          <p:cNvPr id="20" name="Shape 16"/>
           <p:cNvSpPr/>
           <p:nvPr/>
         </p:nvSpPr>
@@ -12052,7 +12052,7 @@
       </p:sp>
       <p:sp>
         <p:nvSpPr>
-          <p:cNvPr id="20" name="Text 17"/>
+          <p:cNvPr id="21" name="Text 17"/>
           <p:cNvSpPr/>
           <p:nvPr/>
         </p:nvSpPr>
@@ -12091,7 +12091,7 @@
       </p:sp>
       <p:sp>
         <p:nvSpPr>
-          <p:cNvPr id="21" name="Text 18"/>
+          <p:cNvPr id="22" name="Text 18"/>
           <p:cNvSpPr/>
           <p:nvPr/>
         </p:nvSpPr>
@@ -12130,7 +12130,7 @@
       </p:sp>
       <p:sp>
         <p:nvSpPr>
-          <p:cNvPr id="22" name="Text 19"/>
+          <p:cNvPr id="23" name="Text 19"/>
           <p:cNvSpPr/>
           <p:nvPr/>
         </p:nvSpPr>
@@ -12172,7 +12172,7 @@
       </p:sp>
       <p:sp>
         <p:nvSpPr>
-          <p:cNvPr id="23" name="Shape 20"/>
+          <p:cNvPr id="24" name="Shape 20"/>
           <p:cNvSpPr/>
           <p:nvPr/>
         </p:nvSpPr>
@@ -12194,7 +12194,7 @@
       </p:sp>
       <p:sp>
         <p:nvSpPr>
-          <p:cNvPr id="24" name="Text 21"/>
+          <p:cNvPr id="25" name="Text 21"/>
           <p:cNvSpPr/>
           <p:nvPr/>
         </p:nvSpPr>
@@ -12233,7 +12233,7 @@
       </p:sp>
       <p:sp>
         <p:nvSpPr>
-          <p:cNvPr id="25" name="Text 22"/>
+          <p:cNvPr id="26" name="Text 22"/>
           <p:cNvSpPr/>
           <p:nvPr/>
         </p:nvSpPr>
@@ -12267,7 +12267,7 @@
                 <a:ea typeface="Montserrat" pitchFamily="34" charset="-122"/>
                 <a:cs typeface="Montserrat" pitchFamily="34" charset="-120"/>
               </a:rPr>
-              <a:t>Мисліть latency_ms і status як «характеристику завершення відповіді», а не як код HTTP. Тоді стрімінг стане розширенням лога, а не його переписуванням.</a:t>
+              <a:t>latency_ms і status — характеристика завершення відповіді, а не код HTTP.</a:t>
             </a:r>
             <a:endParaRPr lang="en-US" sz="1300" dirty="0"/>
           </a:p>
@@ -12560,7 +12560,7 @@
       </p:pic>
       <p:sp>
         <p:nvSpPr>
-          <p:cNvPr id="8" name="Shape 5"/>
+          <p:cNvPr id="9" name="Shape 5"/>
           <p:cNvSpPr/>
           <p:nvPr/>
         </p:nvSpPr>
@@ -12587,7 +12587,7 @@
       </p:sp>
       <p:sp>
         <p:nvSpPr>
-          <p:cNvPr id="9" name="Shape 6"/>
+          <p:cNvPr id="10" name="Shape 6"/>
           <p:cNvSpPr/>
           <p:nvPr/>
         </p:nvSpPr>
@@ -12607,7 +12607,7 @@
       </p:sp>
       <p:sp>
         <p:nvSpPr>
-          <p:cNvPr id="10" name="Text 7"/>
+          <p:cNvPr id="11" name="Text 7"/>
           <p:cNvSpPr/>
           <p:nvPr/>
         </p:nvSpPr>
@@ -12646,7 +12646,7 @@
       </p:sp>
       <p:sp>
         <p:nvSpPr>
-          <p:cNvPr id="11" name="Text 8"/>
+          <p:cNvPr id="12" name="Text 8"/>
           <p:cNvSpPr/>
           <p:nvPr/>
         </p:nvSpPr>
@@ -12685,7 +12685,7 @@
       </p:sp>
       <p:sp>
         <p:nvSpPr>
-          <p:cNvPr id="12" name="Text 9"/>
+          <p:cNvPr id="13" name="Text 9"/>
           <p:cNvSpPr/>
           <p:nvPr/>
         </p:nvSpPr>
@@ -12719,7 +12719,7 @@
                 <a:ea typeface="Montserrat" pitchFamily="34" charset="-122"/>
                 <a:cs typeface="Montserrat" pitchFamily="34" charset="-120"/>
               </a:rPr>
-              <a:t>ознак досить: довжина, токени, finish_reason, спрацювання guardrail, які інструменти кликали</a:t>
+              <a:t>ознак досить: довжина, токени, finish_reason, guardrail, які інструменти</a:t>
             </a:r>
             <a:endParaRPr lang="en-US" sz="1200" dirty="0"/>
           </a:p>
@@ -12727,7 +12727,7 @@
       </p:sp>
       <p:sp>
         <p:nvSpPr>
-          <p:cNvPr id="13" name="Shape 10"/>
+          <p:cNvPr id="14" name="Shape 10"/>
           <p:cNvSpPr/>
           <p:nvPr/>
         </p:nvSpPr>
@@ -12754,7 +12754,7 @@
       </p:sp>
       <p:sp>
         <p:nvSpPr>
-          <p:cNvPr id="14" name="Shape 11"/>
+          <p:cNvPr id="15" name="Shape 11"/>
           <p:cNvSpPr/>
           <p:nvPr/>
         </p:nvSpPr>
@@ -12774,7 +12774,7 @@
       </p:sp>
       <p:sp>
         <p:nvSpPr>
-          <p:cNvPr id="15" name="Text 12"/>
+          <p:cNvPr id="16" name="Text 12"/>
           <p:cNvSpPr/>
           <p:nvPr/>
         </p:nvSpPr>
@@ -12813,7 +12813,7 @@
       </p:sp>
       <p:sp>
         <p:nvSpPr>
-          <p:cNvPr id="16" name="Text 13"/>
+          <p:cNvPr id="17" name="Text 13"/>
           <p:cNvSpPr/>
           <p:nvPr/>
         </p:nvSpPr>
@@ -12852,7 +12852,7 @@
       </p:sp>
       <p:sp>
         <p:nvSpPr>
-          <p:cNvPr id="17" name="Text 14"/>
+          <p:cNvPr id="18" name="Text 14"/>
           <p:cNvSpPr/>
           <p:nvPr/>
         </p:nvSpPr>
@@ -12894,7 +12894,7 @@
       </p:sp>
       <p:sp>
         <p:nvSpPr>
-          <p:cNvPr id="18" name="Shape 15"/>
+          <p:cNvPr id="19" name="Shape 15"/>
           <p:cNvSpPr/>
           <p:nvPr/>
         </p:nvSpPr>
@@ -12916,7 +12916,7 @@
       </p:sp>
       <p:sp>
         <p:nvSpPr>
-          <p:cNvPr id="19" name="Shape 16"/>
+          <p:cNvPr id="20" name="Shape 16"/>
           <p:cNvSpPr/>
           <p:nvPr/>
         </p:nvSpPr>
@@ -12936,7 +12936,7 @@
       </p:sp>
       <p:sp>
         <p:nvSpPr>
-          <p:cNvPr id="20" name="Text 17"/>
+          <p:cNvPr id="21" name="Text 17"/>
           <p:cNvSpPr/>
           <p:nvPr/>
         </p:nvSpPr>
@@ -12975,7 +12975,7 @@
       </p:sp>
       <p:sp>
         <p:nvSpPr>
-          <p:cNvPr id="21" name="Text 18"/>
+          <p:cNvPr id="22" name="Text 18"/>
           <p:cNvSpPr/>
           <p:nvPr/>
         </p:nvSpPr>
@@ -13014,7 +13014,7 @@
       </p:sp>
       <p:sp>
         <p:nvSpPr>
-          <p:cNvPr id="22" name="Text 19"/>
+          <p:cNvPr id="23" name="Text 19"/>
           <p:cNvSpPr/>
           <p:nvPr/>
         </p:nvSpPr>
@@ -13056,7 +13056,7 @@
       </p:sp>
       <p:sp>
         <p:nvSpPr>
-          <p:cNvPr id="23" name="Shape 20"/>
+          <p:cNvPr id="24" name="Shape 20"/>
           <p:cNvSpPr/>
           <p:nvPr/>
         </p:nvSpPr>
@@ -13078,7 +13078,7 @@
       </p:sp>
       <p:sp>
         <p:nvSpPr>
-          <p:cNvPr id="24" name="Text 21"/>
+          <p:cNvPr id="25" name="Text 21"/>
           <p:cNvSpPr/>
           <p:nvPr/>
         </p:nvSpPr>
@@ -13117,7 +13117,7 @@
       </p:sp>
       <p:sp>
         <p:nvSpPr>
-          <p:cNvPr id="25" name="Text 22"/>
+          <p:cNvPr id="26" name="Text 22"/>
           <p:cNvSpPr/>
           <p:nvPr/>
         </p:nvSpPr>
@@ -13151,7 +13151,7 @@
                 <a:ea typeface="Montserrat" pitchFamily="34" charset="-122"/>
                 <a:cs typeface="Montserrat" pitchFamily="34" charset="-120"/>
               </a:rPr>
-              <a:t>Усе, що ви залогували, ви тепер зобов'язані захищати. Лог — не блокнот, а база даних із тим самим режимом доступу, що й інші ваші дані.</a:t>
+              <a:t>Усе залоговане ви зобов'язані захищати: лог — база даних, не блокнот.</a:t>
             </a:r>
             <a:endParaRPr lang="en-US" sz="1300" dirty="0"/>
           </a:p>
@@ -13402,7 +13402,7 @@
       </p:pic>
       <p:sp>
         <p:nvSpPr>
-          <p:cNvPr id="7" name="Shape 4"/>
+          <p:cNvPr id="8" name="Shape 4"/>
           <p:cNvSpPr/>
           <p:nvPr/>
         </p:nvSpPr>
@@ -13424,7 +13424,7 @@
       </p:sp>
       <p:sp>
         <p:nvSpPr>
-          <p:cNvPr id="8" name="Text 5"/>
+          <p:cNvPr id="9" name="Text 5"/>
           <p:cNvSpPr/>
           <p:nvPr/>
         </p:nvSpPr>
@@ -13463,7 +13463,7 @@
       </p:sp>
       <p:sp>
         <p:nvSpPr>
-          <p:cNvPr id="9" name="Text 6"/>
+          <p:cNvPr id="10" name="Text 6"/>
           <p:cNvSpPr/>
           <p:nvPr/>
         </p:nvSpPr>
@@ -13505,7 +13505,7 @@
       </p:sp>
       <p:sp>
         <p:nvSpPr>
-          <p:cNvPr id="10" name="Shape 7"/>
+          <p:cNvPr id="11" name="Shape 7"/>
           <p:cNvSpPr/>
           <p:nvPr/>
         </p:nvSpPr>
@@ -13527,7 +13527,7 @@
       </p:sp>
       <p:sp>
         <p:nvSpPr>
-          <p:cNvPr id="11" name="Text 8"/>
+          <p:cNvPr id="12" name="Text 8"/>
           <p:cNvSpPr/>
           <p:nvPr/>
         </p:nvSpPr>
@@ -13566,7 +13566,7 @@
       </p:sp>
       <p:sp>
         <p:nvSpPr>
-          <p:cNvPr id="12" name="Text 9"/>
+          <p:cNvPr id="13" name="Text 9"/>
           <p:cNvSpPr/>
           <p:nvPr/>
         </p:nvSpPr>
@@ -13608,7 +13608,7 @@
       </p:sp>
       <p:sp>
         <p:nvSpPr>
-          <p:cNvPr id="13" name="Shape 10"/>
+          <p:cNvPr id="14" name="Shape 10"/>
           <p:cNvSpPr/>
           <p:nvPr/>
         </p:nvSpPr>
@@ -13630,7 +13630,7 @@
       </p:sp>
       <p:sp>
         <p:nvSpPr>
-          <p:cNvPr id="14" name="Text 11"/>
+          <p:cNvPr id="15" name="Text 11"/>
           <p:cNvSpPr/>
           <p:nvPr/>
         </p:nvSpPr>
@@ -13669,7 +13669,7 @@
       </p:sp>
       <p:sp>
         <p:nvSpPr>
-          <p:cNvPr id="15" name="Text 12"/>
+          <p:cNvPr id="16" name="Text 12"/>
           <p:cNvSpPr/>
           <p:nvPr/>
         </p:nvSpPr>
@@ -13711,7 +13711,7 @@
       </p:sp>
       <p:sp>
         <p:nvSpPr>
-          <p:cNvPr id="16" name="Shape 13"/>
+          <p:cNvPr id="17" name="Shape 13"/>
           <p:cNvSpPr/>
           <p:nvPr/>
         </p:nvSpPr>
@@ -13738,7 +13738,7 @@
       </p:sp>
       <p:sp>
         <p:nvSpPr>
-          <p:cNvPr id="17" name="Text 14"/>
+          <p:cNvPr id="18" name="Text 14"/>
           <p:cNvSpPr/>
           <p:nvPr/>
         </p:nvSpPr>
@@ -14026,7 +14026,7 @@
       </p:pic>
       <p:sp>
         <p:nvSpPr>
-          <p:cNvPr id="7" name="Shape 4"/>
+          <p:cNvPr id="8" name="Shape 4"/>
           <p:cNvSpPr/>
           <p:nvPr/>
         </p:nvSpPr>
@@ -14053,7 +14053,7 @@
       </p:sp>
       <p:sp>
         <p:nvSpPr>
-          <p:cNvPr id="8" name="Shape 5"/>
+          <p:cNvPr id="9" name="Shape 5"/>
           <p:cNvSpPr/>
           <p:nvPr/>
         </p:nvSpPr>
@@ -14073,7 +14073,7 @@
       </p:sp>
       <p:sp>
         <p:nvSpPr>
-          <p:cNvPr id="9" name="Text 6"/>
+          <p:cNvPr id="10" name="Text 6"/>
           <p:cNvSpPr/>
           <p:nvPr/>
         </p:nvSpPr>
@@ -14112,7 +14112,7 @@
       </p:sp>
       <p:sp>
         <p:nvSpPr>
-          <p:cNvPr id="10" name="Text 7"/>
+          <p:cNvPr id="11" name="Text 7"/>
           <p:cNvSpPr/>
           <p:nvPr/>
         </p:nvSpPr>
@@ -14151,7 +14151,7 @@
       </p:sp>
       <p:sp>
         <p:nvSpPr>
-          <p:cNvPr id="11" name="Text 8"/>
+          <p:cNvPr id="12" name="Text 8"/>
           <p:cNvSpPr/>
           <p:nvPr/>
         </p:nvSpPr>
@@ -14193,7 +14193,7 @@
       </p:sp>
       <p:sp>
         <p:nvSpPr>
-          <p:cNvPr id="12" name="Shape 9"/>
+          <p:cNvPr id="13" name="Shape 9"/>
           <p:cNvSpPr/>
           <p:nvPr/>
         </p:nvSpPr>
@@ -14220,7 +14220,7 @@
       </p:sp>
       <p:sp>
         <p:nvSpPr>
-          <p:cNvPr id="13" name="Shape 10"/>
+          <p:cNvPr id="14" name="Shape 10"/>
           <p:cNvSpPr/>
           <p:nvPr/>
         </p:nvSpPr>
@@ -14240,7 +14240,7 @@
       </p:sp>
       <p:sp>
         <p:nvSpPr>
-          <p:cNvPr id="14" name="Text 11"/>
+          <p:cNvPr id="15" name="Text 11"/>
           <p:cNvSpPr/>
           <p:nvPr/>
         </p:nvSpPr>
@@ -14279,7 +14279,7 @@
       </p:sp>
       <p:sp>
         <p:nvSpPr>
-          <p:cNvPr id="15" name="Text 12"/>
+          <p:cNvPr id="16" name="Text 12"/>
           <p:cNvSpPr/>
           <p:nvPr/>
         </p:nvSpPr>
@@ -14318,7 +14318,7 @@
       </p:sp>
       <p:sp>
         <p:nvSpPr>
-          <p:cNvPr id="16" name="Text 13"/>
+          <p:cNvPr id="17" name="Text 13"/>
           <p:cNvSpPr/>
           <p:nvPr/>
         </p:nvSpPr>
@@ -14360,7 +14360,7 @@
       </p:sp>
       <p:sp>
         <p:nvSpPr>
-          <p:cNvPr id="17" name="Shape 14"/>
+          <p:cNvPr id="18" name="Shape 14"/>
           <p:cNvSpPr/>
           <p:nvPr/>
         </p:nvSpPr>
@@ -14387,7 +14387,7 @@
       </p:sp>
       <p:sp>
         <p:nvSpPr>
-          <p:cNvPr id="18" name="Shape 15"/>
+          <p:cNvPr id="19" name="Shape 15"/>
           <p:cNvSpPr/>
           <p:nvPr/>
         </p:nvSpPr>
@@ -14407,7 +14407,7 @@
       </p:sp>
       <p:sp>
         <p:nvSpPr>
-          <p:cNvPr id="19" name="Text 16"/>
+          <p:cNvPr id="20" name="Text 16"/>
           <p:cNvSpPr/>
           <p:nvPr/>
         </p:nvSpPr>
@@ -14446,7 +14446,7 @@
       </p:sp>
       <p:sp>
         <p:nvSpPr>
-          <p:cNvPr id="20" name="Text 17"/>
+          <p:cNvPr id="21" name="Text 17"/>
           <p:cNvSpPr/>
           <p:nvPr/>
         </p:nvSpPr>
@@ -14485,7 +14485,7 @@
       </p:sp>
       <p:sp>
         <p:nvSpPr>
-          <p:cNvPr id="21" name="Text 18"/>
+          <p:cNvPr id="22" name="Text 18"/>
           <p:cNvSpPr/>
           <p:nvPr/>
         </p:nvSpPr>
@@ -14527,7 +14527,7 @@
       </p:sp>
       <p:sp>
         <p:nvSpPr>
-          <p:cNvPr id="22" name="Shape 19"/>
+          <p:cNvPr id="23" name="Shape 19"/>
           <p:cNvSpPr/>
           <p:nvPr/>
         </p:nvSpPr>
@@ -14554,7 +14554,7 @@
       </p:sp>
       <p:sp>
         <p:nvSpPr>
-          <p:cNvPr id="23" name="Shape 20"/>
+          <p:cNvPr id="24" name="Shape 20"/>
           <p:cNvSpPr/>
           <p:nvPr/>
         </p:nvSpPr>
@@ -14574,7 +14574,7 @@
       </p:sp>
       <p:sp>
         <p:nvSpPr>
-          <p:cNvPr id="24" name="Text 21"/>
+          <p:cNvPr id="25" name="Text 21"/>
           <p:cNvSpPr/>
           <p:nvPr/>
         </p:nvSpPr>
@@ -14613,7 +14613,7 @@
       </p:sp>
       <p:sp>
         <p:nvSpPr>
-          <p:cNvPr id="25" name="Text 22"/>
+          <p:cNvPr id="26" name="Text 22"/>
           <p:cNvSpPr/>
           <p:nvPr/>
         </p:nvSpPr>
@@ -14652,7 +14652,7 @@
       </p:sp>
       <p:sp>
         <p:nvSpPr>
-          <p:cNvPr id="26" name="Text 23"/>
+          <p:cNvPr id="27" name="Text 23"/>
           <p:cNvSpPr/>
           <p:nvPr/>
         </p:nvSpPr>
@@ -14694,7 +14694,7 @@
       </p:sp>
       <p:sp>
         <p:nvSpPr>
-          <p:cNvPr id="27" name="Shape 24"/>
+          <p:cNvPr id="28" name="Shape 24"/>
           <p:cNvSpPr/>
           <p:nvPr/>
         </p:nvSpPr>
@@ -14721,7 +14721,7 @@
       </p:sp>
       <p:sp>
         <p:nvSpPr>
-          <p:cNvPr id="28" name="Shape 25"/>
+          <p:cNvPr id="29" name="Shape 25"/>
           <p:cNvSpPr/>
           <p:nvPr/>
         </p:nvSpPr>
@@ -14741,7 +14741,7 @@
       </p:sp>
       <p:sp>
         <p:nvSpPr>
-          <p:cNvPr id="29" name="Text 26"/>
+          <p:cNvPr id="30" name="Text 26"/>
           <p:cNvSpPr/>
           <p:nvPr/>
         </p:nvSpPr>
@@ -14780,7 +14780,7 @@
       </p:sp>
       <p:sp>
         <p:nvSpPr>
-          <p:cNvPr id="30" name="Text 27"/>
+          <p:cNvPr id="31" name="Text 27"/>
           <p:cNvSpPr/>
           <p:nvPr/>
         </p:nvSpPr>
@@ -14819,7 +14819,7 @@
       </p:sp>
       <p:sp>
         <p:nvSpPr>
-          <p:cNvPr id="31" name="Text 28"/>
+          <p:cNvPr id="32" name="Text 28"/>
           <p:cNvSpPr/>
           <p:nvPr/>
         </p:nvSpPr>
@@ -15065,7 +15065,7 @@
       </p:pic>
       <p:sp>
         <p:nvSpPr>
-          <p:cNvPr id="6" name="Shape 3"/>
+          <p:cNvPr id="7" name="Shape 3"/>
           <p:cNvSpPr/>
           <p:nvPr/>
         </p:nvSpPr>
@@ -15087,7 +15087,7 @@
       </p:sp>
       <p:sp>
         <p:nvSpPr>
-          <p:cNvPr id="7" name="Shape 4"/>
+          <p:cNvPr id="8" name="Shape 4"/>
           <p:cNvSpPr/>
           <p:nvPr/>
         </p:nvSpPr>
@@ -15107,7 +15107,7 @@
       </p:sp>
       <p:sp>
         <p:nvSpPr>
-          <p:cNvPr id="8" name="Text 5"/>
+          <p:cNvPr id="9" name="Text 5"/>
           <p:cNvSpPr/>
           <p:nvPr/>
         </p:nvSpPr>
@@ -15146,7 +15146,7 @@
       </p:sp>
       <p:sp>
         <p:nvSpPr>
-          <p:cNvPr id="9" name="Text 6"/>
+          <p:cNvPr id="10" name="Text 6"/>
           <p:cNvSpPr/>
           <p:nvPr/>
         </p:nvSpPr>
@@ -15185,7 +15185,7 @@
       </p:sp>
       <p:sp>
         <p:nvSpPr>
-          <p:cNvPr id="10" name="Text 7"/>
+          <p:cNvPr id="11" name="Text 7"/>
           <p:cNvSpPr/>
           <p:nvPr/>
         </p:nvSpPr>
@@ -15227,7 +15227,7 @@
       </p:sp>
       <p:sp>
         <p:nvSpPr>
-          <p:cNvPr id="11" name="Shape 8"/>
+          <p:cNvPr id="12" name="Shape 8"/>
           <p:cNvSpPr/>
           <p:nvPr/>
         </p:nvSpPr>
@@ -15249,7 +15249,7 @@
       </p:sp>
       <p:sp>
         <p:nvSpPr>
-          <p:cNvPr id="12" name="Shape 9"/>
+          <p:cNvPr id="13" name="Shape 9"/>
           <p:cNvSpPr/>
           <p:nvPr/>
         </p:nvSpPr>
@@ -15269,7 +15269,7 @@
       </p:sp>
       <p:sp>
         <p:nvSpPr>
-          <p:cNvPr id="13" name="Text 10"/>
+          <p:cNvPr id="14" name="Text 10"/>
           <p:cNvSpPr/>
           <p:nvPr/>
         </p:nvSpPr>
@@ -15308,7 +15308,7 @@
       </p:sp>
       <p:sp>
         <p:nvSpPr>
-          <p:cNvPr id="14" name="Text 11"/>
+          <p:cNvPr id="15" name="Text 11"/>
           <p:cNvSpPr/>
           <p:nvPr/>
         </p:nvSpPr>
@@ -15347,7 +15347,7 @@
       </p:sp>
       <p:sp>
         <p:nvSpPr>
-          <p:cNvPr id="15" name="Text 12"/>
+          <p:cNvPr id="16" name="Text 12"/>
           <p:cNvSpPr/>
           <p:nvPr/>
         </p:nvSpPr>
@@ -15389,7 +15389,7 @@
       </p:sp>
       <p:sp>
         <p:nvSpPr>
-          <p:cNvPr id="16" name="Shape 13"/>
+          <p:cNvPr id="17" name="Shape 13"/>
           <p:cNvSpPr/>
           <p:nvPr/>
         </p:nvSpPr>
@@ -15411,7 +15411,7 @@
       </p:sp>
       <p:sp>
         <p:nvSpPr>
-          <p:cNvPr id="17" name="Shape 14"/>
+          <p:cNvPr id="18" name="Shape 14"/>
           <p:cNvSpPr/>
           <p:nvPr/>
         </p:nvSpPr>
@@ -15431,7 +15431,7 @@
       </p:sp>
       <p:sp>
         <p:nvSpPr>
-          <p:cNvPr id="18" name="Text 15"/>
+          <p:cNvPr id="19" name="Text 15"/>
           <p:cNvSpPr/>
           <p:nvPr/>
         </p:nvSpPr>
@@ -15470,7 +15470,7 @@
       </p:sp>
       <p:sp>
         <p:nvSpPr>
-          <p:cNvPr id="19" name="Text 16"/>
+          <p:cNvPr id="20" name="Text 16"/>
           <p:cNvSpPr/>
           <p:nvPr/>
         </p:nvSpPr>
@@ -15509,7 +15509,7 @@
       </p:sp>
       <p:sp>
         <p:nvSpPr>
-          <p:cNvPr id="20" name="Text 17"/>
+          <p:cNvPr id="21" name="Text 17"/>
           <p:cNvSpPr/>
           <p:nvPr/>
         </p:nvSpPr>
@@ -15551,7 +15551,7 @@
       </p:sp>
       <p:sp>
         <p:nvSpPr>
-          <p:cNvPr id="21" name="Shape 18"/>
+          <p:cNvPr id="22" name="Shape 18"/>
           <p:cNvSpPr/>
           <p:nvPr/>
         </p:nvSpPr>
@@ -15573,7 +15573,7 @@
       </p:sp>
       <p:sp>
         <p:nvSpPr>
-          <p:cNvPr id="22" name="Shape 19"/>
+          <p:cNvPr id="23" name="Shape 19"/>
           <p:cNvSpPr/>
           <p:nvPr/>
         </p:nvSpPr>
@@ -15593,7 +15593,7 @@
       </p:sp>
       <p:sp>
         <p:nvSpPr>
-          <p:cNvPr id="23" name="Text 20"/>
+          <p:cNvPr id="24" name="Text 20"/>
           <p:cNvSpPr/>
           <p:nvPr/>
         </p:nvSpPr>
@@ -15632,7 +15632,7 @@
       </p:sp>
       <p:sp>
         <p:nvSpPr>
-          <p:cNvPr id="24" name="Text 21"/>
+          <p:cNvPr id="25" name="Text 21"/>
           <p:cNvSpPr/>
           <p:nvPr/>
         </p:nvSpPr>
@@ -15671,7 +15671,7 @@
       </p:sp>
       <p:sp>
         <p:nvSpPr>
-          <p:cNvPr id="25" name="Text 22"/>
+          <p:cNvPr id="26" name="Text 22"/>
           <p:cNvSpPr/>
           <p:nvPr/>
         </p:nvSpPr>
@@ -15713,7 +15713,7 @@
       </p:sp>
       <p:sp>
         <p:nvSpPr>
-          <p:cNvPr id="26" name="Shape 23"/>
+          <p:cNvPr id="27" name="Shape 23"/>
           <p:cNvSpPr/>
           <p:nvPr/>
         </p:nvSpPr>
@@ -15735,7 +15735,7 @@
       </p:sp>
       <p:sp>
         <p:nvSpPr>
-          <p:cNvPr id="27" name="Text 24"/>
+          <p:cNvPr id="28" name="Text 24"/>
           <p:cNvSpPr/>
           <p:nvPr/>
         </p:nvSpPr>
@@ -15774,7 +15774,7 @@
       </p:sp>
       <p:sp>
         <p:nvSpPr>
-          <p:cNvPr id="28" name="Text 25"/>
+          <p:cNvPr id="29" name="Text 25"/>
           <p:cNvSpPr/>
           <p:nvPr/>
         </p:nvSpPr>
@@ -16020,7 +16020,7 @@
       </p:pic>
       <p:sp>
         <p:nvSpPr>
-          <p:cNvPr id="6" name="Shape 3"/>
+          <p:cNvPr id="7" name="Shape 3"/>
           <p:cNvSpPr/>
           <p:nvPr/>
         </p:nvSpPr>
@@ -16040,7 +16040,7 @@
       </p:sp>
       <p:sp>
         <p:nvSpPr>
-          <p:cNvPr id="7" name="Text 4"/>
+          <p:cNvPr id="8" name="Text 4"/>
           <p:cNvSpPr/>
           <p:nvPr/>
         </p:nvSpPr>
@@ -16079,7 +16079,7 @@
       </p:sp>
       <p:sp>
         <p:nvSpPr>
-          <p:cNvPr id="8" name="Text 5"/>
+          <p:cNvPr id="9" name="Text 5"/>
           <p:cNvSpPr/>
           <p:nvPr/>
         </p:nvSpPr>
@@ -16132,7 +16132,7 @@
       </p:sp>
       <p:sp>
         <p:nvSpPr>
-          <p:cNvPr id="9" name="Shape 6"/>
+          <p:cNvPr id="10" name="Shape 6"/>
           <p:cNvSpPr/>
           <p:nvPr/>
         </p:nvSpPr>
@@ -16152,7 +16152,7 @@
       </p:sp>
       <p:sp>
         <p:nvSpPr>
-          <p:cNvPr id="10" name="Text 7"/>
+          <p:cNvPr id="11" name="Text 7"/>
           <p:cNvSpPr/>
           <p:nvPr/>
         </p:nvSpPr>
@@ -16191,7 +16191,7 @@
       </p:sp>
       <p:sp>
         <p:nvSpPr>
-          <p:cNvPr id="11" name="Text 8"/>
+          <p:cNvPr id="12" name="Text 8"/>
           <p:cNvSpPr/>
           <p:nvPr/>
         </p:nvSpPr>
@@ -16244,7 +16244,7 @@
       </p:sp>
       <p:sp>
         <p:nvSpPr>
-          <p:cNvPr id="12" name="Shape 9"/>
+          <p:cNvPr id="13" name="Shape 9"/>
           <p:cNvSpPr/>
           <p:nvPr/>
         </p:nvSpPr>
@@ -16264,7 +16264,7 @@
       </p:sp>
       <p:sp>
         <p:nvSpPr>
-          <p:cNvPr id="13" name="Text 10"/>
+          <p:cNvPr id="14" name="Text 10"/>
           <p:cNvSpPr/>
           <p:nvPr/>
         </p:nvSpPr>
@@ -16303,7 +16303,7 @@
       </p:sp>
       <p:sp>
         <p:nvSpPr>
-          <p:cNvPr id="14" name="Text 11"/>
+          <p:cNvPr id="15" name="Text 11"/>
           <p:cNvSpPr/>
           <p:nvPr/>
         </p:nvSpPr>
@@ -16356,7 +16356,7 @@
       </p:sp>
       <p:sp>
         <p:nvSpPr>
-          <p:cNvPr id="15" name="Shape 12"/>
+          <p:cNvPr id="16" name="Shape 12"/>
           <p:cNvSpPr/>
           <p:nvPr/>
         </p:nvSpPr>
@@ -16376,7 +16376,7 @@
       </p:sp>
       <p:sp>
         <p:nvSpPr>
-          <p:cNvPr id="16" name="Text 13"/>
+          <p:cNvPr id="17" name="Text 13"/>
           <p:cNvSpPr/>
           <p:nvPr/>
         </p:nvSpPr>
@@ -16415,7 +16415,7 @@
       </p:sp>
       <p:sp>
         <p:nvSpPr>
-          <p:cNvPr id="17" name="Text 14"/>
+          <p:cNvPr id="18" name="Text 14"/>
           <p:cNvSpPr/>
           <p:nvPr/>
         </p:nvSpPr>
@@ -16468,7 +16468,7 @@
       </p:sp>
       <p:sp>
         <p:nvSpPr>
-          <p:cNvPr id="18" name="Shape 15"/>
+          <p:cNvPr id="19" name="Shape 15"/>
           <p:cNvSpPr/>
           <p:nvPr/>
         </p:nvSpPr>
@@ -16488,7 +16488,7 @@
       </p:sp>
       <p:sp>
         <p:nvSpPr>
-          <p:cNvPr id="19" name="Text 16"/>
+          <p:cNvPr id="20" name="Text 16"/>
           <p:cNvSpPr/>
           <p:nvPr/>
         </p:nvSpPr>
@@ -16527,7 +16527,7 @@
       </p:sp>
       <p:sp>
         <p:nvSpPr>
-          <p:cNvPr id="20" name="Text 17"/>
+          <p:cNvPr id="21" name="Text 17"/>
           <p:cNvSpPr/>
           <p:nvPr/>
         </p:nvSpPr>
@@ -16784,7 +16784,7 @@
       </p:pic>
       <p:sp>
         <p:nvSpPr>
-          <p:cNvPr id="6" name="Shape 3"/>
+          <p:cNvPr id="7" name="Shape 3"/>
           <p:cNvSpPr/>
           <p:nvPr/>
         </p:nvSpPr>
@@ -16806,7 +16806,7 @@
       </p:sp>
       <p:sp>
         <p:nvSpPr>
-          <p:cNvPr id="7" name="Text 4"/>
+          <p:cNvPr id="8" name="Text 4"/>
           <p:cNvSpPr/>
           <p:nvPr/>
         </p:nvSpPr>
@@ -16845,7 +16845,7 @@
       </p:sp>
       <p:sp>
         <p:nvSpPr>
-          <p:cNvPr id="8" name="Text 5"/>
+          <p:cNvPr id="9" name="Text 5"/>
           <p:cNvSpPr/>
           <p:nvPr/>
         </p:nvSpPr>
@@ -16887,7 +16887,7 @@
       </p:sp>
       <p:sp>
         <p:nvSpPr>
-          <p:cNvPr id="9" name="Shape 6"/>
+          <p:cNvPr id="10" name="Shape 6"/>
           <p:cNvSpPr/>
           <p:nvPr/>
         </p:nvSpPr>
@@ -16909,7 +16909,7 @@
       </p:sp>
       <p:sp>
         <p:nvSpPr>
-          <p:cNvPr id="10" name="Text 7"/>
+          <p:cNvPr id="11" name="Text 7"/>
           <p:cNvSpPr/>
           <p:nvPr/>
         </p:nvSpPr>
@@ -16948,7 +16948,7 @@
       </p:sp>
       <p:sp>
         <p:nvSpPr>
-          <p:cNvPr id="11" name="Text 8"/>
+          <p:cNvPr id="12" name="Text 8"/>
           <p:cNvSpPr/>
           <p:nvPr/>
         </p:nvSpPr>
@@ -16990,7 +16990,7 @@
       </p:sp>
       <p:sp>
         <p:nvSpPr>
-          <p:cNvPr id="12" name="Shape 9"/>
+          <p:cNvPr id="13" name="Shape 9"/>
           <p:cNvSpPr/>
           <p:nvPr/>
         </p:nvSpPr>
@@ -17012,7 +17012,7 @@
       </p:sp>
       <p:sp>
         <p:nvSpPr>
-          <p:cNvPr id="13" name="Text 10"/>
+          <p:cNvPr id="14" name="Text 10"/>
           <p:cNvSpPr/>
           <p:nvPr/>
         </p:nvSpPr>
@@ -17051,7 +17051,7 @@
       </p:sp>
       <p:sp>
         <p:nvSpPr>
-          <p:cNvPr id="14" name="Text 11"/>
+          <p:cNvPr id="15" name="Text 11"/>
           <p:cNvSpPr/>
           <p:nvPr/>
         </p:nvSpPr>
@@ -17093,7 +17093,7 @@
       </p:sp>
       <p:sp>
         <p:nvSpPr>
-          <p:cNvPr id="15" name="Shape 12"/>
+          <p:cNvPr id="16" name="Shape 12"/>
           <p:cNvSpPr/>
           <p:nvPr/>
         </p:nvSpPr>
@@ -17120,7 +17120,7 @@
       </p:sp>
       <p:sp>
         <p:nvSpPr>
-          <p:cNvPr id="16" name="Text 13"/>
+          <p:cNvPr id="17" name="Text 13"/>
           <p:cNvSpPr/>
           <p:nvPr/>
         </p:nvSpPr>
@@ -17366,7 +17366,7 @@
       </p:pic>
       <p:sp>
         <p:nvSpPr>
-          <p:cNvPr id="6" name="Shape 3"/>
+          <p:cNvPr id="7" name="Shape 3"/>
           <p:cNvSpPr/>
           <p:nvPr/>
         </p:nvSpPr>
@@ -17393,7 +17393,7 @@
       </p:sp>
       <p:sp>
         <p:nvSpPr>
-          <p:cNvPr id="7" name="Shape 4"/>
+          <p:cNvPr id="8" name="Shape 4"/>
           <p:cNvSpPr/>
           <p:nvPr/>
         </p:nvSpPr>
@@ -17420,14 +17420,54 @@
       </p:sp>
       <p:sp>
         <p:nvSpPr>
-          <p:cNvPr id="8" name="Text 5"/>
-          <p:cNvSpPr/>
-          <p:nvPr/>
-        </p:nvSpPr>
-        <p:spPr>
-          <a:xfrm>
-            <a:off x="978408" y="2157984"/>
-            <a:ext cx="256032" cy="256032"/>
+          <p:cNvPr id="9" name="Shape 5"/>
+          <p:cNvSpPr/>
+          <p:nvPr/>
+        </p:nvSpPr>
+        <p:spPr>
+          <a:xfrm rot="2700000">
+            <a:off x="1041227" y="2297430"/>
+            <a:ext cx="58156" cy="27432"/>
+          </a:xfrm>
+          <a:prstGeom prst="rect">
+            <a:avLst/>
+          </a:prstGeom>
+          <a:solidFill>
+            <a:srgbClr val="5A05F4"/>
+          </a:solidFill>
+          <a:ln/>
+        </p:spPr>
+      </p:sp>
+      <p:sp>
+        <p:nvSpPr>
+          <p:cNvPr id="10" name="Shape 6"/>
+          <p:cNvSpPr/>
+          <p:nvPr/>
+        </p:nvSpPr>
+        <p:spPr>
+          <a:xfrm rot="-3000000">
+            <a:off x="1069025" y="2271370"/>
+            <a:ext cx="121432" cy="27432"/>
+          </a:xfrm>
+          <a:prstGeom prst="rect">
+            <a:avLst/>
+          </a:prstGeom>
+          <a:solidFill>
+            <a:srgbClr val="5A05F4"/>
+          </a:solidFill>
+          <a:ln/>
+        </p:spPr>
+      </p:sp>
+      <p:sp>
+        <p:nvSpPr>
+          <p:cNvPr id="11" name="Text 7"/>
+          <p:cNvSpPr/>
+          <p:nvPr/>
+        </p:nvSpPr>
+        <p:spPr>
+          <a:xfrm>
+            <a:off x="1362456" y="2103120"/>
+            <a:ext cx="4617720" cy="384048"/>
           </a:xfrm>
           <a:prstGeom prst="rect">
             <a:avLst/>
@@ -17439,57 +17479,18 @@
           <a:bodyPr wrap="square" lIns="0" tIns="0" rIns="0" bIns="0" rtlCol="0" anchor="ctr"/>
           <a:lstStyle/>
           <a:p>
-            <a:pPr algn="ctr" indent="0" marL="0">
-              <a:buNone/>
-            </a:pPr>
-            <a:r>
-              <a:rPr lang="en-US" sz="1000" b="1" dirty="0">
-                <a:solidFill>
-                  <a:srgbClr val="5A05F4"/>
+            <a:pPr indent="0" marL="0">
+              <a:buNone/>
+            </a:pPr>
+            <a:r>
+              <a:rPr lang="en-US" sz="1250" dirty="0">
+                <a:solidFill>
+                  <a:srgbClr val="111318"/>
                 </a:solidFill>
                 <a:latin typeface="Montserrat" pitchFamily="34" charset="0"/>
                 <a:ea typeface="Montserrat" pitchFamily="34" charset="-122"/>
                 <a:cs typeface="Montserrat" pitchFamily="34" charset="-120"/>
               </a:rPr>
-              <a:t>✓</a:t>
-            </a:r>
-            <a:endParaRPr lang="en-US" sz="1000" dirty="0"/>
-          </a:p>
-        </p:txBody>
-      </p:sp>
-      <p:sp>
-        <p:nvSpPr>
-          <p:cNvPr id="9" name="Text 6"/>
-          <p:cNvSpPr/>
-          <p:nvPr/>
-        </p:nvSpPr>
-        <p:spPr>
-          <a:xfrm>
-            <a:off x="1362456" y="2103120"/>
-            <a:ext cx="4617720" cy="384048"/>
-          </a:xfrm>
-          <a:prstGeom prst="rect">
-            <a:avLst/>
-          </a:prstGeom>
-          <a:noFill/>
-          <a:ln/>
-        </p:spPr>
-        <p:txBody>
-          <a:bodyPr wrap="square" lIns="0" tIns="0" rIns="0" bIns="0" rtlCol="0" anchor="ctr"/>
-          <a:lstStyle/>
-          <a:p>
-            <a:pPr indent="0" marL="0">
-              <a:buNone/>
-            </a:pPr>
-            <a:r>
-              <a:rPr lang="en-US" sz="1250" dirty="0">
-                <a:solidFill>
-                  <a:srgbClr val="111318"/>
-                </a:solidFill>
-                <a:latin typeface="Montserrat" pitchFamily="34" charset="0"/>
-                <a:ea typeface="Montserrat" pitchFamily="34" charset="-122"/>
-                <a:cs typeface="Montserrat" pitchFamily="34" charset="-120"/>
-              </a:rPr>
               <a:t>усі шість плиток живі й звірені з SQL</a:t>
             </a:r>
             <a:endParaRPr lang="en-US" sz="1250" dirty="0"/>
@@ -17498,7 +17499,7 @@
       </p:sp>
       <p:sp>
         <p:nvSpPr>
-          <p:cNvPr id="10" name="Shape 7"/>
+          <p:cNvPr id="12" name="Shape 8"/>
           <p:cNvSpPr/>
           <p:nvPr/>
         </p:nvSpPr>
@@ -17525,14 +17526,54 @@
       </p:sp>
       <p:sp>
         <p:nvSpPr>
-          <p:cNvPr id="11" name="Text 8"/>
-          <p:cNvSpPr/>
-          <p:nvPr/>
-        </p:nvSpPr>
-        <p:spPr>
-          <a:xfrm>
-            <a:off x="978408" y="2724912"/>
-            <a:ext cx="256032" cy="256032"/>
+          <p:cNvPr id="13" name="Shape 9"/>
+          <p:cNvSpPr/>
+          <p:nvPr/>
+        </p:nvSpPr>
+        <p:spPr>
+          <a:xfrm rot="2700000">
+            <a:off x="1041227" y="2864358"/>
+            <a:ext cx="58156" cy="27432"/>
+          </a:xfrm>
+          <a:prstGeom prst="rect">
+            <a:avLst/>
+          </a:prstGeom>
+          <a:solidFill>
+            <a:srgbClr val="5A05F4"/>
+          </a:solidFill>
+          <a:ln/>
+        </p:spPr>
+      </p:sp>
+      <p:sp>
+        <p:nvSpPr>
+          <p:cNvPr id="14" name="Shape 10"/>
+          <p:cNvSpPr/>
+          <p:nvPr/>
+        </p:nvSpPr>
+        <p:spPr>
+          <a:xfrm rot="-3000000">
+            <a:off x="1069025" y="2838298"/>
+            <a:ext cx="121432" cy="27432"/>
+          </a:xfrm>
+          <a:prstGeom prst="rect">
+            <a:avLst/>
+          </a:prstGeom>
+          <a:solidFill>
+            <a:srgbClr val="5A05F4"/>
+          </a:solidFill>
+          <a:ln/>
+        </p:spPr>
+      </p:sp>
+      <p:sp>
+        <p:nvSpPr>
+          <p:cNvPr id="15" name="Text 11"/>
+          <p:cNvSpPr/>
+          <p:nvPr/>
+        </p:nvSpPr>
+        <p:spPr>
+          <a:xfrm>
+            <a:off x="1362456" y="2670048"/>
+            <a:ext cx="4617720" cy="384048"/>
           </a:xfrm>
           <a:prstGeom prst="rect">
             <a:avLst/>
@@ -17544,57 +17585,18 @@
           <a:bodyPr wrap="square" lIns="0" tIns="0" rIns="0" bIns="0" rtlCol="0" anchor="ctr"/>
           <a:lstStyle/>
           <a:p>
-            <a:pPr algn="ctr" indent="0" marL="0">
-              <a:buNone/>
-            </a:pPr>
-            <a:r>
-              <a:rPr lang="en-US" sz="1000" b="1" dirty="0">
-                <a:solidFill>
-                  <a:srgbClr val="5A05F4"/>
+            <a:pPr indent="0" marL="0">
+              <a:buNone/>
+            </a:pPr>
+            <a:r>
+              <a:rPr lang="en-US" sz="1250" dirty="0">
+                <a:solidFill>
+                  <a:srgbClr val="111318"/>
                 </a:solidFill>
                 <a:latin typeface="Montserrat" pitchFamily="34" charset="0"/>
                 <a:ea typeface="Montserrat" pitchFamily="34" charset="-122"/>
                 <a:cs typeface="Montserrat" pitchFamily="34" charset="-120"/>
               </a:rPr>
-              <a:t>✓</a:t>
-            </a:r>
-            <a:endParaRPr lang="en-US" sz="1000" dirty="0"/>
-          </a:p>
-        </p:txBody>
-      </p:sp>
-      <p:sp>
-        <p:nvSpPr>
-          <p:cNvPr id="12" name="Text 9"/>
-          <p:cNvSpPr/>
-          <p:nvPr/>
-        </p:nvSpPr>
-        <p:spPr>
-          <a:xfrm>
-            <a:off x="1362456" y="2670048"/>
-            <a:ext cx="4617720" cy="384048"/>
-          </a:xfrm>
-          <a:prstGeom prst="rect">
-            <a:avLst/>
-          </a:prstGeom>
-          <a:noFill/>
-          <a:ln/>
-        </p:spPr>
-        <p:txBody>
-          <a:bodyPr wrap="square" lIns="0" tIns="0" rIns="0" bIns="0" rtlCol="0" anchor="ctr"/>
-          <a:lstStyle/>
-          <a:p>
-            <a:pPr indent="0" marL="0">
-              <a:buNone/>
-            </a:pPr>
-            <a:r>
-              <a:rPr lang="en-US" sz="1250" dirty="0">
-                <a:solidFill>
-                  <a:srgbClr val="111318"/>
-                </a:solidFill>
-                <a:latin typeface="Montserrat" pitchFamily="34" charset="0"/>
-                <a:ea typeface="Montserrat" pitchFamily="34" charset="-122"/>
-                <a:cs typeface="Montserrat" pitchFamily="34" charset="-120"/>
-              </a:rPr>
               <a:t>поясню, чому алерти на p95, а не на середнє</a:t>
             </a:r>
             <a:endParaRPr lang="en-US" sz="1250" dirty="0"/>
@@ -17603,7 +17605,7 @@
       </p:sp>
       <p:sp>
         <p:nvSpPr>
-          <p:cNvPr id="13" name="Shape 10"/>
+          <p:cNvPr id="16" name="Shape 12"/>
           <p:cNvSpPr/>
           <p:nvPr/>
         </p:nvSpPr>
@@ -17630,14 +17632,54 @@
       </p:sp>
       <p:sp>
         <p:nvSpPr>
-          <p:cNvPr id="14" name="Text 11"/>
-          <p:cNvSpPr/>
-          <p:nvPr/>
-        </p:nvSpPr>
-        <p:spPr>
-          <a:xfrm>
-            <a:off x="6144768" y="2157984"/>
-            <a:ext cx="256032" cy="256032"/>
+          <p:cNvPr id="17" name="Shape 13"/>
+          <p:cNvSpPr/>
+          <p:nvPr/>
+        </p:nvSpPr>
+        <p:spPr>
+          <a:xfrm rot="2700000">
+            <a:off x="6207587" y="2297430"/>
+            <a:ext cx="58156" cy="27432"/>
+          </a:xfrm>
+          <a:prstGeom prst="rect">
+            <a:avLst/>
+          </a:prstGeom>
+          <a:solidFill>
+            <a:srgbClr val="5A05F4"/>
+          </a:solidFill>
+          <a:ln/>
+        </p:spPr>
+      </p:sp>
+      <p:sp>
+        <p:nvSpPr>
+          <p:cNvPr id="18" name="Shape 14"/>
+          <p:cNvSpPr/>
+          <p:nvPr/>
+        </p:nvSpPr>
+        <p:spPr>
+          <a:xfrm rot="-3000000">
+            <a:off x="6235385" y="2271370"/>
+            <a:ext cx="121432" cy="27432"/>
+          </a:xfrm>
+          <a:prstGeom prst="rect">
+            <a:avLst/>
+          </a:prstGeom>
+          <a:solidFill>
+            <a:srgbClr val="5A05F4"/>
+          </a:solidFill>
+          <a:ln/>
+        </p:spPr>
+      </p:sp>
+      <p:sp>
+        <p:nvSpPr>
+          <p:cNvPr id="19" name="Text 15"/>
+          <p:cNvSpPr/>
+          <p:nvPr/>
+        </p:nvSpPr>
+        <p:spPr>
+          <a:xfrm>
+            <a:off x="6528816" y="2103120"/>
+            <a:ext cx="4617720" cy="384048"/>
           </a:xfrm>
           <a:prstGeom prst="rect">
             <a:avLst/>
@@ -17649,57 +17691,18 @@
           <a:bodyPr wrap="square" lIns="0" tIns="0" rIns="0" bIns="0" rtlCol="0" anchor="ctr"/>
           <a:lstStyle/>
           <a:p>
-            <a:pPr algn="ctr" indent="0" marL="0">
-              <a:buNone/>
-            </a:pPr>
-            <a:r>
-              <a:rPr lang="en-US" sz="1000" b="1" dirty="0">
-                <a:solidFill>
-                  <a:srgbClr val="5A05F4"/>
+            <a:pPr indent="0" marL="0">
+              <a:buNone/>
+            </a:pPr>
+            <a:r>
+              <a:rPr lang="en-US" sz="1250" dirty="0">
+                <a:solidFill>
+                  <a:srgbClr val="111318"/>
                 </a:solidFill>
                 <a:latin typeface="Montserrat" pitchFamily="34" charset="0"/>
                 <a:ea typeface="Montserrat" pitchFamily="34" charset="-122"/>
                 <a:cs typeface="Montserrat" pitchFamily="34" charset="-120"/>
               </a:rPr>
-              <a:t>✓</a:t>
-            </a:r>
-            <a:endParaRPr lang="en-US" sz="1000" dirty="0"/>
-          </a:p>
-        </p:txBody>
-      </p:sp>
-      <p:sp>
-        <p:nvSpPr>
-          <p:cNvPr id="15" name="Text 12"/>
-          <p:cNvSpPr/>
-          <p:nvPr/>
-        </p:nvSpPr>
-        <p:spPr>
-          <a:xfrm>
-            <a:off x="6528816" y="2103120"/>
-            <a:ext cx="4617720" cy="384048"/>
-          </a:xfrm>
-          <a:prstGeom prst="rect">
-            <a:avLst/>
-          </a:prstGeom>
-          <a:noFill/>
-          <a:ln/>
-        </p:spPr>
-        <p:txBody>
-          <a:bodyPr wrap="square" lIns="0" tIns="0" rIns="0" bIns="0" rtlCol="0" anchor="ctr"/>
-          <a:lstStyle/>
-          <a:p>
-            <a:pPr indent="0" marL="0">
-              <a:buNone/>
-            </a:pPr>
-            <a:r>
-              <a:rPr lang="en-US" sz="1250" dirty="0">
-                <a:solidFill>
-                  <a:srgbClr val="111318"/>
-                </a:solidFill>
-                <a:latin typeface="Montserrat" pitchFamily="34" charset="0"/>
-                <a:ea typeface="Montserrat" pitchFamily="34" charset="-122"/>
-                <a:cs typeface="Montserrat" pitchFamily="34" charset="-120"/>
-              </a:rPr>
               <a:t>відтворю тихий інцидент і покажу його в метриках</a:t>
             </a:r>
             <a:endParaRPr lang="en-US" sz="1250" dirty="0"/>
@@ -17708,7 +17711,7 @@
       </p:sp>
       <p:sp>
         <p:nvSpPr>
-          <p:cNvPr id="16" name="Shape 13"/>
+          <p:cNvPr id="20" name="Shape 16"/>
           <p:cNvSpPr/>
           <p:nvPr/>
         </p:nvSpPr>
@@ -17735,14 +17738,54 @@
       </p:sp>
       <p:sp>
         <p:nvSpPr>
-          <p:cNvPr id="17" name="Text 14"/>
-          <p:cNvSpPr/>
-          <p:nvPr/>
-        </p:nvSpPr>
-        <p:spPr>
-          <a:xfrm>
-            <a:off x="6144768" y="2724912"/>
-            <a:ext cx="256032" cy="256032"/>
+          <p:cNvPr id="21" name="Shape 17"/>
+          <p:cNvSpPr/>
+          <p:nvPr/>
+        </p:nvSpPr>
+        <p:spPr>
+          <a:xfrm rot="2700000">
+            <a:off x="6207587" y="2864358"/>
+            <a:ext cx="58156" cy="27432"/>
+          </a:xfrm>
+          <a:prstGeom prst="rect">
+            <a:avLst/>
+          </a:prstGeom>
+          <a:solidFill>
+            <a:srgbClr val="5A05F4"/>
+          </a:solidFill>
+          <a:ln/>
+        </p:spPr>
+      </p:sp>
+      <p:sp>
+        <p:nvSpPr>
+          <p:cNvPr id="22" name="Shape 18"/>
+          <p:cNvSpPr/>
+          <p:nvPr/>
+        </p:nvSpPr>
+        <p:spPr>
+          <a:xfrm rot="-3000000">
+            <a:off x="6235385" y="2838298"/>
+            <a:ext cx="121432" cy="27432"/>
+          </a:xfrm>
+          <a:prstGeom prst="rect">
+            <a:avLst/>
+          </a:prstGeom>
+          <a:solidFill>
+            <a:srgbClr val="5A05F4"/>
+          </a:solidFill>
+          <a:ln/>
+        </p:spPr>
+      </p:sp>
+      <p:sp>
+        <p:nvSpPr>
+          <p:cNvPr id="23" name="Text 19"/>
+          <p:cNvSpPr/>
+          <p:nvPr/>
+        </p:nvSpPr>
+        <p:spPr>
+          <a:xfrm>
+            <a:off x="6528816" y="2670048"/>
+            <a:ext cx="4617720" cy="384048"/>
           </a:xfrm>
           <a:prstGeom prst="rect">
             <a:avLst/>
@@ -17754,57 +17797,18 @@
           <a:bodyPr wrap="square" lIns="0" tIns="0" rIns="0" bIns="0" rtlCol="0" anchor="ctr"/>
           <a:lstStyle/>
           <a:p>
-            <a:pPr algn="ctr" indent="0" marL="0">
-              <a:buNone/>
-            </a:pPr>
-            <a:r>
-              <a:rPr lang="en-US" sz="1000" b="1" dirty="0">
-                <a:solidFill>
-                  <a:srgbClr val="5A05F4"/>
+            <a:pPr indent="0" marL="0">
+              <a:buNone/>
+            </a:pPr>
+            <a:r>
+              <a:rPr lang="en-US" sz="1250" dirty="0">
+                <a:solidFill>
+                  <a:srgbClr val="111318"/>
                 </a:solidFill>
                 <a:latin typeface="Montserrat" pitchFamily="34" charset="0"/>
                 <a:ea typeface="Montserrat" pitchFamily="34" charset="-122"/>
                 <a:cs typeface="Montserrat" pitchFamily="34" charset="-120"/>
               </a:rPr>
-              <a:t>✓</a:t>
-            </a:r>
-            <a:endParaRPr lang="en-US" sz="1000" dirty="0"/>
-          </a:p>
-        </p:txBody>
-      </p:sp>
-      <p:sp>
-        <p:nvSpPr>
-          <p:cNvPr id="18" name="Text 15"/>
-          <p:cNvSpPr/>
-          <p:nvPr/>
-        </p:nvSpPr>
-        <p:spPr>
-          <a:xfrm>
-            <a:off x="6528816" y="2670048"/>
-            <a:ext cx="4617720" cy="384048"/>
-          </a:xfrm>
-          <a:prstGeom prst="rect">
-            <a:avLst/>
-          </a:prstGeom>
-          <a:noFill/>
-          <a:ln/>
-        </p:spPr>
-        <p:txBody>
-          <a:bodyPr wrap="square" lIns="0" tIns="0" rIns="0" bIns="0" rtlCol="0" anchor="ctr"/>
-          <a:lstStyle/>
-          <a:p>
-            <a:pPr indent="0" marL="0">
-              <a:buNone/>
-            </a:pPr>
-            <a:r>
-              <a:rPr lang="en-US" sz="1250" dirty="0">
-                <a:solidFill>
-                  <a:srgbClr val="111318"/>
-                </a:solidFill>
-                <a:latin typeface="Montserrat" pitchFamily="34" charset="0"/>
-                <a:ea typeface="Montserrat" pitchFamily="34" charset="-122"/>
-                <a:cs typeface="Montserrat" pitchFamily="34" charset="-120"/>
-              </a:rPr>
               <a:t>назву, що додати в лог для зрізу по тенантах</a:t>
             </a:r>
             <a:endParaRPr lang="en-US" sz="1250" dirty="0"/>
@@ -17813,7 +17817,7 @@
       </p:sp>
       <p:sp>
         <p:nvSpPr>
-          <p:cNvPr id="19" name="Text 16"/>
+          <p:cNvPr id="24" name="Text 20"/>
           <p:cNvSpPr/>
           <p:nvPr/>
         </p:nvSpPr>
@@ -18056,7 +18060,7 @@
       </p:pic>
       <p:sp>
         <p:nvSpPr>
-          <p:cNvPr id="6" name="Shape 3"/>
+          <p:cNvPr id="7" name="Shape 3"/>
           <p:cNvSpPr/>
           <p:nvPr/>
         </p:nvSpPr>
@@ -18083,7 +18087,7 @@
       </p:sp>
       <p:sp>
         <p:nvSpPr>
-          <p:cNvPr id="7" name="Shape 4"/>
+          <p:cNvPr id="8" name="Shape 4"/>
           <p:cNvSpPr/>
           <p:nvPr/>
         </p:nvSpPr>
@@ -18103,14 +18107,54 @@
       </p:sp>
       <p:sp>
         <p:nvSpPr>
-          <p:cNvPr id="8" name="Text 5"/>
-          <p:cNvSpPr/>
-          <p:nvPr/>
-        </p:nvSpPr>
-        <p:spPr>
-          <a:xfrm>
-            <a:off x="768096" y="1956816"/>
-            <a:ext cx="384048" cy="384048"/>
+          <p:cNvPr id="9" name="Shape 5"/>
+          <p:cNvSpPr/>
+          <p:nvPr/>
+        </p:nvSpPr>
+        <p:spPr>
+          <a:xfrm rot="2700000">
+            <a:off x="871789" y="2133094"/>
+            <a:ext cx="176662" cy="31492"/>
+          </a:xfrm>
+          <a:prstGeom prst="rect">
+            <a:avLst/>
+          </a:prstGeom>
+          <a:solidFill>
+            <a:srgbClr val="C62A2A"/>
+          </a:solidFill>
+          <a:ln/>
+        </p:spPr>
+      </p:sp>
+      <p:sp>
+        <p:nvSpPr>
+          <p:cNvPr id="10" name="Shape 6"/>
+          <p:cNvSpPr/>
+          <p:nvPr/>
+        </p:nvSpPr>
+        <p:spPr>
+          <a:xfrm rot="-2700000">
+            <a:off x="871789" y="2133094"/>
+            <a:ext cx="176662" cy="31492"/>
+          </a:xfrm>
+          <a:prstGeom prst="rect">
+            <a:avLst/>
+          </a:prstGeom>
+          <a:solidFill>
+            <a:srgbClr val="C62A2A"/>
+          </a:solidFill>
+          <a:ln/>
+        </p:spPr>
+      </p:sp>
+      <p:sp>
+        <p:nvSpPr>
+          <p:cNvPr id="11" name="Text 7"/>
+          <p:cNvSpPr/>
+          <p:nvPr/>
+        </p:nvSpPr>
+        <p:spPr>
+          <a:xfrm>
+            <a:off x="1298448" y="1783080"/>
+            <a:ext cx="10149840" cy="731520"/>
           </a:xfrm>
           <a:prstGeom prst="rect">
             <a:avLst/>
@@ -18122,71 +18166,32 @@
           <a:bodyPr wrap="square" lIns="0" tIns="0" rIns="0" bIns="0" rtlCol="0" anchor="ctr"/>
           <a:lstStyle/>
           <a:p>
-            <a:pPr algn="ctr" indent="0" marL="0">
+            <a:pPr indent="0" marL="0">
               <a:buNone/>
             </a:pPr>
             <a:r>
               <a:rPr lang="en-US" sz="1300" b="1" dirty="0">
                 <a:solidFill>
-                  <a:srgbClr val="C62A2A"/>
+                  <a:srgbClr val="111318"/>
                 </a:solidFill>
                 <a:latin typeface="Montserrat" pitchFamily="34" charset="0"/>
                 <a:ea typeface="Montserrat" pitchFamily="34" charset="-122"/>
                 <a:cs typeface="Montserrat" pitchFamily="34" charset="-120"/>
               </a:rPr>
-              <a:t>✕</a:t>
-            </a:r>
-            <a:endParaRPr lang="en-US" sz="1300" dirty="0"/>
-          </a:p>
-        </p:txBody>
-      </p:sp>
-      <p:sp>
-        <p:nvSpPr>
-          <p:cNvPr id="9" name="Text 6"/>
-          <p:cNvSpPr/>
-          <p:nvPr/>
-        </p:nvSpPr>
-        <p:spPr>
-          <a:xfrm>
-            <a:off x="1298448" y="1783080"/>
-            <a:ext cx="10149840" cy="731520"/>
-          </a:xfrm>
-          <a:prstGeom prst="rect">
-            <a:avLst/>
-          </a:prstGeom>
-          <a:noFill/>
-          <a:ln/>
-        </p:spPr>
-        <p:txBody>
-          <a:bodyPr wrap="square" lIns="0" tIns="0" rIns="0" bIns="0" rtlCol="0" anchor="ctr"/>
-          <a:lstStyle/>
-          <a:p>
+              <a:t>Алерт на середню latency   </a:t>
+            </a:r>
             <a:pPr indent="0" marL="0">
               <a:buNone/>
             </a:pPr>
             <a:r>
-              <a:rPr lang="en-US" sz="1300" b="1" dirty="0">
-                <a:solidFill>
-                  <a:srgbClr val="111318"/>
+              <a:rPr lang="en-US" sz="1150" dirty="0">
+                <a:solidFill>
+                  <a:srgbClr val="555B66"/>
                 </a:solidFill>
                 <a:latin typeface="Montserrat" pitchFamily="34" charset="0"/>
                 <a:ea typeface="Montserrat" pitchFamily="34" charset="-122"/>
                 <a:cs typeface="Montserrat" pitchFamily="34" charset="-120"/>
               </a:rPr>
-              <a:t>Алерт на середню latency   </a:t>
-            </a:r>
-            <a:pPr indent="0" marL="0">
-              <a:buNone/>
-            </a:pPr>
-            <a:r>
-              <a:rPr lang="en-US" sz="1150" dirty="0">
-                <a:solidFill>
-                  <a:srgbClr val="555B66"/>
-                </a:solidFill>
-                <a:latin typeface="Montserrat" pitchFamily="34" charset="0"/>
-                <a:ea typeface="Montserrat" pitchFamily="34" charset="-122"/>
-                <a:cs typeface="Montserrat" pitchFamily="34" charset="-120"/>
-              </a:rPr>
               <a:t>згладить і сплеск таймаутів, і деградацію провайдера</a:t>
             </a:r>
             <a:endParaRPr lang="en-US" sz="1300" dirty="0"/>
@@ -18195,7 +18200,7 @@
       </p:sp>
       <p:sp>
         <p:nvSpPr>
-          <p:cNvPr id="10" name="Shape 7"/>
+          <p:cNvPr id="12" name="Shape 8"/>
           <p:cNvSpPr/>
           <p:nvPr/>
         </p:nvSpPr>
@@ -18222,7 +18227,7 @@
       </p:sp>
       <p:sp>
         <p:nvSpPr>
-          <p:cNvPr id="11" name="Shape 8"/>
+          <p:cNvPr id="13" name="Shape 9"/>
           <p:cNvSpPr/>
           <p:nvPr/>
         </p:nvSpPr>
@@ -18242,14 +18247,54 @@
       </p:sp>
       <p:sp>
         <p:nvSpPr>
-          <p:cNvPr id="12" name="Text 9"/>
-          <p:cNvSpPr/>
-          <p:nvPr/>
-        </p:nvSpPr>
-        <p:spPr>
-          <a:xfrm>
-            <a:off x="768096" y="2825496"/>
-            <a:ext cx="384048" cy="384048"/>
+          <p:cNvPr id="14" name="Shape 10"/>
+          <p:cNvSpPr/>
+          <p:nvPr/>
+        </p:nvSpPr>
+        <p:spPr>
+          <a:xfrm rot="2700000">
+            <a:off x="871789" y="3001774"/>
+            <a:ext cx="176662" cy="31492"/>
+          </a:xfrm>
+          <a:prstGeom prst="rect">
+            <a:avLst/>
+          </a:prstGeom>
+          <a:solidFill>
+            <a:srgbClr val="C62A2A"/>
+          </a:solidFill>
+          <a:ln/>
+        </p:spPr>
+      </p:sp>
+      <p:sp>
+        <p:nvSpPr>
+          <p:cNvPr id="15" name="Shape 11"/>
+          <p:cNvSpPr/>
+          <p:nvPr/>
+        </p:nvSpPr>
+        <p:spPr>
+          <a:xfrm rot="-2700000">
+            <a:off x="871789" y="3001774"/>
+            <a:ext cx="176662" cy="31492"/>
+          </a:xfrm>
+          <a:prstGeom prst="rect">
+            <a:avLst/>
+          </a:prstGeom>
+          <a:solidFill>
+            <a:srgbClr val="C62A2A"/>
+          </a:solidFill>
+          <a:ln/>
+        </p:spPr>
+      </p:sp>
+      <p:sp>
+        <p:nvSpPr>
+          <p:cNvPr id="16" name="Text 12"/>
+          <p:cNvSpPr/>
+          <p:nvPr/>
+        </p:nvSpPr>
+        <p:spPr>
+          <a:xfrm>
+            <a:off x="1298448" y="2651760"/>
+            <a:ext cx="10149840" cy="731520"/>
           </a:xfrm>
           <a:prstGeom prst="rect">
             <a:avLst/>
@@ -18261,71 +18306,32 @@
           <a:bodyPr wrap="square" lIns="0" tIns="0" rIns="0" bIns="0" rtlCol="0" anchor="ctr"/>
           <a:lstStyle/>
           <a:p>
-            <a:pPr algn="ctr" indent="0" marL="0">
+            <a:pPr indent="0" marL="0">
               <a:buNone/>
             </a:pPr>
             <a:r>
               <a:rPr lang="en-US" sz="1300" b="1" dirty="0">
                 <a:solidFill>
-                  <a:srgbClr val="C62A2A"/>
+                  <a:srgbClr val="111318"/>
                 </a:solidFill>
                 <a:latin typeface="Montserrat" pitchFamily="34" charset="0"/>
                 <a:ea typeface="Montserrat" pitchFamily="34" charset="-122"/>
                 <a:cs typeface="Montserrat" pitchFamily="34" charset="-120"/>
               </a:rPr>
-              <a:t>✕</a:t>
-            </a:r>
-            <a:endParaRPr lang="en-US" sz="1300" dirty="0"/>
-          </a:p>
-        </p:txBody>
-      </p:sp>
-      <p:sp>
-        <p:nvSpPr>
-          <p:cNvPr id="13" name="Text 10"/>
-          <p:cNvSpPr/>
-          <p:nvPr/>
-        </p:nvSpPr>
-        <p:spPr>
-          <a:xfrm>
-            <a:off x="1298448" y="2651760"/>
-            <a:ext cx="10149840" cy="731520"/>
-          </a:xfrm>
-          <a:prstGeom prst="rect">
-            <a:avLst/>
-          </a:prstGeom>
-          <a:noFill/>
-          <a:ln/>
-        </p:spPr>
-        <p:txBody>
-          <a:bodyPr wrap="square" lIns="0" tIns="0" rIns="0" bIns="0" rtlCol="0" anchor="ctr"/>
-          <a:lstStyle/>
-          <a:p>
+              <a:t>Алерт на кожну помилку   </a:t>
+            </a:r>
             <a:pPr indent="0" marL="0">
               <a:buNone/>
             </a:pPr>
             <a:r>
-              <a:rPr lang="en-US" sz="1300" b="1" dirty="0">
-                <a:solidFill>
-                  <a:srgbClr val="111318"/>
+              <a:rPr lang="en-US" sz="1150" dirty="0">
+                <a:solidFill>
+                  <a:srgbClr val="555B66"/>
                 </a:solidFill>
                 <a:latin typeface="Montserrat" pitchFamily="34" charset="0"/>
                 <a:ea typeface="Montserrat" pitchFamily="34" charset="-122"/>
                 <a:cs typeface="Montserrat" pitchFamily="34" charset="-120"/>
               </a:rPr>
-              <a:t>Алерт на кожну помилку   </a:t>
-            </a:r>
-            <a:pPr indent="0" marL="0">
-              <a:buNone/>
-            </a:pPr>
-            <a:r>
-              <a:rPr lang="en-US" sz="1150" dirty="0">
-                <a:solidFill>
-                  <a:srgbClr val="555B66"/>
-                </a:solidFill>
-                <a:latin typeface="Montserrat" pitchFamily="34" charset="0"/>
-                <a:ea typeface="Montserrat" pitchFamily="34" charset="-122"/>
-                <a:cs typeface="Montserrat" pitchFamily="34" charset="-120"/>
-              </a:rPr>
               <a:t>десять повідомлень щодня і жодної реакції</a:t>
             </a:r>
             <a:endParaRPr lang="en-US" sz="1300" dirty="0"/>
@@ -18334,7 +18340,7 @@
       </p:sp>
       <p:sp>
         <p:nvSpPr>
-          <p:cNvPr id="14" name="Shape 11"/>
+          <p:cNvPr id="17" name="Shape 13"/>
           <p:cNvSpPr/>
           <p:nvPr/>
         </p:nvSpPr>
@@ -18361,7 +18367,7 @@
       </p:sp>
       <p:sp>
         <p:nvSpPr>
-          <p:cNvPr id="15" name="Shape 12"/>
+          <p:cNvPr id="18" name="Shape 14"/>
           <p:cNvSpPr/>
           <p:nvPr/>
         </p:nvSpPr>
@@ -18381,14 +18387,54 @@
       </p:sp>
       <p:sp>
         <p:nvSpPr>
-          <p:cNvPr id="16" name="Text 13"/>
-          <p:cNvSpPr/>
-          <p:nvPr/>
-        </p:nvSpPr>
-        <p:spPr>
-          <a:xfrm>
-            <a:off x="768096" y="3694176"/>
-            <a:ext cx="384048" cy="384048"/>
+          <p:cNvPr id="19" name="Shape 15"/>
+          <p:cNvSpPr/>
+          <p:nvPr/>
+        </p:nvSpPr>
+        <p:spPr>
+          <a:xfrm rot="2700000">
+            <a:off x="871789" y="3870454"/>
+            <a:ext cx="176662" cy="31492"/>
+          </a:xfrm>
+          <a:prstGeom prst="rect">
+            <a:avLst/>
+          </a:prstGeom>
+          <a:solidFill>
+            <a:srgbClr val="C62A2A"/>
+          </a:solidFill>
+          <a:ln/>
+        </p:spPr>
+      </p:sp>
+      <p:sp>
+        <p:nvSpPr>
+          <p:cNvPr id="20" name="Shape 16"/>
+          <p:cNvSpPr/>
+          <p:nvPr/>
+        </p:nvSpPr>
+        <p:spPr>
+          <a:xfrm rot="-2700000">
+            <a:off x="871789" y="3870454"/>
+            <a:ext cx="176662" cy="31492"/>
+          </a:xfrm>
+          <a:prstGeom prst="rect">
+            <a:avLst/>
+          </a:prstGeom>
+          <a:solidFill>
+            <a:srgbClr val="C62A2A"/>
+          </a:solidFill>
+          <a:ln/>
+        </p:spPr>
+      </p:sp>
+      <p:sp>
+        <p:nvSpPr>
+          <p:cNvPr id="21" name="Text 17"/>
+          <p:cNvSpPr/>
+          <p:nvPr/>
+        </p:nvSpPr>
+        <p:spPr>
+          <a:xfrm>
+            <a:off x="1298448" y="3520440"/>
+            <a:ext cx="10149840" cy="731520"/>
           </a:xfrm>
           <a:prstGeom prst="rect">
             <a:avLst/>
@@ -18400,71 +18446,32 @@
           <a:bodyPr wrap="square" lIns="0" tIns="0" rIns="0" bIns="0" rtlCol="0" anchor="ctr"/>
           <a:lstStyle/>
           <a:p>
-            <a:pPr algn="ctr" indent="0" marL="0">
+            <a:pPr indent="0" marL="0">
               <a:buNone/>
             </a:pPr>
             <a:r>
               <a:rPr lang="en-US" sz="1300" b="1" dirty="0">
                 <a:solidFill>
-                  <a:srgbClr val="C62A2A"/>
+                  <a:srgbClr val="111318"/>
                 </a:solidFill>
                 <a:latin typeface="Montserrat" pitchFamily="34" charset="0"/>
                 <a:ea typeface="Montserrat" pitchFamily="34" charset="-122"/>
                 <a:cs typeface="Montserrat" pitchFamily="34" charset="-120"/>
               </a:rPr>
-              <a:t>✕</a:t>
-            </a:r>
-            <a:endParaRPr lang="en-US" sz="1300" dirty="0"/>
-          </a:p>
-        </p:txBody>
-      </p:sp>
-      <p:sp>
-        <p:nvSpPr>
-          <p:cNvPr id="17" name="Text 14"/>
-          <p:cNvSpPr/>
-          <p:nvPr/>
-        </p:nvSpPr>
-        <p:spPr>
-          <a:xfrm>
-            <a:off x="1298448" y="3520440"/>
-            <a:ext cx="10149840" cy="731520"/>
-          </a:xfrm>
-          <a:prstGeom prst="rect">
-            <a:avLst/>
-          </a:prstGeom>
-          <a:noFill/>
-          <a:ln/>
-        </p:spPr>
-        <p:txBody>
-          <a:bodyPr wrap="square" lIns="0" tIns="0" rIns="0" bIns="0" rtlCol="0" anchor="ctr"/>
-          <a:lstStyle/>
-          <a:p>
+              <a:t>Плитка без питання   </a:t>
+            </a:r>
             <a:pPr indent="0" marL="0">
               <a:buNone/>
             </a:pPr>
             <a:r>
-              <a:rPr lang="en-US" sz="1300" b="1" dirty="0">
-                <a:solidFill>
-                  <a:srgbClr val="111318"/>
+              <a:rPr lang="en-US" sz="1150" dirty="0">
+                <a:solidFill>
+                  <a:srgbClr val="555B66"/>
                 </a:solidFill>
                 <a:latin typeface="Montserrat" pitchFamily="34" charset="0"/>
                 <a:ea typeface="Montserrat" pitchFamily="34" charset="-122"/>
                 <a:cs typeface="Montserrat" pitchFamily="34" charset="-120"/>
               </a:rPr>
-              <a:t>Плитка без питання   </a:t>
-            </a:r>
-            <a:pPr indent="0" marL="0">
-              <a:buNone/>
-            </a:pPr>
-            <a:r>
-              <a:rPr lang="en-US" sz="1150" dirty="0">
-                <a:solidFill>
-                  <a:srgbClr val="555B66"/>
-                </a:solidFill>
-                <a:latin typeface="Montserrat" pitchFamily="34" charset="0"/>
-                <a:ea typeface="Montserrat" pitchFamily="34" charset="-122"/>
-                <a:cs typeface="Montserrat" pitchFamily="34" charset="-120"/>
-              </a:rPr>
               <a:t>прикраса, яку перестають помічати за тиждень</a:t>
             </a:r>
             <a:endParaRPr lang="en-US" sz="1300" dirty="0"/>
@@ -18473,7 +18480,7 @@
       </p:sp>
       <p:sp>
         <p:nvSpPr>
-          <p:cNvPr id="18" name="Shape 15"/>
+          <p:cNvPr id="22" name="Shape 18"/>
           <p:cNvSpPr/>
           <p:nvPr/>
         </p:nvSpPr>
@@ -18500,7 +18507,7 @@
       </p:sp>
       <p:sp>
         <p:nvSpPr>
-          <p:cNvPr id="19" name="Shape 16"/>
+          <p:cNvPr id="23" name="Shape 19"/>
           <p:cNvSpPr/>
           <p:nvPr/>
         </p:nvSpPr>
@@ -18520,14 +18527,54 @@
       </p:sp>
       <p:sp>
         <p:nvSpPr>
-          <p:cNvPr id="20" name="Text 17"/>
-          <p:cNvSpPr/>
-          <p:nvPr/>
-        </p:nvSpPr>
-        <p:spPr>
-          <a:xfrm>
-            <a:off x="768096" y="4562856"/>
-            <a:ext cx="384048" cy="384048"/>
+          <p:cNvPr id="24" name="Shape 20"/>
+          <p:cNvSpPr/>
+          <p:nvPr/>
+        </p:nvSpPr>
+        <p:spPr>
+          <a:xfrm rot="2700000">
+            <a:off x="871789" y="4739134"/>
+            <a:ext cx="176662" cy="31492"/>
+          </a:xfrm>
+          <a:prstGeom prst="rect">
+            <a:avLst/>
+          </a:prstGeom>
+          <a:solidFill>
+            <a:srgbClr val="C62A2A"/>
+          </a:solidFill>
+          <a:ln/>
+        </p:spPr>
+      </p:sp>
+      <p:sp>
+        <p:nvSpPr>
+          <p:cNvPr id="25" name="Shape 21"/>
+          <p:cNvSpPr/>
+          <p:nvPr/>
+        </p:nvSpPr>
+        <p:spPr>
+          <a:xfrm rot="-2700000">
+            <a:off x="871789" y="4739134"/>
+            <a:ext cx="176662" cy="31492"/>
+          </a:xfrm>
+          <a:prstGeom prst="rect">
+            <a:avLst/>
+          </a:prstGeom>
+          <a:solidFill>
+            <a:srgbClr val="C62A2A"/>
+          </a:solidFill>
+          <a:ln/>
+        </p:spPr>
+      </p:sp>
+      <p:sp>
+        <p:nvSpPr>
+          <p:cNvPr id="26" name="Text 22"/>
+          <p:cNvSpPr/>
+          <p:nvPr/>
+        </p:nvSpPr>
+        <p:spPr>
+          <a:xfrm>
+            <a:off x="1298448" y="4389120"/>
+            <a:ext cx="10149840" cy="731520"/>
           </a:xfrm>
           <a:prstGeom prst="rect">
             <a:avLst/>
@@ -18539,71 +18586,32 @@
           <a:bodyPr wrap="square" lIns="0" tIns="0" rIns="0" bIns="0" rtlCol="0" anchor="ctr"/>
           <a:lstStyle/>
           <a:p>
-            <a:pPr algn="ctr" indent="0" marL="0">
+            <a:pPr indent="0" marL="0">
               <a:buNone/>
             </a:pPr>
             <a:r>
               <a:rPr lang="en-US" sz="1300" b="1" dirty="0">
                 <a:solidFill>
-                  <a:srgbClr val="C62A2A"/>
+                  <a:srgbClr val="111318"/>
                 </a:solidFill>
                 <a:latin typeface="Montserrat" pitchFamily="34" charset="0"/>
                 <a:ea typeface="Montserrat" pitchFamily="34" charset="-122"/>
                 <a:cs typeface="Montserrat" pitchFamily="34" charset="-120"/>
               </a:rPr>
-              <a:t>✕</a:t>
-            </a:r>
-            <a:endParaRPr lang="en-US" sz="1300" dirty="0"/>
-          </a:p>
-        </p:txBody>
-      </p:sp>
-      <p:sp>
-        <p:nvSpPr>
-          <p:cNvPr id="21" name="Text 18"/>
-          <p:cNvSpPr/>
-          <p:nvPr/>
-        </p:nvSpPr>
-        <p:spPr>
-          <a:xfrm>
-            <a:off x="1298448" y="4389120"/>
-            <a:ext cx="10149840" cy="731520"/>
-          </a:xfrm>
-          <a:prstGeom prst="rect">
-            <a:avLst/>
-          </a:prstGeom>
-          <a:noFill/>
-          <a:ln/>
-        </p:spPr>
-        <p:txBody>
-          <a:bodyPr wrap="square" lIns="0" tIns="0" rIns="0" bIns="0" rtlCol="0" anchor="ctr"/>
-          <a:lstStyle/>
-          <a:p>
+              <a:t>Статус провайдера прибитий до «ok»   </a:t>
+            </a:r>
             <a:pPr indent="0" marL="0">
               <a:buNone/>
             </a:pPr>
             <a:r>
-              <a:rPr lang="en-US" sz="1300" b="1" dirty="0">
-                <a:solidFill>
-                  <a:srgbClr val="111318"/>
+              <a:rPr lang="en-US" sz="1150" dirty="0">
+                <a:solidFill>
+                  <a:srgbClr val="555B66"/>
                 </a:solidFill>
                 <a:latin typeface="Montserrat" pitchFamily="34" charset="0"/>
                 <a:ea typeface="Montserrat" pitchFamily="34" charset="-122"/>
                 <a:cs typeface="Montserrat" pitchFamily="34" charset="-120"/>
               </a:rPr>
-              <a:t>Статус провайдера прибитий до «ok»   </a:t>
-            </a:r>
-            <a:pPr indent="0" marL="0">
-              <a:buNone/>
-            </a:pPr>
-            <a:r>
-              <a:rPr lang="en-US" sz="1150" dirty="0">
-                <a:solidFill>
-                  <a:srgbClr val="555B66"/>
-                </a:solidFill>
-                <a:latin typeface="Montserrat" pitchFamily="34" charset="0"/>
-                <a:ea typeface="Montserrat" pitchFamily="34" charset="-122"/>
-                <a:cs typeface="Montserrat" pitchFamily="34" charset="-120"/>
-              </a:rPr>
               <a:t>брехня рівно в момент, коли правда потрібна</a:t>
             </a:r>
             <a:endParaRPr lang="en-US" sz="1300" dirty="0"/>
@@ -18612,7 +18620,7 @@
       </p:sp>
       <p:sp>
         <p:nvSpPr>
-          <p:cNvPr id="22" name="Shape 19"/>
+          <p:cNvPr id="27" name="Shape 23"/>
           <p:cNvSpPr/>
           <p:nvPr/>
         </p:nvSpPr>
@@ -18639,7 +18647,7 @@
       </p:sp>
       <p:sp>
         <p:nvSpPr>
-          <p:cNvPr id="23" name="Shape 20"/>
+          <p:cNvPr id="28" name="Shape 24"/>
           <p:cNvSpPr/>
           <p:nvPr/>
         </p:nvSpPr>
@@ -18659,46 +18667,47 @@
       </p:sp>
       <p:sp>
         <p:nvSpPr>
-          <p:cNvPr id="24" name="Text 21"/>
-          <p:cNvSpPr/>
-          <p:nvPr/>
-        </p:nvSpPr>
-        <p:spPr>
-          <a:xfrm>
-            <a:off x="768096" y="5431536"/>
-            <a:ext cx="384048" cy="384048"/>
-          </a:xfrm>
-          <a:prstGeom prst="rect">
-            <a:avLst/>
-          </a:prstGeom>
-          <a:noFill/>
-          <a:ln/>
-        </p:spPr>
-        <p:txBody>
-          <a:bodyPr wrap="square" lIns="0" tIns="0" rIns="0" bIns="0" rtlCol="0" anchor="ctr"/>
-          <a:lstStyle/>
-          <a:p>
-            <a:pPr algn="ctr" indent="0" marL="0">
-              <a:buNone/>
-            </a:pPr>
-            <a:r>
-              <a:rPr lang="en-US" sz="1300" b="1" dirty="0">
-                <a:solidFill>
-                  <a:srgbClr val="C62A2A"/>
-                </a:solidFill>
-                <a:latin typeface="Montserrat" pitchFamily="34" charset="0"/>
-                <a:ea typeface="Montserrat" pitchFamily="34" charset="-122"/>
-                <a:cs typeface="Montserrat" pitchFamily="34" charset="-120"/>
-              </a:rPr>
-              <a:t>✕</a:t>
-            </a:r>
-            <a:endParaRPr lang="en-US" sz="1300" dirty="0"/>
-          </a:p>
-        </p:txBody>
-      </p:sp>
-      <p:sp>
-        <p:nvSpPr>
-          <p:cNvPr id="25" name="Text 22"/>
+          <p:cNvPr id="29" name="Shape 25"/>
+          <p:cNvSpPr/>
+          <p:nvPr/>
+        </p:nvSpPr>
+        <p:spPr>
+          <a:xfrm rot="2700000">
+            <a:off x="871789" y="5607814"/>
+            <a:ext cx="176662" cy="31492"/>
+          </a:xfrm>
+          <a:prstGeom prst="rect">
+            <a:avLst/>
+          </a:prstGeom>
+          <a:solidFill>
+            <a:srgbClr val="C62A2A"/>
+          </a:solidFill>
+          <a:ln/>
+        </p:spPr>
+      </p:sp>
+      <p:sp>
+        <p:nvSpPr>
+          <p:cNvPr id="30" name="Shape 26"/>
+          <p:cNvSpPr/>
+          <p:nvPr/>
+        </p:nvSpPr>
+        <p:spPr>
+          <a:xfrm rot="-2700000">
+            <a:off x="871789" y="5607814"/>
+            <a:ext cx="176662" cy="31492"/>
+          </a:xfrm>
+          <a:prstGeom prst="rect">
+            <a:avLst/>
+          </a:prstGeom>
+          <a:solidFill>
+            <a:srgbClr val="C62A2A"/>
+          </a:solidFill>
+          <a:ln/>
+        </p:spPr>
+      </p:sp>
+      <p:sp>
+        <p:nvSpPr>
+          <p:cNvPr id="31" name="Text 27"/>
           <p:cNvSpPr/>
           <p:nvPr/>
         </p:nvSpPr>
@@ -18955,7 +18964,7 @@
       </p:pic>
       <p:sp>
         <p:nvSpPr>
-          <p:cNvPr id="6" name="Shape 3"/>
+          <p:cNvPr id="7" name="Shape 3"/>
           <p:cNvSpPr/>
           <p:nvPr/>
         </p:nvSpPr>
@@ -18982,7 +18991,7 @@
       </p:sp>
       <p:sp>
         <p:nvSpPr>
-          <p:cNvPr id="7" name="Text 4"/>
+          <p:cNvPr id="8" name="Text 4"/>
           <p:cNvSpPr/>
           <p:nvPr/>
         </p:nvSpPr>
@@ -19021,7 +19030,7 @@
       </p:sp>
       <p:sp>
         <p:nvSpPr>
-          <p:cNvPr id="8" name="Text 5"/>
+          <p:cNvPr id="9" name="Text 5"/>
           <p:cNvSpPr/>
           <p:nvPr/>
         </p:nvSpPr>
@@ -19121,7 +19130,7 @@
       </p:sp>
       <p:sp>
         <p:nvSpPr>
-          <p:cNvPr id="9" name="Shape 6"/>
+          <p:cNvPr id="10" name="Shape 6"/>
           <p:cNvSpPr/>
           <p:nvPr/>
         </p:nvSpPr>
@@ -19143,7 +19152,7 @@
       </p:sp>
       <p:sp>
         <p:nvSpPr>
-          <p:cNvPr id="10" name="Text 7"/>
+          <p:cNvPr id="11" name="Text 7"/>
           <p:cNvSpPr/>
           <p:nvPr/>
         </p:nvSpPr>
@@ -19182,7 +19191,7 @@
       </p:sp>
       <p:sp>
         <p:nvSpPr>
-          <p:cNvPr id="11" name="Text 8"/>
+          <p:cNvPr id="12" name="Text 8"/>
           <p:cNvSpPr/>
           <p:nvPr/>
         </p:nvSpPr>
@@ -19224,7 +19233,7 @@
       </p:sp>
       <p:sp>
         <p:nvSpPr>
-          <p:cNvPr id="12" name="Shape 9"/>
+          <p:cNvPr id="13" name="Shape 9"/>
           <p:cNvSpPr/>
           <p:nvPr/>
         </p:nvSpPr>
@@ -19251,7 +19260,7 @@
       </p:sp>
       <p:sp>
         <p:nvSpPr>
-          <p:cNvPr id="13" name="Text 10"/>
+          <p:cNvPr id="14" name="Text 10"/>
           <p:cNvSpPr/>
           <p:nvPr/>
         </p:nvSpPr>
@@ -19290,7 +19299,7 @@
       </p:sp>
       <p:sp>
         <p:nvSpPr>
-          <p:cNvPr id="14" name="Text 11"/>
+          <p:cNvPr id="15" name="Text 11"/>
           <p:cNvSpPr/>
           <p:nvPr/>
         </p:nvSpPr>
@@ -20056,7 +20065,7 @@
       </p:pic>
       <p:sp>
         <p:nvSpPr>
-          <p:cNvPr id="6" name="Shape 3"/>
+          <p:cNvPr id="7" name="Shape 3"/>
           <p:cNvSpPr/>
           <p:nvPr/>
         </p:nvSpPr>
@@ -20083,7 +20092,7 @@
       </p:sp>
       <p:sp>
         <p:nvSpPr>
-          <p:cNvPr id="7" name="Shape 4"/>
+          <p:cNvPr id="8" name="Shape 4"/>
           <p:cNvSpPr/>
           <p:nvPr/>
         </p:nvSpPr>
@@ -20103,7 +20112,7 @@
       </p:sp>
       <p:sp>
         <p:nvSpPr>
-          <p:cNvPr id="8" name="Text 5"/>
+          <p:cNvPr id="9" name="Text 5"/>
           <p:cNvSpPr/>
           <p:nvPr/>
         </p:nvSpPr>
@@ -20142,7 +20151,7 @@
       </p:sp>
       <p:sp>
         <p:nvSpPr>
-          <p:cNvPr id="9" name="Text 6"/>
+          <p:cNvPr id="10" name="Text 6"/>
           <p:cNvSpPr/>
           <p:nvPr/>
         </p:nvSpPr>
@@ -20181,7 +20190,7 @@
       </p:sp>
       <p:sp>
         <p:nvSpPr>
-          <p:cNvPr id="10" name="Shape 7"/>
+          <p:cNvPr id="11" name="Shape 7"/>
           <p:cNvSpPr/>
           <p:nvPr/>
         </p:nvSpPr>
@@ -20208,7 +20217,7 @@
       </p:sp>
       <p:sp>
         <p:nvSpPr>
-          <p:cNvPr id="11" name="Shape 8"/>
+          <p:cNvPr id="12" name="Shape 8"/>
           <p:cNvSpPr/>
           <p:nvPr/>
         </p:nvSpPr>
@@ -20228,7 +20237,7 @@
       </p:sp>
       <p:sp>
         <p:nvSpPr>
-          <p:cNvPr id="12" name="Text 9"/>
+          <p:cNvPr id="13" name="Text 9"/>
           <p:cNvSpPr/>
           <p:nvPr/>
         </p:nvSpPr>
@@ -20267,7 +20276,7 @@
       </p:sp>
       <p:sp>
         <p:nvSpPr>
-          <p:cNvPr id="13" name="Text 10"/>
+          <p:cNvPr id="14" name="Text 10"/>
           <p:cNvSpPr/>
           <p:nvPr/>
         </p:nvSpPr>
@@ -20306,7 +20315,7 @@
       </p:sp>
       <p:sp>
         <p:nvSpPr>
-          <p:cNvPr id="14" name="Shape 11"/>
+          <p:cNvPr id="15" name="Shape 11"/>
           <p:cNvSpPr/>
           <p:nvPr/>
         </p:nvSpPr>
@@ -20333,7 +20342,7 @@
       </p:sp>
       <p:sp>
         <p:nvSpPr>
-          <p:cNvPr id="15" name="Shape 12"/>
+          <p:cNvPr id="16" name="Shape 12"/>
           <p:cNvSpPr/>
           <p:nvPr/>
         </p:nvSpPr>
@@ -20353,7 +20362,7 @@
       </p:sp>
       <p:sp>
         <p:nvSpPr>
-          <p:cNvPr id="16" name="Text 13"/>
+          <p:cNvPr id="17" name="Text 13"/>
           <p:cNvSpPr/>
           <p:nvPr/>
         </p:nvSpPr>
@@ -20392,7 +20401,7 @@
       </p:sp>
       <p:sp>
         <p:nvSpPr>
-          <p:cNvPr id="17" name="Text 14"/>
+          <p:cNvPr id="18" name="Text 14"/>
           <p:cNvSpPr/>
           <p:nvPr/>
         </p:nvSpPr>
@@ -20431,7 +20440,7 @@
       </p:sp>
       <p:sp>
         <p:nvSpPr>
-          <p:cNvPr id="18" name="Shape 15"/>
+          <p:cNvPr id="19" name="Shape 15"/>
           <p:cNvSpPr/>
           <p:nvPr/>
         </p:nvSpPr>
@@ -20458,7 +20467,7 @@
       </p:sp>
       <p:sp>
         <p:nvSpPr>
-          <p:cNvPr id="19" name="Shape 16"/>
+          <p:cNvPr id="20" name="Shape 16"/>
           <p:cNvSpPr/>
           <p:nvPr/>
         </p:nvSpPr>
@@ -20478,7 +20487,7 @@
       </p:sp>
       <p:sp>
         <p:nvSpPr>
-          <p:cNvPr id="20" name="Text 17"/>
+          <p:cNvPr id="21" name="Text 17"/>
           <p:cNvSpPr/>
           <p:nvPr/>
         </p:nvSpPr>
@@ -20517,7 +20526,7 @@
       </p:sp>
       <p:sp>
         <p:nvSpPr>
-          <p:cNvPr id="21" name="Text 18"/>
+          <p:cNvPr id="22" name="Text 18"/>
           <p:cNvSpPr/>
           <p:nvPr/>
         </p:nvSpPr>
@@ -20556,7 +20565,7 @@
       </p:sp>
       <p:sp>
         <p:nvSpPr>
-          <p:cNvPr id="22" name="Shape 19"/>
+          <p:cNvPr id="23" name="Shape 19"/>
           <p:cNvSpPr/>
           <p:nvPr/>
         </p:nvSpPr>
@@ -20583,7 +20592,7 @@
       </p:sp>
       <p:sp>
         <p:nvSpPr>
-          <p:cNvPr id="23" name="Shape 20"/>
+          <p:cNvPr id="24" name="Shape 20"/>
           <p:cNvSpPr/>
           <p:nvPr/>
         </p:nvSpPr>
@@ -20603,7 +20612,7 @@
       </p:sp>
       <p:sp>
         <p:nvSpPr>
-          <p:cNvPr id="24" name="Text 21"/>
+          <p:cNvPr id="25" name="Text 21"/>
           <p:cNvSpPr/>
           <p:nvPr/>
         </p:nvSpPr>
@@ -20642,7 +20651,7 @@
       </p:sp>
       <p:sp>
         <p:nvSpPr>
-          <p:cNvPr id="25" name="Text 22"/>
+          <p:cNvPr id="26" name="Text 22"/>
           <p:cNvSpPr/>
           <p:nvPr/>
         </p:nvSpPr>
@@ -20681,7 +20690,7 @@
       </p:sp>
       <p:sp>
         <p:nvSpPr>
-          <p:cNvPr id="26" name="Shape 23"/>
+          <p:cNvPr id="27" name="Shape 23"/>
           <p:cNvSpPr/>
           <p:nvPr/>
         </p:nvSpPr>
@@ -20708,7 +20717,7 @@
       </p:sp>
       <p:sp>
         <p:nvSpPr>
-          <p:cNvPr id="27" name="Shape 24"/>
+          <p:cNvPr id="28" name="Shape 24"/>
           <p:cNvSpPr/>
           <p:nvPr/>
         </p:nvSpPr>
@@ -20728,7 +20737,7 @@
       </p:sp>
       <p:sp>
         <p:nvSpPr>
-          <p:cNvPr id="28" name="Text 25"/>
+          <p:cNvPr id="29" name="Text 25"/>
           <p:cNvSpPr/>
           <p:nvPr/>
         </p:nvSpPr>
@@ -20767,7 +20776,7 @@
       </p:sp>
       <p:sp>
         <p:nvSpPr>
-          <p:cNvPr id="29" name="Text 26"/>
+          <p:cNvPr id="30" name="Text 26"/>
           <p:cNvSpPr/>
           <p:nvPr/>
         </p:nvSpPr>
@@ -20806,7 +20815,7 @@
       </p:sp>
       <p:sp>
         <p:nvSpPr>
-          <p:cNvPr id="30" name="Shape 27"/>
+          <p:cNvPr id="31" name="Shape 27"/>
           <p:cNvSpPr/>
           <p:nvPr/>
         </p:nvSpPr>
@@ -20833,7 +20842,7 @@
       </p:sp>
       <p:sp>
         <p:nvSpPr>
-          <p:cNvPr id="31" name="Shape 28"/>
+          <p:cNvPr id="32" name="Shape 28"/>
           <p:cNvSpPr/>
           <p:nvPr/>
         </p:nvSpPr>
@@ -20853,7 +20862,7 @@
       </p:sp>
       <p:sp>
         <p:nvSpPr>
-          <p:cNvPr id="32" name="Text 29"/>
+          <p:cNvPr id="33" name="Text 29"/>
           <p:cNvSpPr/>
           <p:nvPr/>
         </p:nvSpPr>
@@ -20892,7 +20901,7 @@
       </p:sp>
       <p:sp>
         <p:nvSpPr>
-          <p:cNvPr id="33" name="Text 30"/>
+          <p:cNvPr id="34" name="Text 30"/>
           <p:cNvSpPr/>
           <p:nvPr/>
         </p:nvSpPr>
@@ -20931,7 +20940,7 @@
       </p:sp>
       <p:sp>
         <p:nvSpPr>
-          <p:cNvPr id="34" name="Shape 31"/>
+          <p:cNvPr id="35" name="Shape 31"/>
           <p:cNvSpPr/>
           <p:nvPr/>
         </p:nvSpPr>
@@ -20953,7 +20962,7 @@
       </p:sp>
       <p:sp>
         <p:nvSpPr>
-          <p:cNvPr id="35" name="Shape 32"/>
+          <p:cNvPr id="36" name="Shape 32"/>
           <p:cNvSpPr/>
           <p:nvPr/>
         </p:nvSpPr>
@@ -20973,7 +20982,7 @@
       </p:sp>
       <p:sp>
         <p:nvSpPr>
-          <p:cNvPr id="36" name="Text 33"/>
+          <p:cNvPr id="37" name="Text 33"/>
           <p:cNvSpPr/>
           <p:nvPr/>
         </p:nvSpPr>
@@ -21012,7 +21021,7 @@
       </p:sp>
       <p:sp>
         <p:nvSpPr>
-          <p:cNvPr id="37" name="Text 34"/>
+          <p:cNvPr id="38" name="Text 34"/>
           <p:cNvSpPr/>
           <p:nvPr/>
         </p:nvSpPr>
@@ -21051,7 +21060,7 @@
       </p:sp>
       <p:sp>
         <p:nvSpPr>
-          <p:cNvPr id="38" name="Shape 35"/>
+          <p:cNvPr id="39" name="Shape 35"/>
           <p:cNvSpPr/>
           <p:nvPr/>
         </p:nvSpPr>
@@ -21078,7 +21087,7 @@
       </p:sp>
       <p:sp>
         <p:nvSpPr>
-          <p:cNvPr id="39" name="Shape 36"/>
+          <p:cNvPr id="40" name="Shape 36"/>
           <p:cNvSpPr/>
           <p:nvPr/>
         </p:nvSpPr>
@@ -21098,7 +21107,7 @@
       </p:sp>
       <p:sp>
         <p:nvSpPr>
-          <p:cNvPr id="40" name="Text 37"/>
+          <p:cNvPr id="41" name="Text 37"/>
           <p:cNvSpPr/>
           <p:nvPr/>
         </p:nvSpPr>
@@ -21137,7 +21146,7 @@
       </p:sp>
       <p:sp>
         <p:nvSpPr>
-          <p:cNvPr id="41" name="Text 38"/>
+          <p:cNvPr id="42" name="Text 38"/>
           <p:cNvSpPr/>
           <p:nvPr/>
         </p:nvSpPr>
@@ -21176,7 +21185,7 @@
       </p:sp>
       <p:sp>
         <p:nvSpPr>
-          <p:cNvPr id="42" name="Shape 39"/>
+          <p:cNvPr id="43" name="Shape 39"/>
           <p:cNvSpPr/>
           <p:nvPr/>
         </p:nvSpPr>
@@ -21203,7 +21212,7 @@
       </p:sp>
       <p:sp>
         <p:nvSpPr>
-          <p:cNvPr id="43" name="Shape 40"/>
+          <p:cNvPr id="44" name="Shape 40"/>
           <p:cNvSpPr/>
           <p:nvPr/>
         </p:nvSpPr>
@@ -21223,7 +21232,7 @@
       </p:sp>
       <p:sp>
         <p:nvSpPr>
-          <p:cNvPr id="44" name="Text 41"/>
+          <p:cNvPr id="45" name="Text 41"/>
           <p:cNvSpPr/>
           <p:nvPr/>
         </p:nvSpPr>
@@ -21262,7 +21271,7 @@
       </p:sp>
       <p:sp>
         <p:nvSpPr>
-          <p:cNvPr id="45" name="Text 42"/>
+          <p:cNvPr id="46" name="Text 42"/>
           <p:cNvSpPr/>
           <p:nvPr/>
         </p:nvSpPr>
@@ -21301,7 +21310,7 @@
       </p:sp>
       <p:sp>
         <p:nvSpPr>
-          <p:cNvPr id="46" name="Shape 43"/>
+          <p:cNvPr id="47" name="Shape 43"/>
           <p:cNvSpPr/>
           <p:nvPr/>
         </p:nvSpPr>
@@ -21328,7 +21337,7 @@
       </p:sp>
       <p:sp>
         <p:nvSpPr>
-          <p:cNvPr id="47" name="Shape 44"/>
+          <p:cNvPr id="48" name="Shape 44"/>
           <p:cNvSpPr/>
           <p:nvPr/>
         </p:nvSpPr>
@@ -21348,7 +21357,7 @@
       </p:sp>
       <p:sp>
         <p:nvSpPr>
-          <p:cNvPr id="48" name="Text 45"/>
+          <p:cNvPr id="49" name="Text 45"/>
           <p:cNvSpPr/>
           <p:nvPr/>
         </p:nvSpPr>
@@ -21387,7 +21396,7 @@
       </p:sp>
       <p:sp>
         <p:nvSpPr>
-          <p:cNvPr id="49" name="Text 46"/>
+          <p:cNvPr id="50" name="Text 46"/>
           <p:cNvSpPr/>
           <p:nvPr/>
         </p:nvSpPr>
@@ -21426,7 +21435,7 @@
       </p:sp>
       <p:sp>
         <p:nvSpPr>
-          <p:cNvPr id="50" name="Shape 47"/>
+          <p:cNvPr id="51" name="Shape 47"/>
           <p:cNvSpPr/>
           <p:nvPr/>
         </p:nvSpPr>
@@ -21453,7 +21462,7 @@
       </p:sp>
       <p:sp>
         <p:nvSpPr>
-          <p:cNvPr id="51" name="Shape 48"/>
+          <p:cNvPr id="52" name="Shape 48"/>
           <p:cNvSpPr/>
           <p:nvPr/>
         </p:nvSpPr>
@@ -21473,7 +21482,7 @@
       </p:sp>
       <p:sp>
         <p:nvSpPr>
-          <p:cNvPr id="52" name="Text 49"/>
+          <p:cNvPr id="53" name="Text 49"/>
           <p:cNvSpPr/>
           <p:nvPr/>
         </p:nvSpPr>
@@ -21512,7 +21521,7 @@
       </p:sp>
       <p:sp>
         <p:nvSpPr>
-          <p:cNvPr id="53" name="Text 50"/>
+          <p:cNvPr id="54" name="Text 50"/>
           <p:cNvSpPr/>
           <p:nvPr/>
         </p:nvSpPr>
@@ -21551,7 +21560,7 @@
       </p:sp>
       <p:sp>
         <p:nvSpPr>
-          <p:cNvPr id="54" name="Shape 51"/>
+          <p:cNvPr id="55" name="Shape 51"/>
           <p:cNvSpPr/>
           <p:nvPr/>
         </p:nvSpPr>
@@ -21578,7 +21587,7 @@
       </p:sp>
       <p:sp>
         <p:nvSpPr>
-          <p:cNvPr id="55" name="Text 52"/>
+          <p:cNvPr id="56" name="Text 52"/>
           <p:cNvSpPr/>
           <p:nvPr/>
         </p:nvSpPr>
@@ -21866,7 +21875,7 @@
       </p:pic>
       <p:sp>
         <p:nvSpPr>
-          <p:cNvPr id="7" name="Shape 4"/>
+          <p:cNvPr id="8" name="Shape 4"/>
           <p:cNvSpPr/>
           <p:nvPr/>
         </p:nvSpPr>
@@ -21893,7 +21902,7 @@
       </p:sp>
       <p:sp>
         <p:nvSpPr>
-          <p:cNvPr id="8" name="Text 5"/>
+          <p:cNvPr id="9" name="Text 5"/>
           <p:cNvSpPr/>
           <p:nvPr/>
         </p:nvSpPr>
@@ -21932,7 +21941,7 @@
       </p:sp>
       <p:sp>
         <p:nvSpPr>
-          <p:cNvPr id="9" name="Text 6"/>
+          <p:cNvPr id="10" name="Text 6"/>
           <p:cNvSpPr/>
           <p:nvPr/>
         </p:nvSpPr>
@@ -21974,7 +21983,7 @@
       </p:sp>
       <p:sp>
         <p:nvSpPr>
-          <p:cNvPr id="10" name="Shape 7"/>
+          <p:cNvPr id="11" name="Shape 7"/>
           <p:cNvSpPr/>
           <p:nvPr/>
         </p:nvSpPr>
@@ -22001,7 +22010,7 @@
       </p:sp>
       <p:sp>
         <p:nvSpPr>
-          <p:cNvPr id="11" name="Text 8"/>
+          <p:cNvPr id="12" name="Text 8"/>
           <p:cNvSpPr/>
           <p:nvPr/>
         </p:nvSpPr>
@@ -22040,7 +22049,7 @@
       </p:sp>
       <p:sp>
         <p:nvSpPr>
-          <p:cNvPr id="12" name="Text 9"/>
+          <p:cNvPr id="13" name="Text 9"/>
           <p:cNvSpPr/>
           <p:nvPr/>
         </p:nvSpPr>
@@ -22082,7 +22091,7 @@
       </p:sp>
       <p:sp>
         <p:nvSpPr>
-          <p:cNvPr id="13" name="Shape 10"/>
+          <p:cNvPr id="14" name="Shape 10"/>
           <p:cNvSpPr/>
           <p:nvPr/>
         </p:nvSpPr>
@@ -22109,7 +22118,7 @@
       </p:sp>
       <p:sp>
         <p:nvSpPr>
-          <p:cNvPr id="14" name="Text 11"/>
+          <p:cNvPr id="15" name="Text 11"/>
           <p:cNvSpPr/>
           <p:nvPr/>
         </p:nvSpPr>
@@ -22148,7 +22157,7 @@
       </p:sp>
       <p:sp>
         <p:nvSpPr>
-          <p:cNvPr id="15" name="Text 12"/>
+          <p:cNvPr id="16" name="Text 12"/>
           <p:cNvSpPr/>
           <p:nvPr/>
         </p:nvSpPr>
@@ -22190,7 +22199,7 @@
       </p:sp>
       <p:sp>
         <p:nvSpPr>
-          <p:cNvPr id="16" name="Shape 13"/>
+          <p:cNvPr id="17" name="Shape 13"/>
           <p:cNvSpPr/>
           <p:nvPr/>
         </p:nvSpPr>
@@ -22217,7 +22226,7 @@
       </p:sp>
       <p:sp>
         <p:nvSpPr>
-          <p:cNvPr id="17" name="Text 14"/>
+          <p:cNvPr id="18" name="Text 14"/>
           <p:cNvSpPr/>
           <p:nvPr/>
         </p:nvSpPr>
@@ -22256,7 +22265,7 @@
       </p:sp>
       <p:sp>
         <p:nvSpPr>
-          <p:cNvPr id="18" name="Text 15"/>
+          <p:cNvPr id="19" name="Text 15"/>
           <p:cNvSpPr/>
           <p:nvPr/>
         </p:nvSpPr>
@@ -22298,7 +22307,7 @@
       </p:sp>
       <p:sp>
         <p:nvSpPr>
-          <p:cNvPr id="19" name="Shape 16"/>
+          <p:cNvPr id="20" name="Shape 16"/>
           <p:cNvSpPr/>
           <p:nvPr/>
         </p:nvSpPr>
@@ -22325,7 +22334,7 @@
       </p:sp>
       <p:sp>
         <p:nvSpPr>
-          <p:cNvPr id="20" name="Text 17"/>
+          <p:cNvPr id="21" name="Text 17"/>
           <p:cNvSpPr/>
           <p:nvPr/>
         </p:nvSpPr>
@@ -22364,7 +22373,7 @@
       </p:sp>
       <p:sp>
         <p:nvSpPr>
-          <p:cNvPr id="21" name="Text 18"/>
+          <p:cNvPr id="22" name="Text 18"/>
           <p:cNvSpPr/>
           <p:nvPr/>
         </p:nvSpPr>
@@ -22406,7 +22415,7 @@
       </p:sp>
       <p:sp>
         <p:nvSpPr>
-          <p:cNvPr id="22" name="Shape 19"/>
+          <p:cNvPr id="23" name="Shape 19"/>
           <p:cNvSpPr/>
           <p:nvPr/>
         </p:nvSpPr>
@@ -22433,7 +22442,7 @@
       </p:sp>
       <p:sp>
         <p:nvSpPr>
-          <p:cNvPr id="23" name="Text 20"/>
+          <p:cNvPr id="24" name="Text 20"/>
           <p:cNvSpPr/>
           <p:nvPr/>
         </p:nvSpPr>
@@ -22472,7 +22481,7 @@
       </p:sp>
       <p:sp>
         <p:nvSpPr>
-          <p:cNvPr id="24" name="Text 21"/>
+          <p:cNvPr id="25" name="Text 21"/>
           <p:cNvSpPr/>
           <p:nvPr/>
         </p:nvSpPr>
@@ -22514,7 +22523,7 @@
       </p:sp>
       <p:sp>
         <p:nvSpPr>
-          <p:cNvPr id="25" name="Shape 22"/>
+          <p:cNvPr id="26" name="Shape 22"/>
           <p:cNvSpPr/>
           <p:nvPr/>
         </p:nvSpPr>
@@ -22541,7 +22550,7 @@
       </p:sp>
       <p:sp>
         <p:nvSpPr>
-          <p:cNvPr id="26" name="Text 23"/>
+          <p:cNvPr id="27" name="Text 23"/>
           <p:cNvSpPr/>
           <p:nvPr/>
         </p:nvSpPr>
@@ -22747,7 +22756,7 @@
         </p:nvSpPr>
         <p:spPr>
           <a:xfrm>
-            <a:off x="1280160" y="1024128"/>
+            <a:off x="1280160" y="1193140"/>
             <a:ext cx="777240" cy="256032"/>
           </a:xfrm>
           <a:prstGeom prst="roundRect">
@@ -22769,7 +22778,7 @@
         </p:nvSpPr>
         <p:spPr>
           <a:xfrm>
-            <a:off x="1280160" y="1024128"/>
+            <a:off x="1280160" y="1193140"/>
             <a:ext cx="777240" cy="256032"/>
           </a:xfrm>
           <a:prstGeom prst="rect">
@@ -22826,7 +22835,7 @@
       </p:pic>
       <p:sp>
         <p:nvSpPr>
-          <p:cNvPr id="7" name="Shape 4"/>
+          <p:cNvPr id="8" name="Shape 4"/>
           <p:cNvSpPr/>
           <p:nvPr/>
         </p:nvSpPr>
@@ -22848,7 +22857,7 @@
       </p:sp>
       <p:sp>
         <p:nvSpPr>
-          <p:cNvPr id="8" name="Shape 5"/>
+          <p:cNvPr id="9" name="Shape 5"/>
           <p:cNvSpPr/>
           <p:nvPr/>
         </p:nvSpPr>
@@ -22868,7 +22877,7 @@
       </p:sp>
       <p:sp>
         <p:nvSpPr>
-          <p:cNvPr id="9" name="Text 6"/>
+          <p:cNvPr id="10" name="Text 6"/>
           <p:cNvSpPr/>
           <p:nvPr/>
         </p:nvSpPr>
@@ -22907,7 +22916,7 @@
       </p:sp>
       <p:sp>
         <p:nvSpPr>
-          <p:cNvPr id="10" name="Text 7"/>
+          <p:cNvPr id="11" name="Text 7"/>
           <p:cNvSpPr/>
           <p:nvPr/>
         </p:nvSpPr>
@@ -22946,7 +22955,7 @@
       </p:sp>
       <p:sp>
         <p:nvSpPr>
-          <p:cNvPr id="11" name="Text 8"/>
+          <p:cNvPr id="12" name="Text 8"/>
           <p:cNvSpPr/>
           <p:nvPr/>
         </p:nvSpPr>
@@ -22988,7 +22997,7 @@
       </p:sp>
       <p:sp>
         <p:nvSpPr>
-          <p:cNvPr id="12" name="Shape 9"/>
+          <p:cNvPr id="13" name="Shape 9"/>
           <p:cNvSpPr/>
           <p:nvPr/>
         </p:nvSpPr>
@@ -23010,7 +23019,7 @@
       </p:sp>
       <p:sp>
         <p:nvSpPr>
-          <p:cNvPr id="13" name="Shape 10"/>
+          <p:cNvPr id="14" name="Shape 10"/>
           <p:cNvSpPr/>
           <p:nvPr/>
         </p:nvSpPr>
@@ -23030,7 +23039,7 @@
       </p:sp>
       <p:sp>
         <p:nvSpPr>
-          <p:cNvPr id="14" name="Text 11"/>
+          <p:cNvPr id="15" name="Text 11"/>
           <p:cNvSpPr/>
           <p:nvPr/>
         </p:nvSpPr>
@@ -23069,7 +23078,7 @@
       </p:sp>
       <p:sp>
         <p:nvSpPr>
-          <p:cNvPr id="15" name="Text 12"/>
+          <p:cNvPr id="16" name="Text 12"/>
           <p:cNvSpPr/>
           <p:nvPr/>
         </p:nvSpPr>
@@ -23108,7 +23117,7 @@
       </p:sp>
       <p:sp>
         <p:nvSpPr>
-          <p:cNvPr id="16" name="Text 13"/>
+          <p:cNvPr id="17" name="Text 13"/>
           <p:cNvSpPr/>
           <p:nvPr/>
         </p:nvSpPr>
@@ -23150,7 +23159,7 @@
       </p:sp>
       <p:sp>
         <p:nvSpPr>
-          <p:cNvPr id="17" name="Shape 14"/>
+          <p:cNvPr id="18" name="Shape 14"/>
           <p:cNvSpPr/>
           <p:nvPr/>
         </p:nvSpPr>
@@ -23172,7 +23181,7 @@
       </p:sp>
       <p:sp>
         <p:nvSpPr>
-          <p:cNvPr id="18" name="Shape 15"/>
+          <p:cNvPr id="19" name="Shape 15"/>
           <p:cNvSpPr/>
           <p:nvPr/>
         </p:nvSpPr>
@@ -23192,7 +23201,7 @@
       </p:sp>
       <p:sp>
         <p:nvSpPr>
-          <p:cNvPr id="19" name="Text 16"/>
+          <p:cNvPr id="20" name="Text 16"/>
           <p:cNvSpPr/>
           <p:nvPr/>
         </p:nvSpPr>
@@ -23231,7 +23240,7 @@
       </p:sp>
       <p:sp>
         <p:nvSpPr>
-          <p:cNvPr id="20" name="Text 17"/>
+          <p:cNvPr id="21" name="Text 17"/>
           <p:cNvSpPr/>
           <p:nvPr/>
         </p:nvSpPr>
@@ -23270,7 +23279,7 @@
       </p:sp>
       <p:sp>
         <p:nvSpPr>
-          <p:cNvPr id="21" name="Text 18"/>
+          <p:cNvPr id="22" name="Text 18"/>
           <p:cNvSpPr/>
           <p:nvPr/>
         </p:nvSpPr>
@@ -23312,7 +23321,7 @@
       </p:sp>
       <p:sp>
         <p:nvSpPr>
-          <p:cNvPr id="22" name="Shape 19"/>
+          <p:cNvPr id="23" name="Shape 19"/>
           <p:cNvSpPr/>
           <p:nvPr/>
         </p:nvSpPr>
@@ -23339,7 +23348,7 @@
       </p:sp>
       <p:sp>
         <p:nvSpPr>
-          <p:cNvPr id="23" name="Text 20"/>
+          <p:cNvPr id="24" name="Text 20"/>
           <p:cNvSpPr/>
           <p:nvPr/>
         </p:nvSpPr>
@@ -23378,7 +23387,7 @@
       </p:sp>
       <p:sp>
         <p:nvSpPr>
-          <p:cNvPr id="24" name="Shape 21"/>
+          <p:cNvPr id="25" name="Shape 21"/>
           <p:cNvSpPr/>
           <p:nvPr/>
         </p:nvSpPr>
@@ -23401,7 +23410,7 @@
       </p:sp>
       <p:sp>
         <p:nvSpPr>
-          <p:cNvPr id="25" name="Shape 22"/>
+          <p:cNvPr id="26" name="Shape 22"/>
           <p:cNvSpPr/>
           <p:nvPr/>
         </p:nvSpPr>
@@ -23421,7 +23430,7 @@
       </p:sp>
       <p:sp>
         <p:nvSpPr>
-          <p:cNvPr id="26" name="Shape 23"/>
+          <p:cNvPr id="27" name="Shape 23"/>
           <p:cNvSpPr/>
           <p:nvPr/>
         </p:nvSpPr>
@@ -23448,7 +23457,7 @@
       </p:sp>
       <p:sp>
         <p:nvSpPr>
-          <p:cNvPr id="27" name="Text 24"/>
+          <p:cNvPr id="28" name="Text 24"/>
           <p:cNvSpPr/>
           <p:nvPr/>
         </p:nvSpPr>
@@ -23487,7 +23496,7 @@
       </p:sp>
       <p:sp>
         <p:nvSpPr>
-          <p:cNvPr id="28" name="Shape 25"/>
+          <p:cNvPr id="29" name="Shape 25"/>
           <p:cNvSpPr/>
           <p:nvPr/>
         </p:nvSpPr>
@@ -23510,7 +23519,7 @@
       </p:sp>
       <p:sp>
         <p:nvSpPr>
-          <p:cNvPr id="29" name="Shape 26"/>
+          <p:cNvPr id="30" name="Shape 26"/>
           <p:cNvSpPr/>
           <p:nvPr/>
         </p:nvSpPr>
@@ -23530,7 +23539,7 @@
       </p:sp>
       <p:sp>
         <p:nvSpPr>
-          <p:cNvPr id="30" name="Shape 27"/>
+          <p:cNvPr id="31" name="Shape 27"/>
           <p:cNvSpPr/>
           <p:nvPr/>
         </p:nvSpPr>
@@ -23552,7 +23561,7 @@
       </p:sp>
       <p:sp>
         <p:nvSpPr>
-          <p:cNvPr id="31" name="Text 28"/>
+          <p:cNvPr id="32" name="Text 28"/>
           <p:cNvSpPr/>
           <p:nvPr/>
         </p:nvSpPr>
@@ -23591,7 +23600,7 @@
       </p:sp>
       <p:sp>
         <p:nvSpPr>
-          <p:cNvPr id="32" name="Shape 29"/>
+          <p:cNvPr id="33" name="Shape 29"/>
           <p:cNvSpPr/>
           <p:nvPr/>
         </p:nvSpPr>
@@ -23614,7 +23623,7 @@
       </p:sp>
       <p:sp>
         <p:nvSpPr>
-          <p:cNvPr id="33" name="Shape 30"/>
+          <p:cNvPr id="34" name="Shape 30"/>
           <p:cNvSpPr/>
           <p:nvPr/>
         </p:nvSpPr>
@@ -23634,7 +23643,7 @@
       </p:sp>
       <p:sp>
         <p:nvSpPr>
-          <p:cNvPr id="34" name="Shape 31"/>
+          <p:cNvPr id="35" name="Shape 31"/>
           <p:cNvSpPr/>
           <p:nvPr/>
         </p:nvSpPr>
@@ -23656,7 +23665,7 @@
       </p:sp>
       <p:sp>
         <p:nvSpPr>
-          <p:cNvPr id="35" name="Text 32"/>
+          <p:cNvPr id="36" name="Text 32"/>
           <p:cNvSpPr/>
           <p:nvPr/>
         </p:nvSpPr>
@@ -23695,7 +23704,7 @@
       </p:sp>
       <p:sp>
         <p:nvSpPr>
-          <p:cNvPr id="36" name="Text 33"/>
+          <p:cNvPr id="37" name="Text 33"/>
           <p:cNvSpPr/>
           <p:nvPr/>
         </p:nvSpPr>
@@ -23726,7 +23735,7 @@
                 <a:ea typeface="Montserrat" pitchFamily="34" charset="-122"/>
                 <a:cs typeface="Montserrat" pitchFamily="34" charset="-120"/>
               </a:rPr>
-              <a:t>перші два виміри знайомі з веб-сервісів; другі два — те, чим LLMOps відрізняється від просто Ops</a:t>
+              <a:t>перші два виміри знайомі з веб-сервісів; другі два — власне LLMOps</a:t>
             </a:r>
             <a:endParaRPr lang="en-US" sz="1150" dirty="0"/>
           </a:p>
@@ -23734,7 +23743,7 @@
       </p:sp>
       <p:sp>
         <p:nvSpPr>
-          <p:cNvPr id="37" name="Shape 34"/>
+          <p:cNvPr id="38" name="Shape 34"/>
           <p:cNvSpPr/>
           <p:nvPr/>
         </p:nvSpPr>
@@ -23756,7 +23765,7 @@
       </p:sp>
       <p:sp>
         <p:nvSpPr>
-          <p:cNvPr id="38" name="Text 35"/>
+          <p:cNvPr id="39" name="Text 35"/>
           <p:cNvSpPr/>
           <p:nvPr/>
         </p:nvSpPr>
@@ -23795,7 +23804,7 @@
       </p:sp>
       <p:sp>
         <p:nvSpPr>
-          <p:cNvPr id="39" name="Text 36"/>
+          <p:cNvPr id="40" name="Text 36"/>
           <p:cNvSpPr/>
           <p:nvPr/>
         </p:nvSpPr>
@@ -23829,7 +23838,7 @@
                 <a:ea typeface="Montserrat" pitchFamily="34" charset="-122"/>
                 <a:cs typeface="Montserrat" pitchFamily="34" charset="-120"/>
               </a:rPr>
-              <a:t>Усі механізми чотирьох тижнів працюють — але поки ви бачите їх лише в коді. Сьогодні вони стають видимими цифрами.</a:t>
+              <a:t>Механізми чотирьох тижнів працюють — сьогодні вони стають видимими цифрами.</a:t>
             </a:r>
             <a:endParaRPr lang="en-US" sz="1300" dirty="0"/>
           </a:p>
@@ -24080,7 +24089,7 @@
       </p:pic>
       <p:sp>
         <p:nvSpPr>
-          <p:cNvPr id="7" name="Shape 4"/>
+          <p:cNvPr id="8" name="Shape 4"/>
           <p:cNvSpPr/>
           <p:nvPr/>
         </p:nvSpPr>
@@ -24107,7 +24116,7 @@
       </p:sp>
       <p:sp>
         <p:nvSpPr>
-          <p:cNvPr id="8" name="Text 5"/>
+          <p:cNvPr id="9" name="Text 5"/>
           <p:cNvSpPr/>
           <p:nvPr/>
         </p:nvSpPr>
@@ -24149,7 +24158,7 @@
       </p:sp>
       <p:sp>
         <p:nvSpPr>
-          <p:cNvPr id="9" name="Shape 6"/>
+          <p:cNvPr id="10" name="Shape 6"/>
           <p:cNvSpPr/>
           <p:nvPr/>
         </p:nvSpPr>
@@ -24171,7 +24180,7 @@
       </p:sp>
       <p:sp>
         <p:nvSpPr>
-          <p:cNvPr id="10" name="Shape 7"/>
+          <p:cNvPr id="11" name="Shape 7"/>
           <p:cNvSpPr/>
           <p:nvPr/>
         </p:nvSpPr>
@@ -24191,7 +24200,7 @@
       </p:sp>
       <p:sp>
         <p:nvSpPr>
-          <p:cNvPr id="11" name="Text 8"/>
+          <p:cNvPr id="12" name="Text 8"/>
           <p:cNvSpPr/>
           <p:nvPr/>
         </p:nvSpPr>
@@ -24230,7 +24239,7 @@
       </p:sp>
       <p:sp>
         <p:nvSpPr>
-          <p:cNvPr id="12" name="Text 9"/>
+          <p:cNvPr id="13" name="Text 9"/>
           <p:cNvSpPr/>
           <p:nvPr/>
         </p:nvSpPr>
@@ -24269,7 +24278,7 @@
       </p:sp>
       <p:sp>
         <p:nvSpPr>
-          <p:cNvPr id="13" name="Text 10"/>
+          <p:cNvPr id="14" name="Text 10"/>
           <p:cNvSpPr/>
           <p:nvPr/>
         </p:nvSpPr>
@@ -24311,7 +24320,7 @@
       </p:sp>
       <p:sp>
         <p:nvSpPr>
-          <p:cNvPr id="14" name="Shape 11"/>
+          <p:cNvPr id="15" name="Shape 11"/>
           <p:cNvSpPr/>
           <p:nvPr/>
         </p:nvSpPr>
@@ -24333,7 +24342,7 @@
       </p:sp>
       <p:sp>
         <p:nvSpPr>
-          <p:cNvPr id="15" name="Shape 12"/>
+          <p:cNvPr id="16" name="Shape 12"/>
           <p:cNvSpPr/>
           <p:nvPr/>
         </p:nvSpPr>
@@ -24353,7 +24362,7 @@
       </p:sp>
       <p:sp>
         <p:nvSpPr>
-          <p:cNvPr id="16" name="Text 13"/>
+          <p:cNvPr id="17" name="Text 13"/>
           <p:cNvSpPr/>
           <p:nvPr/>
         </p:nvSpPr>
@@ -24392,7 +24401,7 @@
       </p:sp>
       <p:sp>
         <p:nvSpPr>
-          <p:cNvPr id="17" name="Text 14"/>
+          <p:cNvPr id="18" name="Text 14"/>
           <p:cNvSpPr/>
           <p:nvPr/>
         </p:nvSpPr>
@@ -24431,7 +24440,7 @@
       </p:sp>
       <p:sp>
         <p:nvSpPr>
-          <p:cNvPr id="18" name="Text 15"/>
+          <p:cNvPr id="19" name="Text 15"/>
           <p:cNvSpPr/>
           <p:nvPr/>
         </p:nvSpPr>
@@ -24473,7 +24482,7 @@
       </p:sp>
       <p:sp>
         <p:nvSpPr>
-          <p:cNvPr id="19" name="Shape 16"/>
+          <p:cNvPr id="20" name="Shape 16"/>
           <p:cNvSpPr/>
           <p:nvPr/>
         </p:nvSpPr>
@@ -24495,7 +24504,7 @@
       </p:sp>
       <p:sp>
         <p:nvSpPr>
-          <p:cNvPr id="20" name="Shape 17"/>
+          <p:cNvPr id="21" name="Shape 17"/>
           <p:cNvSpPr/>
           <p:nvPr/>
         </p:nvSpPr>
@@ -24515,7 +24524,7 @@
       </p:sp>
       <p:sp>
         <p:nvSpPr>
-          <p:cNvPr id="21" name="Text 18"/>
+          <p:cNvPr id="22" name="Text 18"/>
           <p:cNvSpPr/>
           <p:nvPr/>
         </p:nvSpPr>
@@ -24554,7 +24563,7 @@
       </p:sp>
       <p:sp>
         <p:nvSpPr>
-          <p:cNvPr id="22" name="Text 19"/>
+          <p:cNvPr id="23" name="Text 19"/>
           <p:cNvSpPr/>
           <p:nvPr/>
         </p:nvSpPr>
@@ -24593,7 +24602,7 @@
       </p:sp>
       <p:sp>
         <p:nvSpPr>
-          <p:cNvPr id="23" name="Text 20"/>
+          <p:cNvPr id="24" name="Text 20"/>
           <p:cNvSpPr/>
           <p:nvPr/>
         </p:nvSpPr>
@@ -24635,7 +24644,7 @@
       </p:sp>
       <p:sp>
         <p:nvSpPr>
-          <p:cNvPr id="24" name="Shape 21"/>
+          <p:cNvPr id="25" name="Shape 21"/>
           <p:cNvSpPr/>
           <p:nvPr/>
         </p:nvSpPr>
@@ -24657,7 +24666,7 @@
       </p:sp>
       <p:sp>
         <p:nvSpPr>
-          <p:cNvPr id="25" name="Text 22"/>
+          <p:cNvPr id="26" name="Text 22"/>
           <p:cNvSpPr/>
           <p:nvPr/>
         </p:nvSpPr>
@@ -24863,7 +24872,7 @@
         </p:nvSpPr>
         <p:spPr>
           <a:xfrm>
-            <a:off x="1280160" y="1024128"/>
+            <a:off x="1280160" y="1193140"/>
             <a:ext cx="777240" cy="256032"/>
           </a:xfrm>
           <a:prstGeom prst="roundRect">
@@ -24885,7 +24894,7 @@
         </p:nvSpPr>
         <p:spPr>
           <a:xfrm>
-            <a:off x="1280160" y="1024128"/>
+            <a:off x="1280160" y="1193140"/>
             <a:ext cx="777240" cy="256032"/>
           </a:xfrm>
           <a:prstGeom prst="rect">
@@ -26003,7 +26012,7 @@
       </p:graphicFrame>
       <p:sp>
         <p:nvSpPr>
-          <p:cNvPr id="8" name="Shape 4"/>
+          <p:cNvPr id="9" name="Shape 4"/>
           <p:cNvSpPr/>
           <p:nvPr/>
         </p:nvSpPr>
@@ -26025,7 +26034,7 @@
       </p:sp>
       <p:sp>
         <p:nvSpPr>
-          <p:cNvPr id="9" name="Text 5"/>
+          <p:cNvPr id="10" name="Text 5"/>
           <p:cNvSpPr/>
           <p:nvPr/>
         </p:nvSpPr>
@@ -26064,7 +26073,7 @@
       </p:sp>
       <p:sp>
         <p:nvSpPr>
-          <p:cNvPr id="10" name="Text 6"/>
+          <p:cNvPr id="11" name="Text 6"/>
           <p:cNvSpPr/>
           <p:nvPr/>
         </p:nvSpPr>
@@ -26098,7 +26107,7 @@
                 <a:ea typeface="Montserrat" pitchFamily="34" charset="-122"/>
                 <a:cs typeface="Montserrat" pitchFamily="34" charset="-120"/>
               </a:rPr>
-              <a:t>Колонка, записана в момент події, — майбутній GROUP BY, який коштує нуль. Колонка, про яку згадали через місяць, — місяць даних, яких уже не буде.</a:t>
+              <a:t>Колонка в момент події — безкоштовний GROUP BY. Через місяць — даних уже немає.</a:t>
             </a:r>
             <a:endParaRPr lang="en-US" sz="1300" dirty="0"/>
           </a:p>
@@ -26106,7 +26115,7 @@
       </p:sp>
       <p:sp>
         <p:nvSpPr>
-          <p:cNvPr id="11" name="Shape 7"/>
+          <p:cNvPr id="12" name="Shape 7"/>
           <p:cNvSpPr/>
           <p:nvPr/>
         </p:nvSpPr>
@@ -26133,7 +26142,7 @@
       </p:sp>
       <p:sp>
         <p:nvSpPr>
-          <p:cNvPr id="12" name="Text 8"/>
+          <p:cNvPr id="13" name="Text 8"/>
           <p:cNvSpPr/>
           <p:nvPr/>
         </p:nvSpPr>
@@ -26167,7 +26176,7 @@
                 <a:ea typeface="Montserrat" pitchFamily="34" charset="-122"/>
                 <a:cs typeface="Montserrat" pitchFamily="34" charset="-120"/>
               </a:rPr>
-              <a:t>Захочете зріз по тенантах — додайте tenant_id у лог-рядок у момент запиту; по фічах — feature; по операторах approvals — хто підтвердив.</a:t>
+              <a:t>Зріз по тенантах — додайте tenant_id у лог-рядок у момент запиту.</a:t>
             </a:r>
             <a:endParaRPr lang="en-US" sz="1300" dirty="0"/>
           </a:p>
@@ -26418,7 +26427,7 @@
       </p:pic>
       <p:sp>
         <p:nvSpPr>
-          <p:cNvPr id="7" name="Shape 4"/>
+          <p:cNvPr id="8" name="Shape 4"/>
           <p:cNvSpPr/>
           <p:nvPr/>
         </p:nvSpPr>
@@ -26440,7 +26449,7 @@
       </p:sp>
       <p:sp>
         <p:nvSpPr>
-          <p:cNvPr id="8" name="Text 5"/>
+          <p:cNvPr id="9" name="Text 5"/>
           <p:cNvSpPr/>
           <p:nvPr/>
         </p:nvSpPr>
@@ -26479,7 +26488,7 @@
       </p:sp>
       <p:sp>
         <p:nvSpPr>
-          <p:cNvPr id="9" name="Text 6"/>
+          <p:cNvPr id="10" name="Text 6"/>
           <p:cNvSpPr/>
           <p:nvPr/>
         </p:nvSpPr>
@@ -26518,7 +26527,7 @@
       </p:sp>
       <p:sp>
         <p:nvSpPr>
-          <p:cNvPr id="10" name="Shape 7"/>
+          <p:cNvPr id="11" name="Shape 7"/>
           <p:cNvSpPr/>
           <p:nvPr/>
         </p:nvSpPr>
@@ -26540,7 +26549,7 @@
       </p:sp>
       <p:sp>
         <p:nvSpPr>
-          <p:cNvPr id="11" name="Text 8"/>
+          <p:cNvPr id="12" name="Text 8"/>
           <p:cNvSpPr/>
           <p:nvPr/>
         </p:nvSpPr>
@@ -26579,7 +26588,7 @@
       </p:sp>
       <p:sp>
         <p:nvSpPr>
-          <p:cNvPr id="12" name="Text 9"/>
+          <p:cNvPr id="13" name="Text 9"/>
           <p:cNvSpPr/>
           <p:nvPr/>
         </p:nvSpPr>
@@ -26618,7 +26627,7 @@
       </p:sp>
       <p:sp>
         <p:nvSpPr>
-          <p:cNvPr id="13" name="Shape 10"/>
+          <p:cNvPr id="14" name="Shape 10"/>
           <p:cNvSpPr/>
           <p:nvPr/>
         </p:nvSpPr>
@@ -26640,7 +26649,7 @@
       </p:sp>
       <p:sp>
         <p:nvSpPr>
-          <p:cNvPr id="14" name="Text 11"/>
+          <p:cNvPr id="15" name="Text 11"/>
           <p:cNvSpPr/>
           <p:nvPr/>
         </p:nvSpPr>
@@ -26679,7 +26688,7 @@
       </p:sp>
       <p:sp>
         <p:nvSpPr>
-          <p:cNvPr id="15" name="Text 12"/>
+          <p:cNvPr id="16" name="Text 12"/>
           <p:cNvSpPr/>
           <p:nvPr/>
         </p:nvSpPr>
@@ -26718,7 +26727,7 @@
       </p:sp>
       <p:sp>
         <p:nvSpPr>
-          <p:cNvPr id="16" name="Shape 13"/>
+          <p:cNvPr id="17" name="Shape 13"/>
           <p:cNvSpPr/>
           <p:nvPr/>
         </p:nvSpPr>
@@ -26740,7 +26749,7 @@
       </p:sp>
       <p:sp>
         <p:nvSpPr>
-          <p:cNvPr id="17" name="Text 14"/>
+          <p:cNvPr id="18" name="Text 14"/>
           <p:cNvSpPr/>
           <p:nvPr/>
         </p:nvSpPr>
@@ -26779,7 +26788,7 @@
       </p:sp>
       <p:sp>
         <p:nvSpPr>
-          <p:cNvPr id="18" name="Text 15"/>
+          <p:cNvPr id="19" name="Text 15"/>
           <p:cNvSpPr/>
           <p:nvPr/>
         </p:nvSpPr>
@@ -26813,7 +26822,7 @@
                 <a:ea typeface="Montserrat" pitchFamily="34" charset="-122"/>
                 <a:cs typeface="Montserrat" pitchFamily="34" charset="-120"/>
               </a:rPr>
-              <a:t>Алерт на середню latency: вона згладить і сплеск таймаутів, і деградацію провайдера — ви дізнаєтесь зі скарг, а алерт не спрацює. Алерти й SLO — на перцентилі.</a:t>
+              <a:t>Середня latency згладить і сплеск, і деградацію. Алерти — на перцентилі.</a:t>
             </a:r>
             <a:endParaRPr lang="en-US" sz="1300" dirty="0"/>
           </a:p>
@@ -26821,7 +26830,7 @@
       </p:sp>
       <p:sp>
         <p:nvSpPr>
-          <p:cNvPr id="19" name="Shape 16"/>
+          <p:cNvPr id="20" name="Shape 16"/>
           <p:cNvSpPr/>
           <p:nvPr/>
         </p:nvSpPr>
@@ -26843,7 +26852,7 @@
       </p:sp>
       <p:sp>
         <p:nvSpPr>
-          <p:cNvPr id="20" name="Text 17"/>
+          <p:cNvPr id="21" name="Text 17"/>
           <p:cNvSpPr/>
           <p:nvPr/>
         </p:nvSpPr>
@@ -26877,7 +26886,7 @@
                 <a:ea typeface="Montserrat" pitchFamily="34" charset="-122"/>
                 <a:cs typeface="Montserrat" pitchFamily="34" charset="-120"/>
               </a:rPr>
-              <a:t>І пам'ятайте: перцентилі не усереднюються. Середнє від p95 двох годин — не p95 за дві години; рахувати треба по сирих даних.</a:t>
+              <a:t>Перцентилі не усереднюються: середнє від двох p95 — не p95 за дві години.</a:t>
             </a:r>
             <a:endParaRPr lang="en-US" sz="1300" dirty="0"/>
           </a:p>
@@ -27128,7 +27137,7 @@
       </p:pic>
       <p:sp>
         <p:nvSpPr>
-          <p:cNvPr id="7" name="Shape 4"/>
+          <p:cNvPr id="8" name="Shape 4"/>
           <p:cNvSpPr/>
           <p:nvPr/>
         </p:nvSpPr>
@@ -27155,7 +27164,7 @@
       </p:sp>
       <p:sp>
         <p:nvSpPr>
-          <p:cNvPr id="8" name="Text 5"/>
+          <p:cNvPr id="9" name="Text 5"/>
           <p:cNvSpPr/>
           <p:nvPr/>
         </p:nvSpPr>
@@ -27257,7 +27266,7 @@
       </p:sp>
       <p:sp>
         <p:nvSpPr>
-          <p:cNvPr id="9" name="Shape 6"/>
+          <p:cNvPr id="10" name="Shape 6"/>
           <p:cNvSpPr/>
           <p:nvPr/>
         </p:nvSpPr>
@@ -27279,7 +27288,7 @@
       </p:sp>
       <p:sp>
         <p:nvSpPr>
-          <p:cNvPr id="10" name="Text 7"/>
+          <p:cNvPr id="11" name="Text 7"/>
           <p:cNvSpPr/>
           <p:nvPr/>
         </p:nvSpPr>
@@ -27318,7 +27327,7 @@
       </p:sp>
       <p:sp>
         <p:nvSpPr>
-          <p:cNvPr id="11" name="Text 8"/>
+          <p:cNvPr id="12" name="Text 8"/>
           <p:cNvSpPr/>
           <p:nvPr/>
         </p:nvSpPr>
@@ -27360,7 +27369,7 @@
       </p:sp>
       <p:sp>
         <p:nvSpPr>
-          <p:cNvPr id="12" name="Shape 9"/>
+          <p:cNvPr id="13" name="Shape 9"/>
           <p:cNvSpPr/>
           <p:nvPr/>
         </p:nvSpPr>
@@ -27382,7 +27391,7 @@
       </p:sp>
       <p:sp>
         <p:nvSpPr>
-          <p:cNvPr id="13" name="Text 10"/>
+          <p:cNvPr id="14" name="Text 10"/>
           <p:cNvSpPr/>
           <p:nvPr/>
         </p:nvSpPr>
@@ -27421,7 +27430,7 @@
       </p:sp>
       <p:sp>
         <p:nvSpPr>
-          <p:cNvPr id="14" name="Text 11"/>
+          <p:cNvPr id="15" name="Text 11"/>
           <p:cNvSpPr/>
           <p:nvPr/>
         </p:nvSpPr>
@@ -27463,7 +27472,7 @@
       </p:sp>
       <p:sp>
         <p:nvSpPr>
-          <p:cNvPr id="15" name="Text 12"/>
+          <p:cNvPr id="16" name="Text 12"/>
           <p:cNvSpPr/>
           <p:nvPr/>
         </p:nvSpPr>

--- a/docs/decks/L09.pptx
+++ b/docs/decks/L09.pptx
@@ -527,7 +527,7 @@
           <a:p>
             <a:r>
               <a:rPr lang="en-US" dirty="0"/>
-              <a:t>Вітаю на дев'ятому уроці — починаємо п'ятий тиждень, «Observability + evals». За чотири тижні ви збудували роутер, облік вартості, кеш, fallback і безпеку — і кожен із цих механізмів продукує цифри. Сьогодні ці цифри вперше збираються в одному місці й стають тим, на що дивиться оператор: консоль оживає повністю. Але головна тема уроку не плитки. Головна тема — інциденти, які не дають жодної помилки: якість просіла — 200, вартість виросла втричі — 200, трафік поповз на слабшу модель — 200. Uptime зелений, користувачі нещасні. Розберемо, чому один лог-рядок з першого уроку виявляється трейсом, метрикою і аудитом одночасно; чому алерти ставлять на p95, а не на середнє; що таке SLO і бюджет помилок; і зіграємо в детектива — інцидент, який видно тільки в метриках. Курс переходить від «будуємо механізми» до «керуємо системою».</a:t>
+              <a:t/>
             </a:r>
             <a:endParaRPr lang="en-US" dirty="0"/>
           </a:p>
@@ -615,7 +615,7 @@
           <a:p>
             <a:r>
               <a:rPr lang="en-US" dirty="0"/>
-              <a:t>І консоль оживає повністю. Пройдімося по плитках так, як ми проєктували кожен механізм, — від питання. Requests today: яке навантаження зараз? Count по лозі. Вартість сьогодні: скільки палимо і чи в бюджеті? Сума cost_usd — механізм з уроку 4. P95 latency: що бачать найневдаліші користувачі? Перцентиль по лозі. Error rate: яка частка запитів ламається? Частка не-200. Cache-hit: чи окупається кеш? Лічильники з уроку 5. І fallback: чи живемо ми на плані Б? Лічильник з уроку 7. Зверніть увагу: кожна плитка — це механізм, який ви вже збудували, просто тепер його цифра стоїть перед очима оператора. І принцип, який відрізняє робочий дашборд від прикраси: кожен елемент має відповідати на конкретне операційне питання. Тест простий — сформулюйте питання вголос; не формулюється — плитку геть. Дашборд, який «просто показує все», не читає ніхто. У лабі я попрошу вас пройти по кожній плитці й проговорити її питання своїми словами — це і є третій пункт сьогоднішнього ДЗ.</a:t>
+              <a:t/>
             </a:r>
             <a:endParaRPr lang="en-US" dirty="0"/>
           </a:p>
@@ -703,7 +703,7 @@
           <a:p>
             <a:r>
               <a:rPr lang="en-US" dirty="0"/>
-              <a:t>GET /providers додає останній шматок — статус провайдерів. На mock у штатному режимі він «ok», але форма бойова: плитка не має права зеленіти посеред інциденту, тому статус, прибитий цвяхом до «ok», — не спрощення, а брехня рівно в той момент, коли на плитку дивляться. Джерело сигналу для core-доріжки у вас уже є: лічильник збоїв fallback-ланцюга з тижня 4. N поспіль збоїв темнять статус до «degraded», перший успішний виклик повертає «ok». Саме це — обов'язкова частина ДЗ тижня 5. Хто зробив опційний circuit breaker — бере готовий стан breaker'а як джерело, так робить еталон: статус темніє, щойно breaker відкритий. І стик механізмів, який варто знати: breaker оновлюється лише на реальних викликах, а cache-hit у ланцюг не заходить. Тому після інциденту плитка може показувати «down» як завгодно довго, поки трафік обслуговується з кешу. «Відпустило чи ні» перевіряйте питанням, якого немає в кеші. Тільки тримайте в голові урок, здобутий на реальній платформі: проба «чи живий процес» і проба «чи здорові залежності» — різні ендпоінти з різними споживачами. Нам довелося заводити окремий полегшений probe, який свідомо оминає діагностику залежностей: health-check, що тягне зовнішні перевірки, оголошує сервіс «мертвим» щоразу, коли чхнула чужа система, — і оркестратор рестартить цілком здоровий процес. Живість — про процес; здоров'я залежностей — про діагностику. [Ведучому: після одужання провайдера плитка може ще ~30 с показувати degraded, поки не спливе breaker резервного елемента ланцюга, — це гранулярність breaker'ів, не баг; для кадру «зазеленіла» зачекати пів хвилини або зняти другим дублем.]</a:t>
+              <a:t/>
             </a:r>
             <a:endParaRPr lang="en-US" dirty="0"/>
           </a:p>
@@ -791,7 +791,7 @@
           <a:p>
             <a:r>
               <a:rPr lang="en-US" dirty="0"/>
-              <a:t>Цифра на плитці — це стан на зараз. Але тихі інциденти видають себе не станом, а рухом. Fallback_events дорівнює одиниці — подія, буває. Fallback росте щогодини — інцидент, що повзе: основна модель деградує, і ви поки що цього «не бачите», бо відповіді йдуть. Cache-hit повільно падає тиждень — хтось зламав ключ кешу правкою, або змінився профіль трафіку; обидва варіанти варті розслідування. Розподіл моделей поїхав у бік strong — або ескалацій справді більше, або роутер зламаний, і бюджет згорає вдвічі швидше. Саме тому питання з блока 04 — «що переселити з пам'яті в базу» — має відповідь: усе, за чим хочеться стежити в часі. Снапшот показує, що зараз; тренд показує, куди воно йде — а реагувати треба на «куди». Від тренду один крок до алерту, і в правильного алерту чотири обов'язкові частини: метрика, поріг, тривалість, адресат. Тривалість пропускають найчастіше: алерт на миттєве значення блимає на кожному сплеску, черговий звикає закривати його не читаючи — і пропускає справжній. Поріг каже «це погано», тривалість каже «це не випадковість». У нашому контурі алертів ще немає — але формула знадобиться вже наступного тижня, коли писатимете rollback-критерії: у них та сама анатомія. І для тренду не потрібен окремий інструмент — той самий лог із групуванням по днях: один запит, і у вас тижнева динаміка навантаження, грошей і помилок.</a:t>
+              <a:t/>
             </a:r>
             <a:endParaRPr lang="en-US" dirty="0"/>
           </a:p>
@@ -879,7 +879,7 @@
           <a:p>
             <a:r>
               <a:rPr lang="en-US" dirty="0"/>
-              <a:t>Плитки показують числа, але число саме по собі не каже, чи все гаразд: p95 1800 мілісекунд — це добре чи погано? Error rate 2% — привід прокинутися чи звичайний вівторок? Поки немає домовленості, кожен інцидент починається зі спору «а чи це взагалі інцидент». Термінологія проста і варта точності. SLI — показник, який ви міряєте: частка успішних відповідей, p95 latency. SLO — цільове значення, про яке ви домовилися: «99% звернень обслуговуються успішно», «p95 не перевищує 3 секунд». Ключове слово — домовилися: SLO не виводиться з техніки, він приходить із того, що потрібно користувачу і що ви готові обіцяти. І найкорисніша конструкція операційної практики — бюджет помилок. Якщо SLO 99%, то один відсоток невдач вам дозволено. Це не сором, а ресурс: за тиждень із 10 000 звернень бюджет — 100 невдач. Поки не витратили — можна котити зміни й ризикувати; витратили за три дні — решту тижня займаєтеся стабільністю. Замість вічної суперечки «швидко чи надійно» з'являється число, яке її закриває. SLO має бути на те, що відчуває користувач: «uptime 99.9%» — марна обіцянка, сервіс може бути живий і роздавати заглушки. Робочий SLI — «частка звернень зі змістовною відповіддю», і чесно визнаймо: ваш лог поки що цього не порахує — заглушка graceful degradation пише той самий 503, що й реальний збій. Потрібна ще одна колонка — ознака деградації; вона ж робить чесним error rate під інцидентом. Рівно той випадок «новий зріз = нова колонка». Обов'язкова доріжка тижня — ендпоінти й живі плитки; сформулювати один SLO і порахувати тижневий бюджет — окремий пункт опційної частини ДЗ тижня 5, хвилин п'ятнадцять. На останньому уроці ця цифра стане аргументом у KPI-розмові.</a:t>
+              <a:t/>
             </a:r>
             <a:endParaRPr lang="en-US" dirty="0"/>
           </a:p>
@@ -967,7 +967,7 @@
           <a:p>
             <a:r>
               <a:rPr lang="en-US" dirty="0"/>
-              <a:t>Метрики без алертів — це графіки, у які ніхто не дивиться в потрібний момент. Алерти без дисципліни — гірше: команда вчиться їх ігнорувати, і тоді не працює вся система спостережуваності. Три правила, які тримають це в порядку. Перше: алерт на симптом, а не на причину. «Частка успішних відповідей упала нижче SLO» — симптом, його варто побачити завжди. «Кількість 429 зросла» — причина: сама по собі вона може не мати наслідків для користувача, fallback відпрацював — і будити через неї людину нечесно. Друге: розділяйте «прокинутися» і «подивитися вранці». Прокидатися варто лише через те, що зараз шкодить користувачам і потребує людини; усе інше — черга завдань. Якщо ця межа не проведена явно, вона проведеться сама — через вигорання й ігнорування. Третє: кожен алерт має інструкцію. Спрацював — що робити першим? Той, хто прийшов на чергування вперше, мусить зрозуміти. Це і є runbook, до якого ми дійдемо на останньому уроці. Типова помилка — алерт на кожну помилку: у недетермінованій системі на чужій інфраструктурі окремі 5xx і таймаути — нормальний фон. Алерт має спрацьовувати на відхилення від норми, витримане в часі, — інакше канал з десятьма повідомленнями щодня, жодної реакції, і справжній інцидент проїде незауваженим. І практична деталь, яка ламає метрики найчастіше: мітки. User_id чи текст запиту в метриці — вибух комбінацій: сховище роздувається, дашборди не відкриваються. Мітки — невелика кількість заздалегідь відомих значень: модель, маршрут, категорія помилки. Усе різноманітне живе в лозі.</a:t>
+              <a:t/>
             </a:r>
             <a:endParaRPr lang="en-US" dirty="0"/>
           </a:p>
@@ -1055,7 +1055,7 @@
           <a:p>
             <a:r>
               <a:rPr lang="en-US" dirty="0"/>
-              <a:t>Це опційне поглиблення тижня — воно ж опційна частина ДЗ тижня 5. «Error rate 6%» — це початок питання, а не відповідь. За цими шістьма відсотками можуть ховатися зовсім різні історії: 429 від провайдера — треба знижувати темп або міняти ліміти; timeout інструмента — винна зовнішня система; відмова guardrail'а — це взагалі не помилка, а робота захисту; збій БД — ваша інфраструктура. Різні причини — різні дії — різні відповідальні. Мінімум у нас уже є: поле status у лозі розрізняє 429, 503 і timeout. Дорослий рівень — явна таксономія: provider_429, tool_timeout, guardrail_refusal, db_error — окремі лічильники, окремі тренди, а на проді — окремі алерти з різними адресатами. І корисна дисципліна при проєктуванні таксономії: категорія має визначати дію. Якщо дві категорії ведуть до однієї дії — зливайте їх; якщо в одній категорії дві різні дії — діліть. Таксономія заради таблички нікому не потрібна.</a:t>
+              <a:t/>
             </a:r>
             <a:endParaRPr lang="en-US" dirty="0"/>
           </a:p>
@@ -1143,7 +1143,7 @@
           <a:p>
             <a:r>
               <a:rPr lang="en-US" dirty="0"/>
-              <a:t>Сьогоднішня консоль стоїть на одному лог-рядку — і цього достатньо, поки одне звернення користувача це один виклик моделі. Але ми знаємо з уроку 4, що так буває тільки на старті: у дорослому контурі одне звернення розгортається в ретрай, fallback, tool-виклик і повторний виклик моделі з результатом. Питання «що сталося з цим запитом» перетворюється з «покажи рядок» на «покажи послідовність». Термінологія запозичена з класичної спостережуваності. Трейс — усе, що сталося в межах одного звернення. Спан — один крок усередині нього: виклик моделі, виклик інструмента, перевірка guardrail — зі своїми початком, тривалістю і статусом. Спани складаються в дерево: у кожного є батько, тому видно не лише «що було», а й «що з чого виросло». Мінімальна версія не потребує жодної нової системи: до request_id — він і є ідентифікатор трейсу — додати два поля: step і attempt. Одразу стають можливі питання, на які раніше відповіді не було: скільки кроків у середньому потребує одне звернення, які кроки найдовші, скільки викликів було марними — спроби, що не дійшли до користувача. І принцип, який варто закласти відразу: ідентифікатор народжується на вході, передається у все, що ви кличете, і присутній у кожному рядку лога, включно з невдалими спробами. Дописати його потім — це переписати всі логи, які вже накопичилися. На платформі, яку я супроводжую, найдорожчі години розслідувань витрачалися саме там, де ланцюжок ідентифікаторів обривався — фонова обробка створювала «новий» контекст замість продовження попереднього. Формально всі логи були на місці; фактично неможливо було сказати, що з чим пов'язане. Полагодилося не інструментом, а домовленістю: ідентифікатор передається завжди, і жоден крок не має права почати новий.</a:t>
+              <a:t/>
             </a:r>
             <a:endParaRPr lang="en-US" dirty="0"/>
           </a:p>
@@ -1231,7 +1231,7 @@
           <a:p>
             <a:r>
               <a:rPr lang="en-US" dirty="0"/>
-              <a:t>У нашому контурі відповідь приходить цілком, тому latency_ms однозначний. Щойно ви віддаєте токени потоком — а це перше, що просять продуктові команди, — метрики перестають бути однозначними, і краще знати про це заздалегідь, ніж переробляти лог. Перше: один час перетворюється на три. Час до першого токена — його й відчуває користувач; повний час генерації; і час до останнього байта. Мірити треба перший і третій; середній не означає нічого. Друге: помилка приїжджає посеред успіху. Стрім почався зі статусом 200, а обірвався на середині — з погляду HTTP усе гаразд, з погляду користувача відповідь зламана. У лозі потрібне окреме поле «стрім завершився нормально», інакше error rate брехатиме на вашу користь. Третє: кеш і guardrails ускладнюються. Кешувати можна лише повністю зібрану відповідь — а зібрати її треба на своєму боці. Вихідна перевірка або чекає кінця генерації, і тоді сенс стріму частково втрачається, або працює по частинах і мусить уміти обірвати вже початий потік. Практичний висновок для сьогодні один: поля latency_ms і status варто одразу мислити як «характеристику завершення відповіді», а не як «код HTTP». Тоді додати стрімінг буде розширенням лога, а не його переписуванням.</a:t>
+              <a:t/>
             </a:r>
             <a:endParaRPr lang="en-US" dirty="0"/>
           </a:p>
@@ -1319,7 +1319,7 @@
           <a:p>
             <a:r>
               <a:rPr lang="en-US" dirty="0"/>
-              <a:t>Спостережуваність спокушає логувати все: повний промпт, повну відповідь, увесь контекст — «раптом знадобиться». І це найпростіший спосіб перетворити лог на сховище персональних даних, до якого має доступ вся команда, яке потрапляє в бекапи й живе роками. Три правила. Перше: не пишіть повні тіла запитів і відповідей за замовчуванням. Ознак зазвичай достатньо: довжина, кількість токенів, finish_reason, чи спрацював guardrail, які інструменти викликалися — це відповідає на 90% операційних питань. Друге: якщо тіла таки потрібні для розбору якості — робіть це вибірково і з терміном життя: невеликий семпл, окреме сховище, автоматичне видалення. Саме такий семпл, до речі, стає золотим набором для eval'ів — наступний урок; тобто в цього рішення є друга, корисна причина. Третє: ніколи не логуйте секрети й ключі — і пам'ятайте, що вони потрапляють у логи не через Console.WriteLine з ключем, а через дампи запитів «для дебагу», трейси помилок і повні заголовки. І формулювання, яке варто мати в голові щоразу, коли додаєте нове поле в лог: усе, що ви залогували, ви тепер зобов'язані захищати. Лог — це не блокнот, це база даних із тим самим режимом доступу, що й інші ваші дані.</a:t>
+              <a:t/>
             </a:r>
             <a:endParaRPr lang="en-US" dirty="0"/>
           </a:p>
@@ -1407,7 +1407,7 @@
           <a:p>
             <a:r>
               <a:rPr lang="en-US" dirty="0"/>
-              <a:t>Помітили архітектурний хід? Спостережуваність у нас — розділ у самому продукті: ендпоінти сервісу поверх власного лога, консоль як вітрина. Жодного окремого Prometheus, жодної Grafana в обов'язковій доріжці. Це свідомо, і не лише з навчальних міркувань. Індустріальний стек метрик — чудова річ, коли у вас багато сервісів і команда, яка ним володіє. Але він не безкоштовний: інфраструктура, конфіги, ще одна система, яка може зламатись. А головне — він не додає даних: усе, що покаже дашборд, має спершу з'явитись у ваших логах і лічильниках. Налагодьте джерело — а вітрин може бути скільки завгодно: наша консоль сьогодні, /metrics для зовнішніх дашбордів — опційна тема фінального тижня. Ще одна дрібниця з практики, яка вирішує, чи взагалі буде що дивитися. На платформі, яку я супроводжую, нам довелося окремим рішенням підняти рівень логів життєвого циклу — «почав узгодження стану», «завершив», «зупинив останнього агента» — з debug до info. Причина проста: у проді debug вимкнений, тому найцінніші події існували в коді, але не існували в реальності — і кожне розслідування починалося з «а давайте задеплоїмо збірку з увімкненим debug». Ключові переходи стану — це не діагностика для розробника, це операційні дані; вони мусять бути видимі за замовчуванням. І лайфхак на щодень: звірка чесності даних за десять секунд. Цифра на плитці Requests мусить збігатися з SELECT count(*) за сьогодні. Якщо консоль показує одне, а SQL інше — у вас дві правди, і скоро ви перестанете вірити обом.</a:t>
+              <a:t/>
             </a:r>
             <a:endParaRPr lang="en-US" dirty="0"/>
           </a:p>
@@ -1495,7 +1495,7 @@
           <a:p>
             <a:r>
               <a:rPr lang="en-US" dirty="0"/>
-              <a:t>Домовимось про результат уроку — конкретними діями. Після сьогоднішнього заняття ви зможете: порахувати count, p95 і error rate одним SQL-запитом по власному логу — жодної магії, штатна функція Postgres; оживити GET /observability і GET /providers так, щоб усі шість плиток консолі показували числа; пояснити, чому алерти і SLO ставлять на перцентилі, а не на середнє, — і чому перцентилі не можна усереднювати; відтворити тихий інцидент — fallback і error rate ростуть, а користувач не бачить жодного 500; сформулювати SLO для своєї системи і порахувати тижневий бюджет помилок; і назвати, що саме додати в лог, коли завтра спитають «а покажи по тенантах» — нову колонку, а не нову систему. Кожен пункт ви перевірите руками — у лабораторній або в ДЗ тижня.</a:t>
+              <a:t/>
             </a:r>
             <a:endParaRPr lang="en-US" dirty="0"/>
           </a:p>
@@ -1583,7 +1583,7 @@
           <a:p>
             <a:r>
               <a:rPr lang="en-US" dirty="0"/>
-              <a:t>Перш ніж перейти до екрана — що саме ви зараз побачите і навіщо. Послідовність така: спершу агрегати руками в psql — count, p95, error rate одним запитом, щоб побачити, що жодної магії немає. Потім GET /observability — ті самі цифри плюс cache-hit і fallback з лічильників, уже як ендпоінт. Далі консоль: усі шість плиток живі, з числами. І фінал — «детектив»: серія __fail_503, fallback і error rate ростуть, а користувач не бачить жодного 500 — тихий інцидент, який видно тільки в метриках. Навіщо це все: побачити, що моніторинг LLM-системи — це SQL по власному логу плюс кілька лічильників, а не окрема система; і навчитися впізнавати інцидент, якого не видно в жодному uptime. [Ведучому: ДО запису прогнати пре-рол трафіку — після down -v база порожня: 3–4 звичайні питання, 2 повтори того самого (кеш), 1–2 __fail_503, плюс 1–2 ескалації («поверніть гроші, терміново») — інакше плитка вартості покаже $0.0000: уся вартість на mock сидить у mock-strong, а today_usd округлюється до 4 знаків. На камері плитки вже живі — докидається лише серія збоїв для «детектива». Термінал і psql — збільшений шрифт.]</a:t>
+              <a:t/>
             </a:r>
             <a:endParaRPr lang="en-US" dirty="0"/>
           </a:p>
@@ -1671,7 +1671,7 @@
           <a:p>
             <a:r>
               <a:rPr lang="en-US" dirty="0"/>
-              <a:t>Крок перший: SQL руками. У psql написати запит: count, percentile_cont(0.95) по latency, частка не-200 за сьогодні. Спершу руками — щоб побачити, що жодної магії немає. Повна команда підключення: docker compose exec postgres psql -U llmops -d llmops — так само, як шукали свій перший запит на уроці 1. Крок другий: загорнути в ендпоінт. GET /observability — агрегати з БД плюс cache-hit % і fallback з лічильників сервісу. GET /providers — статус провайдерів: у штатному режимі «ok»; «degraded» після N поспіль збоїв fallback-ланцюга — core, або при відкритому circuit breaker — опційна доріжка; логіку розбирали у блоці 05. Крок третій: оживити консоль. Згенерувати трафік: звичайні питання, повтор того самого — кеш, __fail_503 — fallback. Усі шість плиток — з числами. І пройти по кожній: на яке операційне питання вона відповідає? Крок четвертий: детектив. Симулювати тиху деградацію: серія __fail_503 — fallback і error rate ростуть, без жодного 500 користувачу: урок 7 відпрацював. Проговоріть: як виглядав би цей самий інцидент на дашборді, де є тільки uptime? І опційний п'ятий: таксономія — розділити помилки за причинами: 429, timeout, guardrail, БД — і завести окремі лічильники. Це заготовка під опційну частину ДЗ тижня 5.</a:t>
+              <a:t/>
             </a:r>
             <a:endParaRPr lang="en-US" dirty="0"/>
           </a:p>
@@ -1759,7 +1759,7 @@
           <a:p>
             <a:r>
               <a:rPr lang="en-US" dirty="0"/>
-              <a:t>Зафіксуємо, що ми щойно побачили — і що це доводить. Перше: моніторинг LLM-системи — це SQL по власному логу плюс кілька лічильників. Жодної нової системи, жодної магії: percentile_cont — штатна функція Postgres, а таблиця requests пишеться з першого уроку. Лог, закладений заздалегідь, сьогодні окупився повністю. Друге: усі шість плиток живі, і кожна відповідає на конкретне операційне питання — навантаження, гроші, хвіст латентності, частка збоїв, окупність кешу, життя на плані Б. Це і є момент, коли механізми чотирьох тижнів стають системою, якою керує оператор. Третє — найважливіше: ви бачили тихий інцидент. Серія збоїв, fallback і error rate ростуть — а користувач не отримав жодного 500, бо урок 7 відпрацював. На дашборді з самим лише uptime цього інциденту не існує. Саме заради цієї картинки й будувався весь сьогоднішній шар: інцидент видно в метриках, а не в скаргах.</a:t>
+              <a:t/>
             </a:r>
             <a:endParaRPr lang="en-US" dirty="0"/>
           </a:p>
@@ -1847,7 +1847,7 @@
           <a:p>
             <a:r>
               <a:rPr lang="en-US" dirty="0"/>
-              <a:t>Перш ніж розійтися — чесна перевірка обов'язкової доріжки, без оцінок. Чотири пункти. Перший: всі плитки консолі показують числа — і ви знаєте, звідки береться кожне: що з бази, що з лічильників у пам'яті, і чим ці джерела відрізняються. Другий: можете пояснити, чому p95, а не середнє. Якщо відповідь починається з «дев'ять запитів по триста мілісекунд і один на вісім секунд» — усе засвоєно. Третій: ви бачили інцидент — fallback росте, error rate росте — без жодної помилки назовні. Це головна картинка уроку: тихі інциденти видно тільки у власних метриках. І четвертий: розумієте, що додати в лог, якщо завтра спитають «а по тенантах?». Відповідь коротка — колонку, а не систему; і додати її треба сьогодні, бо колонка через місяць — це місяць даних, яких не буде. Де завагалися — туди і повертайтеся в матеріалі уроку. Питання — у канал потоку або на Q&amp;A.</a:t>
+              <a:t/>
             </a:r>
             <a:endParaRPr lang="en-US" dirty="0"/>
           </a:p>
@@ -1935,7 +1935,7 @@
           <a:p>
             <a:r>
               <a:rPr lang="en-US" dirty="0"/>
-              <a:t>П'ять способів звести нанівець сьогоднішній шар — усі перевірені чужими граблями. Моніторити лише uptime і latency: «у нас все зелене» — поки скарги не стануть четвертим виміром замість якості. Середні замість перцентилів: середнє ховає саме тих користувачів, які пишуть скарги, — ми бачили це на цифрах у блоці 03. Дашборд заради дашборда: плитка без операційного питання — шум, який привчає не дивитися; тест «сформулюй питання вголос» безжальний, застосовуйте його. Дивитись метрики лише під час інцидентів: тихі деградації видно тільки тому, хто бачив «норму» — тренд читається лише проти фону звички. І окрема система моніторингу до того, як налагоджені власні логи: вітрина без джерела показує порожнечу — красиво і безкорисно. Спершу лог і лічильники, потім будь-які дашборди.</a:t>
+              <a:t/>
             </a:r>
             <a:endParaRPr lang="en-US" dirty="0"/>
           </a:p>
@@ -2023,7 +2023,7 @@
           <a:p>
             <a:r>
               <a:rPr lang="en-US" dirty="0"/>
-              <a:t>Обов'язково — до наступного уроку, без здачі. Перше: закріпити лабу — усі шість плиток живі й звірені з SQL; це та сама звірка, яку варто робити раз на тиждень і на своїй робочій системі. Друге: відтворити «детектива» — серія __fail_503, після якої інцидент видно в метриках, а користувач не бачить жодної 500. Третє, і воно найкорисніше: сформулювати по одному операційному питанню на кожну плитку — своїми словами. Плитка, під яку не знайшлося питання, — прикраса, і її треба або переробити, або прибрати. Опційно: таксономія помилок — окремі лічильники за причинами: 429 провайдера, timeout інструмента, відмова guardrail. Це опційний блок сьогоднішнього уроку і опційна частина ДЗ тижня. І про ДЗ тижня: воно здається після наступного уроку. ДЗ тижня 5 об'єднує спостережуваність і evals — сьогоднішні ендпоінти вже у вас в руках, після наступного уроку додадуться власні кейси в golden dataset, і тиждень здається одним PR. Критерії приймання будуть у файлі ДЗ після наступного уроку.</a:t>
+              <a:t/>
             </a:r>
             <a:endParaRPr lang="en-US" dirty="0"/>
           </a:p>
@@ -2111,7 +2111,7 @@
           <a:p>
             <a:r>
               <a:rPr lang="en-US" dirty="0"/>
-              <a:t>Підсумуємо. Найдорожчі інциденти LLM-систем не дають жодної помилки: uptime зелений, п'ятірок немає, а система тихо відповідає гірше, дорожче або не те. Саме тому чотири виміри — доступність, latency, вартість і якість — і саме тому третій та четвертий не видно жодному звичайному моніторингу. Весь моніторинг ядра при цьому — це SQL по власному лозі плюс кілька лічильників у пам'яті: percentile_cont — штатна функція бази, а не магія, і жодної нової системи сьогодні не з'явилося. Дивимося на p95, а не на середнє: скарги живуть у хвості розподілу, а середнє їх згладжує — і пам'ятайте, що перцентилі не усереднюються, тому p95 за тиждень не рахується як середнє денних. Плитка існує, лише якщо відповідає на питання, яке хтось справді ставить; решта — графіки, у які перестають дивитися. А SLO ставиться на те, що відчуває користувач, і має бюджет помилок — інакше «скільки це нормально» кожен вирішує сам, і зазвичай уночі. Наступний урок дає якості число. Ви бачите, що система робить, але «відповіді стали гіршими» не покаже жодна з шести плиток: далі — golden dataset, grader, поріг і exit code, той самий, що на тижні 6 стане гейтом у CI. До зустрічі.</a:t>
+              <a:t/>
             </a:r>
             <a:endParaRPr lang="en-US" dirty="0"/>
           </a:p>
@@ -2199,7 +2199,7 @@
           <a:p>
             <a:r>
               <a:rPr lang="en-US" dirty="0"/>
-              <a:t>Маршрут такий. Перша третина — проблема і фундамент: тихі інциденти й чотири виміри спостережуваності; лог-рядок з уроку 1, який виявляється трейсом, метрикою і аудитом одночасно; і чому p95, а не середнє. Друга третина — розтин сьогоднішньої роботи: SQL-агрегати і ендпоінт /observability з двома джерелами, /providers і шість плиток консолі, тренд проти снапшота. Далі — операційна рамка: SLI, SLO і бюджет помилок, дисципліна алертів; опційний блок про таксономію помилок; трейси і спани на виріст — разом із тим, чого в лозі бути не має. І архітектурне питання: чому спостережуваність у нас — розділ у продукті, а не окремий індустріальний стек. Потім лабораторна на п'ять кроків — від psql до «детектива», антипатерни тижня і домашнє завдання. [Ведучому: блоки 01–03 — без коду; на блоці 03 корисно проговорити приклад з дев'ятьма швидкими запитами вголос, цифри тримають увагу краще за означення.]</a:t>
+              <a:t/>
             </a:r>
             <a:endParaRPr lang="en-US" dirty="0"/>
           </a:p>
@@ -2287,7 +2287,7 @@
           <a:p>
             <a:r>
               <a:rPr lang="en-US" dirty="0"/>
-              <a:t>Домовимось про шість слів. p95 — перцентиль: час, у який вкладаються дев'яносто п'ять відсотків запитів; саме він показує досвід найневдаліших користувачів. Error rate — частка запитів, що завершилися не двохсоткою. Cache-hit відсоток і fallback — наші власні лічильники з уроків 5 і 7. SLI — показник, який ви міряєте; SLO — цільове значення, про яке домовилися; а бюджет помилок — скільки невдач ви можете собі дозволити в межах цього SLO. Трейс — відновлений шлях одного запиту за його ідентифікатором. І тихий інцидент — збій, який не дає жодної помилки користувачу: система відповідає, метрики зелені, а всередині щось поїхало. Саме заради нього все це будується.</a:t>
+              <a:t/>
             </a:r>
             <a:endParaRPr lang="en-US" dirty="0"/>
           </a:p>
@@ -2375,7 +2375,7 @@
           <a:p>
             <a:r>
               <a:rPr lang="en-US" dirty="0"/>
-              <a:t>Класичний моніторинг відповідає на питання «сервіс живий?». Для LLM-системи це питання майже нічого не варте: сервіс може бути живий на всі сто — і при цьому відповідати гірше, коштувати дорожче і дедалі частіше падати у fallback. Жоден health-check цього не покаже. Найнеприємніші інциденти LLM-систем — тихі. Вони не дають 5xx. Якість просіла після зміни промпта — 200. Вартість виросла втричі, бо хтось зламав ключ кешу, — 200. Трафік поповз на слабшу модель через fallback — 200, 200, 200. Той голосовий агент з уроку 7, що замовкав посеред розмови, теж був «зеленим» за всіма стандартними метриками — його знайшли по слідах у поведінці, а не по алерту. Звідси головна теза уроку: спостережуваність LLM-системи — це чотири виміри разом. Доступність і latency знайомі кожному, хто працював з веб-сервісами. Вартість і якість — те, чим LLMOps відрізняється від просто Ops. Дивитися тільки на перші два — значить моніторити чужу половину системи. І навіщо цей шар саме зараз: усі механізми чотирьох тижнів продукують цифри — роутер розподіл, облік вартість, кеш hit ratio, fallback лічильник переходів. Сьогодні вони збираються в одному місці. Курс переходить від «будуємо механізми» до «керуємо системою».</a:t>
+              <a:t/>
             </a:r>
             <a:endParaRPr lang="en-US" dirty="0"/>
           </a:p>
@@ -2463,7 +2463,7 @@
           <a:p>
             <a:r>
               <a:rPr lang="en-US" dirty="0"/>
-              <a:t>Пам'ятаєте обіцянку з уроку 1 — «лог з'являється першим, усе інше — надбудови над ним»? Сьогодні день розплати, у хорошому сенсі. Таблиця requests, яку ви ведете з першої лаби, виявляється одночасно трьома речами. Трейсом: по request_id відновлюється шлях конкретного запиту — яка модель, яка версія промпта, скільки тривало. Метрикою: p95 — це перцентиль по latency_ms, error rate — частка не-200, вартість дня — сума cost_usd. І аудитом: хто, коли, якою версією, з яким результатом. Ніякої магії, ніякого окремого «стека спостережуваності» для ядра: SQL по таблиці, яку ви й так пишете. Уявіть на секунду, що на першому тижні ми полінувалися: сьогодні довелося б спершу два тижні збирати дані, перш ніж побачити першу цифру. Лог, закладений заздалегідь, — це різниця між «подивімось» і «почекаймо місяць».</a:t>
+              <a:t/>
             </a:r>
             <a:endParaRPr lang="en-US" dirty="0"/>
           </a:p>
@@ -2551,7 +2551,7 @@
           <a:p>
             <a:r>
               <a:rPr lang="en-US" dirty="0"/>
-              <a:t>З «лог — джерело всього» випливає відповідь на питання «як розширювати спостережуваність». Не новою системою — новою колонкою. Захочете зрізи по тенантах — додайте tenant_id у лог-рядок у момент запиту; по фічах — feature; по операторах approvals — хто підтвердив. Кожна колонка, записана в момент події, — це майбутній GROUP BY, який коштує нуль. А колонка, про яку згадали через місяць, — це місяць даних, яких уже не буде. Єдине застереження — кардинальність зрізів. Зріз корисний, коли груп у ньому можна охопити оком: моделі — одиниці, версії промпта — десятки, тенанти — сотні, і це вже на межі. GROUP BY по унікальному ідентифікатору користувача дасть мільйон рядків, у яких не видно нічого. Правило: записуйте в лог детально — конкретний user_id потрібен для трейсів і аудиту, — а агрегуйте по вимірах з осяжною кількістю значень. Колонка і зріз — різні рішення: перше про можливість, друге про читабельність.</a:t>
+              <a:t/>
             </a:r>
             <a:endParaRPr lang="en-US" dirty="0"/>
           </a:p>
@@ -2639,7 +2639,7 @@
           <a:p>
             <a:r>
               <a:rPr lang="en-US" dirty="0"/>
-              <a:t>Одна метрика заслуговує окремої зупинки. Середня latency — цифра, що бреше в очі: дев'ять запитів по 300 мілісекунд і один на 8 секунд дають середнє близько 1.1 секунди — «прийнятно». А тепер згадайте, хто з цих десяти користувачів напише в підтримку. Правильно — десятий. І його досвід у середньому розчинився. Перцентилі дивляться на розподіл з боку найневдаліших запитів: p95 — це «95 відсотків запитів швидші за цю цифру», чесна межа того, що бачить помітна частина користувачів; p99 — те саме для найгіршого відсотка. Для LLM-систем це особливо важливо: latency генерації нестабільна за природою — довжина відповіді, черги провайдера, ретраї, — розподіл має довгий хвіст, і саме у хвості живуть скарги. Типова помилка — алерт на середню latency: вона згладить і сплеск таймаутів, і деградацію провайдера; ви дізнаєтесь про проблему зі скарг, а алерт так і не спрацює. І математична пастка: перцентилі не можна усереднювати. «Середнє з p95 за кожну годину» — це не p95 за день. Поки лог зберігає кожен запит, будь-який перцентиль за будь-яке вікно — один чесний запит до бази. Згадка на виріст: щойно з'явиться streaming, до p95 повної відповіді додасться time-to-first-token — наш latency_ms цієї різниці не бачить; детальніше в блоці 09.</a:t>
+              <a:t/>
             </a:r>
             <a:endParaRPr lang="en-US" dirty="0"/>
           </a:p>
@@ -2727,7 +2727,7 @@
           <a:p>
             <a:r>
               <a:rPr lang="en-US" dirty="0"/>
-              <a:t>Серце сьогоднішньої роботи — один SQL-запит і один ендпоінт. Спершу агрегати з бази: count, percentile_cont нуль-дев'яносто-п'ять по latency_ms і частка не-200 — три цифри одним проходом. percentile_cont — штатна функція Postgres; ваша «система моніторингу» — це буквально один рядок SQL. COALESCE тут не косметика: на порожній таблиці агрегати повертають NULL, читання в типізовану змінну падає — і свіжий стек після down -v віддає 500 ще до першого запиту. Далі ендпоінт збирає гібрид, і зверніть увагу на два джерела. Requests, p95 і error rate — з бази: переживають рестарт, історичні. Cache-hit і fallback — з лічильників у пам'яті: швидкі, але обнуляються з рестартом. А «рестарт» у робочому циклі трапляється частіше, ніж здається: кожен docker compose up --build -d service — тобто кожна правка коду — обнуляє лічильники. Після ребілду плитки покажуть requests з БД і нульові cache-hit/fallback — це не баг, а ціна компромісу. Хто хоче стежити за цими цифрами в часі — переселяє їх у базу, і тоді звірка вітрини з джерелом працює для всіх плиток. Питання на подумати: які з цих цифр ви б переселили першими і чому? Підказка: ті, за якими захочеться дивитися тренд, — блок 06.</a:t>
+              <a:t/>
             </a:r>
             <a:endParaRPr lang="en-US" dirty="0"/>
           </a:p>
@@ -5512,7 +5512,7 @@
       </p:graphicFrame>
       <p:sp>
         <p:nvSpPr>
-          <p:cNvPr id="9" name="Shape 4"/>
+          <p:cNvPr id="8" name="Shape 4"/>
           <p:cNvSpPr/>
           <p:nvPr/>
         </p:nvSpPr>
@@ -5534,7 +5534,7 @@
       </p:sp>
       <p:sp>
         <p:nvSpPr>
-          <p:cNvPr id="10" name="Text 5"/>
+          <p:cNvPr id="9" name="Text 5"/>
           <p:cNvSpPr/>
           <p:nvPr/>
         </p:nvSpPr>
@@ -5573,7 +5573,7 @@
       </p:sp>
       <p:sp>
         <p:nvSpPr>
-          <p:cNvPr id="11" name="Text 6"/>
+          <p:cNvPr id="10" name="Text 6"/>
           <p:cNvSpPr/>
           <p:nvPr/>
         </p:nvSpPr>
@@ -5858,7 +5858,7 @@
       </p:pic>
       <p:sp>
         <p:nvSpPr>
-          <p:cNvPr id="8" name="Shape 4"/>
+          <p:cNvPr id="7" name="Shape 4"/>
           <p:cNvSpPr/>
           <p:nvPr/>
         </p:nvSpPr>
@@ -5883,7 +5883,7 @@
       </p:sp>
       <p:sp>
         <p:nvSpPr>
-          <p:cNvPr id="9" name="Text 5"/>
+          <p:cNvPr id="8" name="Text 5"/>
           <p:cNvSpPr/>
           <p:nvPr/>
         </p:nvSpPr>
@@ -5922,7 +5922,7 @@
       </p:sp>
       <p:sp>
         <p:nvSpPr>
-          <p:cNvPr id="10" name="Text 6"/>
+          <p:cNvPr id="9" name="Text 6"/>
           <p:cNvSpPr/>
           <p:nvPr/>
         </p:nvSpPr>
@@ -5961,7 +5961,7 @@
       </p:sp>
       <p:sp>
         <p:nvSpPr>
-          <p:cNvPr id="11" name="Shape 7"/>
+          <p:cNvPr id="10" name="Shape 7"/>
           <p:cNvSpPr/>
           <p:nvPr/>
         </p:nvSpPr>
@@ -5984,7 +5984,7 @@
       </p:sp>
       <p:sp>
         <p:nvSpPr>
-          <p:cNvPr id="12" name="Shape 8"/>
+          <p:cNvPr id="11" name="Shape 8"/>
           <p:cNvSpPr/>
           <p:nvPr/>
         </p:nvSpPr>
@@ -6004,7 +6004,7 @@
       </p:sp>
       <p:sp>
         <p:nvSpPr>
-          <p:cNvPr id="13" name="Text 9"/>
+          <p:cNvPr id="12" name="Text 9"/>
           <p:cNvSpPr/>
           <p:nvPr/>
         </p:nvSpPr>
@@ -6043,7 +6043,7 @@
       </p:sp>
       <p:sp>
         <p:nvSpPr>
-          <p:cNvPr id="14" name="Shape 10"/>
+          <p:cNvPr id="13" name="Shape 10"/>
           <p:cNvSpPr/>
           <p:nvPr/>
         </p:nvSpPr>
@@ -6068,7 +6068,7 @@
       </p:sp>
       <p:sp>
         <p:nvSpPr>
-          <p:cNvPr id="15" name="Text 11"/>
+          <p:cNvPr id="14" name="Text 11"/>
           <p:cNvSpPr/>
           <p:nvPr/>
         </p:nvSpPr>
@@ -6107,7 +6107,7 @@
       </p:sp>
       <p:sp>
         <p:nvSpPr>
-          <p:cNvPr id="16" name="Text 12"/>
+          <p:cNvPr id="15" name="Text 12"/>
           <p:cNvSpPr/>
           <p:nvPr/>
         </p:nvSpPr>
@@ -6146,7 +6146,7 @@
       </p:sp>
       <p:sp>
         <p:nvSpPr>
-          <p:cNvPr id="17" name="Shape 13"/>
+          <p:cNvPr id="16" name="Shape 13"/>
           <p:cNvSpPr/>
           <p:nvPr/>
         </p:nvSpPr>
@@ -6168,7 +6168,7 @@
       </p:sp>
       <p:sp>
         <p:nvSpPr>
-          <p:cNvPr id="18" name="Text 14"/>
+          <p:cNvPr id="17" name="Text 14"/>
           <p:cNvSpPr/>
           <p:nvPr/>
         </p:nvSpPr>
@@ -6207,7 +6207,7 @@
       </p:sp>
       <p:sp>
         <p:nvSpPr>
-          <p:cNvPr id="19" name="Text 15"/>
+          <p:cNvPr id="18" name="Text 15"/>
           <p:cNvSpPr/>
           <p:nvPr/>
         </p:nvSpPr>
@@ -6249,7 +6249,7 @@
       </p:sp>
       <p:sp>
         <p:nvSpPr>
-          <p:cNvPr id="20" name="Shape 16"/>
+          <p:cNvPr id="19" name="Shape 16"/>
           <p:cNvSpPr/>
           <p:nvPr/>
         </p:nvSpPr>
@@ -6271,7 +6271,7 @@
       </p:sp>
       <p:sp>
         <p:nvSpPr>
-          <p:cNvPr id="21" name="Text 17"/>
+          <p:cNvPr id="20" name="Text 17"/>
           <p:cNvSpPr/>
           <p:nvPr/>
         </p:nvSpPr>
@@ -6310,7 +6310,7 @@
       </p:sp>
       <p:sp>
         <p:nvSpPr>
-          <p:cNvPr id="22" name="Text 18"/>
+          <p:cNvPr id="21" name="Text 18"/>
           <p:cNvSpPr/>
           <p:nvPr/>
         </p:nvSpPr>
@@ -6352,7 +6352,7 @@
       </p:sp>
       <p:sp>
         <p:nvSpPr>
-          <p:cNvPr id="23" name="Shape 19"/>
+          <p:cNvPr id="22" name="Shape 19"/>
           <p:cNvSpPr/>
           <p:nvPr/>
         </p:nvSpPr>
@@ -6379,7 +6379,7 @@
       </p:sp>
       <p:sp>
         <p:nvSpPr>
-          <p:cNvPr id="24" name="Text 20"/>
+          <p:cNvPr id="23" name="Text 20"/>
           <p:cNvSpPr/>
           <p:nvPr/>
         </p:nvSpPr>
@@ -6664,7 +6664,7 @@
       </p:pic>
       <p:sp>
         <p:nvSpPr>
-          <p:cNvPr id="8" name="Shape 4"/>
+          <p:cNvPr id="7" name="Shape 4"/>
           <p:cNvSpPr/>
           <p:nvPr/>
         </p:nvSpPr>
@@ -6686,7 +6686,7 @@
       </p:sp>
       <p:sp>
         <p:nvSpPr>
-          <p:cNvPr id="9" name="Shape 5"/>
+          <p:cNvPr id="8" name="Shape 5"/>
           <p:cNvSpPr/>
           <p:nvPr/>
         </p:nvSpPr>
@@ -6706,7 +6706,7 @@
       </p:sp>
       <p:sp>
         <p:nvSpPr>
-          <p:cNvPr id="10" name="Text 6"/>
+          <p:cNvPr id="9" name="Text 6"/>
           <p:cNvSpPr/>
           <p:nvPr/>
         </p:nvSpPr>
@@ -6745,7 +6745,7 @@
       </p:sp>
       <p:sp>
         <p:nvSpPr>
-          <p:cNvPr id="11" name="Text 7"/>
+          <p:cNvPr id="10" name="Text 7"/>
           <p:cNvSpPr/>
           <p:nvPr/>
         </p:nvSpPr>
@@ -6784,7 +6784,7 @@
       </p:sp>
       <p:sp>
         <p:nvSpPr>
-          <p:cNvPr id="12" name="Text 8"/>
+          <p:cNvPr id="11" name="Text 8"/>
           <p:cNvSpPr/>
           <p:nvPr/>
         </p:nvSpPr>
@@ -6826,7 +6826,7 @@
       </p:sp>
       <p:sp>
         <p:nvSpPr>
-          <p:cNvPr id="13" name="Shape 9"/>
+          <p:cNvPr id="12" name="Shape 9"/>
           <p:cNvSpPr/>
           <p:nvPr/>
         </p:nvSpPr>
@@ -6848,7 +6848,7 @@
       </p:sp>
       <p:sp>
         <p:nvSpPr>
-          <p:cNvPr id="14" name="Shape 10"/>
+          <p:cNvPr id="13" name="Shape 10"/>
           <p:cNvSpPr/>
           <p:nvPr/>
         </p:nvSpPr>
@@ -6868,7 +6868,7 @@
       </p:sp>
       <p:sp>
         <p:nvSpPr>
-          <p:cNvPr id="15" name="Text 11"/>
+          <p:cNvPr id="14" name="Text 11"/>
           <p:cNvSpPr/>
           <p:nvPr/>
         </p:nvSpPr>
@@ -6907,7 +6907,7 @@
       </p:sp>
       <p:sp>
         <p:nvSpPr>
-          <p:cNvPr id="16" name="Text 12"/>
+          <p:cNvPr id="15" name="Text 12"/>
           <p:cNvSpPr/>
           <p:nvPr/>
         </p:nvSpPr>
@@ -6946,7 +6946,7 @@
       </p:sp>
       <p:sp>
         <p:nvSpPr>
-          <p:cNvPr id="17" name="Text 13"/>
+          <p:cNvPr id="16" name="Text 13"/>
           <p:cNvSpPr/>
           <p:nvPr/>
         </p:nvSpPr>
@@ -6988,7 +6988,7 @@
       </p:sp>
       <p:sp>
         <p:nvSpPr>
-          <p:cNvPr id="18" name="Shape 14"/>
+          <p:cNvPr id="17" name="Shape 14"/>
           <p:cNvSpPr/>
           <p:nvPr/>
         </p:nvSpPr>
@@ -7010,7 +7010,7 @@
       </p:sp>
       <p:sp>
         <p:nvSpPr>
-          <p:cNvPr id="19" name="Shape 15"/>
+          <p:cNvPr id="18" name="Shape 15"/>
           <p:cNvSpPr/>
           <p:nvPr/>
         </p:nvSpPr>
@@ -7030,7 +7030,7 @@
       </p:sp>
       <p:sp>
         <p:nvSpPr>
-          <p:cNvPr id="20" name="Text 16"/>
+          <p:cNvPr id="19" name="Text 16"/>
           <p:cNvSpPr/>
           <p:nvPr/>
         </p:nvSpPr>
@@ -7069,7 +7069,7 @@
       </p:sp>
       <p:sp>
         <p:nvSpPr>
-          <p:cNvPr id="21" name="Text 17"/>
+          <p:cNvPr id="20" name="Text 17"/>
           <p:cNvSpPr/>
           <p:nvPr/>
         </p:nvSpPr>
@@ -7108,7 +7108,7 @@
       </p:sp>
       <p:sp>
         <p:nvSpPr>
-          <p:cNvPr id="22" name="Text 18"/>
+          <p:cNvPr id="21" name="Text 18"/>
           <p:cNvSpPr/>
           <p:nvPr/>
         </p:nvSpPr>
@@ -7150,7 +7150,7 @@
       </p:sp>
       <p:sp>
         <p:nvSpPr>
-          <p:cNvPr id="23" name="Shape 19"/>
+          <p:cNvPr id="22" name="Shape 19"/>
           <p:cNvSpPr/>
           <p:nvPr/>
         </p:nvSpPr>
@@ -7172,7 +7172,7 @@
       </p:sp>
       <p:sp>
         <p:nvSpPr>
-          <p:cNvPr id="24" name="Text 20"/>
+          <p:cNvPr id="23" name="Text 20"/>
           <p:cNvSpPr/>
           <p:nvPr/>
         </p:nvSpPr>
@@ -7211,7 +7211,7 @@
       </p:sp>
       <p:sp>
         <p:nvSpPr>
-          <p:cNvPr id="25" name="Text 21"/>
+          <p:cNvPr id="24" name="Text 21"/>
           <p:cNvSpPr/>
           <p:nvPr/>
         </p:nvSpPr>
@@ -7253,7 +7253,7 @@
       </p:sp>
       <p:sp>
         <p:nvSpPr>
-          <p:cNvPr id="26" name="Shape 22"/>
+          <p:cNvPr id="25" name="Shape 22"/>
           <p:cNvSpPr/>
           <p:nvPr/>
         </p:nvSpPr>
@@ -7280,7 +7280,7 @@
       </p:sp>
       <p:sp>
         <p:nvSpPr>
-          <p:cNvPr id="27" name="Text 23"/>
+          <p:cNvPr id="26" name="Text 23"/>
           <p:cNvSpPr/>
           <p:nvPr/>
         </p:nvSpPr>
@@ -7565,7 +7565,7 @@
       </p:pic>
       <p:sp>
         <p:nvSpPr>
-          <p:cNvPr id="8" name="Shape 4"/>
+          <p:cNvPr id="7" name="Shape 4"/>
           <p:cNvSpPr/>
           <p:nvPr/>
         </p:nvSpPr>
@@ -7592,7 +7592,7 @@
       </p:sp>
       <p:sp>
         <p:nvSpPr>
-          <p:cNvPr id="9" name="Text 5"/>
+          <p:cNvPr id="8" name="Text 5"/>
           <p:cNvSpPr/>
           <p:nvPr/>
         </p:nvSpPr>
@@ -7631,7 +7631,7 @@
       </p:sp>
       <p:sp>
         <p:nvSpPr>
-          <p:cNvPr id="10" name="Text 6"/>
+          <p:cNvPr id="9" name="Text 6"/>
           <p:cNvSpPr/>
           <p:nvPr/>
         </p:nvSpPr>
@@ -7670,7 +7670,7 @@
       </p:sp>
       <p:sp>
         <p:nvSpPr>
-          <p:cNvPr id="11" name="Shape 7"/>
+          <p:cNvPr id="10" name="Shape 7"/>
           <p:cNvSpPr/>
           <p:nvPr/>
         </p:nvSpPr>
@@ -7692,7 +7692,7 @@
       </p:sp>
       <p:sp>
         <p:nvSpPr>
-          <p:cNvPr id="12" name="Text 8"/>
+          <p:cNvPr id="11" name="Text 8"/>
           <p:cNvSpPr/>
           <p:nvPr/>
         </p:nvSpPr>
@@ -7731,7 +7731,7 @@
       </p:sp>
       <p:sp>
         <p:nvSpPr>
-          <p:cNvPr id="13" name="Text 9"/>
+          <p:cNvPr id="12" name="Text 9"/>
           <p:cNvSpPr/>
           <p:nvPr/>
         </p:nvSpPr>
@@ -7770,7 +7770,7 @@
       </p:sp>
       <p:sp>
         <p:nvSpPr>
-          <p:cNvPr id="14" name="Shape 10"/>
+          <p:cNvPr id="13" name="Shape 10"/>
           <p:cNvSpPr/>
           <p:nvPr/>
         </p:nvSpPr>
@@ -7792,7 +7792,7 @@
       </p:sp>
       <p:sp>
         <p:nvSpPr>
-          <p:cNvPr id="15" name="Text 11"/>
+          <p:cNvPr id="14" name="Text 11"/>
           <p:cNvSpPr/>
           <p:nvPr/>
         </p:nvSpPr>
@@ -7831,7 +7831,7 @@
       </p:sp>
       <p:sp>
         <p:nvSpPr>
-          <p:cNvPr id="16" name="Text 12"/>
+          <p:cNvPr id="15" name="Text 12"/>
           <p:cNvSpPr/>
           <p:nvPr/>
         </p:nvSpPr>
@@ -7870,7 +7870,7 @@
       </p:sp>
       <p:sp>
         <p:nvSpPr>
-          <p:cNvPr id="17" name="Shape 13"/>
+          <p:cNvPr id="16" name="Shape 13"/>
           <p:cNvSpPr/>
           <p:nvPr/>
         </p:nvSpPr>
@@ -7892,7 +7892,7 @@
       </p:sp>
       <p:sp>
         <p:nvSpPr>
-          <p:cNvPr id="18" name="Text 14"/>
+          <p:cNvPr id="17" name="Text 14"/>
           <p:cNvSpPr/>
           <p:nvPr/>
         </p:nvSpPr>
@@ -7931,7 +7931,7 @@
       </p:sp>
       <p:sp>
         <p:nvSpPr>
-          <p:cNvPr id="19" name="Text 15"/>
+          <p:cNvPr id="18" name="Text 15"/>
           <p:cNvSpPr/>
           <p:nvPr/>
         </p:nvSpPr>
@@ -7973,7 +7973,7 @@
       </p:sp>
       <p:sp>
         <p:nvSpPr>
-          <p:cNvPr id="20" name="Shape 16"/>
+          <p:cNvPr id="19" name="Shape 16"/>
           <p:cNvSpPr/>
           <p:nvPr/>
         </p:nvSpPr>
@@ -7995,7 +7995,7 @@
       </p:sp>
       <p:sp>
         <p:nvSpPr>
-          <p:cNvPr id="21" name="Text 17"/>
+          <p:cNvPr id="20" name="Text 17"/>
           <p:cNvSpPr/>
           <p:nvPr/>
         </p:nvSpPr>
@@ -8280,7 +8280,7 @@
       </p:pic>
       <p:sp>
         <p:nvSpPr>
-          <p:cNvPr id="8" name="Shape 4"/>
+          <p:cNvPr id="7" name="Shape 4"/>
           <p:cNvSpPr/>
           <p:nvPr/>
         </p:nvSpPr>
@@ -8302,7 +8302,7 @@
       </p:sp>
       <p:sp>
         <p:nvSpPr>
-          <p:cNvPr id="9" name="Shape 5"/>
+          <p:cNvPr id="8" name="Shape 5"/>
           <p:cNvSpPr/>
           <p:nvPr/>
         </p:nvSpPr>
@@ -8322,7 +8322,7 @@
       </p:sp>
       <p:sp>
         <p:nvSpPr>
-          <p:cNvPr id="10" name="Text 6"/>
+          <p:cNvPr id="9" name="Text 6"/>
           <p:cNvSpPr/>
           <p:nvPr/>
         </p:nvSpPr>
@@ -8361,7 +8361,7 @@
       </p:sp>
       <p:sp>
         <p:nvSpPr>
-          <p:cNvPr id="11" name="Text 7"/>
+          <p:cNvPr id="10" name="Text 7"/>
           <p:cNvSpPr/>
           <p:nvPr/>
         </p:nvSpPr>
@@ -8400,7 +8400,7 @@
       </p:sp>
       <p:sp>
         <p:nvSpPr>
-          <p:cNvPr id="12" name="Text 8"/>
+          <p:cNvPr id="11" name="Text 8"/>
           <p:cNvSpPr/>
           <p:nvPr/>
         </p:nvSpPr>
@@ -8442,7 +8442,7 @@
       </p:sp>
       <p:sp>
         <p:nvSpPr>
-          <p:cNvPr id="13" name="Shape 9"/>
+          <p:cNvPr id="12" name="Shape 9"/>
           <p:cNvSpPr/>
           <p:nvPr/>
         </p:nvSpPr>
@@ -8464,7 +8464,7 @@
       </p:sp>
       <p:sp>
         <p:nvSpPr>
-          <p:cNvPr id="14" name="Shape 10"/>
+          <p:cNvPr id="13" name="Shape 10"/>
           <p:cNvSpPr/>
           <p:nvPr/>
         </p:nvSpPr>
@@ -8484,7 +8484,7 @@
       </p:sp>
       <p:sp>
         <p:nvSpPr>
-          <p:cNvPr id="15" name="Text 11"/>
+          <p:cNvPr id="14" name="Text 11"/>
           <p:cNvSpPr/>
           <p:nvPr/>
         </p:nvSpPr>
@@ -8523,7 +8523,7 @@
       </p:sp>
       <p:sp>
         <p:nvSpPr>
-          <p:cNvPr id="16" name="Text 12"/>
+          <p:cNvPr id="15" name="Text 12"/>
           <p:cNvSpPr/>
           <p:nvPr/>
         </p:nvSpPr>
@@ -8562,7 +8562,7 @@
       </p:sp>
       <p:sp>
         <p:nvSpPr>
-          <p:cNvPr id="17" name="Text 13"/>
+          <p:cNvPr id="16" name="Text 13"/>
           <p:cNvSpPr/>
           <p:nvPr/>
         </p:nvSpPr>
@@ -8604,7 +8604,7 @@
       </p:sp>
       <p:sp>
         <p:nvSpPr>
-          <p:cNvPr id="18" name="Shape 14"/>
+          <p:cNvPr id="17" name="Shape 14"/>
           <p:cNvSpPr/>
           <p:nvPr/>
         </p:nvSpPr>
@@ -8626,7 +8626,7 @@
       </p:sp>
       <p:sp>
         <p:nvSpPr>
-          <p:cNvPr id="19" name="Shape 15"/>
+          <p:cNvPr id="18" name="Shape 15"/>
           <p:cNvSpPr/>
           <p:nvPr/>
         </p:nvSpPr>
@@ -8646,7 +8646,7 @@
       </p:sp>
       <p:sp>
         <p:nvSpPr>
-          <p:cNvPr id="20" name="Text 16"/>
+          <p:cNvPr id="19" name="Text 16"/>
           <p:cNvSpPr/>
           <p:nvPr/>
         </p:nvSpPr>
@@ -8685,7 +8685,7 @@
       </p:sp>
       <p:sp>
         <p:nvSpPr>
-          <p:cNvPr id="21" name="Text 17"/>
+          <p:cNvPr id="20" name="Text 17"/>
           <p:cNvSpPr/>
           <p:nvPr/>
         </p:nvSpPr>
@@ -8724,7 +8724,7 @@
       </p:sp>
       <p:sp>
         <p:nvSpPr>
-          <p:cNvPr id="22" name="Text 18"/>
+          <p:cNvPr id="21" name="Text 18"/>
           <p:cNvSpPr/>
           <p:nvPr/>
         </p:nvSpPr>
@@ -8766,7 +8766,7 @@
       </p:sp>
       <p:sp>
         <p:nvSpPr>
-          <p:cNvPr id="23" name="Shape 19"/>
+          <p:cNvPr id="22" name="Shape 19"/>
           <p:cNvSpPr/>
           <p:nvPr/>
         </p:nvSpPr>
@@ -8788,7 +8788,7 @@
       </p:sp>
       <p:sp>
         <p:nvSpPr>
-          <p:cNvPr id="24" name="Text 20"/>
+          <p:cNvPr id="23" name="Text 20"/>
           <p:cNvSpPr/>
           <p:nvPr/>
         </p:nvSpPr>
@@ -8827,7 +8827,7 @@
       </p:sp>
       <p:sp>
         <p:nvSpPr>
-          <p:cNvPr id="25" name="Text 21"/>
+          <p:cNvPr id="24" name="Text 21"/>
           <p:cNvSpPr/>
           <p:nvPr/>
         </p:nvSpPr>
@@ -8869,7 +8869,7 @@
       </p:sp>
       <p:sp>
         <p:nvSpPr>
-          <p:cNvPr id="26" name="Shape 22"/>
+          <p:cNvPr id="25" name="Shape 22"/>
           <p:cNvSpPr/>
           <p:nvPr/>
         </p:nvSpPr>
@@ -8896,7 +8896,7 @@
       </p:sp>
       <p:sp>
         <p:nvSpPr>
-          <p:cNvPr id="27" name="Text 23"/>
+          <p:cNvPr id="26" name="Text 23"/>
           <p:cNvSpPr/>
           <p:nvPr/>
         </p:nvSpPr>
@@ -10097,7 +10097,7 @@
       </p:graphicFrame>
       <p:sp>
         <p:nvSpPr>
-          <p:cNvPr id="11" name="Shape 6"/>
+          <p:cNvPr id="10" name="Shape 6"/>
           <p:cNvSpPr/>
           <p:nvPr/>
         </p:nvSpPr>
@@ -10119,7 +10119,7 @@
       </p:sp>
       <p:sp>
         <p:nvSpPr>
-          <p:cNvPr id="12" name="Text 7"/>
+          <p:cNvPr id="11" name="Text 7"/>
           <p:cNvSpPr/>
           <p:nvPr/>
         </p:nvSpPr>
@@ -10404,7 +10404,7 @@
       </p:pic>
       <p:sp>
         <p:nvSpPr>
-          <p:cNvPr id="8" name="Shape 4"/>
+          <p:cNvPr id="7" name="Shape 4"/>
           <p:cNvSpPr/>
           <p:nvPr/>
         </p:nvSpPr>
@@ -10426,7 +10426,7 @@
       </p:sp>
       <p:sp>
         <p:nvSpPr>
-          <p:cNvPr id="9" name="Text 5"/>
+          <p:cNvPr id="8" name="Text 5"/>
           <p:cNvSpPr/>
           <p:nvPr/>
         </p:nvSpPr>
@@ -10465,7 +10465,7 @@
       </p:sp>
       <p:sp>
         <p:nvSpPr>
-          <p:cNvPr id="10" name="Shape 6"/>
+          <p:cNvPr id="9" name="Shape 6"/>
           <p:cNvSpPr/>
           <p:nvPr/>
         </p:nvSpPr>
@@ -10488,7 +10488,7 @@
       </p:sp>
       <p:sp>
         <p:nvSpPr>
-          <p:cNvPr id="11" name="Shape 7"/>
+          <p:cNvPr id="10" name="Shape 7"/>
           <p:cNvSpPr/>
           <p:nvPr/>
         </p:nvSpPr>
@@ -10508,7 +10508,7 @@
       </p:sp>
       <p:sp>
         <p:nvSpPr>
-          <p:cNvPr id="12" name="Shape 8"/>
+          <p:cNvPr id="11" name="Shape 8"/>
           <p:cNvSpPr/>
           <p:nvPr/>
         </p:nvSpPr>
@@ -10535,7 +10535,7 @@
       </p:sp>
       <p:sp>
         <p:nvSpPr>
-          <p:cNvPr id="13" name="Text 9"/>
+          <p:cNvPr id="12" name="Text 9"/>
           <p:cNvSpPr/>
           <p:nvPr/>
         </p:nvSpPr>
@@ -10574,7 +10574,7 @@
       </p:sp>
       <p:sp>
         <p:nvSpPr>
-          <p:cNvPr id="14" name="Shape 10"/>
+          <p:cNvPr id="13" name="Shape 10"/>
           <p:cNvSpPr/>
           <p:nvPr/>
         </p:nvSpPr>
@@ -10597,7 +10597,7 @@
       </p:sp>
       <p:sp>
         <p:nvSpPr>
-          <p:cNvPr id="15" name="Shape 11"/>
+          <p:cNvPr id="14" name="Shape 11"/>
           <p:cNvSpPr/>
           <p:nvPr/>
         </p:nvSpPr>
@@ -10617,7 +10617,7 @@
       </p:sp>
       <p:sp>
         <p:nvSpPr>
-          <p:cNvPr id="16" name="Shape 12"/>
+          <p:cNvPr id="15" name="Shape 12"/>
           <p:cNvSpPr/>
           <p:nvPr/>
         </p:nvSpPr>
@@ -10644,7 +10644,7 @@
       </p:sp>
       <p:sp>
         <p:nvSpPr>
-          <p:cNvPr id="17" name="Text 13"/>
+          <p:cNvPr id="16" name="Text 13"/>
           <p:cNvSpPr/>
           <p:nvPr/>
         </p:nvSpPr>
@@ -10683,7 +10683,7 @@
       </p:sp>
       <p:sp>
         <p:nvSpPr>
-          <p:cNvPr id="18" name="Shape 14"/>
+          <p:cNvPr id="17" name="Shape 14"/>
           <p:cNvSpPr/>
           <p:nvPr/>
         </p:nvSpPr>
@@ -10706,7 +10706,7 @@
       </p:sp>
       <p:sp>
         <p:nvSpPr>
-          <p:cNvPr id="19" name="Shape 15"/>
+          <p:cNvPr id="18" name="Shape 15"/>
           <p:cNvSpPr/>
           <p:nvPr/>
         </p:nvSpPr>
@@ -10726,7 +10726,7 @@
       </p:sp>
       <p:sp>
         <p:nvSpPr>
-          <p:cNvPr id="20" name="Shape 16"/>
+          <p:cNvPr id="19" name="Shape 16"/>
           <p:cNvSpPr/>
           <p:nvPr/>
         </p:nvSpPr>
@@ -10748,7 +10748,7 @@
       </p:sp>
       <p:sp>
         <p:nvSpPr>
-          <p:cNvPr id="21" name="Text 17"/>
+          <p:cNvPr id="20" name="Text 17"/>
           <p:cNvSpPr/>
           <p:nvPr/>
         </p:nvSpPr>
@@ -10787,7 +10787,7 @@
       </p:sp>
       <p:sp>
         <p:nvSpPr>
-          <p:cNvPr id="22" name="Shape 18"/>
+          <p:cNvPr id="21" name="Shape 18"/>
           <p:cNvSpPr/>
           <p:nvPr/>
         </p:nvSpPr>
@@ -10814,7 +10814,7 @@
       </p:sp>
       <p:sp>
         <p:nvSpPr>
-          <p:cNvPr id="23" name="Shape 19"/>
+          <p:cNvPr id="22" name="Shape 19"/>
           <p:cNvSpPr/>
           <p:nvPr/>
         </p:nvSpPr>
@@ -10834,7 +10834,7 @@
       </p:sp>
       <p:sp>
         <p:nvSpPr>
-          <p:cNvPr id="24" name="Text 20"/>
+          <p:cNvPr id="23" name="Text 20"/>
           <p:cNvSpPr/>
           <p:nvPr/>
         </p:nvSpPr>
@@ -10873,7 +10873,7 @@
       </p:sp>
       <p:sp>
         <p:nvSpPr>
-          <p:cNvPr id="25" name="Text 21"/>
+          <p:cNvPr id="24" name="Text 21"/>
           <p:cNvSpPr/>
           <p:nvPr/>
         </p:nvSpPr>
@@ -10912,7 +10912,7 @@
       </p:sp>
       <p:sp>
         <p:nvSpPr>
-          <p:cNvPr id="26" name="Text 22"/>
+          <p:cNvPr id="25" name="Text 22"/>
           <p:cNvSpPr/>
           <p:nvPr/>
         </p:nvSpPr>
@@ -10954,7 +10954,7 @@
       </p:sp>
       <p:sp>
         <p:nvSpPr>
-          <p:cNvPr id="27" name="Shape 23"/>
+          <p:cNvPr id="26" name="Shape 23"/>
           <p:cNvSpPr/>
           <p:nvPr/>
         </p:nvSpPr>
@@ -10981,7 +10981,7 @@
       </p:sp>
       <p:sp>
         <p:nvSpPr>
-          <p:cNvPr id="28" name="Shape 24"/>
+          <p:cNvPr id="27" name="Shape 24"/>
           <p:cNvSpPr/>
           <p:nvPr/>
         </p:nvSpPr>
@@ -11001,7 +11001,7 @@
       </p:sp>
       <p:sp>
         <p:nvSpPr>
-          <p:cNvPr id="29" name="Text 25"/>
+          <p:cNvPr id="28" name="Text 25"/>
           <p:cNvSpPr/>
           <p:nvPr/>
         </p:nvSpPr>
@@ -11040,7 +11040,7 @@
       </p:sp>
       <p:sp>
         <p:nvSpPr>
-          <p:cNvPr id="30" name="Text 26"/>
+          <p:cNvPr id="29" name="Text 26"/>
           <p:cNvSpPr/>
           <p:nvPr/>
         </p:nvSpPr>
@@ -11079,7 +11079,7 @@
       </p:sp>
       <p:sp>
         <p:nvSpPr>
-          <p:cNvPr id="31" name="Text 27"/>
+          <p:cNvPr id="30" name="Text 27"/>
           <p:cNvSpPr/>
           <p:nvPr/>
         </p:nvSpPr>
@@ -11121,7 +11121,7 @@
       </p:sp>
       <p:sp>
         <p:nvSpPr>
-          <p:cNvPr id="32" name="Shape 28"/>
+          <p:cNvPr id="31" name="Shape 28"/>
           <p:cNvSpPr/>
           <p:nvPr/>
         </p:nvSpPr>
@@ -11148,7 +11148,7 @@
       </p:sp>
       <p:sp>
         <p:nvSpPr>
-          <p:cNvPr id="33" name="Shape 29"/>
+          <p:cNvPr id="32" name="Shape 29"/>
           <p:cNvSpPr/>
           <p:nvPr/>
         </p:nvSpPr>
@@ -11168,7 +11168,7 @@
       </p:sp>
       <p:sp>
         <p:nvSpPr>
-          <p:cNvPr id="34" name="Text 30"/>
+          <p:cNvPr id="33" name="Text 30"/>
           <p:cNvSpPr/>
           <p:nvPr/>
         </p:nvSpPr>
@@ -11207,7 +11207,7 @@
       </p:sp>
       <p:sp>
         <p:nvSpPr>
-          <p:cNvPr id="35" name="Text 31"/>
+          <p:cNvPr id="34" name="Text 31"/>
           <p:cNvSpPr/>
           <p:nvPr/>
         </p:nvSpPr>
@@ -11246,7 +11246,7 @@
       </p:sp>
       <p:sp>
         <p:nvSpPr>
-          <p:cNvPr id="36" name="Text 32"/>
+          <p:cNvPr id="35" name="Text 32"/>
           <p:cNvSpPr/>
           <p:nvPr/>
         </p:nvSpPr>
@@ -11288,7 +11288,7 @@
       </p:sp>
       <p:sp>
         <p:nvSpPr>
-          <p:cNvPr id="37" name="Shape 33"/>
+          <p:cNvPr id="36" name="Shape 33"/>
           <p:cNvSpPr/>
           <p:nvPr/>
         </p:nvSpPr>
@@ -11310,7 +11310,7 @@
       </p:sp>
       <p:sp>
         <p:nvSpPr>
-          <p:cNvPr id="38" name="Text 34"/>
+          <p:cNvPr id="37" name="Text 34"/>
           <p:cNvSpPr/>
           <p:nvPr/>
         </p:nvSpPr>
@@ -11349,7 +11349,7 @@
       </p:sp>
       <p:sp>
         <p:nvSpPr>
-          <p:cNvPr id="39" name="Text 35"/>
+          <p:cNvPr id="38" name="Text 35"/>
           <p:cNvSpPr/>
           <p:nvPr/>
         </p:nvSpPr>
@@ -11676,7 +11676,7 @@
       </p:pic>
       <p:sp>
         <p:nvSpPr>
-          <p:cNvPr id="9" name="Shape 5"/>
+          <p:cNvPr id="8" name="Shape 5"/>
           <p:cNvSpPr/>
           <p:nvPr/>
         </p:nvSpPr>
@@ -11703,7 +11703,7 @@
       </p:sp>
       <p:sp>
         <p:nvSpPr>
-          <p:cNvPr id="10" name="Shape 6"/>
+          <p:cNvPr id="9" name="Shape 6"/>
           <p:cNvSpPr/>
           <p:nvPr/>
         </p:nvSpPr>
@@ -11723,7 +11723,7 @@
       </p:sp>
       <p:sp>
         <p:nvSpPr>
-          <p:cNvPr id="11" name="Text 7"/>
+          <p:cNvPr id="10" name="Text 7"/>
           <p:cNvSpPr/>
           <p:nvPr/>
         </p:nvSpPr>
@@ -11762,7 +11762,7 @@
       </p:sp>
       <p:sp>
         <p:nvSpPr>
-          <p:cNvPr id="12" name="Text 8"/>
+          <p:cNvPr id="11" name="Text 8"/>
           <p:cNvSpPr/>
           <p:nvPr/>
         </p:nvSpPr>
@@ -11801,7 +11801,7 @@
       </p:sp>
       <p:sp>
         <p:nvSpPr>
-          <p:cNvPr id="13" name="Text 9"/>
+          <p:cNvPr id="12" name="Text 9"/>
           <p:cNvSpPr/>
           <p:nvPr/>
         </p:nvSpPr>
@@ -11843,7 +11843,7 @@
       </p:sp>
       <p:sp>
         <p:nvSpPr>
-          <p:cNvPr id="14" name="Shape 10"/>
+          <p:cNvPr id="13" name="Shape 10"/>
           <p:cNvSpPr/>
           <p:nvPr/>
         </p:nvSpPr>
@@ -11865,7 +11865,7 @@
       </p:sp>
       <p:sp>
         <p:nvSpPr>
-          <p:cNvPr id="15" name="Shape 11"/>
+          <p:cNvPr id="14" name="Shape 11"/>
           <p:cNvSpPr/>
           <p:nvPr/>
         </p:nvSpPr>
@@ -11885,7 +11885,7 @@
       </p:sp>
       <p:sp>
         <p:nvSpPr>
-          <p:cNvPr id="16" name="Text 12"/>
+          <p:cNvPr id="15" name="Text 12"/>
           <p:cNvSpPr/>
           <p:nvPr/>
         </p:nvSpPr>
@@ -11924,7 +11924,7 @@
       </p:sp>
       <p:sp>
         <p:nvSpPr>
-          <p:cNvPr id="17" name="Text 13"/>
+          <p:cNvPr id="16" name="Text 13"/>
           <p:cNvSpPr/>
           <p:nvPr/>
         </p:nvSpPr>
@@ -11963,7 +11963,7 @@
       </p:sp>
       <p:sp>
         <p:nvSpPr>
-          <p:cNvPr id="18" name="Text 14"/>
+          <p:cNvPr id="17" name="Text 14"/>
           <p:cNvSpPr/>
           <p:nvPr/>
         </p:nvSpPr>
@@ -12005,7 +12005,7 @@
       </p:sp>
       <p:sp>
         <p:nvSpPr>
-          <p:cNvPr id="19" name="Shape 15"/>
+          <p:cNvPr id="18" name="Shape 15"/>
           <p:cNvSpPr/>
           <p:nvPr/>
         </p:nvSpPr>
@@ -12032,7 +12032,7 @@
       </p:sp>
       <p:sp>
         <p:nvSpPr>
-          <p:cNvPr id="20" name="Shape 16"/>
+          <p:cNvPr id="19" name="Shape 16"/>
           <p:cNvSpPr/>
           <p:nvPr/>
         </p:nvSpPr>
@@ -12052,7 +12052,7 @@
       </p:sp>
       <p:sp>
         <p:nvSpPr>
-          <p:cNvPr id="21" name="Text 17"/>
+          <p:cNvPr id="20" name="Text 17"/>
           <p:cNvSpPr/>
           <p:nvPr/>
         </p:nvSpPr>
@@ -12091,7 +12091,7 @@
       </p:sp>
       <p:sp>
         <p:nvSpPr>
-          <p:cNvPr id="22" name="Text 18"/>
+          <p:cNvPr id="21" name="Text 18"/>
           <p:cNvSpPr/>
           <p:nvPr/>
         </p:nvSpPr>
@@ -12130,7 +12130,7 @@
       </p:sp>
       <p:sp>
         <p:nvSpPr>
-          <p:cNvPr id="23" name="Text 19"/>
+          <p:cNvPr id="22" name="Text 19"/>
           <p:cNvSpPr/>
           <p:nvPr/>
         </p:nvSpPr>
@@ -12172,7 +12172,7 @@
       </p:sp>
       <p:sp>
         <p:nvSpPr>
-          <p:cNvPr id="24" name="Shape 20"/>
+          <p:cNvPr id="23" name="Shape 20"/>
           <p:cNvSpPr/>
           <p:nvPr/>
         </p:nvSpPr>
@@ -12194,7 +12194,7 @@
       </p:sp>
       <p:sp>
         <p:nvSpPr>
-          <p:cNvPr id="25" name="Text 21"/>
+          <p:cNvPr id="24" name="Text 21"/>
           <p:cNvSpPr/>
           <p:nvPr/>
         </p:nvSpPr>
@@ -12233,7 +12233,7 @@
       </p:sp>
       <p:sp>
         <p:nvSpPr>
-          <p:cNvPr id="26" name="Text 22"/>
+          <p:cNvPr id="25" name="Text 22"/>
           <p:cNvSpPr/>
           <p:nvPr/>
         </p:nvSpPr>
@@ -12560,7 +12560,7 @@
       </p:pic>
       <p:sp>
         <p:nvSpPr>
-          <p:cNvPr id="9" name="Shape 5"/>
+          <p:cNvPr id="8" name="Shape 5"/>
           <p:cNvSpPr/>
           <p:nvPr/>
         </p:nvSpPr>
@@ -12587,7 +12587,7 @@
       </p:sp>
       <p:sp>
         <p:nvSpPr>
-          <p:cNvPr id="10" name="Shape 6"/>
+          <p:cNvPr id="9" name="Shape 6"/>
           <p:cNvSpPr/>
           <p:nvPr/>
         </p:nvSpPr>
@@ -12607,7 +12607,7 @@
       </p:sp>
       <p:sp>
         <p:nvSpPr>
-          <p:cNvPr id="11" name="Text 7"/>
+          <p:cNvPr id="10" name="Text 7"/>
           <p:cNvSpPr/>
           <p:nvPr/>
         </p:nvSpPr>
@@ -12646,7 +12646,7 @@
       </p:sp>
       <p:sp>
         <p:nvSpPr>
-          <p:cNvPr id="12" name="Text 8"/>
+          <p:cNvPr id="11" name="Text 8"/>
           <p:cNvSpPr/>
           <p:nvPr/>
         </p:nvSpPr>
@@ -12685,7 +12685,7 @@
       </p:sp>
       <p:sp>
         <p:nvSpPr>
-          <p:cNvPr id="13" name="Text 9"/>
+          <p:cNvPr id="12" name="Text 9"/>
           <p:cNvSpPr/>
           <p:nvPr/>
         </p:nvSpPr>
@@ -12727,7 +12727,7 @@
       </p:sp>
       <p:sp>
         <p:nvSpPr>
-          <p:cNvPr id="14" name="Shape 10"/>
+          <p:cNvPr id="13" name="Shape 10"/>
           <p:cNvSpPr/>
           <p:nvPr/>
         </p:nvSpPr>
@@ -12754,7 +12754,7 @@
       </p:sp>
       <p:sp>
         <p:nvSpPr>
-          <p:cNvPr id="15" name="Shape 11"/>
+          <p:cNvPr id="14" name="Shape 11"/>
           <p:cNvSpPr/>
           <p:nvPr/>
         </p:nvSpPr>
@@ -12774,7 +12774,7 @@
       </p:sp>
       <p:sp>
         <p:nvSpPr>
-          <p:cNvPr id="16" name="Text 12"/>
+          <p:cNvPr id="15" name="Text 12"/>
           <p:cNvSpPr/>
           <p:nvPr/>
         </p:nvSpPr>
@@ -12813,7 +12813,7 @@
       </p:sp>
       <p:sp>
         <p:nvSpPr>
-          <p:cNvPr id="17" name="Text 13"/>
+          <p:cNvPr id="16" name="Text 13"/>
           <p:cNvSpPr/>
           <p:nvPr/>
         </p:nvSpPr>
@@ -12852,7 +12852,7 @@
       </p:sp>
       <p:sp>
         <p:nvSpPr>
-          <p:cNvPr id="18" name="Text 14"/>
+          <p:cNvPr id="17" name="Text 14"/>
           <p:cNvSpPr/>
           <p:nvPr/>
         </p:nvSpPr>
@@ -12894,7 +12894,7 @@
       </p:sp>
       <p:sp>
         <p:nvSpPr>
-          <p:cNvPr id="19" name="Shape 15"/>
+          <p:cNvPr id="18" name="Shape 15"/>
           <p:cNvSpPr/>
           <p:nvPr/>
         </p:nvSpPr>
@@ -12916,7 +12916,7 @@
       </p:sp>
       <p:sp>
         <p:nvSpPr>
-          <p:cNvPr id="20" name="Shape 16"/>
+          <p:cNvPr id="19" name="Shape 16"/>
           <p:cNvSpPr/>
           <p:nvPr/>
         </p:nvSpPr>
@@ -12936,7 +12936,7 @@
       </p:sp>
       <p:sp>
         <p:nvSpPr>
-          <p:cNvPr id="21" name="Text 17"/>
+          <p:cNvPr id="20" name="Text 17"/>
           <p:cNvSpPr/>
           <p:nvPr/>
         </p:nvSpPr>
@@ -12975,7 +12975,7 @@
       </p:sp>
       <p:sp>
         <p:nvSpPr>
-          <p:cNvPr id="22" name="Text 18"/>
+          <p:cNvPr id="21" name="Text 18"/>
           <p:cNvSpPr/>
           <p:nvPr/>
         </p:nvSpPr>
@@ -13014,7 +13014,7 @@
       </p:sp>
       <p:sp>
         <p:nvSpPr>
-          <p:cNvPr id="23" name="Text 19"/>
+          <p:cNvPr id="22" name="Text 19"/>
           <p:cNvSpPr/>
           <p:nvPr/>
         </p:nvSpPr>
@@ -13056,7 +13056,7 @@
       </p:sp>
       <p:sp>
         <p:nvSpPr>
-          <p:cNvPr id="24" name="Shape 20"/>
+          <p:cNvPr id="23" name="Shape 20"/>
           <p:cNvSpPr/>
           <p:nvPr/>
         </p:nvSpPr>
@@ -13078,7 +13078,7 @@
       </p:sp>
       <p:sp>
         <p:nvSpPr>
-          <p:cNvPr id="25" name="Text 21"/>
+          <p:cNvPr id="24" name="Text 21"/>
           <p:cNvSpPr/>
           <p:nvPr/>
         </p:nvSpPr>
@@ -13117,7 +13117,7 @@
       </p:sp>
       <p:sp>
         <p:nvSpPr>
-          <p:cNvPr id="26" name="Text 22"/>
+          <p:cNvPr id="25" name="Text 22"/>
           <p:cNvSpPr/>
           <p:nvPr/>
         </p:nvSpPr>
@@ -13402,7 +13402,7 @@
       </p:pic>
       <p:sp>
         <p:nvSpPr>
-          <p:cNvPr id="8" name="Shape 4"/>
+          <p:cNvPr id="7" name="Shape 4"/>
           <p:cNvSpPr/>
           <p:nvPr/>
         </p:nvSpPr>
@@ -13424,7 +13424,7 @@
       </p:sp>
       <p:sp>
         <p:nvSpPr>
-          <p:cNvPr id="9" name="Text 5"/>
+          <p:cNvPr id="8" name="Text 5"/>
           <p:cNvSpPr/>
           <p:nvPr/>
         </p:nvSpPr>
@@ -13463,7 +13463,7 @@
       </p:sp>
       <p:sp>
         <p:nvSpPr>
-          <p:cNvPr id="10" name="Text 6"/>
+          <p:cNvPr id="9" name="Text 6"/>
           <p:cNvSpPr/>
           <p:nvPr/>
         </p:nvSpPr>
@@ -13505,7 +13505,7 @@
       </p:sp>
       <p:sp>
         <p:nvSpPr>
-          <p:cNvPr id="11" name="Shape 7"/>
+          <p:cNvPr id="10" name="Shape 7"/>
           <p:cNvSpPr/>
           <p:nvPr/>
         </p:nvSpPr>
@@ -13527,7 +13527,7 @@
       </p:sp>
       <p:sp>
         <p:nvSpPr>
-          <p:cNvPr id="12" name="Text 8"/>
+          <p:cNvPr id="11" name="Text 8"/>
           <p:cNvSpPr/>
           <p:nvPr/>
         </p:nvSpPr>
@@ -13566,7 +13566,7 @@
       </p:sp>
       <p:sp>
         <p:nvSpPr>
-          <p:cNvPr id="13" name="Text 9"/>
+          <p:cNvPr id="12" name="Text 9"/>
           <p:cNvSpPr/>
           <p:nvPr/>
         </p:nvSpPr>
@@ -13608,7 +13608,7 @@
       </p:sp>
       <p:sp>
         <p:nvSpPr>
-          <p:cNvPr id="14" name="Shape 10"/>
+          <p:cNvPr id="13" name="Shape 10"/>
           <p:cNvSpPr/>
           <p:nvPr/>
         </p:nvSpPr>
@@ -13630,7 +13630,7 @@
       </p:sp>
       <p:sp>
         <p:nvSpPr>
-          <p:cNvPr id="15" name="Text 11"/>
+          <p:cNvPr id="14" name="Text 11"/>
           <p:cNvSpPr/>
           <p:nvPr/>
         </p:nvSpPr>
@@ -13669,7 +13669,7 @@
       </p:sp>
       <p:sp>
         <p:nvSpPr>
-          <p:cNvPr id="16" name="Text 12"/>
+          <p:cNvPr id="15" name="Text 12"/>
           <p:cNvSpPr/>
           <p:nvPr/>
         </p:nvSpPr>
@@ -13711,7 +13711,7 @@
       </p:sp>
       <p:sp>
         <p:nvSpPr>
-          <p:cNvPr id="17" name="Shape 13"/>
+          <p:cNvPr id="16" name="Shape 13"/>
           <p:cNvSpPr/>
           <p:nvPr/>
         </p:nvSpPr>
@@ -13738,7 +13738,7 @@
       </p:sp>
       <p:sp>
         <p:nvSpPr>
-          <p:cNvPr id="18" name="Text 14"/>
+          <p:cNvPr id="17" name="Text 14"/>
           <p:cNvSpPr/>
           <p:nvPr/>
         </p:nvSpPr>
@@ -14026,7 +14026,7 @@
       </p:pic>
       <p:sp>
         <p:nvSpPr>
-          <p:cNvPr id="8" name="Shape 4"/>
+          <p:cNvPr id="7" name="Shape 4"/>
           <p:cNvSpPr/>
           <p:nvPr/>
         </p:nvSpPr>
@@ -14053,7 +14053,7 @@
       </p:sp>
       <p:sp>
         <p:nvSpPr>
-          <p:cNvPr id="9" name="Shape 5"/>
+          <p:cNvPr id="8" name="Shape 5"/>
           <p:cNvSpPr/>
           <p:nvPr/>
         </p:nvSpPr>
@@ -14073,7 +14073,7 @@
       </p:sp>
       <p:sp>
         <p:nvSpPr>
-          <p:cNvPr id="10" name="Text 6"/>
+          <p:cNvPr id="9" name="Text 6"/>
           <p:cNvSpPr/>
           <p:nvPr/>
         </p:nvSpPr>
@@ -14112,7 +14112,7 @@
       </p:sp>
       <p:sp>
         <p:nvSpPr>
-          <p:cNvPr id="11" name="Text 7"/>
+          <p:cNvPr id="10" name="Text 7"/>
           <p:cNvSpPr/>
           <p:nvPr/>
         </p:nvSpPr>
@@ -14151,7 +14151,7 @@
       </p:sp>
       <p:sp>
         <p:nvSpPr>
-          <p:cNvPr id="12" name="Text 8"/>
+          <p:cNvPr id="11" name="Text 8"/>
           <p:cNvSpPr/>
           <p:nvPr/>
         </p:nvSpPr>
@@ -14193,7 +14193,7 @@
       </p:sp>
       <p:sp>
         <p:nvSpPr>
-          <p:cNvPr id="13" name="Shape 9"/>
+          <p:cNvPr id="12" name="Shape 9"/>
           <p:cNvSpPr/>
           <p:nvPr/>
         </p:nvSpPr>
@@ -14220,7 +14220,7 @@
       </p:sp>
       <p:sp>
         <p:nvSpPr>
-          <p:cNvPr id="14" name="Shape 10"/>
+          <p:cNvPr id="13" name="Shape 10"/>
           <p:cNvSpPr/>
           <p:nvPr/>
         </p:nvSpPr>
@@ -14240,7 +14240,7 @@
       </p:sp>
       <p:sp>
         <p:nvSpPr>
-          <p:cNvPr id="15" name="Text 11"/>
+          <p:cNvPr id="14" name="Text 11"/>
           <p:cNvSpPr/>
           <p:nvPr/>
         </p:nvSpPr>
@@ -14279,7 +14279,7 @@
       </p:sp>
       <p:sp>
         <p:nvSpPr>
-          <p:cNvPr id="16" name="Text 12"/>
+          <p:cNvPr id="15" name="Text 12"/>
           <p:cNvSpPr/>
           <p:nvPr/>
         </p:nvSpPr>
@@ -14318,7 +14318,7 @@
       </p:sp>
       <p:sp>
         <p:nvSpPr>
-          <p:cNvPr id="17" name="Text 13"/>
+          <p:cNvPr id="16" name="Text 13"/>
           <p:cNvSpPr/>
           <p:nvPr/>
         </p:nvSpPr>
@@ -14360,7 +14360,7 @@
       </p:sp>
       <p:sp>
         <p:nvSpPr>
-          <p:cNvPr id="18" name="Shape 14"/>
+          <p:cNvPr id="17" name="Shape 14"/>
           <p:cNvSpPr/>
           <p:nvPr/>
         </p:nvSpPr>
@@ -14387,7 +14387,7 @@
       </p:sp>
       <p:sp>
         <p:nvSpPr>
-          <p:cNvPr id="19" name="Shape 15"/>
+          <p:cNvPr id="18" name="Shape 15"/>
           <p:cNvSpPr/>
           <p:nvPr/>
         </p:nvSpPr>
@@ -14407,7 +14407,7 @@
       </p:sp>
       <p:sp>
         <p:nvSpPr>
-          <p:cNvPr id="20" name="Text 16"/>
+          <p:cNvPr id="19" name="Text 16"/>
           <p:cNvSpPr/>
           <p:nvPr/>
         </p:nvSpPr>
@@ -14446,7 +14446,7 @@
       </p:sp>
       <p:sp>
         <p:nvSpPr>
-          <p:cNvPr id="21" name="Text 17"/>
+          <p:cNvPr id="20" name="Text 17"/>
           <p:cNvSpPr/>
           <p:nvPr/>
         </p:nvSpPr>
@@ -14485,7 +14485,7 @@
       </p:sp>
       <p:sp>
         <p:nvSpPr>
-          <p:cNvPr id="22" name="Text 18"/>
+          <p:cNvPr id="21" name="Text 18"/>
           <p:cNvSpPr/>
           <p:nvPr/>
         </p:nvSpPr>
@@ -14527,7 +14527,7 @@
       </p:sp>
       <p:sp>
         <p:nvSpPr>
-          <p:cNvPr id="23" name="Shape 19"/>
+          <p:cNvPr id="22" name="Shape 19"/>
           <p:cNvSpPr/>
           <p:nvPr/>
         </p:nvSpPr>
@@ -14554,7 +14554,7 @@
       </p:sp>
       <p:sp>
         <p:nvSpPr>
-          <p:cNvPr id="24" name="Shape 20"/>
+          <p:cNvPr id="23" name="Shape 20"/>
           <p:cNvSpPr/>
           <p:nvPr/>
         </p:nvSpPr>
@@ -14574,7 +14574,7 @@
       </p:sp>
       <p:sp>
         <p:nvSpPr>
-          <p:cNvPr id="25" name="Text 21"/>
+          <p:cNvPr id="24" name="Text 21"/>
           <p:cNvSpPr/>
           <p:nvPr/>
         </p:nvSpPr>
@@ -14613,7 +14613,7 @@
       </p:sp>
       <p:sp>
         <p:nvSpPr>
-          <p:cNvPr id="26" name="Text 22"/>
+          <p:cNvPr id="25" name="Text 22"/>
           <p:cNvSpPr/>
           <p:nvPr/>
         </p:nvSpPr>
@@ -14652,7 +14652,7 @@
       </p:sp>
       <p:sp>
         <p:nvSpPr>
-          <p:cNvPr id="27" name="Text 23"/>
+          <p:cNvPr id="26" name="Text 23"/>
           <p:cNvSpPr/>
           <p:nvPr/>
         </p:nvSpPr>
@@ -14694,7 +14694,7 @@
       </p:sp>
       <p:sp>
         <p:nvSpPr>
-          <p:cNvPr id="28" name="Shape 24"/>
+          <p:cNvPr id="27" name="Shape 24"/>
           <p:cNvSpPr/>
           <p:nvPr/>
         </p:nvSpPr>
@@ -14721,7 +14721,7 @@
       </p:sp>
       <p:sp>
         <p:nvSpPr>
-          <p:cNvPr id="29" name="Shape 25"/>
+          <p:cNvPr id="28" name="Shape 25"/>
           <p:cNvSpPr/>
           <p:nvPr/>
         </p:nvSpPr>
@@ -14741,7 +14741,7 @@
       </p:sp>
       <p:sp>
         <p:nvSpPr>
-          <p:cNvPr id="30" name="Text 26"/>
+          <p:cNvPr id="29" name="Text 26"/>
           <p:cNvSpPr/>
           <p:nvPr/>
         </p:nvSpPr>
@@ -14780,7 +14780,7 @@
       </p:sp>
       <p:sp>
         <p:nvSpPr>
-          <p:cNvPr id="31" name="Text 27"/>
+          <p:cNvPr id="30" name="Text 27"/>
           <p:cNvSpPr/>
           <p:nvPr/>
         </p:nvSpPr>
@@ -14819,7 +14819,7 @@
       </p:sp>
       <p:sp>
         <p:nvSpPr>
-          <p:cNvPr id="32" name="Text 28"/>
+          <p:cNvPr id="31" name="Text 28"/>
           <p:cNvSpPr/>
           <p:nvPr/>
         </p:nvSpPr>
@@ -15065,7 +15065,7 @@
       </p:pic>
       <p:sp>
         <p:nvSpPr>
-          <p:cNvPr id="7" name="Shape 3"/>
+          <p:cNvPr id="6" name="Shape 3"/>
           <p:cNvSpPr/>
           <p:nvPr/>
         </p:nvSpPr>
@@ -15087,7 +15087,7 @@
       </p:sp>
       <p:sp>
         <p:nvSpPr>
-          <p:cNvPr id="8" name="Shape 4"/>
+          <p:cNvPr id="7" name="Shape 4"/>
           <p:cNvSpPr/>
           <p:nvPr/>
         </p:nvSpPr>
@@ -15107,7 +15107,7 @@
       </p:sp>
       <p:sp>
         <p:nvSpPr>
-          <p:cNvPr id="9" name="Text 5"/>
+          <p:cNvPr id="8" name="Text 5"/>
           <p:cNvSpPr/>
           <p:nvPr/>
         </p:nvSpPr>
@@ -15146,7 +15146,7 @@
       </p:sp>
       <p:sp>
         <p:nvSpPr>
-          <p:cNvPr id="10" name="Text 6"/>
+          <p:cNvPr id="9" name="Text 6"/>
           <p:cNvSpPr/>
           <p:nvPr/>
         </p:nvSpPr>
@@ -15185,7 +15185,7 @@
       </p:sp>
       <p:sp>
         <p:nvSpPr>
-          <p:cNvPr id="11" name="Text 7"/>
+          <p:cNvPr id="10" name="Text 7"/>
           <p:cNvSpPr/>
           <p:nvPr/>
         </p:nvSpPr>
@@ -15227,7 +15227,7 @@
       </p:sp>
       <p:sp>
         <p:nvSpPr>
-          <p:cNvPr id="12" name="Shape 8"/>
+          <p:cNvPr id="11" name="Shape 8"/>
           <p:cNvSpPr/>
           <p:nvPr/>
         </p:nvSpPr>
@@ -15249,7 +15249,7 @@
       </p:sp>
       <p:sp>
         <p:nvSpPr>
-          <p:cNvPr id="13" name="Shape 9"/>
+          <p:cNvPr id="12" name="Shape 9"/>
           <p:cNvSpPr/>
           <p:nvPr/>
         </p:nvSpPr>
@@ -15269,7 +15269,7 @@
       </p:sp>
       <p:sp>
         <p:nvSpPr>
-          <p:cNvPr id="14" name="Text 10"/>
+          <p:cNvPr id="13" name="Text 10"/>
           <p:cNvSpPr/>
           <p:nvPr/>
         </p:nvSpPr>
@@ -15308,7 +15308,7 @@
       </p:sp>
       <p:sp>
         <p:nvSpPr>
-          <p:cNvPr id="15" name="Text 11"/>
+          <p:cNvPr id="14" name="Text 11"/>
           <p:cNvSpPr/>
           <p:nvPr/>
         </p:nvSpPr>
@@ -15347,7 +15347,7 @@
       </p:sp>
       <p:sp>
         <p:nvSpPr>
-          <p:cNvPr id="16" name="Text 12"/>
+          <p:cNvPr id="15" name="Text 12"/>
           <p:cNvSpPr/>
           <p:nvPr/>
         </p:nvSpPr>
@@ -15389,7 +15389,7 @@
       </p:sp>
       <p:sp>
         <p:nvSpPr>
-          <p:cNvPr id="17" name="Shape 13"/>
+          <p:cNvPr id="16" name="Shape 13"/>
           <p:cNvSpPr/>
           <p:nvPr/>
         </p:nvSpPr>
@@ -15411,7 +15411,7 @@
       </p:sp>
       <p:sp>
         <p:nvSpPr>
-          <p:cNvPr id="18" name="Shape 14"/>
+          <p:cNvPr id="17" name="Shape 14"/>
           <p:cNvSpPr/>
           <p:nvPr/>
         </p:nvSpPr>
@@ -15431,7 +15431,7 @@
       </p:sp>
       <p:sp>
         <p:nvSpPr>
-          <p:cNvPr id="19" name="Text 15"/>
+          <p:cNvPr id="18" name="Text 15"/>
           <p:cNvSpPr/>
           <p:nvPr/>
         </p:nvSpPr>
@@ -15470,7 +15470,7 @@
       </p:sp>
       <p:sp>
         <p:nvSpPr>
-          <p:cNvPr id="20" name="Text 16"/>
+          <p:cNvPr id="19" name="Text 16"/>
           <p:cNvSpPr/>
           <p:nvPr/>
         </p:nvSpPr>
@@ -15509,7 +15509,7 @@
       </p:sp>
       <p:sp>
         <p:nvSpPr>
-          <p:cNvPr id="21" name="Text 17"/>
+          <p:cNvPr id="20" name="Text 17"/>
           <p:cNvSpPr/>
           <p:nvPr/>
         </p:nvSpPr>
@@ -15551,7 +15551,7 @@
       </p:sp>
       <p:sp>
         <p:nvSpPr>
-          <p:cNvPr id="22" name="Shape 18"/>
+          <p:cNvPr id="21" name="Shape 18"/>
           <p:cNvSpPr/>
           <p:nvPr/>
         </p:nvSpPr>
@@ -15573,7 +15573,7 @@
       </p:sp>
       <p:sp>
         <p:nvSpPr>
-          <p:cNvPr id="23" name="Shape 19"/>
+          <p:cNvPr id="22" name="Shape 19"/>
           <p:cNvSpPr/>
           <p:nvPr/>
         </p:nvSpPr>
@@ -15593,7 +15593,7 @@
       </p:sp>
       <p:sp>
         <p:nvSpPr>
-          <p:cNvPr id="24" name="Text 20"/>
+          <p:cNvPr id="23" name="Text 20"/>
           <p:cNvSpPr/>
           <p:nvPr/>
         </p:nvSpPr>
@@ -15632,7 +15632,7 @@
       </p:sp>
       <p:sp>
         <p:nvSpPr>
-          <p:cNvPr id="25" name="Text 21"/>
+          <p:cNvPr id="24" name="Text 21"/>
           <p:cNvSpPr/>
           <p:nvPr/>
         </p:nvSpPr>
@@ -15671,7 +15671,7 @@
       </p:sp>
       <p:sp>
         <p:nvSpPr>
-          <p:cNvPr id="26" name="Text 22"/>
+          <p:cNvPr id="25" name="Text 22"/>
           <p:cNvSpPr/>
           <p:nvPr/>
         </p:nvSpPr>
@@ -15713,7 +15713,7 @@
       </p:sp>
       <p:sp>
         <p:nvSpPr>
-          <p:cNvPr id="27" name="Shape 23"/>
+          <p:cNvPr id="26" name="Shape 23"/>
           <p:cNvSpPr/>
           <p:nvPr/>
         </p:nvSpPr>
@@ -15735,7 +15735,7 @@
       </p:sp>
       <p:sp>
         <p:nvSpPr>
-          <p:cNvPr id="28" name="Text 24"/>
+          <p:cNvPr id="27" name="Text 24"/>
           <p:cNvSpPr/>
           <p:nvPr/>
         </p:nvSpPr>
@@ -15774,7 +15774,7 @@
       </p:sp>
       <p:sp>
         <p:nvSpPr>
-          <p:cNvPr id="29" name="Text 25"/>
+          <p:cNvPr id="28" name="Text 25"/>
           <p:cNvSpPr/>
           <p:nvPr/>
         </p:nvSpPr>
@@ -16020,7 +16020,7 @@
       </p:pic>
       <p:sp>
         <p:nvSpPr>
-          <p:cNvPr id="7" name="Shape 3"/>
+          <p:cNvPr id="6" name="Shape 3"/>
           <p:cNvSpPr/>
           <p:nvPr/>
         </p:nvSpPr>
@@ -16040,7 +16040,7 @@
       </p:sp>
       <p:sp>
         <p:nvSpPr>
-          <p:cNvPr id="8" name="Text 4"/>
+          <p:cNvPr id="7" name="Text 4"/>
           <p:cNvSpPr/>
           <p:nvPr/>
         </p:nvSpPr>
@@ -16079,7 +16079,7 @@
       </p:sp>
       <p:sp>
         <p:nvSpPr>
-          <p:cNvPr id="9" name="Text 5"/>
+          <p:cNvPr id="8" name="Text 5"/>
           <p:cNvSpPr/>
           <p:nvPr/>
         </p:nvSpPr>
@@ -16132,7 +16132,7 @@
       </p:sp>
       <p:sp>
         <p:nvSpPr>
-          <p:cNvPr id="10" name="Shape 6"/>
+          <p:cNvPr id="9" name="Shape 6"/>
           <p:cNvSpPr/>
           <p:nvPr/>
         </p:nvSpPr>
@@ -16152,7 +16152,7 @@
       </p:sp>
       <p:sp>
         <p:nvSpPr>
-          <p:cNvPr id="11" name="Text 7"/>
+          <p:cNvPr id="10" name="Text 7"/>
           <p:cNvSpPr/>
           <p:nvPr/>
         </p:nvSpPr>
@@ -16191,7 +16191,7 @@
       </p:sp>
       <p:sp>
         <p:nvSpPr>
-          <p:cNvPr id="12" name="Text 8"/>
+          <p:cNvPr id="11" name="Text 8"/>
           <p:cNvSpPr/>
           <p:nvPr/>
         </p:nvSpPr>
@@ -16244,7 +16244,7 @@
       </p:sp>
       <p:sp>
         <p:nvSpPr>
-          <p:cNvPr id="13" name="Shape 9"/>
+          <p:cNvPr id="12" name="Shape 9"/>
           <p:cNvSpPr/>
           <p:nvPr/>
         </p:nvSpPr>
@@ -16264,7 +16264,7 @@
       </p:sp>
       <p:sp>
         <p:nvSpPr>
-          <p:cNvPr id="14" name="Text 10"/>
+          <p:cNvPr id="13" name="Text 10"/>
           <p:cNvSpPr/>
           <p:nvPr/>
         </p:nvSpPr>
@@ -16303,7 +16303,7 @@
       </p:sp>
       <p:sp>
         <p:nvSpPr>
-          <p:cNvPr id="15" name="Text 11"/>
+          <p:cNvPr id="14" name="Text 11"/>
           <p:cNvSpPr/>
           <p:nvPr/>
         </p:nvSpPr>
@@ -16356,7 +16356,7 @@
       </p:sp>
       <p:sp>
         <p:nvSpPr>
-          <p:cNvPr id="16" name="Shape 12"/>
+          <p:cNvPr id="15" name="Shape 12"/>
           <p:cNvSpPr/>
           <p:nvPr/>
         </p:nvSpPr>
@@ -16376,7 +16376,7 @@
       </p:sp>
       <p:sp>
         <p:nvSpPr>
-          <p:cNvPr id="17" name="Text 13"/>
+          <p:cNvPr id="16" name="Text 13"/>
           <p:cNvSpPr/>
           <p:nvPr/>
         </p:nvSpPr>
@@ -16415,7 +16415,7 @@
       </p:sp>
       <p:sp>
         <p:nvSpPr>
-          <p:cNvPr id="18" name="Text 14"/>
+          <p:cNvPr id="17" name="Text 14"/>
           <p:cNvSpPr/>
           <p:nvPr/>
         </p:nvSpPr>
@@ -16468,7 +16468,7 @@
       </p:sp>
       <p:sp>
         <p:nvSpPr>
-          <p:cNvPr id="19" name="Shape 15"/>
+          <p:cNvPr id="18" name="Shape 15"/>
           <p:cNvSpPr/>
           <p:nvPr/>
         </p:nvSpPr>
@@ -16488,7 +16488,7 @@
       </p:sp>
       <p:sp>
         <p:nvSpPr>
-          <p:cNvPr id="20" name="Text 16"/>
+          <p:cNvPr id="19" name="Text 16"/>
           <p:cNvSpPr/>
           <p:nvPr/>
         </p:nvSpPr>
@@ -16527,7 +16527,7 @@
       </p:sp>
       <p:sp>
         <p:nvSpPr>
-          <p:cNvPr id="21" name="Text 17"/>
+          <p:cNvPr id="20" name="Text 17"/>
           <p:cNvSpPr/>
           <p:nvPr/>
         </p:nvSpPr>
@@ -16784,7 +16784,7 @@
       </p:pic>
       <p:sp>
         <p:nvSpPr>
-          <p:cNvPr id="7" name="Shape 3"/>
+          <p:cNvPr id="6" name="Shape 3"/>
           <p:cNvSpPr/>
           <p:nvPr/>
         </p:nvSpPr>
@@ -16806,7 +16806,7 @@
       </p:sp>
       <p:sp>
         <p:nvSpPr>
-          <p:cNvPr id="8" name="Text 4"/>
+          <p:cNvPr id="7" name="Text 4"/>
           <p:cNvSpPr/>
           <p:nvPr/>
         </p:nvSpPr>
@@ -16845,7 +16845,7 @@
       </p:sp>
       <p:sp>
         <p:nvSpPr>
-          <p:cNvPr id="9" name="Text 5"/>
+          <p:cNvPr id="8" name="Text 5"/>
           <p:cNvSpPr/>
           <p:nvPr/>
         </p:nvSpPr>
@@ -16887,7 +16887,7 @@
       </p:sp>
       <p:sp>
         <p:nvSpPr>
-          <p:cNvPr id="10" name="Shape 6"/>
+          <p:cNvPr id="9" name="Shape 6"/>
           <p:cNvSpPr/>
           <p:nvPr/>
         </p:nvSpPr>
@@ -16909,7 +16909,7 @@
       </p:sp>
       <p:sp>
         <p:nvSpPr>
-          <p:cNvPr id="11" name="Text 7"/>
+          <p:cNvPr id="10" name="Text 7"/>
           <p:cNvSpPr/>
           <p:nvPr/>
         </p:nvSpPr>
@@ -16948,7 +16948,7 @@
       </p:sp>
       <p:sp>
         <p:nvSpPr>
-          <p:cNvPr id="12" name="Text 8"/>
+          <p:cNvPr id="11" name="Text 8"/>
           <p:cNvSpPr/>
           <p:nvPr/>
         </p:nvSpPr>
@@ -16990,7 +16990,7 @@
       </p:sp>
       <p:sp>
         <p:nvSpPr>
-          <p:cNvPr id="13" name="Shape 9"/>
+          <p:cNvPr id="12" name="Shape 9"/>
           <p:cNvSpPr/>
           <p:nvPr/>
         </p:nvSpPr>
@@ -17012,7 +17012,7 @@
       </p:sp>
       <p:sp>
         <p:nvSpPr>
-          <p:cNvPr id="14" name="Text 10"/>
+          <p:cNvPr id="13" name="Text 10"/>
           <p:cNvSpPr/>
           <p:nvPr/>
         </p:nvSpPr>
@@ -17051,7 +17051,7 @@
       </p:sp>
       <p:sp>
         <p:nvSpPr>
-          <p:cNvPr id="15" name="Text 11"/>
+          <p:cNvPr id="14" name="Text 11"/>
           <p:cNvSpPr/>
           <p:nvPr/>
         </p:nvSpPr>
@@ -17093,7 +17093,7 @@
       </p:sp>
       <p:sp>
         <p:nvSpPr>
-          <p:cNvPr id="16" name="Shape 12"/>
+          <p:cNvPr id="15" name="Shape 12"/>
           <p:cNvSpPr/>
           <p:nvPr/>
         </p:nvSpPr>
@@ -17120,7 +17120,7 @@
       </p:sp>
       <p:sp>
         <p:nvSpPr>
-          <p:cNvPr id="17" name="Text 13"/>
+          <p:cNvPr id="16" name="Text 13"/>
           <p:cNvSpPr/>
           <p:nvPr/>
         </p:nvSpPr>
@@ -17366,7 +17366,7 @@
       </p:pic>
       <p:sp>
         <p:nvSpPr>
-          <p:cNvPr id="7" name="Shape 3"/>
+          <p:cNvPr id="6" name="Shape 3"/>
           <p:cNvSpPr/>
           <p:nvPr/>
         </p:nvSpPr>
@@ -17393,7 +17393,7 @@
       </p:sp>
       <p:sp>
         <p:nvSpPr>
-          <p:cNvPr id="8" name="Shape 4"/>
+          <p:cNvPr id="7" name="Shape 4"/>
           <p:cNvSpPr/>
           <p:nvPr/>
         </p:nvSpPr>
@@ -17420,7 +17420,7 @@
       </p:sp>
       <p:sp>
         <p:nvSpPr>
-          <p:cNvPr id="9" name="Shape 5"/>
+          <p:cNvPr id="8" name="Shape 5"/>
           <p:cNvSpPr/>
           <p:nvPr/>
         </p:nvSpPr>
@@ -17440,7 +17440,7 @@
       </p:sp>
       <p:sp>
         <p:nvSpPr>
-          <p:cNvPr id="10" name="Shape 6"/>
+          <p:cNvPr id="9" name="Shape 6"/>
           <p:cNvSpPr/>
           <p:nvPr/>
         </p:nvSpPr>
@@ -17460,7 +17460,7 @@
       </p:sp>
       <p:sp>
         <p:nvSpPr>
-          <p:cNvPr id="11" name="Text 7"/>
+          <p:cNvPr id="10" name="Text 7"/>
           <p:cNvSpPr/>
           <p:nvPr/>
         </p:nvSpPr>
@@ -17499,7 +17499,7 @@
       </p:sp>
       <p:sp>
         <p:nvSpPr>
-          <p:cNvPr id="12" name="Shape 8"/>
+          <p:cNvPr id="11" name="Shape 8"/>
           <p:cNvSpPr/>
           <p:nvPr/>
         </p:nvSpPr>
@@ -17526,7 +17526,7 @@
       </p:sp>
       <p:sp>
         <p:nvSpPr>
-          <p:cNvPr id="13" name="Shape 9"/>
+          <p:cNvPr id="12" name="Shape 9"/>
           <p:cNvSpPr/>
           <p:nvPr/>
         </p:nvSpPr>
@@ -17546,7 +17546,7 @@
       </p:sp>
       <p:sp>
         <p:nvSpPr>
-          <p:cNvPr id="14" name="Shape 10"/>
+          <p:cNvPr id="13" name="Shape 10"/>
           <p:cNvSpPr/>
           <p:nvPr/>
         </p:nvSpPr>
@@ -17566,7 +17566,7 @@
       </p:sp>
       <p:sp>
         <p:nvSpPr>
-          <p:cNvPr id="15" name="Text 11"/>
+          <p:cNvPr id="14" name="Text 11"/>
           <p:cNvSpPr/>
           <p:nvPr/>
         </p:nvSpPr>
@@ -17605,7 +17605,7 @@
       </p:sp>
       <p:sp>
         <p:nvSpPr>
-          <p:cNvPr id="16" name="Shape 12"/>
+          <p:cNvPr id="15" name="Shape 12"/>
           <p:cNvSpPr/>
           <p:nvPr/>
         </p:nvSpPr>
@@ -17632,7 +17632,7 @@
       </p:sp>
       <p:sp>
         <p:nvSpPr>
-          <p:cNvPr id="17" name="Shape 13"/>
+          <p:cNvPr id="16" name="Shape 13"/>
           <p:cNvSpPr/>
           <p:nvPr/>
         </p:nvSpPr>
@@ -17652,7 +17652,7 @@
       </p:sp>
       <p:sp>
         <p:nvSpPr>
-          <p:cNvPr id="18" name="Shape 14"/>
+          <p:cNvPr id="17" name="Shape 14"/>
           <p:cNvSpPr/>
           <p:nvPr/>
         </p:nvSpPr>
@@ -17672,7 +17672,7 @@
       </p:sp>
       <p:sp>
         <p:nvSpPr>
-          <p:cNvPr id="19" name="Text 15"/>
+          <p:cNvPr id="18" name="Text 15"/>
           <p:cNvSpPr/>
           <p:nvPr/>
         </p:nvSpPr>
@@ -17711,7 +17711,7 @@
       </p:sp>
       <p:sp>
         <p:nvSpPr>
-          <p:cNvPr id="20" name="Shape 16"/>
+          <p:cNvPr id="19" name="Shape 16"/>
           <p:cNvSpPr/>
           <p:nvPr/>
         </p:nvSpPr>
@@ -17738,7 +17738,7 @@
       </p:sp>
       <p:sp>
         <p:nvSpPr>
-          <p:cNvPr id="21" name="Shape 17"/>
+          <p:cNvPr id="20" name="Shape 17"/>
           <p:cNvSpPr/>
           <p:nvPr/>
         </p:nvSpPr>
@@ -17758,7 +17758,7 @@
       </p:sp>
       <p:sp>
         <p:nvSpPr>
-          <p:cNvPr id="22" name="Shape 18"/>
+          <p:cNvPr id="21" name="Shape 18"/>
           <p:cNvSpPr/>
           <p:nvPr/>
         </p:nvSpPr>
@@ -17778,7 +17778,7 @@
       </p:sp>
       <p:sp>
         <p:nvSpPr>
-          <p:cNvPr id="23" name="Text 19"/>
+          <p:cNvPr id="22" name="Text 19"/>
           <p:cNvSpPr/>
           <p:nvPr/>
         </p:nvSpPr>
@@ -17817,7 +17817,7 @@
       </p:sp>
       <p:sp>
         <p:nvSpPr>
-          <p:cNvPr id="24" name="Text 20"/>
+          <p:cNvPr id="23" name="Text 20"/>
           <p:cNvSpPr/>
           <p:nvPr/>
         </p:nvSpPr>
@@ -18060,7 +18060,7 @@
       </p:pic>
       <p:sp>
         <p:nvSpPr>
-          <p:cNvPr id="7" name="Shape 3"/>
+          <p:cNvPr id="6" name="Shape 3"/>
           <p:cNvSpPr/>
           <p:nvPr/>
         </p:nvSpPr>
@@ -18087,7 +18087,7 @@
       </p:sp>
       <p:sp>
         <p:nvSpPr>
-          <p:cNvPr id="8" name="Shape 4"/>
+          <p:cNvPr id="7" name="Shape 4"/>
           <p:cNvSpPr/>
           <p:nvPr/>
         </p:nvSpPr>
@@ -18107,7 +18107,7 @@
       </p:sp>
       <p:sp>
         <p:nvSpPr>
-          <p:cNvPr id="9" name="Shape 5"/>
+          <p:cNvPr id="8" name="Shape 5"/>
           <p:cNvSpPr/>
           <p:nvPr/>
         </p:nvSpPr>
@@ -18127,7 +18127,7 @@
       </p:sp>
       <p:sp>
         <p:nvSpPr>
-          <p:cNvPr id="10" name="Shape 6"/>
+          <p:cNvPr id="9" name="Shape 6"/>
           <p:cNvSpPr/>
           <p:nvPr/>
         </p:nvSpPr>
@@ -18147,7 +18147,7 @@
       </p:sp>
       <p:sp>
         <p:nvSpPr>
-          <p:cNvPr id="11" name="Text 7"/>
+          <p:cNvPr id="10" name="Text 7"/>
           <p:cNvSpPr/>
           <p:nvPr/>
         </p:nvSpPr>
@@ -18200,7 +18200,7 @@
       </p:sp>
       <p:sp>
         <p:nvSpPr>
-          <p:cNvPr id="12" name="Shape 8"/>
+          <p:cNvPr id="11" name="Shape 8"/>
           <p:cNvSpPr/>
           <p:nvPr/>
         </p:nvSpPr>
@@ -18227,7 +18227,7 @@
       </p:sp>
       <p:sp>
         <p:nvSpPr>
-          <p:cNvPr id="13" name="Shape 9"/>
+          <p:cNvPr id="12" name="Shape 9"/>
           <p:cNvSpPr/>
           <p:nvPr/>
         </p:nvSpPr>
@@ -18247,7 +18247,7 @@
       </p:sp>
       <p:sp>
         <p:nvSpPr>
-          <p:cNvPr id="14" name="Shape 10"/>
+          <p:cNvPr id="13" name="Shape 10"/>
           <p:cNvSpPr/>
           <p:nvPr/>
         </p:nvSpPr>
@@ -18267,7 +18267,7 @@
       </p:sp>
       <p:sp>
         <p:nvSpPr>
-          <p:cNvPr id="15" name="Shape 11"/>
+          <p:cNvPr id="14" name="Shape 11"/>
           <p:cNvSpPr/>
           <p:nvPr/>
         </p:nvSpPr>
@@ -18287,7 +18287,7 @@
       </p:sp>
       <p:sp>
         <p:nvSpPr>
-          <p:cNvPr id="16" name="Text 12"/>
+          <p:cNvPr id="15" name="Text 12"/>
           <p:cNvSpPr/>
           <p:nvPr/>
         </p:nvSpPr>
@@ -18340,7 +18340,7 @@
       </p:sp>
       <p:sp>
         <p:nvSpPr>
-          <p:cNvPr id="17" name="Shape 13"/>
+          <p:cNvPr id="16" name="Shape 13"/>
           <p:cNvSpPr/>
           <p:nvPr/>
         </p:nvSpPr>
@@ -18367,7 +18367,7 @@
       </p:sp>
       <p:sp>
         <p:nvSpPr>
-          <p:cNvPr id="18" name="Shape 14"/>
+          <p:cNvPr id="17" name="Shape 14"/>
           <p:cNvSpPr/>
           <p:nvPr/>
         </p:nvSpPr>
@@ -18387,7 +18387,7 @@
       </p:sp>
       <p:sp>
         <p:nvSpPr>
-          <p:cNvPr id="19" name="Shape 15"/>
+          <p:cNvPr id="18" name="Shape 15"/>
           <p:cNvSpPr/>
           <p:nvPr/>
         </p:nvSpPr>
@@ -18407,7 +18407,7 @@
       </p:sp>
       <p:sp>
         <p:nvSpPr>
-          <p:cNvPr id="20" name="Shape 16"/>
+          <p:cNvPr id="19" name="Shape 16"/>
           <p:cNvSpPr/>
           <p:nvPr/>
         </p:nvSpPr>
@@ -18427,7 +18427,7 @@
       </p:sp>
       <p:sp>
         <p:nvSpPr>
-          <p:cNvPr id="21" name="Text 17"/>
+          <p:cNvPr id="20" name="Text 17"/>
           <p:cNvSpPr/>
           <p:nvPr/>
         </p:nvSpPr>
@@ -18480,7 +18480,7 @@
       </p:sp>
       <p:sp>
         <p:nvSpPr>
-          <p:cNvPr id="22" name="Shape 18"/>
+          <p:cNvPr id="21" name="Shape 18"/>
           <p:cNvSpPr/>
           <p:nvPr/>
         </p:nvSpPr>
@@ -18507,7 +18507,7 @@
       </p:sp>
       <p:sp>
         <p:nvSpPr>
-          <p:cNvPr id="23" name="Shape 19"/>
+          <p:cNvPr id="22" name="Shape 19"/>
           <p:cNvSpPr/>
           <p:nvPr/>
         </p:nvSpPr>
@@ -18527,7 +18527,7 @@
       </p:sp>
       <p:sp>
         <p:nvSpPr>
-          <p:cNvPr id="24" name="Shape 20"/>
+          <p:cNvPr id="23" name="Shape 20"/>
           <p:cNvSpPr/>
           <p:nvPr/>
         </p:nvSpPr>
@@ -18547,7 +18547,7 @@
       </p:sp>
       <p:sp>
         <p:nvSpPr>
-          <p:cNvPr id="25" name="Shape 21"/>
+          <p:cNvPr id="24" name="Shape 21"/>
           <p:cNvSpPr/>
           <p:nvPr/>
         </p:nvSpPr>
@@ -18567,7 +18567,7 @@
       </p:sp>
       <p:sp>
         <p:nvSpPr>
-          <p:cNvPr id="26" name="Text 22"/>
+          <p:cNvPr id="25" name="Text 22"/>
           <p:cNvSpPr/>
           <p:nvPr/>
         </p:nvSpPr>
@@ -18620,7 +18620,7 @@
       </p:sp>
       <p:sp>
         <p:nvSpPr>
-          <p:cNvPr id="27" name="Shape 23"/>
+          <p:cNvPr id="26" name="Shape 23"/>
           <p:cNvSpPr/>
           <p:nvPr/>
         </p:nvSpPr>
@@ -18647,7 +18647,7 @@
       </p:sp>
       <p:sp>
         <p:nvSpPr>
-          <p:cNvPr id="28" name="Shape 24"/>
+          <p:cNvPr id="27" name="Shape 24"/>
           <p:cNvSpPr/>
           <p:nvPr/>
         </p:nvSpPr>
@@ -18667,7 +18667,7 @@
       </p:sp>
       <p:sp>
         <p:nvSpPr>
-          <p:cNvPr id="29" name="Shape 25"/>
+          <p:cNvPr id="28" name="Shape 25"/>
           <p:cNvSpPr/>
           <p:nvPr/>
         </p:nvSpPr>
@@ -18687,7 +18687,7 @@
       </p:sp>
       <p:sp>
         <p:nvSpPr>
-          <p:cNvPr id="30" name="Shape 26"/>
+          <p:cNvPr id="29" name="Shape 26"/>
           <p:cNvSpPr/>
           <p:nvPr/>
         </p:nvSpPr>
@@ -18707,7 +18707,7 @@
       </p:sp>
       <p:sp>
         <p:nvSpPr>
-          <p:cNvPr id="31" name="Text 27"/>
+          <p:cNvPr id="30" name="Text 27"/>
           <p:cNvSpPr/>
           <p:nvPr/>
         </p:nvSpPr>
@@ -18964,7 +18964,7 @@
       </p:pic>
       <p:sp>
         <p:nvSpPr>
-          <p:cNvPr id="7" name="Shape 3"/>
+          <p:cNvPr id="6" name="Shape 3"/>
           <p:cNvSpPr/>
           <p:nvPr/>
         </p:nvSpPr>
@@ -18991,7 +18991,7 @@
       </p:sp>
       <p:sp>
         <p:nvSpPr>
-          <p:cNvPr id="8" name="Text 4"/>
+          <p:cNvPr id="7" name="Text 4"/>
           <p:cNvSpPr/>
           <p:nvPr/>
         </p:nvSpPr>
@@ -19030,7 +19030,7 @@
       </p:sp>
       <p:sp>
         <p:nvSpPr>
-          <p:cNvPr id="9" name="Text 5"/>
+          <p:cNvPr id="8" name="Text 5"/>
           <p:cNvSpPr/>
           <p:nvPr/>
         </p:nvSpPr>
@@ -19130,7 +19130,7 @@
       </p:sp>
       <p:sp>
         <p:nvSpPr>
-          <p:cNvPr id="10" name="Shape 6"/>
+          <p:cNvPr id="9" name="Shape 6"/>
           <p:cNvSpPr/>
           <p:nvPr/>
         </p:nvSpPr>
@@ -19152,7 +19152,7 @@
       </p:sp>
       <p:sp>
         <p:nvSpPr>
-          <p:cNvPr id="11" name="Text 7"/>
+          <p:cNvPr id="10" name="Text 7"/>
           <p:cNvSpPr/>
           <p:nvPr/>
         </p:nvSpPr>
@@ -19191,7 +19191,7 @@
       </p:sp>
       <p:sp>
         <p:nvSpPr>
-          <p:cNvPr id="12" name="Text 8"/>
+          <p:cNvPr id="11" name="Text 8"/>
           <p:cNvSpPr/>
           <p:nvPr/>
         </p:nvSpPr>
@@ -19233,7 +19233,7 @@
       </p:sp>
       <p:sp>
         <p:nvSpPr>
-          <p:cNvPr id="13" name="Shape 9"/>
+          <p:cNvPr id="12" name="Shape 9"/>
           <p:cNvSpPr/>
           <p:nvPr/>
         </p:nvSpPr>
@@ -19260,7 +19260,7 @@
       </p:sp>
       <p:sp>
         <p:nvSpPr>
-          <p:cNvPr id="14" name="Text 10"/>
+          <p:cNvPr id="13" name="Text 10"/>
           <p:cNvSpPr/>
           <p:nvPr/>
         </p:nvSpPr>
@@ -19299,7 +19299,7 @@
       </p:sp>
       <p:sp>
         <p:nvSpPr>
-          <p:cNvPr id="15" name="Text 11"/>
+          <p:cNvPr id="14" name="Text 11"/>
           <p:cNvSpPr/>
           <p:nvPr/>
         </p:nvSpPr>
@@ -20065,7 +20065,7 @@
       </p:pic>
       <p:sp>
         <p:nvSpPr>
-          <p:cNvPr id="7" name="Shape 3"/>
+          <p:cNvPr id="6" name="Shape 3"/>
           <p:cNvSpPr/>
           <p:nvPr/>
         </p:nvSpPr>
@@ -20092,7 +20092,7 @@
       </p:sp>
       <p:sp>
         <p:nvSpPr>
-          <p:cNvPr id="8" name="Shape 4"/>
+          <p:cNvPr id="7" name="Shape 4"/>
           <p:cNvSpPr/>
           <p:nvPr/>
         </p:nvSpPr>
@@ -20112,7 +20112,7 @@
       </p:sp>
       <p:sp>
         <p:nvSpPr>
-          <p:cNvPr id="9" name="Text 5"/>
+          <p:cNvPr id="8" name="Text 5"/>
           <p:cNvSpPr/>
           <p:nvPr/>
         </p:nvSpPr>
@@ -20151,7 +20151,7 @@
       </p:sp>
       <p:sp>
         <p:nvSpPr>
-          <p:cNvPr id="10" name="Text 6"/>
+          <p:cNvPr id="9" name="Text 6"/>
           <p:cNvSpPr/>
           <p:nvPr/>
         </p:nvSpPr>
@@ -20190,7 +20190,7 @@
       </p:sp>
       <p:sp>
         <p:nvSpPr>
-          <p:cNvPr id="11" name="Shape 7"/>
+          <p:cNvPr id="10" name="Shape 7"/>
           <p:cNvSpPr/>
           <p:nvPr/>
         </p:nvSpPr>
@@ -20217,7 +20217,7 @@
       </p:sp>
       <p:sp>
         <p:nvSpPr>
-          <p:cNvPr id="12" name="Shape 8"/>
+          <p:cNvPr id="11" name="Shape 8"/>
           <p:cNvSpPr/>
           <p:nvPr/>
         </p:nvSpPr>
@@ -20237,7 +20237,7 @@
       </p:sp>
       <p:sp>
         <p:nvSpPr>
-          <p:cNvPr id="13" name="Text 9"/>
+          <p:cNvPr id="12" name="Text 9"/>
           <p:cNvSpPr/>
           <p:nvPr/>
         </p:nvSpPr>
@@ -20276,7 +20276,7 @@
       </p:sp>
       <p:sp>
         <p:nvSpPr>
-          <p:cNvPr id="14" name="Text 10"/>
+          <p:cNvPr id="13" name="Text 10"/>
           <p:cNvSpPr/>
           <p:nvPr/>
         </p:nvSpPr>
@@ -20315,7 +20315,7 @@
       </p:sp>
       <p:sp>
         <p:nvSpPr>
-          <p:cNvPr id="15" name="Shape 11"/>
+          <p:cNvPr id="14" name="Shape 11"/>
           <p:cNvSpPr/>
           <p:nvPr/>
         </p:nvSpPr>
@@ -20342,7 +20342,7 @@
       </p:sp>
       <p:sp>
         <p:nvSpPr>
-          <p:cNvPr id="16" name="Shape 12"/>
+          <p:cNvPr id="15" name="Shape 12"/>
           <p:cNvSpPr/>
           <p:nvPr/>
         </p:nvSpPr>
@@ -20362,7 +20362,7 @@
       </p:sp>
       <p:sp>
         <p:nvSpPr>
-          <p:cNvPr id="17" name="Text 13"/>
+          <p:cNvPr id="16" name="Text 13"/>
           <p:cNvSpPr/>
           <p:nvPr/>
         </p:nvSpPr>
@@ -20401,7 +20401,7 @@
       </p:sp>
       <p:sp>
         <p:nvSpPr>
-          <p:cNvPr id="18" name="Text 14"/>
+          <p:cNvPr id="17" name="Text 14"/>
           <p:cNvSpPr/>
           <p:nvPr/>
         </p:nvSpPr>
@@ -20440,7 +20440,7 @@
       </p:sp>
       <p:sp>
         <p:nvSpPr>
-          <p:cNvPr id="19" name="Shape 15"/>
+          <p:cNvPr id="18" name="Shape 15"/>
           <p:cNvSpPr/>
           <p:nvPr/>
         </p:nvSpPr>
@@ -20467,7 +20467,7 @@
       </p:sp>
       <p:sp>
         <p:nvSpPr>
-          <p:cNvPr id="20" name="Shape 16"/>
+          <p:cNvPr id="19" name="Shape 16"/>
           <p:cNvSpPr/>
           <p:nvPr/>
         </p:nvSpPr>
@@ -20487,7 +20487,7 @@
       </p:sp>
       <p:sp>
         <p:nvSpPr>
-          <p:cNvPr id="21" name="Text 17"/>
+          <p:cNvPr id="20" name="Text 17"/>
           <p:cNvSpPr/>
           <p:nvPr/>
         </p:nvSpPr>
@@ -20526,7 +20526,7 @@
       </p:sp>
       <p:sp>
         <p:nvSpPr>
-          <p:cNvPr id="22" name="Text 18"/>
+          <p:cNvPr id="21" name="Text 18"/>
           <p:cNvSpPr/>
           <p:nvPr/>
         </p:nvSpPr>
@@ -20565,7 +20565,7 @@
       </p:sp>
       <p:sp>
         <p:nvSpPr>
-          <p:cNvPr id="23" name="Shape 19"/>
+          <p:cNvPr id="22" name="Shape 19"/>
           <p:cNvSpPr/>
           <p:nvPr/>
         </p:nvSpPr>
@@ -20592,7 +20592,7 @@
       </p:sp>
       <p:sp>
         <p:nvSpPr>
-          <p:cNvPr id="24" name="Shape 20"/>
+          <p:cNvPr id="23" name="Shape 20"/>
           <p:cNvSpPr/>
           <p:nvPr/>
         </p:nvSpPr>
@@ -20612,7 +20612,7 @@
       </p:sp>
       <p:sp>
         <p:nvSpPr>
-          <p:cNvPr id="25" name="Text 21"/>
+          <p:cNvPr id="24" name="Text 21"/>
           <p:cNvSpPr/>
           <p:nvPr/>
         </p:nvSpPr>
@@ -20651,7 +20651,7 @@
       </p:sp>
       <p:sp>
         <p:nvSpPr>
-          <p:cNvPr id="26" name="Text 22"/>
+          <p:cNvPr id="25" name="Text 22"/>
           <p:cNvSpPr/>
           <p:nvPr/>
         </p:nvSpPr>
@@ -20690,7 +20690,7 @@
       </p:sp>
       <p:sp>
         <p:nvSpPr>
-          <p:cNvPr id="27" name="Shape 23"/>
+          <p:cNvPr id="26" name="Shape 23"/>
           <p:cNvSpPr/>
           <p:nvPr/>
         </p:nvSpPr>
@@ -20717,7 +20717,7 @@
       </p:sp>
       <p:sp>
         <p:nvSpPr>
-          <p:cNvPr id="28" name="Shape 24"/>
+          <p:cNvPr id="27" name="Shape 24"/>
           <p:cNvSpPr/>
           <p:nvPr/>
         </p:nvSpPr>
@@ -20737,7 +20737,7 @@
       </p:sp>
       <p:sp>
         <p:nvSpPr>
-          <p:cNvPr id="29" name="Text 25"/>
+          <p:cNvPr id="28" name="Text 25"/>
           <p:cNvSpPr/>
           <p:nvPr/>
         </p:nvSpPr>
@@ -20776,7 +20776,7 @@
       </p:sp>
       <p:sp>
         <p:nvSpPr>
-          <p:cNvPr id="30" name="Text 26"/>
+          <p:cNvPr id="29" name="Text 26"/>
           <p:cNvSpPr/>
           <p:nvPr/>
         </p:nvSpPr>
@@ -20815,7 +20815,7 @@
       </p:sp>
       <p:sp>
         <p:nvSpPr>
-          <p:cNvPr id="31" name="Shape 27"/>
+          <p:cNvPr id="30" name="Shape 27"/>
           <p:cNvSpPr/>
           <p:nvPr/>
         </p:nvSpPr>
@@ -20842,7 +20842,7 @@
       </p:sp>
       <p:sp>
         <p:nvSpPr>
-          <p:cNvPr id="32" name="Shape 28"/>
+          <p:cNvPr id="31" name="Shape 28"/>
           <p:cNvSpPr/>
           <p:nvPr/>
         </p:nvSpPr>
@@ -20862,7 +20862,7 @@
       </p:sp>
       <p:sp>
         <p:nvSpPr>
-          <p:cNvPr id="33" name="Text 29"/>
+          <p:cNvPr id="32" name="Text 29"/>
           <p:cNvSpPr/>
           <p:nvPr/>
         </p:nvSpPr>
@@ -20901,7 +20901,7 @@
       </p:sp>
       <p:sp>
         <p:nvSpPr>
-          <p:cNvPr id="34" name="Text 30"/>
+          <p:cNvPr id="33" name="Text 30"/>
           <p:cNvSpPr/>
           <p:nvPr/>
         </p:nvSpPr>
@@ -20940,7 +20940,7 @@
       </p:sp>
       <p:sp>
         <p:nvSpPr>
-          <p:cNvPr id="35" name="Shape 31"/>
+          <p:cNvPr id="34" name="Shape 31"/>
           <p:cNvSpPr/>
           <p:nvPr/>
         </p:nvSpPr>
@@ -20962,7 +20962,7 @@
       </p:sp>
       <p:sp>
         <p:nvSpPr>
-          <p:cNvPr id="36" name="Shape 32"/>
+          <p:cNvPr id="35" name="Shape 32"/>
           <p:cNvSpPr/>
           <p:nvPr/>
         </p:nvSpPr>
@@ -20982,7 +20982,7 @@
       </p:sp>
       <p:sp>
         <p:nvSpPr>
-          <p:cNvPr id="37" name="Text 33"/>
+          <p:cNvPr id="36" name="Text 33"/>
           <p:cNvSpPr/>
           <p:nvPr/>
         </p:nvSpPr>
@@ -21021,7 +21021,7 @@
       </p:sp>
       <p:sp>
         <p:nvSpPr>
-          <p:cNvPr id="38" name="Text 34"/>
+          <p:cNvPr id="37" name="Text 34"/>
           <p:cNvSpPr/>
           <p:nvPr/>
         </p:nvSpPr>
@@ -21060,7 +21060,7 @@
       </p:sp>
       <p:sp>
         <p:nvSpPr>
-          <p:cNvPr id="39" name="Shape 35"/>
+          <p:cNvPr id="38" name="Shape 35"/>
           <p:cNvSpPr/>
           <p:nvPr/>
         </p:nvSpPr>
@@ -21087,7 +21087,7 @@
       </p:sp>
       <p:sp>
         <p:nvSpPr>
-          <p:cNvPr id="40" name="Shape 36"/>
+          <p:cNvPr id="39" name="Shape 36"/>
           <p:cNvSpPr/>
           <p:nvPr/>
         </p:nvSpPr>
@@ -21107,7 +21107,7 @@
       </p:sp>
       <p:sp>
         <p:nvSpPr>
-          <p:cNvPr id="41" name="Text 37"/>
+          <p:cNvPr id="40" name="Text 37"/>
           <p:cNvSpPr/>
           <p:nvPr/>
         </p:nvSpPr>
@@ -21146,7 +21146,7 @@
       </p:sp>
       <p:sp>
         <p:nvSpPr>
-          <p:cNvPr id="42" name="Text 38"/>
+          <p:cNvPr id="41" name="Text 38"/>
           <p:cNvSpPr/>
           <p:nvPr/>
         </p:nvSpPr>
@@ -21185,7 +21185,7 @@
       </p:sp>
       <p:sp>
         <p:nvSpPr>
-          <p:cNvPr id="43" name="Shape 39"/>
+          <p:cNvPr id="42" name="Shape 39"/>
           <p:cNvSpPr/>
           <p:nvPr/>
         </p:nvSpPr>
@@ -21212,7 +21212,7 @@
       </p:sp>
       <p:sp>
         <p:nvSpPr>
-          <p:cNvPr id="44" name="Shape 40"/>
+          <p:cNvPr id="43" name="Shape 40"/>
           <p:cNvSpPr/>
           <p:nvPr/>
         </p:nvSpPr>
@@ -21232,7 +21232,7 @@
       </p:sp>
       <p:sp>
         <p:nvSpPr>
-          <p:cNvPr id="45" name="Text 41"/>
+          <p:cNvPr id="44" name="Text 41"/>
           <p:cNvSpPr/>
           <p:nvPr/>
         </p:nvSpPr>
@@ -21271,7 +21271,7 @@
       </p:sp>
       <p:sp>
         <p:nvSpPr>
-          <p:cNvPr id="46" name="Text 42"/>
+          <p:cNvPr id="45" name="Text 42"/>
           <p:cNvSpPr/>
           <p:nvPr/>
         </p:nvSpPr>
@@ -21310,7 +21310,7 @@
       </p:sp>
       <p:sp>
         <p:nvSpPr>
-          <p:cNvPr id="47" name="Shape 43"/>
+          <p:cNvPr id="46" name="Shape 43"/>
           <p:cNvSpPr/>
           <p:nvPr/>
         </p:nvSpPr>
@@ -21337,7 +21337,7 @@
       </p:sp>
       <p:sp>
         <p:nvSpPr>
-          <p:cNvPr id="48" name="Shape 44"/>
+          <p:cNvPr id="47" name="Shape 44"/>
           <p:cNvSpPr/>
           <p:nvPr/>
         </p:nvSpPr>
@@ -21357,7 +21357,7 @@
       </p:sp>
       <p:sp>
         <p:nvSpPr>
-          <p:cNvPr id="49" name="Text 45"/>
+          <p:cNvPr id="48" name="Text 45"/>
           <p:cNvSpPr/>
           <p:nvPr/>
         </p:nvSpPr>
@@ -21396,7 +21396,7 @@
       </p:sp>
       <p:sp>
         <p:nvSpPr>
-          <p:cNvPr id="50" name="Text 46"/>
+          <p:cNvPr id="49" name="Text 46"/>
           <p:cNvSpPr/>
           <p:nvPr/>
         </p:nvSpPr>
@@ -21435,7 +21435,7 @@
       </p:sp>
       <p:sp>
         <p:nvSpPr>
-          <p:cNvPr id="51" name="Shape 47"/>
+          <p:cNvPr id="50" name="Shape 47"/>
           <p:cNvSpPr/>
           <p:nvPr/>
         </p:nvSpPr>
@@ -21462,7 +21462,7 @@
       </p:sp>
       <p:sp>
         <p:nvSpPr>
-          <p:cNvPr id="52" name="Shape 48"/>
+          <p:cNvPr id="51" name="Shape 48"/>
           <p:cNvSpPr/>
           <p:nvPr/>
         </p:nvSpPr>
@@ -21482,7 +21482,7 @@
       </p:sp>
       <p:sp>
         <p:nvSpPr>
-          <p:cNvPr id="53" name="Text 49"/>
+          <p:cNvPr id="52" name="Text 49"/>
           <p:cNvSpPr/>
           <p:nvPr/>
         </p:nvSpPr>
@@ -21521,7 +21521,7 @@
       </p:sp>
       <p:sp>
         <p:nvSpPr>
-          <p:cNvPr id="54" name="Text 50"/>
+          <p:cNvPr id="53" name="Text 50"/>
           <p:cNvSpPr/>
           <p:nvPr/>
         </p:nvSpPr>
@@ -21560,7 +21560,7 @@
       </p:sp>
       <p:sp>
         <p:nvSpPr>
-          <p:cNvPr id="55" name="Shape 51"/>
+          <p:cNvPr id="54" name="Shape 51"/>
           <p:cNvSpPr/>
           <p:nvPr/>
         </p:nvSpPr>
@@ -21587,7 +21587,7 @@
       </p:sp>
       <p:sp>
         <p:nvSpPr>
-          <p:cNvPr id="56" name="Text 52"/>
+          <p:cNvPr id="55" name="Text 52"/>
           <p:cNvSpPr/>
           <p:nvPr/>
         </p:nvSpPr>
@@ -21875,7 +21875,7 @@
       </p:pic>
       <p:sp>
         <p:nvSpPr>
-          <p:cNvPr id="8" name="Shape 4"/>
+          <p:cNvPr id="7" name="Shape 4"/>
           <p:cNvSpPr/>
           <p:nvPr/>
         </p:nvSpPr>
@@ -21902,7 +21902,7 @@
       </p:sp>
       <p:sp>
         <p:nvSpPr>
-          <p:cNvPr id="9" name="Text 5"/>
+          <p:cNvPr id="8" name="Text 5"/>
           <p:cNvSpPr/>
           <p:nvPr/>
         </p:nvSpPr>
@@ -21941,7 +21941,7 @@
       </p:sp>
       <p:sp>
         <p:nvSpPr>
-          <p:cNvPr id="10" name="Text 6"/>
+          <p:cNvPr id="9" name="Text 6"/>
           <p:cNvSpPr/>
           <p:nvPr/>
         </p:nvSpPr>
@@ -21983,7 +21983,7 @@
       </p:sp>
       <p:sp>
         <p:nvSpPr>
-          <p:cNvPr id="11" name="Shape 7"/>
+          <p:cNvPr id="10" name="Shape 7"/>
           <p:cNvSpPr/>
           <p:nvPr/>
         </p:nvSpPr>
@@ -22010,7 +22010,7 @@
       </p:sp>
       <p:sp>
         <p:nvSpPr>
-          <p:cNvPr id="12" name="Text 8"/>
+          <p:cNvPr id="11" name="Text 8"/>
           <p:cNvSpPr/>
           <p:nvPr/>
         </p:nvSpPr>
@@ -22049,7 +22049,7 @@
       </p:sp>
       <p:sp>
         <p:nvSpPr>
-          <p:cNvPr id="13" name="Text 9"/>
+          <p:cNvPr id="12" name="Text 9"/>
           <p:cNvSpPr/>
           <p:nvPr/>
         </p:nvSpPr>
@@ -22091,7 +22091,7 @@
       </p:sp>
       <p:sp>
         <p:nvSpPr>
-          <p:cNvPr id="14" name="Shape 10"/>
+          <p:cNvPr id="13" name="Shape 10"/>
           <p:cNvSpPr/>
           <p:nvPr/>
         </p:nvSpPr>
@@ -22118,7 +22118,7 @@
       </p:sp>
       <p:sp>
         <p:nvSpPr>
-          <p:cNvPr id="15" name="Text 11"/>
+          <p:cNvPr id="14" name="Text 11"/>
           <p:cNvSpPr/>
           <p:nvPr/>
         </p:nvSpPr>
@@ -22157,7 +22157,7 @@
       </p:sp>
       <p:sp>
         <p:nvSpPr>
-          <p:cNvPr id="16" name="Text 12"/>
+          <p:cNvPr id="15" name="Text 12"/>
           <p:cNvSpPr/>
           <p:nvPr/>
         </p:nvSpPr>
@@ -22199,7 +22199,7 @@
       </p:sp>
       <p:sp>
         <p:nvSpPr>
-          <p:cNvPr id="17" name="Shape 13"/>
+          <p:cNvPr id="16" name="Shape 13"/>
           <p:cNvSpPr/>
           <p:nvPr/>
         </p:nvSpPr>
@@ -22226,7 +22226,7 @@
       </p:sp>
       <p:sp>
         <p:nvSpPr>
-          <p:cNvPr id="18" name="Text 14"/>
+          <p:cNvPr id="17" name="Text 14"/>
           <p:cNvSpPr/>
           <p:nvPr/>
         </p:nvSpPr>
@@ -22265,7 +22265,7 @@
       </p:sp>
       <p:sp>
         <p:nvSpPr>
-          <p:cNvPr id="19" name="Text 15"/>
+          <p:cNvPr id="18" name="Text 15"/>
           <p:cNvSpPr/>
           <p:nvPr/>
         </p:nvSpPr>
@@ -22307,7 +22307,7 @@
       </p:sp>
       <p:sp>
         <p:nvSpPr>
-          <p:cNvPr id="20" name="Shape 16"/>
+          <p:cNvPr id="19" name="Shape 16"/>
           <p:cNvSpPr/>
           <p:nvPr/>
         </p:nvSpPr>
@@ -22334,7 +22334,7 @@
       </p:sp>
       <p:sp>
         <p:nvSpPr>
-          <p:cNvPr id="21" name="Text 17"/>
+          <p:cNvPr id="20" name="Text 17"/>
           <p:cNvSpPr/>
           <p:nvPr/>
         </p:nvSpPr>
@@ -22373,7 +22373,7 @@
       </p:sp>
       <p:sp>
         <p:nvSpPr>
-          <p:cNvPr id="22" name="Text 18"/>
+          <p:cNvPr id="21" name="Text 18"/>
           <p:cNvSpPr/>
           <p:nvPr/>
         </p:nvSpPr>
@@ -22415,7 +22415,7 @@
       </p:sp>
       <p:sp>
         <p:nvSpPr>
-          <p:cNvPr id="23" name="Shape 19"/>
+          <p:cNvPr id="22" name="Shape 19"/>
           <p:cNvSpPr/>
           <p:nvPr/>
         </p:nvSpPr>
@@ -22442,7 +22442,7 @@
       </p:sp>
       <p:sp>
         <p:nvSpPr>
-          <p:cNvPr id="24" name="Text 20"/>
+          <p:cNvPr id="23" name="Text 20"/>
           <p:cNvSpPr/>
           <p:nvPr/>
         </p:nvSpPr>
@@ -22481,7 +22481,7 @@
       </p:sp>
       <p:sp>
         <p:nvSpPr>
-          <p:cNvPr id="25" name="Text 21"/>
+          <p:cNvPr id="24" name="Text 21"/>
           <p:cNvSpPr/>
           <p:nvPr/>
         </p:nvSpPr>
@@ -22523,7 +22523,7 @@
       </p:sp>
       <p:sp>
         <p:nvSpPr>
-          <p:cNvPr id="26" name="Shape 22"/>
+          <p:cNvPr id="25" name="Shape 22"/>
           <p:cNvSpPr/>
           <p:nvPr/>
         </p:nvSpPr>
@@ -22550,7 +22550,7 @@
       </p:sp>
       <p:sp>
         <p:nvSpPr>
-          <p:cNvPr id="27" name="Text 23"/>
+          <p:cNvPr id="26" name="Text 23"/>
           <p:cNvSpPr/>
           <p:nvPr/>
         </p:nvSpPr>
@@ -22835,7 +22835,7 @@
       </p:pic>
       <p:sp>
         <p:nvSpPr>
-          <p:cNvPr id="8" name="Shape 4"/>
+          <p:cNvPr id="7" name="Shape 4"/>
           <p:cNvSpPr/>
           <p:nvPr/>
         </p:nvSpPr>
@@ -22857,7 +22857,7 @@
       </p:sp>
       <p:sp>
         <p:nvSpPr>
-          <p:cNvPr id="9" name="Shape 5"/>
+          <p:cNvPr id="8" name="Shape 5"/>
           <p:cNvSpPr/>
           <p:nvPr/>
         </p:nvSpPr>
@@ -22877,7 +22877,7 @@
       </p:sp>
       <p:sp>
         <p:nvSpPr>
-          <p:cNvPr id="10" name="Text 6"/>
+          <p:cNvPr id="9" name="Text 6"/>
           <p:cNvSpPr/>
           <p:nvPr/>
         </p:nvSpPr>
@@ -22916,7 +22916,7 @@
       </p:sp>
       <p:sp>
         <p:nvSpPr>
-          <p:cNvPr id="11" name="Text 7"/>
+          <p:cNvPr id="10" name="Text 7"/>
           <p:cNvSpPr/>
           <p:nvPr/>
         </p:nvSpPr>
@@ -22955,7 +22955,7 @@
       </p:sp>
       <p:sp>
         <p:nvSpPr>
-          <p:cNvPr id="12" name="Text 8"/>
+          <p:cNvPr id="11" name="Text 8"/>
           <p:cNvSpPr/>
           <p:nvPr/>
         </p:nvSpPr>
@@ -22997,7 +22997,7 @@
       </p:sp>
       <p:sp>
         <p:nvSpPr>
-          <p:cNvPr id="13" name="Shape 9"/>
+          <p:cNvPr id="12" name="Shape 9"/>
           <p:cNvSpPr/>
           <p:nvPr/>
         </p:nvSpPr>
@@ -23019,7 +23019,7 @@
       </p:sp>
       <p:sp>
         <p:nvSpPr>
-          <p:cNvPr id="14" name="Shape 10"/>
+          <p:cNvPr id="13" name="Shape 10"/>
           <p:cNvSpPr/>
           <p:nvPr/>
         </p:nvSpPr>
@@ -23039,7 +23039,7 @@
       </p:sp>
       <p:sp>
         <p:nvSpPr>
-          <p:cNvPr id="15" name="Text 11"/>
+          <p:cNvPr id="14" name="Text 11"/>
           <p:cNvSpPr/>
           <p:nvPr/>
         </p:nvSpPr>
@@ -23078,7 +23078,7 @@
       </p:sp>
       <p:sp>
         <p:nvSpPr>
-          <p:cNvPr id="16" name="Text 12"/>
+          <p:cNvPr id="15" name="Text 12"/>
           <p:cNvSpPr/>
           <p:nvPr/>
         </p:nvSpPr>
@@ -23117,7 +23117,7 @@
       </p:sp>
       <p:sp>
         <p:nvSpPr>
-          <p:cNvPr id="17" name="Text 13"/>
+          <p:cNvPr id="16" name="Text 13"/>
           <p:cNvSpPr/>
           <p:nvPr/>
         </p:nvSpPr>
@@ -23159,7 +23159,7 @@
       </p:sp>
       <p:sp>
         <p:nvSpPr>
-          <p:cNvPr id="18" name="Shape 14"/>
+          <p:cNvPr id="17" name="Shape 14"/>
           <p:cNvSpPr/>
           <p:nvPr/>
         </p:nvSpPr>
@@ -23181,7 +23181,7 @@
       </p:sp>
       <p:sp>
         <p:nvSpPr>
-          <p:cNvPr id="19" name="Shape 15"/>
+          <p:cNvPr id="18" name="Shape 15"/>
           <p:cNvSpPr/>
           <p:nvPr/>
         </p:nvSpPr>
@@ -23201,7 +23201,7 @@
       </p:sp>
       <p:sp>
         <p:nvSpPr>
-          <p:cNvPr id="20" name="Text 16"/>
+          <p:cNvPr id="19" name="Text 16"/>
           <p:cNvSpPr/>
           <p:nvPr/>
         </p:nvSpPr>
@@ -23240,7 +23240,7 @@
       </p:sp>
       <p:sp>
         <p:nvSpPr>
-          <p:cNvPr id="21" name="Text 17"/>
+          <p:cNvPr id="20" name="Text 17"/>
           <p:cNvSpPr/>
           <p:nvPr/>
         </p:nvSpPr>
@@ -23279,7 +23279,7 @@
       </p:sp>
       <p:sp>
         <p:nvSpPr>
-          <p:cNvPr id="22" name="Text 18"/>
+          <p:cNvPr id="21" name="Text 18"/>
           <p:cNvSpPr/>
           <p:nvPr/>
         </p:nvSpPr>
@@ -23321,7 +23321,7 @@
       </p:sp>
       <p:sp>
         <p:nvSpPr>
-          <p:cNvPr id="23" name="Shape 19"/>
+          <p:cNvPr id="22" name="Shape 19"/>
           <p:cNvSpPr/>
           <p:nvPr/>
         </p:nvSpPr>
@@ -23348,7 +23348,7 @@
       </p:sp>
       <p:sp>
         <p:nvSpPr>
-          <p:cNvPr id="24" name="Text 20"/>
+          <p:cNvPr id="23" name="Text 20"/>
           <p:cNvSpPr/>
           <p:nvPr/>
         </p:nvSpPr>
@@ -23387,7 +23387,7 @@
       </p:sp>
       <p:sp>
         <p:nvSpPr>
-          <p:cNvPr id="25" name="Shape 21"/>
+          <p:cNvPr id="24" name="Shape 21"/>
           <p:cNvSpPr/>
           <p:nvPr/>
         </p:nvSpPr>
@@ -23410,7 +23410,7 @@
       </p:sp>
       <p:sp>
         <p:nvSpPr>
-          <p:cNvPr id="26" name="Shape 22"/>
+          <p:cNvPr id="25" name="Shape 22"/>
           <p:cNvSpPr/>
           <p:nvPr/>
         </p:nvSpPr>
@@ -23430,7 +23430,7 @@
       </p:sp>
       <p:sp>
         <p:nvSpPr>
-          <p:cNvPr id="27" name="Shape 23"/>
+          <p:cNvPr id="26" name="Shape 23"/>
           <p:cNvSpPr/>
           <p:nvPr/>
         </p:nvSpPr>
@@ -23457,7 +23457,7 @@
       </p:sp>
       <p:sp>
         <p:nvSpPr>
-          <p:cNvPr id="28" name="Text 24"/>
+          <p:cNvPr id="27" name="Text 24"/>
           <p:cNvSpPr/>
           <p:nvPr/>
         </p:nvSpPr>
@@ -23496,7 +23496,7 @@
       </p:sp>
       <p:sp>
         <p:nvSpPr>
-          <p:cNvPr id="29" name="Shape 25"/>
+          <p:cNvPr id="28" name="Shape 25"/>
           <p:cNvSpPr/>
           <p:nvPr/>
         </p:nvSpPr>
@@ -23519,7 +23519,7 @@
       </p:sp>
       <p:sp>
         <p:nvSpPr>
-          <p:cNvPr id="30" name="Shape 26"/>
+          <p:cNvPr id="29" name="Shape 26"/>
           <p:cNvSpPr/>
           <p:nvPr/>
         </p:nvSpPr>
@@ -23539,7 +23539,7 @@
       </p:sp>
       <p:sp>
         <p:nvSpPr>
-          <p:cNvPr id="31" name="Shape 27"/>
+          <p:cNvPr id="30" name="Shape 27"/>
           <p:cNvSpPr/>
           <p:nvPr/>
         </p:nvSpPr>
@@ -23561,7 +23561,7 @@
       </p:sp>
       <p:sp>
         <p:nvSpPr>
-          <p:cNvPr id="32" name="Text 28"/>
+          <p:cNvPr id="31" name="Text 28"/>
           <p:cNvSpPr/>
           <p:nvPr/>
         </p:nvSpPr>
@@ -23600,7 +23600,7 @@
       </p:sp>
       <p:sp>
         <p:nvSpPr>
-          <p:cNvPr id="33" name="Shape 29"/>
+          <p:cNvPr id="32" name="Shape 29"/>
           <p:cNvSpPr/>
           <p:nvPr/>
         </p:nvSpPr>
@@ -23623,7 +23623,7 @@
       </p:sp>
       <p:sp>
         <p:nvSpPr>
-          <p:cNvPr id="34" name="Shape 30"/>
+          <p:cNvPr id="33" name="Shape 30"/>
           <p:cNvSpPr/>
           <p:nvPr/>
         </p:nvSpPr>
@@ -23643,7 +23643,7 @@
       </p:sp>
       <p:sp>
         <p:nvSpPr>
-          <p:cNvPr id="35" name="Shape 31"/>
+          <p:cNvPr id="34" name="Shape 31"/>
           <p:cNvSpPr/>
           <p:nvPr/>
         </p:nvSpPr>
@@ -23665,7 +23665,7 @@
       </p:sp>
       <p:sp>
         <p:nvSpPr>
-          <p:cNvPr id="36" name="Text 32"/>
+          <p:cNvPr id="35" name="Text 32"/>
           <p:cNvSpPr/>
           <p:nvPr/>
         </p:nvSpPr>
@@ -23704,7 +23704,7 @@
       </p:sp>
       <p:sp>
         <p:nvSpPr>
-          <p:cNvPr id="37" name="Text 33"/>
+          <p:cNvPr id="36" name="Text 33"/>
           <p:cNvSpPr/>
           <p:nvPr/>
         </p:nvSpPr>
@@ -23743,7 +23743,7 @@
       </p:sp>
       <p:sp>
         <p:nvSpPr>
-          <p:cNvPr id="38" name="Shape 34"/>
+          <p:cNvPr id="37" name="Shape 34"/>
           <p:cNvSpPr/>
           <p:nvPr/>
         </p:nvSpPr>
@@ -23765,7 +23765,7 @@
       </p:sp>
       <p:sp>
         <p:nvSpPr>
-          <p:cNvPr id="39" name="Text 35"/>
+          <p:cNvPr id="38" name="Text 35"/>
           <p:cNvSpPr/>
           <p:nvPr/>
         </p:nvSpPr>
@@ -23804,7 +23804,7 @@
       </p:sp>
       <p:sp>
         <p:nvSpPr>
-          <p:cNvPr id="40" name="Text 36"/>
+          <p:cNvPr id="39" name="Text 36"/>
           <p:cNvSpPr/>
           <p:nvPr/>
         </p:nvSpPr>
@@ -24089,7 +24089,7 @@
       </p:pic>
       <p:sp>
         <p:nvSpPr>
-          <p:cNvPr id="8" name="Shape 4"/>
+          <p:cNvPr id="7" name="Shape 4"/>
           <p:cNvSpPr/>
           <p:nvPr/>
         </p:nvSpPr>
@@ -24116,7 +24116,7 @@
       </p:sp>
       <p:sp>
         <p:nvSpPr>
-          <p:cNvPr id="9" name="Text 5"/>
+          <p:cNvPr id="8" name="Text 5"/>
           <p:cNvSpPr/>
           <p:nvPr/>
         </p:nvSpPr>
@@ -24158,7 +24158,7 @@
       </p:sp>
       <p:sp>
         <p:nvSpPr>
-          <p:cNvPr id="10" name="Shape 6"/>
+          <p:cNvPr id="9" name="Shape 6"/>
           <p:cNvSpPr/>
           <p:nvPr/>
         </p:nvSpPr>
@@ -24180,7 +24180,7 @@
       </p:sp>
       <p:sp>
         <p:nvSpPr>
-          <p:cNvPr id="11" name="Shape 7"/>
+          <p:cNvPr id="10" name="Shape 7"/>
           <p:cNvSpPr/>
           <p:nvPr/>
         </p:nvSpPr>
@@ -24200,7 +24200,7 @@
       </p:sp>
       <p:sp>
         <p:nvSpPr>
-          <p:cNvPr id="12" name="Text 8"/>
+          <p:cNvPr id="11" name="Text 8"/>
           <p:cNvSpPr/>
           <p:nvPr/>
         </p:nvSpPr>
@@ -24239,7 +24239,7 @@
       </p:sp>
       <p:sp>
         <p:nvSpPr>
-          <p:cNvPr id="13" name="Text 9"/>
+          <p:cNvPr id="12" name="Text 9"/>
           <p:cNvSpPr/>
           <p:nvPr/>
         </p:nvSpPr>
@@ -24278,7 +24278,7 @@
       </p:sp>
       <p:sp>
         <p:nvSpPr>
-          <p:cNvPr id="14" name="Text 10"/>
+          <p:cNvPr id="13" name="Text 10"/>
           <p:cNvSpPr/>
           <p:nvPr/>
         </p:nvSpPr>
@@ -24320,7 +24320,7 @@
       </p:sp>
       <p:sp>
         <p:nvSpPr>
-          <p:cNvPr id="15" name="Shape 11"/>
+          <p:cNvPr id="14" name="Shape 11"/>
           <p:cNvSpPr/>
           <p:nvPr/>
         </p:nvSpPr>
@@ -24342,7 +24342,7 @@
       </p:sp>
       <p:sp>
         <p:nvSpPr>
-          <p:cNvPr id="16" name="Shape 12"/>
+          <p:cNvPr id="15" name="Shape 12"/>
           <p:cNvSpPr/>
           <p:nvPr/>
         </p:nvSpPr>
@@ -24362,7 +24362,7 @@
       </p:sp>
       <p:sp>
         <p:nvSpPr>
-          <p:cNvPr id="17" name="Text 13"/>
+          <p:cNvPr id="16" name="Text 13"/>
           <p:cNvSpPr/>
           <p:nvPr/>
         </p:nvSpPr>
@@ -24401,7 +24401,7 @@
       </p:sp>
       <p:sp>
         <p:nvSpPr>
-          <p:cNvPr id="18" name="Text 14"/>
+          <p:cNvPr id="17" name="Text 14"/>
           <p:cNvSpPr/>
           <p:nvPr/>
         </p:nvSpPr>
@@ -24440,7 +24440,7 @@
       </p:sp>
       <p:sp>
         <p:nvSpPr>
-          <p:cNvPr id="19" name="Text 15"/>
+          <p:cNvPr id="18" name="Text 15"/>
           <p:cNvSpPr/>
           <p:nvPr/>
         </p:nvSpPr>
@@ -24482,7 +24482,7 @@
       </p:sp>
       <p:sp>
         <p:nvSpPr>
-          <p:cNvPr id="20" name="Shape 16"/>
+          <p:cNvPr id="19" name="Shape 16"/>
           <p:cNvSpPr/>
           <p:nvPr/>
         </p:nvSpPr>
@@ -24504,7 +24504,7 @@
       </p:sp>
       <p:sp>
         <p:nvSpPr>
-          <p:cNvPr id="21" name="Shape 17"/>
+          <p:cNvPr id="20" name="Shape 17"/>
           <p:cNvSpPr/>
           <p:nvPr/>
         </p:nvSpPr>
@@ -24524,7 +24524,7 @@
       </p:sp>
       <p:sp>
         <p:nvSpPr>
-          <p:cNvPr id="22" name="Text 18"/>
+          <p:cNvPr id="21" name="Text 18"/>
           <p:cNvSpPr/>
           <p:nvPr/>
         </p:nvSpPr>
@@ -24563,7 +24563,7 @@
       </p:sp>
       <p:sp>
         <p:nvSpPr>
-          <p:cNvPr id="23" name="Text 19"/>
+          <p:cNvPr id="22" name="Text 19"/>
           <p:cNvSpPr/>
           <p:nvPr/>
         </p:nvSpPr>
@@ -24602,7 +24602,7 @@
       </p:sp>
       <p:sp>
         <p:nvSpPr>
-          <p:cNvPr id="24" name="Text 20"/>
+          <p:cNvPr id="23" name="Text 20"/>
           <p:cNvSpPr/>
           <p:nvPr/>
         </p:nvSpPr>
@@ -24644,7 +24644,7 @@
       </p:sp>
       <p:sp>
         <p:nvSpPr>
-          <p:cNvPr id="25" name="Shape 21"/>
+          <p:cNvPr id="24" name="Shape 21"/>
           <p:cNvSpPr/>
           <p:nvPr/>
         </p:nvSpPr>
@@ -24666,7 +24666,7 @@
       </p:sp>
       <p:sp>
         <p:nvSpPr>
-          <p:cNvPr id="26" name="Text 22"/>
+          <p:cNvPr id="25" name="Text 22"/>
           <p:cNvSpPr/>
           <p:nvPr/>
         </p:nvSpPr>
@@ -26012,7 +26012,7 @@
       </p:graphicFrame>
       <p:sp>
         <p:nvSpPr>
-          <p:cNvPr id="9" name="Shape 4"/>
+          <p:cNvPr id="8" name="Shape 4"/>
           <p:cNvSpPr/>
           <p:nvPr/>
         </p:nvSpPr>
@@ -26034,7 +26034,7 @@
       </p:sp>
       <p:sp>
         <p:nvSpPr>
-          <p:cNvPr id="10" name="Text 5"/>
+          <p:cNvPr id="9" name="Text 5"/>
           <p:cNvSpPr/>
           <p:nvPr/>
         </p:nvSpPr>
@@ -26073,7 +26073,7 @@
       </p:sp>
       <p:sp>
         <p:nvSpPr>
-          <p:cNvPr id="11" name="Text 6"/>
+          <p:cNvPr id="10" name="Text 6"/>
           <p:cNvSpPr/>
           <p:nvPr/>
         </p:nvSpPr>
@@ -26115,7 +26115,7 @@
       </p:sp>
       <p:sp>
         <p:nvSpPr>
-          <p:cNvPr id="12" name="Shape 7"/>
+          <p:cNvPr id="11" name="Shape 7"/>
           <p:cNvSpPr/>
           <p:nvPr/>
         </p:nvSpPr>
@@ -26142,7 +26142,7 @@
       </p:sp>
       <p:sp>
         <p:nvSpPr>
-          <p:cNvPr id="13" name="Text 8"/>
+          <p:cNvPr id="12" name="Text 8"/>
           <p:cNvSpPr/>
           <p:nvPr/>
         </p:nvSpPr>
@@ -26427,7 +26427,7 @@
       </p:pic>
       <p:sp>
         <p:nvSpPr>
-          <p:cNvPr id="8" name="Shape 4"/>
+          <p:cNvPr id="7" name="Shape 4"/>
           <p:cNvSpPr/>
           <p:nvPr/>
         </p:nvSpPr>
@@ -26449,7 +26449,7 @@
       </p:sp>
       <p:sp>
         <p:nvSpPr>
-          <p:cNvPr id="9" name="Text 5"/>
+          <p:cNvPr id="8" name="Text 5"/>
           <p:cNvSpPr/>
           <p:nvPr/>
         </p:nvSpPr>
@@ -26488,7 +26488,7 @@
       </p:sp>
       <p:sp>
         <p:nvSpPr>
-          <p:cNvPr id="10" name="Text 6"/>
+          <p:cNvPr id="9" name="Text 6"/>
           <p:cNvSpPr/>
           <p:nvPr/>
         </p:nvSpPr>
@@ -26527,7 +26527,7 @@
       </p:sp>
       <p:sp>
         <p:nvSpPr>
-          <p:cNvPr id="11" name="Shape 7"/>
+          <p:cNvPr id="10" name="Shape 7"/>
           <p:cNvSpPr/>
           <p:nvPr/>
         </p:nvSpPr>
@@ -26549,7 +26549,7 @@
       </p:sp>
       <p:sp>
         <p:nvSpPr>
-          <p:cNvPr id="12" name="Text 8"/>
+          <p:cNvPr id="11" name="Text 8"/>
           <p:cNvSpPr/>
           <p:nvPr/>
         </p:nvSpPr>
@@ -26588,7 +26588,7 @@
       </p:sp>
       <p:sp>
         <p:nvSpPr>
-          <p:cNvPr id="13" name="Text 9"/>
+          <p:cNvPr id="12" name="Text 9"/>
           <p:cNvSpPr/>
           <p:nvPr/>
         </p:nvSpPr>
@@ -26627,7 +26627,7 @@
       </p:sp>
       <p:sp>
         <p:nvSpPr>
-          <p:cNvPr id="14" name="Shape 10"/>
+          <p:cNvPr id="13" name="Shape 10"/>
           <p:cNvSpPr/>
           <p:nvPr/>
         </p:nvSpPr>
@@ -26649,7 +26649,7 @@
       </p:sp>
       <p:sp>
         <p:nvSpPr>
-          <p:cNvPr id="15" name="Text 11"/>
+          <p:cNvPr id="14" name="Text 11"/>
           <p:cNvSpPr/>
           <p:nvPr/>
         </p:nvSpPr>
@@ -26688,7 +26688,7 @@
       </p:sp>
       <p:sp>
         <p:nvSpPr>
-          <p:cNvPr id="16" name="Text 12"/>
+          <p:cNvPr id="15" name="Text 12"/>
           <p:cNvSpPr/>
           <p:nvPr/>
         </p:nvSpPr>
@@ -26727,7 +26727,7 @@
       </p:sp>
       <p:sp>
         <p:nvSpPr>
-          <p:cNvPr id="17" name="Shape 13"/>
+          <p:cNvPr id="16" name="Shape 13"/>
           <p:cNvSpPr/>
           <p:nvPr/>
         </p:nvSpPr>
@@ -26749,7 +26749,7 @@
       </p:sp>
       <p:sp>
         <p:nvSpPr>
-          <p:cNvPr id="18" name="Text 14"/>
+          <p:cNvPr id="17" name="Text 14"/>
           <p:cNvSpPr/>
           <p:nvPr/>
         </p:nvSpPr>
@@ -26788,7 +26788,7 @@
       </p:sp>
       <p:sp>
         <p:nvSpPr>
-          <p:cNvPr id="19" name="Text 15"/>
+          <p:cNvPr id="18" name="Text 15"/>
           <p:cNvSpPr/>
           <p:nvPr/>
         </p:nvSpPr>
@@ -26830,7 +26830,7 @@
       </p:sp>
       <p:sp>
         <p:nvSpPr>
-          <p:cNvPr id="20" name="Shape 16"/>
+          <p:cNvPr id="19" name="Shape 16"/>
           <p:cNvSpPr/>
           <p:nvPr/>
         </p:nvSpPr>
@@ -26852,7 +26852,7 @@
       </p:sp>
       <p:sp>
         <p:nvSpPr>
-          <p:cNvPr id="21" name="Text 17"/>
+          <p:cNvPr id="20" name="Text 17"/>
           <p:cNvSpPr/>
           <p:nvPr/>
         </p:nvSpPr>
@@ -27137,7 +27137,7 @@
       </p:pic>
       <p:sp>
         <p:nvSpPr>
-          <p:cNvPr id="8" name="Shape 4"/>
+          <p:cNvPr id="7" name="Shape 4"/>
           <p:cNvSpPr/>
           <p:nvPr/>
         </p:nvSpPr>
@@ -27164,7 +27164,7 @@
       </p:sp>
       <p:sp>
         <p:nvSpPr>
-          <p:cNvPr id="9" name="Text 5"/>
+          <p:cNvPr id="8" name="Text 5"/>
           <p:cNvSpPr/>
           <p:nvPr/>
         </p:nvSpPr>
@@ -27266,7 +27266,7 @@
       </p:sp>
       <p:sp>
         <p:nvSpPr>
-          <p:cNvPr id="10" name="Shape 6"/>
+          <p:cNvPr id="9" name="Shape 6"/>
           <p:cNvSpPr/>
           <p:nvPr/>
         </p:nvSpPr>
@@ -27288,7 +27288,7 @@
       </p:sp>
       <p:sp>
         <p:nvSpPr>
-          <p:cNvPr id="11" name="Text 7"/>
+          <p:cNvPr id="10" name="Text 7"/>
           <p:cNvSpPr/>
           <p:nvPr/>
         </p:nvSpPr>
@@ -27327,7 +27327,7 @@
       </p:sp>
       <p:sp>
         <p:nvSpPr>
-          <p:cNvPr id="12" name="Text 8"/>
+          <p:cNvPr id="11" name="Text 8"/>
           <p:cNvSpPr/>
           <p:nvPr/>
         </p:nvSpPr>
@@ -27369,7 +27369,7 @@
       </p:sp>
       <p:sp>
         <p:nvSpPr>
-          <p:cNvPr id="13" name="Shape 9"/>
+          <p:cNvPr id="12" name="Shape 9"/>
           <p:cNvSpPr/>
           <p:nvPr/>
         </p:nvSpPr>
@@ -27391,7 +27391,7 @@
       </p:sp>
       <p:sp>
         <p:nvSpPr>
-          <p:cNvPr id="14" name="Text 10"/>
+          <p:cNvPr id="13" name="Text 10"/>
           <p:cNvSpPr/>
           <p:nvPr/>
         </p:nvSpPr>
@@ -27430,7 +27430,7 @@
       </p:sp>
       <p:sp>
         <p:nvSpPr>
-          <p:cNvPr id="15" name="Text 11"/>
+          <p:cNvPr id="14" name="Text 11"/>
           <p:cNvSpPr/>
           <p:nvPr/>
         </p:nvSpPr>
@@ -27472,7 +27472,7 @@
       </p:sp>
       <p:sp>
         <p:nvSpPr>
-          <p:cNvPr id="16" name="Text 12"/>
+          <p:cNvPr id="15" name="Text 12"/>
           <p:cNvSpPr/>
           <p:nvPr/>
         </p:nvSpPr>

--- a/docs/decks/L09.pptx
+++ b/docs/decks/L09.pptx
@@ -7572,11 +7572,11 @@
         <p:spPr>
           <a:xfrm>
             <a:off x="566928" y="1783080"/>
-            <a:ext cx="11064240" cy="685800"/>
+            <a:ext cx="11064240" cy="621792"/>
           </a:xfrm>
           <a:prstGeom prst="roundRect">
             <a:avLst>
-              <a:gd name="adj" fmla="val 13333"/>
+              <a:gd name="adj" fmla="val 14706"/>
             </a:avLst>
           </a:prstGeom>
           <a:solidFill>
@@ -7599,7 +7599,7 @@
         <p:spPr>
           <a:xfrm>
             <a:off x="786384" y="1783080"/>
-            <a:ext cx="3761842" cy="685800"/>
+            <a:ext cx="3761842" cy="621792"/>
           </a:xfrm>
           <a:prstGeom prst="rect">
             <a:avLst/>
@@ -7638,7 +7638,7 @@
         <p:spPr>
           <a:xfrm>
             <a:off x="4548226" y="1783080"/>
-            <a:ext cx="6640373" cy="685800"/>
+            <a:ext cx="6640373" cy="621792"/>
           </a:xfrm>
           <a:prstGeom prst="rect">
             <a:avLst/>
@@ -7676,12 +7676,12 @@
         </p:nvSpPr>
         <p:spPr>
           <a:xfrm>
-            <a:off x="566928" y="2578608"/>
-            <a:ext cx="11064240" cy="685800"/>
+            <a:off x="566928" y="2514600"/>
+            <a:ext cx="11064240" cy="621792"/>
           </a:xfrm>
           <a:prstGeom prst="roundRect">
             <a:avLst>
-              <a:gd name="adj" fmla="val 13333"/>
+              <a:gd name="adj" fmla="val 14706"/>
             </a:avLst>
           </a:prstGeom>
           <a:solidFill>
@@ -7698,8 +7698,8 @@
         </p:nvSpPr>
         <p:spPr>
           <a:xfrm>
-            <a:off x="786384" y="2578608"/>
-            <a:ext cx="3761842" cy="685800"/>
+            <a:off x="786384" y="2514600"/>
+            <a:ext cx="3761842" cy="621792"/>
           </a:xfrm>
           <a:prstGeom prst="rect">
             <a:avLst/>
@@ -7737,8 +7737,8 @@
         </p:nvSpPr>
         <p:spPr>
           <a:xfrm>
-            <a:off x="4548226" y="2578608"/>
-            <a:ext cx="6640373" cy="685800"/>
+            <a:off x="4548226" y="2514600"/>
+            <a:ext cx="6640373" cy="621792"/>
           </a:xfrm>
           <a:prstGeom prst="rect">
             <a:avLst/>
@@ -7776,12 +7776,12 @@
         </p:nvSpPr>
         <p:spPr>
           <a:xfrm>
-            <a:off x="566928" y="3374136"/>
-            <a:ext cx="11064240" cy="685800"/>
+            <a:off x="566928" y="3246120"/>
+            <a:ext cx="11064240" cy="621792"/>
           </a:xfrm>
           <a:prstGeom prst="roundRect">
             <a:avLst>
-              <a:gd name="adj" fmla="val 13333"/>
+              <a:gd name="adj" fmla="val 14706"/>
             </a:avLst>
           </a:prstGeom>
           <a:solidFill>
@@ -7798,8 +7798,8 @@
         </p:nvSpPr>
         <p:spPr>
           <a:xfrm>
-            <a:off x="786384" y="3374136"/>
-            <a:ext cx="3761842" cy="685800"/>
+            <a:off x="786384" y="3246120"/>
+            <a:ext cx="3761842" cy="621792"/>
           </a:xfrm>
           <a:prstGeom prst="rect">
             <a:avLst/>
@@ -7837,8 +7837,8 @@
         </p:nvSpPr>
         <p:spPr>
           <a:xfrm>
-            <a:off x="4548226" y="3374136"/>
-            <a:ext cx="6640373" cy="685800"/>
+            <a:off x="4548226" y="3246120"/>
+            <a:ext cx="6640373" cy="621792"/>
           </a:xfrm>
           <a:prstGeom prst="rect">
             <a:avLst/>
@@ -7876,12 +7876,2104 @@
         </p:nvSpPr>
         <p:spPr>
           <a:xfrm>
-            <a:off x="566928" y="4315968"/>
-            <a:ext cx="11064240" cy="1234440"/>
+            <a:off x="566928" y="4041648"/>
+            <a:ext cx="118872" cy="118872"/>
+          </a:xfrm>
+          <a:prstGeom prst="rect">
+            <a:avLst/>
+          </a:prstGeom>
+          <a:solidFill>
+            <a:srgbClr val="E9F4EF"/>
+          </a:solidFill>
+          <a:ln/>
+        </p:spPr>
+      </p:sp>
+      <p:sp>
+        <p:nvSpPr>
+          <p:cNvPr id="17" name="Shape 14"/>
+          <p:cNvSpPr/>
+          <p:nvPr/>
+        </p:nvSpPr>
+        <p:spPr>
+          <a:xfrm>
+            <a:off x="726948" y="4041648"/>
+            <a:ext cx="118872" cy="118872"/>
+          </a:xfrm>
+          <a:prstGeom prst="rect">
+            <a:avLst/>
+          </a:prstGeom>
+          <a:solidFill>
+            <a:srgbClr val="E9F4EF"/>
+          </a:solidFill>
+          <a:ln/>
+        </p:spPr>
+      </p:sp>
+      <p:sp>
+        <p:nvSpPr>
+          <p:cNvPr id="18" name="Shape 15"/>
+          <p:cNvSpPr/>
+          <p:nvPr/>
+        </p:nvSpPr>
+        <p:spPr>
+          <a:xfrm>
+            <a:off x="886968" y="4041648"/>
+            <a:ext cx="118872" cy="118872"/>
+          </a:xfrm>
+          <a:prstGeom prst="rect">
+            <a:avLst/>
+          </a:prstGeom>
+          <a:solidFill>
+            <a:srgbClr val="E9F4EF"/>
+          </a:solidFill>
+          <a:ln/>
+        </p:spPr>
+      </p:sp>
+      <p:sp>
+        <p:nvSpPr>
+          <p:cNvPr id="19" name="Shape 16"/>
+          <p:cNvSpPr/>
+          <p:nvPr/>
+        </p:nvSpPr>
+        <p:spPr>
+          <a:xfrm>
+            <a:off x="1046988" y="4041648"/>
+            <a:ext cx="118872" cy="118872"/>
+          </a:xfrm>
+          <a:prstGeom prst="rect">
+            <a:avLst/>
+          </a:prstGeom>
+          <a:solidFill>
+            <a:srgbClr val="E9F4EF"/>
+          </a:solidFill>
+          <a:ln/>
+        </p:spPr>
+      </p:sp>
+      <p:sp>
+        <p:nvSpPr>
+          <p:cNvPr id="20" name="Shape 17"/>
+          <p:cNvSpPr/>
+          <p:nvPr/>
+        </p:nvSpPr>
+        <p:spPr>
+          <a:xfrm>
+            <a:off x="1207008" y="4041648"/>
+            <a:ext cx="118872" cy="118872"/>
+          </a:xfrm>
+          <a:prstGeom prst="rect">
+            <a:avLst/>
+          </a:prstGeom>
+          <a:solidFill>
+            <a:srgbClr val="E9F4EF"/>
+          </a:solidFill>
+          <a:ln/>
+        </p:spPr>
+      </p:sp>
+      <p:sp>
+        <p:nvSpPr>
+          <p:cNvPr id="21" name="Shape 18"/>
+          <p:cNvSpPr/>
+          <p:nvPr/>
+        </p:nvSpPr>
+        <p:spPr>
+          <a:xfrm>
+            <a:off x="1367028" y="4041648"/>
+            <a:ext cx="118872" cy="118872"/>
+          </a:xfrm>
+          <a:prstGeom prst="rect">
+            <a:avLst/>
+          </a:prstGeom>
+          <a:solidFill>
+            <a:srgbClr val="E9F4EF"/>
+          </a:solidFill>
+          <a:ln/>
+        </p:spPr>
+      </p:sp>
+      <p:sp>
+        <p:nvSpPr>
+          <p:cNvPr id="22" name="Shape 19"/>
+          <p:cNvSpPr/>
+          <p:nvPr/>
+        </p:nvSpPr>
+        <p:spPr>
+          <a:xfrm>
+            <a:off x="1527048" y="4041648"/>
+            <a:ext cx="118872" cy="118872"/>
+          </a:xfrm>
+          <a:prstGeom prst="rect">
+            <a:avLst/>
+          </a:prstGeom>
+          <a:solidFill>
+            <a:srgbClr val="E9F4EF"/>
+          </a:solidFill>
+          <a:ln/>
+        </p:spPr>
+      </p:sp>
+      <p:sp>
+        <p:nvSpPr>
+          <p:cNvPr id="23" name="Shape 20"/>
+          <p:cNvSpPr/>
+          <p:nvPr/>
+        </p:nvSpPr>
+        <p:spPr>
+          <a:xfrm>
+            <a:off x="1687068" y="4041648"/>
+            <a:ext cx="118872" cy="118872"/>
+          </a:xfrm>
+          <a:prstGeom prst="rect">
+            <a:avLst/>
+          </a:prstGeom>
+          <a:solidFill>
+            <a:srgbClr val="E9F4EF"/>
+          </a:solidFill>
+          <a:ln/>
+        </p:spPr>
+      </p:sp>
+      <p:sp>
+        <p:nvSpPr>
+          <p:cNvPr id="24" name="Shape 21"/>
+          <p:cNvSpPr/>
+          <p:nvPr/>
+        </p:nvSpPr>
+        <p:spPr>
+          <a:xfrm>
+            <a:off x="1847088" y="4041648"/>
+            <a:ext cx="118872" cy="118872"/>
+          </a:xfrm>
+          <a:prstGeom prst="rect">
+            <a:avLst/>
+          </a:prstGeom>
+          <a:solidFill>
+            <a:srgbClr val="E9F4EF"/>
+          </a:solidFill>
+          <a:ln/>
+        </p:spPr>
+      </p:sp>
+      <p:sp>
+        <p:nvSpPr>
+          <p:cNvPr id="25" name="Shape 22"/>
+          <p:cNvSpPr/>
+          <p:nvPr/>
+        </p:nvSpPr>
+        <p:spPr>
+          <a:xfrm>
+            <a:off x="2007108" y="4041648"/>
+            <a:ext cx="118872" cy="118872"/>
+          </a:xfrm>
+          <a:prstGeom prst="rect">
+            <a:avLst/>
+          </a:prstGeom>
+          <a:solidFill>
+            <a:srgbClr val="E9F4EF"/>
+          </a:solidFill>
+          <a:ln/>
+        </p:spPr>
+      </p:sp>
+      <p:sp>
+        <p:nvSpPr>
+          <p:cNvPr id="26" name="Shape 23"/>
+          <p:cNvSpPr/>
+          <p:nvPr/>
+        </p:nvSpPr>
+        <p:spPr>
+          <a:xfrm>
+            <a:off x="2167128" y="4041648"/>
+            <a:ext cx="118872" cy="118872"/>
+          </a:xfrm>
+          <a:prstGeom prst="rect">
+            <a:avLst/>
+          </a:prstGeom>
+          <a:solidFill>
+            <a:srgbClr val="E9F4EF"/>
+          </a:solidFill>
+          <a:ln/>
+        </p:spPr>
+      </p:sp>
+      <p:sp>
+        <p:nvSpPr>
+          <p:cNvPr id="27" name="Shape 24"/>
+          <p:cNvSpPr/>
+          <p:nvPr/>
+        </p:nvSpPr>
+        <p:spPr>
+          <a:xfrm>
+            <a:off x="2327148" y="4041648"/>
+            <a:ext cx="118872" cy="118872"/>
+          </a:xfrm>
+          <a:prstGeom prst="rect">
+            <a:avLst/>
+          </a:prstGeom>
+          <a:solidFill>
+            <a:srgbClr val="E9F4EF"/>
+          </a:solidFill>
+          <a:ln/>
+        </p:spPr>
+      </p:sp>
+      <p:sp>
+        <p:nvSpPr>
+          <p:cNvPr id="28" name="Shape 25"/>
+          <p:cNvSpPr/>
+          <p:nvPr/>
+        </p:nvSpPr>
+        <p:spPr>
+          <a:xfrm>
+            <a:off x="2487168" y="4041648"/>
+            <a:ext cx="118872" cy="118872"/>
+          </a:xfrm>
+          <a:prstGeom prst="rect">
+            <a:avLst/>
+          </a:prstGeom>
+          <a:solidFill>
+            <a:srgbClr val="E9F4EF"/>
+          </a:solidFill>
+          <a:ln/>
+        </p:spPr>
+      </p:sp>
+      <p:sp>
+        <p:nvSpPr>
+          <p:cNvPr id="29" name="Shape 26"/>
+          <p:cNvSpPr/>
+          <p:nvPr/>
+        </p:nvSpPr>
+        <p:spPr>
+          <a:xfrm>
+            <a:off x="2647188" y="4041648"/>
+            <a:ext cx="118872" cy="118872"/>
+          </a:xfrm>
+          <a:prstGeom prst="rect">
+            <a:avLst/>
+          </a:prstGeom>
+          <a:solidFill>
+            <a:srgbClr val="E9F4EF"/>
+          </a:solidFill>
+          <a:ln/>
+        </p:spPr>
+      </p:sp>
+      <p:sp>
+        <p:nvSpPr>
+          <p:cNvPr id="30" name="Shape 27"/>
+          <p:cNvSpPr/>
+          <p:nvPr/>
+        </p:nvSpPr>
+        <p:spPr>
+          <a:xfrm>
+            <a:off x="2807208" y="4041648"/>
+            <a:ext cx="118872" cy="118872"/>
+          </a:xfrm>
+          <a:prstGeom prst="rect">
+            <a:avLst/>
+          </a:prstGeom>
+          <a:solidFill>
+            <a:srgbClr val="E9F4EF"/>
+          </a:solidFill>
+          <a:ln/>
+        </p:spPr>
+      </p:sp>
+      <p:sp>
+        <p:nvSpPr>
+          <p:cNvPr id="31" name="Shape 28"/>
+          <p:cNvSpPr/>
+          <p:nvPr/>
+        </p:nvSpPr>
+        <p:spPr>
+          <a:xfrm>
+            <a:off x="2967228" y="4041648"/>
+            <a:ext cx="118872" cy="118872"/>
+          </a:xfrm>
+          <a:prstGeom prst="rect">
+            <a:avLst/>
+          </a:prstGeom>
+          <a:solidFill>
+            <a:srgbClr val="E9F4EF"/>
+          </a:solidFill>
+          <a:ln/>
+        </p:spPr>
+      </p:sp>
+      <p:sp>
+        <p:nvSpPr>
+          <p:cNvPr id="32" name="Shape 29"/>
+          <p:cNvSpPr/>
+          <p:nvPr/>
+        </p:nvSpPr>
+        <p:spPr>
+          <a:xfrm>
+            <a:off x="3127248" y="4041648"/>
+            <a:ext cx="118872" cy="118872"/>
+          </a:xfrm>
+          <a:prstGeom prst="rect">
+            <a:avLst/>
+          </a:prstGeom>
+          <a:solidFill>
+            <a:srgbClr val="E9F4EF"/>
+          </a:solidFill>
+          <a:ln/>
+        </p:spPr>
+      </p:sp>
+      <p:sp>
+        <p:nvSpPr>
+          <p:cNvPr id="33" name="Shape 30"/>
+          <p:cNvSpPr/>
+          <p:nvPr/>
+        </p:nvSpPr>
+        <p:spPr>
+          <a:xfrm>
+            <a:off x="3287268" y="4041648"/>
+            <a:ext cx="118872" cy="118872"/>
+          </a:xfrm>
+          <a:prstGeom prst="rect">
+            <a:avLst/>
+          </a:prstGeom>
+          <a:solidFill>
+            <a:srgbClr val="E9F4EF"/>
+          </a:solidFill>
+          <a:ln/>
+        </p:spPr>
+      </p:sp>
+      <p:sp>
+        <p:nvSpPr>
+          <p:cNvPr id="34" name="Shape 31"/>
+          <p:cNvSpPr/>
+          <p:nvPr/>
+        </p:nvSpPr>
+        <p:spPr>
+          <a:xfrm>
+            <a:off x="3447288" y="4041648"/>
+            <a:ext cx="118872" cy="118872"/>
+          </a:xfrm>
+          <a:prstGeom prst="rect">
+            <a:avLst/>
+          </a:prstGeom>
+          <a:solidFill>
+            <a:srgbClr val="E9F4EF"/>
+          </a:solidFill>
+          <a:ln/>
+        </p:spPr>
+      </p:sp>
+      <p:sp>
+        <p:nvSpPr>
+          <p:cNvPr id="35" name="Shape 32"/>
+          <p:cNvSpPr/>
+          <p:nvPr/>
+        </p:nvSpPr>
+        <p:spPr>
+          <a:xfrm>
+            <a:off x="3607308" y="4041648"/>
+            <a:ext cx="118872" cy="118872"/>
+          </a:xfrm>
+          <a:prstGeom prst="rect">
+            <a:avLst/>
+          </a:prstGeom>
+          <a:solidFill>
+            <a:srgbClr val="E9F4EF"/>
+          </a:solidFill>
+          <a:ln/>
+        </p:spPr>
+      </p:sp>
+      <p:sp>
+        <p:nvSpPr>
+          <p:cNvPr id="36" name="Shape 33"/>
+          <p:cNvSpPr/>
+          <p:nvPr/>
+        </p:nvSpPr>
+        <p:spPr>
+          <a:xfrm>
+            <a:off x="566928" y="4201668"/>
+            <a:ext cx="118872" cy="118872"/>
+          </a:xfrm>
+          <a:prstGeom prst="rect">
+            <a:avLst/>
+          </a:prstGeom>
+          <a:solidFill>
+            <a:srgbClr val="E9F4EF"/>
+          </a:solidFill>
+          <a:ln/>
+        </p:spPr>
+      </p:sp>
+      <p:sp>
+        <p:nvSpPr>
+          <p:cNvPr id="37" name="Shape 34"/>
+          <p:cNvSpPr/>
+          <p:nvPr/>
+        </p:nvSpPr>
+        <p:spPr>
+          <a:xfrm>
+            <a:off x="726948" y="4201668"/>
+            <a:ext cx="118872" cy="118872"/>
+          </a:xfrm>
+          <a:prstGeom prst="rect">
+            <a:avLst/>
+          </a:prstGeom>
+          <a:solidFill>
+            <a:srgbClr val="E9F4EF"/>
+          </a:solidFill>
+          <a:ln/>
+        </p:spPr>
+      </p:sp>
+      <p:sp>
+        <p:nvSpPr>
+          <p:cNvPr id="38" name="Shape 35"/>
+          <p:cNvSpPr/>
+          <p:nvPr/>
+        </p:nvSpPr>
+        <p:spPr>
+          <a:xfrm>
+            <a:off x="886968" y="4201668"/>
+            <a:ext cx="118872" cy="118872"/>
+          </a:xfrm>
+          <a:prstGeom prst="rect">
+            <a:avLst/>
+          </a:prstGeom>
+          <a:solidFill>
+            <a:srgbClr val="E9F4EF"/>
+          </a:solidFill>
+          <a:ln/>
+        </p:spPr>
+      </p:sp>
+      <p:sp>
+        <p:nvSpPr>
+          <p:cNvPr id="39" name="Shape 36"/>
+          <p:cNvSpPr/>
+          <p:nvPr/>
+        </p:nvSpPr>
+        <p:spPr>
+          <a:xfrm>
+            <a:off x="1046988" y="4201668"/>
+            <a:ext cx="118872" cy="118872"/>
+          </a:xfrm>
+          <a:prstGeom prst="rect">
+            <a:avLst/>
+          </a:prstGeom>
+          <a:solidFill>
+            <a:srgbClr val="E9F4EF"/>
+          </a:solidFill>
+          <a:ln/>
+        </p:spPr>
+      </p:sp>
+      <p:sp>
+        <p:nvSpPr>
+          <p:cNvPr id="40" name="Shape 37"/>
+          <p:cNvSpPr/>
+          <p:nvPr/>
+        </p:nvSpPr>
+        <p:spPr>
+          <a:xfrm>
+            <a:off x="1207008" y="4201668"/>
+            <a:ext cx="118872" cy="118872"/>
+          </a:xfrm>
+          <a:prstGeom prst="rect">
+            <a:avLst/>
+          </a:prstGeom>
+          <a:solidFill>
+            <a:srgbClr val="E9F4EF"/>
+          </a:solidFill>
+          <a:ln/>
+        </p:spPr>
+      </p:sp>
+      <p:sp>
+        <p:nvSpPr>
+          <p:cNvPr id="41" name="Shape 38"/>
+          <p:cNvSpPr/>
+          <p:nvPr/>
+        </p:nvSpPr>
+        <p:spPr>
+          <a:xfrm>
+            <a:off x="1367028" y="4201668"/>
+            <a:ext cx="118872" cy="118872"/>
+          </a:xfrm>
+          <a:prstGeom prst="rect">
+            <a:avLst/>
+          </a:prstGeom>
+          <a:solidFill>
+            <a:srgbClr val="E9F4EF"/>
+          </a:solidFill>
+          <a:ln/>
+        </p:spPr>
+      </p:sp>
+      <p:sp>
+        <p:nvSpPr>
+          <p:cNvPr id="42" name="Shape 39"/>
+          <p:cNvSpPr/>
+          <p:nvPr/>
+        </p:nvSpPr>
+        <p:spPr>
+          <a:xfrm>
+            <a:off x="1527048" y="4201668"/>
+            <a:ext cx="118872" cy="118872"/>
+          </a:xfrm>
+          <a:prstGeom prst="rect">
+            <a:avLst/>
+          </a:prstGeom>
+          <a:solidFill>
+            <a:srgbClr val="E9F4EF"/>
+          </a:solidFill>
+          <a:ln/>
+        </p:spPr>
+      </p:sp>
+      <p:sp>
+        <p:nvSpPr>
+          <p:cNvPr id="43" name="Shape 40"/>
+          <p:cNvSpPr/>
+          <p:nvPr/>
+        </p:nvSpPr>
+        <p:spPr>
+          <a:xfrm>
+            <a:off x="1687068" y="4201668"/>
+            <a:ext cx="118872" cy="118872"/>
+          </a:xfrm>
+          <a:prstGeom prst="rect">
+            <a:avLst/>
+          </a:prstGeom>
+          <a:solidFill>
+            <a:srgbClr val="E9F4EF"/>
+          </a:solidFill>
+          <a:ln/>
+        </p:spPr>
+      </p:sp>
+      <p:sp>
+        <p:nvSpPr>
+          <p:cNvPr id="44" name="Shape 41"/>
+          <p:cNvSpPr/>
+          <p:nvPr/>
+        </p:nvSpPr>
+        <p:spPr>
+          <a:xfrm>
+            <a:off x="1847088" y="4201668"/>
+            <a:ext cx="118872" cy="118872"/>
+          </a:xfrm>
+          <a:prstGeom prst="rect">
+            <a:avLst/>
+          </a:prstGeom>
+          <a:solidFill>
+            <a:srgbClr val="E9F4EF"/>
+          </a:solidFill>
+          <a:ln/>
+        </p:spPr>
+      </p:sp>
+      <p:sp>
+        <p:nvSpPr>
+          <p:cNvPr id="45" name="Shape 42"/>
+          <p:cNvSpPr/>
+          <p:nvPr/>
+        </p:nvSpPr>
+        <p:spPr>
+          <a:xfrm>
+            <a:off x="2007108" y="4201668"/>
+            <a:ext cx="118872" cy="118872"/>
+          </a:xfrm>
+          <a:prstGeom prst="rect">
+            <a:avLst/>
+          </a:prstGeom>
+          <a:solidFill>
+            <a:srgbClr val="E9F4EF"/>
+          </a:solidFill>
+          <a:ln/>
+        </p:spPr>
+      </p:sp>
+      <p:sp>
+        <p:nvSpPr>
+          <p:cNvPr id="46" name="Shape 43"/>
+          <p:cNvSpPr/>
+          <p:nvPr/>
+        </p:nvSpPr>
+        <p:spPr>
+          <a:xfrm>
+            <a:off x="2167128" y="4201668"/>
+            <a:ext cx="118872" cy="118872"/>
+          </a:xfrm>
+          <a:prstGeom prst="rect">
+            <a:avLst/>
+          </a:prstGeom>
+          <a:solidFill>
+            <a:srgbClr val="E9F4EF"/>
+          </a:solidFill>
+          <a:ln/>
+        </p:spPr>
+      </p:sp>
+      <p:sp>
+        <p:nvSpPr>
+          <p:cNvPr id="47" name="Shape 44"/>
+          <p:cNvSpPr/>
+          <p:nvPr/>
+        </p:nvSpPr>
+        <p:spPr>
+          <a:xfrm>
+            <a:off x="2327148" y="4201668"/>
+            <a:ext cx="118872" cy="118872"/>
+          </a:xfrm>
+          <a:prstGeom prst="rect">
+            <a:avLst/>
+          </a:prstGeom>
+          <a:solidFill>
+            <a:srgbClr val="E9F4EF"/>
+          </a:solidFill>
+          <a:ln/>
+        </p:spPr>
+      </p:sp>
+      <p:sp>
+        <p:nvSpPr>
+          <p:cNvPr id="48" name="Shape 45"/>
+          <p:cNvSpPr/>
+          <p:nvPr/>
+        </p:nvSpPr>
+        <p:spPr>
+          <a:xfrm>
+            <a:off x="2487168" y="4201668"/>
+            <a:ext cx="118872" cy="118872"/>
+          </a:xfrm>
+          <a:prstGeom prst="rect">
+            <a:avLst/>
+          </a:prstGeom>
+          <a:solidFill>
+            <a:srgbClr val="E9F4EF"/>
+          </a:solidFill>
+          <a:ln/>
+        </p:spPr>
+      </p:sp>
+      <p:sp>
+        <p:nvSpPr>
+          <p:cNvPr id="49" name="Shape 46"/>
+          <p:cNvSpPr/>
+          <p:nvPr/>
+        </p:nvSpPr>
+        <p:spPr>
+          <a:xfrm>
+            <a:off x="2647188" y="4201668"/>
+            <a:ext cx="118872" cy="118872"/>
+          </a:xfrm>
+          <a:prstGeom prst="rect">
+            <a:avLst/>
+          </a:prstGeom>
+          <a:solidFill>
+            <a:srgbClr val="E9F4EF"/>
+          </a:solidFill>
+          <a:ln/>
+        </p:spPr>
+      </p:sp>
+      <p:sp>
+        <p:nvSpPr>
+          <p:cNvPr id="50" name="Shape 47"/>
+          <p:cNvSpPr/>
+          <p:nvPr/>
+        </p:nvSpPr>
+        <p:spPr>
+          <a:xfrm>
+            <a:off x="2807208" y="4201668"/>
+            <a:ext cx="118872" cy="118872"/>
+          </a:xfrm>
+          <a:prstGeom prst="rect">
+            <a:avLst/>
+          </a:prstGeom>
+          <a:solidFill>
+            <a:srgbClr val="E9F4EF"/>
+          </a:solidFill>
+          <a:ln/>
+        </p:spPr>
+      </p:sp>
+      <p:sp>
+        <p:nvSpPr>
+          <p:cNvPr id="51" name="Shape 48"/>
+          <p:cNvSpPr/>
+          <p:nvPr/>
+        </p:nvSpPr>
+        <p:spPr>
+          <a:xfrm>
+            <a:off x="2967228" y="4201668"/>
+            <a:ext cx="118872" cy="118872"/>
+          </a:xfrm>
+          <a:prstGeom prst="rect">
+            <a:avLst/>
+          </a:prstGeom>
+          <a:solidFill>
+            <a:srgbClr val="E9F4EF"/>
+          </a:solidFill>
+          <a:ln/>
+        </p:spPr>
+      </p:sp>
+      <p:sp>
+        <p:nvSpPr>
+          <p:cNvPr id="52" name="Shape 49"/>
+          <p:cNvSpPr/>
+          <p:nvPr/>
+        </p:nvSpPr>
+        <p:spPr>
+          <a:xfrm>
+            <a:off x="3127248" y="4201668"/>
+            <a:ext cx="118872" cy="118872"/>
+          </a:xfrm>
+          <a:prstGeom prst="rect">
+            <a:avLst/>
+          </a:prstGeom>
+          <a:solidFill>
+            <a:srgbClr val="E9F4EF"/>
+          </a:solidFill>
+          <a:ln/>
+        </p:spPr>
+      </p:sp>
+      <p:sp>
+        <p:nvSpPr>
+          <p:cNvPr id="53" name="Shape 50"/>
+          <p:cNvSpPr/>
+          <p:nvPr/>
+        </p:nvSpPr>
+        <p:spPr>
+          <a:xfrm>
+            <a:off x="3287268" y="4201668"/>
+            <a:ext cx="118872" cy="118872"/>
+          </a:xfrm>
+          <a:prstGeom prst="rect">
+            <a:avLst/>
+          </a:prstGeom>
+          <a:solidFill>
+            <a:srgbClr val="E9F4EF"/>
+          </a:solidFill>
+          <a:ln/>
+        </p:spPr>
+      </p:sp>
+      <p:sp>
+        <p:nvSpPr>
+          <p:cNvPr id="54" name="Shape 51"/>
+          <p:cNvSpPr/>
+          <p:nvPr/>
+        </p:nvSpPr>
+        <p:spPr>
+          <a:xfrm>
+            <a:off x="3447288" y="4201668"/>
+            <a:ext cx="118872" cy="118872"/>
+          </a:xfrm>
+          <a:prstGeom prst="rect">
+            <a:avLst/>
+          </a:prstGeom>
+          <a:solidFill>
+            <a:srgbClr val="E9F4EF"/>
+          </a:solidFill>
+          <a:ln/>
+        </p:spPr>
+      </p:sp>
+      <p:sp>
+        <p:nvSpPr>
+          <p:cNvPr id="55" name="Shape 52"/>
+          <p:cNvSpPr/>
+          <p:nvPr/>
+        </p:nvSpPr>
+        <p:spPr>
+          <a:xfrm>
+            <a:off x="3607308" y="4201668"/>
+            <a:ext cx="118872" cy="118872"/>
+          </a:xfrm>
+          <a:prstGeom prst="rect">
+            <a:avLst/>
+          </a:prstGeom>
+          <a:solidFill>
+            <a:srgbClr val="E9F4EF"/>
+          </a:solidFill>
+          <a:ln/>
+        </p:spPr>
+      </p:sp>
+      <p:sp>
+        <p:nvSpPr>
+          <p:cNvPr id="56" name="Shape 53"/>
+          <p:cNvSpPr/>
+          <p:nvPr/>
+        </p:nvSpPr>
+        <p:spPr>
+          <a:xfrm>
+            <a:off x="566928" y="4361688"/>
+            <a:ext cx="118872" cy="118872"/>
+          </a:xfrm>
+          <a:prstGeom prst="rect">
+            <a:avLst/>
+          </a:prstGeom>
+          <a:solidFill>
+            <a:srgbClr val="E9F4EF"/>
+          </a:solidFill>
+          <a:ln/>
+        </p:spPr>
+      </p:sp>
+      <p:sp>
+        <p:nvSpPr>
+          <p:cNvPr id="57" name="Shape 54"/>
+          <p:cNvSpPr/>
+          <p:nvPr/>
+        </p:nvSpPr>
+        <p:spPr>
+          <a:xfrm>
+            <a:off x="726948" y="4361688"/>
+            <a:ext cx="118872" cy="118872"/>
+          </a:xfrm>
+          <a:prstGeom prst="rect">
+            <a:avLst/>
+          </a:prstGeom>
+          <a:solidFill>
+            <a:srgbClr val="E9F4EF"/>
+          </a:solidFill>
+          <a:ln/>
+        </p:spPr>
+      </p:sp>
+      <p:sp>
+        <p:nvSpPr>
+          <p:cNvPr id="58" name="Shape 55"/>
+          <p:cNvSpPr/>
+          <p:nvPr/>
+        </p:nvSpPr>
+        <p:spPr>
+          <a:xfrm>
+            <a:off x="886968" y="4361688"/>
+            <a:ext cx="118872" cy="118872"/>
+          </a:xfrm>
+          <a:prstGeom prst="rect">
+            <a:avLst/>
+          </a:prstGeom>
+          <a:solidFill>
+            <a:srgbClr val="E9F4EF"/>
+          </a:solidFill>
+          <a:ln/>
+        </p:spPr>
+      </p:sp>
+      <p:sp>
+        <p:nvSpPr>
+          <p:cNvPr id="59" name="Shape 56"/>
+          <p:cNvSpPr/>
+          <p:nvPr/>
+        </p:nvSpPr>
+        <p:spPr>
+          <a:xfrm>
+            <a:off x="1046988" y="4361688"/>
+            <a:ext cx="118872" cy="118872"/>
+          </a:xfrm>
+          <a:prstGeom prst="rect">
+            <a:avLst/>
+          </a:prstGeom>
+          <a:solidFill>
+            <a:srgbClr val="E9F4EF"/>
+          </a:solidFill>
+          <a:ln/>
+        </p:spPr>
+      </p:sp>
+      <p:sp>
+        <p:nvSpPr>
+          <p:cNvPr id="60" name="Shape 57"/>
+          <p:cNvSpPr/>
+          <p:nvPr/>
+        </p:nvSpPr>
+        <p:spPr>
+          <a:xfrm>
+            <a:off x="1207008" y="4361688"/>
+            <a:ext cx="118872" cy="118872"/>
+          </a:xfrm>
+          <a:prstGeom prst="rect">
+            <a:avLst/>
+          </a:prstGeom>
+          <a:solidFill>
+            <a:srgbClr val="E9F4EF"/>
+          </a:solidFill>
+          <a:ln/>
+        </p:spPr>
+      </p:sp>
+      <p:sp>
+        <p:nvSpPr>
+          <p:cNvPr id="61" name="Shape 58"/>
+          <p:cNvSpPr/>
+          <p:nvPr/>
+        </p:nvSpPr>
+        <p:spPr>
+          <a:xfrm>
+            <a:off x="1367028" y="4361688"/>
+            <a:ext cx="118872" cy="118872"/>
+          </a:xfrm>
+          <a:prstGeom prst="rect">
+            <a:avLst/>
+          </a:prstGeom>
+          <a:solidFill>
+            <a:srgbClr val="E9F4EF"/>
+          </a:solidFill>
+          <a:ln/>
+        </p:spPr>
+      </p:sp>
+      <p:sp>
+        <p:nvSpPr>
+          <p:cNvPr id="62" name="Shape 59"/>
+          <p:cNvSpPr/>
+          <p:nvPr/>
+        </p:nvSpPr>
+        <p:spPr>
+          <a:xfrm>
+            <a:off x="1527048" y="4361688"/>
+            <a:ext cx="118872" cy="118872"/>
+          </a:xfrm>
+          <a:prstGeom prst="rect">
+            <a:avLst/>
+          </a:prstGeom>
+          <a:solidFill>
+            <a:srgbClr val="E9F4EF"/>
+          </a:solidFill>
+          <a:ln/>
+        </p:spPr>
+      </p:sp>
+      <p:sp>
+        <p:nvSpPr>
+          <p:cNvPr id="63" name="Shape 60"/>
+          <p:cNvSpPr/>
+          <p:nvPr/>
+        </p:nvSpPr>
+        <p:spPr>
+          <a:xfrm>
+            <a:off x="1687068" y="4361688"/>
+            <a:ext cx="118872" cy="118872"/>
+          </a:xfrm>
+          <a:prstGeom prst="rect">
+            <a:avLst/>
+          </a:prstGeom>
+          <a:solidFill>
+            <a:srgbClr val="E9F4EF"/>
+          </a:solidFill>
+          <a:ln/>
+        </p:spPr>
+      </p:sp>
+      <p:sp>
+        <p:nvSpPr>
+          <p:cNvPr id="64" name="Shape 61"/>
+          <p:cNvSpPr/>
+          <p:nvPr/>
+        </p:nvSpPr>
+        <p:spPr>
+          <a:xfrm>
+            <a:off x="1847088" y="4361688"/>
+            <a:ext cx="118872" cy="118872"/>
+          </a:xfrm>
+          <a:prstGeom prst="rect">
+            <a:avLst/>
+          </a:prstGeom>
+          <a:solidFill>
+            <a:srgbClr val="E9F4EF"/>
+          </a:solidFill>
+          <a:ln/>
+        </p:spPr>
+      </p:sp>
+      <p:sp>
+        <p:nvSpPr>
+          <p:cNvPr id="65" name="Shape 62"/>
+          <p:cNvSpPr/>
+          <p:nvPr/>
+        </p:nvSpPr>
+        <p:spPr>
+          <a:xfrm>
+            <a:off x="2007108" y="4361688"/>
+            <a:ext cx="118872" cy="118872"/>
+          </a:xfrm>
+          <a:prstGeom prst="rect">
+            <a:avLst/>
+          </a:prstGeom>
+          <a:solidFill>
+            <a:srgbClr val="E9F4EF"/>
+          </a:solidFill>
+          <a:ln/>
+        </p:spPr>
+      </p:sp>
+      <p:sp>
+        <p:nvSpPr>
+          <p:cNvPr id="66" name="Shape 63"/>
+          <p:cNvSpPr/>
+          <p:nvPr/>
+        </p:nvSpPr>
+        <p:spPr>
+          <a:xfrm>
+            <a:off x="2167128" y="4361688"/>
+            <a:ext cx="118872" cy="118872"/>
+          </a:xfrm>
+          <a:prstGeom prst="rect">
+            <a:avLst/>
+          </a:prstGeom>
+          <a:solidFill>
+            <a:srgbClr val="E9F4EF"/>
+          </a:solidFill>
+          <a:ln/>
+        </p:spPr>
+      </p:sp>
+      <p:sp>
+        <p:nvSpPr>
+          <p:cNvPr id="67" name="Shape 64"/>
+          <p:cNvSpPr/>
+          <p:nvPr/>
+        </p:nvSpPr>
+        <p:spPr>
+          <a:xfrm>
+            <a:off x="2327148" y="4361688"/>
+            <a:ext cx="118872" cy="118872"/>
+          </a:xfrm>
+          <a:prstGeom prst="rect">
+            <a:avLst/>
+          </a:prstGeom>
+          <a:solidFill>
+            <a:srgbClr val="E9F4EF"/>
+          </a:solidFill>
+          <a:ln/>
+        </p:spPr>
+      </p:sp>
+      <p:sp>
+        <p:nvSpPr>
+          <p:cNvPr id="68" name="Shape 65"/>
+          <p:cNvSpPr/>
+          <p:nvPr/>
+        </p:nvSpPr>
+        <p:spPr>
+          <a:xfrm>
+            <a:off x="2487168" y="4361688"/>
+            <a:ext cx="118872" cy="118872"/>
+          </a:xfrm>
+          <a:prstGeom prst="rect">
+            <a:avLst/>
+          </a:prstGeom>
+          <a:solidFill>
+            <a:srgbClr val="E9F4EF"/>
+          </a:solidFill>
+          <a:ln/>
+        </p:spPr>
+      </p:sp>
+      <p:sp>
+        <p:nvSpPr>
+          <p:cNvPr id="69" name="Shape 66"/>
+          <p:cNvSpPr/>
+          <p:nvPr/>
+        </p:nvSpPr>
+        <p:spPr>
+          <a:xfrm>
+            <a:off x="2647188" y="4361688"/>
+            <a:ext cx="118872" cy="118872"/>
+          </a:xfrm>
+          <a:prstGeom prst="rect">
+            <a:avLst/>
+          </a:prstGeom>
+          <a:solidFill>
+            <a:srgbClr val="E9F4EF"/>
+          </a:solidFill>
+          <a:ln/>
+        </p:spPr>
+      </p:sp>
+      <p:sp>
+        <p:nvSpPr>
+          <p:cNvPr id="70" name="Shape 67"/>
+          <p:cNvSpPr/>
+          <p:nvPr/>
+        </p:nvSpPr>
+        <p:spPr>
+          <a:xfrm>
+            <a:off x="2807208" y="4361688"/>
+            <a:ext cx="118872" cy="118872"/>
+          </a:xfrm>
+          <a:prstGeom prst="rect">
+            <a:avLst/>
+          </a:prstGeom>
+          <a:solidFill>
+            <a:srgbClr val="E9F4EF"/>
+          </a:solidFill>
+          <a:ln/>
+        </p:spPr>
+      </p:sp>
+      <p:sp>
+        <p:nvSpPr>
+          <p:cNvPr id="71" name="Shape 68"/>
+          <p:cNvSpPr/>
+          <p:nvPr/>
+        </p:nvSpPr>
+        <p:spPr>
+          <a:xfrm>
+            <a:off x="2967228" y="4361688"/>
+            <a:ext cx="118872" cy="118872"/>
+          </a:xfrm>
+          <a:prstGeom prst="rect">
+            <a:avLst/>
+          </a:prstGeom>
+          <a:solidFill>
+            <a:srgbClr val="E9F4EF"/>
+          </a:solidFill>
+          <a:ln/>
+        </p:spPr>
+      </p:sp>
+      <p:sp>
+        <p:nvSpPr>
+          <p:cNvPr id="72" name="Shape 69"/>
+          <p:cNvSpPr/>
+          <p:nvPr/>
+        </p:nvSpPr>
+        <p:spPr>
+          <a:xfrm>
+            <a:off x="3127248" y="4361688"/>
+            <a:ext cx="118872" cy="118872"/>
+          </a:xfrm>
+          <a:prstGeom prst="rect">
+            <a:avLst/>
+          </a:prstGeom>
+          <a:solidFill>
+            <a:srgbClr val="E9F4EF"/>
+          </a:solidFill>
+          <a:ln/>
+        </p:spPr>
+      </p:sp>
+      <p:sp>
+        <p:nvSpPr>
+          <p:cNvPr id="73" name="Shape 70"/>
+          <p:cNvSpPr/>
+          <p:nvPr/>
+        </p:nvSpPr>
+        <p:spPr>
+          <a:xfrm>
+            <a:off x="3287268" y="4361688"/>
+            <a:ext cx="118872" cy="118872"/>
+          </a:xfrm>
+          <a:prstGeom prst="rect">
+            <a:avLst/>
+          </a:prstGeom>
+          <a:solidFill>
+            <a:srgbClr val="E9F4EF"/>
+          </a:solidFill>
+          <a:ln/>
+        </p:spPr>
+      </p:sp>
+      <p:sp>
+        <p:nvSpPr>
+          <p:cNvPr id="74" name="Shape 71"/>
+          <p:cNvSpPr/>
+          <p:nvPr/>
+        </p:nvSpPr>
+        <p:spPr>
+          <a:xfrm>
+            <a:off x="3447288" y="4361688"/>
+            <a:ext cx="118872" cy="118872"/>
+          </a:xfrm>
+          <a:prstGeom prst="rect">
+            <a:avLst/>
+          </a:prstGeom>
+          <a:solidFill>
+            <a:srgbClr val="E9F4EF"/>
+          </a:solidFill>
+          <a:ln/>
+        </p:spPr>
+      </p:sp>
+      <p:sp>
+        <p:nvSpPr>
+          <p:cNvPr id="75" name="Shape 72"/>
+          <p:cNvSpPr/>
+          <p:nvPr/>
+        </p:nvSpPr>
+        <p:spPr>
+          <a:xfrm>
+            <a:off x="3607308" y="4361688"/>
+            <a:ext cx="118872" cy="118872"/>
+          </a:xfrm>
+          <a:prstGeom prst="rect">
+            <a:avLst/>
+          </a:prstGeom>
+          <a:solidFill>
+            <a:srgbClr val="E9F4EF"/>
+          </a:solidFill>
+          <a:ln/>
+        </p:spPr>
+      </p:sp>
+      <p:sp>
+        <p:nvSpPr>
+          <p:cNvPr id="76" name="Shape 73"/>
+          <p:cNvSpPr/>
+          <p:nvPr/>
+        </p:nvSpPr>
+        <p:spPr>
+          <a:xfrm>
+            <a:off x="566928" y="4521708"/>
+            <a:ext cx="118872" cy="118872"/>
+          </a:xfrm>
+          <a:prstGeom prst="rect">
+            <a:avLst/>
+          </a:prstGeom>
+          <a:solidFill>
+            <a:srgbClr val="E9F4EF"/>
+          </a:solidFill>
+          <a:ln/>
+        </p:spPr>
+      </p:sp>
+      <p:sp>
+        <p:nvSpPr>
+          <p:cNvPr id="77" name="Shape 74"/>
+          <p:cNvSpPr/>
+          <p:nvPr/>
+        </p:nvSpPr>
+        <p:spPr>
+          <a:xfrm>
+            <a:off x="726948" y="4521708"/>
+            <a:ext cx="118872" cy="118872"/>
+          </a:xfrm>
+          <a:prstGeom prst="rect">
+            <a:avLst/>
+          </a:prstGeom>
+          <a:solidFill>
+            <a:srgbClr val="E9F4EF"/>
+          </a:solidFill>
+          <a:ln/>
+        </p:spPr>
+      </p:sp>
+      <p:sp>
+        <p:nvSpPr>
+          <p:cNvPr id="78" name="Shape 75"/>
+          <p:cNvSpPr/>
+          <p:nvPr/>
+        </p:nvSpPr>
+        <p:spPr>
+          <a:xfrm>
+            <a:off x="886968" y="4521708"/>
+            <a:ext cx="118872" cy="118872"/>
+          </a:xfrm>
+          <a:prstGeom prst="rect">
+            <a:avLst/>
+          </a:prstGeom>
+          <a:solidFill>
+            <a:srgbClr val="E9F4EF"/>
+          </a:solidFill>
+          <a:ln/>
+        </p:spPr>
+      </p:sp>
+      <p:sp>
+        <p:nvSpPr>
+          <p:cNvPr id="79" name="Shape 76"/>
+          <p:cNvSpPr/>
+          <p:nvPr/>
+        </p:nvSpPr>
+        <p:spPr>
+          <a:xfrm>
+            <a:off x="1046988" y="4521708"/>
+            <a:ext cx="118872" cy="118872"/>
+          </a:xfrm>
+          <a:prstGeom prst="rect">
+            <a:avLst/>
+          </a:prstGeom>
+          <a:solidFill>
+            <a:srgbClr val="E9F4EF"/>
+          </a:solidFill>
+          <a:ln/>
+        </p:spPr>
+      </p:sp>
+      <p:sp>
+        <p:nvSpPr>
+          <p:cNvPr id="80" name="Shape 77"/>
+          <p:cNvSpPr/>
+          <p:nvPr/>
+        </p:nvSpPr>
+        <p:spPr>
+          <a:xfrm>
+            <a:off x="1207008" y="4521708"/>
+            <a:ext cx="118872" cy="118872"/>
+          </a:xfrm>
+          <a:prstGeom prst="rect">
+            <a:avLst/>
+          </a:prstGeom>
+          <a:solidFill>
+            <a:srgbClr val="E9F4EF"/>
+          </a:solidFill>
+          <a:ln/>
+        </p:spPr>
+      </p:sp>
+      <p:sp>
+        <p:nvSpPr>
+          <p:cNvPr id="81" name="Shape 78"/>
+          <p:cNvSpPr/>
+          <p:nvPr/>
+        </p:nvSpPr>
+        <p:spPr>
+          <a:xfrm>
+            <a:off x="1367028" y="4521708"/>
+            <a:ext cx="118872" cy="118872"/>
+          </a:xfrm>
+          <a:prstGeom prst="rect">
+            <a:avLst/>
+          </a:prstGeom>
+          <a:solidFill>
+            <a:srgbClr val="E9F4EF"/>
+          </a:solidFill>
+          <a:ln/>
+        </p:spPr>
+      </p:sp>
+      <p:sp>
+        <p:nvSpPr>
+          <p:cNvPr id="82" name="Shape 79"/>
+          <p:cNvSpPr/>
+          <p:nvPr/>
+        </p:nvSpPr>
+        <p:spPr>
+          <a:xfrm>
+            <a:off x="1527048" y="4521708"/>
+            <a:ext cx="118872" cy="118872"/>
+          </a:xfrm>
+          <a:prstGeom prst="rect">
+            <a:avLst/>
+          </a:prstGeom>
+          <a:solidFill>
+            <a:srgbClr val="E9F4EF"/>
+          </a:solidFill>
+          <a:ln/>
+        </p:spPr>
+      </p:sp>
+      <p:sp>
+        <p:nvSpPr>
+          <p:cNvPr id="83" name="Shape 80"/>
+          <p:cNvSpPr/>
+          <p:nvPr/>
+        </p:nvSpPr>
+        <p:spPr>
+          <a:xfrm>
+            <a:off x="1687068" y="4521708"/>
+            <a:ext cx="118872" cy="118872"/>
+          </a:xfrm>
+          <a:prstGeom prst="rect">
+            <a:avLst/>
+          </a:prstGeom>
+          <a:solidFill>
+            <a:srgbClr val="E9F4EF"/>
+          </a:solidFill>
+          <a:ln/>
+        </p:spPr>
+      </p:sp>
+      <p:sp>
+        <p:nvSpPr>
+          <p:cNvPr id="84" name="Shape 81"/>
+          <p:cNvSpPr/>
+          <p:nvPr/>
+        </p:nvSpPr>
+        <p:spPr>
+          <a:xfrm>
+            <a:off x="1847088" y="4521708"/>
+            <a:ext cx="118872" cy="118872"/>
+          </a:xfrm>
+          <a:prstGeom prst="rect">
+            <a:avLst/>
+          </a:prstGeom>
+          <a:solidFill>
+            <a:srgbClr val="E9F4EF"/>
+          </a:solidFill>
+          <a:ln/>
+        </p:spPr>
+      </p:sp>
+      <p:sp>
+        <p:nvSpPr>
+          <p:cNvPr id="85" name="Shape 82"/>
+          <p:cNvSpPr/>
+          <p:nvPr/>
+        </p:nvSpPr>
+        <p:spPr>
+          <a:xfrm>
+            <a:off x="2007108" y="4521708"/>
+            <a:ext cx="118872" cy="118872"/>
+          </a:xfrm>
+          <a:prstGeom prst="rect">
+            <a:avLst/>
+          </a:prstGeom>
+          <a:solidFill>
+            <a:srgbClr val="E9F4EF"/>
+          </a:solidFill>
+          <a:ln/>
+        </p:spPr>
+      </p:sp>
+      <p:sp>
+        <p:nvSpPr>
+          <p:cNvPr id="86" name="Shape 83"/>
+          <p:cNvSpPr/>
+          <p:nvPr/>
+        </p:nvSpPr>
+        <p:spPr>
+          <a:xfrm>
+            <a:off x="2167128" y="4521708"/>
+            <a:ext cx="118872" cy="118872"/>
+          </a:xfrm>
+          <a:prstGeom prst="rect">
+            <a:avLst/>
+          </a:prstGeom>
+          <a:solidFill>
+            <a:srgbClr val="E9F4EF"/>
+          </a:solidFill>
+          <a:ln/>
+        </p:spPr>
+      </p:sp>
+      <p:sp>
+        <p:nvSpPr>
+          <p:cNvPr id="87" name="Shape 84"/>
+          <p:cNvSpPr/>
+          <p:nvPr/>
+        </p:nvSpPr>
+        <p:spPr>
+          <a:xfrm>
+            <a:off x="2327148" y="4521708"/>
+            <a:ext cx="118872" cy="118872"/>
+          </a:xfrm>
+          <a:prstGeom prst="rect">
+            <a:avLst/>
+          </a:prstGeom>
+          <a:solidFill>
+            <a:srgbClr val="E9F4EF"/>
+          </a:solidFill>
+          <a:ln/>
+        </p:spPr>
+      </p:sp>
+      <p:sp>
+        <p:nvSpPr>
+          <p:cNvPr id="88" name="Shape 85"/>
+          <p:cNvSpPr/>
+          <p:nvPr/>
+        </p:nvSpPr>
+        <p:spPr>
+          <a:xfrm>
+            <a:off x="2487168" y="4521708"/>
+            <a:ext cx="118872" cy="118872"/>
+          </a:xfrm>
+          <a:prstGeom prst="rect">
+            <a:avLst/>
+          </a:prstGeom>
+          <a:solidFill>
+            <a:srgbClr val="E9F4EF"/>
+          </a:solidFill>
+          <a:ln/>
+        </p:spPr>
+      </p:sp>
+      <p:sp>
+        <p:nvSpPr>
+          <p:cNvPr id="89" name="Shape 86"/>
+          <p:cNvSpPr/>
+          <p:nvPr/>
+        </p:nvSpPr>
+        <p:spPr>
+          <a:xfrm>
+            <a:off x="2647188" y="4521708"/>
+            <a:ext cx="118872" cy="118872"/>
+          </a:xfrm>
+          <a:prstGeom prst="rect">
+            <a:avLst/>
+          </a:prstGeom>
+          <a:solidFill>
+            <a:srgbClr val="E9F4EF"/>
+          </a:solidFill>
+          <a:ln/>
+        </p:spPr>
+      </p:sp>
+      <p:sp>
+        <p:nvSpPr>
+          <p:cNvPr id="90" name="Shape 87"/>
+          <p:cNvSpPr/>
+          <p:nvPr/>
+        </p:nvSpPr>
+        <p:spPr>
+          <a:xfrm>
+            <a:off x="2807208" y="4521708"/>
+            <a:ext cx="118872" cy="118872"/>
+          </a:xfrm>
+          <a:prstGeom prst="rect">
+            <a:avLst/>
+          </a:prstGeom>
+          <a:solidFill>
+            <a:srgbClr val="E9F4EF"/>
+          </a:solidFill>
+          <a:ln/>
+        </p:spPr>
+      </p:sp>
+      <p:sp>
+        <p:nvSpPr>
+          <p:cNvPr id="91" name="Shape 88"/>
+          <p:cNvSpPr/>
+          <p:nvPr/>
+        </p:nvSpPr>
+        <p:spPr>
+          <a:xfrm>
+            <a:off x="2967228" y="4521708"/>
+            <a:ext cx="118872" cy="118872"/>
+          </a:xfrm>
+          <a:prstGeom prst="rect">
+            <a:avLst/>
+          </a:prstGeom>
+          <a:solidFill>
+            <a:srgbClr val="E9F4EF"/>
+          </a:solidFill>
+          <a:ln/>
+        </p:spPr>
+      </p:sp>
+      <p:sp>
+        <p:nvSpPr>
+          <p:cNvPr id="92" name="Shape 89"/>
+          <p:cNvSpPr/>
+          <p:nvPr/>
+        </p:nvSpPr>
+        <p:spPr>
+          <a:xfrm>
+            <a:off x="3127248" y="4521708"/>
+            <a:ext cx="118872" cy="118872"/>
+          </a:xfrm>
+          <a:prstGeom prst="rect">
+            <a:avLst/>
+          </a:prstGeom>
+          <a:solidFill>
+            <a:srgbClr val="E9F4EF"/>
+          </a:solidFill>
+          <a:ln/>
+        </p:spPr>
+      </p:sp>
+      <p:sp>
+        <p:nvSpPr>
+          <p:cNvPr id="93" name="Shape 90"/>
+          <p:cNvSpPr/>
+          <p:nvPr/>
+        </p:nvSpPr>
+        <p:spPr>
+          <a:xfrm>
+            <a:off x="3287268" y="4521708"/>
+            <a:ext cx="118872" cy="118872"/>
+          </a:xfrm>
+          <a:prstGeom prst="rect">
+            <a:avLst/>
+          </a:prstGeom>
+          <a:solidFill>
+            <a:srgbClr val="E9F4EF"/>
+          </a:solidFill>
+          <a:ln/>
+        </p:spPr>
+      </p:sp>
+      <p:sp>
+        <p:nvSpPr>
+          <p:cNvPr id="94" name="Shape 91"/>
+          <p:cNvSpPr/>
+          <p:nvPr/>
+        </p:nvSpPr>
+        <p:spPr>
+          <a:xfrm>
+            <a:off x="3447288" y="4521708"/>
+            <a:ext cx="118872" cy="118872"/>
+          </a:xfrm>
+          <a:prstGeom prst="rect">
+            <a:avLst/>
+          </a:prstGeom>
+          <a:solidFill>
+            <a:srgbClr val="E9F4EF"/>
+          </a:solidFill>
+          <a:ln/>
+        </p:spPr>
+      </p:sp>
+      <p:sp>
+        <p:nvSpPr>
+          <p:cNvPr id="95" name="Shape 92"/>
+          <p:cNvSpPr/>
+          <p:nvPr/>
+        </p:nvSpPr>
+        <p:spPr>
+          <a:xfrm>
+            <a:off x="3607308" y="4521708"/>
+            <a:ext cx="118872" cy="118872"/>
+          </a:xfrm>
+          <a:prstGeom prst="rect">
+            <a:avLst/>
+          </a:prstGeom>
+          <a:solidFill>
+            <a:srgbClr val="E9F4EF"/>
+          </a:solidFill>
+          <a:ln/>
+        </p:spPr>
+      </p:sp>
+      <p:sp>
+        <p:nvSpPr>
+          <p:cNvPr id="96" name="Shape 93"/>
+          <p:cNvSpPr/>
+          <p:nvPr/>
+        </p:nvSpPr>
+        <p:spPr>
+          <a:xfrm>
+            <a:off x="566928" y="4681728"/>
+            <a:ext cx="118872" cy="118872"/>
+          </a:xfrm>
+          <a:prstGeom prst="rect">
+            <a:avLst/>
+          </a:prstGeom>
+          <a:solidFill>
+            <a:srgbClr val="E9F4EF"/>
+          </a:solidFill>
+          <a:ln/>
+        </p:spPr>
+      </p:sp>
+      <p:sp>
+        <p:nvSpPr>
+          <p:cNvPr id="97" name="Shape 94"/>
+          <p:cNvSpPr/>
+          <p:nvPr/>
+        </p:nvSpPr>
+        <p:spPr>
+          <a:xfrm>
+            <a:off x="726948" y="4681728"/>
+            <a:ext cx="118872" cy="118872"/>
+          </a:xfrm>
+          <a:prstGeom prst="rect">
+            <a:avLst/>
+          </a:prstGeom>
+          <a:solidFill>
+            <a:srgbClr val="E9F4EF"/>
+          </a:solidFill>
+          <a:ln/>
+        </p:spPr>
+      </p:sp>
+      <p:sp>
+        <p:nvSpPr>
+          <p:cNvPr id="98" name="Shape 95"/>
+          <p:cNvSpPr/>
+          <p:nvPr/>
+        </p:nvSpPr>
+        <p:spPr>
+          <a:xfrm>
+            <a:off x="886968" y="4681728"/>
+            <a:ext cx="118872" cy="118872"/>
+          </a:xfrm>
+          <a:prstGeom prst="rect">
+            <a:avLst/>
+          </a:prstGeom>
+          <a:solidFill>
+            <a:srgbClr val="E9F4EF"/>
+          </a:solidFill>
+          <a:ln/>
+        </p:spPr>
+      </p:sp>
+      <p:sp>
+        <p:nvSpPr>
+          <p:cNvPr id="99" name="Shape 96"/>
+          <p:cNvSpPr/>
+          <p:nvPr/>
+        </p:nvSpPr>
+        <p:spPr>
+          <a:xfrm>
+            <a:off x="1046988" y="4681728"/>
+            <a:ext cx="118872" cy="118872"/>
+          </a:xfrm>
+          <a:prstGeom prst="rect">
+            <a:avLst/>
+          </a:prstGeom>
+          <a:solidFill>
+            <a:srgbClr val="E9F4EF"/>
+          </a:solidFill>
+          <a:ln/>
+        </p:spPr>
+      </p:sp>
+      <p:sp>
+        <p:nvSpPr>
+          <p:cNvPr id="100" name="Shape 97"/>
+          <p:cNvSpPr/>
+          <p:nvPr/>
+        </p:nvSpPr>
+        <p:spPr>
+          <a:xfrm>
+            <a:off x="1207008" y="4681728"/>
+            <a:ext cx="118872" cy="118872"/>
+          </a:xfrm>
+          <a:prstGeom prst="rect">
+            <a:avLst/>
+          </a:prstGeom>
+          <a:solidFill>
+            <a:srgbClr val="E9F4EF"/>
+          </a:solidFill>
+          <a:ln/>
+        </p:spPr>
+      </p:sp>
+      <p:sp>
+        <p:nvSpPr>
+          <p:cNvPr id="101" name="Shape 98"/>
+          <p:cNvSpPr/>
+          <p:nvPr/>
+        </p:nvSpPr>
+        <p:spPr>
+          <a:xfrm>
+            <a:off x="1367028" y="4681728"/>
+            <a:ext cx="118872" cy="118872"/>
+          </a:xfrm>
+          <a:prstGeom prst="rect">
+            <a:avLst/>
+          </a:prstGeom>
+          <a:solidFill>
+            <a:srgbClr val="E9F4EF"/>
+          </a:solidFill>
+          <a:ln/>
+        </p:spPr>
+      </p:sp>
+      <p:sp>
+        <p:nvSpPr>
+          <p:cNvPr id="102" name="Shape 99"/>
+          <p:cNvSpPr/>
+          <p:nvPr/>
+        </p:nvSpPr>
+        <p:spPr>
+          <a:xfrm>
+            <a:off x="1527048" y="4681728"/>
+            <a:ext cx="118872" cy="118872"/>
+          </a:xfrm>
+          <a:prstGeom prst="rect">
+            <a:avLst/>
+          </a:prstGeom>
+          <a:solidFill>
+            <a:srgbClr val="E9F4EF"/>
+          </a:solidFill>
+          <a:ln/>
+        </p:spPr>
+      </p:sp>
+      <p:sp>
+        <p:nvSpPr>
+          <p:cNvPr id="103" name="Shape 100"/>
+          <p:cNvSpPr/>
+          <p:nvPr/>
+        </p:nvSpPr>
+        <p:spPr>
+          <a:xfrm>
+            <a:off x="1687068" y="4681728"/>
+            <a:ext cx="118872" cy="118872"/>
+          </a:xfrm>
+          <a:prstGeom prst="rect">
+            <a:avLst/>
+          </a:prstGeom>
+          <a:solidFill>
+            <a:srgbClr val="E9F4EF"/>
+          </a:solidFill>
+          <a:ln/>
+        </p:spPr>
+      </p:sp>
+      <p:sp>
+        <p:nvSpPr>
+          <p:cNvPr id="104" name="Shape 101"/>
+          <p:cNvSpPr/>
+          <p:nvPr/>
+        </p:nvSpPr>
+        <p:spPr>
+          <a:xfrm>
+            <a:off x="1847088" y="4681728"/>
+            <a:ext cx="118872" cy="118872"/>
+          </a:xfrm>
+          <a:prstGeom prst="rect">
+            <a:avLst/>
+          </a:prstGeom>
+          <a:solidFill>
+            <a:srgbClr val="E9F4EF"/>
+          </a:solidFill>
+          <a:ln/>
+        </p:spPr>
+      </p:sp>
+      <p:sp>
+        <p:nvSpPr>
+          <p:cNvPr id="105" name="Shape 102"/>
+          <p:cNvSpPr/>
+          <p:nvPr/>
+        </p:nvSpPr>
+        <p:spPr>
+          <a:xfrm>
+            <a:off x="2007108" y="4681728"/>
+            <a:ext cx="118872" cy="118872"/>
+          </a:xfrm>
+          <a:prstGeom prst="rect">
+            <a:avLst/>
+          </a:prstGeom>
+          <a:solidFill>
+            <a:srgbClr val="E9F4EF"/>
+          </a:solidFill>
+          <a:ln/>
+        </p:spPr>
+      </p:sp>
+      <p:sp>
+        <p:nvSpPr>
+          <p:cNvPr id="106" name="Shape 103"/>
+          <p:cNvSpPr/>
+          <p:nvPr/>
+        </p:nvSpPr>
+        <p:spPr>
+          <a:xfrm>
+            <a:off x="2167128" y="4681728"/>
+            <a:ext cx="118872" cy="118872"/>
+          </a:xfrm>
+          <a:prstGeom prst="rect">
+            <a:avLst/>
+          </a:prstGeom>
+          <a:solidFill>
+            <a:srgbClr val="E9F4EF"/>
+          </a:solidFill>
+          <a:ln/>
+        </p:spPr>
+      </p:sp>
+      <p:sp>
+        <p:nvSpPr>
+          <p:cNvPr id="107" name="Shape 104"/>
+          <p:cNvSpPr/>
+          <p:nvPr/>
+        </p:nvSpPr>
+        <p:spPr>
+          <a:xfrm>
+            <a:off x="2327148" y="4681728"/>
+            <a:ext cx="118872" cy="118872"/>
+          </a:xfrm>
+          <a:prstGeom prst="rect">
+            <a:avLst/>
+          </a:prstGeom>
+          <a:solidFill>
+            <a:srgbClr val="E9F4EF"/>
+          </a:solidFill>
+          <a:ln/>
+        </p:spPr>
+      </p:sp>
+      <p:sp>
+        <p:nvSpPr>
+          <p:cNvPr id="108" name="Shape 105"/>
+          <p:cNvSpPr/>
+          <p:nvPr/>
+        </p:nvSpPr>
+        <p:spPr>
+          <a:xfrm>
+            <a:off x="2487168" y="4681728"/>
+            <a:ext cx="118872" cy="118872"/>
+          </a:xfrm>
+          <a:prstGeom prst="rect">
+            <a:avLst/>
+          </a:prstGeom>
+          <a:solidFill>
+            <a:srgbClr val="E9F4EF"/>
+          </a:solidFill>
+          <a:ln/>
+        </p:spPr>
+      </p:sp>
+      <p:sp>
+        <p:nvSpPr>
+          <p:cNvPr id="109" name="Shape 106"/>
+          <p:cNvSpPr/>
+          <p:nvPr/>
+        </p:nvSpPr>
+        <p:spPr>
+          <a:xfrm>
+            <a:off x="2647188" y="4681728"/>
+            <a:ext cx="118872" cy="118872"/>
+          </a:xfrm>
+          <a:prstGeom prst="rect">
+            <a:avLst/>
+          </a:prstGeom>
+          <a:solidFill>
+            <a:srgbClr val="E9F4EF"/>
+          </a:solidFill>
+          <a:ln/>
+        </p:spPr>
+      </p:sp>
+      <p:sp>
+        <p:nvSpPr>
+          <p:cNvPr id="110" name="Shape 107"/>
+          <p:cNvSpPr/>
+          <p:nvPr/>
+        </p:nvSpPr>
+        <p:spPr>
+          <a:xfrm>
+            <a:off x="2807208" y="4681728"/>
+            <a:ext cx="118872" cy="118872"/>
+          </a:xfrm>
+          <a:prstGeom prst="rect">
+            <a:avLst/>
+          </a:prstGeom>
+          <a:solidFill>
+            <a:srgbClr val="E9F4EF"/>
+          </a:solidFill>
+          <a:ln/>
+        </p:spPr>
+      </p:sp>
+      <p:sp>
+        <p:nvSpPr>
+          <p:cNvPr id="111" name="Shape 108"/>
+          <p:cNvSpPr/>
+          <p:nvPr/>
+        </p:nvSpPr>
+        <p:spPr>
+          <a:xfrm>
+            <a:off x="2967228" y="4681728"/>
+            <a:ext cx="118872" cy="118872"/>
+          </a:xfrm>
+          <a:prstGeom prst="rect">
+            <a:avLst/>
+          </a:prstGeom>
+          <a:solidFill>
+            <a:srgbClr val="E9F4EF"/>
+          </a:solidFill>
+          <a:ln/>
+        </p:spPr>
+      </p:sp>
+      <p:sp>
+        <p:nvSpPr>
+          <p:cNvPr id="112" name="Shape 109"/>
+          <p:cNvSpPr/>
+          <p:nvPr/>
+        </p:nvSpPr>
+        <p:spPr>
+          <a:xfrm>
+            <a:off x="3127248" y="4681728"/>
+            <a:ext cx="118872" cy="118872"/>
+          </a:xfrm>
+          <a:prstGeom prst="rect">
+            <a:avLst/>
+          </a:prstGeom>
+          <a:solidFill>
+            <a:srgbClr val="E9F4EF"/>
+          </a:solidFill>
+          <a:ln/>
+        </p:spPr>
+      </p:sp>
+      <p:sp>
+        <p:nvSpPr>
+          <p:cNvPr id="113" name="Shape 110"/>
+          <p:cNvSpPr/>
+          <p:nvPr/>
+        </p:nvSpPr>
+        <p:spPr>
+          <a:xfrm>
+            <a:off x="3287268" y="4681728"/>
+            <a:ext cx="118872" cy="118872"/>
+          </a:xfrm>
+          <a:prstGeom prst="rect">
+            <a:avLst/>
+          </a:prstGeom>
+          <a:solidFill>
+            <a:srgbClr val="E9F4EF"/>
+          </a:solidFill>
+          <a:ln/>
+        </p:spPr>
+      </p:sp>
+      <p:sp>
+        <p:nvSpPr>
+          <p:cNvPr id="114" name="Shape 111"/>
+          <p:cNvSpPr/>
+          <p:nvPr/>
+        </p:nvSpPr>
+        <p:spPr>
+          <a:xfrm>
+            <a:off x="3447288" y="4681728"/>
+            <a:ext cx="118872" cy="118872"/>
+          </a:xfrm>
+          <a:prstGeom prst="rect">
+            <a:avLst/>
+          </a:prstGeom>
+          <a:solidFill>
+            <a:srgbClr val="E9F4EF"/>
+          </a:solidFill>
+          <a:ln/>
+        </p:spPr>
+      </p:sp>
+      <p:sp>
+        <p:nvSpPr>
+          <p:cNvPr id="115" name="Shape 112"/>
+          <p:cNvSpPr/>
+          <p:nvPr/>
+        </p:nvSpPr>
+        <p:spPr>
+          <a:xfrm>
+            <a:off x="3607308" y="4681728"/>
+            <a:ext cx="118872" cy="118872"/>
+          </a:xfrm>
+          <a:prstGeom prst="rect">
+            <a:avLst/>
+          </a:prstGeom>
+          <a:solidFill>
+            <a:srgbClr val="C62A2A"/>
+          </a:solidFill>
+          <a:ln/>
+        </p:spPr>
+      </p:sp>
+      <p:sp>
+        <p:nvSpPr>
+          <p:cNvPr id="116" name="Text 113"/>
+          <p:cNvSpPr/>
+          <p:nvPr/>
+        </p:nvSpPr>
+        <p:spPr>
+          <a:xfrm>
+            <a:off x="4137660" y="4087368"/>
+            <a:ext cx="7493508" cy="365760"/>
+          </a:xfrm>
+          <a:prstGeom prst="rect">
+            <a:avLst/>
+          </a:prstGeom>
+          <a:noFill/>
+          <a:ln/>
+        </p:spPr>
+        <p:txBody>
+          <a:bodyPr wrap="square" lIns="0" tIns="0" rIns="0" bIns="0" rtlCol="0" anchor="ctr"/>
+          <a:lstStyle/>
+          <a:p>
+            <a:pPr indent="0" marL="0">
+              <a:buNone/>
+            </a:pPr>
+            <a:r>
+              <a:rPr lang="en-US" sz="1250" b="1" dirty="0">
+                <a:solidFill>
+                  <a:srgbClr val="1B8A5A"/>
+                </a:solidFill>
+                <a:latin typeface="Montserrat" pitchFamily="34" charset="0"/>
+                <a:ea typeface="Montserrat" pitchFamily="34" charset="-122"/>
+                <a:cs typeface="Montserrat" pitchFamily="34" charset="-120"/>
+              </a:rPr>
+              <a:t>100 звернень</a:t>
+            </a:r>
+            <a:pPr indent="0" marL="0">
+              <a:buNone/>
+            </a:pPr>
+            <a:r>
+              <a:rPr lang="en-US" sz="1250" dirty="0">
+                <a:solidFill>
+                  <a:srgbClr val="555B66"/>
+                </a:solidFill>
+                <a:latin typeface="Montserrat" pitchFamily="34" charset="0"/>
+                <a:ea typeface="Montserrat" pitchFamily="34" charset="-122"/>
+                <a:cs typeface="Montserrat" pitchFamily="34" charset="-120"/>
+              </a:rPr>
+              <a:t>  ·  один червоний квадрат — увесь ваш тижневий бюджет невдач</a:t>
+            </a:r>
+            <a:endParaRPr lang="en-US" sz="1250" dirty="0"/>
+          </a:p>
+        </p:txBody>
+      </p:sp>
+      <p:sp>
+        <p:nvSpPr>
+          <p:cNvPr id="117" name="Text 114"/>
+          <p:cNvSpPr/>
+          <p:nvPr/>
+        </p:nvSpPr>
+        <p:spPr>
+          <a:xfrm>
+            <a:off x="4137660" y="4480560"/>
+            <a:ext cx="7493508" cy="365760"/>
+          </a:xfrm>
+          <a:prstGeom prst="rect">
+            <a:avLst/>
+          </a:prstGeom>
+          <a:noFill/>
+          <a:ln/>
+        </p:spPr>
+        <p:txBody>
+          <a:bodyPr wrap="square" lIns="0" tIns="0" rIns="0" bIns="0" rtlCol="0" anchor="ctr"/>
+          <a:lstStyle/>
+          <a:p>
+            <a:pPr indent="0" marL="0">
+              <a:buNone/>
+            </a:pPr>
+            <a:r>
+              <a:rPr lang="en-US" sz="1150" i="1" dirty="0">
+                <a:solidFill>
+                  <a:srgbClr val="9AA1AD"/>
+                </a:solidFill>
+                <a:latin typeface="Montserrat" pitchFamily="34" charset="0"/>
+                <a:ea typeface="Montserrat" pitchFamily="34" charset="-122"/>
+                <a:cs typeface="Montserrat" pitchFamily="34" charset="-120"/>
+              </a:rPr>
+              <a:t>на 10 000 звернень на тиждень це 100 невдач — і вони закінчуються швидше, ніж здається</a:t>
+            </a:r>
+            <a:endParaRPr lang="en-US" sz="1150" dirty="0"/>
+          </a:p>
+        </p:txBody>
+      </p:sp>
+      <p:sp>
+        <p:nvSpPr>
+          <p:cNvPr id="118" name="Shape 115"/>
+          <p:cNvSpPr/>
+          <p:nvPr/>
+        </p:nvSpPr>
+        <p:spPr>
+          <a:xfrm>
+            <a:off x="566928" y="4983480"/>
+            <a:ext cx="11064240" cy="685800"/>
           </a:xfrm>
           <a:prstGeom prst="roundRect">
             <a:avLst>
-              <a:gd name="adj" fmla="val 8889"/>
+              <a:gd name="adj" fmla="val 16000"/>
             </a:avLst>
           </a:prstGeom>
           <a:solidFill>
@@ -7892,13 +9984,13 @@
       </p:sp>
       <p:sp>
         <p:nvSpPr>
-          <p:cNvPr id="17" name="Text 14"/>
-          <p:cNvSpPr/>
-          <p:nvPr/>
-        </p:nvSpPr>
-        <p:spPr>
-          <a:xfrm>
-            <a:off x="786384" y="4443984"/>
+          <p:cNvPr id="119" name="Text 116"/>
+          <p:cNvSpPr/>
+          <p:nvPr/>
+        </p:nvSpPr>
+        <p:spPr>
+          <a:xfrm>
+            <a:off x="786384" y="5111496"/>
             <a:ext cx="10625328" cy="219456"/>
           </a:xfrm>
           <a:prstGeom prst="rect">
@@ -7931,14 +10023,14 @@
       </p:sp>
       <p:sp>
         <p:nvSpPr>
-          <p:cNvPr id="18" name="Text 15"/>
-          <p:cNvSpPr/>
-          <p:nvPr/>
-        </p:nvSpPr>
-        <p:spPr>
-          <a:xfrm>
-            <a:off x="786384" y="4700016"/>
-            <a:ext cx="10625328" cy="722376"/>
+          <p:cNvPr id="120" name="Text 117"/>
+          <p:cNvSpPr/>
+          <p:nvPr/>
+        </p:nvSpPr>
+        <p:spPr>
+          <a:xfrm>
+            <a:off x="786384" y="5367528"/>
+            <a:ext cx="10625328" cy="173736"/>
           </a:xfrm>
           <a:prstGeom prst="rect">
             <a:avLst/>
@@ -7973,18 +10065,18 @@
       </p:sp>
       <p:sp>
         <p:nvSpPr>
-          <p:cNvPr id="19" name="Shape 16"/>
-          <p:cNvSpPr/>
-          <p:nvPr/>
-        </p:nvSpPr>
-        <p:spPr>
-          <a:xfrm>
-            <a:off x="566928" y="5623560"/>
-            <a:ext cx="11064240" cy="548640"/>
+          <p:cNvPr id="121" name="Shape 118"/>
+          <p:cNvSpPr/>
+          <p:nvPr/>
+        </p:nvSpPr>
+        <p:spPr>
+          <a:xfrm>
+            <a:off x="566928" y="5742432"/>
+            <a:ext cx="11064240" cy="411480"/>
           </a:xfrm>
           <a:prstGeom prst="roundRect">
             <a:avLst>
-              <a:gd name="adj" fmla="val 20000"/>
+              <a:gd name="adj" fmla="val 26667"/>
             </a:avLst>
           </a:prstGeom>
           <a:solidFill>
@@ -7995,14 +10087,14 @@
       </p:sp>
       <p:sp>
         <p:nvSpPr>
-          <p:cNvPr id="20" name="Text 17"/>
-          <p:cNvSpPr/>
-          <p:nvPr/>
-        </p:nvSpPr>
-        <p:spPr>
-          <a:xfrm>
-            <a:off x="786384" y="5769864"/>
-            <a:ext cx="10625328" cy="256032"/>
+          <p:cNvPr id="122" name="Text 119"/>
+          <p:cNvSpPr/>
+          <p:nvPr/>
+        </p:nvSpPr>
+        <p:spPr>
+          <a:xfrm>
+            <a:off x="786384" y="5888736"/>
+            <a:ext cx="10625328" cy="118872"/>
           </a:xfrm>
           <a:prstGeom prst="rect">
             <a:avLst/>

--- a/docs/decks/L09.pptx
+++ b/docs/decks/L09.pptx
@@ -28526,307 +28526,7 @@
         <p:spPr>
           <a:xfrm>
             <a:off x="566928" y="1737360"/>
-            <a:ext cx="3566160" cy="1463040"/>
-          </a:xfrm>
-          <a:prstGeom prst="roundRect">
-            <a:avLst>
-              <a:gd name="adj" fmla="val 7500"/>
-            </a:avLst>
-          </a:prstGeom>
-          <a:solidFill>
-            <a:srgbClr val="E9F4EF"/>
-          </a:solidFill>
-          <a:ln/>
-        </p:spPr>
-      </p:sp>
-      <p:sp>
-        <p:nvSpPr>
-          <p:cNvPr id="8" name="Text 5"/>
-          <p:cNvSpPr/>
-          <p:nvPr/>
-        </p:nvSpPr>
-        <p:spPr>
-          <a:xfrm>
-            <a:off x="713232" y="1847088"/>
-            <a:ext cx="3273552" cy="760781"/>
-          </a:xfrm>
-          <a:prstGeom prst="rect">
-            <a:avLst/>
-          </a:prstGeom>
-          <a:noFill/>
-          <a:ln/>
-        </p:spPr>
-        <p:txBody>
-          <a:bodyPr wrap="square" lIns="0" tIns="0" rIns="0" bIns="0" rtlCol="0" anchor="ctr"/>
-          <a:lstStyle/>
-          <a:p>
-            <a:pPr indent="0" marL="0">
-              <a:buNone/>
-            </a:pPr>
-            <a:r>
-              <a:rPr lang="en-US" sz="3200" b="1" dirty="0">
-                <a:solidFill>
-                  <a:srgbClr val="1B8A5A"/>
-                </a:solidFill>
-                <a:latin typeface="Montserrat" pitchFamily="34" charset="0"/>
-                <a:ea typeface="Montserrat" pitchFamily="34" charset="-122"/>
-                <a:cs typeface="Montserrat" pitchFamily="34" charset="-120"/>
-              </a:rPr>
-              <a:t>≈ 1.1 с</a:t>
-            </a:r>
-            <a:endParaRPr lang="en-US" sz="3200" dirty="0"/>
-          </a:p>
-        </p:txBody>
-      </p:sp>
-      <p:sp>
-        <p:nvSpPr>
-          <p:cNvPr id="9" name="Text 6"/>
-          <p:cNvSpPr/>
-          <p:nvPr/>
-        </p:nvSpPr>
-        <p:spPr>
-          <a:xfrm>
-            <a:off x="713232" y="2585923"/>
-            <a:ext cx="3273552" cy="526694"/>
-          </a:xfrm>
-          <a:prstGeom prst="rect">
-            <a:avLst/>
-          </a:prstGeom>
-          <a:noFill/>
-          <a:ln/>
-        </p:spPr>
-        <p:txBody>
-          <a:bodyPr wrap="square" lIns="0" tIns="0" rIns="0" bIns="0" rtlCol="0" anchor="t"/>
-          <a:lstStyle/>
-          <a:p>
-            <a:pPr indent="0" marL="0">
-              <a:buNone/>
-            </a:pPr>
-            <a:r>
-              <a:rPr lang="en-US" sz="1150" dirty="0">
-                <a:solidFill>
-                  <a:srgbClr val="1B8A5A"/>
-                </a:solidFill>
-                <a:latin typeface="Montserrat" pitchFamily="34" charset="0"/>
-                <a:ea typeface="Montserrat" pitchFamily="34" charset="-122"/>
-                <a:cs typeface="Montserrat" pitchFamily="34" charset="-120"/>
-              </a:rPr>
-              <a:t>середнє — «прийнятно»</a:t>
-            </a:r>
-            <a:endParaRPr lang="en-US" sz="1150" dirty="0"/>
-          </a:p>
-        </p:txBody>
-      </p:sp>
-      <p:sp>
-        <p:nvSpPr>
-          <p:cNvPr id="10" name="Shape 7"/>
-          <p:cNvSpPr/>
-          <p:nvPr/>
-        </p:nvSpPr>
-        <p:spPr>
-          <a:xfrm>
-            <a:off x="4315968" y="1737360"/>
-            <a:ext cx="3566160" cy="1463040"/>
-          </a:xfrm>
-          <a:prstGeom prst="roundRect">
-            <a:avLst>
-              <a:gd name="adj" fmla="val 7500"/>
-            </a:avLst>
-          </a:prstGeom>
-          <a:solidFill>
-            <a:srgbClr val="FBE9E9"/>
-          </a:solidFill>
-          <a:ln/>
-        </p:spPr>
-      </p:sp>
-      <p:sp>
-        <p:nvSpPr>
-          <p:cNvPr id="11" name="Text 8"/>
-          <p:cNvSpPr/>
-          <p:nvPr/>
-        </p:nvSpPr>
-        <p:spPr>
-          <a:xfrm>
-            <a:off x="4462272" y="1847088"/>
-            <a:ext cx="3273552" cy="760781"/>
-          </a:xfrm>
-          <a:prstGeom prst="rect">
-            <a:avLst/>
-          </a:prstGeom>
-          <a:noFill/>
-          <a:ln/>
-        </p:spPr>
-        <p:txBody>
-          <a:bodyPr wrap="square" lIns="0" tIns="0" rIns="0" bIns="0" rtlCol="0" anchor="ctr"/>
-          <a:lstStyle/>
-          <a:p>
-            <a:pPr indent="0" marL="0">
-              <a:buNone/>
-            </a:pPr>
-            <a:r>
-              <a:rPr lang="en-US" sz="3200" b="1" dirty="0">
-                <a:solidFill>
-                  <a:srgbClr val="C62A2A"/>
-                </a:solidFill>
-                <a:latin typeface="Montserrat" pitchFamily="34" charset="0"/>
-                <a:ea typeface="Montserrat" pitchFamily="34" charset="-122"/>
-                <a:cs typeface="Montserrat" pitchFamily="34" charset="-120"/>
-              </a:rPr>
-              <a:t>p95</a:t>
-            </a:r>
-            <a:endParaRPr lang="en-US" sz="3200" dirty="0"/>
-          </a:p>
-        </p:txBody>
-      </p:sp>
-      <p:sp>
-        <p:nvSpPr>
-          <p:cNvPr id="12" name="Text 9"/>
-          <p:cNvSpPr/>
-          <p:nvPr/>
-        </p:nvSpPr>
-        <p:spPr>
-          <a:xfrm>
-            <a:off x="4462272" y="2585923"/>
-            <a:ext cx="3273552" cy="526694"/>
-          </a:xfrm>
-          <a:prstGeom prst="rect">
-            <a:avLst/>
-          </a:prstGeom>
-          <a:noFill/>
-          <a:ln/>
-        </p:spPr>
-        <p:txBody>
-          <a:bodyPr wrap="square" lIns="0" tIns="0" rIns="0" bIns="0" rtlCol="0" anchor="t"/>
-          <a:lstStyle/>
-          <a:p>
-            <a:pPr indent="0" marL="0">
-              <a:buNone/>
-            </a:pPr>
-            <a:r>
-              <a:rPr lang="en-US" sz="1150" dirty="0">
-                <a:solidFill>
-                  <a:srgbClr val="C62A2A"/>
-                </a:solidFill>
-                <a:latin typeface="Montserrat" pitchFamily="34" charset="0"/>
-                <a:ea typeface="Montserrat" pitchFamily="34" charset="-122"/>
-                <a:cs typeface="Montserrat" pitchFamily="34" charset="-120"/>
-              </a:rPr>
-              <a:t>досвід найневдаліших: у хвості живуть скарги</a:t>
-            </a:r>
-            <a:endParaRPr lang="en-US" sz="1150" dirty="0"/>
-          </a:p>
-        </p:txBody>
-      </p:sp>
-      <p:sp>
-        <p:nvSpPr>
-          <p:cNvPr id="13" name="Shape 10"/>
-          <p:cNvSpPr/>
-          <p:nvPr/>
-        </p:nvSpPr>
-        <p:spPr>
-          <a:xfrm>
-            <a:off x="8065008" y="1737360"/>
-            <a:ext cx="3566160" cy="1463040"/>
-          </a:xfrm>
-          <a:prstGeom prst="roundRect">
-            <a:avLst>
-              <a:gd name="adj" fmla="val 7500"/>
-            </a:avLst>
-          </a:prstGeom>
-          <a:solidFill>
-            <a:srgbClr val="F8F0E2"/>
-          </a:solidFill>
-          <a:ln/>
-        </p:spPr>
-      </p:sp>
-      <p:sp>
-        <p:nvSpPr>
-          <p:cNvPr id="14" name="Text 11"/>
-          <p:cNvSpPr/>
-          <p:nvPr/>
-        </p:nvSpPr>
-        <p:spPr>
-          <a:xfrm>
-            <a:off x="8211312" y="1847088"/>
-            <a:ext cx="3273552" cy="760781"/>
-          </a:xfrm>
-          <a:prstGeom prst="rect">
-            <a:avLst/>
-          </a:prstGeom>
-          <a:noFill/>
-          <a:ln/>
-        </p:spPr>
-        <p:txBody>
-          <a:bodyPr wrap="square" lIns="0" tIns="0" rIns="0" bIns="0" rtlCol="0" anchor="ctr"/>
-          <a:lstStyle/>
-          <a:p>
-            <a:pPr indent="0" marL="0">
-              <a:buNone/>
-            </a:pPr>
-            <a:r>
-              <a:rPr lang="en-US" sz="3200" b="1" dirty="0">
-                <a:solidFill>
-                  <a:srgbClr val="9A5B12"/>
-                </a:solidFill>
-                <a:latin typeface="Montserrat" pitchFamily="34" charset="0"/>
-                <a:ea typeface="Montserrat" pitchFamily="34" charset="-122"/>
-                <a:cs typeface="Montserrat" pitchFamily="34" charset="-120"/>
-              </a:rPr>
-              <a:t>p99</a:t>
-            </a:r>
-            <a:endParaRPr lang="en-US" sz="3200" dirty="0"/>
-          </a:p>
-        </p:txBody>
-      </p:sp>
-      <p:sp>
-        <p:nvSpPr>
-          <p:cNvPr id="15" name="Text 12"/>
-          <p:cNvSpPr/>
-          <p:nvPr/>
-        </p:nvSpPr>
-        <p:spPr>
-          <a:xfrm>
-            <a:off x="8211312" y="2585923"/>
-            <a:ext cx="3273552" cy="526694"/>
-          </a:xfrm>
-          <a:prstGeom prst="rect">
-            <a:avLst/>
-          </a:prstGeom>
-          <a:noFill/>
-          <a:ln/>
-        </p:spPr>
-        <p:txBody>
-          <a:bodyPr wrap="square" lIns="0" tIns="0" rIns="0" bIns="0" rtlCol="0" anchor="t"/>
-          <a:lstStyle/>
-          <a:p>
-            <a:pPr indent="0" marL="0">
-              <a:buNone/>
-            </a:pPr>
-            <a:r>
-              <a:rPr lang="en-US" sz="1150" dirty="0">
-                <a:solidFill>
-                  <a:srgbClr val="9A5B12"/>
-                </a:solidFill>
-                <a:latin typeface="Montserrat" pitchFamily="34" charset="0"/>
-                <a:ea typeface="Montserrat" pitchFamily="34" charset="-122"/>
-                <a:cs typeface="Montserrat" pitchFamily="34" charset="-120"/>
-              </a:rPr>
-              <a:t>те саме для найгіршого відсотка</a:t>
-            </a:r>
-            <a:endParaRPr lang="en-US" sz="1150" dirty="0"/>
-          </a:p>
-        </p:txBody>
-      </p:sp>
-      <p:sp>
-        <p:nvSpPr>
-          <p:cNvPr id="16" name="Shape 13"/>
-          <p:cNvSpPr/>
-          <p:nvPr/>
-        </p:nvSpPr>
-        <p:spPr>
-          <a:xfrm>
-            <a:off x="566928" y="3429000"/>
-            <a:ext cx="11064240" cy="1234440"/>
+            <a:ext cx="3566160" cy="1234440"/>
           </a:xfrm>
           <a:prstGeom prst="roundRect">
             <a:avLst>
@@ -28834,6 +28534,106 @@
             </a:avLst>
           </a:prstGeom>
           <a:solidFill>
+            <a:srgbClr val="E9F4EF"/>
+          </a:solidFill>
+          <a:ln/>
+        </p:spPr>
+      </p:sp>
+      <p:sp>
+        <p:nvSpPr>
+          <p:cNvPr id="8" name="Text 5"/>
+          <p:cNvSpPr/>
+          <p:nvPr/>
+        </p:nvSpPr>
+        <p:spPr>
+          <a:xfrm>
+            <a:off x="713232" y="1847088"/>
+            <a:ext cx="3273552" cy="641909"/>
+          </a:xfrm>
+          <a:prstGeom prst="rect">
+            <a:avLst/>
+          </a:prstGeom>
+          <a:noFill/>
+          <a:ln/>
+        </p:spPr>
+        <p:txBody>
+          <a:bodyPr wrap="square" lIns="0" tIns="0" rIns="0" bIns="0" rtlCol="0" anchor="ctr"/>
+          <a:lstStyle/>
+          <a:p>
+            <a:pPr indent="0" marL="0">
+              <a:buNone/>
+            </a:pPr>
+            <a:r>
+              <a:rPr lang="en-US" sz="3000" b="1" dirty="0">
+                <a:solidFill>
+                  <a:srgbClr val="1B8A5A"/>
+                </a:solidFill>
+                <a:latin typeface="Montserrat" pitchFamily="34" charset="0"/>
+                <a:ea typeface="Montserrat" pitchFamily="34" charset="-122"/>
+                <a:cs typeface="Montserrat" pitchFamily="34" charset="-120"/>
+              </a:rPr>
+              <a:t>≈ 1.1 с</a:t>
+            </a:r>
+            <a:endParaRPr lang="en-US" sz="3000" dirty="0"/>
+          </a:p>
+        </p:txBody>
+      </p:sp>
+      <p:sp>
+        <p:nvSpPr>
+          <p:cNvPr id="9" name="Text 6"/>
+          <p:cNvSpPr/>
+          <p:nvPr/>
+        </p:nvSpPr>
+        <p:spPr>
+          <a:xfrm>
+            <a:off x="713232" y="2453335"/>
+            <a:ext cx="3273552" cy="444398"/>
+          </a:xfrm>
+          <a:prstGeom prst="rect">
+            <a:avLst/>
+          </a:prstGeom>
+          <a:noFill/>
+          <a:ln/>
+        </p:spPr>
+        <p:txBody>
+          <a:bodyPr wrap="square" lIns="0" tIns="0" rIns="0" bIns="0" rtlCol="0" anchor="t"/>
+          <a:lstStyle/>
+          <a:p>
+            <a:pPr indent="0" marL="0">
+              <a:buNone/>
+            </a:pPr>
+            <a:r>
+              <a:rPr lang="en-US" sz="1150" dirty="0">
+                <a:solidFill>
+                  <a:srgbClr val="1B8A5A"/>
+                </a:solidFill>
+                <a:latin typeface="Montserrat" pitchFamily="34" charset="0"/>
+                <a:ea typeface="Montserrat" pitchFamily="34" charset="-122"/>
+                <a:cs typeface="Montserrat" pitchFamily="34" charset="-120"/>
+              </a:rPr>
+              <a:t>середнє — «прийнятно»</a:t>
+            </a:r>
+            <a:endParaRPr lang="en-US" sz="1150" dirty="0"/>
+          </a:p>
+        </p:txBody>
+      </p:sp>
+      <p:sp>
+        <p:nvSpPr>
+          <p:cNvPr id="10" name="Shape 7"/>
+          <p:cNvSpPr/>
+          <p:nvPr/>
+        </p:nvSpPr>
+        <p:spPr>
+          <a:xfrm>
+            <a:off x="4315968" y="1737360"/>
+            <a:ext cx="3566160" cy="1234440"/>
+          </a:xfrm>
+          <a:prstGeom prst="roundRect">
+            <a:avLst>
+              <a:gd name="adj" fmla="val 8889"/>
+            </a:avLst>
+          </a:prstGeom>
+          <a:solidFill>
             <a:srgbClr val="FBE9E9"/>
           </a:solidFill>
           <a:ln/>
@@ -28841,14 +28641,14 @@
       </p:sp>
       <p:sp>
         <p:nvSpPr>
-          <p:cNvPr id="17" name="Text 14"/>
-          <p:cNvSpPr/>
-          <p:nvPr/>
-        </p:nvSpPr>
-        <p:spPr>
-          <a:xfrm>
-            <a:off x="786384" y="3557016"/>
-            <a:ext cx="10625328" cy="219456"/>
+          <p:cNvPr id="11" name="Text 8"/>
+          <p:cNvSpPr/>
+          <p:nvPr/>
+        </p:nvSpPr>
+        <p:spPr>
+          <a:xfrm>
+            <a:off x="4462272" y="1847088"/>
+            <a:ext cx="3273552" cy="641909"/>
           </a:xfrm>
           <a:prstGeom prst="rect">
             <a:avLst/>
@@ -28864,14 +28664,897 @@
               <a:buNone/>
             </a:pPr>
             <a:r>
-              <a:rPr lang="en-US" sz="950" b="1" spc="150" kern="0" dirty="0">
+              <a:rPr lang="en-US" sz="3000" b="1" dirty="0">
                 <a:solidFill>
                   <a:srgbClr val="C62A2A"/>
+                </a:solidFill>
+                <a:latin typeface="Montserrat" pitchFamily="34" charset="0"/>
+                <a:ea typeface="Montserrat" pitchFamily="34" charset="-122"/>
+                <a:cs typeface="Montserrat" pitchFamily="34" charset="-120"/>
+              </a:rPr>
+              <a:t>p95</a:t>
+            </a:r>
+            <a:endParaRPr lang="en-US" sz="3000" dirty="0"/>
+          </a:p>
+        </p:txBody>
+      </p:sp>
+      <p:sp>
+        <p:nvSpPr>
+          <p:cNvPr id="12" name="Text 9"/>
+          <p:cNvSpPr/>
+          <p:nvPr/>
+        </p:nvSpPr>
+        <p:spPr>
+          <a:xfrm>
+            <a:off x="4462272" y="2453335"/>
+            <a:ext cx="3273552" cy="444398"/>
+          </a:xfrm>
+          <a:prstGeom prst="rect">
+            <a:avLst/>
+          </a:prstGeom>
+          <a:noFill/>
+          <a:ln/>
+        </p:spPr>
+        <p:txBody>
+          <a:bodyPr wrap="square" lIns="0" tIns="0" rIns="0" bIns="0" rtlCol="0" anchor="t"/>
+          <a:lstStyle/>
+          <a:p>
+            <a:pPr indent="0" marL="0">
+              <a:buNone/>
+            </a:pPr>
+            <a:r>
+              <a:rPr lang="en-US" sz="1150" dirty="0">
+                <a:solidFill>
+                  <a:srgbClr val="C62A2A"/>
+                </a:solidFill>
+                <a:latin typeface="Montserrat" pitchFamily="34" charset="0"/>
+                <a:ea typeface="Montserrat" pitchFamily="34" charset="-122"/>
+                <a:cs typeface="Montserrat" pitchFamily="34" charset="-120"/>
+              </a:rPr>
+              <a:t>досвід найневдаліших</a:t>
+            </a:r>
+            <a:endParaRPr lang="en-US" sz="1150" dirty="0"/>
+          </a:p>
+        </p:txBody>
+      </p:sp>
+      <p:sp>
+        <p:nvSpPr>
+          <p:cNvPr id="13" name="Shape 10"/>
+          <p:cNvSpPr/>
+          <p:nvPr/>
+        </p:nvSpPr>
+        <p:spPr>
+          <a:xfrm>
+            <a:off x="8065008" y="1737360"/>
+            <a:ext cx="3566160" cy="1234440"/>
+          </a:xfrm>
+          <a:prstGeom prst="roundRect">
+            <a:avLst>
+              <a:gd name="adj" fmla="val 8889"/>
+            </a:avLst>
+          </a:prstGeom>
+          <a:solidFill>
+            <a:srgbClr val="F8F0E2"/>
+          </a:solidFill>
+          <a:ln/>
+        </p:spPr>
+      </p:sp>
+      <p:sp>
+        <p:nvSpPr>
+          <p:cNvPr id="14" name="Text 11"/>
+          <p:cNvSpPr/>
+          <p:nvPr/>
+        </p:nvSpPr>
+        <p:spPr>
+          <a:xfrm>
+            <a:off x="8211312" y="1847088"/>
+            <a:ext cx="3273552" cy="641909"/>
+          </a:xfrm>
+          <a:prstGeom prst="rect">
+            <a:avLst/>
+          </a:prstGeom>
+          <a:noFill/>
+          <a:ln/>
+        </p:spPr>
+        <p:txBody>
+          <a:bodyPr wrap="square" lIns="0" tIns="0" rIns="0" bIns="0" rtlCol="0" anchor="ctr"/>
+          <a:lstStyle/>
+          <a:p>
+            <a:pPr indent="0" marL="0">
+              <a:buNone/>
+            </a:pPr>
+            <a:r>
+              <a:rPr lang="en-US" sz="3000" b="1" dirty="0">
+                <a:solidFill>
+                  <a:srgbClr val="9A5B12"/>
+                </a:solidFill>
+                <a:latin typeface="Montserrat" pitchFamily="34" charset="0"/>
+                <a:ea typeface="Montserrat" pitchFamily="34" charset="-122"/>
+                <a:cs typeface="Montserrat" pitchFamily="34" charset="-120"/>
+              </a:rPr>
+              <a:t>p99</a:t>
+            </a:r>
+            <a:endParaRPr lang="en-US" sz="3000" dirty="0"/>
+          </a:p>
+        </p:txBody>
+      </p:sp>
+      <p:sp>
+        <p:nvSpPr>
+          <p:cNvPr id="15" name="Text 12"/>
+          <p:cNvSpPr/>
+          <p:nvPr/>
+        </p:nvSpPr>
+        <p:spPr>
+          <a:xfrm>
+            <a:off x="8211312" y="2453335"/>
+            <a:ext cx="3273552" cy="444398"/>
+          </a:xfrm>
+          <a:prstGeom prst="rect">
+            <a:avLst/>
+          </a:prstGeom>
+          <a:noFill/>
+          <a:ln/>
+        </p:spPr>
+        <p:txBody>
+          <a:bodyPr wrap="square" lIns="0" tIns="0" rIns="0" bIns="0" rtlCol="0" anchor="t"/>
+          <a:lstStyle/>
+          <a:p>
+            <a:pPr indent="0" marL="0">
+              <a:buNone/>
+            </a:pPr>
+            <a:r>
+              <a:rPr lang="en-US" sz="1150" dirty="0">
+                <a:solidFill>
+                  <a:srgbClr val="9A5B12"/>
+                </a:solidFill>
+                <a:latin typeface="Montserrat" pitchFamily="34" charset="0"/>
+                <a:ea typeface="Montserrat" pitchFamily="34" charset="-122"/>
+                <a:cs typeface="Montserrat" pitchFamily="34" charset="-120"/>
+              </a:rPr>
+              <a:t>найгірший відсоток</a:t>
+            </a:r>
+            <a:endParaRPr lang="en-US" sz="1150" dirty="0"/>
+          </a:p>
+        </p:txBody>
+      </p:sp>
+      <p:sp>
+        <p:nvSpPr>
+          <p:cNvPr id="16" name="Shape 13"/>
+          <p:cNvSpPr/>
+          <p:nvPr/>
+        </p:nvSpPr>
+        <p:spPr>
+          <a:xfrm>
+            <a:off x="658368" y="4090660"/>
+            <a:ext cx="310896" cy="97292"/>
+          </a:xfrm>
+          <a:prstGeom prst="rect">
+            <a:avLst/>
+          </a:prstGeom>
+          <a:solidFill>
+            <a:srgbClr val="C9B8FB"/>
+          </a:solidFill>
+          <a:ln/>
+        </p:spPr>
+      </p:sp>
+      <p:sp>
+        <p:nvSpPr>
+          <p:cNvPr id="17" name="Shape 14"/>
+          <p:cNvSpPr/>
+          <p:nvPr/>
+        </p:nvSpPr>
+        <p:spPr>
+          <a:xfrm>
+            <a:off x="1042416" y="3951671"/>
+            <a:ext cx="310896" cy="236281"/>
+          </a:xfrm>
+          <a:prstGeom prst="rect">
+            <a:avLst/>
+          </a:prstGeom>
+          <a:solidFill>
+            <a:srgbClr val="C9B8FB"/>
+          </a:solidFill>
+          <a:ln/>
+        </p:spPr>
+      </p:sp>
+      <p:sp>
+        <p:nvSpPr>
+          <p:cNvPr id="18" name="Shape 15"/>
+          <p:cNvSpPr/>
+          <p:nvPr/>
+        </p:nvSpPr>
+        <p:spPr>
+          <a:xfrm>
+            <a:off x="1426464" y="3770986"/>
+            <a:ext cx="310896" cy="416966"/>
+          </a:xfrm>
+          <a:prstGeom prst="rect">
+            <a:avLst/>
+          </a:prstGeom>
+          <a:solidFill>
+            <a:srgbClr val="C9B8FB"/>
+          </a:solidFill>
+          <a:ln/>
+        </p:spPr>
+      </p:sp>
+      <p:sp>
+        <p:nvSpPr>
+          <p:cNvPr id="19" name="Shape 16"/>
+          <p:cNvSpPr/>
+          <p:nvPr/>
+        </p:nvSpPr>
+        <p:spPr>
+          <a:xfrm>
+            <a:off x="1810512" y="3604199"/>
+            <a:ext cx="310896" cy="583753"/>
+          </a:xfrm>
+          <a:prstGeom prst="rect">
+            <a:avLst/>
+          </a:prstGeom>
+          <a:solidFill>
+            <a:srgbClr val="C9B8FB"/>
+          </a:solidFill>
+          <a:ln/>
+        </p:spPr>
+      </p:sp>
+      <p:sp>
+        <p:nvSpPr>
+          <p:cNvPr id="20" name="Shape 17"/>
+          <p:cNvSpPr/>
+          <p:nvPr/>
+        </p:nvSpPr>
+        <p:spPr>
+          <a:xfrm>
+            <a:off x="2194560" y="3493008"/>
+            <a:ext cx="310896" cy="694944"/>
+          </a:xfrm>
+          <a:prstGeom prst="rect">
+            <a:avLst/>
+          </a:prstGeom>
+          <a:solidFill>
+            <a:srgbClr val="C9B8FB"/>
+          </a:solidFill>
+          <a:ln/>
+        </p:spPr>
+      </p:sp>
+      <p:sp>
+        <p:nvSpPr>
+          <p:cNvPr id="21" name="Shape 18"/>
+          <p:cNvSpPr/>
+          <p:nvPr/>
+        </p:nvSpPr>
+        <p:spPr>
+          <a:xfrm>
+            <a:off x="2578608" y="3534705"/>
+            <a:ext cx="310896" cy="653247"/>
+          </a:xfrm>
+          <a:prstGeom prst="rect">
+            <a:avLst/>
+          </a:prstGeom>
+          <a:solidFill>
+            <a:srgbClr val="C9B8FB"/>
+          </a:solidFill>
+          <a:ln/>
+        </p:spPr>
+      </p:sp>
+      <p:sp>
+        <p:nvSpPr>
+          <p:cNvPr id="22" name="Shape 19"/>
+          <p:cNvSpPr/>
+          <p:nvPr/>
+        </p:nvSpPr>
+        <p:spPr>
+          <a:xfrm>
+            <a:off x="2962656" y="3631997"/>
+            <a:ext cx="310896" cy="555955"/>
+          </a:xfrm>
+          <a:prstGeom prst="rect">
+            <a:avLst/>
+          </a:prstGeom>
+          <a:solidFill>
+            <a:srgbClr val="C9B8FB"/>
+          </a:solidFill>
+          <a:ln/>
+        </p:spPr>
+      </p:sp>
+      <p:sp>
+        <p:nvSpPr>
+          <p:cNvPr id="23" name="Shape 20"/>
+          <p:cNvSpPr/>
+          <p:nvPr/>
+        </p:nvSpPr>
+        <p:spPr>
+          <a:xfrm>
+            <a:off x="3346704" y="3729289"/>
+            <a:ext cx="310896" cy="458663"/>
+          </a:xfrm>
+          <a:prstGeom prst="rect">
+            <a:avLst/>
+          </a:prstGeom>
+          <a:solidFill>
+            <a:srgbClr val="C9B8FB"/>
+          </a:solidFill>
+          <a:ln/>
+        </p:spPr>
+      </p:sp>
+      <p:sp>
+        <p:nvSpPr>
+          <p:cNvPr id="24" name="Shape 21"/>
+          <p:cNvSpPr/>
+          <p:nvPr/>
+        </p:nvSpPr>
+        <p:spPr>
+          <a:xfrm>
+            <a:off x="3730752" y="3812682"/>
+            <a:ext cx="310896" cy="375270"/>
+          </a:xfrm>
+          <a:prstGeom prst="rect">
+            <a:avLst/>
+          </a:prstGeom>
+          <a:solidFill>
+            <a:srgbClr val="C9B8FB"/>
+          </a:solidFill>
+          <a:ln/>
+        </p:spPr>
+      </p:sp>
+      <p:sp>
+        <p:nvSpPr>
+          <p:cNvPr id="25" name="Shape 22"/>
+          <p:cNvSpPr/>
+          <p:nvPr/>
+        </p:nvSpPr>
+        <p:spPr>
+          <a:xfrm>
+            <a:off x="4114800" y="3889126"/>
+            <a:ext cx="310896" cy="298826"/>
+          </a:xfrm>
+          <a:prstGeom prst="rect">
+            <a:avLst/>
+          </a:prstGeom>
+          <a:solidFill>
+            <a:srgbClr val="C9B8FB"/>
+          </a:solidFill>
+          <a:ln/>
+        </p:spPr>
+      </p:sp>
+      <p:sp>
+        <p:nvSpPr>
+          <p:cNvPr id="26" name="Shape 23"/>
+          <p:cNvSpPr/>
+          <p:nvPr/>
+        </p:nvSpPr>
+        <p:spPr>
+          <a:xfrm>
+            <a:off x="4498848" y="3944722"/>
+            <a:ext cx="310896" cy="243230"/>
+          </a:xfrm>
+          <a:prstGeom prst="rect">
+            <a:avLst/>
+          </a:prstGeom>
+          <a:solidFill>
+            <a:srgbClr val="C9B8FB"/>
+          </a:solidFill>
+          <a:ln/>
+        </p:spPr>
+      </p:sp>
+      <p:sp>
+        <p:nvSpPr>
+          <p:cNvPr id="27" name="Shape 24"/>
+          <p:cNvSpPr/>
+          <p:nvPr/>
+        </p:nvSpPr>
+        <p:spPr>
+          <a:xfrm>
+            <a:off x="4882896" y="3986418"/>
+            <a:ext cx="310896" cy="201534"/>
+          </a:xfrm>
+          <a:prstGeom prst="rect">
+            <a:avLst/>
+          </a:prstGeom>
+          <a:solidFill>
+            <a:srgbClr val="C9B8FB"/>
+          </a:solidFill>
+          <a:ln/>
+        </p:spPr>
+      </p:sp>
+      <p:sp>
+        <p:nvSpPr>
+          <p:cNvPr id="28" name="Shape 25"/>
+          <p:cNvSpPr/>
+          <p:nvPr/>
+        </p:nvSpPr>
+        <p:spPr>
+          <a:xfrm>
+            <a:off x="5266944" y="4021165"/>
+            <a:ext cx="310896" cy="166787"/>
+          </a:xfrm>
+          <a:prstGeom prst="rect">
+            <a:avLst/>
+          </a:prstGeom>
+          <a:solidFill>
+            <a:srgbClr val="C9B8FB"/>
+          </a:solidFill>
+          <a:ln/>
+        </p:spPr>
+      </p:sp>
+      <p:sp>
+        <p:nvSpPr>
+          <p:cNvPr id="29" name="Shape 26"/>
+          <p:cNvSpPr/>
+          <p:nvPr/>
+        </p:nvSpPr>
+        <p:spPr>
+          <a:xfrm>
+            <a:off x="5650992" y="4048963"/>
+            <a:ext cx="310896" cy="138989"/>
+          </a:xfrm>
+          <a:prstGeom prst="rect">
+            <a:avLst/>
+          </a:prstGeom>
+          <a:solidFill>
+            <a:srgbClr val="C9B8FB"/>
+          </a:solidFill>
+          <a:ln/>
+        </p:spPr>
+      </p:sp>
+      <p:sp>
+        <p:nvSpPr>
+          <p:cNvPr id="30" name="Shape 27"/>
+          <p:cNvSpPr/>
+          <p:nvPr/>
+        </p:nvSpPr>
+        <p:spPr>
+          <a:xfrm>
+            <a:off x="6035040" y="4069812"/>
+            <a:ext cx="310896" cy="118140"/>
+          </a:xfrm>
+          <a:prstGeom prst="rect">
+            <a:avLst/>
+          </a:prstGeom>
+          <a:solidFill>
+            <a:srgbClr val="C9B8FB"/>
+          </a:solidFill>
+          <a:ln/>
+        </p:spPr>
+      </p:sp>
+      <p:sp>
+        <p:nvSpPr>
+          <p:cNvPr id="31" name="Shape 28"/>
+          <p:cNvSpPr/>
+          <p:nvPr/>
+        </p:nvSpPr>
+        <p:spPr>
+          <a:xfrm>
+            <a:off x="6419088" y="4083710"/>
+            <a:ext cx="310896" cy="104242"/>
+          </a:xfrm>
+          <a:prstGeom prst="rect">
+            <a:avLst/>
+          </a:prstGeom>
+          <a:solidFill>
+            <a:srgbClr val="C9B8FB"/>
+          </a:solidFill>
+          <a:ln/>
+        </p:spPr>
+      </p:sp>
+      <p:sp>
+        <p:nvSpPr>
+          <p:cNvPr id="32" name="Shape 29"/>
+          <p:cNvSpPr/>
+          <p:nvPr/>
+        </p:nvSpPr>
+        <p:spPr>
+          <a:xfrm>
+            <a:off x="6803136" y="4097609"/>
+            <a:ext cx="310896" cy="90343"/>
+          </a:xfrm>
+          <a:prstGeom prst="rect">
+            <a:avLst/>
+          </a:prstGeom>
+          <a:solidFill>
+            <a:srgbClr val="C9B8FB"/>
+          </a:solidFill>
+          <a:ln/>
+        </p:spPr>
+      </p:sp>
+      <p:sp>
+        <p:nvSpPr>
+          <p:cNvPr id="33" name="Shape 30"/>
+          <p:cNvSpPr/>
+          <p:nvPr/>
+        </p:nvSpPr>
+        <p:spPr>
+          <a:xfrm>
+            <a:off x="7187184" y="4111508"/>
+            <a:ext cx="310896" cy="76444"/>
+          </a:xfrm>
+          <a:prstGeom prst="rect">
+            <a:avLst/>
+          </a:prstGeom>
+          <a:solidFill>
+            <a:srgbClr val="C9B8FB"/>
+          </a:solidFill>
+          <a:ln/>
+        </p:spPr>
+      </p:sp>
+      <p:sp>
+        <p:nvSpPr>
+          <p:cNvPr id="34" name="Shape 31"/>
+          <p:cNvSpPr/>
+          <p:nvPr/>
+        </p:nvSpPr>
+        <p:spPr>
+          <a:xfrm>
+            <a:off x="7571232" y="4118458"/>
+            <a:ext cx="310896" cy="69494"/>
+          </a:xfrm>
+          <a:prstGeom prst="rect">
+            <a:avLst/>
+          </a:prstGeom>
+          <a:solidFill>
+            <a:srgbClr val="C9B8FB"/>
+          </a:solidFill>
+          <a:ln/>
+        </p:spPr>
+      </p:sp>
+      <p:sp>
+        <p:nvSpPr>
+          <p:cNvPr id="35" name="Shape 32"/>
+          <p:cNvSpPr/>
+          <p:nvPr/>
+        </p:nvSpPr>
+        <p:spPr>
+          <a:xfrm>
+            <a:off x="7955280" y="4125407"/>
+            <a:ext cx="310896" cy="62545"/>
+          </a:xfrm>
+          <a:prstGeom prst="rect">
+            <a:avLst/>
+          </a:prstGeom>
+          <a:solidFill>
+            <a:srgbClr val="C9B8FB"/>
+          </a:solidFill>
+          <a:ln/>
+        </p:spPr>
+      </p:sp>
+      <p:sp>
+        <p:nvSpPr>
+          <p:cNvPr id="36" name="Shape 33"/>
+          <p:cNvSpPr/>
+          <p:nvPr/>
+        </p:nvSpPr>
+        <p:spPr>
+          <a:xfrm>
+            <a:off x="8339328" y="4132356"/>
+            <a:ext cx="310896" cy="55596"/>
+          </a:xfrm>
+          <a:prstGeom prst="rect">
+            <a:avLst/>
+          </a:prstGeom>
+          <a:solidFill>
+            <a:srgbClr val="C9B8FB"/>
+          </a:solidFill>
+          <a:ln/>
+        </p:spPr>
+      </p:sp>
+      <p:sp>
+        <p:nvSpPr>
+          <p:cNvPr id="37" name="Shape 34"/>
+          <p:cNvSpPr/>
+          <p:nvPr/>
+        </p:nvSpPr>
+        <p:spPr>
+          <a:xfrm>
+            <a:off x="8723376" y="4139306"/>
+            <a:ext cx="310896" cy="48646"/>
+          </a:xfrm>
+          <a:prstGeom prst="rect">
+            <a:avLst/>
+          </a:prstGeom>
+          <a:solidFill>
+            <a:srgbClr val="C9B8FB"/>
+          </a:solidFill>
+          <a:ln/>
+        </p:spPr>
+      </p:sp>
+      <p:sp>
+        <p:nvSpPr>
+          <p:cNvPr id="38" name="Shape 35"/>
+          <p:cNvSpPr/>
+          <p:nvPr/>
+        </p:nvSpPr>
+        <p:spPr>
+          <a:xfrm>
+            <a:off x="9107424" y="4146255"/>
+            <a:ext cx="310896" cy="41697"/>
+          </a:xfrm>
+          <a:prstGeom prst="rect">
+            <a:avLst/>
+          </a:prstGeom>
+          <a:solidFill>
+            <a:srgbClr val="C9B8FB"/>
+          </a:solidFill>
+          <a:ln/>
+        </p:spPr>
+      </p:sp>
+      <p:sp>
+        <p:nvSpPr>
+          <p:cNvPr id="39" name="Shape 36"/>
+          <p:cNvSpPr/>
+          <p:nvPr/>
+        </p:nvSpPr>
+        <p:spPr>
+          <a:xfrm>
+            <a:off x="9491472" y="4153205"/>
+            <a:ext cx="310896" cy="34747"/>
+          </a:xfrm>
+          <a:prstGeom prst="rect">
+            <a:avLst/>
+          </a:prstGeom>
+          <a:solidFill>
+            <a:srgbClr val="C9B8FB"/>
+          </a:solidFill>
+          <a:ln/>
+        </p:spPr>
+      </p:sp>
+      <p:sp>
+        <p:nvSpPr>
+          <p:cNvPr id="40" name="Shape 37"/>
+          <p:cNvSpPr/>
+          <p:nvPr/>
+        </p:nvSpPr>
+        <p:spPr>
+          <a:xfrm>
+            <a:off x="9875520" y="4153205"/>
+            <a:ext cx="310896" cy="34747"/>
+          </a:xfrm>
+          <a:prstGeom prst="rect">
+            <a:avLst/>
+          </a:prstGeom>
+          <a:solidFill>
+            <a:srgbClr val="C9B8FB"/>
+          </a:solidFill>
+          <a:ln/>
+        </p:spPr>
+      </p:sp>
+      <p:sp>
+        <p:nvSpPr>
+          <p:cNvPr id="41" name="Shape 38"/>
+          <p:cNvSpPr/>
+          <p:nvPr/>
+        </p:nvSpPr>
+        <p:spPr>
+          <a:xfrm>
+            <a:off x="10259568" y="4160154"/>
+            <a:ext cx="310896" cy="27798"/>
+          </a:xfrm>
+          <a:prstGeom prst="rect">
+            <a:avLst/>
+          </a:prstGeom>
+          <a:solidFill>
+            <a:srgbClr val="C9B8FB"/>
+          </a:solidFill>
+          <a:ln/>
+        </p:spPr>
+      </p:sp>
+      <p:sp>
+        <p:nvSpPr>
+          <p:cNvPr id="42" name="Shape 39"/>
+          <p:cNvSpPr/>
+          <p:nvPr/>
+        </p:nvSpPr>
+        <p:spPr>
+          <a:xfrm>
+            <a:off x="2350008" y="3346704"/>
+            <a:ext cx="0" cy="841248"/>
+          </a:xfrm>
+          <a:prstGeom prst="line">
+            <a:avLst/>
+          </a:prstGeom>
+          <a:noFill/>
+          <a:ln w="19050">
+            <a:solidFill>
+              <a:srgbClr val="1B8A5A"/>
+            </a:solidFill>
+            <a:prstDash val="dash"/>
+          </a:ln>
+        </p:spPr>
+      </p:sp>
+      <p:sp>
+        <p:nvSpPr>
+          <p:cNvPr id="43" name="Text 40"/>
+          <p:cNvSpPr/>
+          <p:nvPr/>
+        </p:nvSpPr>
+        <p:spPr>
+          <a:xfrm>
+            <a:off x="1618488" y="3108960"/>
+            <a:ext cx="1463040" cy="219456"/>
+          </a:xfrm>
+          <a:prstGeom prst="rect">
+            <a:avLst/>
+          </a:prstGeom>
+          <a:noFill/>
+          <a:ln/>
+        </p:spPr>
+        <p:txBody>
+          <a:bodyPr wrap="square" lIns="0" tIns="0" rIns="0" bIns="0" rtlCol="0" anchor="ctr"/>
+          <a:lstStyle/>
+          <a:p>
+            <a:pPr algn="ctr" indent="0" marL="0">
+              <a:buNone/>
+            </a:pPr>
+            <a:r>
+              <a:rPr lang="en-US" sz="900" b="1" dirty="0">
+                <a:solidFill>
+                  <a:srgbClr val="1B8A5A"/>
                 </a:solidFill>
                 <a:latin typeface="Courier New" pitchFamily="34" charset="0"/>
                 <a:ea typeface="Courier New" pitchFamily="34" charset="-122"/>
                 <a:cs typeface="Courier New" pitchFamily="34" charset="-120"/>
               </a:rPr>
+              <a:t>середнє</a:t>
+            </a:r>
+            <a:endParaRPr lang="en-US" sz="900" dirty="0"/>
+          </a:p>
+        </p:txBody>
+      </p:sp>
+      <p:sp>
+        <p:nvSpPr>
+          <p:cNvPr id="44" name="Shape 41"/>
+          <p:cNvSpPr/>
+          <p:nvPr/>
+        </p:nvSpPr>
+        <p:spPr>
+          <a:xfrm>
+            <a:off x="8110728" y="3346704"/>
+            <a:ext cx="0" cy="841248"/>
+          </a:xfrm>
+          <a:prstGeom prst="line">
+            <a:avLst/>
+          </a:prstGeom>
+          <a:noFill/>
+          <a:ln w="19050">
+            <a:solidFill>
+              <a:srgbClr val="C62A2A"/>
+            </a:solidFill>
+            <a:prstDash val="dash"/>
+          </a:ln>
+        </p:spPr>
+      </p:sp>
+      <p:sp>
+        <p:nvSpPr>
+          <p:cNvPr id="45" name="Text 42"/>
+          <p:cNvSpPr/>
+          <p:nvPr/>
+        </p:nvSpPr>
+        <p:spPr>
+          <a:xfrm>
+            <a:off x="7379208" y="3108960"/>
+            <a:ext cx="1463040" cy="219456"/>
+          </a:xfrm>
+          <a:prstGeom prst="rect">
+            <a:avLst/>
+          </a:prstGeom>
+          <a:noFill/>
+          <a:ln/>
+        </p:spPr>
+        <p:txBody>
+          <a:bodyPr wrap="square" lIns="0" tIns="0" rIns="0" bIns="0" rtlCol="0" anchor="ctr"/>
+          <a:lstStyle/>
+          <a:p>
+            <a:pPr algn="ctr" indent="0" marL="0">
+              <a:buNone/>
+            </a:pPr>
+            <a:r>
+              <a:rPr lang="en-US" sz="900" b="1" dirty="0">
+                <a:solidFill>
+                  <a:srgbClr val="C62A2A"/>
+                </a:solidFill>
+                <a:latin typeface="Courier New" pitchFamily="34" charset="0"/>
+                <a:ea typeface="Courier New" pitchFamily="34" charset="-122"/>
+                <a:cs typeface="Courier New" pitchFamily="34" charset="-120"/>
+              </a:rPr>
+              <a:t>p95</a:t>
+            </a:r>
+            <a:endParaRPr lang="en-US" sz="900" dirty="0"/>
+          </a:p>
+        </p:txBody>
+      </p:sp>
+      <p:sp>
+        <p:nvSpPr>
+          <p:cNvPr id="46" name="Text 43"/>
+          <p:cNvSpPr/>
+          <p:nvPr/>
+        </p:nvSpPr>
+        <p:spPr>
+          <a:xfrm>
+            <a:off x="658368" y="4242816"/>
+            <a:ext cx="3657600" cy="201168"/>
+          </a:xfrm>
+          <a:prstGeom prst="rect">
+            <a:avLst/>
+          </a:prstGeom>
+          <a:noFill/>
+          <a:ln/>
+        </p:spPr>
+        <p:txBody>
+          <a:bodyPr wrap="square" lIns="0" tIns="0" rIns="0" bIns="0" rtlCol="0" anchor="ctr"/>
+          <a:lstStyle/>
+          <a:p>
+            <a:pPr indent="0" marL="0">
+              <a:buNone/>
+            </a:pPr>
+            <a:r>
+              <a:rPr lang="en-US" sz="850" spc="100" kern="0" dirty="0">
+                <a:solidFill>
+                  <a:srgbClr val="9AA1AD"/>
+                </a:solidFill>
+                <a:latin typeface="Courier New" pitchFamily="34" charset="0"/>
+                <a:ea typeface="Courier New" pitchFamily="34" charset="-122"/>
+                <a:cs typeface="Courier New" pitchFamily="34" charset="-120"/>
+              </a:rPr>
+              <a:t>час відповіді →</a:t>
+            </a:r>
+            <a:endParaRPr lang="en-US" sz="850" dirty="0"/>
+          </a:p>
+        </p:txBody>
+      </p:sp>
+      <p:sp>
+        <p:nvSpPr>
+          <p:cNvPr id="47" name="Shape 44"/>
+          <p:cNvSpPr/>
+          <p:nvPr/>
+        </p:nvSpPr>
+        <p:spPr>
+          <a:xfrm>
+            <a:off x="566928" y="4553712"/>
+            <a:ext cx="11064240" cy="713232"/>
+          </a:xfrm>
+          <a:prstGeom prst="roundRect">
+            <a:avLst>
+              <a:gd name="adj" fmla="val 15385"/>
+            </a:avLst>
+          </a:prstGeom>
+          <a:solidFill>
+            <a:srgbClr val="FBE9E9"/>
+          </a:solidFill>
+          <a:ln/>
+        </p:spPr>
+      </p:sp>
+      <p:sp>
+        <p:nvSpPr>
+          <p:cNvPr id="48" name="Text 45"/>
+          <p:cNvSpPr/>
+          <p:nvPr/>
+        </p:nvSpPr>
+        <p:spPr>
+          <a:xfrm>
+            <a:off x="786384" y="4681728"/>
+            <a:ext cx="10625328" cy="219456"/>
+          </a:xfrm>
+          <a:prstGeom prst="rect">
+            <a:avLst/>
+          </a:prstGeom>
+          <a:noFill/>
+          <a:ln/>
+        </p:spPr>
+        <p:txBody>
+          <a:bodyPr wrap="square" lIns="0" tIns="0" rIns="0" bIns="0" rtlCol="0" anchor="ctr"/>
+          <a:lstStyle/>
+          <a:p>
+            <a:pPr indent="0" marL="0">
+              <a:buNone/>
+            </a:pPr>
+            <a:r>
+              <a:rPr lang="en-US" sz="950" b="1" spc="150" kern="0" dirty="0">
+                <a:solidFill>
+                  <a:srgbClr val="C62A2A"/>
+                </a:solidFill>
+                <a:latin typeface="Courier New" pitchFamily="34" charset="0"/>
+                <a:ea typeface="Courier New" pitchFamily="34" charset="-122"/>
+                <a:cs typeface="Courier New" pitchFamily="34" charset="-120"/>
+              </a:rPr>
               <a:t>ТИПОВА ПОМИЛКА</a:t>
             </a:r>
             <a:endParaRPr lang="en-US" sz="950" dirty="0"/>
@@ -28880,14 +29563,14 @@
       </p:sp>
       <p:sp>
         <p:nvSpPr>
-          <p:cNvPr id="18" name="Text 15"/>
-          <p:cNvSpPr/>
-          <p:nvPr/>
-        </p:nvSpPr>
-        <p:spPr>
-          <a:xfrm>
-            <a:off x="786384" y="3813048"/>
-            <a:ext cx="10625328" cy="722376"/>
+          <p:cNvPr id="49" name="Text 46"/>
+          <p:cNvSpPr/>
+          <p:nvPr/>
+        </p:nvSpPr>
+        <p:spPr>
+          <a:xfrm>
+            <a:off x="786384" y="4937760"/>
+            <a:ext cx="10625328" cy="201168"/>
           </a:xfrm>
           <a:prstGeom prst="rect">
             <a:avLst/>
@@ -28922,18 +29605,18 @@
       </p:sp>
       <p:sp>
         <p:nvSpPr>
-          <p:cNvPr id="19" name="Shape 16"/>
-          <p:cNvSpPr/>
-          <p:nvPr/>
-        </p:nvSpPr>
-        <p:spPr>
-          <a:xfrm>
-            <a:off x="566928" y="4800600"/>
-            <a:ext cx="11064240" cy="1051560"/>
+          <p:cNvPr id="50" name="Shape 47"/>
+          <p:cNvSpPr/>
+          <p:nvPr/>
+        </p:nvSpPr>
+        <p:spPr>
+          <a:xfrm>
+            <a:off x="566928" y="5394960"/>
+            <a:ext cx="11064240" cy="713232"/>
           </a:xfrm>
           <a:prstGeom prst="roundRect">
             <a:avLst>
-              <a:gd name="adj" fmla="val 10435"/>
+              <a:gd name="adj" fmla="val 15385"/>
             </a:avLst>
           </a:prstGeom>
           <a:solidFill>
@@ -28944,14 +29627,14 @@
       </p:sp>
       <p:sp>
         <p:nvSpPr>
-          <p:cNvPr id="20" name="Text 17"/>
-          <p:cNvSpPr/>
-          <p:nvPr/>
-        </p:nvSpPr>
-        <p:spPr>
-          <a:xfrm>
-            <a:off x="786384" y="4946904"/>
-            <a:ext cx="10625328" cy="758952"/>
+          <p:cNvPr id="51" name="Text 48"/>
+          <p:cNvSpPr/>
+          <p:nvPr/>
+        </p:nvSpPr>
+        <p:spPr>
+          <a:xfrm>
+            <a:off x="786384" y="5541264"/>
+            <a:ext cx="10625328" cy="420624"/>
           </a:xfrm>
           <a:prstGeom prst="rect">
             <a:avLst/>

--- a/docs/decks/L09.pptx
+++ b/docs/decks/L09.pptx
@@ -6671,11 +6671,11 @@
         <p:spPr>
           <a:xfrm>
             <a:off x="566928" y="1783080"/>
-            <a:ext cx="3520440" cy="1691640"/>
+            <a:ext cx="3520440" cy="1417320"/>
           </a:xfrm>
           <a:prstGeom prst="roundRect">
             <a:avLst>
-              <a:gd name="adj" fmla="val 6486"/>
+              <a:gd name="adj" fmla="val 7742"/>
             </a:avLst>
           </a:prstGeom>
           <a:solidFill>
@@ -6791,7 +6791,7 @@
         <p:spPr>
           <a:xfrm>
             <a:off x="768096" y="2468880"/>
-            <a:ext cx="3118104" cy="850392"/>
+            <a:ext cx="3118104" cy="576072"/>
           </a:xfrm>
           <a:prstGeom prst="rect">
             <a:avLst/>
@@ -6833,11 +6833,11 @@
         <p:spPr>
           <a:xfrm>
             <a:off x="4270248" y="1783080"/>
-            <a:ext cx="3520440" cy="1691640"/>
+            <a:ext cx="3520440" cy="1417320"/>
           </a:xfrm>
           <a:prstGeom prst="roundRect">
             <a:avLst>
-              <a:gd name="adj" fmla="val 6486"/>
+              <a:gd name="adj" fmla="val 7742"/>
             </a:avLst>
           </a:prstGeom>
           <a:solidFill>
@@ -6953,7 +6953,7 @@
         <p:spPr>
           <a:xfrm>
             <a:off x="4471416" y="2468880"/>
-            <a:ext cx="3118104" cy="850392"/>
+            <a:ext cx="3118104" cy="576072"/>
           </a:xfrm>
           <a:prstGeom prst="rect">
             <a:avLst/>
@@ -6995,11 +6995,11 @@
         <p:spPr>
           <a:xfrm>
             <a:off x="7973568" y="1783080"/>
-            <a:ext cx="3520440" cy="1691640"/>
+            <a:ext cx="3520440" cy="1417320"/>
           </a:xfrm>
           <a:prstGeom prst="roundRect">
             <a:avLst>
-              <a:gd name="adj" fmla="val 6486"/>
+              <a:gd name="adj" fmla="val 7742"/>
             </a:avLst>
           </a:prstGeom>
           <a:solidFill>
@@ -7115,7 +7115,7 @@
         <p:spPr>
           <a:xfrm>
             <a:off x="8174736" y="2468880"/>
-            <a:ext cx="3118104" cy="850392"/>
+            <a:ext cx="3118104" cy="576072"/>
           </a:xfrm>
           <a:prstGeom prst="rect">
             <a:avLst/>
@@ -7156,100 +7156,57 @@
         </p:nvSpPr>
         <p:spPr>
           <a:xfrm>
-            <a:off x="566928" y="3840480"/>
-            <a:ext cx="11064240" cy="1371600"/>
-          </a:xfrm>
-          <a:prstGeom prst="roundRect">
-            <a:avLst>
-              <a:gd name="adj" fmla="val 8000"/>
-            </a:avLst>
-          </a:prstGeom>
-          <a:solidFill>
-            <a:srgbClr val="5A05F4"/>
-          </a:solidFill>
-          <a:ln/>
-        </p:spPr>
-      </p:sp>
-      <p:sp>
-        <p:nvSpPr>
-          <p:cNvPr id="23" name="Text 20"/>
-          <p:cNvSpPr/>
-          <p:nvPr/>
-        </p:nvSpPr>
-        <p:spPr>
-          <a:xfrm>
-            <a:off x="786384" y="3968496"/>
-            <a:ext cx="10625328" cy="219456"/>
-          </a:xfrm>
-          <a:prstGeom prst="rect">
-            <a:avLst/>
-          </a:prstGeom>
-          <a:noFill/>
-          <a:ln/>
-        </p:spPr>
-        <p:txBody>
-          <a:bodyPr wrap="square" lIns="0" tIns="0" rIns="0" bIns="0" rtlCol="0" anchor="ctr"/>
-          <a:lstStyle/>
-          <a:p>
-            <a:pPr indent="0" marL="0">
-              <a:buNone/>
-            </a:pPr>
-            <a:r>
-              <a:rPr lang="en-US" sz="950" b="1" spc="150" kern="0" dirty="0">
-                <a:solidFill>
-                  <a:srgbClr val="FFFFFF"/>
-                </a:solidFill>
-                <a:latin typeface="Courier New" pitchFamily="34" charset="0"/>
-                <a:ea typeface="Courier New" pitchFamily="34" charset="-122"/>
-                <a:cs typeface="Courier New" pitchFamily="34" charset="-120"/>
-              </a:rPr>
-              <a:t>АНАТОМІЯ АЛЕРТУ — ЧОТИРИ ОБОВ'ЯЗКОВІ ЧАСТИНИ</a:t>
-            </a:r>
-            <a:endParaRPr lang="en-US" sz="950" dirty="0"/>
-          </a:p>
-        </p:txBody>
-      </p:sp>
-      <p:sp>
-        <p:nvSpPr>
-          <p:cNvPr id="24" name="Text 21"/>
-          <p:cNvSpPr/>
-          <p:nvPr/>
-        </p:nvSpPr>
-        <p:spPr>
-          <a:xfrm>
-            <a:off x="786384" y="4224528"/>
-            <a:ext cx="10625328" cy="859536"/>
-          </a:xfrm>
-          <a:prstGeom prst="rect">
-            <a:avLst/>
-          </a:prstGeom>
-          <a:noFill/>
-          <a:ln/>
-        </p:spPr>
-        <p:txBody>
-          <a:bodyPr wrap="square" lIns="0" tIns="0" rIns="0" bIns="0" rtlCol="0" anchor="ctr"/>
-          <a:lstStyle/>
-          <a:p>
-            <a:pPr indent="0" marL="0">
-              <a:lnSpc>
-                <a:spcPct val="112000"/>
-              </a:lnSpc>
-              <a:buNone/>
-            </a:pPr>
-            <a:r>
-              <a:rPr lang="en-US" sz="1300" dirty="0">
-                <a:solidFill>
-                  <a:srgbClr val="FFFFFF"/>
-                </a:solidFill>
-                <a:latin typeface="Montserrat" pitchFamily="34" charset="0"/>
-                <a:ea typeface="Montserrat" pitchFamily="34" charset="-122"/>
-                <a:cs typeface="Montserrat" pitchFamily="34" charset="-120"/>
-              </a:rPr>
-              <a:t>метрика (error rate) + поріг (понад 5%) + тривалість (протягом 15 хвилин) + адресат (хто прокидається). Тривалість пропускають найчастіше — і отримують сирену на кожен чих.</a:t>
-            </a:r>
-            <a:endParaRPr lang="en-US" sz="1300" dirty="0"/>
-          </a:p>
-        </p:txBody>
+            <a:off x="749808" y="3993185"/>
+            <a:ext cx="256032" cy="85039"/>
+          </a:xfrm>
+          <a:prstGeom prst="rect">
+            <a:avLst/>
+          </a:prstGeom>
+          <a:solidFill>
+            <a:srgbClr val="9A5B12"/>
+          </a:solidFill>
+          <a:ln/>
+        </p:spPr>
+      </p:sp>
+      <p:sp>
+        <p:nvSpPr>
+          <p:cNvPr id="23" name="Shape 20"/>
+          <p:cNvSpPr/>
+          <p:nvPr/>
+        </p:nvSpPr>
+        <p:spPr>
+          <a:xfrm>
+            <a:off x="1133856" y="3953500"/>
+            <a:ext cx="256032" cy="124724"/>
+          </a:xfrm>
+          <a:prstGeom prst="rect">
+            <a:avLst/>
+          </a:prstGeom>
+          <a:solidFill>
+            <a:srgbClr val="9A5B12"/>
+          </a:solidFill>
+          <a:ln/>
+        </p:spPr>
+      </p:sp>
+      <p:sp>
+        <p:nvSpPr>
+          <p:cNvPr id="24" name="Shape 21"/>
+          <p:cNvSpPr/>
+          <p:nvPr/>
+        </p:nvSpPr>
+        <p:spPr>
+          <a:xfrm>
+            <a:off x="1517904" y="3908146"/>
+            <a:ext cx="256032" cy="170078"/>
+          </a:xfrm>
+          <a:prstGeom prst="rect">
+            <a:avLst/>
+          </a:prstGeom>
+          <a:solidFill>
+            <a:srgbClr val="9A5B12"/>
+          </a:solidFill>
+          <a:ln/>
+        </p:spPr>
       </p:sp>
       <p:sp>
         <p:nvSpPr>
@@ -7259,17 +7216,113 @@
         </p:nvSpPr>
         <p:spPr>
           <a:xfrm>
-            <a:off x="566928" y="5349240"/>
-            <a:ext cx="11064240" cy="566928"/>
-          </a:xfrm>
-          <a:prstGeom prst="roundRect">
-            <a:avLst>
-              <a:gd name="adj" fmla="val 19355"/>
-            </a:avLst>
-          </a:prstGeom>
-          <a:solidFill>
-            <a:srgbClr val="FFFFFF"/>
-          </a:solidFill>
+            <a:off x="1901952" y="3840114"/>
+            <a:ext cx="256032" cy="238110"/>
+          </a:xfrm>
+          <a:prstGeom prst="rect">
+            <a:avLst/>
+          </a:prstGeom>
+          <a:solidFill>
+            <a:srgbClr val="9A5B12"/>
+          </a:solidFill>
+          <a:ln/>
+        </p:spPr>
+      </p:sp>
+      <p:sp>
+        <p:nvSpPr>
+          <p:cNvPr id="26" name="Shape 23"/>
+          <p:cNvSpPr/>
+          <p:nvPr/>
+        </p:nvSpPr>
+        <p:spPr>
+          <a:xfrm>
+            <a:off x="2286000" y="3766414"/>
+            <a:ext cx="256032" cy="311810"/>
+          </a:xfrm>
+          <a:prstGeom prst="rect">
+            <a:avLst/>
+          </a:prstGeom>
+          <a:solidFill>
+            <a:srgbClr val="9A5B12"/>
+          </a:solidFill>
+          <a:ln/>
+        </p:spPr>
+      </p:sp>
+      <p:sp>
+        <p:nvSpPr>
+          <p:cNvPr id="27" name="Shape 24"/>
+          <p:cNvSpPr/>
+          <p:nvPr/>
+        </p:nvSpPr>
+        <p:spPr>
+          <a:xfrm>
+            <a:off x="2670048" y="3681374"/>
+            <a:ext cx="256032" cy="396850"/>
+          </a:xfrm>
+          <a:prstGeom prst="rect">
+            <a:avLst/>
+          </a:prstGeom>
+          <a:solidFill>
+            <a:srgbClr val="9A5B12"/>
+          </a:solidFill>
+          <a:ln/>
+        </p:spPr>
+      </p:sp>
+      <p:sp>
+        <p:nvSpPr>
+          <p:cNvPr id="28" name="Shape 25"/>
+          <p:cNvSpPr/>
+          <p:nvPr/>
+        </p:nvSpPr>
+        <p:spPr>
+          <a:xfrm>
+            <a:off x="3054096" y="3590666"/>
+            <a:ext cx="256032" cy="487558"/>
+          </a:xfrm>
+          <a:prstGeom prst="rect">
+            <a:avLst/>
+          </a:prstGeom>
+          <a:solidFill>
+            <a:srgbClr val="9A5B12"/>
+          </a:solidFill>
+          <a:ln/>
+        </p:spPr>
+      </p:sp>
+      <p:sp>
+        <p:nvSpPr>
+          <p:cNvPr id="29" name="Shape 26"/>
+          <p:cNvSpPr/>
+          <p:nvPr/>
+        </p:nvSpPr>
+        <p:spPr>
+          <a:xfrm>
+            <a:off x="3438144" y="3511296"/>
+            <a:ext cx="256032" cy="566928"/>
+          </a:xfrm>
+          <a:prstGeom prst="rect">
+            <a:avLst/>
+          </a:prstGeom>
+          <a:solidFill>
+            <a:srgbClr val="9A5B12"/>
+          </a:solidFill>
+          <a:ln/>
+        </p:spPr>
+      </p:sp>
+      <p:sp>
+        <p:nvSpPr>
+          <p:cNvPr id="30" name="Shape 27"/>
+          <p:cNvSpPr/>
+          <p:nvPr/>
+        </p:nvSpPr>
+        <p:spPr>
+          <a:xfrm>
+            <a:off x="749808" y="4096512"/>
+            <a:ext cx="2944368" cy="0"/>
+          </a:xfrm>
+          <a:prstGeom prst="line">
+            <a:avLst/>
+          </a:prstGeom>
+          <a:noFill/>
           <a:ln w="12700">
             <a:solidFill>
               <a:srgbClr val="E6E7EC"/>
@@ -7280,14 +7333,549 @@
       </p:sp>
       <p:sp>
         <p:nvSpPr>
-          <p:cNvPr id="26" name="Text 23"/>
-          <p:cNvSpPr/>
-          <p:nvPr/>
-        </p:nvSpPr>
-        <p:spPr>
-          <a:xfrm>
-            <a:off x="786384" y="5495544"/>
-            <a:ext cx="10625328" cy="274320"/>
+          <p:cNvPr id="31" name="Shape 28"/>
+          <p:cNvSpPr/>
+          <p:nvPr/>
+        </p:nvSpPr>
+        <p:spPr>
+          <a:xfrm>
+            <a:off x="4453128" y="3511296"/>
+            <a:ext cx="256032" cy="566928"/>
+          </a:xfrm>
+          <a:prstGeom prst="rect">
+            <a:avLst/>
+          </a:prstGeom>
+          <a:solidFill>
+            <a:srgbClr val="9A5B12"/>
+          </a:solidFill>
+          <a:ln/>
+        </p:spPr>
+      </p:sp>
+      <p:sp>
+        <p:nvSpPr>
+          <p:cNvPr id="32" name="Shape 29"/>
+          <p:cNvSpPr/>
+          <p:nvPr/>
+        </p:nvSpPr>
+        <p:spPr>
+          <a:xfrm>
+            <a:off x="4837176" y="3556650"/>
+            <a:ext cx="256032" cy="521574"/>
+          </a:xfrm>
+          <a:prstGeom prst="rect">
+            <a:avLst/>
+          </a:prstGeom>
+          <a:solidFill>
+            <a:srgbClr val="9A5B12"/>
+          </a:solidFill>
+          <a:ln/>
+        </p:spPr>
+      </p:sp>
+      <p:sp>
+        <p:nvSpPr>
+          <p:cNvPr id="33" name="Shape 30"/>
+          <p:cNvSpPr/>
+          <p:nvPr/>
+        </p:nvSpPr>
+        <p:spPr>
+          <a:xfrm>
+            <a:off x="5221224" y="3624682"/>
+            <a:ext cx="256032" cy="453542"/>
+          </a:xfrm>
+          <a:prstGeom prst="rect">
+            <a:avLst/>
+          </a:prstGeom>
+          <a:solidFill>
+            <a:srgbClr val="9A5B12"/>
+          </a:solidFill>
+          <a:ln/>
+        </p:spPr>
+      </p:sp>
+      <p:sp>
+        <p:nvSpPr>
+          <p:cNvPr id="34" name="Shape 31"/>
+          <p:cNvSpPr/>
+          <p:nvPr/>
+        </p:nvSpPr>
+        <p:spPr>
+          <a:xfrm>
+            <a:off x="5605272" y="3704052"/>
+            <a:ext cx="256032" cy="374172"/>
+          </a:xfrm>
+          <a:prstGeom prst="rect">
+            <a:avLst/>
+          </a:prstGeom>
+          <a:solidFill>
+            <a:srgbClr val="9A5B12"/>
+          </a:solidFill>
+          <a:ln/>
+        </p:spPr>
+      </p:sp>
+      <p:sp>
+        <p:nvSpPr>
+          <p:cNvPr id="35" name="Shape 32"/>
+          <p:cNvSpPr/>
+          <p:nvPr/>
+        </p:nvSpPr>
+        <p:spPr>
+          <a:xfrm>
+            <a:off x="5989320" y="3794760"/>
+            <a:ext cx="256032" cy="283464"/>
+          </a:xfrm>
+          <a:prstGeom prst="rect">
+            <a:avLst/>
+          </a:prstGeom>
+          <a:solidFill>
+            <a:srgbClr val="9A5B12"/>
+          </a:solidFill>
+          <a:ln/>
+        </p:spPr>
+      </p:sp>
+      <p:sp>
+        <p:nvSpPr>
+          <p:cNvPr id="36" name="Shape 33"/>
+          <p:cNvSpPr/>
+          <p:nvPr/>
+        </p:nvSpPr>
+        <p:spPr>
+          <a:xfrm>
+            <a:off x="6373368" y="3862791"/>
+            <a:ext cx="256032" cy="215433"/>
+          </a:xfrm>
+          <a:prstGeom prst="rect">
+            <a:avLst/>
+          </a:prstGeom>
+          <a:solidFill>
+            <a:srgbClr val="9A5B12"/>
+          </a:solidFill>
+          <a:ln/>
+        </p:spPr>
+      </p:sp>
+      <p:sp>
+        <p:nvSpPr>
+          <p:cNvPr id="37" name="Shape 34"/>
+          <p:cNvSpPr/>
+          <p:nvPr/>
+        </p:nvSpPr>
+        <p:spPr>
+          <a:xfrm>
+            <a:off x="6757416" y="3930823"/>
+            <a:ext cx="256032" cy="147401"/>
+          </a:xfrm>
+          <a:prstGeom prst="rect">
+            <a:avLst/>
+          </a:prstGeom>
+          <a:solidFill>
+            <a:srgbClr val="9A5B12"/>
+          </a:solidFill>
+          <a:ln/>
+        </p:spPr>
+      </p:sp>
+      <p:sp>
+        <p:nvSpPr>
+          <p:cNvPr id="38" name="Shape 35"/>
+          <p:cNvSpPr/>
+          <p:nvPr/>
+        </p:nvSpPr>
+        <p:spPr>
+          <a:xfrm>
+            <a:off x="7141464" y="3987516"/>
+            <a:ext cx="256032" cy="90708"/>
+          </a:xfrm>
+          <a:prstGeom prst="rect">
+            <a:avLst/>
+          </a:prstGeom>
+          <a:solidFill>
+            <a:srgbClr val="9A5B12"/>
+          </a:solidFill>
+          <a:ln/>
+        </p:spPr>
+      </p:sp>
+      <p:sp>
+        <p:nvSpPr>
+          <p:cNvPr id="39" name="Shape 36"/>
+          <p:cNvSpPr/>
+          <p:nvPr/>
+        </p:nvSpPr>
+        <p:spPr>
+          <a:xfrm>
+            <a:off x="4453128" y="4096512"/>
+            <a:ext cx="2944368" cy="0"/>
+          </a:xfrm>
+          <a:prstGeom prst="line">
+            <a:avLst/>
+          </a:prstGeom>
+          <a:noFill/>
+          <a:ln w="12700">
+            <a:solidFill>
+              <a:srgbClr val="E6E7EC"/>
+            </a:solidFill>
+            <a:prstDash val="solid"/>
+          </a:ln>
+        </p:spPr>
+      </p:sp>
+      <p:sp>
+        <p:nvSpPr>
+          <p:cNvPr id="40" name="Shape 37"/>
+          <p:cNvSpPr/>
+          <p:nvPr/>
+        </p:nvSpPr>
+        <p:spPr>
+          <a:xfrm>
+            <a:off x="8156448" y="3964838"/>
+            <a:ext cx="256032" cy="113386"/>
+          </a:xfrm>
+          <a:prstGeom prst="rect">
+            <a:avLst/>
+          </a:prstGeom>
+          <a:solidFill>
+            <a:srgbClr val="9A5B12"/>
+          </a:solidFill>
+          <a:ln/>
+        </p:spPr>
+      </p:sp>
+      <p:sp>
+        <p:nvSpPr>
+          <p:cNvPr id="41" name="Shape 38"/>
+          <p:cNvSpPr/>
+          <p:nvPr/>
+        </p:nvSpPr>
+        <p:spPr>
+          <a:xfrm>
+            <a:off x="8540496" y="3908146"/>
+            <a:ext cx="256032" cy="170078"/>
+          </a:xfrm>
+          <a:prstGeom prst="rect">
+            <a:avLst/>
+          </a:prstGeom>
+          <a:solidFill>
+            <a:srgbClr val="9A5B12"/>
+          </a:solidFill>
+          <a:ln/>
+        </p:spPr>
+      </p:sp>
+      <p:sp>
+        <p:nvSpPr>
+          <p:cNvPr id="42" name="Shape 39"/>
+          <p:cNvSpPr/>
+          <p:nvPr/>
+        </p:nvSpPr>
+        <p:spPr>
+          <a:xfrm>
+            <a:off x="8924544" y="3919484"/>
+            <a:ext cx="256032" cy="158740"/>
+          </a:xfrm>
+          <a:prstGeom prst="rect">
+            <a:avLst/>
+          </a:prstGeom>
+          <a:solidFill>
+            <a:srgbClr val="9A5B12"/>
+          </a:solidFill>
+          <a:ln/>
+        </p:spPr>
+      </p:sp>
+      <p:sp>
+        <p:nvSpPr>
+          <p:cNvPr id="43" name="Shape 40"/>
+          <p:cNvSpPr/>
+          <p:nvPr/>
+        </p:nvSpPr>
+        <p:spPr>
+          <a:xfrm>
+            <a:off x="9308592" y="3823106"/>
+            <a:ext cx="256032" cy="255118"/>
+          </a:xfrm>
+          <a:prstGeom prst="rect">
+            <a:avLst/>
+          </a:prstGeom>
+          <a:solidFill>
+            <a:srgbClr val="9A5B12"/>
+          </a:solidFill>
+          <a:ln/>
+        </p:spPr>
+      </p:sp>
+      <p:sp>
+        <p:nvSpPr>
+          <p:cNvPr id="44" name="Shape 41"/>
+          <p:cNvSpPr/>
+          <p:nvPr/>
+        </p:nvSpPr>
+        <p:spPr>
+          <a:xfrm>
+            <a:off x="9692640" y="3738067"/>
+            <a:ext cx="256032" cy="340157"/>
+          </a:xfrm>
+          <a:prstGeom prst="rect">
+            <a:avLst/>
+          </a:prstGeom>
+          <a:solidFill>
+            <a:srgbClr val="9A5B12"/>
+          </a:solidFill>
+          <a:ln/>
+        </p:spPr>
+      </p:sp>
+      <p:sp>
+        <p:nvSpPr>
+          <p:cNvPr id="45" name="Shape 42"/>
+          <p:cNvSpPr/>
+          <p:nvPr/>
+        </p:nvSpPr>
+        <p:spPr>
+          <a:xfrm>
+            <a:off x="10076688" y="3670036"/>
+            <a:ext cx="256032" cy="408188"/>
+          </a:xfrm>
+          <a:prstGeom prst="rect">
+            <a:avLst/>
+          </a:prstGeom>
+          <a:solidFill>
+            <a:srgbClr val="9A5B12"/>
+          </a:solidFill>
+          <a:ln/>
+        </p:spPr>
+      </p:sp>
+      <p:sp>
+        <p:nvSpPr>
+          <p:cNvPr id="46" name="Shape 43"/>
+          <p:cNvSpPr/>
+          <p:nvPr/>
+        </p:nvSpPr>
+        <p:spPr>
+          <a:xfrm>
+            <a:off x="10460736" y="3579327"/>
+            <a:ext cx="256032" cy="498897"/>
+          </a:xfrm>
+          <a:prstGeom prst="rect">
+            <a:avLst/>
+          </a:prstGeom>
+          <a:solidFill>
+            <a:srgbClr val="9A5B12"/>
+          </a:solidFill>
+          <a:ln/>
+        </p:spPr>
+      </p:sp>
+      <p:sp>
+        <p:nvSpPr>
+          <p:cNvPr id="47" name="Shape 44"/>
+          <p:cNvSpPr/>
+          <p:nvPr/>
+        </p:nvSpPr>
+        <p:spPr>
+          <a:xfrm>
+            <a:off x="10844784" y="3511296"/>
+            <a:ext cx="256032" cy="566928"/>
+          </a:xfrm>
+          <a:prstGeom prst="rect">
+            <a:avLst/>
+          </a:prstGeom>
+          <a:solidFill>
+            <a:srgbClr val="9A5B12"/>
+          </a:solidFill>
+          <a:ln/>
+        </p:spPr>
+      </p:sp>
+      <p:sp>
+        <p:nvSpPr>
+          <p:cNvPr id="48" name="Shape 45"/>
+          <p:cNvSpPr/>
+          <p:nvPr/>
+        </p:nvSpPr>
+        <p:spPr>
+          <a:xfrm>
+            <a:off x="8156448" y="4096512"/>
+            <a:ext cx="2944368" cy="0"/>
+          </a:xfrm>
+          <a:prstGeom prst="line">
+            <a:avLst/>
+          </a:prstGeom>
+          <a:noFill/>
+          <a:ln w="12700">
+            <a:solidFill>
+              <a:srgbClr val="E6E7EC"/>
+            </a:solidFill>
+            <a:prstDash val="solid"/>
+          </a:ln>
+        </p:spPr>
+      </p:sp>
+      <p:sp>
+        <p:nvSpPr>
+          <p:cNvPr id="49" name="Text 46"/>
+          <p:cNvSpPr/>
+          <p:nvPr/>
+        </p:nvSpPr>
+        <p:spPr>
+          <a:xfrm>
+            <a:off x="566928" y="4151376"/>
+            <a:ext cx="11064240" cy="201168"/>
+          </a:xfrm>
+          <a:prstGeom prst="rect">
+            <a:avLst/>
+          </a:prstGeom>
+          <a:noFill/>
+          <a:ln/>
+        </p:spPr>
+        <p:txBody>
+          <a:bodyPr wrap="square" lIns="0" tIns="0" rIns="0" bIns="0" rtlCol="0" anchor="ctr"/>
+          <a:lstStyle/>
+          <a:p>
+            <a:pPr indent="0" marL="0">
+              <a:buNone/>
+            </a:pPr>
+            <a:r>
+              <a:rPr lang="en-US" sz="850" spc="100" kern="0" dirty="0">
+                <a:solidFill>
+                  <a:srgbClr val="9AA1AD"/>
+                </a:solidFill>
+                <a:latin typeface="Courier New" pitchFamily="34" charset="0"/>
+                <a:ea typeface="Courier New" pitchFamily="34" charset="-122"/>
+                <a:cs typeface="Courier New" pitchFamily="34" charset="-120"/>
+              </a:rPr>
+              <a:t>той самий знімок «зараз» — три різні історії</a:t>
+            </a:r>
+            <a:endParaRPr lang="en-US" sz="850" dirty="0"/>
+          </a:p>
+        </p:txBody>
+      </p:sp>
+      <p:sp>
+        <p:nvSpPr>
+          <p:cNvPr id="50" name="Shape 47"/>
+          <p:cNvSpPr/>
+          <p:nvPr/>
+        </p:nvSpPr>
+        <p:spPr>
+          <a:xfrm>
+            <a:off x="566928" y="4443984"/>
+            <a:ext cx="11064240" cy="1051560"/>
+          </a:xfrm>
+          <a:prstGeom prst="roundRect">
+            <a:avLst>
+              <a:gd name="adj" fmla="val 10435"/>
+            </a:avLst>
+          </a:prstGeom>
+          <a:solidFill>
+            <a:srgbClr val="5A05F4"/>
+          </a:solidFill>
+          <a:ln/>
+        </p:spPr>
+      </p:sp>
+      <p:sp>
+        <p:nvSpPr>
+          <p:cNvPr id="51" name="Text 48"/>
+          <p:cNvSpPr/>
+          <p:nvPr/>
+        </p:nvSpPr>
+        <p:spPr>
+          <a:xfrm>
+            <a:off x="786384" y="4572000"/>
+            <a:ext cx="10625328" cy="219456"/>
+          </a:xfrm>
+          <a:prstGeom prst="rect">
+            <a:avLst/>
+          </a:prstGeom>
+          <a:noFill/>
+          <a:ln/>
+        </p:spPr>
+        <p:txBody>
+          <a:bodyPr wrap="square" lIns="0" tIns="0" rIns="0" bIns="0" rtlCol="0" anchor="ctr"/>
+          <a:lstStyle/>
+          <a:p>
+            <a:pPr indent="0" marL="0">
+              <a:buNone/>
+            </a:pPr>
+            <a:r>
+              <a:rPr lang="en-US" sz="950" b="1" spc="150" kern="0" dirty="0">
+                <a:solidFill>
+                  <a:srgbClr val="FFFFFF"/>
+                </a:solidFill>
+                <a:latin typeface="Courier New" pitchFamily="34" charset="0"/>
+                <a:ea typeface="Courier New" pitchFamily="34" charset="-122"/>
+                <a:cs typeface="Courier New" pitchFamily="34" charset="-120"/>
+              </a:rPr>
+              <a:t>АНАТОМІЯ АЛЕРТУ — ЧОТИРИ ОБОВ'ЯЗКОВІ ЧАСТИНИ</a:t>
+            </a:r>
+            <a:endParaRPr lang="en-US" sz="950" dirty="0"/>
+          </a:p>
+        </p:txBody>
+      </p:sp>
+      <p:sp>
+        <p:nvSpPr>
+          <p:cNvPr id="52" name="Text 49"/>
+          <p:cNvSpPr/>
+          <p:nvPr/>
+        </p:nvSpPr>
+        <p:spPr>
+          <a:xfrm>
+            <a:off x="786384" y="4828032"/>
+            <a:ext cx="10625328" cy="539496"/>
+          </a:xfrm>
+          <a:prstGeom prst="rect">
+            <a:avLst/>
+          </a:prstGeom>
+          <a:noFill/>
+          <a:ln/>
+        </p:spPr>
+        <p:txBody>
+          <a:bodyPr wrap="square" lIns="0" tIns="0" rIns="0" bIns="0" rtlCol="0" anchor="ctr"/>
+          <a:lstStyle/>
+          <a:p>
+            <a:pPr indent="0" marL="0">
+              <a:lnSpc>
+                <a:spcPct val="112000"/>
+              </a:lnSpc>
+              <a:buNone/>
+            </a:pPr>
+            <a:r>
+              <a:rPr lang="en-US" sz="1300" dirty="0">
+                <a:solidFill>
+                  <a:srgbClr val="FFFFFF"/>
+                </a:solidFill>
+                <a:latin typeface="Montserrat" pitchFamily="34" charset="0"/>
+                <a:ea typeface="Montserrat" pitchFamily="34" charset="-122"/>
+                <a:cs typeface="Montserrat" pitchFamily="34" charset="-120"/>
+              </a:rPr>
+              <a:t>метрика (error rate) + поріг (понад 5%) + тривалість (протягом 15 хвилин) + адресат (хто прокидається). Тривалість пропускають найчастіше — і отримують сирену на кожен чих.</a:t>
+            </a:r>
+            <a:endParaRPr lang="en-US" sz="1300" dirty="0"/>
+          </a:p>
+        </p:txBody>
+      </p:sp>
+      <p:sp>
+        <p:nvSpPr>
+          <p:cNvPr id="53" name="Shape 50"/>
+          <p:cNvSpPr/>
+          <p:nvPr/>
+        </p:nvSpPr>
+        <p:spPr>
+          <a:xfrm>
+            <a:off x="566928" y="5632704"/>
+            <a:ext cx="11064240" cy="502920"/>
+          </a:xfrm>
+          <a:prstGeom prst="roundRect">
+            <a:avLst>
+              <a:gd name="adj" fmla="val 21818"/>
+            </a:avLst>
+          </a:prstGeom>
+          <a:solidFill>
+            <a:srgbClr val="FFFFFF"/>
+          </a:solidFill>
+          <a:ln w="12700">
+            <a:solidFill>
+              <a:srgbClr val="E6E7EC"/>
+            </a:solidFill>
+            <a:prstDash val="solid"/>
+          </a:ln>
+        </p:spPr>
+      </p:sp>
+      <p:sp>
+        <p:nvSpPr>
+          <p:cNvPr id="54" name="Text 51"/>
+          <p:cNvSpPr/>
+          <p:nvPr/>
+        </p:nvSpPr>
+        <p:spPr>
+          <a:xfrm>
+            <a:off x="786384" y="5779008"/>
+            <a:ext cx="10625328" cy="210312"/>
           </a:xfrm>
           <a:prstGeom prst="rect">
             <a:avLst/>
@@ -13775,11 +14363,11 @@
         <p:spPr>
           <a:xfrm>
             <a:off x="566928" y="1920240"/>
-            <a:ext cx="3520440" cy="2103120"/>
+            <a:ext cx="3520440" cy="1783080"/>
           </a:xfrm>
           <a:prstGeom prst="roundRect">
             <a:avLst>
-              <a:gd name="adj" fmla="val 5217"/>
+              <a:gd name="adj" fmla="val 6154"/>
             </a:avLst>
           </a:prstGeom>
           <a:solidFill>
@@ -13900,7 +14488,7 @@
         <p:spPr>
           <a:xfrm>
             <a:off x="768096" y="2606040"/>
-            <a:ext cx="3118104" cy="1261872"/>
+            <a:ext cx="3118104" cy="941832"/>
           </a:xfrm>
           <a:prstGeom prst="rect">
             <a:avLst/>
@@ -13942,11 +14530,11 @@
         <p:spPr>
           <a:xfrm>
             <a:off x="4270248" y="1920240"/>
-            <a:ext cx="3520440" cy="2103120"/>
+            <a:ext cx="3520440" cy="1783080"/>
           </a:xfrm>
           <a:prstGeom prst="roundRect">
             <a:avLst>
-              <a:gd name="adj" fmla="val 5217"/>
+              <a:gd name="adj" fmla="val 6154"/>
             </a:avLst>
           </a:prstGeom>
           <a:solidFill>
@@ -14062,7 +14650,7 @@
         <p:spPr>
           <a:xfrm>
             <a:off x="4471416" y="2606040"/>
-            <a:ext cx="3118104" cy="1261872"/>
+            <a:ext cx="3118104" cy="941832"/>
           </a:xfrm>
           <a:prstGeom prst="rect">
             <a:avLst/>
@@ -14104,11 +14692,11 @@
         <p:spPr>
           <a:xfrm>
             <a:off x="7973568" y="1920240"/>
-            <a:ext cx="3520440" cy="2103120"/>
+            <a:ext cx="3520440" cy="1783080"/>
           </a:xfrm>
           <a:prstGeom prst="roundRect">
             <a:avLst>
-              <a:gd name="adj" fmla="val 5217"/>
+              <a:gd name="adj" fmla="val 6154"/>
             </a:avLst>
           </a:prstGeom>
           <a:solidFill>
@@ -14229,7 +14817,7 @@
         <p:spPr>
           <a:xfrm>
             <a:off x="8174736" y="2606040"/>
-            <a:ext cx="3118104" cy="1261872"/>
+            <a:ext cx="3118104" cy="941832"/>
           </a:xfrm>
           <a:prstGeom prst="rect">
             <a:avLst/>
@@ -14270,16 +14858,16 @@
         </p:nvSpPr>
         <p:spPr>
           <a:xfrm>
-            <a:off x="566928" y="4297680"/>
-            <a:ext cx="11064240" cy="1600200"/>
+            <a:off x="1481328" y="3913632"/>
+            <a:ext cx="2377440" cy="310896"/>
           </a:xfrm>
           <a:prstGeom prst="roundRect">
             <a:avLst>
-              <a:gd name="adj" fmla="val 6857"/>
+              <a:gd name="adj" fmla="val 17647"/>
             </a:avLst>
           </a:prstGeom>
           <a:solidFill>
-            <a:srgbClr val="5A05F4"/>
+            <a:srgbClr val="EFEAFE"/>
           </a:solidFill>
           <a:ln/>
         </p:spPr>
@@ -14292,8 +14880,8 @@
         </p:nvSpPr>
         <p:spPr>
           <a:xfrm>
-            <a:off x="786384" y="4425696"/>
-            <a:ext cx="10625328" cy="219456"/>
+            <a:off x="1481328" y="3913632"/>
+            <a:ext cx="2377440" cy="310896"/>
           </a:xfrm>
           <a:prstGeom prst="rect">
             <a:avLst/>
@@ -14305,18 +14893,317 @@
           <a:bodyPr wrap="square" lIns="0" tIns="0" rIns="0" bIns="0" rtlCol="0" anchor="ctr"/>
           <a:lstStyle/>
           <a:p>
-            <a:pPr indent="0" marL="0">
-              <a:buNone/>
-            </a:pPr>
-            <a:r>
-              <a:rPr lang="en-US" sz="950" b="1" spc="150" kern="0" dirty="0">
-                <a:solidFill>
-                  <a:srgbClr val="FFFFFF"/>
+            <a:pPr algn="ctr" indent="0" marL="0">
+              <a:buNone/>
+            </a:pPr>
+            <a:r>
+              <a:rPr lang="en-US" sz="900" b="1" dirty="0">
+                <a:solidFill>
+                  <a:srgbClr val="5A05F4"/>
                 </a:solidFill>
                 <a:latin typeface="Courier New" pitchFamily="34" charset="0"/>
                 <a:ea typeface="Courier New" pitchFamily="34" charset="-122"/>
                 <a:cs typeface="Courier New" pitchFamily="34" charset="-120"/>
               </a:rPr>
+              <a:t>час до 1-го токена</a:t>
+            </a:r>
+            <a:endParaRPr lang="en-US" sz="900" dirty="0"/>
+          </a:p>
+        </p:txBody>
+      </p:sp>
+      <p:sp>
+        <p:nvSpPr>
+          <p:cNvPr id="25" name="Shape 22"/>
+          <p:cNvSpPr/>
+          <p:nvPr/>
+        </p:nvSpPr>
+        <p:spPr>
+          <a:xfrm>
+            <a:off x="3913632" y="3913632"/>
+            <a:ext cx="6858000" cy="310896"/>
+          </a:xfrm>
+          <a:prstGeom prst="roundRect">
+            <a:avLst>
+              <a:gd name="adj" fmla="val 17647"/>
+            </a:avLst>
+          </a:prstGeom>
+          <a:solidFill>
+            <a:srgbClr val="E9F4EF"/>
+          </a:solidFill>
+          <a:ln/>
+        </p:spPr>
+      </p:sp>
+      <p:sp>
+        <p:nvSpPr>
+          <p:cNvPr id="26" name="Text 23"/>
+          <p:cNvSpPr/>
+          <p:nvPr/>
+        </p:nvSpPr>
+        <p:spPr>
+          <a:xfrm>
+            <a:off x="3913632" y="3913632"/>
+            <a:ext cx="6858000" cy="310896"/>
+          </a:xfrm>
+          <a:prstGeom prst="rect">
+            <a:avLst/>
+          </a:prstGeom>
+          <a:noFill/>
+          <a:ln/>
+        </p:spPr>
+        <p:txBody>
+          <a:bodyPr wrap="square" lIns="0" tIns="0" rIns="0" bIns="0" rtlCol="0" anchor="ctr"/>
+          <a:lstStyle/>
+          <a:p>
+            <a:pPr algn="ctr" indent="0" marL="0">
+              <a:buNone/>
+            </a:pPr>
+            <a:r>
+              <a:rPr lang="en-US" sz="900" b="1" dirty="0">
+                <a:solidFill>
+                  <a:srgbClr val="1B8A5A"/>
+                </a:solidFill>
+                <a:latin typeface="Courier New" pitchFamily="34" charset="0"/>
+                <a:ea typeface="Courier New" pitchFamily="34" charset="-122"/>
+                <a:cs typeface="Courier New" pitchFamily="34" charset="-120"/>
+              </a:rPr>
+              <a:t>генерація — токен за токеном</a:t>
+            </a:r>
+            <a:endParaRPr lang="en-US" sz="900" dirty="0"/>
+          </a:p>
+        </p:txBody>
+      </p:sp>
+      <p:sp>
+        <p:nvSpPr>
+          <p:cNvPr id="27" name="Shape 24"/>
+          <p:cNvSpPr/>
+          <p:nvPr/>
+        </p:nvSpPr>
+        <p:spPr>
+          <a:xfrm>
+            <a:off x="1435608" y="4023360"/>
+            <a:ext cx="91440" cy="91440"/>
+          </a:xfrm>
+          <a:prstGeom prst="ellipse">
+            <a:avLst/>
+          </a:prstGeom>
+          <a:solidFill>
+            <a:srgbClr val="111318"/>
+          </a:solidFill>
+          <a:ln/>
+        </p:spPr>
+      </p:sp>
+      <p:sp>
+        <p:nvSpPr>
+          <p:cNvPr id="28" name="Text 25"/>
+          <p:cNvSpPr/>
+          <p:nvPr/>
+        </p:nvSpPr>
+        <p:spPr>
+          <a:xfrm>
+            <a:off x="475488" y="4279392"/>
+            <a:ext cx="2011680" cy="201168"/>
+          </a:xfrm>
+          <a:prstGeom prst="rect">
+            <a:avLst/>
+          </a:prstGeom>
+          <a:noFill/>
+          <a:ln/>
+        </p:spPr>
+        <p:txBody>
+          <a:bodyPr wrap="square" lIns="0" tIns="0" rIns="0" bIns="0" rtlCol="0" anchor="ctr"/>
+          <a:lstStyle/>
+          <a:p>
+            <a:pPr algn="ctr" indent="0" marL="0">
+              <a:buNone/>
+            </a:pPr>
+            <a:r>
+              <a:rPr lang="en-US" sz="850" dirty="0">
+                <a:solidFill>
+                  <a:srgbClr val="9AA1AD"/>
+                </a:solidFill>
+                <a:latin typeface="Courier New" pitchFamily="34" charset="0"/>
+                <a:ea typeface="Courier New" pitchFamily="34" charset="-122"/>
+                <a:cs typeface="Courier New" pitchFamily="34" charset="-120"/>
+              </a:rPr>
+              <a:t>запит</a:t>
+            </a:r>
+            <a:endParaRPr lang="en-US" sz="850" dirty="0"/>
+          </a:p>
+        </p:txBody>
+      </p:sp>
+      <p:sp>
+        <p:nvSpPr>
+          <p:cNvPr id="29" name="Shape 26"/>
+          <p:cNvSpPr/>
+          <p:nvPr/>
+        </p:nvSpPr>
+        <p:spPr>
+          <a:xfrm>
+            <a:off x="3813048" y="4023360"/>
+            <a:ext cx="91440" cy="91440"/>
+          </a:xfrm>
+          <a:prstGeom prst="ellipse">
+            <a:avLst/>
+          </a:prstGeom>
+          <a:solidFill>
+            <a:srgbClr val="111318"/>
+          </a:solidFill>
+          <a:ln/>
+        </p:spPr>
+      </p:sp>
+      <p:sp>
+        <p:nvSpPr>
+          <p:cNvPr id="30" name="Text 27"/>
+          <p:cNvSpPr/>
+          <p:nvPr/>
+        </p:nvSpPr>
+        <p:spPr>
+          <a:xfrm>
+            <a:off x="2852928" y="4279392"/>
+            <a:ext cx="2011680" cy="201168"/>
+          </a:xfrm>
+          <a:prstGeom prst="rect">
+            <a:avLst/>
+          </a:prstGeom>
+          <a:noFill/>
+          <a:ln/>
+        </p:spPr>
+        <p:txBody>
+          <a:bodyPr wrap="square" lIns="0" tIns="0" rIns="0" bIns="0" rtlCol="0" anchor="ctr"/>
+          <a:lstStyle/>
+          <a:p>
+            <a:pPr algn="ctr" indent="0" marL="0">
+              <a:buNone/>
+            </a:pPr>
+            <a:r>
+              <a:rPr lang="en-US" sz="850" dirty="0">
+                <a:solidFill>
+                  <a:srgbClr val="9AA1AD"/>
+                </a:solidFill>
+                <a:latin typeface="Courier New" pitchFamily="34" charset="0"/>
+                <a:ea typeface="Courier New" pitchFamily="34" charset="-122"/>
+                <a:cs typeface="Courier New" pitchFamily="34" charset="-120"/>
+              </a:rPr>
+              <a:t>перший токен</a:t>
+            </a:r>
+            <a:endParaRPr lang="en-US" sz="850" dirty="0"/>
+          </a:p>
+        </p:txBody>
+      </p:sp>
+      <p:sp>
+        <p:nvSpPr>
+          <p:cNvPr id="31" name="Shape 28"/>
+          <p:cNvSpPr/>
+          <p:nvPr/>
+        </p:nvSpPr>
+        <p:spPr>
+          <a:xfrm>
+            <a:off x="10725912" y="4023360"/>
+            <a:ext cx="91440" cy="91440"/>
+          </a:xfrm>
+          <a:prstGeom prst="ellipse">
+            <a:avLst/>
+          </a:prstGeom>
+          <a:solidFill>
+            <a:srgbClr val="111318"/>
+          </a:solidFill>
+          <a:ln/>
+        </p:spPr>
+      </p:sp>
+      <p:sp>
+        <p:nvSpPr>
+          <p:cNvPr id="32" name="Text 29"/>
+          <p:cNvSpPr/>
+          <p:nvPr/>
+        </p:nvSpPr>
+        <p:spPr>
+          <a:xfrm>
+            <a:off x="9765792" y="4279392"/>
+            <a:ext cx="2011680" cy="201168"/>
+          </a:xfrm>
+          <a:prstGeom prst="rect">
+            <a:avLst/>
+          </a:prstGeom>
+          <a:noFill/>
+          <a:ln/>
+        </p:spPr>
+        <p:txBody>
+          <a:bodyPr wrap="square" lIns="0" tIns="0" rIns="0" bIns="0" rtlCol="0" anchor="ctr"/>
+          <a:lstStyle/>
+          <a:p>
+            <a:pPr algn="ctr" indent="0" marL="0">
+              <a:buNone/>
+            </a:pPr>
+            <a:r>
+              <a:rPr lang="en-US" sz="850" dirty="0">
+                <a:solidFill>
+                  <a:srgbClr val="9AA1AD"/>
+                </a:solidFill>
+                <a:latin typeface="Courier New" pitchFamily="34" charset="0"/>
+                <a:ea typeface="Courier New" pitchFamily="34" charset="-122"/>
+                <a:cs typeface="Courier New" pitchFamily="34" charset="-120"/>
+              </a:rPr>
+              <a:t>останній байт</a:t>
+            </a:r>
+            <a:endParaRPr lang="en-US" sz="850" dirty="0"/>
+          </a:p>
+        </p:txBody>
+      </p:sp>
+      <p:sp>
+        <p:nvSpPr>
+          <p:cNvPr id="33" name="Shape 30"/>
+          <p:cNvSpPr/>
+          <p:nvPr/>
+        </p:nvSpPr>
+        <p:spPr>
+          <a:xfrm>
+            <a:off x="566928" y="4681728"/>
+            <a:ext cx="11064240" cy="1188720"/>
+          </a:xfrm>
+          <a:prstGeom prst="roundRect">
+            <a:avLst>
+              <a:gd name="adj" fmla="val 9231"/>
+            </a:avLst>
+          </a:prstGeom>
+          <a:solidFill>
+            <a:srgbClr val="5A05F4"/>
+          </a:solidFill>
+          <a:ln/>
+        </p:spPr>
+      </p:sp>
+      <p:sp>
+        <p:nvSpPr>
+          <p:cNvPr id="34" name="Text 31"/>
+          <p:cNvSpPr/>
+          <p:nvPr/>
+        </p:nvSpPr>
+        <p:spPr>
+          <a:xfrm>
+            <a:off x="786384" y="4809744"/>
+            <a:ext cx="10625328" cy="219456"/>
+          </a:xfrm>
+          <a:prstGeom prst="rect">
+            <a:avLst/>
+          </a:prstGeom>
+          <a:noFill/>
+          <a:ln/>
+        </p:spPr>
+        <p:txBody>
+          <a:bodyPr wrap="square" lIns="0" tIns="0" rIns="0" bIns="0" rtlCol="0" anchor="ctr"/>
+          <a:lstStyle/>
+          <a:p>
+            <a:pPr indent="0" marL="0">
+              <a:buNone/>
+            </a:pPr>
+            <a:r>
+              <a:rPr lang="en-US" sz="950" b="1" spc="150" kern="0" dirty="0">
+                <a:solidFill>
+                  <a:srgbClr val="FFFFFF"/>
+                </a:solidFill>
+                <a:latin typeface="Courier New" pitchFamily="34" charset="0"/>
+                <a:ea typeface="Courier New" pitchFamily="34" charset="-122"/>
+                <a:cs typeface="Courier New" pitchFamily="34" charset="-120"/>
+              </a:rPr>
               <a:t>ПРАКТИЧНИЙ ВИСНОВОК НА СЬОГОДНІ</a:t>
             </a:r>
             <a:endParaRPr lang="en-US" sz="950" dirty="0"/>
@@ -14325,14 +15212,14 @@
       </p:sp>
       <p:sp>
         <p:nvSpPr>
-          <p:cNvPr id="25" name="Text 22"/>
-          <p:cNvSpPr/>
-          <p:nvPr/>
-        </p:nvSpPr>
-        <p:spPr>
-          <a:xfrm>
-            <a:off x="786384" y="4681728"/>
-            <a:ext cx="10625328" cy="1088136"/>
+          <p:cNvPr id="35" name="Text 32"/>
+          <p:cNvSpPr/>
+          <p:nvPr/>
+        </p:nvSpPr>
+        <p:spPr>
+          <a:xfrm>
+            <a:off x="786384" y="5065776"/>
+            <a:ext cx="10625328" cy="676656"/>
           </a:xfrm>
           <a:prstGeom prst="rect">
             <a:avLst/>

--- a/docs/decks/L09.pptx
+++ b/docs/decks/L09.pptx
@@ -2803,7 +2803,7 @@
         </p:nvSpPr>
         <p:spPr>
           <a:xfrm>
-            <a:off x="11368735" y="6437376"/>
+            <a:off x="11368735" y="6327648"/>
             <a:ext cx="365760" cy="274320"/>
           </a:xfrm>
           <a:prstGeom prst="rect">
@@ -2839,6 +2839,62 @@
           </a:p>
         </p:txBody>
       </p:sp>
+    </p:spTree>
+  </p:cSld>
+  <p:clrMapOvr>
+    <a:masterClrMapping/>
+  </p:clrMapOvr>
+</p:sldLayout>
+</file>
+
+<file path=ppt/slideLayouts/slideLayout2.xml><?xml version="1.0" encoding="utf-8"?>
+<p:sldLayout xmlns:a="http://schemas.openxmlformats.org/drawingml/2006/main" xmlns:r="http://schemas.openxmlformats.org/officeDocument/2006/relationships" xmlns:p="http://schemas.openxmlformats.org/presentationml/2006/main" preserve="1">
+  <p:cSld name="NEO">
+    <p:bg>
+      <p:bgPr>
+        <a:solidFill>
+          <a:srgbClr val="000000"/>
+        </a:solidFill>
+      </p:bgPr>
+    </p:bg>
+    <p:spTree>
+      <p:nvGrpSpPr>
+        <p:cNvPr id="1" name=""/>
+        <p:cNvGrpSpPr/>
+        <p:nvPr/>
+      </p:nvGrpSpPr>
+      <p:grpSpPr>
+        <a:xfrm>
+          <a:off x="0" y="0"/>
+          <a:ext cx="0" cy="0"/>
+          <a:chOff x="0" y="0"/>
+          <a:chExt cx="0" cy="0"/>
+        </a:xfrm>
+      </p:grpSpPr>
+      <p:pic>
+        <p:nvPicPr>
+          <p:cNvPr id="2" name="Image 0" descr="preencoded.png">    </p:cNvPr>
+          <p:cNvPicPr>
+            <a:picLocks noChangeAspect="1"/>
+          </p:cNvPicPr>
+          <p:nvPr/>
+        </p:nvPicPr>
+        <p:blipFill>
+          <a:blip r:embed="rId1"/>
+          <a:stretch>
+            <a:fillRect/>
+          </a:stretch>
+        </p:blipFill>
+        <p:spPr>
+          <a:xfrm>
+            <a:off x="0" y="0"/>
+            <a:ext cx="12191695" cy="6858000"/>
+          </a:xfrm>
+          <a:prstGeom prst="rect">
+            <a:avLst/>
+          </a:prstGeom>
+        </p:spPr>
+      </p:pic>
     </p:spTree>
   </p:cSld>
   <p:clrMapOvr>
@@ -2876,7 +2932,7 @@
         </p:nvSpPr>
         <p:spPr>
           <a:xfrm>
-            <a:off x="11368735" y="6437376"/>
+            <a:off x="11368735" y="6327648"/>
             <a:ext cx="365760" cy="274320"/>
           </a:xfrm>
           <a:prstGeom prst="rect">
@@ -2917,6 +2973,7 @@
   <p:clrMap bg1="lt1" tx1="dk1" bg2="lt2" tx2="dk2" accent1="accent1" accent2="accent2" accent3="accent3" accent4="accent4" accent5="accent5" accent6="accent6" hlink="hlink" folHlink="folHlink"/>
   <p:sldLayoutIdLst>
     <p:sldLayoutId id="2147483649" r:id="rId1"/>
+    <p:sldLayoutId id="2147483650" r:id="rId2"/>
   </p:sldLayoutIdLst>
   <p:hf sldNum="0" hdr="0" ftr="0" dt="0"/>
   <p:txStyles>
@@ -3175,13 +3232,6 @@
 <file path=ppt/slides/slide1.xml><?xml version="1.0" encoding="utf-8"?>
 <p:sld xmlns:a="http://schemas.openxmlformats.org/drawingml/2006/main" xmlns:r="http://schemas.openxmlformats.org/officeDocument/2006/relationships" xmlns:p="http://schemas.openxmlformats.org/presentationml/2006/main">
   <p:cSld name="Slide 1">
-    <p:bg>
-      <p:bgPr>
-        <a:solidFill>
-          <a:srgbClr val="1B0942"/>
-        </a:solidFill>
-      </p:bgPr>
-    </p:bg>
     <p:spTree>
       <p:nvGrpSpPr>
         <p:cNvPr id="1" name=""/>
@@ -3853,13 +3903,6 @@
 <file path=ppt/slides/slide10.xml><?xml version="1.0" encoding="utf-8"?>
 <p:sld xmlns:a="http://schemas.openxmlformats.org/drawingml/2006/main" xmlns:r="http://schemas.openxmlformats.org/officeDocument/2006/relationships" xmlns:p="http://schemas.openxmlformats.org/presentationml/2006/main">
   <p:cSld name="Slide 10">
-    <p:bg>
-      <p:bgPr>
-        <a:solidFill>
-          <a:srgbClr val="FFFFFF"/>
-        </a:solidFill>
-      </p:bgPr>
-    </p:bg>
     <p:spTree>
       <p:nvGrpSpPr>
         <p:cNvPr id="1" name=""/>
@@ -3876,7 +3919,29 @@
       </p:grpSpPr>
       <p:sp>
         <p:nvSpPr>
-          <p:cNvPr id="2" name="Text 0"/>
+          <p:cNvPr id="2" name="Shape 0"/>
+          <p:cNvSpPr/>
+          <p:nvPr/>
+        </p:nvSpPr>
+        <p:spPr>
+          <a:xfrm>
+            <a:off x="231343" y="194767"/>
+            <a:ext cx="11716207" cy="6473952"/>
+          </a:xfrm>
+          <a:prstGeom prst="roundRect">
+            <a:avLst>
+              <a:gd name="adj" fmla="val 3107"/>
+            </a:avLst>
+          </a:prstGeom>
+          <a:solidFill>
+            <a:srgbClr val="FFFFFF"/>
+          </a:solidFill>
+          <a:ln/>
+        </p:spPr>
+      </p:sp>
+      <p:sp>
+        <p:nvSpPr>
+          <p:cNvPr id="3" name="Text 1"/>
           <p:cNvSpPr/>
           <p:nvPr/>
         </p:nvSpPr>
@@ -3915,7 +3980,7 @@
       </p:sp>
       <p:sp>
         <p:nvSpPr>
-          <p:cNvPr id="3" name="Text 1"/>
+          <p:cNvPr id="4" name="Text 2"/>
           <p:cNvSpPr/>
           <p:nvPr/>
         </p:nvSpPr>
@@ -3954,7 +4019,7 @@
       </p:sp>
       <p:sp>
         <p:nvSpPr>
-          <p:cNvPr id="4" name="Shape 2"/>
+          <p:cNvPr id="5" name="Shape 3"/>
           <p:cNvSpPr/>
           <p:nvPr/>
         </p:nvSpPr>
@@ -3976,7 +4041,7 @@
       </p:sp>
       <p:sp>
         <p:nvSpPr>
-          <p:cNvPr id="5" name="Text 3"/>
+          <p:cNvPr id="6" name="Text 4"/>
           <p:cNvSpPr/>
           <p:nvPr/>
         </p:nvSpPr>
@@ -4015,7 +4080,7 @@
       </p:sp>
       <p:pic>
         <p:nvPicPr>
-          <p:cNvPr id="6" name="Image 0" descr="preencoded.png">    </p:cNvPr>
+          <p:cNvPr id="7" name="Image 0" descr="preencoded.png">    </p:cNvPr>
           <p:cNvPicPr>
             <a:picLocks noChangeAspect="1"/>
           </p:cNvPicPr>
@@ -4029,7 +4094,7 @@
         </p:blipFill>
         <p:spPr>
           <a:xfrm>
-            <a:off x="566928" y="6254496"/>
+            <a:off x="566928" y="6126480"/>
             <a:ext cx="1481328" cy="457200"/>
           </a:xfrm>
           <a:prstGeom prst="rect">
@@ -5512,7 +5577,7 @@
       </p:graphicFrame>
       <p:sp>
         <p:nvSpPr>
-          <p:cNvPr id="8" name="Shape 4"/>
+          <p:cNvPr id="9" name="Shape 5"/>
           <p:cNvSpPr/>
           <p:nvPr/>
         </p:nvSpPr>
@@ -5534,7 +5599,7 @@
       </p:sp>
       <p:sp>
         <p:nvSpPr>
-          <p:cNvPr id="9" name="Text 5"/>
+          <p:cNvPr id="10" name="Text 6"/>
           <p:cNvSpPr/>
           <p:nvPr/>
         </p:nvSpPr>
@@ -5573,7 +5638,7 @@
       </p:sp>
       <p:sp>
         <p:nvSpPr>
-          <p:cNvPr id="10" name="Text 6"/>
+          <p:cNvPr id="11" name="Text 7"/>
           <p:cNvSpPr/>
           <p:nvPr/>
         </p:nvSpPr>
@@ -5625,7 +5690,7 @@
         </p:nvSpPr>
         <p:spPr>
           <a:xfrm>
-            <a:off x="11368735" y="6437376"/>
+            <a:off x="11368735" y="6327648"/>
             <a:ext cx="365760" cy="274320"/>
           </a:xfrm>
           <a:prstGeom prst="rect">
@@ -5672,13 +5737,6 @@
 <file path=ppt/slides/slide11.xml><?xml version="1.0" encoding="utf-8"?>
 <p:sld xmlns:a="http://schemas.openxmlformats.org/drawingml/2006/main" xmlns:r="http://schemas.openxmlformats.org/officeDocument/2006/relationships" xmlns:p="http://schemas.openxmlformats.org/presentationml/2006/main">
   <p:cSld name="Slide 11">
-    <p:bg>
-      <p:bgPr>
-        <a:solidFill>
-          <a:srgbClr val="FFFFFF"/>
-        </a:solidFill>
-      </p:bgPr>
-    </p:bg>
     <p:spTree>
       <p:nvGrpSpPr>
         <p:cNvPr id="1" name=""/>
@@ -5695,7 +5753,29 @@
       </p:grpSpPr>
       <p:sp>
         <p:nvSpPr>
-          <p:cNvPr id="2" name="Text 0"/>
+          <p:cNvPr id="2" name="Shape 0"/>
+          <p:cNvSpPr/>
+          <p:nvPr/>
+        </p:nvSpPr>
+        <p:spPr>
+          <a:xfrm>
+            <a:off x="231343" y="194767"/>
+            <a:ext cx="11716207" cy="6473952"/>
+          </a:xfrm>
+          <a:prstGeom prst="roundRect">
+            <a:avLst>
+              <a:gd name="adj" fmla="val 3107"/>
+            </a:avLst>
+          </a:prstGeom>
+          <a:solidFill>
+            <a:srgbClr val="FFFFFF"/>
+          </a:solidFill>
+          <a:ln/>
+        </p:spPr>
+      </p:sp>
+      <p:sp>
+        <p:nvSpPr>
+          <p:cNvPr id="3" name="Text 1"/>
           <p:cNvSpPr/>
           <p:nvPr/>
         </p:nvSpPr>
@@ -5734,7 +5814,7 @@
       </p:sp>
       <p:sp>
         <p:nvSpPr>
-          <p:cNvPr id="3" name="Text 1"/>
+          <p:cNvPr id="4" name="Text 2"/>
           <p:cNvSpPr/>
           <p:nvPr/>
         </p:nvSpPr>
@@ -5773,7 +5853,7 @@
       </p:sp>
       <p:sp>
         <p:nvSpPr>
-          <p:cNvPr id="4" name="Shape 2"/>
+          <p:cNvPr id="5" name="Shape 3"/>
           <p:cNvSpPr/>
           <p:nvPr/>
         </p:nvSpPr>
@@ -5795,7 +5875,7 @@
       </p:sp>
       <p:sp>
         <p:nvSpPr>
-          <p:cNvPr id="5" name="Text 3"/>
+          <p:cNvPr id="6" name="Text 4"/>
           <p:cNvSpPr/>
           <p:nvPr/>
         </p:nvSpPr>
@@ -5834,7 +5914,7 @@
       </p:sp>
       <p:pic>
         <p:nvPicPr>
-          <p:cNvPr id="6" name="Image 0" descr="preencoded.png">    </p:cNvPr>
+          <p:cNvPr id="7" name="Image 0" descr="preencoded.png">    </p:cNvPr>
           <p:cNvPicPr>
             <a:picLocks noChangeAspect="1"/>
           </p:cNvPicPr>
@@ -5848,7 +5928,7 @@
         </p:blipFill>
         <p:spPr>
           <a:xfrm>
-            <a:off x="566928" y="6254496"/>
+            <a:off x="566928" y="6126480"/>
             <a:ext cx="1481328" cy="457200"/>
           </a:xfrm>
           <a:prstGeom prst="rect">
@@ -5858,7 +5938,7 @@
       </p:pic>
       <p:sp>
         <p:nvSpPr>
-          <p:cNvPr id="7" name="Shape 4"/>
+          <p:cNvPr id="8" name="Shape 5"/>
           <p:cNvSpPr/>
           <p:nvPr/>
         </p:nvSpPr>
@@ -5883,7 +5963,7 @@
       </p:sp>
       <p:sp>
         <p:nvSpPr>
-          <p:cNvPr id="8" name="Text 5"/>
+          <p:cNvPr id="9" name="Text 6"/>
           <p:cNvSpPr/>
           <p:nvPr/>
         </p:nvSpPr>
@@ -5922,7 +6002,7 @@
       </p:sp>
       <p:sp>
         <p:nvSpPr>
-          <p:cNvPr id="9" name="Text 6"/>
+          <p:cNvPr id="10" name="Text 7"/>
           <p:cNvSpPr/>
           <p:nvPr/>
         </p:nvSpPr>
@@ -5961,7 +6041,7 @@
       </p:sp>
       <p:sp>
         <p:nvSpPr>
-          <p:cNvPr id="10" name="Shape 7"/>
+          <p:cNvPr id="11" name="Shape 8"/>
           <p:cNvSpPr/>
           <p:nvPr/>
         </p:nvSpPr>
@@ -5984,7 +6064,7 @@
       </p:sp>
       <p:sp>
         <p:nvSpPr>
-          <p:cNvPr id="11" name="Shape 8"/>
+          <p:cNvPr id="12" name="Shape 9"/>
           <p:cNvSpPr/>
           <p:nvPr/>
         </p:nvSpPr>
@@ -6004,7 +6084,7 @@
       </p:sp>
       <p:sp>
         <p:nvSpPr>
-          <p:cNvPr id="12" name="Text 9"/>
+          <p:cNvPr id="13" name="Text 10"/>
           <p:cNvSpPr/>
           <p:nvPr/>
         </p:nvSpPr>
@@ -6043,7 +6123,7 @@
       </p:sp>
       <p:sp>
         <p:nvSpPr>
-          <p:cNvPr id="13" name="Shape 10"/>
+          <p:cNvPr id="14" name="Shape 11"/>
           <p:cNvSpPr/>
           <p:nvPr/>
         </p:nvSpPr>
@@ -6068,7 +6148,7 @@
       </p:sp>
       <p:sp>
         <p:nvSpPr>
-          <p:cNvPr id="14" name="Text 11"/>
+          <p:cNvPr id="15" name="Text 12"/>
           <p:cNvSpPr/>
           <p:nvPr/>
         </p:nvSpPr>
@@ -6107,7 +6187,7 @@
       </p:sp>
       <p:sp>
         <p:nvSpPr>
-          <p:cNvPr id="15" name="Text 12"/>
+          <p:cNvPr id="16" name="Text 13"/>
           <p:cNvSpPr/>
           <p:nvPr/>
         </p:nvSpPr>
@@ -6146,7 +6226,7 @@
       </p:sp>
       <p:sp>
         <p:nvSpPr>
-          <p:cNvPr id="16" name="Shape 13"/>
+          <p:cNvPr id="17" name="Shape 14"/>
           <p:cNvSpPr/>
           <p:nvPr/>
         </p:nvSpPr>
@@ -6168,7 +6248,7 @@
       </p:sp>
       <p:sp>
         <p:nvSpPr>
-          <p:cNvPr id="17" name="Text 14"/>
+          <p:cNvPr id="18" name="Text 15"/>
           <p:cNvSpPr/>
           <p:nvPr/>
         </p:nvSpPr>
@@ -6207,7 +6287,7 @@
       </p:sp>
       <p:sp>
         <p:nvSpPr>
-          <p:cNvPr id="18" name="Text 15"/>
+          <p:cNvPr id="19" name="Text 16"/>
           <p:cNvSpPr/>
           <p:nvPr/>
         </p:nvSpPr>
@@ -6249,7 +6329,7 @@
       </p:sp>
       <p:sp>
         <p:nvSpPr>
-          <p:cNvPr id="19" name="Shape 16"/>
+          <p:cNvPr id="20" name="Shape 17"/>
           <p:cNvSpPr/>
           <p:nvPr/>
         </p:nvSpPr>
@@ -6271,7 +6351,7 @@
       </p:sp>
       <p:sp>
         <p:nvSpPr>
-          <p:cNvPr id="20" name="Text 17"/>
+          <p:cNvPr id="21" name="Text 18"/>
           <p:cNvSpPr/>
           <p:nvPr/>
         </p:nvSpPr>
@@ -6310,7 +6390,7 @@
       </p:sp>
       <p:sp>
         <p:nvSpPr>
-          <p:cNvPr id="21" name="Text 18"/>
+          <p:cNvPr id="22" name="Text 19"/>
           <p:cNvSpPr/>
           <p:nvPr/>
         </p:nvSpPr>
@@ -6352,7 +6432,7 @@
       </p:sp>
       <p:sp>
         <p:nvSpPr>
-          <p:cNvPr id="22" name="Shape 19"/>
+          <p:cNvPr id="23" name="Shape 20"/>
           <p:cNvSpPr/>
           <p:nvPr/>
         </p:nvSpPr>
@@ -6379,7 +6459,7 @@
       </p:sp>
       <p:sp>
         <p:nvSpPr>
-          <p:cNvPr id="23" name="Text 20"/>
+          <p:cNvPr id="24" name="Text 21"/>
           <p:cNvSpPr/>
           <p:nvPr/>
         </p:nvSpPr>
@@ -6431,7 +6511,7 @@
         </p:nvSpPr>
         <p:spPr>
           <a:xfrm>
-            <a:off x="11368735" y="6437376"/>
+            <a:off x="11368735" y="6327648"/>
             <a:ext cx="365760" cy="274320"/>
           </a:xfrm>
           <a:prstGeom prst="rect">
@@ -6478,13 +6558,6 @@
 <file path=ppt/slides/slide12.xml><?xml version="1.0" encoding="utf-8"?>
 <p:sld xmlns:a="http://schemas.openxmlformats.org/drawingml/2006/main" xmlns:r="http://schemas.openxmlformats.org/officeDocument/2006/relationships" xmlns:p="http://schemas.openxmlformats.org/presentationml/2006/main">
   <p:cSld name="Slide 12">
-    <p:bg>
-      <p:bgPr>
-        <a:solidFill>
-          <a:srgbClr val="FFFFFF"/>
-        </a:solidFill>
-      </p:bgPr>
-    </p:bg>
     <p:spTree>
       <p:nvGrpSpPr>
         <p:cNvPr id="1" name=""/>
@@ -6501,7 +6574,29 @@
       </p:grpSpPr>
       <p:sp>
         <p:nvSpPr>
-          <p:cNvPr id="2" name="Text 0"/>
+          <p:cNvPr id="2" name="Shape 0"/>
+          <p:cNvSpPr/>
+          <p:nvPr/>
+        </p:nvSpPr>
+        <p:spPr>
+          <a:xfrm>
+            <a:off x="231343" y="194767"/>
+            <a:ext cx="11716207" cy="6473952"/>
+          </a:xfrm>
+          <a:prstGeom prst="roundRect">
+            <a:avLst>
+              <a:gd name="adj" fmla="val 3107"/>
+            </a:avLst>
+          </a:prstGeom>
+          <a:solidFill>
+            <a:srgbClr val="FFFFFF"/>
+          </a:solidFill>
+          <a:ln/>
+        </p:spPr>
+      </p:sp>
+      <p:sp>
+        <p:nvSpPr>
+          <p:cNvPr id="3" name="Text 1"/>
           <p:cNvSpPr/>
           <p:nvPr/>
         </p:nvSpPr>
@@ -6540,7 +6635,7 @@
       </p:sp>
       <p:sp>
         <p:nvSpPr>
-          <p:cNvPr id="3" name="Text 1"/>
+          <p:cNvPr id="4" name="Text 2"/>
           <p:cNvSpPr/>
           <p:nvPr/>
         </p:nvSpPr>
@@ -6579,7 +6674,7 @@
       </p:sp>
       <p:sp>
         <p:nvSpPr>
-          <p:cNvPr id="4" name="Shape 2"/>
+          <p:cNvPr id="5" name="Shape 3"/>
           <p:cNvSpPr/>
           <p:nvPr/>
         </p:nvSpPr>
@@ -6601,7 +6696,7 @@
       </p:sp>
       <p:sp>
         <p:nvSpPr>
-          <p:cNvPr id="5" name="Text 3"/>
+          <p:cNvPr id="6" name="Text 4"/>
           <p:cNvSpPr/>
           <p:nvPr/>
         </p:nvSpPr>
@@ -6640,7 +6735,7 @@
       </p:sp>
       <p:pic>
         <p:nvPicPr>
-          <p:cNvPr id="6" name="Image 0" descr="preencoded.png">    </p:cNvPr>
+          <p:cNvPr id="7" name="Image 0" descr="preencoded.png">    </p:cNvPr>
           <p:cNvPicPr>
             <a:picLocks noChangeAspect="1"/>
           </p:cNvPicPr>
@@ -6654,7 +6749,7 @@
         </p:blipFill>
         <p:spPr>
           <a:xfrm>
-            <a:off x="566928" y="6254496"/>
+            <a:off x="566928" y="6126480"/>
             <a:ext cx="1481328" cy="457200"/>
           </a:xfrm>
           <a:prstGeom prst="rect">
@@ -6664,7 +6759,7 @@
       </p:pic>
       <p:sp>
         <p:nvSpPr>
-          <p:cNvPr id="7" name="Shape 4"/>
+          <p:cNvPr id="8" name="Shape 5"/>
           <p:cNvSpPr/>
           <p:nvPr/>
         </p:nvSpPr>
@@ -6686,7 +6781,7 @@
       </p:sp>
       <p:sp>
         <p:nvSpPr>
-          <p:cNvPr id="8" name="Shape 5"/>
+          <p:cNvPr id="9" name="Shape 6"/>
           <p:cNvSpPr/>
           <p:nvPr/>
         </p:nvSpPr>
@@ -6706,7 +6801,7 @@
       </p:sp>
       <p:sp>
         <p:nvSpPr>
-          <p:cNvPr id="9" name="Text 6"/>
+          <p:cNvPr id="10" name="Text 7"/>
           <p:cNvSpPr/>
           <p:nvPr/>
         </p:nvSpPr>
@@ -6745,7 +6840,7 @@
       </p:sp>
       <p:sp>
         <p:nvSpPr>
-          <p:cNvPr id="10" name="Text 7"/>
+          <p:cNvPr id="11" name="Text 8"/>
           <p:cNvSpPr/>
           <p:nvPr/>
         </p:nvSpPr>
@@ -6784,7 +6879,7 @@
       </p:sp>
       <p:sp>
         <p:nvSpPr>
-          <p:cNvPr id="11" name="Text 8"/>
+          <p:cNvPr id="12" name="Text 9"/>
           <p:cNvSpPr/>
           <p:nvPr/>
         </p:nvSpPr>
@@ -6826,7 +6921,7 @@
       </p:sp>
       <p:sp>
         <p:nvSpPr>
-          <p:cNvPr id="12" name="Shape 9"/>
+          <p:cNvPr id="13" name="Shape 10"/>
           <p:cNvSpPr/>
           <p:nvPr/>
         </p:nvSpPr>
@@ -6848,7 +6943,7 @@
       </p:sp>
       <p:sp>
         <p:nvSpPr>
-          <p:cNvPr id="13" name="Shape 10"/>
+          <p:cNvPr id="14" name="Shape 11"/>
           <p:cNvSpPr/>
           <p:nvPr/>
         </p:nvSpPr>
@@ -6868,7 +6963,7 @@
       </p:sp>
       <p:sp>
         <p:nvSpPr>
-          <p:cNvPr id="14" name="Text 11"/>
+          <p:cNvPr id="15" name="Text 12"/>
           <p:cNvSpPr/>
           <p:nvPr/>
         </p:nvSpPr>
@@ -6907,7 +7002,7 @@
       </p:sp>
       <p:sp>
         <p:nvSpPr>
-          <p:cNvPr id="15" name="Text 12"/>
+          <p:cNvPr id="16" name="Text 13"/>
           <p:cNvSpPr/>
           <p:nvPr/>
         </p:nvSpPr>
@@ -6946,7 +7041,7 @@
       </p:sp>
       <p:sp>
         <p:nvSpPr>
-          <p:cNvPr id="16" name="Text 13"/>
+          <p:cNvPr id="17" name="Text 14"/>
           <p:cNvSpPr/>
           <p:nvPr/>
         </p:nvSpPr>
@@ -6988,7 +7083,7 @@
       </p:sp>
       <p:sp>
         <p:nvSpPr>
-          <p:cNvPr id="17" name="Shape 14"/>
+          <p:cNvPr id="18" name="Shape 15"/>
           <p:cNvSpPr/>
           <p:nvPr/>
         </p:nvSpPr>
@@ -7010,7 +7105,7 @@
       </p:sp>
       <p:sp>
         <p:nvSpPr>
-          <p:cNvPr id="18" name="Shape 15"/>
+          <p:cNvPr id="19" name="Shape 16"/>
           <p:cNvSpPr/>
           <p:nvPr/>
         </p:nvSpPr>
@@ -7030,7 +7125,7 @@
       </p:sp>
       <p:sp>
         <p:nvSpPr>
-          <p:cNvPr id="19" name="Text 16"/>
+          <p:cNvPr id="20" name="Text 17"/>
           <p:cNvSpPr/>
           <p:nvPr/>
         </p:nvSpPr>
@@ -7069,7 +7164,7 @@
       </p:sp>
       <p:sp>
         <p:nvSpPr>
-          <p:cNvPr id="20" name="Text 17"/>
+          <p:cNvPr id="21" name="Text 18"/>
           <p:cNvSpPr/>
           <p:nvPr/>
         </p:nvSpPr>
@@ -7108,7 +7203,7 @@
       </p:sp>
       <p:sp>
         <p:nvSpPr>
-          <p:cNvPr id="21" name="Text 18"/>
+          <p:cNvPr id="22" name="Text 19"/>
           <p:cNvSpPr/>
           <p:nvPr/>
         </p:nvSpPr>
@@ -7150,7 +7245,7 @@
       </p:sp>
       <p:sp>
         <p:nvSpPr>
-          <p:cNvPr id="22" name="Shape 19"/>
+          <p:cNvPr id="23" name="Shape 20"/>
           <p:cNvSpPr/>
           <p:nvPr/>
         </p:nvSpPr>
@@ -7170,7 +7265,7 @@
       </p:sp>
       <p:sp>
         <p:nvSpPr>
-          <p:cNvPr id="23" name="Shape 20"/>
+          <p:cNvPr id="24" name="Shape 21"/>
           <p:cNvSpPr/>
           <p:nvPr/>
         </p:nvSpPr>
@@ -7190,7 +7285,7 @@
       </p:sp>
       <p:sp>
         <p:nvSpPr>
-          <p:cNvPr id="24" name="Shape 21"/>
+          <p:cNvPr id="25" name="Shape 22"/>
           <p:cNvSpPr/>
           <p:nvPr/>
         </p:nvSpPr>
@@ -7210,7 +7305,7 @@
       </p:sp>
       <p:sp>
         <p:nvSpPr>
-          <p:cNvPr id="25" name="Shape 22"/>
+          <p:cNvPr id="26" name="Shape 23"/>
           <p:cNvSpPr/>
           <p:nvPr/>
         </p:nvSpPr>
@@ -7230,7 +7325,7 @@
       </p:sp>
       <p:sp>
         <p:nvSpPr>
-          <p:cNvPr id="26" name="Shape 23"/>
+          <p:cNvPr id="27" name="Shape 24"/>
           <p:cNvSpPr/>
           <p:nvPr/>
         </p:nvSpPr>
@@ -7250,7 +7345,7 @@
       </p:sp>
       <p:sp>
         <p:nvSpPr>
-          <p:cNvPr id="27" name="Shape 24"/>
+          <p:cNvPr id="28" name="Shape 25"/>
           <p:cNvSpPr/>
           <p:nvPr/>
         </p:nvSpPr>
@@ -7270,7 +7365,7 @@
       </p:sp>
       <p:sp>
         <p:nvSpPr>
-          <p:cNvPr id="28" name="Shape 25"/>
+          <p:cNvPr id="29" name="Shape 26"/>
           <p:cNvSpPr/>
           <p:nvPr/>
         </p:nvSpPr>
@@ -7290,7 +7385,7 @@
       </p:sp>
       <p:sp>
         <p:nvSpPr>
-          <p:cNvPr id="29" name="Shape 26"/>
+          <p:cNvPr id="30" name="Shape 27"/>
           <p:cNvSpPr/>
           <p:nvPr/>
         </p:nvSpPr>
@@ -7310,7 +7405,7 @@
       </p:sp>
       <p:sp>
         <p:nvSpPr>
-          <p:cNvPr id="30" name="Shape 27"/>
+          <p:cNvPr id="31" name="Shape 28"/>
           <p:cNvSpPr/>
           <p:nvPr/>
         </p:nvSpPr>
@@ -7333,7 +7428,7 @@
       </p:sp>
       <p:sp>
         <p:nvSpPr>
-          <p:cNvPr id="31" name="Shape 28"/>
+          <p:cNvPr id="32" name="Shape 29"/>
           <p:cNvSpPr/>
           <p:nvPr/>
         </p:nvSpPr>
@@ -7353,7 +7448,7 @@
       </p:sp>
       <p:sp>
         <p:nvSpPr>
-          <p:cNvPr id="32" name="Shape 29"/>
+          <p:cNvPr id="33" name="Shape 30"/>
           <p:cNvSpPr/>
           <p:nvPr/>
         </p:nvSpPr>
@@ -7373,7 +7468,7 @@
       </p:sp>
       <p:sp>
         <p:nvSpPr>
-          <p:cNvPr id="33" name="Shape 30"/>
+          <p:cNvPr id="34" name="Shape 31"/>
           <p:cNvSpPr/>
           <p:nvPr/>
         </p:nvSpPr>
@@ -7393,7 +7488,7 @@
       </p:sp>
       <p:sp>
         <p:nvSpPr>
-          <p:cNvPr id="34" name="Shape 31"/>
+          <p:cNvPr id="35" name="Shape 32"/>
           <p:cNvSpPr/>
           <p:nvPr/>
         </p:nvSpPr>
@@ -7413,7 +7508,7 @@
       </p:sp>
       <p:sp>
         <p:nvSpPr>
-          <p:cNvPr id="35" name="Shape 32"/>
+          <p:cNvPr id="36" name="Shape 33"/>
           <p:cNvSpPr/>
           <p:nvPr/>
         </p:nvSpPr>
@@ -7433,7 +7528,7 @@
       </p:sp>
       <p:sp>
         <p:nvSpPr>
-          <p:cNvPr id="36" name="Shape 33"/>
+          <p:cNvPr id="37" name="Shape 34"/>
           <p:cNvSpPr/>
           <p:nvPr/>
         </p:nvSpPr>
@@ -7453,7 +7548,7 @@
       </p:sp>
       <p:sp>
         <p:nvSpPr>
-          <p:cNvPr id="37" name="Shape 34"/>
+          <p:cNvPr id="38" name="Shape 35"/>
           <p:cNvSpPr/>
           <p:nvPr/>
         </p:nvSpPr>
@@ -7473,7 +7568,7 @@
       </p:sp>
       <p:sp>
         <p:nvSpPr>
-          <p:cNvPr id="38" name="Shape 35"/>
+          <p:cNvPr id="39" name="Shape 36"/>
           <p:cNvSpPr/>
           <p:nvPr/>
         </p:nvSpPr>
@@ -7493,7 +7588,7 @@
       </p:sp>
       <p:sp>
         <p:nvSpPr>
-          <p:cNvPr id="39" name="Shape 36"/>
+          <p:cNvPr id="40" name="Shape 37"/>
           <p:cNvSpPr/>
           <p:nvPr/>
         </p:nvSpPr>
@@ -7516,7 +7611,7 @@
       </p:sp>
       <p:sp>
         <p:nvSpPr>
-          <p:cNvPr id="40" name="Shape 37"/>
+          <p:cNvPr id="41" name="Shape 38"/>
           <p:cNvSpPr/>
           <p:nvPr/>
         </p:nvSpPr>
@@ -7536,7 +7631,7 @@
       </p:sp>
       <p:sp>
         <p:nvSpPr>
-          <p:cNvPr id="41" name="Shape 38"/>
+          <p:cNvPr id="42" name="Shape 39"/>
           <p:cNvSpPr/>
           <p:nvPr/>
         </p:nvSpPr>
@@ -7556,7 +7651,7 @@
       </p:sp>
       <p:sp>
         <p:nvSpPr>
-          <p:cNvPr id="42" name="Shape 39"/>
+          <p:cNvPr id="43" name="Shape 40"/>
           <p:cNvSpPr/>
           <p:nvPr/>
         </p:nvSpPr>
@@ -7576,7 +7671,7 @@
       </p:sp>
       <p:sp>
         <p:nvSpPr>
-          <p:cNvPr id="43" name="Shape 40"/>
+          <p:cNvPr id="44" name="Shape 41"/>
           <p:cNvSpPr/>
           <p:nvPr/>
         </p:nvSpPr>
@@ -7596,7 +7691,7 @@
       </p:sp>
       <p:sp>
         <p:nvSpPr>
-          <p:cNvPr id="44" name="Shape 41"/>
+          <p:cNvPr id="45" name="Shape 42"/>
           <p:cNvSpPr/>
           <p:nvPr/>
         </p:nvSpPr>
@@ -7616,7 +7711,7 @@
       </p:sp>
       <p:sp>
         <p:nvSpPr>
-          <p:cNvPr id="45" name="Shape 42"/>
+          <p:cNvPr id="46" name="Shape 43"/>
           <p:cNvSpPr/>
           <p:nvPr/>
         </p:nvSpPr>
@@ -7636,7 +7731,7 @@
       </p:sp>
       <p:sp>
         <p:nvSpPr>
-          <p:cNvPr id="46" name="Shape 43"/>
+          <p:cNvPr id="47" name="Shape 44"/>
           <p:cNvSpPr/>
           <p:nvPr/>
         </p:nvSpPr>
@@ -7656,7 +7751,7 @@
       </p:sp>
       <p:sp>
         <p:nvSpPr>
-          <p:cNvPr id="47" name="Shape 44"/>
+          <p:cNvPr id="48" name="Shape 45"/>
           <p:cNvSpPr/>
           <p:nvPr/>
         </p:nvSpPr>
@@ -7676,7 +7771,7 @@
       </p:sp>
       <p:sp>
         <p:nvSpPr>
-          <p:cNvPr id="48" name="Shape 45"/>
+          <p:cNvPr id="49" name="Shape 46"/>
           <p:cNvSpPr/>
           <p:nvPr/>
         </p:nvSpPr>
@@ -7699,7 +7794,7 @@
       </p:sp>
       <p:sp>
         <p:nvSpPr>
-          <p:cNvPr id="49" name="Text 46"/>
+          <p:cNvPr id="50" name="Text 47"/>
           <p:cNvSpPr/>
           <p:nvPr/>
         </p:nvSpPr>
@@ -7738,7 +7833,7 @@
       </p:sp>
       <p:sp>
         <p:nvSpPr>
-          <p:cNvPr id="50" name="Shape 47"/>
+          <p:cNvPr id="51" name="Shape 48"/>
           <p:cNvSpPr/>
           <p:nvPr/>
         </p:nvSpPr>
@@ -7760,7 +7855,7 @@
       </p:sp>
       <p:sp>
         <p:nvSpPr>
-          <p:cNvPr id="51" name="Text 48"/>
+          <p:cNvPr id="52" name="Text 49"/>
           <p:cNvSpPr/>
           <p:nvPr/>
         </p:nvSpPr>
@@ -7799,7 +7894,7 @@
       </p:sp>
       <p:sp>
         <p:nvSpPr>
-          <p:cNvPr id="52" name="Text 49"/>
+          <p:cNvPr id="53" name="Text 50"/>
           <p:cNvSpPr/>
           <p:nvPr/>
         </p:nvSpPr>
@@ -7841,7 +7936,7 @@
       </p:sp>
       <p:sp>
         <p:nvSpPr>
-          <p:cNvPr id="53" name="Shape 50"/>
+          <p:cNvPr id="54" name="Shape 51"/>
           <p:cNvSpPr/>
           <p:nvPr/>
         </p:nvSpPr>
@@ -7868,7 +7963,7 @@
       </p:sp>
       <p:sp>
         <p:nvSpPr>
-          <p:cNvPr id="54" name="Text 51"/>
+          <p:cNvPr id="55" name="Text 52"/>
           <p:cNvSpPr/>
           <p:nvPr/>
         </p:nvSpPr>
@@ -7920,7 +8015,7 @@
         </p:nvSpPr>
         <p:spPr>
           <a:xfrm>
-            <a:off x="11368735" y="6437376"/>
+            <a:off x="11368735" y="6327648"/>
             <a:ext cx="365760" cy="274320"/>
           </a:xfrm>
           <a:prstGeom prst="rect">
@@ -7967,13 +8062,6 @@
 <file path=ppt/slides/slide13.xml><?xml version="1.0" encoding="utf-8"?>
 <p:sld xmlns:a="http://schemas.openxmlformats.org/drawingml/2006/main" xmlns:r="http://schemas.openxmlformats.org/officeDocument/2006/relationships" xmlns:p="http://schemas.openxmlformats.org/presentationml/2006/main">
   <p:cSld name="Slide 13">
-    <p:bg>
-      <p:bgPr>
-        <a:solidFill>
-          <a:srgbClr val="FFFFFF"/>
-        </a:solidFill>
-      </p:bgPr>
-    </p:bg>
     <p:spTree>
       <p:nvGrpSpPr>
         <p:cNvPr id="1" name=""/>
@@ -7990,7 +8078,29 @@
       </p:grpSpPr>
       <p:sp>
         <p:nvSpPr>
-          <p:cNvPr id="2" name="Text 0"/>
+          <p:cNvPr id="2" name="Shape 0"/>
+          <p:cNvSpPr/>
+          <p:nvPr/>
+        </p:nvSpPr>
+        <p:spPr>
+          <a:xfrm>
+            <a:off x="231343" y="194767"/>
+            <a:ext cx="11716207" cy="6473952"/>
+          </a:xfrm>
+          <a:prstGeom prst="roundRect">
+            <a:avLst>
+              <a:gd name="adj" fmla="val 3107"/>
+            </a:avLst>
+          </a:prstGeom>
+          <a:solidFill>
+            <a:srgbClr val="FFFFFF"/>
+          </a:solidFill>
+          <a:ln/>
+        </p:spPr>
+      </p:sp>
+      <p:sp>
+        <p:nvSpPr>
+          <p:cNvPr id="3" name="Text 1"/>
           <p:cNvSpPr/>
           <p:nvPr/>
         </p:nvSpPr>
@@ -8029,7 +8139,7 @@
       </p:sp>
       <p:sp>
         <p:nvSpPr>
-          <p:cNvPr id="3" name="Text 1"/>
+          <p:cNvPr id="4" name="Text 2"/>
           <p:cNvSpPr/>
           <p:nvPr/>
         </p:nvSpPr>
@@ -8068,7 +8178,7 @@
       </p:sp>
       <p:sp>
         <p:nvSpPr>
-          <p:cNvPr id="4" name="Shape 2"/>
+          <p:cNvPr id="5" name="Shape 3"/>
           <p:cNvSpPr/>
           <p:nvPr/>
         </p:nvSpPr>
@@ -8090,7 +8200,7 @@
       </p:sp>
       <p:sp>
         <p:nvSpPr>
-          <p:cNvPr id="5" name="Text 3"/>
+          <p:cNvPr id="6" name="Text 4"/>
           <p:cNvSpPr/>
           <p:nvPr/>
         </p:nvSpPr>
@@ -8129,7 +8239,7 @@
       </p:sp>
       <p:pic>
         <p:nvPicPr>
-          <p:cNvPr id="6" name="Image 0" descr="preencoded.png">    </p:cNvPr>
+          <p:cNvPr id="7" name="Image 0" descr="preencoded.png">    </p:cNvPr>
           <p:cNvPicPr>
             <a:picLocks noChangeAspect="1"/>
           </p:cNvPicPr>
@@ -8143,7 +8253,7 @@
         </p:blipFill>
         <p:spPr>
           <a:xfrm>
-            <a:off x="566928" y="6254496"/>
+            <a:off x="566928" y="6126480"/>
             <a:ext cx="1481328" cy="457200"/>
           </a:xfrm>
           <a:prstGeom prst="rect">
@@ -8153,7 +8263,7 @@
       </p:pic>
       <p:sp>
         <p:nvSpPr>
-          <p:cNvPr id="7" name="Shape 4"/>
+          <p:cNvPr id="8" name="Shape 5"/>
           <p:cNvSpPr/>
           <p:nvPr/>
         </p:nvSpPr>
@@ -8180,7 +8290,7 @@
       </p:sp>
       <p:sp>
         <p:nvSpPr>
-          <p:cNvPr id="8" name="Text 5"/>
+          <p:cNvPr id="9" name="Text 6"/>
           <p:cNvSpPr/>
           <p:nvPr/>
         </p:nvSpPr>
@@ -8219,7 +8329,7 @@
       </p:sp>
       <p:sp>
         <p:nvSpPr>
-          <p:cNvPr id="9" name="Text 6"/>
+          <p:cNvPr id="10" name="Text 7"/>
           <p:cNvSpPr/>
           <p:nvPr/>
         </p:nvSpPr>
@@ -8258,7 +8368,7 @@
       </p:sp>
       <p:sp>
         <p:nvSpPr>
-          <p:cNvPr id="10" name="Shape 7"/>
+          <p:cNvPr id="11" name="Shape 8"/>
           <p:cNvSpPr/>
           <p:nvPr/>
         </p:nvSpPr>
@@ -8280,7 +8390,7 @@
       </p:sp>
       <p:sp>
         <p:nvSpPr>
-          <p:cNvPr id="11" name="Text 8"/>
+          <p:cNvPr id="12" name="Text 9"/>
           <p:cNvSpPr/>
           <p:nvPr/>
         </p:nvSpPr>
@@ -8319,7 +8429,7 @@
       </p:sp>
       <p:sp>
         <p:nvSpPr>
-          <p:cNvPr id="12" name="Text 9"/>
+          <p:cNvPr id="13" name="Text 10"/>
           <p:cNvSpPr/>
           <p:nvPr/>
         </p:nvSpPr>
@@ -8358,7 +8468,7 @@
       </p:sp>
       <p:sp>
         <p:nvSpPr>
-          <p:cNvPr id="13" name="Shape 10"/>
+          <p:cNvPr id="14" name="Shape 11"/>
           <p:cNvSpPr/>
           <p:nvPr/>
         </p:nvSpPr>
@@ -8380,7 +8490,7 @@
       </p:sp>
       <p:sp>
         <p:nvSpPr>
-          <p:cNvPr id="14" name="Text 11"/>
+          <p:cNvPr id="15" name="Text 12"/>
           <p:cNvSpPr/>
           <p:nvPr/>
         </p:nvSpPr>
@@ -8419,7 +8529,7 @@
       </p:sp>
       <p:sp>
         <p:nvSpPr>
-          <p:cNvPr id="15" name="Text 12"/>
+          <p:cNvPr id="16" name="Text 13"/>
           <p:cNvSpPr/>
           <p:nvPr/>
         </p:nvSpPr>
@@ -8458,7 +8568,7 @@
       </p:sp>
       <p:sp>
         <p:nvSpPr>
-          <p:cNvPr id="16" name="Shape 13"/>
+          <p:cNvPr id="17" name="Shape 14"/>
           <p:cNvSpPr/>
           <p:nvPr/>
         </p:nvSpPr>
@@ -8478,7 +8588,7 @@
       </p:sp>
       <p:sp>
         <p:nvSpPr>
-          <p:cNvPr id="17" name="Shape 14"/>
+          <p:cNvPr id="18" name="Shape 15"/>
           <p:cNvSpPr/>
           <p:nvPr/>
         </p:nvSpPr>
@@ -8498,7 +8608,7 @@
       </p:sp>
       <p:sp>
         <p:nvSpPr>
-          <p:cNvPr id="18" name="Shape 15"/>
+          <p:cNvPr id="19" name="Shape 16"/>
           <p:cNvSpPr/>
           <p:nvPr/>
         </p:nvSpPr>
@@ -8518,7 +8628,7 @@
       </p:sp>
       <p:sp>
         <p:nvSpPr>
-          <p:cNvPr id="19" name="Shape 16"/>
+          <p:cNvPr id="20" name="Shape 17"/>
           <p:cNvSpPr/>
           <p:nvPr/>
         </p:nvSpPr>
@@ -8538,7 +8648,7 @@
       </p:sp>
       <p:sp>
         <p:nvSpPr>
-          <p:cNvPr id="20" name="Shape 17"/>
+          <p:cNvPr id="21" name="Shape 18"/>
           <p:cNvSpPr/>
           <p:nvPr/>
         </p:nvSpPr>
@@ -8558,7 +8668,7 @@
       </p:sp>
       <p:sp>
         <p:nvSpPr>
-          <p:cNvPr id="21" name="Shape 18"/>
+          <p:cNvPr id="22" name="Shape 19"/>
           <p:cNvSpPr/>
           <p:nvPr/>
         </p:nvSpPr>
@@ -8578,7 +8688,7 @@
       </p:sp>
       <p:sp>
         <p:nvSpPr>
-          <p:cNvPr id="22" name="Shape 19"/>
+          <p:cNvPr id="23" name="Shape 20"/>
           <p:cNvSpPr/>
           <p:nvPr/>
         </p:nvSpPr>
@@ -8598,7 +8708,7 @@
       </p:sp>
       <p:sp>
         <p:nvSpPr>
-          <p:cNvPr id="23" name="Shape 20"/>
+          <p:cNvPr id="24" name="Shape 21"/>
           <p:cNvSpPr/>
           <p:nvPr/>
         </p:nvSpPr>
@@ -8618,7 +8728,7 @@
       </p:sp>
       <p:sp>
         <p:nvSpPr>
-          <p:cNvPr id="24" name="Shape 21"/>
+          <p:cNvPr id="25" name="Shape 22"/>
           <p:cNvSpPr/>
           <p:nvPr/>
         </p:nvSpPr>
@@ -8638,7 +8748,7 @@
       </p:sp>
       <p:sp>
         <p:nvSpPr>
-          <p:cNvPr id="25" name="Shape 22"/>
+          <p:cNvPr id="26" name="Shape 23"/>
           <p:cNvSpPr/>
           <p:nvPr/>
         </p:nvSpPr>
@@ -8658,7 +8768,7 @@
       </p:sp>
       <p:sp>
         <p:nvSpPr>
-          <p:cNvPr id="26" name="Shape 23"/>
+          <p:cNvPr id="27" name="Shape 24"/>
           <p:cNvSpPr/>
           <p:nvPr/>
         </p:nvSpPr>
@@ -8678,7 +8788,7 @@
       </p:sp>
       <p:sp>
         <p:nvSpPr>
-          <p:cNvPr id="27" name="Shape 24"/>
+          <p:cNvPr id="28" name="Shape 25"/>
           <p:cNvSpPr/>
           <p:nvPr/>
         </p:nvSpPr>
@@ -8698,7 +8808,7 @@
       </p:sp>
       <p:sp>
         <p:nvSpPr>
-          <p:cNvPr id="28" name="Shape 25"/>
+          <p:cNvPr id="29" name="Shape 26"/>
           <p:cNvSpPr/>
           <p:nvPr/>
         </p:nvSpPr>
@@ -8718,7 +8828,7 @@
       </p:sp>
       <p:sp>
         <p:nvSpPr>
-          <p:cNvPr id="29" name="Shape 26"/>
+          <p:cNvPr id="30" name="Shape 27"/>
           <p:cNvSpPr/>
           <p:nvPr/>
         </p:nvSpPr>
@@ -8738,7 +8848,7 @@
       </p:sp>
       <p:sp>
         <p:nvSpPr>
-          <p:cNvPr id="30" name="Shape 27"/>
+          <p:cNvPr id="31" name="Shape 28"/>
           <p:cNvSpPr/>
           <p:nvPr/>
         </p:nvSpPr>
@@ -8758,7 +8868,7 @@
       </p:sp>
       <p:sp>
         <p:nvSpPr>
-          <p:cNvPr id="31" name="Shape 28"/>
+          <p:cNvPr id="32" name="Shape 29"/>
           <p:cNvSpPr/>
           <p:nvPr/>
         </p:nvSpPr>
@@ -8778,7 +8888,7 @@
       </p:sp>
       <p:sp>
         <p:nvSpPr>
-          <p:cNvPr id="32" name="Shape 29"/>
+          <p:cNvPr id="33" name="Shape 30"/>
           <p:cNvSpPr/>
           <p:nvPr/>
         </p:nvSpPr>
@@ -8798,7 +8908,7 @@
       </p:sp>
       <p:sp>
         <p:nvSpPr>
-          <p:cNvPr id="33" name="Shape 30"/>
+          <p:cNvPr id="34" name="Shape 31"/>
           <p:cNvSpPr/>
           <p:nvPr/>
         </p:nvSpPr>
@@ -8818,7 +8928,7 @@
       </p:sp>
       <p:sp>
         <p:nvSpPr>
-          <p:cNvPr id="34" name="Shape 31"/>
+          <p:cNvPr id="35" name="Shape 32"/>
           <p:cNvSpPr/>
           <p:nvPr/>
         </p:nvSpPr>
@@ -8838,7 +8948,7 @@
       </p:sp>
       <p:sp>
         <p:nvSpPr>
-          <p:cNvPr id="35" name="Shape 32"/>
+          <p:cNvPr id="36" name="Shape 33"/>
           <p:cNvSpPr/>
           <p:nvPr/>
         </p:nvSpPr>
@@ -8858,7 +8968,7 @@
       </p:sp>
       <p:sp>
         <p:nvSpPr>
-          <p:cNvPr id="36" name="Shape 33"/>
+          <p:cNvPr id="37" name="Shape 34"/>
           <p:cNvSpPr/>
           <p:nvPr/>
         </p:nvSpPr>
@@ -8878,7 +8988,7 @@
       </p:sp>
       <p:sp>
         <p:nvSpPr>
-          <p:cNvPr id="37" name="Shape 34"/>
+          <p:cNvPr id="38" name="Shape 35"/>
           <p:cNvSpPr/>
           <p:nvPr/>
         </p:nvSpPr>
@@ -8898,7 +9008,7 @@
       </p:sp>
       <p:sp>
         <p:nvSpPr>
-          <p:cNvPr id="38" name="Shape 35"/>
+          <p:cNvPr id="39" name="Shape 36"/>
           <p:cNvSpPr/>
           <p:nvPr/>
         </p:nvSpPr>
@@ -8918,7 +9028,7 @@
       </p:sp>
       <p:sp>
         <p:nvSpPr>
-          <p:cNvPr id="39" name="Shape 36"/>
+          <p:cNvPr id="40" name="Shape 37"/>
           <p:cNvSpPr/>
           <p:nvPr/>
         </p:nvSpPr>
@@ -8938,7 +9048,7 @@
       </p:sp>
       <p:sp>
         <p:nvSpPr>
-          <p:cNvPr id="40" name="Shape 37"/>
+          <p:cNvPr id="41" name="Shape 38"/>
           <p:cNvSpPr/>
           <p:nvPr/>
         </p:nvSpPr>
@@ -8958,7 +9068,7 @@
       </p:sp>
       <p:sp>
         <p:nvSpPr>
-          <p:cNvPr id="41" name="Shape 38"/>
+          <p:cNvPr id="42" name="Shape 39"/>
           <p:cNvSpPr/>
           <p:nvPr/>
         </p:nvSpPr>
@@ -8978,7 +9088,7 @@
       </p:sp>
       <p:sp>
         <p:nvSpPr>
-          <p:cNvPr id="42" name="Shape 39"/>
+          <p:cNvPr id="43" name="Shape 40"/>
           <p:cNvSpPr/>
           <p:nvPr/>
         </p:nvSpPr>
@@ -8998,7 +9108,7 @@
       </p:sp>
       <p:sp>
         <p:nvSpPr>
-          <p:cNvPr id="43" name="Shape 40"/>
+          <p:cNvPr id="44" name="Shape 41"/>
           <p:cNvSpPr/>
           <p:nvPr/>
         </p:nvSpPr>
@@ -9018,7 +9128,7 @@
       </p:sp>
       <p:sp>
         <p:nvSpPr>
-          <p:cNvPr id="44" name="Shape 41"/>
+          <p:cNvPr id="45" name="Shape 42"/>
           <p:cNvSpPr/>
           <p:nvPr/>
         </p:nvSpPr>
@@ -9038,7 +9148,7 @@
       </p:sp>
       <p:sp>
         <p:nvSpPr>
-          <p:cNvPr id="45" name="Shape 42"/>
+          <p:cNvPr id="46" name="Shape 43"/>
           <p:cNvSpPr/>
           <p:nvPr/>
         </p:nvSpPr>
@@ -9058,7 +9168,7 @@
       </p:sp>
       <p:sp>
         <p:nvSpPr>
-          <p:cNvPr id="46" name="Shape 43"/>
+          <p:cNvPr id="47" name="Shape 44"/>
           <p:cNvSpPr/>
           <p:nvPr/>
         </p:nvSpPr>
@@ -9078,7 +9188,7 @@
       </p:sp>
       <p:sp>
         <p:nvSpPr>
-          <p:cNvPr id="47" name="Shape 44"/>
+          <p:cNvPr id="48" name="Shape 45"/>
           <p:cNvSpPr/>
           <p:nvPr/>
         </p:nvSpPr>
@@ -9098,7 +9208,7 @@
       </p:sp>
       <p:sp>
         <p:nvSpPr>
-          <p:cNvPr id="48" name="Shape 45"/>
+          <p:cNvPr id="49" name="Shape 46"/>
           <p:cNvSpPr/>
           <p:nvPr/>
         </p:nvSpPr>
@@ -9118,7 +9228,7 @@
       </p:sp>
       <p:sp>
         <p:nvSpPr>
-          <p:cNvPr id="49" name="Shape 46"/>
+          <p:cNvPr id="50" name="Shape 47"/>
           <p:cNvSpPr/>
           <p:nvPr/>
         </p:nvSpPr>
@@ -9138,7 +9248,7 @@
       </p:sp>
       <p:sp>
         <p:nvSpPr>
-          <p:cNvPr id="50" name="Shape 47"/>
+          <p:cNvPr id="51" name="Shape 48"/>
           <p:cNvSpPr/>
           <p:nvPr/>
         </p:nvSpPr>
@@ -9158,7 +9268,7 @@
       </p:sp>
       <p:sp>
         <p:nvSpPr>
-          <p:cNvPr id="51" name="Shape 48"/>
+          <p:cNvPr id="52" name="Shape 49"/>
           <p:cNvSpPr/>
           <p:nvPr/>
         </p:nvSpPr>
@@ -9178,7 +9288,7 @@
       </p:sp>
       <p:sp>
         <p:nvSpPr>
-          <p:cNvPr id="52" name="Shape 49"/>
+          <p:cNvPr id="53" name="Shape 50"/>
           <p:cNvSpPr/>
           <p:nvPr/>
         </p:nvSpPr>
@@ -9198,7 +9308,7 @@
       </p:sp>
       <p:sp>
         <p:nvSpPr>
-          <p:cNvPr id="53" name="Shape 50"/>
+          <p:cNvPr id="54" name="Shape 51"/>
           <p:cNvSpPr/>
           <p:nvPr/>
         </p:nvSpPr>
@@ -9218,7 +9328,7 @@
       </p:sp>
       <p:sp>
         <p:nvSpPr>
-          <p:cNvPr id="54" name="Shape 51"/>
+          <p:cNvPr id="55" name="Shape 52"/>
           <p:cNvSpPr/>
           <p:nvPr/>
         </p:nvSpPr>
@@ -9238,7 +9348,7 @@
       </p:sp>
       <p:sp>
         <p:nvSpPr>
-          <p:cNvPr id="55" name="Shape 52"/>
+          <p:cNvPr id="56" name="Shape 53"/>
           <p:cNvSpPr/>
           <p:nvPr/>
         </p:nvSpPr>
@@ -9258,7 +9368,7 @@
       </p:sp>
       <p:sp>
         <p:nvSpPr>
-          <p:cNvPr id="56" name="Shape 53"/>
+          <p:cNvPr id="57" name="Shape 54"/>
           <p:cNvSpPr/>
           <p:nvPr/>
         </p:nvSpPr>
@@ -9278,7 +9388,7 @@
       </p:sp>
       <p:sp>
         <p:nvSpPr>
-          <p:cNvPr id="57" name="Shape 54"/>
+          <p:cNvPr id="58" name="Shape 55"/>
           <p:cNvSpPr/>
           <p:nvPr/>
         </p:nvSpPr>
@@ -9298,7 +9408,7 @@
       </p:sp>
       <p:sp>
         <p:nvSpPr>
-          <p:cNvPr id="58" name="Shape 55"/>
+          <p:cNvPr id="59" name="Shape 56"/>
           <p:cNvSpPr/>
           <p:nvPr/>
         </p:nvSpPr>
@@ -9318,7 +9428,7 @@
       </p:sp>
       <p:sp>
         <p:nvSpPr>
-          <p:cNvPr id="59" name="Shape 56"/>
+          <p:cNvPr id="60" name="Shape 57"/>
           <p:cNvSpPr/>
           <p:nvPr/>
         </p:nvSpPr>
@@ -9338,7 +9448,7 @@
       </p:sp>
       <p:sp>
         <p:nvSpPr>
-          <p:cNvPr id="60" name="Shape 57"/>
+          <p:cNvPr id="61" name="Shape 58"/>
           <p:cNvSpPr/>
           <p:nvPr/>
         </p:nvSpPr>
@@ -9358,7 +9468,7 @@
       </p:sp>
       <p:sp>
         <p:nvSpPr>
-          <p:cNvPr id="61" name="Shape 58"/>
+          <p:cNvPr id="62" name="Shape 59"/>
           <p:cNvSpPr/>
           <p:nvPr/>
         </p:nvSpPr>
@@ -9378,7 +9488,7 @@
       </p:sp>
       <p:sp>
         <p:nvSpPr>
-          <p:cNvPr id="62" name="Shape 59"/>
+          <p:cNvPr id="63" name="Shape 60"/>
           <p:cNvSpPr/>
           <p:nvPr/>
         </p:nvSpPr>
@@ -9398,7 +9508,7 @@
       </p:sp>
       <p:sp>
         <p:nvSpPr>
-          <p:cNvPr id="63" name="Shape 60"/>
+          <p:cNvPr id="64" name="Shape 61"/>
           <p:cNvSpPr/>
           <p:nvPr/>
         </p:nvSpPr>
@@ -9418,7 +9528,7 @@
       </p:sp>
       <p:sp>
         <p:nvSpPr>
-          <p:cNvPr id="64" name="Shape 61"/>
+          <p:cNvPr id="65" name="Shape 62"/>
           <p:cNvSpPr/>
           <p:nvPr/>
         </p:nvSpPr>
@@ -9438,7 +9548,7 @@
       </p:sp>
       <p:sp>
         <p:nvSpPr>
-          <p:cNvPr id="65" name="Shape 62"/>
+          <p:cNvPr id="66" name="Shape 63"/>
           <p:cNvSpPr/>
           <p:nvPr/>
         </p:nvSpPr>
@@ -9458,7 +9568,7 @@
       </p:sp>
       <p:sp>
         <p:nvSpPr>
-          <p:cNvPr id="66" name="Shape 63"/>
+          <p:cNvPr id="67" name="Shape 64"/>
           <p:cNvSpPr/>
           <p:nvPr/>
         </p:nvSpPr>
@@ -9478,7 +9588,7 @@
       </p:sp>
       <p:sp>
         <p:nvSpPr>
-          <p:cNvPr id="67" name="Shape 64"/>
+          <p:cNvPr id="68" name="Shape 65"/>
           <p:cNvSpPr/>
           <p:nvPr/>
         </p:nvSpPr>
@@ -9498,7 +9608,7 @@
       </p:sp>
       <p:sp>
         <p:nvSpPr>
-          <p:cNvPr id="68" name="Shape 65"/>
+          <p:cNvPr id="69" name="Shape 66"/>
           <p:cNvSpPr/>
           <p:nvPr/>
         </p:nvSpPr>
@@ -9518,7 +9628,7 @@
       </p:sp>
       <p:sp>
         <p:nvSpPr>
-          <p:cNvPr id="69" name="Shape 66"/>
+          <p:cNvPr id="70" name="Shape 67"/>
           <p:cNvSpPr/>
           <p:nvPr/>
         </p:nvSpPr>
@@ -9538,7 +9648,7 @@
       </p:sp>
       <p:sp>
         <p:nvSpPr>
-          <p:cNvPr id="70" name="Shape 67"/>
+          <p:cNvPr id="71" name="Shape 68"/>
           <p:cNvSpPr/>
           <p:nvPr/>
         </p:nvSpPr>
@@ -9558,7 +9668,7 @@
       </p:sp>
       <p:sp>
         <p:nvSpPr>
-          <p:cNvPr id="71" name="Shape 68"/>
+          <p:cNvPr id="72" name="Shape 69"/>
           <p:cNvSpPr/>
           <p:nvPr/>
         </p:nvSpPr>
@@ -9578,7 +9688,7 @@
       </p:sp>
       <p:sp>
         <p:nvSpPr>
-          <p:cNvPr id="72" name="Shape 69"/>
+          <p:cNvPr id="73" name="Shape 70"/>
           <p:cNvSpPr/>
           <p:nvPr/>
         </p:nvSpPr>
@@ -9598,7 +9708,7 @@
       </p:sp>
       <p:sp>
         <p:nvSpPr>
-          <p:cNvPr id="73" name="Shape 70"/>
+          <p:cNvPr id="74" name="Shape 71"/>
           <p:cNvSpPr/>
           <p:nvPr/>
         </p:nvSpPr>
@@ -9618,7 +9728,7 @@
       </p:sp>
       <p:sp>
         <p:nvSpPr>
-          <p:cNvPr id="74" name="Shape 71"/>
+          <p:cNvPr id="75" name="Shape 72"/>
           <p:cNvSpPr/>
           <p:nvPr/>
         </p:nvSpPr>
@@ -9638,7 +9748,7 @@
       </p:sp>
       <p:sp>
         <p:nvSpPr>
-          <p:cNvPr id="75" name="Shape 72"/>
+          <p:cNvPr id="76" name="Shape 73"/>
           <p:cNvSpPr/>
           <p:nvPr/>
         </p:nvSpPr>
@@ -9658,7 +9768,7 @@
       </p:sp>
       <p:sp>
         <p:nvSpPr>
-          <p:cNvPr id="76" name="Shape 73"/>
+          <p:cNvPr id="77" name="Shape 74"/>
           <p:cNvSpPr/>
           <p:nvPr/>
         </p:nvSpPr>
@@ -9678,7 +9788,7 @@
       </p:sp>
       <p:sp>
         <p:nvSpPr>
-          <p:cNvPr id="77" name="Shape 74"/>
+          <p:cNvPr id="78" name="Shape 75"/>
           <p:cNvSpPr/>
           <p:nvPr/>
         </p:nvSpPr>
@@ -9698,7 +9808,7 @@
       </p:sp>
       <p:sp>
         <p:nvSpPr>
-          <p:cNvPr id="78" name="Shape 75"/>
+          <p:cNvPr id="79" name="Shape 76"/>
           <p:cNvSpPr/>
           <p:nvPr/>
         </p:nvSpPr>
@@ -9718,7 +9828,7 @@
       </p:sp>
       <p:sp>
         <p:nvSpPr>
-          <p:cNvPr id="79" name="Shape 76"/>
+          <p:cNvPr id="80" name="Shape 77"/>
           <p:cNvSpPr/>
           <p:nvPr/>
         </p:nvSpPr>
@@ -9738,7 +9848,7 @@
       </p:sp>
       <p:sp>
         <p:nvSpPr>
-          <p:cNvPr id="80" name="Shape 77"/>
+          <p:cNvPr id="81" name="Shape 78"/>
           <p:cNvSpPr/>
           <p:nvPr/>
         </p:nvSpPr>
@@ -9758,7 +9868,7 @@
       </p:sp>
       <p:sp>
         <p:nvSpPr>
-          <p:cNvPr id="81" name="Shape 78"/>
+          <p:cNvPr id="82" name="Shape 79"/>
           <p:cNvSpPr/>
           <p:nvPr/>
         </p:nvSpPr>
@@ -9778,7 +9888,7 @@
       </p:sp>
       <p:sp>
         <p:nvSpPr>
-          <p:cNvPr id="82" name="Shape 79"/>
+          <p:cNvPr id="83" name="Shape 80"/>
           <p:cNvSpPr/>
           <p:nvPr/>
         </p:nvSpPr>
@@ -9798,7 +9908,7 @@
       </p:sp>
       <p:sp>
         <p:nvSpPr>
-          <p:cNvPr id="83" name="Shape 80"/>
+          <p:cNvPr id="84" name="Shape 81"/>
           <p:cNvSpPr/>
           <p:nvPr/>
         </p:nvSpPr>
@@ -9818,7 +9928,7 @@
       </p:sp>
       <p:sp>
         <p:nvSpPr>
-          <p:cNvPr id="84" name="Shape 81"/>
+          <p:cNvPr id="85" name="Shape 82"/>
           <p:cNvSpPr/>
           <p:nvPr/>
         </p:nvSpPr>
@@ -9838,7 +9948,7 @@
       </p:sp>
       <p:sp>
         <p:nvSpPr>
-          <p:cNvPr id="85" name="Shape 82"/>
+          <p:cNvPr id="86" name="Shape 83"/>
           <p:cNvSpPr/>
           <p:nvPr/>
         </p:nvSpPr>
@@ -9858,7 +9968,7 @@
       </p:sp>
       <p:sp>
         <p:nvSpPr>
-          <p:cNvPr id="86" name="Shape 83"/>
+          <p:cNvPr id="87" name="Shape 84"/>
           <p:cNvSpPr/>
           <p:nvPr/>
         </p:nvSpPr>
@@ -9878,7 +9988,7 @@
       </p:sp>
       <p:sp>
         <p:nvSpPr>
-          <p:cNvPr id="87" name="Shape 84"/>
+          <p:cNvPr id="88" name="Shape 85"/>
           <p:cNvSpPr/>
           <p:nvPr/>
         </p:nvSpPr>
@@ -9898,7 +10008,7 @@
       </p:sp>
       <p:sp>
         <p:nvSpPr>
-          <p:cNvPr id="88" name="Shape 85"/>
+          <p:cNvPr id="89" name="Shape 86"/>
           <p:cNvSpPr/>
           <p:nvPr/>
         </p:nvSpPr>
@@ -9918,7 +10028,7 @@
       </p:sp>
       <p:sp>
         <p:nvSpPr>
-          <p:cNvPr id="89" name="Shape 86"/>
+          <p:cNvPr id="90" name="Shape 87"/>
           <p:cNvSpPr/>
           <p:nvPr/>
         </p:nvSpPr>
@@ -9938,7 +10048,7 @@
       </p:sp>
       <p:sp>
         <p:nvSpPr>
-          <p:cNvPr id="90" name="Shape 87"/>
+          <p:cNvPr id="91" name="Shape 88"/>
           <p:cNvSpPr/>
           <p:nvPr/>
         </p:nvSpPr>
@@ -9958,7 +10068,7 @@
       </p:sp>
       <p:sp>
         <p:nvSpPr>
-          <p:cNvPr id="91" name="Shape 88"/>
+          <p:cNvPr id="92" name="Shape 89"/>
           <p:cNvSpPr/>
           <p:nvPr/>
         </p:nvSpPr>
@@ -9978,7 +10088,7 @@
       </p:sp>
       <p:sp>
         <p:nvSpPr>
-          <p:cNvPr id="92" name="Shape 89"/>
+          <p:cNvPr id="93" name="Shape 90"/>
           <p:cNvSpPr/>
           <p:nvPr/>
         </p:nvSpPr>
@@ -9998,7 +10108,7 @@
       </p:sp>
       <p:sp>
         <p:nvSpPr>
-          <p:cNvPr id="93" name="Shape 90"/>
+          <p:cNvPr id="94" name="Shape 91"/>
           <p:cNvSpPr/>
           <p:nvPr/>
         </p:nvSpPr>
@@ -10018,7 +10128,7 @@
       </p:sp>
       <p:sp>
         <p:nvSpPr>
-          <p:cNvPr id="94" name="Shape 91"/>
+          <p:cNvPr id="95" name="Shape 92"/>
           <p:cNvSpPr/>
           <p:nvPr/>
         </p:nvSpPr>
@@ -10038,7 +10148,7 @@
       </p:sp>
       <p:sp>
         <p:nvSpPr>
-          <p:cNvPr id="95" name="Shape 92"/>
+          <p:cNvPr id="96" name="Shape 93"/>
           <p:cNvSpPr/>
           <p:nvPr/>
         </p:nvSpPr>
@@ -10058,7 +10168,7 @@
       </p:sp>
       <p:sp>
         <p:nvSpPr>
-          <p:cNvPr id="96" name="Shape 93"/>
+          <p:cNvPr id="97" name="Shape 94"/>
           <p:cNvSpPr/>
           <p:nvPr/>
         </p:nvSpPr>
@@ -10078,7 +10188,7 @@
       </p:sp>
       <p:sp>
         <p:nvSpPr>
-          <p:cNvPr id="97" name="Shape 94"/>
+          <p:cNvPr id="98" name="Shape 95"/>
           <p:cNvSpPr/>
           <p:nvPr/>
         </p:nvSpPr>
@@ -10098,7 +10208,7 @@
       </p:sp>
       <p:sp>
         <p:nvSpPr>
-          <p:cNvPr id="98" name="Shape 95"/>
+          <p:cNvPr id="99" name="Shape 96"/>
           <p:cNvSpPr/>
           <p:nvPr/>
         </p:nvSpPr>
@@ -10118,7 +10228,7 @@
       </p:sp>
       <p:sp>
         <p:nvSpPr>
-          <p:cNvPr id="99" name="Shape 96"/>
+          <p:cNvPr id="100" name="Shape 97"/>
           <p:cNvSpPr/>
           <p:nvPr/>
         </p:nvSpPr>
@@ -10138,7 +10248,7 @@
       </p:sp>
       <p:sp>
         <p:nvSpPr>
-          <p:cNvPr id="100" name="Shape 97"/>
+          <p:cNvPr id="101" name="Shape 98"/>
           <p:cNvSpPr/>
           <p:nvPr/>
         </p:nvSpPr>
@@ -10158,7 +10268,7 @@
       </p:sp>
       <p:sp>
         <p:nvSpPr>
-          <p:cNvPr id="101" name="Shape 98"/>
+          <p:cNvPr id="102" name="Shape 99"/>
           <p:cNvSpPr/>
           <p:nvPr/>
         </p:nvSpPr>
@@ -10178,7 +10288,7 @@
       </p:sp>
       <p:sp>
         <p:nvSpPr>
-          <p:cNvPr id="102" name="Shape 99"/>
+          <p:cNvPr id="103" name="Shape 100"/>
           <p:cNvSpPr/>
           <p:nvPr/>
         </p:nvSpPr>
@@ -10198,7 +10308,7 @@
       </p:sp>
       <p:sp>
         <p:nvSpPr>
-          <p:cNvPr id="103" name="Shape 100"/>
+          <p:cNvPr id="104" name="Shape 101"/>
           <p:cNvSpPr/>
           <p:nvPr/>
         </p:nvSpPr>
@@ -10218,7 +10328,7 @@
       </p:sp>
       <p:sp>
         <p:nvSpPr>
-          <p:cNvPr id="104" name="Shape 101"/>
+          <p:cNvPr id="105" name="Shape 102"/>
           <p:cNvSpPr/>
           <p:nvPr/>
         </p:nvSpPr>
@@ -10238,7 +10348,7 @@
       </p:sp>
       <p:sp>
         <p:nvSpPr>
-          <p:cNvPr id="105" name="Shape 102"/>
+          <p:cNvPr id="106" name="Shape 103"/>
           <p:cNvSpPr/>
           <p:nvPr/>
         </p:nvSpPr>
@@ -10258,7 +10368,7 @@
       </p:sp>
       <p:sp>
         <p:nvSpPr>
-          <p:cNvPr id="106" name="Shape 103"/>
+          <p:cNvPr id="107" name="Shape 104"/>
           <p:cNvSpPr/>
           <p:nvPr/>
         </p:nvSpPr>
@@ -10278,7 +10388,7 @@
       </p:sp>
       <p:sp>
         <p:nvSpPr>
-          <p:cNvPr id="107" name="Shape 104"/>
+          <p:cNvPr id="108" name="Shape 105"/>
           <p:cNvSpPr/>
           <p:nvPr/>
         </p:nvSpPr>
@@ -10298,7 +10408,7 @@
       </p:sp>
       <p:sp>
         <p:nvSpPr>
-          <p:cNvPr id="108" name="Shape 105"/>
+          <p:cNvPr id="109" name="Shape 106"/>
           <p:cNvSpPr/>
           <p:nvPr/>
         </p:nvSpPr>
@@ -10318,7 +10428,7 @@
       </p:sp>
       <p:sp>
         <p:nvSpPr>
-          <p:cNvPr id="109" name="Shape 106"/>
+          <p:cNvPr id="110" name="Shape 107"/>
           <p:cNvSpPr/>
           <p:nvPr/>
         </p:nvSpPr>
@@ -10338,7 +10448,7 @@
       </p:sp>
       <p:sp>
         <p:nvSpPr>
-          <p:cNvPr id="110" name="Shape 107"/>
+          <p:cNvPr id="111" name="Shape 108"/>
           <p:cNvSpPr/>
           <p:nvPr/>
         </p:nvSpPr>
@@ -10358,7 +10468,7 @@
       </p:sp>
       <p:sp>
         <p:nvSpPr>
-          <p:cNvPr id="111" name="Shape 108"/>
+          <p:cNvPr id="112" name="Shape 109"/>
           <p:cNvSpPr/>
           <p:nvPr/>
         </p:nvSpPr>
@@ -10378,7 +10488,7 @@
       </p:sp>
       <p:sp>
         <p:nvSpPr>
-          <p:cNvPr id="112" name="Shape 109"/>
+          <p:cNvPr id="113" name="Shape 110"/>
           <p:cNvSpPr/>
           <p:nvPr/>
         </p:nvSpPr>
@@ -10398,7 +10508,7 @@
       </p:sp>
       <p:sp>
         <p:nvSpPr>
-          <p:cNvPr id="113" name="Shape 110"/>
+          <p:cNvPr id="114" name="Shape 111"/>
           <p:cNvSpPr/>
           <p:nvPr/>
         </p:nvSpPr>
@@ -10418,7 +10528,7 @@
       </p:sp>
       <p:sp>
         <p:nvSpPr>
-          <p:cNvPr id="114" name="Shape 111"/>
+          <p:cNvPr id="115" name="Shape 112"/>
           <p:cNvSpPr/>
           <p:nvPr/>
         </p:nvSpPr>
@@ -10438,7 +10548,7 @@
       </p:sp>
       <p:sp>
         <p:nvSpPr>
-          <p:cNvPr id="115" name="Shape 112"/>
+          <p:cNvPr id="116" name="Shape 113"/>
           <p:cNvSpPr/>
           <p:nvPr/>
         </p:nvSpPr>
@@ -10458,7 +10568,7 @@
       </p:sp>
       <p:sp>
         <p:nvSpPr>
-          <p:cNvPr id="116" name="Text 113"/>
+          <p:cNvPr id="117" name="Text 114"/>
           <p:cNvSpPr/>
           <p:nvPr/>
         </p:nvSpPr>
@@ -10511,7 +10621,7 @@
       </p:sp>
       <p:sp>
         <p:nvSpPr>
-          <p:cNvPr id="117" name="Text 114"/>
+          <p:cNvPr id="118" name="Text 115"/>
           <p:cNvSpPr/>
           <p:nvPr/>
         </p:nvSpPr>
@@ -10550,7 +10660,7 @@
       </p:sp>
       <p:sp>
         <p:nvSpPr>
-          <p:cNvPr id="118" name="Shape 115"/>
+          <p:cNvPr id="119" name="Shape 116"/>
           <p:cNvSpPr/>
           <p:nvPr/>
         </p:nvSpPr>
@@ -10572,7 +10682,7 @@
       </p:sp>
       <p:sp>
         <p:nvSpPr>
-          <p:cNvPr id="119" name="Text 116"/>
+          <p:cNvPr id="120" name="Text 117"/>
           <p:cNvSpPr/>
           <p:nvPr/>
         </p:nvSpPr>
@@ -10611,7 +10721,7 @@
       </p:sp>
       <p:sp>
         <p:nvSpPr>
-          <p:cNvPr id="120" name="Text 117"/>
+          <p:cNvPr id="121" name="Text 118"/>
           <p:cNvSpPr/>
           <p:nvPr/>
         </p:nvSpPr>
@@ -10653,7 +10763,7 @@
       </p:sp>
       <p:sp>
         <p:nvSpPr>
-          <p:cNvPr id="121" name="Shape 118"/>
+          <p:cNvPr id="122" name="Shape 119"/>
           <p:cNvSpPr/>
           <p:nvPr/>
         </p:nvSpPr>
@@ -10675,7 +10785,7 @@
       </p:sp>
       <p:sp>
         <p:nvSpPr>
-          <p:cNvPr id="122" name="Text 119"/>
+          <p:cNvPr id="123" name="Text 120"/>
           <p:cNvSpPr/>
           <p:nvPr/>
         </p:nvSpPr>
@@ -10727,7 +10837,7 @@
         </p:nvSpPr>
         <p:spPr>
           <a:xfrm>
-            <a:off x="11368735" y="6437376"/>
+            <a:off x="11368735" y="6327648"/>
             <a:ext cx="365760" cy="274320"/>
           </a:xfrm>
           <a:prstGeom prst="rect">
@@ -10774,13 +10884,6 @@
 <file path=ppt/slides/slide14.xml><?xml version="1.0" encoding="utf-8"?>
 <p:sld xmlns:a="http://schemas.openxmlformats.org/drawingml/2006/main" xmlns:r="http://schemas.openxmlformats.org/officeDocument/2006/relationships" xmlns:p="http://schemas.openxmlformats.org/presentationml/2006/main">
   <p:cSld name="Slide 14">
-    <p:bg>
-      <p:bgPr>
-        <a:solidFill>
-          <a:srgbClr val="FFFFFF"/>
-        </a:solidFill>
-      </p:bgPr>
-    </p:bg>
     <p:spTree>
       <p:nvGrpSpPr>
         <p:cNvPr id="1" name=""/>
@@ -10797,7 +10900,29 @@
       </p:grpSpPr>
       <p:sp>
         <p:nvSpPr>
-          <p:cNvPr id="2" name="Text 0"/>
+          <p:cNvPr id="2" name="Shape 0"/>
+          <p:cNvSpPr/>
+          <p:nvPr/>
+        </p:nvSpPr>
+        <p:spPr>
+          <a:xfrm>
+            <a:off x="231343" y="194767"/>
+            <a:ext cx="11716207" cy="6473952"/>
+          </a:xfrm>
+          <a:prstGeom prst="roundRect">
+            <a:avLst>
+              <a:gd name="adj" fmla="val 3107"/>
+            </a:avLst>
+          </a:prstGeom>
+          <a:solidFill>
+            <a:srgbClr val="FFFFFF"/>
+          </a:solidFill>
+          <a:ln/>
+        </p:spPr>
+      </p:sp>
+      <p:sp>
+        <p:nvSpPr>
+          <p:cNvPr id="3" name="Text 1"/>
           <p:cNvSpPr/>
           <p:nvPr/>
         </p:nvSpPr>
@@ -10836,7 +10961,7 @@
       </p:sp>
       <p:sp>
         <p:nvSpPr>
-          <p:cNvPr id="3" name="Text 1"/>
+          <p:cNvPr id="4" name="Text 2"/>
           <p:cNvSpPr/>
           <p:nvPr/>
         </p:nvSpPr>
@@ -10875,7 +11000,7 @@
       </p:sp>
       <p:sp>
         <p:nvSpPr>
-          <p:cNvPr id="4" name="Shape 2"/>
+          <p:cNvPr id="5" name="Shape 3"/>
           <p:cNvSpPr/>
           <p:nvPr/>
         </p:nvSpPr>
@@ -10897,7 +11022,7 @@
       </p:sp>
       <p:sp>
         <p:nvSpPr>
-          <p:cNvPr id="5" name="Text 3"/>
+          <p:cNvPr id="6" name="Text 4"/>
           <p:cNvSpPr/>
           <p:nvPr/>
         </p:nvSpPr>
@@ -10936,7 +11061,7 @@
       </p:sp>
       <p:pic>
         <p:nvPicPr>
-          <p:cNvPr id="6" name="Image 0" descr="preencoded.png">    </p:cNvPr>
+          <p:cNvPr id="7" name="Image 0" descr="preencoded.png">    </p:cNvPr>
           <p:cNvPicPr>
             <a:picLocks noChangeAspect="1"/>
           </p:cNvPicPr>
@@ -10950,7 +11075,7 @@
         </p:blipFill>
         <p:spPr>
           <a:xfrm>
-            <a:off x="566928" y="6254496"/>
+            <a:off x="566928" y="6126480"/>
             <a:ext cx="1481328" cy="457200"/>
           </a:xfrm>
           <a:prstGeom prst="rect">
@@ -10960,7 +11085,7 @@
       </p:pic>
       <p:sp>
         <p:nvSpPr>
-          <p:cNvPr id="7" name="Shape 4"/>
+          <p:cNvPr id="8" name="Shape 5"/>
           <p:cNvSpPr/>
           <p:nvPr/>
         </p:nvSpPr>
@@ -10982,7 +11107,7 @@
       </p:sp>
       <p:sp>
         <p:nvSpPr>
-          <p:cNvPr id="8" name="Shape 5"/>
+          <p:cNvPr id="9" name="Shape 6"/>
           <p:cNvSpPr/>
           <p:nvPr/>
         </p:nvSpPr>
@@ -11002,7 +11127,7 @@
       </p:sp>
       <p:sp>
         <p:nvSpPr>
-          <p:cNvPr id="9" name="Text 6"/>
+          <p:cNvPr id="10" name="Text 7"/>
           <p:cNvSpPr/>
           <p:nvPr/>
         </p:nvSpPr>
@@ -11041,7 +11166,7 @@
       </p:sp>
       <p:sp>
         <p:nvSpPr>
-          <p:cNvPr id="10" name="Text 7"/>
+          <p:cNvPr id="11" name="Text 8"/>
           <p:cNvSpPr/>
           <p:nvPr/>
         </p:nvSpPr>
@@ -11080,7 +11205,7 @@
       </p:sp>
       <p:sp>
         <p:nvSpPr>
-          <p:cNvPr id="11" name="Text 8"/>
+          <p:cNvPr id="12" name="Text 9"/>
           <p:cNvSpPr/>
           <p:nvPr/>
         </p:nvSpPr>
@@ -11122,7 +11247,7 @@
       </p:sp>
       <p:sp>
         <p:nvSpPr>
-          <p:cNvPr id="12" name="Shape 9"/>
+          <p:cNvPr id="13" name="Shape 10"/>
           <p:cNvSpPr/>
           <p:nvPr/>
         </p:nvSpPr>
@@ -11144,7 +11269,7 @@
       </p:sp>
       <p:sp>
         <p:nvSpPr>
-          <p:cNvPr id="13" name="Shape 10"/>
+          <p:cNvPr id="14" name="Shape 11"/>
           <p:cNvSpPr/>
           <p:nvPr/>
         </p:nvSpPr>
@@ -11164,7 +11289,7 @@
       </p:sp>
       <p:sp>
         <p:nvSpPr>
-          <p:cNvPr id="14" name="Text 11"/>
+          <p:cNvPr id="15" name="Text 12"/>
           <p:cNvSpPr/>
           <p:nvPr/>
         </p:nvSpPr>
@@ -11203,7 +11328,7 @@
       </p:sp>
       <p:sp>
         <p:nvSpPr>
-          <p:cNvPr id="15" name="Text 12"/>
+          <p:cNvPr id="16" name="Text 13"/>
           <p:cNvSpPr/>
           <p:nvPr/>
         </p:nvSpPr>
@@ -11242,7 +11367,7 @@
       </p:sp>
       <p:sp>
         <p:nvSpPr>
-          <p:cNvPr id="16" name="Text 13"/>
+          <p:cNvPr id="17" name="Text 14"/>
           <p:cNvSpPr/>
           <p:nvPr/>
         </p:nvSpPr>
@@ -11284,7 +11409,7 @@
       </p:sp>
       <p:sp>
         <p:nvSpPr>
-          <p:cNvPr id="17" name="Shape 14"/>
+          <p:cNvPr id="18" name="Shape 15"/>
           <p:cNvSpPr/>
           <p:nvPr/>
         </p:nvSpPr>
@@ -11306,7 +11431,7 @@
       </p:sp>
       <p:sp>
         <p:nvSpPr>
-          <p:cNvPr id="18" name="Shape 15"/>
+          <p:cNvPr id="19" name="Shape 16"/>
           <p:cNvSpPr/>
           <p:nvPr/>
         </p:nvSpPr>
@@ -11326,7 +11451,7 @@
       </p:sp>
       <p:sp>
         <p:nvSpPr>
-          <p:cNvPr id="19" name="Text 16"/>
+          <p:cNvPr id="20" name="Text 17"/>
           <p:cNvSpPr/>
           <p:nvPr/>
         </p:nvSpPr>
@@ -11365,7 +11490,7 @@
       </p:sp>
       <p:sp>
         <p:nvSpPr>
-          <p:cNvPr id="20" name="Text 17"/>
+          <p:cNvPr id="21" name="Text 18"/>
           <p:cNvSpPr/>
           <p:nvPr/>
         </p:nvSpPr>
@@ -11404,7 +11529,7 @@
       </p:sp>
       <p:sp>
         <p:nvSpPr>
-          <p:cNvPr id="21" name="Text 18"/>
+          <p:cNvPr id="22" name="Text 19"/>
           <p:cNvSpPr/>
           <p:nvPr/>
         </p:nvSpPr>
@@ -11446,7 +11571,7 @@
       </p:sp>
       <p:sp>
         <p:nvSpPr>
-          <p:cNvPr id="22" name="Shape 19"/>
+          <p:cNvPr id="23" name="Shape 20"/>
           <p:cNvSpPr/>
           <p:nvPr/>
         </p:nvSpPr>
@@ -11468,7 +11593,7 @@
       </p:sp>
       <p:sp>
         <p:nvSpPr>
-          <p:cNvPr id="23" name="Text 20"/>
+          <p:cNvPr id="24" name="Text 21"/>
           <p:cNvSpPr/>
           <p:nvPr/>
         </p:nvSpPr>
@@ -11507,7 +11632,7 @@
       </p:sp>
       <p:sp>
         <p:nvSpPr>
-          <p:cNvPr id="24" name="Text 21"/>
+          <p:cNvPr id="25" name="Text 22"/>
           <p:cNvSpPr/>
           <p:nvPr/>
         </p:nvSpPr>
@@ -11549,7 +11674,7 @@
       </p:sp>
       <p:sp>
         <p:nvSpPr>
-          <p:cNvPr id="25" name="Shape 22"/>
+          <p:cNvPr id="26" name="Shape 23"/>
           <p:cNvSpPr/>
           <p:nvPr/>
         </p:nvSpPr>
@@ -11576,7 +11701,7 @@
       </p:sp>
       <p:sp>
         <p:nvSpPr>
-          <p:cNvPr id="26" name="Text 23"/>
+          <p:cNvPr id="27" name="Text 24"/>
           <p:cNvSpPr/>
           <p:nvPr/>
         </p:nvSpPr>
@@ -11628,7 +11753,7 @@
         </p:nvSpPr>
         <p:spPr>
           <a:xfrm>
-            <a:off x="11368735" y="6437376"/>
+            <a:off x="11368735" y="6327648"/>
             <a:ext cx="365760" cy="274320"/>
           </a:xfrm>
           <a:prstGeom prst="rect">
@@ -11675,13 +11800,6 @@
 <file path=ppt/slides/slide15.xml><?xml version="1.0" encoding="utf-8"?>
 <p:sld xmlns:a="http://schemas.openxmlformats.org/drawingml/2006/main" xmlns:r="http://schemas.openxmlformats.org/officeDocument/2006/relationships" xmlns:p="http://schemas.openxmlformats.org/presentationml/2006/main">
   <p:cSld name="Slide 15">
-    <p:bg>
-      <p:bgPr>
-        <a:solidFill>
-          <a:srgbClr val="FFFFFF"/>
-        </a:solidFill>
-      </p:bgPr>
-    </p:bg>
     <p:spTree>
       <p:nvGrpSpPr>
         <p:cNvPr id="1" name=""/>
@@ -11698,7 +11816,29 @@
       </p:grpSpPr>
       <p:sp>
         <p:nvSpPr>
-          <p:cNvPr id="2" name="Text 0"/>
+          <p:cNvPr id="2" name="Shape 0"/>
+          <p:cNvSpPr/>
+          <p:nvPr/>
+        </p:nvSpPr>
+        <p:spPr>
+          <a:xfrm>
+            <a:off x="231343" y="194767"/>
+            <a:ext cx="11716207" cy="6473952"/>
+          </a:xfrm>
+          <a:prstGeom prst="roundRect">
+            <a:avLst>
+              <a:gd name="adj" fmla="val 3107"/>
+            </a:avLst>
+          </a:prstGeom>
+          <a:solidFill>
+            <a:srgbClr val="FFFFFF"/>
+          </a:solidFill>
+          <a:ln/>
+        </p:spPr>
+      </p:sp>
+      <p:sp>
+        <p:nvSpPr>
+          <p:cNvPr id="3" name="Text 1"/>
           <p:cNvSpPr/>
           <p:nvPr/>
         </p:nvSpPr>
@@ -11737,7 +11877,7 @@
       </p:sp>
       <p:sp>
         <p:nvSpPr>
-          <p:cNvPr id="3" name="Text 1"/>
+          <p:cNvPr id="4" name="Text 2"/>
           <p:cNvSpPr/>
           <p:nvPr/>
         </p:nvSpPr>
@@ -11776,7 +11916,7 @@
       </p:sp>
       <p:sp>
         <p:nvSpPr>
-          <p:cNvPr id="4" name="Shape 2"/>
+          <p:cNvPr id="5" name="Shape 3"/>
           <p:cNvSpPr/>
           <p:nvPr/>
         </p:nvSpPr>
@@ -11798,7 +11938,7 @@
       </p:sp>
       <p:sp>
         <p:nvSpPr>
-          <p:cNvPr id="5" name="Text 3"/>
+          <p:cNvPr id="6" name="Text 4"/>
           <p:cNvSpPr/>
           <p:nvPr/>
         </p:nvSpPr>
@@ -11837,7 +11977,7 @@
       </p:sp>
       <p:sp>
         <p:nvSpPr>
-          <p:cNvPr id="6" name="Shape 4"/>
+          <p:cNvPr id="7" name="Shape 5"/>
           <p:cNvSpPr/>
           <p:nvPr/>
         </p:nvSpPr>
@@ -11859,7 +11999,7 @@
       </p:sp>
       <p:sp>
         <p:nvSpPr>
-          <p:cNvPr id="7" name="Text 5"/>
+          <p:cNvPr id="8" name="Text 6"/>
           <p:cNvSpPr/>
           <p:nvPr/>
         </p:nvSpPr>
@@ -11898,7 +12038,7 @@
       </p:sp>
       <p:pic>
         <p:nvPicPr>
-          <p:cNvPr id="8" name="Image 0" descr="preencoded.png">    </p:cNvPr>
+          <p:cNvPr id="9" name="Image 0" descr="preencoded.png">    </p:cNvPr>
           <p:cNvPicPr>
             <a:picLocks noChangeAspect="1"/>
           </p:cNvPicPr>
@@ -11912,7 +12052,7 @@
         </p:blipFill>
         <p:spPr>
           <a:xfrm>
-            <a:off x="566928" y="6254496"/>
+            <a:off x="566928" y="6126480"/>
             <a:ext cx="1481328" cy="457200"/>
           </a:xfrm>
           <a:prstGeom prst="rect">
@@ -12777,7 +12917,7 @@
       </p:graphicFrame>
       <p:sp>
         <p:nvSpPr>
-          <p:cNvPr id="10" name="Shape 6"/>
+          <p:cNvPr id="11" name="Shape 7"/>
           <p:cNvSpPr/>
           <p:nvPr/>
         </p:nvSpPr>
@@ -12799,7 +12939,7 @@
       </p:sp>
       <p:sp>
         <p:nvSpPr>
-          <p:cNvPr id="11" name="Text 7"/>
+          <p:cNvPr id="12" name="Text 8"/>
           <p:cNvSpPr/>
           <p:nvPr/>
         </p:nvSpPr>
@@ -12851,7 +12991,7 @@
         </p:nvSpPr>
         <p:spPr>
           <a:xfrm>
-            <a:off x="11368735" y="6437376"/>
+            <a:off x="11368735" y="6327648"/>
             <a:ext cx="365760" cy="274320"/>
           </a:xfrm>
           <a:prstGeom prst="rect">
@@ -12898,13 +13038,6 @@
 <file path=ppt/slides/slide16.xml><?xml version="1.0" encoding="utf-8"?>
 <p:sld xmlns:a="http://schemas.openxmlformats.org/drawingml/2006/main" xmlns:r="http://schemas.openxmlformats.org/officeDocument/2006/relationships" xmlns:p="http://schemas.openxmlformats.org/presentationml/2006/main">
   <p:cSld name="Slide 16">
-    <p:bg>
-      <p:bgPr>
-        <a:solidFill>
-          <a:srgbClr val="FFFFFF"/>
-        </a:solidFill>
-      </p:bgPr>
-    </p:bg>
     <p:spTree>
       <p:nvGrpSpPr>
         <p:cNvPr id="1" name=""/>
@@ -12921,7 +13054,29 @@
       </p:grpSpPr>
       <p:sp>
         <p:nvSpPr>
-          <p:cNvPr id="2" name="Text 0"/>
+          <p:cNvPr id="2" name="Shape 0"/>
+          <p:cNvSpPr/>
+          <p:nvPr/>
+        </p:nvSpPr>
+        <p:spPr>
+          <a:xfrm>
+            <a:off x="231343" y="194767"/>
+            <a:ext cx="11716207" cy="6473952"/>
+          </a:xfrm>
+          <a:prstGeom prst="roundRect">
+            <a:avLst>
+              <a:gd name="adj" fmla="val 3107"/>
+            </a:avLst>
+          </a:prstGeom>
+          <a:solidFill>
+            <a:srgbClr val="FFFFFF"/>
+          </a:solidFill>
+          <a:ln/>
+        </p:spPr>
+      </p:sp>
+      <p:sp>
+        <p:nvSpPr>
+          <p:cNvPr id="3" name="Text 1"/>
           <p:cNvSpPr/>
           <p:nvPr/>
         </p:nvSpPr>
@@ -12960,7 +13115,7 @@
       </p:sp>
       <p:sp>
         <p:nvSpPr>
-          <p:cNvPr id="3" name="Text 1"/>
+          <p:cNvPr id="4" name="Text 2"/>
           <p:cNvSpPr/>
           <p:nvPr/>
         </p:nvSpPr>
@@ -12999,7 +13154,7 @@
       </p:sp>
       <p:sp>
         <p:nvSpPr>
-          <p:cNvPr id="4" name="Shape 2"/>
+          <p:cNvPr id="5" name="Shape 3"/>
           <p:cNvSpPr/>
           <p:nvPr/>
         </p:nvSpPr>
@@ -13021,7 +13176,7 @@
       </p:sp>
       <p:sp>
         <p:nvSpPr>
-          <p:cNvPr id="5" name="Text 3"/>
+          <p:cNvPr id="6" name="Text 4"/>
           <p:cNvSpPr/>
           <p:nvPr/>
         </p:nvSpPr>
@@ -13060,7 +13215,7 @@
       </p:sp>
       <p:pic>
         <p:nvPicPr>
-          <p:cNvPr id="6" name="Image 0" descr="preencoded.png">    </p:cNvPr>
+          <p:cNvPr id="7" name="Image 0" descr="preencoded.png">    </p:cNvPr>
           <p:cNvPicPr>
             <a:picLocks noChangeAspect="1"/>
           </p:cNvPicPr>
@@ -13074,7 +13229,7 @@
         </p:blipFill>
         <p:spPr>
           <a:xfrm>
-            <a:off x="566928" y="6254496"/>
+            <a:off x="566928" y="6126480"/>
             <a:ext cx="1481328" cy="457200"/>
           </a:xfrm>
           <a:prstGeom prst="rect">
@@ -13084,7 +13239,7 @@
       </p:pic>
       <p:sp>
         <p:nvSpPr>
-          <p:cNvPr id="7" name="Shape 4"/>
+          <p:cNvPr id="8" name="Shape 5"/>
           <p:cNvSpPr/>
           <p:nvPr/>
         </p:nvSpPr>
@@ -13106,7 +13261,7 @@
       </p:sp>
       <p:sp>
         <p:nvSpPr>
-          <p:cNvPr id="8" name="Text 5"/>
+          <p:cNvPr id="9" name="Text 6"/>
           <p:cNvSpPr/>
           <p:nvPr/>
         </p:nvSpPr>
@@ -13145,7 +13300,7 @@
       </p:sp>
       <p:sp>
         <p:nvSpPr>
-          <p:cNvPr id="9" name="Shape 6"/>
+          <p:cNvPr id="10" name="Shape 7"/>
           <p:cNvSpPr/>
           <p:nvPr/>
         </p:nvSpPr>
@@ -13168,7 +13323,7 @@
       </p:sp>
       <p:sp>
         <p:nvSpPr>
-          <p:cNvPr id="10" name="Shape 7"/>
+          <p:cNvPr id="11" name="Shape 8"/>
           <p:cNvSpPr/>
           <p:nvPr/>
         </p:nvSpPr>
@@ -13188,7 +13343,7 @@
       </p:sp>
       <p:sp>
         <p:nvSpPr>
-          <p:cNvPr id="11" name="Shape 8"/>
+          <p:cNvPr id="12" name="Shape 9"/>
           <p:cNvSpPr/>
           <p:nvPr/>
         </p:nvSpPr>
@@ -13215,7 +13370,7 @@
       </p:sp>
       <p:sp>
         <p:nvSpPr>
-          <p:cNvPr id="12" name="Text 9"/>
+          <p:cNvPr id="13" name="Text 10"/>
           <p:cNvSpPr/>
           <p:nvPr/>
         </p:nvSpPr>
@@ -13254,7 +13409,7 @@
       </p:sp>
       <p:sp>
         <p:nvSpPr>
-          <p:cNvPr id="13" name="Shape 10"/>
+          <p:cNvPr id="14" name="Shape 11"/>
           <p:cNvSpPr/>
           <p:nvPr/>
         </p:nvSpPr>
@@ -13277,7 +13432,7 @@
       </p:sp>
       <p:sp>
         <p:nvSpPr>
-          <p:cNvPr id="14" name="Shape 11"/>
+          <p:cNvPr id="15" name="Shape 12"/>
           <p:cNvSpPr/>
           <p:nvPr/>
         </p:nvSpPr>
@@ -13297,7 +13452,7 @@
       </p:sp>
       <p:sp>
         <p:nvSpPr>
-          <p:cNvPr id="15" name="Shape 12"/>
+          <p:cNvPr id="16" name="Shape 13"/>
           <p:cNvSpPr/>
           <p:nvPr/>
         </p:nvSpPr>
@@ -13324,7 +13479,7 @@
       </p:sp>
       <p:sp>
         <p:nvSpPr>
-          <p:cNvPr id="16" name="Text 13"/>
+          <p:cNvPr id="17" name="Text 14"/>
           <p:cNvSpPr/>
           <p:nvPr/>
         </p:nvSpPr>
@@ -13363,7 +13518,7 @@
       </p:sp>
       <p:sp>
         <p:nvSpPr>
-          <p:cNvPr id="17" name="Shape 14"/>
+          <p:cNvPr id="18" name="Shape 15"/>
           <p:cNvSpPr/>
           <p:nvPr/>
         </p:nvSpPr>
@@ -13386,7 +13541,7 @@
       </p:sp>
       <p:sp>
         <p:nvSpPr>
-          <p:cNvPr id="18" name="Shape 15"/>
+          <p:cNvPr id="19" name="Shape 16"/>
           <p:cNvSpPr/>
           <p:nvPr/>
         </p:nvSpPr>
@@ -13406,7 +13561,7 @@
       </p:sp>
       <p:sp>
         <p:nvSpPr>
-          <p:cNvPr id="19" name="Shape 16"/>
+          <p:cNvPr id="20" name="Shape 17"/>
           <p:cNvSpPr/>
           <p:nvPr/>
         </p:nvSpPr>
@@ -13428,7 +13583,7 @@
       </p:sp>
       <p:sp>
         <p:nvSpPr>
-          <p:cNvPr id="20" name="Text 17"/>
+          <p:cNvPr id="21" name="Text 18"/>
           <p:cNvSpPr/>
           <p:nvPr/>
         </p:nvSpPr>
@@ -13467,7 +13622,7 @@
       </p:sp>
       <p:sp>
         <p:nvSpPr>
-          <p:cNvPr id="21" name="Shape 18"/>
+          <p:cNvPr id="22" name="Shape 19"/>
           <p:cNvSpPr/>
           <p:nvPr/>
         </p:nvSpPr>
@@ -13494,7 +13649,7 @@
       </p:sp>
       <p:sp>
         <p:nvSpPr>
-          <p:cNvPr id="22" name="Shape 19"/>
+          <p:cNvPr id="23" name="Shape 20"/>
           <p:cNvSpPr/>
           <p:nvPr/>
         </p:nvSpPr>
@@ -13514,7 +13669,7 @@
       </p:sp>
       <p:sp>
         <p:nvSpPr>
-          <p:cNvPr id="23" name="Text 20"/>
+          <p:cNvPr id="24" name="Text 21"/>
           <p:cNvSpPr/>
           <p:nvPr/>
         </p:nvSpPr>
@@ -13553,7 +13708,7 @@
       </p:sp>
       <p:sp>
         <p:nvSpPr>
-          <p:cNvPr id="24" name="Text 21"/>
+          <p:cNvPr id="25" name="Text 22"/>
           <p:cNvSpPr/>
           <p:nvPr/>
         </p:nvSpPr>
@@ -13592,7 +13747,7 @@
       </p:sp>
       <p:sp>
         <p:nvSpPr>
-          <p:cNvPr id="25" name="Text 22"/>
+          <p:cNvPr id="26" name="Text 23"/>
           <p:cNvSpPr/>
           <p:nvPr/>
         </p:nvSpPr>
@@ -13634,7 +13789,7 @@
       </p:sp>
       <p:sp>
         <p:nvSpPr>
-          <p:cNvPr id="26" name="Shape 23"/>
+          <p:cNvPr id="27" name="Shape 24"/>
           <p:cNvSpPr/>
           <p:nvPr/>
         </p:nvSpPr>
@@ -13661,7 +13816,7 @@
       </p:sp>
       <p:sp>
         <p:nvSpPr>
-          <p:cNvPr id="27" name="Shape 24"/>
+          <p:cNvPr id="28" name="Shape 25"/>
           <p:cNvSpPr/>
           <p:nvPr/>
         </p:nvSpPr>
@@ -13681,7 +13836,7 @@
       </p:sp>
       <p:sp>
         <p:nvSpPr>
-          <p:cNvPr id="28" name="Text 25"/>
+          <p:cNvPr id="29" name="Text 26"/>
           <p:cNvSpPr/>
           <p:nvPr/>
         </p:nvSpPr>
@@ -13720,7 +13875,7 @@
       </p:sp>
       <p:sp>
         <p:nvSpPr>
-          <p:cNvPr id="29" name="Text 26"/>
+          <p:cNvPr id="30" name="Text 27"/>
           <p:cNvSpPr/>
           <p:nvPr/>
         </p:nvSpPr>
@@ -13759,7 +13914,7 @@
       </p:sp>
       <p:sp>
         <p:nvSpPr>
-          <p:cNvPr id="30" name="Text 27"/>
+          <p:cNvPr id="31" name="Text 28"/>
           <p:cNvSpPr/>
           <p:nvPr/>
         </p:nvSpPr>
@@ -13801,7 +13956,7 @@
       </p:sp>
       <p:sp>
         <p:nvSpPr>
-          <p:cNvPr id="31" name="Shape 28"/>
+          <p:cNvPr id="32" name="Shape 29"/>
           <p:cNvSpPr/>
           <p:nvPr/>
         </p:nvSpPr>
@@ -13828,7 +13983,7 @@
       </p:sp>
       <p:sp>
         <p:nvSpPr>
-          <p:cNvPr id="32" name="Shape 29"/>
+          <p:cNvPr id="33" name="Shape 30"/>
           <p:cNvSpPr/>
           <p:nvPr/>
         </p:nvSpPr>
@@ -13848,7 +14003,7 @@
       </p:sp>
       <p:sp>
         <p:nvSpPr>
-          <p:cNvPr id="33" name="Text 30"/>
+          <p:cNvPr id="34" name="Text 31"/>
           <p:cNvSpPr/>
           <p:nvPr/>
         </p:nvSpPr>
@@ -13887,7 +14042,7 @@
       </p:sp>
       <p:sp>
         <p:nvSpPr>
-          <p:cNvPr id="34" name="Text 31"/>
+          <p:cNvPr id="35" name="Text 32"/>
           <p:cNvSpPr/>
           <p:nvPr/>
         </p:nvSpPr>
@@ -13926,7 +14081,7 @@
       </p:sp>
       <p:sp>
         <p:nvSpPr>
-          <p:cNvPr id="35" name="Text 32"/>
+          <p:cNvPr id="36" name="Text 33"/>
           <p:cNvSpPr/>
           <p:nvPr/>
         </p:nvSpPr>
@@ -13968,7 +14123,7 @@
       </p:sp>
       <p:sp>
         <p:nvSpPr>
-          <p:cNvPr id="36" name="Shape 33"/>
+          <p:cNvPr id="37" name="Shape 34"/>
           <p:cNvSpPr/>
           <p:nvPr/>
         </p:nvSpPr>
@@ -13990,7 +14145,7 @@
       </p:sp>
       <p:sp>
         <p:nvSpPr>
-          <p:cNvPr id="37" name="Text 34"/>
+          <p:cNvPr id="38" name="Text 35"/>
           <p:cNvSpPr/>
           <p:nvPr/>
         </p:nvSpPr>
@@ -14029,7 +14184,7 @@
       </p:sp>
       <p:sp>
         <p:nvSpPr>
-          <p:cNvPr id="38" name="Text 35"/>
+          <p:cNvPr id="39" name="Text 36"/>
           <p:cNvSpPr/>
           <p:nvPr/>
         </p:nvSpPr>
@@ -14081,7 +14236,7 @@
         </p:nvSpPr>
         <p:spPr>
           <a:xfrm>
-            <a:off x="11368735" y="6437376"/>
+            <a:off x="11368735" y="6327648"/>
             <a:ext cx="365760" cy="274320"/>
           </a:xfrm>
           <a:prstGeom prst="rect">
@@ -14128,13 +14283,6 @@
 <file path=ppt/slides/slide17.xml><?xml version="1.0" encoding="utf-8"?>
 <p:sld xmlns:a="http://schemas.openxmlformats.org/drawingml/2006/main" xmlns:r="http://schemas.openxmlformats.org/officeDocument/2006/relationships" xmlns:p="http://schemas.openxmlformats.org/presentationml/2006/main">
   <p:cSld name="Slide 17">
-    <p:bg>
-      <p:bgPr>
-        <a:solidFill>
-          <a:srgbClr val="FFFFFF"/>
-        </a:solidFill>
-      </p:bgPr>
-    </p:bg>
     <p:spTree>
       <p:nvGrpSpPr>
         <p:cNvPr id="1" name=""/>
@@ -14151,7 +14299,29 @@
       </p:grpSpPr>
       <p:sp>
         <p:nvSpPr>
-          <p:cNvPr id="2" name="Text 0"/>
+          <p:cNvPr id="2" name="Shape 0"/>
+          <p:cNvSpPr/>
+          <p:nvPr/>
+        </p:nvSpPr>
+        <p:spPr>
+          <a:xfrm>
+            <a:off x="231343" y="194767"/>
+            <a:ext cx="11716207" cy="6473952"/>
+          </a:xfrm>
+          <a:prstGeom prst="roundRect">
+            <a:avLst>
+              <a:gd name="adj" fmla="val 3107"/>
+            </a:avLst>
+          </a:prstGeom>
+          <a:solidFill>
+            <a:srgbClr val="FFFFFF"/>
+          </a:solidFill>
+          <a:ln/>
+        </p:spPr>
+      </p:sp>
+      <p:sp>
+        <p:nvSpPr>
+          <p:cNvPr id="3" name="Text 1"/>
           <p:cNvSpPr/>
           <p:nvPr/>
         </p:nvSpPr>
@@ -14190,7 +14360,7 @@
       </p:sp>
       <p:sp>
         <p:nvSpPr>
-          <p:cNvPr id="3" name="Text 1"/>
+          <p:cNvPr id="4" name="Text 2"/>
           <p:cNvSpPr/>
           <p:nvPr/>
         </p:nvSpPr>
@@ -14229,7 +14399,7 @@
       </p:sp>
       <p:sp>
         <p:nvSpPr>
-          <p:cNvPr id="4" name="Text 2"/>
+          <p:cNvPr id="5" name="Text 3"/>
           <p:cNvSpPr/>
           <p:nvPr/>
         </p:nvSpPr>
@@ -14271,7 +14441,7 @@
       </p:sp>
       <p:sp>
         <p:nvSpPr>
-          <p:cNvPr id="5" name="Shape 3"/>
+          <p:cNvPr id="6" name="Shape 4"/>
           <p:cNvSpPr/>
           <p:nvPr/>
         </p:nvSpPr>
@@ -14293,7 +14463,7 @@
       </p:sp>
       <p:sp>
         <p:nvSpPr>
-          <p:cNvPr id="6" name="Text 4"/>
+          <p:cNvPr id="7" name="Text 5"/>
           <p:cNvSpPr/>
           <p:nvPr/>
         </p:nvSpPr>
@@ -14332,7 +14502,7 @@
       </p:sp>
       <p:pic>
         <p:nvPicPr>
-          <p:cNvPr id="7" name="Image 0" descr="preencoded.png">    </p:cNvPr>
+          <p:cNvPr id="8" name="Image 0" descr="preencoded.png">    </p:cNvPr>
           <p:cNvPicPr>
             <a:picLocks noChangeAspect="1"/>
           </p:cNvPicPr>
@@ -14346,7 +14516,7 @@
         </p:blipFill>
         <p:spPr>
           <a:xfrm>
-            <a:off x="566928" y="6254496"/>
+            <a:off x="566928" y="6126480"/>
             <a:ext cx="1481328" cy="457200"/>
           </a:xfrm>
           <a:prstGeom prst="rect">
@@ -14356,7 +14526,7 @@
       </p:pic>
       <p:sp>
         <p:nvSpPr>
-          <p:cNvPr id="8" name="Shape 5"/>
+          <p:cNvPr id="9" name="Shape 6"/>
           <p:cNvSpPr/>
           <p:nvPr/>
         </p:nvSpPr>
@@ -14383,7 +14553,7 @@
       </p:sp>
       <p:sp>
         <p:nvSpPr>
-          <p:cNvPr id="9" name="Shape 6"/>
+          <p:cNvPr id="10" name="Shape 7"/>
           <p:cNvSpPr/>
           <p:nvPr/>
         </p:nvSpPr>
@@ -14403,7 +14573,7 @@
       </p:sp>
       <p:sp>
         <p:nvSpPr>
-          <p:cNvPr id="10" name="Text 7"/>
+          <p:cNvPr id="11" name="Text 8"/>
           <p:cNvSpPr/>
           <p:nvPr/>
         </p:nvSpPr>
@@ -14442,7 +14612,7 @@
       </p:sp>
       <p:sp>
         <p:nvSpPr>
-          <p:cNvPr id="11" name="Text 8"/>
+          <p:cNvPr id="12" name="Text 9"/>
           <p:cNvSpPr/>
           <p:nvPr/>
         </p:nvSpPr>
@@ -14481,7 +14651,7 @@
       </p:sp>
       <p:sp>
         <p:nvSpPr>
-          <p:cNvPr id="12" name="Text 9"/>
+          <p:cNvPr id="13" name="Text 10"/>
           <p:cNvSpPr/>
           <p:nvPr/>
         </p:nvSpPr>
@@ -14523,7 +14693,7 @@
       </p:sp>
       <p:sp>
         <p:nvSpPr>
-          <p:cNvPr id="13" name="Shape 10"/>
+          <p:cNvPr id="14" name="Shape 11"/>
           <p:cNvSpPr/>
           <p:nvPr/>
         </p:nvSpPr>
@@ -14545,7 +14715,7 @@
       </p:sp>
       <p:sp>
         <p:nvSpPr>
-          <p:cNvPr id="14" name="Shape 11"/>
+          <p:cNvPr id="15" name="Shape 12"/>
           <p:cNvSpPr/>
           <p:nvPr/>
         </p:nvSpPr>
@@ -14565,7 +14735,7 @@
       </p:sp>
       <p:sp>
         <p:nvSpPr>
-          <p:cNvPr id="15" name="Text 12"/>
+          <p:cNvPr id="16" name="Text 13"/>
           <p:cNvSpPr/>
           <p:nvPr/>
         </p:nvSpPr>
@@ -14604,7 +14774,7 @@
       </p:sp>
       <p:sp>
         <p:nvSpPr>
-          <p:cNvPr id="16" name="Text 13"/>
+          <p:cNvPr id="17" name="Text 14"/>
           <p:cNvSpPr/>
           <p:nvPr/>
         </p:nvSpPr>
@@ -14643,7 +14813,7 @@
       </p:sp>
       <p:sp>
         <p:nvSpPr>
-          <p:cNvPr id="17" name="Text 14"/>
+          <p:cNvPr id="18" name="Text 15"/>
           <p:cNvSpPr/>
           <p:nvPr/>
         </p:nvSpPr>
@@ -14685,7 +14855,7 @@
       </p:sp>
       <p:sp>
         <p:nvSpPr>
-          <p:cNvPr id="18" name="Shape 15"/>
+          <p:cNvPr id="19" name="Shape 16"/>
           <p:cNvSpPr/>
           <p:nvPr/>
         </p:nvSpPr>
@@ -14712,7 +14882,7 @@
       </p:sp>
       <p:sp>
         <p:nvSpPr>
-          <p:cNvPr id="19" name="Shape 16"/>
+          <p:cNvPr id="20" name="Shape 17"/>
           <p:cNvSpPr/>
           <p:nvPr/>
         </p:nvSpPr>
@@ -14732,7 +14902,7 @@
       </p:sp>
       <p:sp>
         <p:nvSpPr>
-          <p:cNvPr id="20" name="Text 17"/>
+          <p:cNvPr id="21" name="Text 18"/>
           <p:cNvSpPr/>
           <p:nvPr/>
         </p:nvSpPr>
@@ -14771,7 +14941,7 @@
       </p:sp>
       <p:sp>
         <p:nvSpPr>
-          <p:cNvPr id="21" name="Text 18"/>
+          <p:cNvPr id="22" name="Text 19"/>
           <p:cNvSpPr/>
           <p:nvPr/>
         </p:nvSpPr>
@@ -14810,7 +14980,7 @@
       </p:sp>
       <p:sp>
         <p:nvSpPr>
-          <p:cNvPr id="22" name="Text 19"/>
+          <p:cNvPr id="23" name="Text 20"/>
           <p:cNvSpPr/>
           <p:nvPr/>
         </p:nvSpPr>
@@ -14852,7 +15022,7 @@
       </p:sp>
       <p:sp>
         <p:nvSpPr>
-          <p:cNvPr id="23" name="Shape 20"/>
+          <p:cNvPr id="24" name="Shape 21"/>
           <p:cNvSpPr/>
           <p:nvPr/>
         </p:nvSpPr>
@@ -14874,7 +15044,7 @@
       </p:sp>
       <p:sp>
         <p:nvSpPr>
-          <p:cNvPr id="24" name="Text 21"/>
+          <p:cNvPr id="25" name="Text 22"/>
           <p:cNvSpPr/>
           <p:nvPr/>
         </p:nvSpPr>
@@ -14913,7 +15083,7 @@
       </p:sp>
       <p:sp>
         <p:nvSpPr>
-          <p:cNvPr id="25" name="Shape 22"/>
+          <p:cNvPr id="26" name="Shape 23"/>
           <p:cNvSpPr/>
           <p:nvPr/>
         </p:nvSpPr>
@@ -14935,7 +15105,7 @@
       </p:sp>
       <p:sp>
         <p:nvSpPr>
-          <p:cNvPr id="26" name="Text 23"/>
+          <p:cNvPr id="27" name="Text 24"/>
           <p:cNvSpPr/>
           <p:nvPr/>
         </p:nvSpPr>
@@ -14974,7 +15144,7 @@
       </p:sp>
       <p:sp>
         <p:nvSpPr>
-          <p:cNvPr id="27" name="Shape 24"/>
+          <p:cNvPr id="28" name="Shape 25"/>
           <p:cNvSpPr/>
           <p:nvPr/>
         </p:nvSpPr>
@@ -14994,7 +15164,7 @@
       </p:sp>
       <p:sp>
         <p:nvSpPr>
-          <p:cNvPr id="28" name="Text 25"/>
+          <p:cNvPr id="29" name="Text 26"/>
           <p:cNvSpPr/>
           <p:nvPr/>
         </p:nvSpPr>
@@ -15033,7 +15203,7 @@
       </p:sp>
       <p:sp>
         <p:nvSpPr>
-          <p:cNvPr id="29" name="Shape 26"/>
+          <p:cNvPr id="30" name="Shape 27"/>
           <p:cNvSpPr/>
           <p:nvPr/>
         </p:nvSpPr>
@@ -15053,7 +15223,7 @@
       </p:sp>
       <p:sp>
         <p:nvSpPr>
-          <p:cNvPr id="30" name="Text 27"/>
+          <p:cNvPr id="31" name="Text 28"/>
           <p:cNvSpPr/>
           <p:nvPr/>
         </p:nvSpPr>
@@ -15092,7 +15262,7 @@
       </p:sp>
       <p:sp>
         <p:nvSpPr>
-          <p:cNvPr id="31" name="Shape 28"/>
+          <p:cNvPr id="32" name="Shape 29"/>
           <p:cNvSpPr/>
           <p:nvPr/>
         </p:nvSpPr>
@@ -15112,7 +15282,7 @@
       </p:sp>
       <p:sp>
         <p:nvSpPr>
-          <p:cNvPr id="32" name="Text 29"/>
+          <p:cNvPr id="33" name="Text 30"/>
           <p:cNvSpPr/>
           <p:nvPr/>
         </p:nvSpPr>
@@ -15151,7 +15321,7 @@
       </p:sp>
       <p:sp>
         <p:nvSpPr>
-          <p:cNvPr id="33" name="Shape 30"/>
+          <p:cNvPr id="34" name="Shape 31"/>
           <p:cNvSpPr/>
           <p:nvPr/>
         </p:nvSpPr>
@@ -15173,7 +15343,7 @@
       </p:sp>
       <p:sp>
         <p:nvSpPr>
-          <p:cNvPr id="34" name="Text 31"/>
+          <p:cNvPr id="35" name="Text 32"/>
           <p:cNvSpPr/>
           <p:nvPr/>
         </p:nvSpPr>
@@ -15212,7 +15382,7 @@
       </p:sp>
       <p:sp>
         <p:nvSpPr>
-          <p:cNvPr id="35" name="Text 32"/>
+          <p:cNvPr id="36" name="Text 33"/>
           <p:cNvSpPr/>
           <p:nvPr/>
         </p:nvSpPr>
@@ -15264,7 +15434,7 @@
         </p:nvSpPr>
         <p:spPr>
           <a:xfrm>
-            <a:off x="11368735" y="6437376"/>
+            <a:off x="11368735" y="6327648"/>
             <a:ext cx="365760" cy="274320"/>
           </a:xfrm>
           <a:prstGeom prst="rect">
@@ -15311,13 +15481,6 @@
 <file path=ppt/slides/slide18.xml><?xml version="1.0" encoding="utf-8"?>
 <p:sld xmlns:a="http://schemas.openxmlformats.org/drawingml/2006/main" xmlns:r="http://schemas.openxmlformats.org/officeDocument/2006/relationships" xmlns:p="http://schemas.openxmlformats.org/presentationml/2006/main">
   <p:cSld name="Slide 18">
-    <p:bg>
-      <p:bgPr>
-        <a:solidFill>
-          <a:srgbClr val="FFFFFF"/>
-        </a:solidFill>
-      </p:bgPr>
-    </p:bg>
     <p:spTree>
       <p:nvGrpSpPr>
         <p:cNvPr id="1" name=""/>
@@ -15334,7 +15497,29 @@
       </p:grpSpPr>
       <p:sp>
         <p:nvSpPr>
-          <p:cNvPr id="2" name="Text 0"/>
+          <p:cNvPr id="2" name="Shape 0"/>
+          <p:cNvSpPr/>
+          <p:nvPr/>
+        </p:nvSpPr>
+        <p:spPr>
+          <a:xfrm>
+            <a:off x="231343" y="194767"/>
+            <a:ext cx="11716207" cy="6473952"/>
+          </a:xfrm>
+          <a:prstGeom prst="roundRect">
+            <a:avLst>
+              <a:gd name="adj" fmla="val 3107"/>
+            </a:avLst>
+          </a:prstGeom>
+          <a:solidFill>
+            <a:srgbClr val="FFFFFF"/>
+          </a:solidFill>
+          <a:ln/>
+        </p:spPr>
+      </p:sp>
+      <p:sp>
+        <p:nvSpPr>
+          <p:cNvPr id="3" name="Text 1"/>
           <p:cNvSpPr/>
           <p:nvPr/>
         </p:nvSpPr>
@@ -15373,7 +15558,7 @@
       </p:sp>
       <p:sp>
         <p:nvSpPr>
-          <p:cNvPr id="3" name="Text 1"/>
+          <p:cNvPr id="4" name="Text 2"/>
           <p:cNvSpPr/>
           <p:nvPr/>
         </p:nvSpPr>
@@ -15412,7 +15597,7 @@
       </p:sp>
       <p:sp>
         <p:nvSpPr>
-          <p:cNvPr id="4" name="Text 2"/>
+          <p:cNvPr id="5" name="Text 3"/>
           <p:cNvSpPr/>
           <p:nvPr/>
         </p:nvSpPr>
@@ -15454,7 +15639,7 @@
       </p:sp>
       <p:sp>
         <p:nvSpPr>
-          <p:cNvPr id="5" name="Shape 3"/>
+          <p:cNvPr id="6" name="Shape 4"/>
           <p:cNvSpPr/>
           <p:nvPr/>
         </p:nvSpPr>
@@ -15476,7 +15661,7 @@
       </p:sp>
       <p:sp>
         <p:nvSpPr>
-          <p:cNvPr id="6" name="Text 4"/>
+          <p:cNvPr id="7" name="Text 5"/>
           <p:cNvSpPr/>
           <p:nvPr/>
         </p:nvSpPr>
@@ -15515,7 +15700,7 @@
       </p:sp>
       <p:pic>
         <p:nvPicPr>
-          <p:cNvPr id="7" name="Image 0" descr="preencoded.png">    </p:cNvPr>
+          <p:cNvPr id="8" name="Image 0" descr="preencoded.png">    </p:cNvPr>
           <p:cNvPicPr>
             <a:picLocks noChangeAspect="1"/>
           </p:cNvPicPr>
@@ -15529,7 +15714,7 @@
         </p:blipFill>
         <p:spPr>
           <a:xfrm>
-            <a:off x="566928" y="6254496"/>
+            <a:off x="566928" y="6126480"/>
             <a:ext cx="1481328" cy="457200"/>
           </a:xfrm>
           <a:prstGeom prst="rect">
@@ -15539,7 +15724,7 @@
       </p:pic>
       <p:sp>
         <p:nvSpPr>
-          <p:cNvPr id="8" name="Shape 5"/>
+          <p:cNvPr id="9" name="Shape 6"/>
           <p:cNvSpPr/>
           <p:nvPr/>
         </p:nvSpPr>
@@ -15566,7 +15751,7 @@
       </p:sp>
       <p:sp>
         <p:nvSpPr>
-          <p:cNvPr id="9" name="Shape 6"/>
+          <p:cNvPr id="10" name="Shape 7"/>
           <p:cNvSpPr/>
           <p:nvPr/>
         </p:nvSpPr>
@@ -15586,7 +15771,7 @@
       </p:sp>
       <p:sp>
         <p:nvSpPr>
-          <p:cNvPr id="10" name="Text 7"/>
+          <p:cNvPr id="11" name="Text 8"/>
           <p:cNvSpPr/>
           <p:nvPr/>
         </p:nvSpPr>
@@ -15625,7 +15810,7 @@
       </p:sp>
       <p:sp>
         <p:nvSpPr>
-          <p:cNvPr id="11" name="Text 8"/>
+          <p:cNvPr id="12" name="Text 9"/>
           <p:cNvSpPr/>
           <p:nvPr/>
         </p:nvSpPr>
@@ -15664,7 +15849,7 @@
       </p:sp>
       <p:sp>
         <p:nvSpPr>
-          <p:cNvPr id="12" name="Text 9"/>
+          <p:cNvPr id="13" name="Text 10"/>
           <p:cNvSpPr/>
           <p:nvPr/>
         </p:nvSpPr>
@@ -15706,7 +15891,7 @@
       </p:sp>
       <p:sp>
         <p:nvSpPr>
-          <p:cNvPr id="13" name="Shape 10"/>
+          <p:cNvPr id="14" name="Shape 11"/>
           <p:cNvSpPr/>
           <p:nvPr/>
         </p:nvSpPr>
@@ -15733,7 +15918,7 @@
       </p:sp>
       <p:sp>
         <p:nvSpPr>
-          <p:cNvPr id="14" name="Shape 11"/>
+          <p:cNvPr id="15" name="Shape 12"/>
           <p:cNvSpPr/>
           <p:nvPr/>
         </p:nvSpPr>
@@ -15753,7 +15938,7 @@
       </p:sp>
       <p:sp>
         <p:nvSpPr>
-          <p:cNvPr id="15" name="Text 12"/>
+          <p:cNvPr id="16" name="Text 13"/>
           <p:cNvSpPr/>
           <p:nvPr/>
         </p:nvSpPr>
@@ -15792,7 +15977,7 @@
       </p:sp>
       <p:sp>
         <p:nvSpPr>
-          <p:cNvPr id="16" name="Text 13"/>
+          <p:cNvPr id="17" name="Text 14"/>
           <p:cNvSpPr/>
           <p:nvPr/>
         </p:nvSpPr>
@@ -15831,7 +16016,7 @@
       </p:sp>
       <p:sp>
         <p:nvSpPr>
-          <p:cNvPr id="17" name="Text 14"/>
+          <p:cNvPr id="18" name="Text 15"/>
           <p:cNvSpPr/>
           <p:nvPr/>
         </p:nvSpPr>
@@ -15873,7 +16058,7 @@
       </p:sp>
       <p:sp>
         <p:nvSpPr>
-          <p:cNvPr id="18" name="Shape 15"/>
+          <p:cNvPr id="19" name="Shape 16"/>
           <p:cNvSpPr/>
           <p:nvPr/>
         </p:nvSpPr>
@@ -15895,7 +16080,7 @@
       </p:sp>
       <p:sp>
         <p:nvSpPr>
-          <p:cNvPr id="19" name="Shape 16"/>
+          <p:cNvPr id="20" name="Shape 17"/>
           <p:cNvSpPr/>
           <p:nvPr/>
         </p:nvSpPr>
@@ -15915,7 +16100,7 @@
       </p:sp>
       <p:sp>
         <p:nvSpPr>
-          <p:cNvPr id="20" name="Text 17"/>
+          <p:cNvPr id="21" name="Text 18"/>
           <p:cNvSpPr/>
           <p:nvPr/>
         </p:nvSpPr>
@@ -15954,7 +16139,7 @@
       </p:sp>
       <p:sp>
         <p:nvSpPr>
-          <p:cNvPr id="21" name="Text 18"/>
+          <p:cNvPr id="22" name="Text 19"/>
           <p:cNvSpPr/>
           <p:nvPr/>
         </p:nvSpPr>
@@ -15993,7 +16178,7 @@
       </p:sp>
       <p:sp>
         <p:nvSpPr>
-          <p:cNvPr id="22" name="Text 19"/>
+          <p:cNvPr id="23" name="Text 20"/>
           <p:cNvSpPr/>
           <p:nvPr/>
         </p:nvSpPr>
@@ -16035,7 +16220,7 @@
       </p:sp>
       <p:sp>
         <p:nvSpPr>
-          <p:cNvPr id="23" name="Shape 20"/>
+          <p:cNvPr id="24" name="Shape 21"/>
           <p:cNvSpPr/>
           <p:nvPr/>
         </p:nvSpPr>
@@ -16057,7 +16242,7 @@
       </p:sp>
       <p:sp>
         <p:nvSpPr>
-          <p:cNvPr id="24" name="Text 21"/>
+          <p:cNvPr id="25" name="Text 22"/>
           <p:cNvSpPr/>
           <p:nvPr/>
         </p:nvSpPr>
@@ -16096,7 +16281,7 @@
       </p:sp>
       <p:sp>
         <p:nvSpPr>
-          <p:cNvPr id="25" name="Text 22"/>
+          <p:cNvPr id="26" name="Text 23"/>
           <p:cNvSpPr/>
           <p:nvPr/>
         </p:nvSpPr>
@@ -16148,7 +16333,7 @@
         </p:nvSpPr>
         <p:spPr>
           <a:xfrm>
-            <a:off x="11368735" y="6437376"/>
+            <a:off x="11368735" y="6327648"/>
             <a:ext cx="365760" cy="274320"/>
           </a:xfrm>
           <a:prstGeom prst="rect">
@@ -16195,13 +16380,6 @@
 <file path=ppt/slides/slide19.xml><?xml version="1.0" encoding="utf-8"?>
 <p:sld xmlns:a="http://schemas.openxmlformats.org/drawingml/2006/main" xmlns:r="http://schemas.openxmlformats.org/officeDocument/2006/relationships" xmlns:p="http://schemas.openxmlformats.org/presentationml/2006/main">
   <p:cSld name="Slide 19">
-    <p:bg>
-      <p:bgPr>
-        <a:solidFill>
-          <a:srgbClr val="FFFFFF"/>
-        </a:solidFill>
-      </p:bgPr>
-    </p:bg>
     <p:spTree>
       <p:nvGrpSpPr>
         <p:cNvPr id="1" name=""/>
@@ -16218,7 +16396,29 @@
       </p:grpSpPr>
       <p:sp>
         <p:nvSpPr>
-          <p:cNvPr id="2" name="Text 0"/>
+          <p:cNvPr id="2" name="Shape 0"/>
+          <p:cNvSpPr/>
+          <p:nvPr/>
+        </p:nvSpPr>
+        <p:spPr>
+          <a:xfrm>
+            <a:off x="231343" y="194767"/>
+            <a:ext cx="11716207" cy="6473952"/>
+          </a:xfrm>
+          <a:prstGeom prst="roundRect">
+            <a:avLst>
+              <a:gd name="adj" fmla="val 3107"/>
+            </a:avLst>
+          </a:prstGeom>
+          <a:solidFill>
+            <a:srgbClr val="FFFFFF"/>
+          </a:solidFill>
+          <a:ln/>
+        </p:spPr>
+      </p:sp>
+      <p:sp>
+        <p:nvSpPr>
+          <p:cNvPr id="3" name="Text 1"/>
           <p:cNvSpPr/>
           <p:nvPr/>
         </p:nvSpPr>
@@ -16257,7 +16457,7 @@
       </p:sp>
       <p:sp>
         <p:nvSpPr>
-          <p:cNvPr id="3" name="Text 1"/>
+          <p:cNvPr id="4" name="Text 2"/>
           <p:cNvSpPr/>
           <p:nvPr/>
         </p:nvSpPr>
@@ -16296,7 +16496,7 @@
       </p:sp>
       <p:sp>
         <p:nvSpPr>
-          <p:cNvPr id="4" name="Shape 2"/>
+          <p:cNvPr id="5" name="Shape 3"/>
           <p:cNvSpPr/>
           <p:nvPr/>
         </p:nvSpPr>
@@ -16318,7 +16518,7 @@
       </p:sp>
       <p:sp>
         <p:nvSpPr>
-          <p:cNvPr id="5" name="Text 3"/>
+          <p:cNvPr id="6" name="Text 4"/>
           <p:cNvSpPr/>
           <p:nvPr/>
         </p:nvSpPr>
@@ -16357,7 +16557,7 @@
       </p:sp>
       <p:pic>
         <p:nvPicPr>
-          <p:cNvPr id="6" name="Image 0" descr="preencoded.png">    </p:cNvPr>
+          <p:cNvPr id="7" name="Image 0" descr="preencoded.png">    </p:cNvPr>
           <p:cNvPicPr>
             <a:picLocks noChangeAspect="1"/>
           </p:cNvPicPr>
@@ -16371,7 +16571,7 @@
         </p:blipFill>
         <p:spPr>
           <a:xfrm>
-            <a:off x="566928" y="6254496"/>
+            <a:off x="566928" y="6126480"/>
             <a:ext cx="1481328" cy="457200"/>
           </a:xfrm>
           <a:prstGeom prst="rect">
@@ -16381,7 +16581,7 @@
       </p:pic>
       <p:sp>
         <p:nvSpPr>
-          <p:cNvPr id="7" name="Shape 4"/>
+          <p:cNvPr id="8" name="Shape 5"/>
           <p:cNvSpPr/>
           <p:nvPr/>
         </p:nvSpPr>
@@ -16403,7 +16603,7 @@
       </p:sp>
       <p:sp>
         <p:nvSpPr>
-          <p:cNvPr id="8" name="Text 5"/>
+          <p:cNvPr id="9" name="Text 6"/>
           <p:cNvSpPr/>
           <p:nvPr/>
         </p:nvSpPr>
@@ -16442,7 +16642,7 @@
       </p:sp>
       <p:sp>
         <p:nvSpPr>
-          <p:cNvPr id="9" name="Text 6"/>
+          <p:cNvPr id="10" name="Text 7"/>
           <p:cNvSpPr/>
           <p:nvPr/>
         </p:nvSpPr>
@@ -16484,7 +16684,7 @@
       </p:sp>
       <p:sp>
         <p:nvSpPr>
-          <p:cNvPr id="10" name="Shape 7"/>
+          <p:cNvPr id="11" name="Shape 8"/>
           <p:cNvSpPr/>
           <p:nvPr/>
         </p:nvSpPr>
@@ -16506,7 +16706,7 @@
       </p:sp>
       <p:sp>
         <p:nvSpPr>
-          <p:cNvPr id="11" name="Text 8"/>
+          <p:cNvPr id="12" name="Text 9"/>
           <p:cNvSpPr/>
           <p:nvPr/>
         </p:nvSpPr>
@@ -16545,7 +16745,7 @@
       </p:sp>
       <p:sp>
         <p:nvSpPr>
-          <p:cNvPr id="12" name="Text 9"/>
+          <p:cNvPr id="13" name="Text 10"/>
           <p:cNvSpPr/>
           <p:nvPr/>
         </p:nvSpPr>
@@ -16587,7 +16787,7 @@
       </p:sp>
       <p:sp>
         <p:nvSpPr>
-          <p:cNvPr id="13" name="Shape 10"/>
+          <p:cNvPr id="14" name="Shape 11"/>
           <p:cNvSpPr/>
           <p:nvPr/>
         </p:nvSpPr>
@@ -16609,7 +16809,7 @@
       </p:sp>
       <p:sp>
         <p:nvSpPr>
-          <p:cNvPr id="14" name="Text 11"/>
+          <p:cNvPr id="15" name="Text 12"/>
           <p:cNvSpPr/>
           <p:nvPr/>
         </p:nvSpPr>
@@ -16648,7 +16848,7 @@
       </p:sp>
       <p:sp>
         <p:nvSpPr>
-          <p:cNvPr id="15" name="Text 12"/>
+          <p:cNvPr id="16" name="Text 13"/>
           <p:cNvSpPr/>
           <p:nvPr/>
         </p:nvSpPr>
@@ -16690,7 +16890,7 @@
       </p:sp>
       <p:sp>
         <p:nvSpPr>
-          <p:cNvPr id="16" name="Shape 13"/>
+          <p:cNvPr id="17" name="Shape 14"/>
           <p:cNvSpPr/>
           <p:nvPr/>
         </p:nvSpPr>
@@ -16717,7 +16917,7 @@
       </p:sp>
       <p:sp>
         <p:nvSpPr>
-          <p:cNvPr id="17" name="Text 14"/>
+          <p:cNvPr id="18" name="Text 15"/>
           <p:cNvSpPr/>
           <p:nvPr/>
         </p:nvSpPr>
@@ -16769,7 +16969,7 @@
         </p:nvSpPr>
         <p:spPr>
           <a:xfrm>
-            <a:off x="11368735" y="6437376"/>
+            <a:off x="11368735" y="6327648"/>
             <a:ext cx="365760" cy="274320"/>
           </a:xfrm>
           <a:prstGeom prst="rect">
@@ -16816,13 +17016,6 @@
 <file path=ppt/slides/slide2.xml><?xml version="1.0" encoding="utf-8"?>
 <p:sld xmlns:a="http://schemas.openxmlformats.org/drawingml/2006/main" xmlns:r="http://schemas.openxmlformats.org/officeDocument/2006/relationships" xmlns:p="http://schemas.openxmlformats.org/presentationml/2006/main">
   <p:cSld name="Slide 2">
-    <p:bg>
-      <p:bgPr>
-        <a:solidFill>
-          <a:srgbClr val="FFFFFF"/>
-        </a:solidFill>
-      </p:bgPr>
-    </p:bg>
     <p:spTree>
       <p:nvGrpSpPr>
         <p:cNvPr id="1" name=""/>
@@ -16839,7 +17032,29 @@
       </p:grpSpPr>
       <p:sp>
         <p:nvSpPr>
-          <p:cNvPr id="2" name="Text 0"/>
+          <p:cNvPr id="2" name="Shape 0"/>
+          <p:cNvSpPr/>
+          <p:nvPr/>
+        </p:nvSpPr>
+        <p:spPr>
+          <a:xfrm>
+            <a:off x="231343" y="194767"/>
+            <a:ext cx="11716207" cy="6473952"/>
+          </a:xfrm>
+          <a:prstGeom prst="roundRect">
+            <a:avLst>
+              <a:gd name="adj" fmla="val 3107"/>
+            </a:avLst>
+          </a:prstGeom>
+          <a:solidFill>
+            <a:srgbClr val="FFFFFF"/>
+          </a:solidFill>
+          <a:ln/>
+        </p:spPr>
+      </p:sp>
+      <p:sp>
+        <p:nvSpPr>
+          <p:cNvPr id="3" name="Text 1"/>
           <p:cNvSpPr/>
           <p:nvPr/>
         </p:nvSpPr>
@@ -16878,7 +17093,7 @@
       </p:sp>
       <p:sp>
         <p:nvSpPr>
-          <p:cNvPr id="3" name="Text 1"/>
+          <p:cNvPr id="4" name="Text 2"/>
           <p:cNvSpPr/>
           <p:nvPr/>
         </p:nvSpPr>
@@ -16920,7 +17135,7 @@
       </p:sp>
       <p:sp>
         <p:nvSpPr>
-          <p:cNvPr id="4" name="Shape 2"/>
+          <p:cNvPr id="5" name="Shape 3"/>
           <p:cNvSpPr/>
           <p:nvPr/>
         </p:nvSpPr>
@@ -16942,7 +17157,7 @@
       </p:sp>
       <p:sp>
         <p:nvSpPr>
-          <p:cNvPr id="5" name="Text 3"/>
+          <p:cNvPr id="6" name="Text 4"/>
           <p:cNvSpPr/>
           <p:nvPr/>
         </p:nvSpPr>
@@ -16981,7 +17196,7 @@
       </p:sp>
       <p:pic>
         <p:nvPicPr>
-          <p:cNvPr id="6" name="Image 0" descr="preencoded.png">    </p:cNvPr>
+          <p:cNvPr id="7" name="Image 0" descr="preencoded.png">    </p:cNvPr>
           <p:cNvPicPr>
             <a:picLocks noChangeAspect="1"/>
           </p:cNvPicPr>
@@ -16995,7 +17210,7 @@
         </p:blipFill>
         <p:spPr>
           <a:xfrm>
-            <a:off x="566928" y="6254496"/>
+            <a:off x="566928" y="6126480"/>
             <a:ext cx="1481328" cy="457200"/>
           </a:xfrm>
           <a:prstGeom prst="rect">
@@ -17005,7 +17220,7 @@
       </p:pic>
       <p:sp>
         <p:nvSpPr>
-          <p:cNvPr id="7" name="Shape 4"/>
+          <p:cNvPr id="8" name="Shape 5"/>
           <p:cNvSpPr/>
           <p:nvPr/>
         </p:nvSpPr>
@@ -17032,7 +17247,7 @@
       </p:sp>
       <p:sp>
         <p:nvSpPr>
-          <p:cNvPr id="8" name="Shape 5"/>
+          <p:cNvPr id="9" name="Shape 6"/>
           <p:cNvSpPr/>
           <p:nvPr/>
         </p:nvSpPr>
@@ -17052,7 +17267,7 @@
       </p:sp>
       <p:sp>
         <p:nvSpPr>
-          <p:cNvPr id="9" name="Text 6"/>
+          <p:cNvPr id="10" name="Text 7"/>
           <p:cNvSpPr/>
           <p:nvPr/>
         </p:nvSpPr>
@@ -17091,7 +17306,7 @@
       </p:sp>
       <p:sp>
         <p:nvSpPr>
-          <p:cNvPr id="10" name="Text 7"/>
+          <p:cNvPr id="11" name="Text 8"/>
           <p:cNvSpPr/>
           <p:nvPr/>
         </p:nvSpPr>
@@ -17130,7 +17345,7 @@
       </p:sp>
       <p:sp>
         <p:nvSpPr>
-          <p:cNvPr id="11" name="Text 8"/>
+          <p:cNvPr id="12" name="Text 9"/>
           <p:cNvSpPr/>
           <p:nvPr/>
         </p:nvSpPr>
@@ -17172,7 +17387,7 @@
       </p:sp>
       <p:sp>
         <p:nvSpPr>
-          <p:cNvPr id="12" name="Shape 9"/>
+          <p:cNvPr id="13" name="Shape 10"/>
           <p:cNvSpPr/>
           <p:nvPr/>
         </p:nvSpPr>
@@ -17199,7 +17414,7 @@
       </p:sp>
       <p:sp>
         <p:nvSpPr>
-          <p:cNvPr id="13" name="Shape 10"/>
+          <p:cNvPr id="14" name="Shape 11"/>
           <p:cNvSpPr/>
           <p:nvPr/>
         </p:nvSpPr>
@@ -17219,7 +17434,7 @@
       </p:sp>
       <p:sp>
         <p:nvSpPr>
-          <p:cNvPr id="14" name="Text 11"/>
+          <p:cNvPr id="15" name="Text 12"/>
           <p:cNvSpPr/>
           <p:nvPr/>
         </p:nvSpPr>
@@ -17258,7 +17473,7 @@
       </p:sp>
       <p:sp>
         <p:nvSpPr>
-          <p:cNvPr id="15" name="Text 12"/>
+          <p:cNvPr id="16" name="Text 13"/>
           <p:cNvSpPr/>
           <p:nvPr/>
         </p:nvSpPr>
@@ -17297,7 +17512,7 @@
       </p:sp>
       <p:sp>
         <p:nvSpPr>
-          <p:cNvPr id="16" name="Text 13"/>
+          <p:cNvPr id="17" name="Text 14"/>
           <p:cNvSpPr/>
           <p:nvPr/>
         </p:nvSpPr>
@@ -17339,7 +17554,7 @@
       </p:sp>
       <p:sp>
         <p:nvSpPr>
-          <p:cNvPr id="17" name="Shape 14"/>
+          <p:cNvPr id="18" name="Shape 15"/>
           <p:cNvSpPr/>
           <p:nvPr/>
         </p:nvSpPr>
@@ -17366,7 +17581,7 @@
       </p:sp>
       <p:sp>
         <p:nvSpPr>
-          <p:cNvPr id="18" name="Shape 15"/>
+          <p:cNvPr id="19" name="Shape 16"/>
           <p:cNvSpPr/>
           <p:nvPr/>
         </p:nvSpPr>
@@ -17386,7 +17601,7 @@
       </p:sp>
       <p:sp>
         <p:nvSpPr>
-          <p:cNvPr id="19" name="Text 16"/>
+          <p:cNvPr id="20" name="Text 17"/>
           <p:cNvSpPr/>
           <p:nvPr/>
         </p:nvSpPr>
@@ -17425,7 +17640,7 @@
       </p:sp>
       <p:sp>
         <p:nvSpPr>
-          <p:cNvPr id="20" name="Text 17"/>
+          <p:cNvPr id="21" name="Text 18"/>
           <p:cNvSpPr/>
           <p:nvPr/>
         </p:nvSpPr>
@@ -17464,7 +17679,7 @@
       </p:sp>
       <p:sp>
         <p:nvSpPr>
-          <p:cNvPr id="21" name="Text 18"/>
+          <p:cNvPr id="22" name="Text 19"/>
           <p:cNvSpPr/>
           <p:nvPr/>
         </p:nvSpPr>
@@ -17506,7 +17721,7 @@
       </p:sp>
       <p:sp>
         <p:nvSpPr>
-          <p:cNvPr id="22" name="Shape 19"/>
+          <p:cNvPr id="23" name="Shape 20"/>
           <p:cNvSpPr/>
           <p:nvPr/>
         </p:nvSpPr>
@@ -17533,7 +17748,7 @@
       </p:sp>
       <p:sp>
         <p:nvSpPr>
-          <p:cNvPr id="23" name="Shape 20"/>
+          <p:cNvPr id="24" name="Shape 21"/>
           <p:cNvSpPr/>
           <p:nvPr/>
         </p:nvSpPr>
@@ -17553,7 +17768,7 @@
       </p:sp>
       <p:sp>
         <p:nvSpPr>
-          <p:cNvPr id="24" name="Text 21"/>
+          <p:cNvPr id="25" name="Text 22"/>
           <p:cNvSpPr/>
           <p:nvPr/>
         </p:nvSpPr>
@@ -17592,7 +17807,7 @@
       </p:sp>
       <p:sp>
         <p:nvSpPr>
-          <p:cNvPr id="25" name="Text 22"/>
+          <p:cNvPr id="26" name="Text 23"/>
           <p:cNvSpPr/>
           <p:nvPr/>
         </p:nvSpPr>
@@ -17631,7 +17846,7 @@
       </p:sp>
       <p:sp>
         <p:nvSpPr>
-          <p:cNvPr id="26" name="Text 23"/>
+          <p:cNvPr id="27" name="Text 24"/>
           <p:cNvSpPr/>
           <p:nvPr/>
         </p:nvSpPr>
@@ -17673,7 +17888,7 @@
       </p:sp>
       <p:sp>
         <p:nvSpPr>
-          <p:cNvPr id="27" name="Shape 24"/>
+          <p:cNvPr id="28" name="Shape 25"/>
           <p:cNvSpPr/>
           <p:nvPr/>
         </p:nvSpPr>
@@ -17700,7 +17915,7 @@
       </p:sp>
       <p:sp>
         <p:nvSpPr>
-          <p:cNvPr id="28" name="Shape 25"/>
+          <p:cNvPr id="29" name="Shape 26"/>
           <p:cNvSpPr/>
           <p:nvPr/>
         </p:nvSpPr>
@@ -17720,7 +17935,7 @@
       </p:sp>
       <p:sp>
         <p:nvSpPr>
-          <p:cNvPr id="29" name="Text 26"/>
+          <p:cNvPr id="30" name="Text 27"/>
           <p:cNvSpPr/>
           <p:nvPr/>
         </p:nvSpPr>
@@ -17759,7 +17974,7 @@
       </p:sp>
       <p:sp>
         <p:nvSpPr>
-          <p:cNvPr id="30" name="Text 27"/>
+          <p:cNvPr id="31" name="Text 28"/>
           <p:cNvSpPr/>
           <p:nvPr/>
         </p:nvSpPr>
@@ -17798,7 +18013,7 @@
       </p:sp>
       <p:sp>
         <p:nvSpPr>
-          <p:cNvPr id="31" name="Text 28"/>
+          <p:cNvPr id="32" name="Text 29"/>
           <p:cNvSpPr/>
           <p:nvPr/>
         </p:nvSpPr>
@@ -17850,7 +18065,7 @@
         </p:nvSpPr>
         <p:spPr>
           <a:xfrm>
-            <a:off x="11368735" y="6437376"/>
+            <a:off x="11368735" y="6327648"/>
             <a:ext cx="365760" cy="274320"/>
           </a:xfrm>
           <a:prstGeom prst="rect">
@@ -17897,13 +18112,6 @@
 <file path=ppt/slides/slide20.xml><?xml version="1.0" encoding="utf-8"?>
 <p:sld xmlns:a="http://schemas.openxmlformats.org/drawingml/2006/main" xmlns:r="http://schemas.openxmlformats.org/officeDocument/2006/relationships" xmlns:p="http://schemas.openxmlformats.org/presentationml/2006/main">
   <p:cSld name="Slide 20">
-    <p:bg>
-      <p:bgPr>
-        <a:solidFill>
-          <a:srgbClr val="FFFFFF"/>
-        </a:solidFill>
-      </p:bgPr>
-    </p:bg>
     <p:spTree>
       <p:nvGrpSpPr>
         <p:cNvPr id="1" name=""/>
@@ -17920,7 +18128,29 @@
       </p:grpSpPr>
       <p:sp>
         <p:nvSpPr>
-          <p:cNvPr id="2" name="Text 0"/>
+          <p:cNvPr id="2" name="Shape 0"/>
+          <p:cNvSpPr/>
+          <p:nvPr/>
+        </p:nvSpPr>
+        <p:spPr>
+          <a:xfrm>
+            <a:off x="231343" y="194767"/>
+            <a:ext cx="11716207" cy="6473952"/>
+          </a:xfrm>
+          <a:prstGeom prst="roundRect">
+            <a:avLst>
+              <a:gd name="adj" fmla="val 3107"/>
+            </a:avLst>
+          </a:prstGeom>
+          <a:solidFill>
+            <a:srgbClr val="FFFFFF"/>
+          </a:solidFill>
+          <a:ln/>
+        </p:spPr>
+      </p:sp>
+      <p:sp>
+        <p:nvSpPr>
+          <p:cNvPr id="3" name="Text 1"/>
           <p:cNvSpPr/>
           <p:nvPr/>
         </p:nvSpPr>
@@ -17959,7 +18189,7 @@
       </p:sp>
       <p:sp>
         <p:nvSpPr>
-          <p:cNvPr id="3" name="Shape 1"/>
+          <p:cNvPr id="4" name="Shape 2"/>
           <p:cNvSpPr/>
           <p:nvPr/>
         </p:nvSpPr>
@@ -17981,7 +18211,7 @@
       </p:sp>
       <p:sp>
         <p:nvSpPr>
-          <p:cNvPr id="4" name="Text 2"/>
+          <p:cNvPr id="5" name="Text 3"/>
           <p:cNvSpPr/>
           <p:nvPr/>
         </p:nvSpPr>
@@ -18020,7 +18250,7 @@
       </p:sp>
       <p:pic>
         <p:nvPicPr>
-          <p:cNvPr id="5" name="Image 0" descr="preencoded.png">    </p:cNvPr>
+          <p:cNvPr id="6" name="Image 0" descr="preencoded.png">    </p:cNvPr>
           <p:cNvPicPr>
             <a:picLocks noChangeAspect="1"/>
           </p:cNvPicPr>
@@ -18034,7 +18264,7 @@
         </p:blipFill>
         <p:spPr>
           <a:xfrm>
-            <a:off x="566928" y="6254496"/>
+            <a:off x="566928" y="6126480"/>
             <a:ext cx="1481328" cy="457200"/>
           </a:xfrm>
           <a:prstGeom prst="rect">
@@ -18044,7 +18274,7 @@
       </p:pic>
       <p:sp>
         <p:nvSpPr>
-          <p:cNvPr id="6" name="Shape 3"/>
+          <p:cNvPr id="7" name="Shape 4"/>
           <p:cNvSpPr/>
           <p:nvPr/>
         </p:nvSpPr>
@@ -18066,7 +18296,7 @@
       </p:sp>
       <p:sp>
         <p:nvSpPr>
-          <p:cNvPr id="7" name="Shape 4"/>
+          <p:cNvPr id="8" name="Shape 5"/>
           <p:cNvSpPr/>
           <p:nvPr/>
         </p:nvSpPr>
@@ -18086,7 +18316,7 @@
       </p:sp>
       <p:sp>
         <p:nvSpPr>
-          <p:cNvPr id="8" name="Text 5"/>
+          <p:cNvPr id="9" name="Text 6"/>
           <p:cNvSpPr/>
           <p:nvPr/>
         </p:nvSpPr>
@@ -18125,7 +18355,7 @@
       </p:sp>
       <p:sp>
         <p:nvSpPr>
-          <p:cNvPr id="9" name="Text 6"/>
+          <p:cNvPr id="10" name="Text 7"/>
           <p:cNvSpPr/>
           <p:nvPr/>
         </p:nvSpPr>
@@ -18164,7 +18394,7 @@
       </p:sp>
       <p:sp>
         <p:nvSpPr>
-          <p:cNvPr id="10" name="Text 7"/>
+          <p:cNvPr id="11" name="Text 8"/>
           <p:cNvSpPr/>
           <p:nvPr/>
         </p:nvSpPr>
@@ -18206,7 +18436,7 @@
       </p:sp>
       <p:sp>
         <p:nvSpPr>
-          <p:cNvPr id="11" name="Shape 8"/>
+          <p:cNvPr id="12" name="Shape 9"/>
           <p:cNvSpPr/>
           <p:nvPr/>
         </p:nvSpPr>
@@ -18228,7 +18458,7 @@
       </p:sp>
       <p:sp>
         <p:nvSpPr>
-          <p:cNvPr id="12" name="Shape 9"/>
+          <p:cNvPr id="13" name="Shape 10"/>
           <p:cNvSpPr/>
           <p:nvPr/>
         </p:nvSpPr>
@@ -18248,7 +18478,7 @@
       </p:sp>
       <p:sp>
         <p:nvSpPr>
-          <p:cNvPr id="13" name="Text 10"/>
+          <p:cNvPr id="14" name="Text 11"/>
           <p:cNvSpPr/>
           <p:nvPr/>
         </p:nvSpPr>
@@ -18287,7 +18517,7 @@
       </p:sp>
       <p:sp>
         <p:nvSpPr>
-          <p:cNvPr id="14" name="Text 11"/>
+          <p:cNvPr id="15" name="Text 12"/>
           <p:cNvSpPr/>
           <p:nvPr/>
         </p:nvSpPr>
@@ -18326,7 +18556,7 @@
       </p:sp>
       <p:sp>
         <p:nvSpPr>
-          <p:cNvPr id="15" name="Text 12"/>
+          <p:cNvPr id="16" name="Text 13"/>
           <p:cNvSpPr/>
           <p:nvPr/>
         </p:nvSpPr>
@@ -18368,7 +18598,7 @@
       </p:sp>
       <p:sp>
         <p:nvSpPr>
-          <p:cNvPr id="16" name="Shape 13"/>
+          <p:cNvPr id="17" name="Shape 14"/>
           <p:cNvSpPr/>
           <p:nvPr/>
         </p:nvSpPr>
@@ -18390,7 +18620,7 @@
       </p:sp>
       <p:sp>
         <p:nvSpPr>
-          <p:cNvPr id="17" name="Shape 14"/>
+          <p:cNvPr id="18" name="Shape 15"/>
           <p:cNvSpPr/>
           <p:nvPr/>
         </p:nvSpPr>
@@ -18410,7 +18640,7 @@
       </p:sp>
       <p:sp>
         <p:nvSpPr>
-          <p:cNvPr id="18" name="Text 15"/>
+          <p:cNvPr id="19" name="Text 16"/>
           <p:cNvSpPr/>
           <p:nvPr/>
         </p:nvSpPr>
@@ -18449,7 +18679,7 @@
       </p:sp>
       <p:sp>
         <p:nvSpPr>
-          <p:cNvPr id="19" name="Text 16"/>
+          <p:cNvPr id="20" name="Text 17"/>
           <p:cNvSpPr/>
           <p:nvPr/>
         </p:nvSpPr>
@@ -18488,7 +18718,7 @@
       </p:sp>
       <p:sp>
         <p:nvSpPr>
-          <p:cNvPr id="20" name="Text 17"/>
+          <p:cNvPr id="21" name="Text 18"/>
           <p:cNvSpPr/>
           <p:nvPr/>
         </p:nvSpPr>
@@ -18530,7 +18760,7 @@
       </p:sp>
       <p:sp>
         <p:nvSpPr>
-          <p:cNvPr id="21" name="Shape 18"/>
+          <p:cNvPr id="22" name="Shape 19"/>
           <p:cNvSpPr/>
           <p:nvPr/>
         </p:nvSpPr>
@@ -18552,7 +18782,7 @@
       </p:sp>
       <p:sp>
         <p:nvSpPr>
-          <p:cNvPr id="22" name="Shape 19"/>
+          <p:cNvPr id="23" name="Shape 20"/>
           <p:cNvSpPr/>
           <p:nvPr/>
         </p:nvSpPr>
@@ -18572,7 +18802,7 @@
       </p:sp>
       <p:sp>
         <p:nvSpPr>
-          <p:cNvPr id="23" name="Text 20"/>
+          <p:cNvPr id="24" name="Text 21"/>
           <p:cNvSpPr/>
           <p:nvPr/>
         </p:nvSpPr>
@@ -18611,7 +18841,7 @@
       </p:sp>
       <p:sp>
         <p:nvSpPr>
-          <p:cNvPr id="24" name="Text 21"/>
+          <p:cNvPr id="25" name="Text 22"/>
           <p:cNvSpPr/>
           <p:nvPr/>
         </p:nvSpPr>
@@ -18650,7 +18880,7 @@
       </p:sp>
       <p:sp>
         <p:nvSpPr>
-          <p:cNvPr id="25" name="Text 22"/>
+          <p:cNvPr id="26" name="Text 23"/>
           <p:cNvSpPr/>
           <p:nvPr/>
         </p:nvSpPr>
@@ -18692,7 +18922,7 @@
       </p:sp>
       <p:sp>
         <p:nvSpPr>
-          <p:cNvPr id="26" name="Shape 23"/>
+          <p:cNvPr id="27" name="Shape 24"/>
           <p:cNvSpPr/>
           <p:nvPr/>
         </p:nvSpPr>
@@ -18714,7 +18944,7 @@
       </p:sp>
       <p:sp>
         <p:nvSpPr>
-          <p:cNvPr id="27" name="Text 24"/>
+          <p:cNvPr id="28" name="Text 25"/>
           <p:cNvSpPr/>
           <p:nvPr/>
         </p:nvSpPr>
@@ -18753,7 +18983,7 @@
       </p:sp>
       <p:sp>
         <p:nvSpPr>
-          <p:cNvPr id="28" name="Text 25"/>
+          <p:cNvPr id="29" name="Text 26"/>
           <p:cNvSpPr/>
           <p:nvPr/>
         </p:nvSpPr>
@@ -18805,7 +19035,7 @@
         </p:nvSpPr>
         <p:spPr>
           <a:xfrm>
-            <a:off x="11368735" y="6437376"/>
+            <a:off x="11368735" y="6327648"/>
             <a:ext cx="365760" cy="274320"/>
           </a:xfrm>
           <a:prstGeom prst="rect">
@@ -18852,13 +19082,6 @@
 <file path=ppt/slides/slide21.xml><?xml version="1.0" encoding="utf-8"?>
 <p:sld xmlns:a="http://schemas.openxmlformats.org/drawingml/2006/main" xmlns:r="http://schemas.openxmlformats.org/officeDocument/2006/relationships" xmlns:p="http://schemas.openxmlformats.org/presentationml/2006/main">
   <p:cSld name="Slide 21">
-    <p:bg>
-      <p:bgPr>
-        <a:solidFill>
-          <a:srgbClr val="FFFFFF"/>
-        </a:solidFill>
-      </p:bgPr>
-    </p:bg>
     <p:spTree>
       <p:nvGrpSpPr>
         <p:cNvPr id="1" name=""/>
@@ -18875,7 +19098,29 @@
       </p:grpSpPr>
       <p:sp>
         <p:nvSpPr>
-          <p:cNvPr id="2" name="Text 0"/>
+          <p:cNvPr id="2" name="Shape 0"/>
+          <p:cNvSpPr/>
+          <p:nvPr/>
+        </p:nvSpPr>
+        <p:spPr>
+          <a:xfrm>
+            <a:off x="231343" y="194767"/>
+            <a:ext cx="11716207" cy="6473952"/>
+          </a:xfrm>
+          <a:prstGeom prst="roundRect">
+            <a:avLst>
+              <a:gd name="adj" fmla="val 3107"/>
+            </a:avLst>
+          </a:prstGeom>
+          <a:solidFill>
+            <a:srgbClr val="FFFFFF"/>
+          </a:solidFill>
+          <a:ln/>
+        </p:spPr>
+      </p:sp>
+      <p:sp>
+        <p:nvSpPr>
+          <p:cNvPr id="3" name="Text 1"/>
           <p:cNvSpPr/>
           <p:nvPr/>
         </p:nvSpPr>
@@ -18914,7 +19159,7 @@
       </p:sp>
       <p:sp>
         <p:nvSpPr>
-          <p:cNvPr id="3" name="Shape 1"/>
+          <p:cNvPr id="4" name="Shape 2"/>
           <p:cNvSpPr/>
           <p:nvPr/>
         </p:nvSpPr>
@@ -18936,7 +19181,7 @@
       </p:sp>
       <p:sp>
         <p:nvSpPr>
-          <p:cNvPr id="4" name="Text 2"/>
+          <p:cNvPr id="5" name="Text 3"/>
           <p:cNvSpPr/>
           <p:nvPr/>
         </p:nvSpPr>
@@ -18975,7 +19220,7 @@
       </p:sp>
       <p:pic>
         <p:nvPicPr>
-          <p:cNvPr id="5" name="Image 0" descr="preencoded.png">    </p:cNvPr>
+          <p:cNvPr id="6" name="Image 0" descr="preencoded.png">    </p:cNvPr>
           <p:cNvPicPr>
             <a:picLocks noChangeAspect="1"/>
           </p:cNvPicPr>
@@ -18989,7 +19234,7 @@
         </p:blipFill>
         <p:spPr>
           <a:xfrm>
-            <a:off x="566928" y="6254496"/>
+            <a:off x="566928" y="6126480"/>
             <a:ext cx="1481328" cy="457200"/>
           </a:xfrm>
           <a:prstGeom prst="rect">
@@ -18999,7 +19244,7 @@
       </p:pic>
       <p:sp>
         <p:nvSpPr>
-          <p:cNvPr id="6" name="Shape 3"/>
+          <p:cNvPr id="7" name="Shape 4"/>
           <p:cNvSpPr/>
           <p:nvPr/>
         </p:nvSpPr>
@@ -19019,7 +19264,7 @@
       </p:sp>
       <p:sp>
         <p:nvSpPr>
-          <p:cNvPr id="7" name="Text 4"/>
+          <p:cNvPr id="8" name="Text 5"/>
           <p:cNvSpPr/>
           <p:nvPr/>
         </p:nvSpPr>
@@ -19058,7 +19303,7 @@
       </p:sp>
       <p:sp>
         <p:nvSpPr>
-          <p:cNvPr id="8" name="Text 5"/>
+          <p:cNvPr id="9" name="Text 6"/>
           <p:cNvSpPr/>
           <p:nvPr/>
         </p:nvSpPr>
@@ -19111,7 +19356,7 @@
       </p:sp>
       <p:sp>
         <p:nvSpPr>
-          <p:cNvPr id="9" name="Shape 6"/>
+          <p:cNvPr id="10" name="Shape 7"/>
           <p:cNvSpPr/>
           <p:nvPr/>
         </p:nvSpPr>
@@ -19131,7 +19376,7 @@
       </p:sp>
       <p:sp>
         <p:nvSpPr>
-          <p:cNvPr id="10" name="Text 7"/>
+          <p:cNvPr id="11" name="Text 8"/>
           <p:cNvSpPr/>
           <p:nvPr/>
         </p:nvSpPr>
@@ -19170,7 +19415,7 @@
       </p:sp>
       <p:sp>
         <p:nvSpPr>
-          <p:cNvPr id="11" name="Text 8"/>
+          <p:cNvPr id="12" name="Text 9"/>
           <p:cNvSpPr/>
           <p:nvPr/>
         </p:nvSpPr>
@@ -19223,7 +19468,7 @@
       </p:sp>
       <p:sp>
         <p:nvSpPr>
-          <p:cNvPr id="12" name="Shape 9"/>
+          <p:cNvPr id="13" name="Shape 10"/>
           <p:cNvSpPr/>
           <p:nvPr/>
         </p:nvSpPr>
@@ -19243,7 +19488,7 @@
       </p:sp>
       <p:sp>
         <p:nvSpPr>
-          <p:cNvPr id="13" name="Text 10"/>
+          <p:cNvPr id="14" name="Text 11"/>
           <p:cNvSpPr/>
           <p:nvPr/>
         </p:nvSpPr>
@@ -19282,7 +19527,7 @@
       </p:sp>
       <p:sp>
         <p:nvSpPr>
-          <p:cNvPr id="14" name="Text 11"/>
+          <p:cNvPr id="15" name="Text 12"/>
           <p:cNvSpPr/>
           <p:nvPr/>
         </p:nvSpPr>
@@ -19335,7 +19580,7 @@
       </p:sp>
       <p:sp>
         <p:nvSpPr>
-          <p:cNvPr id="15" name="Shape 12"/>
+          <p:cNvPr id="16" name="Shape 13"/>
           <p:cNvSpPr/>
           <p:nvPr/>
         </p:nvSpPr>
@@ -19355,7 +19600,7 @@
       </p:sp>
       <p:sp>
         <p:nvSpPr>
-          <p:cNvPr id="16" name="Text 13"/>
+          <p:cNvPr id="17" name="Text 14"/>
           <p:cNvSpPr/>
           <p:nvPr/>
         </p:nvSpPr>
@@ -19394,7 +19639,7 @@
       </p:sp>
       <p:sp>
         <p:nvSpPr>
-          <p:cNvPr id="17" name="Text 14"/>
+          <p:cNvPr id="18" name="Text 15"/>
           <p:cNvSpPr/>
           <p:nvPr/>
         </p:nvSpPr>
@@ -19447,7 +19692,7 @@
       </p:sp>
       <p:sp>
         <p:nvSpPr>
-          <p:cNvPr id="18" name="Shape 15"/>
+          <p:cNvPr id="19" name="Shape 16"/>
           <p:cNvSpPr/>
           <p:nvPr/>
         </p:nvSpPr>
@@ -19467,7 +19712,7 @@
       </p:sp>
       <p:sp>
         <p:nvSpPr>
-          <p:cNvPr id="19" name="Text 16"/>
+          <p:cNvPr id="20" name="Text 17"/>
           <p:cNvSpPr/>
           <p:nvPr/>
         </p:nvSpPr>
@@ -19506,7 +19751,7 @@
       </p:sp>
       <p:sp>
         <p:nvSpPr>
-          <p:cNvPr id="20" name="Text 17"/>
+          <p:cNvPr id="21" name="Text 18"/>
           <p:cNvSpPr/>
           <p:nvPr/>
         </p:nvSpPr>
@@ -19569,7 +19814,7 @@
         </p:nvSpPr>
         <p:spPr>
           <a:xfrm>
-            <a:off x="11368735" y="6437376"/>
+            <a:off x="11368735" y="6327648"/>
             <a:ext cx="365760" cy="274320"/>
           </a:xfrm>
           <a:prstGeom prst="rect">
@@ -19616,13 +19861,6 @@
 <file path=ppt/slides/slide22.xml><?xml version="1.0" encoding="utf-8"?>
 <p:sld xmlns:a="http://schemas.openxmlformats.org/drawingml/2006/main" xmlns:r="http://schemas.openxmlformats.org/officeDocument/2006/relationships" xmlns:p="http://schemas.openxmlformats.org/presentationml/2006/main">
   <p:cSld name="Slide 22">
-    <p:bg>
-      <p:bgPr>
-        <a:solidFill>
-          <a:srgbClr val="FFFFFF"/>
-        </a:solidFill>
-      </p:bgPr>
-    </p:bg>
     <p:spTree>
       <p:nvGrpSpPr>
         <p:cNvPr id="1" name=""/>
@@ -19639,7 +19877,29 @@
       </p:grpSpPr>
       <p:sp>
         <p:nvSpPr>
-          <p:cNvPr id="2" name="Text 0"/>
+          <p:cNvPr id="2" name="Shape 0"/>
+          <p:cNvSpPr/>
+          <p:nvPr/>
+        </p:nvSpPr>
+        <p:spPr>
+          <a:xfrm>
+            <a:off x="231343" y="194767"/>
+            <a:ext cx="11716207" cy="6473952"/>
+          </a:xfrm>
+          <a:prstGeom prst="roundRect">
+            <a:avLst>
+              <a:gd name="adj" fmla="val 3107"/>
+            </a:avLst>
+          </a:prstGeom>
+          <a:solidFill>
+            <a:srgbClr val="FFFFFF"/>
+          </a:solidFill>
+          <a:ln/>
+        </p:spPr>
+      </p:sp>
+      <p:sp>
+        <p:nvSpPr>
+          <p:cNvPr id="3" name="Text 1"/>
           <p:cNvSpPr/>
           <p:nvPr/>
         </p:nvSpPr>
@@ -19678,7 +19938,7 @@
       </p:sp>
       <p:sp>
         <p:nvSpPr>
-          <p:cNvPr id="3" name="Shape 1"/>
+          <p:cNvPr id="4" name="Shape 2"/>
           <p:cNvSpPr/>
           <p:nvPr/>
         </p:nvSpPr>
@@ -19700,7 +19960,7 @@
       </p:sp>
       <p:sp>
         <p:nvSpPr>
-          <p:cNvPr id="4" name="Text 2"/>
+          <p:cNvPr id="5" name="Text 3"/>
           <p:cNvSpPr/>
           <p:nvPr/>
         </p:nvSpPr>
@@ -19739,7 +19999,7 @@
       </p:sp>
       <p:pic>
         <p:nvPicPr>
-          <p:cNvPr id="5" name="Image 0" descr="preencoded.png">    </p:cNvPr>
+          <p:cNvPr id="6" name="Image 0" descr="preencoded.png">    </p:cNvPr>
           <p:cNvPicPr>
             <a:picLocks noChangeAspect="1"/>
           </p:cNvPicPr>
@@ -19753,7 +20013,7 @@
         </p:blipFill>
         <p:spPr>
           <a:xfrm>
-            <a:off x="566928" y="6254496"/>
+            <a:off x="566928" y="6126480"/>
             <a:ext cx="1481328" cy="457200"/>
           </a:xfrm>
           <a:prstGeom prst="rect">
@@ -19763,7 +20023,7 @@
       </p:pic>
       <p:sp>
         <p:nvSpPr>
-          <p:cNvPr id="6" name="Shape 3"/>
+          <p:cNvPr id="7" name="Shape 4"/>
           <p:cNvSpPr/>
           <p:nvPr/>
         </p:nvSpPr>
@@ -19785,7 +20045,7 @@
       </p:sp>
       <p:sp>
         <p:nvSpPr>
-          <p:cNvPr id="7" name="Text 4"/>
+          <p:cNvPr id="8" name="Text 5"/>
           <p:cNvSpPr/>
           <p:nvPr/>
         </p:nvSpPr>
@@ -19824,7 +20084,7 @@
       </p:sp>
       <p:sp>
         <p:nvSpPr>
-          <p:cNvPr id="8" name="Text 5"/>
+          <p:cNvPr id="9" name="Text 6"/>
           <p:cNvSpPr/>
           <p:nvPr/>
         </p:nvSpPr>
@@ -19866,7 +20126,7 @@
       </p:sp>
       <p:sp>
         <p:nvSpPr>
-          <p:cNvPr id="9" name="Shape 6"/>
+          <p:cNvPr id="10" name="Shape 7"/>
           <p:cNvSpPr/>
           <p:nvPr/>
         </p:nvSpPr>
@@ -19888,7 +20148,7 @@
       </p:sp>
       <p:sp>
         <p:nvSpPr>
-          <p:cNvPr id="10" name="Text 7"/>
+          <p:cNvPr id="11" name="Text 8"/>
           <p:cNvSpPr/>
           <p:nvPr/>
         </p:nvSpPr>
@@ -19927,7 +20187,7 @@
       </p:sp>
       <p:sp>
         <p:nvSpPr>
-          <p:cNvPr id="11" name="Text 8"/>
+          <p:cNvPr id="12" name="Text 9"/>
           <p:cNvSpPr/>
           <p:nvPr/>
         </p:nvSpPr>
@@ -19969,7 +20229,7 @@
       </p:sp>
       <p:sp>
         <p:nvSpPr>
-          <p:cNvPr id="12" name="Shape 9"/>
+          <p:cNvPr id="13" name="Shape 10"/>
           <p:cNvSpPr/>
           <p:nvPr/>
         </p:nvSpPr>
@@ -19991,7 +20251,7 @@
       </p:sp>
       <p:sp>
         <p:nvSpPr>
-          <p:cNvPr id="13" name="Text 10"/>
+          <p:cNvPr id="14" name="Text 11"/>
           <p:cNvSpPr/>
           <p:nvPr/>
         </p:nvSpPr>
@@ -20030,7 +20290,7 @@
       </p:sp>
       <p:sp>
         <p:nvSpPr>
-          <p:cNvPr id="14" name="Text 11"/>
+          <p:cNvPr id="15" name="Text 12"/>
           <p:cNvSpPr/>
           <p:nvPr/>
         </p:nvSpPr>
@@ -20072,7 +20332,7 @@
       </p:sp>
       <p:sp>
         <p:nvSpPr>
-          <p:cNvPr id="15" name="Shape 12"/>
+          <p:cNvPr id="16" name="Shape 13"/>
           <p:cNvSpPr/>
           <p:nvPr/>
         </p:nvSpPr>
@@ -20099,7 +20359,7 @@
       </p:sp>
       <p:sp>
         <p:nvSpPr>
-          <p:cNvPr id="16" name="Text 13"/>
+          <p:cNvPr id="17" name="Text 14"/>
           <p:cNvSpPr/>
           <p:nvPr/>
         </p:nvSpPr>
@@ -20151,7 +20411,7 @@
         </p:nvSpPr>
         <p:spPr>
           <a:xfrm>
-            <a:off x="11368735" y="6437376"/>
+            <a:off x="11368735" y="6327648"/>
             <a:ext cx="365760" cy="274320"/>
           </a:xfrm>
           <a:prstGeom prst="rect">
@@ -20198,13 +20458,6 @@
 <file path=ppt/slides/slide23.xml><?xml version="1.0" encoding="utf-8"?>
 <p:sld xmlns:a="http://schemas.openxmlformats.org/drawingml/2006/main" xmlns:r="http://schemas.openxmlformats.org/officeDocument/2006/relationships" xmlns:p="http://schemas.openxmlformats.org/presentationml/2006/main">
   <p:cSld name="Slide 23">
-    <p:bg>
-      <p:bgPr>
-        <a:solidFill>
-          <a:srgbClr val="FFFFFF"/>
-        </a:solidFill>
-      </p:bgPr>
-    </p:bg>
     <p:spTree>
       <p:nvGrpSpPr>
         <p:cNvPr id="1" name=""/>
@@ -20221,7 +20474,29 @@
       </p:grpSpPr>
       <p:sp>
         <p:nvSpPr>
-          <p:cNvPr id="2" name="Text 0"/>
+          <p:cNvPr id="2" name="Shape 0"/>
+          <p:cNvSpPr/>
+          <p:nvPr/>
+        </p:nvSpPr>
+        <p:spPr>
+          <a:xfrm>
+            <a:off x="231343" y="194767"/>
+            <a:ext cx="11716207" cy="6473952"/>
+          </a:xfrm>
+          <a:prstGeom prst="roundRect">
+            <a:avLst>
+              <a:gd name="adj" fmla="val 3107"/>
+            </a:avLst>
+          </a:prstGeom>
+          <a:solidFill>
+            <a:srgbClr val="FFFFFF"/>
+          </a:solidFill>
+          <a:ln/>
+        </p:spPr>
+      </p:sp>
+      <p:sp>
+        <p:nvSpPr>
+          <p:cNvPr id="3" name="Text 1"/>
           <p:cNvSpPr/>
           <p:nvPr/>
         </p:nvSpPr>
@@ -20260,7 +20535,7 @@
       </p:sp>
       <p:sp>
         <p:nvSpPr>
-          <p:cNvPr id="3" name="Shape 1"/>
+          <p:cNvPr id="4" name="Shape 2"/>
           <p:cNvSpPr/>
           <p:nvPr/>
         </p:nvSpPr>
@@ -20282,7 +20557,7 @@
       </p:sp>
       <p:sp>
         <p:nvSpPr>
-          <p:cNvPr id="4" name="Text 2"/>
+          <p:cNvPr id="5" name="Text 3"/>
           <p:cNvSpPr/>
           <p:nvPr/>
         </p:nvSpPr>
@@ -20321,7 +20596,7 @@
       </p:sp>
       <p:pic>
         <p:nvPicPr>
-          <p:cNvPr id="5" name="Image 0" descr="preencoded.png">    </p:cNvPr>
+          <p:cNvPr id="6" name="Image 0" descr="preencoded.png">    </p:cNvPr>
           <p:cNvPicPr>
             <a:picLocks noChangeAspect="1"/>
           </p:cNvPicPr>
@@ -20335,7 +20610,7 @@
         </p:blipFill>
         <p:spPr>
           <a:xfrm>
-            <a:off x="566928" y="6254496"/>
+            <a:off x="566928" y="6126480"/>
             <a:ext cx="1481328" cy="457200"/>
           </a:xfrm>
           <a:prstGeom prst="rect">
@@ -20345,7 +20620,7 @@
       </p:pic>
       <p:sp>
         <p:nvSpPr>
-          <p:cNvPr id="6" name="Shape 3"/>
+          <p:cNvPr id="7" name="Shape 4"/>
           <p:cNvSpPr/>
           <p:nvPr/>
         </p:nvSpPr>
@@ -20372,7 +20647,7 @@
       </p:sp>
       <p:sp>
         <p:nvSpPr>
-          <p:cNvPr id="7" name="Shape 4"/>
+          <p:cNvPr id="8" name="Shape 5"/>
           <p:cNvSpPr/>
           <p:nvPr/>
         </p:nvSpPr>
@@ -20399,7 +20674,7 @@
       </p:sp>
       <p:sp>
         <p:nvSpPr>
-          <p:cNvPr id="8" name="Shape 5"/>
+          <p:cNvPr id="9" name="Shape 6"/>
           <p:cNvSpPr/>
           <p:nvPr/>
         </p:nvSpPr>
@@ -20419,7 +20694,7 @@
       </p:sp>
       <p:sp>
         <p:nvSpPr>
-          <p:cNvPr id="9" name="Shape 6"/>
+          <p:cNvPr id="10" name="Shape 7"/>
           <p:cNvSpPr/>
           <p:nvPr/>
         </p:nvSpPr>
@@ -20439,7 +20714,7 @@
       </p:sp>
       <p:sp>
         <p:nvSpPr>
-          <p:cNvPr id="10" name="Text 7"/>
+          <p:cNvPr id="11" name="Text 8"/>
           <p:cNvSpPr/>
           <p:nvPr/>
         </p:nvSpPr>
@@ -20478,7 +20753,7 @@
       </p:sp>
       <p:sp>
         <p:nvSpPr>
-          <p:cNvPr id="11" name="Shape 8"/>
+          <p:cNvPr id="12" name="Shape 9"/>
           <p:cNvSpPr/>
           <p:nvPr/>
         </p:nvSpPr>
@@ -20505,7 +20780,7 @@
       </p:sp>
       <p:sp>
         <p:nvSpPr>
-          <p:cNvPr id="12" name="Shape 9"/>
+          <p:cNvPr id="13" name="Shape 10"/>
           <p:cNvSpPr/>
           <p:nvPr/>
         </p:nvSpPr>
@@ -20525,7 +20800,7 @@
       </p:sp>
       <p:sp>
         <p:nvSpPr>
-          <p:cNvPr id="13" name="Shape 10"/>
+          <p:cNvPr id="14" name="Shape 11"/>
           <p:cNvSpPr/>
           <p:nvPr/>
         </p:nvSpPr>
@@ -20545,7 +20820,7 @@
       </p:sp>
       <p:sp>
         <p:nvSpPr>
-          <p:cNvPr id="14" name="Text 11"/>
+          <p:cNvPr id="15" name="Text 12"/>
           <p:cNvSpPr/>
           <p:nvPr/>
         </p:nvSpPr>
@@ -20584,7 +20859,7 @@
       </p:sp>
       <p:sp>
         <p:nvSpPr>
-          <p:cNvPr id="15" name="Shape 12"/>
+          <p:cNvPr id="16" name="Shape 13"/>
           <p:cNvSpPr/>
           <p:nvPr/>
         </p:nvSpPr>
@@ -20611,7 +20886,7 @@
       </p:sp>
       <p:sp>
         <p:nvSpPr>
-          <p:cNvPr id="16" name="Shape 13"/>
+          <p:cNvPr id="17" name="Shape 14"/>
           <p:cNvSpPr/>
           <p:nvPr/>
         </p:nvSpPr>
@@ -20631,7 +20906,7 @@
       </p:sp>
       <p:sp>
         <p:nvSpPr>
-          <p:cNvPr id="17" name="Shape 14"/>
+          <p:cNvPr id="18" name="Shape 15"/>
           <p:cNvSpPr/>
           <p:nvPr/>
         </p:nvSpPr>
@@ -20651,7 +20926,7 @@
       </p:sp>
       <p:sp>
         <p:nvSpPr>
-          <p:cNvPr id="18" name="Text 15"/>
+          <p:cNvPr id="19" name="Text 16"/>
           <p:cNvSpPr/>
           <p:nvPr/>
         </p:nvSpPr>
@@ -20690,7 +20965,7 @@
       </p:sp>
       <p:sp>
         <p:nvSpPr>
-          <p:cNvPr id="19" name="Shape 16"/>
+          <p:cNvPr id="20" name="Shape 17"/>
           <p:cNvSpPr/>
           <p:nvPr/>
         </p:nvSpPr>
@@ -20717,7 +20992,7 @@
       </p:sp>
       <p:sp>
         <p:nvSpPr>
-          <p:cNvPr id="20" name="Shape 17"/>
+          <p:cNvPr id="21" name="Shape 18"/>
           <p:cNvSpPr/>
           <p:nvPr/>
         </p:nvSpPr>
@@ -20737,7 +21012,7 @@
       </p:sp>
       <p:sp>
         <p:nvSpPr>
-          <p:cNvPr id="21" name="Shape 18"/>
+          <p:cNvPr id="22" name="Shape 19"/>
           <p:cNvSpPr/>
           <p:nvPr/>
         </p:nvSpPr>
@@ -20757,7 +21032,7 @@
       </p:sp>
       <p:sp>
         <p:nvSpPr>
-          <p:cNvPr id="22" name="Text 19"/>
+          <p:cNvPr id="23" name="Text 20"/>
           <p:cNvSpPr/>
           <p:nvPr/>
         </p:nvSpPr>
@@ -20796,7 +21071,7 @@
       </p:sp>
       <p:sp>
         <p:nvSpPr>
-          <p:cNvPr id="23" name="Text 20"/>
+          <p:cNvPr id="24" name="Text 21"/>
           <p:cNvSpPr/>
           <p:nvPr/>
         </p:nvSpPr>
@@ -20845,7 +21120,7 @@
         </p:nvSpPr>
         <p:spPr>
           <a:xfrm>
-            <a:off x="11368735" y="6437376"/>
+            <a:off x="11368735" y="6327648"/>
             <a:ext cx="365760" cy="274320"/>
           </a:xfrm>
           <a:prstGeom prst="rect">
@@ -20892,13 +21167,6 @@
 <file path=ppt/slides/slide24.xml><?xml version="1.0" encoding="utf-8"?>
 <p:sld xmlns:a="http://schemas.openxmlformats.org/drawingml/2006/main" xmlns:r="http://schemas.openxmlformats.org/officeDocument/2006/relationships" xmlns:p="http://schemas.openxmlformats.org/presentationml/2006/main">
   <p:cSld name="Slide 24">
-    <p:bg>
-      <p:bgPr>
-        <a:solidFill>
-          <a:srgbClr val="FFFFFF"/>
-        </a:solidFill>
-      </p:bgPr>
-    </p:bg>
     <p:spTree>
       <p:nvGrpSpPr>
         <p:cNvPr id="1" name=""/>
@@ -20915,7 +21183,29 @@
       </p:grpSpPr>
       <p:sp>
         <p:nvSpPr>
-          <p:cNvPr id="2" name="Text 0"/>
+          <p:cNvPr id="2" name="Shape 0"/>
+          <p:cNvSpPr/>
+          <p:nvPr/>
+        </p:nvSpPr>
+        <p:spPr>
+          <a:xfrm>
+            <a:off x="231343" y="194767"/>
+            <a:ext cx="11716207" cy="6473952"/>
+          </a:xfrm>
+          <a:prstGeom prst="roundRect">
+            <a:avLst>
+              <a:gd name="adj" fmla="val 3107"/>
+            </a:avLst>
+          </a:prstGeom>
+          <a:solidFill>
+            <a:srgbClr val="FFFFFF"/>
+          </a:solidFill>
+          <a:ln/>
+        </p:spPr>
+      </p:sp>
+      <p:sp>
+        <p:nvSpPr>
+          <p:cNvPr id="3" name="Text 1"/>
           <p:cNvSpPr/>
           <p:nvPr/>
         </p:nvSpPr>
@@ -20954,7 +21244,7 @@
       </p:sp>
       <p:sp>
         <p:nvSpPr>
-          <p:cNvPr id="3" name="Shape 1"/>
+          <p:cNvPr id="4" name="Shape 2"/>
           <p:cNvSpPr/>
           <p:nvPr/>
         </p:nvSpPr>
@@ -20976,7 +21266,7 @@
       </p:sp>
       <p:sp>
         <p:nvSpPr>
-          <p:cNvPr id="4" name="Text 2"/>
+          <p:cNvPr id="5" name="Text 3"/>
           <p:cNvSpPr/>
           <p:nvPr/>
         </p:nvSpPr>
@@ -21015,7 +21305,7 @@
       </p:sp>
       <p:pic>
         <p:nvPicPr>
-          <p:cNvPr id="5" name="Image 0" descr="preencoded.png">    </p:cNvPr>
+          <p:cNvPr id="6" name="Image 0" descr="preencoded.png">    </p:cNvPr>
           <p:cNvPicPr>
             <a:picLocks noChangeAspect="1"/>
           </p:cNvPicPr>
@@ -21029,7 +21319,7 @@
         </p:blipFill>
         <p:spPr>
           <a:xfrm>
-            <a:off x="566928" y="6254496"/>
+            <a:off x="566928" y="6126480"/>
             <a:ext cx="1481328" cy="457200"/>
           </a:xfrm>
           <a:prstGeom prst="rect">
@@ -21039,7 +21329,7 @@
       </p:pic>
       <p:sp>
         <p:nvSpPr>
-          <p:cNvPr id="6" name="Shape 3"/>
+          <p:cNvPr id="7" name="Shape 4"/>
           <p:cNvSpPr/>
           <p:nvPr/>
         </p:nvSpPr>
@@ -21066,7 +21356,7 @@
       </p:sp>
       <p:sp>
         <p:nvSpPr>
-          <p:cNvPr id="7" name="Shape 4"/>
+          <p:cNvPr id="8" name="Shape 5"/>
           <p:cNvSpPr/>
           <p:nvPr/>
         </p:nvSpPr>
@@ -21086,7 +21376,7 @@
       </p:sp>
       <p:sp>
         <p:nvSpPr>
-          <p:cNvPr id="8" name="Shape 5"/>
+          <p:cNvPr id="9" name="Shape 6"/>
           <p:cNvSpPr/>
           <p:nvPr/>
         </p:nvSpPr>
@@ -21106,7 +21396,7 @@
       </p:sp>
       <p:sp>
         <p:nvSpPr>
-          <p:cNvPr id="9" name="Shape 6"/>
+          <p:cNvPr id="10" name="Shape 7"/>
           <p:cNvSpPr/>
           <p:nvPr/>
         </p:nvSpPr>
@@ -21126,7 +21416,7 @@
       </p:sp>
       <p:sp>
         <p:nvSpPr>
-          <p:cNvPr id="10" name="Text 7"/>
+          <p:cNvPr id="11" name="Text 8"/>
           <p:cNvSpPr/>
           <p:nvPr/>
         </p:nvSpPr>
@@ -21179,7 +21469,7 @@
       </p:sp>
       <p:sp>
         <p:nvSpPr>
-          <p:cNvPr id="11" name="Shape 8"/>
+          <p:cNvPr id="12" name="Shape 9"/>
           <p:cNvSpPr/>
           <p:nvPr/>
         </p:nvSpPr>
@@ -21206,7 +21496,7 @@
       </p:sp>
       <p:sp>
         <p:nvSpPr>
-          <p:cNvPr id="12" name="Shape 9"/>
+          <p:cNvPr id="13" name="Shape 10"/>
           <p:cNvSpPr/>
           <p:nvPr/>
         </p:nvSpPr>
@@ -21226,7 +21516,7 @@
       </p:sp>
       <p:sp>
         <p:nvSpPr>
-          <p:cNvPr id="13" name="Shape 10"/>
+          <p:cNvPr id="14" name="Shape 11"/>
           <p:cNvSpPr/>
           <p:nvPr/>
         </p:nvSpPr>
@@ -21246,7 +21536,7 @@
       </p:sp>
       <p:sp>
         <p:nvSpPr>
-          <p:cNvPr id="14" name="Shape 11"/>
+          <p:cNvPr id="15" name="Shape 12"/>
           <p:cNvSpPr/>
           <p:nvPr/>
         </p:nvSpPr>
@@ -21266,7 +21556,7 @@
       </p:sp>
       <p:sp>
         <p:nvSpPr>
-          <p:cNvPr id="15" name="Text 12"/>
+          <p:cNvPr id="16" name="Text 13"/>
           <p:cNvSpPr/>
           <p:nvPr/>
         </p:nvSpPr>
@@ -21319,7 +21609,7 @@
       </p:sp>
       <p:sp>
         <p:nvSpPr>
-          <p:cNvPr id="16" name="Shape 13"/>
+          <p:cNvPr id="17" name="Shape 14"/>
           <p:cNvSpPr/>
           <p:nvPr/>
         </p:nvSpPr>
@@ -21346,7 +21636,7 @@
       </p:sp>
       <p:sp>
         <p:nvSpPr>
-          <p:cNvPr id="17" name="Shape 14"/>
+          <p:cNvPr id="18" name="Shape 15"/>
           <p:cNvSpPr/>
           <p:nvPr/>
         </p:nvSpPr>
@@ -21366,7 +21656,7 @@
       </p:sp>
       <p:sp>
         <p:nvSpPr>
-          <p:cNvPr id="18" name="Shape 15"/>
+          <p:cNvPr id="19" name="Shape 16"/>
           <p:cNvSpPr/>
           <p:nvPr/>
         </p:nvSpPr>
@@ -21386,7 +21676,7 @@
       </p:sp>
       <p:sp>
         <p:nvSpPr>
-          <p:cNvPr id="19" name="Shape 16"/>
+          <p:cNvPr id="20" name="Shape 17"/>
           <p:cNvSpPr/>
           <p:nvPr/>
         </p:nvSpPr>
@@ -21406,7 +21696,7 @@
       </p:sp>
       <p:sp>
         <p:nvSpPr>
-          <p:cNvPr id="20" name="Text 17"/>
+          <p:cNvPr id="21" name="Text 18"/>
           <p:cNvSpPr/>
           <p:nvPr/>
         </p:nvSpPr>
@@ -21459,7 +21749,7 @@
       </p:sp>
       <p:sp>
         <p:nvSpPr>
-          <p:cNvPr id="21" name="Shape 18"/>
+          <p:cNvPr id="22" name="Shape 19"/>
           <p:cNvSpPr/>
           <p:nvPr/>
         </p:nvSpPr>
@@ -21486,7 +21776,7 @@
       </p:sp>
       <p:sp>
         <p:nvSpPr>
-          <p:cNvPr id="22" name="Shape 19"/>
+          <p:cNvPr id="23" name="Shape 20"/>
           <p:cNvSpPr/>
           <p:nvPr/>
         </p:nvSpPr>
@@ -21506,7 +21796,7 @@
       </p:sp>
       <p:sp>
         <p:nvSpPr>
-          <p:cNvPr id="23" name="Shape 20"/>
+          <p:cNvPr id="24" name="Shape 21"/>
           <p:cNvSpPr/>
           <p:nvPr/>
         </p:nvSpPr>
@@ -21526,7 +21816,7 @@
       </p:sp>
       <p:sp>
         <p:nvSpPr>
-          <p:cNvPr id="24" name="Shape 21"/>
+          <p:cNvPr id="25" name="Shape 22"/>
           <p:cNvSpPr/>
           <p:nvPr/>
         </p:nvSpPr>
@@ -21546,7 +21836,7 @@
       </p:sp>
       <p:sp>
         <p:nvSpPr>
-          <p:cNvPr id="25" name="Text 22"/>
+          <p:cNvPr id="26" name="Text 23"/>
           <p:cNvSpPr/>
           <p:nvPr/>
         </p:nvSpPr>
@@ -21599,7 +21889,7 @@
       </p:sp>
       <p:sp>
         <p:nvSpPr>
-          <p:cNvPr id="26" name="Shape 23"/>
+          <p:cNvPr id="27" name="Shape 24"/>
           <p:cNvSpPr/>
           <p:nvPr/>
         </p:nvSpPr>
@@ -21626,7 +21916,7 @@
       </p:sp>
       <p:sp>
         <p:nvSpPr>
-          <p:cNvPr id="27" name="Shape 24"/>
+          <p:cNvPr id="28" name="Shape 25"/>
           <p:cNvSpPr/>
           <p:nvPr/>
         </p:nvSpPr>
@@ -21646,7 +21936,7 @@
       </p:sp>
       <p:sp>
         <p:nvSpPr>
-          <p:cNvPr id="28" name="Shape 25"/>
+          <p:cNvPr id="29" name="Shape 26"/>
           <p:cNvSpPr/>
           <p:nvPr/>
         </p:nvSpPr>
@@ -21666,7 +21956,7 @@
       </p:sp>
       <p:sp>
         <p:nvSpPr>
-          <p:cNvPr id="29" name="Shape 26"/>
+          <p:cNvPr id="30" name="Shape 27"/>
           <p:cNvSpPr/>
           <p:nvPr/>
         </p:nvSpPr>
@@ -21686,7 +21976,7 @@
       </p:sp>
       <p:sp>
         <p:nvSpPr>
-          <p:cNvPr id="30" name="Text 27"/>
+          <p:cNvPr id="31" name="Text 28"/>
           <p:cNvSpPr/>
           <p:nvPr/>
         </p:nvSpPr>
@@ -21749,7 +22039,7 @@
         </p:nvSpPr>
         <p:spPr>
           <a:xfrm>
-            <a:off x="11368735" y="6437376"/>
+            <a:off x="11368735" y="6327648"/>
             <a:ext cx="365760" cy="274320"/>
           </a:xfrm>
           <a:prstGeom prst="rect">
@@ -21796,13 +22086,6 @@
 <file path=ppt/slides/slide25.xml><?xml version="1.0" encoding="utf-8"?>
 <p:sld xmlns:a="http://schemas.openxmlformats.org/drawingml/2006/main" xmlns:r="http://schemas.openxmlformats.org/officeDocument/2006/relationships" xmlns:p="http://schemas.openxmlformats.org/presentationml/2006/main">
   <p:cSld name="Slide 25">
-    <p:bg>
-      <p:bgPr>
-        <a:solidFill>
-          <a:srgbClr val="FFFFFF"/>
-        </a:solidFill>
-      </p:bgPr>
-    </p:bg>
     <p:spTree>
       <p:nvGrpSpPr>
         <p:cNvPr id="1" name=""/>
@@ -21819,7 +22102,29 @@
       </p:grpSpPr>
       <p:sp>
         <p:nvSpPr>
-          <p:cNvPr id="2" name="Text 0"/>
+          <p:cNvPr id="2" name="Shape 0"/>
+          <p:cNvSpPr/>
+          <p:nvPr/>
+        </p:nvSpPr>
+        <p:spPr>
+          <a:xfrm>
+            <a:off x="231343" y="194767"/>
+            <a:ext cx="11716207" cy="6473952"/>
+          </a:xfrm>
+          <a:prstGeom prst="roundRect">
+            <a:avLst>
+              <a:gd name="adj" fmla="val 3107"/>
+            </a:avLst>
+          </a:prstGeom>
+          <a:solidFill>
+            <a:srgbClr val="FFFFFF"/>
+          </a:solidFill>
+          <a:ln/>
+        </p:spPr>
+      </p:sp>
+      <p:sp>
+        <p:nvSpPr>
+          <p:cNvPr id="3" name="Text 1"/>
           <p:cNvSpPr/>
           <p:nvPr/>
         </p:nvSpPr>
@@ -21858,7 +22163,7 @@
       </p:sp>
       <p:sp>
         <p:nvSpPr>
-          <p:cNvPr id="3" name="Shape 1"/>
+          <p:cNvPr id="4" name="Shape 2"/>
           <p:cNvSpPr/>
           <p:nvPr/>
         </p:nvSpPr>
@@ -21880,7 +22185,7 @@
       </p:sp>
       <p:sp>
         <p:nvSpPr>
-          <p:cNvPr id="4" name="Text 2"/>
+          <p:cNvPr id="5" name="Text 3"/>
           <p:cNvSpPr/>
           <p:nvPr/>
         </p:nvSpPr>
@@ -21919,7 +22224,7 @@
       </p:sp>
       <p:pic>
         <p:nvPicPr>
-          <p:cNvPr id="5" name="Image 0" descr="preencoded.png">    </p:cNvPr>
+          <p:cNvPr id="6" name="Image 0" descr="preencoded.png">    </p:cNvPr>
           <p:cNvPicPr>
             <a:picLocks noChangeAspect="1"/>
           </p:cNvPicPr>
@@ -21933,7 +22238,7 @@
         </p:blipFill>
         <p:spPr>
           <a:xfrm>
-            <a:off x="566928" y="6254496"/>
+            <a:off x="566928" y="6126480"/>
             <a:ext cx="1481328" cy="457200"/>
           </a:xfrm>
           <a:prstGeom prst="rect">
@@ -21943,7 +22248,7 @@
       </p:pic>
       <p:sp>
         <p:nvSpPr>
-          <p:cNvPr id="6" name="Shape 3"/>
+          <p:cNvPr id="7" name="Shape 4"/>
           <p:cNvSpPr/>
           <p:nvPr/>
         </p:nvSpPr>
@@ -21970,7 +22275,7 @@
       </p:sp>
       <p:sp>
         <p:nvSpPr>
-          <p:cNvPr id="7" name="Text 4"/>
+          <p:cNvPr id="8" name="Text 5"/>
           <p:cNvSpPr/>
           <p:nvPr/>
         </p:nvSpPr>
@@ -22009,7 +22314,7 @@
       </p:sp>
       <p:sp>
         <p:nvSpPr>
-          <p:cNvPr id="8" name="Text 5"/>
+          <p:cNvPr id="9" name="Text 6"/>
           <p:cNvSpPr/>
           <p:nvPr/>
         </p:nvSpPr>
@@ -22109,7 +22414,7 @@
       </p:sp>
       <p:sp>
         <p:nvSpPr>
-          <p:cNvPr id="9" name="Shape 6"/>
+          <p:cNvPr id="10" name="Shape 7"/>
           <p:cNvSpPr/>
           <p:nvPr/>
         </p:nvSpPr>
@@ -22131,7 +22436,7 @@
       </p:sp>
       <p:sp>
         <p:nvSpPr>
-          <p:cNvPr id="10" name="Text 7"/>
+          <p:cNvPr id="11" name="Text 8"/>
           <p:cNvSpPr/>
           <p:nvPr/>
         </p:nvSpPr>
@@ -22170,7 +22475,7 @@
       </p:sp>
       <p:sp>
         <p:nvSpPr>
-          <p:cNvPr id="11" name="Text 8"/>
+          <p:cNvPr id="12" name="Text 9"/>
           <p:cNvSpPr/>
           <p:nvPr/>
         </p:nvSpPr>
@@ -22212,7 +22517,7 @@
       </p:sp>
       <p:sp>
         <p:nvSpPr>
-          <p:cNvPr id="12" name="Shape 9"/>
+          <p:cNvPr id="13" name="Shape 10"/>
           <p:cNvSpPr/>
           <p:nvPr/>
         </p:nvSpPr>
@@ -22239,7 +22544,7 @@
       </p:sp>
       <p:sp>
         <p:nvSpPr>
-          <p:cNvPr id="13" name="Text 10"/>
+          <p:cNvPr id="14" name="Text 11"/>
           <p:cNvSpPr/>
           <p:nvPr/>
         </p:nvSpPr>
@@ -22278,7 +22583,7 @@
       </p:sp>
       <p:sp>
         <p:nvSpPr>
-          <p:cNvPr id="14" name="Text 11"/>
+          <p:cNvPr id="15" name="Text 12"/>
           <p:cNvSpPr/>
           <p:nvPr/>
         </p:nvSpPr>
@@ -22327,7 +22632,7 @@
         </p:nvSpPr>
         <p:spPr>
           <a:xfrm>
-            <a:off x="11368735" y="6437376"/>
+            <a:off x="11368735" y="6327648"/>
             <a:ext cx="365760" cy="274320"/>
           </a:xfrm>
           <a:prstGeom prst="rect">
@@ -22374,13 +22679,6 @@
 <file path=ppt/slides/slide26.xml><?xml version="1.0" encoding="utf-8"?>
 <p:sld xmlns:a="http://schemas.openxmlformats.org/drawingml/2006/main" xmlns:r="http://schemas.openxmlformats.org/officeDocument/2006/relationships" xmlns:p="http://schemas.openxmlformats.org/presentationml/2006/main">
   <p:cSld name="Slide 26">
-    <p:bg>
-      <p:bgPr>
-        <a:solidFill>
-          <a:srgbClr val="1B0942"/>
-        </a:solidFill>
-      </p:bgPr>
-    </p:bg>
     <p:spTree>
       <p:nvGrpSpPr>
         <p:cNvPr id="1" name=""/>
@@ -22897,13 +23195,6 @@
 <file path=ppt/slides/slide3.xml><?xml version="1.0" encoding="utf-8"?>
 <p:sld xmlns:a="http://schemas.openxmlformats.org/drawingml/2006/main" xmlns:r="http://schemas.openxmlformats.org/officeDocument/2006/relationships" xmlns:p="http://schemas.openxmlformats.org/presentationml/2006/main">
   <p:cSld name="Slide 3">
-    <p:bg>
-      <p:bgPr>
-        <a:solidFill>
-          <a:srgbClr val="FFFFFF"/>
-        </a:solidFill>
-      </p:bgPr>
-    </p:bg>
     <p:spTree>
       <p:nvGrpSpPr>
         <p:cNvPr id="1" name=""/>
@@ -22920,7 +23211,29 @@
       </p:grpSpPr>
       <p:sp>
         <p:nvSpPr>
-          <p:cNvPr id="2" name="Text 0"/>
+          <p:cNvPr id="2" name="Shape 0"/>
+          <p:cNvSpPr/>
+          <p:nvPr/>
+        </p:nvSpPr>
+        <p:spPr>
+          <a:xfrm>
+            <a:off x="231343" y="194767"/>
+            <a:ext cx="11716207" cy="6473952"/>
+          </a:xfrm>
+          <a:prstGeom prst="roundRect">
+            <a:avLst>
+              <a:gd name="adj" fmla="val 3107"/>
+            </a:avLst>
+          </a:prstGeom>
+          <a:solidFill>
+            <a:srgbClr val="FFFFFF"/>
+          </a:solidFill>
+          <a:ln/>
+        </p:spPr>
+      </p:sp>
+      <p:sp>
+        <p:nvSpPr>
+          <p:cNvPr id="3" name="Text 1"/>
           <p:cNvSpPr/>
           <p:nvPr/>
         </p:nvSpPr>
@@ -22959,7 +23272,7 @@
       </p:sp>
       <p:sp>
         <p:nvSpPr>
-          <p:cNvPr id="3" name="Shape 1"/>
+          <p:cNvPr id="4" name="Shape 2"/>
           <p:cNvSpPr/>
           <p:nvPr/>
         </p:nvSpPr>
@@ -22981,7 +23294,7 @@
       </p:sp>
       <p:sp>
         <p:nvSpPr>
-          <p:cNvPr id="4" name="Text 2"/>
+          <p:cNvPr id="5" name="Text 3"/>
           <p:cNvSpPr/>
           <p:nvPr/>
         </p:nvSpPr>
@@ -23020,7 +23333,7 @@
       </p:sp>
       <p:pic>
         <p:nvPicPr>
-          <p:cNvPr id="5" name="Image 0" descr="preencoded.png">    </p:cNvPr>
+          <p:cNvPr id="6" name="Image 0" descr="preencoded.png">    </p:cNvPr>
           <p:cNvPicPr>
             <a:picLocks noChangeAspect="1"/>
           </p:cNvPicPr>
@@ -23034,7 +23347,7 @@
         </p:blipFill>
         <p:spPr>
           <a:xfrm>
-            <a:off x="566928" y="6254496"/>
+            <a:off x="566928" y="6126480"/>
             <a:ext cx="1481328" cy="457200"/>
           </a:xfrm>
           <a:prstGeom prst="rect">
@@ -23044,7 +23357,7 @@
       </p:pic>
       <p:sp>
         <p:nvSpPr>
-          <p:cNvPr id="6" name="Shape 3"/>
+          <p:cNvPr id="7" name="Shape 4"/>
           <p:cNvSpPr/>
           <p:nvPr/>
         </p:nvSpPr>
@@ -23071,7 +23384,7 @@
       </p:sp>
       <p:sp>
         <p:nvSpPr>
-          <p:cNvPr id="7" name="Shape 4"/>
+          <p:cNvPr id="8" name="Shape 5"/>
           <p:cNvSpPr/>
           <p:nvPr/>
         </p:nvSpPr>
@@ -23091,7 +23404,7 @@
       </p:sp>
       <p:sp>
         <p:nvSpPr>
-          <p:cNvPr id="8" name="Text 5"/>
+          <p:cNvPr id="9" name="Text 6"/>
           <p:cNvSpPr/>
           <p:nvPr/>
         </p:nvSpPr>
@@ -23130,7 +23443,7 @@
       </p:sp>
       <p:sp>
         <p:nvSpPr>
-          <p:cNvPr id="9" name="Text 6"/>
+          <p:cNvPr id="10" name="Text 7"/>
           <p:cNvSpPr/>
           <p:nvPr/>
         </p:nvSpPr>
@@ -23169,7 +23482,7 @@
       </p:sp>
       <p:sp>
         <p:nvSpPr>
-          <p:cNvPr id="10" name="Shape 7"/>
+          <p:cNvPr id="11" name="Shape 8"/>
           <p:cNvSpPr/>
           <p:nvPr/>
         </p:nvSpPr>
@@ -23196,7 +23509,7 @@
       </p:sp>
       <p:sp>
         <p:nvSpPr>
-          <p:cNvPr id="11" name="Shape 8"/>
+          <p:cNvPr id="12" name="Shape 9"/>
           <p:cNvSpPr/>
           <p:nvPr/>
         </p:nvSpPr>
@@ -23216,7 +23529,7 @@
       </p:sp>
       <p:sp>
         <p:nvSpPr>
-          <p:cNvPr id="12" name="Text 9"/>
+          <p:cNvPr id="13" name="Text 10"/>
           <p:cNvSpPr/>
           <p:nvPr/>
         </p:nvSpPr>
@@ -23255,7 +23568,7 @@
       </p:sp>
       <p:sp>
         <p:nvSpPr>
-          <p:cNvPr id="13" name="Text 10"/>
+          <p:cNvPr id="14" name="Text 11"/>
           <p:cNvSpPr/>
           <p:nvPr/>
         </p:nvSpPr>
@@ -23294,7 +23607,7 @@
       </p:sp>
       <p:sp>
         <p:nvSpPr>
-          <p:cNvPr id="14" name="Shape 11"/>
+          <p:cNvPr id="15" name="Shape 12"/>
           <p:cNvSpPr/>
           <p:nvPr/>
         </p:nvSpPr>
@@ -23321,7 +23634,7 @@
       </p:sp>
       <p:sp>
         <p:nvSpPr>
-          <p:cNvPr id="15" name="Shape 12"/>
+          <p:cNvPr id="16" name="Shape 13"/>
           <p:cNvSpPr/>
           <p:nvPr/>
         </p:nvSpPr>
@@ -23341,7 +23654,7 @@
       </p:sp>
       <p:sp>
         <p:nvSpPr>
-          <p:cNvPr id="16" name="Text 13"/>
+          <p:cNvPr id="17" name="Text 14"/>
           <p:cNvSpPr/>
           <p:nvPr/>
         </p:nvSpPr>
@@ -23380,7 +23693,7 @@
       </p:sp>
       <p:sp>
         <p:nvSpPr>
-          <p:cNvPr id="17" name="Text 14"/>
+          <p:cNvPr id="18" name="Text 15"/>
           <p:cNvSpPr/>
           <p:nvPr/>
         </p:nvSpPr>
@@ -23419,7 +23732,7 @@
       </p:sp>
       <p:sp>
         <p:nvSpPr>
-          <p:cNvPr id="18" name="Shape 15"/>
+          <p:cNvPr id="19" name="Shape 16"/>
           <p:cNvSpPr/>
           <p:nvPr/>
         </p:nvSpPr>
@@ -23446,7 +23759,7 @@
       </p:sp>
       <p:sp>
         <p:nvSpPr>
-          <p:cNvPr id="19" name="Shape 16"/>
+          <p:cNvPr id="20" name="Shape 17"/>
           <p:cNvSpPr/>
           <p:nvPr/>
         </p:nvSpPr>
@@ -23466,7 +23779,7 @@
       </p:sp>
       <p:sp>
         <p:nvSpPr>
-          <p:cNvPr id="20" name="Text 17"/>
+          <p:cNvPr id="21" name="Text 18"/>
           <p:cNvSpPr/>
           <p:nvPr/>
         </p:nvSpPr>
@@ -23505,7 +23818,7 @@
       </p:sp>
       <p:sp>
         <p:nvSpPr>
-          <p:cNvPr id="21" name="Text 18"/>
+          <p:cNvPr id="22" name="Text 19"/>
           <p:cNvSpPr/>
           <p:nvPr/>
         </p:nvSpPr>
@@ -23544,7 +23857,7 @@
       </p:sp>
       <p:sp>
         <p:nvSpPr>
-          <p:cNvPr id="22" name="Shape 19"/>
+          <p:cNvPr id="23" name="Shape 20"/>
           <p:cNvSpPr/>
           <p:nvPr/>
         </p:nvSpPr>
@@ -23571,7 +23884,7 @@
       </p:sp>
       <p:sp>
         <p:nvSpPr>
-          <p:cNvPr id="23" name="Shape 20"/>
+          <p:cNvPr id="24" name="Shape 21"/>
           <p:cNvSpPr/>
           <p:nvPr/>
         </p:nvSpPr>
@@ -23591,7 +23904,7 @@
       </p:sp>
       <p:sp>
         <p:nvSpPr>
-          <p:cNvPr id="24" name="Text 21"/>
+          <p:cNvPr id="25" name="Text 22"/>
           <p:cNvSpPr/>
           <p:nvPr/>
         </p:nvSpPr>
@@ -23630,7 +23943,7 @@
       </p:sp>
       <p:sp>
         <p:nvSpPr>
-          <p:cNvPr id="25" name="Text 22"/>
+          <p:cNvPr id="26" name="Text 23"/>
           <p:cNvSpPr/>
           <p:nvPr/>
         </p:nvSpPr>
@@ -23669,7 +23982,7 @@
       </p:sp>
       <p:sp>
         <p:nvSpPr>
-          <p:cNvPr id="26" name="Shape 23"/>
+          <p:cNvPr id="27" name="Shape 24"/>
           <p:cNvSpPr/>
           <p:nvPr/>
         </p:nvSpPr>
@@ -23696,7 +24009,7 @@
       </p:sp>
       <p:sp>
         <p:nvSpPr>
-          <p:cNvPr id="27" name="Shape 24"/>
+          <p:cNvPr id="28" name="Shape 25"/>
           <p:cNvSpPr/>
           <p:nvPr/>
         </p:nvSpPr>
@@ -23716,7 +24029,7 @@
       </p:sp>
       <p:sp>
         <p:nvSpPr>
-          <p:cNvPr id="28" name="Text 25"/>
+          <p:cNvPr id="29" name="Text 26"/>
           <p:cNvSpPr/>
           <p:nvPr/>
         </p:nvSpPr>
@@ -23755,7 +24068,7 @@
       </p:sp>
       <p:sp>
         <p:nvSpPr>
-          <p:cNvPr id="29" name="Text 26"/>
+          <p:cNvPr id="30" name="Text 27"/>
           <p:cNvSpPr/>
           <p:nvPr/>
         </p:nvSpPr>
@@ -23794,7 +24107,7 @@
       </p:sp>
       <p:sp>
         <p:nvSpPr>
-          <p:cNvPr id="30" name="Shape 27"/>
+          <p:cNvPr id="31" name="Shape 28"/>
           <p:cNvSpPr/>
           <p:nvPr/>
         </p:nvSpPr>
@@ -23821,7 +24134,7 @@
       </p:sp>
       <p:sp>
         <p:nvSpPr>
-          <p:cNvPr id="31" name="Shape 28"/>
+          <p:cNvPr id="32" name="Shape 29"/>
           <p:cNvSpPr/>
           <p:nvPr/>
         </p:nvSpPr>
@@ -23841,7 +24154,7 @@
       </p:sp>
       <p:sp>
         <p:nvSpPr>
-          <p:cNvPr id="32" name="Text 29"/>
+          <p:cNvPr id="33" name="Text 30"/>
           <p:cNvSpPr/>
           <p:nvPr/>
         </p:nvSpPr>
@@ -23880,7 +24193,7 @@
       </p:sp>
       <p:sp>
         <p:nvSpPr>
-          <p:cNvPr id="33" name="Text 30"/>
+          <p:cNvPr id="34" name="Text 31"/>
           <p:cNvSpPr/>
           <p:nvPr/>
         </p:nvSpPr>
@@ -23919,7 +24232,7 @@
       </p:sp>
       <p:sp>
         <p:nvSpPr>
-          <p:cNvPr id="34" name="Shape 31"/>
+          <p:cNvPr id="35" name="Shape 32"/>
           <p:cNvSpPr/>
           <p:nvPr/>
         </p:nvSpPr>
@@ -23941,7 +24254,7 @@
       </p:sp>
       <p:sp>
         <p:nvSpPr>
-          <p:cNvPr id="35" name="Shape 32"/>
+          <p:cNvPr id="36" name="Shape 33"/>
           <p:cNvSpPr/>
           <p:nvPr/>
         </p:nvSpPr>
@@ -23961,7 +24274,7 @@
       </p:sp>
       <p:sp>
         <p:nvSpPr>
-          <p:cNvPr id="36" name="Text 33"/>
+          <p:cNvPr id="37" name="Text 34"/>
           <p:cNvSpPr/>
           <p:nvPr/>
         </p:nvSpPr>
@@ -24000,7 +24313,7 @@
       </p:sp>
       <p:sp>
         <p:nvSpPr>
-          <p:cNvPr id="37" name="Text 34"/>
+          <p:cNvPr id="38" name="Text 35"/>
           <p:cNvSpPr/>
           <p:nvPr/>
         </p:nvSpPr>
@@ -24039,7 +24352,7 @@
       </p:sp>
       <p:sp>
         <p:nvSpPr>
-          <p:cNvPr id="38" name="Shape 35"/>
+          <p:cNvPr id="39" name="Shape 36"/>
           <p:cNvSpPr/>
           <p:nvPr/>
         </p:nvSpPr>
@@ -24066,7 +24379,7 @@
       </p:sp>
       <p:sp>
         <p:nvSpPr>
-          <p:cNvPr id="39" name="Shape 36"/>
+          <p:cNvPr id="40" name="Shape 37"/>
           <p:cNvSpPr/>
           <p:nvPr/>
         </p:nvSpPr>
@@ -24086,7 +24399,7 @@
       </p:sp>
       <p:sp>
         <p:nvSpPr>
-          <p:cNvPr id="40" name="Text 37"/>
+          <p:cNvPr id="41" name="Text 38"/>
           <p:cNvSpPr/>
           <p:nvPr/>
         </p:nvSpPr>
@@ -24125,7 +24438,7 @@
       </p:sp>
       <p:sp>
         <p:nvSpPr>
-          <p:cNvPr id="41" name="Text 38"/>
+          <p:cNvPr id="42" name="Text 39"/>
           <p:cNvSpPr/>
           <p:nvPr/>
         </p:nvSpPr>
@@ -24164,7 +24477,7 @@
       </p:sp>
       <p:sp>
         <p:nvSpPr>
-          <p:cNvPr id="42" name="Shape 39"/>
+          <p:cNvPr id="43" name="Shape 40"/>
           <p:cNvSpPr/>
           <p:nvPr/>
         </p:nvSpPr>
@@ -24191,7 +24504,7 @@
       </p:sp>
       <p:sp>
         <p:nvSpPr>
-          <p:cNvPr id="43" name="Shape 40"/>
+          <p:cNvPr id="44" name="Shape 41"/>
           <p:cNvSpPr/>
           <p:nvPr/>
         </p:nvSpPr>
@@ -24211,7 +24524,7 @@
       </p:sp>
       <p:sp>
         <p:nvSpPr>
-          <p:cNvPr id="44" name="Text 41"/>
+          <p:cNvPr id="45" name="Text 42"/>
           <p:cNvSpPr/>
           <p:nvPr/>
         </p:nvSpPr>
@@ -24250,7 +24563,7 @@
       </p:sp>
       <p:sp>
         <p:nvSpPr>
-          <p:cNvPr id="45" name="Text 42"/>
+          <p:cNvPr id="46" name="Text 43"/>
           <p:cNvSpPr/>
           <p:nvPr/>
         </p:nvSpPr>
@@ -24289,7 +24602,7 @@
       </p:sp>
       <p:sp>
         <p:nvSpPr>
-          <p:cNvPr id="46" name="Shape 43"/>
+          <p:cNvPr id="47" name="Shape 44"/>
           <p:cNvSpPr/>
           <p:nvPr/>
         </p:nvSpPr>
@@ -24316,7 +24629,7 @@
       </p:sp>
       <p:sp>
         <p:nvSpPr>
-          <p:cNvPr id="47" name="Shape 44"/>
+          <p:cNvPr id="48" name="Shape 45"/>
           <p:cNvSpPr/>
           <p:nvPr/>
         </p:nvSpPr>
@@ -24336,7 +24649,7 @@
       </p:sp>
       <p:sp>
         <p:nvSpPr>
-          <p:cNvPr id="48" name="Text 45"/>
+          <p:cNvPr id="49" name="Text 46"/>
           <p:cNvSpPr/>
           <p:nvPr/>
         </p:nvSpPr>
@@ -24375,7 +24688,7 @@
       </p:sp>
       <p:sp>
         <p:nvSpPr>
-          <p:cNvPr id="49" name="Text 46"/>
+          <p:cNvPr id="50" name="Text 47"/>
           <p:cNvSpPr/>
           <p:nvPr/>
         </p:nvSpPr>
@@ -24414,7 +24727,7 @@
       </p:sp>
       <p:sp>
         <p:nvSpPr>
-          <p:cNvPr id="50" name="Shape 47"/>
+          <p:cNvPr id="51" name="Shape 48"/>
           <p:cNvSpPr/>
           <p:nvPr/>
         </p:nvSpPr>
@@ -24441,7 +24754,7 @@
       </p:sp>
       <p:sp>
         <p:nvSpPr>
-          <p:cNvPr id="51" name="Shape 48"/>
+          <p:cNvPr id="52" name="Shape 49"/>
           <p:cNvSpPr/>
           <p:nvPr/>
         </p:nvSpPr>
@@ -24461,7 +24774,7 @@
       </p:sp>
       <p:sp>
         <p:nvSpPr>
-          <p:cNvPr id="52" name="Text 49"/>
+          <p:cNvPr id="53" name="Text 50"/>
           <p:cNvSpPr/>
           <p:nvPr/>
         </p:nvSpPr>
@@ -24500,7 +24813,7 @@
       </p:sp>
       <p:sp>
         <p:nvSpPr>
-          <p:cNvPr id="53" name="Text 50"/>
+          <p:cNvPr id="54" name="Text 51"/>
           <p:cNvSpPr/>
           <p:nvPr/>
         </p:nvSpPr>
@@ -24539,7 +24852,7 @@
       </p:sp>
       <p:sp>
         <p:nvSpPr>
-          <p:cNvPr id="54" name="Shape 51"/>
+          <p:cNvPr id="55" name="Shape 52"/>
           <p:cNvSpPr/>
           <p:nvPr/>
         </p:nvSpPr>
@@ -24566,7 +24879,7 @@
       </p:sp>
       <p:sp>
         <p:nvSpPr>
-          <p:cNvPr id="55" name="Text 52"/>
+          <p:cNvPr id="56" name="Text 53"/>
           <p:cNvSpPr/>
           <p:nvPr/>
         </p:nvSpPr>
@@ -24618,7 +24931,7 @@
         </p:nvSpPr>
         <p:spPr>
           <a:xfrm>
-            <a:off x="11368735" y="6437376"/>
+            <a:off x="11368735" y="6327648"/>
             <a:ext cx="365760" cy="274320"/>
           </a:xfrm>
           <a:prstGeom prst="rect">
@@ -24665,13 +24978,6 @@
 <file path=ppt/slides/slide4.xml><?xml version="1.0" encoding="utf-8"?>
 <p:sld xmlns:a="http://schemas.openxmlformats.org/drawingml/2006/main" xmlns:r="http://schemas.openxmlformats.org/officeDocument/2006/relationships" xmlns:p="http://schemas.openxmlformats.org/presentationml/2006/main">
   <p:cSld name="Slide 4">
-    <p:bg>
-      <p:bgPr>
-        <a:solidFill>
-          <a:srgbClr val="FFFFFF"/>
-        </a:solidFill>
-      </p:bgPr>
-    </p:bg>
     <p:spTree>
       <p:nvGrpSpPr>
         <p:cNvPr id="1" name=""/>
@@ -24688,7 +24994,29 @@
       </p:grpSpPr>
       <p:sp>
         <p:nvSpPr>
-          <p:cNvPr id="2" name="Text 0"/>
+          <p:cNvPr id="2" name="Shape 0"/>
+          <p:cNvSpPr/>
+          <p:nvPr/>
+        </p:nvSpPr>
+        <p:spPr>
+          <a:xfrm>
+            <a:off x="231343" y="194767"/>
+            <a:ext cx="11716207" cy="6473952"/>
+          </a:xfrm>
+          <a:prstGeom prst="roundRect">
+            <a:avLst>
+              <a:gd name="adj" fmla="val 3107"/>
+            </a:avLst>
+          </a:prstGeom>
+          <a:solidFill>
+            <a:srgbClr val="FFFFFF"/>
+          </a:solidFill>
+          <a:ln/>
+        </p:spPr>
+      </p:sp>
+      <p:sp>
+        <p:nvSpPr>
+          <p:cNvPr id="3" name="Text 1"/>
           <p:cNvSpPr/>
           <p:nvPr/>
         </p:nvSpPr>
@@ -24727,7 +25055,7 @@
       </p:sp>
       <p:sp>
         <p:nvSpPr>
-          <p:cNvPr id="3" name="Text 1"/>
+          <p:cNvPr id="4" name="Text 2"/>
           <p:cNvSpPr/>
           <p:nvPr/>
         </p:nvSpPr>
@@ -24769,7 +25097,7 @@
       </p:sp>
       <p:sp>
         <p:nvSpPr>
-          <p:cNvPr id="4" name="Shape 2"/>
+          <p:cNvPr id="5" name="Shape 3"/>
           <p:cNvSpPr/>
           <p:nvPr/>
         </p:nvSpPr>
@@ -24791,7 +25119,7 @@
       </p:sp>
       <p:sp>
         <p:nvSpPr>
-          <p:cNvPr id="5" name="Text 3"/>
+          <p:cNvPr id="6" name="Text 4"/>
           <p:cNvSpPr/>
           <p:nvPr/>
         </p:nvSpPr>
@@ -24830,7 +25158,7 @@
       </p:sp>
       <p:pic>
         <p:nvPicPr>
-          <p:cNvPr id="6" name="Image 0" descr="preencoded.png">    </p:cNvPr>
+          <p:cNvPr id="7" name="Image 0" descr="preencoded.png">    </p:cNvPr>
           <p:cNvPicPr>
             <a:picLocks noChangeAspect="1"/>
           </p:cNvPicPr>
@@ -24844,7 +25172,7 @@
         </p:blipFill>
         <p:spPr>
           <a:xfrm>
-            <a:off x="566928" y="6254496"/>
+            <a:off x="566928" y="6126480"/>
             <a:ext cx="1481328" cy="457200"/>
           </a:xfrm>
           <a:prstGeom prst="rect">
@@ -24854,7 +25182,7 @@
       </p:pic>
       <p:sp>
         <p:nvSpPr>
-          <p:cNvPr id="7" name="Shape 4"/>
+          <p:cNvPr id="8" name="Shape 5"/>
           <p:cNvSpPr/>
           <p:nvPr/>
         </p:nvSpPr>
@@ -24881,7 +25209,7 @@
       </p:sp>
       <p:sp>
         <p:nvSpPr>
-          <p:cNvPr id="8" name="Text 5"/>
+          <p:cNvPr id="9" name="Text 6"/>
           <p:cNvSpPr/>
           <p:nvPr/>
         </p:nvSpPr>
@@ -24920,7 +25248,7 @@
       </p:sp>
       <p:sp>
         <p:nvSpPr>
-          <p:cNvPr id="9" name="Text 6"/>
+          <p:cNvPr id="10" name="Text 7"/>
           <p:cNvSpPr/>
           <p:nvPr/>
         </p:nvSpPr>
@@ -24962,7 +25290,7 @@
       </p:sp>
       <p:sp>
         <p:nvSpPr>
-          <p:cNvPr id="10" name="Shape 7"/>
+          <p:cNvPr id="11" name="Shape 8"/>
           <p:cNvSpPr/>
           <p:nvPr/>
         </p:nvSpPr>
@@ -24989,7 +25317,7 @@
       </p:sp>
       <p:sp>
         <p:nvSpPr>
-          <p:cNvPr id="11" name="Text 8"/>
+          <p:cNvPr id="12" name="Text 9"/>
           <p:cNvSpPr/>
           <p:nvPr/>
         </p:nvSpPr>
@@ -25028,7 +25356,7 @@
       </p:sp>
       <p:sp>
         <p:nvSpPr>
-          <p:cNvPr id="12" name="Text 9"/>
+          <p:cNvPr id="13" name="Text 10"/>
           <p:cNvSpPr/>
           <p:nvPr/>
         </p:nvSpPr>
@@ -25070,7 +25398,7 @@
       </p:sp>
       <p:sp>
         <p:nvSpPr>
-          <p:cNvPr id="13" name="Shape 10"/>
+          <p:cNvPr id="14" name="Shape 11"/>
           <p:cNvSpPr/>
           <p:nvPr/>
         </p:nvSpPr>
@@ -25097,7 +25425,7 @@
       </p:sp>
       <p:sp>
         <p:nvSpPr>
-          <p:cNvPr id="14" name="Text 11"/>
+          <p:cNvPr id="15" name="Text 12"/>
           <p:cNvSpPr/>
           <p:nvPr/>
         </p:nvSpPr>
@@ -25136,7 +25464,7 @@
       </p:sp>
       <p:sp>
         <p:nvSpPr>
-          <p:cNvPr id="15" name="Text 12"/>
+          <p:cNvPr id="16" name="Text 13"/>
           <p:cNvSpPr/>
           <p:nvPr/>
         </p:nvSpPr>
@@ -25178,7 +25506,7 @@
       </p:sp>
       <p:sp>
         <p:nvSpPr>
-          <p:cNvPr id="16" name="Shape 13"/>
+          <p:cNvPr id="17" name="Shape 14"/>
           <p:cNvSpPr/>
           <p:nvPr/>
         </p:nvSpPr>
@@ -25205,7 +25533,7 @@
       </p:sp>
       <p:sp>
         <p:nvSpPr>
-          <p:cNvPr id="17" name="Text 14"/>
+          <p:cNvPr id="18" name="Text 15"/>
           <p:cNvSpPr/>
           <p:nvPr/>
         </p:nvSpPr>
@@ -25244,7 +25572,7 @@
       </p:sp>
       <p:sp>
         <p:nvSpPr>
-          <p:cNvPr id="18" name="Text 15"/>
+          <p:cNvPr id="19" name="Text 16"/>
           <p:cNvSpPr/>
           <p:nvPr/>
         </p:nvSpPr>
@@ -25286,7 +25614,7 @@
       </p:sp>
       <p:sp>
         <p:nvSpPr>
-          <p:cNvPr id="19" name="Shape 16"/>
+          <p:cNvPr id="20" name="Shape 17"/>
           <p:cNvSpPr/>
           <p:nvPr/>
         </p:nvSpPr>
@@ -25313,7 +25641,7 @@
       </p:sp>
       <p:sp>
         <p:nvSpPr>
-          <p:cNvPr id="20" name="Text 17"/>
+          <p:cNvPr id="21" name="Text 18"/>
           <p:cNvSpPr/>
           <p:nvPr/>
         </p:nvSpPr>
@@ -25352,7 +25680,7 @@
       </p:sp>
       <p:sp>
         <p:nvSpPr>
-          <p:cNvPr id="21" name="Text 18"/>
+          <p:cNvPr id="22" name="Text 19"/>
           <p:cNvSpPr/>
           <p:nvPr/>
         </p:nvSpPr>
@@ -25394,7 +25722,7 @@
       </p:sp>
       <p:sp>
         <p:nvSpPr>
-          <p:cNvPr id="22" name="Shape 19"/>
+          <p:cNvPr id="23" name="Shape 20"/>
           <p:cNvSpPr/>
           <p:nvPr/>
         </p:nvSpPr>
@@ -25421,7 +25749,7 @@
       </p:sp>
       <p:sp>
         <p:nvSpPr>
-          <p:cNvPr id="23" name="Text 20"/>
+          <p:cNvPr id="24" name="Text 21"/>
           <p:cNvSpPr/>
           <p:nvPr/>
         </p:nvSpPr>
@@ -25460,7 +25788,7 @@
       </p:sp>
       <p:sp>
         <p:nvSpPr>
-          <p:cNvPr id="24" name="Text 21"/>
+          <p:cNvPr id="25" name="Text 22"/>
           <p:cNvSpPr/>
           <p:nvPr/>
         </p:nvSpPr>
@@ -25502,7 +25830,7 @@
       </p:sp>
       <p:sp>
         <p:nvSpPr>
-          <p:cNvPr id="25" name="Shape 22"/>
+          <p:cNvPr id="26" name="Shape 23"/>
           <p:cNvSpPr/>
           <p:nvPr/>
         </p:nvSpPr>
@@ -25529,7 +25857,7 @@
       </p:sp>
       <p:sp>
         <p:nvSpPr>
-          <p:cNvPr id="26" name="Text 23"/>
+          <p:cNvPr id="27" name="Text 24"/>
           <p:cNvSpPr/>
           <p:nvPr/>
         </p:nvSpPr>
@@ -25581,7 +25909,7 @@
         </p:nvSpPr>
         <p:spPr>
           <a:xfrm>
-            <a:off x="11368735" y="6437376"/>
+            <a:off x="11368735" y="6327648"/>
             <a:ext cx="365760" cy="274320"/>
           </a:xfrm>
           <a:prstGeom prst="rect">
@@ -25628,13 +25956,6 @@
 <file path=ppt/slides/slide5.xml><?xml version="1.0" encoding="utf-8"?>
 <p:sld xmlns:a="http://schemas.openxmlformats.org/drawingml/2006/main" xmlns:r="http://schemas.openxmlformats.org/officeDocument/2006/relationships" xmlns:p="http://schemas.openxmlformats.org/presentationml/2006/main">
   <p:cSld name="Slide 5">
-    <p:bg>
-      <p:bgPr>
-        <a:solidFill>
-          <a:srgbClr val="FFFFFF"/>
-        </a:solidFill>
-      </p:bgPr>
-    </p:bg>
     <p:spTree>
       <p:nvGrpSpPr>
         <p:cNvPr id="1" name=""/>
@@ -25651,7 +25972,29 @@
       </p:grpSpPr>
       <p:sp>
         <p:nvSpPr>
-          <p:cNvPr id="2" name="Text 0"/>
+          <p:cNvPr id="2" name="Shape 0"/>
+          <p:cNvSpPr/>
+          <p:nvPr/>
+        </p:nvSpPr>
+        <p:spPr>
+          <a:xfrm>
+            <a:off x="231343" y="194767"/>
+            <a:ext cx="11716207" cy="6473952"/>
+          </a:xfrm>
+          <a:prstGeom prst="roundRect">
+            <a:avLst>
+              <a:gd name="adj" fmla="val 3107"/>
+            </a:avLst>
+          </a:prstGeom>
+          <a:solidFill>
+            <a:srgbClr val="FFFFFF"/>
+          </a:solidFill>
+          <a:ln/>
+        </p:spPr>
+      </p:sp>
+      <p:sp>
+        <p:nvSpPr>
+          <p:cNvPr id="3" name="Text 1"/>
           <p:cNvSpPr/>
           <p:nvPr/>
         </p:nvSpPr>
@@ -25690,7 +26033,7 @@
       </p:sp>
       <p:sp>
         <p:nvSpPr>
-          <p:cNvPr id="3" name="Text 1"/>
+          <p:cNvPr id="4" name="Text 2"/>
           <p:cNvSpPr/>
           <p:nvPr/>
         </p:nvSpPr>
@@ -25729,7 +26072,7 @@
       </p:sp>
       <p:sp>
         <p:nvSpPr>
-          <p:cNvPr id="4" name="Shape 2"/>
+          <p:cNvPr id="5" name="Shape 3"/>
           <p:cNvSpPr/>
           <p:nvPr/>
         </p:nvSpPr>
@@ -25751,7 +26094,7 @@
       </p:sp>
       <p:sp>
         <p:nvSpPr>
-          <p:cNvPr id="5" name="Text 3"/>
+          <p:cNvPr id="6" name="Text 4"/>
           <p:cNvSpPr/>
           <p:nvPr/>
         </p:nvSpPr>
@@ -25790,7 +26133,7 @@
       </p:sp>
       <p:pic>
         <p:nvPicPr>
-          <p:cNvPr id="6" name="Image 0" descr="preencoded.png">    </p:cNvPr>
+          <p:cNvPr id="7" name="Image 0" descr="preencoded.png">    </p:cNvPr>
           <p:cNvPicPr>
             <a:picLocks noChangeAspect="1"/>
           </p:cNvPicPr>
@@ -25804,7 +26147,7 @@
         </p:blipFill>
         <p:spPr>
           <a:xfrm>
-            <a:off x="566928" y="6254496"/>
+            <a:off x="566928" y="6126480"/>
             <a:ext cx="1481328" cy="457200"/>
           </a:xfrm>
           <a:prstGeom prst="rect">
@@ -25814,7 +26157,7 @@
       </p:pic>
       <p:sp>
         <p:nvSpPr>
-          <p:cNvPr id="7" name="Shape 4"/>
+          <p:cNvPr id="8" name="Shape 5"/>
           <p:cNvSpPr/>
           <p:nvPr/>
         </p:nvSpPr>
@@ -25836,7 +26179,7 @@
       </p:sp>
       <p:sp>
         <p:nvSpPr>
-          <p:cNvPr id="8" name="Shape 5"/>
+          <p:cNvPr id="9" name="Shape 6"/>
           <p:cNvSpPr/>
           <p:nvPr/>
         </p:nvSpPr>
@@ -25856,7 +26199,7 @@
       </p:sp>
       <p:sp>
         <p:nvSpPr>
-          <p:cNvPr id="9" name="Text 6"/>
+          <p:cNvPr id="10" name="Text 7"/>
           <p:cNvSpPr/>
           <p:nvPr/>
         </p:nvSpPr>
@@ -25895,7 +26238,7 @@
       </p:sp>
       <p:sp>
         <p:nvSpPr>
-          <p:cNvPr id="10" name="Text 7"/>
+          <p:cNvPr id="11" name="Text 8"/>
           <p:cNvSpPr/>
           <p:nvPr/>
         </p:nvSpPr>
@@ -25934,7 +26277,7 @@
       </p:sp>
       <p:sp>
         <p:nvSpPr>
-          <p:cNvPr id="11" name="Text 8"/>
+          <p:cNvPr id="12" name="Text 9"/>
           <p:cNvSpPr/>
           <p:nvPr/>
         </p:nvSpPr>
@@ -25976,7 +26319,7 @@
       </p:sp>
       <p:sp>
         <p:nvSpPr>
-          <p:cNvPr id="12" name="Shape 9"/>
+          <p:cNvPr id="13" name="Shape 10"/>
           <p:cNvSpPr/>
           <p:nvPr/>
         </p:nvSpPr>
@@ -25998,7 +26341,7 @@
       </p:sp>
       <p:sp>
         <p:nvSpPr>
-          <p:cNvPr id="13" name="Shape 10"/>
+          <p:cNvPr id="14" name="Shape 11"/>
           <p:cNvSpPr/>
           <p:nvPr/>
         </p:nvSpPr>
@@ -26018,7 +26361,7 @@
       </p:sp>
       <p:sp>
         <p:nvSpPr>
-          <p:cNvPr id="14" name="Text 11"/>
+          <p:cNvPr id="15" name="Text 12"/>
           <p:cNvSpPr/>
           <p:nvPr/>
         </p:nvSpPr>
@@ -26057,7 +26400,7 @@
       </p:sp>
       <p:sp>
         <p:nvSpPr>
-          <p:cNvPr id="15" name="Text 12"/>
+          <p:cNvPr id="16" name="Text 13"/>
           <p:cNvSpPr/>
           <p:nvPr/>
         </p:nvSpPr>
@@ -26096,7 +26439,7 @@
       </p:sp>
       <p:sp>
         <p:nvSpPr>
-          <p:cNvPr id="16" name="Text 13"/>
+          <p:cNvPr id="17" name="Text 14"/>
           <p:cNvSpPr/>
           <p:nvPr/>
         </p:nvSpPr>
@@ -26138,7 +26481,7 @@
       </p:sp>
       <p:sp>
         <p:nvSpPr>
-          <p:cNvPr id="17" name="Shape 14"/>
+          <p:cNvPr id="18" name="Shape 15"/>
           <p:cNvSpPr/>
           <p:nvPr/>
         </p:nvSpPr>
@@ -26160,7 +26503,7 @@
       </p:sp>
       <p:sp>
         <p:nvSpPr>
-          <p:cNvPr id="18" name="Shape 15"/>
+          <p:cNvPr id="19" name="Shape 16"/>
           <p:cNvSpPr/>
           <p:nvPr/>
         </p:nvSpPr>
@@ -26180,7 +26523,7 @@
       </p:sp>
       <p:sp>
         <p:nvSpPr>
-          <p:cNvPr id="19" name="Text 16"/>
+          <p:cNvPr id="20" name="Text 17"/>
           <p:cNvSpPr/>
           <p:nvPr/>
         </p:nvSpPr>
@@ -26219,7 +26562,7 @@
       </p:sp>
       <p:sp>
         <p:nvSpPr>
-          <p:cNvPr id="20" name="Text 17"/>
+          <p:cNvPr id="21" name="Text 18"/>
           <p:cNvSpPr/>
           <p:nvPr/>
         </p:nvSpPr>
@@ -26258,7 +26601,7 @@
       </p:sp>
       <p:sp>
         <p:nvSpPr>
-          <p:cNvPr id="21" name="Text 18"/>
+          <p:cNvPr id="22" name="Text 19"/>
           <p:cNvSpPr/>
           <p:nvPr/>
         </p:nvSpPr>
@@ -26300,7 +26643,7 @@
       </p:sp>
       <p:sp>
         <p:nvSpPr>
-          <p:cNvPr id="22" name="Shape 19"/>
+          <p:cNvPr id="23" name="Shape 20"/>
           <p:cNvSpPr/>
           <p:nvPr/>
         </p:nvSpPr>
@@ -26327,7 +26670,7 @@
       </p:sp>
       <p:sp>
         <p:nvSpPr>
-          <p:cNvPr id="23" name="Text 20"/>
+          <p:cNvPr id="24" name="Text 21"/>
           <p:cNvSpPr/>
           <p:nvPr/>
         </p:nvSpPr>
@@ -26366,7 +26709,7 @@
       </p:sp>
       <p:sp>
         <p:nvSpPr>
-          <p:cNvPr id="24" name="Shape 21"/>
+          <p:cNvPr id="25" name="Shape 22"/>
           <p:cNvSpPr/>
           <p:nvPr/>
         </p:nvSpPr>
@@ -26389,7 +26732,7 @@
       </p:sp>
       <p:sp>
         <p:nvSpPr>
-          <p:cNvPr id="25" name="Shape 22"/>
+          <p:cNvPr id="26" name="Shape 23"/>
           <p:cNvSpPr/>
           <p:nvPr/>
         </p:nvSpPr>
@@ -26409,7 +26752,7 @@
       </p:sp>
       <p:sp>
         <p:nvSpPr>
-          <p:cNvPr id="26" name="Shape 23"/>
+          <p:cNvPr id="27" name="Shape 24"/>
           <p:cNvSpPr/>
           <p:nvPr/>
         </p:nvSpPr>
@@ -26436,7 +26779,7 @@
       </p:sp>
       <p:sp>
         <p:nvSpPr>
-          <p:cNvPr id="27" name="Text 24"/>
+          <p:cNvPr id="28" name="Text 25"/>
           <p:cNvSpPr/>
           <p:nvPr/>
         </p:nvSpPr>
@@ -26475,7 +26818,7 @@
       </p:sp>
       <p:sp>
         <p:nvSpPr>
-          <p:cNvPr id="28" name="Shape 25"/>
+          <p:cNvPr id="29" name="Shape 26"/>
           <p:cNvSpPr/>
           <p:nvPr/>
         </p:nvSpPr>
@@ -26498,7 +26841,7 @@
       </p:sp>
       <p:sp>
         <p:nvSpPr>
-          <p:cNvPr id="29" name="Shape 26"/>
+          <p:cNvPr id="30" name="Shape 27"/>
           <p:cNvSpPr/>
           <p:nvPr/>
         </p:nvSpPr>
@@ -26518,7 +26861,7 @@
       </p:sp>
       <p:sp>
         <p:nvSpPr>
-          <p:cNvPr id="30" name="Shape 27"/>
+          <p:cNvPr id="31" name="Shape 28"/>
           <p:cNvSpPr/>
           <p:nvPr/>
         </p:nvSpPr>
@@ -26540,7 +26883,7 @@
       </p:sp>
       <p:sp>
         <p:nvSpPr>
-          <p:cNvPr id="31" name="Text 28"/>
+          <p:cNvPr id="32" name="Text 29"/>
           <p:cNvSpPr/>
           <p:nvPr/>
         </p:nvSpPr>
@@ -26579,7 +26922,7 @@
       </p:sp>
       <p:sp>
         <p:nvSpPr>
-          <p:cNvPr id="32" name="Shape 29"/>
+          <p:cNvPr id="33" name="Shape 30"/>
           <p:cNvSpPr/>
           <p:nvPr/>
         </p:nvSpPr>
@@ -26602,7 +26945,7 @@
       </p:sp>
       <p:sp>
         <p:nvSpPr>
-          <p:cNvPr id="33" name="Shape 30"/>
+          <p:cNvPr id="34" name="Shape 31"/>
           <p:cNvSpPr/>
           <p:nvPr/>
         </p:nvSpPr>
@@ -26622,7 +26965,7 @@
       </p:sp>
       <p:sp>
         <p:nvSpPr>
-          <p:cNvPr id="34" name="Shape 31"/>
+          <p:cNvPr id="35" name="Shape 32"/>
           <p:cNvSpPr/>
           <p:nvPr/>
         </p:nvSpPr>
@@ -26644,7 +26987,7 @@
       </p:sp>
       <p:sp>
         <p:nvSpPr>
-          <p:cNvPr id="35" name="Text 32"/>
+          <p:cNvPr id="36" name="Text 33"/>
           <p:cNvSpPr/>
           <p:nvPr/>
         </p:nvSpPr>
@@ -26683,7 +27026,7 @@
       </p:sp>
       <p:sp>
         <p:nvSpPr>
-          <p:cNvPr id="36" name="Text 33"/>
+          <p:cNvPr id="37" name="Text 34"/>
           <p:cNvSpPr/>
           <p:nvPr/>
         </p:nvSpPr>
@@ -26722,7 +27065,7 @@
       </p:sp>
       <p:sp>
         <p:nvSpPr>
-          <p:cNvPr id="37" name="Shape 34"/>
+          <p:cNvPr id="38" name="Shape 35"/>
           <p:cNvSpPr/>
           <p:nvPr/>
         </p:nvSpPr>
@@ -26744,7 +27087,7 @@
       </p:sp>
       <p:sp>
         <p:nvSpPr>
-          <p:cNvPr id="38" name="Text 35"/>
+          <p:cNvPr id="39" name="Text 36"/>
           <p:cNvSpPr/>
           <p:nvPr/>
         </p:nvSpPr>
@@ -26783,7 +27126,7 @@
       </p:sp>
       <p:sp>
         <p:nvSpPr>
-          <p:cNvPr id="39" name="Text 36"/>
+          <p:cNvPr id="40" name="Text 37"/>
           <p:cNvSpPr/>
           <p:nvPr/>
         </p:nvSpPr>
@@ -26835,7 +27178,7 @@
         </p:nvSpPr>
         <p:spPr>
           <a:xfrm>
-            <a:off x="11368735" y="6437376"/>
+            <a:off x="11368735" y="6327648"/>
             <a:ext cx="365760" cy="274320"/>
           </a:xfrm>
           <a:prstGeom prst="rect">
@@ -26882,13 +27225,6 @@
 <file path=ppt/slides/slide6.xml><?xml version="1.0" encoding="utf-8"?>
 <p:sld xmlns:a="http://schemas.openxmlformats.org/drawingml/2006/main" xmlns:r="http://schemas.openxmlformats.org/officeDocument/2006/relationships" xmlns:p="http://schemas.openxmlformats.org/presentationml/2006/main">
   <p:cSld name="Slide 6">
-    <p:bg>
-      <p:bgPr>
-        <a:solidFill>
-          <a:srgbClr val="FFFFFF"/>
-        </a:solidFill>
-      </p:bgPr>
-    </p:bg>
     <p:spTree>
       <p:nvGrpSpPr>
         <p:cNvPr id="1" name=""/>
@@ -26905,7 +27241,29 @@
       </p:grpSpPr>
       <p:sp>
         <p:nvSpPr>
-          <p:cNvPr id="2" name="Text 0"/>
+          <p:cNvPr id="2" name="Shape 0"/>
+          <p:cNvSpPr/>
+          <p:nvPr/>
+        </p:nvSpPr>
+        <p:spPr>
+          <a:xfrm>
+            <a:off x="231343" y="194767"/>
+            <a:ext cx="11716207" cy="6473952"/>
+          </a:xfrm>
+          <a:prstGeom prst="roundRect">
+            <a:avLst>
+              <a:gd name="adj" fmla="val 3107"/>
+            </a:avLst>
+          </a:prstGeom>
+          <a:solidFill>
+            <a:srgbClr val="FFFFFF"/>
+          </a:solidFill>
+          <a:ln/>
+        </p:spPr>
+      </p:sp>
+      <p:sp>
+        <p:nvSpPr>
+          <p:cNvPr id="3" name="Text 1"/>
           <p:cNvSpPr/>
           <p:nvPr/>
         </p:nvSpPr>
@@ -26944,7 +27302,7 @@
       </p:sp>
       <p:sp>
         <p:nvSpPr>
-          <p:cNvPr id="3" name="Text 1"/>
+          <p:cNvPr id="4" name="Text 2"/>
           <p:cNvSpPr/>
           <p:nvPr/>
         </p:nvSpPr>
@@ -26983,7 +27341,7 @@
       </p:sp>
       <p:sp>
         <p:nvSpPr>
-          <p:cNvPr id="4" name="Shape 2"/>
+          <p:cNvPr id="5" name="Shape 3"/>
           <p:cNvSpPr/>
           <p:nvPr/>
         </p:nvSpPr>
@@ -27005,7 +27363,7 @@
       </p:sp>
       <p:sp>
         <p:nvSpPr>
-          <p:cNvPr id="5" name="Text 3"/>
+          <p:cNvPr id="6" name="Text 4"/>
           <p:cNvSpPr/>
           <p:nvPr/>
         </p:nvSpPr>
@@ -27044,7 +27402,7 @@
       </p:sp>
       <p:pic>
         <p:nvPicPr>
-          <p:cNvPr id="6" name="Image 0" descr="preencoded.png">    </p:cNvPr>
+          <p:cNvPr id="7" name="Image 0" descr="preencoded.png">    </p:cNvPr>
           <p:cNvPicPr>
             <a:picLocks noChangeAspect="1"/>
           </p:cNvPicPr>
@@ -27058,7 +27416,7 @@
         </p:blipFill>
         <p:spPr>
           <a:xfrm>
-            <a:off x="566928" y="6254496"/>
+            <a:off x="566928" y="6126480"/>
             <a:ext cx="1481328" cy="457200"/>
           </a:xfrm>
           <a:prstGeom prst="rect">
@@ -27068,7 +27426,7 @@
       </p:pic>
       <p:sp>
         <p:nvSpPr>
-          <p:cNvPr id="7" name="Shape 4"/>
+          <p:cNvPr id="8" name="Shape 5"/>
           <p:cNvSpPr/>
           <p:nvPr/>
         </p:nvSpPr>
@@ -27095,7 +27453,7 @@
       </p:sp>
       <p:sp>
         <p:nvSpPr>
-          <p:cNvPr id="8" name="Text 5"/>
+          <p:cNvPr id="9" name="Text 6"/>
           <p:cNvSpPr/>
           <p:nvPr/>
         </p:nvSpPr>
@@ -27137,7 +27495,7 @@
       </p:sp>
       <p:sp>
         <p:nvSpPr>
-          <p:cNvPr id="9" name="Shape 6"/>
+          <p:cNvPr id="10" name="Shape 7"/>
           <p:cNvSpPr/>
           <p:nvPr/>
         </p:nvSpPr>
@@ -27159,7 +27517,7 @@
       </p:sp>
       <p:sp>
         <p:nvSpPr>
-          <p:cNvPr id="10" name="Shape 7"/>
+          <p:cNvPr id="11" name="Shape 8"/>
           <p:cNvSpPr/>
           <p:nvPr/>
         </p:nvSpPr>
@@ -27179,7 +27537,7 @@
       </p:sp>
       <p:sp>
         <p:nvSpPr>
-          <p:cNvPr id="11" name="Text 8"/>
+          <p:cNvPr id="12" name="Text 9"/>
           <p:cNvSpPr/>
           <p:nvPr/>
         </p:nvSpPr>
@@ -27218,7 +27576,7 @@
       </p:sp>
       <p:sp>
         <p:nvSpPr>
-          <p:cNvPr id="12" name="Text 9"/>
+          <p:cNvPr id="13" name="Text 10"/>
           <p:cNvSpPr/>
           <p:nvPr/>
         </p:nvSpPr>
@@ -27257,7 +27615,7 @@
       </p:sp>
       <p:sp>
         <p:nvSpPr>
-          <p:cNvPr id="13" name="Text 10"/>
+          <p:cNvPr id="14" name="Text 11"/>
           <p:cNvSpPr/>
           <p:nvPr/>
         </p:nvSpPr>
@@ -27299,7 +27657,7 @@
       </p:sp>
       <p:sp>
         <p:nvSpPr>
-          <p:cNvPr id="14" name="Shape 11"/>
+          <p:cNvPr id="15" name="Shape 12"/>
           <p:cNvSpPr/>
           <p:nvPr/>
         </p:nvSpPr>
@@ -27321,7 +27679,7 @@
       </p:sp>
       <p:sp>
         <p:nvSpPr>
-          <p:cNvPr id="15" name="Shape 12"/>
+          <p:cNvPr id="16" name="Shape 13"/>
           <p:cNvSpPr/>
           <p:nvPr/>
         </p:nvSpPr>
@@ -27341,7 +27699,7 @@
       </p:sp>
       <p:sp>
         <p:nvSpPr>
-          <p:cNvPr id="16" name="Text 13"/>
+          <p:cNvPr id="17" name="Text 14"/>
           <p:cNvSpPr/>
           <p:nvPr/>
         </p:nvSpPr>
@@ -27380,7 +27738,7 @@
       </p:sp>
       <p:sp>
         <p:nvSpPr>
-          <p:cNvPr id="17" name="Text 14"/>
+          <p:cNvPr id="18" name="Text 15"/>
           <p:cNvSpPr/>
           <p:nvPr/>
         </p:nvSpPr>
@@ -27419,7 +27777,7 @@
       </p:sp>
       <p:sp>
         <p:nvSpPr>
-          <p:cNvPr id="18" name="Text 15"/>
+          <p:cNvPr id="19" name="Text 16"/>
           <p:cNvSpPr/>
           <p:nvPr/>
         </p:nvSpPr>
@@ -27461,7 +27819,7 @@
       </p:sp>
       <p:sp>
         <p:nvSpPr>
-          <p:cNvPr id="19" name="Shape 16"/>
+          <p:cNvPr id="20" name="Shape 17"/>
           <p:cNvSpPr/>
           <p:nvPr/>
         </p:nvSpPr>
@@ -27483,7 +27841,7 @@
       </p:sp>
       <p:sp>
         <p:nvSpPr>
-          <p:cNvPr id="20" name="Shape 17"/>
+          <p:cNvPr id="21" name="Shape 18"/>
           <p:cNvSpPr/>
           <p:nvPr/>
         </p:nvSpPr>
@@ -27503,7 +27861,7 @@
       </p:sp>
       <p:sp>
         <p:nvSpPr>
-          <p:cNvPr id="21" name="Text 18"/>
+          <p:cNvPr id="22" name="Text 19"/>
           <p:cNvSpPr/>
           <p:nvPr/>
         </p:nvSpPr>
@@ -27542,7 +27900,7 @@
       </p:sp>
       <p:sp>
         <p:nvSpPr>
-          <p:cNvPr id="22" name="Text 19"/>
+          <p:cNvPr id="23" name="Text 20"/>
           <p:cNvSpPr/>
           <p:nvPr/>
         </p:nvSpPr>
@@ -27581,7 +27939,7 @@
       </p:sp>
       <p:sp>
         <p:nvSpPr>
-          <p:cNvPr id="23" name="Text 20"/>
+          <p:cNvPr id="24" name="Text 21"/>
           <p:cNvSpPr/>
           <p:nvPr/>
         </p:nvSpPr>
@@ -27623,7 +27981,7 @@
       </p:sp>
       <p:sp>
         <p:nvSpPr>
-          <p:cNvPr id="24" name="Shape 21"/>
+          <p:cNvPr id="25" name="Shape 22"/>
           <p:cNvSpPr/>
           <p:nvPr/>
         </p:nvSpPr>
@@ -27645,7 +28003,7 @@
       </p:sp>
       <p:sp>
         <p:nvSpPr>
-          <p:cNvPr id="25" name="Text 22"/>
+          <p:cNvPr id="26" name="Text 23"/>
           <p:cNvSpPr/>
           <p:nvPr/>
         </p:nvSpPr>
@@ -27697,7 +28055,7 @@
         </p:nvSpPr>
         <p:spPr>
           <a:xfrm>
-            <a:off x="11368735" y="6437376"/>
+            <a:off x="11368735" y="6327648"/>
             <a:ext cx="365760" cy="274320"/>
           </a:xfrm>
           <a:prstGeom prst="rect">
@@ -27744,13 +28102,6 @@
 <file path=ppt/slides/slide7.xml><?xml version="1.0" encoding="utf-8"?>
 <p:sld xmlns:a="http://schemas.openxmlformats.org/drawingml/2006/main" xmlns:r="http://schemas.openxmlformats.org/officeDocument/2006/relationships" xmlns:p="http://schemas.openxmlformats.org/presentationml/2006/main">
   <p:cSld name="Slide 7">
-    <p:bg>
-      <p:bgPr>
-        <a:solidFill>
-          <a:srgbClr val="FFFFFF"/>
-        </a:solidFill>
-      </p:bgPr>
-    </p:bg>
     <p:spTree>
       <p:nvGrpSpPr>
         <p:cNvPr id="1" name=""/>
@@ -27767,7 +28118,29 @@
       </p:grpSpPr>
       <p:sp>
         <p:nvSpPr>
-          <p:cNvPr id="2" name="Text 0"/>
+          <p:cNvPr id="2" name="Shape 0"/>
+          <p:cNvSpPr/>
+          <p:nvPr/>
+        </p:nvSpPr>
+        <p:spPr>
+          <a:xfrm>
+            <a:off x="231343" y="194767"/>
+            <a:ext cx="11716207" cy="6473952"/>
+          </a:xfrm>
+          <a:prstGeom prst="roundRect">
+            <a:avLst>
+              <a:gd name="adj" fmla="val 3107"/>
+            </a:avLst>
+          </a:prstGeom>
+          <a:solidFill>
+            <a:srgbClr val="FFFFFF"/>
+          </a:solidFill>
+          <a:ln/>
+        </p:spPr>
+      </p:sp>
+      <p:sp>
+        <p:nvSpPr>
+          <p:cNvPr id="3" name="Text 1"/>
           <p:cNvSpPr/>
           <p:nvPr/>
         </p:nvSpPr>
@@ -27806,7 +28179,7 @@
       </p:sp>
       <p:sp>
         <p:nvSpPr>
-          <p:cNvPr id="3" name="Text 1"/>
+          <p:cNvPr id="4" name="Text 2"/>
           <p:cNvSpPr/>
           <p:nvPr/>
         </p:nvSpPr>
@@ -27845,7 +28218,7 @@
       </p:sp>
       <p:sp>
         <p:nvSpPr>
-          <p:cNvPr id="4" name="Shape 2"/>
+          <p:cNvPr id="5" name="Shape 3"/>
           <p:cNvSpPr/>
           <p:nvPr/>
         </p:nvSpPr>
@@ -27867,7 +28240,7 @@
       </p:sp>
       <p:sp>
         <p:nvSpPr>
-          <p:cNvPr id="5" name="Text 3"/>
+          <p:cNvPr id="6" name="Text 4"/>
           <p:cNvSpPr/>
           <p:nvPr/>
         </p:nvSpPr>
@@ -27906,7 +28279,7 @@
       </p:sp>
       <p:pic>
         <p:nvPicPr>
-          <p:cNvPr id="6" name="Image 0" descr="preencoded.png">    </p:cNvPr>
+          <p:cNvPr id="7" name="Image 0" descr="preencoded.png">    </p:cNvPr>
           <p:cNvPicPr>
             <a:picLocks noChangeAspect="1"/>
           </p:cNvPicPr>
@@ -27920,7 +28293,7 @@
         </p:blipFill>
         <p:spPr>
           <a:xfrm>
-            <a:off x="566928" y="6254496"/>
+            <a:off x="566928" y="6126480"/>
             <a:ext cx="1481328" cy="457200"/>
           </a:xfrm>
           <a:prstGeom prst="rect">
@@ -28991,7 +29364,7 @@
       </p:graphicFrame>
       <p:sp>
         <p:nvSpPr>
-          <p:cNvPr id="8" name="Shape 4"/>
+          <p:cNvPr id="9" name="Shape 5"/>
           <p:cNvSpPr/>
           <p:nvPr/>
         </p:nvSpPr>
@@ -29013,7 +29386,7 @@
       </p:sp>
       <p:sp>
         <p:nvSpPr>
-          <p:cNvPr id="9" name="Text 5"/>
+          <p:cNvPr id="10" name="Text 6"/>
           <p:cNvSpPr/>
           <p:nvPr/>
         </p:nvSpPr>
@@ -29052,7 +29425,7 @@
       </p:sp>
       <p:sp>
         <p:nvSpPr>
-          <p:cNvPr id="10" name="Text 6"/>
+          <p:cNvPr id="11" name="Text 7"/>
           <p:cNvSpPr/>
           <p:nvPr/>
         </p:nvSpPr>
@@ -29094,7 +29467,7 @@
       </p:sp>
       <p:sp>
         <p:nvSpPr>
-          <p:cNvPr id="11" name="Shape 7"/>
+          <p:cNvPr id="12" name="Shape 8"/>
           <p:cNvSpPr/>
           <p:nvPr/>
         </p:nvSpPr>
@@ -29121,7 +29494,7 @@
       </p:sp>
       <p:sp>
         <p:nvSpPr>
-          <p:cNvPr id="12" name="Text 8"/>
+          <p:cNvPr id="13" name="Text 9"/>
           <p:cNvSpPr/>
           <p:nvPr/>
         </p:nvSpPr>
@@ -29173,7 +29546,7 @@
         </p:nvSpPr>
         <p:spPr>
           <a:xfrm>
-            <a:off x="11368735" y="6437376"/>
+            <a:off x="11368735" y="6327648"/>
             <a:ext cx="365760" cy="274320"/>
           </a:xfrm>
           <a:prstGeom prst="rect">
@@ -29220,13 +29593,6 @@
 <file path=ppt/slides/slide8.xml><?xml version="1.0" encoding="utf-8"?>
 <p:sld xmlns:a="http://schemas.openxmlformats.org/drawingml/2006/main" xmlns:r="http://schemas.openxmlformats.org/officeDocument/2006/relationships" xmlns:p="http://schemas.openxmlformats.org/presentationml/2006/main">
   <p:cSld name="Slide 8">
-    <p:bg>
-      <p:bgPr>
-        <a:solidFill>
-          <a:srgbClr val="FFFFFF"/>
-        </a:solidFill>
-      </p:bgPr>
-    </p:bg>
     <p:spTree>
       <p:nvGrpSpPr>
         <p:cNvPr id="1" name=""/>
@@ -29243,7 +29609,29 @@
       </p:grpSpPr>
       <p:sp>
         <p:nvSpPr>
-          <p:cNvPr id="2" name="Text 0"/>
+          <p:cNvPr id="2" name="Shape 0"/>
+          <p:cNvSpPr/>
+          <p:nvPr/>
+        </p:nvSpPr>
+        <p:spPr>
+          <a:xfrm>
+            <a:off x="231343" y="194767"/>
+            <a:ext cx="11716207" cy="6473952"/>
+          </a:xfrm>
+          <a:prstGeom prst="roundRect">
+            <a:avLst>
+              <a:gd name="adj" fmla="val 3107"/>
+            </a:avLst>
+          </a:prstGeom>
+          <a:solidFill>
+            <a:srgbClr val="FFFFFF"/>
+          </a:solidFill>
+          <a:ln/>
+        </p:spPr>
+      </p:sp>
+      <p:sp>
+        <p:nvSpPr>
+          <p:cNvPr id="3" name="Text 1"/>
           <p:cNvSpPr/>
           <p:nvPr/>
         </p:nvSpPr>
@@ -29282,7 +29670,7 @@
       </p:sp>
       <p:sp>
         <p:nvSpPr>
-          <p:cNvPr id="3" name="Text 1"/>
+          <p:cNvPr id="4" name="Text 2"/>
           <p:cNvSpPr/>
           <p:nvPr/>
         </p:nvSpPr>
@@ -29321,7 +29709,7 @@
       </p:sp>
       <p:sp>
         <p:nvSpPr>
-          <p:cNvPr id="4" name="Shape 2"/>
+          <p:cNvPr id="5" name="Shape 3"/>
           <p:cNvSpPr/>
           <p:nvPr/>
         </p:nvSpPr>
@@ -29343,7 +29731,7 @@
       </p:sp>
       <p:sp>
         <p:nvSpPr>
-          <p:cNvPr id="5" name="Text 3"/>
+          <p:cNvPr id="6" name="Text 4"/>
           <p:cNvSpPr/>
           <p:nvPr/>
         </p:nvSpPr>
@@ -29382,7 +29770,7 @@
       </p:sp>
       <p:pic>
         <p:nvPicPr>
-          <p:cNvPr id="6" name="Image 0" descr="preencoded.png">    </p:cNvPr>
+          <p:cNvPr id="7" name="Image 0" descr="preencoded.png">    </p:cNvPr>
           <p:cNvPicPr>
             <a:picLocks noChangeAspect="1"/>
           </p:cNvPicPr>
@@ -29396,7 +29784,7 @@
         </p:blipFill>
         <p:spPr>
           <a:xfrm>
-            <a:off x="566928" y="6254496"/>
+            <a:off x="566928" y="6126480"/>
             <a:ext cx="1481328" cy="457200"/>
           </a:xfrm>
           <a:prstGeom prst="rect">
@@ -29406,7 +29794,7 @@
       </p:pic>
       <p:sp>
         <p:nvSpPr>
-          <p:cNvPr id="7" name="Shape 4"/>
+          <p:cNvPr id="8" name="Shape 5"/>
           <p:cNvSpPr/>
           <p:nvPr/>
         </p:nvSpPr>
@@ -29428,7 +29816,7 @@
       </p:sp>
       <p:sp>
         <p:nvSpPr>
-          <p:cNvPr id="8" name="Text 5"/>
+          <p:cNvPr id="9" name="Text 6"/>
           <p:cNvSpPr/>
           <p:nvPr/>
         </p:nvSpPr>
@@ -29467,7 +29855,7 @@
       </p:sp>
       <p:sp>
         <p:nvSpPr>
-          <p:cNvPr id="9" name="Text 6"/>
+          <p:cNvPr id="10" name="Text 7"/>
           <p:cNvSpPr/>
           <p:nvPr/>
         </p:nvSpPr>
@@ -29506,7 +29894,7 @@
       </p:sp>
       <p:sp>
         <p:nvSpPr>
-          <p:cNvPr id="10" name="Shape 7"/>
+          <p:cNvPr id="11" name="Shape 8"/>
           <p:cNvSpPr/>
           <p:nvPr/>
         </p:nvSpPr>
@@ -29528,7 +29916,7 @@
       </p:sp>
       <p:sp>
         <p:nvSpPr>
-          <p:cNvPr id="11" name="Text 8"/>
+          <p:cNvPr id="12" name="Text 9"/>
           <p:cNvSpPr/>
           <p:nvPr/>
         </p:nvSpPr>
@@ -29567,7 +29955,7 @@
       </p:sp>
       <p:sp>
         <p:nvSpPr>
-          <p:cNvPr id="12" name="Text 9"/>
+          <p:cNvPr id="13" name="Text 10"/>
           <p:cNvSpPr/>
           <p:nvPr/>
         </p:nvSpPr>
@@ -29606,7 +29994,7 @@
       </p:sp>
       <p:sp>
         <p:nvSpPr>
-          <p:cNvPr id="13" name="Shape 10"/>
+          <p:cNvPr id="14" name="Shape 11"/>
           <p:cNvSpPr/>
           <p:nvPr/>
         </p:nvSpPr>
@@ -29628,7 +30016,7 @@
       </p:sp>
       <p:sp>
         <p:nvSpPr>
-          <p:cNvPr id="14" name="Text 11"/>
+          <p:cNvPr id="15" name="Text 12"/>
           <p:cNvSpPr/>
           <p:nvPr/>
         </p:nvSpPr>
@@ -29667,7 +30055,7 @@
       </p:sp>
       <p:sp>
         <p:nvSpPr>
-          <p:cNvPr id="15" name="Text 12"/>
+          <p:cNvPr id="16" name="Text 13"/>
           <p:cNvSpPr/>
           <p:nvPr/>
         </p:nvSpPr>
@@ -29706,7 +30094,7 @@
       </p:sp>
       <p:sp>
         <p:nvSpPr>
-          <p:cNvPr id="16" name="Shape 13"/>
+          <p:cNvPr id="17" name="Shape 14"/>
           <p:cNvSpPr/>
           <p:nvPr/>
         </p:nvSpPr>
@@ -29726,7 +30114,7 @@
       </p:sp>
       <p:sp>
         <p:nvSpPr>
-          <p:cNvPr id="17" name="Shape 14"/>
+          <p:cNvPr id="18" name="Shape 15"/>
           <p:cNvSpPr/>
           <p:nvPr/>
         </p:nvSpPr>
@@ -29746,7 +30134,7 @@
       </p:sp>
       <p:sp>
         <p:nvSpPr>
-          <p:cNvPr id="18" name="Shape 15"/>
+          <p:cNvPr id="19" name="Shape 16"/>
           <p:cNvSpPr/>
           <p:nvPr/>
         </p:nvSpPr>
@@ -29766,7 +30154,7 @@
       </p:sp>
       <p:sp>
         <p:nvSpPr>
-          <p:cNvPr id="19" name="Shape 16"/>
+          <p:cNvPr id="20" name="Shape 17"/>
           <p:cNvSpPr/>
           <p:nvPr/>
         </p:nvSpPr>
@@ -29786,7 +30174,7 @@
       </p:sp>
       <p:sp>
         <p:nvSpPr>
-          <p:cNvPr id="20" name="Shape 17"/>
+          <p:cNvPr id="21" name="Shape 18"/>
           <p:cNvSpPr/>
           <p:nvPr/>
         </p:nvSpPr>
@@ -29806,7 +30194,7 @@
       </p:sp>
       <p:sp>
         <p:nvSpPr>
-          <p:cNvPr id="21" name="Shape 18"/>
+          <p:cNvPr id="22" name="Shape 19"/>
           <p:cNvSpPr/>
           <p:nvPr/>
         </p:nvSpPr>
@@ -29826,7 +30214,7 @@
       </p:sp>
       <p:sp>
         <p:nvSpPr>
-          <p:cNvPr id="22" name="Shape 19"/>
+          <p:cNvPr id="23" name="Shape 20"/>
           <p:cNvSpPr/>
           <p:nvPr/>
         </p:nvSpPr>
@@ -29846,7 +30234,7 @@
       </p:sp>
       <p:sp>
         <p:nvSpPr>
-          <p:cNvPr id="23" name="Shape 20"/>
+          <p:cNvPr id="24" name="Shape 21"/>
           <p:cNvSpPr/>
           <p:nvPr/>
         </p:nvSpPr>
@@ -29866,7 +30254,7 @@
       </p:sp>
       <p:sp>
         <p:nvSpPr>
-          <p:cNvPr id="24" name="Shape 21"/>
+          <p:cNvPr id="25" name="Shape 22"/>
           <p:cNvSpPr/>
           <p:nvPr/>
         </p:nvSpPr>
@@ -29886,7 +30274,7 @@
       </p:sp>
       <p:sp>
         <p:nvSpPr>
-          <p:cNvPr id="25" name="Shape 22"/>
+          <p:cNvPr id="26" name="Shape 23"/>
           <p:cNvSpPr/>
           <p:nvPr/>
         </p:nvSpPr>
@@ -29906,7 +30294,7 @@
       </p:sp>
       <p:sp>
         <p:nvSpPr>
-          <p:cNvPr id="26" name="Shape 23"/>
+          <p:cNvPr id="27" name="Shape 24"/>
           <p:cNvSpPr/>
           <p:nvPr/>
         </p:nvSpPr>
@@ -29926,7 +30314,7 @@
       </p:sp>
       <p:sp>
         <p:nvSpPr>
-          <p:cNvPr id="27" name="Shape 24"/>
+          <p:cNvPr id="28" name="Shape 25"/>
           <p:cNvSpPr/>
           <p:nvPr/>
         </p:nvSpPr>
@@ -29946,7 +30334,7 @@
       </p:sp>
       <p:sp>
         <p:nvSpPr>
-          <p:cNvPr id="28" name="Shape 25"/>
+          <p:cNvPr id="29" name="Shape 26"/>
           <p:cNvSpPr/>
           <p:nvPr/>
         </p:nvSpPr>
@@ -29966,7 +30354,7 @@
       </p:sp>
       <p:sp>
         <p:nvSpPr>
-          <p:cNvPr id="29" name="Shape 26"/>
+          <p:cNvPr id="30" name="Shape 27"/>
           <p:cNvSpPr/>
           <p:nvPr/>
         </p:nvSpPr>
@@ -29986,7 +30374,7 @@
       </p:sp>
       <p:sp>
         <p:nvSpPr>
-          <p:cNvPr id="30" name="Shape 27"/>
+          <p:cNvPr id="31" name="Shape 28"/>
           <p:cNvSpPr/>
           <p:nvPr/>
         </p:nvSpPr>
@@ -30006,7 +30394,7 @@
       </p:sp>
       <p:sp>
         <p:nvSpPr>
-          <p:cNvPr id="31" name="Shape 28"/>
+          <p:cNvPr id="32" name="Shape 29"/>
           <p:cNvSpPr/>
           <p:nvPr/>
         </p:nvSpPr>
@@ -30026,7 +30414,7 @@
       </p:sp>
       <p:sp>
         <p:nvSpPr>
-          <p:cNvPr id="32" name="Shape 29"/>
+          <p:cNvPr id="33" name="Shape 30"/>
           <p:cNvSpPr/>
           <p:nvPr/>
         </p:nvSpPr>
@@ -30046,7 +30434,7 @@
       </p:sp>
       <p:sp>
         <p:nvSpPr>
-          <p:cNvPr id="33" name="Shape 30"/>
+          <p:cNvPr id="34" name="Shape 31"/>
           <p:cNvSpPr/>
           <p:nvPr/>
         </p:nvSpPr>
@@ -30066,7 +30454,7 @@
       </p:sp>
       <p:sp>
         <p:nvSpPr>
-          <p:cNvPr id="34" name="Shape 31"/>
+          <p:cNvPr id="35" name="Shape 32"/>
           <p:cNvSpPr/>
           <p:nvPr/>
         </p:nvSpPr>
@@ -30086,7 +30474,7 @@
       </p:sp>
       <p:sp>
         <p:nvSpPr>
-          <p:cNvPr id="35" name="Shape 32"/>
+          <p:cNvPr id="36" name="Shape 33"/>
           <p:cNvSpPr/>
           <p:nvPr/>
         </p:nvSpPr>
@@ -30106,7 +30494,7 @@
       </p:sp>
       <p:sp>
         <p:nvSpPr>
-          <p:cNvPr id="36" name="Shape 33"/>
+          <p:cNvPr id="37" name="Shape 34"/>
           <p:cNvSpPr/>
           <p:nvPr/>
         </p:nvSpPr>
@@ -30126,7 +30514,7 @@
       </p:sp>
       <p:sp>
         <p:nvSpPr>
-          <p:cNvPr id="37" name="Shape 34"/>
+          <p:cNvPr id="38" name="Shape 35"/>
           <p:cNvSpPr/>
           <p:nvPr/>
         </p:nvSpPr>
@@ -30146,7 +30534,7 @@
       </p:sp>
       <p:sp>
         <p:nvSpPr>
-          <p:cNvPr id="38" name="Shape 35"/>
+          <p:cNvPr id="39" name="Shape 36"/>
           <p:cNvSpPr/>
           <p:nvPr/>
         </p:nvSpPr>
@@ -30166,7 +30554,7 @@
       </p:sp>
       <p:sp>
         <p:nvSpPr>
-          <p:cNvPr id="39" name="Shape 36"/>
+          <p:cNvPr id="40" name="Shape 37"/>
           <p:cNvSpPr/>
           <p:nvPr/>
         </p:nvSpPr>
@@ -30186,7 +30574,7 @@
       </p:sp>
       <p:sp>
         <p:nvSpPr>
-          <p:cNvPr id="40" name="Shape 37"/>
+          <p:cNvPr id="41" name="Shape 38"/>
           <p:cNvSpPr/>
           <p:nvPr/>
         </p:nvSpPr>
@@ -30206,7 +30594,7 @@
       </p:sp>
       <p:sp>
         <p:nvSpPr>
-          <p:cNvPr id="41" name="Shape 38"/>
+          <p:cNvPr id="42" name="Shape 39"/>
           <p:cNvSpPr/>
           <p:nvPr/>
         </p:nvSpPr>
@@ -30226,7 +30614,7 @@
       </p:sp>
       <p:sp>
         <p:nvSpPr>
-          <p:cNvPr id="42" name="Shape 39"/>
+          <p:cNvPr id="43" name="Shape 40"/>
           <p:cNvSpPr/>
           <p:nvPr/>
         </p:nvSpPr>
@@ -30249,7 +30637,7 @@
       </p:sp>
       <p:sp>
         <p:nvSpPr>
-          <p:cNvPr id="43" name="Text 40"/>
+          <p:cNvPr id="44" name="Text 41"/>
           <p:cNvSpPr/>
           <p:nvPr/>
         </p:nvSpPr>
@@ -30288,7 +30676,7 @@
       </p:sp>
       <p:sp>
         <p:nvSpPr>
-          <p:cNvPr id="44" name="Shape 41"/>
+          <p:cNvPr id="45" name="Shape 42"/>
           <p:cNvSpPr/>
           <p:nvPr/>
         </p:nvSpPr>
@@ -30311,7 +30699,7 @@
       </p:sp>
       <p:sp>
         <p:nvSpPr>
-          <p:cNvPr id="45" name="Text 42"/>
+          <p:cNvPr id="46" name="Text 43"/>
           <p:cNvSpPr/>
           <p:nvPr/>
         </p:nvSpPr>
@@ -30350,7 +30738,7 @@
       </p:sp>
       <p:sp>
         <p:nvSpPr>
-          <p:cNvPr id="46" name="Text 43"/>
+          <p:cNvPr id="47" name="Text 44"/>
           <p:cNvSpPr/>
           <p:nvPr/>
         </p:nvSpPr>
@@ -30389,7 +30777,7 @@
       </p:sp>
       <p:sp>
         <p:nvSpPr>
-          <p:cNvPr id="47" name="Shape 44"/>
+          <p:cNvPr id="48" name="Shape 45"/>
           <p:cNvSpPr/>
           <p:nvPr/>
         </p:nvSpPr>
@@ -30411,7 +30799,7 @@
       </p:sp>
       <p:sp>
         <p:nvSpPr>
-          <p:cNvPr id="48" name="Text 45"/>
+          <p:cNvPr id="49" name="Text 46"/>
           <p:cNvSpPr/>
           <p:nvPr/>
         </p:nvSpPr>
@@ -30450,7 +30838,7 @@
       </p:sp>
       <p:sp>
         <p:nvSpPr>
-          <p:cNvPr id="49" name="Text 46"/>
+          <p:cNvPr id="50" name="Text 47"/>
           <p:cNvSpPr/>
           <p:nvPr/>
         </p:nvSpPr>
@@ -30492,7 +30880,7 @@
       </p:sp>
       <p:sp>
         <p:nvSpPr>
-          <p:cNvPr id="50" name="Shape 47"/>
+          <p:cNvPr id="51" name="Shape 48"/>
           <p:cNvSpPr/>
           <p:nvPr/>
         </p:nvSpPr>
@@ -30514,7 +30902,7 @@
       </p:sp>
       <p:sp>
         <p:nvSpPr>
-          <p:cNvPr id="51" name="Text 48"/>
+          <p:cNvPr id="52" name="Text 49"/>
           <p:cNvSpPr/>
           <p:nvPr/>
         </p:nvSpPr>
@@ -30566,7 +30954,7 @@
         </p:nvSpPr>
         <p:spPr>
           <a:xfrm>
-            <a:off x="11368735" y="6437376"/>
+            <a:off x="11368735" y="6327648"/>
             <a:ext cx="365760" cy="274320"/>
           </a:xfrm>
           <a:prstGeom prst="rect">
@@ -30613,13 +31001,6 @@
 <file path=ppt/slides/slide9.xml><?xml version="1.0" encoding="utf-8"?>
 <p:sld xmlns:a="http://schemas.openxmlformats.org/drawingml/2006/main" xmlns:r="http://schemas.openxmlformats.org/officeDocument/2006/relationships" xmlns:p="http://schemas.openxmlformats.org/presentationml/2006/main">
   <p:cSld name="Slide 9">
-    <p:bg>
-      <p:bgPr>
-        <a:solidFill>
-          <a:srgbClr val="FFFFFF"/>
-        </a:solidFill>
-      </p:bgPr>
-    </p:bg>
     <p:spTree>
       <p:nvGrpSpPr>
         <p:cNvPr id="1" name=""/>
@@ -30636,7 +31017,29 @@
       </p:grpSpPr>
       <p:sp>
         <p:nvSpPr>
-          <p:cNvPr id="2" name="Text 0"/>
+          <p:cNvPr id="2" name="Shape 0"/>
+          <p:cNvSpPr/>
+          <p:nvPr/>
+        </p:nvSpPr>
+        <p:spPr>
+          <a:xfrm>
+            <a:off x="231343" y="194767"/>
+            <a:ext cx="11716207" cy="6473952"/>
+          </a:xfrm>
+          <a:prstGeom prst="roundRect">
+            <a:avLst>
+              <a:gd name="adj" fmla="val 3107"/>
+            </a:avLst>
+          </a:prstGeom>
+          <a:solidFill>
+            <a:srgbClr val="FFFFFF"/>
+          </a:solidFill>
+          <a:ln/>
+        </p:spPr>
+      </p:sp>
+      <p:sp>
+        <p:nvSpPr>
+          <p:cNvPr id="3" name="Text 1"/>
           <p:cNvSpPr/>
           <p:nvPr/>
         </p:nvSpPr>
@@ -30675,7 +31078,7 @@
       </p:sp>
       <p:sp>
         <p:nvSpPr>
-          <p:cNvPr id="3" name="Text 1"/>
+          <p:cNvPr id="4" name="Text 2"/>
           <p:cNvSpPr/>
           <p:nvPr/>
         </p:nvSpPr>
@@ -30714,7 +31117,7 @@
       </p:sp>
       <p:sp>
         <p:nvSpPr>
-          <p:cNvPr id="4" name="Shape 2"/>
+          <p:cNvPr id="5" name="Shape 3"/>
           <p:cNvSpPr/>
           <p:nvPr/>
         </p:nvSpPr>
@@ -30736,7 +31139,7 @@
       </p:sp>
       <p:sp>
         <p:nvSpPr>
-          <p:cNvPr id="5" name="Text 3"/>
+          <p:cNvPr id="6" name="Text 4"/>
           <p:cNvSpPr/>
           <p:nvPr/>
         </p:nvSpPr>
@@ -30775,7 +31178,7 @@
       </p:sp>
       <p:pic>
         <p:nvPicPr>
-          <p:cNvPr id="6" name="Image 0" descr="preencoded.png">    </p:cNvPr>
+          <p:cNvPr id="7" name="Image 0" descr="preencoded.png">    </p:cNvPr>
           <p:cNvPicPr>
             <a:picLocks noChangeAspect="1"/>
           </p:cNvPicPr>
@@ -30789,7 +31192,7 @@
         </p:blipFill>
         <p:spPr>
           <a:xfrm>
-            <a:off x="566928" y="6254496"/>
+            <a:off x="566928" y="6126480"/>
             <a:ext cx="1481328" cy="457200"/>
           </a:xfrm>
           <a:prstGeom prst="rect">
@@ -30799,7 +31202,7 @@
       </p:pic>
       <p:sp>
         <p:nvSpPr>
-          <p:cNvPr id="7" name="Shape 4"/>
+          <p:cNvPr id="8" name="Shape 5"/>
           <p:cNvSpPr/>
           <p:nvPr/>
         </p:nvSpPr>
@@ -30826,7 +31229,7 @@
       </p:sp>
       <p:sp>
         <p:nvSpPr>
-          <p:cNvPr id="8" name="Text 5"/>
+          <p:cNvPr id="9" name="Text 6"/>
           <p:cNvSpPr/>
           <p:nvPr/>
         </p:nvSpPr>
@@ -30928,7 +31331,7 @@
       </p:sp>
       <p:sp>
         <p:nvSpPr>
-          <p:cNvPr id="9" name="Shape 6"/>
+          <p:cNvPr id="10" name="Shape 7"/>
           <p:cNvSpPr/>
           <p:nvPr/>
         </p:nvSpPr>
@@ -30950,7 +31353,7 @@
       </p:sp>
       <p:sp>
         <p:nvSpPr>
-          <p:cNvPr id="10" name="Text 7"/>
+          <p:cNvPr id="11" name="Text 8"/>
           <p:cNvSpPr/>
           <p:nvPr/>
         </p:nvSpPr>
@@ -30989,7 +31392,7 @@
       </p:sp>
       <p:sp>
         <p:nvSpPr>
-          <p:cNvPr id="11" name="Text 8"/>
+          <p:cNvPr id="12" name="Text 9"/>
           <p:cNvSpPr/>
           <p:nvPr/>
         </p:nvSpPr>
@@ -31031,7 +31434,7 @@
       </p:sp>
       <p:sp>
         <p:nvSpPr>
-          <p:cNvPr id="12" name="Shape 9"/>
+          <p:cNvPr id="13" name="Shape 10"/>
           <p:cNvSpPr/>
           <p:nvPr/>
         </p:nvSpPr>
@@ -31053,7 +31456,7 @@
       </p:sp>
       <p:sp>
         <p:nvSpPr>
-          <p:cNvPr id="13" name="Text 10"/>
+          <p:cNvPr id="14" name="Text 11"/>
           <p:cNvSpPr/>
           <p:nvPr/>
         </p:nvSpPr>
@@ -31092,7 +31495,7 @@
       </p:sp>
       <p:sp>
         <p:nvSpPr>
-          <p:cNvPr id="14" name="Text 11"/>
+          <p:cNvPr id="15" name="Text 12"/>
           <p:cNvSpPr/>
           <p:nvPr/>
         </p:nvSpPr>
@@ -31134,7 +31537,7 @@
       </p:sp>
       <p:sp>
         <p:nvSpPr>
-          <p:cNvPr id="15" name="Text 12"/>
+          <p:cNvPr id="16" name="Text 13"/>
           <p:cNvSpPr/>
           <p:nvPr/>
         </p:nvSpPr>
@@ -31183,7 +31586,7 @@
         </p:nvSpPr>
         <p:spPr>
           <a:xfrm>
-            <a:off x="11368735" y="6437376"/>
+            <a:off x="11368735" y="6327648"/>
             <a:ext cx="365760" cy="274320"/>
           </a:xfrm>
           <a:prstGeom prst="rect">

--- a/docs/decks/L09.pptx
+++ b/docs/decks/L09.pptx
@@ -2803,7 +2803,7 @@
         </p:nvSpPr>
         <p:spPr>
           <a:xfrm>
-            <a:off x="11368735" y="6327648"/>
+            <a:off x="11368735" y="6437376"/>
             <a:ext cx="365760" cy="274320"/>
           </a:xfrm>
           <a:prstGeom prst="rect">
@@ -2932,7 +2932,7 @@
         </p:nvSpPr>
         <p:spPr>
           <a:xfrm>
-            <a:off x="11368735" y="6327648"/>
+            <a:off x="11368735" y="6437376"/>
             <a:ext cx="365760" cy="274320"/>
           </a:xfrm>
           <a:prstGeom prst="rect">
@@ -4072,7 +4072,7 @@
         </p:blipFill>
         <p:spPr>
           <a:xfrm>
-            <a:off x="566928" y="6126480"/>
+            <a:off x="566928" y="6254496"/>
             <a:ext cx="1481328" cy="457200"/>
           </a:xfrm>
           <a:prstGeom prst="rect">
@@ -5668,7 +5668,7 @@
         </p:nvSpPr>
         <p:spPr>
           <a:xfrm>
-            <a:off x="11368735" y="6327648"/>
+            <a:off x="11368735" y="6437376"/>
             <a:ext cx="365760" cy="274320"/>
           </a:xfrm>
           <a:prstGeom prst="rect">
@@ -5884,7 +5884,7 @@
         </p:blipFill>
         <p:spPr>
           <a:xfrm>
-            <a:off x="566928" y="6126480"/>
+            <a:off x="566928" y="6254496"/>
             <a:ext cx="1481328" cy="457200"/>
           </a:xfrm>
           <a:prstGeom prst="rect">
@@ -6467,7 +6467,7 @@
         </p:nvSpPr>
         <p:spPr>
           <a:xfrm>
-            <a:off x="11368735" y="6327648"/>
+            <a:off x="11368735" y="6437376"/>
             <a:ext cx="365760" cy="274320"/>
           </a:xfrm>
           <a:prstGeom prst="rect">
@@ -6683,7 +6683,7 @@
         </p:blipFill>
         <p:spPr>
           <a:xfrm>
-            <a:off x="566928" y="6126480"/>
+            <a:off x="566928" y="6254496"/>
             <a:ext cx="1481328" cy="457200"/>
           </a:xfrm>
           <a:prstGeom prst="rect">
@@ -7949,7 +7949,7 @@
         </p:nvSpPr>
         <p:spPr>
           <a:xfrm>
-            <a:off x="11368735" y="6327648"/>
+            <a:off x="11368735" y="6437376"/>
             <a:ext cx="365760" cy="274320"/>
           </a:xfrm>
           <a:prstGeom prst="rect">
@@ -8165,7 +8165,7 @@
         </p:blipFill>
         <p:spPr>
           <a:xfrm>
-            <a:off x="566928" y="6126480"/>
+            <a:off x="566928" y="6254496"/>
             <a:ext cx="1481328" cy="457200"/>
           </a:xfrm>
           <a:prstGeom prst="rect">
@@ -10749,7 +10749,7 @@
         </p:nvSpPr>
         <p:spPr>
           <a:xfrm>
-            <a:off x="11368735" y="6327648"/>
+            <a:off x="11368735" y="6437376"/>
             <a:ext cx="365760" cy="274320"/>
           </a:xfrm>
           <a:prstGeom prst="rect">
@@ -10965,7 +10965,7 @@
         </p:blipFill>
         <p:spPr>
           <a:xfrm>
-            <a:off x="566928" y="6126480"/>
+            <a:off x="566928" y="6254496"/>
             <a:ext cx="1481328" cy="457200"/>
           </a:xfrm>
           <a:prstGeom prst="rect">
@@ -11643,7 +11643,7 @@
         </p:nvSpPr>
         <p:spPr>
           <a:xfrm>
-            <a:off x="11368735" y="6327648"/>
+            <a:off x="11368735" y="6437376"/>
             <a:ext cx="365760" cy="274320"/>
           </a:xfrm>
           <a:prstGeom prst="rect">
@@ -11920,7 +11920,7 @@
         </p:blipFill>
         <p:spPr>
           <a:xfrm>
-            <a:off x="566928" y="6126480"/>
+            <a:off x="566928" y="6254496"/>
             <a:ext cx="1481328" cy="457200"/>
           </a:xfrm>
           <a:prstGeom prst="rect">
@@ -12859,7 +12859,7 @@
         </p:nvSpPr>
         <p:spPr>
           <a:xfrm>
-            <a:off x="11368735" y="6327648"/>
+            <a:off x="11368735" y="6437376"/>
             <a:ext cx="365760" cy="274320"/>
           </a:xfrm>
           <a:prstGeom prst="rect">
@@ -13075,7 +13075,7 @@
         </p:blipFill>
         <p:spPr>
           <a:xfrm>
-            <a:off x="566928" y="6126480"/>
+            <a:off x="566928" y="6254496"/>
             <a:ext cx="1481328" cy="457200"/>
           </a:xfrm>
           <a:prstGeom prst="rect">
@@ -14082,7 +14082,7 @@
         </p:nvSpPr>
         <p:spPr>
           <a:xfrm>
-            <a:off x="11368735" y="6327648"/>
+            <a:off x="11368735" y="6437376"/>
             <a:ext cx="365760" cy="274320"/>
           </a:xfrm>
           <a:prstGeom prst="rect">
@@ -14340,7 +14340,7 @@
         </p:blipFill>
         <p:spPr>
           <a:xfrm>
-            <a:off x="566928" y="6126480"/>
+            <a:off x="566928" y="6254496"/>
             <a:ext cx="1481328" cy="457200"/>
           </a:xfrm>
           <a:prstGeom prst="rect">
@@ -15258,7 +15258,7 @@
         </p:nvSpPr>
         <p:spPr>
           <a:xfrm>
-            <a:off x="11368735" y="6327648"/>
+            <a:off x="11368735" y="6437376"/>
             <a:ext cx="365760" cy="274320"/>
           </a:xfrm>
           <a:prstGeom prst="rect">
@@ -15516,7 +15516,7 @@
         </p:blipFill>
         <p:spPr>
           <a:xfrm>
-            <a:off x="566928" y="6126480"/>
+            <a:off x="566928" y="6254496"/>
             <a:ext cx="1481328" cy="457200"/>
           </a:xfrm>
           <a:prstGeom prst="rect">
@@ -16135,7 +16135,7 @@
         </p:nvSpPr>
         <p:spPr>
           <a:xfrm>
-            <a:off x="11368735" y="6327648"/>
+            <a:off x="11368735" y="6437376"/>
             <a:ext cx="365760" cy="274320"/>
           </a:xfrm>
           <a:prstGeom prst="rect">
@@ -16351,7 +16351,7 @@
         </p:blipFill>
         <p:spPr>
           <a:xfrm>
-            <a:off x="566928" y="6126480"/>
+            <a:off x="566928" y="6254496"/>
             <a:ext cx="1481328" cy="457200"/>
           </a:xfrm>
           <a:prstGeom prst="rect">
@@ -16749,7 +16749,7 @@
         </p:nvSpPr>
         <p:spPr>
           <a:xfrm>
-            <a:off x="11368735" y="6327648"/>
+            <a:off x="11368735" y="6437376"/>
             <a:ext cx="365760" cy="274320"/>
           </a:xfrm>
           <a:prstGeom prst="rect">
@@ -16968,7 +16968,7 @@
         </p:blipFill>
         <p:spPr>
           <a:xfrm>
-            <a:off x="566928" y="6126480"/>
+            <a:off x="566928" y="6254496"/>
             <a:ext cx="1481328" cy="457200"/>
           </a:xfrm>
           <a:prstGeom prst="rect">
@@ -17823,7 +17823,7 @@
         </p:nvSpPr>
         <p:spPr>
           <a:xfrm>
-            <a:off x="11368735" y="6327648"/>
+            <a:off x="11368735" y="6437376"/>
             <a:ext cx="365760" cy="274320"/>
           </a:xfrm>
           <a:prstGeom prst="rect">
@@ -18000,7 +18000,7 @@
         </p:blipFill>
         <p:spPr>
           <a:xfrm>
-            <a:off x="566928" y="6126480"/>
+            <a:off x="566928" y="6254496"/>
             <a:ext cx="1481328" cy="457200"/>
           </a:xfrm>
           <a:prstGeom prst="rect">
@@ -18771,7 +18771,7 @@
         </p:nvSpPr>
         <p:spPr>
           <a:xfrm>
-            <a:off x="11368735" y="6327648"/>
+            <a:off x="11368735" y="6437376"/>
             <a:ext cx="365760" cy="274320"/>
           </a:xfrm>
           <a:prstGeom prst="rect">
@@ -18948,7 +18948,7 @@
         </p:blipFill>
         <p:spPr>
           <a:xfrm>
-            <a:off x="566928" y="6126480"/>
+            <a:off x="566928" y="6254496"/>
             <a:ext cx="1481328" cy="457200"/>
           </a:xfrm>
           <a:prstGeom prst="rect">
@@ -19528,7 +19528,7 @@
         </p:nvSpPr>
         <p:spPr>
           <a:xfrm>
-            <a:off x="11368735" y="6327648"/>
+            <a:off x="11368735" y="6437376"/>
             <a:ext cx="365760" cy="274320"/>
           </a:xfrm>
           <a:prstGeom prst="rect">
@@ -19705,7 +19705,7 @@
         </p:blipFill>
         <p:spPr>
           <a:xfrm>
-            <a:off x="566928" y="6126480"/>
+            <a:off x="566928" y="6254496"/>
             <a:ext cx="1481328" cy="457200"/>
           </a:xfrm>
           <a:prstGeom prst="rect">
@@ -20103,7 +20103,7 @@
         </p:nvSpPr>
         <p:spPr>
           <a:xfrm>
-            <a:off x="11368735" y="6327648"/>
+            <a:off x="11368735" y="6437376"/>
             <a:ext cx="365760" cy="274320"/>
           </a:xfrm>
           <a:prstGeom prst="rect">
@@ -20280,7 +20280,7 @@
         </p:blipFill>
         <p:spPr>
           <a:xfrm>
-            <a:off x="566928" y="6126480"/>
+            <a:off x="566928" y="6254496"/>
             <a:ext cx="1481328" cy="457200"/>
           </a:xfrm>
           <a:prstGeom prst="rect">
@@ -20790,7 +20790,7 @@
         </p:nvSpPr>
         <p:spPr>
           <a:xfrm>
-            <a:off x="11368735" y="6327648"/>
+            <a:off x="11368735" y="6437376"/>
             <a:ext cx="365760" cy="274320"/>
           </a:xfrm>
           <a:prstGeom prst="rect">
@@ -20967,7 +20967,7 @@
         </p:blipFill>
         <p:spPr>
           <a:xfrm>
-            <a:off x="566928" y="6126480"/>
+            <a:off x="566928" y="6254496"/>
             <a:ext cx="1481328" cy="457200"/>
           </a:xfrm>
           <a:prstGeom prst="rect">
@@ -21687,7 +21687,7 @@
         </p:nvSpPr>
         <p:spPr>
           <a:xfrm>
-            <a:off x="11368735" y="6327648"/>
+            <a:off x="11368735" y="6437376"/>
             <a:ext cx="365760" cy="274320"/>
           </a:xfrm>
           <a:prstGeom prst="rect">
@@ -21864,7 +21864,7 @@
         </p:blipFill>
         <p:spPr>
           <a:xfrm>
-            <a:off x="566928" y="6126480"/>
+            <a:off x="566928" y="6254496"/>
             <a:ext cx="1481328" cy="457200"/>
           </a:xfrm>
           <a:prstGeom prst="rect">
@@ -22258,7 +22258,7 @@
         </p:nvSpPr>
         <p:spPr>
           <a:xfrm>
-            <a:off x="11368735" y="6327648"/>
+            <a:off x="11368735" y="6437376"/>
             <a:ext cx="365760" cy="274320"/>
           </a:xfrm>
           <a:prstGeom prst="rect">
@@ -22956,7 +22956,7 @@
         </p:blipFill>
         <p:spPr>
           <a:xfrm>
-            <a:off x="566928" y="6126480"/>
+            <a:off x="566928" y="6254496"/>
             <a:ext cx="1481328" cy="457200"/>
           </a:xfrm>
           <a:prstGeom prst="rect">
@@ -24540,7 +24540,7 @@
         </p:nvSpPr>
         <p:spPr>
           <a:xfrm>
-            <a:off x="11368735" y="6327648"/>
+            <a:off x="11368735" y="6437376"/>
             <a:ext cx="365760" cy="274320"/>
           </a:xfrm>
           <a:prstGeom prst="rect">
@@ -24759,7 +24759,7 @@
         </p:blipFill>
         <p:spPr>
           <a:xfrm>
-            <a:off x="566928" y="6126480"/>
+            <a:off x="566928" y="6254496"/>
             <a:ext cx="1481328" cy="457200"/>
           </a:xfrm>
           <a:prstGeom prst="rect">
@@ -25496,7 +25496,7 @@
         </p:nvSpPr>
         <p:spPr>
           <a:xfrm>
-            <a:off x="11368735" y="6327648"/>
+            <a:off x="11368735" y="6437376"/>
             <a:ext cx="365760" cy="274320"/>
           </a:xfrm>
           <a:prstGeom prst="rect">
@@ -25712,7 +25712,7 @@
         </p:blipFill>
         <p:spPr>
           <a:xfrm>
-            <a:off x="566928" y="6126480"/>
+            <a:off x="566928" y="6254496"/>
             <a:ext cx="1481328" cy="457200"/>
           </a:xfrm>
           <a:prstGeom prst="rect">
@@ -26743,7 +26743,7 @@
         </p:nvSpPr>
         <p:spPr>
           <a:xfrm>
-            <a:off x="11368735" y="6327648"/>
+            <a:off x="11368735" y="6437376"/>
             <a:ext cx="365760" cy="274320"/>
           </a:xfrm>
           <a:prstGeom prst="rect">
@@ -26959,7 +26959,7 @@
         </p:blipFill>
         <p:spPr>
           <a:xfrm>
-            <a:off x="566928" y="6126480"/>
+            <a:off x="566928" y="6254496"/>
             <a:ext cx="1481328" cy="457200"/>
           </a:xfrm>
           <a:prstGeom prst="rect">
@@ -27598,7 +27598,7 @@
         </p:nvSpPr>
         <p:spPr>
           <a:xfrm>
-            <a:off x="11368735" y="6327648"/>
+            <a:off x="11368735" y="6437376"/>
             <a:ext cx="365760" cy="274320"/>
           </a:xfrm>
           <a:prstGeom prst="rect">
@@ -27814,7 +27814,7 @@
         </p:blipFill>
         <p:spPr>
           <a:xfrm>
-            <a:off x="566928" y="6126480"/>
+            <a:off x="566928" y="6254496"/>
             <a:ext cx="1481328" cy="457200"/>
           </a:xfrm>
           <a:prstGeom prst="rect">
@@ -29067,7 +29067,7 @@
         </p:nvSpPr>
         <p:spPr>
           <a:xfrm>
-            <a:off x="11368735" y="6327648"/>
+            <a:off x="11368735" y="6437376"/>
             <a:ext cx="365760" cy="274320"/>
           </a:xfrm>
           <a:prstGeom prst="rect">
@@ -29283,7 +29283,7 @@
         </p:blipFill>
         <p:spPr>
           <a:xfrm>
-            <a:off x="566928" y="6126480"/>
+            <a:off x="566928" y="6254496"/>
             <a:ext cx="1481328" cy="457200"/>
           </a:xfrm>
           <a:prstGeom prst="rect">
@@ -30453,7 +30453,7 @@
         </p:nvSpPr>
         <p:spPr>
           <a:xfrm>
-            <a:off x="11368735" y="6327648"/>
+            <a:off x="11368735" y="6437376"/>
             <a:ext cx="365760" cy="274320"/>
           </a:xfrm>
           <a:prstGeom prst="rect">
@@ -30669,7 +30669,7 @@
         </p:blipFill>
         <p:spPr>
           <a:xfrm>
-            <a:off x="566928" y="6126480"/>
+            <a:off x="566928" y="6254496"/>
             <a:ext cx="1481328" cy="457200"/>
           </a:xfrm>
           <a:prstGeom prst="rect">
@@ -31063,7 +31063,7 @@
         </p:nvSpPr>
         <p:spPr>
           <a:xfrm>
-            <a:off x="11368735" y="6327648"/>
+            <a:off x="11368735" y="6437376"/>
             <a:ext cx="365760" cy="274320"/>
           </a:xfrm>
           <a:prstGeom prst="rect">

--- a/docs/decks/L09.pptx
+++ b/docs/decks/L09.pptx
@@ -3430,17 +3430,17 @@
               <a:buNone/>
             </a:pPr>
             <a:r>
-              <a:rPr lang="en-US" sz="4000" b="1" dirty="0">
+              <a:rPr lang="en-US" sz="3600" dirty="0">
                 <a:solidFill>
                   <a:srgbClr val="FFFFFF"/>
                 </a:solidFill>
-                <a:latin typeface="Montserrat" pitchFamily="34" charset="0"/>
-                <a:ea typeface="Montserrat" pitchFamily="34" charset="-122"/>
-                <a:cs typeface="Montserrat" pitchFamily="34" charset="-120"/>
+                <a:latin typeface="Unbounded" pitchFamily="34" charset="0"/>
+                <a:ea typeface="Unbounded" pitchFamily="34" charset="-122"/>
+                <a:cs typeface="Unbounded" pitchFamily="34" charset="-120"/>
               </a:rPr>
               <a:t>Observability</a:t>
             </a:r>
-            <a:endParaRPr lang="en-US" sz="4000" dirty="0"/>
+            <a:endParaRPr lang="en-US" sz="3600" dirty="0"/>
           </a:p>
           <a:p>
             <a:pPr indent="0" marL="0">
@@ -3450,17 +3450,17 @@
               <a:buNone/>
             </a:pPr>
             <a:r>
-              <a:rPr lang="en-US" sz="4000" b="1" dirty="0">
+              <a:rPr lang="en-US" sz="3600" dirty="0">
                 <a:solidFill>
                   <a:srgbClr val="FFFFFF"/>
                 </a:solidFill>
-                <a:latin typeface="Montserrat" pitchFamily="34" charset="0"/>
-                <a:ea typeface="Montserrat" pitchFamily="34" charset="-122"/>
-                <a:cs typeface="Montserrat" pitchFamily="34" charset="-120"/>
+                <a:latin typeface="Unbounded" pitchFamily="34" charset="0"/>
+                <a:ea typeface="Unbounded" pitchFamily="34" charset="-122"/>
+                <a:cs typeface="Unbounded" pitchFamily="34" charset="-120"/>
               </a:rPr>
               <a:t>для LLM-систем</a:t>
             </a:r>
-            <a:endParaRPr lang="en-US" sz="4000" dirty="0"/>
+            <a:endParaRPr lang="en-US" sz="3600" dirty="0"/>
           </a:p>
         </p:txBody>
       </p:sp>
@@ -3981,13 +3981,13 @@
               <a:buNone/>
             </a:pPr>
             <a:r>
-              <a:rPr lang="en-US" sz="2400" b="1" dirty="0">
+              <a:rPr lang="en-US" sz="2400" dirty="0">
                 <a:solidFill>
                   <a:srgbClr val="FFFFFF"/>
                 </a:solidFill>
-                <a:latin typeface="Montserrat" pitchFamily="34" charset="0"/>
-                <a:ea typeface="Montserrat" pitchFamily="34" charset="-122"/>
-                <a:cs typeface="Montserrat" pitchFamily="34" charset="-120"/>
+                <a:latin typeface="Unbounded" pitchFamily="34" charset="0"/>
+                <a:ea typeface="Unbounded" pitchFamily="34" charset="-122"/>
+                <a:cs typeface="Unbounded" pitchFamily="34" charset="-120"/>
               </a:rPr>
               <a:t>Плитка — це відповідь на питання</a:t>
             </a:r>
@@ -4003,7 +4003,7 @@
         </p:nvSpPr>
         <p:spPr>
           <a:xfrm>
-            <a:off x="1280160" y="1024128"/>
+            <a:off x="1280160" y="1218895"/>
             <a:ext cx="777240" cy="256032"/>
           </a:xfrm>
           <a:prstGeom prst="roundRect">
@@ -4025,7 +4025,7 @@
         </p:nvSpPr>
         <p:spPr>
           <a:xfrm>
-            <a:off x="1280160" y="1024128"/>
+            <a:off x="1280160" y="1218895"/>
             <a:ext cx="777240" cy="256032"/>
           </a:xfrm>
           <a:prstGeom prst="rect">
@@ -5793,13 +5793,13 @@
               <a:buNone/>
             </a:pPr>
             <a:r>
-              <a:rPr lang="en-US" sz="2400" b="1" dirty="0">
+              <a:rPr lang="en-US" sz="2400" dirty="0">
                 <a:solidFill>
                   <a:srgbClr val="FFFFFF"/>
                 </a:solidFill>
-                <a:latin typeface="Montserrat" pitchFamily="34" charset="0"/>
-                <a:ea typeface="Montserrat" pitchFamily="34" charset="-122"/>
-                <a:cs typeface="Montserrat" pitchFamily="34" charset="-120"/>
+                <a:latin typeface="Unbounded" pitchFamily="34" charset="0"/>
+                <a:ea typeface="Unbounded" pitchFamily="34" charset="-122"/>
+                <a:cs typeface="Unbounded" pitchFamily="34" charset="-120"/>
               </a:rPr>
               <a:t>GET /providers: статус не має права брехати</a:t>
             </a:r>
@@ -5815,7 +5815,7 @@
         </p:nvSpPr>
         <p:spPr>
           <a:xfrm>
-            <a:off x="1280160" y="1193140"/>
+            <a:off x="1280160" y="1218895"/>
             <a:ext cx="777240" cy="256032"/>
           </a:xfrm>
           <a:prstGeom prst="roundRect">
@@ -5837,7 +5837,7 @@
         </p:nvSpPr>
         <p:spPr>
           <a:xfrm>
-            <a:off x="1280160" y="1193140"/>
+            <a:off x="1280160" y="1218895"/>
             <a:ext cx="777240" cy="256032"/>
           </a:xfrm>
           <a:prstGeom prst="rect">
@@ -6592,13 +6592,13 @@
               <a:buNone/>
             </a:pPr>
             <a:r>
-              <a:rPr lang="en-US" sz="2400" b="1" dirty="0">
+              <a:rPr lang="en-US" sz="2400" dirty="0">
                 <a:solidFill>
                   <a:srgbClr val="FFFFFF"/>
                 </a:solidFill>
-                <a:latin typeface="Montserrat" pitchFamily="34" charset="0"/>
-                <a:ea typeface="Montserrat" pitchFamily="34" charset="-122"/>
-                <a:cs typeface="Montserrat" pitchFamily="34" charset="-120"/>
+                <a:latin typeface="Unbounded" pitchFamily="34" charset="0"/>
+                <a:ea typeface="Unbounded" pitchFamily="34" charset="-122"/>
+                <a:cs typeface="Unbounded" pitchFamily="34" charset="-120"/>
               </a:rPr>
               <a:t>Тренд важливіший за снапшот</a:t>
             </a:r>
@@ -8074,13 +8074,13 @@
               <a:buNone/>
             </a:pPr>
             <a:r>
-              <a:rPr lang="en-US" sz="2400" b="1" dirty="0">
+              <a:rPr lang="en-US" sz="2400" dirty="0">
                 <a:solidFill>
                   <a:srgbClr val="FFFFFF"/>
                 </a:solidFill>
-                <a:latin typeface="Montserrat" pitchFamily="34" charset="0"/>
-                <a:ea typeface="Montserrat" pitchFamily="34" charset="-122"/>
-                <a:cs typeface="Montserrat" pitchFamily="34" charset="-120"/>
+                <a:latin typeface="Unbounded" pitchFamily="34" charset="0"/>
+                <a:ea typeface="Unbounded" pitchFamily="34" charset="-122"/>
+                <a:cs typeface="Unbounded" pitchFamily="34" charset="-120"/>
               </a:rPr>
               <a:t>Скільки — це нормально: SLI, SLO, бюджет помилок</a:t>
             </a:r>
@@ -8096,7 +8096,7 @@
         </p:nvSpPr>
         <p:spPr>
           <a:xfrm>
-            <a:off x="1280160" y="1193140"/>
+            <a:off x="1280160" y="1218895"/>
             <a:ext cx="777240" cy="256032"/>
           </a:xfrm>
           <a:prstGeom prst="roundRect">
@@ -8118,7 +8118,7 @@
         </p:nvSpPr>
         <p:spPr>
           <a:xfrm>
-            <a:off x="1280160" y="1193140"/>
+            <a:off x="1280160" y="1218895"/>
             <a:ext cx="777240" cy="256032"/>
           </a:xfrm>
           <a:prstGeom prst="rect">
@@ -10874,13 +10874,13 @@
               <a:buNone/>
             </a:pPr>
             <a:r>
-              <a:rPr lang="en-US" sz="2400" b="1" dirty="0">
+              <a:rPr lang="en-US" sz="2400" dirty="0">
                 <a:solidFill>
                   <a:srgbClr val="FFFFFF"/>
                 </a:solidFill>
-                <a:latin typeface="Montserrat" pitchFamily="34" charset="0"/>
-                <a:ea typeface="Montserrat" pitchFamily="34" charset="-122"/>
-                <a:cs typeface="Montserrat" pitchFamily="34" charset="-120"/>
+                <a:latin typeface="Unbounded" pitchFamily="34" charset="0"/>
+                <a:ea typeface="Unbounded" pitchFamily="34" charset="-122"/>
+                <a:cs typeface="Unbounded" pitchFamily="34" charset="-120"/>
               </a:rPr>
               <a:t>Алерт — це прохання прокинутися</a:t>
             </a:r>
@@ -10896,7 +10896,7 @@
         </p:nvSpPr>
         <p:spPr>
           <a:xfrm>
-            <a:off x="1280160" y="1024128"/>
+            <a:off x="1280160" y="1218895"/>
             <a:ext cx="777240" cy="256032"/>
           </a:xfrm>
           <a:prstGeom prst="roundRect">
@@ -10918,7 +10918,7 @@
         </p:nvSpPr>
         <p:spPr>
           <a:xfrm>
-            <a:off x="1280160" y="1024128"/>
+            <a:off x="1280160" y="1218895"/>
             <a:ext cx="777240" cy="256032"/>
           </a:xfrm>
           <a:prstGeom prst="rect">
@@ -11768,13 +11768,13 @@
               <a:buNone/>
             </a:pPr>
             <a:r>
-              <a:rPr lang="en-US" sz="2400" b="1" dirty="0">
+              <a:rPr lang="en-US" sz="2400" dirty="0">
                 <a:solidFill>
                   <a:srgbClr val="FFFFFF"/>
                 </a:solidFill>
-                <a:latin typeface="Montserrat" pitchFamily="34" charset="0"/>
-                <a:ea typeface="Montserrat" pitchFamily="34" charset="-122"/>
-                <a:cs typeface="Montserrat" pitchFamily="34" charset="-120"/>
+                <a:latin typeface="Unbounded" pitchFamily="34" charset="0"/>
+                <a:ea typeface="Unbounded" pitchFamily="34" charset="-122"/>
+                <a:cs typeface="Unbounded" pitchFamily="34" charset="-120"/>
               </a:rPr>
               <a:t>Таксономія помилок: категорія визначає дію</a:t>
             </a:r>
@@ -11790,7 +11790,7 @@
         </p:nvSpPr>
         <p:spPr>
           <a:xfrm>
-            <a:off x="1280160" y="1193140"/>
+            <a:off x="1280160" y="1218895"/>
             <a:ext cx="777240" cy="256032"/>
           </a:xfrm>
           <a:prstGeom prst="roundRect">
@@ -11812,7 +11812,7 @@
         </p:nvSpPr>
         <p:spPr>
           <a:xfrm>
-            <a:off x="1280160" y="1193140"/>
+            <a:off x="1280160" y="1218895"/>
             <a:ext cx="777240" cy="256032"/>
           </a:xfrm>
           <a:prstGeom prst="rect">
@@ -11851,7 +11851,7 @@
         </p:nvSpPr>
         <p:spPr>
           <a:xfrm>
-            <a:off x="2167128" y="1193140"/>
+            <a:off x="2167128" y="1218895"/>
             <a:ext cx="864108" cy="256032"/>
           </a:xfrm>
           <a:prstGeom prst="roundRect">
@@ -11873,7 +11873,7 @@
         </p:nvSpPr>
         <p:spPr>
           <a:xfrm>
-            <a:off x="2167128" y="1193140"/>
+            <a:off x="2167128" y="1218895"/>
             <a:ext cx="864108" cy="256032"/>
           </a:xfrm>
           <a:prstGeom prst="rect">
@@ -12984,13 +12984,13 @@
               <a:buNone/>
             </a:pPr>
             <a:r>
-              <a:rPr lang="en-US" sz="2400" b="1" dirty="0">
+              <a:rPr lang="en-US" sz="2400" dirty="0">
                 <a:solidFill>
                   <a:srgbClr val="FFFFFF"/>
                 </a:solidFill>
-                <a:latin typeface="Montserrat" pitchFamily="34" charset="0"/>
-                <a:ea typeface="Montserrat" pitchFamily="34" charset="-122"/>
-                <a:cs typeface="Montserrat" pitchFamily="34" charset="-120"/>
+                <a:latin typeface="Unbounded" pitchFamily="34" charset="0"/>
+                <a:ea typeface="Unbounded" pitchFamily="34" charset="-122"/>
+                <a:cs typeface="Unbounded" pitchFamily="34" charset="-120"/>
               </a:rPr>
               <a:t>Трейс і спани: коли одного request_id мало</a:t>
             </a:r>
@@ -13006,7 +13006,7 @@
         </p:nvSpPr>
         <p:spPr>
           <a:xfrm>
-            <a:off x="1280160" y="1193140"/>
+            <a:off x="1280160" y="1218895"/>
             <a:ext cx="777240" cy="256032"/>
           </a:xfrm>
           <a:prstGeom prst="roundRect">
@@ -13028,7 +13028,7 @@
         </p:nvSpPr>
         <p:spPr>
           <a:xfrm>
-            <a:off x="1280160" y="1193140"/>
+            <a:off x="1280160" y="1218895"/>
             <a:ext cx="777240" cy="256032"/>
           </a:xfrm>
           <a:prstGeom prst="rect">
@@ -14207,13 +14207,13 @@
               <a:buNone/>
             </a:pPr>
             <a:r>
-              <a:rPr lang="en-US" sz="2400" b="1" dirty="0">
+              <a:rPr lang="en-US" sz="2400" dirty="0">
                 <a:solidFill>
                   <a:srgbClr val="FFFFFF"/>
                 </a:solidFill>
-                <a:latin typeface="Montserrat" pitchFamily="34" charset="0"/>
-                <a:ea typeface="Montserrat" pitchFamily="34" charset="-122"/>
-                <a:cs typeface="Montserrat" pitchFamily="34" charset="-120"/>
+                <a:latin typeface="Unbounded" pitchFamily="34" charset="0"/>
+                <a:ea typeface="Unbounded" pitchFamily="34" charset="-122"/>
+                <a:cs typeface="Unbounded" pitchFamily="34" charset="-120"/>
               </a:rPr>
               <a:t>Стрімінг змінює самі метрики</a:t>
             </a:r>
@@ -15383,13 +15383,13 @@
               <a:buNone/>
             </a:pPr>
             <a:r>
-              <a:rPr lang="en-US" sz="2400" b="1" dirty="0">
+              <a:rPr lang="en-US" sz="2400" dirty="0">
                 <a:solidFill>
                   <a:srgbClr val="FFFFFF"/>
                 </a:solidFill>
-                <a:latin typeface="Montserrat" pitchFamily="34" charset="0"/>
-                <a:ea typeface="Montserrat" pitchFamily="34" charset="-122"/>
-                <a:cs typeface="Montserrat" pitchFamily="34" charset="-120"/>
+                <a:latin typeface="Unbounded" pitchFamily="34" charset="0"/>
+                <a:ea typeface="Unbounded" pitchFamily="34" charset="-122"/>
+                <a:cs typeface="Unbounded" pitchFamily="34" charset="-120"/>
               </a:rPr>
               <a:t>Чого не має бути в лозі</a:t>
             </a:r>
@@ -16260,13 +16260,13 @@
               <a:buNone/>
             </a:pPr>
             <a:r>
-              <a:rPr lang="en-US" sz="2400" b="1" dirty="0">
+              <a:rPr lang="en-US" sz="2400" dirty="0">
                 <a:solidFill>
                   <a:srgbClr val="FFFFFF"/>
                 </a:solidFill>
-                <a:latin typeface="Montserrat" pitchFamily="34" charset="0"/>
-                <a:ea typeface="Montserrat" pitchFamily="34" charset="-122"/>
-                <a:cs typeface="Montserrat" pitchFamily="34" charset="-120"/>
+                <a:latin typeface="Unbounded" pitchFamily="34" charset="0"/>
+                <a:ea typeface="Unbounded" pitchFamily="34" charset="-122"/>
+                <a:cs typeface="Unbounded" pitchFamily="34" charset="-120"/>
               </a:rPr>
               <a:t>У продукті чи індустріальний стек</a:t>
             </a:r>
@@ -16282,7 +16282,7 @@
         </p:nvSpPr>
         <p:spPr>
           <a:xfrm>
-            <a:off x="1280160" y="1024128"/>
+            <a:off x="1280160" y="1218895"/>
             <a:ext cx="777240" cy="256032"/>
           </a:xfrm>
           <a:prstGeom prst="roundRect">
@@ -16304,7 +16304,7 @@
         </p:nvSpPr>
         <p:spPr>
           <a:xfrm>
-            <a:off x="1280160" y="1024128"/>
+            <a:off x="1280160" y="1218895"/>
             <a:ext cx="777240" cy="256032"/>
           </a:xfrm>
           <a:prstGeom prst="rect">
@@ -16835,13 +16835,13 @@
               <a:buNone/>
             </a:pPr>
             <a:r>
-              <a:rPr lang="en-US" sz="2400" b="1" dirty="0">
+              <a:rPr lang="en-US" sz="2400" dirty="0">
                 <a:solidFill>
                   <a:srgbClr val="FFFFFF"/>
                 </a:solidFill>
-                <a:latin typeface="Montserrat" pitchFamily="34" charset="0"/>
-                <a:ea typeface="Montserrat" pitchFamily="34" charset="-122"/>
-                <a:cs typeface="Montserrat" pitchFamily="34" charset="-120"/>
+                <a:latin typeface="Unbounded" pitchFamily="34" charset="0"/>
+                <a:ea typeface="Unbounded" pitchFamily="34" charset="-122"/>
+                <a:cs typeface="Unbounded" pitchFamily="34" charset="-120"/>
               </a:rPr>
               <a:t>Що ви зможете після уроку</a:t>
             </a:r>
@@ -17909,13 +17909,13 @@
               <a:buNone/>
             </a:pPr>
             <a:r>
-              <a:rPr lang="en-US" sz="2400" b="1" dirty="0">
+              <a:rPr lang="en-US" sz="2400" dirty="0">
                 <a:solidFill>
                   <a:srgbClr val="FFFFFF"/>
                 </a:solidFill>
-                <a:latin typeface="Montserrat" pitchFamily="34" charset="0"/>
-                <a:ea typeface="Montserrat" pitchFamily="34" charset="-122"/>
-                <a:cs typeface="Montserrat" pitchFamily="34" charset="-120"/>
+                <a:latin typeface="Unbounded" pitchFamily="34" charset="0"/>
+                <a:ea typeface="Unbounded" pitchFamily="34" charset="-122"/>
+                <a:cs typeface="Unbounded" pitchFamily="34" charset="-120"/>
               </a:rPr>
               <a:t>Зараз ви побачите — і навіщо</a:t>
             </a:r>
@@ -18857,13 +18857,13 @@
               <a:buNone/>
             </a:pPr>
             <a:r>
-              <a:rPr lang="en-US" sz="2400" b="1" dirty="0">
+              <a:rPr lang="en-US" sz="2400" dirty="0">
                 <a:solidFill>
                   <a:srgbClr val="FFFFFF"/>
                 </a:solidFill>
-                <a:latin typeface="Montserrat" pitchFamily="34" charset="0"/>
-                <a:ea typeface="Montserrat" pitchFamily="34" charset="-122"/>
-                <a:cs typeface="Montserrat" pitchFamily="34" charset="-120"/>
+                <a:latin typeface="Unbounded" pitchFamily="34" charset="0"/>
+                <a:ea typeface="Unbounded" pitchFamily="34" charset="-122"/>
+                <a:cs typeface="Unbounded" pitchFamily="34" charset="-120"/>
               </a:rPr>
               <a:t>Лабораторна: чотири кроки + опційний</a:t>
             </a:r>
@@ -18879,7 +18879,7 @@
         </p:nvSpPr>
         <p:spPr>
           <a:xfrm>
-            <a:off x="566928" y="1024128"/>
+            <a:off x="566928" y="1218895"/>
             <a:ext cx="950976" cy="256032"/>
           </a:xfrm>
           <a:prstGeom prst="roundRect">
@@ -18901,7 +18901,7 @@
         </p:nvSpPr>
         <p:spPr>
           <a:xfrm>
-            <a:off x="566928" y="1024128"/>
+            <a:off x="566928" y="1218895"/>
             <a:ext cx="950976" cy="256032"/>
           </a:xfrm>
           <a:prstGeom prst="rect">
@@ -19614,13 +19614,13 @@
               <a:buNone/>
             </a:pPr>
             <a:r>
-              <a:rPr lang="en-US" sz="2400" b="1" dirty="0">
+              <a:rPr lang="en-US" sz="2400" dirty="0">
                 <a:solidFill>
                   <a:srgbClr val="FFFFFF"/>
                 </a:solidFill>
-                <a:latin typeface="Montserrat" pitchFamily="34" charset="0"/>
-                <a:ea typeface="Montserrat" pitchFamily="34" charset="-122"/>
-                <a:cs typeface="Montserrat" pitchFamily="34" charset="-120"/>
+                <a:latin typeface="Unbounded" pitchFamily="34" charset="0"/>
+                <a:ea typeface="Unbounded" pitchFamily="34" charset="-122"/>
+                <a:cs typeface="Unbounded" pitchFamily="34" charset="-120"/>
               </a:rPr>
               <a:t>Що це довело</a:t>
             </a:r>
@@ -20189,13 +20189,13 @@
               <a:buNone/>
             </a:pPr>
             <a:r>
-              <a:rPr lang="en-US" sz="2400" b="1" dirty="0">
+              <a:rPr lang="en-US" sz="2400" dirty="0">
                 <a:solidFill>
                   <a:srgbClr val="FFFFFF"/>
                 </a:solidFill>
-                <a:latin typeface="Montserrat" pitchFamily="34" charset="0"/>
-                <a:ea typeface="Montserrat" pitchFamily="34" charset="-122"/>
-                <a:cs typeface="Montserrat" pitchFamily="34" charset="-120"/>
+                <a:latin typeface="Unbounded" pitchFamily="34" charset="0"/>
+                <a:ea typeface="Unbounded" pitchFamily="34" charset="-122"/>
+                <a:cs typeface="Unbounded" pitchFamily="34" charset="-120"/>
               </a:rPr>
               <a:t>Перевір себе</a:t>
             </a:r>
@@ -20876,13 +20876,13 @@
               <a:buNone/>
             </a:pPr>
             <a:r>
-              <a:rPr lang="en-US" sz="2400" b="1" dirty="0">
+              <a:rPr lang="en-US" sz="2400" dirty="0">
                 <a:solidFill>
                   <a:srgbClr val="FFFFFF"/>
                 </a:solidFill>
-                <a:latin typeface="Montserrat" pitchFamily="34" charset="0"/>
-                <a:ea typeface="Montserrat" pitchFamily="34" charset="-122"/>
-                <a:cs typeface="Montserrat" pitchFamily="34" charset="-120"/>
+                <a:latin typeface="Unbounded" pitchFamily="34" charset="0"/>
+                <a:ea typeface="Unbounded" pitchFamily="34" charset="-122"/>
+                <a:cs typeface="Unbounded" pitchFamily="34" charset="-120"/>
               </a:rPr>
               <a:t>Антипатерни тижня</a:t>
             </a:r>
@@ -21773,13 +21773,13 @@
               <a:buNone/>
             </a:pPr>
             <a:r>
-              <a:rPr lang="en-US" sz="2400" b="1" dirty="0">
+              <a:rPr lang="en-US" sz="2400" dirty="0">
                 <a:solidFill>
                   <a:srgbClr val="FFFFFF"/>
                 </a:solidFill>
-                <a:latin typeface="Montserrat" pitchFamily="34" charset="0"/>
-                <a:ea typeface="Montserrat" pitchFamily="34" charset="-122"/>
-                <a:cs typeface="Montserrat" pitchFamily="34" charset="-120"/>
+                <a:latin typeface="Unbounded" pitchFamily="34" charset="0"/>
+                <a:ea typeface="Unbounded" pitchFamily="34" charset="-122"/>
+                <a:cs typeface="Unbounded" pitchFamily="34" charset="-120"/>
               </a:rPr>
               <a:t>Домашнє завдання</a:t>
             </a:r>
@@ -22865,13 +22865,13 @@
               <a:buNone/>
             </a:pPr>
             <a:r>
-              <a:rPr lang="en-US" sz="2400" b="1" dirty="0">
+              <a:rPr lang="en-US" sz="2400" dirty="0">
                 <a:solidFill>
                   <a:srgbClr val="FFFFFF"/>
                 </a:solidFill>
-                <a:latin typeface="Montserrat" pitchFamily="34" charset="0"/>
-                <a:ea typeface="Montserrat" pitchFamily="34" charset="-122"/>
-                <a:cs typeface="Montserrat" pitchFamily="34" charset="-120"/>
+                <a:latin typeface="Unbounded" pitchFamily="34" charset="0"/>
+                <a:ea typeface="Unbounded" pitchFamily="34" charset="-122"/>
+                <a:cs typeface="Unbounded" pitchFamily="34" charset="-120"/>
               </a:rPr>
               <a:t>Маршрут на сьогодні</a:t>
             </a:r>
@@ -24626,13 +24626,13 @@
               <a:buNone/>
             </a:pPr>
             <a:r>
-              <a:rPr lang="en-US" sz="2400" b="1" dirty="0">
+              <a:rPr lang="en-US" sz="2400" dirty="0">
                 <a:solidFill>
                   <a:srgbClr val="FFFFFF"/>
                 </a:solidFill>
-                <a:latin typeface="Montserrat" pitchFamily="34" charset="0"/>
-                <a:ea typeface="Montserrat" pitchFamily="34" charset="-122"/>
-                <a:cs typeface="Montserrat" pitchFamily="34" charset="-120"/>
+                <a:latin typeface="Unbounded" pitchFamily="34" charset="0"/>
+                <a:ea typeface="Unbounded" pitchFamily="34" charset="-122"/>
+                <a:cs typeface="Unbounded" pitchFamily="34" charset="-120"/>
               </a:rPr>
               <a:t>Терміни, якими користуватимемось</a:t>
             </a:r>
@@ -24648,7 +24648,7 @@
         </p:nvSpPr>
         <p:spPr>
           <a:xfrm>
-            <a:off x="566928" y="1005840"/>
+            <a:off x="566928" y="1200607"/>
             <a:ext cx="6839712" cy="256032"/>
           </a:xfrm>
           <a:prstGeom prst="rect">
@@ -24690,7 +24690,7 @@
         </p:nvSpPr>
         <p:spPr>
           <a:xfrm>
-            <a:off x="566928" y="1271016"/>
+            <a:off x="566928" y="1465783"/>
             <a:ext cx="777240" cy="256032"/>
           </a:xfrm>
           <a:prstGeom prst="roundRect">
@@ -24712,7 +24712,7 @@
         </p:nvSpPr>
         <p:spPr>
           <a:xfrm>
-            <a:off x="566928" y="1271016"/>
+            <a:off x="566928" y="1465783"/>
             <a:ext cx="777240" cy="256032"/>
           </a:xfrm>
           <a:prstGeom prst="rect">
@@ -25621,13 +25621,13 @@
               <a:buNone/>
             </a:pPr>
             <a:r>
-              <a:rPr lang="en-US" sz="2400" b="1" dirty="0">
+              <a:rPr lang="en-US" sz="2400" dirty="0">
                 <a:solidFill>
                   <a:srgbClr val="FFFFFF"/>
                 </a:solidFill>
-                <a:latin typeface="Montserrat" pitchFamily="34" charset="0"/>
-                <a:ea typeface="Montserrat" pitchFamily="34" charset="-122"/>
-                <a:cs typeface="Montserrat" pitchFamily="34" charset="-120"/>
+                <a:latin typeface="Unbounded" pitchFamily="34" charset="0"/>
+                <a:ea typeface="Unbounded" pitchFamily="34" charset="-122"/>
+                <a:cs typeface="Unbounded" pitchFamily="34" charset="-120"/>
               </a:rPr>
               <a:t>Тихі інциденти: все зелене — все погано</a:t>
             </a:r>
@@ -25643,7 +25643,7 @@
         </p:nvSpPr>
         <p:spPr>
           <a:xfrm>
-            <a:off x="1280160" y="1193140"/>
+            <a:off x="1280160" y="1218895"/>
             <a:ext cx="777240" cy="256032"/>
           </a:xfrm>
           <a:prstGeom prst="roundRect">
@@ -25665,7 +25665,7 @@
         </p:nvSpPr>
         <p:spPr>
           <a:xfrm>
-            <a:off x="1280160" y="1193140"/>
+            <a:off x="1280160" y="1218895"/>
             <a:ext cx="777240" cy="256032"/>
           </a:xfrm>
           <a:prstGeom prst="rect">
@@ -26868,13 +26868,13 @@
               <a:buNone/>
             </a:pPr>
             <a:r>
-              <a:rPr lang="en-US" sz="2400" b="1" dirty="0">
+              <a:rPr lang="en-US" sz="2400" dirty="0">
                 <a:solidFill>
                   <a:srgbClr val="FFFFFF"/>
                 </a:solidFill>
-                <a:latin typeface="Montserrat" pitchFamily="34" charset="0"/>
-                <a:ea typeface="Montserrat" pitchFamily="34" charset="-122"/>
-                <a:cs typeface="Montserrat" pitchFamily="34" charset="-120"/>
+                <a:latin typeface="Unbounded" pitchFamily="34" charset="0"/>
+                <a:ea typeface="Unbounded" pitchFamily="34" charset="-122"/>
+                <a:cs typeface="Unbounded" pitchFamily="34" charset="-120"/>
               </a:rPr>
               <a:t>Один лог-рядок — джерело всього</a:t>
             </a:r>
@@ -26890,7 +26890,7 @@
         </p:nvSpPr>
         <p:spPr>
           <a:xfrm>
-            <a:off x="1280160" y="1024128"/>
+            <a:off x="1280160" y="1218895"/>
             <a:ext cx="777240" cy="256032"/>
           </a:xfrm>
           <a:prstGeom prst="roundRect">
@@ -26912,7 +26912,7 @@
         </p:nvSpPr>
         <p:spPr>
           <a:xfrm>
-            <a:off x="1280160" y="1024128"/>
+            <a:off x="1280160" y="1218895"/>
             <a:ext cx="777240" cy="256032"/>
           </a:xfrm>
           <a:prstGeom prst="rect">
@@ -27723,13 +27723,13 @@
               <a:buNone/>
             </a:pPr>
             <a:r>
-              <a:rPr lang="en-US" sz="2400" b="1" dirty="0">
+              <a:rPr lang="en-US" sz="2400" dirty="0">
                 <a:solidFill>
                   <a:srgbClr val="FFFFFF"/>
                 </a:solidFill>
-                <a:latin typeface="Montserrat" pitchFamily="34" charset="0"/>
-                <a:ea typeface="Montserrat" pitchFamily="34" charset="-122"/>
-                <a:cs typeface="Montserrat" pitchFamily="34" charset="-120"/>
+                <a:latin typeface="Unbounded" pitchFamily="34" charset="0"/>
+                <a:ea typeface="Unbounded" pitchFamily="34" charset="-122"/>
+                <a:cs typeface="Unbounded" pitchFamily="34" charset="-120"/>
               </a:rPr>
               <a:t>Новий зріз = нова колонка, не нова система</a:t>
             </a:r>
@@ -27745,7 +27745,7 @@
         </p:nvSpPr>
         <p:spPr>
           <a:xfrm>
-            <a:off x="1280160" y="1193140"/>
+            <a:off x="1280160" y="1218895"/>
             <a:ext cx="777240" cy="256032"/>
           </a:xfrm>
           <a:prstGeom prst="roundRect">
@@ -27767,7 +27767,7 @@
         </p:nvSpPr>
         <p:spPr>
           <a:xfrm>
-            <a:off x="1280160" y="1193140"/>
+            <a:off x="1280160" y="1218895"/>
             <a:ext cx="777240" cy="256032"/>
           </a:xfrm>
           <a:prstGeom prst="rect">
@@ -29192,13 +29192,13 @@
               <a:buNone/>
             </a:pPr>
             <a:r>
-              <a:rPr lang="en-US" sz="2400" b="1" dirty="0">
+              <a:rPr lang="en-US" sz="2400" dirty="0">
                 <a:solidFill>
                   <a:srgbClr val="FFFFFF"/>
                 </a:solidFill>
-                <a:latin typeface="Montserrat" pitchFamily="34" charset="0"/>
-                <a:ea typeface="Montserrat" pitchFamily="34" charset="-122"/>
-                <a:cs typeface="Montserrat" pitchFamily="34" charset="-120"/>
+                <a:latin typeface="Unbounded" pitchFamily="34" charset="0"/>
+                <a:ea typeface="Unbounded" pitchFamily="34" charset="-122"/>
+                <a:cs typeface="Unbounded" pitchFamily="34" charset="-120"/>
               </a:rPr>
               <a:t>p95, не середнє</a:t>
             </a:r>
@@ -30578,13 +30578,13 @@
               <a:buNone/>
             </a:pPr>
             <a:r>
-              <a:rPr lang="en-US" sz="2400" b="1" dirty="0">
+              <a:rPr lang="en-US" sz="2400" dirty="0">
                 <a:solidFill>
                   <a:srgbClr val="FFFFFF"/>
                 </a:solidFill>
-                <a:latin typeface="Montserrat" pitchFamily="34" charset="0"/>
-                <a:ea typeface="Montserrat" pitchFamily="34" charset="-122"/>
-                <a:cs typeface="Montserrat" pitchFamily="34" charset="-120"/>
+                <a:latin typeface="Unbounded" pitchFamily="34" charset="0"/>
+                <a:ea typeface="Unbounded" pitchFamily="34" charset="-122"/>
+                <a:cs typeface="Unbounded" pitchFamily="34" charset="-120"/>
               </a:rPr>
               <a:t>Розтин: GET /observability</a:t>
             </a:r>

--- a/docs/decks/L09.pptx
+++ b/docs/decks/L09.pptx
@@ -2821,7 +2821,7 @@
             <a:lvl1pPr>
               <a:defRPr sz="850">
                 <a:solidFill>
-                  <a:srgbClr val="8A82A0"/>
+                  <a:srgbClr val="9A94AA"/>
                 </a:solidFill>
                 <a:latin typeface="Courier New"/>
                 <a:ea typeface="Courier New"/>
@@ -2903,6 +2903,62 @@
 </p:sldLayout>
 </file>
 
+<file path=ppt/slideLayouts/slideLayout3.xml><?xml version="1.0" encoding="utf-8"?>
+<p:sldLayout xmlns:a="http://schemas.openxmlformats.org/drawingml/2006/main" xmlns:r="http://schemas.openxmlformats.org/officeDocument/2006/relationships" xmlns:p="http://schemas.openxmlformats.org/presentationml/2006/main" preserve="1">
+  <p:cSld name="NEO_COVER">
+    <p:bg>
+      <p:bgPr>
+        <a:solidFill>
+          <a:srgbClr val="000000"/>
+        </a:solidFill>
+      </p:bgPr>
+    </p:bg>
+    <p:spTree>
+      <p:nvGrpSpPr>
+        <p:cNvPr id="1" name=""/>
+        <p:cNvGrpSpPr/>
+        <p:nvPr/>
+      </p:nvGrpSpPr>
+      <p:grpSpPr>
+        <a:xfrm>
+          <a:off x="0" y="0"/>
+          <a:ext cx="0" cy="0"/>
+          <a:chOff x="0" y="0"/>
+          <a:chExt cx="0" cy="0"/>
+        </a:xfrm>
+      </p:grpSpPr>
+      <p:pic>
+        <p:nvPicPr>
+          <p:cNvPr id="2" name="Image 0" descr="preencoded.png">    </p:cNvPr>
+          <p:cNvPicPr>
+            <a:picLocks noChangeAspect="1"/>
+          </p:cNvPicPr>
+          <p:nvPr/>
+        </p:nvPicPr>
+        <p:blipFill>
+          <a:blip r:embed="rId1"/>
+          <a:stretch>
+            <a:fillRect/>
+          </a:stretch>
+        </p:blipFill>
+        <p:spPr>
+          <a:xfrm>
+            <a:off x="0" y="0"/>
+            <a:ext cx="12191695" cy="6858000"/>
+          </a:xfrm>
+          <a:prstGeom prst="rect">
+            <a:avLst/>
+          </a:prstGeom>
+        </p:spPr>
+      </p:pic>
+    </p:spTree>
+  </p:cSld>
+  <p:clrMapOvr>
+    <a:masterClrMapping/>
+  </p:clrMapOvr>
+</p:sldLayout>
+</file>
+
 <file path=ppt/slideMasters/slideMaster1.xml><?xml version="1.0" encoding="utf-8"?>
 <p:sldMaster xmlns:a="http://schemas.openxmlformats.org/drawingml/2006/main" xmlns:r="http://schemas.openxmlformats.org/officeDocument/2006/relationships" xmlns:p="http://schemas.openxmlformats.org/presentationml/2006/main">
   <p:cSld>
@@ -2950,7 +3006,7 @@
             <a:lvl1pPr>
               <a:defRPr sz="850">
                 <a:solidFill>
-                  <a:srgbClr val="8A82A0"/>
+                  <a:srgbClr val="9A94AA"/>
                 </a:solidFill>
                 <a:latin typeface="Courier New"/>
                 <a:ea typeface="Courier New"/>
@@ -2974,6 +3030,7 @@
   <p:sldLayoutIdLst>
     <p:sldLayoutId id="2147483649" r:id="rId1"/>
     <p:sldLayoutId id="2147483650" r:id="rId2"/>
+    <p:sldLayoutId id="2147483651" r:id="rId3"/>
   </p:sldLayoutIdLst>
   <p:hf sldNum="0" hdr="0" ftr="0" dt="0"/>
   <p:txStyles>
@@ -3303,7 +3360,7 @@
           </a:prstGeom>
           <a:ln w="12700">
             <a:solidFill>
-              <a:srgbClr val="9B7BE8">
+              <a:srgbClr val="8F72E6">
                 <a:alpha val="24000"/>
               </a:srgbClr>
             </a:solidFill>
@@ -3329,7 +3386,7 @@
           </a:prstGeom>
           <a:ln w="12700">
             <a:solidFill>
-              <a:srgbClr val="9B7BE8">
+              <a:srgbClr val="8F72E6">
                 <a:alpha val="42000"/>
               </a:srgbClr>
             </a:solidFill>
@@ -3355,7 +3412,7 @@
           </a:prstGeom>
           <a:ln w="12700">
             <a:solidFill>
-              <a:srgbClr val="9B7BE8">
+              <a:srgbClr val="8F72E6">
                 <a:alpha val="66000"/>
               </a:srgbClr>
             </a:solidFill>
@@ -3390,7 +3447,7 @@
             <a:r>
               <a:rPr lang="en-US" sz="1200" b="1" spc="300" kern="0" dirty="0">
                 <a:solidFill>
-                  <a:srgbClr val="C9B8FB"/>
+                  <a:srgbClr val="C4B3F5"/>
                 </a:solidFill>
                 <a:latin typeface="Courier New" pitchFamily="34" charset="0"/>
                 <a:ea typeface="Courier New" pitchFamily="34" charset="-122"/>
@@ -3494,7 +3551,7 @@
             <a:r>
               <a:rPr lang="en-US" sz="1500" dirty="0">
                 <a:solidFill>
-                  <a:srgbClr val="C9B8FB"/>
+                  <a:srgbClr val="C4B3F5"/>
                 </a:solidFill>
                 <a:latin typeface="Montserrat" pitchFamily="34" charset="0"/>
                 <a:ea typeface="Montserrat" pitchFamily="34" charset="-122"/>
@@ -3524,7 +3581,7 @@
           </a:prstGeom>
           <a:ln w="12700">
             <a:solidFill>
-              <a:srgbClr val="9B7BE8">
+              <a:srgbClr val="8F72E6">
                 <a:alpha val="60000"/>
               </a:srgbClr>
             </a:solidFill>
@@ -3559,7 +3616,7 @@
             <a:r>
               <a:rPr lang="en-US" sz="900" dirty="0">
                 <a:solidFill>
-                  <a:srgbClr val="C9B8FB"/>
+                  <a:srgbClr val="C4B3F5"/>
                 </a:solidFill>
                 <a:latin typeface="Courier New" pitchFamily="34" charset="0"/>
                 <a:ea typeface="Courier New" pitchFamily="34" charset="-122"/>
@@ -3589,7 +3646,7 @@
           </a:prstGeom>
           <a:ln w="12700">
             <a:solidFill>
-              <a:srgbClr val="9B7BE8">
+              <a:srgbClr val="8F72E6">
                 <a:alpha val="60000"/>
               </a:srgbClr>
             </a:solidFill>
@@ -3624,7 +3681,7 @@
             <a:r>
               <a:rPr lang="en-US" sz="900" dirty="0">
                 <a:solidFill>
-                  <a:srgbClr val="C9B8FB"/>
+                  <a:srgbClr val="C4B3F5"/>
                 </a:solidFill>
                 <a:latin typeface="Courier New" pitchFamily="34" charset="0"/>
                 <a:ea typeface="Courier New" pitchFamily="34" charset="-122"/>
@@ -3654,7 +3711,7 @@
           </a:prstGeom>
           <a:ln w="12700">
             <a:solidFill>
-              <a:srgbClr val="9B7BE8">
+              <a:srgbClr val="8F72E6">
                 <a:alpha val="60000"/>
               </a:srgbClr>
             </a:solidFill>
@@ -3689,7 +3746,7 @@
             <a:r>
               <a:rPr lang="en-US" sz="900" dirty="0">
                 <a:solidFill>
-                  <a:srgbClr val="C9B8FB"/>
+                  <a:srgbClr val="C4B3F5"/>
                 </a:solidFill>
                 <a:latin typeface="Courier New" pitchFamily="34" charset="0"/>
                 <a:ea typeface="Courier New" pitchFamily="34" charset="-122"/>
@@ -3719,7 +3776,7 @@
           </a:prstGeom>
           <a:ln w="12700">
             <a:solidFill>
-              <a:srgbClr val="9B7BE8">
+              <a:srgbClr val="8F72E6">
                 <a:alpha val="60000"/>
               </a:srgbClr>
             </a:solidFill>
@@ -3754,7 +3811,7 @@
             <a:r>
               <a:rPr lang="en-US" sz="900" dirty="0">
                 <a:solidFill>
-                  <a:srgbClr val="C9B8FB"/>
+                  <a:srgbClr val="C4B3F5"/>
                 </a:solidFill>
                 <a:latin typeface="Courier New" pitchFamily="34" charset="0"/>
                 <a:ea typeface="Courier New" pitchFamily="34" charset="-122"/>
@@ -3845,7 +3902,7 @@
           </a:prstGeom>
           <a:ln w="12700">
             <a:solidFill>
-              <a:srgbClr val="9B7BE8">
+              <a:srgbClr val="8F72E6">
                 <a:alpha val="60000"/>
               </a:srgbClr>
             </a:solidFill>
@@ -3880,7 +3937,7 @@
             <a:r>
               <a:rPr lang="en-US" sz="900" dirty="0">
                 <a:solidFill>
-                  <a:srgbClr val="C9B8FB"/>
+                  <a:srgbClr val="C4B3F5"/>
                 </a:solidFill>
                 <a:latin typeface="Courier New" pitchFamily="34" charset="0"/>
                 <a:ea typeface="Courier New" pitchFamily="34" charset="-122"/>
@@ -3944,7 +4001,7 @@
             <a:r>
               <a:rPr lang="en-US" sz="2600" b="1" dirty="0">
                 <a:solidFill>
-                  <a:srgbClr val="C9A6FF"/>
+                  <a:srgbClr val="A98BFF"/>
                 </a:solidFill>
                 <a:latin typeface="Courier New" pitchFamily="34" charset="0"/>
                 <a:ea typeface="Courier New" pitchFamily="34" charset="-122"/>
@@ -4012,9 +4069,14 @@
             </a:avLst>
           </a:prstGeom>
           <a:solidFill>
-            <a:srgbClr val="C9A6FF"/>
-          </a:solidFill>
-          <a:ln/>
+            <a:srgbClr val="1A0B3D"/>
+          </a:solidFill>
+          <a:ln w="12700">
+            <a:solidFill>
+              <a:srgbClr val="5A05F4"/>
+            </a:solidFill>
+            <a:prstDash val="solid"/>
+          </a:ln>
         </p:spPr>
       </p:sp>
       <p:sp>
@@ -4044,7 +4106,7 @@
             <a:r>
               <a:rPr lang="en-US" sz="900" b="1" spc="100" kern="0" dirty="0">
                 <a:solidFill>
-                  <a:srgbClr val="1C1140"/>
+                  <a:srgbClr val="A98BFF"/>
                 </a:solidFill>
                 <a:latin typeface="Courier New" pitchFamily="34" charset="0"/>
                 <a:ea typeface="Courier New" pitchFamily="34" charset="-122"/>
@@ -4119,7 +4181,7 @@
                       <a:r>
                         <a:rPr lang="en-US" sz="900" b="1" spc="100" kern="0" dirty="0">
                           <a:solidFill>
-                            <a:srgbClr val="AFA9BE"/>
+                            <a:srgbClr val="C9C4D6"/>
                           </a:solidFill>
                           <a:latin typeface="Courier New" pitchFamily="34" charset="0"/>
                           <a:ea typeface="Courier New" pitchFamily="34" charset="-122"/>
@@ -4137,7 +4199,7 @@
                   <a:tcPr marL="73152" marR="73152" marT="73152" marB="73152" anchor="ctr">
                     <a:lnL w="6350" cap="flat" cmpd="sng" algn="ctr">
                       <a:solidFill>
-                        <a:srgbClr val="2E2A3A"/>
+                        <a:srgbClr val="5E4F85"/>
                       </a:solidFill>
                       <a:prstDash val="solid"/>
                       <a:round/>
@@ -4146,7 +4208,7 @@
                     </a:lnL>
                     <a:lnR w="6350" cap="flat" cmpd="sng" algn="ctr">
                       <a:solidFill>
-                        <a:srgbClr val="2E2A3A"/>
+                        <a:srgbClr val="5E4F85"/>
                       </a:solidFill>
                       <a:prstDash val="solid"/>
                       <a:round/>
@@ -4155,7 +4217,7 @@
                     </a:lnR>
                     <a:lnT w="6350" cap="flat" cmpd="sng" algn="ctr">
                       <a:solidFill>
-                        <a:srgbClr val="2E2A3A"/>
+                        <a:srgbClr val="5E4F85"/>
                       </a:solidFill>
                       <a:prstDash val="solid"/>
                       <a:round/>
@@ -4164,7 +4226,7 @@
                     </a:lnT>
                     <a:lnB w="6350" cap="flat" cmpd="sng" algn="ctr">
                       <a:solidFill>
-                        <a:srgbClr val="2E2A3A"/>
+                        <a:srgbClr val="5E4F85"/>
                       </a:solidFill>
                       <a:prstDash val="solid"/>
                       <a:round/>
@@ -4172,7 +4234,7 @@
                       <a:tailEnd type="none" w="med" len="med"/>
                     </a:lnB>
                     <a:solidFill>
-                      <a:srgbClr val="1F1B2A"/>
+                      <a:srgbClr val="1A0B3D"/>
                     </a:solidFill>
                   </a:tcPr>
                 </a:tc>
@@ -4187,7 +4249,7 @@
                       <a:r>
                         <a:rPr lang="en-US" sz="900" b="1" spc="100" kern="0" dirty="0">
                           <a:solidFill>
-                            <a:srgbClr val="AFA9BE"/>
+                            <a:srgbClr val="C9C4D6"/>
                           </a:solidFill>
                           <a:latin typeface="Courier New" pitchFamily="34" charset="0"/>
                           <a:ea typeface="Courier New" pitchFamily="34" charset="-122"/>
@@ -4205,7 +4267,7 @@
                   <a:tcPr marL="73152" marR="73152" marT="73152" marB="73152" anchor="ctr">
                     <a:lnL w="6350" cap="flat" cmpd="sng" algn="ctr">
                       <a:solidFill>
-                        <a:srgbClr val="2E2A3A"/>
+                        <a:srgbClr val="5E4F85"/>
                       </a:solidFill>
                       <a:prstDash val="solid"/>
                       <a:round/>
@@ -4214,7 +4276,7 @@
                     </a:lnL>
                     <a:lnR w="6350" cap="flat" cmpd="sng" algn="ctr">
                       <a:solidFill>
-                        <a:srgbClr val="2E2A3A"/>
+                        <a:srgbClr val="5E4F85"/>
                       </a:solidFill>
                       <a:prstDash val="solid"/>
                       <a:round/>
@@ -4223,7 +4285,7 @@
                     </a:lnR>
                     <a:lnT w="6350" cap="flat" cmpd="sng" algn="ctr">
                       <a:solidFill>
-                        <a:srgbClr val="2E2A3A"/>
+                        <a:srgbClr val="5E4F85"/>
                       </a:solidFill>
                       <a:prstDash val="solid"/>
                       <a:round/>
@@ -4232,7 +4294,7 @@
                     </a:lnT>
                     <a:lnB w="6350" cap="flat" cmpd="sng" algn="ctr">
                       <a:solidFill>
-                        <a:srgbClr val="2E2A3A"/>
+                        <a:srgbClr val="5E4F85"/>
                       </a:solidFill>
                       <a:prstDash val="solid"/>
                       <a:round/>
@@ -4240,7 +4302,7 @@
                       <a:tailEnd type="none" w="med" len="med"/>
                     </a:lnB>
                     <a:solidFill>
-                      <a:srgbClr val="1F1B2A"/>
+                      <a:srgbClr val="1A0B3D"/>
                     </a:solidFill>
                   </a:tcPr>
                 </a:tc>
@@ -4255,7 +4317,7 @@
                       <a:r>
                         <a:rPr lang="en-US" sz="900" b="1" spc="100" kern="0" dirty="0">
                           <a:solidFill>
-                            <a:srgbClr val="AFA9BE"/>
+                            <a:srgbClr val="C9C4D6"/>
                           </a:solidFill>
                           <a:latin typeface="Courier New" pitchFamily="34" charset="0"/>
                           <a:ea typeface="Courier New" pitchFamily="34" charset="-122"/>
@@ -4273,7 +4335,7 @@
                   <a:tcPr marL="73152" marR="73152" marT="73152" marB="73152" anchor="ctr">
                     <a:lnL w="6350" cap="flat" cmpd="sng" algn="ctr">
                       <a:solidFill>
-                        <a:srgbClr val="2E2A3A"/>
+                        <a:srgbClr val="5E4F85"/>
                       </a:solidFill>
                       <a:prstDash val="solid"/>
                       <a:round/>
@@ -4282,7 +4344,7 @@
                     </a:lnL>
                     <a:lnR w="6350" cap="flat" cmpd="sng" algn="ctr">
                       <a:solidFill>
-                        <a:srgbClr val="2E2A3A"/>
+                        <a:srgbClr val="5E4F85"/>
                       </a:solidFill>
                       <a:prstDash val="solid"/>
                       <a:round/>
@@ -4291,7 +4353,7 @@
                     </a:lnR>
                     <a:lnT w="6350" cap="flat" cmpd="sng" algn="ctr">
                       <a:solidFill>
-                        <a:srgbClr val="2E2A3A"/>
+                        <a:srgbClr val="5E4F85"/>
                       </a:solidFill>
                       <a:prstDash val="solid"/>
                       <a:round/>
@@ -4300,7 +4362,7 @@
                     </a:lnT>
                     <a:lnB w="6350" cap="flat" cmpd="sng" algn="ctr">
                       <a:solidFill>
-                        <a:srgbClr val="2E2A3A"/>
+                        <a:srgbClr val="5E4F85"/>
                       </a:solidFill>
                       <a:prstDash val="solid"/>
                       <a:round/>
@@ -4308,7 +4370,7 @@
                       <a:tailEnd type="none" w="med" len="med"/>
                     </a:lnB>
                     <a:solidFill>
-                      <a:srgbClr val="1F1B2A"/>
+                      <a:srgbClr val="1A0B3D"/>
                     </a:solidFill>
                   </a:tcPr>
                 </a:tc>
@@ -4343,7 +4405,7 @@
                   <a:tcPr marL="73152" marR="73152" marT="73152" marB="73152" anchor="ctr">
                     <a:lnL w="6350" cap="flat" cmpd="sng" algn="ctr">
                       <a:solidFill>
-                        <a:srgbClr val="2E2A3A"/>
+                        <a:srgbClr val="5E4F85"/>
                       </a:solidFill>
                       <a:prstDash val="solid"/>
                       <a:round/>
@@ -4352,7 +4414,7 @@
                     </a:lnL>
                     <a:lnR w="6350" cap="flat" cmpd="sng" algn="ctr">
                       <a:solidFill>
-                        <a:srgbClr val="2E2A3A"/>
+                        <a:srgbClr val="5E4F85"/>
                       </a:solidFill>
                       <a:prstDash val="solid"/>
                       <a:round/>
@@ -4361,7 +4423,7 @@
                     </a:lnR>
                     <a:lnT w="6350" cap="flat" cmpd="sng" algn="ctr">
                       <a:solidFill>
-                        <a:srgbClr val="2E2A3A"/>
+                        <a:srgbClr val="5E4F85"/>
                       </a:solidFill>
                       <a:prstDash val="solid"/>
                       <a:round/>
@@ -4370,7 +4432,7 @@
                     </a:lnT>
                     <a:lnB w="6350" cap="flat" cmpd="sng" algn="ctr">
                       <a:solidFill>
-                        <a:srgbClr val="2E2A3A"/>
+                        <a:srgbClr val="5E4F85"/>
                       </a:solidFill>
                       <a:prstDash val="solid"/>
                       <a:round/>
@@ -4378,7 +4440,7 @@
                       <a:tailEnd type="none" w="med" len="med"/>
                     </a:lnB>
                     <a:solidFill>
-                      <a:srgbClr val="17141F"/>
+                      <a:srgbClr val="000000"/>
                     </a:solidFill>
                   </a:tcPr>
                 </a:tc>
@@ -4411,7 +4473,7 @@
                   <a:tcPr marL="73152" marR="73152" marT="73152" marB="73152" anchor="ctr">
                     <a:lnL w="6350" cap="flat" cmpd="sng" algn="ctr">
                       <a:solidFill>
-                        <a:srgbClr val="2E2A3A"/>
+                        <a:srgbClr val="5E4F85"/>
                       </a:solidFill>
                       <a:prstDash val="solid"/>
                       <a:round/>
@@ -4420,7 +4482,7 @@
                     </a:lnL>
                     <a:lnR w="6350" cap="flat" cmpd="sng" algn="ctr">
                       <a:solidFill>
-                        <a:srgbClr val="2E2A3A"/>
+                        <a:srgbClr val="5E4F85"/>
                       </a:solidFill>
                       <a:prstDash val="solid"/>
                       <a:round/>
@@ -4429,7 +4491,7 @@
                     </a:lnR>
                     <a:lnT w="6350" cap="flat" cmpd="sng" algn="ctr">
                       <a:solidFill>
-                        <a:srgbClr val="2E2A3A"/>
+                        <a:srgbClr val="5E4F85"/>
                       </a:solidFill>
                       <a:prstDash val="solid"/>
                       <a:round/>
@@ -4438,7 +4500,7 @@
                     </a:lnT>
                     <a:lnB w="6350" cap="flat" cmpd="sng" algn="ctr">
                       <a:solidFill>
-                        <a:srgbClr val="2E2A3A"/>
+                        <a:srgbClr val="5E4F85"/>
                       </a:solidFill>
                       <a:prstDash val="solid"/>
                       <a:round/>
@@ -4446,7 +4508,7 @@
                       <a:tailEnd type="none" w="med" len="med"/>
                     </a:lnB>
                     <a:solidFill>
-                      <a:srgbClr val="17141F"/>
+                      <a:srgbClr val="000000"/>
                     </a:solidFill>
                   </a:tcPr>
                 </a:tc>
@@ -4479,7 +4541,7 @@
                   <a:tcPr marL="73152" marR="73152" marT="73152" marB="73152" anchor="ctr">
                     <a:lnL w="6350" cap="flat" cmpd="sng" algn="ctr">
                       <a:solidFill>
-                        <a:srgbClr val="2E2A3A"/>
+                        <a:srgbClr val="5E4F85"/>
                       </a:solidFill>
                       <a:prstDash val="solid"/>
                       <a:round/>
@@ -4488,7 +4550,7 @@
                     </a:lnL>
                     <a:lnR w="6350" cap="flat" cmpd="sng" algn="ctr">
                       <a:solidFill>
-                        <a:srgbClr val="2E2A3A"/>
+                        <a:srgbClr val="5E4F85"/>
                       </a:solidFill>
                       <a:prstDash val="solid"/>
                       <a:round/>
@@ -4497,7 +4559,7 @@
                     </a:lnR>
                     <a:lnT w="6350" cap="flat" cmpd="sng" algn="ctr">
                       <a:solidFill>
-                        <a:srgbClr val="2E2A3A"/>
+                        <a:srgbClr val="5E4F85"/>
                       </a:solidFill>
                       <a:prstDash val="solid"/>
                       <a:round/>
@@ -4506,7 +4568,7 @@
                     </a:lnT>
                     <a:lnB w="6350" cap="flat" cmpd="sng" algn="ctr">
                       <a:solidFill>
-                        <a:srgbClr val="2E2A3A"/>
+                        <a:srgbClr val="5E4F85"/>
                       </a:solidFill>
                       <a:prstDash val="solid"/>
                       <a:round/>
@@ -4514,7 +4576,7 @@
                       <a:tailEnd type="none" w="med" len="med"/>
                     </a:lnB>
                     <a:solidFill>
-                      <a:srgbClr val="17141F"/>
+                      <a:srgbClr val="000000"/>
                     </a:solidFill>
                   </a:tcPr>
                 </a:tc>
@@ -4531,7 +4593,7 @@
                       <a:r>
                         <a:rPr lang="en-US" sz="1150" b="1" dirty="0">
                           <a:solidFill>
-                            <a:srgbClr val="C9A6FF"/>
+                            <a:srgbClr val="A98BFF"/>
                           </a:solidFill>
                           <a:latin typeface="Montserrat" pitchFamily="34" charset="0"/>
                           <a:ea typeface="Montserrat" pitchFamily="34" charset="-122"/>
@@ -4549,7 +4611,7 @@
                   <a:tcPr marL="73152" marR="73152" marT="73152" marB="73152" anchor="ctr">
                     <a:lnL w="6350" cap="flat" cmpd="sng" algn="ctr">
                       <a:solidFill>
-                        <a:srgbClr val="2E2A3A"/>
+                        <a:srgbClr val="5E4F85"/>
                       </a:solidFill>
                       <a:prstDash val="solid"/>
                       <a:round/>
@@ -4558,7 +4620,7 @@
                     </a:lnL>
                     <a:lnR w="6350" cap="flat" cmpd="sng" algn="ctr">
                       <a:solidFill>
-                        <a:srgbClr val="2E2A3A"/>
+                        <a:srgbClr val="5E4F85"/>
                       </a:solidFill>
                       <a:prstDash val="solid"/>
                       <a:round/>
@@ -4567,7 +4629,7 @@
                     </a:lnR>
                     <a:lnT w="6350" cap="flat" cmpd="sng" algn="ctr">
                       <a:solidFill>
-                        <a:srgbClr val="2E2A3A"/>
+                        <a:srgbClr val="5E4F85"/>
                       </a:solidFill>
                       <a:prstDash val="solid"/>
                       <a:round/>
@@ -4576,7 +4638,7 @@
                     </a:lnT>
                     <a:lnB w="6350" cap="flat" cmpd="sng" algn="ctr">
                       <a:solidFill>
-                        <a:srgbClr val="2E2A3A"/>
+                        <a:srgbClr val="5E4F85"/>
                       </a:solidFill>
                       <a:prstDash val="solid"/>
                       <a:round/>
@@ -4584,7 +4646,7 @@
                       <a:tailEnd type="none" w="med" len="med"/>
                     </a:lnB>
                     <a:solidFill>
-                      <a:srgbClr val="1C1140"/>
+                      <a:srgbClr val="1A0B3D"/>
                     </a:solidFill>
                   </a:tcPr>
                 </a:tc>
@@ -4617,7 +4679,7 @@
                   <a:tcPr marL="73152" marR="73152" marT="73152" marB="73152" anchor="ctr">
                     <a:lnL w="6350" cap="flat" cmpd="sng" algn="ctr">
                       <a:solidFill>
-                        <a:srgbClr val="2E2A3A"/>
+                        <a:srgbClr val="5E4F85"/>
                       </a:solidFill>
                       <a:prstDash val="solid"/>
                       <a:round/>
@@ -4626,7 +4688,7 @@
                     </a:lnL>
                     <a:lnR w="6350" cap="flat" cmpd="sng" algn="ctr">
                       <a:solidFill>
-                        <a:srgbClr val="2E2A3A"/>
+                        <a:srgbClr val="5E4F85"/>
                       </a:solidFill>
                       <a:prstDash val="solid"/>
                       <a:round/>
@@ -4635,7 +4697,7 @@
                     </a:lnR>
                     <a:lnT w="6350" cap="flat" cmpd="sng" algn="ctr">
                       <a:solidFill>
-                        <a:srgbClr val="2E2A3A"/>
+                        <a:srgbClr val="5E4F85"/>
                       </a:solidFill>
                       <a:prstDash val="solid"/>
                       <a:round/>
@@ -4644,7 +4706,7 @@
                     </a:lnT>
                     <a:lnB w="6350" cap="flat" cmpd="sng" algn="ctr">
                       <a:solidFill>
-                        <a:srgbClr val="2E2A3A"/>
+                        <a:srgbClr val="5E4F85"/>
                       </a:solidFill>
                       <a:prstDash val="solid"/>
                       <a:round/>
@@ -4652,7 +4714,7 @@
                       <a:tailEnd type="none" w="med" len="med"/>
                     </a:lnB>
                     <a:solidFill>
-                      <a:srgbClr val="1C1140"/>
+                      <a:srgbClr val="1A0B3D"/>
                     </a:solidFill>
                   </a:tcPr>
                 </a:tc>
@@ -4685,7 +4747,7 @@
                   <a:tcPr marL="73152" marR="73152" marT="73152" marB="73152" anchor="ctr">
                     <a:lnL w="6350" cap="flat" cmpd="sng" algn="ctr">
                       <a:solidFill>
-                        <a:srgbClr val="2E2A3A"/>
+                        <a:srgbClr val="5E4F85"/>
                       </a:solidFill>
                       <a:prstDash val="solid"/>
                       <a:round/>
@@ -4694,7 +4756,7 @@
                     </a:lnL>
                     <a:lnR w="6350" cap="flat" cmpd="sng" algn="ctr">
                       <a:solidFill>
-                        <a:srgbClr val="2E2A3A"/>
+                        <a:srgbClr val="5E4F85"/>
                       </a:solidFill>
                       <a:prstDash val="solid"/>
                       <a:round/>
@@ -4703,7 +4765,7 @@
                     </a:lnR>
                     <a:lnT w="6350" cap="flat" cmpd="sng" algn="ctr">
                       <a:solidFill>
-                        <a:srgbClr val="2E2A3A"/>
+                        <a:srgbClr val="5E4F85"/>
                       </a:solidFill>
                       <a:prstDash val="solid"/>
                       <a:round/>
@@ -4712,7 +4774,7 @@
                     </a:lnT>
                     <a:lnB w="6350" cap="flat" cmpd="sng" algn="ctr">
                       <a:solidFill>
-                        <a:srgbClr val="2E2A3A"/>
+                        <a:srgbClr val="5E4F85"/>
                       </a:solidFill>
                       <a:prstDash val="solid"/>
                       <a:round/>
@@ -4720,7 +4782,7 @@
                       <a:tailEnd type="none" w="med" len="med"/>
                     </a:lnB>
                     <a:solidFill>
-                      <a:srgbClr val="1C1140"/>
+                      <a:srgbClr val="1A0B3D"/>
                     </a:solidFill>
                   </a:tcPr>
                 </a:tc>
@@ -4755,7 +4817,7 @@
                   <a:tcPr marL="73152" marR="73152" marT="73152" marB="73152" anchor="ctr">
                     <a:lnL w="6350" cap="flat" cmpd="sng" algn="ctr">
                       <a:solidFill>
-                        <a:srgbClr val="2E2A3A"/>
+                        <a:srgbClr val="5E4F85"/>
                       </a:solidFill>
                       <a:prstDash val="solid"/>
                       <a:round/>
@@ -4764,7 +4826,7 @@
                     </a:lnL>
                     <a:lnR w="6350" cap="flat" cmpd="sng" algn="ctr">
                       <a:solidFill>
-                        <a:srgbClr val="2E2A3A"/>
+                        <a:srgbClr val="5E4F85"/>
                       </a:solidFill>
                       <a:prstDash val="solid"/>
                       <a:round/>
@@ -4773,7 +4835,7 @@
                     </a:lnR>
                     <a:lnT w="6350" cap="flat" cmpd="sng" algn="ctr">
                       <a:solidFill>
-                        <a:srgbClr val="2E2A3A"/>
+                        <a:srgbClr val="5E4F85"/>
                       </a:solidFill>
                       <a:prstDash val="solid"/>
                       <a:round/>
@@ -4782,7 +4844,7 @@
                     </a:lnT>
                     <a:lnB w="6350" cap="flat" cmpd="sng" algn="ctr">
                       <a:solidFill>
-                        <a:srgbClr val="2E2A3A"/>
+                        <a:srgbClr val="5E4F85"/>
                       </a:solidFill>
                       <a:prstDash val="solid"/>
                       <a:round/>
@@ -4790,7 +4852,7 @@
                       <a:tailEnd type="none" w="med" len="med"/>
                     </a:lnB>
                     <a:solidFill>
-                      <a:srgbClr val="17141F"/>
+                      <a:srgbClr val="000000"/>
                     </a:solidFill>
                   </a:tcPr>
                 </a:tc>
@@ -4823,7 +4885,7 @@
                   <a:tcPr marL="73152" marR="73152" marT="73152" marB="73152" anchor="ctr">
                     <a:lnL w="6350" cap="flat" cmpd="sng" algn="ctr">
                       <a:solidFill>
-                        <a:srgbClr val="2E2A3A"/>
+                        <a:srgbClr val="5E4F85"/>
                       </a:solidFill>
                       <a:prstDash val="solid"/>
                       <a:round/>
@@ -4832,7 +4894,7 @@
                     </a:lnL>
                     <a:lnR w="6350" cap="flat" cmpd="sng" algn="ctr">
                       <a:solidFill>
-                        <a:srgbClr val="2E2A3A"/>
+                        <a:srgbClr val="5E4F85"/>
                       </a:solidFill>
                       <a:prstDash val="solid"/>
                       <a:round/>
@@ -4841,7 +4903,7 @@
                     </a:lnR>
                     <a:lnT w="6350" cap="flat" cmpd="sng" algn="ctr">
                       <a:solidFill>
-                        <a:srgbClr val="2E2A3A"/>
+                        <a:srgbClr val="5E4F85"/>
                       </a:solidFill>
                       <a:prstDash val="solid"/>
                       <a:round/>
@@ -4850,7 +4912,7 @@
                     </a:lnT>
                     <a:lnB w="6350" cap="flat" cmpd="sng" algn="ctr">
                       <a:solidFill>
-                        <a:srgbClr val="2E2A3A"/>
+                        <a:srgbClr val="5E4F85"/>
                       </a:solidFill>
                       <a:prstDash val="solid"/>
                       <a:round/>
@@ -4858,7 +4920,7 @@
                       <a:tailEnd type="none" w="med" len="med"/>
                     </a:lnB>
                     <a:solidFill>
-                      <a:srgbClr val="17141F"/>
+                      <a:srgbClr val="000000"/>
                     </a:solidFill>
                   </a:tcPr>
                 </a:tc>
@@ -4891,7 +4953,7 @@
                   <a:tcPr marL="73152" marR="73152" marT="73152" marB="73152" anchor="ctr">
                     <a:lnL w="6350" cap="flat" cmpd="sng" algn="ctr">
                       <a:solidFill>
-                        <a:srgbClr val="2E2A3A"/>
+                        <a:srgbClr val="5E4F85"/>
                       </a:solidFill>
                       <a:prstDash val="solid"/>
                       <a:round/>
@@ -4900,7 +4962,7 @@
                     </a:lnL>
                     <a:lnR w="6350" cap="flat" cmpd="sng" algn="ctr">
                       <a:solidFill>
-                        <a:srgbClr val="2E2A3A"/>
+                        <a:srgbClr val="5E4F85"/>
                       </a:solidFill>
                       <a:prstDash val="solid"/>
                       <a:round/>
@@ -4909,7 +4971,7 @@
                     </a:lnR>
                     <a:lnT w="6350" cap="flat" cmpd="sng" algn="ctr">
                       <a:solidFill>
-                        <a:srgbClr val="2E2A3A"/>
+                        <a:srgbClr val="5E4F85"/>
                       </a:solidFill>
                       <a:prstDash val="solid"/>
                       <a:round/>
@@ -4918,7 +4980,7 @@
                     </a:lnT>
                     <a:lnB w="6350" cap="flat" cmpd="sng" algn="ctr">
                       <a:solidFill>
-                        <a:srgbClr val="2E2A3A"/>
+                        <a:srgbClr val="5E4F85"/>
                       </a:solidFill>
                       <a:prstDash val="solid"/>
                       <a:round/>
@@ -4926,7 +4988,7 @@
                       <a:tailEnd type="none" w="med" len="med"/>
                     </a:lnB>
                     <a:solidFill>
-                      <a:srgbClr val="17141F"/>
+                      <a:srgbClr val="000000"/>
                     </a:solidFill>
                   </a:tcPr>
                 </a:tc>
@@ -4961,7 +5023,7 @@
                   <a:tcPr marL="73152" marR="73152" marT="73152" marB="73152" anchor="ctr">
                     <a:lnL w="6350" cap="flat" cmpd="sng" algn="ctr">
                       <a:solidFill>
-                        <a:srgbClr val="2E2A3A"/>
+                        <a:srgbClr val="5E4F85"/>
                       </a:solidFill>
                       <a:prstDash val="solid"/>
                       <a:round/>
@@ -4970,7 +5032,7 @@
                     </a:lnL>
                     <a:lnR w="6350" cap="flat" cmpd="sng" algn="ctr">
                       <a:solidFill>
-                        <a:srgbClr val="2E2A3A"/>
+                        <a:srgbClr val="5E4F85"/>
                       </a:solidFill>
                       <a:prstDash val="solid"/>
                       <a:round/>
@@ -4979,7 +5041,7 @@
                     </a:lnR>
                     <a:lnT w="6350" cap="flat" cmpd="sng" algn="ctr">
                       <a:solidFill>
-                        <a:srgbClr val="2E2A3A"/>
+                        <a:srgbClr val="5E4F85"/>
                       </a:solidFill>
                       <a:prstDash val="solid"/>
                       <a:round/>
@@ -4988,7 +5050,7 @@
                     </a:lnT>
                     <a:lnB w="6350" cap="flat" cmpd="sng" algn="ctr">
                       <a:solidFill>
-                        <a:srgbClr val="2E2A3A"/>
+                        <a:srgbClr val="5E4F85"/>
                       </a:solidFill>
                       <a:prstDash val="solid"/>
                       <a:round/>
@@ -4996,7 +5058,7 @@
                       <a:tailEnd type="none" w="med" len="med"/>
                     </a:lnB>
                     <a:solidFill>
-                      <a:srgbClr val="17141F"/>
+                      <a:srgbClr val="000000"/>
                     </a:solidFill>
                   </a:tcPr>
                 </a:tc>
@@ -5029,7 +5091,7 @@
                   <a:tcPr marL="73152" marR="73152" marT="73152" marB="73152" anchor="ctr">
                     <a:lnL w="6350" cap="flat" cmpd="sng" algn="ctr">
                       <a:solidFill>
-                        <a:srgbClr val="2E2A3A"/>
+                        <a:srgbClr val="5E4F85"/>
                       </a:solidFill>
                       <a:prstDash val="solid"/>
                       <a:round/>
@@ -5038,7 +5100,7 @@
                     </a:lnL>
                     <a:lnR w="6350" cap="flat" cmpd="sng" algn="ctr">
                       <a:solidFill>
-                        <a:srgbClr val="2E2A3A"/>
+                        <a:srgbClr val="5E4F85"/>
                       </a:solidFill>
                       <a:prstDash val="solid"/>
                       <a:round/>
@@ -5047,7 +5109,7 @@
                     </a:lnR>
                     <a:lnT w="6350" cap="flat" cmpd="sng" algn="ctr">
                       <a:solidFill>
-                        <a:srgbClr val="2E2A3A"/>
+                        <a:srgbClr val="5E4F85"/>
                       </a:solidFill>
                       <a:prstDash val="solid"/>
                       <a:round/>
@@ -5056,7 +5118,7 @@
                     </a:lnT>
                     <a:lnB w="6350" cap="flat" cmpd="sng" algn="ctr">
                       <a:solidFill>
-                        <a:srgbClr val="2E2A3A"/>
+                        <a:srgbClr val="5E4F85"/>
                       </a:solidFill>
                       <a:prstDash val="solid"/>
                       <a:round/>
@@ -5064,7 +5126,7 @@
                       <a:tailEnd type="none" w="med" len="med"/>
                     </a:lnB>
                     <a:solidFill>
-                      <a:srgbClr val="17141F"/>
+                      <a:srgbClr val="000000"/>
                     </a:solidFill>
                   </a:tcPr>
                 </a:tc>
@@ -5097,7 +5159,7 @@
                   <a:tcPr marL="73152" marR="73152" marT="73152" marB="73152" anchor="ctr">
                     <a:lnL w="6350" cap="flat" cmpd="sng" algn="ctr">
                       <a:solidFill>
-                        <a:srgbClr val="2E2A3A"/>
+                        <a:srgbClr val="5E4F85"/>
                       </a:solidFill>
                       <a:prstDash val="solid"/>
                       <a:round/>
@@ -5106,7 +5168,7 @@
                     </a:lnL>
                     <a:lnR w="6350" cap="flat" cmpd="sng" algn="ctr">
                       <a:solidFill>
-                        <a:srgbClr val="2E2A3A"/>
+                        <a:srgbClr val="5E4F85"/>
                       </a:solidFill>
                       <a:prstDash val="solid"/>
                       <a:round/>
@@ -5115,7 +5177,7 @@
                     </a:lnR>
                     <a:lnT w="6350" cap="flat" cmpd="sng" algn="ctr">
                       <a:solidFill>
-                        <a:srgbClr val="2E2A3A"/>
+                        <a:srgbClr val="5E4F85"/>
                       </a:solidFill>
                       <a:prstDash val="solid"/>
                       <a:round/>
@@ -5124,7 +5186,7 @@
                     </a:lnT>
                     <a:lnB w="6350" cap="flat" cmpd="sng" algn="ctr">
                       <a:solidFill>
-                        <a:srgbClr val="2E2A3A"/>
+                        <a:srgbClr val="5E4F85"/>
                       </a:solidFill>
                       <a:prstDash val="solid"/>
                       <a:round/>
@@ -5132,7 +5194,7 @@
                       <a:tailEnd type="none" w="med" len="med"/>
                     </a:lnB>
                     <a:solidFill>
-                      <a:srgbClr val="17141F"/>
+                      <a:srgbClr val="000000"/>
                     </a:solidFill>
                   </a:tcPr>
                 </a:tc>
@@ -5149,7 +5211,7 @@
                       <a:r>
                         <a:rPr lang="en-US" sz="1150" b="1" dirty="0">
                           <a:solidFill>
-                            <a:srgbClr val="C9A6FF"/>
+                            <a:srgbClr val="A98BFF"/>
                           </a:solidFill>
                           <a:latin typeface="Montserrat" pitchFamily="34" charset="0"/>
                           <a:ea typeface="Montserrat" pitchFamily="34" charset="-122"/>
@@ -5167,7 +5229,7 @@
                   <a:tcPr marL="73152" marR="73152" marT="73152" marB="73152" anchor="ctr">
                     <a:lnL w="6350" cap="flat" cmpd="sng" algn="ctr">
                       <a:solidFill>
-                        <a:srgbClr val="2E2A3A"/>
+                        <a:srgbClr val="5E4F85"/>
                       </a:solidFill>
                       <a:prstDash val="solid"/>
                       <a:round/>
@@ -5176,7 +5238,7 @@
                     </a:lnL>
                     <a:lnR w="6350" cap="flat" cmpd="sng" algn="ctr">
                       <a:solidFill>
-                        <a:srgbClr val="2E2A3A"/>
+                        <a:srgbClr val="5E4F85"/>
                       </a:solidFill>
                       <a:prstDash val="solid"/>
                       <a:round/>
@@ -5185,7 +5247,7 @@
                     </a:lnR>
                     <a:lnT w="6350" cap="flat" cmpd="sng" algn="ctr">
                       <a:solidFill>
-                        <a:srgbClr val="2E2A3A"/>
+                        <a:srgbClr val="5E4F85"/>
                       </a:solidFill>
                       <a:prstDash val="solid"/>
                       <a:round/>
@@ -5194,7 +5256,7 @@
                     </a:lnT>
                     <a:lnB w="6350" cap="flat" cmpd="sng" algn="ctr">
                       <a:solidFill>
-                        <a:srgbClr val="2E2A3A"/>
+                        <a:srgbClr val="5E4F85"/>
                       </a:solidFill>
                       <a:prstDash val="solid"/>
                       <a:round/>
@@ -5202,7 +5264,7 @@
                       <a:tailEnd type="none" w="med" len="med"/>
                     </a:lnB>
                     <a:solidFill>
-                      <a:srgbClr val="1C1140"/>
+                      <a:srgbClr val="1A0B3D"/>
                     </a:solidFill>
                   </a:tcPr>
                 </a:tc>
@@ -5235,7 +5297,7 @@
                   <a:tcPr marL="73152" marR="73152" marT="73152" marB="73152" anchor="ctr">
                     <a:lnL w="6350" cap="flat" cmpd="sng" algn="ctr">
                       <a:solidFill>
-                        <a:srgbClr val="2E2A3A"/>
+                        <a:srgbClr val="5E4F85"/>
                       </a:solidFill>
                       <a:prstDash val="solid"/>
                       <a:round/>
@@ -5244,7 +5306,7 @@
                     </a:lnL>
                     <a:lnR w="6350" cap="flat" cmpd="sng" algn="ctr">
                       <a:solidFill>
-                        <a:srgbClr val="2E2A3A"/>
+                        <a:srgbClr val="5E4F85"/>
                       </a:solidFill>
                       <a:prstDash val="solid"/>
                       <a:round/>
@@ -5253,7 +5315,7 @@
                     </a:lnR>
                     <a:lnT w="6350" cap="flat" cmpd="sng" algn="ctr">
                       <a:solidFill>
-                        <a:srgbClr val="2E2A3A"/>
+                        <a:srgbClr val="5E4F85"/>
                       </a:solidFill>
                       <a:prstDash val="solid"/>
                       <a:round/>
@@ -5262,7 +5324,7 @@
                     </a:lnT>
                     <a:lnB w="6350" cap="flat" cmpd="sng" algn="ctr">
                       <a:solidFill>
-                        <a:srgbClr val="2E2A3A"/>
+                        <a:srgbClr val="5E4F85"/>
                       </a:solidFill>
                       <a:prstDash val="solid"/>
                       <a:round/>
@@ -5270,7 +5332,7 @@
                       <a:tailEnd type="none" w="med" len="med"/>
                     </a:lnB>
                     <a:solidFill>
-                      <a:srgbClr val="1C1140"/>
+                      <a:srgbClr val="1A0B3D"/>
                     </a:solidFill>
                   </a:tcPr>
                 </a:tc>
@@ -5303,7 +5365,7 @@
                   <a:tcPr marL="73152" marR="73152" marT="73152" marB="73152" anchor="ctr">
                     <a:lnL w="6350" cap="flat" cmpd="sng" algn="ctr">
                       <a:solidFill>
-                        <a:srgbClr val="2E2A3A"/>
+                        <a:srgbClr val="5E4F85"/>
                       </a:solidFill>
                       <a:prstDash val="solid"/>
                       <a:round/>
@@ -5312,7 +5374,7 @@
                     </a:lnL>
                     <a:lnR w="6350" cap="flat" cmpd="sng" algn="ctr">
                       <a:solidFill>
-                        <a:srgbClr val="2E2A3A"/>
+                        <a:srgbClr val="5E4F85"/>
                       </a:solidFill>
                       <a:prstDash val="solid"/>
                       <a:round/>
@@ -5321,7 +5383,7 @@
                     </a:lnR>
                     <a:lnT w="6350" cap="flat" cmpd="sng" algn="ctr">
                       <a:solidFill>
-                        <a:srgbClr val="2E2A3A"/>
+                        <a:srgbClr val="5E4F85"/>
                       </a:solidFill>
                       <a:prstDash val="solid"/>
                       <a:round/>
@@ -5330,7 +5392,7 @@
                     </a:lnT>
                     <a:lnB w="6350" cap="flat" cmpd="sng" algn="ctr">
                       <a:solidFill>
-                        <a:srgbClr val="2E2A3A"/>
+                        <a:srgbClr val="5E4F85"/>
                       </a:solidFill>
                       <a:prstDash val="solid"/>
                       <a:round/>
@@ -5338,7 +5400,7 @@
                       <a:tailEnd type="none" w="med" len="med"/>
                     </a:lnB>
                     <a:solidFill>
-                      <a:srgbClr val="1C1140"/>
+                      <a:srgbClr val="1A0B3D"/>
                     </a:solidFill>
                   </a:tcPr>
                 </a:tc>
@@ -5373,7 +5435,7 @@
                   <a:tcPr marL="73152" marR="73152" marT="73152" marB="73152" anchor="ctr">
                     <a:lnL w="6350" cap="flat" cmpd="sng" algn="ctr">
                       <a:solidFill>
-                        <a:srgbClr val="2E2A3A"/>
+                        <a:srgbClr val="5E4F85"/>
                       </a:solidFill>
                       <a:prstDash val="solid"/>
                       <a:round/>
@@ -5382,7 +5444,7 @@
                     </a:lnL>
                     <a:lnR w="6350" cap="flat" cmpd="sng" algn="ctr">
                       <a:solidFill>
-                        <a:srgbClr val="2E2A3A"/>
+                        <a:srgbClr val="5E4F85"/>
                       </a:solidFill>
                       <a:prstDash val="solid"/>
                       <a:round/>
@@ -5391,7 +5453,7 @@
                     </a:lnR>
                     <a:lnT w="6350" cap="flat" cmpd="sng" algn="ctr">
                       <a:solidFill>
-                        <a:srgbClr val="2E2A3A"/>
+                        <a:srgbClr val="5E4F85"/>
                       </a:solidFill>
                       <a:prstDash val="solid"/>
                       <a:round/>
@@ -5400,7 +5462,7 @@
                     </a:lnT>
                     <a:lnB w="6350" cap="flat" cmpd="sng" algn="ctr">
                       <a:solidFill>
-                        <a:srgbClr val="2E2A3A"/>
+                        <a:srgbClr val="5E4F85"/>
                       </a:solidFill>
                       <a:prstDash val="solid"/>
                       <a:round/>
@@ -5408,7 +5470,7 @@
                       <a:tailEnd type="none" w="med" len="med"/>
                     </a:lnB>
                     <a:solidFill>
-                      <a:srgbClr val="17141F"/>
+                      <a:srgbClr val="000000"/>
                     </a:solidFill>
                   </a:tcPr>
                 </a:tc>
@@ -5441,7 +5503,7 @@
                   <a:tcPr marL="73152" marR="73152" marT="73152" marB="73152" anchor="ctr">
                     <a:lnL w="6350" cap="flat" cmpd="sng" algn="ctr">
                       <a:solidFill>
-                        <a:srgbClr val="2E2A3A"/>
+                        <a:srgbClr val="5E4F85"/>
                       </a:solidFill>
                       <a:prstDash val="solid"/>
                       <a:round/>
@@ -5450,7 +5512,7 @@
                     </a:lnL>
                     <a:lnR w="6350" cap="flat" cmpd="sng" algn="ctr">
                       <a:solidFill>
-                        <a:srgbClr val="2E2A3A"/>
+                        <a:srgbClr val="5E4F85"/>
                       </a:solidFill>
                       <a:prstDash val="solid"/>
                       <a:round/>
@@ -5459,7 +5521,7 @@
                     </a:lnR>
                     <a:lnT w="6350" cap="flat" cmpd="sng" algn="ctr">
                       <a:solidFill>
-                        <a:srgbClr val="2E2A3A"/>
+                        <a:srgbClr val="5E4F85"/>
                       </a:solidFill>
                       <a:prstDash val="solid"/>
                       <a:round/>
@@ -5468,7 +5530,7 @@
                     </a:lnT>
                     <a:lnB w="6350" cap="flat" cmpd="sng" algn="ctr">
                       <a:solidFill>
-                        <a:srgbClr val="2E2A3A"/>
+                        <a:srgbClr val="5E4F85"/>
                       </a:solidFill>
                       <a:prstDash val="solid"/>
                       <a:round/>
@@ -5476,7 +5538,7 @@
                       <a:tailEnd type="none" w="med" len="med"/>
                     </a:lnB>
                     <a:solidFill>
-                      <a:srgbClr val="17141F"/>
+                      <a:srgbClr val="000000"/>
                     </a:solidFill>
                   </a:tcPr>
                 </a:tc>
@@ -5509,7 +5571,7 @@
                   <a:tcPr marL="73152" marR="73152" marT="73152" marB="73152" anchor="ctr">
                     <a:lnL w="6350" cap="flat" cmpd="sng" algn="ctr">
                       <a:solidFill>
-                        <a:srgbClr val="2E2A3A"/>
+                        <a:srgbClr val="5E4F85"/>
                       </a:solidFill>
                       <a:prstDash val="solid"/>
                       <a:round/>
@@ -5518,7 +5580,7 @@
                     </a:lnL>
                     <a:lnR w="6350" cap="flat" cmpd="sng" algn="ctr">
                       <a:solidFill>
-                        <a:srgbClr val="2E2A3A"/>
+                        <a:srgbClr val="5E4F85"/>
                       </a:solidFill>
                       <a:prstDash val="solid"/>
                       <a:round/>
@@ -5527,7 +5589,7 @@
                     </a:lnR>
                     <a:lnT w="6350" cap="flat" cmpd="sng" algn="ctr">
                       <a:solidFill>
-                        <a:srgbClr val="2E2A3A"/>
+                        <a:srgbClr val="5E4F85"/>
                       </a:solidFill>
                       <a:prstDash val="solid"/>
                       <a:round/>
@@ -5536,7 +5598,7 @@
                     </a:lnT>
                     <a:lnB w="6350" cap="flat" cmpd="sng" algn="ctr">
                       <a:solidFill>
-                        <a:srgbClr val="2E2A3A"/>
+                        <a:srgbClr val="5E4F85"/>
                       </a:solidFill>
                       <a:prstDash val="solid"/>
                       <a:round/>
@@ -5544,7 +5606,7 @@
                       <a:tailEnd type="none" w="med" len="med"/>
                     </a:lnB>
                     <a:solidFill>
-                      <a:srgbClr val="17141F"/>
+                      <a:srgbClr val="000000"/>
                     </a:solidFill>
                   </a:tcPr>
                 </a:tc>
@@ -5570,9 +5632,14 @@
             </a:avLst>
           </a:prstGeom>
           <a:solidFill>
-            <a:srgbClr val="102A20"/>
-          </a:solidFill>
-          <a:ln/>
+            <a:srgbClr val="06180F"/>
+          </a:solidFill>
+          <a:ln w="12700">
+            <a:solidFill>
+              <a:srgbClr val="3FCF8E"/>
+            </a:solidFill>
+            <a:prstDash val="solid"/>
+          </a:ln>
         </p:spPr>
       </p:sp>
       <p:sp>
@@ -5602,7 +5669,7 @@
             <a:r>
               <a:rPr lang="en-US" sz="950" b="1" spc="150" kern="0" dirty="0">
                 <a:solidFill>
-                  <a:srgbClr val="5FD6A0"/>
+                  <a:srgbClr val="3FCF8E"/>
                 </a:solidFill>
                 <a:latin typeface="Courier New" pitchFamily="34" charset="0"/>
                 <a:ea typeface="Courier New" pitchFamily="34" charset="-122"/>
@@ -5686,7 +5753,7 @@
             <a:lvl1pPr>
               <a:defRPr sz="850">
                 <a:solidFill>
-                  <a:srgbClr val="8A82A0"/>
+                  <a:srgbClr val="9A94AA"/>
                 </a:solidFill>
                 <a:latin typeface="Courier New"/>
                 <a:ea typeface="Courier New"/>
@@ -5756,7 +5823,7 @@
             <a:r>
               <a:rPr lang="en-US" sz="2600" b="1" dirty="0">
                 <a:solidFill>
-                  <a:srgbClr val="C9A6FF"/>
+                  <a:srgbClr val="A98BFF"/>
                 </a:solidFill>
                 <a:latin typeface="Courier New" pitchFamily="34" charset="0"/>
                 <a:ea typeface="Courier New" pitchFamily="34" charset="-122"/>
@@ -5824,9 +5891,14 @@
             </a:avLst>
           </a:prstGeom>
           <a:solidFill>
-            <a:srgbClr val="C9A6FF"/>
-          </a:solidFill>
-          <a:ln/>
+            <a:srgbClr val="1A0B3D"/>
+          </a:solidFill>
+          <a:ln w="12700">
+            <a:solidFill>
+              <a:srgbClr val="5A05F4"/>
+            </a:solidFill>
+            <a:prstDash val="solid"/>
+          </a:ln>
         </p:spPr>
       </p:sp>
       <p:sp>
@@ -5856,7 +5928,7 @@
             <a:r>
               <a:rPr lang="en-US" sz="900" b="1" spc="100" kern="0" dirty="0">
                 <a:solidFill>
-                  <a:srgbClr val="1C1140"/>
+                  <a:srgbClr val="A98BFF"/>
                 </a:solidFill>
                 <a:latin typeface="Courier New" pitchFamily="34" charset="0"/>
                 <a:ea typeface="Courier New" pitchFamily="34" charset="-122"/>
@@ -5907,11 +5979,11 @@
             <a:avLst/>
           </a:prstGeom>
           <a:solidFill>
-            <a:srgbClr val="102A20"/>
+            <a:srgbClr val="06180F"/>
           </a:solidFill>
           <a:ln w="19050">
             <a:solidFill>
-              <a:srgbClr val="5FD6A0"/>
+              <a:srgbClr val="3FCF8E"/>
             </a:solidFill>
             <a:prstDash val="solid"/>
           </a:ln>
@@ -5944,7 +6016,7 @@
             <a:r>
               <a:rPr lang="en-US" sz="1050" b="1" dirty="0">
                 <a:solidFill>
-                  <a:srgbClr val="5FD6A0"/>
+                  <a:srgbClr val="3FCF8E"/>
                 </a:solidFill>
                 <a:latin typeface="Courier New" pitchFamily="34" charset="0"/>
                 <a:ea typeface="Courier New" pitchFamily="34" charset="-122"/>
@@ -5983,7 +6055,7 @@
             <a:r>
               <a:rPr lang="en-US" sz="1050" dirty="0">
                 <a:solidFill>
-                  <a:srgbClr val="AFA9BE"/>
+                  <a:srgbClr val="C9C4D6"/>
                 </a:solidFill>
                 <a:latin typeface="Montserrat" pitchFamily="34" charset="0"/>
                 <a:ea typeface="Montserrat" pitchFamily="34" charset="-122"/>
@@ -6012,7 +6084,7 @@
           <a:noFill/>
           <a:ln w="15875">
             <a:solidFill>
-              <a:srgbClr val="C9A6FF"/>
+              <a:srgbClr val="A98BFF"/>
             </a:solidFill>
             <a:prstDash val="solid"/>
           </a:ln>
@@ -6033,7 +6105,7 @@
             <a:avLst/>
           </a:prstGeom>
           <a:solidFill>
-            <a:srgbClr val="C9A6FF"/>
+            <a:srgbClr val="A98BFF"/>
           </a:solidFill>
           <a:ln/>
         </p:spPr>
@@ -6065,7 +6137,7 @@
             <a:r>
               <a:rPr lang="en-US" sz="950" dirty="0">
                 <a:solidFill>
-                  <a:srgbClr val="C9A6FF"/>
+                  <a:srgbClr val="A98BFF"/>
                 </a:solidFill>
                 <a:latin typeface="Courier New" pitchFamily="34" charset="0"/>
                 <a:ea typeface="Courier New" pitchFamily="34" charset="-122"/>
@@ -6092,11 +6164,11 @@
             <a:avLst/>
           </a:prstGeom>
           <a:solidFill>
-            <a:srgbClr val="2A2010"/>
+            <a:srgbClr val="0B1A38"/>
           </a:solidFill>
           <a:ln w="19050">
             <a:solidFill>
-              <a:srgbClr val="E8A857"/>
+              <a:srgbClr val="6BA0F8"/>
             </a:solidFill>
             <a:prstDash val="solid"/>
           </a:ln>
@@ -6129,7 +6201,7 @@
             <a:r>
               <a:rPr lang="en-US" sz="1050" b="1" dirty="0">
                 <a:solidFill>
-                  <a:srgbClr val="E8A857"/>
+                  <a:srgbClr val="6BA0F8"/>
                 </a:solidFill>
                 <a:latin typeface="Courier New" pitchFamily="34" charset="0"/>
                 <a:ea typeface="Courier New" pitchFamily="34" charset="-122"/>
@@ -6168,7 +6240,7 @@
             <a:r>
               <a:rPr lang="en-US" sz="1050" dirty="0">
                 <a:solidFill>
-                  <a:srgbClr val="AFA9BE"/>
+                  <a:srgbClr val="C9C4D6"/>
                 </a:solidFill>
                 <a:latin typeface="Montserrat" pitchFamily="34" charset="0"/>
                 <a:ea typeface="Montserrat" pitchFamily="34" charset="-122"/>
@@ -6197,9 +6269,14 @@
             </a:avLst>
           </a:prstGeom>
           <a:solidFill>
-            <a:srgbClr val="1C1140"/>
-          </a:solidFill>
-          <a:ln/>
+            <a:srgbClr val="1A0B3D"/>
+          </a:solidFill>
+          <a:ln w="12700">
+            <a:solidFill>
+              <a:srgbClr val="5A05F4"/>
+            </a:solidFill>
+            <a:prstDash val="solid"/>
+          </a:ln>
         </p:spPr>
       </p:sp>
       <p:sp>
@@ -6229,7 +6306,7 @@
             <a:r>
               <a:rPr lang="en-US" sz="1450" b="1" dirty="0">
                 <a:solidFill>
-                  <a:srgbClr val="C9A6FF"/>
+                  <a:srgbClr val="A98BFF"/>
                 </a:solidFill>
                 <a:latin typeface="Montserrat" pitchFamily="34" charset="0"/>
                 <a:ea typeface="Montserrat" pitchFamily="34" charset="-122"/>
@@ -6271,7 +6348,7 @@
             <a:r>
               <a:rPr lang="en-US" sz="1200" dirty="0">
                 <a:solidFill>
-                  <a:srgbClr val="FFFFFF"/>
+                  <a:srgbClr val="C9C4D6"/>
                 </a:solidFill>
                 <a:latin typeface="Montserrat" pitchFamily="34" charset="0"/>
                 <a:ea typeface="Montserrat" pitchFamily="34" charset="-122"/>
@@ -6300,9 +6377,14 @@
             </a:avLst>
           </a:prstGeom>
           <a:solidFill>
-            <a:srgbClr val="2E1418"/>
-          </a:solidFill>
-          <a:ln/>
+            <a:srgbClr val="1A0808"/>
+          </a:solidFill>
+          <a:ln w="12700">
+            <a:solidFill>
+              <a:srgbClr val="FF6B6B"/>
+            </a:solidFill>
+            <a:prstDash val="solid"/>
+          </a:ln>
         </p:spPr>
       </p:sp>
       <p:sp>
@@ -6332,7 +6414,7 @@
             <a:r>
               <a:rPr lang="en-US" sz="950" b="1" spc="150" kern="0" dirty="0">
                 <a:solidFill>
-                  <a:srgbClr val="FF7B7B"/>
+                  <a:srgbClr val="FF6B6B"/>
                 </a:solidFill>
                 <a:latin typeface="Courier New" pitchFamily="34" charset="0"/>
                 <a:ea typeface="Courier New" pitchFamily="34" charset="-122"/>
@@ -6403,11 +6485,11 @@
             </a:avLst>
           </a:prstGeom>
           <a:solidFill>
-            <a:srgbClr val="17141F"/>
+            <a:srgbClr val="000000"/>
           </a:solidFill>
           <a:ln w="12700">
             <a:solidFill>
-              <a:srgbClr val="2E2A3A"/>
+              <a:srgbClr val="5E4F85"/>
             </a:solidFill>
             <a:prstDash val="solid"/>
           </a:ln>
@@ -6485,7 +6567,7 @@
             <a:lvl1pPr>
               <a:defRPr sz="850">
                 <a:solidFill>
-                  <a:srgbClr val="8A82A0"/>
+                  <a:srgbClr val="9A94AA"/>
                 </a:solidFill>
                 <a:latin typeface="Courier New"/>
                 <a:ea typeface="Courier New"/>
@@ -6555,7 +6637,7 @@
             <a:r>
               <a:rPr lang="en-US" sz="2600" b="1" dirty="0">
                 <a:solidFill>
-                  <a:srgbClr val="C9A6FF"/>
+                  <a:srgbClr val="A98BFF"/>
                 </a:solidFill>
                 <a:latin typeface="Courier New" pitchFamily="34" charset="0"/>
                 <a:ea typeface="Courier New" pitchFamily="34" charset="-122"/>
@@ -6623,9 +6705,14 @@
             </a:avLst>
           </a:prstGeom>
           <a:solidFill>
-            <a:srgbClr val="C9A6FF"/>
-          </a:solidFill>
-          <a:ln/>
+            <a:srgbClr val="1A0B3D"/>
+          </a:solidFill>
+          <a:ln w="12700">
+            <a:solidFill>
+              <a:srgbClr val="5A05F4"/>
+            </a:solidFill>
+            <a:prstDash val="solid"/>
+          </a:ln>
         </p:spPr>
       </p:sp>
       <p:sp>
@@ -6655,7 +6742,7 @@
             <a:r>
               <a:rPr lang="en-US" sz="900" b="1" spc="100" kern="0" dirty="0">
                 <a:solidFill>
-                  <a:srgbClr val="1C1140"/>
+                  <a:srgbClr val="A98BFF"/>
                 </a:solidFill>
                 <a:latin typeface="Courier New" pitchFamily="34" charset="0"/>
                 <a:ea typeface="Courier New" pitchFamily="34" charset="-122"/>
@@ -6708,9 +6795,14 @@
             </a:avLst>
           </a:prstGeom>
           <a:solidFill>
-            <a:srgbClr val="2A2010"/>
-          </a:solidFill>
-          <a:ln/>
+            <a:srgbClr val="0B1A38"/>
+          </a:solidFill>
+          <a:ln w="12700">
+            <a:solidFill>
+              <a:srgbClr val="6BA0F8"/>
+            </a:solidFill>
+            <a:prstDash val="solid"/>
+          </a:ln>
         </p:spPr>
       </p:sp>
       <p:sp>
@@ -6728,7 +6820,7 @@
             <a:avLst/>
           </a:prstGeom>
           <a:solidFill>
-            <a:srgbClr val="E8A857"/>
+            <a:srgbClr val="5A05F4"/>
           </a:solidFill>
           <a:ln/>
         </p:spPr>
@@ -6760,7 +6852,7 @@
             <a:r>
               <a:rPr lang="en-US" sz="1200" b="1" dirty="0">
                 <a:solidFill>
-                  <a:srgbClr val="2A2010"/>
+                  <a:srgbClr val="FFFFFF"/>
                 </a:solidFill>
                 <a:latin typeface="Courier New" pitchFamily="34" charset="0"/>
                 <a:ea typeface="Courier New" pitchFamily="34" charset="-122"/>
@@ -6799,7 +6891,7 @@
             <a:r>
               <a:rPr lang="en-US" sz="1450" b="1" dirty="0">
                 <a:solidFill>
-                  <a:srgbClr val="E8A857"/>
+                  <a:srgbClr val="6BA0F8"/>
                 </a:solidFill>
                 <a:latin typeface="Montserrat" pitchFamily="34" charset="0"/>
                 <a:ea typeface="Montserrat" pitchFamily="34" charset="-122"/>
@@ -6841,7 +6933,7 @@
             <a:r>
               <a:rPr lang="en-US" sz="1200" dirty="0">
                 <a:solidFill>
-                  <a:srgbClr val="FFFFFF"/>
+                  <a:srgbClr val="C9C4D6"/>
                 </a:solidFill>
                 <a:latin typeface="Montserrat" pitchFamily="34" charset="0"/>
                 <a:ea typeface="Montserrat" pitchFamily="34" charset="-122"/>
@@ -6870,9 +6962,14 @@
             </a:avLst>
           </a:prstGeom>
           <a:solidFill>
-            <a:srgbClr val="2A2010"/>
-          </a:solidFill>
-          <a:ln/>
+            <a:srgbClr val="0B1A38"/>
+          </a:solidFill>
+          <a:ln w="12700">
+            <a:solidFill>
+              <a:srgbClr val="6BA0F8"/>
+            </a:solidFill>
+            <a:prstDash val="solid"/>
+          </a:ln>
         </p:spPr>
       </p:sp>
       <p:sp>
@@ -6890,7 +6987,7 @@
             <a:avLst/>
           </a:prstGeom>
           <a:solidFill>
-            <a:srgbClr val="E8A857"/>
+            <a:srgbClr val="5A05F4"/>
           </a:solidFill>
           <a:ln/>
         </p:spPr>
@@ -6922,7 +7019,7 @@
             <a:r>
               <a:rPr lang="en-US" sz="1200" b="1" dirty="0">
                 <a:solidFill>
-                  <a:srgbClr val="2A2010"/>
+                  <a:srgbClr val="FFFFFF"/>
                 </a:solidFill>
                 <a:latin typeface="Courier New" pitchFamily="34" charset="0"/>
                 <a:ea typeface="Courier New" pitchFamily="34" charset="-122"/>
@@ -6961,7 +7058,7 @@
             <a:r>
               <a:rPr lang="en-US" sz="1450" b="1" dirty="0">
                 <a:solidFill>
-                  <a:srgbClr val="E8A857"/>
+                  <a:srgbClr val="6BA0F8"/>
                 </a:solidFill>
                 <a:latin typeface="Montserrat" pitchFamily="34" charset="0"/>
                 <a:ea typeface="Montserrat" pitchFamily="34" charset="-122"/>
@@ -7003,7 +7100,7 @@
             <a:r>
               <a:rPr lang="en-US" sz="1200" dirty="0">
                 <a:solidFill>
-                  <a:srgbClr val="FFFFFF"/>
+                  <a:srgbClr val="C9C4D6"/>
                 </a:solidFill>
                 <a:latin typeface="Montserrat" pitchFamily="34" charset="0"/>
                 <a:ea typeface="Montserrat" pitchFamily="34" charset="-122"/>
@@ -7032,9 +7129,14 @@
             </a:avLst>
           </a:prstGeom>
           <a:solidFill>
-            <a:srgbClr val="2A2010"/>
-          </a:solidFill>
-          <a:ln/>
+            <a:srgbClr val="0B1A38"/>
+          </a:solidFill>
+          <a:ln w="12700">
+            <a:solidFill>
+              <a:srgbClr val="6BA0F8"/>
+            </a:solidFill>
+            <a:prstDash val="solid"/>
+          </a:ln>
         </p:spPr>
       </p:sp>
       <p:sp>
@@ -7052,7 +7154,7 @@
             <a:avLst/>
           </a:prstGeom>
           <a:solidFill>
-            <a:srgbClr val="E8A857"/>
+            <a:srgbClr val="5A05F4"/>
           </a:solidFill>
           <a:ln/>
         </p:spPr>
@@ -7084,7 +7186,7 @@
             <a:r>
               <a:rPr lang="en-US" sz="1200" b="1" dirty="0">
                 <a:solidFill>
-                  <a:srgbClr val="2A2010"/>
+                  <a:srgbClr val="FFFFFF"/>
                 </a:solidFill>
                 <a:latin typeface="Courier New" pitchFamily="34" charset="0"/>
                 <a:ea typeface="Courier New" pitchFamily="34" charset="-122"/>
@@ -7123,7 +7225,7 @@
             <a:r>
               <a:rPr lang="en-US" sz="1450" b="1" dirty="0">
                 <a:solidFill>
-                  <a:srgbClr val="E8A857"/>
+                  <a:srgbClr val="6BA0F8"/>
                 </a:solidFill>
                 <a:latin typeface="Montserrat" pitchFamily="34" charset="0"/>
                 <a:ea typeface="Montserrat" pitchFamily="34" charset="-122"/>
@@ -7165,7 +7267,7 @@
             <a:r>
               <a:rPr lang="en-US" sz="1200" dirty="0">
                 <a:solidFill>
-                  <a:srgbClr val="FFFFFF"/>
+                  <a:srgbClr val="C9C4D6"/>
                 </a:solidFill>
                 <a:latin typeface="Montserrat" pitchFamily="34" charset="0"/>
                 <a:ea typeface="Montserrat" pitchFamily="34" charset="-122"/>
@@ -7192,7 +7294,7 @@
             <a:avLst/>
           </a:prstGeom>
           <a:solidFill>
-            <a:srgbClr val="E8A857"/>
+            <a:srgbClr val="6BA0F8"/>
           </a:solidFill>
           <a:ln/>
         </p:spPr>
@@ -7212,7 +7314,7 @@
             <a:avLst/>
           </a:prstGeom>
           <a:solidFill>
-            <a:srgbClr val="E8A857"/>
+            <a:srgbClr val="6BA0F8"/>
           </a:solidFill>
           <a:ln/>
         </p:spPr>
@@ -7232,7 +7334,7 @@
             <a:avLst/>
           </a:prstGeom>
           <a:solidFill>
-            <a:srgbClr val="E8A857"/>
+            <a:srgbClr val="6BA0F8"/>
           </a:solidFill>
           <a:ln/>
         </p:spPr>
@@ -7252,7 +7354,7 @@
             <a:avLst/>
           </a:prstGeom>
           <a:solidFill>
-            <a:srgbClr val="E8A857"/>
+            <a:srgbClr val="6BA0F8"/>
           </a:solidFill>
           <a:ln/>
         </p:spPr>
@@ -7272,7 +7374,7 @@
             <a:avLst/>
           </a:prstGeom>
           <a:solidFill>
-            <a:srgbClr val="E8A857"/>
+            <a:srgbClr val="6BA0F8"/>
           </a:solidFill>
           <a:ln/>
         </p:spPr>
@@ -7292,7 +7394,7 @@
             <a:avLst/>
           </a:prstGeom>
           <a:solidFill>
-            <a:srgbClr val="E8A857"/>
+            <a:srgbClr val="6BA0F8"/>
           </a:solidFill>
           <a:ln/>
         </p:spPr>
@@ -7312,7 +7414,7 @@
             <a:avLst/>
           </a:prstGeom>
           <a:solidFill>
-            <a:srgbClr val="E8A857"/>
+            <a:srgbClr val="6BA0F8"/>
           </a:solidFill>
           <a:ln/>
         </p:spPr>
@@ -7332,7 +7434,7 @@
             <a:avLst/>
           </a:prstGeom>
           <a:solidFill>
-            <a:srgbClr val="E8A857"/>
+            <a:srgbClr val="6BA0F8"/>
           </a:solidFill>
           <a:ln/>
         </p:spPr>
@@ -7354,7 +7456,7 @@
           <a:noFill/>
           <a:ln w="12700">
             <a:solidFill>
-              <a:srgbClr val="2E2A3A"/>
+              <a:srgbClr val="5E4F85"/>
             </a:solidFill>
             <a:prstDash val="solid"/>
           </a:ln>
@@ -7375,7 +7477,7 @@
             <a:avLst/>
           </a:prstGeom>
           <a:solidFill>
-            <a:srgbClr val="E8A857"/>
+            <a:srgbClr val="6BA0F8"/>
           </a:solidFill>
           <a:ln/>
         </p:spPr>
@@ -7395,7 +7497,7 @@
             <a:avLst/>
           </a:prstGeom>
           <a:solidFill>
-            <a:srgbClr val="E8A857"/>
+            <a:srgbClr val="6BA0F8"/>
           </a:solidFill>
           <a:ln/>
         </p:spPr>
@@ -7415,7 +7517,7 @@
             <a:avLst/>
           </a:prstGeom>
           <a:solidFill>
-            <a:srgbClr val="E8A857"/>
+            <a:srgbClr val="6BA0F8"/>
           </a:solidFill>
           <a:ln/>
         </p:spPr>
@@ -7435,7 +7537,7 @@
             <a:avLst/>
           </a:prstGeom>
           <a:solidFill>
-            <a:srgbClr val="E8A857"/>
+            <a:srgbClr val="6BA0F8"/>
           </a:solidFill>
           <a:ln/>
         </p:spPr>
@@ -7455,7 +7557,7 @@
             <a:avLst/>
           </a:prstGeom>
           <a:solidFill>
-            <a:srgbClr val="E8A857"/>
+            <a:srgbClr val="6BA0F8"/>
           </a:solidFill>
           <a:ln/>
         </p:spPr>
@@ -7475,7 +7577,7 @@
             <a:avLst/>
           </a:prstGeom>
           <a:solidFill>
-            <a:srgbClr val="E8A857"/>
+            <a:srgbClr val="6BA0F8"/>
           </a:solidFill>
           <a:ln/>
         </p:spPr>
@@ -7495,7 +7597,7 @@
             <a:avLst/>
           </a:prstGeom>
           <a:solidFill>
-            <a:srgbClr val="E8A857"/>
+            <a:srgbClr val="6BA0F8"/>
           </a:solidFill>
           <a:ln/>
         </p:spPr>
@@ -7515,7 +7617,7 @@
             <a:avLst/>
           </a:prstGeom>
           <a:solidFill>
-            <a:srgbClr val="E8A857"/>
+            <a:srgbClr val="6BA0F8"/>
           </a:solidFill>
           <a:ln/>
         </p:spPr>
@@ -7537,7 +7639,7 @@
           <a:noFill/>
           <a:ln w="12700">
             <a:solidFill>
-              <a:srgbClr val="2E2A3A"/>
+              <a:srgbClr val="5E4F85"/>
             </a:solidFill>
             <a:prstDash val="solid"/>
           </a:ln>
@@ -7558,7 +7660,7 @@
             <a:avLst/>
           </a:prstGeom>
           <a:solidFill>
-            <a:srgbClr val="E8A857"/>
+            <a:srgbClr val="6BA0F8"/>
           </a:solidFill>
           <a:ln/>
         </p:spPr>
@@ -7578,7 +7680,7 @@
             <a:avLst/>
           </a:prstGeom>
           <a:solidFill>
-            <a:srgbClr val="E8A857"/>
+            <a:srgbClr val="6BA0F8"/>
           </a:solidFill>
           <a:ln/>
         </p:spPr>
@@ -7598,7 +7700,7 @@
             <a:avLst/>
           </a:prstGeom>
           <a:solidFill>
-            <a:srgbClr val="E8A857"/>
+            <a:srgbClr val="6BA0F8"/>
           </a:solidFill>
           <a:ln/>
         </p:spPr>
@@ -7618,7 +7720,7 @@
             <a:avLst/>
           </a:prstGeom>
           <a:solidFill>
-            <a:srgbClr val="E8A857"/>
+            <a:srgbClr val="6BA0F8"/>
           </a:solidFill>
           <a:ln/>
         </p:spPr>
@@ -7638,7 +7740,7 @@
             <a:avLst/>
           </a:prstGeom>
           <a:solidFill>
-            <a:srgbClr val="E8A857"/>
+            <a:srgbClr val="6BA0F8"/>
           </a:solidFill>
           <a:ln/>
         </p:spPr>
@@ -7658,7 +7760,7 @@
             <a:avLst/>
           </a:prstGeom>
           <a:solidFill>
-            <a:srgbClr val="E8A857"/>
+            <a:srgbClr val="6BA0F8"/>
           </a:solidFill>
           <a:ln/>
         </p:spPr>
@@ -7678,7 +7780,7 @@
             <a:avLst/>
           </a:prstGeom>
           <a:solidFill>
-            <a:srgbClr val="E8A857"/>
+            <a:srgbClr val="6BA0F8"/>
           </a:solidFill>
           <a:ln/>
         </p:spPr>
@@ -7698,7 +7800,7 @@
             <a:avLst/>
           </a:prstGeom>
           <a:solidFill>
-            <a:srgbClr val="E8A857"/>
+            <a:srgbClr val="6BA0F8"/>
           </a:solidFill>
           <a:ln/>
         </p:spPr>
@@ -7720,7 +7822,7 @@
           <a:noFill/>
           <a:ln w="12700">
             <a:solidFill>
-              <a:srgbClr val="2E2A3A"/>
+              <a:srgbClr val="5E4F85"/>
             </a:solidFill>
             <a:prstDash val="solid"/>
           </a:ln>
@@ -7753,7 +7855,7 @@
             <a:r>
               <a:rPr lang="en-US" sz="850" spc="100" kern="0" dirty="0">
                 <a:solidFill>
-                  <a:srgbClr val="8A82A0"/>
+                  <a:srgbClr val="9A94AA"/>
                 </a:solidFill>
                 <a:latin typeface="Courier New" pitchFamily="34" charset="0"/>
                 <a:ea typeface="Courier New" pitchFamily="34" charset="-122"/>
@@ -7885,11 +7987,11 @@
             </a:avLst>
           </a:prstGeom>
           <a:solidFill>
-            <a:srgbClr val="17141F"/>
+            <a:srgbClr val="000000"/>
           </a:solidFill>
           <a:ln w="12700">
             <a:solidFill>
-              <a:srgbClr val="2E2A3A"/>
+              <a:srgbClr val="5E4F85"/>
             </a:solidFill>
             <a:prstDash val="solid"/>
           </a:ln>
@@ -7967,7 +8069,7 @@
             <a:lvl1pPr>
               <a:defRPr sz="850">
                 <a:solidFill>
-                  <a:srgbClr val="8A82A0"/>
+                  <a:srgbClr val="9A94AA"/>
                 </a:solidFill>
                 <a:latin typeface="Courier New"/>
                 <a:ea typeface="Courier New"/>
@@ -8037,7 +8139,7 @@
             <a:r>
               <a:rPr lang="en-US" sz="2600" b="1" dirty="0">
                 <a:solidFill>
-                  <a:srgbClr val="C9A6FF"/>
+                  <a:srgbClr val="A98BFF"/>
                 </a:solidFill>
                 <a:latin typeface="Courier New" pitchFamily="34" charset="0"/>
                 <a:ea typeface="Courier New" pitchFamily="34" charset="-122"/>
@@ -8105,9 +8207,14 @@
             </a:avLst>
           </a:prstGeom>
           <a:solidFill>
-            <a:srgbClr val="C9A6FF"/>
-          </a:solidFill>
-          <a:ln/>
+            <a:srgbClr val="1A0B3D"/>
+          </a:solidFill>
+          <a:ln w="12700">
+            <a:solidFill>
+              <a:srgbClr val="5A05F4"/>
+            </a:solidFill>
+            <a:prstDash val="solid"/>
+          </a:ln>
         </p:spPr>
       </p:sp>
       <p:sp>
@@ -8137,7 +8244,7 @@
             <a:r>
               <a:rPr lang="en-US" sz="900" b="1" spc="100" kern="0" dirty="0">
                 <a:solidFill>
-                  <a:srgbClr val="1C1140"/>
+                  <a:srgbClr val="A98BFF"/>
                 </a:solidFill>
                 <a:latin typeface="Courier New" pitchFamily="34" charset="0"/>
                 <a:ea typeface="Courier New" pitchFamily="34" charset="-122"/>
@@ -8190,11 +8297,11 @@
             </a:avLst>
           </a:prstGeom>
           <a:solidFill>
-            <a:srgbClr val="17141F"/>
+            <a:srgbClr val="000000"/>
           </a:solidFill>
           <a:ln w="12700">
             <a:solidFill>
-              <a:srgbClr val="2E2A3A"/>
+              <a:srgbClr val="5E4F85"/>
             </a:solidFill>
             <a:prstDash val="solid"/>
           </a:ln>
@@ -8266,7 +8373,7 @@
             <a:r>
               <a:rPr lang="en-US" sz="1150" dirty="0">
                 <a:solidFill>
-                  <a:srgbClr val="AFA9BE"/>
+                  <a:srgbClr val="C9C4D6"/>
                 </a:solidFill>
                 <a:latin typeface="Montserrat" pitchFamily="34" charset="0"/>
                 <a:ea typeface="Montserrat" pitchFamily="34" charset="-122"/>
@@ -8295,9 +8402,14 @@
             </a:avLst>
           </a:prstGeom>
           <a:solidFill>
-            <a:srgbClr val="1C1140"/>
-          </a:solidFill>
-          <a:ln/>
+            <a:srgbClr val="1A0B3D"/>
+          </a:solidFill>
+          <a:ln w="12700">
+            <a:solidFill>
+              <a:srgbClr val="5A05F4"/>
+            </a:solidFill>
+            <a:prstDash val="solid"/>
+          </a:ln>
         </p:spPr>
       </p:sp>
       <p:sp>
@@ -8327,7 +8439,7 @@
             <a:r>
               <a:rPr lang="en-US" sz="1350" b="1" dirty="0">
                 <a:solidFill>
-                  <a:srgbClr val="C9A6FF"/>
+                  <a:srgbClr val="A98BFF"/>
                 </a:solidFill>
                 <a:latin typeface="Montserrat" pitchFamily="34" charset="0"/>
                 <a:ea typeface="Montserrat" pitchFamily="34" charset="-122"/>
@@ -8366,7 +8478,7 @@
             <a:r>
               <a:rPr lang="en-US" sz="1150" dirty="0">
                 <a:solidFill>
-                  <a:srgbClr val="FFFFFF"/>
+                  <a:srgbClr val="C9C4D6"/>
                 </a:solidFill>
                 <a:latin typeface="Montserrat" pitchFamily="34" charset="0"/>
                 <a:ea typeface="Montserrat" pitchFamily="34" charset="-122"/>
@@ -8395,9 +8507,14 @@
             </a:avLst>
           </a:prstGeom>
           <a:solidFill>
-            <a:srgbClr val="102A20"/>
-          </a:solidFill>
-          <a:ln/>
+            <a:srgbClr val="06180F"/>
+          </a:solidFill>
+          <a:ln w="12700">
+            <a:solidFill>
+              <a:srgbClr val="3FCF8E"/>
+            </a:solidFill>
+            <a:prstDash val="solid"/>
+          </a:ln>
         </p:spPr>
       </p:sp>
       <p:sp>
@@ -8427,7 +8544,7 @@
             <a:r>
               <a:rPr lang="en-US" sz="1350" b="1" dirty="0">
                 <a:solidFill>
-                  <a:srgbClr val="5FD6A0"/>
+                  <a:srgbClr val="3FCF8E"/>
                 </a:solidFill>
                 <a:latin typeface="Montserrat" pitchFamily="34" charset="0"/>
                 <a:ea typeface="Montserrat" pitchFamily="34" charset="-122"/>
@@ -8466,7 +8583,7 @@
             <a:r>
               <a:rPr lang="en-US" sz="1150" dirty="0">
                 <a:solidFill>
-                  <a:srgbClr val="FFFFFF"/>
+                  <a:srgbClr val="C9C4D6"/>
                 </a:solidFill>
                 <a:latin typeface="Montserrat" pitchFamily="34" charset="0"/>
                 <a:ea typeface="Montserrat" pitchFamily="34" charset="-122"/>
@@ -8493,7 +8610,7 @@
             <a:avLst/>
           </a:prstGeom>
           <a:solidFill>
-            <a:srgbClr val="102A20"/>
+            <a:srgbClr val="06180F"/>
           </a:solidFill>
           <a:ln/>
         </p:spPr>
@@ -8513,7 +8630,7 @@
             <a:avLst/>
           </a:prstGeom>
           <a:solidFill>
-            <a:srgbClr val="102A20"/>
+            <a:srgbClr val="06180F"/>
           </a:solidFill>
           <a:ln/>
         </p:spPr>
@@ -8533,7 +8650,7 @@
             <a:avLst/>
           </a:prstGeom>
           <a:solidFill>
-            <a:srgbClr val="102A20"/>
+            <a:srgbClr val="06180F"/>
           </a:solidFill>
           <a:ln/>
         </p:spPr>
@@ -8553,7 +8670,7 @@
             <a:avLst/>
           </a:prstGeom>
           <a:solidFill>
-            <a:srgbClr val="102A20"/>
+            <a:srgbClr val="06180F"/>
           </a:solidFill>
           <a:ln/>
         </p:spPr>
@@ -8573,7 +8690,7 @@
             <a:avLst/>
           </a:prstGeom>
           <a:solidFill>
-            <a:srgbClr val="102A20"/>
+            <a:srgbClr val="06180F"/>
           </a:solidFill>
           <a:ln/>
         </p:spPr>
@@ -8593,7 +8710,7 @@
             <a:avLst/>
           </a:prstGeom>
           <a:solidFill>
-            <a:srgbClr val="102A20"/>
+            <a:srgbClr val="06180F"/>
           </a:solidFill>
           <a:ln/>
         </p:spPr>
@@ -8613,7 +8730,7 @@
             <a:avLst/>
           </a:prstGeom>
           <a:solidFill>
-            <a:srgbClr val="102A20"/>
+            <a:srgbClr val="06180F"/>
           </a:solidFill>
           <a:ln/>
         </p:spPr>
@@ -8633,7 +8750,7 @@
             <a:avLst/>
           </a:prstGeom>
           <a:solidFill>
-            <a:srgbClr val="102A20"/>
+            <a:srgbClr val="06180F"/>
           </a:solidFill>
           <a:ln/>
         </p:spPr>
@@ -8653,7 +8770,7 @@
             <a:avLst/>
           </a:prstGeom>
           <a:solidFill>
-            <a:srgbClr val="102A20"/>
+            <a:srgbClr val="06180F"/>
           </a:solidFill>
           <a:ln/>
         </p:spPr>
@@ -8673,7 +8790,7 @@
             <a:avLst/>
           </a:prstGeom>
           <a:solidFill>
-            <a:srgbClr val="102A20"/>
+            <a:srgbClr val="06180F"/>
           </a:solidFill>
           <a:ln/>
         </p:spPr>
@@ -8693,7 +8810,7 @@
             <a:avLst/>
           </a:prstGeom>
           <a:solidFill>
-            <a:srgbClr val="102A20"/>
+            <a:srgbClr val="06180F"/>
           </a:solidFill>
           <a:ln/>
         </p:spPr>
@@ -8713,7 +8830,7 @@
             <a:avLst/>
           </a:prstGeom>
           <a:solidFill>
-            <a:srgbClr val="102A20"/>
+            <a:srgbClr val="06180F"/>
           </a:solidFill>
           <a:ln/>
         </p:spPr>
@@ -8733,7 +8850,7 @@
             <a:avLst/>
           </a:prstGeom>
           <a:solidFill>
-            <a:srgbClr val="102A20"/>
+            <a:srgbClr val="06180F"/>
           </a:solidFill>
           <a:ln/>
         </p:spPr>
@@ -8753,7 +8870,7 @@
             <a:avLst/>
           </a:prstGeom>
           <a:solidFill>
-            <a:srgbClr val="102A20"/>
+            <a:srgbClr val="06180F"/>
           </a:solidFill>
           <a:ln/>
         </p:spPr>
@@ -8773,7 +8890,7 @@
             <a:avLst/>
           </a:prstGeom>
           <a:solidFill>
-            <a:srgbClr val="102A20"/>
+            <a:srgbClr val="06180F"/>
           </a:solidFill>
           <a:ln/>
         </p:spPr>
@@ -8793,7 +8910,7 @@
             <a:avLst/>
           </a:prstGeom>
           <a:solidFill>
-            <a:srgbClr val="102A20"/>
+            <a:srgbClr val="06180F"/>
           </a:solidFill>
           <a:ln/>
         </p:spPr>
@@ -8813,7 +8930,7 @@
             <a:avLst/>
           </a:prstGeom>
           <a:solidFill>
-            <a:srgbClr val="102A20"/>
+            <a:srgbClr val="06180F"/>
           </a:solidFill>
           <a:ln/>
         </p:spPr>
@@ -8833,7 +8950,7 @@
             <a:avLst/>
           </a:prstGeom>
           <a:solidFill>
-            <a:srgbClr val="102A20"/>
+            <a:srgbClr val="06180F"/>
           </a:solidFill>
           <a:ln/>
         </p:spPr>
@@ -8853,7 +8970,7 @@
             <a:avLst/>
           </a:prstGeom>
           <a:solidFill>
-            <a:srgbClr val="102A20"/>
+            <a:srgbClr val="06180F"/>
           </a:solidFill>
           <a:ln/>
         </p:spPr>
@@ -8873,7 +8990,7 @@
             <a:avLst/>
           </a:prstGeom>
           <a:solidFill>
-            <a:srgbClr val="102A20"/>
+            <a:srgbClr val="06180F"/>
           </a:solidFill>
           <a:ln/>
         </p:spPr>
@@ -8893,7 +9010,7 @@
             <a:avLst/>
           </a:prstGeom>
           <a:solidFill>
-            <a:srgbClr val="102A20"/>
+            <a:srgbClr val="06180F"/>
           </a:solidFill>
           <a:ln/>
         </p:spPr>
@@ -8913,7 +9030,7 @@
             <a:avLst/>
           </a:prstGeom>
           <a:solidFill>
-            <a:srgbClr val="102A20"/>
+            <a:srgbClr val="06180F"/>
           </a:solidFill>
           <a:ln/>
         </p:spPr>
@@ -8933,7 +9050,7 @@
             <a:avLst/>
           </a:prstGeom>
           <a:solidFill>
-            <a:srgbClr val="102A20"/>
+            <a:srgbClr val="06180F"/>
           </a:solidFill>
           <a:ln/>
         </p:spPr>
@@ -8953,7 +9070,7 @@
             <a:avLst/>
           </a:prstGeom>
           <a:solidFill>
-            <a:srgbClr val="102A20"/>
+            <a:srgbClr val="06180F"/>
           </a:solidFill>
           <a:ln/>
         </p:spPr>
@@ -8973,7 +9090,7 @@
             <a:avLst/>
           </a:prstGeom>
           <a:solidFill>
-            <a:srgbClr val="102A20"/>
+            <a:srgbClr val="06180F"/>
           </a:solidFill>
           <a:ln/>
         </p:spPr>
@@ -8993,7 +9110,7 @@
             <a:avLst/>
           </a:prstGeom>
           <a:solidFill>
-            <a:srgbClr val="102A20"/>
+            <a:srgbClr val="06180F"/>
           </a:solidFill>
           <a:ln/>
         </p:spPr>
@@ -9013,7 +9130,7 @@
             <a:avLst/>
           </a:prstGeom>
           <a:solidFill>
-            <a:srgbClr val="102A20"/>
+            <a:srgbClr val="06180F"/>
           </a:solidFill>
           <a:ln/>
         </p:spPr>
@@ -9033,7 +9150,7 @@
             <a:avLst/>
           </a:prstGeom>
           <a:solidFill>
-            <a:srgbClr val="102A20"/>
+            <a:srgbClr val="06180F"/>
           </a:solidFill>
           <a:ln/>
         </p:spPr>
@@ -9053,7 +9170,7 @@
             <a:avLst/>
           </a:prstGeom>
           <a:solidFill>
-            <a:srgbClr val="102A20"/>
+            <a:srgbClr val="06180F"/>
           </a:solidFill>
           <a:ln/>
         </p:spPr>
@@ -9073,7 +9190,7 @@
             <a:avLst/>
           </a:prstGeom>
           <a:solidFill>
-            <a:srgbClr val="102A20"/>
+            <a:srgbClr val="06180F"/>
           </a:solidFill>
           <a:ln/>
         </p:spPr>
@@ -9093,7 +9210,7 @@
             <a:avLst/>
           </a:prstGeom>
           <a:solidFill>
-            <a:srgbClr val="102A20"/>
+            <a:srgbClr val="06180F"/>
           </a:solidFill>
           <a:ln/>
         </p:spPr>
@@ -9113,7 +9230,7 @@
             <a:avLst/>
           </a:prstGeom>
           <a:solidFill>
-            <a:srgbClr val="102A20"/>
+            <a:srgbClr val="06180F"/>
           </a:solidFill>
           <a:ln/>
         </p:spPr>
@@ -9133,7 +9250,7 @@
             <a:avLst/>
           </a:prstGeom>
           <a:solidFill>
-            <a:srgbClr val="102A20"/>
+            <a:srgbClr val="06180F"/>
           </a:solidFill>
           <a:ln/>
         </p:spPr>
@@ -9153,7 +9270,7 @@
             <a:avLst/>
           </a:prstGeom>
           <a:solidFill>
-            <a:srgbClr val="102A20"/>
+            <a:srgbClr val="06180F"/>
           </a:solidFill>
           <a:ln/>
         </p:spPr>
@@ -9173,7 +9290,7 @@
             <a:avLst/>
           </a:prstGeom>
           <a:solidFill>
-            <a:srgbClr val="102A20"/>
+            <a:srgbClr val="06180F"/>
           </a:solidFill>
           <a:ln/>
         </p:spPr>
@@ -9193,7 +9310,7 @@
             <a:avLst/>
           </a:prstGeom>
           <a:solidFill>
-            <a:srgbClr val="102A20"/>
+            <a:srgbClr val="06180F"/>
           </a:solidFill>
           <a:ln/>
         </p:spPr>
@@ -9213,7 +9330,7 @@
             <a:avLst/>
           </a:prstGeom>
           <a:solidFill>
-            <a:srgbClr val="102A20"/>
+            <a:srgbClr val="06180F"/>
           </a:solidFill>
           <a:ln/>
         </p:spPr>
@@ -9233,7 +9350,7 @@
             <a:avLst/>
           </a:prstGeom>
           <a:solidFill>
-            <a:srgbClr val="102A20"/>
+            <a:srgbClr val="06180F"/>
           </a:solidFill>
           <a:ln/>
         </p:spPr>
@@ -9253,7 +9370,7 @@
             <a:avLst/>
           </a:prstGeom>
           <a:solidFill>
-            <a:srgbClr val="102A20"/>
+            <a:srgbClr val="06180F"/>
           </a:solidFill>
           <a:ln/>
         </p:spPr>
@@ -9273,7 +9390,7 @@
             <a:avLst/>
           </a:prstGeom>
           <a:solidFill>
-            <a:srgbClr val="102A20"/>
+            <a:srgbClr val="06180F"/>
           </a:solidFill>
           <a:ln/>
         </p:spPr>
@@ -9293,7 +9410,7 @@
             <a:avLst/>
           </a:prstGeom>
           <a:solidFill>
-            <a:srgbClr val="102A20"/>
+            <a:srgbClr val="06180F"/>
           </a:solidFill>
           <a:ln/>
         </p:spPr>
@@ -9313,7 +9430,7 @@
             <a:avLst/>
           </a:prstGeom>
           <a:solidFill>
-            <a:srgbClr val="102A20"/>
+            <a:srgbClr val="06180F"/>
           </a:solidFill>
           <a:ln/>
         </p:spPr>
@@ -9333,7 +9450,7 @@
             <a:avLst/>
           </a:prstGeom>
           <a:solidFill>
-            <a:srgbClr val="102A20"/>
+            <a:srgbClr val="06180F"/>
           </a:solidFill>
           <a:ln/>
         </p:spPr>
@@ -9353,7 +9470,7 @@
             <a:avLst/>
           </a:prstGeom>
           <a:solidFill>
-            <a:srgbClr val="102A20"/>
+            <a:srgbClr val="06180F"/>
           </a:solidFill>
           <a:ln/>
         </p:spPr>
@@ -9373,7 +9490,7 @@
             <a:avLst/>
           </a:prstGeom>
           <a:solidFill>
-            <a:srgbClr val="102A20"/>
+            <a:srgbClr val="06180F"/>
           </a:solidFill>
           <a:ln/>
         </p:spPr>
@@ -9393,7 +9510,7 @@
             <a:avLst/>
           </a:prstGeom>
           <a:solidFill>
-            <a:srgbClr val="102A20"/>
+            <a:srgbClr val="06180F"/>
           </a:solidFill>
           <a:ln/>
         </p:spPr>
@@ -9413,7 +9530,7 @@
             <a:avLst/>
           </a:prstGeom>
           <a:solidFill>
-            <a:srgbClr val="102A20"/>
+            <a:srgbClr val="06180F"/>
           </a:solidFill>
           <a:ln/>
         </p:spPr>
@@ -9433,7 +9550,7 @@
             <a:avLst/>
           </a:prstGeom>
           <a:solidFill>
-            <a:srgbClr val="102A20"/>
+            <a:srgbClr val="06180F"/>
           </a:solidFill>
           <a:ln/>
         </p:spPr>
@@ -9453,7 +9570,7 @@
             <a:avLst/>
           </a:prstGeom>
           <a:solidFill>
-            <a:srgbClr val="102A20"/>
+            <a:srgbClr val="06180F"/>
           </a:solidFill>
           <a:ln/>
         </p:spPr>
@@ -9473,7 +9590,7 @@
             <a:avLst/>
           </a:prstGeom>
           <a:solidFill>
-            <a:srgbClr val="102A20"/>
+            <a:srgbClr val="06180F"/>
           </a:solidFill>
           <a:ln/>
         </p:spPr>
@@ -9493,7 +9610,7 @@
             <a:avLst/>
           </a:prstGeom>
           <a:solidFill>
-            <a:srgbClr val="102A20"/>
+            <a:srgbClr val="06180F"/>
           </a:solidFill>
           <a:ln/>
         </p:spPr>
@@ -9513,7 +9630,7 @@
             <a:avLst/>
           </a:prstGeom>
           <a:solidFill>
-            <a:srgbClr val="102A20"/>
+            <a:srgbClr val="06180F"/>
           </a:solidFill>
           <a:ln/>
         </p:spPr>
@@ -9533,7 +9650,7 @@
             <a:avLst/>
           </a:prstGeom>
           <a:solidFill>
-            <a:srgbClr val="102A20"/>
+            <a:srgbClr val="06180F"/>
           </a:solidFill>
           <a:ln/>
         </p:spPr>
@@ -9553,7 +9670,7 @@
             <a:avLst/>
           </a:prstGeom>
           <a:solidFill>
-            <a:srgbClr val="102A20"/>
+            <a:srgbClr val="06180F"/>
           </a:solidFill>
           <a:ln/>
         </p:spPr>
@@ -9573,7 +9690,7 @@
             <a:avLst/>
           </a:prstGeom>
           <a:solidFill>
-            <a:srgbClr val="102A20"/>
+            <a:srgbClr val="06180F"/>
           </a:solidFill>
           <a:ln/>
         </p:spPr>
@@ -9593,7 +9710,7 @@
             <a:avLst/>
           </a:prstGeom>
           <a:solidFill>
-            <a:srgbClr val="102A20"/>
+            <a:srgbClr val="06180F"/>
           </a:solidFill>
           <a:ln/>
         </p:spPr>
@@ -9613,7 +9730,7 @@
             <a:avLst/>
           </a:prstGeom>
           <a:solidFill>
-            <a:srgbClr val="102A20"/>
+            <a:srgbClr val="06180F"/>
           </a:solidFill>
           <a:ln/>
         </p:spPr>
@@ -9633,7 +9750,7 @@
             <a:avLst/>
           </a:prstGeom>
           <a:solidFill>
-            <a:srgbClr val="102A20"/>
+            <a:srgbClr val="06180F"/>
           </a:solidFill>
           <a:ln/>
         </p:spPr>
@@ -9653,7 +9770,7 @@
             <a:avLst/>
           </a:prstGeom>
           <a:solidFill>
-            <a:srgbClr val="102A20"/>
+            <a:srgbClr val="06180F"/>
           </a:solidFill>
           <a:ln/>
         </p:spPr>
@@ -9673,7 +9790,7 @@
             <a:avLst/>
           </a:prstGeom>
           <a:solidFill>
-            <a:srgbClr val="102A20"/>
+            <a:srgbClr val="06180F"/>
           </a:solidFill>
           <a:ln/>
         </p:spPr>
@@ -9693,7 +9810,7 @@
             <a:avLst/>
           </a:prstGeom>
           <a:solidFill>
-            <a:srgbClr val="102A20"/>
+            <a:srgbClr val="06180F"/>
           </a:solidFill>
           <a:ln/>
         </p:spPr>
@@ -9713,7 +9830,7 @@
             <a:avLst/>
           </a:prstGeom>
           <a:solidFill>
-            <a:srgbClr val="102A20"/>
+            <a:srgbClr val="06180F"/>
           </a:solidFill>
           <a:ln/>
         </p:spPr>
@@ -9733,7 +9850,7 @@
             <a:avLst/>
           </a:prstGeom>
           <a:solidFill>
-            <a:srgbClr val="102A20"/>
+            <a:srgbClr val="06180F"/>
           </a:solidFill>
           <a:ln/>
         </p:spPr>
@@ -9753,7 +9870,7 @@
             <a:avLst/>
           </a:prstGeom>
           <a:solidFill>
-            <a:srgbClr val="102A20"/>
+            <a:srgbClr val="06180F"/>
           </a:solidFill>
           <a:ln/>
         </p:spPr>
@@ -9773,7 +9890,7 @@
             <a:avLst/>
           </a:prstGeom>
           <a:solidFill>
-            <a:srgbClr val="102A20"/>
+            <a:srgbClr val="06180F"/>
           </a:solidFill>
           <a:ln/>
         </p:spPr>
@@ -9793,7 +9910,7 @@
             <a:avLst/>
           </a:prstGeom>
           <a:solidFill>
-            <a:srgbClr val="102A20"/>
+            <a:srgbClr val="06180F"/>
           </a:solidFill>
           <a:ln/>
         </p:spPr>
@@ -9813,7 +9930,7 @@
             <a:avLst/>
           </a:prstGeom>
           <a:solidFill>
-            <a:srgbClr val="102A20"/>
+            <a:srgbClr val="06180F"/>
           </a:solidFill>
           <a:ln/>
         </p:spPr>
@@ -9833,7 +9950,7 @@
             <a:avLst/>
           </a:prstGeom>
           <a:solidFill>
-            <a:srgbClr val="102A20"/>
+            <a:srgbClr val="06180F"/>
           </a:solidFill>
           <a:ln/>
         </p:spPr>
@@ -9853,7 +9970,7 @@
             <a:avLst/>
           </a:prstGeom>
           <a:solidFill>
-            <a:srgbClr val="102A20"/>
+            <a:srgbClr val="06180F"/>
           </a:solidFill>
           <a:ln/>
         </p:spPr>
@@ -9873,7 +9990,7 @@
             <a:avLst/>
           </a:prstGeom>
           <a:solidFill>
-            <a:srgbClr val="102A20"/>
+            <a:srgbClr val="06180F"/>
           </a:solidFill>
           <a:ln/>
         </p:spPr>
@@ -9893,7 +10010,7 @@
             <a:avLst/>
           </a:prstGeom>
           <a:solidFill>
-            <a:srgbClr val="102A20"/>
+            <a:srgbClr val="06180F"/>
           </a:solidFill>
           <a:ln/>
         </p:spPr>
@@ -9913,7 +10030,7 @@
             <a:avLst/>
           </a:prstGeom>
           <a:solidFill>
-            <a:srgbClr val="102A20"/>
+            <a:srgbClr val="06180F"/>
           </a:solidFill>
           <a:ln/>
         </p:spPr>
@@ -9933,7 +10050,7 @@
             <a:avLst/>
           </a:prstGeom>
           <a:solidFill>
-            <a:srgbClr val="102A20"/>
+            <a:srgbClr val="06180F"/>
           </a:solidFill>
           <a:ln/>
         </p:spPr>
@@ -9953,7 +10070,7 @@
             <a:avLst/>
           </a:prstGeom>
           <a:solidFill>
-            <a:srgbClr val="102A20"/>
+            <a:srgbClr val="06180F"/>
           </a:solidFill>
           <a:ln/>
         </p:spPr>
@@ -9973,7 +10090,7 @@
             <a:avLst/>
           </a:prstGeom>
           <a:solidFill>
-            <a:srgbClr val="102A20"/>
+            <a:srgbClr val="06180F"/>
           </a:solidFill>
           <a:ln/>
         </p:spPr>
@@ -9993,7 +10110,7 @@
             <a:avLst/>
           </a:prstGeom>
           <a:solidFill>
-            <a:srgbClr val="102A20"/>
+            <a:srgbClr val="06180F"/>
           </a:solidFill>
           <a:ln/>
         </p:spPr>
@@ -10013,7 +10130,7 @@
             <a:avLst/>
           </a:prstGeom>
           <a:solidFill>
-            <a:srgbClr val="102A20"/>
+            <a:srgbClr val="06180F"/>
           </a:solidFill>
           <a:ln/>
         </p:spPr>
@@ -10033,7 +10150,7 @@
             <a:avLst/>
           </a:prstGeom>
           <a:solidFill>
-            <a:srgbClr val="102A20"/>
+            <a:srgbClr val="06180F"/>
           </a:solidFill>
           <a:ln/>
         </p:spPr>
@@ -10053,7 +10170,7 @@
             <a:avLst/>
           </a:prstGeom>
           <a:solidFill>
-            <a:srgbClr val="102A20"/>
+            <a:srgbClr val="06180F"/>
           </a:solidFill>
           <a:ln/>
         </p:spPr>
@@ -10073,7 +10190,7 @@
             <a:avLst/>
           </a:prstGeom>
           <a:solidFill>
-            <a:srgbClr val="102A20"/>
+            <a:srgbClr val="06180F"/>
           </a:solidFill>
           <a:ln/>
         </p:spPr>
@@ -10093,7 +10210,7 @@
             <a:avLst/>
           </a:prstGeom>
           <a:solidFill>
-            <a:srgbClr val="102A20"/>
+            <a:srgbClr val="06180F"/>
           </a:solidFill>
           <a:ln/>
         </p:spPr>
@@ -10113,7 +10230,7 @@
             <a:avLst/>
           </a:prstGeom>
           <a:solidFill>
-            <a:srgbClr val="102A20"/>
+            <a:srgbClr val="06180F"/>
           </a:solidFill>
           <a:ln/>
         </p:spPr>
@@ -10133,7 +10250,7 @@
             <a:avLst/>
           </a:prstGeom>
           <a:solidFill>
-            <a:srgbClr val="102A20"/>
+            <a:srgbClr val="06180F"/>
           </a:solidFill>
           <a:ln/>
         </p:spPr>
@@ -10153,7 +10270,7 @@
             <a:avLst/>
           </a:prstGeom>
           <a:solidFill>
-            <a:srgbClr val="102A20"/>
+            <a:srgbClr val="06180F"/>
           </a:solidFill>
           <a:ln/>
         </p:spPr>
@@ -10173,7 +10290,7 @@
             <a:avLst/>
           </a:prstGeom>
           <a:solidFill>
-            <a:srgbClr val="102A20"/>
+            <a:srgbClr val="06180F"/>
           </a:solidFill>
           <a:ln/>
         </p:spPr>
@@ -10193,7 +10310,7 @@
             <a:avLst/>
           </a:prstGeom>
           <a:solidFill>
-            <a:srgbClr val="102A20"/>
+            <a:srgbClr val="06180F"/>
           </a:solidFill>
           <a:ln/>
         </p:spPr>
@@ -10213,7 +10330,7 @@
             <a:avLst/>
           </a:prstGeom>
           <a:solidFill>
-            <a:srgbClr val="102A20"/>
+            <a:srgbClr val="06180F"/>
           </a:solidFill>
           <a:ln/>
         </p:spPr>
@@ -10233,7 +10350,7 @@
             <a:avLst/>
           </a:prstGeom>
           <a:solidFill>
-            <a:srgbClr val="102A20"/>
+            <a:srgbClr val="06180F"/>
           </a:solidFill>
           <a:ln/>
         </p:spPr>
@@ -10253,7 +10370,7 @@
             <a:avLst/>
           </a:prstGeom>
           <a:solidFill>
-            <a:srgbClr val="102A20"/>
+            <a:srgbClr val="06180F"/>
           </a:solidFill>
           <a:ln/>
         </p:spPr>
@@ -10273,7 +10390,7 @@
             <a:avLst/>
           </a:prstGeom>
           <a:solidFill>
-            <a:srgbClr val="102A20"/>
+            <a:srgbClr val="06180F"/>
           </a:solidFill>
           <a:ln/>
         </p:spPr>
@@ -10293,7 +10410,7 @@
             <a:avLst/>
           </a:prstGeom>
           <a:solidFill>
-            <a:srgbClr val="102A20"/>
+            <a:srgbClr val="06180F"/>
           </a:solidFill>
           <a:ln/>
         </p:spPr>
@@ -10313,7 +10430,7 @@
             <a:avLst/>
           </a:prstGeom>
           <a:solidFill>
-            <a:srgbClr val="102A20"/>
+            <a:srgbClr val="06180F"/>
           </a:solidFill>
           <a:ln/>
         </p:spPr>
@@ -10333,7 +10450,7 @@
             <a:avLst/>
           </a:prstGeom>
           <a:solidFill>
-            <a:srgbClr val="102A20"/>
+            <a:srgbClr val="06180F"/>
           </a:solidFill>
           <a:ln/>
         </p:spPr>
@@ -10353,7 +10470,7 @@
             <a:avLst/>
           </a:prstGeom>
           <a:solidFill>
-            <a:srgbClr val="102A20"/>
+            <a:srgbClr val="06180F"/>
           </a:solidFill>
           <a:ln/>
         </p:spPr>
@@ -10373,7 +10490,7 @@
             <a:avLst/>
           </a:prstGeom>
           <a:solidFill>
-            <a:srgbClr val="102A20"/>
+            <a:srgbClr val="06180F"/>
           </a:solidFill>
           <a:ln/>
         </p:spPr>
@@ -10393,7 +10510,7 @@
             <a:avLst/>
           </a:prstGeom>
           <a:solidFill>
-            <a:srgbClr val="102A20"/>
+            <a:srgbClr val="06180F"/>
           </a:solidFill>
           <a:ln/>
         </p:spPr>
@@ -10413,7 +10530,7 @@
             <a:avLst/>
           </a:prstGeom>
           <a:solidFill>
-            <a:srgbClr val="102A20"/>
+            <a:srgbClr val="06180F"/>
           </a:solidFill>
           <a:ln/>
         </p:spPr>
@@ -10433,7 +10550,7 @@
             <a:avLst/>
           </a:prstGeom>
           <a:solidFill>
-            <a:srgbClr val="102A20"/>
+            <a:srgbClr val="06180F"/>
           </a:solidFill>
           <a:ln/>
         </p:spPr>
@@ -10453,7 +10570,7 @@
             <a:avLst/>
           </a:prstGeom>
           <a:solidFill>
-            <a:srgbClr val="102A20"/>
+            <a:srgbClr val="06180F"/>
           </a:solidFill>
           <a:ln/>
         </p:spPr>
@@ -10473,7 +10590,7 @@
             <a:avLst/>
           </a:prstGeom>
           <a:solidFill>
-            <a:srgbClr val="FF7B7B"/>
+            <a:srgbClr val="FF6B6B"/>
           </a:solidFill>
           <a:ln/>
         </p:spPr>
@@ -10505,7 +10622,7 @@
             <a:r>
               <a:rPr lang="en-US" sz="1250" b="1" dirty="0">
                 <a:solidFill>
-                  <a:srgbClr val="5FD6A0"/>
+                  <a:srgbClr val="3FCF8E"/>
                 </a:solidFill>
                 <a:latin typeface="Montserrat" pitchFamily="34" charset="0"/>
                 <a:ea typeface="Montserrat" pitchFamily="34" charset="-122"/>
@@ -10519,7 +10636,7 @@
             <a:r>
               <a:rPr lang="en-US" sz="1250" dirty="0">
                 <a:solidFill>
-                  <a:srgbClr val="AFA9BE"/>
+                  <a:srgbClr val="C9C4D6"/>
                 </a:solidFill>
                 <a:latin typeface="Montserrat" pitchFamily="34" charset="0"/>
                 <a:ea typeface="Montserrat" pitchFamily="34" charset="-122"/>
@@ -10558,7 +10675,7 @@
             <a:r>
               <a:rPr lang="en-US" sz="1150" i="1" dirty="0">
                 <a:solidFill>
-                  <a:srgbClr val="8A82A0"/>
+                  <a:srgbClr val="9A94AA"/>
                 </a:solidFill>
                 <a:latin typeface="Montserrat" pitchFamily="34" charset="0"/>
                 <a:ea typeface="Montserrat" pitchFamily="34" charset="-122"/>
@@ -10587,9 +10704,14 @@
             </a:avLst>
           </a:prstGeom>
           <a:solidFill>
-            <a:srgbClr val="102A20"/>
-          </a:solidFill>
-          <a:ln/>
+            <a:srgbClr val="06180F"/>
+          </a:solidFill>
+          <a:ln w="12700">
+            <a:solidFill>
+              <a:srgbClr val="3FCF8E"/>
+            </a:solidFill>
+            <a:prstDash val="solid"/>
+          </a:ln>
         </p:spPr>
       </p:sp>
       <p:sp>
@@ -10619,7 +10741,7 @@
             <a:r>
               <a:rPr lang="en-US" sz="950" b="1" spc="150" kern="0" dirty="0">
                 <a:solidFill>
-                  <a:srgbClr val="5FD6A0"/>
+                  <a:srgbClr val="3FCF8E"/>
                 </a:solidFill>
                 <a:latin typeface="Courier New" pitchFamily="34" charset="0"/>
                 <a:ea typeface="Courier New" pitchFamily="34" charset="-122"/>
@@ -10690,9 +10812,14 @@
             </a:avLst>
           </a:prstGeom>
           <a:solidFill>
-            <a:srgbClr val="2A2010"/>
-          </a:solidFill>
-          <a:ln/>
+            <a:srgbClr val="0B1A38"/>
+          </a:solidFill>
+          <a:ln w="12700">
+            <a:solidFill>
+              <a:srgbClr val="6BA0F8"/>
+            </a:solidFill>
+            <a:prstDash val="solid"/>
+          </a:ln>
         </p:spPr>
       </p:sp>
       <p:sp>
@@ -10767,7 +10894,7 @@
             <a:lvl1pPr>
               <a:defRPr sz="850">
                 <a:solidFill>
-                  <a:srgbClr val="8A82A0"/>
+                  <a:srgbClr val="9A94AA"/>
                 </a:solidFill>
                 <a:latin typeface="Courier New"/>
                 <a:ea typeface="Courier New"/>
@@ -10837,7 +10964,7 @@
             <a:r>
               <a:rPr lang="en-US" sz="2600" b="1" dirty="0">
                 <a:solidFill>
-                  <a:srgbClr val="C9A6FF"/>
+                  <a:srgbClr val="A98BFF"/>
                 </a:solidFill>
                 <a:latin typeface="Courier New" pitchFamily="34" charset="0"/>
                 <a:ea typeface="Courier New" pitchFamily="34" charset="-122"/>
@@ -10905,9 +11032,14 @@
             </a:avLst>
           </a:prstGeom>
           <a:solidFill>
-            <a:srgbClr val="C9A6FF"/>
-          </a:solidFill>
-          <a:ln/>
+            <a:srgbClr val="1A0B3D"/>
+          </a:solidFill>
+          <a:ln w="12700">
+            <a:solidFill>
+              <a:srgbClr val="5A05F4"/>
+            </a:solidFill>
+            <a:prstDash val="solid"/>
+          </a:ln>
         </p:spPr>
       </p:sp>
       <p:sp>
@@ -10937,7 +11069,7 @@
             <a:r>
               <a:rPr lang="en-US" sz="900" b="1" spc="100" kern="0" dirty="0">
                 <a:solidFill>
-                  <a:srgbClr val="1C1140"/>
+                  <a:srgbClr val="A98BFF"/>
                 </a:solidFill>
                 <a:latin typeface="Courier New" pitchFamily="34" charset="0"/>
                 <a:ea typeface="Courier New" pitchFamily="34" charset="-122"/>
@@ -10990,9 +11122,14 @@
             </a:avLst>
           </a:prstGeom>
           <a:solidFill>
-            <a:srgbClr val="1C1140"/>
-          </a:solidFill>
-          <a:ln/>
+            <a:srgbClr val="1A0B3D"/>
+          </a:solidFill>
+          <a:ln w="12700">
+            <a:solidFill>
+              <a:srgbClr val="5A05F4"/>
+            </a:solidFill>
+            <a:prstDash val="solid"/>
+          </a:ln>
         </p:spPr>
       </p:sp>
       <p:sp>
@@ -11010,7 +11147,7 @@
             <a:avLst/>
           </a:prstGeom>
           <a:solidFill>
-            <a:srgbClr val="C9A6FF"/>
+            <a:srgbClr val="5A05F4"/>
           </a:solidFill>
           <a:ln/>
         </p:spPr>
@@ -11042,7 +11179,7 @@
             <a:r>
               <a:rPr lang="en-US" sz="1200" b="1" dirty="0">
                 <a:solidFill>
-                  <a:srgbClr val="1C1140"/>
+                  <a:srgbClr val="FFFFFF"/>
                 </a:solidFill>
                 <a:latin typeface="Courier New" pitchFamily="34" charset="0"/>
                 <a:ea typeface="Courier New" pitchFamily="34" charset="-122"/>
@@ -11081,7 +11218,7 @@
             <a:r>
               <a:rPr lang="en-US" sz="1450" b="1" dirty="0">
                 <a:solidFill>
-                  <a:srgbClr val="C9A6FF"/>
+                  <a:srgbClr val="A98BFF"/>
                 </a:solidFill>
                 <a:latin typeface="Montserrat" pitchFamily="34" charset="0"/>
                 <a:ea typeface="Montserrat" pitchFamily="34" charset="-122"/>
@@ -11123,7 +11260,7 @@
             <a:r>
               <a:rPr lang="en-US" sz="1200" dirty="0">
                 <a:solidFill>
-                  <a:srgbClr val="FFFFFF"/>
+                  <a:srgbClr val="C9C4D6"/>
                 </a:solidFill>
                 <a:latin typeface="Montserrat" pitchFamily="34" charset="0"/>
                 <a:ea typeface="Montserrat" pitchFamily="34" charset="-122"/>
@@ -11152,9 +11289,14 @@
             </a:avLst>
           </a:prstGeom>
           <a:solidFill>
-            <a:srgbClr val="1C1140"/>
-          </a:solidFill>
-          <a:ln/>
+            <a:srgbClr val="1A0B3D"/>
+          </a:solidFill>
+          <a:ln w="12700">
+            <a:solidFill>
+              <a:srgbClr val="5A05F4"/>
+            </a:solidFill>
+            <a:prstDash val="solid"/>
+          </a:ln>
         </p:spPr>
       </p:sp>
       <p:sp>
@@ -11172,7 +11314,7 @@
             <a:avLst/>
           </a:prstGeom>
           <a:solidFill>
-            <a:srgbClr val="C9A6FF"/>
+            <a:srgbClr val="5A05F4"/>
           </a:solidFill>
           <a:ln/>
         </p:spPr>
@@ -11204,7 +11346,7 @@
             <a:r>
               <a:rPr lang="en-US" sz="1200" b="1" dirty="0">
                 <a:solidFill>
-                  <a:srgbClr val="1C1140"/>
+                  <a:srgbClr val="FFFFFF"/>
                 </a:solidFill>
                 <a:latin typeface="Courier New" pitchFamily="34" charset="0"/>
                 <a:ea typeface="Courier New" pitchFamily="34" charset="-122"/>
@@ -11243,7 +11385,7 @@
             <a:r>
               <a:rPr lang="en-US" sz="1450" b="1" dirty="0">
                 <a:solidFill>
-                  <a:srgbClr val="C9A6FF"/>
+                  <a:srgbClr val="A98BFF"/>
                 </a:solidFill>
                 <a:latin typeface="Montserrat" pitchFamily="34" charset="0"/>
                 <a:ea typeface="Montserrat" pitchFamily="34" charset="-122"/>
@@ -11285,7 +11427,7 @@
             <a:r>
               <a:rPr lang="en-US" sz="1200" dirty="0">
                 <a:solidFill>
-                  <a:srgbClr val="FFFFFF"/>
+                  <a:srgbClr val="C9C4D6"/>
                 </a:solidFill>
                 <a:latin typeface="Montserrat" pitchFamily="34" charset="0"/>
                 <a:ea typeface="Montserrat" pitchFamily="34" charset="-122"/>
@@ -11314,9 +11456,14 @@
             </a:avLst>
           </a:prstGeom>
           <a:solidFill>
-            <a:srgbClr val="1C1140"/>
-          </a:solidFill>
-          <a:ln/>
+            <a:srgbClr val="1A0B3D"/>
+          </a:solidFill>
+          <a:ln w="12700">
+            <a:solidFill>
+              <a:srgbClr val="5A05F4"/>
+            </a:solidFill>
+            <a:prstDash val="solid"/>
+          </a:ln>
         </p:spPr>
       </p:sp>
       <p:sp>
@@ -11334,7 +11481,7 @@
             <a:avLst/>
           </a:prstGeom>
           <a:solidFill>
-            <a:srgbClr val="C9A6FF"/>
+            <a:srgbClr val="5A05F4"/>
           </a:solidFill>
           <a:ln/>
         </p:spPr>
@@ -11366,7 +11513,7 @@
             <a:r>
               <a:rPr lang="en-US" sz="1200" b="1" dirty="0">
                 <a:solidFill>
-                  <a:srgbClr val="1C1140"/>
+                  <a:srgbClr val="FFFFFF"/>
                 </a:solidFill>
                 <a:latin typeface="Courier New" pitchFamily="34" charset="0"/>
                 <a:ea typeface="Courier New" pitchFamily="34" charset="-122"/>
@@ -11405,7 +11552,7 @@
             <a:r>
               <a:rPr lang="en-US" sz="1450" b="1" dirty="0">
                 <a:solidFill>
-                  <a:srgbClr val="C9A6FF"/>
+                  <a:srgbClr val="A98BFF"/>
                 </a:solidFill>
                 <a:latin typeface="Montserrat" pitchFamily="34" charset="0"/>
                 <a:ea typeface="Montserrat" pitchFamily="34" charset="-122"/>
@@ -11447,7 +11594,7 @@
             <a:r>
               <a:rPr lang="en-US" sz="1200" dirty="0">
                 <a:solidFill>
-                  <a:srgbClr val="FFFFFF"/>
+                  <a:srgbClr val="C9C4D6"/>
                 </a:solidFill>
                 <a:latin typeface="Montserrat" pitchFamily="34" charset="0"/>
                 <a:ea typeface="Montserrat" pitchFamily="34" charset="-122"/>
@@ -11476,9 +11623,14 @@
             </a:avLst>
           </a:prstGeom>
           <a:solidFill>
-            <a:srgbClr val="2E1418"/>
-          </a:solidFill>
-          <a:ln/>
+            <a:srgbClr val="1A0808"/>
+          </a:solidFill>
+          <a:ln w="12700">
+            <a:solidFill>
+              <a:srgbClr val="FF6B6B"/>
+            </a:solidFill>
+            <a:prstDash val="solid"/>
+          </a:ln>
         </p:spPr>
       </p:sp>
       <p:sp>
@@ -11508,7 +11660,7 @@
             <a:r>
               <a:rPr lang="en-US" sz="950" b="1" spc="150" kern="0" dirty="0">
                 <a:solidFill>
-                  <a:srgbClr val="FF7B7B"/>
+                  <a:srgbClr val="FF6B6B"/>
                 </a:solidFill>
                 <a:latin typeface="Courier New" pitchFamily="34" charset="0"/>
                 <a:ea typeface="Courier New" pitchFamily="34" charset="-122"/>
@@ -11579,11 +11731,11 @@
             </a:avLst>
           </a:prstGeom>
           <a:solidFill>
-            <a:srgbClr val="17141F"/>
+            <a:srgbClr val="000000"/>
           </a:solidFill>
           <a:ln w="12700">
             <a:solidFill>
-              <a:srgbClr val="2E2A3A"/>
+              <a:srgbClr val="5E4F85"/>
             </a:solidFill>
             <a:prstDash val="solid"/>
           </a:ln>
@@ -11661,7 +11813,7 @@
             <a:lvl1pPr>
               <a:defRPr sz="850">
                 <a:solidFill>
-                  <a:srgbClr val="8A82A0"/>
+                  <a:srgbClr val="9A94AA"/>
                 </a:solidFill>
                 <a:latin typeface="Courier New"/>
                 <a:ea typeface="Courier New"/>
@@ -11731,7 +11883,7 @@
             <a:r>
               <a:rPr lang="en-US" sz="2600" b="1" dirty="0">
                 <a:solidFill>
-                  <a:srgbClr val="C9A6FF"/>
+                  <a:srgbClr val="A98BFF"/>
                 </a:solidFill>
                 <a:latin typeface="Courier New" pitchFamily="34" charset="0"/>
                 <a:ea typeface="Courier New" pitchFamily="34" charset="-122"/>
@@ -11799,9 +11951,14 @@
             </a:avLst>
           </a:prstGeom>
           <a:solidFill>
-            <a:srgbClr val="C9A6FF"/>
-          </a:solidFill>
-          <a:ln/>
+            <a:srgbClr val="1A0B3D"/>
+          </a:solidFill>
+          <a:ln w="12700">
+            <a:solidFill>
+              <a:srgbClr val="5A05F4"/>
+            </a:solidFill>
+            <a:prstDash val="solid"/>
+          </a:ln>
         </p:spPr>
       </p:sp>
       <p:sp>
@@ -11831,7 +11988,7 @@
             <a:r>
               <a:rPr lang="en-US" sz="900" b="1" spc="100" kern="0" dirty="0">
                 <a:solidFill>
-                  <a:srgbClr val="1C1140"/>
+                  <a:srgbClr val="A98BFF"/>
                 </a:solidFill>
                 <a:latin typeface="Courier New" pitchFamily="34" charset="0"/>
                 <a:ea typeface="Courier New" pitchFamily="34" charset="-122"/>
@@ -11860,9 +12017,14 @@
             </a:avLst>
           </a:prstGeom>
           <a:solidFill>
-            <a:srgbClr val="2A2010"/>
-          </a:solidFill>
-          <a:ln/>
+            <a:srgbClr val="000000"/>
+          </a:solidFill>
+          <a:ln w="12700">
+            <a:solidFill>
+              <a:srgbClr val="5E4F85"/>
+            </a:solidFill>
+            <a:prstDash val="solid"/>
+          </a:ln>
         </p:spPr>
       </p:sp>
       <p:sp>
@@ -11892,7 +12054,7 @@
             <a:r>
               <a:rPr lang="en-US" sz="900" b="1" spc="100" kern="0" dirty="0">
                 <a:solidFill>
-                  <a:srgbClr val="E8A857"/>
+                  <a:srgbClr val="C9C4D6"/>
                 </a:solidFill>
                 <a:latin typeface="Courier New" pitchFamily="34" charset="0"/>
                 <a:ea typeface="Courier New" pitchFamily="34" charset="-122"/>
@@ -11967,7 +12129,7 @@
                       <a:r>
                         <a:rPr lang="en-US" sz="900" b="1" spc="100" kern="0" dirty="0">
                           <a:solidFill>
-                            <a:srgbClr val="AFA9BE"/>
+                            <a:srgbClr val="C9C4D6"/>
                           </a:solidFill>
                           <a:latin typeface="Courier New" pitchFamily="34" charset="0"/>
                           <a:ea typeface="Courier New" pitchFamily="34" charset="-122"/>
@@ -11985,7 +12147,7 @@
                   <a:tcPr marL="73152" marR="73152" marT="73152" marB="73152" anchor="ctr">
                     <a:lnL w="6350" cap="flat" cmpd="sng" algn="ctr">
                       <a:solidFill>
-                        <a:srgbClr val="2E2A3A"/>
+                        <a:srgbClr val="5E4F85"/>
                       </a:solidFill>
                       <a:prstDash val="solid"/>
                       <a:round/>
@@ -11994,7 +12156,7 @@
                     </a:lnL>
                     <a:lnR w="6350" cap="flat" cmpd="sng" algn="ctr">
                       <a:solidFill>
-                        <a:srgbClr val="2E2A3A"/>
+                        <a:srgbClr val="5E4F85"/>
                       </a:solidFill>
                       <a:prstDash val="solid"/>
                       <a:round/>
@@ -12003,7 +12165,7 @@
                     </a:lnR>
                     <a:lnT w="6350" cap="flat" cmpd="sng" algn="ctr">
                       <a:solidFill>
-                        <a:srgbClr val="2E2A3A"/>
+                        <a:srgbClr val="5E4F85"/>
                       </a:solidFill>
                       <a:prstDash val="solid"/>
                       <a:round/>
@@ -12012,7 +12174,7 @@
                     </a:lnT>
                     <a:lnB w="6350" cap="flat" cmpd="sng" algn="ctr">
                       <a:solidFill>
-                        <a:srgbClr val="2E2A3A"/>
+                        <a:srgbClr val="5E4F85"/>
                       </a:solidFill>
                       <a:prstDash val="solid"/>
                       <a:round/>
@@ -12020,7 +12182,7 @@
                       <a:tailEnd type="none" w="med" len="med"/>
                     </a:lnB>
                     <a:solidFill>
-                      <a:srgbClr val="1F1B2A"/>
+                      <a:srgbClr val="1A0B3D"/>
                     </a:solidFill>
                   </a:tcPr>
                 </a:tc>
@@ -12035,7 +12197,7 @@
                       <a:r>
                         <a:rPr lang="en-US" sz="900" b="1" spc="100" kern="0" dirty="0">
                           <a:solidFill>
-                            <a:srgbClr val="AFA9BE"/>
+                            <a:srgbClr val="C9C4D6"/>
                           </a:solidFill>
                           <a:latin typeface="Courier New" pitchFamily="34" charset="0"/>
                           <a:ea typeface="Courier New" pitchFamily="34" charset="-122"/>
@@ -12053,7 +12215,7 @@
                   <a:tcPr marL="73152" marR="73152" marT="73152" marB="73152" anchor="ctr">
                     <a:lnL w="6350" cap="flat" cmpd="sng" algn="ctr">
                       <a:solidFill>
-                        <a:srgbClr val="2E2A3A"/>
+                        <a:srgbClr val="5E4F85"/>
                       </a:solidFill>
                       <a:prstDash val="solid"/>
                       <a:round/>
@@ -12062,7 +12224,7 @@
                     </a:lnL>
                     <a:lnR w="6350" cap="flat" cmpd="sng" algn="ctr">
                       <a:solidFill>
-                        <a:srgbClr val="2E2A3A"/>
+                        <a:srgbClr val="5E4F85"/>
                       </a:solidFill>
                       <a:prstDash val="solid"/>
                       <a:round/>
@@ -12071,7 +12233,7 @@
                     </a:lnR>
                     <a:lnT w="6350" cap="flat" cmpd="sng" algn="ctr">
                       <a:solidFill>
-                        <a:srgbClr val="2E2A3A"/>
+                        <a:srgbClr val="5E4F85"/>
                       </a:solidFill>
                       <a:prstDash val="solid"/>
                       <a:round/>
@@ -12080,7 +12242,7 @@
                     </a:lnT>
                     <a:lnB w="6350" cap="flat" cmpd="sng" algn="ctr">
                       <a:solidFill>
-                        <a:srgbClr val="2E2A3A"/>
+                        <a:srgbClr val="5E4F85"/>
                       </a:solidFill>
                       <a:prstDash val="solid"/>
                       <a:round/>
@@ -12088,7 +12250,7 @@
                       <a:tailEnd type="none" w="med" len="med"/>
                     </a:lnB>
                     <a:solidFill>
-                      <a:srgbClr val="1F1B2A"/>
+                      <a:srgbClr val="1A0B3D"/>
                     </a:solidFill>
                   </a:tcPr>
                 </a:tc>
@@ -12103,7 +12265,7 @@
                       <a:r>
                         <a:rPr lang="en-US" sz="900" b="1" spc="100" kern="0" dirty="0">
                           <a:solidFill>
-                            <a:srgbClr val="AFA9BE"/>
+                            <a:srgbClr val="C9C4D6"/>
                           </a:solidFill>
                           <a:latin typeface="Courier New" pitchFamily="34" charset="0"/>
                           <a:ea typeface="Courier New" pitchFamily="34" charset="-122"/>
@@ -12121,7 +12283,7 @@
                   <a:tcPr marL="73152" marR="73152" marT="73152" marB="73152" anchor="ctr">
                     <a:lnL w="6350" cap="flat" cmpd="sng" algn="ctr">
                       <a:solidFill>
-                        <a:srgbClr val="2E2A3A"/>
+                        <a:srgbClr val="5E4F85"/>
                       </a:solidFill>
                       <a:prstDash val="solid"/>
                       <a:round/>
@@ -12130,7 +12292,7 @@
                     </a:lnL>
                     <a:lnR w="6350" cap="flat" cmpd="sng" algn="ctr">
                       <a:solidFill>
-                        <a:srgbClr val="2E2A3A"/>
+                        <a:srgbClr val="5E4F85"/>
                       </a:solidFill>
                       <a:prstDash val="solid"/>
                       <a:round/>
@@ -12139,7 +12301,7 @@
                     </a:lnR>
                     <a:lnT w="6350" cap="flat" cmpd="sng" algn="ctr">
                       <a:solidFill>
-                        <a:srgbClr val="2E2A3A"/>
+                        <a:srgbClr val="5E4F85"/>
                       </a:solidFill>
                       <a:prstDash val="solid"/>
                       <a:round/>
@@ -12148,7 +12310,7 @@
                     </a:lnT>
                     <a:lnB w="6350" cap="flat" cmpd="sng" algn="ctr">
                       <a:solidFill>
-                        <a:srgbClr val="2E2A3A"/>
+                        <a:srgbClr val="5E4F85"/>
                       </a:solidFill>
                       <a:prstDash val="solid"/>
                       <a:round/>
@@ -12156,7 +12318,7 @@
                       <a:tailEnd type="none" w="med" len="med"/>
                     </a:lnB>
                     <a:solidFill>
-                      <a:srgbClr val="1F1B2A"/>
+                      <a:srgbClr val="1A0B3D"/>
                     </a:solidFill>
                   </a:tcPr>
                 </a:tc>
@@ -12173,7 +12335,7 @@
                       <a:r>
                         <a:rPr lang="en-US" sz="1150" b="1" dirty="0">
                           <a:solidFill>
-                            <a:srgbClr val="E8A857"/>
+                            <a:srgbClr val="6BA0F8"/>
                           </a:solidFill>
                           <a:latin typeface="Montserrat" pitchFamily="34" charset="0"/>
                           <a:ea typeface="Montserrat" pitchFamily="34" charset="-122"/>
@@ -12191,7 +12353,7 @@
                   <a:tcPr marL="73152" marR="73152" marT="73152" marB="73152" anchor="ctr">
                     <a:lnL w="6350" cap="flat" cmpd="sng" algn="ctr">
                       <a:solidFill>
-                        <a:srgbClr val="2E2A3A"/>
+                        <a:srgbClr val="5E4F85"/>
                       </a:solidFill>
                       <a:prstDash val="solid"/>
                       <a:round/>
@@ -12200,7 +12362,7 @@
                     </a:lnL>
                     <a:lnR w="6350" cap="flat" cmpd="sng" algn="ctr">
                       <a:solidFill>
-                        <a:srgbClr val="2E2A3A"/>
+                        <a:srgbClr val="5E4F85"/>
                       </a:solidFill>
                       <a:prstDash val="solid"/>
                       <a:round/>
@@ -12209,7 +12371,7 @@
                     </a:lnR>
                     <a:lnT w="6350" cap="flat" cmpd="sng" algn="ctr">
                       <a:solidFill>
-                        <a:srgbClr val="2E2A3A"/>
+                        <a:srgbClr val="5E4F85"/>
                       </a:solidFill>
                       <a:prstDash val="solid"/>
                       <a:round/>
@@ -12218,7 +12380,7 @@
                     </a:lnT>
                     <a:lnB w="6350" cap="flat" cmpd="sng" algn="ctr">
                       <a:solidFill>
-                        <a:srgbClr val="2E2A3A"/>
+                        <a:srgbClr val="5E4F85"/>
                       </a:solidFill>
                       <a:prstDash val="solid"/>
                       <a:round/>
@@ -12226,7 +12388,7 @@
                       <a:tailEnd type="none" w="med" len="med"/>
                     </a:lnB>
                     <a:solidFill>
-                      <a:srgbClr val="2A2010"/>
+                      <a:srgbClr val="0B1A38"/>
                     </a:solidFill>
                   </a:tcPr>
                 </a:tc>
@@ -12259,7 +12421,7 @@
                   <a:tcPr marL="73152" marR="73152" marT="73152" marB="73152" anchor="ctr">
                     <a:lnL w="6350" cap="flat" cmpd="sng" algn="ctr">
                       <a:solidFill>
-                        <a:srgbClr val="2E2A3A"/>
+                        <a:srgbClr val="5E4F85"/>
                       </a:solidFill>
                       <a:prstDash val="solid"/>
                       <a:round/>
@@ -12268,7 +12430,7 @@
                     </a:lnL>
                     <a:lnR w="6350" cap="flat" cmpd="sng" algn="ctr">
                       <a:solidFill>
-                        <a:srgbClr val="2E2A3A"/>
+                        <a:srgbClr val="5E4F85"/>
                       </a:solidFill>
                       <a:prstDash val="solid"/>
                       <a:round/>
@@ -12277,7 +12439,7 @@
                     </a:lnR>
                     <a:lnT w="6350" cap="flat" cmpd="sng" algn="ctr">
                       <a:solidFill>
-                        <a:srgbClr val="2E2A3A"/>
+                        <a:srgbClr val="5E4F85"/>
                       </a:solidFill>
                       <a:prstDash val="solid"/>
                       <a:round/>
@@ -12286,7 +12448,7 @@
                     </a:lnT>
                     <a:lnB w="6350" cap="flat" cmpd="sng" algn="ctr">
                       <a:solidFill>
-                        <a:srgbClr val="2E2A3A"/>
+                        <a:srgbClr val="5E4F85"/>
                       </a:solidFill>
                       <a:prstDash val="solid"/>
                       <a:round/>
@@ -12294,7 +12456,7 @@
                       <a:tailEnd type="none" w="med" len="med"/>
                     </a:lnB>
                     <a:solidFill>
-                      <a:srgbClr val="2A2010"/>
+                      <a:srgbClr val="0B1A38"/>
                     </a:solidFill>
                   </a:tcPr>
                 </a:tc>
@@ -12327,7 +12489,7 @@
                   <a:tcPr marL="73152" marR="73152" marT="73152" marB="73152" anchor="ctr">
                     <a:lnL w="6350" cap="flat" cmpd="sng" algn="ctr">
                       <a:solidFill>
-                        <a:srgbClr val="2E2A3A"/>
+                        <a:srgbClr val="5E4F85"/>
                       </a:solidFill>
                       <a:prstDash val="solid"/>
                       <a:round/>
@@ -12336,7 +12498,7 @@
                     </a:lnL>
                     <a:lnR w="6350" cap="flat" cmpd="sng" algn="ctr">
                       <a:solidFill>
-                        <a:srgbClr val="2E2A3A"/>
+                        <a:srgbClr val="5E4F85"/>
                       </a:solidFill>
                       <a:prstDash val="solid"/>
                       <a:round/>
@@ -12345,7 +12507,7 @@
                     </a:lnR>
                     <a:lnT w="6350" cap="flat" cmpd="sng" algn="ctr">
                       <a:solidFill>
-                        <a:srgbClr val="2E2A3A"/>
+                        <a:srgbClr val="5E4F85"/>
                       </a:solidFill>
                       <a:prstDash val="solid"/>
                       <a:round/>
@@ -12354,7 +12516,7 @@
                     </a:lnT>
                     <a:lnB w="6350" cap="flat" cmpd="sng" algn="ctr">
                       <a:solidFill>
-                        <a:srgbClr val="2E2A3A"/>
+                        <a:srgbClr val="5E4F85"/>
                       </a:solidFill>
                       <a:prstDash val="solid"/>
                       <a:round/>
@@ -12362,7 +12524,7 @@
                       <a:tailEnd type="none" w="med" len="med"/>
                     </a:lnB>
                     <a:solidFill>
-                      <a:srgbClr val="2A2010"/>
+                      <a:srgbClr val="0B1A38"/>
                     </a:solidFill>
                   </a:tcPr>
                 </a:tc>
@@ -12397,7 +12559,7 @@
                   <a:tcPr marL="73152" marR="73152" marT="73152" marB="73152" anchor="ctr">
                     <a:lnL w="6350" cap="flat" cmpd="sng" algn="ctr">
                       <a:solidFill>
-                        <a:srgbClr val="2E2A3A"/>
+                        <a:srgbClr val="5E4F85"/>
                       </a:solidFill>
                       <a:prstDash val="solid"/>
                       <a:round/>
@@ -12406,7 +12568,7 @@
                     </a:lnL>
                     <a:lnR w="6350" cap="flat" cmpd="sng" algn="ctr">
                       <a:solidFill>
-                        <a:srgbClr val="2E2A3A"/>
+                        <a:srgbClr val="5E4F85"/>
                       </a:solidFill>
                       <a:prstDash val="solid"/>
                       <a:round/>
@@ -12415,7 +12577,7 @@
                     </a:lnR>
                     <a:lnT w="6350" cap="flat" cmpd="sng" algn="ctr">
                       <a:solidFill>
-                        <a:srgbClr val="2E2A3A"/>
+                        <a:srgbClr val="5E4F85"/>
                       </a:solidFill>
                       <a:prstDash val="solid"/>
                       <a:round/>
@@ -12424,7 +12586,7 @@
                     </a:lnT>
                     <a:lnB w="6350" cap="flat" cmpd="sng" algn="ctr">
                       <a:solidFill>
-                        <a:srgbClr val="2E2A3A"/>
+                        <a:srgbClr val="5E4F85"/>
                       </a:solidFill>
                       <a:prstDash val="solid"/>
                       <a:round/>
@@ -12432,7 +12594,7 @@
                       <a:tailEnd type="none" w="med" len="med"/>
                     </a:lnB>
                     <a:solidFill>
-                      <a:srgbClr val="17141F"/>
+                      <a:srgbClr val="000000"/>
                     </a:solidFill>
                   </a:tcPr>
                 </a:tc>
@@ -12465,7 +12627,7 @@
                   <a:tcPr marL="73152" marR="73152" marT="73152" marB="73152" anchor="ctr">
                     <a:lnL w="6350" cap="flat" cmpd="sng" algn="ctr">
                       <a:solidFill>
-                        <a:srgbClr val="2E2A3A"/>
+                        <a:srgbClr val="5E4F85"/>
                       </a:solidFill>
                       <a:prstDash val="solid"/>
                       <a:round/>
@@ -12474,7 +12636,7 @@
                     </a:lnL>
                     <a:lnR w="6350" cap="flat" cmpd="sng" algn="ctr">
                       <a:solidFill>
-                        <a:srgbClr val="2E2A3A"/>
+                        <a:srgbClr val="5E4F85"/>
                       </a:solidFill>
                       <a:prstDash val="solid"/>
                       <a:round/>
@@ -12483,7 +12645,7 @@
                     </a:lnR>
                     <a:lnT w="6350" cap="flat" cmpd="sng" algn="ctr">
                       <a:solidFill>
-                        <a:srgbClr val="2E2A3A"/>
+                        <a:srgbClr val="5E4F85"/>
                       </a:solidFill>
                       <a:prstDash val="solid"/>
                       <a:round/>
@@ -12492,7 +12654,7 @@
                     </a:lnT>
                     <a:lnB w="6350" cap="flat" cmpd="sng" algn="ctr">
                       <a:solidFill>
-                        <a:srgbClr val="2E2A3A"/>
+                        <a:srgbClr val="5E4F85"/>
                       </a:solidFill>
                       <a:prstDash val="solid"/>
                       <a:round/>
@@ -12500,7 +12662,7 @@
                       <a:tailEnd type="none" w="med" len="med"/>
                     </a:lnB>
                     <a:solidFill>
-                      <a:srgbClr val="17141F"/>
+                      <a:srgbClr val="000000"/>
                     </a:solidFill>
                   </a:tcPr>
                 </a:tc>
@@ -12533,7 +12695,7 @@
                   <a:tcPr marL="73152" marR="73152" marT="73152" marB="73152" anchor="ctr">
                     <a:lnL w="6350" cap="flat" cmpd="sng" algn="ctr">
                       <a:solidFill>
-                        <a:srgbClr val="2E2A3A"/>
+                        <a:srgbClr val="5E4F85"/>
                       </a:solidFill>
                       <a:prstDash val="solid"/>
                       <a:round/>
@@ -12542,7 +12704,7 @@
                     </a:lnL>
                     <a:lnR w="6350" cap="flat" cmpd="sng" algn="ctr">
                       <a:solidFill>
-                        <a:srgbClr val="2E2A3A"/>
+                        <a:srgbClr val="5E4F85"/>
                       </a:solidFill>
                       <a:prstDash val="solid"/>
                       <a:round/>
@@ -12551,7 +12713,7 @@
                     </a:lnR>
                     <a:lnT w="6350" cap="flat" cmpd="sng" algn="ctr">
                       <a:solidFill>
-                        <a:srgbClr val="2E2A3A"/>
+                        <a:srgbClr val="5E4F85"/>
                       </a:solidFill>
                       <a:prstDash val="solid"/>
                       <a:round/>
@@ -12560,7 +12722,7 @@
                     </a:lnT>
                     <a:lnB w="6350" cap="flat" cmpd="sng" algn="ctr">
                       <a:solidFill>
-                        <a:srgbClr val="2E2A3A"/>
+                        <a:srgbClr val="5E4F85"/>
                       </a:solidFill>
                       <a:prstDash val="solid"/>
                       <a:round/>
@@ -12568,7 +12730,7 @@
                       <a:tailEnd type="none" w="med" len="med"/>
                     </a:lnB>
                     <a:solidFill>
-                      <a:srgbClr val="17141F"/>
+                      <a:srgbClr val="000000"/>
                     </a:solidFill>
                   </a:tcPr>
                 </a:tc>
@@ -12585,7 +12747,7 @@
                       <a:r>
                         <a:rPr lang="en-US" sz="1150" b="1" dirty="0">
                           <a:solidFill>
-                            <a:srgbClr val="5FD6A0"/>
+                            <a:srgbClr val="3FCF8E"/>
                           </a:solidFill>
                           <a:latin typeface="Montserrat" pitchFamily="34" charset="0"/>
                           <a:ea typeface="Montserrat" pitchFamily="34" charset="-122"/>
@@ -12603,7 +12765,7 @@
                   <a:tcPr marL="73152" marR="73152" marT="73152" marB="73152" anchor="ctr">
                     <a:lnL w="6350" cap="flat" cmpd="sng" algn="ctr">
                       <a:solidFill>
-                        <a:srgbClr val="2E2A3A"/>
+                        <a:srgbClr val="5E4F85"/>
                       </a:solidFill>
                       <a:prstDash val="solid"/>
                       <a:round/>
@@ -12612,7 +12774,7 @@
                     </a:lnL>
                     <a:lnR w="6350" cap="flat" cmpd="sng" algn="ctr">
                       <a:solidFill>
-                        <a:srgbClr val="2E2A3A"/>
+                        <a:srgbClr val="5E4F85"/>
                       </a:solidFill>
                       <a:prstDash val="solid"/>
                       <a:round/>
@@ -12621,7 +12783,7 @@
                     </a:lnR>
                     <a:lnT w="6350" cap="flat" cmpd="sng" algn="ctr">
                       <a:solidFill>
-                        <a:srgbClr val="2E2A3A"/>
+                        <a:srgbClr val="5E4F85"/>
                       </a:solidFill>
                       <a:prstDash val="solid"/>
                       <a:round/>
@@ -12630,7 +12792,7 @@
                     </a:lnT>
                     <a:lnB w="6350" cap="flat" cmpd="sng" algn="ctr">
                       <a:solidFill>
-                        <a:srgbClr val="2E2A3A"/>
+                        <a:srgbClr val="5E4F85"/>
                       </a:solidFill>
                       <a:prstDash val="solid"/>
                       <a:round/>
@@ -12638,7 +12800,7 @@
                       <a:tailEnd type="none" w="med" len="med"/>
                     </a:lnB>
                     <a:solidFill>
-                      <a:srgbClr val="102A20"/>
+                      <a:srgbClr val="06180F"/>
                     </a:solidFill>
                   </a:tcPr>
                 </a:tc>
@@ -12671,7 +12833,7 @@
                   <a:tcPr marL="73152" marR="73152" marT="73152" marB="73152" anchor="ctr">
                     <a:lnL w="6350" cap="flat" cmpd="sng" algn="ctr">
                       <a:solidFill>
-                        <a:srgbClr val="2E2A3A"/>
+                        <a:srgbClr val="5E4F85"/>
                       </a:solidFill>
                       <a:prstDash val="solid"/>
                       <a:round/>
@@ -12680,7 +12842,7 @@
                     </a:lnL>
                     <a:lnR w="6350" cap="flat" cmpd="sng" algn="ctr">
                       <a:solidFill>
-                        <a:srgbClr val="2E2A3A"/>
+                        <a:srgbClr val="5E4F85"/>
                       </a:solidFill>
                       <a:prstDash val="solid"/>
                       <a:round/>
@@ -12689,7 +12851,7 @@
                     </a:lnR>
                     <a:lnT w="6350" cap="flat" cmpd="sng" algn="ctr">
                       <a:solidFill>
-                        <a:srgbClr val="2E2A3A"/>
+                        <a:srgbClr val="5E4F85"/>
                       </a:solidFill>
                       <a:prstDash val="solid"/>
                       <a:round/>
@@ -12698,7 +12860,7 @@
                     </a:lnT>
                     <a:lnB w="6350" cap="flat" cmpd="sng" algn="ctr">
                       <a:solidFill>
-                        <a:srgbClr val="2E2A3A"/>
+                        <a:srgbClr val="5E4F85"/>
                       </a:solidFill>
                       <a:prstDash val="solid"/>
                       <a:round/>
@@ -12706,7 +12868,7 @@
                       <a:tailEnd type="none" w="med" len="med"/>
                     </a:lnB>
                     <a:solidFill>
-                      <a:srgbClr val="102A20"/>
+                      <a:srgbClr val="06180F"/>
                     </a:solidFill>
                   </a:tcPr>
                 </a:tc>
@@ -12739,7 +12901,7 @@
                   <a:tcPr marL="73152" marR="73152" marT="73152" marB="73152" anchor="ctr">
                     <a:lnL w="6350" cap="flat" cmpd="sng" algn="ctr">
                       <a:solidFill>
-                        <a:srgbClr val="2E2A3A"/>
+                        <a:srgbClr val="5E4F85"/>
                       </a:solidFill>
                       <a:prstDash val="solid"/>
                       <a:round/>
@@ -12748,7 +12910,7 @@
                     </a:lnL>
                     <a:lnR w="6350" cap="flat" cmpd="sng" algn="ctr">
                       <a:solidFill>
-                        <a:srgbClr val="2E2A3A"/>
+                        <a:srgbClr val="5E4F85"/>
                       </a:solidFill>
                       <a:prstDash val="solid"/>
                       <a:round/>
@@ -12757,7 +12919,7 @@
                     </a:lnR>
                     <a:lnT w="6350" cap="flat" cmpd="sng" algn="ctr">
                       <a:solidFill>
-                        <a:srgbClr val="2E2A3A"/>
+                        <a:srgbClr val="5E4F85"/>
                       </a:solidFill>
                       <a:prstDash val="solid"/>
                       <a:round/>
@@ -12766,7 +12928,7 @@
                     </a:lnT>
                     <a:lnB w="6350" cap="flat" cmpd="sng" algn="ctr">
                       <a:solidFill>
-                        <a:srgbClr val="2E2A3A"/>
+                        <a:srgbClr val="5E4F85"/>
                       </a:solidFill>
                       <a:prstDash val="solid"/>
                       <a:round/>
@@ -12774,7 +12936,7 @@
                       <a:tailEnd type="none" w="med" len="med"/>
                     </a:lnB>
                     <a:solidFill>
-                      <a:srgbClr val="102A20"/>
+                      <a:srgbClr val="06180F"/>
                     </a:solidFill>
                   </a:tcPr>
                 </a:tc>
@@ -12877,7 +13039,7 @@
             <a:lvl1pPr>
               <a:defRPr sz="850">
                 <a:solidFill>
-                  <a:srgbClr val="8A82A0"/>
+                  <a:srgbClr val="9A94AA"/>
                 </a:solidFill>
                 <a:latin typeface="Courier New"/>
                 <a:ea typeface="Courier New"/>
@@ -12947,7 +13109,7 @@
             <a:r>
               <a:rPr lang="en-US" sz="2600" b="1" dirty="0">
                 <a:solidFill>
-                  <a:srgbClr val="C9A6FF"/>
+                  <a:srgbClr val="A98BFF"/>
                 </a:solidFill>
                 <a:latin typeface="Courier New" pitchFamily="34" charset="0"/>
                 <a:ea typeface="Courier New" pitchFamily="34" charset="-122"/>
@@ -13015,9 +13177,14 @@
             </a:avLst>
           </a:prstGeom>
           <a:solidFill>
-            <a:srgbClr val="C9A6FF"/>
-          </a:solidFill>
-          <a:ln/>
+            <a:srgbClr val="1A0B3D"/>
+          </a:solidFill>
+          <a:ln w="12700">
+            <a:solidFill>
+              <a:srgbClr val="5A05F4"/>
+            </a:solidFill>
+            <a:prstDash val="solid"/>
+          </a:ln>
         </p:spPr>
       </p:sp>
       <p:sp>
@@ -13047,7 +13214,7 @@
             <a:r>
               <a:rPr lang="en-US" sz="900" b="1" spc="100" kern="0" dirty="0">
                 <a:solidFill>
-                  <a:srgbClr val="1C1140"/>
+                  <a:srgbClr val="A98BFF"/>
                 </a:solidFill>
                 <a:latin typeface="Courier New" pitchFamily="34" charset="0"/>
                 <a:ea typeface="Courier New" pitchFamily="34" charset="-122"/>
@@ -13100,9 +13267,14 @@
             </a:avLst>
           </a:prstGeom>
           <a:solidFill>
-            <a:srgbClr val="1C1140"/>
-          </a:solidFill>
-          <a:ln/>
+            <a:srgbClr val="1A0B3D"/>
+          </a:solidFill>
+          <a:ln w="12700">
+            <a:solidFill>
+              <a:srgbClr val="5A05F4"/>
+            </a:solidFill>
+            <a:prstDash val="solid"/>
+          </a:ln>
         </p:spPr>
       </p:sp>
       <p:sp>
@@ -13132,7 +13304,7 @@
             <a:r>
               <a:rPr lang="en-US" sz="1100" b="1" dirty="0">
                 <a:solidFill>
-                  <a:srgbClr val="C9A6FF"/>
+                  <a:srgbClr val="A98BFF"/>
                 </a:solidFill>
                 <a:latin typeface="Courier New" pitchFamily="34" charset="0"/>
                 <a:ea typeface="Courier New" pitchFamily="34" charset="-122"/>
@@ -13161,7 +13333,7 @@
           <a:noFill/>
           <a:ln w="15875">
             <a:solidFill>
-              <a:srgbClr val="9B7BE8"/>
+              <a:srgbClr val="8F72E6"/>
             </a:solidFill>
             <a:prstDash val="solid"/>
           </a:ln>
@@ -13182,7 +13354,7 @@
             <a:avLst/>
           </a:prstGeom>
           <a:solidFill>
-            <a:srgbClr val="9B7BE8"/>
+            <a:srgbClr val="8F72E6"/>
           </a:solidFill>
           <a:ln/>
         </p:spPr>
@@ -13204,11 +13376,11 @@
             </a:avLst>
           </a:prstGeom>
           <a:solidFill>
-            <a:srgbClr val="17141F"/>
+            <a:srgbClr val="000000"/>
           </a:solidFill>
           <a:ln w="12700">
             <a:solidFill>
-              <a:srgbClr val="2E2A3A"/>
+              <a:srgbClr val="5E4F85"/>
             </a:solidFill>
             <a:prstDash val="solid"/>
           </a:ln>
@@ -13270,7 +13442,7 @@
           <a:noFill/>
           <a:ln w="15875">
             <a:solidFill>
-              <a:srgbClr val="9B7BE8"/>
+              <a:srgbClr val="8F72E6"/>
             </a:solidFill>
             <a:prstDash val="solid"/>
           </a:ln>
@@ -13291,7 +13463,7 @@
             <a:avLst/>
           </a:prstGeom>
           <a:solidFill>
-            <a:srgbClr val="9B7BE8"/>
+            <a:srgbClr val="8F72E6"/>
           </a:solidFill>
           <a:ln/>
         </p:spPr>
@@ -13313,11 +13485,11 @@
             </a:avLst>
           </a:prstGeom>
           <a:solidFill>
-            <a:srgbClr val="17141F"/>
+            <a:srgbClr val="000000"/>
           </a:solidFill>
           <a:ln w="12700">
             <a:solidFill>
-              <a:srgbClr val="2E2A3A"/>
+              <a:srgbClr val="5E4F85"/>
             </a:solidFill>
             <a:prstDash val="solid"/>
           </a:ln>
@@ -13379,7 +13551,7 @@
           <a:noFill/>
           <a:ln w="15875">
             <a:solidFill>
-              <a:srgbClr val="9B7BE8"/>
+              <a:srgbClr val="8F72E6"/>
             </a:solidFill>
             <a:prstDash val="solid"/>
           </a:ln>
@@ -13400,7 +13572,7 @@
             <a:avLst/>
           </a:prstGeom>
           <a:solidFill>
-            <a:srgbClr val="9B7BE8"/>
+            <a:srgbClr val="8F72E6"/>
           </a:solidFill>
           <a:ln/>
         </p:spPr>
@@ -13422,9 +13594,14 @@
             </a:avLst>
           </a:prstGeom>
           <a:solidFill>
-            <a:srgbClr val="102A20"/>
-          </a:solidFill>
-          <a:ln/>
+            <a:srgbClr val="06180F"/>
+          </a:solidFill>
+          <a:ln w="12700">
+            <a:solidFill>
+              <a:srgbClr val="3FCF8E"/>
+            </a:solidFill>
+            <a:prstDash val="solid"/>
+          </a:ln>
         </p:spPr>
       </p:sp>
       <p:sp>
@@ -13454,7 +13631,7 @@
             <a:r>
               <a:rPr lang="en-US" sz="1100" b="1" dirty="0">
                 <a:solidFill>
-                  <a:srgbClr val="5FD6A0"/>
+                  <a:srgbClr val="3FCF8E"/>
                 </a:solidFill>
                 <a:latin typeface="Courier New" pitchFamily="34" charset="0"/>
                 <a:ea typeface="Courier New" pitchFamily="34" charset="-122"/>
@@ -13483,11 +13660,11 @@
             </a:avLst>
           </a:prstGeom>
           <a:solidFill>
-            <a:srgbClr val="17141F"/>
+            <a:srgbClr val="000000"/>
           </a:solidFill>
           <a:ln w="12700">
             <a:solidFill>
-              <a:srgbClr val="2E2A3A"/>
+              <a:srgbClr val="5E4F85"/>
             </a:solidFill>
             <a:prstDash val="solid"/>
           </a:ln>
@@ -13621,7 +13798,7 @@
             <a:r>
               <a:rPr lang="en-US" sz="1200" dirty="0">
                 <a:solidFill>
-                  <a:srgbClr val="AFA9BE"/>
+                  <a:srgbClr val="C9C4D6"/>
                 </a:solidFill>
                 <a:latin typeface="Montserrat" pitchFamily="34" charset="0"/>
                 <a:ea typeface="Montserrat" pitchFamily="34" charset="-122"/>
@@ -13650,11 +13827,11 @@
             </a:avLst>
           </a:prstGeom>
           <a:solidFill>
-            <a:srgbClr val="17141F"/>
+            <a:srgbClr val="000000"/>
           </a:solidFill>
           <a:ln w="12700">
             <a:solidFill>
-              <a:srgbClr val="2E2A3A"/>
+              <a:srgbClr val="5E4F85"/>
             </a:solidFill>
             <a:prstDash val="solid"/>
           </a:ln>
@@ -13788,7 +13965,7 @@
             <a:r>
               <a:rPr lang="en-US" sz="1200" dirty="0">
                 <a:solidFill>
-                  <a:srgbClr val="AFA9BE"/>
+                  <a:srgbClr val="C9C4D6"/>
                 </a:solidFill>
                 <a:latin typeface="Montserrat" pitchFamily="34" charset="0"/>
                 <a:ea typeface="Montserrat" pitchFamily="34" charset="-122"/>
@@ -13817,11 +13994,11 @@
             </a:avLst>
           </a:prstGeom>
           <a:solidFill>
-            <a:srgbClr val="17141F"/>
+            <a:srgbClr val="000000"/>
           </a:solidFill>
           <a:ln w="12700">
             <a:solidFill>
-              <a:srgbClr val="2E2A3A"/>
+              <a:srgbClr val="5E4F85"/>
             </a:solidFill>
             <a:prstDash val="solid"/>
           </a:ln>
@@ -13955,7 +14132,7 @@
             <a:r>
               <a:rPr lang="en-US" sz="1200" dirty="0">
                 <a:solidFill>
-                  <a:srgbClr val="AFA9BE"/>
+                  <a:srgbClr val="C9C4D6"/>
                 </a:solidFill>
                 <a:latin typeface="Montserrat" pitchFamily="34" charset="0"/>
                 <a:ea typeface="Montserrat" pitchFamily="34" charset="-122"/>
@@ -13984,9 +14161,14 @@
             </a:avLst>
           </a:prstGeom>
           <a:solidFill>
-            <a:srgbClr val="102A20"/>
-          </a:solidFill>
-          <a:ln/>
+            <a:srgbClr val="06180F"/>
+          </a:solidFill>
+          <a:ln w="12700">
+            <a:solidFill>
+              <a:srgbClr val="3FCF8E"/>
+            </a:solidFill>
+            <a:prstDash val="solid"/>
+          </a:ln>
         </p:spPr>
       </p:sp>
       <p:sp>
@@ -14016,7 +14198,7 @@
             <a:r>
               <a:rPr lang="en-US" sz="950" b="1" spc="150" kern="0" dirty="0">
                 <a:solidFill>
-                  <a:srgbClr val="5FD6A0"/>
+                  <a:srgbClr val="3FCF8E"/>
                 </a:solidFill>
                 <a:latin typeface="Courier New" pitchFamily="34" charset="0"/>
                 <a:ea typeface="Courier New" pitchFamily="34" charset="-122"/>
@@ -14100,7 +14282,7 @@
             <a:lvl1pPr>
               <a:defRPr sz="850">
                 <a:solidFill>
-                  <a:srgbClr val="8A82A0"/>
+                  <a:srgbClr val="9A94AA"/>
                 </a:solidFill>
                 <a:latin typeface="Courier New"/>
                 <a:ea typeface="Courier New"/>
@@ -14170,7 +14352,7 @@
             <a:r>
               <a:rPr lang="en-US" sz="2600" b="1" dirty="0">
                 <a:solidFill>
-                  <a:srgbClr val="C9A6FF"/>
+                  <a:srgbClr val="A98BFF"/>
                 </a:solidFill>
                 <a:latin typeface="Courier New" pitchFamily="34" charset="0"/>
                 <a:ea typeface="Courier New" pitchFamily="34" charset="-122"/>
@@ -14251,7 +14433,7 @@
             <a:r>
               <a:rPr lang="en-US" sz="1300" dirty="0">
                 <a:solidFill>
-                  <a:srgbClr val="AFA9BE"/>
+                  <a:srgbClr val="C9C4D6"/>
                 </a:solidFill>
                 <a:latin typeface="Montserrat" pitchFamily="34" charset="0"/>
                 <a:ea typeface="Montserrat" pitchFamily="34" charset="-122"/>
@@ -14280,9 +14462,14 @@
             </a:avLst>
           </a:prstGeom>
           <a:solidFill>
-            <a:srgbClr val="C9A6FF"/>
-          </a:solidFill>
-          <a:ln/>
+            <a:srgbClr val="1A0B3D"/>
+          </a:solidFill>
+          <a:ln w="12700">
+            <a:solidFill>
+              <a:srgbClr val="5A05F4"/>
+            </a:solidFill>
+            <a:prstDash val="solid"/>
+          </a:ln>
         </p:spPr>
       </p:sp>
       <p:sp>
@@ -14312,7 +14499,7 @@
             <a:r>
               <a:rPr lang="en-US" sz="900" b="1" spc="100" kern="0" dirty="0">
                 <a:solidFill>
-                  <a:srgbClr val="1C1140"/>
+                  <a:srgbClr val="A98BFF"/>
                 </a:solidFill>
                 <a:latin typeface="Courier New" pitchFamily="34" charset="0"/>
                 <a:ea typeface="Courier New" pitchFamily="34" charset="-122"/>
@@ -14365,11 +14552,11 @@
             </a:avLst>
           </a:prstGeom>
           <a:solidFill>
-            <a:srgbClr val="17141F"/>
+            <a:srgbClr val="000000"/>
           </a:solidFill>
           <a:ln w="12700">
             <a:solidFill>
-              <a:srgbClr val="2E2A3A"/>
+              <a:srgbClr val="5E4F85"/>
             </a:solidFill>
             <a:prstDash val="solid"/>
           </a:ln>
@@ -14503,7 +14690,7 @@
             <a:r>
               <a:rPr lang="en-US" sz="1200" dirty="0">
                 <a:solidFill>
-                  <a:srgbClr val="AFA9BE"/>
+                  <a:srgbClr val="C9C4D6"/>
                 </a:solidFill>
                 <a:latin typeface="Montserrat" pitchFamily="34" charset="0"/>
                 <a:ea typeface="Montserrat" pitchFamily="34" charset="-122"/>
@@ -14532,9 +14719,14 @@
             </a:avLst>
           </a:prstGeom>
           <a:solidFill>
-            <a:srgbClr val="2E1418"/>
-          </a:solidFill>
-          <a:ln/>
+            <a:srgbClr val="1A0808"/>
+          </a:solidFill>
+          <a:ln w="12700">
+            <a:solidFill>
+              <a:srgbClr val="FF6B6B"/>
+            </a:solidFill>
+            <a:prstDash val="solid"/>
+          </a:ln>
         </p:spPr>
       </p:sp>
       <p:sp>
@@ -14552,7 +14744,7 @@
             <a:avLst/>
           </a:prstGeom>
           <a:solidFill>
-            <a:srgbClr val="FF7B7B"/>
+            <a:srgbClr val="5A05F4"/>
           </a:solidFill>
           <a:ln/>
         </p:spPr>
@@ -14584,7 +14776,7 @@
             <a:r>
               <a:rPr lang="en-US" sz="1200" b="1" dirty="0">
                 <a:solidFill>
-                  <a:srgbClr val="2E1418"/>
+                  <a:srgbClr val="FFFFFF"/>
                 </a:solidFill>
                 <a:latin typeface="Courier New" pitchFamily="34" charset="0"/>
                 <a:ea typeface="Courier New" pitchFamily="34" charset="-122"/>
@@ -14623,7 +14815,7 @@
             <a:r>
               <a:rPr lang="en-US" sz="1450" b="1" dirty="0">
                 <a:solidFill>
-                  <a:srgbClr val="FF7B7B"/>
+                  <a:srgbClr val="FF6B6B"/>
                 </a:solidFill>
                 <a:latin typeface="Montserrat" pitchFamily="34" charset="0"/>
                 <a:ea typeface="Montserrat" pitchFamily="34" charset="-122"/>
@@ -14665,7 +14857,7 @@
             <a:r>
               <a:rPr lang="en-US" sz="1200" dirty="0">
                 <a:solidFill>
-                  <a:srgbClr val="FFFFFF"/>
+                  <a:srgbClr val="C9C4D6"/>
                 </a:solidFill>
                 <a:latin typeface="Montserrat" pitchFamily="34" charset="0"/>
                 <a:ea typeface="Montserrat" pitchFamily="34" charset="-122"/>
@@ -14694,11 +14886,11 @@
             </a:avLst>
           </a:prstGeom>
           <a:solidFill>
-            <a:srgbClr val="17141F"/>
+            <a:srgbClr val="000000"/>
           </a:solidFill>
           <a:ln w="12700">
             <a:solidFill>
-              <a:srgbClr val="2E2A3A"/>
+              <a:srgbClr val="5E4F85"/>
             </a:solidFill>
             <a:prstDash val="solid"/>
           </a:ln>
@@ -14832,7 +15024,7 @@
             <a:r>
               <a:rPr lang="en-US" sz="1200" dirty="0">
                 <a:solidFill>
-                  <a:srgbClr val="AFA9BE"/>
+                  <a:srgbClr val="C9C4D6"/>
                 </a:solidFill>
                 <a:latin typeface="Montserrat" pitchFamily="34" charset="0"/>
                 <a:ea typeface="Montserrat" pitchFamily="34" charset="-122"/>
@@ -14861,7 +15053,7 @@
             </a:avLst>
           </a:prstGeom>
           <a:solidFill>
-            <a:srgbClr val="1C1140"/>
+            <a:srgbClr val="1A0B3D"/>
           </a:solidFill>
           <a:ln/>
         </p:spPr>
@@ -14893,7 +15085,7 @@
             <a:r>
               <a:rPr lang="en-US" sz="900" b="1" dirty="0">
                 <a:solidFill>
-                  <a:srgbClr val="C9A6FF"/>
+                  <a:srgbClr val="A98BFF"/>
                 </a:solidFill>
                 <a:latin typeface="Courier New" pitchFamily="34" charset="0"/>
                 <a:ea typeface="Courier New" pitchFamily="34" charset="-122"/>
@@ -14922,7 +15114,7 @@
             </a:avLst>
           </a:prstGeom>
           <a:solidFill>
-            <a:srgbClr val="102A20"/>
+            <a:srgbClr val="06180F"/>
           </a:solidFill>
           <a:ln/>
         </p:spPr>
@@ -14954,7 +15146,7 @@
             <a:r>
               <a:rPr lang="en-US" sz="900" b="1" dirty="0">
                 <a:solidFill>
-                  <a:srgbClr val="5FD6A0"/>
+                  <a:srgbClr val="3FCF8E"/>
                 </a:solidFill>
                 <a:latin typeface="Courier New" pitchFamily="34" charset="0"/>
                 <a:ea typeface="Courier New" pitchFamily="34" charset="-122"/>
@@ -15013,7 +15205,7 @@
             <a:r>
               <a:rPr lang="en-US" sz="850" dirty="0">
                 <a:solidFill>
-                  <a:srgbClr val="8A82A0"/>
+                  <a:srgbClr val="9A94AA"/>
                 </a:solidFill>
                 <a:latin typeface="Courier New" pitchFamily="34" charset="0"/>
                 <a:ea typeface="Courier New" pitchFamily="34" charset="-122"/>
@@ -15072,7 +15264,7 @@
             <a:r>
               <a:rPr lang="en-US" sz="850" dirty="0">
                 <a:solidFill>
-                  <a:srgbClr val="8A82A0"/>
+                  <a:srgbClr val="9A94AA"/>
                 </a:solidFill>
                 <a:latin typeface="Courier New" pitchFamily="34" charset="0"/>
                 <a:ea typeface="Courier New" pitchFamily="34" charset="-122"/>
@@ -15131,7 +15323,7 @@
             <a:r>
               <a:rPr lang="en-US" sz="850" dirty="0">
                 <a:solidFill>
-                  <a:srgbClr val="8A82A0"/>
+                  <a:srgbClr val="9A94AA"/>
                 </a:solidFill>
                 <a:latin typeface="Courier New" pitchFamily="34" charset="0"/>
                 <a:ea typeface="Courier New" pitchFamily="34" charset="-122"/>
@@ -15276,7 +15468,7 @@
             <a:lvl1pPr>
               <a:defRPr sz="850">
                 <a:solidFill>
-                  <a:srgbClr val="8A82A0"/>
+                  <a:srgbClr val="9A94AA"/>
                 </a:solidFill>
                 <a:latin typeface="Courier New"/>
                 <a:ea typeface="Courier New"/>
@@ -15346,7 +15538,7 @@
             <a:r>
               <a:rPr lang="en-US" sz="2600" b="1" dirty="0">
                 <a:solidFill>
-                  <a:srgbClr val="C9A6FF"/>
+                  <a:srgbClr val="A98BFF"/>
                 </a:solidFill>
                 <a:latin typeface="Courier New" pitchFamily="34" charset="0"/>
                 <a:ea typeface="Courier New" pitchFamily="34" charset="-122"/>
@@ -15427,7 +15619,7 @@
             <a:r>
               <a:rPr lang="en-US" sz="1300" dirty="0">
                 <a:solidFill>
-                  <a:srgbClr val="AFA9BE"/>
+                  <a:srgbClr val="C9C4D6"/>
                 </a:solidFill>
                 <a:latin typeface="Montserrat" pitchFamily="34" charset="0"/>
                 <a:ea typeface="Montserrat" pitchFamily="34" charset="-122"/>
@@ -15456,9 +15648,14 @@
             </a:avLst>
           </a:prstGeom>
           <a:solidFill>
-            <a:srgbClr val="C9A6FF"/>
-          </a:solidFill>
-          <a:ln/>
+            <a:srgbClr val="1A0B3D"/>
+          </a:solidFill>
+          <a:ln w="12700">
+            <a:solidFill>
+              <a:srgbClr val="5A05F4"/>
+            </a:solidFill>
+            <a:prstDash val="solid"/>
+          </a:ln>
         </p:spPr>
       </p:sp>
       <p:sp>
@@ -15488,7 +15685,7 @@
             <a:r>
               <a:rPr lang="en-US" sz="900" b="1" spc="100" kern="0" dirty="0">
                 <a:solidFill>
-                  <a:srgbClr val="1C1140"/>
+                  <a:srgbClr val="A98BFF"/>
                 </a:solidFill>
                 <a:latin typeface="Courier New" pitchFamily="34" charset="0"/>
                 <a:ea typeface="Courier New" pitchFamily="34" charset="-122"/>
@@ -15541,11 +15738,11 @@
             </a:avLst>
           </a:prstGeom>
           <a:solidFill>
-            <a:srgbClr val="17141F"/>
+            <a:srgbClr val="000000"/>
           </a:solidFill>
           <a:ln w="12700">
             <a:solidFill>
-              <a:srgbClr val="2E2A3A"/>
+              <a:srgbClr val="5E4F85"/>
             </a:solidFill>
             <a:prstDash val="solid"/>
           </a:ln>
@@ -15679,7 +15876,7 @@
             <a:r>
               <a:rPr lang="en-US" sz="1200" dirty="0">
                 <a:solidFill>
-                  <a:srgbClr val="AFA9BE"/>
+                  <a:srgbClr val="C9C4D6"/>
                 </a:solidFill>
                 <a:latin typeface="Montserrat" pitchFamily="34" charset="0"/>
                 <a:ea typeface="Montserrat" pitchFamily="34" charset="-122"/>
@@ -15708,11 +15905,11 @@
             </a:avLst>
           </a:prstGeom>
           <a:solidFill>
-            <a:srgbClr val="17141F"/>
+            <a:srgbClr val="000000"/>
           </a:solidFill>
           <a:ln w="12700">
             <a:solidFill>
-              <a:srgbClr val="2E2A3A"/>
+              <a:srgbClr val="5E4F85"/>
             </a:solidFill>
             <a:prstDash val="solid"/>
           </a:ln>
@@ -15846,7 +16043,7 @@
             <a:r>
               <a:rPr lang="en-US" sz="1200" dirty="0">
                 <a:solidFill>
-                  <a:srgbClr val="AFA9BE"/>
+                  <a:srgbClr val="C9C4D6"/>
                 </a:solidFill>
                 <a:latin typeface="Montserrat" pitchFamily="34" charset="0"/>
                 <a:ea typeface="Montserrat" pitchFamily="34" charset="-122"/>
@@ -15875,9 +16072,14 @@
             </a:avLst>
           </a:prstGeom>
           <a:solidFill>
-            <a:srgbClr val="2E1418"/>
-          </a:solidFill>
-          <a:ln/>
+            <a:srgbClr val="1A0808"/>
+          </a:solidFill>
+          <a:ln w="12700">
+            <a:solidFill>
+              <a:srgbClr val="FF6B6B"/>
+            </a:solidFill>
+            <a:prstDash val="solid"/>
+          </a:ln>
         </p:spPr>
       </p:sp>
       <p:sp>
@@ -15895,7 +16097,7 @@
             <a:avLst/>
           </a:prstGeom>
           <a:solidFill>
-            <a:srgbClr val="FF7B7B"/>
+            <a:srgbClr val="5A05F4"/>
           </a:solidFill>
           <a:ln/>
         </p:spPr>
@@ -15927,7 +16129,7 @@
             <a:r>
               <a:rPr lang="en-US" sz="1200" b="1" dirty="0">
                 <a:solidFill>
-                  <a:srgbClr val="2E1418"/>
+                  <a:srgbClr val="FFFFFF"/>
                 </a:solidFill>
                 <a:latin typeface="Courier New" pitchFamily="34" charset="0"/>
                 <a:ea typeface="Courier New" pitchFamily="34" charset="-122"/>
@@ -15966,7 +16168,7 @@
             <a:r>
               <a:rPr lang="en-US" sz="1450" b="1" dirty="0">
                 <a:solidFill>
-                  <a:srgbClr val="FF7B7B"/>
+                  <a:srgbClr val="FF6B6B"/>
                 </a:solidFill>
                 <a:latin typeface="Montserrat" pitchFamily="34" charset="0"/>
                 <a:ea typeface="Montserrat" pitchFamily="34" charset="-122"/>
@@ -16008,7 +16210,7 @@
             <a:r>
               <a:rPr lang="en-US" sz="1200" dirty="0">
                 <a:solidFill>
-                  <a:srgbClr val="FFFFFF"/>
+                  <a:srgbClr val="C9C4D6"/>
                 </a:solidFill>
                 <a:latin typeface="Montserrat" pitchFamily="34" charset="0"/>
                 <a:ea typeface="Montserrat" pitchFamily="34" charset="-122"/>
@@ -16037,9 +16239,14 @@
             </a:avLst>
           </a:prstGeom>
           <a:solidFill>
-            <a:srgbClr val="102A20"/>
-          </a:solidFill>
-          <a:ln/>
+            <a:srgbClr val="06180F"/>
+          </a:solidFill>
+          <a:ln w="12700">
+            <a:solidFill>
+              <a:srgbClr val="3FCF8E"/>
+            </a:solidFill>
+            <a:prstDash val="solid"/>
+          </a:ln>
         </p:spPr>
       </p:sp>
       <p:sp>
@@ -16069,7 +16276,7 @@
             <a:r>
               <a:rPr lang="en-US" sz="950" b="1" spc="150" kern="0" dirty="0">
                 <a:solidFill>
-                  <a:srgbClr val="5FD6A0"/>
+                  <a:srgbClr val="3FCF8E"/>
                 </a:solidFill>
                 <a:latin typeface="Courier New" pitchFamily="34" charset="0"/>
                 <a:ea typeface="Courier New" pitchFamily="34" charset="-122"/>
@@ -16153,7 +16360,7 @@
             <a:lvl1pPr>
               <a:defRPr sz="850">
                 <a:solidFill>
-                  <a:srgbClr val="8A82A0"/>
+                  <a:srgbClr val="9A94AA"/>
                 </a:solidFill>
                 <a:latin typeface="Courier New"/>
                 <a:ea typeface="Courier New"/>
@@ -16223,7 +16430,7 @@
             <a:r>
               <a:rPr lang="en-US" sz="2600" b="1" dirty="0">
                 <a:solidFill>
-                  <a:srgbClr val="C9A6FF"/>
+                  <a:srgbClr val="A98BFF"/>
                 </a:solidFill>
                 <a:latin typeface="Courier New" pitchFamily="34" charset="0"/>
                 <a:ea typeface="Courier New" pitchFamily="34" charset="-122"/>
@@ -16291,9 +16498,14 @@
             </a:avLst>
           </a:prstGeom>
           <a:solidFill>
-            <a:srgbClr val="C9A6FF"/>
-          </a:solidFill>
-          <a:ln/>
+            <a:srgbClr val="1A0B3D"/>
+          </a:solidFill>
+          <a:ln w="12700">
+            <a:solidFill>
+              <a:srgbClr val="5A05F4"/>
+            </a:solidFill>
+            <a:prstDash val="solid"/>
+          </a:ln>
         </p:spPr>
       </p:sp>
       <p:sp>
@@ -16323,7 +16535,7 @@
             <a:r>
               <a:rPr lang="en-US" sz="900" b="1" spc="100" kern="0" dirty="0">
                 <a:solidFill>
-                  <a:srgbClr val="1C1140"/>
+                  <a:srgbClr val="A98BFF"/>
                 </a:solidFill>
                 <a:latin typeface="Courier New" pitchFamily="34" charset="0"/>
                 <a:ea typeface="Courier New" pitchFamily="34" charset="-122"/>
@@ -16376,9 +16588,14 @@
             </a:avLst>
           </a:prstGeom>
           <a:solidFill>
-            <a:srgbClr val="1C1140"/>
-          </a:solidFill>
-          <a:ln/>
+            <a:srgbClr val="1A0B3D"/>
+          </a:solidFill>
+          <a:ln w="12700">
+            <a:solidFill>
+              <a:srgbClr val="5A05F4"/>
+            </a:solidFill>
+            <a:prstDash val="solid"/>
+          </a:ln>
         </p:spPr>
       </p:sp>
       <p:sp>
@@ -16408,7 +16625,7 @@
             <a:r>
               <a:rPr lang="en-US" sz="1450" b="1" dirty="0">
                 <a:solidFill>
-                  <a:srgbClr val="C9A6FF"/>
+                  <a:srgbClr val="A98BFF"/>
                 </a:solidFill>
                 <a:latin typeface="Montserrat" pitchFamily="34" charset="0"/>
                 <a:ea typeface="Montserrat" pitchFamily="34" charset="-122"/>
@@ -16450,7 +16667,7 @@
             <a:r>
               <a:rPr lang="en-US" sz="1200" dirty="0">
                 <a:solidFill>
-                  <a:srgbClr val="FFFFFF"/>
+                  <a:srgbClr val="C9C4D6"/>
                 </a:solidFill>
                 <a:latin typeface="Montserrat" pitchFamily="34" charset="0"/>
                 <a:ea typeface="Montserrat" pitchFamily="34" charset="-122"/>
@@ -16479,9 +16696,14 @@
             </a:avLst>
           </a:prstGeom>
           <a:solidFill>
-            <a:srgbClr val="2A2010"/>
-          </a:solidFill>
-          <a:ln/>
+            <a:srgbClr val="0B1A38"/>
+          </a:solidFill>
+          <a:ln w="12700">
+            <a:solidFill>
+              <a:srgbClr val="6BA0F8"/>
+            </a:solidFill>
+            <a:prstDash val="solid"/>
+          </a:ln>
         </p:spPr>
       </p:sp>
       <p:sp>
@@ -16511,7 +16733,7 @@
             <a:r>
               <a:rPr lang="en-US" sz="1450" b="1" dirty="0">
                 <a:solidFill>
-                  <a:srgbClr val="E8A857"/>
+                  <a:srgbClr val="6BA0F8"/>
                 </a:solidFill>
                 <a:latin typeface="Montserrat" pitchFamily="34" charset="0"/>
                 <a:ea typeface="Montserrat" pitchFamily="34" charset="-122"/>
@@ -16553,7 +16775,7 @@
             <a:r>
               <a:rPr lang="en-US" sz="1200" dirty="0">
                 <a:solidFill>
-                  <a:srgbClr val="FFFFFF"/>
+                  <a:srgbClr val="C9C4D6"/>
                 </a:solidFill>
                 <a:latin typeface="Montserrat" pitchFamily="34" charset="0"/>
                 <a:ea typeface="Montserrat" pitchFamily="34" charset="-122"/>
@@ -16582,9 +16804,14 @@
             </a:avLst>
           </a:prstGeom>
           <a:solidFill>
-            <a:srgbClr val="2A2010"/>
-          </a:solidFill>
-          <a:ln/>
+            <a:srgbClr val="0B1A38"/>
+          </a:solidFill>
+          <a:ln w="12700">
+            <a:solidFill>
+              <a:srgbClr val="6BA0F8"/>
+            </a:solidFill>
+            <a:prstDash val="solid"/>
+          </a:ln>
         </p:spPr>
       </p:sp>
       <p:sp>
@@ -16614,7 +16841,7 @@
             <a:r>
               <a:rPr lang="en-US" sz="950" b="1" spc="150" kern="0" dirty="0">
                 <a:solidFill>
-                  <a:srgbClr val="E8A857"/>
+                  <a:srgbClr val="6BA0F8"/>
                 </a:solidFill>
                 <a:latin typeface="Courier New" pitchFamily="34" charset="0"/>
                 <a:ea typeface="Courier New" pitchFamily="34" charset="-122"/>
@@ -16685,11 +16912,11 @@
             </a:avLst>
           </a:prstGeom>
           <a:solidFill>
-            <a:srgbClr val="17141F"/>
+            <a:srgbClr val="000000"/>
           </a:solidFill>
           <a:ln w="12700">
             <a:solidFill>
-              <a:srgbClr val="2E2A3A"/>
+              <a:srgbClr val="5E4F85"/>
             </a:solidFill>
             <a:prstDash val="solid"/>
           </a:ln>
@@ -16767,7 +16994,7 @@
             <a:lvl1pPr>
               <a:defRPr sz="850">
                 <a:solidFill>
-                  <a:srgbClr val="8A82A0"/>
+                  <a:srgbClr val="9A94AA"/>
                 </a:solidFill>
                 <a:latin typeface="Courier New"/>
                 <a:ea typeface="Courier New"/>
@@ -16879,7 +17106,7 @@
             <a:r>
               <a:rPr lang="en-US" sz="1300" dirty="0">
                 <a:solidFill>
-                  <a:srgbClr val="AFA9BE"/>
+                  <a:srgbClr val="C9C4D6"/>
                 </a:solidFill>
                 <a:latin typeface="Montserrat" pitchFamily="34" charset="0"/>
                 <a:ea typeface="Montserrat" pitchFamily="34" charset="-122"/>
@@ -16908,9 +17135,14 @@
             </a:avLst>
           </a:prstGeom>
           <a:solidFill>
-            <a:srgbClr val="C9A6FF"/>
-          </a:solidFill>
-          <a:ln/>
+            <a:srgbClr val="1A0B3D"/>
+          </a:solidFill>
+          <a:ln w="12700">
+            <a:solidFill>
+              <a:srgbClr val="5A05F4"/>
+            </a:solidFill>
+            <a:prstDash val="solid"/>
+          </a:ln>
         </p:spPr>
       </p:sp>
       <p:sp>
@@ -16940,7 +17172,7 @@
             <a:r>
               <a:rPr lang="en-US" sz="900" b="1" spc="100" kern="0" dirty="0">
                 <a:solidFill>
-                  <a:srgbClr val="1C1140"/>
+                  <a:srgbClr val="A98BFF"/>
                 </a:solidFill>
                 <a:latin typeface="Courier New" pitchFamily="34" charset="0"/>
                 <a:ea typeface="Courier New" pitchFamily="34" charset="-122"/>
@@ -16993,11 +17225,11 @@
             </a:avLst>
           </a:prstGeom>
           <a:solidFill>
-            <a:srgbClr val="17141F"/>
+            <a:srgbClr val="000000"/>
           </a:solidFill>
           <a:ln w="12700">
             <a:solidFill>
-              <a:srgbClr val="2E2A3A"/>
+              <a:srgbClr val="5E4F85"/>
             </a:solidFill>
             <a:prstDash val="solid"/>
           </a:ln>
@@ -17131,7 +17363,7 @@
             <a:r>
               <a:rPr lang="en-US" sz="1200" dirty="0">
                 <a:solidFill>
-                  <a:srgbClr val="AFA9BE"/>
+                  <a:srgbClr val="C9C4D6"/>
                 </a:solidFill>
                 <a:latin typeface="Montserrat" pitchFamily="34" charset="0"/>
                 <a:ea typeface="Montserrat" pitchFamily="34" charset="-122"/>
@@ -17160,11 +17392,11 @@
             </a:avLst>
           </a:prstGeom>
           <a:solidFill>
-            <a:srgbClr val="17141F"/>
+            <a:srgbClr val="000000"/>
           </a:solidFill>
           <a:ln w="12700">
             <a:solidFill>
-              <a:srgbClr val="2E2A3A"/>
+              <a:srgbClr val="5E4F85"/>
             </a:solidFill>
             <a:prstDash val="solid"/>
           </a:ln>
@@ -17298,7 +17530,7 @@
             <a:r>
               <a:rPr lang="en-US" sz="1200" dirty="0">
                 <a:solidFill>
-                  <a:srgbClr val="AFA9BE"/>
+                  <a:srgbClr val="C9C4D6"/>
                 </a:solidFill>
                 <a:latin typeface="Montserrat" pitchFamily="34" charset="0"/>
                 <a:ea typeface="Montserrat" pitchFamily="34" charset="-122"/>
@@ -17327,11 +17559,11 @@
             </a:avLst>
           </a:prstGeom>
           <a:solidFill>
-            <a:srgbClr val="17141F"/>
+            <a:srgbClr val="000000"/>
           </a:solidFill>
           <a:ln w="12700">
             <a:solidFill>
-              <a:srgbClr val="2E2A3A"/>
+              <a:srgbClr val="5E4F85"/>
             </a:solidFill>
             <a:prstDash val="solid"/>
           </a:ln>
@@ -17465,7 +17697,7 @@
             <a:r>
               <a:rPr lang="en-US" sz="1200" dirty="0">
                 <a:solidFill>
-                  <a:srgbClr val="AFA9BE"/>
+                  <a:srgbClr val="C9C4D6"/>
                 </a:solidFill>
                 <a:latin typeface="Montserrat" pitchFamily="34" charset="0"/>
                 <a:ea typeface="Montserrat" pitchFamily="34" charset="-122"/>
@@ -17494,11 +17726,11 @@
             </a:avLst>
           </a:prstGeom>
           <a:solidFill>
-            <a:srgbClr val="17141F"/>
+            <a:srgbClr val="000000"/>
           </a:solidFill>
           <a:ln w="12700">
             <a:solidFill>
-              <a:srgbClr val="2E2A3A"/>
+              <a:srgbClr val="5E4F85"/>
             </a:solidFill>
             <a:prstDash val="solid"/>
           </a:ln>
@@ -17632,7 +17864,7 @@
             <a:r>
               <a:rPr lang="en-US" sz="1200" dirty="0">
                 <a:solidFill>
-                  <a:srgbClr val="AFA9BE"/>
+                  <a:srgbClr val="C9C4D6"/>
                 </a:solidFill>
                 <a:latin typeface="Montserrat" pitchFamily="34" charset="0"/>
                 <a:ea typeface="Montserrat" pitchFamily="34" charset="-122"/>
@@ -17661,11 +17893,11 @@
             </a:avLst>
           </a:prstGeom>
           <a:solidFill>
-            <a:srgbClr val="17141F"/>
+            <a:srgbClr val="000000"/>
           </a:solidFill>
           <a:ln w="12700">
             <a:solidFill>
-              <a:srgbClr val="2E2A3A"/>
+              <a:srgbClr val="5E4F85"/>
             </a:solidFill>
             <a:prstDash val="solid"/>
           </a:ln>
@@ -17799,7 +18031,7 @@
             <a:r>
               <a:rPr lang="en-US" sz="1200" dirty="0">
                 <a:solidFill>
-                  <a:srgbClr val="AFA9BE"/>
+                  <a:srgbClr val="C9C4D6"/>
                 </a:solidFill>
                 <a:latin typeface="Montserrat" pitchFamily="34" charset="0"/>
                 <a:ea typeface="Montserrat" pitchFamily="34" charset="-122"/>
@@ -17841,7 +18073,7 @@
             <a:lvl1pPr>
               <a:defRPr sz="850">
                 <a:solidFill>
-                  <a:srgbClr val="8A82A0"/>
+                  <a:srgbClr val="9A94AA"/>
                 </a:solidFill>
                 <a:latin typeface="Courier New"/>
                 <a:ea typeface="Courier New"/>
@@ -17940,7 +18172,7 @@
             </a:avLst>
           </a:prstGeom>
           <a:solidFill>
-            <a:srgbClr val="5FD6A0"/>
+            <a:srgbClr val="5A05F4"/>
           </a:solidFill>
           <a:ln/>
         </p:spPr>
@@ -17972,7 +18204,7 @@
             <a:r>
               <a:rPr lang="en-US" sz="900" b="1" spc="100" kern="0" dirty="0">
                 <a:solidFill>
-                  <a:srgbClr val="102A20"/>
+                  <a:srgbClr val="FFFFFF"/>
                 </a:solidFill>
                 <a:latin typeface="Courier New" pitchFamily="34" charset="0"/>
                 <a:ea typeface="Courier New" pitchFamily="34" charset="-122"/>
@@ -18025,9 +18257,14 @@
             </a:avLst>
           </a:prstGeom>
           <a:solidFill>
-            <a:srgbClr val="102A20"/>
-          </a:solidFill>
-          <a:ln/>
+            <a:srgbClr val="06180F"/>
+          </a:solidFill>
+          <a:ln w="12700">
+            <a:solidFill>
+              <a:srgbClr val="3FCF8E"/>
+            </a:solidFill>
+            <a:prstDash val="solid"/>
+          </a:ln>
         </p:spPr>
       </p:sp>
       <p:sp>
@@ -18045,7 +18282,7 @@
             <a:avLst/>
           </a:prstGeom>
           <a:solidFill>
-            <a:srgbClr val="5FD6A0"/>
+            <a:srgbClr val="5A05F4"/>
           </a:solidFill>
           <a:ln/>
         </p:spPr>
@@ -18077,7 +18314,7 @@
             <a:r>
               <a:rPr lang="en-US" sz="1200" b="1" dirty="0">
                 <a:solidFill>
-                  <a:srgbClr val="102A20"/>
+                  <a:srgbClr val="FFFFFF"/>
                 </a:solidFill>
                 <a:latin typeface="Courier New" pitchFamily="34" charset="0"/>
                 <a:ea typeface="Courier New" pitchFamily="34" charset="-122"/>
@@ -18116,7 +18353,7 @@
             <a:r>
               <a:rPr lang="en-US" sz="1450" b="1" dirty="0">
                 <a:solidFill>
-                  <a:srgbClr val="5FD6A0"/>
+                  <a:srgbClr val="3FCF8E"/>
                 </a:solidFill>
                 <a:latin typeface="Montserrat" pitchFamily="34" charset="0"/>
                 <a:ea typeface="Montserrat" pitchFamily="34" charset="-122"/>
@@ -18158,7 +18395,7 @@
             <a:r>
               <a:rPr lang="en-US" sz="1200" dirty="0">
                 <a:solidFill>
-                  <a:srgbClr val="FFFFFF"/>
+                  <a:srgbClr val="C9C4D6"/>
                 </a:solidFill>
                 <a:latin typeface="Montserrat" pitchFamily="34" charset="0"/>
                 <a:ea typeface="Montserrat" pitchFamily="34" charset="-122"/>
@@ -18187,9 +18424,14 @@
             </a:avLst>
           </a:prstGeom>
           <a:solidFill>
-            <a:srgbClr val="102A20"/>
-          </a:solidFill>
-          <a:ln/>
+            <a:srgbClr val="06180F"/>
+          </a:solidFill>
+          <a:ln w="12700">
+            <a:solidFill>
+              <a:srgbClr val="3FCF8E"/>
+            </a:solidFill>
+            <a:prstDash val="solid"/>
+          </a:ln>
         </p:spPr>
       </p:sp>
       <p:sp>
@@ -18207,7 +18449,7 @@
             <a:avLst/>
           </a:prstGeom>
           <a:solidFill>
-            <a:srgbClr val="5FD6A0"/>
+            <a:srgbClr val="5A05F4"/>
           </a:solidFill>
           <a:ln/>
         </p:spPr>
@@ -18239,7 +18481,7 @@
             <a:r>
               <a:rPr lang="en-US" sz="1200" b="1" dirty="0">
                 <a:solidFill>
-                  <a:srgbClr val="102A20"/>
+                  <a:srgbClr val="FFFFFF"/>
                 </a:solidFill>
                 <a:latin typeface="Courier New" pitchFamily="34" charset="0"/>
                 <a:ea typeface="Courier New" pitchFamily="34" charset="-122"/>
@@ -18278,7 +18520,7 @@
             <a:r>
               <a:rPr lang="en-US" sz="1450" b="1" dirty="0">
                 <a:solidFill>
-                  <a:srgbClr val="5FD6A0"/>
+                  <a:srgbClr val="3FCF8E"/>
                 </a:solidFill>
                 <a:latin typeface="Montserrat" pitchFamily="34" charset="0"/>
                 <a:ea typeface="Montserrat" pitchFamily="34" charset="-122"/>
@@ -18320,7 +18562,7 @@
             <a:r>
               <a:rPr lang="en-US" sz="1200" dirty="0">
                 <a:solidFill>
-                  <a:srgbClr val="FFFFFF"/>
+                  <a:srgbClr val="C9C4D6"/>
                 </a:solidFill>
                 <a:latin typeface="Montserrat" pitchFamily="34" charset="0"/>
                 <a:ea typeface="Montserrat" pitchFamily="34" charset="-122"/>
@@ -18349,9 +18591,14 @@
             </a:avLst>
           </a:prstGeom>
           <a:solidFill>
-            <a:srgbClr val="102A20"/>
-          </a:solidFill>
-          <a:ln/>
+            <a:srgbClr val="06180F"/>
+          </a:solidFill>
+          <a:ln w="12700">
+            <a:solidFill>
+              <a:srgbClr val="3FCF8E"/>
+            </a:solidFill>
+            <a:prstDash val="solid"/>
+          </a:ln>
         </p:spPr>
       </p:sp>
       <p:sp>
@@ -18369,7 +18616,7 @@
             <a:avLst/>
           </a:prstGeom>
           <a:solidFill>
-            <a:srgbClr val="5FD6A0"/>
+            <a:srgbClr val="5A05F4"/>
           </a:solidFill>
           <a:ln/>
         </p:spPr>
@@ -18401,7 +18648,7 @@
             <a:r>
               <a:rPr lang="en-US" sz="1200" b="1" dirty="0">
                 <a:solidFill>
-                  <a:srgbClr val="102A20"/>
+                  <a:srgbClr val="FFFFFF"/>
                 </a:solidFill>
                 <a:latin typeface="Courier New" pitchFamily="34" charset="0"/>
                 <a:ea typeface="Courier New" pitchFamily="34" charset="-122"/>
@@ -18440,7 +18687,7 @@
             <a:r>
               <a:rPr lang="en-US" sz="1450" b="1" dirty="0">
                 <a:solidFill>
-                  <a:srgbClr val="5FD6A0"/>
+                  <a:srgbClr val="3FCF8E"/>
                 </a:solidFill>
                 <a:latin typeface="Montserrat" pitchFamily="34" charset="0"/>
                 <a:ea typeface="Montserrat" pitchFamily="34" charset="-122"/>
@@ -18482,7 +18729,7 @@
             <a:r>
               <a:rPr lang="en-US" sz="1200" dirty="0">
                 <a:solidFill>
-                  <a:srgbClr val="FFFFFF"/>
+                  <a:srgbClr val="C9C4D6"/>
                 </a:solidFill>
                 <a:latin typeface="Montserrat" pitchFamily="34" charset="0"/>
                 <a:ea typeface="Montserrat" pitchFamily="34" charset="-122"/>
@@ -18511,9 +18758,14 @@
             </a:avLst>
           </a:prstGeom>
           <a:solidFill>
-            <a:srgbClr val="2E1418"/>
-          </a:solidFill>
-          <a:ln/>
+            <a:srgbClr val="1A0808"/>
+          </a:solidFill>
+          <a:ln w="12700">
+            <a:solidFill>
+              <a:srgbClr val="FF6B6B"/>
+            </a:solidFill>
+            <a:prstDash val="solid"/>
+          </a:ln>
         </p:spPr>
       </p:sp>
       <p:sp>
@@ -18531,7 +18783,7 @@
             <a:avLst/>
           </a:prstGeom>
           <a:solidFill>
-            <a:srgbClr val="FF7B7B"/>
+            <a:srgbClr val="5A05F4"/>
           </a:solidFill>
           <a:ln/>
         </p:spPr>
@@ -18563,7 +18815,7 @@
             <a:r>
               <a:rPr lang="en-US" sz="1200" b="1" dirty="0">
                 <a:solidFill>
-                  <a:srgbClr val="2E1418"/>
+                  <a:srgbClr val="FFFFFF"/>
                 </a:solidFill>
                 <a:latin typeface="Courier New" pitchFamily="34" charset="0"/>
                 <a:ea typeface="Courier New" pitchFamily="34" charset="-122"/>
@@ -18602,7 +18854,7 @@
             <a:r>
               <a:rPr lang="en-US" sz="1450" b="1" dirty="0">
                 <a:solidFill>
-                  <a:srgbClr val="FF7B7B"/>
+                  <a:srgbClr val="FF6B6B"/>
                 </a:solidFill>
                 <a:latin typeface="Montserrat" pitchFamily="34" charset="0"/>
                 <a:ea typeface="Montserrat" pitchFamily="34" charset="-122"/>
@@ -18644,7 +18896,7 @@
             <a:r>
               <a:rPr lang="en-US" sz="1200" dirty="0">
                 <a:solidFill>
-                  <a:srgbClr val="FFFFFF"/>
+                  <a:srgbClr val="C9C4D6"/>
                 </a:solidFill>
                 <a:latin typeface="Montserrat" pitchFamily="34" charset="0"/>
                 <a:ea typeface="Montserrat" pitchFamily="34" charset="-122"/>
@@ -18789,7 +19041,7 @@
             <a:lvl1pPr>
               <a:defRPr sz="850">
                 <a:solidFill>
-                  <a:srgbClr val="8A82A0"/>
+                  <a:srgbClr val="9A94AA"/>
                 </a:solidFill>
                 <a:latin typeface="Courier New"/>
                 <a:ea typeface="Courier New"/>
@@ -18888,7 +19140,7 @@
             </a:avLst>
           </a:prstGeom>
           <a:solidFill>
-            <a:srgbClr val="5FD6A0"/>
+            <a:srgbClr val="5A05F4"/>
           </a:solidFill>
           <a:ln/>
         </p:spPr>
@@ -18920,7 +19172,7 @@
             <a:r>
               <a:rPr lang="en-US" sz="900" b="1" spc="100" kern="0" dirty="0">
                 <a:solidFill>
-                  <a:srgbClr val="102A20"/>
+                  <a:srgbClr val="FFFFFF"/>
                 </a:solidFill>
                 <a:latin typeface="Courier New" pitchFamily="34" charset="0"/>
                 <a:ea typeface="Courier New" pitchFamily="34" charset="-122"/>
@@ -18971,7 +19223,7 @@
             <a:avLst/>
           </a:prstGeom>
           <a:solidFill>
-            <a:srgbClr val="C9A6FF"/>
+            <a:srgbClr val="A98BFF"/>
           </a:solidFill>
           <a:ln/>
         </p:spPr>
@@ -19003,7 +19255,7 @@
             <a:r>
               <a:rPr lang="en-US" sz="1300" b="1" dirty="0">
                 <a:solidFill>
-                  <a:srgbClr val="1C1140"/>
+                  <a:srgbClr val="1A0B3D"/>
                 </a:solidFill>
                 <a:latin typeface="Courier New" pitchFamily="34" charset="0"/>
                 <a:ea typeface="Courier New" pitchFamily="34" charset="-122"/>
@@ -19056,7 +19308,7 @@
             <a:r>
               <a:rPr lang="en-US" sz="1200" dirty="0">
                 <a:solidFill>
-                  <a:srgbClr val="AFA9BE"/>
+                  <a:srgbClr val="C9C4D6"/>
                 </a:solidFill>
                 <a:latin typeface="Montserrat" pitchFamily="34" charset="0"/>
                 <a:ea typeface="Montserrat" pitchFamily="34" charset="-122"/>
@@ -19083,7 +19335,7 @@
             <a:avLst/>
           </a:prstGeom>
           <a:solidFill>
-            <a:srgbClr val="C9A6FF"/>
+            <a:srgbClr val="A98BFF"/>
           </a:solidFill>
           <a:ln/>
         </p:spPr>
@@ -19115,7 +19367,7 @@
             <a:r>
               <a:rPr lang="en-US" sz="1300" b="1" dirty="0">
                 <a:solidFill>
-                  <a:srgbClr val="1C1140"/>
+                  <a:srgbClr val="1A0B3D"/>
                 </a:solidFill>
                 <a:latin typeface="Courier New" pitchFamily="34" charset="0"/>
                 <a:ea typeface="Courier New" pitchFamily="34" charset="-122"/>
@@ -19168,7 +19420,7 @@
             <a:r>
               <a:rPr lang="en-US" sz="1200" dirty="0">
                 <a:solidFill>
-                  <a:srgbClr val="AFA9BE"/>
+                  <a:srgbClr val="C9C4D6"/>
                 </a:solidFill>
                 <a:latin typeface="Montserrat" pitchFamily="34" charset="0"/>
                 <a:ea typeface="Montserrat" pitchFamily="34" charset="-122"/>
@@ -19195,7 +19447,7 @@
             <a:avLst/>
           </a:prstGeom>
           <a:solidFill>
-            <a:srgbClr val="C9A6FF"/>
+            <a:srgbClr val="A98BFF"/>
           </a:solidFill>
           <a:ln/>
         </p:spPr>
@@ -19227,7 +19479,7 @@
             <a:r>
               <a:rPr lang="en-US" sz="1300" b="1" dirty="0">
                 <a:solidFill>
-                  <a:srgbClr val="1C1140"/>
+                  <a:srgbClr val="1A0B3D"/>
                 </a:solidFill>
                 <a:latin typeface="Courier New" pitchFamily="34" charset="0"/>
                 <a:ea typeface="Courier New" pitchFamily="34" charset="-122"/>
@@ -19280,7 +19532,7 @@
             <a:r>
               <a:rPr lang="en-US" sz="1200" dirty="0">
                 <a:solidFill>
-                  <a:srgbClr val="AFA9BE"/>
+                  <a:srgbClr val="C9C4D6"/>
                 </a:solidFill>
                 <a:latin typeface="Montserrat" pitchFamily="34" charset="0"/>
                 <a:ea typeface="Montserrat" pitchFamily="34" charset="-122"/>
@@ -19307,7 +19559,7 @@
             <a:avLst/>
           </a:prstGeom>
           <a:solidFill>
-            <a:srgbClr val="C9A6FF"/>
+            <a:srgbClr val="A98BFF"/>
           </a:solidFill>
           <a:ln/>
         </p:spPr>
@@ -19339,7 +19591,7 @@
             <a:r>
               <a:rPr lang="en-US" sz="1300" b="1" dirty="0">
                 <a:solidFill>
-                  <a:srgbClr val="1C1140"/>
+                  <a:srgbClr val="1A0B3D"/>
                 </a:solidFill>
                 <a:latin typeface="Courier New" pitchFamily="34" charset="0"/>
                 <a:ea typeface="Courier New" pitchFamily="34" charset="-122"/>
@@ -19392,7 +19644,7 @@
             <a:r>
               <a:rPr lang="en-US" sz="1200" dirty="0">
                 <a:solidFill>
-                  <a:srgbClr val="AFA9BE"/>
+                  <a:srgbClr val="C9C4D6"/>
                 </a:solidFill>
                 <a:latin typeface="Montserrat" pitchFamily="34" charset="0"/>
                 <a:ea typeface="Montserrat" pitchFamily="34" charset="-122"/>
@@ -19419,7 +19671,7 @@
             <a:avLst/>
           </a:prstGeom>
           <a:solidFill>
-            <a:srgbClr val="E8A857"/>
+            <a:srgbClr val="6BA0F8"/>
           </a:solidFill>
           <a:ln/>
         </p:spPr>
@@ -19451,7 +19703,7 @@
             <a:r>
               <a:rPr lang="en-US" sz="1300" b="1" dirty="0">
                 <a:solidFill>
-                  <a:srgbClr val="2A2010"/>
+                  <a:srgbClr val="0B1A38"/>
                 </a:solidFill>
                 <a:latin typeface="Courier New" pitchFamily="34" charset="0"/>
                 <a:ea typeface="Courier New" pitchFamily="34" charset="-122"/>
@@ -19490,7 +19742,7 @@
             <a:r>
               <a:rPr lang="en-US" sz="1400" b="1" dirty="0">
                 <a:solidFill>
-                  <a:srgbClr val="E8A857"/>
+                  <a:srgbClr val="6BA0F8"/>
                 </a:solidFill>
                 <a:latin typeface="Montserrat" pitchFamily="34" charset="0"/>
                 <a:ea typeface="Montserrat" pitchFamily="34" charset="-122"/>
@@ -19504,7 +19756,7 @@
             <a:r>
               <a:rPr lang="en-US" sz="1200" dirty="0">
                 <a:solidFill>
-                  <a:srgbClr val="AFA9BE"/>
+                  <a:srgbClr val="C9C4D6"/>
                 </a:solidFill>
                 <a:latin typeface="Montserrat" pitchFamily="34" charset="0"/>
                 <a:ea typeface="Montserrat" pitchFamily="34" charset="-122"/>
@@ -19546,7 +19798,7 @@
             <a:lvl1pPr>
               <a:defRPr sz="850">
                 <a:solidFill>
-                  <a:srgbClr val="8A82A0"/>
+                  <a:srgbClr val="9A94AA"/>
                 </a:solidFill>
                 <a:latin typeface="Courier New"/>
                 <a:ea typeface="Courier New"/>
@@ -19645,9 +19897,14 @@
             </a:avLst>
           </a:prstGeom>
           <a:solidFill>
-            <a:srgbClr val="E8A857"/>
-          </a:solidFill>
-          <a:ln/>
+            <a:srgbClr val="0B1A38"/>
+          </a:solidFill>
+          <a:ln w="12700">
+            <a:solidFill>
+              <a:srgbClr val="6BA0F8"/>
+            </a:solidFill>
+            <a:prstDash val="solid"/>
+          </a:ln>
         </p:spPr>
       </p:sp>
       <p:sp>
@@ -19677,7 +19934,7 @@
             <a:r>
               <a:rPr lang="en-US" sz="900" b="1" spc="100" kern="0" dirty="0">
                 <a:solidFill>
-                  <a:srgbClr val="2A2010"/>
+                  <a:srgbClr val="6BA0F8"/>
                 </a:solidFill>
                 <a:latin typeface="Courier New" pitchFamily="34" charset="0"/>
                 <a:ea typeface="Courier New" pitchFamily="34" charset="-122"/>
@@ -19730,9 +19987,14 @@
             </a:avLst>
           </a:prstGeom>
           <a:solidFill>
-            <a:srgbClr val="102A20"/>
-          </a:solidFill>
-          <a:ln/>
+            <a:srgbClr val="06180F"/>
+          </a:solidFill>
+          <a:ln w="12700">
+            <a:solidFill>
+              <a:srgbClr val="3FCF8E"/>
+            </a:solidFill>
+            <a:prstDash val="solid"/>
+          </a:ln>
         </p:spPr>
       </p:sp>
       <p:sp>
@@ -19762,7 +20024,7 @@
             <a:r>
               <a:rPr lang="en-US" sz="1450" b="1" dirty="0">
                 <a:solidFill>
-                  <a:srgbClr val="5FD6A0"/>
+                  <a:srgbClr val="3FCF8E"/>
                 </a:solidFill>
                 <a:latin typeface="Montserrat" pitchFamily="34" charset="0"/>
                 <a:ea typeface="Montserrat" pitchFamily="34" charset="-122"/>
@@ -19804,7 +20066,7 @@
             <a:r>
               <a:rPr lang="en-US" sz="1200" dirty="0">
                 <a:solidFill>
-                  <a:srgbClr val="FFFFFF"/>
+                  <a:srgbClr val="C9C4D6"/>
                 </a:solidFill>
                 <a:latin typeface="Montserrat" pitchFamily="34" charset="0"/>
                 <a:ea typeface="Montserrat" pitchFamily="34" charset="-122"/>
@@ -19833,9 +20095,14 @@
             </a:avLst>
           </a:prstGeom>
           <a:solidFill>
-            <a:srgbClr val="1C1140"/>
-          </a:solidFill>
-          <a:ln/>
+            <a:srgbClr val="1A0B3D"/>
+          </a:solidFill>
+          <a:ln w="12700">
+            <a:solidFill>
+              <a:srgbClr val="5A05F4"/>
+            </a:solidFill>
+            <a:prstDash val="solid"/>
+          </a:ln>
         </p:spPr>
       </p:sp>
       <p:sp>
@@ -19865,7 +20132,7 @@
             <a:r>
               <a:rPr lang="en-US" sz="1450" b="1" dirty="0">
                 <a:solidFill>
-                  <a:srgbClr val="C9A6FF"/>
+                  <a:srgbClr val="A98BFF"/>
                 </a:solidFill>
                 <a:latin typeface="Montserrat" pitchFamily="34" charset="0"/>
                 <a:ea typeface="Montserrat" pitchFamily="34" charset="-122"/>
@@ -19907,7 +20174,7 @@
             <a:r>
               <a:rPr lang="en-US" sz="1200" dirty="0">
                 <a:solidFill>
-                  <a:srgbClr val="FFFFFF"/>
+                  <a:srgbClr val="C9C4D6"/>
                 </a:solidFill>
                 <a:latin typeface="Montserrat" pitchFamily="34" charset="0"/>
                 <a:ea typeface="Montserrat" pitchFamily="34" charset="-122"/>
@@ -19936,9 +20203,14 @@
             </a:avLst>
           </a:prstGeom>
           <a:solidFill>
-            <a:srgbClr val="2E1418"/>
-          </a:solidFill>
-          <a:ln/>
+            <a:srgbClr val="1A0808"/>
+          </a:solidFill>
+          <a:ln w="12700">
+            <a:solidFill>
+              <a:srgbClr val="FF6B6B"/>
+            </a:solidFill>
+            <a:prstDash val="solid"/>
+          </a:ln>
         </p:spPr>
       </p:sp>
       <p:sp>
@@ -19968,7 +20240,7 @@
             <a:r>
               <a:rPr lang="en-US" sz="1450" b="1" dirty="0">
                 <a:solidFill>
-                  <a:srgbClr val="FF7B7B"/>
+                  <a:srgbClr val="FF6B6B"/>
                 </a:solidFill>
                 <a:latin typeface="Montserrat" pitchFamily="34" charset="0"/>
                 <a:ea typeface="Montserrat" pitchFamily="34" charset="-122"/>
@@ -20010,7 +20282,7 @@
             <a:r>
               <a:rPr lang="en-US" sz="1200" dirty="0">
                 <a:solidFill>
-                  <a:srgbClr val="FFFFFF"/>
+                  <a:srgbClr val="C9C4D6"/>
                 </a:solidFill>
                 <a:latin typeface="Montserrat" pitchFamily="34" charset="0"/>
                 <a:ea typeface="Montserrat" pitchFamily="34" charset="-122"/>
@@ -20039,11 +20311,11 @@
             </a:avLst>
           </a:prstGeom>
           <a:solidFill>
-            <a:srgbClr val="17141F"/>
+            <a:srgbClr val="000000"/>
           </a:solidFill>
           <a:ln w="12700">
             <a:solidFill>
-              <a:srgbClr val="2E2A3A"/>
+              <a:srgbClr val="5E4F85"/>
             </a:solidFill>
             <a:prstDash val="solid"/>
           </a:ln>
@@ -20121,7 +20393,7 @@
             <a:lvl1pPr>
               <a:defRPr sz="850">
                 <a:solidFill>
-                  <a:srgbClr val="8A82A0"/>
+                  <a:srgbClr val="9A94AA"/>
                 </a:solidFill>
                 <a:latin typeface="Courier New"/>
                 <a:ea typeface="Courier New"/>
@@ -20220,9 +20492,14 @@
             </a:avLst>
           </a:prstGeom>
           <a:solidFill>
-            <a:srgbClr val="E8A857"/>
-          </a:solidFill>
-          <a:ln/>
+            <a:srgbClr val="0B1A38"/>
+          </a:solidFill>
+          <a:ln w="12700">
+            <a:solidFill>
+              <a:srgbClr val="6BA0F8"/>
+            </a:solidFill>
+            <a:prstDash val="solid"/>
+          </a:ln>
         </p:spPr>
       </p:sp>
       <p:sp>
@@ -20252,7 +20529,7 @@
             <a:r>
               <a:rPr lang="en-US" sz="900" b="1" spc="100" kern="0" dirty="0">
                 <a:solidFill>
-                  <a:srgbClr val="2A2010"/>
+                  <a:srgbClr val="6BA0F8"/>
                 </a:solidFill>
                 <a:latin typeface="Courier New" pitchFamily="34" charset="0"/>
                 <a:ea typeface="Courier New" pitchFamily="34" charset="-122"/>
@@ -20305,11 +20582,11 @@
             </a:avLst>
           </a:prstGeom>
           <a:solidFill>
-            <a:srgbClr val="17141F"/>
+            <a:srgbClr val="000000"/>
           </a:solidFill>
           <a:ln w="12700">
             <a:solidFill>
-              <a:srgbClr val="2E2A3A"/>
+              <a:srgbClr val="5E4F85"/>
             </a:solidFill>
             <a:prstDash val="solid"/>
           </a:ln>
@@ -20332,11 +20609,11 @@
             </a:avLst>
           </a:prstGeom>
           <a:solidFill>
-            <a:srgbClr val="1C1140"/>
+            <a:srgbClr val="1A0B3D"/>
           </a:solidFill>
           <a:ln w="12700">
             <a:solidFill>
-              <a:srgbClr val="C9A6FF"/>
+              <a:srgbClr val="A98BFF"/>
             </a:solidFill>
             <a:prstDash val="solid"/>
           </a:ln>
@@ -20357,7 +20634,7 @@
             <a:avLst/>
           </a:prstGeom>
           <a:solidFill>
-            <a:srgbClr val="C9A6FF"/>
+            <a:srgbClr val="A98BFF"/>
           </a:solidFill>
           <a:ln/>
         </p:spPr>
@@ -20377,7 +20654,7 @@
             <a:avLst/>
           </a:prstGeom>
           <a:solidFill>
-            <a:srgbClr val="C9A6FF"/>
+            <a:srgbClr val="A98BFF"/>
           </a:solidFill>
           <a:ln/>
         </p:spPr>
@@ -20438,11 +20715,11 @@
             </a:avLst>
           </a:prstGeom>
           <a:solidFill>
-            <a:srgbClr val="1C1140"/>
+            <a:srgbClr val="1A0B3D"/>
           </a:solidFill>
           <a:ln w="12700">
             <a:solidFill>
-              <a:srgbClr val="C9A6FF"/>
+              <a:srgbClr val="A98BFF"/>
             </a:solidFill>
             <a:prstDash val="solid"/>
           </a:ln>
@@ -20463,7 +20740,7 @@
             <a:avLst/>
           </a:prstGeom>
           <a:solidFill>
-            <a:srgbClr val="C9A6FF"/>
+            <a:srgbClr val="A98BFF"/>
           </a:solidFill>
           <a:ln/>
         </p:spPr>
@@ -20483,7 +20760,7 @@
             <a:avLst/>
           </a:prstGeom>
           <a:solidFill>
-            <a:srgbClr val="C9A6FF"/>
+            <a:srgbClr val="A98BFF"/>
           </a:solidFill>
           <a:ln/>
         </p:spPr>
@@ -20544,11 +20821,11 @@
             </a:avLst>
           </a:prstGeom>
           <a:solidFill>
-            <a:srgbClr val="1C1140"/>
+            <a:srgbClr val="1A0B3D"/>
           </a:solidFill>
           <a:ln w="12700">
             <a:solidFill>
-              <a:srgbClr val="C9A6FF"/>
+              <a:srgbClr val="A98BFF"/>
             </a:solidFill>
             <a:prstDash val="solid"/>
           </a:ln>
@@ -20569,7 +20846,7 @@
             <a:avLst/>
           </a:prstGeom>
           <a:solidFill>
-            <a:srgbClr val="C9A6FF"/>
+            <a:srgbClr val="A98BFF"/>
           </a:solidFill>
           <a:ln/>
         </p:spPr>
@@ -20589,7 +20866,7 @@
             <a:avLst/>
           </a:prstGeom>
           <a:solidFill>
-            <a:srgbClr val="C9A6FF"/>
+            <a:srgbClr val="A98BFF"/>
           </a:solidFill>
           <a:ln/>
         </p:spPr>
@@ -20650,11 +20927,11 @@
             </a:avLst>
           </a:prstGeom>
           <a:solidFill>
-            <a:srgbClr val="1C1140"/>
+            <a:srgbClr val="1A0B3D"/>
           </a:solidFill>
           <a:ln w="12700">
             <a:solidFill>
-              <a:srgbClr val="C9A6FF"/>
+              <a:srgbClr val="A98BFF"/>
             </a:solidFill>
             <a:prstDash val="solid"/>
           </a:ln>
@@ -20675,7 +20952,7 @@
             <a:avLst/>
           </a:prstGeom>
           <a:solidFill>
-            <a:srgbClr val="C9A6FF"/>
+            <a:srgbClr val="A98BFF"/>
           </a:solidFill>
           <a:ln/>
         </p:spPr>
@@ -20695,7 +20972,7 @@
             <a:avLst/>
           </a:prstGeom>
           <a:solidFill>
-            <a:srgbClr val="C9A6FF"/>
+            <a:srgbClr val="A98BFF"/>
           </a:solidFill>
           <a:ln/>
         </p:spPr>
@@ -20766,7 +21043,7 @@
             <a:r>
               <a:rPr lang="en-US" sz="1200" i="1" dirty="0">
                 <a:solidFill>
-                  <a:srgbClr val="8A82A0"/>
+                  <a:srgbClr val="9A94AA"/>
                 </a:solidFill>
                 <a:latin typeface="Montserrat" pitchFamily="34" charset="0"/>
                 <a:ea typeface="Montserrat" pitchFamily="34" charset="-122"/>
@@ -20808,7 +21085,7 @@
             <a:lvl1pPr>
               <a:defRPr sz="850">
                 <a:solidFill>
-                  <a:srgbClr val="8A82A0"/>
+                  <a:srgbClr val="9A94AA"/>
                 </a:solidFill>
                 <a:latin typeface="Courier New"/>
                 <a:ea typeface="Courier New"/>
@@ -20907,9 +21184,14 @@
             </a:avLst>
           </a:prstGeom>
           <a:solidFill>
-            <a:srgbClr val="E8A857"/>
-          </a:solidFill>
-          <a:ln/>
+            <a:srgbClr val="0B1A38"/>
+          </a:solidFill>
+          <a:ln w="12700">
+            <a:solidFill>
+              <a:srgbClr val="6BA0F8"/>
+            </a:solidFill>
+            <a:prstDash val="solid"/>
+          </a:ln>
         </p:spPr>
       </p:sp>
       <p:sp>
@@ -20939,7 +21221,7 @@
             <a:r>
               <a:rPr lang="en-US" sz="900" b="1" spc="100" kern="0" dirty="0">
                 <a:solidFill>
-                  <a:srgbClr val="2A2010"/>
+                  <a:srgbClr val="6BA0F8"/>
                 </a:solidFill>
                 <a:latin typeface="Courier New" pitchFamily="34" charset="0"/>
                 <a:ea typeface="Courier New" pitchFamily="34" charset="-122"/>
@@ -20992,11 +21274,11 @@
             </a:avLst>
           </a:prstGeom>
           <a:solidFill>
-            <a:srgbClr val="17141F"/>
+            <a:srgbClr val="000000"/>
           </a:solidFill>
           <a:ln w="12700">
             <a:solidFill>
-              <a:srgbClr val="2E2A3A"/>
+              <a:srgbClr val="5E4F85"/>
             </a:solidFill>
             <a:prstDash val="solid"/>
           </a:ln>
@@ -21017,7 +21299,7 @@
             <a:avLst/>
           </a:prstGeom>
           <a:solidFill>
-            <a:srgbClr val="2E1418"/>
+            <a:srgbClr val="1A0808"/>
           </a:solidFill>
           <a:ln/>
         </p:spPr>
@@ -21037,7 +21319,7 @@
             <a:avLst/>
           </a:prstGeom>
           <a:solidFill>
-            <a:srgbClr val="FF7B7B"/>
+            <a:srgbClr val="FF6B6B"/>
           </a:solidFill>
           <a:ln/>
         </p:spPr>
@@ -21057,7 +21339,7 @@
             <a:avLst/>
           </a:prstGeom>
           <a:solidFill>
-            <a:srgbClr val="FF7B7B"/>
+            <a:srgbClr val="FF6B6B"/>
           </a:solidFill>
           <a:ln/>
         </p:spPr>
@@ -21103,7 +21385,7 @@
             <a:r>
               <a:rPr lang="en-US" sz="1150" dirty="0">
                 <a:solidFill>
-                  <a:srgbClr val="AFA9BE"/>
+                  <a:srgbClr val="C9C4D6"/>
                 </a:solidFill>
                 <a:latin typeface="Montserrat" pitchFamily="34" charset="0"/>
                 <a:ea typeface="Montserrat" pitchFamily="34" charset="-122"/>
@@ -21132,11 +21414,11 @@
             </a:avLst>
           </a:prstGeom>
           <a:solidFill>
-            <a:srgbClr val="17141F"/>
+            <a:srgbClr val="000000"/>
           </a:solidFill>
           <a:ln w="12700">
             <a:solidFill>
-              <a:srgbClr val="2E2A3A"/>
+              <a:srgbClr val="5E4F85"/>
             </a:solidFill>
             <a:prstDash val="solid"/>
           </a:ln>
@@ -21157,7 +21439,7 @@
             <a:avLst/>
           </a:prstGeom>
           <a:solidFill>
-            <a:srgbClr val="2E1418"/>
+            <a:srgbClr val="1A0808"/>
           </a:solidFill>
           <a:ln/>
         </p:spPr>
@@ -21177,7 +21459,7 @@
             <a:avLst/>
           </a:prstGeom>
           <a:solidFill>
-            <a:srgbClr val="FF7B7B"/>
+            <a:srgbClr val="FF6B6B"/>
           </a:solidFill>
           <a:ln/>
         </p:spPr>
@@ -21197,7 +21479,7 @@
             <a:avLst/>
           </a:prstGeom>
           <a:solidFill>
-            <a:srgbClr val="FF7B7B"/>
+            <a:srgbClr val="FF6B6B"/>
           </a:solidFill>
           <a:ln/>
         </p:spPr>
@@ -21243,7 +21525,7 @@
             <a:r>
               <a:rPr lang="en-US" sz="1150" dirty="0">
                 <a:solidFill>
-                  <a:srgbClr val="AFA9BE"/>
+                  <a:srgbClr val="C9C4D6"/>
                 </a:solidFill>
                 <a:latin typeface="Montserrat" pitchFamily="34" charset="0"/>
                 <a:ea typeface="Montserrat" pitchFamily="34" charset="-122"/>
@@ -21272,11 +21554,11 @@
             </a:avLst>
           </a:prstGeom>
           <a:solidFill>
-            <a:srgbClr val="17141F"/>
+            <a:srgbClr val="000000"/>
           </a:solidFill>
           <a:ln w="12700">
             <a:solidFill>
-              <a:srgbClr val="2E2A3A"/>
+              <a:srgbClr val="5E4F85"/>
             </a:solidFill>
             <a:prstDash val="solid"/>
           </a:ln>
@@ -21297,7 +21579,7 @@
             <a:avLst/>
           </a:prstGeom>
           <a:solidFill>
-            <a:srgbClr val="2E1418"/>
+            <a:srgbClr val="1A0808"/>
           </a:solidFill>
           <a:ln/>
         </p:spPr>
@@ -21317,7 +21599,7 @@
             <a:avLst/>
           </a:prstGeom>
           <a:solidFill>
-            <a:srgbClr val="FF7B7B"/>
+            <a:srgbClr val="FF6B6B"/>
           </a:solidFill>
           <a:ln/>
         </p:spPr>
@@ -21337,7 +21619,7 @@
             <a:avLst/>
           </a:prstGeom>
           <a:solidFill>
-            <a:srgbClr val="FF7B7B"/>
+            <a:srgbClr val="FF6B6B"/>
           </a:solidFill>
           <a:ln/>
         </p:spPr>
@@ -21383,7 +21665,7 @@
             <a:r>
               <a:rPr lang="en-US" sz="1150" dirty="0">
                 <a:solidFill>
-                  <a:srgbClr val="AFA9BE"/>
+                  <a:srgbClr val="C9C4D6"/>
                 </a:solidFill>
                 <a:latin typeface="Montserrat" pitchFamily="34" charset="0"/>
                 <a:ea typeface="Montserrat" pitchFamily="34" charset="-122"/>
@@ -21412,11 +21694,11 @@
             </a:avLst>
           </a:prstGeom>
           <a:solidFill>
-            <a:srgbClr val="17141F"/>
+            <a:srgbClr val="000000"/>
           </a:solidFill>
           <a:ln w="12700">
             <a:solidFill>
-              <a:srgbClr val="2E2A3A"/>
+              <a:srgbClr val="5E4F85"/>
             </a:solidFill>
             <a:prstDash val="solid"/>
           </a:ln>
@@ -21437,7 +21719,7 @@
             <a:avLst/>
           </a:prstGeom>
           <a:solidFill>
-            <a:srgbClr val="2E1418"/>
+            <a:srgbClr val="1A0808"/>
           </a:solidFill>
           <a:ln/>
         </p:spPr>
@@ -21457,7 +21739,7 @@
             <a:avLst/>
           </a:prstGeom>
           <a:solidFill>
-            <a:srgbClr val="FF7B7B"/>
+            <a:srgbClr val="FF6B6B"/>
           </a:solidFill>
           <a:ln/>
         </p:spPr>
@@ -21477,7 +21759,7 @@
             <a:avLst/>
           </a:prstGeom>
           <a:solidFill>
-            <a:srgbClr val="FF7B7B"/>
+            <a:srgbClr val="FF6B6B"/>
           </a:solidFill>
           <a:ln/>
         </p:spPr>
@@ -21523,7 +21805,7 @@
             <a:r>
               <a:rPr lang="en-US" sz="1150" dirty="0">
                 <a:solidFill>
-                  <a:srgbClr val="AFA9BE"/>
+                  <a:srgbClr val="C9C4D6"/>
                 </a:solidFill>
                 <a:latin typeface="Montserrat" pitchFamily="34" charset="0"/>
                 <a:ea typeface="Montserrat" pitchFamily="34" charset="-122"/>
@@ -21552,11 +21834,11 @@
             </a:avLst>
           </a:prstGeom>
           <a:solidFill>
-            <a:srgbClr val="17141F"/>
+            <a:srgbClr val="000000"/>
           </a:solidFill>
           <a:ln w="12700">
             <a:solidFill>
-              <a:srgbClr val="2E2A3A"/>
+              <a:srgbClr val="5E4F85"/>
             </a:solidFill>
             <a:prstDash val="solid"/>
           </a:ln>
@@ -21577,7 +21859,7 @@
             <a:avLst/>
           </a:prstGeom>
           <a:solidFill>
-            <a:srgbClr val="2E1418"/>
+            <a:srgbClr val="1A0808"/>
           </a:solidFill>
           <a:ln/>
         </p:spPr>
@@ -21597,7 +21879,7 @@
             <a:avLst/>
           </a:prstGeom>
           <a:solidFill>
-            <a:srgbClr val="FF7B7B"/>
+            <a:srgbClr val="FF6B6B"/>
           </a:solidFill>
           <a:ln/>
         </p:spPr>
@@ -21617,7 +21899,7 @@
             <a:avLst/>
           </a:prstGeom>
           <a:solidFill>
-            <a:srgbClr val="FF7B7B"/>
+            <a:srgbClr val="FF6B6B"/>
           </a:solidFill>
           <a:ln/>
         </p:spPr>
@@ -21663,7 +21945,7 @@
             <a:r>
               <a:rPr lang="en-US" sz="1150" dirty="0">
                 <a:solidFill>
-                  <a:srgbClr val="AFA9BE"/>
+                  <a:srgbClr val="C9C4D6"/>
                 </a:solidFill>
                 <a:latin typeface="Montserrat" pitchFamily="34" charset="0"/>
                 <a:ea typeface="Montserrat" pitchFamily="34" charset="-122"/>
@@ -21705,7 +21987,7 @@
             <a:lvl1pPr>
               <a:defRPr sz="850">
                 <a:solidFill>
-                  <a:srgbClr val="8A82A0"/>
+                  <a:srgbClr val="9A94AA"/>
                 </a:solidFill>
                 <a:latin typeface="Courier New"/>
                 <a:ea typeface="Courier New"/>
@@ -21804,7 +22086,7 @@
             </a:avLst>
           </a:prstGeom>
           <a:solidFill>
-            <a:srgbClr val="5FD6A0"/>
+            <a:srgbClr val="5A05F4"/>
           </a:solidFill>
           <a:ln/>
         </p:spPr>
@@ -21836,7 +22118,7 @@
             <a:r>
               <a:rPr lang="en-US" sz="900" b="1" spc="100" kern="0" dirty="0">
                 <a:solidFill>
-                  <a:srgbClr val="102A20"/>
+                  <a:srgbClr val="FFFFFF"/>
                 </a:solidFill>
                 <a:latin typeface="Courier New" pitchFamily="34" charset="0"/>
                 <a:ea typeface="Courier New" pitchFamily="34" charset="-122"/>
@@ -21889,11 +22171,11 @@
             </a:avLst>
           </a:prstGeom>
           <a:solidFill>
-            <a:srgbClr val="17141F"/>
+            <a:srgbClr val="000000"/>
           </a:solidFill>
           <a:ln w="12700">
             <a:solidFill>
-              <a:srgbClr val="2E2A3A"/>
+              <a:srgbClr val="5E4F85"/>
             </a:solidFill>
             <a:prstDash val="solid"/>
           </a:ln>
@@ -21968,7 +22250,7 @@
             <a:r>
               <a:rPr lang="en-US" sz="1200" dirty="0">
                 <a:solidFill>
-                  <a:srgbClr val="AFA9BE"/>
+                  <a:srgbClr val="C9C4D6"/>
                 </a:solidFill>
                 <a:latin typeface="Montserrat" pitchFamily="34" charset="0"/>
                 <a:ea typeface="Montserrat" pitchFamily="34" charset="-122"/>
@@ -21997,7 +22279,7 @@
             <a:r>
               <a:rPr lang="en-US" sz="1200" dirty="0">
                 <a:solidFill>
-                  <a:srgbClr val="AFA9BE"/>
+                  <a:srgbClr val="C9C4D6"/>
                 </a:solidFill>
                 <a:latin typeface="Montserrat" pitchFamily="34" charset="0"/>
                 <a:ea typeface="Montserrat" pitchFamily="34" charset="-122"/>
@@ -22026,7 +22308,7 @@
             <a:r>
               <a:rPr lang="en-US" sz="1200" dirty="0">
                 <a:solidFill>
-                  <a:srgbClr val="AFA9BE"/>
+                  <a:srgbClr val="C9C4D6"/>
                 </a:solidFill>
                 <a:latin typeface="Montserrat" pitchFamily="34" charset="0"/>
                 <a:ea typeface="Montserrat" pitchFamily="34" charset="-122"/>
@@ -22055,9 +22337,14 @@
             </a:avLst>
           </a:prstGeom>
           <a:solidFill>
-            <a:srgbClr val="2A2010"/>
-          </a:solidFill>
-          <a:ln/>
+            <a:srgbClr val="0B1A38"/>
+          </a:solidFill>
+          <a:ln w="12700">
+            <a:solidFill>
+              <a:srgbClr val="6BA0F8"/>
+            </a:solidFill>
+            <a:prstDash val="solid"/>
+          </a:ln>
         </p:spPr>
       </p:sp>
       <p:sp>
@@ -22087,7 +22374,7 @@
             <a:r>
               <a:rPr lang="en-US" sz="1450" b="1" dirty="0">
                 <a:solidFill>
-                  <a:srgbClr val="E8A857"/>
+                  <a:srgbClr val="6BA0F8"/>
                 </a:solidFill>
                 <a:latin typeface="Montserrat" pitchFamily="34" charset="0"/>
                 <a:ea typeface="Montserrat" pitchFamily="34" charset="-122"/>
@@ -22129,7 +22416,7 @@
             <a:r>
               <a:rPr lang="en-US" sz="1200" dirty="0">
                 <a:solidFill>
-                  <a:srgbClr val="FFFFFF"/>
+                  <a:srgbClr val="C9C4D6"/>
                 </a:solidFill>
                 <a:latin typeface="Montserrat" pitchFamily="34" charset="0"/>
                 <a:ea typeface="Montserrat" pitchFamily="34" charset="-122"/>
@@ -22158,11 +22445,11 @@
             </a:avLst>
           </a:prstGeom>
           <a:solidFill>
-            <a:srgbClr val="17141F"/>
+            <a:srgbClr val="000000"/>
           </a:solidFill>
           <a:ln w="19050">
             <a:solidFill>
-              <a:srgbClr val="C9A6FF"/>
+              <a:srgbClr val="A98BFF"/>
             </a:solidFill>
             <a:prstDash val="solid"/>
           </a:ln>
@@ -22195,7 +22482,7 @@
             <a:r>
               <a:rPr lang="en-US" sz="1500" b="1" dirty="0">
                 <a:solidFill>
-                  <a:srgbClr val="C9A6FF"/>
+                  <a:srgbClr val="A98BFF"/>
                 </a:solidFill>
                 <a:latin typeface="Montserrat" pitchFamily="34" charset="0"/>
                 <a:ea typeface="Montserrat" pitchFamily="34" charset="-122"/>
@@ -22276,7 +22563,7 @@
             <a:lvl1pPr>
               <a:defRPr sz="850">
                 <a:solidFill>
-                  <a:srgbClr val="8A82A0"/>
+                  <a:srgbClr val="9A94AA"/>
                 </a:solidFill>
                 <a:latin typeface="Courier New"/>
                 <a:ea typeface="Courier New"/>
@@ -22385,7 +22672,7 @@
             <a:r>
               <a:rPr lang="en-US" sz="1100" b="1" spc="300" kern="0" dirty="0">
                 <a:solidFill>
-                  <a:srgbClr val="C9B8FB"/>
+                  <a:srgbClr val="C4B3F5"/>
                 </a:solidFill>
                 <a:latin typeface="Courier New" pitchFamily="34" charset="0"/>
                 <a:ea typeface="Courier New" pitchFamily="34" charset="-122"/>
@@ -22724,11 +23011,11 @@
             </a:avLst>
           </a:prstGeom>
           <a:solidFill>
-            <a:srgbClr val="17141F"/>
+            <a:srgbClr val="000000"/>
           </a:solidFill>
           <a:ln w="12700">
             <a:solidFill>
-              <a:srgbClr val="2E2A3A"/>
+              <a:srgbClr val="5E4F85"/>
             </a:solidFill>
             <a:prstDash val="solid"/>
           </a:ln>
@@ -22761,7 +23048,7 @@
             <a:r>
               <a:rPr lang="en-US" sz="1500" b="1" dirty="0">
                 <a:solidFill>
-                  <a:srgbClr val="C9A6FF"/>
+                  <a:srgbClr val="A98BFF"/>
                 </a:solidFill>
                 <a:latin typeface="Montserrat" pitchFamily="34" charset="0"/>
                 <a:ea typeface="Montserrat" pitchFamily="34" charset="-122"/>
@@ -22896,9 +23183,14 @@
             </a:avLst>
           </a:prstGeom>
           <a:solidFill>
-            <a:srgbClr val="C9A6FF"/>
-          </a:solidFill>
-          <a:ln/>
+            <a:srgbClr val="1A0B3D"/>
+          </a:solidFill>
+          <a:ln w="12700">
+            <a:solidFill>
+              <a:srgbClr val="5A05F4"/>
+            </a:solidFill>
+            <a:prstDash val="solid"/>
+          </a:ln>
         </p:spPr>
       </p:sp>
       <p:sp>
@@ -22928,7 +23220,7 @@
             <a:r>
               <a:rPr lang="en-US" sz="900" b="1" spc="100" kern="0" dirty="0">
                 <a:solidFill>
-                  <a:srgbClr val="1C1140"/>
+                  <a:srgbClr val="A98BFF"/>
                 </a:solidFill>
                 <a:latin typeface="Courier New" pitchFamily="34" charset="0"/>
                 <a:ea typeface="Courier New" pitchFamily="34" charset="-122"/>
@@ -22981,11 +23273,11 @@
             </a:avLst>
           </a:prstGeom>
           <a:solidFill>
-            <a:srgbClr val="17141F"/>
+            <a:srgbClr val="000000"/>
           </a:solidFill>
           <a:ln w="12700">
             <a:solidFill>
-              <a:srgbClr val="2E2A3A"/>
+              <a:srgbClr val="5E4F85"/>
             </a:solidFill>
             <a:prstDash val="solid"/>
           </a:ln>
@@ -23106,11 +23398,11 @@
             </a:avLst>
           </a:prstGeom>
           <a:solidFill>
-            <a:srgbClr val="17141F"/>
+            <a:srgbClr val="000000"/>
           </a:solidFill>
           <a:ln w="12700">
             <a:solidFill>
-              <a:srgbClr val="2E2A3A"/>
+              <a:srgbClr val="5E4F85"/>
             </a:solidFill>
             <a:prstDash val="solid"/>
           </a:ln>
@@ -23231,11 +23523,11 @@
             </a:avLst>
           </a:prstGeom>
           <a:solidFill>
-            <a:srgbClr val="17141F"/>
+            <a:srgbClr val="000000"/>
           </a:solidFill>
           <a:ln w="12700">
             <a:solidFill>
-              <a:srgbClr val="2E2A3A"/>
+              <a:srgbClr val="5E4F85"/>
             </a:solidFill>
             <a:prstDash val="solid"/>
           </a:ln>
@@ -23356,11 +23648,11 @@
             </a:avLst>
           </a:prstGeom>
           <a:solidFill>
-            <a:srgbClr val="17141F"/>
+            <a:srgbClr val="000000"/>
           </a:solidFill>
           <a:ln w="12700">
             <a:solidFill>
-              <a:srgbClr val="2E2A3A"/>
+              <a:srgbClr val="5E4F85"/>
             </a:solidFill>
             <a:prstDash val="solid"/>
           </a:ln>
@@ -23481,11 +23773,11 @@
             </a:avLst>
           </a:prstGeom>
           <a:solidFill>
-            <a:srgbClr val="17141F"/>
+            <a:srgbClr val="000000"/>
           </a:solidFill>
           <a:ln w="12700">
             <a:solidFill>
-              <a:srgbClr val="2E2A3A"/>
+              <a:srgbClr val="5E4F85"/>
             </a:solidFill>
             <a:prstDash val="solid"/>
           </a:ln>
@@ -23606,11 +23898,11 @@
             </a:avLst>
           </a:prstGeom>
           <a:solidFill>
-            <a:srgbClr val="17141F"/>
+            <a:srgbClr val="000000"/>
           </a:solidFill>
           <a:ln w="12700">
             <a:solidFill>
-              <a:srgbClr val="2E2A3A"/>
+              <a:srgbClr val="5E4F85"/>
             </a:solidFill>
             <a:prstDash val="solid"/>
           </a:ln>
@@ -23731,11 +24023,11 @@
             </a:avLst>
           </a:prstGeom>
           <a:solidFill>
-            <a:srgbClr val="17141F"/>
+            <a:srgbClr val="000000"/>
           </a:solidFill>
           <a:ln w="12700">
             <a:solidFill>
-              <a:srgbClr val="2E2A3A"/>
+              <a:srgbClr val="5E4F85"/>
             </a:solidFill>
             <a:prstDash val="solid"/>
           </a:ln>
@@ -23856,9 +24148,14 @@
             </a:avLst>
           </a:prstGeom>
           <a:solidFill>
-            <a:srgbClr val="2A2010"/>
-          </a:solidFill>
-          <a:ln/>
+            <a:srgbClr val="0B1A38"/>
+          </a:solidFill>
+          <a:ln w="12700">
+            <a:solidFill>
+              <a:srgbClr val="6BA0F8"/>
+            </a:solidFill>
+            <a:prstDash val="solid"/>
+          </a:ln>
         </p:spPr>
       </p:sp>
       <p:sp>
@@ -23876,7 +24173,7 @@
             <a:avLst/>
           </a:prstGeom>
           <a:solidFill>
-            <a:srgbClr val="E8A857"/>
+            <a:srgbClr val="5A05F4"/>
           </a:solidFill>
           <a:ln/>
         </p:spPr>
@@ -23908,7 +24205,7 @@
             <a:r>
               <a:rPr lang="en-US" sz="1200" b="1" dirty="0">
                 <a:solidFill>
-                  <a:srgbClr val="2A2010"/>
+                  <a:srgbClr val="FFFFFF"/>
                 </a:solidFill>
                 <a:latin typeface="Courier New" pitchFamily="34" charset="0"/>
                 <a:ea typeface="Courier New" pitchFamily="34" charset="-122"/>
@@ -23947,7 +24244,7 @@
             <a:r>
               <a:rPr lang="en-US" sz="1450" b="1" dirty="0">
                 <a:solidFill>
-                  <a:srgbClr val="E8A857"/>
+                  <a:srgbClr val="6BA0F8"/>
                 </a:solidFill>
                 <a:latin typeface="Montserrat" pitchFamily="34" charset="0"/>
                 <a:ea typeface="Montserrat" pitchFamily="34" charset="-122"/>
@@ -23976,11 +24273,11 @@
             </a:avLst>
           </a:prstGeom>
           <a:solidFill>
-            <a:srgbClr val="17141F"/>
+            <a:srgbClr val="000000"/>
           </a:solidFill>
           <a:ln w="12700">
             <a:solidFill>
-              <a:srgbClr val="2E2A3A"/>
+              <a:srgbClr val="5E4F85"/>
             </a:solidFill>
             <a:prstDash val="solid"/>
           </a:ln>
@@ -24101,11 +24398,11 @@
             </a:avLst>
           </a:prstGeom>
           <a:solidFill>
-            <a:srgbClr val="17141F"/>
+            <a:srgbClr val="000000"/>
           </a:solidFill>
           <a:ln w="12700">
             <a:solidFill>
-              <a:srgbClr val="2E2A3A"/>
+              <a:srgbClr val="5E4F85"/>
             </a:solidFill>
             <a:prstDash val="solid"/>
           </a:ln>
@@ -24226,11 +24523,11 @@
             </a:avLst>
           </a:prstGeom>
           <a:solidFill>
-            <a:srgbClr val="17141F"/>
+            <a:srgbClr val="000000"/>
           </a:solidFill>
           <a:ln w="12700">
             <a:solidFill>
-              <a:srgbClr val="2E2A3A"/>
+              <a:srgbClr val="5E4F85"/>
             </a:solidFill>
             <a:prstDash val="solid"/>
           </a:ln>
@@ -24351,11 +24648,11 @@
             </a:avLst>
           </a:prstGeom>
           <a:solidFill>
-            <a:srgbClr val="17141F"/>
+            <a:srgbClr val="000000"/>
           </a:solidFill>
           <a:ln w="12700">
             <a:solidFill>
-              <a:srgbClr val="2E2A3A"/>
+              <a:srgbClr val="5E4F85"/>
             </a:solidFill>
             <a:prstDash val="solid"/>
           </a:ln>
@@ -24476,11 +24773,11 @@
             </a:avLst>
           </a:prstGeom>
           <a:solidFill>
-            <a:srgbClr val="17141F"/>
+            <a:srgbClr val="000000"/>
           </a:solidFill>
           <a:ln w="12700">
             <a:solidFill>
-              <a:srgbClr val="2E2A3A"/>
+              <a:srgbClr val="5E4F85"/>
             </a:solidFill>
             <a:prstDash val="solid"/>
           </a:ln>
@@ -24558,7 +24855,7 @@
             <a:lvl1pPr>
               <a:defRPr sz="850">
                 <a:solidFill>
-                  <a:srgbClr val="8A82A0"/>
+                  <a:srgbClr val="9A94AA"/>
                 </a:solidFill>
                 <a:latin typeface="Courier New"/>
                 <a:ea typeface="Courier New"/>
@@ -24670,7 +24967,7 @@
             <a:r>
               <a:rPr lang="en-US" sz="1300" dirty="0">
                 <a:solidFill>
-                  <a:srgbClr val="AFA9BE"/>
+                  <a:srgbClr val="C9C4D6"/>
                 </a:solidFill>
                 <a:latin typeface="Montserrat" pitchFamily="34" charset="0"/>
                 <a:ea typeface="Montserrat" pitchFamily="34" charset="-122"/>
@@ -24699,9 +24996,14 @@
             </a:avLst>
           </a:prstGeom>
           <a:solidFill>
-            <a:srgbClr val="C9A6FF"/>
-          </a:solidFill>
-          <a:ln/>
+            <a:srgbClr val="1A0B3D"/>
+          </a:solidFill>
+          <a:ln w="12700">
+            <a:solidFill>
+              <a:srgbClr val="5A05F4"/>
+            </a:solidFill>
+            <a:prstDash val="solid"/>
+          </a:ln>
         </p:spPr>
       </p:sp>
       <p:sp>
@@ -24731,7 +25033,7 @@
             <a:r>
               <a:rPr lang="en-US" sz="900" b="1" spc="100" kern="0" dirty="0">
                 <a:solidFill>
-                  <a:srgbClr val="1C1140"/>
+                  <a:srgbClr val="A98BFF"/>
                 </a:solidFill>
                 <a:latin typeface="Courier New" pitchFamily="34" charset="0"/>
                 <a:ea typeface="Courier New" pitchFamily="34" charset="-122"/>
@@ -24784,11 +25086,11 @@
             </a:avLst>
           </a:prstGeom>
           <a:solidFill>
-            <a:srgbClr val="17141F"/>
+            <a:srgbClr val="000000"/>
           </a:solidFill>
           <a:ln w="12700">
             <a:solidFill>
-              <a:srgbClr val="2E2A3A"/>
+              <a:srgbClr val="5E4F85"/>
             </a:solidFill>
             <a:prstDash val="solid"/>
           </a:ln>
@@ -24821,7 +25123,7 @@
             <a:r>
               <a:rPr lang="en-US" sz="1250" b="1" dirty="0">
                 <a:solidFill>
-                  <a:srgbClr val="C9A6FF"/>
+                  <a:srgbClr val="A98BFF"/>
                 </a:solidFill>
                 <a:latin typeface="Courier New" pitchFamily="34" charset="0"/>
                 <a:ea typeface="Courier New" pitchFamily="34" charset="-122"/>
@@ -24863,7 +25165,7 @@
             <a:r>
               <a:rPr lang="en-US" sz="1150" dirty="0">
                 <a:solidFill>
-                  <a:srgbClr val="AFA9BE"/>
+                  <a:srgbClr val="C9C4D6"/>
                 </a:solidFill>
                 <a:latin typeface="Montserrat" pitchFamily="34" charset="0"/>
                 <a:ea typeface="Montserrat" pitchFamily="34" charset="-122"/>
@@ -24892,11 +25194,11 @@
             </a:avLst>
           </a:prstGeom>
           <a:solidFill>
-            <a:srgbClr val="17141F"/>
+            <a:srgbClr val="000000"/>
           </a:solidFill>
           <a:ln w="12700">
             <a:solidFill>
-              <a:srgbClr val="2E2A3A"/>
+              <a:srgbClr val="5E4F85"/>
             </a:solidFill>
             <a:prstDash val="solid"/>
           </a:ln>
@@ -24929,7 +25231,7 @@
             <a:r>
               <a:rPr lang="en-US" sz="1250" b="1" dirty="0">
                 <a:solidFill>
-                  <a:srgbClr val="C9A6FF"/>
+                  <a:srgbClr val="A98BFF"/>
                 </a:solidFill>
                 <a:latin typeface="Courier New" pitchFamily="34" charset="0"/>
                 <a:ea typeface="Courier New" pitchFamily="34" charset="-122"/>
@@ -24971,7 +25273,7 @@
             <a:r>
               <a:rPr lang="en-US" sz="1150" dirty="0">
                 <a:solidFill>
-                  <a:srgbClr val="AFA9BE"/>
+                  <a:srgbClr val="C9C4D6"/>
                 </a:solidFill>
                 <a:latin typeface="Montserrat" pitchFamily="34" charset="0"/>
                 <a:ea typeface="Montserrat" pitchFamily="34" charset="-122"/>
@@ -25000,11 +25302,11 @@
             </a:avLst>
           </a:prstGeom>
           <a:solidFill>
-            <a:srgbClr val="17141F"/>
+            <a:srgbClr val="000000"/>
           </a:solidFill>
           <a:ln w="12700">
             <a:solidFill>
-              <a:srgbClr val="2E2A3A"/>
+              <a:srgbClr val="5E4F85"/>
             </a:solidFill>
             <a:prstDash val="solid"/>
           </a:ln>
@@ -25037,7 +25339,7 @@
             <a:r>
               <a:rPr lang="en-US" sz="1250" b="1" dirty="0">
                 <a:solidFill>
-                  <a:srgbClr val="C9A6FF"/>
+                  <a:srgbClr val="A98BFF"/>
                 </a:solidFill>
                 <a:latin typeface="Courier New" pitchFamily="34" charset="0"/>
                 <a:ea typeface="Courier New" pitchFamily="34" charset="-122"/>
@@ -25079,7 +25381,7 @@
             <a:r>
               <a:rPr lang="en-US" sz="1150" dirty="0">
                 <a:solidFill>
-                  <a:srgbClr val="AFA9BE"/>
+                  <a:srgbClr val="C9C4D6"/>
                 </a:solidFill>
                 <a:latin typeface="Montserrat" pitchFamily="34" charset="0"/>
                 <a:ea typeface="Montserrat" pitchFamily="34" charset="-122"/>
@@ -25108,11 +25410,11 @@
             </a:avLst>
           </a:prstGeom>
           <a:solidFill>
-            <a:srgbClr val="17141F"/>
+            <a:srgbClr val="000000"/>
           </a:solidFill>
           <a:ln w="12700">
             <a:solidFill>
-              <a:srgbClr val="2E2A3A"/>
+              <a:srgbClr val="5E4F85"/>
             </a:solidFill>
             <a:prstDash val="solid"/>
           </a:ln>
@@ -25145,7 +25447,7 @@
             <a:r>
               <a:rPr lang="en-US" sz="1250" b="1" dirty="0">
                 <a:solidFill>
-                  <a:srgbClr val="C9A6FF"/>
+                  <a:srgbClr val="A98BFF"/>
                 </a:solidFill>
                 <a:latin typeface="Courier New" pitchFamily="34" charset="0"/>
                 <a:ea typeface="Courier New" pitchFamily="34" charset="-122"/>
@@ -25187,7 +25489,7 @@
             <a:r>
               <a:rPr lang="en-US" sz="1150" dirty="0">
                 <a:solidFill>
-                  <a:srgbClr val="AFA9BE"/>
+                  <a:srgbClr val="C9C4D6"/>
                 </a:solidFill>
                 <a:latin typeface="Montserrat" pitchFamily="34" charset="0"/>
                 <a:ea typeface="Montserrat" pitchFamily="34" charset="-122"/>
@@ -25216,11 +25518,11 @@
             </a:avLst>
           </a:prstGeom>
           <a:solidFill>
-            <a:srgbClr val="17141F"/>
+            <a:srgbClr val="000000"/>
           </a:solidFill>
           <a:ln w="12700">
             <a:solidFill>
-              <a:srgbClr val="2E2A3A"/>
+              <a:srgbClr val="5E4F85"/>
             </a:solidFill>
             <a:prstDash val="solid"/>
           </a:ln>
@@ -25253,7 +25555,7 @@
             <a:r>
               <a:rPr lang="en-US" sz="1250" b="1" dirty="0">
                 <a:solidFill>
-                  <a:srgbClr val="C9A6FF"/>
+                  <a:srgbClr val="A98BFF"/>
                 </a:solidFill>
                 <a:latin typeface="Courier New" pitchFamily="34" charset="0"/>
                 <a:ea typeface="Courier New" pitchFamily="34" charset="-122"/>
@@ -25295,7 +25597,7 @@
             <a:r>
               <a:rPr lang="en-US" sz="1150" dirty="0">
                 <a:solidFill>
-                  <a:srgbClr val="AFA9BE"/>
+                  <a:srgbClr val="C9C4D6"/>
                 </a:solidFill>
                 <a:latin typeface="Montserrat" pitchFamily="34" charset="0"/>
                 <a:ea typeface="Montserrat" pitchFamily="34" charset="-122"/>
@@ -25324,11 +25626,11 @@
             </a:avLst>
           </a:prstGeom>
           <a:solidFill>
-            <a:srgbClr val="17141F"/>
+            <a:srgbClr val="000000"/>
           </a:solidFill>
           <a:ln w="12700">
             <a:solidFill>
-              <a:srgbClr val="2E2A3A"/>
+              <a:srgbClr val="5E4F85"/>
             </a:solidFill>
             <a:prstDash val="solid"/>
           </a:ln>
@@ -25361,7 +25663,7 @@
             <a:r>
               <a:rPr lang="en-US" sz="1250" b="1" dirty="0">
                 <a:solidFill>
-                  <a:srgbClr val="C9A6FF"/>
+                  <a:srgbClr val="A98BFF"/>
                 </a:solidFill>
                 <a:latin typeface="Courier New" pitchFamily="34" charset="0"/>
                 <a:ea typeface="Courier New" pitchFamily="34" charset="-122"/>
@@ -25403,7 +25705,7 @@
             <a:r>
               <a:rPr lang="en-US" sz="1150" dirty="0">
                 <a:solidFill>
-                  <a:srgbClr val="AFA9BE"/>
+                  <a:srgbClr val="C9C4D6"/>
                 </a:solidFill>
                 <a:latin typeface="Montserrat" pitchFamily="34" charset="0"/>
                 <a:ea typeface="Montserrat" pitchFamily="34" charset="-122"/>
@@ -25432,11 +25734,11 @@
             </a:avLst>
           </a:prstGeom>
           <a:solidFill>
-            <a:srgbClr val="17141F"/>
+            <a:srgbClr val="000000"/>
           </a:solidFill>
           <a:ln w="12700">
             <a:solidFill>
-              <a:srgbClr val="2E2A3A"/>
+              <a:srgbClr val="5E4F85"/>
             </a:solidFill>
             <a:prstDash val="solid"/>
           </a:ln>
@@ -25514,7 +25816,7 @@
             <a:lvl1pPr>
               <a:defRPr sz="850">
                 <a:solidFill>
-                  <a:srgbClr val="8A82A0"/>
+                  <a:srgbClr val="9A94AA"/>
                 </a:solidFill>
                 <a:latin typeface="Courier New"/>
                 <a:ea typeface="Courier New"/>
@@ -25584,7 +25886,7 @@
             <a:r>
               <a:rPr lang="en-US" sz="2600" b="1" dirty="0">
                 <a:solidFill>
-                  <a:srgbClr val="C9A6FF"/>
+                  <a:srgbClr val="A98BFF"/>
                 </a:solidFill>
                 <a:latin typeface="Courier New" pitchFamily="34" charset="0"/>
                 <a:ea typeface="Courier New" pitchFamily="34" charset="-122"/>
@@ -25652,9 +25954,14 @@
             </a:avLst>
           </a:prstGeom>
           <a:solidFill>
-            <a:srgbClr val="C9A6FF"/>
-          </a:solidFill>
-          <a:ln/>
+            <a:srgbClr val="1A0B3D"/>
+          </a:solidFill>
+          <a:ln w="12700">
+            <a:solidFill>
+              <a:srgbClr val="5A05F4"/>
+            </a:solidFill>
+            <a:prstDash val="solid"/>
+          </a:ln>
         </p:spPr>
       </p:sp>
       <p:sp>
@@ -25684,7 +25991,7 @@
             <a:r>
               <a:rPr lang="en-US" sz="900" b="1" spc="100" kern="0" dirty="0">
                 <a:solidFill>
-                  <a:srgbClr val="1C1140"/>
+                  <a:srgbClr val="A98BFF"/>
                 </a:solidFill>
                 <a:latin typeface="Courier New" pitchFamily="34" charset="0"/>
                 <a:ea typeface="Courier New" pitchFamily="34" charset="-122"/>
@@ -25737,9 +26044,14 @@
             </a:avLst>
           </a:prstGeom>
           <a:solidFill>
-            <a:srgbClr val="2E1418"/>
-          </a:solidFill>
-          <a:ln/>
+            <a:srgbClr val="1A0808"/>
+          </a:solidFill>
+          <a:ln w="12700">
+            <a:solidFill>
+              <a:srgbClr val="FF6B6B"/>
+            </a:solidFill>
+            <a:prstDash val="solid"/>
+          </a:ln>
         </p:spPr>
       </p:sp>
       <p:sp>
@@ -25757,7 +26069,7 @@
             <a:avLst/>
           </a:prstGeom>
           <a:solidFill>
-            <a:srgbClr val="FF7B7B"/>
+            <a:srgbClr val="5A05F4"/>
           </a:solidFill>
           <a:ln/>
         </p:spPr>
@@ -25789,7 +26101,7 @@
             <a:r>
               <a:rPr lang="en-US" sz="1200" b="1" dirty="0">
                 <a:solidFill>
-                  <a:srgbClr val="2E1418"/>
+                  <a:srgbClr val="FFFFFF"/>
                 </a:solidFill>
                 <a:latin typeface="Courier New" pitchFamily="34" charset="0"/>
                 <a:ea typeface="Courier New" pitchFamily="34" charset="-122"/>
@@ -25828,7 +26140,7 @@
             <a:r>
               <a:rPr lang="en-US" sz="1450" b="1" dirty="0">
                 <a:solidFill>
-                  <a:srgbClr val="FF7B7B"/>
+                  <a:srgbClr val="FF6B6B"/>
                 </a:solidFill>
                 <a:latin typeface="Montserrat" pitchFamily="34" charset="0"/>
                 <a:ea typeface="Montserrat" pitchFamily="34" charset="-122"/>
@@ -25870,7 +26182,7 @@
             <a:r>
               <a:rPr lang="en-US" sz="1200" dirty="0">
                 <a:solidFill>
-                  <a:srgbClr val="FFFFFF"/>
+                  <a:srgbClr val="C9C4D6"/>
                 </a:solidFill>
                 <a:latin typeface="Montserrat" pitchFamily="34" charset="0"/>
                 <a:ea typeface="Montserrat" pitchFamily="34" charset="-122"/>
@@ -25899,9 +26211,14 @@
             </a:avLst>
           </a:prstGeom>
           <a:solidFill>
-            <a:srgbClr val="2E1418"/>
-          </a:solidFill>
-          <a:ln/>
+            <a:srgbClr val="1A0808"/>
+          </a:solidFill>
+          <a:ln w="12700">
+            <a:solidFill>
+              <a:srgbClr val="FF6B6B"/>
+            </a:solidFill>
+            <a:prstDash val="solid"/>
+          </a:ln>
         </p:spPr>
       </p:sp>
       <p:sp>
@@ -25919,7 +26236,7 @@
             <a:avLst/>
           </a:prstGeom>
           <a:solidFill>
-            <a:srgbClr val="FF7B7B"/>
+            <a:srgbClr val="5A05F4"/>
           </a:solidFill>
           <a:ln/>
         </p:spPr>
@@ -25951,7 +26268,7 @@
             <a:r>
               <a:rPr lang="en-US" sz="1200" b="1" dirty="0">
                 <a:solidFill>
-                  <a:srgbClr val="2E1418"/>
+                  <a:srgbClr val="FFFFFF"/>
                 </a:solidFill>
                 <a:latin typeface="Courier New" pitchFamily="34" charset="0"/>
                 <a:ea typeface="Courier New" pitchFamily="34" charset="-122"/>
@@ -25990,7 +26307,7 @@
             <a:r>
               <a:rPr lang="en-US" sz="1450" b="1" dirty="0">
                 <a:solidFill>
-                  <a:srgbClr val="FF7B7B"/>
+                  <a:srgbClr val="FF6B6B"/>
                 </a:solidFill>
                 <a:latin typeface="Montserrat" pitchFamily="34" charset="0"/>
                 <a:ea typeface="Montserrat" pitchFamily="34" charset="-122"/>
@@ -26032,7 +26349,7 @@
             <a:r>
               <a:rPr lang="en-US" sz="1200" dirty="0">
                 <a:solidFill>
-                  <a:srgbClr val="FFFFFF"/>
+                  <a:srgbClr val="C9C4D6"/>
                 </a:solidFill>
                 <a:latin typeface="Montserrat" pitchFamily="34" charset="0"/>
                 <a:ea typeface="Montserrat" pitchFamily="34" charset="-122"/>
@@ -26061,9 +26378,14 @@
             </a:avLst>
           </a:prstGeom>
           <a:solidFill>
-            <a:srgbClr val="2E1418"/>
-          </a:solidFill>
-          <a:ln/>
+            <a:srgbClr val="1A0808"/>
+          </a:solidFill>
+          <a:ln w="12700">
+            <a:solidFill>
+              <a:srgbClr val="FF6B6B"/>
+            </a:solidFill>
+            <a:prstDash val="solid"/>
+          </a:ln>
         </p:spPr>
       </p:sp>
       <p:sp>
@@ -26081,7 +26403,7 @@
             <a:avLst/>
           </a:prstGeom>
           <a:solidFill>
-            <a:srgbClr val="FF7B7B"/>
+            <a:srgbClr val="5A05F4"/>
           </a:solidFill>
           <a:ln/>
         </p:spPr>
@@ -26113,7 +26435,7 @@
             <a:r>
               <a:rPr lang="en-US" sz="1200" b="1" dirty="0">
                 <a:solidFill>
-                  <a:srgbClr val="2E1418"/>
+                  <a:srgbClr val="FFFFFF"/>
                 </a:solidFill>
                 <a:latin typeface="Courier New" pitchFamily="34" charset="0"/>
                 <a:ea typeface="Courier New" pitchFamily="34" charset="-122"/>
@@ -26152,7 +26474,7 @@
             <a:r>
               <a:rPr lang="en-US" sz="1450" b="1" dirty="0">
                 <a:solidFill>
-                  <a:srgbClr val="FF7B7B"/>
+                  <a:srgbClr val="FF6B6B"/>
                 </a:solidFill>
                 <a:latin typeface="Montserrat" pitchFamily="34" charset="0"/>
                 <a:ea typeface="Montserrat" pitchFamily="34" charset="-122"/>
@@ -26194,7 +26516,7 @@
             <a:r>
               <a:rPr lang="en-US" sz="1200" dirty="0">
                 <a:solidFill>
-                  <a:srgbClr val="FFFFFF"/>
+                  <a:srgbClr val="C9C4D6"/>
                 </a:solidFill>
                 <a:latin typeface="Montserrat" pitchFamily="34" charset="0"/>
                 <a:ea typeface="Montserrat" pitchFamily="34" charset="-122"/>
@@ -26223,11 +26545,11 @@
             </a:avLst>
           </a:prstGeom>
           <a:solidFill>
-            <a:srgbClr val="17141F"/>
+            <a:srgbClr val="000000"/>
           </a:solidFill>
           <a:ln w="12700">
             <a:solidFill>
-              <a:srgbClr val="2E2A3A"/>
+              <a:srgbClr val="5E4F85"/>
             </a:solidFill>
             <a:prstDash val="solid"/>
           </a:ln>
@@ -26289,7 +26611,7 @@
           <a:noFill/>
           <a:ln w="15875">
             <a:solidFill>
-              <a:srgbClr val="9B7BE8"/>
+              <a:srgbClr val="8F72E6"/>
             </a:solidFill>
             <a:prstDash val="solid"/>
           </a:ln>
@@ -26310,7 +26632,7 @@
             <a:avLst/>
           </a:prstGeom>
           <a:solidFill>
-            <a:srgbClr val="9B7BE8"/>
+            <a:srgbClr val="8F72E6"/>
           </a:solidFill>
           <a:ln/>
         </p:spPr>
@@ -26332,11 +26654,11 @@
             </a:avLst>
           </a:prstGeom>
           <a:solidFill>
-            <a:srgbClr val="17141F"/>
+            <a:srgbClr val="000000"/>
           </a:solidFill>
           <a:ln w="12700">
             <a:solidFill>
-              <a:srgbClr val="2E2A3A"/>
+              <a:srgbClr val="5E4F85"/>
             </a:solidFill>
             <a:prstDash val="solid"/>
           </a:ln>
@@ -26398,7 +26720,7 @@
           <a:noFill/>
           <a:ln w="15875">
             <a:solidFill>
-              <a:srgbClr val="9B7BE8"/>
+              <a:srgbClr val="8F72E6"/>
             </a:solidFill>
             <a:prstDash val="solid"/>
           </a:ln>
@@ -26419,7 +26741,7 @@
             <a:avLst/>
           </a:prstGeom>
           <a:solidFill>
-            <a:srgbClr val="9B7BE8"/>
+            <a:srgbClr val="8F72E6"/>
           </a:solidFill>
           <a:ln/>
         </p:spPr>
@@ -26441,9 +26763,14 @@
             </a:avLst>
           </a:prstGeom>
           <a:solidFill>
-            <a:srgbClr val="1C1140"/>
-          </a:solidFill>
-          <a:ln/>
+            <a:srgbClr val="1A0B3D"/>
+          </a:solidFill>
+          <a:ln w="12700">
+            <a:solidFill>
+              <a:srgbClr val="5A05F4"/>
+            </a:solidFill>
+            <a:prstDash val="solid"/>
+          </a:ln>
         </p:spPr>
       </p:sp>
       <p:sp>
@@ -26473,7 +26800,7 @@
             <a:r>
               <a:rPr lang="en-US" sz="1100" b="1" dirty="0">
                 <a:solidFill>
-                  <a:srgbClr val="C9A6FF"/>
+                  <a:srgbClr val="A98BFF"/>
                 </a:solidFill>
                 <a:latin typeface="Courier New" pitchFamily="34" charset="0"/>
                 <a:ea typeface="Courier New" pitchFamily="34" charset="-122"/>
@@ -26502,7 +26829,7 @@
           <a:noFill/>
           <a:ln w="15875">
             <a:solidFill>
-              <a:srgbClr val="9B7BE8"/>
+              <a:srgbClr val="8F72E6"/>
             </a:solidFill>
             <a:prstDash val="solid"/>
           </a:ln>
@@ -26523,7 +26850,7 @@
             <a:avLst/>
           </a:prstGeom>
           <a:solidFill>
-            <a:srgbClr val="9B7BE8"/>
+            <a:srgbClr val="8F72E6"/>
           </a:solidFill>
           <a:ln/>
         </p:spPr>
@@ -26545,9 +26872,14 @@
             </a:avLst>
           </a:prstGeom>
           <a:solidFill>
-            <a:srgbClr val="1C1140"/>
-          </a:solidFill>
-          <a:ln/>
+            <a:srgbClr val="1A0B3D"/>
+          </a:solidFill>
+          <a:ln w="12700">
+            <a:solidFill>
+              <a:srgbClr val="5A05F4"/>
+            </a:solidFill>
+            <a:prstDash val="solid"/>
+          </a:ln>
         </p:spPr>
       </p:sp>
       <p:sp>
@@ -26577,7 +26909,7 @@
             <a:r>
               <a:rPr lang="en-US" sz="1100" b="1" dirty="0">
                 <a:solidFill>
-                  <a:srgbClr val="C9A6FF"/>
+                  <a:srgbClr val="A98BFF"/>
                 </a:solidFill>
                 <a:latin typeface="Courier New" pitchFamily="34" charset="0"/>
                 <a:ea typeface="Courier New" pitchFamily="34" charset="-122"/>
@@ -26616,7 +26948,7 @@
             <a:r>
               <a:rPr lang="en-US" sz="1150" i="1" dirty="0">
                 <a:solidFill>
-                  <a:srgbClr val="8A82A0"/>
+                  <a:srgbClr val="9A94AA"/>
                 </a:solidFill>
                 <a:latin typeface="Montserrat" pitchFamily="34" charset="0"/>
                 <a:ea typeface="Montserrat" pitchFamily="34" charset="-122"/>
@@ -26761,7 +27093,7 @@
             <a:lvl1pPr>
               <a:defRPr sz="850">
                 <a:solidFill>
-                  <a:srgbClr val="8A82A0"/>
+                  <a:srgbClr val="9A94AA"/>
                 </a:solidFill>
                 <a:latin typeface="Courier New"/>
                 <a:ea typeface="Courier New"/>
@@ -26831,7 +27163,7 @@
             <a:r>
               <a:rPr lang="en-US" sz="2600" b="1" dirty="0">
                 <a:solidFill>
-                  <a:srgbClr val="C9A6FF"/>
+                  <a:srgbClr val="A98BFF"/>
                 </a:solidFill>
                 <a:latin typeface="Courier New" pitchFamily="34" charset="0"/>
                 <a:ea typeface="Courier New" pitchFamily="34" charset="-122"/>
@@ -26899,9 +27231,14 @@
             </a:avLst>
           </a:prstGeom>
           <a:solidFill>
-            <a:srgbClr val="C9A6FF"/>
-          </a:solidFill>
-          <a:ln/>
+            <a:srgbClr val="1A0B3D"/>
+          </a:solidFill>
+          <a:ln w="12700">
+            <a:solidFill>
+              <a:srgbClr val="5A05F4"/>
+            </a:solidFill>
+            <a:prstDash val="solid"/>
+          </a:ln>
         </p:spPr>
       </p:sp>
       <p:sp>
@@ -26931,7 +27268,7 @@
             <a:r>
               <a:rPr lang="en-US" sz="900" b="1" spc="100" kern="0" dirty="0">
                 <a:solidFill>
-                  <a:srgbClr val="1C1140"/>
+                  <a:srgbClr val="A98BFF"/>
                 </a:solidFill>
                 <a:latin typeface="Courier New" pitchFamily="34" charset="0"/>
                 <a:ea typeface="Courier New" pitchFamily="34" charset="-122"/>
@@ -26984,11 +27321,11 @@
             </a:avLst>
           </a:prstGeom>
           <a:solidFill>
-            <a:srgbClr val="12101A"/>
+            <a:srgbClr val="07060C"/>
           </a:solidFill>
           <a:ln w="12700">
             <a:solidFill>
-              <a:srgbClr val="2E2A3A"/>
+              <a:srgbClr val="5E4F85"/>
             </a:solidFill>
             <a:prstDash val="solid"/>
           </a:ln>
@@ -27024,7 +27361,7 @@
             <a:r>
               <a:rPr lang="en-US" sz="1250" dirty="0">
                 <a:solidFill>
-                  <a:srgbClr val="C9A6FF"/>
+                  <a:srgbClr val="A98BFF"/>
                 </a:solidFill>
                 <a:latin typeface="Courier New" pitchFamily="34" charset="0"/>
                 <a:ea typeface="Courier New" pitchFamily="34" charset="-122"/>
@@ -27053,9 +27390,14 @@
             </a:avLst>
           </a:prstGeom>
           <a:solidFill>
-            <a:srgbClr val="1C1140"/>
-          </a:solidFill>
-          <a:ln/>
+            <a:srgbClr val="1A0B3D"/>
+          </a:solidFill>
+          <a:ln w="12700">
+            <a:solidFill>
+              <a:srgbClr val="5A05F4"/>
+            </a:solidFill>
+            <a:prstDash val="solid"/>
+          </a:ln>
         </p:spPr>
       </p:sp>
       <p:sp>
@@ -27073,7 +27415,7 @@
             <a:avLst/>
           </a:prstGeom>
           <a:solidFill>
-            <a:srgbClr val="C9A6FF"/>
+            <a:srgbClr val="5A05F4"/>
           </a:solidFill>
           <a:ln/>
         </p:spPr>
@@ -27105,7 +27447,7 @@
             <a:r>
               <a:rPr lang="en-US" sz="1200" b="1" dirty="0">
                 <a:solidFill>
-                  <a:srgbClr val="1C1140"/>
+                  <a:srgbClr val="FFFFFF"/>
                 </a:solidFill>
                 <a:latin typeface="Courier New" pitchFamily="34" charset="0"/>
                 <a:ea typeface="Courier New" pitchFamily="34" charset="-122"/>
@@ -27144,7 +27486,7 @@
             <a:r>
               <a:rPr lang="en-US" sz="1450" b="1" dirty="0">
                 <a:solidFill>
-                  <a:srgbClr val="C9A6FF"/>
+                  <a:srgbClr val="A98BFF"/>
                 </a:solidFill>
                 <a:latin typeface="Montserrat" pitchFamily="34" charset="0"/>
                 <a:ea typeface="Montserrat" pitchFamily="34" charset="-122"/>
@@ -27186,7 +27528,7 @@
             <a:r>
               <a:rPr lang="en-US" sz="1200" dirty="0">
                 <a:solidFill>
-                  <a:srgbClr val="FFFFFF"/>
+                  <a:srgbClr val="C9C4D6"/>
                 </a:solidFill>
                 <a:latin typeface="Montserrat" pitchFamily="34" charset="0"/>
                 <a:ea typeface="Montserrat" pitchFamily="34" charset="-122"/>
@@ -27215,9 +27557,14 @@
             </a:avLst>
           </a:prstGeom>
           <a:solidFill>
-            <a:srgbClr val="1C1140"/>
-          </a:solidFill>
-          <a:ln/>
+            <a:srgbClr val="1A0B3D"/>
+          </a:solidFill>
+          <a:ln w="12700">
+            <a:solidFill>
+              <a:srgbClr val="5A05F4"/>
+            </a:solidFill>
+            <a:prstDash val="solid"/>
+          </a:ln>
         </p:spPr>
       </p:sp>
       <p:sp>
@@ -27235,7 +27582,7 @@
             <a:avLst/>
           </a:prstGeom>
           <a:solidFill>
-            <a:srgbClr val="C9A6FF"/>
+            <a:srgbClr val="5A05F4"/>
           </a:solidFill>
           <a:ln/>
         </p:spPr>
@@ -27267,7 +27614,7 @@
             <a:r>
               <a:rPr lang="en-US" sz="1200" b="1" dirty="0">
                 <a:solidFill>
-                  <a:srgbClr val="1C1140"/>
+                  <a:srgbClr val="FFFFFF"/>
                 </a:solidFill>
                 <a:latin typeface="Courier New" pitchFamily="34" charset="0"/>
                 <a:ea typeface="Courier New" pitchFamily="34" charset="-122"/>
@@ -27306,7 +27653,7 @@
             <a:r>
               <a:rPr lang="en-US" sz="1450" b="1" dirty="0">
                 <a:solidFill>
-                  <a:srgbClr val="C9A6FF"/>
+                  <a:srgbClr val="A98BFF"/>
                 </a:solidFill>
                 <a:latin typeface="Montserrat" pitchFamily="34" charset="0"/>
                 <a:ea typeface="Montserrat" pitchFamily="34" charset="-122"/>
@@ -27348,7 +27695,7 @@
             <a:r>
               <a:rPr lang="en-US" sz="1200" dirty="0">
                 <a:solidFill>
-                  <a:srgbClr val="FFFFFF"/>
+                  <a:srgbClr val="C9C4D6"/>
                 </a:solidFill>
                 <a:latin typeface="Montserrat" pitchFamily="34" charset="0"/>
                 <a:ea typeface="Montserrat" pitchFamily="34" charset="-122"/>
@@ -27377,9 +27724,14 @@
             </a:avLst>
           </a:prstGeom>
           <a:solidFill>
-            <a:srgbClr val="1C1140"/>
-          </a:solidFill>
-          <a:ln/>
+            <a:srgbClr val="1A0B3D"/>
+          </a:solidFill>
+          <a:ln w="12700">
+            <a:solidFill>
+              <a:srgbClr val="5A05F4"/>
+            </a:solidFill>
+            <a:prstDash val="solid"/>
+          </a:ln>
         </p:spPr>
       </p:sp>
       <p:sp>
@@ -27397,7 +27749,7 @@
             <a:avLst/>
           </a:prstGeom>
           <a:solidFill>
-            <a:srgbClr val="C9A6FF"/>
+            <a:srgbClr val="5A05F4"/>
           </a:solidFill>
           <a:ln/>
         </p:spPr>
@@ -27429,7 +27781,7 @@
             <a:r>
               <a:rPr lang="en-US" sz="1200" b="1" dirty="0">
                 <a:solidFill>
-                  <a:srgbClr val="1C1140"/>
+                  <a:srgbClr val="FFFFFF"/>
                 </a:solidFill>
                 <a:latin typeface="Courier New" pitchFamily="34" charset="0"/>
                 <a:ea typeface="Courier New" pitchFamily="34" charset="-122"/>
@@ -27468,7 +27820,7 @@
             <a:r>
               <a:rPr lang="en-US" sz="1450" b="1" dirty="0">
                 <a:solidFill>
-                  <a:srgbClr val="C9A6FF"/>
+                  <a:srgbClr val="A98BFF"/>
                 </a:solidFill>
                 <a:latin typeface="Montserrat" pitchFamily="34" charset="0"/>
                 <a:ea typeface="Montserrat" pitchFamily="34" charset="-122"/>
@@ -27510,7 +27862,7 @@
             <a:r>
               <a:rPr lang="en-US" sz="1200" dirty="0">
                 <a:solidFill>
-                  <a:srgbClr val="FFFFFF"/>
+                  <a:srgbClr val="C9C4D6"/>
                 </a:solidFill>
                 <a:latin typeface="Montserrat" pitchFamily="34" charset="0"/>
                 <a:ea typeface="Montserrat" pitchFamily="34" charset="-122"/>
@@ -27539,9 +27891,14 @@
             </a:avLst>
           </a:prstGeom>
           <a:solidFill>
-            <a:srgbClr val="102A20"/>
-          </a:solidFill>
-          <a:ln/>
+            <a:srgbClr val="06180F"/>
+          </a:solidFill>
+          <a:ln w="12700">
+            <a:solidFill>
+              <a:srgbClr val="3FCF8E"/>
+            </a:solidFill>
+            <a:prstDash val="solid"/>
+          </a:ln>
         </p:spPr>
       </p:sp>
       <p:sp>
@@ -27616,7 +27973,7 @@
             <a:lvl1pPr>
               <a:defRPr sz="850">
                 <a:solidFill>
-                  <a:srgbClr val="8A82A0"/>
+                  <a:srgbClr val="9A94AA"/>
                 </a:solidFill>
                 <a:latin typeface="Courier New"/>
                 <a:ea typeface="Courier New"/>
@@ -27686,7 +28043,7 @@
             <a:r>
               <a:rPr lang="en-US" sz="2600" b="1" dirty="0">
                 <a:solidFill>
-                  <a:srgbClr val="C9A6FF"/>
+                  <a:srgbClr val="A98BFF"/>
                 </a:solidFill>
                 <a:latin typeface="Courier New" pitchFamily="34" charset="0"/>
                 <a:ea typeface="Courier New" pitchFamily="34" charset="-122"/>
@@ -27754,9 +28111,14 @@
             </a:avLst>
           </a:prstGeom>
           <a:solidFill>
-            <a:srgbClr val="C9A6FF"/>
-          </a:solidFill>
-          <a:ln/>
+            <a:srgbClr val="1A0B3D"/>
+          </a:solidFill>
+          <a:ln w="12700">
+            <a:solidFill>
+              <a:srgbClr val="5A05F4"/>
+            </a:solidFill>
+            <a:prstDash val="solid"/>
+          </a:ln>
         </p:spPr>
       </p:sp>
       <p:sp>
@@ -27786,7 +28148,7 @@
             <a:r>
               <a:rPr lang="en-US" sz="900" b="1" spc="100" kern="0" dirty="0">
                 <a:solidFill>
-                  <a:srgbClr val="1C1140"/>
+                  <a:srgbClr val="A98BFF"/>
                 </a:solidFill>
                 <a:latin typeface="Courier New" pitchFamily="34" charset="0"/>
                 <a:ea typeface="Courier New" pitchFamily="34" charset="-122"/>
@@ -27861,7 +28223,7 @@
                       <a:r>
                         <a:rPr lang="en-US" sz="900" b="1" spc="100" kern="0" dirty="0">
                           <a:solidFill>
-                            <a:srgbClr val="AFA9BE"/>
+                            <a:srgbClr val="C9C4D6"/>
                           </a:solidFill>
                           <a:latin typeface="Courier New" pitchFamily="34" charset="0"/>
                           <a:ea typeface="Courier New" pitchFamily="34" charset="-122"/>
@@ -27879,7 +28241,7 @@
                   <a:tcPr marL="73152" marR="73152" marT="73152" marB="73152" anchor="ctr">
                     <a:lnL w="6350" cap="flat" cmpd="sng" algn="ctr">
                       <a:solidFill>
-                        <a:srgbClr val="2E2A3A"/>
+                        <a:srgbClr val="5E4F85"/>
                       </a:solidFill>
                       <a:prstDash val="solid"/>
                       <a:round/>
@@ -27888,7 +28250,7 @@
                     </a:lnL>
                     <a:lnR w="6350" cap="flat" cmpd="sng" algn="ctr">
                       <a:solidFill>
-                        <a:srgbClr val="2E2A3A"/>
+                        <a:srgbClr val="5E4F85"/>
                       </a:solidFill>
                       <a:prstDash val="solid"/>
                       <a:round/>
@@ -27897,7 +28259,7 @@
                     </a:lnR>
                     <a:lnT w="6350" cap="flat" cmpd="sng" algn="ctr">
                       <a:solidFill>
-                        <a:srgbClr val="2E2A3A"/>
+                        <a:srgbClr val="5E4F85"/>
                       </a:solidFill>
                       <a:prstDash val="solid"/>
                       <a:round/>
@@ -27906,7 +28268,7 @@
                     </a:lnT>
                     <a:lnB w="6350" cap="flat" cmpd="sng" algn="ctr">
                       <a:solidFill>
-                        <a:srgbClr val="2E2A3A"/>
+                        <a:srgbClr val="5E4F85"/>
                       </a:solidFill>
                       <a:prstDash val="solid"/>
                       <a:round/>
@@ -27914,7 +28276,7 @@
                       <a:tailEnd type="none" w="med" len="med"/>
                     </a:lnB>
                     <a:solidFill>
-                      <a:srgbClr val="1F1B2A"/>
+                      <a:srgbClr val="1A0B3D"/>
                     </a:solidFill>
                   </a:tcPr>
                 </a:tc>
@@ -27929,7 +28291,7 @@
                       <a:r>
                         <a:rPr lang="en-US" sz="900" b="1" spc="100" kern="0" dirty="0">
                           <a:solidFill>
-                            <a:srgbClr val="AFA9BE"/>
+                            <a:srgbClr val="C9C4D6"/>
                           </a:solidFill>
                           <a:latin typeface="Courier New" pitchFamily="34" charset="0"/>
                           <a:ea typeface="Courier New" pitchFamily="34" charset="-122"/>
@@ -27947,7 +28309,7 @@
                   <a:tcPr marL="73152" marR="73152" marT="73152" marB="73152" anchor="ctr">
                     <a:lnL w="6350" cap="flat" cmpd="sng" algn="ctr">
                       <a:solidFill>
-                        <a:srgbClr val="2E2A3A"/>
+                        <a:srgbClr val="5E4F85"/>
                       </a:solidFill>
                       <a:prstDash val="solid"/>
                       <a:round/>
@@ -27956,7 +28318,7 @@
                     </a:lnL>
                     <a:lnR w="6350" cap="flat" cmpd="sng" algn="ctr">
                       <a:solidFill>
-                        <a:srgbClr val="2E2A3A"/>
+                        <a:srgbClr val="5E4F85"/>
                       </a:solidFill>
                       <a:prstDash val="solid"/>
                       <a:round/>
@@ -27965,7 +28327,7 @@
                     </a:lnR>
                     <a:lnT w="6350" cap="flat" cmpd="sng" algn="ctr">
                       <a:solidFill>
-                        <a:srgbClr val="2E2A3A"/>
+                        <a:srgbClr val="5E4F85"/>
                       </a:solidFill>
                       <a:prstDash val="solid"/>
                       <a:round/>
@@ -27974,7 +28336,7 @@
                     </a:lnT>
                     <a:lnB w="6350" cap="flat" cmpd="sng" algn="ctr">
                       <a:solidFill>
-                        <a:srgbClr val="2E2A3A"/>
+                        <a:srgbClr val="5E4F85"/>
                       </a:solidFill>
                       <a:prstDash val="solid"/>
                       <a:round/>
@@ -27982,7 +28344,7 @@
                       <a:tailEnd type="none" w="med" len="med"/>
                     </a:lnB>
                     <a:solidFill>
-                      <a:srgbClr val="1F1B2A"/>
+                      <a:srgbClr val="1A0B3D"/>
                     </a:solidFill>
                   </a:tcPr>
                 </a:tc>
@@ -27997,7 +28359,7 @@
                       <a:r>
                         <a:rPr lang="en-US" sz="900" b="1" spc="100" kern="0" dirty="0">
                           <a:solidFill>
-                            <a:srgbClr val="AFA9BE"/>
+                            <a:srgbClr val="C9C4D6"/>
                           </a:solidFill>
                           <a:latin typeface="Courier New" pitchFamily="34" charset="0"/>
                           <a:ea typeface="Courier New" pitchFamily="34" charset="-122"/>
@@ -28015,7 +28377,7 @@
                   <a:tcPr marL="73152" marR="73152" marT="73152" marB="73152" anchor="ctr">
                     <a:lnL w="6350" cap="flat" cmpd="sng" algn="ctr">
                       <a:solidFill>
-                        <a:srgbClr val="2E2A3A"/>
+                        <a:srgbClr val="5E4F85"/>
                       </a:solidFill>
                       <a:prstDash val="solid"/>
                       <a:round/>
@@ -28024,7 +28386,7 @@
                     </a:lnL>
                     <a:lnR w="6350" cap="flat" cmpd="sng" algn="ctr">
                       <a:solidFill>
-                        <a:srgbClr val="2E2A3A"/>
+                        <a:srgbClr val="5E4F85"/>
                       </a:solidFill>
                       <a:prstDash val="solid"/>
                       <a:round/>
@@ -28033,7 +28395,7 @@
                     </a:lnR>
                     <a:lnT w="6350" cap="flat" cmpd="sng" algn="ctr">
                       <a:solidFill>
-                        <a:srgbClr val="2E2A3A"/>
+                        <a:srgbClr val="5E4F85"/>
                       </a:solidFill>
                       <a:prstDash val="solid"/>
                       <a:round/>
@@ -28042,7 +28404,7 @@
                     </a:lnT>
                     <a:lnB w="6350" cap="flat" cmpd="sng" algn="ctr">
                       <a:solidFill>
-                        <a:srgbClr val="2E2A3A"/>
+                        <a:srgbClr val="5E4F85"/>
                       </a:solidFill>
                       <a:prstDash val="solid"/>
                       <a:round/>
@@ -28050,7 +28412,7 @@
                       <a:tailEnd type="none" w="med" len="med"/>
                     </a:lnB>
                     <a:solidFill>
-                      <a:srgbClr val="1F1B2A"/>
+                      <a:srgbClr val="1A0B3D"/>
                     </a:solidFill>
                   </a:tcPr>
                 </a:tc>
@@ -28067,7 +28429,7 @@
                       <a:r>
                         <a:rPr lang="en-US" sz="1150" b="1" dirty="0">
                           <a:solidFill>
-                            <a:srgbClr val="5FD6A0"/>
+                            <a:srgbClr val="3FCF8E"/>
                           </a:solidFill>
                           <a:latin typeface="Montserrat" pitchFamily="34" charset="0"/>
                           <a:ea typeface="Montserrat" pitchFamily="34" charset="-122"/>
@@ -28085,7 +28447,7 @@
                   <a:tcPr marL="73152" marR="73152" marT="73152" marB="73152" anchor="ctr">
                     <a:lnL w="6350" cap="flat" cmpd="sng" algn="ctr">
                       <a:solidFill>
-                        <a:srgbClr val="2E2A3A"/>
+                        <a:srgbClr val="5E4F85"/>
                       </a:solidFill>
                       <a:prstDash val="solid"/>
                       <a:round/>
@@ -28094,7 +28456,7 @@
                     </a:lnL>
                     <a:lnR w="6350" cap="flat" cmpd="sng" algn="ctr">
                       <a:solidFill>
-                        <a:srgbClr val="2E2A3A"/>
+                        <a:srgbClr val="5E4F85"/>
                       </a:solidFill>
                       <a:prstDash val="solid"/>
                       <a:round/>
@@ -28103,7 +28465,7 @@
                     </a:lnR>
                     <a:lnT w="6350" cap="flat" cmpd="sng" algn="ctr">
                       <a:solidFill>
-                        <a:srgbClr val="2E2A3A"/>
+                        <a:srgbClr val="5E4F85"/>
                       </a:solidFill>
                       <a:prstDash val="solid"/>
                       <a:round/>
@@ -28112,7 +28474,7 @@
                     </a:lnT>
                     <a:lnB w="6350" cap="flat" cmpd="sng" algn="ctr">
                       <a:solidFill>
-                        <a:srgbClr val="2E2A3A"/>
+                        <a:srgbClr val="5E4F85"/>
                       </a:solidFill>
                       <a:prstDash val="solid"/>
                       <a:round/>
@@ -28120,7 +28482,7 @@
                       <a:tailEnd type="none" w="med" len="med"/>
                     </a:lnB>
                     <a:solidFill>
-                      <a:srgbClr val="102A20"/>
+                      <a:srgbClr val="06180F"/>
                     </a:solidFill>
                   </a:tcPr>
                 </a:tc>
@@ -28153,7 +28515,7 @@
                   <a:tcPr marL="73152" marR="73152" marT="73152" marB="73152" anchor="ctr">
                     <a:lnL w="6350" cap="flat" cmpd="sng" algn="ctr">
                       <a:solidFill>
-                        <a:srgbClr val="2E2A3A"/>
+                        <a:srgbClr val="5E4F85"/>
                       </a:solidFill>
                       <a:prstDash val="solid"/>
                       <a:round/>
@@ -28162,7 +28524,7 @@
                     </a:lnL>
                     <a:lnR w="6350" cap="flat" cmpd="sng" algn="ctr">
                       <a:solidFill>
-                        <a:srgbClr val="2E2A3A"/>
+                        <a:srgbClr val="5E4F85"/>
                       </a:solidFill>
                       <a:prstDash val="solid"/>
                       <a:round/>
@@ -28171,7 +28533,7 @@
                     </a:lnR>
                     <a:lnT w="6350" cap="flat" cmpd="sng" algn="ctr">
                       <a:solidFill>
-                        <a:srgbClr val="2E2A3A"/>
+                        <a:srgbClr val="5E4F85"/>
                       </a:solidFill>
                       <a:prstDash val="solid"/>
                       <a:round/>
@@ -28180,7 +28542,7 @@
                     </a:lnT>
                     <a:lnB w="6350" cap="flat" cmpd="sng" algn="ctr">
                       <a:solidFill>
-                        <a:srgbClr val="2E2A3A"/>
+                        <a:srgbClr val="5E4F85"/>
                       </a:solidFill>
                       <a:prstDash val="solid"/>
                       <a:round/>
@@ -28188,7 +28550,7 @@
                       <a:tailEnd type="none" w="med" len="med"/>
                     </a:lnB>
                     <a:solidFill>
-                      <a:srgbClr val="102A20"/>
+                      <a:srgbClr val="06180F"/>
                     </a:solidFill>
                   </a:tcPr>
                 </a:tc>
@@ -28221,7 +28583,7 @@
                   <a:tcPr marL="73152" marR="73152" marT="73152" marB="73152" anchor="ctr">
                     <a:lnL w="6350" cap="flat" cmpd="sng" algn="ctr">
                       <a:solidFill>
-                        <a:srgbClr val="2E2A3A"/>
+                        <a:srgbClr val="5E4F85"/>
                       </a:solidFill>
                       <a:prstDash val="solid"/>
                       <a:round/>
@@ -28230,7 +28592,7 @@
                     </a:lnL>
                     <a:lnR w="6350" cap="flat" cmpd="sng" algn="ctr">
                       <a:solidFill>
-                        <a:srgbClr val="2E2A3A"/>
+                        <a:srgbClr val="5E4F85"/>
                       </a:solidFill>
                       <a:prstDash val="solid"/>
                       <a:round/>
@@ -28239,7 +28601,7 @@
                     </a:lnR>
                     <a:lnT w="6350" cap="flat" cmpd="sng" algn="ctr">
                       <a:solidFill>
-                        <a:srgbClr val="2E2A3A"/>
+                        <a:srgbClr val="5E4F85"/>
                       </a:solidFill>
                       <a:prstDash val="solid"/>
                       <a:round/>
@@ -28248,7 +28610,7 @@
                     </a:lnT>
                     <a:lnB w="6350" cap="flat" cmpd="sng" algn="ctr">
                       <a:solidFill>
-                        <a:srgbClr val="2E2A3A"/>
+                        <a:srgbClr val="5E4F85"/>
                       </a:solidFill>
                       <a:prstDash val="solid"/>
                       <a:round/>
@@ -28256,7 +28618,7 @@
                       <a:tailEnd type="none" w="med" len="med"/>
                     </a:lnB>
                     <a:solidFill>
-                      <a:srgbClr val="102A20"/>
+                      <a:srgbClr val="06180F"/>
                     </a:solidFill>
                   </a:tcPr>
                 </a:tc>
@@ -28273,7 +28635,7 @@
                       <a:r>
                         <a:rPr lang="en-US" sz="1150" b="1" dirty="0">
                           <a:solidFill>
-                            <a:srgbClr val="5FD6A0"/>
+                            <a:srgbClr val="3FCF8E"/>
                           </a:solidFill>
                           <a:latin typeface="Montserrat" pitchFamily="34" charset="0"/>
                           <a:ea typeface="Montserrat" pitchFamily="34" charset="-122"/>
@@ -28291,7 +28653,7 @@
                   <a:tcPr marL="73152" marR="73152" marT="73152" marB="73152" anchor="ctr">
                     <a:lnL w="6350" cap="flat" cmpd="sng" algn="ctr">
                       <a:solidFill>
-                        <a:srgbClr val="2E2A3A"/>
+                        <a:srgbClr val="5E4F85"/>
                       </a:solidFill>
                       <a:prstDash val="solid"/>
                       <a:round/>
@@ -28300,7 +28662,7 @@
                     </a:lnL>
                     <a:lnR w="6350" cap="flat" cmpd="sng" algn="ctr">
                       <a:solidFill>
-                        <a:srgbClr val="2E2A3A"/>
+                        <a:srgbClr val="5E4F85"/>
                       </a:solidFill>
                       <a:prstDash val="solid"/>
                       <a:round/>
@@ -28309,7 +28671,7 @@
                     </a:lnR>
                     <a:lnT w="6350" cap="flat" cmpd="sng" algn="ctr">
                       <a:solidFill>
-                        <a:srgbClr val="2E2A3A"/>
+                        <a:srgbClr val="5E4F85"/>
                       </a:solidFill>
                       <a:prstDash val="solid"/>
                       <a:round/>
@@ -28318,7 +28680,7 @@
                     </a:lnT>
                     <a:lnB w="6350" cap="flat" cmpd="sng" algn="ctr">
                       <a:solidFill>
-                        <a:srgbClr val="2E2A3A"/>
+                        <a:srgbClr val="5E4F85"/>
                       </a:solidFill>
                       <a:prstDash val="solid"/>
                       <a:round/>
@@ -28326,7 +28688,7 @@
                       <a:tailEnd type="none" w="med" len="med"/>
                     </a:lnB>
                     <a:solidFill>
-                      <a:srgbClr val="102A20"/>
+                      <a:srgbClr val="06180F"/>
                     </a:solidFill>
                   </a:tcPr>
                 </a:tc>
@@ -28359,7 +28721,7 @@
                   <a:tcPr marL="73152" marR="73152" marT="73152" marB="73152" anchor="ctr">
                     <a:lnL w="6350" cap="flat" cmpd="sng" algn="ctr">
                       <a:solidFill>
-                        <a:srgbClr val="2E2A3A"/>
+                        <a:srgbClr val="5E4F85"/>
                       </a:solidFill>
                       <a:prstDash val="solid"/>
                       <a:round/>
@@ -28368,7 +28730,7 @@
                     </a:lnL>
                     <a:lnR w="6350" cap="flat" cmpd="sng" algn="ctr">
                       <a:solidFill>
-                        <a:srgbClr val="2E2A3A"/>
+                        <a:srgbClr val="5E4F85"/>
                       </a:solidFill>
                       <a:prstDash val="solid"/>
                       <a:round/>
@@ -28377,7 +28739,7 @@
                     </a:lnR>
                     <a:lnT w="6350" cap="flat" cmpd="sng" algn="ctr">
                       <a:solidFill>
-                        <a:srgbClr val="2E2A3A"/>
+                        <a:srgbClr val="5E4F85"/>
                       </a:solidFill>
                       <a:prstDash val="solid"/>
                       <a:round/>
@@ -28386,7 +28748,7 @@
                     </a:lnT>
                     <a:lnB w="6350" cap="flat" cmpd="sng" algn="ctr">
                       <a:solidFill>
-                        <a:srgbClr val="2E2A3A"/>
+                        <a:srgbClr val="5E4F85"/>
                       </a:solidFill>
                       <a:prstDash val="solid"/>
                       <a:round/>
@@ -28394,7 +28756,7 @@
                       <a:tailEnd type="none" w="med" len="med"/>
                     </a:lnB>
                     <a:solidFill>
-                      <a:srgbClr val="102A20"/>
+                      <a:srgbClr val="06180F"/>
                     </a:solidFill>
                   </a:tcPr>
                 </a:tc>
@@ -28427,7 +28789,7 @@
                   <a:tcPr marL="73152" marR="73152" marT="73152" marB="73152" anchor="ctr">
                     <a:lnL w="6350" cap="flat" cmpd="sng" algn="ctr">
                       <a:solidFill>
-                        <a:srgbClr val="2E2A3A"/>
+                        <a:srgbClr val="5E4F85"/>
                       </a:solidFill>
                       <a:prstDash val="solid"/>
                       <a:round/>
@@ -28436,7 +28798,7 @@
                     </a:lnL>
                     <a:lnR w="6350" cap="flat" cmpd="sng" algn="ctr">
                       <a:solidFill>
-                        <a:srgbClr val="2E2A3A"/>
+                        <a:srgbClr val="5E4F85"/>
                       </a:solidFill>
                       <a:prstDash val="solid"/>
                       <a:round/>
@@ -28445,7 +28807,7 @@
                     </a:lnR>
                     <a:lnT w="6350" cap="flat" cmpd="sng" algn="ctr">
                       <a:solidFill>
-                        <a:srgbClr val="2E2A3A"/>
+                        <a:srgbClr val="5E4F85"/>
                       </a:solidFill>
                       <a:prstDash val="solid"/>
                       <a:round/>
@@ -28454,7 +28816,7 @@
                     </a:lnT>
                     <a:lnB w="6350" cap="flat" cmpd="sng" algn="ctr">
                       <a:solidFill>
-                        <a:srgbClr val="2E2A3A"/>
+                        <a:srgbClr val="5E4F85"/>
                       </a:solidFill>
                       <a:prstDash val="solid"/>
                       <a:round/>
@@ -28462,7 +28824,7 @@
                       <a:tailEnd type="none" w="med" len="med"/>
                     </a:lnB>
                     <a:solidFill>
-                      <a:srgbClr val="102A20"/>
+                      <a:srgbClr val="06180F"/>
                     </a:solidFill>
                   </a:tcPr>
                 </a:tc>
@@ -28479,7 +28841,7 @@
                       <a:r>
                         <a:rPr lang="en-US" sz="1150" b="1" dirty="0">
                           <a:solidFill>
-                            <a:srgbClr val="E8A857"/>
+                            <a:srgbClr val="6BA0F8"/>
                           </a:solidFill>
                           <a:latin typeface="Montserrat" pitchFamily="34" charset="0"/>
                           <a:ea typeface="Montserrat" pitchFamily="34" charset="-122"/>
@@ -28497,7 +28859,7 @@
                   <a:tcPr marL="73152" marR="73152" marT="73152" marB="73152" anchor="ctr">
                     <a:lnL w="6350" cap="flat" cmpd="sng" algn="ctr">
                       <a:solidFill>
-                        <a:srgbClr val="2E2A3A"/>
+                        <a:srgbClr val="5E4F85"/>
                       </a:solidFill>
                       <a:prstDash val="solid"/>
                       <a:round/>
@@ -28506,7 +28868,7 @@
                     </a:lnL>
                     <a:lnR w="6350" cap="flat" cmpd="sng" algn="ctr">
                       <a:solidFill>
-                        <a:srgbClr val="2E2A3A"/>
+                        <a:srgbClr val="5E4F85"/>
                       </a:solidFill>
                       <a:prstDash val="solid"/>
                       <a:round/>
@@ -28515,7 +28877,7 @@
                     </a:lnR>
                     <a:lnT w="6350" cap="flat" cmpd="sng" algn="ctr">
                       <a:solidFill>
-                        <a:srgbClr val="2E2A3A"/>
+                        <a:srgbClr val="5E4F85"/>
                       </a:solidFill>
                       <a:prstDash val="solid"/>
                       <a:round/>
@@ -28524,7 +28886,7 @@
                     </a:lnT>
                     <a:lnB w="6350" cap="flat" cmpd="sng" algn="ctr">
                       <a:solidFill>
-                        <a:srgbClr val="2E2A3A"/>
+                        <a:srgbClr val="5E4F85"/>
                       </a:solidFill>
                       <a:prstDash val="solid"/>
                       <a:round/>
@@ -28532,7 +28894,7 @@
                       <a:tailEnd type="none" w="med" len="med"/>
                     </a:lnB>
                     <a:solidFill>
-                      <a:srgbClr val="2A2010"/>
+                      <a:srgbClr val="0B1A38"/>
                     </a:solidFill>
                   </a:tcPr>
                 </a:tc>
@@ -28565,7 +28927,7 @@
                   <a:tcPr marL="73152" marR="73152" marT="73152" marB="73152" anchor="ctr">
                     <a:lnL w="6350" cap="flat" cmpd="sng" algn="ctr">
                       <a:solidFill>
-                        <a:srgbClr val="2E2A3A"/>
+                        <a:srgbClr val="5E4F85"/>
                       </a:solidFill>
                       <a:prstDash val="solid"/>
                       <a:round/>
@@ -28574,7 +28936,7 @@
                     </a:lnL>
                     <a:lnR w="6350" cap="flat" cmpd="sng" algn="ctr">
                       <a:solidFill>
-                        <a:srgbClr val="2E2A3A"/>
+                        <a:srgbClr val="5E4F85"/>
                       </a:solidFill>
                       <a:prstDash val="solid"/>
                       <a:round/>
@@ -28583,7 +28945,7 @@
                     </a:lnR>
                     <a:lnT w="6350" cap="flat" cmpd="sng" algn="ctr">
                       <a:solidFill>
-                        <a:srgbClr val="2E2A3A"/>
+                        <a:srgbClr val="5E4F85"/>
                       </a:solidFill>
                       <a:prstDash val="solid"/>
                       <a:round/>
@@ -28592,7 +28954,7 @@
                     </a:lnT>
                     <a:lnB w="6350" cap="flat" cmpd="sng" algn="ctr">
                       <a:solidFill>
-                        <a:srgbClr val="2E2A3A"/>
+                        <a:srgbClr val="5E4F85"/>
                       </a:solidFill>
                       <a:prstDash val="solid"/>
                       <a:round/>
@@ -28600,7 +28962,7 @@
                       <a:tailEnd type="none" w="med" len="med"/>
                     </a:lnB>
                     <a:solidFill>
-                      <a:srgbClr val="2A2010"/>
+                      <a:srgbClr val="0B1A38"/>
                     </a:solidFill>
                   </a:tcPr>
                 </a:tc>
@@ -28633,7 +28995,7 @@
                   <a:tcPr marL="73152" marR="73152" marT="73152" marB="73152" anchor="ctr">
                     <a:lnL w="6350" cap="flat" cmpd="sng" algn="ctr">
                       <a:solidFill>
-                        <a:srgbClr val="2E2A3A"/>
+                        <a:srgbClr val="5E4F85"/>
                       </a:solidFill>
                       <a:prstDash val="solid"/>
                       <a:round/>
@@ -28642,7 +29004,7 @@
                     </a:lnL>
                     <a:lnR w="6350" cap="flat" cmpd="sng" algn="ctr">
                       <a:solidFill>
-                        <a:srgbClr val="2E2A3A"/>
+                        <a:srgbClr val="5E4F85"/>
                       </a:solidFill>
                       <a:prstDash val="solid"/>
                       <a:round/>
@@ -28651,7 +29013,7 @@
                     </a:lnR>
                     <a:lnT w="6350" cap="flat" cmpd="sng" algn="ctr">
                       <a:solidFill>
-                        <a:srgbClr val="2E2A3A"/>
+                        <a:srgbClr val="5E4F85"/>
                       </a:solidFill>
                       <a:prstDash val="solid"/>
                       <a:round/>
@@ -28660,7 +29022,7 @@
                     </a:lnT>
                     <a:lnB w="6350" cap="flat" cmpd="sng" algn="ctr">
                       <a:solidFill>
-                        <a:srgbClr val="2E2A3A"/>
+                        <a:srgbClr val="5E4F85"/>
                       </a:solidFill>
                       <a:prstDash val="solid"/>
                       <a:round/>
@@ -28668,7 +29030,7 @@
                       <a:tailEnd type="none" w="med" len="med"/>
                     </a:lnB>
                     <a:solidFill>
-                      <a:srgbClr val="2A2010"/>
+                      <a:srgbClr val="0B1A38"/>
                     </a:solidFill>
                   </a:tcPr>
                 </a:tc>
@@ -28685,7 +29047,7 @@
                       <a:r>
                         <a:rPr lang="en-US" sz="1150" b="1" dirty="0">
                           <a:solidFill>
-                            <a:srgbClr val="FF7B7B"/>
+                            <a:srgbClr val="FF6B6B"/>
                           </a:solidFill>
                           <a:latin typeface="Montserrat" pitchFamily="34" charset="0"/>
                           <a:ea typeface="Montserrat" pitchFamily="34" charset="-122"/>
@@ -28703,7 +29065,7 @@
                   <a:tcPr marL="73152" marR="73152" marT="73152" marB="73152" anchor="ctr">
                     <a:lnL w="6350" cap="flat" cmpd="sng" algn="ctr">
                       <a:solidFill>
-                        <a:srgbClr val="2E2A3A"/>
+                        <a:srgbClr val="5E4F85"/>
                       </a:solidFill>
                       <a:prstDash val="solid"/>
                       <a:round/>
@@ -28712,7 +29074,7 @@
                     </a:lnL>
                     <a:lnR w="6350" cap="flat" cmpd="sng" algn="ctr">
                       <a:solidFill>
-                        <a:srgbClr val="2E2A3A"/>
+                        <a:srgbClr val="5E4F85"/>
                       </a:solidFill>
                       <a:prstDash val="solid"/>
                       <a:round/>
@@ -28721,7 +29083,7 @@
                     </a:lnR>
                     <a:lnT w="6350" cap="flat" cmpd="sng" algn="ctr">
                       <a:solidFill>
-                        <a:srgbClr val="2E2A3A"/>
+                        <a:srgbClr val="5E4F85"/>
                       </a:solidFill>
                       <a:prstDash val="solid"/>
                       <a:round/>
@@ -28730,7 +29092,7 @@
                     </a:lnT>
                     <a:lnB w="6350" cap="flat" cmpd="sng" algn="ctr">
                       <a:solidFill>
-                        <a:srgbClr val="2E2A3A"/>
+                        <a:srgbClr val="5E4F85"/>
                       </a:solidFill>
                       <a:prstDash val="solid"/>
                       <a:round/>
@@ -28738,7 +29100,7 @@
                       <a:tailEnd type="none" w="med" len="med"/>
                     </a:lnB>
                     <a:solidFill>
-                      <a:srgbClr val="2E1418"/>
+                      <a:srgbClr val="1A0808"/>
                     </a:solidFill>
                   </a:tcPr>
                 </a:tc>
@@ -28771,7 +29133,7 @@
                   <a:tcPr marL="73152" marR="73152" marT="73152" marB="73152" anchor="ctr">
                     <a:lnL w="6350" cap="flat" cmpd="sng" algn="ctr">
                       <a:solidFill>
-                        <a:srgbClr val="2E2A3A"/>
+                        <a:srgbClr val="5E4F85"/>
                       </a:solidFill>
                       <a:prstDash val="solid"/>
                       <a:round/>
@@ -28780,7 +29142,7 @@
                     </a:lnL>
                     <a:lnR w="6350" cap="flat" cmpd="sng" algn="ctr">
                       <a:solidFill>
-                        <a:srgbClr val="2E2A3A"/>
+                        <a:srgbClr val="5E4F85"/>
                       </a:solidFill>
                       <a:prstDash val="solid"/>
                       <a:round/>
@@ -28789,7 +29151,7 @@
                     </a:lnR>
                     <a:lnT w="6350" cap="flat" cmpd="sng" algn="ctr">
                       <a:solidFill>
-                        <a:srgbClr val="2E2A3A"/>
+                        <a:srgbClr val="5E4F85"/>
                       </a:solidFill>
                       <a:prstDash val="solid"/>
                       <a:round/>
@@ -28798,7 +29160,7 @@
                     </a:lnT>
                     <a:lnB w="6350" cap="flat" cmpd="sng" algn="ctr">
                       <a:solidFill>
-                        <a:srgbClr val="2E2A3A"/>
+                        <a:srgbClr val="5E4F85"/>
                       </a:solidFill>
                       <a:prstDash val="solid"/>
                       <a:round/>
@@ -28806,7 +29168,7 @@
                       <a:tailEnd type="none" w="med" len="med"/>
                     </a:lnB>
                     <a:solidFill>
-                      <a:srgbClr val="2E1418"/>
+                      <a:srgbClr val="1A0808"/>
                     </a:solidFill>
                   </a:tcPr>
                 </a:tc>
@@ -28839,7 +29201,7 @@
                   <a:tcPr marL="73152" marR="73152" marT="73152" marB="73152" anchor="ctr">
                     <a:lnL w="6350" cap="flat" cmpd="sng" algn="ctr">
                       <a:solidFill>
-                        <a:srgbClr val="2E2A3A"/>
+                        <a:srgbClr val="5E4F85"/>
                       </a:solidFill>
                       <a:prstDash val="solid"/>
                       <a:round/>
@@ -28848,7 +29210,7 @@
                     </a:lnL>
                     <a:lnR w="6350" cap="flat" cmpd="sng" algn="ctr">
                       <a:solidFill>
-                        <a:srgbClr val="2E2A3A"/>
+                        <a:srgbClr val="5E4F85"/>
                       </a:solidFill>
                       <a:prstDash val="solid"/>
                       <a:round/>
@@ -28857,7 +29219,7 @@
                     </a:lnR>
                     <a:lnT w="6350" cap="flat" cmpd="sng" algn="ctr">
                       <a:solidFill>
-                        <a:srgbClr val="2E2A3A"/>
+                        <a:srgbClr val="5E4F85"/>
                       </a:solidFill>
                       <a:prstDash val="solid"/>
                       <a:round/>
@@ -28866,7 +29228,7 @@
                     </a:lnT>
                     <a:lnB w="6350" cap="flat" cmpd="sng" algn="ctr">
                       <a:solidFill>
-                        <a:srgbClr val="2E2A3A"/>
+                        <a:srgbClr val="5E4F85"/>
                       </a:solidFill>
                       <a:prstDash val="solid"/>
                       <a:round/>
@@ -28874,7 +29236,7 @@
                       <a:tailEnd type="none" w="med" len="med"/>
                     </a:lnB>
                     <a:solidFill>
-                      <a:srgbClr val="2E1418"/>
+                      <a:srgbClr val="1A0808"/>
                     </a:solidFill>
                   </a:tcPr>
                 </a:tc>
@@ -29003,11 +29365,11 @@
             </a:avLst>
           </a:prstGeom>
           <a:solidFill>
-            <a:srgbClr val="17141F"/>
+            <a:srgbClr val="000000"/>
           </a:solidFill>
           <a:ln w="12700">
             <a:solidFill>
-              <a:srgbClr val="2E2A3A"/>
+              <a:srgbClr val="5E4F85"/>
             </a:solidFill>
             <a:prstDash val="solid"/>
           </a:ln>
@@ -29085,7 +29447,7 @@
             <a:lvl1pPr>
               <a:defRPr sz="850">
                 <a:solidFill>
-                  <a:srgbClr val="8A82A0"/>
+                  <a:srgbClr val="9A94AA"/>
                 </a:solidFill>
                 <a:latin typeface="Courier New"/>
                 <a:ea typeface="Courier New"/>
@@ -29155,7 +29517,7 @@
             <a:r>
               <a:rPr lang="en-US" sz="2600" b="1" dirty="0">
                 <a:solidFill>
-                  <a:srgbClr val="C9A6FF"/>
+                  <a:srgbClr val="A98BFF"/>
                 </a:solidFill>
                 <a:latin typeface="Courier New" pitchFamily="34" charset="0"/>
                 <a:ea typeface="Courier New" pitchFamily="34" charset="-122"/>
@@ -29223,9 +29585,14 @@
             </a:avLst>
           </a:prstGeom>
           <a:solidFill>
-            <a:srgbClr val="C9A6FF"/>
-          </a:solidFill>
-          <a:ln/>
+            <a:srgbClr val="1A0B3D"/>
+          </a:solidFill>
+          <a:ln w="12700">
+            <a:solidFill>
+              <a:srgbClr val="5A05F4"/>
+            </a:solidFill>
+            <a:prstDash val="solid"/>
+          </a:ln>
         </p:spPr>
       </p:sp>
       <p:sp>
@@ -29255,7 +29622,7 @@
             <a:r>
               <a:rPr lang="en-US" sz="900" b="1" spc="100" kern="0" dirty="0">
                 <a:solidFill>
-                  <a:srgbClr val="1C1140"/>
+                  <a:srgbClr val="A98BFF"/>
                 </a:solidFill>
                 <a:latin typeface="Courier New" pitchFamily="34" charset="0"/>
                 <a:ea typeface="Courier New" pitchFamily="34" charset="-122"/>
@@ -29308,9 +29675,14 @@
             </a:avLst>
           </a:prstGeom>
           <a:solidFill>
-            <a:srgbClr val="102A20"/>
-          </a:solidFill>
-          <a:ln/>
+            <a:srgbClr val="06180F"/>
+          </a:solidFill>
+          <a:ln w="12700">
+            <a:solidFill>
+              <a:srgbClr val="3FCF8E"/>
+            </a:solidFill>
+            <a:prstDash val="solid"/>
+          </a:ln>
         </p:spPr>
       </p:sp>
       <p:sp>
@@ -29340,7 +29712,7 @@
             <a:r>
               <a:rPr lang="en-US" sz="3000" b="1" dirty="0">
                 <a:solidFill>
-                  <a:srgbClr val="5FD6A0"/>
+                  <a:srgbClr val="3FCF8E"/>
                 </a:solidFill>
                 <a:latin typeface="Montserrat" pitchFamily="34" charset="0"/>
                 <a:ea typeface="Montserrat" pitchFamily="34" charset="-122"/>
@@ -29379,7 +29751,7 @@
             <a:r>
               <a:rPr lang="en-US" sz="1150" dirty="0">
                 <a:solidFill>
-                  <a:srgbClr val="5FD6A0"/>
+                  <a:srgbClr val="C9C4D6"/>
                 </a:solidFill>
                 <a:latin typeface="Montserrat" pitchFamily="34" charset="0"/>
                 <a:ea typeface="Montserrat" pitchFamily="34" charset="-122"/>
@@ -29408,9 +29780,14 @@
             </a:avLst>
           </a:prstGeom>
           <a:solidFill>
-            <a:srgbClr val="2E1418"/>
-          </a:solidFill>
-          <a:ln/>
+            <a:srgbClr val="1A0808"/>
+          </a:solidFill>
+          <a:ln w="12700">
+            <a:solidFill>
+              <a:srgbClr val="FF6B6B"/>
+            </a:solidFill>
+            <a:prstDash val="solid"/>
+          </a:ln>
         </p:spPr>
       </p:sp>
       <p:sp>
@@ -29440,7 +29817,7 @@
             <a:r>
               <a:rPr lang="en-US" sz="3000" b="1" dirty="0">
                 <a:solidFill>
-                  <a:srgbClr val="FF7B7B"/>
+                  <a:srgbClr val="FF6B6B"/>
                 </a:solidFill>
                 <a:latin typeface="Montserrat" pitchFamily="34" charset="0"/>
                 <a:ea typeface="Montserrat" pitchFamily="34" charset="-122"/>
@@ -29479,7 +29856,7 @@
             <a:r>
               <a:rPr lang="en-US" sz="1150" dirty="0">
                 <a:solidFill>
-                  <a:srgbClr val="FF7B7B"/>
+                  <a:srgbClr val="C9C4D6"/>
                 </a:solidFill>
                 <a:latin typeface="Montserrat" pitchFamily="34" charset="0"/>
                 <a:ea typeface="Montserrat" pitchFamily="34" charset="-122"/>
@@ -29508,9 +29885,14 @@
             </a:avLst>
           </a:prstGeom>
           <a:solidFill>
-            <a:srgbClr val="2A2010"/>
-          </a:solidFill>
-          <a:ln/>
+            <a:srgbClr val="0B1A38"/>
+          </a:solidFill>
+          <a:ln w="12700">
+            <a:solidFill>
+              <a:srgbClr val="6BA0F8"/>
+            </a:solidFill>
+            <a:prstDash val="solid"/>
+          </a:ln>
         </p:spPr>
       </p:sp>
       <p:sp>
@@ -29540,7 +29922,7 @@
             <a:r>
               <a:rPr lang="en-US" sz="3000" b="1" dirty="0">
                 <a:solidFill>
-                  <a:srgbClr val="E8A857"/>
+                  <a:srgbClr val="6BA0F8"/>
                 </a:solidFill>
                 <a:latin typeface="Montserrat" pitchFamily="34" charset="0"/>
                 <a:ea typeface="Montserrat" pitchFamily="34" charset="-122"/>
@@ -29579,7 +29961,7 @@
             <a:r>
               <a:rPr lang="en-US" sz="1150" dirty="0">
                 <a:solidFill>
-                  <a:srgbClr val="E8A857"/>
+                  <a:srgbClr val="C9C4D6"/>
                 </a:solidFill>
                 <a:latin typeface="Montserrat" pitchFamily="34" charset="0"/>
                 <a:ea typeface="Montserrat" pitchFamily="34" charset="-122"/>
@@ -29606,7 +29988,7 @@
             <a:avLst/>
           </a:prstGeom>
           <a:solidFill>
-            <a:srgbClr val="9B7BE8"/>
+            <a:srgbClr val="8F72E6"/>
           </a:solidFill>
           <a:ln/>
         </p:spPr>
@@ -29626,7 +30008,7 @@
             <a:avLst/>
           </a:prstGeom>
           <a:solidFill>
-            <a:srgbClr val="9B7BE8"/>
+            <a:srgbClr val="8F72E6"/>
           </a:solidFill>
           <a:ln/>
         </p:spPr>
@@ -29646,7 +30028,7 @@
             <a:avLst/>
           </a:prstGeom>
           <a:solidFill>
-            <a:srgbClr val="9B7BE8"/>
+            <a:srgbClr val="8F72E6"/>
           </a:solidFill>
           <a:ln/>
         </p:spPr>
@@ -29666,7 +30048,7 @@
             <a:avLst/>
           </a:prstGeom>
           <a:solidFill>
-            <a:srgbClr val="9B7BE8"/>
+            <a:srgbClr val="8F72E6"/>
           </a:solidFill>
           <a:ln/>
         </p:spPr>
@@ -29686,7 +30068,7 @@
             <a:avLst/>
           </a:prstGeom>
           <a:solidFill>
-            <a:srgbClr val="9B7BE8"/>
+            <a:srgbClr val="8F72E6"/>
           </a:solidFill>
           <a:ln/>
         </p:spPr>
@@ -29706,7 +30088,7 @@
             <a:avLst/>
           </a:prstGeom>
           <a:solidFill>
-            <a:srgbClr val="9B7BE8"/>
+            <a:srgbClr val="8F72E6"/>
           </a:solidFill>
           <a:ln/>
         </p:spPr>
@@ -29726,7 +30108,7 @@
             <a:avLst/>
           </a:prstGeom>
           <a:solidFill>
-            <a:srgbClr val="9B7BE8"/>
+            <a:srgbClr val="8F72E6"/>
           </a:solidFill>
           <a:ln/>
         </p:spPr>
@@ -29746,7 +30128,7 @@
             <a:avLst/>
           </a:prstGeom>
           <a:solidFill>
-            <a:srgbClr val="9B7BE8"/>
+            <a:srgbClr val="8F72E6"/>
           </a:solidFill>
           <a:ln/>
         </p:spPr>
@@ -29766,7 +30148,7 @@
             <a:avLst/>
           </a:prstGeom>
           <a:solidFill>
-            <a:srgbClr val="9B7BE8"/>
+            <a:srgbClr val="8F72E6"/>
           </a:solidFill>
           <a:ln/>
         </p:spPr>
@@ -29786,7 +30168,7 @@
             <a:avLst/>
           </a:prstGeom>
           <a:solidFill>
-            <a:srgbClr val="9B7BE8"/>
+            <a:srgbClr val="8F72E6"/>
           </a:solidFill>
           <a:ln/>
         </p:spPr>
@@ -29806,7 +30188,7 @@
             <a:avLst/>
           </a:prstGeom>
           <a:solidFill>
-            <a:srgbClr val="9B7BE8"/>
+            <a:srgbClr val="8F72E6"/>
           </a:solidFill>
           <a:ln/>
         </p:spPr>
@@ -29826,7 +30208,7 @@
             <a:avLst/>
           </a:prstGeom>
           <a:solidFill>
-            <a:srgbClr val="9B7BE8"/>
+            <a:srgbClr val="8F72E6"/>
           </a:solidFill>
           <a:ln/>
         </p:spPr>
@@ -29846,7 +30228,7 @@
             <a:avLst/>
           </a:prstGeom>
           <a:solidFill>
-            <a:srgbClr val="9B7BE8"/>
+            <a:srgbClr val="8F72E6"/>
           </a:solidFill>
           <a:ln/>
         </p:spPr>
@@ -29866,7 +30248,7 @@
             <a:avLst/>
           </a:prstGeom>
           <a:solidFill>
-            <a:srgbClr val="9B7BE8"/>
+            <a:srgbClr val="8F72E6"/>
           </a:solidFill>
           <a:ln/>
         </p:spPr>
@@ -29886,7 +30268,7 @@
             <a:avLst/>
           </a:prstGeom>
           <a:solidFill>
-            <a:srgbClr val="9B7BE8"/>
+            <a:srgbClr val="8F72E6"/>
           </a:solidFill>
           <a:ln/>
         </p:spPr>
@@ -29906,7 +30288,7 @@
             <a:avLst/>
           </a:prstGeom>
           <a:solidFill>
-            <a:srgbClr val="9B7BE8"/>
+            <a:srgbClr val="8F72E6"/>
           </a:solidFill>
           <a:ln/>
         </p:spPr>
@@ -29926,7 +30308,7 @@
             <a:avLst/>
           </a:prstGeom>
           <a:solidFill>
-            <a:srgbClr val="9B7BE8"/>
+            <a:srgbClr val="8F72E6"/>
           </a:solidFill>
           <a:ln/>
         </p:spPr>
@@ -29946,7 +30328,7 @@
             <a:avLst/>
           </a:prstGeom>
           <a:solidFill>
-            <a:srgbClr val="9B7BE8"/>
+            <a:srgbClr val="8F72E6"/>
           </a:solidFill>
           <a:ln/>
         </p:spPr>
@@ -29966,7 +30348,7 @@
             <a:avLst/>
           </a:prstGeom>
           <a:solidFill>
-            <a:srgbClr val="9B7BE8"/>
+            <a:srgbClr val="8F72E6"/>
           </a:solidFill>
           <a:ln/>
         </p:spPr>
@@ -29986,7 +30368,7 @@
             <a:avLst/>
           </a:prstGeom>
           <a:solidFill>
-            <a:srgbClr val="9B7BE8"/>
+            <a:srgbClr val="8F72E6"/>
           </a:solidFill>
           <a:ln/>
         </p:spPr>
@@ -30006,7 +30388,7 @@
             <a:avLst/>
           </a:prstGeom>
           <a:solidFill>
-            <a:srgbClr val="9B7BE8"/>
+            <a:srgbClr val="8F72E6"/>
           </a:solidFill>
           <a:ln/>
         </p:spPr>
@@ -30026,7 +30408,7 @@
             <a:avLst/>
           </a:prstGeom>
           <a:solidFill>
-            <a:srgbClr val="9B7BE8"/>
+            <a:srgbClr val="8F72E6"/>
           </a:solidFill>
           <a:ln/>
         </p:spPr>
@@ -30046,7 +30428,7 @@
             <a:avLst/>
           </a:prstGeom>
           <a:solidFill>
-            <a:srgbClr val="9B7BE8"/>
+            <a:srgbClr val="8F72E6"/>
           </a:solidFill>
           <a:ln/>
         </p:spPr>
@@ -30066,7 +30448,7 @@
             <a:avLst/>
           </a:prstGeom>
           <a:solidFill>
-            <a:srgbClr val="9B7BE8"/>
+            <a:srgbClr val="8F72E6"/>
           </a:solidFill>
           <a:ln/>
         </p:spPr>
@@ -30086,7 +30468,7 @@
             <a:avLst/>
           </a:prstGeom>
           <a:solidFill>
-            <a:srgbClr val="9B7BE8"/>
+            <a:srgbClr val="8F72E6"/>
           </a:solidFill>
           <a:ln/>
         </p:spPr>
@@ -30106,7 +30488,7 @@
             <a:avLst/>
           </a:prstGeom>
           <a:solidFill>
-            <a:srgbClr val="9B7BE8"/>
+            <a:srgbClr val="8F72E6"/>
           </a:solidFill>
           <a:ln/>
         </p:spPr>
@@ -30128,7 +30510,7 @@
           <a:noFill/>
           <a:ln w="19050">
             <a:solidFill>
-              <a:srgbClr val="5FD6A0"/>
+              <a:srgbClr val="3FCF8E"/>
             </a:solidFill>
             <a:prstDash val="dash"/>
           </a:ln>
@@ -30161,7 +30543,7 @@
             <a:r>
               <a:rPr lang="en-US" sz="900" b="1" dirty="0">
                 <a:solidFill>
-                  <a:srgbClr val="5FD6A0"/>
+                  <a:srgbClr val="3FCF8E"/>
                 </a:solidFill>
                 <a:latin typeface="Courier New" pitchFamily="34" charset="0"/>
                 <a:ea typeface="Courier New" pitchFamily="34" charset="-122"/>
@@ -30190,7 +30572,7 @@
           <a:noFill/>
           <a:ln w="19050">
             <a:solidFill>
-              <a:srgbClr val="FF7B7B"/>
+              <a:srgbClr val="FF6B6B"/>
             </a:solidFill>
             <a:prstDash val="dash"/>
           </a:ln>
@@ -30223,7 +30605,7 @@
             <a:r>
               <a:rPr lang="en-US" sz="900" b="1" dirty="0">
                 <a:solidFill>
-                  <a:srgbClr val="FF7B7B"/>
+                  <a:srgbClr val="FF6B6B"/>
                 </a:solidFill>
                 <a:latin typeface="Courier New" pitchFamily="34" charset="0"/>
                 <a:ea typeface="Courier New" pitchFamily="34" charset="-122"/>
@@ -30262,7 +30644,7 @@
             <a:r>
               <a:rPr lang="en-US" sz="850" spc="100" kern="0" dirty="0">
                 <a:solidFill>
-                  <a:srgbClr val="8A82A0"/>
+                  <a:srgbClr val="9A94AA"/>
                 </a:solidFill>
                 <a:latin typeface="Courier New" pitchFamily="34" charset="0"/>
                 <a:ea typeface="Courier New" pitchFamily="34" charset="-122"/>
@@ -30291,9 +30673,14 @@
             </a:avLst>
           </a:prstGeom>
           <a:solidFill>
-            <a:srgbClr val="2E1418"/>
-          </a:solidFill>
-          <a:ln/>
+            <a:srgbClr val="1A0808"/>
+          </a:solidFill>
+          <a:ln w="12700">
+            <a:solidFill>
+              <a:srgbClr val="FF6B6B"/>
+            </a:solidFill>
+            <a:prstDash val="solid"/>
+          </a:ln>
         </p:spPr>
       </p:sp>
       <p:sp>
@@ -30323,7 +30710,7 @@
             <a:r>
               <a:rPr lang="en-US" sz="950" b="1" spc="150" kern="0" dirty="0">
                 <a:solidFill>
-                  <a:srgbClr val="FF7B7B"/>
+                  <a:srgbClr val="FF6B6B"/>
                 </a:solidFill>
                 <a:latin typeface="Courier New" pitchFamily="34" charset="0"/>
                 <a:ea typeface="Courier New" pitchFamily="34" charset="-122"/>
@@ -30471,7 +30858,7 @@
             <a:lvl1pPr>
               <a:defRPr sz="850">
                 <a:solidFill>
-                  <a:srgbClr val="8A82A0"/>
+                  <a:srgbClr val="9A94AA"/>
                 </a:solidFill>
                 <a:latin typeface="Courier New"/>
                 <a:ea typeface="Courier New"/>
@@ -30541,7 +30928,7 @@
             <a:r>
               <a:rPr lang="en-US" sz="2600" b="1" dirty="0">
                 <a:solidFill>
-                  <a:srgbClr val="C9A6FF"/>
+                  <a:srgbClr val="A98BFF"/>
                 </a:solidFill>
                 <a:latin typeface="Courier New" pitchFamily="34" charset="0"/>
                 <a:ea typeface="Courier New" pitchFamily="34" charset="-122"/>
@@ -30609,9 +30996,14 @@
             </a:avLst>
           </a:prstGeom>
           <a:solidFill>
-            <a:srgbClr val="C9A6FF"/>
-          </a:solidFill>
-          <a:ln/>
+            <a:srgbClr val="1A0B3D"/>
+          </a:solidFill>
+          <a:ln w="12700">
+            <a:solidFill>
+              <a:srgbClr val="5A05F4"/>
+            </a:solidFill>
+            <a:prstDash val="solid"/>
+          </a:ln>
         </p:spPr>
       </p:sp>
       <p:sp>
@@ -30641,7 +31033,7 @@
             <a:r>
               <a:rPr lang="en-US" sz="900" b="1" spc="100" kern="0" dirty="0">
                 <a:solidFill>
-                  <a:srgbClr val="1C1140"/>
+                  <a:srgbClr val="A98BFF"/>
                 </a:solidFill>
                 <a:latin typeface="Courier New" pitchFamily="34" charset="0"/>
                 <a:ea typeface="Courier New" pitchFamily="34" charset="-122"/>
@@ -30694,11 +31086,11 @@
             </a:avLst>
           </a:prstGeom>
           <a:solidFill>
-            <a:srgbClr val="12101A"/>
+            <a:srgbClr val="07060C"/>
           </a:solidFill>
           <a:ln w="12700">
             <a:solidFill>
-              <a:srgbClr val="2E2A3A"/>
+              <a:srgbClr val="5E4F85"/>
             </a:solidFill>
             <a:prstDash val="solid"/>
           </a:ln>
@@ -30734,7 +31126,7 @@
             <a:r>
               <a:rPr lang="en-US" sz="1150" dirty="0">
                 <a:solidFill>
-                  <a:srgbClr val="C9A6FF"/>
+                  <a:srgbClr val="A98BFF"/>
                 </a:solidFill>
                 <a:latin typeface="Courier New" pitchFamily="34" charset="0"/>
                 <a:ea typeface="Courier New" pitchFamily="34" charset="-122"/>
@@ -30794,7 +31186,7 @@
             <a:r>
               <a:rPr lang="en-US" sz="1150" dirty="0">
                 <a:solidFill>
-                  <a:srgbClr val="C9A6FF"/>
+                  <a:srgbClr val="A98BFF"/>
                 </a:solidFill>
                 <a:latin typeface="Courier New" pitchFamily="34" charset="0"/>
                 <a:ea typeface="Courier New" pitchFamily="34" charset="-122"/>
@@ -30823,9 +31215,14 @@
             </a:avLst>
           </a:prstGeom>
           <a:solidFill>
-            <a:srgbClr val="102A20"/>
-          </a:solidFill>
-          <a:ln/>
+            <a:srgbClr val="06180F"/>
+          </a:solidFill>
+          <a:ln w="12700">
+            <a:solidFill>
+              <a:srgbClr val="3FCF8E"/>
+            </a:solidFill>
+            <a:prstDash val="solid"/>
+          </a:ln>
         </p:spPr>
       </p:sp>
       <p:sp>
@@ -30855,7 +31252,7 @@
             <a:r>
               <a:rPr lang="en-US" sz="1450" b="1" dirty="0">
                 <a:solidFill>
-                  <a:srgbClr val="5FD6A0"/>
+                  <a:srgbClr val="3FCF8E"/>
                 </a:solidFill>
                 <a:latin typeface="Montserrat" pitchFamily="34" charset="0"/>
                 <a:ea typeface="Montserrat" pitchFamily="34" charset="-122"/>
@@ -30897,7 +31294,7 @@
             <a:r>
               <a:rPr lang="en-US" sz="1200" dirty="0">
                 <a:solidFill>
-                  <a:srgbClr val="FFFFFF"/>
+                  <a:srgbClr val="C9C4D6"/>
                 </a:solidFill>
                 <a:latin typeface="Montserrat" pitchFamily="34" charset="0"/>
                 <a:ea typeface="Montserrat" pitchFamily="34" charset="-122"/>
@@ -30926,9 +31323,14 @@
             </a:avLst>
           </a:prstGeom>
           <a:solidFill>
-            <a:srgbClr val="2A2010"/>
-          </a:solidFill>
-          <a:ln/>
+            <a:srgbClr val="0B1A38"/>
+          </a:solidFill>
+          <a:ln w="12700">
+            <a:solidFill>
+              <a:srgbClr val="6BA0F8"/>
+            </a:solidFill>
+            <a:prstDash val="solid"/>
+          </a:ln>
         </p:spPr>
       </p:sp>
       <p:sp>
@@ -30958,7 +31360,7 @@
             <a:r>
               <a:rPr lang="en-US" sz="1450" b="1" dirty="0">
                 <a:solidFill>
-                  <a:srgbClr val="E8A857"/>
+                  <a:srgbClr val="6BA0F8"/>
                 </a:solidFill>
                 <a:latin typeface="Montserrat" pitchFamily="34" charset="0"/>
                 <a:ea typeface="Montserrat" pitchFamily="34" charset="-122"/>
@@ -31000,7 +31402,7 @@
             <a:r>
               <a:rPr lang="en-US" sz="1200" dirty="0">
                 <a:solidFill>
-                  <a:srgbClr val="FFFFFF"/>
+                  <a:srgbClr val="C9C4D6"/>
                 </a:solidFill>
                 <a:latin typeface="Montserrat" pitchFamily="34" charset="0"/>
                 <a:ea typeface="Montserrat" pitchFamily="34" charset="-122"/>
@@ -31039,7 +31441,7 @@
             <a:r>
               <a:rPr lang="en-US" sz="1150" i="1" dirty="0">
                 <a:solidFill>
-                  <a:srgbClr val="AFA9BE"/>
+                  <a:srgbClr val="C9C4D6"/>
                 </a:solidFill>
                 <a:latin typeface="Montserrat" pitchFamily="34" charset="0"/>
                 <a:ea typeface="Montserrat" pitchFamily="34" charset="-122"/>
@@ -31081,7 +31483,7 @@
             <a:lvl1pPr>
               <a:defRPr sz="850">
                 <a:solidFill>
-                  <a:srgbClr val="8A82A0"/>
+                  <a:srgbClr val="9A94AA"/>
                 </a:solidFill>
                 <a:latin typeface="Courier New"/>
                 <a:ea typeface="Courier New"/>

--- a/docs/decks/L09.pptx
+++ b/docs/decks/L09.pptx
@@ -17571,11 +17571,11 @@
         <p:spPr>
           <a:xfrm>
             <a:off x="566928" y="1783080"/>
-            <a:ext cx="3520440" cy="1463040"/>
+            <a:ext cx="3520440" cy="1874520"/>
           </a:xfrm>
           <a:prstGeom prst="roundRect">
             <a:avLst>
-              <a:gd name="adj" fmla="val 7500"/>
+              <a:gd name="adj" fmla="val 5854"/>
             </a:avLst>
           </a:prstGeom>
           <a:solidFill>
@@ -17691,7 +17691,7 @@
         <p:spPr>
           <a:xfrm>
             <a:off x="768096" y="2468880"/>
-            <a:ext cx="3118104" cy="621792"/>
+            <a:ext cx="3118104" cy="1033272"/>
           </a:xfrm>
           <a:prstGeom prst="rect">
             <a:avLst/>
@@ -17733,11 +17733,11 @@
         <p:spPr>
           <a:xfrm>
             <a:off x="4270248" y="1783080"/>
-            <a:ext cx="3520440" cy="1463040"/>
+            <a:ext cx="3520440" cy="1874520"/>
           </a:xfrm>
           <a:prstGeom prst="roundRect">
             <a:avLst>
-              <a:gd name="adj" fmla="val 7500"/>
+              <a:gd name="adj" fmla="val 5854"/>
             </a:avLst>
           </a:prstGeom>
           <a:solidFill>
@@ -17853,7 +17853,7 @@
         <p:spPr>
           <a:xfrm>
             <a:off x="4471416" y="2468880"/>
-            <a:ext cx="3118104" cy="621792"/>
+            <a:ext cx="3118104" cy="1033272"/>
           </a:xfrm>
           <a:prstGeom prst="rect">
             <a:avLst/>
@@ -17895,11 +17895,11 @@
         <p:spPr>
           <a:xfrm>
             <a:off x="7973568" y="1783080"/>
-            <a:ext cx="3520440" cy="1463040"/>
+            <a:ext cx="3520440" cy="1874520"/>
           </a:xfrm>
           <a:prstGeom prst="roundRect">
             <a:avLst>
-              <a:gd name="adj" fmla="val 7500"/>
+              <a:gd name="adj" fmla="val 5854"/>
             </a:avLst>
           </a:prstGeom>
           <a:solidFill>
@@ -18015,7 +18015,7 @@
         <p:spPr>
           <a:xfrm>
             <a:off x="8174736" y="2468880"/>
-            <a:ext cx="3118104" cy="621792"/>
+            <a:ext cx="3118104" cy="1033272"/>
           </a:xfrm>
           <a:prstGeom prst="rect">
             <a:avLst/>
@@ -18056,12 +18056,12 @@
         </p:nvSpPr>
         <p:spPr>
           <a:xfrm>
-            <a:off x="566928" y="3520440"/>
-            <a:ext cx="3520440" cy="1463040"/>
+            <a:off x="566928" y="3886200"/>
+            <a:ext cx="3520440" cy="1874520"/>
           </a:xfrm>
           <a:prstGeom prst="roundRect">
             <a:avLst>
-              <a:gd name="adj" fmla="val 7500"/>
+              <a:gd name="adj" fmla="val 5854"/>
             </a:avLst>
           </a:prstGeom>
           <a:solidFill>
@@ -18078,7 +18078,7 @@
         </p:nvSpPr>
         <p:spPr>
           <a:xfrm>
-            <a:off x="768096" y="3703320"/>
+            <a:off x="768096" y="4069080"/>
             <a:ext cx="384048" cy="384048"/>
           </a:xfrm>
           <a:prstGeom prst="ellipse">
@@ -18098,7 +18098,7 @@
         </p:nvSpPr>
         <p:spPr>
           <a:xfrm>
-            <a:off x="768096" y="3703320"/>
+            <a:off x="768096" y="4069080"/>
             <a:ext cx="384048" cy="384048"/>
           </a:xfrm>
           <a:prstGeom prst="rect">
@@ -18137,7 +18137,7 @@
         </p:nvSpPr>
         <p:spPr>
           <a:xfrm>
-            <a:off x="1280160" y="3675888"/>
+            <a:off x="1280160" y="4041648"/>
             <a:ext cx="2606040" cy="438912"/>
           </a:xfrm>
           <a:prstGeom prst="rect">
@@ -18176,8 +18176,8 @@
         </p:nvSpPr>
         <p:spPr>
           <a:xfrm>
-            <a:off x="768096" y="4206240"/>
-            <a:ext cx="3118104" cy="621792"/>
+            <a:off x="768096" y="4572000"/>
+            <a:ext cx="3118104" cy="1033272"/>
           </a:xfrm>
           <a:prstGeom prst="rect">
             <a:avLst/>
@@ -18218,12 +18218,12 @@
         </p:nvSpPr>
         <p:spPr>
           <a:xfrm>
-            <a:off x="4270248" y="3520440"/>
-            <a:ext cx="3520440" cy="1463040"/>
+            <a:off x="4270248" y="3886200"/>
+            <a:ext cx="3520440" cy="1874520"/>
           </a:xfrm>
           <a:prstGeom prst="roundRect">
             <a:avLst>
-              <a:gd name="adj" fmla="val 7500"/>
+              <a:gd name="adj" fmla="val 5854"/>
             </a:avLst>
           </a:prstGeom>
           <a:solidFill>
@@ -18240,7 +18240,7 @@
         </p:nvSpPr>
         <p:spPr>
           <a:xfrm>
-            <a:off x="4471416" y="3703320"/>
+            <a:off x="4471416" y="4069080"/>
             <a:ext cx="384048" cy="384048"/>
           </a:xfrm>
           <a:prstGeom prst="ellipse">
@@ -18260,7 +18260,7 @@
         </p:nvSpPr>
         <p:spPr>
           <a:xfrm>
-            <a:off x="4471416" y="3703320"/>
+            <a:off x="4471416" y="4069080"/>
             <a:ext cx="384048" cy="384048"/>
           </a:xfrm>
           <a:prstGeom prst="rect">
@@ -18299,7 +18299,7 @@
         </p:nvSpPr>
         <p:spPr>
           <a:xfrm>
-            <a:off x="4983480" y="3675888"/>
+            <a:off x="4983480" y="4041648"/>
             <a:ext cx="2606040" cy="438912"/>
           </a:xfrm>
           <a:prstGeom prst="rect">
@@ -18338,8 +18338,8 @@
         </p:nvSpPr>
         <p:spPr>
           <a:xfrm>
-            <a:off x="4471416" y="4206240"/>
-            <a:ext cx="3118104" cy="621792"/>
+            <a:off x="4471416" y="4572000"/>
+            <a:ext cx="3118104" cy="1033272"/>
           </a:xfrm>
           <a:prstGeom prst="rect">
             <a:avLst/>
@@ -21345,11 +21345,11 @@
         <p:spPr>
           <a:xfrm>
             <a:off x="566928" y="1737360"/>
-            <a:ext cx="3566160" cy="1828800"/>
+            <a:ext cx="3566160" cy="2148840"/>
           </a:xfrm>
           <a:prstGeom prst="roundRect">
             <a:avLst>
-              <a:gd name="adj" fmla="val 6000"/>
+              <a:gd name="adj" fmla="val 5106"/>
             </a:avLst>
           </a:prstGeom>
           <a:solidFill>
@@ -21406,7 +21406,7 @@
         <p:spPr>
           <a:xfrm>
             <a:off x="768096" y="2423160"/>
-            <a:ext cx="3163824" cy="987552"/>
+            <a:ext cx="3163824" cy="1307592"/>
           </a:xfrm>
           <a:prstGeom prst="rect">
             <a:avLst/>
@@ -21448,11 +21448,11 @@
         <p:spPr>
           <a:xfrm>
             <a:off x="4315968" y="1737360"/>
-            <a:ext cx="3566160" cy="1828800"/>
+            <a:ext cx="3566160" cy="2148840"/>
           </a:xfrm>
           <a:prstGeom prst="roundRect">
             <a:avLst>
-              <a:gd name="adj" fmla="val 6000"/>
+              <a:gd name="adj" fmla="val 5106"/>
             </a:avLst>
           </a:prstGeom>
           <a:solidFill>
@@ -21509,7 +21509,7 @@
         <p:spPr>
           <a:xfrm>
             <a:off x="4517136" y="2423160"/>
-            <a:ext cx="3163824" cy="987552"/>
+            <a:ext cx="3163824" cy="1307592"/>
           </a:xfrm>
           <a:prstGeom prst="rect">
             <a:avLst/>
@@ -21551,11 +21551,11 @@
         <p:spPr>
           <a:xfrm>
             <a:off x="8065008" y="1737360"/>
-            <a:ext cx="3566160" cy="1828800"/>
+            <a:ext cx="3566160" cy="2148840"/>
           </a:xfrm>
           <a:prstGeom prst="roundRect">
             <a:avLst>
-              <a:gd name="adj" fmla="val 6000"/>
+              <a:gd name="adj" fmla="val 5106"/>
             </a:avLst>
           </a:prstGeom>
           <a:solidFill>
@@ -21612,7 +21612,7 @@
         <p:spPr>
           <a:xfrm>
             <a:off x="8266176" y="2423160"/>
-            <a:ext cx="3163824" cy="987552"/>
+            <a:ext cx="3163824" cy="1307592"/>
           </a:xfrm>
           <a:prstGeom prst="rect">
             <a:avLst/>
@@ -21653,12 +21653,12 @@
         </p:nvSpPr>
         <p:spPr>
           <a:xfrm>
-            <a:off x="566928" y="3977640"/>
-            <a:ext cx="11064240" cy="1234440"/>
+            <a:off x="566928" y="4297680"/>
+            <a:ext cx="11064240" cy="1600200"/>
           </a:xfrm>
           <a:prstGeom prst="roundRect">
             <a:avLst>
-              <a:gd name="adj" fmla="val 8889"/>
+              <a:gd name="adj" fmla="val 6857"/>
             </a:avLst>
           </a:prstGeom>
           <a:solidFill>
@@ -21680,8 +21680,8 @@
         </p:nvSpPr>
         <p:spPr>
           <a:xfrm>
-            <a:off x="786384" y="4123944"/>
-            <a:ext cx="10625328" cy="941832"/>
+            <a:off x="786384" y="4443984"/>
+            <a:ext cx="10625328" cy="1307592"/>
           </a:xfrm>
           <a:prstGeom prst="rect">
             <a:avLst/>
@@ -21947,11 +21947,11 @@
         <p:spPr>
           <a:xfrm>
             <a:off x="566928" y="1783080"/>
-            <a:ext cx="11064240" cy="1874520"/>
+            <a:ext cx="11064240" cy="3657600"/>
           </a:xfrm>
           <a:prstGeom prst="roundRect">
             <a:avLst>
-              <a:gd name="adj" fmla="val 5854"/>
+              <a:gd name="adj" fmla="val 3000"/>
             </a:avLst>
           </a:prstGeom>
           <a:solidFill>
@@ -21973,7 +21973,7 @@
         </p:nvSpPr>
         <p:spPr>
           <a:xfrm>
-            <a:off x="978408" y="2157984"/>
+            <a:off x="978408" y="2706624"/>
             <a:ext cx="256032" cy="256032"/>
           </a:xfrm>
           <a:prstGeom prst="roundRect">
@@ -22000,7 +22000,7 @@
         </p:nvSpPr>
         <p:spPr>
           <a:xfrm rot="2700000">
-            <a:off x="1041227" y="2297430"/>
+            <a:off x="1041227" y="2846070"/>
             <a:ext cx="58156" cy="27432"/>
           </a:xfrm>
           <a:prstGeom prst="rect">
@@ -22020,7 +22020,7 @@
         </p:nvSpPr>
         <p:spPr>
           <a:xfrm rot="-3000000">
-            <a:off x="1069025" y="2271370"/>
+            <a:off x="1069025" y="2820010"/>
             <a:ext cx="121432" cy="27432"/>
           </a:xfrm>
           <a:prstGeom prst="rect">
@@ -22040,8 +22040,8 @@
         </p:nvSpPr>
         <p:spPr>
           <a:xfrm>
-            <a:off x="1362456" y="2103120"/>
-            <a:ext cx="4617720" cy="384048"/>
+            <a:off x="1362456" y="2505456"/>
+            <a:ext cx="4617720" cy="658368"/>
           </a:xfrm>
           <a:prstGeom prst="rect">
             <a:avLst/>
@@ -22057,7 +22057,7 @@
               <a:buNone/>
             </a:pPr>
             <a:r>
-              <a:rPr lang="en-US" sz="1250" dirty="0">
+              <a:rPr lang="en-US" sz="1400" dirty="0">
                 <a:solidFill>
                   <a:srgbClr val="000000"/>
                 </a:solidFill>
@@ -22067,7 +22067,7 @@
               </a:rPr>
               <a:t>усі шість плиток живі й звірені з SQL</a:t>
             </a:r>
-            <a:endParaRPr lang="en-US" sz="1250" dirty="0"/>
+            <a:endParaRPr lang="en-US" sz="1400" dirty="0"/>
           </a:p>
         </p:txBody>
       </p:sp>
@@ -22079,7 +22079,7 @@
         </p:nvSpPr>
         <p:spPr>
           <a:xfrm>
-            <a:off x="978408" y="2724912"/>
+            <a:off x="978408" y="4169664"/>
             <a:ext cx="256032" cy="256032"/>
           </a:xfrm>
           <a:prstGeom prst="roundRect">
@@ -22106,7 +22106,7 @@
         </p:nvSpPr>
         <p:spPr>
           <a:xfrm rot="2700000">
-            <a:off x="1041227" y="2864358"/>
+            <a:off x="1041227" y="4309110"/>
             <a:ext cx="58156" cy="27432"/>
           </a:xfrm>
           <a:prstGeom prst="rect">
@@ -22126,7 +22126,7 @@
         </p:nvSpPr>
         <p:spPr>
           <a:xfrm rot="-3000000">
-            <a:off x="1069025" y="2838298"/>
+            <a:off x="1069025" y="4283050"/>
             <a:ext cx="121432" cy="27432"/>
           </a:xfrm>
           <a:prstGeom prst="rect">
@@ -22146,8 +22146,8 @@
         </p:nvSpPr>
         <p:spPr>
           <a:xfrm>
-            <a:off x="1362456" y="2670048"/>
-            <a:ext cx="4617720" cy="384048"/>
+            <a:off x="1362456" y="3968496"/>
+            <a:ext cx="4617720" cy="658368"/>
           </a:xfrm>
           <a:prstGeom prst="rect">
             <a:avLst/>
@@ -22163,7 +22163,7 @@
               <a:buNone/>
             </a:pPr>
             <a:r>
-              <a:rPr lang="en-US" sz="1250" dirty="0">
+              <a:rPr lang="en-US" sz="1400" dirty="0">
                 <a:solidFill>
                   <a:srgbClr val="000000"/>
                 </a:solidFill>
@@ -22173,7 +22173,7 @@
               </a:rPr>
               <a:t>поясню, чому алерти на p95, а не на середнє</a:t>
             </a:r>
-            <a:endParaRPr lang="en-US" sz="1250" dirty="0"/>
+            <a:endParaRPr lang="en-US" sz="1400" dirty="0"/>
           </a:p>
         </p:txBody>
       </p:sp>
@@ -22185,7 +22185,7 @@
         </p:nvSpPr>
         <p:spPr>
           <a:xfrm>
-            <a:off x="6144768" y="2157984"/>
+            <a:off x="6144768" y="2706624"/>
             <a:ext cx="256032" cy="256032"/>
           </a:xfrm>
           <a:prstGeom prst="roundRect">
@@ -22212,7 +22212,7 @@
         </p:nvSpPr>
         <p:spPr>
           <a:xfrm rot="2700000">
-            <a:off x="6207587" y="2297430"/>
+            <a:off x="6207587" y="2846070"/>
             <a:ext cx="58156" cy="27432"/>
           </a:xfrm>
           <a:prstGeom prst="rect">
@@ -22232,7 +22232,7 @@
         </p:nvSpPr>
         <p:spPr>
           <a:xfrm rot="-3000000">
-            <a:off x="6235385" y="2271370"/>
+            <a:off x="6235385" y="2820010"/>
             <a:ext cx="121432" cy="27432"/>
           </a:xfrm>
           <a:prstGeom prst="rect">
@@ -22252,8 +22252,8 @@
         </p:nvSpPr>
         <p:spPr>
           <a:xfrm>
-            <a:off x="6528816" y="2103120"/>
-            <a:ext cx="4617720" cy="384048"/>
+            <a:off x="6528816" y="2505456"/>
+            <a:ext cx="4617720" cy="658368"/>
           </a:xfrm>
           <a:prstGeom prst="rect">
             <a:avLst/>
@@ -22269,7 +22269,7 @@
               <a:buNone/>
             </a:pPr>
             <a:r>
-              <a:rPr lang="en-US" sz="1250" dirty="0">
+              <a:rPr lang="en-US" sz="1400" dirty="0">
                 <a:solidFill>
                   <a:srgbClr val="000000"/>
                 </a:solidFill>
@@ -22279,7 +22279,7 @@
               </a:rPr>
               <a:t>відтворю тихий інцидент і покажу його в метриках</a:t>
             </a:r>
-            <a:endParaRPr lang="en-US" sz="1250" dirty="0"/>
+            <a:endParaRPr lang="en-US" sz="1400" dirty="0"/>
           </a:p>
         </p:txBody>
       </p:sp>
@@ -22291,7 +22291,7 @@
         </p:nvSpPr>
         <p:spPr>
           <a:xfrm>
-            <a:off x="6144768" y="2724912"/>
+            <a:off x="6144768" y="4169664"/>
             <a:ext cx="256032" cy="256032"/>
           </a:xfrm>
           <a:prstGeom prst="roundRect">
@@ -22318,7 +22318,7 @@
         </p:nvSpPr>
         <p:spPr>
           <a:xfrm rot="2700000">
-            <a:off x="6207587" y="2864358"/>
+            <a:off x="6207587" y="4309110"/>
             <a:ext cx="58156" cy="27432"/>
           </a:xfrm>
           <a:prstGeom prst="rect">
@@ -22338,7 +22338,7 @@
         </p:nvSpPr>
         <p:spPr>
           <a:xfrm rot="-3000000">
-            <a:off x="6235385" y="2838298"/>
+            <a:off x="6235385" y="4283050"/>
             <a:ext cx="121432" cy="27432"/>
           </a:xfrm>
           <a:prstGeom prst="rect">
@@ -22358,8 +22358,8 @@
         </p:nvSpPr>
         <p:spPr>
           <a:xfrm>
-            <a:off x="6528816" y="2670048"/>
-            <a:ext cx="4617720" cy="384048"/>
+            <a:off x="6528816" y="3968496"/>
+            <a:ext cx="4617720" cy="658368"/>
           </a:xfrm>
           <a:prstGeom prst="rect">
             <a:avLst/>
@@ -22375,7 +22375,7 @@
               <a:buNone/>
             </a:pPr>
             <a:r>
-              <a:rPr lang="en-US" sz="1250" dirty="0">
+              <a:rPr lang="en-US" sz="1400" dirty="0">
                 <a:solidFill>
                   <a:srgbClr val="000000"/>
                 </a:solidFill>
@@ -22385,7 +22385,7 @@
               </a:rPr>
               <a:t>назву, що додати в лог для зрізу по тенантах</a:t>
             </a:r>
-            <a:endParaRPr lang="en-US" sz="1250" dirty="0"/>
+            <a:endParaRPr lang="en-US" sz="1400" dirty="0"/>
           </a:p>
         </p:txBody>
       </p:sp>
@@ -22397,7 +22397,7 @@
         </p:nvSpPr>
         <p:spPr>
           <a:xfrm>
-            <a:off x="566928" y="3886200"/>
+            <a:off x="566928" y="5669280"/>
             <a:ext cx="10972800" cy="320040"/>
           </a:xfrm>
           <a:prstGeom prst="rect">
@@ -26494,11 +26494,11 @@
         <p:spPr>
           <a:xfrm>
             <a:off x="566928" y="1783080"/>
-            <a:ext cx="3553968" cy="1188720"/>
+            <a:ext cx="3553968" cy="1481328"/>
           </a:xfrm>
           <a:prstGeom prst="roundRect">
             <a:avLst>
-              <a:gd name="adj" fmla="val 7692"/>
+              <a:gd name="adj" fmla="val 6173"/>
             </a:avLst>
           </a:prstGeom>
           <a:solidFill>
@@ -26560,7 +26560,7 @@
         <p:spPr>
           <a:xfrm>
             <a:off x="749808" y="2203704"/>
-            <a:ext cx="3188208" cy="658368"/>
+            <a:ext cx="3188208" cy="950976"/>
           </a:xfrm>
           <a:prstGeom prst="rect">
             <a:avLst/>
@@ -26602,11 +26602,11 @@
         <p:spPr>
           <a:xfrm>
             <a:off x="4322064" y="1783080"/>
-            <a:ext cx="3553968" cy="1188720"/>
+            <a:ext cx="3553968" cy="1481328"/>
           </a:xfrm>
           <a:prstGeom prst="roundRect">
             <a:avLst>
-              <a:gd name="adj" fmla="val 7692"/>
+              <a:gd name="adj" fmla="val 6173"/>
             </a:avLst>
           </a:prstGeom>
           <a:solidFill>
@@ -26668,7 +26668,7 @@
         <p:spPr>
           <a:xfrm>
             <a:off x="4504944" y="2203704"/>
-            <a:ext cx="3188208" cy="658368"/>
+            <a:ext cx="3188208" cy="950976"/>
           </a:xfrm>
           <a:prstGeom prst="rect">
             <a:avLst/>
@@ -26710,11 +26710,11 @@
         <p:spPr>
           <a:xfrm>
             <a:off x="8077200" y="1783080"/>
-            <a:ext cx="3553968" cy="1188720"/>
+            <a:ext cx="3553968" cy="1481328"/>
           </a:xfrm>
           <a:prstGeom prst="roundRect">
             <a:avLst>
-              <a:gd name="adj" fmla="val 7692"/>
+              <a:gd name="adj" fmla="val 6173"/>
             </a:avLst>
           </a:prstGeom>
           <a:solidFill>
@@ -26776,7 +26776,7 @@
         <p:spPr>
           <a:xfrm>
             <a:off x="8260080" y="2203704"/>
-            <a:ext cx="3188208" cy="658368"/>
+            <a:ext cx="3188208" cy="950976"/>
           </a:xfrm>
           <a:prstGeom prst="rect">
             <a:avLst/>
@@ -26817,12 +26817,12 @@
         </p:nvSpPr>
         <p:spPr>
           <a:xfrm>
-            <a:off x="566928" y="3172968"/>
-            <a:ext cx="3553968" cy="1188720"/>
+            <a:off x="566928" y="3465576"/>
+            <a:ext cx="3553968" cy="1481328"/>
           </a:xfrm>
           <a:prstGeom prst="roundRect">
             <a:avLst>
-              <a:gd name="adj" fmla="val 7692"/>
+              <a:gd name="adj" fmla="val 6173"/>
             </a:avLst>
           </a:prstGeom>
           <a:solidFill>
@@ -26844,7 +26844,7 @@
         </p:nvSpPr>
         <p:spPr>
           <a:xfrm>
-            <a:off x="749808" y="3282696"/>
+            <a:off x="749808" y="3575304"/>
             <a:ext cx="3188208" cy="310896"/>
           </a:xfrm>
           <a:prstGeom prst="rect">
@@ -26883,8 +26883,8 @@
         </p:nvSpPr>
         <p:spPr>
           <a:xfrm>
-            <a:off x="749808" y="3593592"/>
-            <a:ext cx="3188208" cy="658368"/>
+            <a:off x="749808" y="3886200"/>
+            <a:ext cx="3188208" cy="950976"/>
           </a:xfrm>
           <a:prstGeom prst="rect">
             <a:avLst/>
@@ -26925,12 +26925,12 @@
         </p:nvSpPr>
         <p:spPr>
           <a:xfrm>
-            <a:off x="4322064" y="3172968"/>
-            <a:ext cx="3553968" cy="1188720"/>
+            <a:off x="4322064" y="3465576"/>
+            <a:ext cx="3553968" cy="1481328"/>
           </a:xfrm>
           <a:prstGeom prst="roundRect">
             <a:avLst>
-              <a:gd name="adj" fmla="val 7692"/>
+              <a:gd name="adj" fmla="val 6173"/>
             </a:avLst>
           </a:prstGeom>
           <a:solidFill>
@@ -26952,7 +26952,7 @@
         </p:nvSpPr>
         <p:spPr>
           <a:xfrm>
-            <a:off x="4504944" y="3282696"/>
+            <a:off x="4504944" y="3575304"/>
             <a:ext cx="3188208" cy="310896"/>
           </a:xfrm>
           <a:prstGeom prst="rect">
@@ -26991,8 +26991,8 @@
         </p:nvSpPr>
         <p:spPr>
           <a:xfrm>
-            <a:off x="4504944" y="3593592"/>
-            <a:ext cx="3188208" cy="658368"/>
+            <a:off x="4504944" y="3886200"/>
+            <a:ext cx="3188208" cy="950976"/>
           </a:xfrm>
           <a:prstGeom prst="rect">
             <a:avLst/>
@@ -27033,12 +27033,12 @@
         </p:nvSpPr>
         <p:spPr>
           <a:xfrm>
-            <a:off x="8077200" y="3172968"/>
-            <a:ext cx="3553968" cy="1188720"/>
+            <a:off x="8077200" y="3465576"/>
+            <a:ext cx="3553968" cy="1481328"/>
           </a:xfrm>
           <a:prstGeom prst="roundRect">
             <a:avLst>
-              <a:gd name="adj" fmla="val 7692"/>
+              <a:gd name="adj" fmla="val 6173"/>
             </a:avLst>
           </a:prstGeom>
           <a:solidFill>
@@ -27060,7 +27060,7 @@
         </p:nvSpPr>
         <p:spPr>
           <a:xfrm>
-            <a:off x="8260080" y="3282696"/>
+            <a:off x="8260080" y="3575304"/>
             <a:ext cx="3188208" cy="310896"/>
           </a:xfrm>
           <a:prstGeom prst="rect">
@@ -27099,8 +27099,8 @@
         </p:nvSpPr>
         <p:spPr>
           <a:xfrm>
-            <a:off x="8260080" y="3593592"/>
-            <a:ext cx="3188208" cy="658368"/>
+            <a:off x="8260080" y="3886200"/>
+            <a:ext cx="3188208" cy="950976"/>
           </a:xfrm>
           <a:prstGeom prst="rect">
             <a:avLst/>
@@ -27141,7 +27141,7 @@
         </p:nvSpPr>
         <p:spPr>
           <a:xfrm>
-            <a:off x="566928" y="4526280"/>
+            <a:off x="566928" y="5138928"/>
             <a:ext cx="11064240" cy="777240"/>
           </a:xfrm>
           <a:prstGeom prst="roundRect">
@@ -27168,7 +27168,7 @@
         </p:nvSpPr>
         <p:spPr>
           <a:xfrm>
-            <a:off x="786384" y="4672584"/>
+            <a:off x="786384" y="5285232"/>
             <a:ext cx="10625328" cy="484632"/>
           </a:xfrm>
           <a:prstGeom prst="rect">

--- a/docs/decks/L09.pptx
+++ b/docs/decks/L09.pptx
@@ -34,9 +34,10 @@
     <p:sldId id="282" r:id="rId28"/>
     <p:sldId id="283" r:id="rId29"/>
     <p:sldId id="284" r:id="rId30"/>
+    <p:sldId id="285" r:id="rId31"/>
   </p:sldIdLst>
   <p:notesMasterIdLst>
-    <p:notesMasterId r:id="rId31"/>
+    <p:notesMasterId r:id="rId32"/>
   </p:notesMasterIdLst>
   <p:sldSz cx="12192000" cy="6858000"/>
   <p:notesSz cx="6858000" cy="12192000"/>
@@ -2490,6 +2491,94 @@
             <a:fld id="{F7021451-1387-4CA6-816F-3879F97B5CBC}" type="slidenum">
               <a:rPr lang="en-US"/>
               <a:t>3</a:t>
+            </a:fld>
+            <a:endParaRPr lang="en-US"/>
+          </a:p>
+        </p:txBody>
+      </p:sp>
+    </p:spTree>
+    <p:extLst>
+      <p:ext uri="{BB962C8B-B14F-4D97-AF65-F5344CB8AC3E}">
+        <p14:creationId xmlns:p14="http://schemas.microsoft.com/office/powerpoint/2010/main" val="1024086991"/>
+      </p:ext>
+    </p:extLst>
+  </p:cSld>
+  <p:clrMapOvr>
+    <a:masterClrMapping/>
+  </p:clrMapOvr>
+</p:notes>
+</file>
+
+<file path=ppt/notesSlides/notesSlide30.xml><?xml version="1.0" encoding="utf-8"?>
+<p:notes xmlns:a="http://schemas.openxmlformats.org/drawingml/2006/main" xmlns:r="http://schemas.openxmlformats.org/officeDocument/2006/relationships" xmlns:p="http://schemas.openxmlformats.org/presentationml/2006/main">
+  <p:cSld>
+    <p:spTree>
+      <p:nvGrpSpPr>
+        <p:cNvPr id="1" name=""/>
+        <p:cNvGrpSpPr/>
+        <p:nvPr/>
+      </p:nvGrpSpPr>
+      <p:grpSpPr>
+        <a:xfrm>
+          <a:off x="0" y="0"/>
+          <a:ext cx="0" cy="0"/>
+          <a:chOff x="0" y="0"/>
+          <a:chExt cx="0" cy="0"/>
+        </a:xfrm>
+      </p:grpSpPr>
+      <p:sp>
+        <p:nvSpPr>
+          <p:cNvPr id="2" name="Slide Image Placeholder 1"/>
+          <p:cNvSpPr>
+            <a:spLocks noGrp="1" noRot="1" noChangeAspect="1"/>
+          </p:cNvSpPr>
+          <p:nvPr>
+            <p:ph type="sldImg"/>
+          </p:nvPr>
+        </p:nvSpPr>
+        <p:spPr/>
+      </p:sp>
+      <p:sp>
+        <p:nvSpPr>
+          <p:cNvPr id="3" name="Notes Placeholder 2"/>
+          <p:cNvSpPr>
+            <a:spLocks noGrp="1"/>
+          </p:cNvSpPr>
+          <p:nvPr>
+            <p:ph type="body" idx="1"/>
+          </p:nvPr>
+        </p:nvSpPr>
+        <p:spPr/>
+        <p:txBody>
+          <a:bodyPr/>
+          <a:lstStyle/>
+          <a:p>
+            <a:r>
+              <a:rPr lang="en-US" dirty="0"/>
+              <a:t/>
+            </a:r>
+            <a:endParaRPr lang="en-US" dirty="0"/>
+          </a:p>
+        </p:txBody>
+      </p:sp>
+      <p:sp>
+        <p:nvSpPr>
+          <p:cNvPr id="4" name="Slide Number Placeholder 3"/>
+          <p:cNvSpPr>
+            <a:spLocks noGrp="1"/>
+          </p:cNvSpPr>
+          <p:nvPr>
+            <p:ph type="sldNum" sz="quarter" idx="10"/>
+          </p:nvPr>
+        </p:nvSpPr>
+        <p:spPr/>
+        <p:txBody>
+          <a:bodyPr/>
+          <a:lstStyle/>
+          <a:p>
+            <a:fld id="{F7021451-1387-4CA6-816F-3879F97B5CBC}" type="slidenum">
+              <a:rPr lang="en-US"/>
+              <a:t>30</a:t>
             </a:fld>
             <a:endParaRPr lang="en-US"/>
           </a:p>
@@ -26275,6 +26364,109 @@
 </p:sld>
 </file>
 
+<file path=ppt/slides/slide30.xml><?xml version="1.0" encoding="utf-8"?>
+<p:sld xmlns:a="http://schemas.openxmlformats.org/drawingml/2006/main" xmlns:r="http://schemas.openxmlformats.org/officeDocument/2006/relationships" xmlns:p="http://schemas.openxmlformats.org/presentationml/2006/main">
+  <p:cSld name="Slide 30">
+    <p:spTree>
+      <p:nvGrpSpPr>
+        <p:cNvPr id="1" name=""/>
+        <p:cNvGrpSpPr/>
+        <p:nvPr/>
+      </p:nvGrpSpPr>
+      <p:grpSpPr>
+        <a:xfrm>
+          <a:off x="0" y="0"/>
+          <a:ext cx="0" cy="0"/>
+          <a:chOff x="0" y="0"/>
+          <a:chExt cx="0" cy="0"/>
+        </a:xfrm>
+      </p:grpSpPr>
+      <p:sp>
+        <p:nvSpPr>
+          <p:cNvPr id="2" name="Text 0"/>
+          <p:cNvSpPr/>
+          <p:nvPr/>
+        </p:nvSpPr>
+        <p:spPr>
+          <a:xfrm>
+            <a:off x="566928" y="384048"/>
+            <a:ext cx="5486400" cy="274320"/>
+          </a:xfrm>
+          <a:prstGeom prst="rect">
+            <a:avLst/>
+          </a:prstGeom>
+          <a:noFill/>
+          <a:ln/>
+        </p:spPr>
+        <p:txBody>
+          <a:bodyPr wrap="square" lIns="0" tIns="0" rIns="0" bIns="0" rtlCol="0" anchor="ctr"/>
+          <a:lstStyle/>
+          <a:p>
+            <a:pPr indent="0" marL="0">
+              <a:buNone/>
+            </a:pPr>
+            <a:r>
+              <a:rPr lang="en-US" sz="1200" b="1" spc="400" kern="0" dirty="0">
+                <a:solidFill>
+                  <a:srgbClr val="FFFFFF"/>
+                </a:solidFill>
+                <a:latin typeface="Montserrat" pitchFamily="34" charset="0"/>
+                <a:ea typeface="Montserrat" pitchFamily="34" charset="-122"/>
+                <a:cs typeface="Montserrat" pitchFamily="34" charset="-120"/>
+              </a:rPr>
+              <a:t>NEOVERSITY</a:t>
+            </a:r>
+            <a:endParaRPr lang="en-US" sz="1200" dirty="0"/>
+          </a:p>
+        </p:txBody>
+      </p:sp>
+      <p:sp>
+        <p:nvSpPr>
+          <p:cNvPr id="3" name="Text 1"/>
+          <p:cNvSpPr/>
+          <p:nvPr/>
+        </p:nvSpPr>
+        <p:spPr>
+          <a:xfrm>
+            <a:off x="566928" y="2834640"/>
+            <a:ext cx="11064240" cy="1463040"/>
+          </a:xfrm>
+          <a:prstGeom prst="rect">
+            <a:avLst/>
+          </a:prstGeom>
+          <a:noFill/>
+          <a:ln/>
+        </p:spPr>
+        <p:txBody>
+          <a:bodyPr wrap="square" lIns="0" tIns="0" rIns="0" bIns="0" rtlCol="0" anchor="ctr"/>
+          <a:lstStyle/>
+          <a:p>
+            <a:pPr indent="0" marL="0">
+              <a:buNone/>
+            </a:pPr>
+            <a:r>
+              <a:rPr lang="en-US" sz="7300" dirty="0">
+                <a:solidFill>
+                  <a:srgbClr val="FFFFFF"/>
+                </a:solidFill>
+                <a:latin typeface="Unbounded" pitchFamily="34" charset="0"/>
+                <a:ea typeface="Unbounded" pitchFamily="34" charset="-122"/>
+                <a:cs typeface="Unbounded" pitchFamily="34" charset="-120"/>
+              </a:rPr>
+              <a:t>ДЯКУЮ</a:t>
+            </a:r>
+            <a:endParaRPr lang="en-US" sz="7300" dirty="0"/>
+          </a:p>
+        </p:txBody>
+      </p:sp>
+    </p:spTree>
+  </p:cSld>
+  <p:clrMapOvr>
+    <a:masterClrMapping/>
+  </p:clrMapOvr>
+</p:sld>
+</file>
+
 <file path=ppt/slides/slide4.xml><?xml version="1.0" encoding="utf-8"?>
 <p:sld xmlns:a="http://schemas.openxmlformats.org/drawingml/2006/main" xmlns:r="http://schemas.openxmlformats.org/officeDocument/2006/relationships" xmlns:p="http://schemas.openxmlformats.org/presentationml/2006/main">
   <p:cSld name="Slide 4">

--- a/docs/decks/L09.pptx
+++ b/docs/decks/L09.pptx
@@ -7705,7 +7705,7 @@
                 <a:ea typeface="Unbounded" pitchFamily="34" charset="-122"/>
                 <a:cs typeface="Unbounded" pitchFamily="34" charset="-120"/>
               </a:rPr>
-              <a:t>Тренд важливіший за снапшот</a:t>
+              <a:t>Тренд важливіший за поточне значення</a:t>
             </a:r>
             <a:endParaRPr lang="en-US" sz="2400" dirty="0"/>
           </a:p>
@@ -7719,7 +7719,7 @@
         </p:nvSpPr>
         <p:spPr>
           <a:xfrm>
-            <a:off x="1280160" y="1024128"/>
+            <a:off x="1280160" y="1218895"/>
             <a:ext cx="777240" cy="256032"/>
           </a:xfrm>
           <a:prstGeom prst="roundRect">
@@ -7746,7 +7746,7 @@
         </p:nvSpPr>
         <p:spPr>
           <a:xfrm>
-            <a:off x="1280160" y="1024128"/>
+            <a:off x="1280160" y="1218895"/>
             <a:ext cx="777240" cy="256032"/>
           </a:xfrm>
           <a:prstGeom prst="rect">
@@ -9041,7 +9041,7 @@
                 <a:ea typeface="Montserrat" pitchFamily="34" charset="-122"/>
                 <a:cs typeface="Montserrat" pitchFamily="34" charset="-120"/>
               </a:rPr>
-              <a:t>Снапшот каже «зараз погано». Тренд каже «стає гірше» — і дає час.</a:t>
+              <a:t>Поточне значення каже «зараз погано». Тренд каже «стає гірше» — і дає час.</a:t>
             </a:r>
             <a:endParaRPr lang="en-US" sz="1300" dirty="0"/>
           </a:p>
@@ -25513,7 +25513,7 @@
                 <a:ea typeface="Montserrat" pitchFamily="34" charset="-122"/>
                 <a:cs typeface="Montserrat" pitchFamily="34" charset="-120"/>
               </a:rPr>
-              <a:t>Тренд важливіший за снапшот</a:t>
+              <a:t>Тренд, а не поточне значення</a:t>
             </a:r>
             <a:endParaRPr lang="en-US" sz="1450" dirty="0"/>
           </a:p>

--- a/docs/decks/L09.pptx
+++ b/docs/decks/L09.pptx
@@ -5228,7 +5228,7 @@
                       <a:tailEnd type="none" w="med" len="med"/>
                     </a:lnB>
                     <a:solidFill>
-                      <a:srgbClr val="000000"/>
+                      <a:srgbClr val="5A05F4"/>
                     </a:solidFill>
                   </a:tcPr>
                 </a:tc>
@@ -5296,7 +5296,7 @@
                       <a:tailEnd type="none" w="med" len="med"/>
                     </a:lnB>
                     <a:solidFill>
-                      <a:srgbClr val="000000"/>
+                      <a:srgbClr val="5A05F4"/>
                     </a:solidFill>
                   </a:tcPr>
                 </a:tc>
@@ -5364,7 +5364,7 @@
                       <a:tailEnd type="none" w="med" len="med"/>
                     </a:lnB>
                     <a:solidFill>
-                      <a:srgbClr val="000000"/>
+                      <a:srgbClr val="5A05F4"/>
                     </a:solidFill>
                   </a:tcPr>
                 </a:tc>
@@ -5587,7 +5587,7 @@
                       <a:r>
                         <a:rPr lang="en-US" sz="1150" b="1" dirty="0">
                           <a:solidFill>
-                            <a:srgbClr val="A98BFF"/>
+                            <a:srgbClr val="5A05F4"/>
                           </a:solidFill>
                           <a:latin typeface="Montserrat" pitchFamily="34" charset="0"/>
                           <a:ea typeface="Montserrat" pitchFamily="34" charset="-122"/>
@@ -5640,7 +5640,7 @@
                       <a:tailEnd type="none" w="med" len="med"/>
                     </a:lnB>
                     <a:solidFill>
-                      <a:srgbClr val="000000"/>
+                      <a:srgbClr val="F5F3FA"/>
                     </a:solidFill>
                   </a:tcPr>
                 </a:tc>
@@ -5655,7 +5655,7 @@
                       <a:r>
                         <a:rPr lang="en-US" sz="1150" dirty="0">
                           <a:solidFill>
-                            <a:srgbClr val="A98BFF"/>
+                            <a:srgbClr val="5A05F4"/>
                           </a:solidFill>
                           <a:latin typeface="Montserrat" pitchFamily="34" charset="0"/>
                           <a:ea typeface="Montserrat" pitchFamily="34" charset="-122"/>
@@ -5708,7 +5708,7 @@
                       <a:tailEnd type="none" w="med" len="med"/>
                     </a:lnB>
                     <a:solidFill>
-                      <a:srgbClr val="000000"/>
+                      <a:srgbClr val="F5F3FA"/>
                     </a:solidFill>
                   </a:tcPr>
                 </a:tc>
@@ -5723,7 +5723,7 @@
                       <a:r>
                         <a:rPr lang="en-US" sz="1150" dirty="0">
                           <a:solidFill>
-                            <a:srgbClr val="A98BFF"/>
+                            <a:srgbClr val="5A05F4"/>
                           </a:solidFill>
                           <a:latin typeface="Montserrat" pitchFamily="34" charset="0"/>
                           <a:ea typeface="Montserrat" pitchFamily="34" charset="-122"/>
@@ -5776,7 +5776,7 @@
                       <a:tailEnd type="none" w="med" len="med"/>
                     </a:lnB>
                     <a:solidFill>
-                      <a:srgbClr val="000000"/>
+                      <a:srgbClr val="F5F3FA"/>
                     </a:solidFill>
                   </a:tcPr>
                 </a:tc>
@@ -6205,7 +6205,7 @@
                       <a:r>
                         <a:rPr lang="en-US" sz="1150" b="1" dirty="0">
                           <a:solidFill>
-                            <a:srgbClr val="A98BFF"/>
+                            <a:srgbClr val="5A05F4"/>
                           </a:solidFill>
                           <a:latin typeface="Montserrat" pitchFamily="34" charset="0"/>
                           <a:ea typeface="Montserrat" pitchFamily="34" charset="-122"/>
@@ -6258,7 +6258,7 @@
                       <a:tailEnd type="none" w="med" len="med"/>
                     </a:lnB>
                     <a:solidFill>
-                      <a:srgbClr val="000000"/>
+                      <a:srgbClr val="F5F3FA"/>
                     </a:solidFill>
                   </a:tcPr>
                 </a:tc>
@@ -6273,7 +6273,7 @@
                       <a:r>
                         <a:rPr lang="en-US" sz="1150" dirty="0">
                           <a:solidFill>
-                            <a:srgbClr val="A98BFF"/>
+                            <a:srgbClr val="5A05F4"/>
                           </a:solidFill>
                           <a:latin typeface="Montserrat" pitchFamily="34" charset="0"/>
                           <a:ea typeface="Montserrat" pitchFamily="34" charset="-122"/>
@@ -6326,7 +6326,7 @@
                       <a:tailEnd type="none" w="med" len="med"/>
                     </a:lnB>
                     <a:solidFill>
-                      <a:srgbClr val="000000"/>
+                      <a:srgbClr val="F5F3FA"/>
                     </a:solidFill>
                   </a:tcPr>
                 </a:tc>
@@ -6341,7 +6341,7 @@
                       <a:r>
                         <a:rPr lang="en-US" sz="1150" dirty="0">
                           <a:solidFill>
-                            <a:srgbClr val="A98BFF"/>
+                            <a:srgbClr val="5A05F4"/>
                           </a:solidFill>
                           <a:latin typeface="Montserrat" pitchFamily="34" charset="0"/>
                           <a:ea typeface="Montserrat" pitchFamily="34" charset="-122"/>
@@ -6394,7 +6394,7 @@
                       <a:tailEnd type="none" w="med" len="med"/>
                     </a:lnB>
                     <a:solidFill>
-                      <a:srgbClr val="000000"/>
+                      <a:srgbClr val="F5F3FA"/>
                     </a:solidFill>
                   </a:tcPr>
                 </a:tc>
@@ -13226,7 +13226,7 @@
                       <a:tailEnd type="none" w="med" len="med"/>
                     </a:lnB>
                     <a:solidFill>
-                      <a:srgbClr val="000000"/>
+                      <a:srgbClr val="5A05F4"/>
                     </a:solidFill>
                   </a:tcPr>
                 </a:tc>
@@ -13294,7 +13294,7 @@
                       <a:tailEnd type="none" w="med" len="med"/>
                     </a:lnB>
                     <a:solidFill>
-                      <a:srgbClr val="000000"/>
+                      <a:srgbClr val="5A05F4"/>
                     </a:solidFill>
                   </a:tcPr>
                 </a:tc>
@@ -13362,7 +13362,7 @@
                       <a:tailEnd type="none" w="med" len="med"/>
                     </a:lnB>
                     <a:solidFill>
-                      <a:srgbClr val="000000"/>
+                      <a:srgbClr val="5A05F4"/>
                     </a:solidFill>
                   </a:tcPr>
                 </a:tc>
@@ -13379,7 +13379,7 @@
                       <a:r>
                         <a:rPr lang="en-US" sz="1150" b="1" dirty="0">
                           <a:solidFill>
-                            <a:srgbClr val="6BA0F8"/>
+                            <a:srgbClr val="1A4FBF"/>
                           </a:solidFill>
                           <a:latin typeface="Montserrat" pitchFamily="34" charset="0"/>
                           <a:ea typeface="Montserrat" pitchFamily="34" charset="-122"/>
@@ -13432,7 +13432,7 @@
                       <a:tailEnd type="none" w="med" len="med"/>
                     </a:lnB>
                     <a:solidFill>
-                      <a:srgbClr val="000000"/>
+                      <a:srgbClr val="F5F3FA"/>
                     </a:solidFill>
                   </a:tcPr>
                 </a:tc>
@@ -13447,7 +13447,7 @@
                       <a:r>
                         <a:rPr lang="en-US" sz="1150" dirty="0">
                           <a:solidFill>
-                            <a:srgbClr val="6BA0F8"/>
+                            <a:srgbClr val="1A4FBF"/>
                           </a:solidFill>
                           <a:latin typeface="Montserrat" pitchFamily="34" charset="0"/>
                           <a:ea typeface="Montserrat" pitchFamily="34" charset="-122"/>
@@ -13500,7 +13500,7 @@
                       <a:tailEnd type="none" w="med" len="med"/>
                     </a:lnB>
                     <a:solidFill>
-                      <a:srgbClr val="000000"/>
+                      <a:srgbClr val="F5F3FA"/>
                     </a:solidFill>
                   </a:tcPr>
                 </a:tc>
@@ -13515,7 +13515,7 @@
                       <a:r>
                         <a:rPr lang="en-US" sz="1150" dirty="0">
                           <a:solidFill>
-                            <a:srgbClr val="6BA0F8"/>
+                            <a:srgbClr val="1A4FBF"/>
                           </a:solidFill>
                           <a:latin typeface="Montserrat" pitchFamily="34" charset="0"/>
                           <a:ea typeface="Montserrat" pitchFamily="34" charset="-122"/>
@@ -13568,7 +13568,7 @@
                       <a:tailEnd type="none" w="med" len="med"/>
                     </a:lnB>
                     <a:solidFill>
-                      <a:srgbClr val="000000"/>
+                      <a:srgbClr val="F5F3FA"/>
                     </a:solidFill>
                   </a:tcPr>
                 </a:tc>
@@ -13791,7 +13791,7 @@
                       <a:r>
                         <a:rPr lang="en-US" sz="1150" b="1" dirty="0">
                           <a:solidFill>
-                            <a:srgbClr val="3FCF8E"/>
+                            <a:srgbClr val="106B41"/>
                           </a:solidFill>
                           <a:latin typeface="Montserrat" pitchFamily="34" charset="0"/>
                           <a:ea typeface="Montserrat" pitchFamily="34" charset="-122"/>
@@ -13844,7 +13844,7 @@
                       <a:tailEnd type="none" w="med" len="med"/>
                     </a:lnB>
                     <a:solidFill>
-                      <a:srgbClr val="000000"/>
+                      <a:srgbClr val="F5F3FA"/>
                     </a:solidFill>
                   </a:tcPr>
                 </a:tc>
@@ -13859,7 +13859,7 @@
                       <a:r>
                         <a:rPr lang="en-US" sz="1150" dirty="0">
                           <a:solidFill>
-                            <a:srgbClr val="3FCF8E"/>
+                            <a:srgbClr val="106B41"/>
                           </a:solidFill>
                           <a:latin typeface="Montserrat" pitchFamily="34" charset="0"/>
                           <a:ea typeface="Montserrat" pitchFamily="34" charset="-122"/>
@@ -13912,7 +13912,7 @@
                       <a:tailEnd type="none" w="med" len="med"/>
                     </a:lnB>
                     <a:solidFill>
-                      <a:srgbClr val="000000"/>
+                      <a:srgbClr val="F5F3FA"/>
                     </a:solidFill>
                   </a:tcPr>
                 </a:tc>
@@ -13927,7 +13927,7 @@
                       <a:r>
                         <a:rPr lang="en-US" sz="1150" dirty="0">
                           <a:solidFill>
-                            <a:srgbClr val="3FCF8E"/>
+                            <a:srgbClr val="106B41"/>
                           </a:solidFill>
                           <a:latin typeface="Montserrat" pitchFamily="34" charset="0"/>
                           <a:ea typeface="Montserrat" pitchFamily="34" charset="-122"/>
@@ -13980,7 +13980,7 @@
                       <a:tailEnd type="none" w="med" len="med"/>
                     </a:lnB>
                     <a:solidFill>
-                      <a:srgbClr val="000000"/>
+                      <a:srgbClr val="F5F3FA"/>
                     </a:solidFill>
                   </a:tcPr>
                 </a:tc>
@@ -30042,7 +30042,7 @@
                       <a:tailEnd type="none" w="med" len="med"/>
                     </a:lnB>
                     <a:solidFill>
-                      <a:srgbClr val="000000"/>
+                      <a:srgbClr val="5A05F4"/>
                     </a:solidFill>
                   </a:tcPr>
                 </a:tc>
@@ -30110,7 +30110,7 @@
                       <a:tailEnd type="none" w="med" len="med"/>
                     </a:lnB>
                     <a:solidFill>
-                      <a:srgbClr val="000000"/>
+                      <a:srgbClr val="5A05F4"/>
                     </a:solidFill>
                   </a:tcPr>
                 </a:tc>
@@ -30178,7 +30178,7 @@
                       <a:tailEnd type="none" w="med" len="med"/>
                     </a:lnB>
                     <a:solidFill>
-                      <a:srgbClr val="000000"/>
+                      <a:srgbClr val="5A05F4"/>
                     </a:solidFill>
                   </a:tcPr>
                 </a:tc>
@@ -30195,7 +30195,7 @@
                       <a:r>
                         <a:rPr lang="en-US" sz="1150" b="1" dirty="0">
                           <a:solidFill>
-                            <a:srgbClr val="3FCF8E"/>
+                            <a:srgbClr val="106B41"/>
                           </a:solidFill>
                           <a:latin typeface="Montserrat" pitchFamily="34" charset="0"/>
                           <a:ea typeface="Montserrat" pitchFamily="34" charset="-122"/>
@@ -30248,7 +30248,7 @@
                       <a:tailEnd type="none" w="med" len="med"/>
                     </a:lnB>
                     <a:solidFill>
-                      <a:srgbClr val="000000"/>
+                      <a:srgbClr val="F5F3FA"/>
                     </a:solidFill>
                   </a:tcPr>
                 </a:tc>
@@ -30263,7 +30263,7 @@
                       <a:r>
                         <a:rPr lang="en-US" sz="1150" dirty="0">
                           <a:solidFill>
-                            <a:srgbClr val="3FCF8E"/>
+                            <a:srgbClr val="106B41"/>
                           </a:solidFill>
                           <a:latin typeface="Montserrat" pitchFamily="34" charset="0"/>
                           <a:ea typeface="Montserrat" pitchFamily="34" charset="-122"/>
@@ -30316,7 +30316,7 @@
                       <a:tailEnd type="none" w="med" len="med"/>
                     </a:lnB>
                     <a:solidFill>
-                      <a:srgbClr val="000000"/>
+                      <a:srgbClr val="F5F3FA"/>
                     </a:solidFill>
                   </a:tcPr>
                 </a:tc>
@@ -30331,7 +30331,7 @@
                       <a:r>
                         <a:rPr lang="en-US" sz="1150" dirty="0">
                           <a:solidFill>
-                            <a:srgbClr val="3FCF8E"/>
+                            <a:srgbClr val="106B41"/>
                           </a:solidFill>
                           <a:latin typeface="Montserrat" pitchFamily="34" charset="0"/>
                           <a:ea typeface="Montserrat" pitchFamily="34" charset="-122"/>
@@ -30384,7 +30384,7 @@
                       <a:tailEnd type="none" w="med" len="med"/>
                     </a:lnB>
                     <a:solidFill>
-                      <a:srgbClr val="000000"/>
+                      <a:srgbClr val="F5F3FA"/>
                     </a:solidFill>
                   </a:tcPr>
                 </a:tc>
@@ -30401,7 +30401,7 @@
                       <a:r>
                         <a:rPr lang="en-US" sz="1150" b="1" dirty="0">
                           <a:solidFill>
-                            <a:srgbClr val="3FCF8E"/>
+                            <a:srgbClr val="106B41"/>
                           </a:solidFill>
                           <a:latin typeface="Montserrat" pitchFamily="34" charset="0"/>
                           <a:ea typeface="Montserrat" pitchFamily="34" charset="-122"/>
@@ -30454,7 +30454,7 @@
                       <a:tailEnd type="none" w="med" len="med"/>
                     </a:lnB>
                     <a:solidFill>
-                      <a:srgbClr val="000000"/>
+                      <a:srgbClr val="F5F3FA"/>
                     </a:solidFill>
                   </a:tcPr>
                 </a:tc>
@@ -30469,7 +30469,7 @@
                       <a:r>
                         <a:rPr lang="en-US" sz="1150" dirty="0">
                           <a:solidFill>
-                            <a:srgbClr val="3FCF8E"/>
+                            <a:srgbClr val="106B41"/>
                           </a:solidFill>
                           <a:latin typeface="Montserrat" pitchFamily="34" charset="0"/>
                           <a:ea typeface="Montserrat" pitchFamily="34" charset="-122"/>
@@ -30522,7 +30522,7 @@
                       <a:tailEnd type="none" w="med" len="med"/>
                     </a:lnB>
                     <a:solidFill>
-                      <a:srgbClr val="000000"/>
+                      <a:srgbClr val="F5F3FA"/>
                     </a:solidFill>
                   </a:tcPr>
                 </a:tc>
@@ -30537,7 +30537,7 @@
                       <a:r>
                         <a:rPr lang="en-US" sz="1150" dirty="0">
                           <a:solidFill>
-                            <a:srgbClr val="3FCF8E"/>
+                            <a:srgbClr val="106B41"/>
                           </a:solidFill>
                           <a:latin typeface="Montserrat" pitchFamily="34" charset="0"/>
                           <a:ea typeface="Montserrat" pitchFamily="34" charset="-122"/>
@@ -30590,7 +30590,7 @@
                       <a:tailEnd type="none" w="med" len="med"/>
                     </a:lnB>
                     <a:solidFill>
-                      <a:srgbClr val="000000"/>
+                      <a:srgbClr val="F5F3FA"/>
                     </a:solidFill>
                   </a:tcPr>
                 </a:tc>
@@ -30607,7 +30607,7 @@
                       <a:r>
                         <a:rPr lang="en-US" sz="1150" b="1" dirty="0">
                           <a:solidFill>
-                            <a:srgbClr val="6BA0F8"/>
+                            <a:srgbClr val="1A4FBF"/>
                           </a:solidFill>
                           <a:latin typeface="Montserrat" pitchFamily="34" charset="0"/>
                           <a:ea typeface="Montserrat" pitchFamily="34" charset="-122"/>
@@ -30660,7 +30660,7 @@
                       <a:tailEnd type="none" w="med" len="med"/>
                     </a:lnB>
                     <a:solidFill>
-                      <a:srgbClr val="000000"/>
+                      <a:srgbClr val="F5F3FA"/>
                     </a:solidFill>
                   </a:tcPr>
                 </a:tc>
@@ -30675,7 +30675,7 @@
                       <a:r>
                         <a:rPr lang="en-US" sz="1150" dirty="0">
                           <a:solidFill>
-                            <a:srgbClr val="6BA0F8"/>
+                            <a:srgbClr val="1A4FBF"/>
                           </a:solidFill>
                           <a:latin typeface="Montserrat" pitchFamily="34" charset="0"/>
                           <a:ea typeface="Montserrat" pitchFamily="34" charset="-122"/>
@@ -30728,7 +30728,7 @@
                       <a:tailEnd type="none" w="med" len="med"/>
                     </a:lnB>
                     <a:solidFill>
-                      <a:srgbClr val="000000"/>
+                      <a:srgbClr val="F5F3FA"/>
                     </a:solidFill>
                   </a:tcPr>
                 </a:tc>
@@ -30743,7 +30743,7 @@
                       <a:r>
                         <a:rPr lang="en-US" sz="1150" dirty="0">
                           <a:solidFill>
-                            <a:srgbClr val="6BA0F8"/>
+                            <a:srgbClr val="1A4FBF"/>
                           </a:solidFill>
                           <a:latin typeface="Montserrat" pitchFamily="34" charset="0"/>
                           <a:ea typeface="Montserrat" pitchFamily="34" charset="-122"/>
@@ -30796,7 +30796,7 @@
                       <a:tailEnd type="none" w="med" len="med"/>
                     </a:lnB>
                     <a:solidFill>
-                      <a:srgbClr val="000000"/>
+                      <a:srgbClr val="F5F3FA"/>
                     </a:solidFill>
                   </a:tcPr>
                 </a:tc>
@@ -30813,7 +30813,7 @@
                       <a:r>
                         <a:rPr lang="en-US" sz="1150" b="1" dirty="0">
                           <a:solidFill>
-                            <a:srgbClr val="FF6B6B"/>
+                            <a:srgbClr val="B3261E"/>
                           </a:solidFill>
                           <a:latin typeface="Montserrat" pitchFamily="34" charset="0"/>
                           <a:ea typeface="Montserrat" pitchFamily="34" charset="-122"/>
@@ -30866,7 +30866,7 @@
                       <a:tailEnd type="none" w="med" len="med"/>
                     </a:lnB>
                     <a:solidFill>
-                      <a:srgbClr val="000000"/>
+                      <a:srgbClr val="F5F3FA"/>
                     </a:solidFill>
                   </a:tcPr>
                 </a:tc>
@@ -30881,7 +30881,7 @@
                       <a:r>
                         <a:rPr lang="en-US" sz="1150" dirty="0">
                           <a:solidFill>
-                            <a:srgbClr val="FF6B6B"/>
+                            <a:srgbClr val="B3261E"/>
                           </a:solidFill>
                           <a:latin typeface="Montserrat" pitchFamily="34" charset="0"/>
                           <a:ea typeface="Montserrat" pitchFamily="34" charset="-122"/>
@@ -30934,7 +30934,7 @@
                       <a:tailEnd type="none" w="med" len="med"/>
                     </a:lnB>
                     <a:solidFill>
-                      <a:srgbClr val="000000"/>
+                      <a:srgbClr val="F5F3FA"/>
                     </a:solidFill>
                   </a:tcPr>
                 </a:tc>
@@ -30949,7 +30949,7 @@
                       <a:r>
                         <a:rPr lang="en-US" sz="1150" dirty="0">
                           <a:solidFill>
-                            <a:srgbClr val="FF6B6B"/>
+                            <a:srgbClr val="B3261E"/>
                           </a:solidFill>
                           <a:latin typeface="Montserrat" pitchFamily="34" charset="0"/>
                           <a:ea typeface="Montserrat" pitchFamily="34" charset="-122"/>
@@ -31002,7 +31002,7 @@
                       <a:tailEnd type="none" w="med" len="med"/>
                     </a:lnB>
                     <a:solidFill>
-                      <a:srgbClr val="000000"/>
+                      <a:srgbClr val="F5F3FA"/>
                     </a:solidFill>
                   </a:tcPr>
                 </a:tc>

--- a/docs/decks/L09.pptx
+++ b/docs/decks/L09.pptx
@@ -5587,7 +5587,7 @@
                       <a:r>
                         <a:rPr lang="en-US" sz="1150" b="1" dirty="0">
                           <a:solidFill>
-                            <a:srgbClr val="5A05F4"/>
+                            <a:srgbClr val="000000"/>
                           </a:solidFill>
                           <a:latin typeface="Montserrat" pitchFamily="34" charset="0"/>
                           <a:ea typeface="Montserrat" pitchFamily="34" charset="-122"/>
@@ -5640,7 +5640,7 @@
                       <a:tailEnd type="none" w="med" len="med"/>
                     </a:lnB>
                     <a:solidFill>
-                      <a:srgbClr val="F5F3FA"/>
+                      <a:srgbClr val="FFFFFF"/>
                     </a:solidFill>
                   </a:tcPr>
                 </a:tc>
@@ -5655,7 +5655,7 @@
                       <a:r>
                         <a:rPr lang="en-US" sz="1150" dirty="0">
                           <a:solidFill>
-                            <a:srgbClr val="5A05F4"/>
+                            <a:srgbClr val="000000"/>
                           </a:solidFill>
                           <a:latin typeface="Montserrat" pitchFamily="34" charset="0"/>
                           <a:ea typeface="Montserrat" pitchFamily="34" charset="-122"/>
@@ -5708,7 +5708,7 @@
                       <a:tailEnd type="none" w="med" len="med"/>
                     </a:lnB>
                     <a:solidFill>
-                      <a:srgbClr val="F5F3FA"/>
+                      <a:srgbClr val="FFFFFF"/>
                     </a:solidFill>
                   </a:tcPr>
                 </a:tc>
@@ -5723,7 +5723,7 @@
                       <a:r>
                         <a:rPr lang="en-US" sz="1150" dirty="0">
                           <a:solidFill>
-                            <a:srgbClr val="5A05F4"/>
+                            <a:srgbClr val="000000"/>
                           </a:solidFill>
                           <a:latin typeface="Montserrat" pitchFamily="34" charset="0"/>
                           <a:ea typeface="Montserrat" pitchFamily="34" charset="-122"/>
@@ -5776,7 +5776,7 @@
                       <a:tailEnd type="none" w="med" len="med"/>
                     </a:lnB>
                     <a:solidFill>
-                      <a:srgbClr val="F5F3FA"/>
+                      <a:srgbClr val="FFFFFF"/>
                     </a:solidFill>
                   </a:tcPr>
                 </a:tc>
@@ -6205,7 +6205,7 @@
                       <a:r>
                         <a:rPr lang="en-US" sz="1150" b="1" dirty="0">
                           <a:solidFill>
-                            <a:srgbClr val="5A05F4"/>
+                            <a:srgbClr val="000000"/>
                           </a:solidFill>
                           <a:latin typeface="Montserrat" pitchFamily="34" charset="0"/>
                           <a:ea typeface="Montserrat" pitchFamily="34" charset="-122"/>
@@ -6258,7 +6258,7 @@
                       <a:tailEnd type="none" w="med" len="med"/>
                     </a:lnB>
                     <a:solidFill>
-                      <a:srgbClr val="F5F3FA"/>
+                      <a:srgbClr val="FFFFFF"/>
                     </a:solidFill>
                   </a:tcPr>
                 </a:tc>
@@ -6273,7 +6273,7 @@
                       <a:r>
                         <a:rPr lang="en-US" sz="1150" dirty="0">
                           <a:solidFill>
-                            <a:srgbClr val="5A05F4"/>
+                            <a:srgbClr val="000000"/>
                           </a:solidFill>
                           <a:latin typeface="Montserrat" pitchFamily="34" charset="0"/>
                           <a:ea typeface="Montserrat" pitchFamily="34" charset="-122"/>
@@ -6326,7 +6326,7 @@
                       <a:tailEnd type="none" w="med" len="med"/>
                     </a:lnB>
                     <a:solidFill>
-                      <a:srgbClr val="F5F3FA"/>
+                      <a:srgbClr val="FFFFFF"/>
                     </a:solidFill>
                   </a:tcPr>
                 </a:tc>
@@ -6341,7 +6341,7 @@
                       <a:r>
                         <a:rPr lang="en-US" sz="1150" dirty="0">
                           <a:solidFill>
-                            <a:srgbClr val="5A05F4"/>
+                            <a:srgbClr val="000000"/>
                           </a:solidFill>
                           <a:latin typeface="Montserrat" pitchFamily="34" charset="0"/>
                           <a:ea typeface="Montserrat" pitchFamily="34" charset="-122"/>
@@ -6394,7 +6394,7 @@
                       <a:tailEnd type="none" w="med" len="med"/>
                     </a:lnB>
                     <a:solidFill>
-                      <a:srgbClr val="F5F3FA"/>
+                      <a:srgbClr val="FFFFFF"/>
                     </a:solidFill>
                   </a:tcPr>
                 </a:tc>
@@ -13379,7 +13379,7 @@
                       <a:r>
                         <a:rPr lang="en-US" sz="1150" b="1" dirty="0">
                           <a:solidFill>
-                            <a:srgbClr val="1A4FBF"/>
+                            <a:srgbClr val="000000"/>
                           </a:solidFill>
                           <a:latin typeface="Montserrat" pitchFamily="34" charset="0"/>
                           <a:ea typeface="Montserrat" pitchFamily="34" charset="-122"/>
@@ -13432,7 +13432,7 @@
                       <a:tailEnd type="none" w="med" len="med"/>
                     </a:lnB>
                     <a:solidFill>
-                      <a:srgbClr val="F5F3FA"/>
+                      <a:srgbClr val="FFFFFF"/>
                     </a:solidFill>
                   </a:tcPr>
                 </a:tc>
@@ -13447,7 +13447,7 @@
                       <a:r>
                         <a:rPr lang="en-US" sz="1150" dirty="0">
                           <a:solidFill>
-                            <a:srgbClr val="1A4FBF"/>
+                            <a:srgbClr val="000000"/>
                           </a:solidFill>
                           <a:latin typeface="Montserrat" pitchFamily="34" charset="0"/>
                           <a:ea typeface="Montserrat" pitchFamily="34" charset="-122"/>
@@ -13500,7 +13500,7 @@
                       <a:tailEnd type="none" w="med" len="med"/>
                     </a:lnB>
                     <a:solidFill>
-                      <a:srgbClr val="F5F3FA"/>
+                      <a:srgbClr val="FFFFFF"/>
                     </a:solidFill>
                   </a:tcPr>
                 </a:tc>
@@ -13515,7 +13515,7 @@
                       <a:r>
                         <a:rPr lang="en-US" sz="1150" dirty="0">
                           <a:solidFill>
-                            <a:srgbClr val="1A4FBF"/>
+                            <a:srgbClr val="000000"/>
                           </a:solidFill>
                           <a:latin typeface="Montserrat" pitchFamily="34" charset="0"/>
                           <a:ea typeface="Montserrat" pitchFamily="34" charset="-122"/>
@@ -13568,7 +13568,7 @@
                       <a:tailEnd type="none" w="med" len="med"/>
                     </a:lnB>
                     <a:solidFill>
-                      <a:srgbClr val="F5F3FA"/>
+                      <a:srgbClr val="FFFFFF"/>
                     </a:solidFill>
                   </a:tcPr>
                 </a:tc>
@@ -13791,7 +13791,7 @@
                       <a:r>
                         <a:rPr lang="en-US" sz="1150" b="1" dirty="0">
                           <a:solidFill>
-                            <a:srgbClr val="106B41"/>
+                            <a:srgbClr val="000000"/>
                           </a:solidFill>
                           <a:latin typeface="Montserrat" pitchFamily="34" charset="0"/>
                           <a:ea typeface="Montserrat" pitchFamily="34" charset="-122"/>
@@ -13844,7 +13844,7 @@
                       <a:tailEnd type="none" w="med" len="med"/>
                     </a:lnB>
                     <a:solidFill>
-                      <a:srgbClr val="F5F3FA"/>
+                      <a:srgbClr val="FFFFFF"/>
                     </a:solidFill>
                   </a:tcPr>
                 </a:tc>
@@ -13859,7 +13859,7 @@
                       <a:r>
                         <a:rPr lang="en-US" sz="1150" dirty="0">
                           <a:solidFill>
-                            <a:srgbClr val="106B41"/>
+                            <a:srgbClr val="000000"/>
                           </a:solidFill>
                           <a:latin typeface="Montserrat" pitchFamily="34" charset="0"/>
                           <a:ea typeface="Montserrat" pitchFamily="34" charset="-122"/>
@@ -13912,7 +13912,7 @@
                       <a:tailEnd type="none" w="med" len="med"/>
                     </a:lnB>
                     <a:solidFill>
-                      <a:srgbClr val="F5F3FA"/>
+                      <a:srgbClr val="FFFFFF"/>
                     </a:solidFill>
                   </a:tcPr>
                 </a:tc>
@@ -13927,7 +13927,7 @@
                       <a:r>
                         <a:rPr lang="en-US" sz="1150" dirty="0">
                           <a:solidFill>
-                            <a:srgbClr val="106B41"/>
+                            <a:srgbClr val="000000"/>
                           </a:solidFill>
                           <a:latin typeface="Montserrat" pitchFamily="34" charset="0"/>
                           <a:ea typeface="Montserrat" pitchFamily="34" charset="-122"/>
@@ -13980,7 +13980,7 @@
                       <a:tailEnd type="none" w="med" len="med"/>
                     </a:lnB>
                     <a:solidFill>
-                      <a:srgbClr val="F5F3FA"/>
+                      <a:srgbClr val="FFFFFF"/>
                     </a:solidFill>
                   </a:tcPr>
                 </a:tc>

--- a/docs/decks/L09.pptx
+++ b/docs/decks/L09.pptx
@@ -31028,9 +31028,14 @@
             </a:avLst>
           </a:prstGeom>
           <a:solidFill>
-            <a:srgbClr val="5A05F4"/>
-          </a:solidFill>
-          <a:ln/>
+            <a:srgbClr val="FFFFFF"/>
+          </a:solidFill>
+          <a:ln w="12700">
+            <a:solidFill>
+              <a:srgbClr val="106B41"/>
+            </a:solidFill>
+            <a:prstDash val="solid"/>
+          </a:ln>
         </p:spPr>
       </p:sp>
       <p:sp>
@@ -31060,7 +31065,7 @@
             <a:r>
               <a:rPr lang="en-US" sz="950" b="1" spc="150" kern="0" dirty="0">
                 <a:solidFill>
-                  <a:srgbClr val="FFFFFF"/>
+                  <a:srgbClr val="106B41"/>
                 </a:solidFill>
                 <a:latin typeface="Courier New" pitchFamily="34" charset="0"/>
                 <a:ea typeface="Courier New" pitchFamily="34" charset="-122"/>
@@ -31102,7 +31107,7 @@
             <a:r>
               <a:rPr lang="en-US" sz="1300" dirty="0">
                 <a:solidFill>
-                  <a:srgbClr val="FFFFFF"/>
+                  <a:srgbClr val="000000"/>
                 </a:solidFill>
                 <a:latin typeface="Montserrat" pitchFamily="34" charset="0"/>
                 <a:ea typeface="Montserrat" pitchFamily="34" charset="-122"/>

--- a/docs/decks/L09.pptx
+++ b/docs/decks/L09.pptx
@@ -5169,7 +5169,7 @@
                     <a:bodyPr/>
                     <a:lstStyle/>
                     <a:p>
-                      <a:pPr indent="0" marL="0">
+                      <a:pPr algn="ctr" indent="0" marL="0">
                         <a:buNone/>
                       </a:pPr>
                       <a:r>
@@ -5237,7 +5237,7 @@
                     <a:bodyPr/>
                     <a:lstStyle/>
                     <a:p>
-                      <a:pPr indent="0" marL="0">
+                      <a:pPr algn="ctr" indent="0" marL="0">
                         <a:buNone/>
                       </a:pPr>
                       <a:r>
@@ -5305,7 +5305,7 @@
                     <a:bodyPr/>
                     <a:lstStyle/>
                     <a:p>
-                      <a:pPr indent="0" marL="0">
+                      <a:pPr algn="ctr" indent="0" marL="0">
                         <a:buNone/>
                       </a:pPr>
                       <a:r>
@@ -13167,7 +13167,7 @@
                     <a:bodyPr/>
                     <a:lstStyle/>
                     <a:p>
-                      <a:pPr indent="0" marL="0">
+                      <a:pPr algn="ctr" indent="0" marL="0">
                         <a:buNone/>
                       </a:pPr>
                       <a:r>
@@ -13235,7 +13235,7 @@
                     <a:bodyPr/>
                     <a:lstStyle/>
                     <a:p>
-                      <a:pPr indent="0" marL="0">
+                      <a:pPr algn="ctr" indent="0" marL="0">
                         <a:buNone/>
                       </a:pPr>
                       <a:r>
@@ -13303,7 +13303,7 @@
                     <a:bodyPr/>
                     <a:lstStyle/>
                     <a:p>
-                      <a:pPr indent="0" marL="0">
+                      <a:pPr algn="ctr" indent="0" marL="0">
                         <a:buNone/>
                       </a:pPr>
                       <a:r>
@@ -29983,7 +29983,7 @@
                     <a:bodyPr/>
                     <a:lstStyle/>
                     <a:p>
-                      <a:pPr indent="0" marL="0">
+                      <a:pPr algn="ctr" indent="0" marL="0">
                         <a:buNone/>
                       </a:pPr>
                       <a:r>
@@ -30051,7 +30051,7 @@
                     <a:bodyPr/>
                     <a:lstStyle/>
                     <a:p>
-                      <a:pPr indent="0" marL="0">
+                      <a:pPr algn="ctr" indent="0" marL="0">
                         <a:buNone/>
                       </a:pPr>
                       <a:r>
@@ -30119,7 +30119,7 @@
                     <a:bodyPr/>
                     <a:lstStyle/>
                     <a:p>
-                      <a:pPr indent="0" marL="0">
+                      <a:pPr algn="ctr" indent="0" marL="0">
                         <a:buNone/>
                       </a:pPr>
                       <a:r>

--- a/docs/decks/L09.pptx
+++ b/docs/decks/L09.pptx
@@ -4,6 +4,9 @@
   <p:sldMasterIdLst>
     <p:sldMasterId id="2147483648" r:id="rId1"/>
   </p:sldMasterIdLst>
+  <p:notesMasterIdLst>
+    <p:notesMasterId r:id="rId32"/>
+  </p:notesMasterIdLst>
   <p:sldIdLst>
     <p:sldId id="256" r:id="rId2"/>
     <p:sldId id="257" r:id="rId3"/>
@@ -36,9 +39,6 @@
     <p:sldId id="284" r:id="rId30"/>
     <p:sldId id="285" r:id="rId31"/>
   </p:sldIdLst>
-  <p:notesMasterIdLst>
-    <p:notesMasterId r:id="rId32"/>
-  </p:notesMasterIdLst>
   <p:sldSz cx="12192000" cy="6858000"/>
   <p:notesSz cx="6858000" cy="12192000"/>
   <p:defaultTextStyle>
@@ -133,6 +133,11 @@
       </a:defRPr>
     </a:lvl9pPr>
   </p:defaultTextStyle>
+  <p:extLst>
+    <p:ext uri="{EFAFB233-063F-42B5-8137-9DF3F51BA10A}">
+      <p15:sldGuideLst xmlns:p15="http://schemas.microsoft.com/office/powerpoint/2012/main"/>
+    </p:ext>
+  </p:extLst>
 </p:presentation>
 </file>
 
@@ -158,234 +163,10 @@
           <a:chExt cx="0" cy="0"/>
         </a:xfrm>
       </p:grpSpPr>
-      <p:sp>
-        <p:nvSpPr>
-          <p:cNvPr id="2" name="Header Placeholder 1"/>
-          <p:cNvSpPr>
-            <a:spLocks noGrp="1"/>
-          </p:cNvSpPr>
-          <p:nvPr>
-            <p:ph type="hdr" sz="quarter"/>
-          </p:nvPr>
-        </p:nvSpPr>
-        <p:spPr>
-          <a:xfrm>
-            <a:off x="0" y="0"/>
-            <a:ext cx="2971800" cy="458788"/>
-          </a:xfrm>
-          <a:prstGeom prst="rect">
-            <a:avLst/>
-          </a:prstGeom>
-        </p:spPr>
-        <p:txBody>
-          <a:bodyPr vert="horz" lIns="91440" tIns="45720" rIns="91440" bIns="45720" rtlCol="0"/>
-          <a:lstStyle>
-            <a:lvl1pPr algn="l">
-              <a:defRPr sz="1200"/>
-            </a:lvl1pPr>
-          </a:lstStyle>
-          <a:p>
-            <a:endParaRPr lang="en-US"/>
-          </a:p>
-        </p:txBody>
-      </p:sp>
-      <p:sp>
-        <p:nvSpPr>
-          <p:cNvPr id="3" name="Date Placeholder 2"/>
-          <p:cNvSpPr>
-            <a:spLocks noGrp="1"/>
-          </p:cNvSpPr>
-          <p:nvPr>
-            <p:ph type="dt" idx="1"/>
-          </p:nvPr>
-        </p:nvSpPr>
-        <p:spPr>
-          <a:xfrm>
-            <a:off x="3884613" y="0"/>
-            <a:ext cx="2971800" cy="458788"/>
-          </a:xfrm>
-          <a:prstGeom prst="rect">
-            <a:avLst/>
-          </a:prstGeom>
-        </p:spPr>
-        <p:txBody>
-          <a:bodyPr vert="horz" lIns="91440" tIns="45720" rIns="91440" bIns="45720" rtlCol="0"/>
-          <a:lstStyle>
-            <a:lvl1pPr algn="r">
-              <a:defRPr sz="1200"/>
-            </a:lvl1pPr>
-          </a:lstStyle>
-          <a:p>
-            <a:fld id="{5282F153-3F37-0F45-9E97-73ACFA13230C}" type="datetimeFigureOut">
-              <a:rPr lang="en-US"/>
-              <a:t>7/23/19</a:t>
-            </a:fld>
-            <a:endParaRPr lang="en-US"/>
-          </a:p>
-        </p:txBody>
-      </p:sp>
-      <p:sp>
-        <p:nvSpPr>
-          <p:cNvPr id="4" name="Slide Image Placeholder 3"/>
-          <p:cNvSpPr>
-            <a:spLocks noGrp="1" noRot="1" noChangeAspect="1"/>
-          </p:cNvSpPr>
-          <p:nvPr>
-            <p:ph type="sldImg" idx="2"/>
-          </p:nvPr>
-        </p:nvSpPr>
-        <p:spPr>
-          <a:xfrm>
-            <a:off x="685800" y="1143000"/>
-            <a:ext cx="5486400" cy="3086100"/>
-          </a:xfrm>
-          <a:prstGeom prst="rect">
-            <a:avLst/>
-          </a:prstGeom>
-          <a:noFill/>
-          <a:ln w="12700">
-            <a:solidFill>
-              <a:prstClr val="black"/>
-            </a:solidFill>
-          </a:ln>
-        </p:spPr>
-        <p:txBody>
-          <a:bodyPr vert="horz" lIns="91440" tIns="45720" rIns="91440" bIns="45720" rtlCol="0" anchor="ctr"/>
-          <a:lstStyle/>
-          <a:p>
-            <a:endParaRPr lang="en-US"/>
-          </a:p>
-        </p:txBody>
-      </p:sp>
-      <p:sp>
-        <p:nvSpPr>
-          <p:cNvPr id="5" name="Notes Placeholder 4"/>
-          <p:cNvSpPr>
-            <a:spLocks noGrp="1"/>
-          </p:cNvSpPr>
-          <p:nvPr>
-            <p:ph type="body" sz="quarter" idx="3"/>
-          </p:nvPr>
-        </p:nvSpPr>
-        <p:spPr>
-          <a:xfrm>
-            <a:off x="685800" y="4400550"/>
-            <a:ext cx="5486400" cy="3600450"/>
-          </a:xfrm>
-          <a:prstGeom prst="rect">
-            <a:avLst/>
-          </a:prstGeom>
-        </p:spPr>
-        <p:txBody>
-          <a:bodyPr vert="horz" lIns="91440" tIns="45720" rIns="91440" bIns="45720" rtlCol="0"/>
-          <a:lstStyle/>
-          <a:p>
-            <a:pPr lvl="0"/>
-            <a:r>
-              <a:rPr lang="en-US"/>
-              <a:t>Click to edit Master text styles</a:t>
-            </a:r>
-          </a:p>
-          <a:p>
-            <a:pPr lvl="1"/>
-            <a:r>
-              <a:rPr lang="en-US"/>
-              <a:t>Second level</a:t>
-            </a:r>
-          </a:p>
-          <a:p>
-            <a:pPr lvl="2"/>
-            <a:r>
-              <a:rPr lang="en-US"/>
-              <a:t>Third level</a:t>
-            </a:r>
-          </a:p>
-          <a:p>
-            <a:pPr lvl="3"/>
-            <a:r>
-              <a:rPr lang="en-US"/>
-              <a:t>Fourth level</a:t>
-            </a:r>
-          </a:p>
-          <a:p>
-            <a:pPr lvl="4"/>
-            <a:r>
-              <a:rPr lang="en-US"/>
-              <a:t>Fifth level</a:t>
-            </a:r>
-          </a:p>
-        </p:txBody>
-      </p:sp>
-      <p:sp>
-        <p:nvSpPr>
-          <p:cNvPr id="6" name="Footer Placeholder 5"/>
-          <p:cNvSpPr>
-            <a:spLocks noGrp="1"/>
-          </p:cNvSpPr>
-          <p:nvPr>
-            <p:ph type="ftr" sz="quarter" idx="4"/>
-          </p:nvPr>
-        </p:nvSpPr>
-        <p:spPr>
-          <a:xfrm>
-            <a:off x="0" y="8685213"/>
-            <a:ext cx="2971800" cy="458787"/>
-          </a:xfrm>
-          <a:prstGeom prst="rect">
-            <a:avLst/>
-          </a:prstGeom>
-        </p:spPr>
-        <p:txBody>
-          <a:bodyPr vert="horz" lIns="91440" tIns="45720" rIns="91440" bIns="45720" rtlCol="0" anchor="b"/>
-          <a:lstStyle>
-            <a:lvl1pPr algn="l">
-              <a:defRPr sz="1200"/>
-            </a:lvl1pPr>
-          </a:lstStyle>
-          <a:p>
-            <a:endParaRPr lang="en-US"/>
-          </a:p>
-        </p:txBody>
-      </p:sp>
-      <p:sp>
-        <p:nvSpPr>
-          <p:cNvPr id="7" name="Slide Number Placeholder 6"/>
-          <p:cNvSpPr>
-            <a:spLocks noGrp="1"/>
-          </p:cNvSpPr>
-          <p:nvPr>
-            <p:ph type="sldNum" sz="quarter" idx="5"/>
-          </p:nvPr>
-        </p:nvSpPr>
-        <p:spPr>
-          <a:xfrm>
-            <a:off x="3884613" y="8685213"/>
-            <a:ext cx="2971800" cy="458787"/>
-          </a:xfrm>
-          <a:prstGeom prst="rect">
-            <a:avLst/>
-          </a:prstGeom>
-        </p:spPr>
-        <p:txBody>
-          <a:bodyPr vert="horz" lIns="91440" tIns="45720" rIns="91440" bIns="45720" rtlCol="0" anchor="b"/>
-          <a:lstStyle>
-            <a:lvl1pPr algn="r">
-              <a:defRPr sz="1200"/>
-            </a:lvl1pPr>
-          </a:lstStyle>
-          <a:p>
-            <a:fld id="{CE5E9CC1-C706-0F49-92D6-E571CC5EEA8F}" type="slidenum">
-              <a:rPr lang="en-US"/>
-              <a:t>‹#›</a:t>
-            </a:fld>
-            <a:endParaRPr lang="en-US"/>
-          </a:p>
-        </p:txBody>
-      </p:sp>
     </p:spTree>
     <p:extLst>
       <p:ext uri="{BB962C8B-B14F-4D97-AF65-F5344CB8AC3E}">
-        <p14:creationId xmlns:p14="http://schemas.microsoft.com/office/powerpoint/2010/main" val="1024086991"/>
+        <p14:creationId xmlns:p14="http://schemas.microsoft.com/office/powerpoint/2010/main" val="1214745195"/>
       </p:ext>
     </p:extLst>
   </p:cSld>
@@ -529,10 +310,6 @@
           <a:bodyPr/>
           <a:lstStyle/>
           <a:p>
-            <a:r>
-              <a:rPr lang="en-US" dirty="0"/>
-              <a:t/>
-            </a:r>
             <a:endParaRPr lang="en-US" dirty="0"/>
           </a:p>
         </p:txBody>
@@ -617,10 +394,6 @@
           <a:bodyPr/>
           <a:lstStyle/>
           <a:p>
-            <a:r>
-              <a:rPr lang="en-US" dirty="0"/>
-              <a:t/>
-            </a:r>
             <a:endParaRPr lang="en-US" dirty="0"/>
           </a:p>
         </p:txBody>
@@ -705,10 +478,6 @@
           <a:bodyPr/>
           <a:lstStyle/>
           <a:p>
-            <a:r>
-              <a:rPr lang="en-US" dirty="0"/>
-              <a:t/>
-            </a:r>
             <a:endParaRPr lang="en-US" dirty="0"/>
           </a:p>
         </p:txBody>
@@ -793,10 +562,6 @@
           <a:bodyPr/>
           <a:lstStyle/>
           <a:p>
-            <a:r>
-              <a:rPr lang="en-US" dirty="0"/>
-              <a:t/>
-            </a:r>
             <a:endParaRPr lang="en-US" dirty="0"/>
           </a:p>
         </p:txBody>
@@ -881,10 +646,6 @@
           <a:bodyPr/>
           <a:lstStyle/>
           <a:p>
-            <a:r>
-              <a:rPr lang="en-US" dirty="0"/>
-              <a:t/>
-            </a:r>
             <a:endParaRPr lang="en-US" dirty="0"/>
           </a:p>
         </p:txBody>
@@ -969,10 +730,6 @@
           <a:bodyPr/>
           <a:lstStyle/>
           <a:p>
-            <a:r>
-              <a:rPr lang="en-US" dirty="0"/>
-              <a:t/>
-            </a:r>
             <a:endParaRPr lang="en-US" dirty="0"/>
           </a:p>
         </p:txBody>
@@ -1057,10 +814,6 @@
           <a:bodyPr/>
           <a:lstStyle/>
           <a:p>
-            <a:r>
-              <a:rPr lang="en-US" dirty="0"/>
-              <a:t/>
-            </a:r>
             <a:endParaRPr lang="en-US" dirty="0"/>
           </a:p>
         </p:txBody>
@@ -1145,10 +898,6 @@
           <a:bodyPr/>
           <a:lstStyle/>
           <a:p>
-            <a:r>
-              <a:rPr lang="en-US" dirty="0"/>
-              <a:t/>
-            </a:r>
             <a:endParaRPr lang="en-US" dirty="0"/>
           </a:p>
         </p:txBody>
@@ -1233,10 +982,6 @@
           <a:bodyPr/>
           <a:lstStyle/>
           <a:p>
-            <a:r>
-              <a:rPr lang="en-US" dirty="0"/>
-              <a:t/>
-            </a:r>
             <a:endParaRPr lang="en-US" dirty="0"/>
           </a:p>
         </p:txBody>
@@ -1321,10 +1066,6 @@
           <a:bodyPr/>
           <a:lstStyle/>
           <a:p>
-            <a:r>
-              <a:rPr lang="en-US" dirty="0"/>
-              <a:t/>
-            </a:r>
             <a:endParaRPr lang="en-US" dirty="0"/>
           </a:p>
         </p:txBody>
@@ -1409,10 +1150,6 @@
           <a:bodyPr/>
           <a:lstStyle/>
           <a:p>
-            <a:r>
-              <a:rPr lang="en-US" dirty="0"/>
-              <a:t/>
-            </a:r>
             <a:endParaRPr lang="en-US" dirty="0"/>
           </a:p>
         </p:txBody>
@@ -1497,10 +1234,6 @@
           <a:bodyPr/>
           <a:lstStyle/>
           <a:p>
-            <a:r>
-              <a:rPr lang="en-US" dirty="0"/>
-              <a:t/>
-            </a:r>
             <a:endParaRPr lang="en-US" dirty="0"/>
           </a:p>
         </p:txBody>
@@ -1585,10 +1318,6 @@
           <a:bodyPr/>
           <a:lstStyle/>
           <a:p>
-            <a:r>
-              <a:rPr lang="en-US" dirty="0"/>
-              <a:t/>
-            </a:r>
             <a:endParaRPr lang="en-US" dirty="0"/>
           </a:p>
         </p:txBody>
@@ -1673,10 +1402,6 @@
           <a:bodyPr/>
           <a:lstStyle/>
           <a:p>
-            <a:r>
-              <a:rPr lang="en-US" dirty="0"/>
-              <a:t/>
-            </a:r>
             <a:endParaRPr lang="en-US" dirty="0"/>
           </a:p>
         </p:txBody>
@@ -1761,10 +1486,6 @@
           <a:bodyPr/>
           <a:lstStyle/>
           <a:p>
-            <a:r>
-              <a:rPr lang="en-US" dirty="0"/>
-              <a:t/>
-            </a:r>
             <a:endParaRPr lang="en-US" dirty="0"/>
           </a:p>
         </p:txBody>
@@ -1849,10 +1570,6 @@
           <a:bodyPr/>
           <a:lstStyle/>
           <a:p>
-            <a:r>
-              <a:rPr lang="en-US" dirty="0"/>
-              <a:t/>
-            </a:r>
             <a:endParaRPr lang="en-US" dirty="0"/>
           </a:p>
         </p:txBody>
@@ -1937,10 +1654,6 @@
           <a:bodyPr/>
           <a:lstStyle/>
           <a:p>
-            <a:r>
-              <a:rPr lang="en-US" dirty="0"/>
-              <a:t/>
-            </a:r>
             <a:endParaRPr lang="en-US" dirty="0"/>
           </a:p>
         </p:txBody>
@@ -2025,10 +1738,6 @@
           <a:bodyPr/>
           <a:lstStyle/>
           <a:p>
-            <a:r>
-              <a:rPr lang="en-US" dirty="0"/>
-              <a:t/>
-            </a:r>
             <a:endParaRPr lang="en-US" dirty="0"/>
           </a:p>
         </p:txBody>
@@ -2113,10 +1822,6 @@
           <a:bodyPr/>
           <a:lstStyle/>
           <a:p>
-            <a:r>
-              <a:rPr lang="en-US" dirty="0"/>
-              <a:t/>
-            </a:r>
             <a:endParaRPr lang="en-US" dirty="0"/>
           </a:p>
         </p:txBody>
@@ -2201,10 +1906,6 @@
           <a:bodyPr/>
           <a:lstStyle/>
           <a:p>
-            <a:r>
-              <a:rPr lang="en-US" dirty="0"/>
-              <a:t/>
-            </a:r>
             <a:endParaRPr lang="en-US" dirty="0"/>
           </a:p>
         </p:txBody>
@@ -2289,10 +1990,6 @@
           <a:bodyPr/>
           <a:lstStyle/>
           <a:p>
-            <a:r>
-              <a:rPr lang="en-US" dirty="0"/>
-              <a:t/>
-            </a:r>
             <a:endParaRPr lang="en-US" dirty="0"/>
           </a:p>
         </p:txBody>
@@ -2377,10 +2074,6 @@
           <a:bodyPr/>
           <a:lstStyle/>
           <a:p>
-            <a:r>
-              <a:rPr lang="en-US" dirty="0"/>
-              <a:t/>
-            </a:r>
             <a:endParaRPr lang="en-US" dirty="0"/>
           </a:p>
         </p:txBody>
@@ -2465,10 +2158,6 @@
           <a:bodyPr/>
           <a:lstStyle/>
           <a:p>
-            <a:r>
-              <a:rPr lang="en-US" dirty="0"/>
-              <a:t/>
-            </a:r>
             <a:endParaRPr lang="en-US" dirty="0"/>
           </a:p>
         </p:txBody>
@@ -2553,10 +2242,6 @@
           <a:bodyPr/>
           <a:lstStyle/>
           <a:p>
-            <a:r>
-              <a:rPr lang="en-US" dirty="0"/>
-              <a:t/>
-            </a:r>
             <a:endParaRPr lang="en-US" dirty="0"/>
           </a:p>
         </p:txBody>
@@ -2641,10 +2326,6 @@
           <a:bodyPr/>
           <a:lstStyle/>
           <a:p>
-            <a:r>
-              <a:rPr lang="en-US" dirty="0"/>
-              <a:t/>
-            </a:r>
             <a:endParaRPr lang="en-US" dirty="0"/>
           </a:p>
         </p:txBody>
@@ -2729,10 +2410,6 @@
           <a:bodyPr/>
           <a:lstStyle/>
           <a:p>
-            <a:r>
-              <a:rPr lang="en-US" dirty="0"/>
-              <a:t/>
-            </a:r>
             <a:endParaRPr lang="en-US" dirty="0"/>
           </a:p>
         </p:txBody>
@@ -2817,10 +2494,6 @@
           <a:bodyPr/>
           <a:lstStyle/>
           <a:p>
-            <a:r>
-              <a:rPr lang="en-US" dirty="0"/>
-              <a:t/>
-            </a:r>
             <a:endParaRPr lang="en-US" dirty="0"/>
           </a:p>
         </p:txBody>
@@ -2905,10 +2578,6 @@
           <a:bodyPr/>
           <a:lstStyle/>
           <a:p>
-            <a:r>
-              <a:rPr lang="en-US" dirty="0"/>
-              <a:t/>
-            </a:r>
             <a:endParaRPr lang="en-US" dirty="0"/>
           </a:p>
         </p:txBody>
@@ -2993,10 +2662,6 @@
           <a:bodyPr/>
           <a:lstStyle/>
           <a:p>
-            <a:r>
-              <a:rPr lang="en-US" dirty="0"/>
-              <a:t/>
-            </a:r>
             <a:endParaRPr lang="en-US" dirty="0"/>
           </a:p>
         </p:txBody>
@@ -3081,10 +2746,6 @@
           <a:bodyPr/>
           <a:lstStyle/>
           <a:p>
-            <a:r>
-              <a:rPr lang="en-US" dirty="0"/>
-              <a:t/>
-            </a:r>
             <a:endParaRPr lang="en-US" dirty="0"/>
           </a:p>
         </p:txBody>
@@ -3167,7 +2828,7 @@
           </a:prstGeom>
           <a:extLst>
             <a:ext uri="{C572A759-6A51-4108-AA02-DFA0A04FC94B}">
-              <ma14:wrappingTextBoxFlag xmlns:ma14="http://schemas.microsoft.com/office/mac/drawingml/2011/main" val="0"/>
+              <ma14:wrappingTextBoxFlag xmlns:ma14="http://schemas.microsoft.com/office/mac/drawingml/2011/main" xmlns="" val="0"/>
             </a:ext>
           </a:extLst>
         </p:spPr>
@@ -3188,8 +2849,8 @@
           <a:p>
             <a:pPr algn="l"/>
             <a:fld id="{F7021451-1387-4CA6-816F-3879F97B5CBC}" type="slidenum">
-              <a:rPr b="0" lang="en-US"/>
-              <a:t>1000</a:t>
+              <a:rPr lang="en-US" b="0"/>
+              <a:t>‹#›</a:t>
             </a:fld>
             <a:endParaRPr lang="en-US"/>
           </a:p>
@@ -3211,6 +2872,7 @@
         <a:solidFill>
           <a:srgbClr val="000000"/>
         </a:solidFill>
+        <a:effectLst/>
       </p:bgPr>
     </p:bg>
     <p:spTree>
@@ -3229,14 +2891,14 @@
       </p:grpSpPr>
       <p:pic>
         <p:nvPicPr>
-          <p:cNvPr id="2" name="Image 0" descr="preencoded.png">    </p:cNvPr>
+          <p:cNvPr id="2" name="Image 0" descr="preencoded.png"/>
           <p:cNvPicPr>
             <a:picLocks noChangeAspect="1"/>
           </p:cNvPicPr>
           <p:nvPr/>
         </p:nvPicPr>
         <p:blipFill>
-          <a:blip r:embed="rId1"/>
+          <a:blip r:embed="rId2"/>
           <a:stretch>
             <a:fillRect/>
           </a:stretch>
@@ -3267,6 +2929,7 @@
         <a:solidFill>
           <a:srgbClr val="000000"/>
         </a:solidFill>
+        <a:effectLst/>
       </p:bgPr>
     </p:bg>
     <p:spTree>
@@ -3285,14 +2948,14 @@
       </p:grpSpPr>
       <p:pic>
         <p:nvPicPr>
-          <p:cNvPr id="2" name="Image 0" descr="preencoded.png">    </p:cNvPr>
+          <p:cNvPr id="2" name="Image 0" descr="preencoded.png"/>
           <p:cNvPicPr>
             <a:picLocks noChangeAspect="1"/>
           </p:cNvPicPr>
           <p:nvPr/>
         </p:nvPicPr>
         <p:blipFill>
-          <a:blip r:embed="rId1"/>
+          <a:blip r:embed="rId2"/>
           <a:stretch>
             <a:fillRect/>
           </a:stretch>
@@ -3323,6 +2986,7 @@
         <a:solidFill>
           <a:srgbClr val="000000"/>
         </a:solidFill>
+        <a:effectLst/>
       </p:bgPr>
     </p:bg>
     <p:spTree>
@@ -3341,14 +3005,14 @@
       </p:grpSpPr>
       <p:pic>
         <p:nvPicPr>
-          <p:cNvPr id="2" name="Image 0" descr="preencoded.png">    </p:cNvPr>
+          <p:cNvPr id="2" name="Image 0" descr="preencoded.png"/>
           <p:cNvPicPr>
             <a:picLocks noChangeAspect="1"/>
           </p:cNvPicPr>
           <p:nvPr/>
         </p:nvPicPr>
         <p:blipFill>
-          <a:blip r:embed="rId1"/>
+          <a:blip r:embed="rId2"/>
           <a:stretch>
             <a:fillRect/>
           </a:stretch>
@@ -3374,6 +3038,11 @@
 <file path=ppt/slideMasters/slideMaster1.xml><?xml version="1.0" encoding="utf-8"?>
 <p:sldMaster xmlns:a="http://schemas.openxmlformats.org/drawingml/2006/main" xmlns:r="http://schemas.openxmlformats.org/officeDocument/2006/relationships" xmlns:p="http://schemas.openxmlformats.org/presentationml/2006/main">
   <p:cSld>
+    <p:bg>
+      <p:bgRef idx="1001">
+        <a:schemeClr val="bg1"/>
+      </p:bgRef>
+    </p:bg>
     <p:spTree>
       <p:nvGrpSpPr>
         <p:cNvPr id="1" name=""/>
@@ -3408,7 +3077,7 @@
           </a:prstGeom>
           <a:extLst>
             <a:ext uri="{C572A759-6A51-4108-AA02-DFA0A04FC94B}">
-              <ma14:wrappingTextBoxFlag xmlns:ma14="http://schemas.microsoft.com/office/mac/drawingml/2011/main" val="0"/>
+              <ma14:wrappingTextBoxFlag xmlns:ma14="http://schemas.microsoft.com/office/mac/drawingml/2011/main" xmlns="" val="0"/>
             </a:ext>
           </a:extLst>
         </p:spPr>
@@ -3429,8 +3098,8 @@
           <a:p>
             <a:pPr algn="l"/>
             <a:fld id="{F7021451-1387-4CA6-816F-3879F97B5CBC}" type="slidenum">
-              <a:rPr b="0" lang="en-US"/>
-              <a:t>null</a:t>
+              <a:rPr lang="en-US" b="0"/>
+              <a:t>‹#›</a:t>
             </a:fld>
             <a:endParaRPr lang="en-US"/>
           </a:p>
@@ -3737,11 +3406,11 @@
           <a:bodyPr wrap="square" lIns="0" tIns="0" rIns="0" bIns="0" rtlCol="0" anchor="ctr"/>
           <a:lstStyle/>
           <a:p>
-            <a:pPr indent="0" marL="0">
-              <a:buNone/>
-            </a:pPr>
-            <a:r>
-              <a:rPr lang="en-US" sz="1200" b="1" spc="400" kern="0" dirty="0">
+            <a:pPr marL="0" indent="0">
+              <a:buNone/>
+            </a:pPr>
+            <a:r>
+              <a:rPr lang="en-US" sz="1200" b="1" kern="0" spc="400" dirty="0">
                 <a:solidFill>
                   <a:srgbClr val="FFFFFF"/>
                 </a:solidFill>
@@ -3776,11 +3445,11 @@
           <a:bodyPr wrap="square" lIns="0" tIns="0" rIns="0" bIns="0" rtlCol="0" anchor="ctr"/>
           <a:lstStyle/>
           <a:p>
-            <a:pPr indent="0" marL="0">
-              <a:buNone/>
-            </a:pPr>
-            <a:r>
-              <a:rPr lang="en-US" sz="1200" b="1" spc="300" kern="0" dirty="0">
+            <a:pPr marL="0" indent="0">
+              <a:buNone/>
+            </a:pPr>
+            <a:r>
+              <a:rPr lang="en-US" sz="1200" b="1" kern="0" spc="300" dirty="0">
                 <a:solidFill>
                   <a:srgbClr val="C4B3F5"/>
                 </a:solidFill>
@@ -3815,7 +3484,7 @@
           <a:bodyPr wrap="square" lIns="0" tIns="0" rIns="0" bIns="0" rtlCol="0" anchor="t"/>
           <a:lstStyle/>
           <a:p>
-            <a:pPr indent="0" marL="0">
+            <a:pPr marL="0" indent="0">
               <a:lnSpc>
                 <a:spcPct val="102000"/>
               </a:lnSpc>
@@ -3835,7 +3504,7 @@
             <a:endParaRPr lang="en-US" sz="3600" dirty="0"/>
           </a:p>
           <a:p>
-            <a:pPr indent="0" marL="0">
+            <a:pPr marL="0" indent="0">
               <a:lnSpc>
                 <a:spcPct val="102000"/>
               </a:lnSpc>
@@ -3877,7 +3546,7 @@
           <a:bodyPr wrap="square" lIns="0" tIns="0" rIns="0" bIns="0" rtlCol="0" anchor="ctr"/>
           <a:lstStyle/>
           <a:p>
-            <a:pPr indent="0" marL="0">
+            <a:pPr marL="0" indent="0">
               <a:lnSpc>
                 <a:spcPct val="120000"/>
               </a:lnSpc>
@@ -3945,7 +3614,7 @@
           <a:bodyPr wrap="square" lIns="0" tIns="0" rIns="0" bIns="0" rtlCol="0" anchor="ctr"/>
           <a:lstStyle/>
           <a:p>
-            <a:pPr algn="ctr" indent="0" marL="0">
+            <a:pPr marL="0" indent="0" algn="ctr">
               <a:buNone/>
             </a:pPr>
             <a:r>
@@ -4010,7 +3679,7 @@
           <a:bodyPr wrap="square" lIns="0" tIns="0" rIns="0" bIns="0" rtlCol="0" anchor="ctr"/>
           <a:lstStyle/>
           <a:p>
-            <a:pPr algn="ctr" indent="0" marL="0">
+            <a:pPr marL="0" indent="0" algn="ctr">
               <a:buNone/>
             </a:pPr>
             <a:r>
@@ -4075,7 +3744,7 @@
           <a:bodyPr wrap="square" lIns="0" tIns="0" rIns="0" bIns="0" rtlCol="0" anchor="ctr"/>
           <a:lstStyle/>
           <a:p>
-            <a:pPr algn="ctr" indent="0" marL="0">
+            <a:pPr marL="0" indent="0" algn="ctr">
               <a:buNone/>
             </a:pPr>
             <a:r>
@@ -4140,7 +3809,7 @@
           <a:bodyPr wrap="square" lIns="0" tIns="0" rIns="0" bIns="0" rtlCol="0" anchor="ctr"/>
           <a:lstStyle/>
           <a:p>
-            <a:pPr algn="ctr" indent="0" marL="0">
+            <a:pPr marL="0" indent="0" algn="ctr">
               <a:buNone/>
             </a:pPr>
             <a:r>
@@ -4201,7 +3870,7 @@
           <a:bodyPr wrap="square" lIns="0" tIns="0" rIns="0" bIns="0" rtlCol="0" anchor="ctr"/>
           <a:lstStyle/>
           <a:p>
-            <a:pPr algn="ctr" indent="0" marL="0">
+            <a:pPr marL="0" indent="0" algn="ctr">
               <a:buNone/>
             </a:pPr>
             <a:r>
@@ -4266,7 +3935,7 @@
           <a:bodyPr wrap="square" lIns="0" tIns="0" rIns="0" bIns="0" rtlCol="0" anchor="ctr"/>
           <a:lstStyle/>
           <a:p>
-            <a:pPr algn="ctr" indent="0" marL="0">
+            <a:pPr marL="0" indent="0" algn="ctr">
               <a:buNone/>
             </a:pPr>
             <a:r>
@@ -4352,7 +4021,7 @@
           <a:bodyPr wrap="square" lIns="0" tIns="0" rIns="0" bIns="0" rtlCol="0" anchor="ctr"/>
           <a:lstStyle/>
           <a:p>
-            <a:pPr algn="l" indent="0" marL="0">
+            <a:pPr marL="0" indent="0" algn="l">
               <a:buNone/>
             </a:pPr>
             <a:r>
@@ -4391,7 +4060,7 @@
           <a:bodyPr wrap="square" lIns="0" tIns="0" rIns="0" bIns="0" rtlCol="0" anchor="ctr"/>
           <a:lstStyle/>
           <a:p>
-            <a:pPr indent="0" marL="0">
+            <a:pPr marL="0" indent="0">
               <a:buNone/>
             </a:pPr>
             <a:r>
@@ -4457,11 +4126,11 @@
           <a:bodyPr wrap="square" lIns="0" tIns="0" rIns="0" bIns="0" rtlCol="0" anchor="ctr"/>
           <a:lstStyle/>
           <a:p>
-            <a:pPr algn="ctr" indent="0" marL="0">
-              <a:buNone/>
-            </a:pPr>
-            <a:r>
-              <a:rPr lang="en-US" sz="900" b="1" spc="100" kern="0" dirty="0">
+            <a:pPr marL="0" indent="0" algn="ctr">
+              <a:buNone/>
+            </a:pPr>
+            <a:r>
+              <a:rPr lang="en-US" sz="900" b="1" kern="0" spc="100" dirty="0">
                 <a:solidFill>
                   <a:srgbClr val="5A05F4"/>
                 </a:solidFill>
@@ -4477,14 +4146,14 @@
       </p:sp>
       <p:pic>
         <p:nvPicPr>
-          <p:cNvPr id="7" name="Image 0" descr="preencoded.png">    </p:cNvPr>
+          <p:cNvPr id="7" name="Image 0" descr="preencoded.png"/>
           <p:cNvPicPr>
             <a:picLocks noChangeAspect="1"/>
           </p:cNvPicPr>
           <p:nvPr/>
         </p:nvPicPr>
         <p:blipFill>
-          <a:blip r:embed="rId1"/>
+          <a:blip r:embed="rId3"/>
           <a:stretch>
             <a:fillRect/>
           </a:stretch>
@@ -4547,7 +4216,7 @@
           <a:bodyPr wrap="square" lIns="0" tIns="0" rIns="0" bIns="0" rtlCol="0" anchor="t"/>
           <a:lstStyle/>
           <a:p>
-            <a:pPr indent="0" marL="0">
+            <a:pPr marL="0" indent="0">
               <a:lnSpc>
                 <a:spcPct val="130000"/>
               </a:lnSpc>
@@ -4567,7 +4236,7 @@
             <a:endParaRPr lang="en-US" sz="1150" dirty="0"/>
           </a:p>
           <a:p>
-            <a:pPr indent="0" marL="0">
+            <a:pPr marL="0" indent="0">
               <a:lnSpc>
                 <a:spcPct val="130000"/>
               </a:lnSpc>
@@ -4587,7 +4256,7 @@
             <a:endParaRPr lang="en-US" sz="1150" dirty="0"/>
           </a:p>
           <a:p>
-            <a:pPr indent="0" marL="0">
+            <a:pPr marL="0" indent="0">
               <a:lnSpc>
                 <a:spcPct val="130000"/>
               </a:lnSpc>
@@ -4607,7 +4276,7 @@
             <a:endParaRPr lang="en-US" sz="1150" dirty="0"/>
           </a:p>
           <a:p>
-            <a:pPr indent="0" marL="0">
+            <a:pPr marL="0" indent="0">
               <a:lnSpc>
                 <a:spcPct val="130000"/>
               </a:lnSpc>
@@ -4671,7 +4340,7 @@
           <a:bodyPr wrap="square" lIns="0" tIns="0" rIns="0" bIns="0" rtlCol="0" anchor="ctr"/>
           <a:lstStyle/>
           <a:p>
-            <a:pPr indent="0" marL="0">
+            <a:pPr marL="0" indent="0">
               <a:buNone/>
             </a:pPr>
             <a:r>
@@ -4710,7 +4379,7 @@
           <a:bodyPr wrap="square" lIns="0" tIns="0" rIns="0" bIns="0" rtlCol="0" anchor="t"/>
           <a:lstStyle/>
           <a:p>
-            <a:pPr indent="0" marL="0">
+            <a:pPr marL="0" indent="0">
               <a:lnSpc>
                 <a:spcPct val="108000"/>
               </a:lnSpc>
@@ -4774,7 +4443,7 @@
           <a:bodyPr wrap="square" lIns="0" tIns="0" rIns="0" bIns="0" rtlCol="0" anchor="ctr"/>
           <a:lstStyle/>
           <a:p>
-            <a:pPr indent="0" marL="0">
+            <a:pPr marL="0" indent="0">
               <a:buNone/>
             </a:pPr>
             <a:r>
@@ -4813,7 +4482,7 @@
           <a:bodyPr wrap="square" lIns="0" tIns="0" rIns="0" bIns="0" rtlCol="0" anchor="t"/>
           <a:lstStyle/>
           <a:p>
-            <a:pPr indent="0" marL="0">
+            <a:pPr marL="0" indent="0">
               <a:lnSpc>
                 <a:spcPct val="108000"/>
               </a:lnSpc>
@@ -4855,7 +4524,7 @@
           <a:bodyPr wrap="square" lIns="0" tIns="0" rIns="0" bIns="0" rtlCol="0" anchor="ctr"/>
           <a:lstStyle/>
           <a:p>
-            <a:pPr indent="0" marL="0">
+            <a:pPr marL="0" indent="0">
               <a:buNone/>
             </a:pPr>
             <a:r>
@@ -4893,7 +4562,7 @@
           </a:prstGeom>
           <a:extLst>
             <a:ext uri="{C572A759-6A51-4108-AA02-DFA0A04FC94B}">
-              <ma14:wrappingTextBoxFlag xmlns:ma14="http://schemas.microsoft.com/office/mac/drawingml/2011/main" val="0"/>
+              <ma14:wrappingTextBoxFlag xmlns:ma14="http://schemas.microsoft.com/office/mac/drawingml/2011/main" xmlns="" val="0"/>
             </a:ext>
           </a:extLst>
         </p:spPr>
@@ -4914,7 +4583,7 @@
           <a:p>
             <a:pPr algn="l"/>
             <a:fld id="{F7021451-1387-4CA6-816F-3879F97B5CBC}" type="slidenum">
-              <a:rPr b="0" lang="en-US"/>
+              <a:rPr lang="en-US" b="0"/>
               <a:t>10</a:t>
             </a:fld>
             <a:endParaRPr lang="en-US"/>
@@ -4989,7 +4658,7 @@
           <a:bodyPr wrap="square" lIns="0" tIns="0" rIns="0" bIns="0" rtlCol="0" anchor="ctr"/>
           <a:lstStyle/>
           <a:p>
-            <a:pPr algn="l" indent="0" marL="0">
+            <a:pPr marL="0" indent="0" algn="l">
               <a:buNone/>
             </a:pPr>
             <a:r>
@@ -5028,7 +4697,7 @@
           <a:bodyPr wrap="square" lIns="0" tIns="0" rIns="0" bIns="0" rtlCol="0" anchor="ctr"/>
           <a:lstStyle/>
           <a:p>
-            <a:pPr indent="0" marL="0">
+            <a:pPr marL="0" indent="0">
               <a:buNone/>
             </a:pPr>
             <a:r>
@@ -5094,11 +4763,11 @@
           <a:bodyPr wrap="square" lIns="0" tIns="0" rIns="0" bIns="0" rtlCol="0" anchor="ctr"/>
           <a:lstStyle/>
           <a:p>
-            <a:pPr algn="ctr" indent="0" marL="0">
-              <a:buNone/>
-            </a:pPr>
-            <a:r>
-              <a:rPr lang="en-US" sz="900" b="1" spc="100" kern="0" dirty="0">
+            <a:pPr marL="0" indent="0" algn="ctr">
+              <a:buNone/>
+            </a:pPr>
+            <a:r>
+              <a:rPr lang="en-US" sz="900" b="1" kern="0" spc="100" dirty="0">
                 <a:solidFill>
                   <a:srgbClr val="5A05F4"/>
                 </a:solidFill>
@@ -5114,14 +4783,14 @@
       </p:sp>
       <p:pic>
         <p:nvPicPr>
-          <p:cNvPr id="7" name="Image 0" descr="preencoded.png">    </p:cNvPr>
+          <p:cNvPr id="7" name="Image 0" descr="preencoded.png"/>
           <p:cNvPicPr>
             <a:picLocks noChangeAspect="1"/>
           </p:cNvPicPr>
           <p:nvPr/>
         </p:nvPicPr>
         <p:blipFill>
-          <a:blip r:embed="rId1"/>
+          <a:blip r:embed="rId3"/>
           <a:stretch>
             <a:fillRect/>
           </a:stretch>
@@ -5152,16 +4821,34 @@
         </p:nvGraphicFramePr>
         <p:xfrm>
           <a:off x="566928" y="1737360"/>
-          <a:ext cx="11064240" cy="914400"/>
+          <a:ext cx="11064240" cy="3456432"/>
         </p:xfrm>
         <a:graphic>
           <a:graphicData uri="http://schemas.openxmlformats.org/drawingml/2006/table">
             <a:tbl>
               <a:tblPr/>
               <a:tblGrid>
-                <a:gridCol w="2743200"/>
-                <a:gridCol w="4937760"/>
-                <a:gridCol w="3383280"/>
+                <a:gridCol w="2743200">
+                  <a:extLst>
+                    <a:ext uri="{9D8B030D-6E8A-4147-A177-3AD203B41FA5}">
+                      <a16:colId xmlns:a16="http://schemas.microsoft.com/office/drawing/2014/main" val="20000"/>
+                    </a:ext>
+                  </a:extLst>
+                </a:gridCol>
+                <a:gridCol w="4937760">
+                  <a:extLst>
+                    <a:ext uri="{9D8B030D-6E8A-4147-A177-3AD203B41FA5}">
+                      <a16:colId xmlns:a16="http://schemas.microsoft.com/office/drawing/2014/main" val="20001"/>
+                    </a:ext>
+                  </a:extLst>
+                </a:gridCol>
+                <a:gridCol w="3383280">
+                  <a:extLst>
+                    <a:ext uri="{9D8B030D-6E8A-4147-A177-3AD203B41FA5}">
+                      <a16:colId xmlns:a16="http://schemas.microsoft.com/office/drawing/2014/main" val="20002"/>
+                    </a:ext>
+                  </a:extLst>
+                </a:gridCol>
               </a:tblGrid>
               <a:tr h="493776">
                 <a:tc>
@@ -5169,11 +4856,11 @@
                     <a:bodyPr/>
                     <a:lstStyle/>
                     <a:p>
-                      <a:pPr algn="ctr" indent="0" marL="0">
+                      <a:pPr marL="0" indent="0" algn="ctr">
                         <a:buNone/>
                       </a:pPr>
                       <a:r>
-                        <a:rPr lang="en-US" sz="900" b="1" spc="100" kern="0" dirty="0">
+                        <a:rPr lang="en-US" sz="900" b="1" kern="0" spc="100" dirty="0">
                           <a:solidFill>
                             <a:srgbClr val="FFFFFF"/>
                           </a:solidFill>
@@ -5237,11 +4924,11 @@
                     <a:bodyPr/>
                     <a:lstStyle/>
                     <a:p>
-                      <a:pPr algn="ctr" indent="0" marL="0">
+                      <a:pPr marL="0" indent="0" algn="ctr">
                         <a:buNone/>
                       </a:pPr>
                       <a:r>
-                        <a:rPr lang="en-US" sz="900" b="1" spc="100" kern="0" dirty="0">
+                        <a:rPr lang="en-US" sz="900" b="1" kern="0" spc="100" dirty="0">
                           <a:solidFill>
                             <a:srgbClr val="FFFFFF"/>
                           </a:solidFill>
@@ -5305,11 +4992,11 @@
                     <a:bodyPr/>
                     <a:lstStyle/>
                     <a:p>
-                      <a:pPr algn="ctr" indent="0" marL="0">
+                      <a:pPr marL="0" indent="0" algn="ctr">
                         <a:buNone/>
                       </a:pPr>
                       <a:r>
-                        <a:rPr lang="en-US" sz="900" b="1" spc="100" kern="0" dirty="0">
+                        <a:rPr lang="en-US" sz="900" b="1" kern="0" spc="100" dirty="0">
                           <a:solidFill>
                             <a:srgbClr val="FFFFFF"/>
                           </a:solidFill>
@@ -5368,6 +5055,11 @@
                     </a:solidFill>
                   </a:tcPr>
                 </a:tc>
+                <a:extLst>
+                  <a:ext uri="{0D108BD9-81ED-4DB2-BD59-A6C34878D82A}">
+                    <a16:rowId xmlns:a16="http://schemas.microsoft.com/office/drawing/2014/main" val="10000"/>
+                  </a:ext>
+                </a:extLst>
               </a:tr>
               <a:tr h="493776">
                 <a:tc>
@@ -5375,7 +5067,7 @@
                     <a:bodyPr/>
                     <a:lstStyle/>
                     <a:p>
-                      <a:pPr indent="0" marL="0">
+                      <a:pPr marL="0" indent="0">
                         <a:buNone/>
                       </a:pPr>
                       <a:r>
@@ -5443,7 +5135,7 @@
                     <a:bodyPr/>
                     <a:lstStyle/>
                     <a:p>
-                      <a:pPr indent="0" marL="0">
+                      <a:pPr marL="0" indent="0">
                         <a:buNone/>
                       </a:pPr>
                       <a:r>
@@ -5511,7 +5203,7 @@
                     <a:bodyPr/>
                     <a:lstStyle/>
                     <a:p>
-                      <a:pPr indent="0" marL="0">
+                      <a:pPr marL="0" indent="0">
                         <a:buNone/>
                       </a:pPr>
                       <a:r>
@@ -5574,6 +5266,11 @@
                     </a:solidFill>
                   </a:tcPr>
                 </a:tc>
+                <a:extLst>
+                  <a:ext uri="{0D108BD9-81ED-4DB2-BD59-A6C34878D82A}">
+                    <a16:rowId xmlns:a16="http://schemas.microsoft.com/office/drawing/2014/main" val="10001"/>
+                  </a:ext>
+                </a:extLst>
               </a:tr>
               <a:tr h="493776">
                 <a:tc>
@@ -5581,7 +5278,7 @@
                     <a:bodyPr/>
                     <a:lstStyle/>
                     <a:p>
-                      <a:pPr indent="0" marL="0">
+                      <a:pPr marL="0" indent="0">
                         <a:buNone/>
                       </a:pPr>
                       <a:r>
@@ -5649,7 +5346,7 @@
                     <a:bodyPr/>
                     <a:lstStyle/>
                     <a:p>
-                      <a:pPr indent="0" marL="0">
+                      <a:pPr marL="0" indent="0">
                         <a:buNone/>
                       </a:pPr>
                       <a:r>
@@ -5717,7 +5414,7 @@
                     <a:bodyPr/>
                     <a:lstStyle/>
                     <a:p>
-                      <a:pPr indent="0" marL="0">
+                      <a:pPr marL="0" indent="0">
                         <a:buNone/>
                       </a:pPr>
                       <a:r>
@@ -5780,6 +5477,11 @@
                     </a:solidFill>
                   </a:tcPr>
                 </a:tc>
+                <a:extLst>
+                  <a:ext uri="{0D108BD9-81ED-4DB2-BD59-A6C34878D82A}">
+                    <a16:rowId xmlns:a16="http://schemas.microsoft.com/office/drawing/2014/main" val="10002"/>
+                  </a:ext>
+                </a:extLst>
               </a:tr>
               <a:tr h="493776">
                 <a:tc>
@@ -5787,7 +5489,7 @@
                     <a:bodyPr/>
                     <a:lstStyle/>
                     <a:p>
-                      <a:pPr indent="0" marL="0">
+                      <a:pPr marL="0" indent="0">
                         <a:buNone/>
                       </a:pPr>
                       <a:r>
@@ -5855,7 +5557,7 @@
                     <a:bodyPr/>
                     <a:lstStyle/>
                     <a:p>
-                      <a:pPr indent="0" marL="0">
+                      <a:pPr marL="0" indent="0">
                         <a:buNone/>
                       </a:pPr>
                       <a:r>
@@ -5923,7 +5625,7 @@
                     <a:bodyPr/>
                     <a:lstStyle/>
                     <a:p>
-                      <a:pPr indent="0" marL="0">
+                      <a:pPr marL="0" indent="0">
                         <a:buNone/>
                       </a:pPr>
                       <a:r>
@@ -5986,6 +5688,11 @@
                     </a:solidFill>
                   </a:tcPr>
                 </a:tc>
+                <a:extLst>
+                  <a:ext uri="{0D108BD9-81ED-4DB2-BD59-A6C34878D82A}">
+                    <a16:rowId xmlns:a16="http://schemas.microsoft.com/office/drawing/2014/main" val="10003"/>
+                  </a:ext>
+                </a:extLst>
               </a:tr>
               <a:tr h="493776">
                 <a:tc>
@@ -5993,7 +5700,7 @@
                     <a:bodyPr/>
                     <a:lstStyle/>
                     <a:p>
-                      <a:pPr indent="0" marL="0">
+                      <a:pPr marL="0" indent="0">
                         <a:buNone/>
                       </a:pPr>
                       <a:r>
@@ -6061,7 +5768,7 @@
                     <a:bodyPr/>
                     <a:lstStyle/>
                     <a:p>
-                      <a:pPr indent="0" marL="0">
+                      <a:pPr marL="0" indent="0">
                         <a:buNone/>
                       </a:pPr>
                       <a:r>
@@ -6129,7 +5836,7 @@
                     <a:bodyPr/>
                     <a:lstStyle/>
                     <a:p>
-                      <a:pPr indent="0" marL="0">
+                      <a:pPr marL="0" indent="0">
                         <a:buNone/>
                       </a:pPr>
                       <a:r>
@@ -6192,6 +5899,11 @@
                     </a:solidFill>
                   </a:tcPr>
                 </a:tc>
+                <a:extLst>
+                  <a:ext uri="{0D108BD9-81ED-4DB2-BD59-A6C34878D82A}">
+                    <a16:rowId xmlns:a16="http://schemas.microsoft.com/office/drawing/2014/main" val="10004"/>
+                  </a:ext>
+                </a:extLst>
               </a:tr>
               <a:tr h="493776">
                 <a:tc>
@@ -6199,7 +5911,7 @@
                     <a:bodyPr/>
                     <a:lstStyle/>
                     <a:p>
-                      <a:pPr indent="0" marL="0">
+                      <a:pPr marL="0" indent="0">
                         <a:buNone/>
                       </a:pPr>
                       <a:r>
@@ -6267,7 +5979,7 @@
                     <a:bodyPr/>
                     <a:lstStyle/>
                     <a:p>
-                      <a:pPr indent="0" marL="0">
+                      <a:pPr marL="0" indent="0">
                         <a:buNone/>
                       </a:pPr>
                       <a:r>
@@ -6335,7 +6047,7 @@
                     <a:bodyPr/>
                     <a:lstStyle/>
                     <a:p>
-                      <a:pPr indent="0" marL="0">
+                      <a:pPr marL="0" indent="0">
                         <a:buNone/>
                       </a:pPr>
                       <a:r>
@@ -6398,6 +6110,11 @@
                     </a:solidFill>
                   </a:tcPr>
                 </a:tc>
+                <a:extLst>
+                  <a:ext uri="{0D108BD9-81ED-4DB2-BD59-A6C34878D82A}">
+                    <a16:rowId xmlns:a16="http://schemas.microsoft.com/office/drawing/2014/main" val="10005"/>
+                  </a:ext>
+                </a:extLst>
               </a:tr>
               <a:tr h="493776">
                 <a:tc>
@@ -6405,7 +6122,7 @@
                     <a:bodyPr/>
                     <a:lstStyle/>
                     <a:p>
-                      <a:pPr indent="0" marL="0">
+                      <a:pPr marL="0" indent="0">
                         <a:buNone/>
                       </a:pPr>
                       <a:r>
@@ -6473,7 +6190,7 @@
                     <a:bodyPr/>
                     <a:lstStyle/>
                     <a:p>
-                      <a:pPr indent="0" marL="0">
+                      <a:pPr marL="0" indent="0">
                         <a:buNone/>
                       </a:pPr>
                       <a:r>
@@ -6541,7 +6258,7 @@
                     <a:bodyPr/>
                     <a:lstStyle/>
                     <a:p>
-                      <a:pPr indent="0" marL="0">
+                      <a:pPr marL="0" indent="0">
                         <a:buNone/>
                       </a:pPr>
                       <a:r>
@@ -6604,6 +6321,11 @@
                     </a:solidFill>
                   </a:tcPr>
                 </a:tc>
+                <a:extLst>
+                  <a:ext uri="{0D108BD9-81ED-4DB2-BD59-A6C34878D82A}">
+                    <a16:rowId xmlns:a16="http://schemas.microsoft.com/office/drawing/2014/main" val="10006"/>
+                  </a:ext>
+                </a:extLst>
               </a:tr>
             </a:tbl>
           </a:graphicData>
@@ -6657,11 +6379,11 @@
           <a:bodyPr wrap="square" lIns="0" tIns="0" rIns="0" bIns="0" rtlCol="0" anchor="ctr"/>
           <a:lstStyle/>
           <a:p>
-            <a:pPr indent="0" marL="0">
-              <a:buNone/>
-            </a:pPr>
-            <a:r>
-              <a:rPr lang="en-US" sz="950" b="1" spc="150" kern="0" dirty="0">
+            <a:pPr marL="0" indent="0">
+              <a:buNone/>
+            </a:pPr>
+            <a:r>
+              <a:rPr lang="en-US" sz="950" b="1" kern="0" spc="150" dirty="0">
                 <a:solidFill>
                   <a:srgbClr val="106B41"/>
                 </a:solidFill>
@@ -6696,7 +6418,7 @@
           <a:bodyPr wrap="square" lIns="0" tIns="0" rIns="0" bIns="0" rtlCol="0" anchor="ctr"/>
           <a:lstStyle/>
           <a:p>
-            <a:pPr indent="0" marL="0">
+            <a:pPr marL="0" indent="0">
               <a:lnSpc>
                 <a:spcPct val="112000"/>
               </a:lnSpc>
@@ -6737,7 +6459,7 @@
           </a:prstGeom>
           <a:extLst>
             <a:ext uri="{C572A759-6A51-4108-AA02-DFA0A04FC94B}">
-              <ma14:wrappingTextBoxFlag xmlns:ma14="http://schemas.microsoft.com/office/mac/drawingml/2011/main" val="0"/>
+              <ma14:wrappingTextBoxFlag xmlns:ma14="http://schemas.microsoft.com/office/mac/drawingml/2011/main" xmlns="" val="0"/>
             </a:ext>
           </a:extLst>
         </p:spPr>
@@ -6758,7 +6480,7 @@
           <a:p>
             <a:pPr algn="l"/>
             <a:fld id="{F7021451-1387-4CA6-816F-3879F97B5CBC}" type="slidenum">
-              <a:rPr b="0" lang="en-US"/>
+              <a:rPr lang="en-US" b="0"/>
               <a:t>11</a:t>
             </a:fld>
             <a:endParaRPr lang="en-US"/>
@@ -6833,7 +6555,7 @@
           <a:bodyPr wrap="square" lIns="0" tIns="0" rIns="0" bIns="0" rtlCol="0" anchor="ctr"/>
           <a:lstStyle/>
           <a:p>
-            <a:pPr algn="l" indent="0" marL="0">
+            <a:pPr marL="0" indent="0" algn="l">
               <a:buNone/>
             </a:pPr>
             <a:r>
@@ -6872,7 +6594,7 @@
           <a:bodyPr wrap="square" lIns="0" tIns="0" rIns="0" bIns="0" rtlCol="0" anchor="ctr"/>
           <a:lstStyle/>
           <a:p>
-            <a:pPr indent="0" marL="0">
+            <a:pPr marL="0" indent="0">
               <a:buNone/>
             </a:pPr>
             <a:r>
@@ -6938,11 +6660,11 @@
           <a:bodyPr wrap="square" lIns="0" tIns="0" rIns="0" bIns="0" rtlCol="0" anchor="ctr"/>
           <a:lstStyle/>
           <a:p>
-            <a:pPr algn="ctr" indent="0" marL="0">
-              <a:buNone/>
-            </a:pPr>
-            <a:r>
-              <a:rPr lang="en-US" sz="900" b="1" spc="100" kern="0" dirty="0">
+            <a:pPr marL="0" indent="0" algn="ctr">
+              <a:buNone/>
+            </a:pPr>
+            <a:r>
+              <a:rPr lang="en-US" sz="900" b="1" kern="0" spc="100" dirty="0">
                 <a:solidFill>
                   <a:srgbClr val="5A05F4"/>
                 </a:solidFill>
@@ -6958,14 +6680,14 @@
       </p:sp>
       <p:pic>
         <p:nvPicPr>
-          <p:cNvPr id="7" name="Image 0" descr="preencoded.png">    </p:cNvPr>
+          <p:cNvPr id="7" name="Image 0" descr="preencoded.png"/>
           <p:cNvPicPr>
             <a:picLocks noChangeAspect="1"/>
           </p:cNvPicPr>
           <p:nvPr/>
         </p:nvPicPr>
         <p:blipFill>
-          <a:blip r:embed="rId1"/>
+          <a:blip r:embed="rId3"/>
           <a:stretch>
             <a:fillRect/>
           </a:stretch>
@@ -7021,7 +6743,7 @@
           <a:bodyPr wrap="square" lIns="0" tIns="0" rIns="0" bIns="0" rtlCol="0" anchor="ctr"/>
           <a:lstStyle/>
           <a:p>
-            <a:pPr algn="ctr" indent="0" marL="0">
+            <a:pPr marL="0" indent="0" algn="ctr">
               <a:buNone/>
             </a:pPr>
             <a:r>
@@ -7060,7 +6782,7 @@
           <a:bodyPr wrap="square" lIns="0" tIns="0" rIns="0" bIns="0" rtlCol="0" anchor="ctr"/>
           <a:lstStyle/>
           <a:p>
-            <a:pPr algn="ctr" indent="0" marL="0">
+            <a:pPr marL="0" indent="0" algn="ctr">
               <a:buNone/>
             </a:pPr>
             <a:r>
@@ -7142,7 +6864,7 @@
           <a:bodyPr wrap="square" lIns="0" tIns="0" rIns="0" bIns="0" rtlCol="0" anchor="ctr"/>
           <a:lstStyle/>
           <a:p>
-            <a:pPr algn="ctr" indent="0" marL="0">
+            <a:pPr marL="0" indent="0" algn="ctr">
               <a:buNone/>
             </a:pPr>
             <a:r>
@@ -7201,7 +6923,7 @@
           <a:bodyPr wrap="square" lIns="0" tIns="0" rIns="0" bIns="0" rtlCol="0" anchor="ctr"/>
           <a:lstStyle/>
           <a:p>
-            <a:pPr algn="ctr" indent="0" marL="0">
+            <a:pPr marL="0" indent="0" algn="ctr">
               <a:buNone/>
             </a:pPr>
             <a:r>
@@ -7240,7 +6962,7 @@
           <a:bodyPr wrap="square" lIns="0" tIns="0" rIns="0" bIns="0" rtlCol="0" anchor="ctr"/>
           <a:lstStyle/>
           <a:p>
-            <a:pPr algn="ctr" indent="0" marL="0">
+            <a:pPr marL="0" indent="0" algn="ctr">
               <a:buNone/>
             </a:pPr>
             <a:r>
@@ -7301,7 +7023,7 @@
           <a:bodyPr wrap="square" lIns="0" tIns="0" rIns="0" bIns="0" rtlCol="0" anchor="ctr"/>
           <a:lstStyle/>
           <a:p>
-            <a:pPr indent="0" marL="0">
+            <a:pPr marL="0" indent="0">
               <a:buNone/>
             </a:pPr>
             <a:r>
@@ -7340,7 +7062,7 @@
           <a:bodyPr wrap="square" lIns="0" tIns="0" rIns="0" bIns="0" rtlCol="0" anchor="t"/>
           <a:lstStyle/>
           <a:p>
-            <a:pPr indent="0" marL="0">
+            <a:pPr marL="0" indent="0">
               <a:lnSpc>
                 <a:spcPct val="108000"/>
               </a:lnSpc>
@@ -7409,11 +7131,11 @@
           <a:bodyPr wrap="square" lIns="0" tIns="0" rIns="0" bIns="0" rtlCol="0" anchor="ctr"/>
           <a:lstStyle/>
           <a:p>
-            <a:pPr indent="0" marL="0">
-              <a:buNone/>
-            </a:pPr>
-            <a:r>
-              <a:rPr lang="en-US" sz="950" b="1" spc="150" kern="0" dirty="0">
+            <a:pPr marL="0" indent="0">
+              <a:buNone/>
+            </a:pPr>
+            <a:r>
+              <a:rPr lang="en-US" sz="950" b="1" kern="0" spc="150" dirty="0">
                 <a:solidFill>
                   <a:srgbClr val="B3261E"/>
                 </a:solidFill>
@@ -7448,7 +7170,7 @@
           <a:bodyPr wrap="square" lIns="0" tIns="0" rIns="0" bIns="0" rtlCol="0" anchor="ctr"/>
           <a:lstStyle/>
           <a:p>
-            <a:pPr indent="0" marL="0">
+            <a:pPr marL="0" indent="0">
               <a:lnSpc>
                 <a:spcPct val="112000"/>
               </a:lnSpc>
@@ -7517,7 +7239,7 @@
           <a:bodyPr wrap="square" lIns="0" tIns="0" rIns="0" bIns="0" rtlCol="0" anchor="ctr"/>
           <a:lstStyle/>
           <a:p>
-            <a:pPr indent="0" marL="0">
+            <a:pPr marL="0" indent="0">
               <a:lnSpc>
                 <a:spcPct val="112000"/>
               </a:lnSpc>
@@ -7558,7 +7280,7 @@
           </a:prstGeom>
           <a:extLst>
             <a:ext uri="{C572A759-6A51-4108-AA02-DFA0A04FC94B}">
-              <ma14:wrappingTextBoxFlag xmlns:ma14="http://schemas.microsoft.com/office/mac/drawingml/2011/main" val="0"/>
+              <ma14:wrappingTextBoxFlag xmlns:ma14="http://schemas.microsoft.com/office/mac/drawingml/2011/main" xmlns="" val="0"/>
             </a:ext>
           </a:extLst>
         </p:spPr>
@@ -7579,7 +7301,7 @@
           <a:p>
             <a:pPr algn="l"/>
             <a:fld id="{F7021451-1387-4CA6-816F-3879F97B5CBC}" type="slidenum">
-              <a:rPr b="0" lang="en-US"/>
+              <a:rPr lang="en-US" b="0"/>
               <a:t>12</a:t>
             </a:fld>
             <a:endParaRPr lang="en-US"/>
@@ -7654,7 +7376,7 @@
           <a:bodyPr wrap="square" lIns="0" tIns="0" rIns="0" bIns="0" rtlCol="0" anchor="ctr"/>
           <a:lstStyle/>
           <a:p>
-            <a:pPr algn="l" indent="0" marL="0">
+            <a:pPr marL="0" indent="0" algn="l">
               <a:buNone/>
             </a:pPr>
             <a:r>
@@ -7693,7 +7415,7 @@
           <a:bodyPr wrap="square" lIns="0" tIns="0" rIns="0" bIns="0" rtlCol="0" anchor="ctr"/>
           <a:lstStyle/>
           <a:p>
-            <a:pPr indent="0" marL="0">
+            <a:pPr marL="0" indent="0">
               <a:buNone/>
             </a:pPr>
             <a:r>
@@ -7759,11 +7481,11 @@
           <a:bodyPr wrap="square" lIns="0" tIns="0" rIns="0" bIns="0" rtlCol="0" anchor="ctr"/>
           <a:lstStyle/>
           <a:p>
-            <a:pPr algn="ctr" indent="0" marL="0">
-              <a:buNone/>
-            </a:pPr>
-            <a:r>
-              <a:rPr lang="en-US" sz="900" b="1" spc="100" kern="0" dirty="0">
+            <a:pPr marL="0" indent="0" algn="ctr">
+              <a:buNone/>
+            </a:pPr>
+            <a:r>
+              <a:rPr lang="en-US" sz="900" b="1" kern="0" spc="100" dirty="0">
                 <a:solidFill>
                   <a:srgbClr val="5A05F4"/>
                 </a:solidFill>
@@ -7779,14 +7501,14 @@
       </p:sp>
       <p:pic>
         <p:nvPicPr>
-          <p:cNvPr id="7" name="Image 0" descr="preencoded.png">    </p:cNvPr>
+          <p:cNvPr id="7" name="Image 0" descr="preencoded.png"/>
           <p:cNvPicPr>
             <a:picLocks noChangeAspect="1"/>
           </p:cNvPicPr>
           <p:nvPr/>
         </p:nvPicPr>
         <p:blipFill>
-          <a:blip r:embed="rId1"/>
+          <a:blip r:embed="rId3"/>
           <a:stretch>
             <a:fillRect/>
           </a:stretch>
@@ -7864,7 +7586,7 @@
           <a:bodyPr wrap="square" lIns="0" tIns="0" rIns="0" bIns="0" rtlCol="0" anchor="ctr"/>
           <a:lstStyle/>
           <a:p>
-            <a:pPr algn="ctr" indent="0" marL="0">
+            <a:pPr marL="0" indent="0" algn="ctr">
               <a:buNone/>
             </a:pPr>
             <a:r>
@@ -7903,7 +7625,7 @@
           <a:bodyPr wrap="square" lIns="0" tIns="0" rIns="0" bIns="0" rtlCol="0" anchor="ctr"/>
           <a:lstStyle/>
           <a:p>
-            <a:pPr indent="0" marL="0">
+            <a:pPr marL="0" indent="0">
               <a:buNone/>
             </a:pPr>
             <a:r>
@@ -7942,7 +7664,7 @@
           <a:bodyPr wrap="square" lIns="0" tIns="0" rIns="0" bIns="0" rtlCol="0" anchor="t"/>
           <a:lstStyle/>
           <a:p>
-            <a:pPr indent="0" marL="0">
+            <a:pPr marL="0" indent="0">
               <a:lnSpc>
                 <a:spcPct val="108000"/>
               </a:lnSpc>
@@ -8026,7 +7748,7 @@
           <a:bodyPr wrap="square" lIns="0" tIns="0" rIns="0" bIns="0" rtlCol="0" anchor="ctr"/>
           <a:lstStyle/>
           <a:p>
-            <a:pPr algn="ctr" indent="0" marL="0">
+            <a:pPr marL="0" indent="0" algn="ctr">
               <a:buNone/>
             </a:pPr>
             <a:r>
@@ -8065,7 +7787,7 @@
           <a:bodyPr wrap="square" lIns="0" tIns="0" rIns="0" bIns="0" rtlCol="0" anchor="ctr"/>
           <a:lstStyle/>
           <a:p>
-            <a:pPr indent="0" marL="0">
+            <a:pPr marL="0" indent="0">
               <a:buNone/>
             </a:pPr>
             <a:r>
@@ -8104,7 +7826,7 @@
           <a:bodyPr wrap="square" lIns="0" tIns="0" rIns="0" bIns="0" rtlCol="0" anchor="t"/>
           <a:lstStyle/>
           <a:p>
-            <a:pPr indent="0" marL="0">
+            <a:pPr marL="0" indent="0">
               <a:lnSpc>
                 <a:spcPct val="108000"/>
               </a:lnSpc>
@@ -8188,7 +7910,7 @@
           <a:bodyPr wrap="square" lIns="0" tIns="0" rIns="0" bIns="0" rtlCol="0" anchor="ctr"/>
           <a:lstStyle/>
           <a:p>
-            <a:pPr algn="ctr" indent="0" marL="0">
+            <a:pPr marL="0" indent="0" algn="ctr">
               <a:buNone/>
             </a:pPr>
             <a:r>
@@ -8227,7 +7949,7 @@
           <a:bodyPr wrap="square" lIns="0" tIns="0" rIns="0" bIns="0" rtlCol="0" anchor="ctr"/>
           <a:lstStyle/>
           <a:p>
-            <a:pPr indent="0" marL="0">
+            <a:pPr marL="0" indent="0">
               <a:buNone/>
             </a:pPr>
             <a:r>
@@ -8266,7 +7988,7 @@
           <a:bodyPr wrap="square" lIns="0" tIns="0" rIns="0" bIns="0" rtlCol="0" anchor="t"/>
           <a:lstStyle/>
           <a:p>
-            <a:pPr indent="0" marL="0">
+            <a:pPr marL="0" indent="0">
               <a:lnSpc>
                 <a:spcPct val="108000"/>
               </a:lnSpc>
@@ -8857,11 +8579,11 @@
           <a:bodyPr wrap="square" lIns="0" tIns="0" rIns="0" bIns="0" rtlCol="0" anchor="ctr"/>
           <a:lstStyle/>
           <a:p>
-            <a:pPr indent="0" marL="0">
-              <a:buNone/>
-            </a:pPr>
-            <a:r>
-              <a:rPr lang="en-US" sz="850" spc="100" kern="0" dirty="0">
+            <a:pPr marL="0" indent="0">
+              <a:buNone/>
+            </a:pPr>
+            <a:r>
+              <a:rPr lang="en-US" sz="850" kern="0" spc="100" dirty="0">
                 <a:solidFill>
                   <a:srgbClr val="6B6B6B"/>
                 </a:solidFill>
@@ -8918,11 +8640,11 @@
           <a:bodyPr wrap="square" lIns="0" tIns="0" rIns="0" bIns="0" rtlCol="0" anchor="ctr"/>
           <a:lstStyle/>
           <a:p>
-            <a:pPr indent="0" marL="0">
-              <a:buNone/>
-            </a:pPr>
-            <a:r>
-              <a:rPr lang="en-US" sz="950" b="1" spc="150" kern="0" dirty="0">
+            <a:pPr marL="0" indent="0">
+              <a:buNone/>
+            </a:pPr>
+            <a:r>
+              <a:rPr lang="en-US" sz="950" b="1" kern="0" spc="150" dirty="0">
                 <a:solidFill>
                   <a:srgbClr val="FFFFFF"/>
                 </a:solidFill>
@@ -8957,7 +8679,7 @@
           <a:bodyPr wrap="square" lIns="0" tIns="0" rIns="0" bIns="0" rtlCol="0" anchor="ctr"/>
           <a:lstStyle/>
           <a:p>
-            <a:pPr indent="0" marL="0">
+            <a:pPr marL="0" indent="0">
               <a:lnSpc>
                 <a:spcPct val="112000"/>
               </a:lnSpc>
@@ -9026,7 +8748,7 @@
           <a:bodyPr wrap="square" lIns="0" tIns="0" rIns="0" bIns="0" rtlCol="0" anchor="ctr"/>
           <a:lstStyle/>
           <a:p>
-            <a:pPr indent="0" marL="0">
+            <a:pPr marL="0" indent="0">
               <a:lnSpc>
                 <a:spcPct val="112000"/>
               </a:lnSpc>
@@ -9049,7 +8771,7 @@
       </p:sp>
       <p:sp>
         <p:nvSpPr>
-          <p:cNvPr id="25" name="Slide Number Placeholder 0"/>
+          <p:cNvPr id="56" name="Slide Number Placeholder 0"/>
           <p:cNvSpPr>
             <a:spLocks noGrp="1"/>
           </p:cNvSpPr>
@@ -9067,7 +8789,7 @@
           </a:prstGeom>
           <a:extLst>
             <a:ext uri="{C572A759-6A51-4108-AA02-DFA0A04FC94B}">
-              <ma14:wrappingTextBoxFlag xmlns:ma14="http://schemas.microsoft.com/office/mac/drawingml/2011/main" val="0"/>
+              <ma14:wrappingTextBoxFlag xmlns:ma14="http://schemas.microsoft.com/office/mac/drawingml/2011/main" xmlns="" val="0"/>
             </a:ext>
           </a:extLst>
         </p:spPr>
@@ -9088,7 +8810,7 @@
           <a:p>
             <a:pPr algn="l"/>
             <a:fld id="{F7021451-1387-4CA6-816F-3879F97B5CBC}" type="slidenum">
-              <a:rPr b="0" lang="en-US"/>
+              <a:rPr lang="en-US" b="0"/>
               <a:t>13</a:t>
             </a:fld>
             <a:endParaRPr lang="en-US"/>
@@ -9163,7 +8885,7 @@
           <a:bodyPr wrap="square" lIns="0" tIns="0" rIns="0" bIns="0" rtlCol="0" anchor="ctr"/>
           <a:lstStyle/>
           <a:p>
-            <a:pPr algn="l" indent="0" marL="0">
+            <a:pPr marL="0" indent="0" algn="l">
               <a:buNone/>
             </a:pPr>
             <a:r>
@@ -9202,7 +8924,7 @@
           <a:bodyPr wrap="square" lIns="0" tIns="0" rIns="0" bIns="0" rtlCol="0" anchor="ctr"/>
           <a:lstStyle/>
           <a:p>
-            <a:pPr indent="0" marL="0">
+            <a:pPr marL="0" indent="0">
               <a:buNone/>
             </a:pPr>
             <a:r>
@@ -9268,11 +8990,11 @@
           <a:bodyPr wrap="square" lIns="0" tIns="0" rIns="0" bIns="0" rtlCol="0" anchor="ctr"/>
           <a:lstStyle/>
           <a:p>
-            <a:pPr algn="ctr" indent="0" marL="0">
-              <a:buNone/>
-            </a:pPr>
-            <a:r>
-              <a:rPr lang="en-US" sz="900" b="1" spc="100" kern="0" dirty="0">
+            <a:pPr marL="0" indent="0" algn="ctr">
+              <a:buNone/>
+            </a:pPr>
+            <a:r>
+              <a:rPr lang="en-US" sz="900" b="1" kern="0" spc="100" dirty="0">
                 <a:solidFill>
                   <a:srgbClr val="5A05F4"/>
                 </a:solidFill>
@@ -9288,14 +9010,14 @@
       </p:sp>
       <p:pic>
         <p:nvPicPr>
-          <p:cNvPr id="7" name="Image 0" descr="preencoded.png">    </p:cNvPr>
+          <p:cNvPr id="7" name="Image 0" descr="preencoded.png"/>
           <p:cNvPicPr>
             <a:picLocks noChangeAspect="1"/>
           </p:cNvPicPr>
           <p:nvPr/>
         </p:nvPicPr>
         <p:blipFill>
-          <a:blip r:embed="rId1"/>
+          <a:blip r:embed="rId3"/>
           <a:stretch>
             <a:fillRect/>
           </a:stretch>
@@ -9353,7 +9075,7 @@
           <a:bodyPr wrap="square" lIns="0" tIns="0" rIns="0" bIns="0" rtlCol="0" anchor="ctr"/>
           <a:lstStyle/>
           <a:p>
-            <a:pPr indent="0" marL="0">
+            <a:pPr marL="0" indent="0">
               <a:buNone/>
             </a:pPr>
             <a:r>
@@ -9392,7 +9114,7 @@
           <a:bodyPr wrap="square" lIns="0" tIns="0" rIns="0" bIns="0" rtlCol="0" anchor="ctr"/>
           <a:lstStyle/>
           <a:p>
-            <a:pPr indent="0" marL="0">
+            <a:pPr marL="0" indent="0">
               <a:buNone/>
             </a:pPr>
             <a:r>
@@ -9453,7 +9175,7 @@
           <a:bodyPr wrap="square" lIns="0" tIns="0" rIns="0" bIns="0" rtlCol="0" anchor="ctr"/>
           <a:lstStyle/>
           <a:p>
-            <a:pPr indent="0" marL="0">
+            <a:pPr marL="0" indent="0">
               <a:buNone/>
             </a:pPr>
             <a:r>
@@ -9492,7 +9214,7 @@
           <a:bodyPr wrap="square" lIns="0" tIns="0" rIns="0" bIns="0" rtlCol="0" anchor="ctr"/>
           <a:lstStyle/>
           <a:p>
-            <a:pPr indent="0" marL="0">
+            <a:pPr marL="0" indent="0">
               <a:buNone/>
             </a:pPr>
             <a:r>
@@ -9553,7 +9275,7 @@
           <a:bodyPr wrap="square" lIns="0" tIns="0" rIns="0" bIns="0" rtlCol="0" anchor="ctr"/>
           <a:lstStyle/>
           <a:p>
-            <a:pPr indent="0" marL="0">
+            <a:pPr marL="0" indent="0">
               <a:buNone/>
             </a:pPr>
             <a:r>
@@ -9592,7 +9314,7 @@
           <a:bodyPr wrap="square" lIns="0" tIns="0" rIns="0" bIns="0" rtlCol="0" anchor="ctr"/>
           <a:lstStyle/>
           <a:p>
-            <a:pPr indent="0" marL="0">
+            <a:pPr marL="0" indent="0">
               <a:buNone/>
             </a:pPr>
             <a:r>
@@ -11631,7 +11353,7 @@
           <a:bodyPr wrap="square" lIns="0" tIns="0" rIns="0" bIns="0" rtlCol="0" anchor="ctr"/>
           <a:lstStyle/>
           <a:p>
-            <a:pPr indent="0" marL="0">
+            <a:pPr marL="0" indent="0">
               <a:buNone/>
             </a:pPr>
             <a:r>
@@ -11645,9 +11367,6 @@
               </a:rPr>
               <a:t>100 звернень</a:t>
             </a:r>
-            <a:pPr indent="0" marL="0">
-              <a:buNone/>
-            </a:pPr>
             <a:r>
               <a:rPr lang="en-US" sz="1250" dirty="0">
                 <a:solidFill>
@@ -11684,7 +11403,7 @@
           <a:bodyPr wrap="square" lIns="0" tIns="0" rIns="0" bIns="0" rtlCol="0" anchor="ctr"/>
           <a:lstStyle/>
           <a:p>
-            <a:pPr indent="0" marL="0">
+            <a:pPr marL="0" indent="0">
               <a:buNone/>
             </a:pPr>
             <a:r>
@@ -11750,11 +11469,11 @@
           <a:bodyPr wrap="square" lIns="0" tIns="0" rIns="0" bIns="0" rtlCol="0" anchor="ctr"/>
           <a:lstStyle/>
           <a:p>
-            <a:pPr indent="0" marL="0">
-              <a:buNone/>
-            </a:pPr>
-            <a:r>
-              <a:rPr lang="en-US" sz="950" b="1" spc="150" kern="0" dirty="0">
+            <a:pPr marL="0" indent="0">
+              <a:buNone/>
+            </a:pPr>
+            <a:r>
+              <a:rPr lang="en-US" sz="950" b="1" kern="0" spc="150" dirty="0">
                 <a:solidFill>
                   <a:srgbClr val="106B41"/>
                 </a:solidFill>
@@ -11789,7 +11508,7 @@
           <a:bodyPr wrap="square" lIns="0" tIns="0" rIns="0" bIns="0" rtlCol="0" anchor="ctr"/>
           <a:lstStyle/>
           <a:p>
-            <a:pPr indent="0" marL="0">
+            <a:pPr marL="0" indent="0">
               <a:lnSpc>
                 <a:spcPct val="112000"/>
               </a:lnSpc>
@@ -11858,7 +11577,7 @@
           <a:bodyPr wrap="square" lIns="0" tIns="0" rIns="0" bIns="0" rtlCol="0" anchor="ctr"/>
           <a:lstStyle/>
           <a:p>
-            <a:pPr indent="0" marL="0">
+            <a:pPr marL="0" indent="0">
               <a:lnSpc>
                 <a:spcPct val="112000"/>
               </a:lnSpc>
@@ -11881,7 +11600,7 @@
       </p:sp>
       <p:sp>
         <p:nvSpPr>
-          <p:cNvPr id="25" name="Slide Number Placeholder 0"/>
+          <p:cNvPr id="124" name="Slide Number Placeholder 0"/>
           <p:cNvSpPr>
             <a:spLocks noGrp="1"/>
           </p:cNvSpPr>
@@ -11899,7 +11618,7 @@
           </a:prstGeom>
           <a:extLst>
             <a:ext uri="{C572A759-6A51-4108-AA02-DFA0A04FC94B}">
-              <ma14:wrappingTextBoxFlag xmlns:ma14="http://schemas.microsoft.com/office/mac/drawingml/2011/main" val="0"/>
+              <ma14:wrappingTextBoxFlag xmlns:ma14="http://schemas.microsoft.com/office/mac/drawingml/2011/main" xmlns="" val="0"/>
             </a:ext>
           </a:extLst>
         </p:spPr>
@@ -11920,7 +11639,7 @@
           <a:p>
             <a:pPr algn="l"/>
             <a:fld id="{F7021451-1387-4CA6-816F-3879F97B5CBC}" type="slidenum">
-              <a:rPr b="0" lang="en-US"/>
+              <a:rPr lang="en-US" b="0"/>
               <a:t>14</a:t>
             </a:fld>
             <a:endParaRPr lang="en-US"/>
@@ -11995,7 +11714,7 @@
           <a:bodyPr wrap="square" lIns="0" tIns="0" rIns="0" bIns="0" rtlCol="0" anchor="ctr"/>
           <a:lstStyle/>
           <a:p>
-            <a:pPr algn="l" indent="0" marL="0">
+            <a:pPr marL="0" indent="0" algn="l">
               <a:buNone/>
             </a:pPr>
             <a:r>
@@ -12034,7 +11753,7 @@
           <a:bodyPr wrap="square" lIns="0" tIns="0" rIns="0" bIns="0" rtlCol="0" anchor="ctr"/>
           <a:lstStyle/>
           <a:p>
-            <a:pPr indent="0" marL="0">
+            <a:pPr marL="0" indent="0">
               <a:buNone/>
             </a:pPr>
             <a:r>
@@ -12100,11 +11819,11 @@
           <a:bodyPr wrap="square" lIns="0" tIns="0" rIns="0" bIns="0" rtlCol="0" anchor="ctr"/>
           <a:lstStyle/>
           <a:p>
-            <a:pPr algn="ctr" indent="0" marL="0">
-              <a:buNone/>
-            </a:pPr>
-            <a:r>
-              <a:rPr lang="en-US" sz="900" b="1" spc="100" kern="0" dirty="0">
+            <a:pPr marL="0" indent="0" algn="ctr">
+              <a:buNone/>
+            </a:pPr>
+            <a:r>
+              <a:rPr lang="en-US" sz="900" b="1" kern="0" spc="100" dirty="0">
                 <a:solidFill>
                   <a:srgbClr val="5A05F4"/>
                 </a:solidFill>
@@ -12120,14 +11839,14 @@
       </p:sp>
       <p:pic>
         <p:nvPicPr>
-          <p:cNvPr id="7" name="Image 0" descr="preencoded.png">    </p:cNvPr>
+          <p:cNvPr id="7" name="Image 0" descr="preencoded.png"/>
           <p:cNvPicPr>
             <a:picLocks noChangeAspect="1"/>
           </p:cNvPicPr>
           <p:nvPr/>
         </p:nvPicPr>
         <p:blipFill>
-          <a:blip r:embed="rId1"/>
+          <a:blip r:embed="rId3"/>
           <a:stretch>
             <a:fillRect/>
           </a:stretch>
@@ -12150,7 +11869,7 @@
         </p:nvSpPr>
         <p:spPr>
           <a:xfrm>
-            <a:off x="566928" y="1783080"/>
+            <a:off x="632460" y="1783080"/>
             <a:ext cx="3520440" cy="1783080"/>
           </a:xfrm>
           <a:prstGeom prst="roundRect">
@@ -12205,7 +11924,7 @@
           <a:bodyPr wrap="square" lIns="0" tIns="0" rIns="0" bIns="0" rtlCol="0" anchor="ctr"/>
           <a:lstStyle/>
           <a:p>
-            <a:pPr algn="ctr" indent="0" marL="0">
+            <a:pPr marL="0" indent="0" algn="ctr">
               <a:buNone/>
             </a:pPr>
             <a:r>
@@ -12231,7 +11950,7 @@
         </p:nvSpPr>
         <p:spPr>
           <a:xfrm>
-            <a:off x="1280160" y="1938528"/>
+            <a:off x="1345692" y="1938528"/>
             <a:ext cx="2606040" cy="438912"/>
           </a:xfrm>
           <a:prstGeom prst="rect">
@@ -12244,7 +11963,7 @@
           <a:bodyPr wrap="square" lIns="0" tIns="0" rIns="0" bIns="0" rtlCol="0" anchor="ctr"/>
           <a:lstStyle/>
           <a:p>
-            <a:pPr indent="0" marL="0">
+            <a:pPr marL="0" indent="0">
               <a:buNone/>
             </a:pPr>
             <a:r>
@@ -12270,7 +11989,7 @@
         </p:nvSpPr>
         <p:spPr>
           <a:xfrm>
-            <a:off x="768096" y="2468880"/>
+            <a:off x="833628" y="2468880"/>
             <a:ext cx="3118104" cy="941832"/>
           </a:xfrm>
           <a:prstGeom prst="rect">
@@ -12283,7 +12002,7 @@
           <a:bodyPr wrap="square" lIns="0" tIns="0" rIns="0" bIns="0" rtlCol="0" anchor="t"/>
           <a:lstStyle/>
           <a:p>
-            <a:pPr indent="0" marL="0">
+            <a:pPr marL="0" indent="0">
               <a:lnSpc>
                 <a:spcPct val="108000"/>
               </a:lnSpc>
@@ -12312,7 +12031,7 @@
         </p:nvSpPr>
         <p:spPr>
           <a:xfrm>
-            <a:off x="4270248" y="1783080"/>
+            <a:off x="4335780" y="1783080"/>
             <a:ext cx="3520440" cy="1783080"/>
           </a:xfrm>
           <a:prstGeom prst="roundRect">
@@ -12354,7 +12073,7 @@
         </p:nvSpPr>
         <p:spPr>
           <a:xfrm>
-            <a:off x="4471416" y="1965960"/>
+            <a:off x="4536948" y="1965960"/>
             <a:ext cx="384048" cy="384048"/>
           </a:xfrm>
           <a:prstGeom prst="rect">
@@ -12367,7 +12086,7 @@
           <a:bodyPr wrap="square" lIns="0" tIns="0" rIns="0" bIns="0" rtlCol="0" anchor="ctr"/>
           <a:lstStyle/>
           <a:p>
-            <a:pPr algn="ctr" indent="0" marL="0">
+            <a:pPr marL="0" indent="0" algn="ctr">
               <a:buNone/>
             </a:pPr>
             <a:r>
@@ -12393,7 +12112,7 @@
         </p:nvSpPr>
         <p:spPr>
           <a:xfrm>
-            <a:off x="4983480" y="1938528"/>
+            <a:off x="5049012" y="1938528"/>
             <a:ext cx="2606040" cy="438912"/>
           </a:xfrm>
           <a:prstGeom prst="rect">
@@ -12406,7 +12125,7 @@
           <a:bodyPr wrap="square" lIns="0" tIns="0" rIns="0" bIns="0" rtlCol="0" anchor="ctr"/>
           <a:lstStyle/>
           <a:p>
-            <a:pPr indent="0" marL="0">
+            <a:pPr marL="0" indent="0">
               <a:buNone/>
             </a:pPr>
             <a:r>
@@ -12432,7 +12151,7 @@
         </p:nvSpPr>
         <p:spPr>
           <a:xfrm>
-            <a:off x="4471416" y="2468880"/>
+            <a:off x="4536948" y="2468880"/>
             <a:ext cx="3118104" cy="941832"/>
           </a:xfrm>
           <a:prstGeom prst="rect">
@@ -12445,7 +12164,7 @@
           <a:bodyPr wrap="square" lIns="0" tIns="0" rIns="0" bIns="0" rtlCol="0" anchor="t"/>
           <a:lstStyle/>
           <a:p>
-            <a:pPr indent="0" marL="0">
+            <a:pPr marL="0" indent="0">
               <a:lnSpc>
                 <a:spcPct val="108000"/>
               </a:lnSpc>
@@ -12474,7 +12193,7 @@
         </p:nvSpPr>
         <p:spPr>
           <a:xfrm>
-            <a:off x="7973568" y="1783080"/>
+            <a:off x="8039100" y="1783080"/>
             <a:ext cx="3520440" cy="1783080"/>
           </a:xfrm>
           <a:prstGeom prst="roundRect">
@@ -12496,29 +12215,29 @@
         </p:nvSpPr>
         <p:spPr>
           <a:xfrm>
+            <a:off x="8240268" y="1965960"/>
+            <a:ext cx="384048" cy="384048"/>
+          </a:xfrm>
+          <a:prstGeom prst="ellipse">
+            <a:avLst/>
+          </a:prstGeom>
+          <a:solidFill>
+            <a:srgbClr val="5A05F4"/>
+          </a:solidFill>
+          <a:ln/>
+        </p:spPr>
+      </p:sp>
+      <p:sp>
+        <p:nvSpPr>
+          <p:cNvPr id="20" name="Text 17"/>
+          <p:cNvSpPr/>
+          <p:nvPr/>
+        </p:nvSpPr>
+        <p:spPr>
+          <a:xfrm>
             <a:off x="8174736" y="1965960"/>
             <a:ext cx="384048" cy="384048"/>
           </a:xfrm>
-          <a:prstGeom prst="ellipse">
-            <a:avLst/>
-          </a:prstGeom>
-          <a:solidFill>
-            <a:srgbClr val="5A05F4"/>
-          </a:solidFill>
-          <a:ln/>
-        </p:spPr>
-      </p:sp>
-      <p:sp>
-        <p:nvSpPr>
-          <p:cNvPr id="20" name="Text 17"/>
-          <p:cNvSpPr/>
-          <p:nvPr/>
-        </p:nvSpPr>
-        <p:spPr>
-          <a:xfrm>
-            <a:off x="8174736" y="1965960"/>
-            <a:ext cx="384048" cy="384048"/>
-          </a:xfrm>
           <a:prstGeom prst="rect">
             <a:avLst/>
           </a:prstGeom>
@@ -12529,7 +12248,7 @@
           <a:bodyPr wrap="square" lIns="0" tIns="0" rIns="0" bIns="0" rtlCol="0" anchor="ctr"/>
           <a:lstStyle/>
           <a:p>
-            <a:pPr algn="ctr" indent="0" marL="0">
+            <a:pPr marL="0" indent="0" algn="ctr">
               <a:buNone/>
             </a:pPr>
             <a:r>
@@ -12555,7 +12274,7 @@
         </p:nvSpPr>
         <p:spPr>
           <a:xfrm>
-            <a:off x="8686800" y="1938528"/>
+            <a:off x="8752332" y="1938528"/>
             <a:ext cx="2606040" cy="438912"/>
           </a:xfrm>
           <a:prstGeom prst="rect">
@@ -12568,7 +12287,7 @@
           <a:bodyPr wrap="square" lIns="0" tIns="0" rIns="0" bIns="0" rtlCol="0" anchor="ctr"/>
           <a:lstStyle/>
           <a:p>
-            <a:pPr indent="0" marL="0">
+            <a:pPr marL="0" indent="0">
               <a:buNone/>
             </a:pPr>
             <a:r>
@@ -12594,7 +12313,7 @@
         </p:nvSpPr>
         <p:spPr>
           <a:xfrm>
-            <a:off x="8174736" y="2468880"/>
+            <a:off x="8240268" y="2468880"/>
             <a:ext cx="3118104" cy="941832"/>
           </a:xfrm>
           <a:prstGeom prst="rect">
@@ -12607,7 +12326,7 @@
           <a:bodyPr wrap="square" lIns="0" tIns="0" rIns="0" bIns="0" rtlCol="0" anchor="t"/>
           <a:lstStyle/>
           <a:p>
-            <a:pPr indent="0" marL="0">
+            <a:pPr marL="0" indent="0">
               <a:lnSpc>
                 <a:spcPct val="108000"/>
               </a:lnSpc>
@@ -12636,8 +12355,8 @@
         </p:nvSpPr>
         <p:spPr>
           <a:xfrm>
-            <a:off x="566928" y="3931920"/>
-            <a:ext cx="11064240" cy="1234440"/>
+            <a:off x="632460" y="3931920"/>
+            <a:ext cx="10927080" cy="1234440"/>
           </a:xfrm>
           <a:prstGeom prst="roundRect">
             <a:avLst>
@@ -12676,11 +12395,11 @@
           <a:bodyPr wrap="square" lIns="0" tIns="0" rIns="0" bIns="0" rtlCol="0" anchor="ctr"/>
           <a:lstStyle/>
           <a:p>
-            <a:pPr indent="0" marL="0">
-              <a:buNone/>
-            </a:pPr>
-            <a:r>
-              <a:rPr lang="en-US" sz="950" b="1" spc="150" kern="0" dirty="0">
+            <a:pPr marL="0" indent="0">
+              <a:buNone/>
+            </a:pPr>
+            <a:r>
+              <a:rPr lang="en-US" sz="950" b="1" kern="0" spc="150" dirty="0">
                 <a:solidFill>
                   <a:srgbClr val="B3261E"/>
                 </a:solidFill>
@@ -12715,7 +12434,7 @@
           <a:bodyPr wrap="square" lIns="0" tIns="0" rIns="0" bIns="0" rtlCol="0" anchor="ctr"/>
           <a:lstStyle/>
           <a:p>
-            <a:pPr indent="0" marL="0">
+            <a:pPr marL="0" indent="0">
               <a:lnSpc>
                 <a:spcPct val="112000"/>
               </a:lnSpc>
@@ -12744,8 +12463,8 @@
         </p:nvSpPr>
         <p:spPr>
           <a:xfrm>
-            <a:off x="566928" y="5303520"/>
-            <a:ext cx="11064240" cy="548640"/>
+            <a:off x="632460" y="5303520"/>
+            <a:ext cx="10927080" cy="548640"/>
           </a:xfrm>
           <a:prstGeom prst="roundRect">
             <a:avLst>
@@ -12784,7 +12503,7 @@
           <a:bodyPr wrap="square" lIns="0" tIns="0" rIns="0" bIns="0" rtlCol="0" anchor="ctr"/>
           <a:lstStyle/>
           <a:p>
-            <a:pPr indent="0" marL="0">
+            <a:pPr marL="0" indent="0">
               <a:lnSpc>
                 <a:spcPct val="112000"/>
               </a:lnSpc>
@@ -12807,7 +12526,7 @@
       </p:sp>
       <p:sp>
         <p:nvSpPr>
-          <p:cNvPr id="25" name="Slide Number Placeholder 0"/>
+          <p:cNvPr id="28" name="Slide Number Placeholder 0"/>
           <p:cNvSpPr>
             <a:spLocks noGrp="1"/>
           </p:cNvSpPr>
@@ -12825,7 +12544,7 @@
           </a:prstGeom>
           <a:extLst>
             <a:ext uri="{C572A759-6A51-4108-AA02-DFA0A04FC94B}">
-              <ma14:wrappingTextBoxFlag xmlns:ma14="http://schemas.microsoft.com/office/mac/drawingml/2011/main" val="0"/>
+              <ma14:wrappingTextBoxFlag xmlns:ma14="http://schemas.microsoft.com/office/mac/drawingml/2011/main" xmlns="" val="0"/>
             </a:ext>
           </a:extLst>
         </p:spPr>
@@ -12846,7 +12565,7 @@
           <a:p>
             <a:pPr algn="l"/>
             <a:fld id="{F7021451-1387-4CA6-816F-3879F97B5CBC}" type="slidenum">
-              <a:rPr b="0" lang="en-US"/>
+              <a:rPr lang="en-US" b="0"/>
               <a:t>15</a:t>
             </a:fld>
             <a:endParaRPr lang="en-US"/>
@@ -12921,7 +12640,7 @@
           <a:bodyPr wrap="square" lIns="0" tIns="0" rIns="0" bIns="0" rtlCol="0" anchor="ctr"/>
           <a:lstStyle/>
           <a:p>
-            <a:pPr algn="l" indent="0" marL="0">
+            <a:pPr marL="0" indent="0" algn="l">
               <a:buNone/>
             </a:pPr>
             <a:r>
@@ -12960,7 +12679,7 @@
           <a:bodyPr wrap="square" lIns="0" tIns="0" rIns="0" bIns="0" rtlCol="0" anchor="ctr"/>
           <a:lstStyle/>
           <a:p>
-            <a:pPr indent="0" marL="0">
+            <a:pPr marL="0" indent="0">
               <a:buNone/>
             </a:pPr>
             <a:r>
@@ -13026,11 +12745,11 @@
           <a:bodyPr wrap="square" lIns="0" tIns="0" rIns="0" bIns="0" rtlCol="0" anchor="ctr"/>
           <a:lstStyle/>
           <a:p>
-            <a:pPr algn="ctr" indent="0" marL="0">
-              <a:buNone/>
-            </a:pPr>
-            <a:r>
-              <a:rPr lang="en-US" sz="900" b="1" spc="100" kern="0" dirty="0">
+            <a:pPr marL="0" indent="0" algn="ctr">
+              <a:buNone/>
+            </a:pPr>
+            <a:r>
+              <a:rPr lang="en-US" sz="900" b="1" kern="0" spc="100" dirty="0">
                 <a:solidFill>
                   <a:srgbClr val="5A05F4"/>
                 </a:solidFill>
@@ -13092,11 +12811,11 @@
           <a:bodyPr wrap="square" lIns="0" tIns="0" rIns="0" bIns="0" rtlCol="0" anchor="ctr"/>
           <a:lstStyle/>
           <a:p>
-            <a:pPr algn="ctr" indent="0" marL="0">
-              <a:buNone/>
-            </a:pPr>
-            <a:r>
-              <a:rPr lang="en-US" sz="900" b="1" spc="100" kern="0" dirty="0">
+            <a:pPr marL="0" indent="0" algn="ctr">
+              <a:buNone/>
+            </a:pPr>
+            <a:r>
+              <a:rPr lang="en-US" sz="900" b="1" kern="0" spc="100" dirty="0">
                 <a:solidFill>
                   <a:srgbClr val="434343"/>
                 </a:solidFill>
@@ -13112,14 +12831,14 @@
       </p:sp>
       <p:pic>
         <p:nvPicPr>
-          <p:cNvPr id="9" name="Image 0" descr="preencoded.png">    </p:cNvPr>
+          <p:cNvPr id="9" name="Image 0" descr="preencoded.png"/>
           <p:cNvPicPr>
             <a:picLocks noChangeAspect="1"/>
           </p:cNvPicPr>
           <p:nvPr/>
         </p:nvPicPr>
         <p:blipFill>
-          <a:blip r:embed="rId1"/>
+          <a:blip r:embed="rId3"/>
           <a:stretch>
             <a:fillRect/>
           </a:stretch>
@@ -13150,16 +12869,34 @@
         </p:nvGraphicFramePr>
         <p:xfrm>
           <a:off x="566928" y="1920240"/>
-          <a:ext cx="11064240" cy="914400"/>
+          <a:ext cx="11064240" cy="2048256"/>
         </p:xfrm>
         <a:graphic>
           <a:graphicData uri="http://schemas.openxmlformats.org/drawingml/2006/table">
             <a:tbl>
               <a:tblPr/>
               <a:tblGrid>
-                <a:gridCol w="3108960"/>
-                <a:gridCol w="4023360"/>
-                <a:gridCol w="3931920"/>
+                <a:gridCol w="3108960">
+                  <a:extLst>
+                    <a:ext uri="{9D8B030D-6E8A-4147-A177-3AD203B41FA5}">
+                      <a16:colId xmlns:a16="http://schemas.microsoft.com/office/drawing/2014/main" val="20000"/>
+                    </a:ext>
+                  </a:extLst>
+                </a:gridCol>
+                <a:gridCol w="4023360">
+                  <a:extLst>
+                    <a:ext uri="{9D8B030D-6E8A-4147-A177-3AD203B41FA5}">
+                      <a16:colId xmlns:a16="http://schemas.microsoft.com/office/drawing/2014/main" val="20001"/>
+                    </a:ext>
+                  </a:extLst>
+                </a:gridCol>
+                <a:gridCol w="3931920">
+                  <a:extLst>
+                    <a:ext uri="{9D8B030D-6E8A-4147-A177-3AD203B41FA5}">
+                      <a16:colId xmlns:a16="http://schemas.microsoft.com/office/drawing/2014/main" val="20002"/>
+                    </a:ext>
+                  </a:extLst>
+                </a:gridCol>
               </a:tblGrid>
               <a:tr h="512064">
                 <a:tc>
@@ -13167,11 +12904,11 @@
                     <a:bodyPr/>
                     <a:lstStyle/>
                     <a:p>
-                      <a:pPr algn="ctr" indent="0" marL="0">
+                      <a:pPr marL="0" indent="0" algn="ctr">
                         <a:buNone/>
                       </a:pPr>
                       <a:r>
-                        <a:rPr lang="en-US" sz="900" b="1" spc="100" kern="0" dirty="0">
+                        <a:rPr lang="en-US" sz="900" b="1" kern="0" spc="100" dirty="0">
                           <a:solidFill>
                             <a:srgbClr val="FFFFFF"/>
                           </a:solidFill>
@@ -13235,11 +12972,11 @@
                     <a:bodyPr/>
                     <a:lstStyle/>
                     <a:p>
-                      <a:pPr algn="ctr" indent="0" marL="0">
+                      <a:pPr marL="0" indent="0" algn="ctr">
                         <a:buNone/>
                       </a:pPr>
                       <a:r>
-                        <a:rPr lang="en-US" sz="900" b="1" spc="100" kern="0" dirty="0">
+                        <a:rPr lang="en-US" sz="900" b="1" kern="0" spc="100" dirty="0">
                           <a:solidFill>
                             <a:srgbClr val="FFFFFF"/>
                           </a:solidFill>
@@ -13303,11 +13040,11 @@
                     <a:bodyPr/>
                     <a:lstStyle/>
                     <a:p>
-                      <a:pPr algn="ctr" indent="0" marL="0">
+                      <a:pPr marL="0" indent="0" algn="ctr">
                         <a:buNone/>
                       </a:pPr>
                       <a:r>
-                        <a:rPr lang="en-US" sz="900" b="1" spc="100" kern="0" dirty="0">
+                        <a:rPr lang="en-US" sz="900" b="1" kern="0" spc="100" dirty="0">
                           <a:solidFill>
                             <a:srgbClr val="FFFFFF"/>
                           </a:solidFill>
@@ -13366,6 +13103,11 @@
                     </a:solidFill>
                   </a:tcPr>
                 </a:tc>
+                <a:extLst>
+                  <a:ext uri="{0D108BD9-81ED-4DB2-BD59-A6C34878D82A}">
+                    <a16:rowId xmlns:a16="http://schemas.microsoft.com/office/drawing/2014/main" val="10000"/>
+                  </a:ext>
+                </a:extLst>
               </a:tr>
               <a:tr h="512064">
                 <a:tc>
@@ -13373,7 +13115,7 @@
                     <a:bodyPr/>
                     <a:lstStyle/>
                     <a:p>
-                      <a:pPr indent="0" marL="0">
+                      <a:pPr marL="0" indent="0">
                         <a:buNone/>
                       </a:pPr>
                       <a:r>
@@ -13441,7 +13183,7 @@
                     <a:bodyPr/>
                     <a:lstStyle/>
                     <a:p>
-                      <a:pPr indent="0" marL="0">
+                      <a:pPr marL="0" indent="0">
                         <a:buNone/>
                       </a:pPr>
                       <a:r>
@@ -13509,7 +13251,7 @@
                     <a:bodyPr/>
                     <a:lstStyle/>
                     <a:p>
-                      <a:pPr indent="0" marL="0">
+                      <a:pPr marL="0" indent="0">
                         <a:buNone/>
                       </a:pPr>
                       <a:r>
@@ -13572,6 +13314,11 @@
                     </a:solidFill>
                   </a:tcPr>
                 </a:tc>
+                <a:extLst>
+                  <a:ext uri="{0D108BD9-81ED-4DB2-BD59-A6C34878D82A}">
+                    <a16:rowId xmlns:a16="http://schemas.microsoft.com/office/drawing/2014/main" val="10001"/>
+                  </a:ext>
+                </a:extLst>
               </a:tr>
               <a:tr h="512064">
                 <a:tc>
@@ -13579,7 +13326,7 @@
                     <a:bodyPr/>
                     <a:lstStyle/>
                     <a:p>
-                      <a:pPr indent="0" marL="0">
+                      <a:pPr marL="0" indent="0">
                         <a:buNone/>
                       </a:pPr>
                       <a:r>
@@ -13647,7 +13394,7 @@
                     <a:bodyPr/>
                     <a:lstStyle/>
                     <a:p>
-                      <a:pPr indent="0" marL="0">
+                      <a:pPr marL="0" indent="0">
                         <a:buNone/>
                       </a:pPr>
                       <a:r>
@@ -13715,7 +13462,7 @@
                     <a:bodyPr/>
                     <a:lstStyle/>
                     <a:p>
-                      <a:pPr indent="0" marL="0">
+                      <a:pPr marL="0" indent="0">
                         <a:buNone/>
                       </a:pPr>
                       <a:r>
@@ -13778,6 +13525,11 @@
                     </a:solidFill>
                   </a:tcPr>
                 </a:tc>
+                <a:extLst>
+                  <a:ext uri="{0D108BD9-81ED-4DB2-BD59-A6C34878D82A}">
+                    <a16:rowId xmlns:a16="http://schemas.microsoft.com/office/drawing/2014/main" val="10002"/>
+                  </a:ext>
+                </a:extLst>
               </a:tr>
               <a:tr h="512064">
                 <a:tc>
@@ -13785,7 +13537,7 @@
                     <a:bodyPr/>
                     <a:lstStyle/>
                     <a:p>
-                      <a:pPr indent="0" marL="0">
+                      <a:pPr marL="0" indent="0">
                         <a:buNone/>
                       </a:pPr>
                       <a:r>
@@ -13853,7 +13605,7 @@
                     <a:bodyPr/>
                     <a:lstStyle/>
                     <a:p>
-                      <a:pPr indent="0" marL="0">
+                      <a:pPr marL="0" indent="0">
                         <a:buNone/>
                       </a:pPr>
                       <a:r>
@@ -13921,7 +13673,7 @@
                     <a:bodyPr/>
                     <a:lstStyle/>
                     <a:p>
-                      <a:pPr indent="0" marL="0">
+                      <a:pPr marL="0" indent="0">
                         <a:buNone/>
                       </a:pPr>
                       <a:r>
@@ -13984,6 +13736,11 @@
                     </a:solidFill>
                   </a:tcPr>
                 </a:tc>
+                <a:extLst>
+                  <a:ext uri="{0D108BD9-81ED-4DB2-BD59-A6C34878D82A}">
+                    <a16:rowId xmlns:a16="http://schemas.microsoft.com/office/drawing/2014/main" val="10003"/>
+                  </a:ext>
+                </a:extLst>
               </a:tr>
             </a:tbl>
           </a:graphicData>
@@ -14032,7 +13789,7 @@
           <a:bodyPr wrap="square" lIns="0" tIns="0" rIns="0" bIns="0" rtlCol="0" anchor="ctr"/>
           <a:lstStyle/>
           <a:p>
-            <a:pPr indent="0" marL="0">
+            <a:pPr marL="0" indent="0">
               <a:lnSpc>
                 <a:spcPct val="112000"/>
               </a:lnSpc>
@@ -14073,7 +13830,7 @@
           </a:prstGeom>
           <a:extLst>
             <a:ext uri="{C572A759-6A51-4108-AA02-DFA0A04FC94B}">
-              <ma14:wrappingTextBoxFlag xmlns:ma14="http://schemas.microsoft.com/office/mac/drawingml/2011/main" val="0"/>
+              <ma14:wrappingTextBoxFlag xmlns:ma14="http://schemas.microsoft.com/office/mac/drawingml/2011/main" xmlns="" val="0"/>
             </a:ext>
           </a:extLst>
         </p:spPr>
@@ -14094,7 +13851,7 @@
           <a:p>
             <a:pPr algn="l"/>
             <a:fld id="{F7021451-1387-4CA6-816F-3879F97B5CBC}" type="slidenum">
-              <a:rPr b="0" lang="en-US"/>
+              <a:rPr lang="en-US" b="0"/>
               <a:t>16</a:t>
             </a:fld>
             <a:endParaRPr lang="en-US"/>
@@ -14169,7 +13926,7 @@
           <a:bodyPr wrap="square" lIns="0" tIns="0" rIns="0" bIns="0" rtlCol="0" anchor="ctr"/>
           <a:lstStyle/>
           <a:p>
-            <a:pPr algn="l" indent="0" marL="0">
+            <a:pPr marL="0" indent="0" algn="l">
               <a:buNone/>
             </a:pPr>
             <a:r>
@@ -14208,7 +13965,7 @@
           <a:bodyPr wrap="square" lIns="0" tIns="0" rIns="0" bIns="0" rtlCol="0" anchor="ctr"/>
           <a:lstStyle/>
           <a:p>
-            <a:pPr indent="0" marL="0">
+            <a:pPr marL="0" indent="0">
               <a:buNone/>
             </a:pPr>
             <a:r>
@@ -14274,11 +14031,11 @@
           <a:bodyPr wrap="square" lIns="0" tIns="0" rIns="0" bIns="0" rtlCol="0" anchor="ctr"/>
           <a:lstStyle/>
           <a:p>
-            <a:pPr algn="ctr" indent="0" marL="0">
-              <a:buNone/>
-            </a:pPr>
-            <a:r>
-              <a:rPr lang="en-US" sz="900" b="1" spc="100" kern="0" dirty="0">
+            <a:pPr marL="0" indent="0" algn="ctr">
+              <a:buNone/>
+            </a:pPr>
+            <a:r>
+              <a:rPr lang="en-US" sz="900" b="1" kern="0" spc="100" dirty="0">
                 <a:solidFill>
                   <a:srgbClr val="5A05F4"/>
                 </a:solidFill>
@@ -14294,14 +14051,14 @@
       </p:sp>
       <p:pic>
         <p:nvPicPr>
-          <p:cNvPr id="7" name="Image 0" descr="preencoded.png">    </p:cNvPr>
+          <p:cNvPr id="7" name="Image 0" descr="preencoded.png"/>
           <p:cNvPicPr>
             <a:picLocks noChangeAspect="1"/>
           </p:cNvPicPr>
           <p:nvPr/>
         </p:nvPicPr>
         <p:blipFill>
-          <a:blip r:embed="rId1"/>
+          <a:blip r:embed="rId3"/>
           <a:stretch>
             <a:fillRect/>
           </a:stretch>
@@ -14359,7 +14116,7 @@
           <a:bodyPr wrap="square" lIns="0" tIns="0" rIns="0" bIns="0" rtlCol="0" anchor="ctr"/>
           <a:lstStyle/>
           <a:p>
-            <a:pPr algn="ctr" indent="0" marL="0">
+            <a:pPr marL="0" indent="0" algn="ctr">
               <a:buNone/>
             </a:pPr>
             <a:r>
@@ -14463,7 +14220,7 @@
           <a:bodyPr wrap="square" lIns="0" tIns="0" rIns="0" bIns="0" rtlCol="0" anchor="ctr"/>
           <a:lstStyle/>
           <a:p>
-            <a:pPr algn="ctr" indent="0" marL="0">
+            <a:pPr marL="0" indent="0" algn="ctr">
               <a:buNone/>
             </a:pPr>
             <a:r>
@@ -14567,7 +14324,7 @@
           <a:bodyPr wrap="square" lIns="0" tIns="0" rIns="0" bIns="0" rtlCol="0" anchor="ctr"/>
           <a:lstStyle/>
           <a:p>
-            <a:pPr algn="ctr" indent="0" marL="0">
+            <a:pPr marL="0" indent="0" algn="ctr">
               <a:buNone/>
             </a:pPr>
             <a:r>
@@ -14671,7 +14428,7 @@
           <a:bodyPr wrap="square" lIns="0" tIns="0" rIns="0" bIns="0" rtlCol="0" anchor="ctr"/>
           <a:lstStyle/>
           <a:p>
-            <a:pPr algn="ctr" indent="0" marL="0">
+            <a:pPr marL="0" indent="0" algn="ctr">
               <a:buNone/>
             </a:pPr>
             <a:r>
@@ -14752,7 +14509,7 @@
           <a:bodyPr wrap="square" lIns="0" tIns="0" rIns="0" bIns="0" rtlCol="0" anchor="ctr"/>
           <a:lstStyle/>
           <a:p>
-            <a:pPr algn="ctr" indent="0" marL="0">
+            <a:pPr marL="0" indent="0" algn="ctr">
               <a:buNone/>
             </a:pPr>
             <a:r>
@@ -14791,7 +14548,7 @@
           <a:bodyPr wrap="square" lIns="0" tIns="0" rIns="0" bIns="0" rtlCol="0" anchor="ctr"/>
           <a:lstStyle/>
           <a:p>
-            <a:pPr indent="0" marL="0">
+            <a:pPr marL="0" indent="0">
               <a:buNone/>
             </a:pPr>
             <a:r>
@@ -14830,7 +14587,7 @@
           <a:bodyPr wrap="square" lIns="0" tIns="0" rIns="0" bIns="0" rtlCol="0" anchor="t"/>
           <a:lstStyle/>
           <a:p>
-            <a:pPr indent="0" marL="0">
+            <a:pPr marL="0" indent="0">
               <a:lnSpc>
                 <a:spcPct val="108000"/>
               </a:lnSpc>
@@ -14914,7 +14671,7 @@
           <a:bodyPr wrap="square" lIns="0" tIns="0" rIns="0" bIns="0" rtlCol="0" anchor="ctr"/>
           <a:lstStyle/>
           <a:p>
-            <a:pPr algn="ctr" indent="0" marL="0">
+            <a:pPr marL="0" indent="0" algn="ctr">
               <a:buNone/>
             </a:pPr>
             <a:r>
@@ -14953,7 +14710,7 @@
           <a:bodyPr wrap="square" lIns="0" tIns="0" rIns="0" bIns="0" rtlCol="0" anchor="ctr"/>
           <a:lstStyle/>
           <a:p>
-            <a:pPr indent="0" marL="0">
+            <a:pPr marL="0" indent="0">
               <a:buNone/>
             </a:pPr>
             <a:r>
@@ -14992,7 +14749,7 @@
           <a:bodyPr wrap="square" lIns="0" tIns="0" rIns="0" bIns="0" rtlCol="0" anchor="t"/>
           <a:lstStyle/>
           <a:p>
-            <a:pPr indent="0" marL="0">
+            <a:pPr marL="0" indent="0">
               <a:lnSpc>
                 <a:spcPct val="108000"/>
               </a:lnSpc>
@@ -15022,7 +14779,7 @@
         <p:spPr>
           <a:xfrm>
             <a:off x="7973568" y="2926080"/>
-            <a:ext cx="3520440" cy="1600200"/>
+            <a:ext cx="3651504" cy="1600200"/>
           </a:xfrm>
           <a:prstGeom prst="roundRect">
             <a:avLst>
@@ -15076,7 +14833,7 @@
           <a:bodyPr wrap="square" lIns="0" tIns="0" rIns="0" bIns="0" rtlCol="0" anchor="ctr"/>
           <a:lstStyle/>
           <a:p>
-            <a:pPr algn="ctr" indent="0" marL="0">
+            <a:pPr marL="0" indent="0" algn="ctr">
               <a:buNone/>
             </a:pPr>
             <a:r>
@@ -15115,7 +14872,7 @@
           <a:bodyPr wrap="square" lIns="0" tIns="0" rIns="0" bIns="0" rtlCol="0" anchor="ctr"/>
           <a:lstStyle/>
           <a:p>
-            <a:pPr indent="0" marL="0">
+            <a:pPr marL="0" indent="0">
               <a:buNone/>
             </a:pPr>
             <a:r>
@@ -15154,7 +14911,7 @@
           <a:bodyPr wrap="square" lIns="0" tIns="0" rIns="0" bIns="0" rtlCol="0" anchor="t"/>
           <a:lstStyle/>
           <a:p>
-            <a:pPr indent="0" marL="0">
+            <a:pPr marL="0" indent="0">
               <a:lnSpc>
                 <a:spcPct val="108000"/>
               </a:lnSpc>
@@ -15223,11 +14980,11 @@
           <a:bodyPr wrap="square" lIns="0" tIns="0" rIns="0" bIns="0" rtlCol="0" anchor="ctr"/>
           <a:lstStyle/>
           <a:p>
-            <a:pPr indent="0" marL="0">
-              <a:buNone/>
-            </a:pPr>
-            <a:r>
-              <a:rPr lang="en-US" sz="950" b="1" spc="150" kern="0" dirty="0">
+            <a:pPr marL="0" indent="0">
+              <a:buNone/>
+            </a:pPr>
+            <a:r>
+              <a:rPr lang="en-US" sz="950" b="1" kern="0" spc="150" dirty="0">
                 <a:solidFill>
                   <a:srgbClr val="106B41"/>
                 </a:solidFill>
@@ -15262,7 +15019,7 @@
           <a:bodyPr wrap="square" lIns="0" tIns="0" rIns="0" bIns="0" rtlCol="0" anchor="ctr"/>
           <a:lstStyle/>
           <a:p>
-            <a:pPr indent="0" marL="0">
+            <a:pPr marL="0" indent="0">
               <a:lnSpc>
                 <a:spcPct val="112000"/>
               </a:lnSpc>
@@ -15285,7 +15042,7 @@
       </p:sp>
       <p:sp>
         <p:nvSpPr>
-          <p:cNvPr id="25" name="Slide Number Placeholder 0"/>
+          <p:cNvPr id="40" name="Slide Number Placeholder 0"/>
           <p:cNvSpPr>
             <a:spLocks noGrp="1"/>
           </p:cNvSpPr>
@@ -15303,7 +15060,7 @@
           </a:prstGeom>
           <a:extLst>
             <a:ext uri="{C572A759-6A51-4108-AA02-DFA0A04FC94B}">
-              <ma14:wrappingTextBoxFlag xmlns:ma14="http://schemas.microsoft.com/office/mac/drawingml/2011/main" val="0"/>
+              <ma14:wrappingTextBoxFlag xmlns:ma14="http://schemas.microsoft.com/office/mac/drawingml/2011/main" xmlns="" val="0"/>
             </a:ext>
           </a:extLst>
         </p:spPr>
@@ -15324,7 +15081,7 @@
           <a:p>
             <a:pPr algn="l"/>
             <a:fld id="{F7021451-1387-4CA6-816F-3879F97B5CBC}" type="slidenum">
-              <a:rPr b="0" lang="en-US"/>
+              <a:rPr lang="en-US" b="0"/>
               <a:t>17</a:t>
             </a:fld>
             <a:endParaRPr lang="en-US"/>
@@ -15399,7 +15156,7 @@
           <a:bodyPr wrap="square" lIns="0" tIns="0" rIns="0" bIns="0" rtlCol="0" anchor="ctr"/>
           <a:lstStyle/>
           <a:p>
-            <a:pPr algn="l" indent="0" marL="0">
+            <a:pPr marL="0" indent="0" algn="l">
               <a:buNone/>
             </a:pPr>
             <a:r>
@@ -15438,7 +15195,7 @@
           <a:bodyPr wrap="square" lIns="0" tIns="0" rIns="0" bIns="0" rtlCol="0" anchor="ctr"/>
           <a:lstStyle/>
           <a:p>
-            <a:pPr indent="0" marL="0">
+            <a:pPr marL="0" indent="0">
               <a:buNone/>
             </a:pPr>
             <a:r>
@@ -15477,7 +15234,7 @@
           <a:bodyPr wrap="square" lIns="0" tIns="0" rIns="0" bIns="0" rtlCol="0" anchor="t"/>
           <a:lstStyle/>
           <a:p>
-            <a:pPr indent="0" marL="0">
+            <a:pPr marL="0" indent="0">
               <a:lnSpc>
                 <a:spcPct val="100000"/>
               </a:lnSpc>
@@ -15546,11 +15303,11 @@
           <a:bodyPr wrap="square" lIns="0" tIns="0" rIns="0" bIns="0" rtlCol="0" anchor="ctr"/>
           <a:lstStyle/>
           <a:p>
-            <a:pPr algn="ctr" indent="0" marL="0">
-              <a:buNone/>
-            </a:pPr>
-            <a:r>
-              <a:rPr lang="en-US" sz="900" b="1" spc="100" kern="0" dirty="0">
+            <a:pPr marL="0" indent="0" algn="ctr">
+              <a:buNone/>
+            </a:pPr>
+            <a:r>
+              <a:rPr lang="en-US" sz="900" b="1" kern="0" spc="100" dirty="0">
                 <a:solidFill>
                   <a:srgbClr val="5A05F4"/>
                 </a:solidFill>
@@ -15566,14 +15323,14 @@
       </p:sp>
       <p:pic>
         <p:nvPicPr>
-          <p:cNvPr id="8" name="Image 0" descr="preencoded.png">    </p:cNvPr>
+          <p:cNvPr id="8" name="Image 0" descr="preencoded.png"/>
           <p:cNvPicPr>
             <a:picLocks noChangeAspect="1"/>
           </p:cNvPicPr>
           <p:nvPr/>
         </p:nvPicPr>
         <p:blipFill>
-          <a:blip r:embed="rId1"/>
+          <a:blip r:embed="rId3"/>
           <a:stretch>
             <a:fillRect/>
           </a:stretch>
@@ -15651,7 +15408,7 @@
           <a:bodyPr wrap="square" lIns="0" tIns="0" rIns="0" bIns="0" rtlCol="0" anchor="ctr"/>
           <a:lstStyle/>
           <a:p>
-            <a:pPr algn="ctr" indent="0" marL="0">
+            <a:pPr marL="0" indent="0" algn="ctr">
               <a:buNone/>
             </a:pPr>
             <a:r>
@@ -15690,7 +15447,7 @@
           <a:bodyPr wrap="square" lIns="0" tIns="0" rIns="0" bIns="0" rtlCol="0" anchor="ctr"/>
           <a:lstStyle/>
           <a:p>
-            <a:pPr indent="0" marL="0">
+            <a:pPr marL="0" indent="0">
               <a:buNone/>
             </a:pPr>
             <a:r>
@@ -15729,7 +15486,7 @@
           <a:bodyPr wrap="square" lIns="0" tIns="0" rIns="0" bIns="0" rtlCol="0" anchor="t"/>
           <a:lstStyle/>
           <a:p>
-            <a:pPr indent="0" marL="0">
+            <a:pPr marL="0" indent="0">
               <a:lnSpc>
                 <a:spcPct val="108000"/>
               </a:lnSpc>
@@ -15813,7 +15570,7 @@
           <a:bodyPr wrap="square" lIns="0" tIns="0" rIns="0" bIns="0" rtlCol="0" anchor="ctr"/>
           <a:lstStyle/>
           <a:p>
-            <a:pPr algn="ctr" indent="0" marL="0">
+            <a:pPr marL="0" indent="0" algn="ctr">
               <a:buNone/>
             </a:pPr>
             <a:r>
@@ -15852,7 +15609,7 @@
           <a:bodyPr wrap="square" lIns="0" tIns="0" rIns="0" bIns="0" rtlCol="0" anchor="ctr"/>
           <a:lstStyle/>
           <a:p>
-            <a:pPr indent="0" marL="0">
+            <a:pPr marL="0" indent="0">
               <a:buNone/>
             </a:pPr>
             <a:r>
@@ -15891,7 +15648,7 @@
           <a:bodyPr wrap="square" lIns="0" tIns="0" rIns="0" bIns="0" rtlCol="0" anchor="t"/>
           <a:lstStyle/>
           <a:p>
-            <a:pPr indent="0" marL="0">
+            <a:pPr marL="0" indent="0">
               <a:lnSpc>
                 <a:spcPct val="108000"/>
               </a:lnSpc>
@@ -15975,7 +15732,7 @@
           <a:bodyPr wrap="square" lIns="0" tIns="0" rIns="0" bIns="0" rtlCol="0" anchor="ctr"/>
           <a:lstStyle/>
           <a:p>
-            <a:pPr algn="ctr" indent="0" marL="0">
+            <a:pPr marL="0" indent="0" algn="ctr">
               <a:buNone/>
             </a:pPr>
             <a:r>
@@ -16014,7 +15771,7 @@
           <a:bodyPr wrap="square" lIns="0" tIns="0" rIns="0" bIns="0" rtlCol="0" anchor="ctr"/>
           <a:lstStyle/>
           <a:p>
-            <a:pPr indent="0" marL="0">
+            <a:pPr marL="0" indent="0">
               <a:buNone/>
             </a:pPr>
             <a:r>
@@ -16053,7 +15810,7 @@
           <a:bodyPr wrap="square" lIns="0" tIns="0" rIns="0" bIns="0" rtlCol="0" anchor="t"/>
           <a:lstStyle/>
           <a:p>
-            <a:pPr indent="0" marL="0">
+            <a:pPr marL="0" indent="0">
               <a:lnSpc>
                 <a:spcPct val="108000"/>
               </a:lnSpc>
@@ -16122,7 +15879,7 @@
           <a:bodyPr wrap="square" lIns="0" tIns="0" rIns="0" bIns="0" rtlCol="0" anchor="ctr"/>
           <a:lstStyle/>
           <a:p>
-            <a:pPr algn="ctr" indent="0" marL="0">
+            <a:pPr marL="0" indent="0" algn="ctr">
               <a:buNone/>
             </a:pPr>
             <a:r>
@@ -16188,7 +15945,7 @@
           <a:bodyPr wrap="square" lIns="0" tIns="0" rIns="0" bIns="0" rtlCol="0" anchor="ctr"/>
           <a:lstStyle/>
           <a:p>
-            <a:pPr algn="ctr" indent="0" marL="0">
+            <a:pPr marL="0" indent="0" algn="ctr">
               <a:buNone/>
             </a:pPr>
             <a:r>
@@ -16247,7 +16004,7 @@
           <a:bodyPr wrap="square" lIns="0" tIns="0" rIns="0" bIns="0" rtlCol="0" anchor="ctr"/>
           <a:lstStyle/>
           <a:p>
-            <a:pPr algn="ctr" indent="0" marL="0">
+            <a:pPr marL="0" indent="0" algn="ctr">
               <a:buNone/>
             </a:pPr>
             <a:r>
@@ -16306,7 +16063,7 @@
           <a:bodyPr wrap="square" lIns="0" tIns="0" rIns="0" bIns="0" rtlCol="0" anchor="ctr"/>
           <a:lstStyle/>
           <a:p>
-            <a:pPr algn="ctr" indent="0" marL="0">
+            <a:pPr marL="0" indent="0" algn="ctr">
               <a:buNone/>
             </a:pPr>
             <a:r>
@@ -16365,7 +16122,7 @@
           <a:bodyPr wrap="square" lIns="0" tIns="0" rIns="0" bIns="0" rtlCol="0" anchor="ctr"/>
           <a:lstStyle/>
           <a:p>
-            <a:pPr algn="ctr" indent="0" marL="0">
+            <a:pPr marL="0" indent="0" algn="ctr">
               <a:buNone/>
             </a:pPr>
             <a:r>
@@ -16391,8 +16148,8 @@
         </p:nvSpPr>
         <p:spPr>
           <a:xfrm>
-            <a:off x="566928" y="4681728"/>
-            <a:ext cx="11064240" cy="1188720"/>
+            <a:off x="629072" y="4672584"/>
+            <a:ext cx="10864936" cy="1188720"/>
           </a:xfrm>
           <a:prstGeom prst="roundRect">
             <a:avLst>
@@ -16426,11 +16183,11 @@
           <a:bodyPr wrap="square" lIns="0" tIns="0" rIns="0" bIns="0" rtlCol="0" anchor="ctr"/>
           <a:lstStyle/>
           <a:p>
-            <a:pPr indent="0" marL="0">
-              <a:buNone/>
-            </a:pPr>
-            <a:r>
-              <a:rPr lang="en-US" sz="950" b="1" spc="150" kern="0" dirty="0">
+            <a:pPr marL="0" indent="0">
+              <a:buNone/>
+            </a:pPr>
+            <a:r>
+              <a:rPr lang="en-US" sz="950" b="1" kern="0" spc="150" dirty="0">
                 <a:solidFill>
                   <a:srgbClr val="FFFFFF"/>
                 </a:solidFill>
@@ -16465,7 +16222,7 @@
           <a:bodyPr wrap="square" lIns="0" tIns="0" rIns="0" bIns="0" rtlCol="0" anchor="ctr"/>
           <a:lstStyle/>
           <a:p>
-            <a:pPr indent="0" marL="0">
+            <a:pPr marL="0" indent="0">
               <a:lnSpc>
                 <a:spcPct val="112000"/>
               </a:lnSpc>
@@ -16488,7 +16245,7 @@
       </p:sp>
       <p:sp>
         <p:nvSpPr>
-          <p:cNvPr id="25" name="Slide Number Placeholder 0"/>
+          <p:cNvPr id="37" name="Slide Number Placeholder 0"/>
           <p:cNvSpPr>
             <a:spLocks noGrp="1"/>
           </p:cNvSpPr>
@@ -16506,7 +16263,7 @@
           </a:prstGeom>
           <a:extLst>
             <a:ext uri="{C572A759-6A51-4108-AA02-DFA0A04FC94B}">
-              <ma14:wrappingTextBoxFlag xmlns:ma14="http://schemas.microsoft.com/office/mac/drawingml/2011/main" val="0"/>
+              <ma14:wrappingTextBoxFlag xmlns:ma14="http://schemas.microsoft.com/office/mac/drawingml/2011/main" xmlns="" val="0"/>
             </a:ext>
           </a:extLst>
         </p:spPr>
@@ -16527,7 +16284,7 @@
           <a:p>
             <a:pPr algn="l"/>
             <a:fld id="{F7021451-1387-4CA6-816F-3879F97B5CBC}" type="slidenum">
-              <a:rPr b="0" lang="en-US"/>
+              <a:rPr lang="en-US" b="0"/>
               <a:t>18</a:t>
             </a:fld>
             <a:endParaRPr lang="en-US"/>
@@ -16602,7 +16359,7 @@
           <a:bodyPr wrap="square" lIns="0" tIns="0" rIns="0" bIns="0" rtlCol="0" anchor="ctr"/>
           <a:lstStyle/>
           <a:p>
-            <a:pPr algn="l" indent="0" marL="0">
+            <a:pPr marL="0" indent="0" algn="l">
               <a:buNone/>
             </a:pPr>
             <a:r>
@@ -16641,7 +16398,7 @@
           <a:bodyPr wrap="square" lIns="0" tIns="0" rIns="0" bIns="0" rtlCol="0" anchor="ctr"/>
           <a:lstStyle/>
           <a:p>
-            <a:pPr indent="0" marL="0">
+            <a:pPr marL="0" indent="0">
               <a:buNone/>
             </a:pPr>
             <a:r>
@@ -16680,7 +16437,7 @@
           <a:bodyPr wrap="square" lIns="0" tIns="0" rIns="0" bIns="0" rtlCol="0" anchor="t"/>
           <a:lstStyle/>
           <a:p>
-            <a:pPr indent="0" marL="0">
+            <a:pPr marL="0" indent="0">
               <a:lnSpc>
                 <a:spcPct val="100000"/>
               </a:lnSpc>
@@ -16749,11 +16506,11 @@
           <a:bodyPr wrap="square" lIns="0" tIns="0" rIns="0" bIns="0" rtlCol="0" anchor="ctr"/>
           <a:lstStyle/>
           <a:p>
-            <a:pPr algn="ctr" indent="0" marL="0">
-              <a:buNone/>
-            </a:pPr>
-            <a:r>
-              <a:rPr lang="en-US" sz="900" b="1" spc="100" kern="0" dirty="0">
+            <a:pPr marL="0" indent="0" algn="ctr">
+              <a:buNone/>
+            </a:pPr>
+            <a:r>
+              <a:rPr lang="en-US" sz="900" b="1" kern="0" spc="100" dirty="0">
                 <a:solidFill>
                   <a:srgbClr val="5A05F4"/>
                 </a:solidFill>
@@ -16769,14 +16526,14 @@
       </p:sp>
       <p:pic>
         <p:nvPicPr>
-          <p:cNvPr id="8" name="Image 0" descr="preencoded.png">    </p:cNvPr>
+          <p:cNvPr id="8" name="Image 0" descr="preencoded.png"/>
           <p:cNvPicPr>
             <a:picLocks noChangeAspect="1"/>
           </p:cNvPicPr>
           <p:nvPr/>
         </p:nvPicPr>
         <p:blipFill>
-          <a:blip r:embed="rId1"/>
+          <a:blip r:embed="rId3"/>
           <a:stretch>
             <a:fillRect/>
           </a:stretch>
@@ -16854,7 +16611,7 @@
           <a:bodyPr wrap="square" lIns="0" tIns="0" rIns="0" bIns="0" rtlCol="0" anchor="ctr"/>
           <a:lstStyle/>
           <a:p>
-            <a:pPr algn="ctr" indent="0" marL="0">
+            <a:pPr marL="0" indent="0" algn="ctr">
               <a:buNone/>
             </a:pPr>
             <a:r>
@@ -16893,7 +16650,7 @@
           <a:bodyPr wrap="square" lIns="0" tIns="0" rIns="0" bIns="0" rtlCol="0" anchor="ctr"/>
           <a:lstStyle/>
           <a:p>
-            <a:pPr indent="0" marL="0">
+            <a:pPr marL="0" indent="0">
               <a:buNone/>
             </a:pPr>
             <a:r>
@@ -16932,7 +16689,7 @@
           <a:bodyPr wrap="square" lIns="0" tIns="0" rIns="0" bIns="0" rtlCol="0" anchor="t"/>
           <a:lstStyle/>
           <a:p>
-            <a:pPr indent="0" marL="0">
+            <a:pPr marL="0" indent="0">
               <a:lnSpc>
                 <a:spcPct val="108000"/>
               </a:lnSpc>
@@ -17016,7 +16773,7 @@
           <a:bodyPr wrap="square" lIns="0" tIns="0" rIns="0" bIns="0" rtlCol="0" anchor="ctr"/>
           <a:lstStyle/>
           <a:p>
-            <a:pPr algn="ctr" indent="0" marL="0">
+            <a:pPr marL="0" indent="0" algn="ctr">
               <a:buNone/>
             </a:pPr>
             <a:r>
@@ -17055,7 +16812,7 @@
           <a:bodyPr wrap="square" lIns="0" tIns="0" rIns="0" bIns="0" rtlCol="0" anchor="ctr"/>
           <a:lstStyle/>
           <a:p>
-            <a:pPr indent="0" marL="0">
+            <a:pPr marL="0" indent="0">
               <a:buNone/>
             </a:pPr>
             <a:r>
@@ -17094,7 +16851,7 @@
           <a:bodyPr wrap="square" lIns="0" tIns="0" rIns="0" bIns="0" rtlCol="0" anchor="t"/>
           <a:lstStyle/>
           <a:p>
-            <a:pPr indent="0" marL="0">
+            <a:pPr marL="0" indent="0">
               <a:lnSpc>
                 <a:spcPct val="108000"/>
               </a:lnSpc>
@@ -17124,7 +16881,7 @@
         <p:spPr>
           <a:xfrm>
             <a:off x="7973568" y="1920240"/>
-            <a:ext cx="3520440" cy="2103120"/>
+            <a:ext cx="3651504" cy="2103120"/>
           </a:xfrm>
           <a:prstGeom prst="roundRect">
             <a:avLst>
@@ -17178,7 +16935,7 @@
           <a:bodyPr wrap="square" lIns="0" tIns="0" rIns="0" bIns="0" rtlCol="0" anchor="ctr"/>
           <a:lstStyle/>
           <a:p>
-            <a:pPr algn="ctr" indent="0" marL="0">
+            <a:pPr marL="0" indent="0" algn="ctr">
               <a:buNone/>
             </a:pPr>
             <a:r>
@@ -17217,7 +16974,7 @@
           <a:bodyPr wrap="square" lIns="0" tIns="0" rIns="0" bIns="0" rtlCol="0" anchor="ctr"/>
           <a:lstStyle/>
           <a:p>
-            <a:pPr indent="0" marL="0">
+            <a:pPr marL="0" indent="0">
               <a:buNone/>
             </a:pPr>
             <a:r>
@@ -17256,7 +17013,7 @@
           <a:bodyPr wrap="square" lIns="0" tIns="0" rIns="0" bIns="0" rtlCol="0" anchor="t"/>
           <a:lstStyle/>
           <a:p>
-            <a:pPr indent="0" marL="0">
+            <a:pPr marL="0" indent="0">
               <a:lnSpc>
                 <a:spcPct val="108000"/>
               </a:lnSpc>
@@ -17325,11 +17082,11 @@
           <a:bodyPr wrap="square" lIns="0" tIns="0" rIns="0" bIns="0" rtlCol="0" anchor="ctr"/>
           <a:lstStyle/>
           <a:p>
-            <a:pPr indent="0" marL="0">
-              <a:buNone/>
-            </a:pPr>
-            <a:r>
-              <a:rPr lang="en-US" sz="950" b="1" spc="150" kern="0" dirty="0">
+            <a:pPr marL="0" indent="0">
+              <a:buNone/>
+            </a:pPr>
+            <a:r>
+              <a:rPr lang="en-US" sz="950" b="1" kern="0" spc="150" dirty="0">
                 <a:solidFill>
                   <a:srgbClr val="106B41"/>
                 </a:solidFill>
@@ -17364,7 +17121,7 @@
           <a:bodyPr wrap="square" lIns="0" tIns="0" rIns="0" bIns="0" rtlCol="0" anchor="ctr"/>
           <a:lstStyle/>
           <a:p>
-            <a:pPr indent="0" marL="0">
+            <a:pPr marL="0" indent="0">
               <a:lnSpc>
                 <a:spcPct val="112000"/>
               </a:lnSpc>
@@ -17387,7 +17144,7 @@
       </p:sp>
       <p:sp>
         <p:nvSpPr>
-          <p:cNvPr id="25" name="Slide Number Placeholder 0"/>
+          <p:cNvPr id="27" name="Slide Number Placeholder 0"/>
           <p:cNvSpPr>
             <a:spLocks noGrp="1"/>
           </p:cNvSpPr>
@@ -17405,7 +17162,7 @@
           </a:prstGeom>
           <a:extLst>
             <a:ext uri="{C572A759-6A51-4108-AA02-DFA0A04FC94B}">
-              <ma14:wrappingTextBoxFlag xmlns:ma14="http://schemas.microsoft.com/office/mac/drawingml/2011/main" val="0"/>
+              <ma14:wrappingTextBoxFlag xmlns:ma14="http://schemas.microsoft.com/office/mac/drawingml/2011/main" xmlns="" val="0"/>
             </a:ext>
           </a:extLst>
         </p:spPr>
@@ -17426,7 +17183,7 @@
           <a:p>
             <a:pPr algn="l"/>
             <a:fld id="{F7021451-1387-4CA6-816F-3879F97B5CBC}" type="slidenum">
-              <a:rPr b="0" lang="en-US"/>
+              <a:rPr lang="en-US" b="0"/>
               <a:t>19</a:t>
             </a:fld>
             <a:endParaRPr lang="en-US"/>
@@ -17501,7 +17258,7 @@
           <a:bodyPr wrap="square" lIns="0" tIns="0" rIns="0" bIns="0" rtlCol="0" anchor="ctr"/>
           <a:lstStyle/>
           <a:p>
-            <a:pPr indent="0" marL="0">
+            <a:pPr marL="0" indent="0">
               <a:buNone/>
             </a:pPr>
             <a:r>
@@ -17540,7 +17297,7 @@
           <a:bodyPr wrap="square" lIns="0" tIns="0" rIns="0" bIns="0" rtlCol="0" anchor="t"/>
           <a:lstStyle/>
           <a:p>
-            <a:pPr indent="0" marL="0">
+            <a:pPr marL="0" indent="0">
               <a:lnSpc>
                 <a:spcPct val="100000"/>
               </a:lnSpc>
@@ -17609,11 +17366,11 @@
           <a:bodyPr wrap="square" lIns="0" tIns="0" rIns="0" bIns="0" rtlCol="0" anchor="ctr"/>
           <a:lstStyle/>
           <a:p>
-            <a:pPr algn="ctr" indent="0" marL="0">
-              <a:buNone/>
-            </a:pPr>
-            <a:r>
-              <a:rPr lang="en-US" sz="900" b="1" spc="100" kern="0" dirty="0">
+            <a:pPr marL="0" indent="0" algn="ctr">
+              <a:buNone/>
+            </a:pPr>
+            <a:r>
+              <a:rPr lang="en-US" sz="900" b="1" kern="0" spc="100" dirty="0">
                 <a:solidFill>
                   <a:srgbClr val="5A05F4"/>
                 </a:solidFill>
@@ -17629,14 +17386,14 @@
       </p:sp>
       <p:pic>
         <p:nvPicPr>
-          <p:cNvPr id="7" name="Image 0" descr="preencoded.png">    </p:cNvPr>
+          <p:cNvPr id="7" name="Image 0" descr="preencoded.png"/>
           <p:cNvPicPr>
             <a:picLocks noChangeAspect="1"/>
           </p:cNvPicPr>
           <p:nvPr/>
         </p:nvPicPr>
         <p:blipFill>
-          <a:blip r:embed="rId1"/>
+          <a:blip r:embed="rId3"/>
           <a:stretch>
             <a:fillRect/>
           </a:stretch>
@@ -17714,7 +17471,7 @@
           <a:bodyPr wrap="square" lIns="0" tIns="0" rIns="0" bIns="0" rtlCol="0" anchor="ctr"/>
           <a:lstStyle/>
           <a:p>
-            <a:pPr algn="ctr" indent="0" marL="0">
+            <a:pPr marL="0" indent="0" algn="ctr">
               <a:buNone/>
             </a:pPr>
             <a:r>
@@ -17753,7 +17510,7 @@
           <a:bodyPr wrap="square" lIns="0" tIns="0" rIns="0" bIns="0" rtlCol="0" anchor="ctr"/>
           <a:lstStyle/>
           <a:p>
-            <a:pPr indent="0" marL="0">
+            <a:pPr marL="0" indent="0">
               <a:buNone/>
             </a:pPr>
             <a:r>
@@ -17792,7 +17549,7 @@
           <a:bodyPr wrap="square" lIns="0" tIns="0" rIns="0" bIns="0" rtlCol="0" anchor="t"/>
           <a:lstStyle/>
           <a:p>
-            <a:pPr indent="0" marL="0">
+            <a:pPr marL="0" indent="0">
               <a:lnSpc>
                 <a:spcPct val="108000"/>
               </a:lnSpc>
@@ -17876,7 +17633,7 @@
           <a:bodyPr wrap="square" lIns="0" tIns="0" rIns="0" bIns="0" rtlCol="0" anchor="ctr"/>
           <a:lstStyle/>
           <a:p>
-            <a:pPr algn="ctr" indent="0" marL="0">
+            <a:pPr marL="0" indent="0" algn="ctr">
               <a:buNone/>
             </a:pPr>
             <a:r>
@@ -17915,7 +17672,7 @@
           <a:bodyPr wrap="square" lIns="0" tIns="0" rIns="0" bIns="0" rtlCol="0" anchor="ctr"/>
           <a:lstStyle/>
           <a:p>
-            <a:pPr indent="0" marL="0">
+            <a:pPr marL="0" indent="0">
               <a:buNone/>
             </a:pPr>
             <a:r>
@@ -17954,7 +17711,7 @@
           <a:bodyPr wrap="square" lIns="0" tIns="0" rIns="0" bIns="0" rtlCol="0" anchor="t"/>
           <a:lstStyle/>
           <a:p>
-            <a:pPr indent="0" marL="0">
+            <a:pPr marL="0" indent="0">
               <a:lnSpc>
                 <a:spcPct val="108000"/>
               </a:lnSpc>
@@ -18038,7 +17795,7 @@
           <a:bodyPr wrap="square" lIns="0" tIns="0" rIns="0" bIns="0" rtlCol="0" anchor="ctr"/>
           <a:lstStyle/>
           <a:p>
-            <a:pPr algn="ctr" indent="0" marL="0">
+            <a:pPr marL="0" indent="0" algn="ctr">
               <a:buNone/>
             </a:pPr>
             <a:r>
@@ -18077,7 +17834,7 @@
           <a:bodyPr wrap="square" lIns="0" tIns="0" rIns="0" bIns="0" rtlCol="0" anchor="ctr"/>
           <a:lstStyle/>
           <a:p>
-            <a:pPr indent="0" marL="0">
+            <a:pPr marL="0" indent="0">
               <a:buNone/>
             </a:pPr>
             <a:r>
@@ -18116,7 +17873,7 @@
           <a:bodyPr wrap="square" lIns="0" tIns="0" rIns="0" bIns="0" rtlCol="0" anchor="t"/>
           <a:lstStyle/>
           <a:p>
-            <a:pPr indent="0" marL="0">
+            <a:pPr marL="0" indent="0">
               <a:lnSpc>
                 <a:spcPct val="108000"/>
               </a:lnSpc>
@@ -18200,7 +17957,7 @@
           <a:bodyPr wrap="square" lIns="0" tIns="0" rIns="0" bIns="0" rtlCol="0" anchor="ctr"/>
           <a:lstStyle/>
           <a:p>
-            <a:pPr algn="ctr" indent="0" marL="0">
+            <a:pPr marL="0" indent="0" algn="ctr">
               <a:buNone/>
             </a:pPr>
             <a:r>
@@ -18239,7 +17996,7 @@
           <a:bodyPr wrap="square" lIns="0" tIns="0" rIns="0" bIns="0" rtlCol="0" anchor="ctr"/>
           <a:lstStyle/>
           <a:p>
-            <a:pPr indent="0" marL="0">
+            <a:pPr marL="0" indent="0">
               <a:buNone/>
             </a:pPr>
             <a:r>
@@ -18278,7 +18035,7 @@
           <a:bodyPr wrap="square" lIns="0" tIns="0" rIns="0" bIns="0" rtlCol="0" anchor="t"/>
           <a:lstStyle/>
           <a:p>
-            <a:pPr indent="0" marL="0">
+            <a:pPr marL="0" indent="0">
               <a:lnSpc>
                 <a:spcPct val="108000"/>
               </a:lnSpc>
@@ -18362,7 +18119,7 @@
           <a:bodyPr wrap="square" lIns="0" tIns="0" rIns="0" bIns="0" rtlCol="0" anchor="ctr"/>
           <a:lstStyle/>
           <a:p>
-            <a:pPr algn="ctr" indent="0" marL="0">
+            <a:pPr marL="0" indent="0" algn="ctr">
               <a:buNone/>
             </a:pPr>
             <a:r>
@@ -18401,7 +18158,7 @@
           <a:bodyPr wrap="square" lIns="0" tIns="0" rIns="0" bIns="0" rtlCol="0" anchor="ctr"/>
           <a:lstStyle/>
           <a:p>
-            <a:pPr indent="0" marL="0">
+            <a:pPr marL="0" indent="0">
               <a:buNone/>
             </a:pPr>
             <a:r>
@@ -18440,7 +18197,7 @@
           <a:bodyPr wrap="square" lIns="0" tIns="0" rIns="0" bIns="0" rtlCol="0" anchor="t"/>
           <a:lstStyle/>
           <a:p>
-            <a:pPr indent="0" marL="0">
+            <a:pPr marL="0" indent="0">
               <a:lnSpc>
                 <a:spcPct val="108000"/>
               </a:lnSpc>
@@ -18463,7 +18220,7 @@
       </p:sp>
       <p:sp>
         <p:nvSpPr>
-          <p:cNvPr id="25" name="Slide Number Placeholder 0"/>
+          <p:cNvPr id="33" name="Slide Number Placeholder 0"/>
           <p:cNvSpPr>
             <a:spLocks noGrp="1"/>
           </p:cNvSpPr>
@@ -18481,7 +18238,7 @@
           </a:prstGeom>
           <a:extLst>
             <a:ext uri="{C572A759-6A51-4108-AA02-DFA0A04FC94B}">
-              <ma14:wrappingTextBoxFlag xmlns:ma14="http://schemas.microsoft.com/office/mac/drawingml/2011/main" val="0"/>
+              <ma14:wrappingTextBoxFlag xmlns:ma14="http://schemas.microsoft.com/office/mac/drawingml/2011/main" xmlns="" val="0"/>
             </a:ext>
           </a:extLst>
         </p:spPr>
@@ -18502,7 +18259,7 @@
           <a:p>
             <a:pPr algn="l"/>
             <a:fld id="{F7021451-1387-4CA6-816F-3879F97B5CBC}" type="slidenum">
-              <a:rPr b="0" lang="en-US"/>
+              <a:rPr lang="en-US" b="0"/>
               <a:t>2</a:t>
             </a:fld>
             <a:endParaRPr lang="en-US"/>
@@ -18577,7 +18334,7 @@
           <a:bodyPr wrap="square" lIns="0" tIns="0" rIns="0" bIns="0" rtlCol="0" anchor="ctr"/>
           <a:lstStyle/>
           <a:p>
-            <a:pPr algn="l" indent="0" marL="0">
+            <a:pPr marL="0" indent="0" algn="l">
               <a:buNone/>
             </a:pPr>
             <a:r>
@@ -18616,7 +18373,7 @@
           <a:bodyPr wrap="square" lIns="0" tIns="0" rIns="0" bIns="0" rtlCol="0" anchor="ctr"/>
           <a:lstStyle/>
           <a:p>
-            <a:pPr indent="0" marL="0">
+            <a:pPr marL="0" indent="0">
               <a:buNone/>
             </a:pPr>
             <a:r>
@@ -18682,11 +18439,11 @@
           <a:bodyPr wrap="square" lIns="0" tIns="0" rIns="0" bIns="0" rtlCol="0" anchor="ctr"/>
           <a:lstStyle/>
           <a:p>
-            <a:pPr algn="ctr" indent="0" marL="0">
-              <a:buNone/>
-            </a:pPr>
-            <a:r>
-              <a:rPr lang="en-US" sz="900" b="1" spc="100" kern="0" dirty="0">
+            <a:pPr marL="0" indent="0" algn="ctr">
+              <a:buNone/>
+            </a:pPr>
+            <a:r>
+              <a:rPr lang="en-US" sz="900" b="1" kern="0" spc="100" dirty="0">
                 <a:solidFill>
                   <a:srgbClr val="5A05F4"/>
                 </a:solidFill>
@@ -18702,14 +18459,14 @@
       </p:sp>
       <p:pic>
         <p:nvPicPr>
-          <p:cNvPr id="7" name="Image 0" descr="preencoded.png">    </p:cNvPr>
+          <p:cNvPr id="7" name="Image 0" descr="preencoded.png"/>
           <p:cNvPicPr>
             <a:picLocks noChangeAspect="1"/>
           </p:cNvPicPr>
           <p:nvPr/>
         </p:nvPicPr>
         <p:blipFill>
-          <a:blip r:embed="rId1"/>
+          <a:blip r:embed="rId3"/>
           <a:stretch>
             <a:fillRect/>
           </a:stretch>
@@ -18767,7 +18524,7 @@
           <a:bodyPr wrap="square" lIns="0" tIns="0" rIns="0" bIns="0" rtlCol="0" anchor="ctr"/>
           <a:lstStyle/>
           <a:p>
-            <a:pPr indent="0" marL="0">
+            <a:pPr marL="0" indent="0">
               <a:buNone/>
             </a:pPr>
             <a:r>
@@ -18806,7 +18563,7 @@
           <a:bodyPr wrap="square" lIns="0" tIns="0" rIns="0" bIns="0" rtlCol="0" anchor="t"/>
           <a:lstStyle/>
           <a:p>
-            <a:pPr indent="0" marL="0">
+            <a:pPr marL="0" indent="0">
               <a:lnSpc>
                 <a:spcPct val="108000"/>
               </a:lnSpc>
@@ -18870,7 +18627,7 @@
           <a:bodyPr wrap="square" lIns="0" tIns="0" rIns="0" bIns="0" rtlCol="0" anchor="ctr"/>
           <a:lstStyle/>
           <a:p>
-            <a:pPr indent="0" marL="0">
+            <a:pPr marL="0" indent="0">
               <a:buNone/>
             </a:pPr>
             <a:r>
@@ -18909,7 +18666,7 @@
           <a:bodyPr wrap="square" lIns="0" tIns="0" rIns="0" bIns="0" rtlCol="0" anchor="t"/>
           <a:lstStyle/>
           <a:p>
-            <a:pPr indent="0" marL="0">
+            <a:pPr marL="0" indent="0">
               <a:lnSpc>
                 <a:spcPct val="108000"/>
               </a:lnSpc>
@@ -18978,11 +18735,11 @@
           <a:bodyPr wrap="square" lIns="0" tIns="0" rIns="0" bIns="0" rtlCol="0" anchor="ctr"/>
           <a:lstStyle/>
           <a:p>
-            <a:pPr indent="0" marL="0">
-              <a:buNone/>
-            </a:pPr>
-            <a:r>
-              <a:rPr lang="en-US" sz="950" b="1" spc="150" kern="0" dirty="0">
+            <a:pPr marL="0" indent="0">
+              <a:buNone/>
+            </a:pPr>
+            <a:r>
+              <a:rPr lang="en-US" sz="950" b="1" kern="0" spc="150" dirty="0">
                 <a:solidFill>
                   <a:srgbClr val="1A4FBF"/>
                 </a:solidFill>
@@ -19017,7 +18774,7 @@
           <a:bodyPr wrap="square" lIns="0" tIns="0" rIns="0" bIns="0" rtlCol="0" anchor="ctr"/>
           <a:lstStyle/>
           <a:p>
-            <a:pPr indent="0" marL="0">
+            <a:pPr marL="0" indent="0">
               <a:lnSpc>
                 <a:spcPct val="112000"/>
               </a:lnSpc>
@@ -19086,7 +18843,7 @@
           <a:bodyPr wrap="square" lIns="0" tIns="0" rIns="0" bIns="0" rtlCol="0" anchor="ctr"/>
           <a:lstStyle/>
           <a:p>
-            <a:pPr indent="0" marL="0">
+            <a:pPr marL="0" indent="0">
               <a:lnSpc>
                 <a:spcPct val="112000"/>
               </a:lnSpc>
@@ -19127,7 +18884,7 @@
           </a:prstGeom>
           <a:extLst>
             <a:ext uri="{C572A759-6A51-4108-AA02-DFA0A04FC94B}">
-              <ma14:wrappingTextBoxFlag xmlns:ma14="http://schemas.microsoft.com/office/mac/drawingml/2011/main" val="0"/>
+              <ma14:wrappingTextBoxFlag xmlns:ma14="http://schemas.microsoft.com/office/mac/drawingml/2011/main" xmlns="" val="0"/>
             </a:ext>
           </a:extLst>
         </p:spPr>
@@ -19148,7 +18905,7 @@
           <a:p>
             <a:pPr algn="l"/>
             <a:fld id="{F7021451-1387-4CA6-816F-3879F97B5CBC}" type="slidenum">
-              <a:rPr b="0" lang="en-US"/>
+              <a:rPr lang="en-US" b="0"/>
               <a:t>20</a:t>
             </a:fld>
             <a:endParaRPr lang="en-US"/>
@@ -19201,11 +18958,11 @@
           <a:bodyPr wrap="square" lIns="0" tIns="0" rIns="0" bIns="0" rtlCol="0" anchor="ctr"/>
           <a:lstStyle/>
           <a:p>
-            <a:pPr indent="0" marL="0">
-              <a:buNone/>
-            </a:pPr>
-            <a:r>
-              <a:rPr lang="en-US" sz="1200" b="1" spc="400" kern="0" dirty="0">
+            <a:pPr marL="0" indent="0">
+              <a:buNone/>
+            </a:pPr>
+            <a:r>
+              <a:rPr lang="en-US" sz="1200" b="1" kern="0" spc="400" dirty="0">
                 <a:solidFill>
                   <a:srgbClr val="FFFFFF"/>
                 </a:solidFill>
@@ -19240,7 +18997,7 @@
           <a:bodyPr wrap="square" lIns="0" tIns="0" rIns="0" bIns="0" rtlCol="0" anchor="ctr"/>
           <a:lstStyle/>
           <a:p>
-            <a:pPr indent="0" marL="0">
+            <a:pPr marL="0" indent="0">
               <a:buNone/>
             </a:pPr>
             <a:r>
@@ -19279,7 +19036,7 @@
           <a:bodyPr wrap="square" lIns="0" tIns="0" rIns="0" bIns="0" rtlCol="0" anchor="t"/>
           <a:lstStyle/>
           <a:p>
-            <a:pPr indent="0" marL="0">
+            <a:pPr marL="0" indent="0">
               <a:buNone/>
             </a:pPr>
             <a:r>
@@ -19340,7 +19097,7 @@
           <a:bodyPr wrap="square" lIns="0" tIns="0" rIns="0" bIns="0" rtlCol="0" anchor="ctr"/>
           <a:lstStyle/>
           <a:p>
-            <a:pPr algn="ctr" indent="0" marL="0">
+            <a:pPr marL="0" indent="0" algn="ctr">
               <a:buNone/>
             </a:pPr>
             <a:r>
@@ -19426,7 +19183,7 @@
           <a:bodyPr wrap="square" lIns="0" tIns="0" rIns="0" bIns="0" rtlCol="0" anchor="ctr"/>
           <a:lstStyle/>
           <a:p>
-            <a:pPr indent="0" marL="0">
+            <a:pPr marL="0" indent="0">
               <a:buNone/>
             </a:pPr>
             <a:r>
@@ -19487,11 +19244,11 @@
           <a:bodyPr wrap="square" lIns="0" tIns="0" rIns="0" bIns="0" rtlCol="0" anchor="ctr"/>
           <a:lstStyle/>
           <a:p>
-            <a:pPr algn="ctr" indent="0" marL="0">
-              <a:buNone/>
-            </a:pPr>
-            <a:r>
-              <a:rPr lang="en-US" sz="900" b="1" spc="100" kern="0" dirty="0">
+            <a:pPr marL="0" indent="0" algn="ctr">
+              <a:buNone/>
+            </a:pPr>
+            <a:r>
+              <a:rPr lang="en-US" sz="900" b="1" kern="0" spc="100" dirty="0">
                 <a:solidFill>
                   <a:srgbClr val="FFFFFF"/>
                 </a:solidFill>
@@ -19507,14 +19264,14 @@
       </p:sp>
       <p:pic>
         <p:nvPicPr>
-          <p:cNvPr id="6" name="Image 0" descr="preencoded.png">    </p:cNvPr>
+          <p:cNvPr id="6" name="Image 0" descr="preencoded.png"/>
           <p:cNvPicPr>
             <a:picLocks noChangeAspect="1"/>
           </p:cNvPicPr>
           <p:nvPr/>
         </p:nvPicPr>
         <p:blipFill>
-          <a:blip r:embed="rId1"/>
+          <a:blip r:embed="rId3"/>
           <a:stretch>
             <a:fillRect/>
           </a:stretch>
@@ -19592,7 +19349,7 @@
           <a:bodyPr wrap="square" lIns="0" tIns="0" rIns="0" bIns="0" rtlCol="0" anchor="ctr"/>
           <a:lstStyle/>
           <a:p>
-            <a:pPr algn="ctr" indent="0" marL="0">
+            <a:pPr marL="0" indent="0" algn="ctr">
               <a:buNone/>
             </a:pPr>
             <a:r>
@@ -19631,7 +19388,7 @@
           <a:bodyPr wrap="square" lIns="0" tIns="0" rIns="0" bIns="0" rtlCol="0" anchor="ctr"/>
           <a:lstStyle/>
           <a:p>
-            <a:pPr indent="0" marL="0">
+            <a:pPr marL="0" indent="0">
               <a:buNone/>
             </a:pPr>
             <a:r>
@@ -19670,7 +19427,7 @@
           <a:bodyPr wrap="square" lIns="0" tIns="0" rIns="0" bIns="0" rtlCol="0" anchor="t"/>
           <a:lstStyle/>
           <a:p>
-            <a:pPr indent="0" marL="0">
+            <a:pPr marL="0" indent="0">
               <a:lnSpc>
                 <a:spcPct val="108000"/>
               </a:lnSpc>
@@ -19754,7 +19511,7 @@
           <a:bodyPr wrap="square" lIns="0" tIns="0" rIns="0" bIns="0" rtlCol="0" anchor="ctr"/>
           <a:lstStyle/>
           <a:p>
-            <a:pPr algn="ctr" indent="0" marL="0">
+            <a:pPr marL="0" indent="0" algn="ctr">
               <a:buNone/>
             </a:pPr>
             <a:r>
@@ -19793,7 +19550,7 @@
           <a:bodyPr wrap="square" lIns="0" tIns="0" rIns="0" bIns="0" rtlCol="0" anchor="ctr"/>
           <a:lstStyle/>
           <a:p>
-            <a:pPr indent="0" marL="0">
+            <a:pPr marL="0" indent="0">
               <a:buNone/>
             </a:pPr>
             <a:r>
@@ -19832,7 +19589,7 @@
           <a:bodyPr wrap="square" lIns="0" tIns="0" rIns="0" bIns="0" rtlCol="0" anchor="t"/>
           <a:lstStyle/>
           <a:p>
-            <a:pPr indent="0" marL="0">
+            <a:pPr marL="0" indent="0">
               <a:lnSpc>
                 <a:spcPct val="108000"/>
               </a:lnSpc>
@@ -19916,7 +19673,7 @@
           <a:bodyPr wrap="square" lIns="0" tIns="0" rIns="0" bIns="0" rtlCol="0" anchor="ctr"/>
           <a:lstStyle/>
           <a:p>
-            <a:pPr algn="ctr" indent="0" marL="0">
+            <a:pPr marL="0" indent="0" algn="ctr">
               <a:buNone/>
             </a:pPr>
             <a:r>
@@ -19955,7 +19712,7 @@
           <a:bodyPr wrap="square" lIns="0" tIns="0" rIns="0" bIns="0" rtlCol="0" anchor="ctr"/>
           <a:lstStyle/>
           <a:p>
-            <a:pPr indent="0" marL="0">
+            <a:pPr marL="0" indent="0">
               <a:buNone/>
             </a:pPr>
             <a:r>
@@ -19994,7 +19751,7 @@
           <a:bodyPr wrap="square" lIns="0" tIns="0" rIns="0" bIns="0" rtlCol="0" anchor="t"/>
           <a:lstStyle/>
           <a:p>
-            <a:pPr indent="0" marL="0">
+            <a:pPr marL="0" indent="0">
               <a:lnSpc>
                 <a:spcPct val="108000"/>
               </a:lnSpc>
@@ -20078,7 +19835,7 @@
           <a:bodyPr wrap="square" lIns="0" tIns="0" rIns="0" bIns="0" rtlCol="0" anchor="ctr"/>
           <a:lstStyle/>
           <a:p>
-            <a:pPr algn="ctr" indent="0" marL="0">
+            <a:pPr marL="0" indent="0" algn="ctr">
               <a:buNone/>
             </a:pPr>
             <a:r>
@@ -20117,7 +19874,7 @@
           <a:bodyPr wrap="square" lIns="0" tIns="0" rIns="0" bIns="0" rtlCol="0" anchor="ctr"/>
           <a:lstStyle/>
           <a:p>
-            <a:pPr indent="0" marL="0">
+            <a:pPr marL="0" indent="0">
               <a:buNone/>
             </a:pPr>
             <a:r>
@@ -20156,7 +19913,7 @@
           <a:bodyPr wrap="square" lIns="0" tIns="0" rIns="0" bIns="0" rtlCol="0" anchor="t"/>
           <a:lstStyle/>
           <a:p>
-            <a:pPr indent="0" marL="0">
+            <a:pPr marL="0" indent="0">
               <a:lnSpc>
                 <a:spcPct val="108000"/>
               </a:lnSpc>
@@ -20220,11 +19977,11 @@
           <a:bodyPr wrap="square" lIns="0" tIns="0" rIns="0" bIns="0" rtlCol="0" anchor="ctr"/>
           <a:lstStyle/>
           <a:p>
-            <a:pPr indent="0" marL="0">
-              <a:buNone/>
-            </a:pPr>
-            <a:r>
-              <a:rPr lang="en-US" sz="950" b="1" spc="150" kern="0" dirty="0">
+            <a:pPr marL="0" indent="0">
+              <a:buNone/>
+            </a:pPr>
+            <a:r>
+              <a:rPr lang="en-US" sz="950" b="1" kern="0" spc="150" dirty="0">
                 <a:solidFill>
                   <a:srgbClr val="FFFFFF"/>
                 </a:solidFill>
@@ -20259,7 +20016,7 @@
           <a:bodyPr wrap="square" lIns="0" tIns="0" rIns="0" bIns="0" rtlCol="0" anchor="ctr"/>
           <a:lstStyle/>
           <a:p>
-            <a:pPr indent="0" marL="0">
+            <a:pPr marL="0" indent="0">
               <a:lnSpc>
                 <a:spcPct val="112000"/>
               </a:lnSpc>
@@ -20282,7 +20039,7 @@
       </p:sp>
       <p:sp>
         <p:nvSpPr>
-          <p:cNvPr id="25" name="Slide Number Placeholder 0"/>
+          <p:cNvPr id="30" name="Slide Number Placeholder 0"/>
           <p:cNvSpPr>
             <a:spLocks noGrp="1"/>
           </p:cNvSpPr>
@@ -20300,7 +20057,7 @@
           </a:prstGeom>
           <a:extLst>
             <a:ext uri="{C572A759-6A51-4108-AA02-DFA0A04FC94B}">
-              <ma14:wrappingTextBoxFlag xmlns:ma14="http://schemas.microsoft.com/office/mac/drawingml/2011/main" val="0"/>
+              <ma14:wrappingTextBoxFlag xmlns:ma14="http://schemas.microsoft.com/office/mac/drawingml/2011/main" xmlns="" val="0"/>
             </a:ext>
           </a:extLst>
         </p:spPr>
@@ -20321,7 +20078,7 @@
           <a:p>
             <a:pPr algn="l"/>
             <a:fld id="{F7021451-1387-4CA6-816F-3879F97B5CBC}" type="slidenum">
-              <a:rPr b="0" lang="en-US"/>
+              <a:rPr lang="en-US" b="0"/>
               <a:t>22</a:t>
             </a:fld>
             <a:endParaRPr lang="en-US"/>
@@ -20396,7 +20153,7 @@
           <a:bodyPr wrap="square" lIns="0" tIns="0" rIns="0" bIns="0" rtlCol="0" anchor="ctr"/>
           <a:lstStyle/>
           <a:p>
-            <a:pPr indent="0" marL="0">
+            <a:pPr marL="0" indent="0">
               <a:buNone/>
             </a:pPr>
             <a:r>
@@ -20457,11 +20214,11 @@
           <a:bodyPr wrap="square" lIns="0" tIns="0" rIns="0" bIns="0" rtlCol="0" anchor="ctr"/>
           <a:lstStyle/>
           <a:p>
-            <a:pPr algn="ctr" indent="0" marL="0">
-              <a:buNone/>
-            </a:pPr>
-            <a:r>
-              <a:rPr lang="en-US" sz="900" b="1" spc="100" kern="0" dirty="0">
+            <a:pPr marL="0" indent="0" algn="ctr">
+              <a:buNone/>
+            </a:pPr>
+            <a:r>
+              <a:rPr lang="en-US" sz="900" b="1" kern="0" spc="100" dirty="0">
                 <a:solidFill>
                   <a:srgbClr val="FFFFFF"/>
                 </a:solidFill>
@@ -20477,14 +20234,14 @@
       </p:sp>
       <p:pic>
         <p:nvPicPr>
-          <p:cNvPr id="6" name="Image 0" descr="preencoded.png">    </p:cNvPr>
+          <p:cNvPr id="6" name="Image 0" descr="preencoded.png"/>
           <p:cNvPicPr>
             <a:picLocks noChangeAspect="1"/>
           </p:cNvPicPr>
           <p:nvPr/>
         </p:nvPicPr>
         <p:blipFill>
-          <a:blip r:embed="rId1"/>
+          <a:blip r:embed="rId3"/>
           <a:stretch>
             <a:fillRect/>
           </a:stretch>
@@ -20540,7 +20297,7 @@
           <a:bodyPr wrap="square" lIns="0" tIns="0" rIns="0" bIns="0" rtlCol="0" anchor="ctr"/>
           <a:lstStyle/>
           <a:p>
-            <a:pPr algn="ctr" indent="0" marL="0">
+            <a:pPr marL="0" indent="0" algn="ctr">
               <a:buNone/>
             </a:pPr>
             <a:r>
@@ -20579,7 +20336,7 @@
           <a:bodyPr wrap="square" lIns="0" tIns="0" rIns="0" bIns="0" rtlCol="0" anchor="ctr"/>
           <a:lstStyle/>
           <a:p>
-            <a:pPr indent="0" marL="0">
+            <a:pPr marL="0" indent="0">
               <a:buNone/>
             </a:pPr>
             <a:r>
@@ -20593,9 +20350,6 @@
               </a:rPr>
               <a:t>Порахувати руками  </a:t>
             </a:r>
-            <a:pPr indent="0" marL="0">
-              <a:buNone/>
-            </a:pPr>
             <a:r>
               <a:rPr lang="en-US" sz="1200" dirty="0">
                 <a:solidFill>
@@ -20652,7 +20406,7 @@
           <a:bodyPr wrap="square" lIns="0" tIns="0" rIns="0" bIns="0" rtlCol="0" anchor="ctr"/>
           <a:lstStyle/>
           <a:p>
-            <a:pPr algn="ctr" indent="0" marL="0">
+            <a:pPr marL="0" indent="0" algn="ctr">
               <a:buNone/>
             </a:pPr>
             <a:r>
@@ -20691,7 +20445,7 @@
           <a:bodyPr wrap="square" lIns="0" tIns="0" rIns="0" bIns="0" rtlCol="0" anchor="ctr"/>
           <a:lstStyle/>
           <a:p>
-            <a:pPr indent="0" marL="0">
+            <a:pPr marL="0" indent="0">
               <a:buNone/>
             </a:pPr>
             <a:r>
@@ -20705,9 +20459,6 @@
               </a:rPr>
               <a:t>Оживити /observability  </a:t>
             </a:r>
-            <a:pPr indent="0" marL="0">
-              <a:buNone/>
-            </a:pPr>
             <a:r>
               <a:rPr lang="en-US" sz="1200" dirty="0">
                 <a:solidFill>
@@ -20764,7 +20515,7 @@
           <a:bodyPr wrap="square" lIns="0" tIns="0" rIns="0" bIns="0" rtlCol="0" anchor="ctr"/>
           <a:lstStyle/>
           <a:p>
-            <a:pPr algn="ctr" indent="0" marL="0">
+            <a:pPr marL="0" indent="0" algn="ctr">
               <a:buNone/>
             </a:pPr>
             <a:r>
@@ -20803,7 +20554,7 @@
           <a:bodyPr wrap="square" lIns="0" tIns="0" rIns="0" bIns="0" rtlCol="0" anchor="ctr"/>
           <a:lstStyle/>
           <a:p>
-            <a:pPr indent="0" marL="0">
+            <a:pPr marL="0" indent="0">
               <a:buNone/>
             </a:pPr>
             <a:r>
@@ -20817,9 +20568,6 @@
               </a:rPr>
               <a:t>Звірити плитки з SQL  </a:t>
             </a:r>
-            <a:pPr indent="0" marL="0">
-              <a:buNone/>
-            </a:pPr>
             <a:r>
               <a:rPr lang="en-US" sz="1200" dirty="0">
                 <a:solidFill>
@@ -20876,7 +20624,7 @@
           <a:bodyPr wrap="square" lIns="0" tIns="0" rIns="0" bIns="0" rtlCol="0" anchor="ctr"/>
           <a:lstStyle/>
           <a:p>
-            <a:pPr algn="ctr" indent="0" marL="0">
+            <a:pPr marL="0" indent="0" algn="ctr">
               <a:buNone/>
             </a:pPr>
             <a:r>
@@ -20915,7 +20663,7 @@
           <a:bodyPr wrap="square" lIns="0" tIns="0" rIns="0" bIns="0" rtlCol="0" anchor="ctr"/>
           <a:lstStyle/>
           <a:p>
-            <a:pPr indent="0" marL="0">
+            <a:pPr marL="0" indent="0">
               <a:buNone/>
             </a:pPr>
             <a:r>
@@ -20929,9 +20677,6 @@
               </a:rPr>
               <a:t>Відтворити «детектива»  </a:t>
             </a:r>
-            <a:pPr indent="0" marL="0">
-              <a:buNone/>
-            </a:pPr>
             <a:r>
               <a:rPr lang="en-US" sz="1200" dirty="0">
                 <a:solidFill>
@@ -20988,7 +20733,7 @@
           <a:bodyPr wrap="square" lIns="0" tIns="0" rIns="0" bIns="0" rtlCol="0" anchor="ctr"/>
           <a:lstStyle/>
           <a:p>
-            <a:pPr algn="ctr" indent="0" marL="0">
+            <a:pPr marL="0" indent="0" algn="ctr">
               <a:buNone/>
             </a:pPr>
             <a:r>
@@ -21027,7 +20772,7 @@
           <a:bodyPr wrap="square" lIns="0" tIns="0" rIns="0" bIns="0" rtlCol="0" anchor="ctr"/>
           <a:lstStyle/>
           <a:p>
-            <a:pPr indent="0" marL="0">
+            <a:pPr marL="0" indent="0">
               <a:buNone/>
             </a:pPr>
             <a:r>
@@ -21041,9 +20786,6 @@
               </a:rPr>
               <a:t>Таксономія помилок · опційно  </a:t>
             </a:r>
-            <a:pPr indent="0" marL="0">
-              <a:buNone/>
-            </a:pPr>
             <a:r>
               <a:rPr lang="en-US" sz="1200" dirty="0">
                 <a:solidFill>
@@ -21079,7 +20821,7 @@
           </a:prstGeom>
           <a:extLst>
             <a:ext uri="{C572A759-6A51-4108-AA02-DFA0A04FC94B}">
-              <ma14:wrappingTextBoxFlag xmlns:ma14="http://schemas.microsoft.com/office/mac/drawingml/2011/main" val="0"/>
+              <ma14:wrappingTextBoxFlag xmlns:ma14="http://schemas.microsoft.com/office/mac/drawingml/2011/main" xmlns="" val="0"/>
             </a:ext>
           </a:extLst>
         </p:spPr>
@@ -21100,7 +20842,7 @@
           <a:p>
             <a:pPr algn="l"/>
             <a:fld id="{F7021451-1387-4CA6-816F-3879F97B5CBC}" type="slidenum">
-              <a:rPr b="0" lang="en-US"/>
+              <a:rPr lang="en-US" b="0"/>
               <a:t>23</a:t>
             </a:fld>
             <a:endParaRPr lang="en-US"/>
@@ -21153,11 +20895,11 @@
           <a:bodyPr wrap="square" lIns="0" tIns="0" rIns="0" bIns="0" rtlCol="0" anchor="ctr"/>
           <a:lstStyle/>
           <a:p>
-            <a:pPr indent="0" marL="0">
-              <a:buNone/>
-            </a:pPr>
-            <a:r>
-              <a:rPr lang="en-US" sz="1200" b="1" spc="400" kern="0" dirty="0">
+            <a:pPr marL="0" indent="0">
+              <a:buNone/>
+            </a:pPr>
+            <a:r>
+              <a:rPr lang="en-US" sz="1200" b="1" kern="0" spc="400" dirty="0">
                 <a:solidFill>
                   <a:srgbClr val="FFFFFF"/>
                 </a:solidFill>
@@ -21192,7 +20934,7 @@
           <a:bodyPr wrap="square" lIns="0" tIns="0" rIns="0" bIns="0" rtlCol="0" anchor="ctr"/>
           <a:lstStyle/>
           <a:p>
-            <a:pPr indent="0" marL="0">
+            <a:pPr marL="0" indent="0">
               <a:buNone/>
             </a:pPr>
             <a:r>
@@ -21231,7 +20973,7 @@
           <a:bodyPr wrap="square" lIns="0" tIns="0" rIns="0" bIns="0" rtlCol="0" anchor="t"/>
           <a:lstStyle/>
           <a:p>
-            <a:pPr indent="0" marL="0">
+            <a:pPr marL="0" indent="0">
               <a:buNone/>
             </a:pPr>
             <a:r>
@@ -21317,7 +21059,7 @@
           <a:bodyPr wrap="square" lIns="0" tIns="0" rIns="0" bIns="0" rtlCol="0" anchor="ctr"/>
           <a:lstStyle/>
           <a:p>
-            <a:pPr indent="0" marL="0">
+            <a:pPr marL="0" indent="0">
               <a:buNone/>
             </a:pPr>
             <a:r>
@@ -21383,11 +21125,11 @@
           <a:bodyPr wrap="square" lIns="0" tIns="0" rIns="0" bIns="0" rtlCol="0" anchor="ctr"/>
           <a:lstStyle/>
           <a:p>
-            <a:pPr algn="ctr" indent="0" marL="0">
-              <a:buNone/>
-            </a:pPr>
-            <a:r>
-              <a:rPr lang="en-US" sz="900" b="1" spc="100" kern="0" dirty="0">
+            <a:pPr marL="0" indent="0" algn="ctr">
+              <a:buNone/>
+            </a:pPr>
+            <a:r>
+              <a:rPr lang="en-US" sz="900" b="1" kern="0" spc="100" dirty="0">
                 <a:solidFill>
                   <a:srgbClr val="1A4FBF"/>
                 </a:solidFill>
@@ -21403,14 +21145,14 @@
       </p:sp>
       <p:pic>
         <p:nvPicPr>
-          <p:cNvPr id="6" name="Image 0" descr="preencoded.png">    </p:cNvPr>
+          <p:cNvPr id="6" name="Image 0" descr="preencoded.png"/>
           <p:cNvPicPr>
             <a:picLocks noChangeAspect="1"/>
           </p:cNvPicPr>
           <p:nvPr/>
         </p:nvPicPr>
         <p:blipFill>
-          <a:blip r:embed="rId1"/>
+          <a:blip r:embed="rId3"/>
           <a:stretch>
             <a:fillRect/>
           </a:stretch>
@@ -21468,7 +21210,7 @@
           <a:bodyPr wrap="square" lIns="0" tIns="0" rIns="0" bIns="0" rtlCol="0" anchor="ctr"/>
           <a:lstStyle/>
           <a:p>
-            <a:pPr indent="0" marL="0">
+            <a:pPr marL="0" indent="0">
               <a:buNone/>
             </a:pPr>
             <a:r>
@@ -21507,7 +21249,7 @@
           <a:bodyPr wrap="square" lIns="0" tIns="0" rIns="0" bIns="0" rtlCol="0" anchor="t"/>
           <a:lstStyle/>
           <a:p>
-            <a:pPr indent="0" marL="0">
+            <a:pPr marL="0" indent="0">
               <a:lnSpc>
                 <a:spcPct val="108000"/>
               </a:lnSpc>
@@ -21571,7 +21313,7 @@
           <a:bodyPr wrap="square" lIns="0" tIns="0" rIns="0" bIns="0" rtlCol="0" anchor="ctr"/>
           <a:lstStyle/>
           <a:p>
-            <a:pPr indent="0" marL="0">
+            <a:pPr marL="0" indent="0">
               <a:buNone/>
             </a:pPr>
             <a:r>
@@ -21610,7 +21352,7 @@
           <a:bodyPr wrap="square" lIns="0" tIns="0" rIns="0" bIns="0" rtlCol="0" anchor="t"/>
           <a:lstStyle/>
           <a:p>
-            <a:pPr indent="0" marL="0">
+            <a:pPr marL="0" indent="0">
               <a:lnSpc>
                 <a:spcPct val="108000"/>
               </a:lnSpc>
@@ -21674,7 +21416,7 @@
           <a:bodyPr wrap="square" lIns="0" tIns="0" rIns="0" bIns="0" rtlCol="0" anchor="ctr"/>
           <a:lstStyle/>
           <a:p>
-            <a:pPr indent="0" marL="0">
+            <a:pPr marL="0" indent="0">
               <a:buNone/>
             </a:pPr>
             <a:r>
@@ -21713,7 +21455,7 @@
           <a:bodyPr wrap="square" lIns="0" tIns="0" rIns="0" bIns="0" rtlCol="0" anchor="t"/>
           <a:lstStyle/>
           <a:p>
-            <a:pPr indent="0" marL="0">
+            <a:pPr marL="0" indent="0">
               <a:lnSpc>
                 <a:spcPct val="108000"/>
               </a:lnSpc>
@@ -21782,7 +21524,7 @@
           <a:bodyPr wrap="square" lIns="0" tIns="0" rIns="0" bIns="0" rtlCol="0" anchor="ctr"/>
           <a:lstStyle/>
           <a:p>
-            <a:pPr indent="0" marL="0">
+            <a:pPr marL="0" indent="0">
               <a:lnSpc>
                 <a:spcPct val="112000"/>
               </a:lnSpc>
@@ -21823,7 +21565,7 @@
           </a:prstGeom>
           <a:extLst>
             <a:ext uri="{C572A759-6A51-4108-AA02-DFA0A04FC94B}">
-              <ma14:wrappingTextBoxFlag xmlns:ma14="http://schemas.microsoft.com/office/mac/drawingml/2011/main" val="0"/>
+              <ma14:wrappingTextBoxFlag xmlns:ma14="http://schemas.microsoft.com/office/mac/drawingml/2011/main" xmlns="" val="0"/>
             </a:ext>
           </a:extLst>
         </p:spPr>
@@ -21844,7 +21586,7 @@
           <a:p>
             <a:pPr algn="l"/>
             <a:fld id="{F7021451-1387-4CA6-816F-3879F97B5CBC}" type="slidenum">
-              <a:rPr b="0" lang="en-US"/>
+              <a:rPr lang="en-US" b="0"/>
               <a:t>25</a:t>
             </a:fld>
             <a:endParaRPr lang="en-US"/>
@@ -21919,7 +21661,7 @@
           <a:bodyPr wrap="square" lIns="0" tIns="0" rIns="0" bIns="0" rtlCol="0" anchor="ctr"/>
           <a:lstStyle/>
           <a:p>
-            <a:pPr indent="0" marL="0">
+            <a:pPr marL="0" indent="0">
               <a:buNone/>
             </a:pPr>
             <a:r>
@@ -21985,11 +21727,11 @@
           <a:bodyPr wrap="square" lIns="0" tIns="0" rIns="0" bIns="0" rtlCol="0" anchor="ctr"/>
           <a:lstStyle/>
           <a:p>
-            <a:pPr algn="ctr" indent="0" marL="0">
-              <a:buNone/>
-            </a:pPr>
-            <a:r>
-              <a:rPr lang="en-US" sz="900" b="1" spc="100" kern="0" dirty="0">
+            <a:pPr marL="0" indent="0" algn="ctr">
+              <a:buNone/>
+            </a:pPr>
+            <a:r>
+              <a:rPr lang="en-US" sz="900" b="1" kern="0" spc="100" dirty="0">
                 <a:solidFill>
                   <a:srgbClr val="1A4FBF"/>
                 </a:solidFill>
@@ -22005,14 +21747,14 @@
       </p:sp>
       <p:pic>
         <p:nvPicPr>
-          <p:cNvPr id="6" name="Image 0" descr="preencoded.png">    </p:cNvPr>
+          <p:cNvPr id="6" name="Image 0" descr="preencoded.png"/>
           <p:cNvPicPr>
             <a:picLocks noChangeAspect="1"/>
           </p:cNvPicPr>
           <p:nvPr/>
         </p:nvPicPr>
         <p:blipFill>
-          <a:blip r:embed="rId1"/>
+          <a:blip r:embed="rId3"/>
           <a:stretch>
             <a:fillRect/>
           </a:stretch>
@@ -22142,7 +21884,7 @@
           <a:bodyPr wrap="square" lIns="0" tIns="0" rIns="0" bIns="0" rtlCol="0" anchor="ctr"/>
           <a:lstStyle/>
           <a:p>
-            <a:pPr indent="0" marL="0">
+            <a:pPr marL="0" indent="0">
               <a:buNone/>
             </a:pPr>
             <a:r>
@@ -22248,7 +21990,7 @@
           <a:bodyPr wrap="square" lIns="0" tIns="0" rIns="0" bIns="0" rtlCol="0" anchor="ctr"/>
           <a:lstStyle/>
           <a:p>
-            <a:pPr indent="0" marL="0">
+            <a:pPr marL="0" indent="0">
               <a:buNone/>
             </a:pPr>
             <a:r>
@@ -22354,7 +22096,7 @@
           <a:bodyPr wrap="square" lIns="0" tIns="0" rIns="0" bIns="0" rtlCol="0" anchor="ctr"/>
           <a:lstStyle/>
           <a:p>
-            <a:pPr indent="0" marL="0">
+            <a:pPr marL="0" indent="0">
               <a:buNone/>
             </a:pPr>
             <a:r>
@@ -22460,7 +22202,7 @@
           <a:bodyPr wrap="square" lIns="0" tIns="0" rIns="0" bIns="0" rtlCol="0" anchor="ctr"/>
           <a:lstStyle/>
           <a:p>
-            <a:pPr indent="0" marL="0">
+            <a:pPr marL="0" indent="0">
               <a:buNone/>
             </a:pPr>
             <a:r>
@@ -22499,7 +22241,7 @@
           <a:bodyPr wrap="square" lIns="0" tIns="0" rIns="0" bIns="0" rtlCol="0" anchor="ctr"/>
           <a:lstStyle/>
           <a:p>
-            <a:pPr indent="0" marL="0">
+            <a:pPr marL="0" indent="0">
               <a:buNone/>
             </a:pPr>
             <a:r>
@@ -22537,7 +22279,7 @@
           </a:prstGeom>
           <a:extLst>
             <a:ext uri="{C572A759-6A51-4108-AA02-DFA0A04FC94B}">
-              <ma14:wrappingTextBoxFlag xmlns:ma14="http://schemas.microsoft.com/office/mac/drawingml/2011/main" val="0"/>
+              <ma14:wrappingTextBoxFlag xmlns:ma14="http://schemas.microsoft.com/office/mac/drawingml/2011/main" xmlns="" val="0"/>
             </a:ext>
           </a:extLst>
         </p:spPr>
@@ -22558,7 +22300,7 @@
           <a:p>
             <a:pPr algn="l"/>
             <a:fld id="{F7021451-1387-4CA6-816F-3879F97B5CBC}" type="slidenum">
-              <a:rPr b="0" lang="en-US"/>
+              <a:rPr lang="en-US" b="0"/>
               <a:t>26</a:t>
             </a:fld>
             <a:endParaRPr lang="en-US"/>
@@ -22633,7 +22375,7 @@
           <a:bodyPr wrap="square" lIns="0" tIns="0" rIns="0" bIns="0" rtlCol="0" anchor="ctr"/>
           <a:lstStyle/>
           <a:p>
-            <a:pPr indent="0" marL="0">
+            <a:pPr marL="0" indent="0">
               <a:buNone/>
             </a:pPr>
             <a:r>
@@ -22699,11 +22441,11 @@
           <a:bodyPr wrap="square" lIns="0" tIns="0" rIns="0" bIns="0" rtlCol="0" anchor="ctr"/>
           <a:lstStyle/>
           <a:p>
-            <a:pPr algn="ctr" indent="0" marL="0">
-              <a:buNone/>
-            </a:pPr>
-            <a:r>
-              <a:rPr lang="en-US" sz="900" b="1" spc="100" kern="0" dirty="0">
+            <a:pPr marL="0" indent="0" algn="ctr">
+              <a:buNone/>
+            </a:pPr>
+            <a:r>
+              <a:rPr lang="en-US" sz="900" b="1" kern="0" spc="100" dirty="0">
                 <a:solidFill>
                   <a:srgbClr val="1A4FBF"/>
                 </a:solidFill>
@@ -22719,14 +22461,14 @@
       </p:sp>
       <p:pic>
         <p:nvPicPr>
-          <p:cNvPr id="6" name="Image 0" descr="preencoded.png">    </p:cNvPr>
+          <p:cNvPr id="6" name="Image 0" descr="preencoded.png"/>
           <p:cNvPicPr>
             <a:picLocks noChangeAspect="1"/>
           </p:cNvPicPr>
           <p:nvPr/>
         </p:nvPicPr>
         <p:blipFill>
-          <a:blip r:embed="rId1"/>
+          <a:blip r:embed="rId3"/>
           <a:stretch>
             <a:fillRect/>
           </a:stretch>
@@ -22854,7 +22596,7 @@
           <a:bodyPr wrap="square" lIns="0" tIns="0" rIns="0" bIns="0" rtlCol="0" anchor="ctr"/>
           <a:lstStyle/>
           <a:p>
-            <a:pPr indent="0" marL="0">
+            <a:pPr marL="0" indent="0">
               <a:buNone/>
             </a:pPr>
             <a:r>
@@ -22868,9 +22610,6 @@
               </a:rPr>
               <a:t>Алерт на середню latency   </a:t>
             </a:r>
-            <a:pPr indent="0" marL="0">
-              <a:buNone/>
-            </a:pPr>
             <a:r>
               <a:rPr lang="en-US" sz="1150" dirty="0">
                 <a:solidFill>
@@ -22999,7 +22738,7 @@
           <a:bodyPr wrap="square" lIns="0" tIns="0" rIns="0" bIns="0" rtlCol="0" anchor="ctr"/>
           <a:lstStyle/>
           <a:p>
-            <a:pPr indent="0" marL="0">
+            <a:pPr marL="0" indent="0">
               <a:buNone/>
             </a:pPr>
             <a:r>
@@ -23013,9 +22752,6 @@
               </a:rPr>
               <a:t>Алерт на кожну помилку   </a:t>
             </a:r>
-            <a:pPr indent="0" marL="0">
-              <a:buNone/>
-            </a:pPr>
             <a:r>
               <a:rPr lang="en-US" sz="1150" dirty="0">
                 <a:solidFill>
@@ -23144,7 +22880,7 @@
           <a:bodyPr wrap="square" lIns="0" tIns="0" rIns="0" bIns="0" rtlCol="0" anchor="ctr"/>
           <a:lstStyle/>
           <a:p>
-            <a:pPr indent="0" marL="0">
+            <a:pPr marL="0" indent="0">
               <a:buNone/>
             </a:pPr>
             <a:r>
@@ -23158,9 +22894,6 @@
               </a:rPr>
               <a:t>Плитка без питання   </a:t>
             </a:r>
-            <a:pPr indent="0" marL="0">
-              <a:buNone/>
-            </a:pPr>
             <a:r>
               <a:rPr lang="en-US" sz="1150" dirty="0">
                 <a:solidFill>
@@ -23289,7 +23022,7 @@
           <a:bodyPr wrap="square" lIns="0" tIns="0" rIns="0" bIns="0" rtlCol="0" anchor="ctr"/>
           <a:lstStyle/>
           <a:p>
-            <a:pPr indent="0" marL="0">
+            <a:pPr marL="0" indent="0">
               <a:buNone/>
             </a:pPr>
             <a:r>
@@ -23303,9 +23036,6 @@
               </a:rPr>
               <a:t>Статус провайдера прибитий до «ok»   </a:t>
             </a:r>
-            <a:pPr indent="0" marL="0">
-              <a:buNone/>
-            </a:pPr>
             <a:r>
               <a:rPr lang="en-US" sz="1150" dirty="0">
                 <a:solidFill>
@@ -23434,7 +23164,7 @@
           <a:bodyPr wrap="square" lIns="0" tIns="0" rIns="0" bIns="0" rtlCol="0" anchor="ctr"/>
           <a:lstStyle/>
           <a:p>
-            <a:pPr indent="0" marL="0">
+            <a:pPr marL="0" indent="0">
               <a:buNone/>
             </a:pPr>
             <a:r>
@@ -23448,9 +23178,6 @@
               </a:rPr>
               <a:t>User_id у мітках метрик   </a:t>
             </a:r>
-            <a:pPr indent="0" marL="0">
-              <a:buNone/>
-            </a:pPr>
             <a:r>
               <a:rPr lang="en-US" sz="1150" dirty="0">
                 <a:solidFill>
@@ -23468,7 +23195,7 @@
       </p:sp>
       <p:sp>
         <p:nvSpPr>
-          <p:cNvPr id="25" name="Slide Number Placeholder 0"/>
+          <p:cNvPr id="32" name="Slide Number Placeholder 0"/>
           <p:cNvSpPr>
             <a:spLocks noGrp="1"/>
           </p:cNvSpPr>
@@ -23486,7 +23213,7 @@
           </a:prstGeom>
           <a:extLst>
             <a:ext uri="{C572A759-6A51-4108-AA02-DFA0A04FC94B}">
-              <ma14:wrappingTextBoxFlag xmlns:ma14="http://schemas.microsoft.com/office/mac/drawingml/2011/main" val="0"/>
+              <ma14:wrappingTextBoxFlag xmlns:ma14="http://schemas.microsoft.com/office/mac/drawingml/2011/main" xmlns="" val="0"/>
             </a:ext>
           </a:extLst>
         </p:spPr>
@@ -23507,7 +23234,7 @@
           <a:p>
             <a:pPr algn="l"/>
             <a:fld id="{F7021451-1387-4CA6-816F-3879F97B5CBC}" type="slidenum">
-              <a:rPr b="0" lang="en-US"/>
+              <a:rPr lang="en-US" b="0"/>
               <a:t>27</a:t>
             </a:fld>
             <a:endParaRPr lang="en-US"/>
@@ -23582,7 +23309,7 @@
           <a:bodyPr wrap="square" lIns="0" tIns="0" rIns="0" bIns="0" rtlCol="0" anchor="ctr"/>
           <a:lstStyle/>
           <a:p>
-            <a:pPr indent="0" marL="0">
+            <a:pPr marL="0" indent="0">
               <a:buNone/>
             </a:pPr>
             <a:r>
@@ -23643,11 +23370,11 @@
           <a:bodyPr wrap="square" lIns="0" tIns="0" rIns="0" bIns="0" rtlCol="0" anchor="ctr"/>
           <a:lstStyle/>
           <a:p>
-            <a:pPr algn="ctr" indent="0" marL="0">
-              <a:buNone/>
-            </a:pPr>
-            <a:r>
-              <a:rPr lang="en-US" sz="900" b="1" spc="100" kern="0" dirty="0">
+            <a:pPr marL="0" indent="0" algn="ctr">
+              <a:buNone/>
+            </a:pPr>
+            <a:r>
+              <a:rPr lang="en-US" sz="900" b="1" kern="0" spc="100" dirty="0">
                 <a:solidFill>
                   <a:srgbClr val="FFFFFF"/>
                 </a:solidFill>
@@ -23663,14 +23390,14 @@
       </p:sp>
       <p:pic>
         <p:nvPicPr>
-          <p:cNvPr id="6" name="Image 0" descr="preencoded.png">    </p:cNvPr>
+          <p:cNvPr id="6" name="Image 0" descr="preencoded.png"/>
           <p:cNvPicPr>
             <a:picLocks noChangeAspect="1"/>
           </p:cNvPicPr>
           <p:nvPr/>
         </p:nvPicPr>
         <p:blipFill>
-          <a:blip r:embed="rId1"/>
+          <a:blip r:embed="rId3"/>
           <a:stretch>
             <a:fillRect/>
           </a:stretch>
@@ -23728,7 +23455,7 @@
           <a:bodyPr wrap="square" lIns="0" tIns="0" rIns="0" bIns="0" rtlCol="0" anchor="ctr"/>
           <a:lstStyle/>
           <a:p>
-            <a:pPr indent="0" marL="0">
+            <a:pPr marL="0" indent="0">
               <a:buNone/>
             </a:pPr>
             <a:r>
@@ -23767,7 +23494,7 @@
           <a:bodyPr wrap="square" lIns="0" tIns="0" rIns="0" bIns="0" rtlCol="0" anchor="t"/>
           <a:lstStyle/>
           <a:p>
-            <a:pPr indent="0" marL="0">
+            <a:pPr marL="0" indent="0">
               <a:lnSpc>
                 <a:spcPct val="108000"/>
               </a:lnSpc>
@@ -23787,7 +23514,7 @@
             <a:endParaRPr lang="en-US" sz="1200" dirty="0"/>
           </a:p>
           <a:p>
-            <a:pPr indent="0" marL="0">
+            <a:pPr marL="0" indent="0">
               <a:lnSpc>
                 <a:spcPct val="108000"/>
               </a:lnSpc>
@@ -23796,7 +23523,7 @@
             <a:endParaRPr lang="en-US" sz="1200" dirty="0"/>
           </a:p>
           <a:p>
-            <a:pPr indent="0" marL="0">
+            <a:pPr marL="0" indent="0">
               <a:lnSpc>
                 <a:spcPct val="108000"/>
               </a:lnSpc>
@@ -23816,7 +23543,7 @@
             <a:endParaRPr lang="en-US" sz="1200" dirty="0"/>
           </a:p>
           <a:p>
-            <a:pPr indent="0" marL="0">
+            <a:pPr marL="0" indent="0">
               <a:lnSpc>
                 <a:spcPct val="108000"/>
               </a:lnSpc>
@@ -23825,7 +23552,7 @@
             <a:endParaRPr lang="en-US" sz="1200" dirty="0"/>
           </a:p>
           <a:p>
-            <a:pPr indent="0" marL="0">
+            <a:pPr marL="0" indent="0">
               <a:lnSpc>
                 <a:spcPct val="108000"/>
               </a:lnSpc>
@@ -23889,7 +23616,7 @@
           <a:bodyPr wrap="square" lIns="0" tIns="0" rIns="0" bIns="0" rtlCol="0" anchor="ctr"/>
           <a:lstStyle/>
           <a:p>
-            <a:pPr indent="0" marL="0">
+            <a:pPr marL="0" indent="0">
               <a:buNone/>
             </a:pPr>
             <a:r>
@@ -23928,7 +23655,7 @@
           <a:bodyPr wrap="square" lIns="0" tIns="0" rIns="0" bIns="0" rtlCol="0" anchor="t"/>
           <a:lstStyle/>
           <a:p>
-            <a:pPr indent="0" marL="0">
+            <a:pPr marL="0" indent="0">
               <a:lnSpc>
                 <a:spcPct val="108000"/>
               </a:lnSpc>
@@ -23997,7 +23724,7 @@
           <a:bodyPr wrap="square" lIns="0" tIns="0" rIns="0" bIns="0" rtlCol="0" anchor="ctr"/>
           <a:lstStyle/>
           <a:p>
-            <a:pPr indent="0" marL="0">
+            <a:pPr marL="0" indent="0">
               <a:buNone/>
             </a:pPr>
             <a:r>
@@ -24036,7 +23763,7 @@
           <a:bodyPr wrap="square" lIns="0" tIns="0" rIns="0" bIns="0" rtlCol="0" anchor="t"/>
           <a:lstStyle/>
           <a:p>
-            <a:pPr indent="0" marL="0">
+            <a:pPr marL="0" indent="0">
               <a:buNone/>
             </a:pPr>
             <a:r>
@@ -24074,7 +23801,7 @@
           </a:prstGeom>
           <a:extLst>
             <a:ext uri="{C572A759-6A51-4108-AA02-DFA0A04FC94B}">
-              <ma14:wrappingTextBoxFlag xmlns:ma14="http://schemas.microsoft.com/office/mac/drawingml/2011/main" val="0"/>
+              <ma14:wrappingTextBoxFlag xmlns:ma14="http://schemas.microsoft.com/office/mac/drawingml/2011/main" xmlns="" val="0"/>
             </a:ext>
           </a:extLst>
         </p:spPr>
@@ -24095,7 +23822,7 @@
           <a:p>
             <a:pPr algn="l"/>
             <a:fld id="{F7021451-1387-4CA6-816F-3879F97B5CBC}" type="slidenum">
-              <a:rPr b="0" lang="en-US"/>
+              <a:rPr lang="en-US" b="0"/>
               <a:t>28</a:t>
             </a:fld>
             <a:endParaRPr lang="en-US"/>
@@ -24148,11 +23875,11 @@
           <a:bodyPr wrap="square" lIns="0" tIns="0" rIns="0" bIns="0" rtlCol="0" anchor="ctr"/>
           <a:lstStyle/>
           <a:p>
-            <a:pPr indent="0" marL="0">
-              <a:buNone/>
-            </a:pPr>
-            <a:r>
-              <a:rPr lang="en-US" sz="1200" b="1" spc="400" kern="0" dirty="0">
+            <a:pPr marL="0" indent="0">
+              <a:buNone/>
+            </a:pPr>
+            <a:r>
+              <a:rPr lang="en-US" sz="1200" b="1" kern="0" spc="400" dirty="0">
                 <a:solidFill>
                   <a:srgbClr val="FFFFFF"/>
                 </a:solidFill>
@@ -24187,11 +23914,11 @@
           <a:bodyPr wrap="square" lIns="0" tIns="0" rIns="0" bIns="0" rtlCol="0" anchor="ctr"/>
           <a:lstStyle/>
           <a:p>
-            <a:pPr indent="0" marL="0">
-              <a:buNone/>
-            </a:pPr>
-            <a:r>
-              <a:rPr lang="en-US" sz="1100" b="1" spc="300" kern="0" dirty="0">
+            <a:pPr marL="0" indent="0">
+              <a:buNone/>
+            </a:pPr>
+            <a:r>
+              <a:rPr lang="en-US" sz="1100" b="1" kern="0" spc="300" dirty="0">
                 <a:solidFill>
                   <a:srgbClr val="C4B3F5"/>
                 </a:solidFill>
@@ -24246,7 +23973,7 @@
           <a:bodyPr wrap="square" lIns="0" tIns="0" rIns="0" bIns="0" rtlCol="0" anchor="t"/>
           <a:lstStyle/>
           <a:p>
-            <a:pPr indent="0" marL="0">
+            <a:pPr marL="0" indent="0">
               <a:lnSpc>
                 <a:spcPct val="110000"/>
               </a:lnSpc>
@@ -24308,7 +24035,7 @@
           <a:bodyPr wrap="square" lIns="0" tIns="0" rIns="0" bIns="0" rtlCol="0" anchor="t"/>
           <a:lstStyle/>
           <a:p>
-            <a:pPr indent="0" marL="0">
+            <a:pPr marL="0" indent="0">
               <a:lnSpc>
                 <a:spcPct val="110000"/>
               </a:lnSpc>
@@ -24370,7 +24097,7 @@
           <a:bodyPr wrap="square" lIns="0" tIns="0" rIns="0" bIns="0" rtlCol="0" anchor="t"/>
           <a:lstStyle/>
           <a:p>
-            <a:pPr indent="0" marL="0">
+            <a:pPr marL="0" indent="0">
               <a:lnSpc>
                 <a:spcPct val="110000"/>
               </a:lnSpc>
@@ -24432,7 +24159,7 @@
           <a:bodyPr wrap="square" lIns="0" tIns="0" rIns="0" bIns="0" rtlCol="0" anchor="t"/>
           <a:lstStyle/>
           <a:p>
-            <a:pPr indent="0" marL="0">
+            <a:pPr marL="0" indent="0">
               <a:lnSpc>
                 <a:spcPct val="110000"/>
               </a:lnSpc>
@@ -24494,7 +24221,7 @@
           <a:bodyPr wrap="square" lIns="0" tIns="0" rIns="0" bIns="0" rtlCol="0" anchor="t"/>
           <a:lstStyle/>
           <a:p>
-            <a:pPr indent="0" marL="0">
+            <a:pPr marL="0" indent="0">
               <a:lnSpc>
                 <a:spcPct val="110000"/>
               </a:lnSpc>
@@ -24563,7 +24290,7 @@
           <a:bodyPr wrap="square" lIns="0" tIns="0" rIns="0" bIns="0" rtlCol="0" anchor="ctr"/>
           <a:lstStyle/>
           <a:p>
-            <a:pPr indent="0" marL="0">
+            <a:pPr marL="0" indent="0">
               <a:buNone/>
             </a:pPr>
             <a:r>
@@ -24602,7 +24329,7 @@
           <a:bodyPr wrap="square" lIns="0" tIns="0" rIns="0" bIns="0" rtlCol="0" anchor="t"/>
           <a:lstStyle/>
           <a:p>
-            <a:pPr indent="0" marL="0">
+            <a:pPr marL="0" indent="0">
               <a:lnSpc>
                 <a:spcPct val="115000"/>
               </a:lnSpc>
@@ -24691,7 +24418,7 @@
           <a:bodyPr wrap="square" lIns="0" tIns="0" rIns="0" bIns="0" rtlCol="0" anchor="ctr"/>
           <a:lstStyle/>
           <a:p>
-            <a:pPr indent="0" marL="0">
+            <a:pPr marL="0" indent="0">
               <a:buNone/>
             </a:pPr>
             <a:r>
@@ -24757,11 +24484,11 @@
           <a:bodyPr wrap="square" lIns="0" tIns="0" rIns="0" bIns="0" rtlCol="0" anchor="ctr"/>
           <a:lstStyle/>
           <a:p>
-            <a:pPr algn="ctr" indent="0" marL="0">
-              <a:buNone/>
-            </a:pPr>
-            <a:r>
-              <a:rPr lang="en-US" sz="900" b="1" spc="100" kern="0" dirty="0">
+            <a:pPr marL="0" indent="0" algn="ctr">
+              <a:buNone/>
+            </a:pPr>
+            <a:r>
+              <a:rPr lang="en-US" sz="900" b="1" kern="0" spc="100" dirty="0">
                 <a:solidFill>
                   <a:srgbClr val="5A05F4"/>
                 </a:solidFill>
@@ -24777,14 +24504,14 @@
       </p:sp>
       <p:pic>
         <p:nvPicPr>
-          <p:cNvPr id="6" name="Image 0" descr="preencoded.png">    </p:cNvPr>
+          <p:cNvPr id="6" name="Image 0" descr="preencoded.png"/>
           <p:cNvPicPr>
             <a:picLocks noChangeAspect="1"/>
           </p:cNvPicPr>
           <p:nvPr/>
         </p:nvPicPr>
         <p:blipFill>
-          <a:blip r:embed="rId1"/>
+          <a:blip r:embed="rId3"/>
           <a:stretch>
             <a:fillRect/>
           </a:stretch>
@@ -24862,7 +24589,7 @@
           <a:bodyPr wrap="square" lIns="0" tIns="0" rIns="0" bIns="0" rtlCol="0" anchor="ctr"/>
           <a:lstStyle/>
           <a:p>
-            <a:pPr algn="ctr" indent="0" marL="0">
+            <a:pPr marL="0" indent="0" algn="ctr">
               <a:buNone/>
             </a:pPr>
             <a:r>
@@ -24901,7 +24628,7 @@
           <a:bodyPr wrap="square" lIns="0" tIns="0" rIns="0" bIns="0" rtlCol="0" anchor="ctr"/>
           <a:lstStyle/>
           <a:p>
-            <a:pPr indent="0" marL="0">
+            <a:pPr marL="0" indent="0">
               <a:buNone/>
             </a:pPr>
             <a:r>
@@ -24982,7 +24709,7 @@
           <a:bodyPr wrap="square" lIns="0" tIns="0" rIns="0" bIns="0" rtlCol="0" anchor="ctr"/>
           <a:lstStyle/>
           <a:p>
-            <a:pPr algn="ctr" indent="0" marL="0">
+            <a:pPr marL="0" indent="0" algn="ctr">
               <a:buNone/>
             </a:pPr>
             <a:r>
@@ -25021,7 +24748,7 @@
           <a:bodyPr wrap="square" lIns="0" tIns="0" rIns="0" bIns="0" rtlCol="0" anchor="ctr"/>
           <a:lstStyle/>
           <a:p>
-            <a:pPr indent="0" marL="0">
+            <a:pPr marL="0" indent="0">
               <a:buNone/>
             </a:pPr>
             <a:r>
@@ -25102,7 +24829,7 @@
           <a:bodyPr wrap="square" lIns="0" tIns="0" rIns="0" bIns="0" rtlCol="0" anchor="ctr"/>
           <a:lstStyle/>
           <a:p>
-            <a:pPr algn="ctr" indent="0" marL="0">
+            <a:pPr marL="0" indent="0" algn="ctr">
               <a:buNone/>
             </a:pPr>
             <a:r>
@@ -25141,7 +24868,7 @@
           <a:bodyPr wrap="square" lIns="0" tIns="0" rIns="0" bIns="0" rtlCol="0" anchor="ctr"/>
           <a:lstStyle/>
           <a:p>
-            <a:pPr indent="0" marL="0">
+            <a:pPr marL="0" indent="0">
               <a:buNone/>
             </a:pPr>
             <a:r>
@@ -25222,7 +24949,7 @@
           <a:bodyPr wrap="square" lIns="0" tIns="0" rIns="0" bIns="0" rtlCol="0" anchor="ctr"/>
           <a:lstStyle/>
           <a:p>
-            <a:pPr algn="ctr" indent="0" marL="0">
+            <a:pPr marL="0" indent="0" algn="ctr">
               <a:buNone/>
             </a:pPr>
             <a:r>
@@ -25261,7 +24988,7 @@
           <a:bodyPr wrap="square" lIns="0" tIns="0" rIns="0" bIns="0" rtlCol="0" anchor="ctr"/>
           <a:lstStyle/>
           <a:p>
-            <a:pPr indent="0" marL="0">
+            <a:pPr marL="0" indent="0">
               <a:buNone/>
             </a:pPr>
             <a:r>
@@ -25342,7 +25069,7 @@
           <a:bodyPr wrap="square" lIns="0" tIns="0" rIns="0" bIns="0" rtlCol="0" anchor="ctr"/>
           <a:lstStyle/>
           <a:p>
-            <a:pPr algn="ctr" indent="0" marL="0">
+            <a:pPr marL="0" indent="0" algn="ctr">
               <a:buNone/>
             </a:pPr>
             <a:r>
@@ -25381,7 +25108,7 @@
           <a:bodyPr wrap="square" lIns="0" tIns="0" rIns="0" bIns="0" rtlCol="0" anchor="ctr"/>
           <a:lstStyle/>
           <a:p>
-            <a:pPr indent="0" marL="0">
+            <a:pPr marL="0" indent="0">
               <a:buNone/>
             </a:pPr>
             <a:r>
@@ -25462,7 +25189,7 @@
           <a:bodyPr wrap="square" lIns="0" tIns="0" rIns="0" bIns="0" rtlCol="0" anchor="ctr"/>
           <a:lstStyle/>
           <a:p>
-            <a:pPr algn="ctr" indent="0" marL="0">
+            <a:pPr marL="0" indent="0" algn="ctr">
               <a:buNone/>
             </a:pPr>
             <a:r>
@@ -25501,7 +25228,7 @@
           <a:bodyPr wrap="square" lIns="0" tIns="0" rIns="0" bIns="0" rtlCol="0" anchor="ctr"/>
           <a:lstStyle/>
           <a:p>
-            <a:pPr indent="0" marL="0">
+            <a:pPr marL="0" indent="0">
               <a:buNone/>
             </a:pPr>
             <a:r>
@@ -25582,7 +25309,7 @@
           <a:bodyPr wrap="square" lIns="0" tIns="0" rIns="0" bIns="0" rtlCol="0" anchor="ctr"/>
           <a:lstStyle/>
           <a:p>
-            <a:pPr algn="ctr" indent="0" marL="0">
+            <a:pPr marL="0" indent="0" algn="ctr">
               <a:buNone/>
             </a:pPr>
             <a:r>
@@ -25621,7 +25348,7 @@
           <a:bodyPr wrap="square" lIns="0" tIns="0" rIns="0" bIns="0" rtlCol="0" anchor="ctr"/>
           <a:lstStyle/>
           <a:p>
-            <a:pPr indent="0" marL="0">
+            <a:pPr marL="0" indent="0">
               <a:buNone/>
             </a:pPr>
             <a:r>
@@ -25702,7 +25429,7 @@
           <a:bodyPr wrap="square" lIns="0" tIns="0" rIns="0" bIns="0" rtlCol="0" anchor="ctr"/>
           <a:lstStyle/>
           <a:p>
-            <a:pPr algn="ctr" indent="0" marL="0">
+            <a:pPr marL="0" indent="0" algn="ctr">
               <a:buNone/>
             </a:pPr>
             <a:r>
@@ -25741,7 +25468,7 @@
           <a:bodyPr wrap="square" lIns="0" tIns="0" rIns="0" bIns="0" rtlCol="0" anchor="ctr"/>
           <a:lstStyle/>
           <a:p>
-            <a:pPr indent="0" marL="0">
+            <a:pPr marL="0" indent="0">
               <a:buNone/>
             </a:pPr>
             <a:r>
@@ -25822,7 +25549,7 @@
           <a:bodyPr wrap="square" lIns="0" tIns="0" rIns="0" bIns="0" rtlCol="0" anchor="ctr"/>
           <a:lstStyle/>
           <a:p>
-            <a:pPr algn="ctr" indent="0" marL="0">
+            <a:pPr marL="0" indent="0" algn="ctr">
               <a:buNone/>
             </a:pPr>
             <a:r>
@@ -25861,7 +25588,7 @@
           <a:bodyPr wrap="square" lIns="0" tIns="0" rIns="0" bIns="0" rtlCol="0" anchor="ctr"/>
           <a:lstStyle/>
           <a:p>
-            <a:pPr indent="0" marL="0">
+            <a:pPr marL="0" indent="0">
               <a:buNone/>
             </a:pPr>
             <a:r>
@@ -25942,7 +25669,7 @@
           <a:bodyPr wrap="square" lIns="0" tIns="0" rIns="0" bIns="0" rtlCol="0" anchor="ctr"/>
           <a:lstStyle/>
           <a:p>
-            <a:pPr algn="ctr" indent="0" marL="0">
+            <a:pPr marL="0" indent="0" algn="ctr">
               <a:buNone/>
             </a:pPr>
             <a:r>
@@ -25981,7 +25708,7 @@
           <a:bodyPr wrap="square" lIns="0" tIns="0" rIns="0" bIns="0" rtlCol="0" anchor="ctr"/>
           <a:lstStyle/>
           <a:p>
-            <a:pPr indent="0" marL="0">
+            <a:pPr marL="0" indent="0">
               <a:buNone/>
             </a:pPr>
             <a:r>
@@ -26062,7 +25789,7 @@
           <a:bodyPr wrap="square" lIns="0" tIns="0" rIns="0" bIns="0" rtlCol="0" anchor="ctr"/>
           <a:lstStyle/>
           <a:p>
-            <a:pPr algn="ctr" indent="0" marL="0">
+            <a:pPr marL="0" indent="0" algn="ctr">
               <a:buNone/>
             </a:pPr>
             <a:r>
@@ -26101,7 +25828,7 @@
           <a:bodyPr wrap="square" lIns="0" tIns="0" rIns="0" bIns="0" rtlCol="0" anchor="ctr"/>
           <a:lstStyle/>
           <a:p>
-            <a:pPr indent="0" marL="0">
+            <a:pPr marL="0" indent="0">
               <a:buNone/>
             </a:pPr>
             <a:r>
@@ -26182,7 +25909,7 @@
           <a:bodyPr wrap="square" lIns="0" tIns="0" rIns="0" bIns="0" rtlCol="0" anchor="ctr"/>
           <a:lstStyle/>
           <a:p>
-            <a:pPr algn="ctr" indent="0" marL="0">
+            <a:pPr marL="0" indent="0" algn="ctr">
               <a:buNone/>
             </a:pPr>
             <a:r>
@@ -26221,7 +25948,7 @@
           <a:bodyPr wrap="square" lIns="0" tIns="0" rIns="0" bIns="0" rtlCol="0" anchor="ctr"/>
           <a:lstStyle/>
           <a:p>
-            <a:pPr indent="0" marL="0">
+            <a:pPr marL="0" indent="0">
               <a:buNone/>
             </a:pPr>
             <a:r>
@@ -26248,7 +25975,7 @@
         <p:spPr>
           <a:xfrm>
             <a:off x="566928" y="5779008"/>
-            <a:ext cx="11064240" cy="402336"/>
+            <a:ext cx="10927080" cy="402336"/>
           </a:xfrm>
           <a:prstGeom prst="roundRect">
             <a:avLst>
@@ -26287,7 +26014,7 @@
           <a:bodyPr wrap="square" lIns="0" tIns="0" rIns="0" bIns="0" rtlCol="0" anchor="ctr"/>
           <a:lstStyle/>
           <a:p>
-            <a:pPr indent="0" marL="0">
+            <a:pPr marL="0" indent="0">
               <a:lnSpc>
                 <a:spcPct val="112000"/>
               </a:lnSpc>
@@ -26310,7 +26037,7 @@
       </p:sp>
       <p:sp>
         <p:nvSpPr>
-          <p:cNvPr id="25" name="Slide Number Placeholder 0"/>
+          <p:cNvPr id="57" name="Slide Number Placeholder 0"/>
           <p:cNvSpPr>
             <a:spLocks noGrp="1"/>
           </p:cNvSpPr>
@@ -26328,7 +26055,7 @@
           </a:prstGeom>
           <a:extLst>
             <a:ext uri="{C572A759-6A51-4108-AA02-DFA0A04FC94B}">
-              <ma14:wrappingTextBoxFlag xmlns:ma14="http://schemas.microsoft.com/office/mac/drawingml/2011/main" val="0"/>
+              <ma14:wrappingTextBoxFlag xmlns:ma14="http://schemas.microsoft.com/office/mac/drawingml/2011/main" xmlns="" val="0"/>
             </a:ext>
           </a:extLst>
         </p:spPr>
@@ -26349,7 +26076,7 @@
           <a:p>
             <a:pPr algn="l"/>
             <a:fld id="{F7021451-1387-4CA6-816F-3879F97B5CBC}" type="slidenum">
-              <a:rPr b="0" lang="en-US"/>
+              <a:rPr lang="en-US" b="0"/>
               <a:t>3</a:t>
             </a:fld>
             <a:endParaRPr lang="en-US"/>
@@ -26402,11 +26129,11 @@
           <a:bodyPr wrap="square" lIns="0" tIns="0" rIns="0" bIns="0" rtlCol="0" anchor="ctr"/>
           <a:lstStyle/>
           <a:p>
-            <a:pPr indent="0" marL="0">
-              <a:buNone/>
-            </a:pPr>
-            <a:r>
-              <a:rPr lang="en-US" sz="1200" b="1" spc="400" kern="0" dirty="0">
+            <a:pPr marL="0" indent="0">
+              <a:buNone/>
+            </a:pPr>
+            <a:r>
+              <a:rPr lang="en-US" sz="1200" b="1" kern="0" spc="400" dirty="0">
                 <a:solidFill>
                   <a:srgbClr val="FFFFFF"/>
                 </a:solidFill>
@@ -26441,7 +26168,7 @@
           <a:bodyPr wrap="square" lIns="0" tIns="0" rIns="0" bIns="0" rtlCol="0" anchor="ctr"/>
           <a:lstStyle/>
           <a:p>
-            <a:pPr indent="0" marL="0">
+            <a:pPr marL="0" indent="0">
               <a:buNone/>
             </a:pPr>
             <a:r>
@@ -26527,7 +26254,7 @@
           <a:bodyPr wrap="square" lIns="0" tIns="0" rIns="0" bIns="0" rtlCol="0" anchor="ctr"/>
           <a:lstStyle/>
           <a:p>
-            <a:pPr indent="0" marL="0">
+            <a:pPr marL="0" indent="0">
               <a:buNone/>
             </a:pPr>
             <a:r>
@@ -26566,7 +26293,7 @@
           <a:bodyPr wrap="square" lIns="0" tIns="0" rIns="0" bIns="0" rtlCol="0" anchor="t"/>
           <a:lstStyle/>
           <a:p>
-            <a:pPr indent="0" marL="0">
+            <a:pPr marL="0" indent="0">
               <a:lnSpc>
                 <a:spcPct val="100000"/>
               </a:lnSpc>
@@ -26635,11 +26362,11 @@
           <a:bodyPr wrap="square" lIns="0" tIns="0" rIns="0" bIns="0" rtlCol="0" anchor="ctr"/>
           <a:lstStyle/>
           <a:p>
-            <a:pPr algn="ctr" indent="0" marL="0">
-              <a:buNone/>
-            </a:pPr>
-            <a:r>
-              <a:rPr lang="en-US" sz="900" b="1" spc="100" kern="0" dirty="0">
+            <a:pPr marL="0" indent="0" algn="ctr">
+              <a:buNone/>
+            </a:pPr>
+            <a:r>
+              <a:rPr lang="en-US" sz="900" b="1" kern="0" spc="100" dirty="0">
                 <a:solidFill>
                   <a:srgbClr val="5A05F4"/>
                 </a:solidFill>
@@ -26655,14 +26382,14 @@
       </p:sp>
       <p:pic>
         <p:nvPicPr>
-          <p:cNvPr id="7" name="Image 0" descr="preencoded.png">    </p:cNvPr>
+          <p:cNvPr id="7" name="Image 0" descr="preencoded.png"/>
           <p:cNvPicPr>
             <a:picLocks noChangeAspect="1"/>
           </p:cNvPicPr>
           <p:nvPr/>
         </p:nvPicPr>
         <p:blipFill>
-          <a:blip r:embed="rId1"/>
+          <a:blip r:embed="rId3"/>
           <a:stretch>
             <a:fillRect/>
           </a:stretch>
@@ -26725,7 +26452,7 @@
           <a:bodyPr wrap="square" lIns="0" tIns="0" rIns="0" bIns="0" rtlCol="0" anchor="ctr"/>
           <a:lstStyle/>
           <a:p>
-            <a:pPr indent="0" marL="0">
+            <a:pPr marL="0" indent="0">
               <a:buNone/>
             </a:pPr>
             <a:r>
@@ -26764,7 +26491,7 @@
           <a:bodyPr wrap="square" lIns="0" tIns="0" rIns="0" bIns="0" rtlCol="0" anchor="t"/>
           <a:lstStyle/>
           <a:p>
-            <a:pPr indent="0" marL="0">
+            <a:pPr marL="0" indent="0">
               <a:lnSpc>
                 <a:spcPct val="105000"/>
               </a:lnSpc>
@@ -26833,7 +26560,7 @@
           <a:bodyPr wrap="square" lIns="0" tIns="0" rIns="0" bIns="0" rtlCol="0" anchor="ctr"/>
           <a:lstStyle/>
           <a:p>
-            <a:pPr indent="0" marL="0">
+            <a:pPr marL="0" indent="0">
               <a:buNone/>
             </a:pPr>
             <a:r>
@@ -26872,7 +26599,7 @@
           <a:bodyPr wrap="square" lIns="0" tIns="0" rIns="0" bIns="0" rtlCol="0" anchor="t"/>
           <a:lstStyle/>
           <a:p>
-            <a:pPr indent="0" marL="0">
+            <a:pPr marL="0" indent="0">
               <a:lnSpc>
                 <a:spcPct val="105000"/>
               </a:lnSpc>
@@ -26941,7 +26668,7 @@
           <a:bodyPr wrap="square" lIns="0" tIns="0" rIns="0" bIns="0" rtlCol="0" anchor="ctr"/>
           <a:lstStyle/>
           <a:p>
-            <a:pPr indent="0" marL="0">
+            <a:pPr marL="0" indent="0">
               <a:buNone/>
             </a:pPr>
             <a:r>
@@ -26980,7 +26707,7 @@
           <a:bodyPr wrap="square" lIns="0" tIns="0" rIns="0" bIns="0" rtlCol="0" anchor="t"/>
           <a:lstStyle/>
           <a:p>
-            <a:pPr indent="0" marL="0">
+            <a:pPr marL="0" indent="0">
               <a:lnSpc>
                 <a:spcPct val="105000"/>
               </a:lnSpc>
@@ -27049,7 +26776,7 @@
           <a:bodyPr wrap="square" lIns="0" tIns="0" rIns="0" bIns="0" rtlCol="0" anchor="ctr"/>
           <a:lstStyle/>
           <a:p>
-            <a:pPr indent="0" marL="0">
+            <a:pPr marL="0" indent="0">
               <a:buNone/>
             </a:pPr>
             <a:r>
@@ -27088,7 +26815,7 @@
           <a:bodyPr wrap="square" lIns="0" tIns="0" rIns="0" bIns="0" rtlCol="0" anchor="t"/>
           <a:lstStyle/>
           <a:p>
-            <a:pPr indent="0" marL="0">
+            <a:pPr marL="0" indent="0">
               <a:lnSpc>
                 <a:spcPct val="105000"/>
               </a:lnSpc>
@@ -27157,7 +26884,7 @@
           <a:bodyPr wrap="square" lIns="0" tIns="0" rIns="0" bIns="0" rtlCol="0" anchor="ctr"/>
           <a:lstStyle/>
           <a:p>
-            <a:pPr indent="0" marL="0">
+            <a:pPr marL="0" indent="0">
               <a:buNone/>
             </a:pPr>
             <a:r>
@@ -27196,7 +26923,7 @@
           <a:bodyPr wrap="square" lIns="0" tIns="0" rIns="0" bIns="0" rtlCol="0" anchor="t"/>
           <a:lstStyle/>
           <a:p>
-            <a:pPr indent="0" marL="0">
+            <a:pPr marL="0" indent="0">
               <a:lnSpc>
                 <a:spcPct val="105000"/>
               </a:lnSpc>
@@ -27265,7 +26992,7 @@
           <a:bodyPr wrap="square" lIns="0" tIns="0" rIns="0" bIns="0" rtlCol="0" anchor="ctr"/>
           <a:lstStyle/>
           <a:p>
-            <a:pPr indent="0" marL="0">
+            <a:pPr marL="0" indent="0">
               <a:buNone/>
             </a:pPr>
             <a:r>
@@ -27304,7 +27031,7 @@
           <a:bodyPr wrap="square" lIns="0" tIns="0" rIns="0" bIns="0" rtlCol="0" anchor="t"/>
           <a:lstStyle/>
           <a:p>
-            <a:pPr indent="0" marL="0">
+            <a:pPr marL="0" indent="0">
               <a:lnSpc>
                 <a:spcPct val="105000"/>
               </a:lnSpc>
@@ -27373,7 +27100,7 @@
           <a:bodyPr wrap="square" lIns="0" tIns="0" rIns="0" bIns="0" rtlCol="0" anchor="ctr"/>
           <a:lstStyle/>
           <a:p>
-            <a:pPr indent="0" marL="0">
+            <a:pPr marL="0" indent="0">
               <a:lnSpc>
                 <a:spcPct val="112000"/>
               </a:lnSpc>
@@ -27396,7 +27123,7 @@
       </p:sp>
       <p:sp>
         <p:nvSpPr>
-          <p:cNvPr id="25" name="Slide Number Placeholder 0"/>
+          <p:cNvPr id="28" name="Slide Number Placeholder 0"/>
           <p:cNvSpPr>
             <a:spLocks noGrp="1"/>
           </p:cNvSpPr>
@@ -27414,7 +27141,7 @@
           </a:prstGeom>
           <a:extLst>
             <a:ext uri="{C572A759-6A51-4108-AA02-DFA0A04FC94B}">
-              <ma14:wrappingTextBoxFlag xmlns:ma14="http://schemas.microsoft.com/office/mac/drawingml/2011/main" val="0"/>
+              <ma14:wrappingTextBoxFlag xmlns:ma14="http://schemas.microsoft.com/office/mac/drawingml/2011/main" xmlns="" val="0"/>
             </a:ext>
           </a:extLst>
         </p:spPr>
@@ -27435,7 +27162,7 @@
           <a:p>
             <a:pPr algn="l"/>
             <a:fld id="{F7021451-1387-4CA6-816F-3879F97B5CBC}" type="slidenum">
-              <a:rPr b="0" lang="en-US"/>
+              <a:rPr lang="en-US" b="0"/>
               <a:t>4</a:t>
             </a:fld>
             <a:endParaRPr lang="en-US"/>
@@ -27488,11 +27215,11 @@
           <a:bodyPr wrap="square" lIns="0" tIns="0" rIns="0" bIns="0" rtlCol="0" anchor="ctr"/>
           <a:lstStyle/>
           <a:p>
-            <a:pPr indent="0" marL="0">
-              <a:buNone/>
-            </a:pPr>
-            <a:r>
-              <a:rPr lang="en-US" sz="1200" b="1" spc="400" kern="0" dirty="0">
+            <a:pPr marL="0" indent="0">
+              <a:buNone/>
+            </a:pPr>
+            <a:r>
+              <a:rPr lang="en-US" sz="1200" b="1" kern="0" spc="400" dirty="0">
                 <a:solidFill>
                   <a:srgbClr val="FFFFFF"/>
                 </a:solidFill>
@@ -27527,7 +27254,7 @@
           <a:bodyPr wrap="square" lIns="0" tIns="0" rIns="0" bIns="0" rtlCol="0" anchor="ctr"/>
           <a:lstStyle/>
           <a:p>
-            <a:pPr indent="0" marL="0">
+            <a:pPr marL="0" indent="0">
               <a:buNone/>
             </a:pPr>
             <a:r>
@@ -27566,7 +27293,7 @@
           <a:bodyPr wrap="square" lIns="0" tIns="0" rIns="0" bIns="0" rtlCol="0" anchor="t"/>
           <a:lstStyle/>
           <a:p>
-            <a:pPr indent="0" marL="0">
+            <a:pPr marL="0" indent="0">
               <a:buNone/>
             </a:pPr>
             <a:r>
@@ -27652,7 +27379,7 @@
           <a:bodyPr wrap="square" lIns="0" tIns="0" rIns="0" bIns="0" rtlCol="0" anchor="ctr"/>
           <a:lstStyle/>
           <a:p>
-            <a:pPr algn="l" indent="0" marL="0">
+            <a:pPr marL="0" indent="0" algn="l">
               <a:buNone/>
             </a:pPr>
             <a:r>
@@ -27691,7 +27418,7 @@
           <a:bodyPr wrap="square" lIns="0" tIns="0" rIns="0" bIns="0" rtlCol="0" anchor="ctr"/>
           <a:lstStyle/>
           <a:p>
-            <a:pPr indent="0" marL="0">
+            <a:pPr marL="0" indent="0">
               <a:buNone/>
             </a:pPr>
             <a:r>
@@ -27757,11 +27484,11 @@
           <a:bodyPr wrap="square" lIns="0" tIns="0" rIns="0" bIns="0" rtlCol="0" anchor="ctr"/>
           <a:lstStyle/>
           <a:p>
-            <a:pPr algn="ctr" indent="0" marL="0">
-              <a:buNone/>
-            </a:pPr>
-            <a:r>
-              <a:rPr lang="en-US" sz="900" b="1" spc="100" kern="0" dirty="0">
+            <a:pPr marL="0" indent="0" algn="ctr">
+              <a:buNone/>
+            </a:pPr>
+            <a:r>
+              <a:rPr lang="en-US" sz="900" b="1" kern="0" spc="100" dirty="0">
                 <a:solidFill>
                   <a:srgbClr val="5A05F4"/>
                 </a:solidFill>
@@ -27777,14 +27504,14 @@
       </p:sp>
       <p:pic>
         <p:nvPicPr>
-          <p:cNvPr id="7" name="Image 0" descr="preencoded.png">    </p:cNvPr>
+          <p:cNvPr id="7" name="Image 0" descr="preencoded.png"/>
           <p:cNvPicPr>
             <a:picLocks noChangeAspect="1"/>
           </p:cNvPicPr>
           <p:nvPr/>
         </p:nvPicPr>
         <p:blipFill>
-          <a:blip r:embed="rId1"/>
+          <a:blip r:embed="rId3"/>
           <a:stretch>
             <a:fillRect/>
           </a:stretch>
@@ -27862,7 +27589,7 @@
           <a:bodyPr wrap="square" lIns="0" tIns="0" rIns="0" bIns="0" rtlCol="0" anchor="ctr"/>
           <a:lstStyle/>
           <a:p>
-            <a:pPr algn="ctr" indent="0" marL="0">
+            <a:pPr marL="0" indent="0" algn="ctr">
               <a:buNone/>
             </a:pPr>
             <a:r>
@@ -27901,7 +27628,7 @@
           <a:bodyPr wrap="square" lIns="0" tIns="0" rIns="0" bIns="0" rtlCol="0" anchor="ctr"/>
           <a:lstStyle/>
           <a:p>
-            <a:pPr indent="0" marL="0">
+            <a:pPr marL="0" indent="0">
               <a:buNone/>
             </a:pPr>
             <a:r>
@@ -27940,7 +27667,7 @@
           <a:bodyPr wrap="square" lIns="0" tIns="0" rIns="0" bIns="0" rtlCol="0" anchor="t"/>
           <a:lstStyle/>
           <a:p>
-            <a:pPr indent="0" marL="0">
+            <a:pPr marL="0" indent="0">
               <a:lnSpc>
                 <a:spcPct val="108000"/>
               </a:lnSpc>
@@ -28024,7 +27751,7 @@
           <a:bodyPr wrap="square" lIns="0" tIns="0" rIns="0" bIns="0" rtlCol="0" anchor="ctr"/>
           <a:lstStyle/>
           <a:p>
-            <a:pPr algn="ctr" indent="0" marL="0">
+            <a:pPr marL="0" indent="0" algn="ctr">
               <a:buNone/>
             </a:pPr>
             <a:r>
@@ -28063,7 +27790,7 @@
           <a:bodyPr wrap="square" lIns="0" tIns="0" rIns="0" bIns="0" rtlCol="0" anchor="ctr"/>
           <a:lstStyle/>
           <a:p>
-            <a:pPr indent="0" marL="0">
+            <a:pPr marL="0" indent="0">
               <a:buNone/>
             </a:pPr>
             <a:r>
@@ -28102,7 +27829,7 @@
           <a:bodyPr wrap="square" lIns="0" tIns="0" rIns="0" bIns="0" rtlCol="0" anchor="t"/>
           <a:lstStyle/>
           <a:p>
-            <a:pPr indent="0" marL="0">
+            <a:pPr marL="0" indent="0">
               <a:lnSpc>
                 <a:spcPct val="108000"/>
               </a:lnSpc>
@@ -28186,7 +27913,7 @@
           <a:bodyPr wrap="square" lIns="0" tIns="0" rIns="0" bIns="0" rtlCol="0" anchor="ctr"/>
           <a:lstStyle/>
           <a:p>
-            <a:pPr algn="ctr" indent="0" marL="0">
+            <a:pPr marL="0" indent="0" algn="ctr">
               <a:buNone/>
             </a:pPr>
             <a:r>
@@ -28225,7 +27952,7 @@
           <a:bodyPr wrap="square" lIns="0" tIns="0" rIns="0" bIns="0" rtlCol="0" anchor="ctr"/>
           <a:lstStyle/>
           <a:p>
-            <a:pPr indent="0" marL="0">
+            <a:pPr marL="0" indent="0">
               <a:buNone/>
             </a:pPr>
             <a:r>
@@ -28264,7 +27991,7 @@
           <a:bodyPr wrap="square" lIns="0" tIns="0" rIns="0" bIns="0" rtlCol="0" anchor="t"/>
           <a:lstStyle/>
           <a:p>
-            <a:pPr indent="0" marL="0">
+            <a:pPr marL="0" indent="0">
               <a:lnSpc>
                 <a:spcPct val="108000"/>
               </a:lnSpc>
@@ -28328,7 +28055,7 @@
           <a:bodyPr wrap="square" lIns="0" tIns="0" rIns="0" bIns="0" rtlCol="0" anchor="ctr"/>
           <a:lstStyle/>
           <a:p>
-            <a:pPr algn="ctr" indent="0" marL="0">
+            <a:pPr marL="0" indent="0" algn="ctr">
               <a:buNone/>
             </a:pPr>
             <a:r>
@@ -28432,7 +28159,7 @@
           <a:bodyPr wrap="square" lIns="0" tIns="0" rIns="0" bIns="0" rtlCol="0" anchor="ctr"/>
           <a:lstStyle/>
           <a:p>
-            <a:pPr algn="ctr" indent="0" marL="0">
+            <a:pPr marL="0" indent="0" algn="ctr">
               <a:buNone/>
             </a:pPr>
             <a:r>
@@ -28536,7 +28263,7 @@
           <a:bodyPr wrap="square" lIns="0" tIns="0" rIns="0" bIns="0" rtlCol="0" anchor="ctr"/>
           <a:lstStyle/>
           <a:p>
-            <a:pPr algn="ctr" indent="0" marL="0">
+            <a:pPr marL="0" indent="0" algn="ctr">
               <a:buNone/>
             </a:pPr>
             <a:r>
@@ -28640,7 +28367,7 @@
           <a:bodyPr wrap="square" lIns="0" tIns="0" rIns="0" bIns="0" rtlCol="0" anchor="ctr"/>
           <a:lstStyle/>
           <a:p>
-            <a:pPr algn="ctr" indent="0" marL="0">
+            <a:pPr marL="0" indent="0" algn="ctr">
               <a:buNone/>
             </a:pPr>
             <a:r>
@@ -28679,7 +28406,7 @@
           <a:bodyPr wrap="square" lIns="0" tIns="0" rIns="0" bIns="0" rtlCol="0" anchor="ctr"/>
           <a:lstStyle/>
           <a:p>
-            <a:pPr indent="0" marL="0">
+            <a:pPr marL="0" indent="0">
               <a:buNone/>
             </a:pPr>
             <a:r>
@@ -28740,11 +28467,11 @@
           <a:bodyPr wrap="square" lIns="0" tIns="0" rIns="0" bIns="0" rtlCol="0" anchor="ctr"/>
           <a:lstStyle/>
           <a:p>
-            <a:pPr indent="0" marL="0">
-              <a:buNone/>
-            </a:pPr>
-            <a:r>
-              <a:rPr lang="en-US" sz="950" b="1" spc="150" kern="0" dirty="0">
+            <a:pPr marL="0" indent="0">
+              <a:buNone/>
+            </a:pPr>
+            <a:r>
+              <a:rPr lang="en-US" sz="950" b="1" kern="0" spc="150" dirty="0">
                 <a:solidFill>
                   <a:srgbClr val="FFFFFF"/>
                 </a:solidFill>
@@ -28779,7 +28506,7 @@
           <a:bodyPr wrap="square" lIns="0" tIns="0" rIns="0" bIns="0" rtlCol="0" anchor="ctr"/>
           <a:lstStyle/>
           <a:p>
-            <a:pPr indent="0" marL="0">
+            <a:pPr marL="0" indent="0">
               <a:lnSpc>
                 <a:spcPct val="112000"/>
               </a:lnSpc>
@@ -28802,7 +28529,7 @@
       </p:sp>
       <p:sp>
         <p:nvSpPr>
-          <p:cNvPr id="25" name="Slide Number Placeholder 0"/>
+          <p:cNvPr id="41" name="Slide Number Placeholder 0"/>
           <p:cNvSpPr>
             <a:spLocks noGrp="1"/>
           </p:cNvSpPr>
@@ -28820,7 +28547,7 @@
           </a:prstGeom>
           <a:extLst>
             <a:ext uri="{C572A759-6A51-4108-AA02-DFA0A04FC94B}">
-              <ma14:wrappingTextBoxFlag xmlns:ma14="http://schemas.microsoft.com/office/mac/drawingml/2011/main" val="0"/>
+              <ma14:wrappingTextBoxFlag xmlns:ma14="http://schemas.microsoft.com/office/mac/drawingml/2011/main" xmlns="" val="0"/>
             </a:ext>
           </a:extLst>
         </p:spPr>
@@ -28841,7 +28568,7 @@
           <a:p>
             <a:pPr algn="l"/>
             <a:fld id="{F7021451-1387-4CA6-816F-3879F97B5CBC}" type="slidenum">
-              <a:rPr b="0" lang="en-US"/>
+              <a:rPr lang="en-US" b="0"/>
               <a:t>6</a:t>
             </a:fld>
             <a:endParaRPr lang="en-US"/>
@@ -28916,7 +28643,7 @@
           <a:bodyPr wrap="square" lIns="0" tIns="0" rIns="0" bIns="0" rtlCol="0" anchor="ctr"/>
           <a:lstStyle/>
           <a:p>
-            <a:pPr algn="l" indent="0" marL="0">
+            <a:pPr marL="0" indent="0" algn="l">
               <a:buNone/>
             </a:pPr>
             <a:r>
@@ -28955,7 +28682,7 @@
           <a:bodyPr wrap="square" lIns="0" tIns="0" rIns="0" bIns="0" rtlCol="0" anchor="ctr"/>
           <a:lstStyle/>
           <a:p>
-            <a:pPr indent="0" marL="0">
+            <a:pPr marL="0" indent="0">
               <a:buNone/>
             </a:pPr>
             <a:r>
@@ -29021,11 +28748,11 @@
           <a:bodyPr wrap="square" lIns="0" tIns="0" rIns="0" bIns="0" rtlCol="0" anchor="ctr"/>
           <a:lstStyle/>
           <a:p>
-            <a:pPr algn="ctr" indent="0" marL="0">
-              <a:buNone/>
-            </a:pPr>
-            <a:r>
-              <a:rPr lang="en-US" sz="900" b="1" spc="100" kern="0" dirty="0">
+            <a:pPr marL="0" indent="0" algn="ctr">
+              <a:buNone/>
+            </a:pPr>
+            <a:r>
+              <a:rPr lang="en-US" sz="900" b="1" kern="0" spc="100" dirty="0">
                 <a:solidFill>
                   <a:srgbClr val="5A05F4"/>
                 </a:solidFill>
@@ -29041,14 +28768,14 @@
       </p:sp>
       <p:pic>
         <p:nvPicPr>
-          <p:cNvPr id="7" name="Image 0" descr="preencoded.png">    </p:cNvPr>
+          <p:cNvPr id="7" name="Image 0" descr="preencoded.png"/>
           <p:cNvPicPr>
             <a:picLocks noChangeAspect="1"/>
           </p:cNvPicPr>
           <p:nvPr/>
         </p:nvPicPr>
         <p:blipFill>
-          <a:blip r:embed="rId1"/>
+          <a:blip r:embed="rId3"/>
           <a:stretch>
             <a:fillRect/>
           </a:stretch>
@@ -29072,7 +28799,7 @@
         <p:spPr>
           <a:xfrm>
             <a:off x="566928" y="1737360"/>
-            <a:ext cx="11064240" cy="777240"/>
+            <a:ext cx="11030407" cy="777240"/>
           </a:xfrm>
           <a:prstGeom prst="roundRect">
             <a:avLst>
@@ -29111,7 +28838,7 @@
           <a:bodyPr wrap="square" lIns="0" tIns="0" rIns="0" bIns="0" rtlCol="0" anchor="t"/>
           <a:lstStyle/>
           <a:p>
-            <a:pPr indent="0" marL="0">
+            <a:pPr marL="0" indent="0">
               <a:lnSpc>
                 <a:spcPct val="130000"/>
               </a:lnSpc>
@@ -29195,7 +28922,7 @@
           <a:bodyPr wrap="square" lIns="0" tIns="0" rIns="0" bIns="0" rtlCol="0" anchor="ctr"/>
           <a:lstStyle/>
           <a:p>
-            <a:pPr algn="ctr" indent="0" marL="0">
+            <a:pPr marL="0" indent="0" algn="ctr">
               <a:buNone/>
             </a:pPr>
             <a:r>
@@ -29234,7 +28961,7 @@
           <a:bodyPr wrap="square" lIns="0" tIns="0" rIns="0" bIns="0" rtlCol="0" anchor="ctr"/>
           <a:lstStyle/>
           <a:p>
-            <a:pPr indent="0" marL="0">
+            <a:pPr marL="0" indent="0">
               <a:buNone/>
             </a:pPr>
             <a:r>
@@ -29273,7 +29000,7 @@
           <a:bodyPr wrap="square" lIns="0" tIns="0" rIns="0" bIns="0" rtlCol="0" anchor="t"/>
           <a:lstStyle/>
           <a:p>
-            <a:pPr indent="0" marL="0">
+            <a:pPr marL="0" indent="0">
               <a:lnSpc>
                 <a:spcPct val="108000"/>
               </a:lnSpc>
@@ -29302,7 +29029,7 @@
         </p:nvSpPr>
         <p:spPr>
           <a:xfrm>
-            <a:off x="4270248" y="2834640"/>
+            <a:off x="4335780" y="2834640"/>
             <a:ext cx="3520440" cy="1600200"/>
           </a:xfrm>
           <a:prstGeom prst="roundRect">
@@ -29324,29 +29051,29 @@
         </p:nvSpPr>
         <p:spPr>
           <a:xfrm>
+            <a:off x="4536948" y="3017520"/>
+            <a:ext cx="384048" cy="384048"/>
+          </a:xfrm>
+          <a:prstGeom prst="ellipse">
+            <a:avLst/>
+          </a:prstGeom>
+          <a:solidFill>
+            <a:srgbClr val="5A05F4"/>
+          </a:solidFill>
+          <a:ln/>
+        </p:spPr>
+      </p:sp>
+      <p:sp>
+        <p:nvSpPr>
+          <p:cNvPr id="17" name="Text 14"/>
+          <p:cNvSpPr/>
+          <p:nvPr/>
+        </p:nvSpPr>
+        <p:spPr>
+          <a:xfrm>
             <a:off x="4471416" y="3017520"/>
             <a:ext cx="384048" cy="384048"/>
           </a:xfrm>
-          <a:prstGeom prst="ellipse">
-            <a:avLst/>
-          </a:prstGeom>
-          <a:solidFill>
-            <a:srgbClr val="5A05F4"/>
-          </a:solidFill>
-          <a:ln/>
-        </p:spPr>
-      </p:sp>
-      <p:sp>
-        <p:nvSpPr>
-          <p:cNvPr id="17" name="Text 14"/>
-          <p:cNvSpPr/>
-          <p:nvPr/>
-        </p:nvSpPr>
-        <p:spPr>
-          <a:xfrm>
-            <a:off x="4471416" y="3017520"/>
-            <a:ext cx="384048" cy="384048"/>
-          </a:xfrm>
           <a:prstGeom prst="rect">
             <a:avLst/>
           </a:prstGeom>
@@ -29357,7 +29084,7 @@
           <a:bodyPr wrap="square" lIns="0" tIns="0" rIns="0" bIns="0" rtlCol="0" anchor="ctr"/>
           <a:lstStyle/>
           <a:p>
-            <a:pPr algn="ctr" indent="0" marL="0">
+            <a:pPr marL="0" indent="0" algn="ctr">
               <a:buNone/>
             </a:pPr>
             <a:r>
@@ -29383,7 +29110,7 @@
         </p:nvSpPr>
         <p:spPr>
           <a:xfrm>
-            <a:off x="4983480" y="2990088"/>
+            <a:off x="5049012" y="2990088"/>
             <a:ext cx="2606040" cy="438912"/>
           </a:xfrm>
           <a:prstGeom prst="rect">
@@ -29396,7 +29123,7 @@
           <a:bodyPr wrap="square" lIns="0" tIns="0" rIns="0" bIns="0" rtlCol="0" anchor="ctr"/>
           <a:lstStyle/>
           <a:p>
-            <a:pPr indent="0" marL="0">
+            <a:pPr marL="0" indent="0">
               <a:buNone/>
             </a:pPr>
             <a:r>
@@ -29422,7 +29149,7 @@
         </p:nvSpPr>
         <p:spPr>
           <a:xfrm>
-            <a:off x="4471416" y="3520440"/>
+            <a:off x="4536948" y="3520440"/>
             <a:ext cx="3118104" cy="758952"/>
           </a:xfrm>
           <a:prstGeom prst="rect">
@@ -29435,7 +29162,7 @@
           <a:bodyPr wrap="square" lIns="0" tIns="0" rIns="0" bIns="0" rtlCol="0" anchor="t"/>
           <a:lstStyle/>
           <a:p>
-            <a:pPr indent="0" marL="0">
+            <a:pPr marL="0" indent="0">
               <a:lnSpc>
                 <a:spcPct val="108000"/>
               </a:lnSpc>
@@ -29464,7 +29191,7 @@
         </p:nvSpPr>
         <p:spPr>
           <a:xfrm>
-            <a:off x="7973568" y="2834640"/>
+            <a:off x="8076895" y="2820347"/>
             <a:ext cx="3520440" cy="1600200"/>
           </a:xfrm>
           <a:prstGeom prst="roundRect">
@@ -29486,29 +29213,29 @@
         </p:nvSpPr>
         <p:spPr>
           <a:xfrm>
+            <a:off x="8278063" y="3003227"/>
+            <a:ext cx="384048" cy="384048"/>
+          </a:xfrm>
+          <a:prstGeom prst="ellipse">
+            <a:avLst/>
+          </a:prstGeom>
+          <a:solidFill>
+            <a:srgbClr val="5A05F4"/>
+          </a:solidFill>
+          <a:ln/>
+        </p:spPr>
+      </p:sp>
+      <p:sp>
+        <p:nvSpPr>
+          <p:cNvPr id="22" name="Text 19"/>
+          <p:cNvSpPr/>
+          <p:nvPr/>
+        </p:nvSpPr>
+        <p:spPr>
+          <a:xfrm>
             <a:off x="8174736" y="3017520"/>
             <a:ext cx="384048" cy="384048"/>
           </a:xfrm>
-          <a:prstGeom prst="ellipse">
-            <a:avLst/>
-          </a:prstGeom>
-          <a:solidFill>
-            <a:srgbClr val="5A05F4"/>
-          </a:solidFill>
-          <a:ln/>
-        </p:spPr>
-      </p:sp>
-      <p:sp>
-        <p:nvSpPr>
-          <p:cNvPr id="22" name="Text 19"/>
-          <p:cNvSpPr/>
-          <p:nvPr/>
-        </p:nvSpPr>
-        <p:spPr>
-          <a:xfrm>
-            <a:off x="8174736" y="3017520"/>
-            <a:ext cx="384048" cy="384048"/>
-          </a:xfrm>
           <a:prstGeom prst="rect">
             <a:avLst/>
           </a:prstGeom>
@@ -29519,7 +29246,7 @@
           <a:bodyPr wrap="square" lIns="0" tIns="0" rIns="0" bIns="0" rtlCol="0" anchor="ctr"/>
           <a:lstStyle/>
           <a:p>
-            <a:pPr algn="ctr" indent="0" marL="0">
+            <a:pPr marL="0" indent="0" algn="ctr">
               <a:buNone/>
             </a:pPr>
             <a:r>
@@ -29545,7 +29272,7 @@
         </p:nvSpPr>
         <p:spPr>
           <a:xfrm>
-            <a:off x="8686800" y="2990088"/>
+            <a:off x="8790127" y="2975795"/>
             <a:ext cx="2606040" cy="438912"/>
           </a:xfrm>
           <a:prstGeom prst="rect">
@@ -29558,7 +29285,7 @@
           <a:bodyPr wrap="square" lIns="0" tIns="0" rIns="0" bIns="0" rtlCol="0" anchor="ctr"/>
           <a:lstStyle/>
           <a:p>
-            <a:pPr indent="0" marL="0">
+            <a:pPr marL="0" indent="0">
               <a:buNone/>
             </a:pPr>
             <a:r>
@@ -29584,7 +29311,7 @@
         </p:nvSpPr>
         <p:spPr>
           <a:xfrm>
-            <a:off x="8174736" y="3520440"/>
+            <a:off x="8278063" y="3506147"/>
             <a:ext cx="3118104" cy="758952"/>
           </a:xfrm>
           <a:prstGeom prst="rect">
@@ -29597,7 +29324,7 @@
           <a:bodyPr wrap="square" lIns="0" tIns="0" rIns="0" bIns="0" rtlCol="0" anchor="t"/>
           <a:lstStyle/>
           <a:p>
-            <a:pPr indent="0" marL="0">
+            <a:pPr marL="0" indent="0">
               <a:lnSpc>
                 <a:spcPct val="108000"/>
               </a:lnSpc>
@@ -29627,7 +29354,7 @@
         <p:spPr>
           <a:xfrm>
             <a:off x="566928" y="4617720"/>
-            <a:ext cx="11064240" cy="1234440"/>
+            <a:ext cx="11030407" cy="1234440"/>
           </a:xfrm>
           <a:prstGeom prst="roundRect">
             <a:avLst>
@@ -29666,7 +29393,7 @@
           <a:bodyPr wrap="square" lIns="0" tIns="0" rIns="0" bIns="0" rtlCol="0" anchor="ctr"/>
           <a:lstStyle/>
           <a:p>
-            <a:pPr indent="0" marL="0">
+            <a:pPr marL="0" indent="0">
               <a:lnSpc>
                 <a:spcPct val="112000"/>
               </a:lnSpc>
@@ -29689,7 +29416,7 @@
       </p:sp>
       <p:sp>
         <p:nvSpPr>
-          <p:cNvPr id="25" name="Slide Number Placeholder 0"/>
+          <p:cNvPr id="27" name="Slide Number Placeholder 0"/>
           <p:cNvSpPr>
             <a:spLocks noGrp="1"/>
           </p:cNvSpPr>
@@ -29707,7 +29434,7 @@
           </a:prstGeom>
           <a:extLst>
             <a:ext uri="{C572A759-6A51-4108-AA02-DFA0A04FC94B}">
-              <ma14:wrappingTextBoxFlag xmlns:ma14="http://schemas.microsoft.com/office/mac/drawingml/2011/main" val="0"/>
+              <ma14:wrappingTextBoxFlag xmlns:ma14="http://schemas.microsoft.com/office/mac/drawingml/2011/main" xmlns="" val="0"/>
             </a:ext>
           </a:extLst>
         </p:spPr>
@@ -29728,7 +29455,7 @@
           <a:p>
             <a:pPr algn="l"/>
             <a:fld id="{F7021451-1387-4CA6-816F-3879F97B5CBC}" type="slidenum">
-              <a:rPr b="0" lang="en-US"/>
+              <a:rPr lang="en-US" b="0"/>
               <a:t>7</a:t>
             </a:fld>
             <a:endParaRPr lang="en-US"/>
@@ -29803,7 +29530,7 @@
           <a:bodyPr wrap="square" lIns="0" tIns="0" rIns="0" bIns="0" rtlCol="0" anchor="ctr"/>
           <a:lstStyle/>
           <a:p>
-            <a:pPr algn="l" indent="0" marL="0">
+            <a:pPr marL="0" indent="0" algn="l">
               <a:buNone/>
             </a:pPr>
             <a:r>
@@ -29842,7 +29569,7 @@
           <a:bodyPr wrap="square" lIns="0" tIns="0" rIns="0" bIns="0" rtlCol="0" anchor="ctr"/>
           <a:lstStyle/>
           <a:p>
-            <a:pPr indent="0" marL="0">
+            <a:pPr marL="0" indent="0">
               <a:buNone/>
             </a:pPr>
             <a:r>
@@ -29908,11 +29635,11 @@
           <a:bodyPr wrap="square" lIns="0" tIns="0" rIns="0" bIns="0" rtlCol="0" anchor="ctr"/>
           <a:lstStyle/>
           <a:p>
-            <a:pPr algn="ctr" indent="0" marL="0">
-              <a:buNone/>
-            </a:pPr>
-            <a:r>
-              <a:rPr lang="en-US" sz="900" b="1" spc="100" kern="0" dirty="0">
+            <a:pPr marL="0" indent="0" algn="ctr">
+              <a:buNone/>
+            </a:pPr>
+            <a:r>
+              <a:rPr lang="en-US" sz="900" b="1" kern="0" spc="100" dirty="0">
                 <a:solidFill>
                   <a:srgbClr val="5A05F4"/>
                 </a:solidFill>
@@ -29928,14 +29655,14 @@
       </p:sp>
       <p:pic>
         <p:nvPicPr>
-          <p:cNvPr id="7" name="Image 0" descr="preencoded.png">    </p:cNvPr>
+          <p:cNvPr id="7" name="Image 0" descr="preencoded.png"/>
           <p:cNvPicPr>
             <a:picLocks noChangeAspect="1"/>
           </p:cNvPicPr>
           <p:nvPr/>
         </p:nvPicPr>
         <p:blipFill>
-          <a:blip r:embed="rId1"/>
+          <a:blip r:embed="rId3"/>
           <a:stretch>
             <a:fillRect/>
           </a:stretch>
@@ -29966,16 +29693,34 @@
         </p:nvGraphicFramePr>
         <p:xfrm>
           <a:off x="566928" y="1737360"/>
-          <a:ext cx="6766560" cy="914400"/>
+          <a:ext cx="6766560" cy="2743200"/>
         </p:xfrm>
         <a:graphic>
           <a:graphicData uri="http://schemas.openxmlformats.org/drawingml/2006/table">
             <a:tbl>
               <a:tblPr/>
               <a:tblGrid>
-                <a:gridCol w="2377440"/>
-                <a:gridCol w="2194560"/>
-                <a:gridCol w="2194560"/>
+                <a:gridCol w="2377440">
+                  <a:extLst>
+                    <a:ext uri="{9D8B030D-6E8A-4147-A177-3AD203B41FA5}">
+                      <a16:colId xmlns:a16="http://schemas.microsoft.com/office/drawing/2014/main" val="20000"/>
+                    </a:ext>
+                  </a:extLst>
+                </a:gridCol>
+                <a:gridCol w="2194560">
+                  <a:extLst>
+                    <a:ext uri="{9D8B030D-6E8A-4147-A177-3AD203B41FA5}">
+                      <a16:colId xmlns:a16="http://schemas.microsoft.com/office/drawing/2014/main" val="20001"/>
+                    </a:ext>
+                  </a:extLst>
+                </a:gridCol>
+                <a:gridCol w="2194560">
+                  <a:extLst>
+                    <a:ext uri="{9D8B030D-6E8A-4147-A177-3AD203B41FA5}">
+                      <a16:colId xmlns:a16="http://schemas.microsoft.com/office/drawing/2014/main" val="20002"/>
+                    </a:ext>
+                  </a:extLst>
+                </a:gridCol>
               </a:tblGrid>
               <a:tr h="548640">
                 <a:tc>
@@ -29983,11 +29728,11 @@
                     <a:bodyPr/>
                     <a:lstStyle/>
                     <a:p>
-                      <a:pPr algn="ctr" indent="0" marL="0">
+                      <a:pPr marL="0" indent="0" algn="ctr">
                         <a:buNone/>
                       </a:pPr>
                       <a:r>
-                        <a:rPr lang="en-US" sz="900" b="1" spc="100" kern="0" dirty="0">
+                        <a:rPr lang="en-US" sz="900" b="1" kern="0" spc="100" dirty="0">
                           <a:solidFill>
                             <a:srgbClr val="FFFFFF"/>
                           </a:solidFill>
@@ -30051,11 +29796,11 @@
                     <a:bodyPr/>
                     <a:lstStyle/>
                     <a:p>
-                      <a:pPr algn="ctr" indent="0" marL="0">
+                      <a:pPr marL="0" indent="0" algn="ctr">
                         <a:buNone/>
                       </a:pPr>
                       <a:r>
-                        <a:rPr lang="en-US" sz="900" b="1" spc="100" kern="0" dirty="0">
+                        <a:rPr lang="en-US" sz="900" b="1" kern="0" spc="100" dirty="0">
                           <a:solidFill>
                             <a:srgbClr val="FFFFFF"/>
                           </a:solidFill>
@@ -30119,11 +29864,11 @@
                     <a:bodyPr/>
                     <a:lstStyle/>
                     <a:p>
-                      <a:pPr algn="ctr" indent="0" marL="0">
+                      <a:pPr marL="0" indent="0" algn="ctr">
                         <a:buNone/>
                       </a:pPr>
                       <a:r>
-                        <a:rPr lang="en-US" sz="900" b="1" spc="100" kern="0" dirty="0">
+                        <a:rPr lang="en-US" sz="900" b="1" kern="0" spc="100" dirty="0">
                           <a:solidFill>
                             <a:srgbClr val="FFFFFF"/>
                           </a:solidFill>
@@ -30182,6 +29927,11 @@
                     </a:solidFill>
                   </a:tcPr>
                 </a:tc>
+                <a:extLst>
+                  <a:ext uri="{0D108BD9-81ED-4DB2-BD59-A6C34878D82A}">
+                    <a16:rowId xmlns:a16="http://schemas.microsoft.com/office/drawing/2014/main" val="10000"/>
+                  </a:ext>
+                </a:extLst>
               </a:tr>
               <a:tr h="548640">
                 <a:tc>
@@ -30189,7 +29939,7 @@
                     <a:bodyPr/>
                     <a:lstStyle/>
                     <a:p>
-                      <a:pPr indent="0" marL="0">
+                      <a:pPr marL="0" indent="0">
                         <a:buNone/>
                       </a:pPr>
                       <a:r>
@@ -30257,7 +30007,7 @@
                     <a:bodyPr/>
                     <a:lstStyle/>
                     <a:p>
-                      <a:pPr indent="0" marL="0">
+                      <a:pPr marL="0" indent="0">
                         <a:buNone/>
                       </a:pPr>
                       <a:r>
@@ -30325,7 +30075,7 @@
                     <a:bodyPr/>
                     <a:lstStyle/>
                     <a:p>
-                      <a:pPr indent="0" marL="0">
+                      <a:pPr marL="0" indent="0">
                         <a:buNone/>
                       </a:pPr>
                       <a:r>
@@ -30388,6 +30138,11 @@
                     </a:solidFill>
                   </a:tcPr>
                 </a:tc>
+                <a:extLst>
+                  <a:ext uri="{0D108BD9-81ED-4DB2-BD59-A6C34878D82A}">
+                    <a16:rowId xmlns:a16="http://schemas.microsoft.com/office/drawing/2014/main" val="10001"/>
+                  </a:ext>
+                </a:extLst>
               </a:tr>
               <a:tr h="548640">
                 <a:tc>
@@ -30395,7 +30150,7 @@
                     <a:bodyPr/>
                     <a:lstStyle/>
                     <a:p>
-                      <a:pPr indent="0" marL="0">
+                      <a:pPr marL="0" indent="0">
                         <a:buNone/>
                       </a:pPr>
                       <a:r>
@@ -30463,7 +30218,7 @@
                     <a:bodyPr/>
                     <a:lstStyle/>
                     <a:p>
-                      <a:pPr indent="0" marL="0">
+                      <a:pPr marL="0" indent="0">
                         <a:buNone/>
                       </a:pPr>
                       <a:r>
@@ -30531,7 +30286,7 @@
                     <a:bodyPr/>
                     <a:lstStyle/>
                     <a:p>
-                      <a:pPr indent="0" marL="0">
+                      <a:pPr marL="0" indent="0">
                         <a:buNone/>
                       </a:pPr>
                       <a:r>
@@ -30594,6 +30349,11 @@
                     </a:solidFill>
                   </a:tcPr>
                 </a:tc>
+                <a:extLst>
+                  <a:ext uri="{0D108BD9-81ED-4DB2-BD59-A6C34878D82A}">
+                    <a16:rowId xmlns:a16="http://schemas.microsoft.com/office/drawing/2014/main" val="10002"/>
+                  </a:ext>
+                </a:extLst>
               </a:tr>
               <a:tr h="548640">
                 <a:tc>
@@ -30601,7 +30361,7 @@
                     <a:bodyPr/>
                     <a:lstStyle/>
                     <a:p>
-                      <a:pPr indent="0" marL="0">
+                      <a:pPr marL="0" indent="0">
                         <a:buNone/>
                       </a:pPr>
                       <a:r>
@@ -30669,7 +30429,7 @@
                     <a:bodyPr/>
                     <a:lstStyle/>
                     <a:p>
-                      <a:pPr indent="0" marL="0">
+                      <a:pPr marL="0" indent="0">
                         <a:buNone/>
                       </a:pPr>
                       <a:r>
@@ -30737,7 +30497,7 @@
                     <a:bodyPr/>
                     <a:lstStyle/>
                     <a:p>
-                      <a:pPr indent="0" marL="0">
+                      <a:pPr marL="0" indent="0">
                         <a:buNone/>
                       </a:pPr>
                       <a:r>
@@ -30800,6 +30560,11 @@
                     </a:solidFill>
                   </a:tcPr>
                 </a:tc>
+                <a:extLst>
+                  <a:ext uri="{0D108BD9-81ED-4DB2-BD59-A6C34878D82A}">
+                    <a16:rowId xmlns:a16="http://schemas.microsoft.com/office/drawing/2014/main" val="10003"/>
+                  </a:ext>
+                </a:extLst>
               </a:tr>
               <a:tr h="548640">
                 <a:tc>
@@ -30807,7 +30572,7 @@
                     <a:bodyPr/>
                     <a:lstStyle/>
                     <a:p>
-                      <a:pPr indent="0" marL="0">
+                      <a:pPr marL="0" indent="0">
                         <a:buNone/>
                       </a:pPr>
                       <a:r>
@@ -30875,7 +30640,7 @@
                     <a:bodyPr/>
                     <a:lstStyle/>
                     <a:p>
-                      <a:pPr indent="0" marL="0">
+                      <a:pPr marL="0" indent="0">
                         <a:buNone/>
                       </a:pPr>
                       <a:r>
@@ -30943,7 +30708,7 @@
                     <a:bodyPr/>
                     <a:lstStyle/>
                     <a:p>
-                      <a:pPr indent="0" marL="0">
+                      <a:pPr marL="0" indent="0">
                         <a:buNone/>
                       </a:pPr>
                       <a:r>
@@ -31006,6 +30771,11 @@
                     </a:solidFill>
                   </a:tcPr>
                 </a:tc>
+                <a:extLst>
+                  <a:ext uri="{0D108BD9-81ED-4DB2-BD59-A6C34878D82A}">
+                    <a16:rowId xmlns:a16="http://schemas.microsoft.com/office/drawing/2014/main" val="10004"/>
+                  </a:ext>
+                </a:extLst>
               </a:tr>
             </a:tbl>
           </a:graphicData>
@@ -31013,7 +30783,7 @@
       </p:graphicFrame>
       <p:sp>
         <p:nvSpPr>
-          <p:cNvPr id="9" name="Shape 5"/>
+          <p:cNvPr id="8" name="Shape 5"/>
           <p:cNvSpPr/>
           <p:nvPr/>
         </p:nvSpPr>
@@ -31059,11 +30829,11 @@
           <a:bodyPr wrap="square" lIns="0" tIns="0" rIns="0" bIns="0" rtlCol="0" anchor="ctr"/>
           <a:lstStyle/>
           <a:p>
-            <a:pPr indent="0" marL="0">
-              <a:buNone/>
-            </a:pPr>
-            <a:r>
-              <a:rPr lang="en-US" sz="950" b="1" spc="150" kern="0" dirty="0">
+            <a:pPr marL="0" indent="0">
+              <a:buNone/>
+            </a:pPr>
+            <a:r>
+              <a:rPr lang="en-US" sz="950" b="1" kern="0" spc="150" dirty="0">
                 <a:solidFill>
                   <a:srgbClr val="106B41"/>
                 </a:solidFill>
@@ -31098,7 +30868,7 @@
           <a:bodyPr wrap="square" lIns="0" tIns="0" rIns="0" bIns="0" rtlCol="0" anchor="ctr"/>
           <a:lstStyle/>
           <a:p>
-            <a:pPr indent="0" marL="0">
+            <a:pPr marL="0" indent="0">
               <a:lnSpc>
                 <a:spcPct val="112000"/>
               </a:lnSpc>
@@ -31167,7 +30937,7 @@
           <a:bodyPr wrap="square" lIns="0" tIns="0" rIns="0" bIns="0" rtlCol="0" anchor="ctr"/>
           <a:lstStyle/>
           <a:p>
-            <a:pPr indent="0" marL="0">
+            <a:pPr marL="0" indent="0">
               <a:lnSpc>
                 <a:spcPct val="112000"/>
               </a:lnSpc>
@@ -31208,7 +30978,7 @@
           </a:prstGeom>
           <a:extLst>
             <a:ext uri="{C572A759-6A51-4108-AA02-DFA0A04FC94B}">
-              <ma14:wrappingTextBoxFlag xmlns:ma14="http://schemas.microsoft.com/office/mac/drawingml/2011/main" val="0"/>
+              <ma14:wrappingTextBoxFlag xmlns:ma14="http://schemas.microsoft.com/office/mac/drawingml/2011/main" xmlns="" val="0"/>
             </a:ext>
           </a:extLst>
         </p:spPr>
@@ -31229,7 +30999,7 @@
           <a:p>
             <a:pPr algn="l"/>
             <a:fld id="{F7021451-1387-4CA6-816F-3879F97B5CBC}" type="slidenum">
-              <a:rPr b="0" lang="en-US"/>
+              <a:rPr lang="en-US" b="0"/>
               <a:t>8</a:t>
             </a:fld>
             <a:endParaRPr lang="en-US"/>
@@ -31304,7 +31074,7 @@
           <a:bodyPr wrap="square" lIns="0" tIns="0" rIns="0" bIns="0" rtlCol="0" anchor="ctr"/>
           <a:lstStyle/>
           <a:p>
-            <a:pPr algn="l" indent="0" marL="0">
+            <a:pPr marL="0" indent="0" algn="l">
               <a:buNone/>
             </a:pPr>
             <a:r>
@@ -31343,7 +31113,7 @@
           <a:bodyPr wrap="square" lIns="0" tIns="0" rIns="0" bIns="0" rtlCol="0" anchor="ctr"/>
           <a:lstStyle/>
           <a:p>
-            <a:pPr indent="0" marL="0">
+            <a:pPr marL="0" indent="0">
               <a:buNone/>
             </a:pPr>
             <a:r>
@@ -31409,11 +31179,11 @@
           <a:bodyPr wrap="square" lIns="0" tIns="0" rIns="0" bIns="0" rtlCol="0" anchor="ctr"/>
           <a:lstStyle/>
           <a:p>
-            <a:pPr algn="ctr" indent="0" marL="0">
-              <a:buNone/>
-            </a:pPr>
-            <a:r>
-              <a:rPr lang="en-US" sz="900" b="1" spc="100" kern="0" dirty="0">
+            <a:pPr marL="0" indent="0" algn="ctr">
+              <a:buNone/>
+            </a:pPr>
+            <a:r>
+              <a:rPr lang="en-US" sz="900" b="1" kern="0" spc="100" dirty="0">
                 <a:solidFill>
                   <a:srgbClr val="5A05F4"/>
                 </a:solidFill>
@@ -31429,14 +31199,14 @@
       </p:sp>
       <p:pic>
         <p:nvPicPr>
-          <p:cNvPr id="7" name="Image 0" descr="preencoded.png">    </p:cNvPr>
+          <p:cNvPr id="7" name="Image 0" descr="preencoded.png"/>
           <p:cNvPicPr>
             <a:picLocks noChangeAspect="1"/>
           </p:cNvPicPr>
           <p:nvPr/>
         </p:nvPicPr>
         <p:blipFill>
-          <a:blip r:embed="rId1"/>
+          <a:blip r:embed="rId3"/>
           <a:stretch>
             <a:fillRect/>
           </a:stretch>
@@ -31494,7 +31264,7 @@
           <a:bodyPr wrap="square" lIns="0" tIns="0" rIns="0" bIns="0" rtlCol="0" anchor="ctr"/>
           <a:lstStyle/>
           <a:p>
-            <a:pPr indent="0" marL="0">
+            <a:pPr marL="0" indent="0">
               <a:buNone/>
             </a:pPr>
             <a:r>
@@ -31533,7 +31303,7 @@
           <a:bodyPr wrap="square" lIns="0" tIns="0" rIns="0" bIns="0" rtlCol="0" anchor="t"/>
           <a:lstStyle/>
           <a:p>
-            <a:pPr indent="0" marL="0">
+            <a:pPr marL="0" indent="0">
               <a:buNone/>
             </a:pPr>
             <a:r>
@@ -31594,7 +31364,7 @@
           <a:bodyPr wrap="square" lIns="0" tIns="0" rIns="0" bIns="0" rtlCol="0" anchor="ctr"/>
           <a:lstStyle/>
           <a:p>
-            <a:pPr indent="0" marL="0">
+            <a:pPr marL="0" indent="0">
               <a:buNone/>
             </a:pPr>
             <a:r>
@@ -31633,7 +31403,7 @@
           <a:bodyPr wrap="square" lIns="0" tIns="0" rIns="0" bIns="0" rtlCol="0" anchor="t"/>
           <a:lstStyle/>
           <a:p>
-            <a:pPr indent="0" marL="0">
+            <a:pPr marL="0" indent="0">
               <a:buNone/>
             </a:pPr>
             <a:r>
@@ -31694,7 +31464,7 @@
           <a:bodyPr wrap="square" lIns="0" tIns="0" rIns="0" bIns="0" rtlCol="0" anchor="ctr"/>
           <a:lstStyle/>
           <a:p>
-            <a:pPr indent="0" marL="0">
+            <a:pPr marL="0" indent="0">
               <a:buNone/>
             </a:pPr>
             <a:r>
@@ -31733,7 +31503,7 @@
           <a:bodyPr wrap="square" lIns="0" tIns="0" rIns="0" bIns="0" rtlCol="0" anchor="t"/>
           <a:lstStyle/>
           <a:p>
-            <a:pPr indent="0" marL="0">
+            <a:pPr marL="0" indent="0">
               <a:buNone/>
             </a:pPr>
             <a:r>
@@ -32315,7 +32085,7 @@
           <a:bodyPr wrap="square" lIns="0" tIns="0" rIns="0" bIns="0" rtlCol="0" anchor="ctr"/>
           <a:lstStyle/>
           <a:p>
-            <a:pPr algn="ctr" indent="0" marL="0">
+            <a:pPr marL="0" indent="0" algn="ctr">
               <a:buNone/>
             </a:pPr>
             <a:r>
@@ -32377,7 +32147,7 @@
           <a:bodyPr wrap="square" lIns="0" tIns="0" rIns="0" bIns="0" rtlCol="0" anchor="ctr"/>
           <a:lstStyle/>
           <a:p>
-            <a:pPr algn="ctr" indent="0" marL="0">
+            <a:pPr marL="0" indent="0" algn="ctr">
               <a:buNone/>
             </a:pPr>
             <a:r>
@@ -32416,11 +32186,11 @@
           <a:bodyPr wrap="square" lIns="0" tIns="0" rIns="0" bIns="0" rtlCol="0" anchor="ctr"/>
           <a:lstStyle/>
           <a:p>
-            <a:pPr indent="0" marL="0">
-              <a:buNone/>
-            </a:pPr>
-            <a:r>
-              <a:rPr lang="en-US" sz="850" spc="100" kern="0" dirty="0">
+            <a:pPr marL="0" indent="0">
+              <a:buNone/>
+            </a:pPr>
+            <a:r>
+              <a:rPr lang="en-US" sz="850" kern="0" spc="100" dirty="0">
                 <a:solidFill>
                   <a:srgbClr val="6B6B6B"/>
                 </a:solidFill>
@@ -32482,11 +32252,11 @@
           <a:bodyPr wrap="square" lIns="0" tIns="0" rIns="0" bIns="0" rtlCol="0" anchor="ctr"/>
           <a:lstStyle/>
           <a:p>
-            <a:pPr indent="0" marL="0">
-              <a:buNone/>
-            </a:pPr>
-            <a:r>
-              <a:rPr lang="en-US" sz="950" b="1" spc="150" kern="0" dirty="0">
+            <a:pPr marL="0" indent="0">
+              <a:buNone/>
+            </a:pPr>
+            <a:r>
+              <a:rPr lang="en-US" sz="950" b="1" kern="0" spc="150" dirty="0">
                 <a:solidFill>
                   <a:srgbClr val="B3261E"/>
                 </a:solidFill>
@@ -32521,7 +32291,7 @@
           <a:bodyPr wrap="square" lIns="0" tIns="0" rIns="0" bIns="0" rtlCol="0" anchor="ctr"/>
           <a:lstStyle/>
           <a:p>
-            <a:pPr indent="0" marL="0">
+            <a:pPr marL="0" indent="0">
               <a:lnSpc>
                 <a:spcPct val="112000"/>
               </a:lnSpc>
@@ -32585,7 +32355,7 @@
           <a:bodyPr wrap="square" lIns="0" tIns="0" rIns="0" bIns="0" rtlCol="0" anchor="ctr"/>
           <a:lstStyle/>
           <a:p>
-            <a:pPr indent="0" marL="0">
+            <a:pPr marL="0" indent="0">
               <a:lnSpc>
                 <a:spcPct val="112000"/>
               </a:lnSpc>
@@ -32608,7 +32378,7 @@
       </p:sp>
       <p:sp>
         <p:nvSpPr>
-          <p:cNvPr id="25" name="Slide Number Placeholder 0"/>
+          <p:cNvPr id="53" name="Slide Number Placeholder 0"/>
           <p:cNvSpPr>
             <a:spLocks noGrp="1"/>
           </p:cNvSpPr>
@@ -32626,7 +32396,7 @@
           </a:prstGeom>
           <a:extLst>
             <a:ext uri="{C572A759-6A51-4108-AA02-DFA0A04FC94B}">
-              <ma14:wrappingTextBoxFlag xmlns:ma14="http://schemas.microsoft.com/office/mac/drawingml/2011/main" val="0"/>
+              <ma14:wrappingTextBoxFlag xmlns:ma14="http://schemas.microsoft.com/office/mac/drawingml/2011/main" xmlns="" val="0"/>
             </a:ext>
           </a:extLst>
         </p:spPr>
@@ -32647,7 +32417,7 @@
           <a:p>
             <a:pPr algn="l"/>
             <a:fld id="{F7021451-1387-4CA6-816F-3879F97B5CBC}" type="slidenum">
-              <a:rPr b="0" lang="en-US"/>
+              <a:rPr lang="en-US" b="0"/>
               <a:t>9</a:t>
             </a:fld>
             <a:endParaRPr lang="en-US"/>
@@ -32955,4 +32725,299 @@
     </a:ext>
   </a:extLst>
 </a:theme>
+</file>
+
+<file path=ppt/theme/theme2.xml><?xml version="1.0" encoding="utf-8"?>
+<a:theme xmlns:a="http://schemas.openxmlformats.org/drawingml/2006/main" name="Office Theme">
+  <a:themeElements>
+    <a:clrScheme name="Office">
+      <a:dk1>
+        <a:sysClr val="windowText" lastClr="000000"/>
+      </a:dk1>
+      <a:lt1>
+        <a:sysClr val="window" lastClr="FFFFFF"/>
+      </a:lt1>
+      <a:dk2>
+        <a:srgbClr val="44546A"/>
+      </a:dk2>
+      <a:lt2>
+        <a:srgbClr val="E7E6E6"/>
+      </a:lt2>
+      <a:accent1>
+        <a:srgbClr val="4472C4"/>
+      </a:accent1>
+      <a:accent2>
+        <a:srgbClr val="ED7D31"/>
+      </a:accent2>
+      <a:accent3>
+        <a:srgbClr val="A5A5A5"/>
+      </a:accent3>
+      <a:accent4>
+        <a:srgbClr val="FFC000"/>
+      </a:accent4>
+      <a:accent5>
+        <a:srgbClr val="5B9BD5"/>
+      </a:accent5>
+      <a:accent6>
+        <a:srgbClr val="70AD47"/>
+      </a:accent6>
+      <a:hlink>
+        <a:srgbClr val="0563C1"/>
+      </a:hlink>
+      <a:folHlink>
+        <a:srgbClr val="954F72"/>
+      </a:folHlink>
+    </a:clrScheme>
+    <a:fontScheme name="Office">
+      <a:majorFont>
+        <a:latin typeface="Calibri Light" panose="020F0302020204030204"/>
+        <a:ea typeface=""/>
+        <a:cs typeface=""/>
+        <a:font script="Jpan" typeface="游ゴシック Light"/>
+        <a:font script="Hang" typeface="맑은 고딕"/>
+        <a:font script="Hans" typeface="等线 Light"/>
+        <a:font script="Hant" typeface="新細明體"/>
+        <a:font script="Arab" typeface="Times New Roman"/>
+        <a:font script="Hebr" typeface="Times New Roman"/>
+        <a:font script="Thai" typeface="Angsana New"/>
+        <a:font script="Ethi" typeface="Nyala"/>
+        <a:font script="Beng" typeface="Vrinda"/>
+        <a:font script="Gujr" typeface="Shruti"/>
+        <a:font script="Khmr" typeface="MoolBoran"/>
+        <a:font script="Knda" typeface="Tunga"/>
+        <a:font script="Guru" typeface="Raavi"/>
+        <a:font script="Cans" typeface="Euphemia"/>
+        <a:font script="Cher" typeface="Plantagenet Cherokee"/>
+        <a:font script="Yiii" typeface="Microsoft Yi Baiti"/>
+        <a:font script="Tibt" typeface="Microsoft Himalaya"/>
+        <a:font script="Thaa" typeface="MV Boli"/>
+        <a:font script="Deva" typeface="Mangal"/>
+        <a:font script="Telu" typeface="Gautami"/>
+        <a:font script="Taml" typeface="Latha"/>
+        <a:font script="Syrc" typeface="Estrangelo Edessa"/>
+        <a:font script="Orya" typeface="Kalinga"/>
+        <a:font script="Mlym" typeface="Kartika"/>
+        <a:font script="Laoo" typeface="DokChampa"/>
+        <a:font script="Sinh" typeface="Iskoola Pota"/>
+        <a:font script="Mong" typeface="Mongolian Baiti"/>
+        <a:font script="Viet" typeface="Times New Roman"/>
+        <a:font script="Uigh" typeface="Microsoft Uighur"/>
+        <a:font script="Geor" typeface="Sylfaen"/>
+        <a:font script="Armn" typeface="Arial"/>
+        <a:font script="Bugi" typeface="Leelawadee UI"/>
+        <a:font script="Bopo" typeface="Microsoft JhengHei"/>
+        <a:font script="Java" typeface="Javanese Text"/>
+        <a:font script="Lisu" typeface="Segoe UI"/>
+        <a:font script="Mymr" typeface="Myanmar Text"/>
+        <a:font script="Nkoo" typeface="Ebrima"/>
+        <a:font script="Olck" typeface="Nirmala UI"/>
+        <a:font script="Osma" typeface="Ebrima"/>
+        <a:font script="Phag" typeface="Phagspa"/>
+        <a:font script="Syrn" typeface="Estrangelo Edessa"/>
+        <a:font script="Syrj" typeface="Estrangelo Edessa"/>
+        <a:font script="Syre" typeface="Estrangelo Edessa"/>
+        <a:font script="Sora" typeface="Nirmala UI"/>
+        <a:font script="Tale" typeface="Microsoft Tai Le"/>
+        <a:font script="Talu" typeface="Microsoft New Tai Lue"/>
+        <a:font script="Tfng" typeface="Ebrima"/>
+      </a:majorFont>
+      <a:minorFont>
+        <a:latin typeface="Calibri" panose="020F0502020204030204"/>
+        <a:ea typeface=""/>
+        <a:cs typeface=""/>
+        <a:font script="Jpan" typeface="游ゴシック"/>
+        <a:font script="Hang" typeface="맑은 고딕"/>
+        <a:font script="Hans" typeface="等线"/>
+        <a:font script="Hant" typeface="新細明體"/>
+        <a:font script="Arab" typeface="Arial"/>
+        <a:font script="Hebr" typeface="Arial"/>
+        <a:font script="Thai" typeface="Cordia New"/>
+        <a:font script="Ethi" typeface="Nyala"/>
+        <a:font script="Beng" typeface="Vrinda"/>
+        <a:font script="Gujr" typeface="Shruti"/>
+        <a:font script="Khmr" typeface="DaunPenh"/>
+        <a:font script="Knda" typeface="Tunga"/>
+        <a:font script="Guru" typeface="Raavi"/>
+        <a:font script="Cans" typeface="Euphemia"/>
+        <a:font script="Cher" typeface="Plantagenet Cherokee"/>
+        <a:font script="Yiii" typeface="Microsoft Yi Baiti"/>
+        <a:font script="Tibt" typeface="Microsoft Himalaya"/>
+        <a:font script="Thaa" typeface="MV Boli"/>
+        <a:font script="Deva" typeface="Mangal"/>
+        <a:font script="Telu" typeface="Gautami"/>
+        <a:font script="Taml" typeface="Latha"/>
+        <a:font script="Syrc" typeface="Estrangelo Edessa"/>
+        <a:font script="Orya" typeface="Kalinga"/>
+        <a:font script="Mlym" typeface="Kartika"/>
+        <a:font script="Laoo" typeface="DokChampa"/>
+        <a:font script="Sinh" typeface="Iskoola Pota"/>
+        <a:font script="Mong" typeface="Mongolian Baiti"/>
+        <a:font script="Viet" typeface="Arial"/>
+        <a:font script="Uigh" typeface="Microsoft Uighur"/>
+        <a:font script="Geor" typeface="Sylfaen"/>
+        <a:font script="Armn" typeface="Arial"/>
+        <a:font script="Bugi" typeface="Leelawadee UI"/>
+        <a:font script="Bopo" typeface="Microsoft JhengHei"/>
+        <a:font script="Java" typeface="Javanese Text"/>
+        <a:font script="Lisu" typeface="Segoe UI"/>
+        <a:font script="Mymr" typeface="Myanmar Text"/>
+        <a:font script="Nkoo" typeface="Ebrima"/>
+        <a:font script="Olck" typeface="Nirmala UI"/>
+        <a:font script="Osma" typeface="Ebrima"/>
+        <a:font script="Phag" typeface="Phagspa"/>
+        <a:font script="Syrn" typeface="Estrangelo Edessa"/>
+        <a:font script="Syrj" typeface="Estrangelo Edessa"/>
+        <a:font script="Syre" typeface="Estrangelo Edessa"/>
+        <a:font script="Sora" typeface="Nirmala UI"/>
+        <a:font script="Tale" typeface="Microsoft Tai Le"/>
+        <a:font script="Talu" typeface="Microsoft New Tai Lue"/>
+        <a:font script="Tfng" typeface="Ebrima"/>
+      </a:minorFont>
+    </a:fontScheme>
+    <a:fmtScheme name="Office">
+      <a:fillStyleLst>
+        <a:solidFill>
+          <a:schemeClr val="phClr"/>
+        </a:solidFill>
+        <a:gradFill rotWithShape="1">
+          <a:gsLst>
+            <a:gs pos="0">
+              <a:schemeClr val="phClr">
+                <a:lumMod val="110000"/>
+                <a:satMod val="105000"/>
+                <a:tint val="67000"/>
+              </a:schemeClr>
+            </a:gs>
+            <a:gs pos="50000">
+              <a:schemeClr val="phClr">
+                <a:lumMod val="105000"/>
+                <a:satMod val="103000"/>
+                <a:tint val="73000"/>
+              </a:schemeClr>
+            </a:gs>
+            <a:gs pos="100000">
+              <a:schemeClr val="phClr">
+                <a:lumMod val="105000"/>
+                <a:satMod val="109000"/>
+                <a:tint val="81000"/>
+              </a:schemeClr>
+            </a:gs>
+          </a:gsLst>
+          <a:lin ang="5400000" scaled="0"/>
+        </a:gradFill>
+        <a:gradFill rotWithShape="1">
+          <a:gsLst>
+            <a:gs pos="0">
+              <a:schemeClr val="phClr">
+                <a:satMod val="103000"/>
+                <a:lumMod val="102000"/>
+                <a:tint val="94000"/>
+              </a:schemeClr>
+            </a:gs>
+            <a:gs pos="50000">
+              <a:schemeClr val="phClr">
+                <a:satMod val="110000"/>
+                <a:lumMod val="100000"/>
+                <a:shade val="100000"/>
+              </a:schemeClr>
+            </a:gs>
+            <a:gs pos="100000">
+              <a:schemeClr val="phClr">
+                <a:lumMod val="99000"/>
+                <a:satMod val="120000"/>
+                <a:shade val="78000"/>
+              </a:schemeClr>
+            </a:gs>
+          </a:gsLst>
+          <a:lin ang="5400000" scaled="0"/>
+        </a:gradFill>
+      </a:fillStyleLst>
+      <a:lnStyleLst>
+        <a:ln w="6350" cap="flat" cmpd="sng" algn="ctr">
+          <a:solidFill>
+            <a:schemeClr val="phClr"/>
+          </a:solidFill>
+          <a:prstDash val="solid"/>
+          <a:miter lim="800000"/>
+        </a:ln>
+        <a:ln w="12700" cap="flat" cmpd="sng" algn="ctr">
+          <a:solidFill>
+            <a:schemeClr val="phClr"/>
+          </a:solidFill>
+          <a:prstDash val="solid"/>
+          <a:miter lim="800000"/>
+        </a:ln>
+        <a:ln w="19050" cap="flat" cmpd="sng" algn="ctr">
+          <a:solidFill>
+            <a:schemeClr val="phClr"/>
+          </a:solidFill>
+          <a:prstDash val="solid"/>
+          <a:miter lim="800000"/>
+        </a:ln>
+      </a:lnStyleLst>
+      <a:effectStyleLst>
+        <a:effectStyle>
+          <a:effectLst/>
+        </a:effectStyle>
+        <a:effectStyle>
+          <a:effectLst/>
+        </a:effectStyle>
+        <a:effectStyle>
+          <a:effectLst>
+            <a:outerShdw blurRad="57150" dist="19050" dir="5400000" algn="ctr" rotWithShape="0">
+              <a:srgbClr val="000000">
+                <a:alpha val="63000"/>
+              </a:srgbClr>
+            </a:outerShdw>
+          </a:effectLst>
+        </a:effectStyle>
+      </a:effectStyleLst>
+      <a:bgFillStyleLst>
+        <a:solidFill>
+          <a:schemeClr val="phClr"/>
+        </a:solidFill>
+        <a:solidFill>
+          <a:schemeClr val="phClr">
+            <a:tint val="95000"/>
+            <a:satMod val="170000"/>
+          </a:schemeClr>
+        </a:solidFill>
+        <a:gradFill rotWithShape="1">
+          <a:gsLst>
+            <a:gs pos="0">
+              <a:schemeClr val="phClr">
+                <a:tint val="93000"/>
+                <a:satMod val="150000"/>
+                <a:shade val="98000"/>
+                <a:lumMod val="102000"/>
+              </a:schemeClr>
+            </a:gs>
+            <a:gs pos="50000">
+              <a:schemeClr val="phClr">
+                <a:tint val="98000"/>
+                <a:satMod val="130000"/>
+                <a:shade val="90000"/>
+                <a:lumMod val="103000"/>
+              </a:schemeClr>
+            </a:gs>
+            <a:gs pos="100000">
+              <a:schemeClr val="phClr">
+                <a:shade val="63000"/>
+                <a:satMod val="120000"/>
+              </a:schemeClr>
+            </a:gs>
+          </a:gsLst>
+          <a:lin ang="5400000" scaled="0"/>
+        </a:gradFill>
+      </a:bgFillStyleLst>
+    </a:fmtScheme>
+  </a:themeElements>
+  <a:objectDefaults/>
+  <a:extraClrSchemeLst/>
+  <a:extLst>
+    <a:ext uri="{05A4C25C-085E-4340-85A3-A5531E510DB2}">
+      <thm15:themeFamily xmlns:thm15="http://schemas.microsoft.com/office/thememl/2012/main" name="Office Theme" id="{62F939B6-93AF-4DB8-9C6B-D6C7DFDC589F}" vid="{4A3C46E8-61CC-4603-A589-7422A47A8E4A}"/>
+    </a:ext>
+  </a:extLst>
+</a:theme>
 </file>
--- a/docs/decks/L09.pptx
+++ b/docs/decks/L09.pptx
@@ -4,9 +4,6 @@
   <p:sldMasterIdLst>
     <p:sldMasterId id="2147483648" r:id="rId1"/>
   </p:sldMasterIdLst>
-  <p:notesMasterIdLst>
-    <p:notesMasterId r:id="rId32"/>
-  </p:notesMasterIdLst>
   <p:sldIdLst>
     <p:sldId id="256" r:id="rId2"/>
     <p:sldId id="257" r:id="rId3"/>
@@ -39,6 +36,9 @@
     <p:sldId id="284" r:id="rId30"/>
     <p:sldId id="285" r:id="rId31"/>
   </p:sldIdLst>
+  <p:notesMasterIdLst>
+    <p:notesMasterId r:id="rId32"/>
+  </p:notesMasterIdLst>
   <p:sldSz cx="12192000" cy="6858000"/>
   <p:notesSz cx="6858000" cy="12192000"/>
   <p:defaultTextStyle>
@@ -133,11 +133,6 @@
       </a:defRPr>
     </a:lvl9pPr>
   </p:defaultTextStyle>
-  <p:extLst>
-    <p:ext uri="{EFAFB233-063F-42B5-8137-9DF3F51BA10A}">
-      <p15:sldGuideLst xmlns:p15="http://schemas.microsoft.com/office/powerpoint/2012/main"/>
-    </p:ext>
-  </p:extLst>
 </p:presentation>
 </file>
 
@@ -163,10 +158,234 @@
           <a:chExt cx="0" cy="0"/>
         </a:xfrm>
       </p:grpSpPr>
+      <p:sp>
+        <p:nvSpPr>
+          <p:cNvPr id="2" name="Header Placeholder 1"/>
+          <p:cNvSpPr>
+            <a:spLocks noGrp="1"/>
+          </p:cNvSpPr>
+          <p:nvPr>
+            <p:ph type="hdr" sz="quarter"/>
+          </p:nvPr>
+        </p:nvSpPr>
+        <p:spPr>
+          <a:xfrm>
+            <a:off x="0" y="0"/>
+            <a:ext cx="2971800" cy="458788"/>
+          </a:xfrm>
+          <a:prstGeom prst="rect">
+            <a:avLst/>
+          </a:prstGeom>
+        </p:spPr>
+        <p:txBody>
+          <a:bodyPr vert="horz" lIns="91440" tIns="45720" rIns="91440" bIns="45720" rtlCol="0"/>
+          <a:lstStyle>
+            <a:lvl1pPr algn="l">
+              <a:defRPr sz="1200"/>
+            </a:lvl1pPr>
+          </a:lstStyle>
+          <a:p>
+            <a:endParaRPr lang="en-US"/>
+          </a:p>
+        </p:txBody>
+      </p:sp>
+      <p:sp>
+        <p:nvSpPr>
+          <p:cNvPr id="3" name="Date Placeholder 2"/>
+          <p:cNvSpPr>
+            <a:spLocks noGrp="1"/>
+          </p:cNvSpPr>
+          <p:nvPr>
+            <p:ph type="dt" idx="1"/>
+          </p:nvPr>
+        </p:nvSpPr>
+        <p:spPr>
+          <a:xfrm>
+            <a:off x="3884613" y="0"/>
+            <a:ext cx="2971800" cy="458788"/>
+          </a:xfrm>
+          <a:prstGeom prst="rect">
+            <a:avLst/>
+          </a:prstGeom>
+        </p:spPr>
+        <p:txBody>
+          <a:bodyPr vert="horz" lIns="91440" tIns="45720" rIns="91440" bIns="45720" rtlCol="0"/>
+          <a:lstStyle>
+            <a:lvl1pPr algn="r">
+              <a:defRPr sz="1200"/>
+            </a:lvl1pPr>
+          </a:lstStyle>
+          <a:p>
+            <a:fld id="{5282F153-3F37-0F45-9E97-73ACFA13230C}" type="datetimeFigureOut">
+              <a:rPr lang="en-US"/>
+              <a:t>7/23/19</a:t>
+            </a:fld>
+            <a:endParaRPr lang="en-US"/>
+          </a:p>
+        </p:txBody>
+      </p:sp>
+      <p:sp>
+        <p:nvSpPr>
+          <p:cNvPr id="4" name="Slide Image Placeholder 3"/>
+          <p:cNvSpPr>
+            <a:spLocks noGrp="1" noRot="1" noChangeAspect="1"/>
+          </p:cNvSpPr>
+          <p:nvPr>
+            <p:ph type="sldImg" idx="2"/>
+          </p:nvPr>
+        </p:nvSpPr>
+        <p:spPr>
+          <a:xfrm>
+            <a:off x="685800" y="1143000"/>
+            <a:ext cx="5486400" cy="3086100"/>
+          </a:xfrm>
+          <a:prstGeom prst="rect">
+            <a:avLst/>
+          </a:prstGeom>
+          <a:noFill/>
+          <a:ln w="12700">
+            <a:solidFill>
+              <a:prstClr val="black"/>
+            </a:solidFill>
+          </a:ln>
+        </p:spPr>
+        <p:txBody>
+          <a:bodyPr vert="horz" lIns="91440" tIns="45720" rIns="91440" bIns="45720" rtlCol="0" anchor="ctr"/>
+          <a:lstStyle/>
+          <a:p>
+            <a:endParaRPr lang="en-US"/>
+          </a:p>
+        </p:txBody>
+      </p:sp>
+      <p:sp>
+        <p:nvSpPr>
+          <p:cNvPr id="5" name="Notes Placeholder 4"/>
+          <p:cNvSpPr>
+            <a:spLocks noGrp="1"/>
+          </p:cNvSpPr>
+          <p:nvPr>
+            <p:ph type="body" sz="quarter" idx="3"/>
+          </p:nvPr>
+        </p:nvSpPr>
+        <p:spPr>
+          <a:xfrm>
+            <a:off x="685800" y="4400550"/>
+            <a:ext cx="5486400" cy="3600450"/>
+          </a:xfrm>
+          <a:prstGeom prst="rect">
+            <a:avLst/>
+          </a:prstGeom>
+        </p:spPr>
+        <p:txBody>
+          <a:bodyPr vert="horz" lIns="91440" tIns="45720" rIns="91440" bIns="45720" rtlCol="0"/>
+          <a:lstStyle/>
+          <a:p>
+            <a:pPr lvl="0"/>
+            <a:r>
+              <a:rPr lang="en-US"/>
+              <a:t>Click to edit Master text styles</a:t>
+            </a:r>
+          </a:p>
+          <a:p>
+            <a:pPr lvl="1"/>
+            <a:r>
+              <a:rPr lang="en-US"/>
+              <a:t>Second level</a:t>
+            </a:r>
+          </a:p>
+          <a:p>
+            <a:pPr lvl="2"/>
+            <a:r>
+              <a:rPr lang="en-US"/>
+              <a:t>Third level</a:t>
+            </a:r>
+          </a:p>
+          <a:p>
+            <a:pPr lvl="3"/>
+            <a:r>
+              <a:rPr lang="en-US"/>
+              <a:t>Fourth level</a:t>
+            </a:r>
+          </a:p>
+          <a:p>
+            <a:pPr lvl="4"/>
+            <a:r>
+              <a:rPr lang="en-US"/>
+              <a:t>Fifth level</a:t>
+            </a:r>
+          </a:p>
+        </p:txBody>
+      </p:sp>
+      <p:sp>
+        <p:nvSpPr>
+          <p:cNvPr id="6" name="Footer Placeholder 5"/>
+          <p:cNvSpPr>
+            <a:spLocks noGrp="1"/>
+          </p:cNvSpPr>
+          <p:nvPr>
+            <p:ph type="ftr" sz="quarter" idx="4"/>
+          </p:nvPr>
+        </p:nvSpPr>
+        <p:spPr>
+          <a:xfrm>
+            <a:off x="0" y="8685213"/>
+            <a:ext cx="2971800" cy="458787"/>
+          </a:xfrm>
+          <a:prstGeom prst="rect">
+            <a:avLst/>
+          </a:prstGeom>
+        </p:spPr>
+        <p:txBody>
+          <a:bodyPr vert="horz" lIns="91440" tIns="45720" rIns="91440" bIns="45720" rtlCol="0" anchor="b"/>
+          <a:lstStyle>
+            <a:lvl1pPr algn="l">
+              <a:defRPr sz="1200"/>
+            </a:lvl1pPr>
+          </a:lstStyle>
+          <a:p>
+            <a:endParaRPr lang="en-US"/>
+          </a:p>
+        </p:txBody>
+      </p:sp>
+      <p:sp>
+        <p:nvSpPr>
+          <p:cNvPr id="7" name="Slide Number Placeholder 6"/>
+          <p:cNvSpPr>
+            <a:spLocks noGrp="1"/>
+          </p:cNvSpPr>
+          <p:nvPr>
+            <p:ph type="sldNum" sz="quarter" idx="5"/>
+          </p:nvPr>
+        </p:nvSpPr>
+        <p:spPr>
+          <a:xfrm>
+            <a:off x="3884613" y="8685213"/>
+            <a:ext cx="2971800" cy="458787"/>
+          </a:xfrm>
+          <a:prstGeom prst="rect">
+            <a:avLst/>
+          </a:prstGeom>
+        </p:spPr>
+        <p:txBody>
+          <a:bodyPr vert="horz" lIns="91440" tIns="45720" rIns="91440" bIns="45720" rtlCol="0" anchor="b"/>
+          <a:lstStyle>
+            <a:lvl1pPr algn="r">
+              <a:defRPr sz="1200"/>
+            </a:lvl1pPr>
+          </a:lstStyle>
+          <a:p>
+            <a:fld id="{CE5E9CC1-C706-0F49-92D6-E571CC5EEA8F}" type="slidenum">
+              <a:rPr lang="en-US"/>
+              <a:t>‹#›</a:t>
+            </a:fld>
+            <a:endParaRPr lang="en-US"/>
+          </a:p>
+        </p:txBody>
+      </p:sp>
     </p:spTree>
     <p:extLst>
       <p:ext uri="{BB962C8B-B14F-4D97-AF65-F5344CB8AC3E}">
-        <p14:creationId xmlns:p14="http://schemas.microsoft.com/office/powerpoint/2010/main" val="1214745195"/>
+        <p14:creationId xmlns:p14="http://schemas.microsoft.com/office/powerpoint/2010/main" val="1024086991"/>
       </p:ext>
     </p:extLst>
   </p:cSld>
@@ -310,6 +529,10 @@
           <a:bodyPr/>
           <a:lstStyle/>
           <a:p>
+            <a:r>
+              <a:rPr lang="en-US" dirty="0"/>
+              <a:t/>
+            </a:r>
             <a:endParaRPr lang="en-US" dirty="0"/>
           </a:p>
         </p:txBody>
@@ -394,6 +617,10 @@
           <a:bodyPr/>
           <a:lstStyle/>
           <a:p>
+            <a:r>
+              <a:rPr lang="en-US" dirty="0"/>
+              <a:t/>
+            </a:r>
             <a:endParaRPr lang="en-US" dirty="0"/>
           </a:p>
         </p:txBody>
@@ -478,6 +705,10 @@
           <a:bodyPr/>
           <a:lstStyle/>
           <a:p>
+            <a:r>
+              <a:rPr lang="en-US" dirty="0"/>
+              <a:t/>
+            </a:r>
             <a:endParaRPr lang="en-US" dirty="0"/>
           </a:p>
         </p:txBody>
@@ -562,6 +793,10 @@
           <a:bodyPr/>
           <a:lstStyle/>
           <a:p>
+            <a:r>
+              <a:rPr lang="en-US" dirty="0"/>
+              <a:t/>
+            </a:r>
             <a:endParaRPr lang="en-US" dirty="0"/>
           </a:p>
         </p:txBody>
@@ -646,6 +881,10 @@
           <a:bodyPr/>
           <a:lstStyle/>
           <a:p>
+            <a:r>
+              <a:rPr lang="en-US" dirty="0"/>
+              <a:t/>
+            </a:r>
             <a:endParaRPr lang="en-US" dirty="0"/>
           </a:p>
         </p:txBody>
@@ -730,6 +969,10 @@
           <a:bodyPr/>
           <a:lstStyle/>
           <a:p>
+            <a:r>
+              <a:rPr lang="en-US" dirty="0"/>
+              <a:t/>
+            </a:r>
             <a:endParaRPr lang="en-US" dirty="0"/>
           </a:p>
         </p:txBody>
@@ -814,6 +1057,10 @@
           <a:bodyPr/>
           <a:lstStyle/>
           <a:p>
+            <a:r>
+              <a:rPr lang="en-US" dirty="0"/>
+              <a:t/>
+            </a:r>
             <a:endParaRPr lang="en-US" dirty="0"/>
           </a:p>
         </p:txBody>
@@ -898,6 +1145,10 @@
           <a:bodyPr/>
           <a:lstStyle/>
           <a:p>
+            <a:r>
+              <a:rPr lang="en-US" dirty="0"/>
+              <a:t/>
+            </a:r>
             <a:endParaRPr lang="en-US" dirty="0"/>
           </a:p>
         </p:txBody>
@@ -982,6 +1233,10 @@
           <a:bodyPr/>
           <a:lstStyle/>
           <a:p>
+            <a:r>
+              <a:rPr lang="en-US" dirty="0"/>
+              <a:t/>
+            </a:r>
             <a:endParaRPr lang="en-US" dirty="0"/>
           </a:p>
         </p:txBody>
@@ -1066,6 +1321,10 @@
           <a:bodyPr/>
           <a:lstStyle/>
           <a:p>
+            <a:r>
+              <a:rPr lang="en-US" dirty="0"/>
+              <a:t/>
+            </a:r>
             <a:endParaRPr lang="en-US" dirty="0"/>
           </a:p>
         </p:txBody>
@@ -1150,6 +1409,10 @@
           <a:bodyPr/>
           <a:lstStyle/>
           <a:p>
+            <a:r>
+              <a:rPr lang="en-US" dirty="0"/>
+              <a:t/>
+            </a:r>
             <a:endParaRPr lang="en-US" dirty="0"/>
           </a:p>
         </p:txBody>
@@ -1234,6 +1497,10 @@
           <a:bodyPr/>
           <a:lstStyle/>
           <a:p>
+            <a:r>
+              <a:rPr lang="en-US" dirty="0"/>
+              <a:t/>
+            </a:r>
             <a:endParaRPr lang="en-US" dirty="0"/>
           </a:p>
         </p:txBody>
@@ -1318,6 +1585,10 @@
           <a:bodyPr/>
           <a:lstStyle/>
           <a:p>
+            <a:r>
+              <a:rPr lang="en-US" dirty="0"/>
+              <a:t/>
+            </a:r>
             <a:endParaRPr lang="en-US" dirty="0"/>
           </a:p>
         </p:txBody>
@@ -1402,6 +1673,10 @@
           <a:bodyPr/>
           <a:lstStyle/>
           <a:p>
+            <a:r>
+              <a:rPr lang="en-US" dirty="0"/>
+              <a:t/>
+            </a:r>
             <a:endParaRPr lang="en-US" dirty="0"/>
           </a:p>
         </p:txBody>
@@ -1486,6 +1761,10 @@
           <a:bodyPr/>
           <a:lstStyle/>
           <a:p>
+            <a:r>
+              <a:rPr lang="en-US" dirty="0"/>
+              <a:t/>
+            </a:r>
             <a:endParaRPr lang="en-US" dirty="0"/>
           </a:p>
         </p:txBody>
@@ -1570,6 +1849,10 @@
           <a:bodyPr/>
           <a:lstStyle/>
           <a:p>
+            <a:r>
+              <a:rPr lang="en-US" dirty="0"/>
+              <a:t/>
+            </a:r>
             <a:endParaRPr lang="en-US" dirty="0"/>
           </a:p>
         </p:txBody>
@@ -1654,6 +1937,10 @@
           <a:bodyPr/>
           <a:lstStyle/>
           <a:p>
+            <a:r>
+              <a:rPr lang="en-US" dirty="0"/>
+              <a:t/>
+            </a:r>
             <a:endParaRPr lang="en-US" dirty="0"/>
           </a:p>
         </p:txBody>
@@ -1738,6 +2025,10 @@
           <a:bodyPr/>
           <a:lstStyle/>
           <a:p>
+            <a:r>
+              <a:rPr lang="en-US" dirty="0"/>
+              <a:t/>
+            </a:r>
             <a:endParaRPr lang="en-US" dirty="0"/>
           </a:p>
         </p:txBody>
@@ -1822,6 +2113,10 @@
           <a:bodyPr/>
           <a:lstStyle/>
           <a:p>
+            <a:r>
+              <a:rPr lang="en-US" dirty="0"/>
+              <a:t/>
+            </a:r>
             <a:endParaRPr lang="en-US" dirty="0"/>
           </a:p>
         </p:txBody>
@@ -1906,6 +2201,10 @@
           <a:bodyPr/>
           <a:lstStyle/>
           <a:p>
+            <a:r>
+              <a:rPr lang="en-US" dirty="0"/>
+              <a:t/>
+            </a:r>
             <a:endParaRPr lang="en-US" dirty="0"/>
           </a:p>
         </p:txBody>
@@ -1990,6 +2289,10 @@
           <a:bodyPr/>
           <a:lstStyle/>
           <a:p>
+            <a:r>
+              <a:rPr lang="en-US" dirty="0"/>
+              <a:t/>
+            </a:r>
             <a:endParaRPr lang="en-US" dirty="0"/>
           </a:p>
         </p:txBody>
@@ -2074,6 +2377,10 @@
           <a:bodyPr/>
           <a:lstStyle/>
           <a:p>
+            <a:r>
+              <a:rPr lang="en-US" dirty="0"/>
+              <a:t/>
+            </a:r>
             <a:endParaRPr lang="en-US" dirty="0"/>
           </a:p>
         </p:txBody>
@@ -2158,6 +2465,10 @@
           <a:bodyPr/>
           <a:lstStyle/>
           <a:p>
+            <a:r>
+              <a:rPr lang="en-US" dirty="0"/>
+              <a:t/>
+            </a:r>
             <a:endParaRPr lang="en-US" dirty="0"/>
           </a:p>
         </p:txBody>
@@ -2242,6 +2553,10 @@
           <a:bodyPr/>
           <a:lstStyle/>
           <a:p>
+            <a:r>
+              <a:rPr lang="en-US" dirty="0"/>
+              <a:t/>
+            </a:r>
             <a:endParaRPr lang="en-US" dirty="0"/>
           </a:p>
         </p:txBody>
@@ -2326,6 +2641,10 @@
           <a:bodyPr/>
           <a:lstStyle/>
           <a:p>
+            <a:r>
+              <a:rPr lang="en-US" dirty="0"/>
+              <a:t/>
+            </a:r>
             <a:endParaRPr lang="en-US" dirty="0"/>
           </a:p>
         </p:txBody>
@@ -2410,6 +2729,10 @@
           <a:bodyPr/>
           <a:lstStyle/>
           <a:p>
+            <a:r>
+              <a:rPr lang="en-US" dirty="0"/>
+              <a:t/>
+            </a:r>
             <a:endParaRPr lang="en-US" dirty="0"/>
           </a:p>
         </p:txBody>
@@ -2494,6 +2817,10 @@
           <a:bodyPr/>
           <a:lstStyle/>
           <a:p>
+            <a:r>
+              <a:rPr lang="en-US" dirty="0"/>
+              <a:t/>
+            </a:r>
             <a:endParaRPr lang="en-US" dirty="0"/>
           </a:p>
         </p:txBody>
@@ -2578,6 +2905,10 @@
           <a:bodyPr/>
           <a:lstStyle/>
           <a:p>
+            <a:r>
+              <a:rPr lang="en-US" dirty="0"/>
+              <a:t/>
+            </a:r>
             <a:endParaRPr lang="en-US" dirty="0"/>
           </a:p>
         </p:txBody>
@@ -2662,6 +2993,10 @@
           <a:bodyPr/>
           <a:lstStyle/>
           <a:p>
+            <a:r>
+              <a:rPr lang="en-US" dirty="0"/>
+              <a:t/>
+            </a:r>
             <a:endParaRPr lang="en-US" dirty="0"/>
           </a:p>
         </p:txBody>
@@ -2746,6 +3081,10 @@
           <a:bodyPr/>
           <a:lstStyle/>
           <a:p>
+            <a:r>
+              <a:rPr lang="en-US" dirty="0"/>
+              <a:t/>
+            </a:r>
             <a:endParaRPr lang="en-US" dirty="0"/>
           </a:p>
         </p:txBody>
@@ -2828,7 +3167,7 @@
           </a:prstGeom>
           <a:extLst>
             <a:ext uri="{C572A759-6A51-4108-AA02-DFA0A04FC94B}">
-              <ma14:wrappingTextBoxFlag xmlns:ma14="http://schemas.microsoft.com/office/mac/drawingml/2011/main" xmlns="" val="0"/>
+              <ma14:wrappingTextBoxFlag xmlns:ma14="http://schemas.microsoft.com/office/mac/drawingml/2011/main" val="0"/>
             </a:ext>
           </a:extLst>
         </p:spPr>
@@ -2849,8 +3188,8 @@
           <a:p>
             <a:pPr algn="l"/>
             <a:fld id="{F7021451-1387-4CA6-816F-3879F97B5CBC}" type="slidenum">
-              <a:rPr lang="en-US" b="0"/>
-              <a:t>‹#›</a:t>
+              <a:rPr b="0" lang="en-US"/>
+              <a:t>1000</a:t>
             </a:fld>
             <a:endParaRPr lang="en-US"/>
           </a:p>
@@ -2872,7 +3211,6 @@
         <a:solidFill>
           <a:srgbClr val="000000"/>
         </a:solidFill>
-        <a:effectLst/>
       </p:bgPr>
     </p:bg>
     <p:spTree>
@@ -2891,14 +3229,14 @@
       </p:grpSpPr>
       <p:pic>
         <p:nvPicPr>
-          <p:cNvPr id="2" name="Image 0" descr="preencoded.png"/>
+          <p:cNvPr id="2" name="Image 0" descr="preencoded.png">    </p:cNvPr>
           <p:cNvPicPr>
             <a:picLocks noChangeAspect="1"/>
           </p:cNvPicPr>
           <p:nvPr/>
         </p:nvPicPr>
         <p:blipFill>
-          <a:blip r:embed="rId2"/>
+          <a:blip r:embed="rId1"/>
           <a:stretch>
             <a:fillRect/>
           </a:stretch>
@@ -2929,7 +3267,6 @@
         <a:solidFill>
           <a:srgbClr val="000000"/>
         </a:solidFill>
-        <a:effectLst/>
       </p:bgPr>
     </p:bg>
     <p:spTree>
@@ -2948,14 +3285,14 @@
       </p:grpSpPr>
       <p:pic>
         <p:nvPicPr>
-          <p:cNvPr id="2" name="Image 0" descr="preencoded.png"/>
+          <p:cNvPr id="2" name="Image 0" descr="preencoded.png">    </p:cNvPr>
           <p:cNvPicPr>
             <a:picLocks noChangeAspect="1"/>
           </p:cNvPicPr>
           <p:nvPr/>
         </p:nvPicPr>
         <p:blipFill>
-          <a:blip r:embed="rId2"/>
+          <a:blip r:embed="rId1"/>
           <a:stretch>
             <a:fillRect/>
           </a:stretch>
@@ -2986,7 +3323,6 @@
         <a:solidFill>
           <a:srgbClr val="000000"/>
         </a:solidFill>
-        <a:effectLst/>
       </p:bgPr>
     </p:bg>
     <p:spTree>
@@ -3005,14 +3341,14 @@
       </p:grpSpPr>
       <p:pic>
         <p:nvPicPr>
-          <p:cNvPr id="2" name="Image 0" descr="preencoded.png"/>
+          <p:cNvPr id="2" name="Image 0" descr="preencoded.png">    </p:cNvPr>
           <p:cNvPicPr>
             <a:picLocks noChangeAspect="1"/>
           </p:cNvPicPr>
           <p:nvPr/>
         </p:nvPicPr>
         <p:blipFill>
-          <a:blip r:embed="rId2"/>
+          <a:blip r:embed="rId1"/>
           <a:stretch>
             <a:fillRect/>
           </a:stretch>
@@ -3038,11 +3374,6 @@
 <file path=ppt/slideMasters/slideMaster1.xml><?xml version="1.0" encoding="utf-8"?>
 <p:sldMaster xmlns:a="http://schemas.openxmlformats.org/drawingml/2006/main" xmlns:r="http://schemas.openxmlformats.org/officeDocument/2006/relationships" xmlns:p="http://schemas.openxmlformats.org/presentationml/2006/main">
   <p:cSld>
-    <p:bg>
-      <p:bgRef idx="1001">
-        <a:schemeClr val="bg1"/>
-      </p:bgRef>
-    </p:bg>
     <p:spTree>
       <p:nvGrpSpPr>
         <p:cNvPr id="1" name=""/>
@@ -3077,7 +3408,7 @@
           </a:prstGeom>
           <a:extLst>
             <a:ext uri="{C572A759-6A51-4108-AA02-DFA0A04FC94B}">
-              <ma14:wrappingTextBoxFlag xmlns:ma14="http://schemas.microsoft.com/office/mac/drawingml/2011/main" xmlns="" val="0"/>
+              <ma14:wrappingTextBoxFlag xmlns:ma14="http://schemas.microsoft.com/office/mac/drawingml/2011/main" val="0"/>
             </a:ext>
           </a:extLst>
         </p:spPr>
@@ -3098,8 +3429,8 @@
           <a:p>
             <a:pPr algn="l"/>
             <a:fld id="{F7021451-1387-4CA6-816F-3879F97B5CBC}" type="slidenum">
-              <a:rPr lang="en-US" b="0"/>
-              <a:t>‹#›</a:t>
+              <a:rPr b="0" lang="en-US"/>
+              <a:t>null</a:t>
             </a:fld>
             <a:endParaRPr lang="en-US"/>
           </a:p>
@@ -3406,11 +3737,11 @@
           <a:bodyPr wrap="square" lIns="0" tIns="0" rIns="0" bIns="0" rtlCol="0" anchor="ctr"/>
           <a:lstStyle/>
           <a:p>
-            <a:pPr marL="0" indent="0">
-              <a:buNone/>
-            </a:pPr>
-            <a:r>
-              <a:rPr lang="en-US" sz="1200" b="1" kern="0" spc="400" dirty="0">
+            <a:pPr indent="0" marL="0">
+              <a:buNone/>
+            </a:pPr>
+            <a:r>
+              <a:rPr lang="en-US" sz="1200" b="1" spc="400" kern="0" dirty="0">
                 <a:solidFill>
                   <a:srgbClr val="FFFFFF"/>
                 </a:solidFill>
@@ -3445,11 +3776,11 @@
           <a:bodyPr wrap="square" lIns="0" tIns="0" rIns="0" bIns="0" rtlCol="0" anchor="ctr"/>
           <a:lstStyle/>
           <a:p>
-            <a:pPr marL="0" indent="0">
-              <a:buNone/>
-            </a:pPr>
-            <a:r>
-              <a:rPr lang="en-US" sz="1200" b="1" kern="0" spc="300" dirty="0">
+            <a:pPr indent="0" marL="0">
+              <a:buNone/>
+            </a:pPr>
+            <a:r>
+              <a:rPr lang="en-US" sz="1200" b="1" spc="300" kern="0" dirty="0">
                 <a:solidFill>
                   <a:srgbClr val="C4B3F5"/>
                 </a:solidFill>
@@ -3484,7 +3815,7 @@
           <a:bodyPr wrap="square" lIns="0" tIns="0" rIns="0" bIns="0" rtlCol="0" anchor="t"/>
           <a:lstStyle/>
           <a:p>
-            <a:pPr marL="0" indent="0">
+            <a:pPr indent="0" marL="0">
               <a:lnSpc>
                 <a:spcPct val="102000"/>
               </a:lnSpc>
@@ -3504,7 +3835,7 @@
             <a:endParaRPr lang="en-US" sz="3600" dirty="0"/>
           </a:p>
           <a:p>
-            <a:pPr marL="0" indent="0">
+            <a:pPr indent="0" marL="0">
               <a:lnSpc>
                 <a:spcPct val="102000"/>
               </a:lnSpc>
@@ -3546,7 +3877,7 @@
           <a:bodyPr wrap="square" lIns="0" tIns="0" rIns="0" bIns="0" rtlCol="0" anchor="ctr"/>
           <a:lstStyle/>
           <a:p>
-            <a:pPr marL="0" indent="0">
+            <a:pPr indent="0" marL="0">
               <a:lnSpc>
                 <a:spcPct val="120000"/>
               </a:lnSpc>
@@ -3614,7 +3945,7 @@
           <a:bodyPr wrap="square" lIns="0" tIns="0" rIns="0" bIns="0" rtlCol="0" anchor="ctr"/>
           <a:lstStyle/>
           <a:p>
-            <a:pPr marL="0" indent="0" algn="ctr">
+            <a:pPr algn="ctr" indent="0" marL="0">
               <a:buNone/>
             </a:pPr>
             <a:r>
@@ -3679,7 +4010,7 @@
           <a:bodyPr wrap="square" lIns="0" tIns="0" rIns="0" bIns="0" rtlCol="0" anchor="ctr"/>
           <a:lstStyle/>
           <a:p>
-            <a:pPr marL="0" indent="0" algn="ctr">
+            <a:pPr algn="ctr" indent="0" marL="0">
               <a:buNone/>
             </a:pPr>
             <a:r>
@@ -3744,7 +4075,7 @@
           <a:bodyPr wrap="square" lIns="0" tIns="0" rIns="0" bIns="0" rtlCol="0" anchor="ctr"/>
           <a:lstStyle/>
           <a:p>
-            <a:pPr marL="0" indent="0" algn="ctr">
+            <a:pPr algn="ctr" indent="0" marL="0">
               <a:buNone/>
             </a:pPr>
             <a:r>
@@ -3809,7 +4140,7 @@
           <a:bodyPr wrap="square" lIns="0" tIns="0" rIns="0" bIns="0" rtlCol="0" anchor="ctr"/>
           <a:lstStyle/>
           <a:p>
-            <a:pPr marL="0" indent="0" algn="ctr">
+            <a:pPr algn="ctr" indent="0" marL="0">
               <a:buNone/>
             </a:pPr>
             <a:r>
@@ -3870,7 +4201,7 @@
           <a:bodyPr wrap="square" lIns="0" tIns="0" rIns="0" bIns="0" rtlCol="0" anchor="ctr"/>
           <a:lstStyle/>
           <a:p>
-            <a:pPr marL="0" indent="0" algn="ctr">
+            <a:pPr algn="ctr" indent="0" marL="0">
               <a:buNone/>
             </a:pPr>
             <a:r>
@@ -3935,7 +4266,7 @@
           <a:bodyPr wrap="square" lIns="0" tIns="0" rIns="0" bIns="0" rtlCol="0" anchor="ctr"/>
           <a:lstStyle/>
           <a:p>
-            <a:pPr marL="0" indent="0" algn="ctr">
+            <a:pPr algn="ctr" indent="0" marL="0">
               <a:buNone/>
             </a:pPr>
             <a:r>
@@ -4021,7 +4352,7 @@
           <a:bodyPr wrap="square" lIns="0" tIns="0" rIns="0" bIns="0" rtlCol="0" anchor="ctr"/>
           <a:lstStyle/>
           <a:p>
-            <a:pPr marL="0" indent="0" algn="l">
+            <a:pPr algn="l" indent="0" marL="0">
               <a:buNone/>
             </a:pPr>
             <a:r>
@@ -4060,7 +4391,7 @@
           <a:bodyPr wrap="square" lIns="0" tIns="0" rIns="0" bIns="0" rtlCol="0" anchor="ctr"/>
           <a:lstStyle/>
           <a:p>
-            <a:pPr marL="0" indent="0">
+            <a:pPr indent="0" marL="0">
               <a:buNone/>
             </a:pPr>
             <a:r>
@@ -4126,11 +4457,11 @@
           <a:bodyPr wrap="square" lIns="0" tIns="0" rIns="0" bIns="0" rtlCol="0" anchor="ctr"/>
           <a:lstStyle/>
           <a:p>
-            <a:pPr marL="0" indent="0" algn="ctr">
-              <a:buNone/>
-            </a:pPr>
-            <a:r>
-              <a:rPr lang="en-US" sz="900" b="1" kern="0" spc="100" dirty="0">
+            <a:pPr algn="ctr" indent="0" marL="0">
+              <a:buNone/>
+            </a:pPr>
+            <a:r>
+              <a:rPr lang="en-US" sz="900" b="1" spc="100" kern="0" dirty="0">
                 <a:solidFill>
                   <a:srgbClr val="5A05F4"/>
                 </a:solidFill>
@@ -4146,14 +4477,14 @@
       </p:sp>
       <p:pic>
         <p:nvPicPr>
-          <p:cNvPr id="7" name="Image 0" descr="preencoded.png"/>
+          <p:cNvPr id="7" name="Image 0" descr="preencoded.png">    </p:cNvPr>
           <p:cNvPicPr>
             <a:picLocks noChangeAspect="1"/>
           </p:cNvPicPr>
           <p:nvPr/>
         </p:nvPicPr>
         <p:blipFill>
-          <a:blip r:embed="rId3"/>
+          <a:blip r:embed="rId1"/>
           <a:stretch>
             <a:fillRect/>
           </a:stretch>
@@ -4216,7 +4547,7 @@
           <a:bodyPr wrap="square" lIns="0" tIns="0" rIns="0" bIns="0" rtlCol="0" anchor="t"/>
           <a:lstStyle/>
           <a:p>
-            <a:pPr marL="0" indent="0">
+            <a:pPr indent="0" marL="0">
               <a:lnSpc>
                 <a:spcPct val="130000"/>
               </a:lnSpc>
@@ -4236,7 +4567,7 @@
             <a:endParaRPr lang="en-US" sz="1150" dirty="0"/>
           </a:p>
           <a:p>
-            <a:pPr marL="0" indent="0">
+            <a:pPr indent="0" marL="0">
               <a:lnSpc>
                 <a:spcPct val="130000"/>
               </a:lnSpc>
@@ -4256,7 +4587,7 @@
             <a:endParaRPr lang="en-US" sz="1150" dirty="0"/>
           </a:p>
           <a:p>
-            <a:pPr marL="0" indent="0">
+            <a:pPr indent="0" marL="0">
               <a:lnSpc>
                 <a:spcPct val="130000"/>
               </a:lnSpc>
@@ -4276,7 +4607,7 @@
             <a:endParaRPr lang="en-US" sz="1150" dirty="0"/>
           </a:p>
           <a:p>
-            <a:pPr marL="0" indent="0">
+            <a:pPr indent="0" marL="0">
               <a:lnSpc>
                 <a:spcPct val="130000"/>
               </a:lnSpc>
@@ -4340,7 +4671,7 @@
           <a:bodyPr wrap="square" lIns="0" tIns="0" rIns="0" bIns="0" rtlCol="0" anchor="ctr"/>
           <a:lstStyle/>
           <a:p>
-            <a:pPr marL="0" indent="0">
+            <a:pPr indent="0" marL="0">
               <a:buNone/>
             </a:pPr>
             <a:r>
@@ -4379,7 +4710,7 @@
           <a:bodyPr wrap="square" lIns="0" tIns="0" rIns="0" bIns="0" rtlCol="0" anchor="t"/>
           <a:lstStyle/>
           <a:p>
-            <a:pPr marL="0" indent="0">
+            <a:pPr indent="0" marL="0">
               <a:lnSpc>
                 <a:spcPct val="108000"/>
               </a:lnSpc>
@@ -4443,7 +4774,7 @@
           <a:bodyPr wrap="square" lIns="0" tIns="0" rIns="0" bIns="0" rtlCol="0" anchor="ctr"/>
           <a:lstStyle/>
           <a:p>
-            <a:pPr marL="0" indent="0">
+            <a:pPr indent="0" marL="0">
               <a:buNone/>
             </a:pPr>
             <a:r>
@@ -4482,7 +4813,7 @@
           <a:bodyPr wrap="square" lIns="0" tIns="0" rIns="0" bIns="0" rtlCol="0" anchor="t"/>
           <a:lstStyle/>
           <a:p>
-            <a:pPr marL="0" indent="0">
+            <a:pPr indent="0" marL="0">
               <a:lnSpc>
                 <a:spcPct val="108000"/>
               </a:lnSpc>
@@ -4524,7 +4855,7 @@
           <a:bodyPr wrap="square" lIns="0" tIns="0" rIns="0" bIns="0" rtlCol="0" anchor="ctr"/>
           <a:lstStyle/>
           <a:p>
-            <a:pPr marL="0" indent="0">
+            <a:pPr indent="0" marL="0">
               <a:buNone/>
             </a:pPr>
             <a:r>
@@ -4562,7 +4893,7 @@
           </a:prstGeom>
           <a:extLst>
             <a:ext uri="{C572A759-6A51-4108-AA02-DFA0A04FC94B}">
-              <ma14:wrappingTextBoxFlag xmlns:ma14="http://schemas.microsoft.com/office/mac/drawingml/2011/main" xmlns="" val="0"/>
+              <ma14:wrappingTextBoxFlag xmlns:ma14="http://schemas.microsoft.com/office/mac/drawingml/2011/main" val="0"/>
             </a:ext>
           </a:extLst>
         </p:spPr>
@@ -4583,7 +4914,7 @@
           <a:p>
             <a:pPr algn="l"/>
             <a:fld id="{F7021451-1387-4CA6-816F-3879F97B5CBC}" type="slidenum">
-              <a:rPr lang="en-US" b="0"/>
+              <a:rPr b="0" lang="en-US"/>
               <a:t>10</a:t>
             </a:fld>
             <a:endParaRPr lang="en-US"/>
@@ -4658,7 +4989,7 @@
           <a:bodyPr wrap="square" lIns="0" tIns="0" rIns="0" bIns="0" rtlCol="0" anchor="ctr"/>
           <a:lstStyle/>
           <a:p>
-            <a:pPr marL="0" indent="0" algn="l">
+            <a:pPr algn="l" indent="0" marL="0">
               <a:buNone/>
             </a:pPr>
             <a:r>
@@ -4697,7 +5028,7 @@
           <a:bodyPr wrap="square" lIns="0" tIns="0" rIns="0" bIns="0" rtlCol="0" anchor="ctr"/>
           <a:lstStyle/>
           <a:p>
-            <a:pPr marL="0" indent="0">
+            <a:pPr indent="0" marL="0">
               <a:buNone/>
             </a:pPr>
             <a:r>
@@ -4763,11 +5094,11 @@
           <a:bodyPr wrap="square" lIns="0" tIns="0" rIns="0" bIns="0" rtlCol="0" anchor="ctr"/>
           <a:lstStyle/>
           <a:p>
-            <a:pPr marL="0" indent="0" algn="ctr">
-              <a:buNone/>
-            </a:pPr>
-            <a:r>
-              <a:rPr lang="en-US" sz="900" b="1" kern="0" spc="100" dirty="0">
+            <a:pPr algn="ctr" indent="0" marL="0">
+              <a:buNone/>
+            </a:pPr>
+            <a:r>
+              <a:rPr lang="en-US" sz="900" b="1" spc="100" kern="0" dirty="0">
                 <a:solidFill>
                   <a:srgbClr val="5A05F4"/>
                 </a:solidFill>
@@ -4783,14 +5114,14 @@
       </p:sp>
       <p:pic>
         <p:nvPicPr>
-          <p:cNvPr id="7" name="Image 0" descr="preencoded.png"/>
+          <p:cNvPr id="7" name="Image 0" descr="preencoded.png">    </p:cNvPr>
           <p:cNvPicPr>
             <a:picLocks noChangeAspect="1"/>
           </p:cNvPicPr>
           <p:nvPr/>
         </p:nvPicPr>
         <p:blipFill>
-          <a:blip r:embed="rId3"/>
+          <a:blip r:embed="rId1"/>
           <a:stretch>
             <a:fillRect/>
           </a:stretch>
@@ -4821,34 +5152,16 @@
         </p:nvGraphicFramePr>
         <p:xfrm>
           <a:off x="566928" y="1737360"/>
-          <a:ext cx="11064240" cy="3456432"/>
+          <a:ext cx="11064240" cy="914400"/>
         </p:xfrm>
         <a:graphic>
           <a:graphicData uri="http://schemas.openxmlformats.org/drawingml/2006/table">
             <a:tbl>
               <a:tblPr/>
               <a:tblGrid>
-                <a:gridCol w="2743200">
-                  <a:extLst>
-                    <a:ext uri="{9D8B030D-6E8A-4147-A177-3AD203B41FA5}">
-                      <a16:colId xmlns:a16="http://schemas.microsoft.com/office/drawing/2014/main" val="20000"/>
-                    </a:ext>
-                  </a:extLst>
-                </a:gridCol>
-                <a:gridCol w="4937760">
-                  <a:extLst>
-                    <a:ext uri="{9D8B030D-6E8A-4147-A177-3AD203B41FA5}">
-                      <a16:colId xmlns:a16="http://schemas.microsoft.com/office/drawing/2014/main" val="20001"/>
-                    </a:ext>
-                  </a:extLst>
-                </a:gridCol>
-                <a:gridCol w="3383280">
-                  <a:extLst>
-                    <a:ext uri="{9D8B030D-6E8A-4147-A177-3AD203B41FA5}">
-                      <a16:colId xmlns:a16="http://schemas.microsoft.com/office/drawing/2014/main" val="20002"/>
-                    </a:ext>
-                  </a:extLst>
-                </a:gridCol>
+                <a:gridCol w="2743200"/>
+                <a:gridCol w="4937760"/>
+                <a:gridCol w="3383280"/>
               </a:tblGrid>
               <a:tr h="493776">
                 <a:tc>
@@ -4856,11 +5169,11 @@
                     <a:bodyPr/>
                     <a:lstStyle/>
                     <a:p>
-                      <a:pPr marL="0" indent="0" algn="ctr">
+                      <a:pPr algn="ctr" indent="0" marL="0">
                         <a:buNone/>
                       </a:pPr>
                       <a:r>
-                        <a:rPr lang="en-US" sz="900" b="1" kern="0" spc="100" dirty="0">
+                        <a:rPr lang="en-US" sz="900" b="1" spc="100" kern="0" dirty="0">
                           <a:solidFill>
                             <a:srgbClr val="FFFFFF"/>
                           </a:solidFill>
@@ -4924,11 +5237,11 @@
                     <a:bodyPr/>
                     <a:lstStyle/>
                     <a:p>
-                      <a:pPr marL="0" indent="0" algn="ctr">
+                      <a:pPr algn="ctr" indent="0" marL="0">
                         <a:buNone/>
                       </a:pPr>
                       <a:r>
-                        <a:rPr lang="en-US" sz="900" b="1" kern="0" spc="100" dirty="0">
+                        <a:rPr lang="en-US" sz="900" b="1" spc="100" kern="0" dirty="0">
                           <a:solidFill>
                             <a:srgbClr val="FFFFFF"/>
                           </a:solidFill>
@@ -4992,11 +5305,11 @@
                     <a:bodyPr/>
                     <a:lstStyle/>
                     <a:p>
-                      <a:pPr marL="0" indent="0" algn="ctr">
+                      <a:pPr algn="ctr" indent="0" marL="0">
                         <a:buNone/>
                       </a:pPr>
                       <a:r>
-                        <a:rPr lang="en-US" sz="900" b="1" kern="0" spc="100" dirty="0">
+                        <a:rPr lang="en-US" sz="900" b="1" spc="100" kern="0" dirty="0">
                           <a:solidFill>
                             <a:srgbClr val="FFFFFF"/>
                           </a:solidFill>
@@ -5055,11 +5368,6 @@
                     </a:solidFill>
                   </a:tcPr>
                 </a:tc>
-                <a:extLst>
-                  <a:ext uri="{0D108BD9-81ED-4DB2-BD59-A6C34878D82A}">
-                    <a16:rowId xmlns:a16="http://schemas.microsoft.com/office/drawing/2014/main" val="10000"/>
-                  </a:ext>
-                </a:extLst>
               </a:tr>
               <a:tr h="493776">
                 <a:tc>
@@ -5067,7 +5375,7 @@
                     <a:bodyPr/>
                     <a:lstStyle/>
                     <a:p>
-                      <a:pPr marL="0" indent="0">
+                      <a:pPr indent="0" marL="0">
                         <a:buNone/>
                       </a:pPr>
                       <a:r>
@@ -5135,7 +5443,7 @@
                     <a:bodyPr/>
                     <a:lstStyle/>
                     <a:p>
-                      <a:pPr marL="0" indent="0">
+                      <a:pPr indent="0" marL="0">
                         <a:buNone/>
                       </a:pPr>
                       <a:r>
@@ -5203,7 +5511,7 @@
                     <a:bodyPr/>
                     <a:lstStyle/>
                     <a:p>
-                      <a:pPr marL="0" indent="0">
+                      <a:pPr indent="0" marL="0">
                         <a:buNone/>
                       </a:pPr>
                       <a:r>
@@ -5266,11 +5574,6 @@
                     </a:solidFill>
                   </a:tcPr>
                 </a:tc>
-                <a:extLst>
-                  <a:ext uri="{0D108BD9-81ED-4DB2-BD59-A6C34878D82A}">
-                    <a16:rowId xmlns:a16="http://schemas.microsoft.com/office/drawing/2014/main" val="10001"/>
-                  </a:ext>
-                </a:extLst>
               </a:tr>
               <a:tr h="493776">
                 <a:tc>
@@ -5278,7 +5581,7 @@
                     <a:bodyPr/>
                     <a:lstStyle/>
                     <a:p>
-                      <a:pPr marL="0" indent="0">
+                      <a:pPr indent="0" marL="0">
                         <a:buNone/>
                       </a:pPr>
                       <a:r>
@@ -5346,7 +5649,7 @@
                     <a:bodyPr/>
                     <a:lstStyle/>
                     <a:p>
-                      <a:pPr marL="0" indent="0">
+                      <a:pPr indent="0" marL="0">
                         <a:buNone/>
                       </a:pPr>
                       <a:r>
@@ -5414,7 +5717,7 @@
                     <a:bodyPr/>
                     <a:lstStyle/>
                     <a:p>
-                      <a:pPr marL="0" indent="0">
+                      <a:pPr indent="0" marL="0">
                         <a:buNone/>
                       </a:pPr>
                       <a:r>
@@ -5477,11 +5780,6 @@
                     </a:solidFill>
                   </a:tcPr>
                 </a:tc>
-                <a:extLst>
-                  <a:ext uri="{0D108BD9-81ED-4DB2-BD59-A6C34878D82A}">
-                    <a16:rowId xmlns:a16="http://schemas.microsoft.com/office/drawing/2014/main" val="10002"/>
-                  </a:ext>
-                </a:extLst>
               </a:tr>
               <a:tr h="493776">
                 <a:tc>
@@ -5489,7 +5787,7 @@
                     <a:bodyPr/>
                     <a:lstStyle/>
                     <a:p>
-                      <a:pPr marL="0" indent="0">
+                      <a:pPr indent="0" marL="0">
                         <a:buNone/>
                       </a:pPr>
                       <a:r>
@@ -5557,7 +5855,7 @@
                     <a:bodyPr/>
                     <a:lstStyle/>
                     <a:p>
-                      <a:pPr marL="0" indent="0">
+                      <a:pPr indent="0" marL="0">
                         <a:buNone/>
                       </a:pPr>
                       <a:r>
@@ -5625,7 +5923,7 @@
                     <a:bodyPr/>
                     <a:lstStyle/>
                     <a:p>
-                      <a:pPr marL="0" indent="0">
+                      <a:pPr indent="0" marL="0">
                         <a:buNone/>
                       </a:pPr>
                       <a:r>
@@ -5688,11 +5986,6 @@
                     </a:solidFill>
                   </a:tcPr>
                 </a:tc>
-                <a:extLst>
-                  <a:ext uri="{0D108BD9-81ED-4DB2-BD59-A6C34878D82A}">
-                    <a16:rowId xmlns:a16="http://schemas.microsoft.com/office/drawing/2014/main" val="10003"/>
-                  </a:ext>
-                </a:extLst>
               </a:tr>
               <a:tr h="493776">
                 <a:tc>
@@ -5700,7 +5993,7 @@
                     <a:bodyPr/>
                     <a:lstStyle/>
                     <a:p>
-                      <a:pPr marL="0" indent="0">
+                      <a:pPr indent="0" marL="0">
                         <a:buNone/>
                       </a:pPr>
                       <a:r>
@@ -5768,7 +6061,7 @@
                     <a:bodyPr/>
                     <a:lstStyle/>
                     <a:p>
-                      <a:pPr marL="0" indent="0">
+                      <a:pPr indent="0" marL="0">
                         <a:buNone/>
                       </a:pPr>
                       <a:r>
@@ -5836,7 +6129,7 @@
                     <a:bodyPr/>
                     <a:lstStyle/>
                     <a:p>
-                      <a:pPr marL="0" indent="0">
+                      <a:pPr indent="0" marL="0">
                         <a:buNone/>
                       </a:pPr>
                       <a:r>
@@ -5899,11 +6192,6 @@
                     </a:solidFill>
                   </a:tcPr>
                 </a:tc>
-                <a:extLst>
-                  <a:ext uri="{0D108BD9-81ED-4DB2-BD59-A6C34878D82A}">
-                    <a16:rowId xmlns:a16="http://schemas.microsoft.com/office/drawing/2014/main" val="10004"/>
-                  </a:ext>
-                </a:extLst>
               </a:tr>
               <a:tr h="493776">
                 <a:tc>
@@ -5911,7 +6199,7 @@
                     <a:bodyPr/>
                     <a:lstStyle/>
                     <a:p>
-                      <a:pPr marL="0" indent="0">
+                      <a:pPr indent="0" marL="0">
                         <a:buNone/>
                       </a:pPr>
                       <a:r>
@@ -5979,7 +6267,7 @@
                     <a:bodyPr/>
                     <a:lstStyle/>
                     <a:p>
-                      <a:pPr marL="0" indent="0">
+                      <a:pPr indent="0" marL="0">
                         <a:buNone/>
                       </a:pPr>
                       <a:r>
@@ -6047,7 +6335,7 @@
                     <a:bodyPr/>
                     <a:lstStyle/>
                     <a:p>
-                      <a:pPr marL="0" indent="0">
+                      <a:pPr indent="0" marL="0">
                         <a:buNone/>
                       </a:pPr>
                       <a:r>
@@ -6110,11 +6398,6 @@
                     </a:solidFill>
                   </a:tcPr>
                 </a:tc>
-                <a:extLst>
-                  <a:ext uri="{0D108BD9-81ED-4DB2-BD59-A6C34878D82A}">
-                    <a16:rowId xmlns:a16="http://schemas.microsoft.com/office/drawing/2014/main" val="10005"/>
-                  </a:ext>
-                </a:extLst>
               </a:tr>
               <a:tr h="493776">
                 <a:tc>
@@ -6122,7 +6405,7 @@
                     <a:bodyPr/>
                     <a:lstStyle/>
                     <a:p>
-                      <a:pPr marL="0" indent="0">
+                      <a:pPr indent="0" marL="0">
                         <a:buNone/>
                       </a:pPr>
                       <a:r>
@@ -6190,7 +6473,7 @@
                     <a:bodyPr/>
                     <a:lstStyle/>
                     <a:p>
-                      <a:pPr marL="0" indent="0">
+                      <a:pPr indent="0" marL="0">
                         <a:buNone/>
                       </a:pPr>
                       <a:r>
@@ -6258,7 +6541,7 @@
                     <a:bodyPr/>
                     <a:lstStyle/>
                     <a:p>
-                      <a:pPr marL="0" indent="0">
+                      <a:pPr indent="0" marL="0">
                         <a:buNone/>
                       </a:pPr>
                       <a:r>
@@ -6321,11 +6604,6 @@
                     </a:solidFill>
                   </a:tcPr>
                 </a:tc>
-                <a:extLst>
-                  <a:ext uri="{0D108BD9-81ED-4DB2-BD59-A6C34878D82A}">
-                    <a16:rowId xmlns:a16="http://schemas.microsoft.com/office/drawing/2014/main" val="10006"/>
-                  </a:ext>
-                </a:extLst>
               </a:tr>
             </a:tbl>
           </a:graphicData>
@@ -6360,14 +6638,34 @@
       </p:sp>
       <p:sp>
         <p:nvSpPr>
-          <p:cNvPr id="10" name="Text 6"/>
-          <p:cNvSpPr/>
-          <p:nvPr/>
-        </p:nvSpPr>
-        <p:spPr>
-          <a:xfrm>
-            <a:off x="786384" y="5431536"/>
-            <a:ext cx="10625328" cy="219456"/>
+          <p:cNvPr id="10" name="Shape 6"/>
+          <p:cNvSpPr/>
+          <p:nvPr/>
+        </p:nvSpPr>
+        <p:spPr>
+          <a:xfrm>
+            <a:off x="749808" y="5559552"/>
+            <a:ext cx="310896" cy="310896"/>
+          </a:xfrm>
+          <a:prstGeom prst="ellipse">
+            <a:avLst/>
+          </a:prstGeom>
+          <a:solidFill>
+            <a:srgbClr val="106B41"/>
+          </a:solidFill>
+          <a:ln/>
+        </p:spPr>
+      </p:sp>
+      <p:sp>
+        <p:nvSpPr>
+          <p:cNvPr id="11" name="Text 7"/>
+          <p:cNvSpPr/>
+          <p:nvPr/>
+        </p:nvSpPr>
+        <p:spPr>
+          <a:xfrm>
+            <a:off x="749808" y="5559552"/>
+            <a:ext cx="310896" cy="310896"/>
           </a:xfrm>
           <a:prstGeom prst="rect">
             <a:avLst/>
@@ -6379,11 +6677,50 @@
           <a:bodyPr wrap="square" lIns="0" tIns="0" rIns="0" bIns="0" rtlCol="0" anchor="ctr"/>
           <a:lstStyle/>
           <a:p>
-            <a:pPr marL="0" indent="0">
-              <a:buNone/>
-            </a:pPr>
-            <a:r>
-              <a:rPr lang="en-US" sz="950" b="1" kern="0" spc="150" dirty="0">
+            <a:pPr algn="ctr" indent="0" marL="0">
+              <a:buNone/>
+            </a:pPr>
+            <a:r>
+              <a:rPr lang="en-US" sz="1200" b="1" dirty="0">
+                <a:solidFill>
+                  <a:srgbClr val="FFFFFF"/>
+                </a:solidFill>
+                <a:latin typeface="Arial" pitchFamily="34" charset="0"/>
+                <a:ea typeface="Arial" pitchFamily="34" charset="-122"/>
+                <a:cs typeface="Arial" pitchFamily="34" charset="-120"/>
+              </a:rPr>
+              <a:t>◆</a:t>
+            </a:r>
+            <a:endParaRPr lang="en-US" sz="1200" dirty="0"/>
+          </a:p>
+        </p:txBody>
+      </p:sp>
+      <p:sp>
+        <p:nvSpPr>
+          <p:cNvPr id="12" name="Text 8"/>
+          <p:cNvSpPr/>
+          <p:nvPr/>
+        </p:nvSpPr>
+        <p:spPr>
+          <a:xfrm>
+            <a:off x="1243584" y="5431536"/>
+            <a:ext cx="10168128" cy="219456"/>
+          </a:xfrm>
+          <a:prstGeom prst="rect">
+            <a:avLst/>
+          </a:prstGeom>
+          <a:noFill/>
+          <a:ln/>
+        </p:spPr>
+        <p:txBody>
+          <a:bodyPr wrap="square" lIns="0" tIns="0" rIns="0" bIns="0" rtlCol="0" anchor="ctr"/>
+          <a:lstStyle/>
+          <a:p>
+            <a:pPr indent="0" marL="0">
+              <a:buNone/>
+            </a:pPr>
+            <a:r>
+              <a:rPr lang="en-US" sz="950" b="1" spc="150" kern="0" dirty="0">
                 <a:solidFill>
                   <a:srgbClr val="106B41"/>
                 </a:solidFill>
@@ -6399,14 +6736,14 @@
       </p:sp>
       <p:sp>
         <p:nvSpPr>
-          <p:cNvPr id="11" name="Text 7"/>
-          <p:cNvSpPr/>
-          <p:nvPr/>
-        </p:nvSpPr>
-        <p:spPr>
-          <a:xfrm>
-            <a:off x="786384" y="5687568"/>
-            <a:ext cx="10625328" cy="310896"/>
+          <p:cNvPr id="13" name="Text 9"/>
+          <p:cNvSpPr/>
+          <p:nvPr/>
+        </p:nvSpPr>
+        <p:spPr>
+          <a:xfrm>
+            <a:off x="1243584" y="5687568"/>
+            <a:ext cx="10168128" cy="310896"/>
           </a:xfrm>
           <a:prstGeom prst="rect">
             <a:avLst/>
@@ -6418,7 +6755,7 @@
           <a:bodyPr wrap="square" lIns="0" tIns="0" rIns="0" bIns="0" rtlCol="0" anchor="ctr"/>
           <a:lstStyle/>
           <a:p>
-            <a:pPr marL="0" indent="0">
+            <a:pPr indent="0" marL="0">
               <a:lnSpc>
                 <a:spcPct val="112000"/>
               </a:lnSpc>
@@ -6459,7 +6796,7 @@
           </a:prstGeom>
           <a:extLst>
             <a:ext uri="{C572A759-6A51-4108-AA02-DFA0A04FC94B}">
-              <ma14:wrappingTextBoxFlag xmlns:ma14="http://schemas.microsoft.com/office/mac/drawingml/2011/main" xmlns="" val="0"/>
+              <ma14:wrappingTextBoxFlag xmlns:ma14="http://schemas.microsoft.com/office/mac/drawingml/2011/main" val="0"/>
             </a:ext>
           </a:extLst>
         </p:spPr>
@@ -6480,7 +6817,7 @@
           <a:p>
             <a:pPr algn="l"/>
             <a:fld id="{F7021451-1387-4CA6-816F-3879F97B5CBC}" type="slidenum">
-              <a:rPr lang="en-US" b="0"/>
+              <a:rPr b="0" lang="en-US"/>
               <a:t>11</a:t>
             </a:fld>
             <a:endParaRPr lang="en-US"/>
@@ -6555,7 +6892,7 @@
           <a:bodyPr wrap="square" lIns="0" tIns="0" rIns="0" bIns="0" rtlCol="0" anchor="ctr"/>
           <a:lstStyle/>
           <a:p>
-            <a:pPr marL="0" indent="0" algn="l">
+            <a:pPr algn="l" indent="0" marL="0">
               <a:buNone/>
             </a:pPr>
             <a:r>
@@ -6594,7 +6931,7 @@
           <a:bodyPr wrap="square" lIns="0" tIns="0" rIns="0" bIns="0" rtlCol="0" anchor="ctr"/>
           <a:lstStyle/>
           <a:p>
-            <a:pPr marL="0" indent="0">
+            <a:pPr indent="0" marL="0">
               <a:buNone/>
             </a:pPr>
             <a:r>
@@ -6660,11 +6997,11 @@
           <a:bodyPr wrap="square" lIns="0" tIns="0" rIns="0" bIns="0" rtlCol="0" anchor="ctr"/>
           <a:lstStyle/>
           <a:p>
-            <a:pPr marL="0" indent="0" algn="ctr">
-              <a:buNone/>
-            </a:pPr>
-            <a:r>
-              <a:rPr lang="en-US" sz="900" b="1" kern="0" spc="100" dirty="0">
+            <a:pPr algn="ctr" indent="0" marL="0">
+              <a:buNone/>
+            </a:pPr>
+            <a:r>
+              <a:rPr lang="en-US" sz="900" b="1" spc="100" kern="0" dirty="0">
                 <a:solidFill>
                   <a:srgbClr val="5A05F4"/>
                 </a:solidFill>
@@ -6680,14 +7017,14 @@
       </p:sp>
       <p:pic>
         <p:nvPicPr>
-          <p:cNvPr id="7" name="Image 0" descr="preencoded.png"/>
+          <p:cNvPr id="7" name="Image 0" descr="preencoded.png">    </p:cNvPr>
           <p:cNvPicPr>
             <a:picLocks noChangeAspect="1"/>
           </p:cNvPicPr>
           <p:nvPr/>
         </p:nvPicPr>
         <p:blipFill>
-          <a:blip r:embed="rId3"/>
+          <a:blip r:embed="rId1"/>
           <a:stretch>
             <a:fillRect/>
           </a:stretch>
@@ -6743,7 +7080,7 @@
           <a:bodyPr wrap="square" lIns="0" tIns="0" rIns="0" bIns="0" rtlCol="0" anchor="ctr"/>
           <a:lstStyle/>
           <a:p>
-            <a:pPr marL="0" indent="0" algn="ctr">
+            <a:pPr algn="ctr" indent="0" marL="0">
               <a:buNone/>
             </a:pPr>
             <a:r>
@@ -6782,7 +7119,7 @@
           <a:bodyPr wrap="square" lIns="0" tIns="0" rIns="0" bIns="0" rtlCol="0" anchor="ctr"/>
           <a:lstStyle/>
           <a:p>
-            <a:pPr marL="0" indent="0" algn="ctr">
+            <a:pPr algn="ctr" indent="0" marL="0">
               <a:buNone/>
             </a:pPr>
             <a:r>
@@ -6864,7 +7201,7 @@
           <a:bodyPr wrap="square" lIns="0" tIns="0" rIns="0" bIns="0" rtlCol="0" anchor="ctr"/>
           <a:lstStyle/>
           <a:p>
-            <a:pPr marL="0" indent="0" algn="ctr">
+            <a:pPr algn="ctr" indent="0" marL="0">
               <a:buNone/>
             </a:pPr>
             <a:r>
@@ -6923,7 +7260,7 @@
           <a:bodyPr wrap="square" lIns="0" tIns="0" rIns="0" bIns="0" rtlCol="0" anchor="ctr"/>
           <a:lstStyle/>
           <a:p>
-            <a:pPr marL="0" indent="0" algn="ctr">
+            <a:pPr algn="ctr" indent="0" marL="0">
               <a:buNone/>
             </a:pPr>
             <a:r>
@@ -6962,7 +7299,7 @@
           <a:bodyPr wrap="square" lIns="0" tIns="0" rIns="0" bIns="0" rtlCol="0" anchor="ctr"/>
           <a:lstStyle/>
           <a:p>
-            <a:pPr marL="0" indent="0" algn="ctr">
+            <a:pPr algn="ctr" indent="0" marL="0">
               <a:buNone/>
             </a:pPr>
             <a:r>
@@ -7023,7 +7360,7 @@
           <a:bodyPr wrap="square" lIns="0" tIns="0" rIns="0" bIns="0" rtlCol="0" anchor="ctr"/>
           <a:lstStyle/>
           <a:p>
-            <a:pPr marL="0" indent="0">
+            <a:pPr indent="0" marL="0">
               <a:buNone/>
             </a:pPr>
             <a:r>
@@ -7062,7 +7399,7 @@
           <a:bodyPr wrap="square" lIns="0" tIns="0" rIns="0" bIns="0" rtlCol="0" anchor="t"/>
           <a:lstStyle/>
           <a:p>
-            <a:pPr marL="0" indent="0">
+            <a:pPr indent="0" marL="0">
               <a:lnSpc>
                 <a:spcPct val="108000"/>
               </a:lnSpc>
@@ -7131,11 +7468,11 @@
           <a:bodyPr wrap="square" lIns="0" tIns="0" rIns="0" bIns="0" rtlCol="0" anchor="ctr"/>
           <a:lstStyle/>
           <a:p>
-            <a:pPr marL="0" indent="0">
-              <a:buNone/>
-            </a:pPr>
-            <a:r>
-              <a:rPr lang="en-US" sz="950" b="1" kern="0" spc="150" dirty="0">
+            <a:pPr indent="0" marL="0">
+              <a:buNone/>
+            </a:pPr>
+            <a:r>
+              <a:rPr lang="en-US" sz="950" b="1" spc="150" kern="0" dirty="0">
                 <a:solidFill>
                   <a:srgbClr val="B3261E"/>
                 </a:solidFill>
@@ -7170,7 +7507,7 @@
           <a:bodyPr wrap="square" lIns="0" tIns="0" rIns="0" bIns="0" rtlCol="0" anchor="ctr"/>
           <a:lstStyle/>
           <a:p>
-            <a:pPr marL="0" indent="0">
+            <a:pPr indent="0" marL="0">
               <a:lnSpc>
                 <a:spcPct val="112000"/>
               </a:lnSpc>
@@ -7239,7 +7576,7 @@
           <a:bodyPr wrap="square" lIns="0" tIns="0" rIns="0" bIns="0" rtlCol="0" anchor="ctr"/>
           <a:lstStyle/>
           <a:p>
-            <a:pPr marL="0" indent="0">
+            <a:pPr indent="0" marL="0">
               <a:lnSpc>
                 <a:spcPct val="112000"/>
               </a:lnSpc>
@@ -7280,7 +7617,7 @@
           </a:prstGeom>
           <a:extLst>
             <a:ext uri="{C572A759-6A51-4108-AA02-DFA0A04FC94B}">
-              <ma14:wrappingTextBoxFlag xmlns:ma14="http://schemas.microsoft.com/office/mac/drawingml/2011/main" xmlns="" val="0"/>
+              <ma14:wrappingTextBoxFlag xmlns:ma14="http://schemas.microsoft.com/office/mac/drawingml/2011/main" val="0"/>
             </a:ext>
           </a:extLst>
         </p:spPr>
@@ -7301,7 +7638,7 @@
           <a:p>
             <a:pPr algn="l"/>
             <a:fld id="{F7021451-1387-4CA6-816F-3879F97B5CBC}" type="slidenum">
-              <a:rPr lang="en-US" b="0"/>
+              <a:rPr b="0" lang="en-US"/>
               <a:t>12</a:t>
             </a:fld>
             <a:endParaRPr lang="en-US"/>
@@ -7376,7 +7713,7 @@
           <a:bodyPr wrap="square" lIns="0" tIns="0" rIns="0" bIns="0" rtlCol="0" anchor="ctr"/>
           <a:lstStyle/>
           <a:p>
-            <a:pPr marL="0" indent="0" algn="l">
+            <a:pPr algn="l" indent="0" marL="0">
               <a:buNone/>
             </a:pPr>
             <a:r>
@@ -7415,7 +7752,7 @@
           <a:bodyPr wrap="square" lIns="0" tIns="0" rIns="0" bIns="0" rtlCol="0" anchor="ctr"/>
           <a:lstStyle/>
           <a:p>
-            <a:pPr marL="0" indent="0">
+            <a:pPr indent="0" marL="0">
               <a:buNone/>
             </a:pPr>
             <a:r>
@@ -7481,11 +7818,11 @@
           <a:bodyPr wrap="square" lIns="0" tIns="0" rIns="0" bIns="0" rtlCol="0" anchor="ctr"/>
           <a:lstStyle/>
           <a:p>
-            <a:pPr marL="0" indent="0" algn="ctr">
-              <a:buNone/>
-            </a:pPr>
-            <a:r>
-              <a:rPr lang="en-US" sz="900" b="1" kern="0" spc="100" dirty="0">
+            <a:pPr algn="ctr" indent="0" marL="0">
+              <a:buNone/>
+            </a:pPr>
+            <a:r>
+              <a:rPr lang="en-US" sz="900" b="1" spc="100" kern="0" dirty="0">
                 <a:solidFill>
                   <a:srgbClr val="5A05F4"/>
                 </a:solidFill>
@@ -7501,14 +7838,14 @@
       </p:sp>
       <p:pic>
         <p:nvPicPr>
-          <p:cNvPr id="7" name="Image 0" descr="preencoded.png"/>
+          <p:cNvPr id="7" name="Image 0" descr="preencoded.png">    </p:cNvPr>
           <p:cNvPicPr>
             <a:picLocks noChangeAspect="1"/>
           </p:cNvPicPr>
           <p:nvPr/>
         </p:nvPicPr>
         <p:blipFill>
-          <a:blip r:embed="rId3"/>
+          <a:blip r:embed="rId1"/>
           <a:stretch>
             <a:fillRect/>
           </a:stretch>
@@ -7586,7 +7923,7 @@
           <a:bodyPr wrap="square" lIns="0" tIns="0" rIns="0" bIns="0" rtlCol="0" anchor="ctr"/>
           <a:lstStyle/>
           <a:p>
-            <a:pPr marL="0" indent="0" algn="ctr">
+            <a:pPr algn="ctr" indent="0" marL="0">
               <a:buNone/>
             </a:pPr>
             <a:r>
@@ -7625,7 +7962,7 @@
           <a:bodyPr wrap="square" lIns="0" tIns="0" rIns="0" bIns="0" rtlCol="0" anchor="ctr"/>
           <a:lstStyle/>
           <a:p>
-            <a:pPr marL="0" indent="0">
+            <a:pPr indent="0" marL="0">
               <a:buNone/>
             </a:pPr>
             <a:r>
@@ -7664,7 +8001,7 @@
           <a:bodyPr wrap="square" lIns="0" tIns="0" rIns="0" bIns="0" rtlCol="0" anchor="t"/>
           <a:lstStyle/>
           <a:p>
-            <a:pPr marL="0" indent="0">
+            <a:pPr indent="0" marL="0">
               <a:lnSpc>
                 <a:spcPct val="108000"/>
               </a:lnSpc>
@@ -7748,7 +8085,7 @@
           <a:bodyPr wrap="square" lIns="0" tIns="0" rIns="0" bIns="0" rtlCol="0" anchor="ctr"/>
           <a:lstStyle/>
           <a:p>
-            <a:pPr marL="0" indent="0" algn="ctr">
+            <a:pPr algn="ctr" indent="0" marL="0">
               <a:buNone/>
             </a:pPr>
             <a:r>
@@ -7787,7 +8124,7 @@
           <a:bodyPr wrap="square" lIns="0" tIns="0" rIns="0" bIns="0" rtlCol="0" anchor="ctr"/>
           <a:lstStyle/>
           <a:p>
-            <a:pPr marL="0" indent="0">
+            <a:pPr indent="0" marL="0">
               <a:buNone/>
             </a:pPr>
             <a:r>
@@ -7826,7 +8163,7 @@
           <a:bodyPr wrap="square" lIns="0" tIns="0" rIns="0" bIns="0" rtlCol="0" anchor="t"/>
           <a:lstStyle/>
           <a:p>
-            <a:pPr marL="0" indent="0">
+            <a:pPr indent="0" marL="0">
               <a:lnSpc>
                 <a:spcPct val="108000"/>
               </a:lnSpc>
@@ -7910,7 +8247,7 @@
           <a:bodyPr wrap="square" lIns="0" tIns="0" rIns="0" bIns="0" rtlCol="0" anchor="ctr"/>
           <a:lstStyle/>
           <a:p>
-            <a:pPr marL="0" indent="0" algn="ctr">
+            <a:pPr algn="ctr" indent="0" marL="0">
               <a:buNone/>
             </a:pPr>
             <a:r>
@@ -7949,7 +8286,7 @@
           <a:bodyPr wrap="square" lIns="0" tIns="0" rIns="0" bIns="0" rtlCol="0" anchor="ctr"/>
           <a:lstStyle/>
           <a:p>
-            <a:pPr marL="0" indent="0">
+            <a:pPr indent="0" marL="0">
               <a:buNone/>
             </a:pPr>
             <a:r>
@@ -7988,7 +8325,7 @@
           <a:bodyPr wrap="square" lIns="0" tIns="0" rIns="0" bIns="0" rtlCol="0" anchor="t"/>
           <a:lstStyle/>
           <a:p>
-            <a:pPr marL="0" indent="0">
+            <a:pPr indent="0" marL="0">
               <a:lnSpc>
                 <a:spcPct val="108000"/>
               </a:lnSpc>
@@ -8579,11 +8916,11 @@
           <a:bodyPr wrap="square" lIns="0" tIns="0" rIns="0" bIns="0" rtlCol="0" anchor="ctr"/>
           <a:lstStyle/>
           <a:p>
-            <a:pPr marL="0" indent="0">
-              <a:buNone/>
-            </a:pPr>
-            <a:r>
-              <a:rPr lang="en-US" sz="850" kern="0" spc="100" dirty="0">
+            <a:pPr indent="0" marL="0">
+              <a:buNone/>
+            </a:pPr>
+            <a:r>
+              <a:rPr lang="en-US" sz="850" spc="100" kern="0" dirty="0">
                 <a:solidFill>
                   <a:srgbClr val="6B6B6B"/>
                 </a:solidFill>
@@ -8640,11 +8977,11 @@
           <a:bodyPr wrap="square" lIns="0" tIns="0" rIns="0" bIns="0" rtlCol="0" anchor="ctr"/>
           <a:lstStyle/>
           <a:p>
-            <a:pPr marL="0" indent="0">
-              <a:buNone/>
-            </a:pPr>
-            <a:r>
-              <a:rPr lang="en-US" sz="950" b="1" kern="0" spc="150" dirty="0">
+            <a:pPr indent="0" marL="0">
+              <a:buNone/>
+            </a:pPr>
+            <a:r>
+              <a:rPr lang="en-US" sz="950" b="1" spc="150" kern="0" dirty="0">
                 <a:solidFill>
                   <a:srgbClr val="FFFFFF"/>
                 </a:solidFill>
@@ -8679,7 +9016,7 @@
           <a:bodyPr wrap="square" lIns="0" tIns="0" rIns="0" bIns="0" rtlCol="0" anchor="ctr"/>
           <a:lstStyle/>
           <a:p>
-            <a:pPr marL="0" indent="0">
+            <a:pPr indent="0" marL="0">
               <a:lnSpc>
                 <a:spcPct val="112000"/>
               </a:lnSpc>
@@ -8748,7 +9085,7 @@
           <a:bodyPr wrap="square" lIns="0" tIns="0" rIns="0" bIns="0" rtlCol="0" anchor="ctr"/>
           <a:lstStyle/>
           <a:p>
-            <a:pPr marL="0" indent="0">
+            <a:pPr indent="0" marL="0">
               <a:lnSpc>
                 <a:spcPct val="112000"/>
               </a:lnSpc>
@@ -8771,7 +9108,7 @@
       </p:sp>
       <p:sp>
         <p:nvSpPr>
-          <p:cNvPr id="56" name="Slide Number Placeholder 0"/>
+          <p:cNvPr id="25" name="Slide Number Placeholder 0"/>
           <p:cNvSpPr>
             <a:spLocks noGrp="1"/>
           </p:cNvSpPr>
@@ -8789,7 +9126,7 @@
           </a:prstGeom>
           <a:extLst>
             <a:ext uri="{C572A759-6A51-4108-AA02-DFA0A04FC94B}">
-              <ma14:wrappingTextBoxFlag xmlns:ma14="http://schemas.microsoft.com/office/mac/drawingml/2011/main" xmlns="" val="0"/>
+              <ma14:wrappingTextBoxFlag xmlns:ma14="http://schemas.microsoft.com/office/mac/drawingml/2011/main" val="0"/>
             </a:ext>
           </a:extLst>
         </p:spPr>
@@ -8810,7 +9147,7 @@
           <a:p>
             <a:pPr algn="l"/>
             <a:fld id="{F7021451-1387-4CA6-816F-3879F97B5CBC}" type="slidenum">
-              <a:rPr lang="en-US" b="0"/>
+              <a:rPr b="0" lang="en-US"/>
               <a:t>13</a:t>
             </a:fld>
             <a:endParaRPr lang="en-US"/>
@@ -8885,7 +9222,7 @@
           <a:bodyPr wrap="square" lIns="0" tIns="0" rIns="0" bIns="0" rtlCol="0" anchor="ctr"/>
           <a:lstStyle/>
           <a:p>
-            <a:pPr marL="0" indent="0" algn="l">
+            <a:pPr algn="l" indent="0" marL="0">
               <a:buNone/>
             </a:pPr>
             <a:r>
@@ -8924,7 +9261,7 @@
           <a:bodyPr wrap="square" lIns="0" tIns="0" rIns="0" bIns="0" rtlCol="0" anchor="ctr"/>
           <a:lstStyle/>
           <a:p>
-            <a:pPr marL="0" indent="0">
+            <a:pPr indent="0" marL="0">
               <a:buNone/>
             </a:pPr>
             <a:r>
@@ -8990,11 +9327,11 @@
           <a:bodyPr wrap="square" lIns="0" tIns="0" rIns="0" bIns="0" rtlCol="0" anchor="ctr"/>
           <a:lstStyle/>
           <a:p>
-            <a:pPr marL="0" indent="0" algn="ctr">
-              <a:buNone/>
-            </a:pPr>
-            <a:r>
-              <a:rPr lang="en-US" sz="900" b="1" kern="0" spc="100" dirty="0">
+            <a:pPr algn="ctr" indent="0" marL="0">
+              <a:buNone/>
+            </a:pPr>
+            <a:r>
+              <a:rPr lang="en-US" sz="900" b="1" spc="100" kern="0" dirty="0">
                 <a:solidFill>
                   <a:srgbClr val="5A05F4"/>
                 </a:solidFill>
@@ -9010,14 +9347,14 @@
       </p:sp>
       <p:pic>
         <p:nvPicPr>
-          <p:cNvPr id="7" name="Image 0" descr="preencoded.png"/>
+          <p:cNvPr id="7" name="Image 0" descr="preencoded.png">    </p:cNvPr>
           <p:cNvPicPr>
             <a:picLocks noChangeAspect="1"/>
           </p:cNvPicPr>
           <p:nvPr/>
         </p:nvPicPr>
         <p:blipFill>
-          <a:blip r:embed="rId3"/>
+          <a:blip r:embed="rId1"/>
           <a:stretch>
             <a:fillRect/>
           </a:stretch>
@@ -9075,7 +9412,7 @@
           <a:bodyPr wrap="square" lIns="0" tIns="0" rIns="0" bIns="0" rtlCol="0" anchor="ctr"/>
           <a:lstStyle/>
           <a:p>
-            <a:pPr marL="0" indent="0">
+            <a:pPr indent="0" marL="0">
               <a:buNone/>
             </a:pPr>
             <a:r>
@@ -9114,7 +9451,7 @@
           <a:bodyPr wrap="square" lIns="0" tIns="0" rIns="0" bIns="0" rtlCol="0" anchor="ctr"/>
           <a:lstStyle/>
           <a:p>
-            <a:pPr marL="0" indent="0">
+            <a:pPr indent="0" marL="0">
               <a:buNone/>
             </a:pPr>
             <a:r>
@@ -9175,7 +9512,7 @@
           <a:bodyPr wrap="square" lIns="0" tIns="0" rIns="0" bIns="0" rtlCol="0" anchor="ctr"/>
           <a:lstStyle/>
           <a:p>
-            <a:pPr marL="0" indent="0">
+            <a:pPr indent="0" marL="0">
               <a:buNone/>
             </a:pPr>
             <a:r>
@@ -9214,7 +9551,7 @@
           <a:bodyPr wrap="square" lIns="0" tIns="0" rIns="0" bIns="0" rtlCol="0" anchor="ctr"/>
           <a:lstStyle/>
           <a:p>
-            <a:pPr marL="0" indent="0">
+            <a:pPr indent="0" marL="0">
               <a:buNone/>
             </a:pPr>
             <a:r>
@@ -9275,7 +9612,7 @@
           <a:bodyPr wrap="square" lIns="0" tIns="0" rIns="0" bIns="0" rtlCol="0" anchor="ctr"/>
           <a:lstStyle/>
           <a:p>
-            <a:pPr marL="0" indent="0">
+            <a:pPr indent="0" marL="0">
               <a:buNone/>
             </a:pPr>
             <a:r>
@@ -9314,7 +9651,7 @@
           <a:bodyPr wrap="square" lIns="0" tIns="0" rIns="0" bIns="0" rtlCol="0" anchor="ctr"/>
           <a:lstStyle/>
           <a:p>
-            <a:pPr marL="0" indent="0">
+            <a:pPr indent="0" marL="0">
               <a:buNone/>
             </a:pPr>
             <a:r>
@@ -11353,7 +11690,7 @@
           <a:bodyPr wrap="square" lIns="0" tIns="0" rIns="0" bIns="0" rtlCol="0" anchor="ctr"/>
           <a:lstStyle/>
           <a:p>
-            <a:pPr marL="0" indent="0">
+            <a:pPr indent="0" marL="0">
               <a:buNone/>
             </a:pPr>
             <a:r>
@@ -11367,6 +11704,9 @@
               </a:rPr>
               <a:t>100 звернень</a:t>
             </a:r>
+            <a:pPr indent="0" marL="0">
+              <a:buNone/>
+            </a:pPr>
             <a:r>
               <a:rPr lang="en-US" sz="1250" dirty="0">
                 <a:solidFill>
@@ -11403,7 +11743,7 @@
           <a:bodyPr wrap="square" lIns="0" tIns="0" rIns="0" bIns="0" rtlCol="0" anchor="ctr"/>
           <a:lstStyle/>
           <a:p>
-            <a:pPr marL="0" indent="0">
+            <a:pPr indent="0" marL="0">
               <a:buNone/>
             </a:pPr>
             <a:r>
@@ -11450,14 +11790,34 @@
       </p:sp>
       <p:sp>
         <p:nvSpPr>
-          <p:cNvPr id="120" name="Text 117"/>
-          <p:cNvSpPr/>
-          <p:nvPr/>
-        </p:nvSpPr>
-        <p:spPr>
-          <a:xfrm>
-            <a:off x="786384" y="5111496"/>
-            <a:ext cx="10625328" cy="219456"/>
+          <p:cNvPr id="120" name="Shape 117"/>
+          <p:cNvSpPr/>
+          <p:nvPr/>
+        </p:nvSpPr>
+        <p:spPr>
+          <a:xfrm>
+            <a:off x="749808" y="5170932"/>
+            <a:ext cx="310896" cy="310896"/>
+          </a:xfrm>
+          <a:prstGeom prst="ellipse">
+            <a:avLst/>
+          </a:prstGeom>
+          <a:solidFill>
+            <a:srgbClr val="106B41"/>
+          </a:solidFill>
+          <a:ln/>
+        </p:spPr>
+      </p:sp>
+      <p:sp>
+        <p:nvSpPr>
+          <p:cNvPr id="121" name="Text 118"/>
+          <p:cNvSpPr/>
+          <p:nvPr/>
+        </p:nvSpPr>
+        <p:spPr>
+          <a:xfrm>
+            <a:off x="749808" y="5170932"/>
+            <a:ext cx="310896" cy="310896"/>
           </a:xfrm>
           <a:prstGeom prst="rect">
             <a:avLst/>
@@ -11469,11 +11829,50 @@
           <a:bodyPr wrap="square" lIns="0" tIns="0" rIns="0" bIns="0" rtlCol="0" anchor="ctr"/>
           <a:lstStyle/>
           <a:p>
-            <a:pPr marL="0" indent="0">
-              <a:buNone/>
-            </a:pPr>
-            <a:r>
-              <a:rPr lang="en-US" sz="950" b="1" kern="0" spc="150" dirty="0">
+            <a:pPr algn="ctr" indent="0" marL="0">
+              <a:buNone/>
+            </a:pPr>
+            <a:r>
+              <a:rPr lang="en-US" sz="1200" b="1" dirty="0">
+                <a:solidFill>
+                  <a:srgbClr val="FFFFFF"/>
+                </a:solidFill>
+                <a:latin typeface="Arial" pitchFamily="34" charset="0"/>
+                <a:ea typeface="Arial" pitchFamily="34" charset="-122"/>
+                <a:cs typeface="Arial" pitchFamily="34" charset="-120"/>
+              </a:rPr>
+              <a:t>◆</a:t>
+            </a:r>
+            <a:endParaRPr lang="en-US" sz="1200" dirty="0"/>
+          </a:p>
+        </p:txBody>
+      </p:sp>
+      <p:sp>
+        <p:nvSpPr>
+          <p:cNvPr id="122" name="Text 119"/>
+          <p:cNvSpPr/>
+          <p:nvPr/>
+        </p:nvSpPr>
+        <p:spPr>
+          <a:xfrm>
+            <a:off x="1243584" y="5111496"/>
+            <a:ext cx="10168128" cy="219456"/>
+          </a:xfrm>
+          <a:prstGeom prst="rect">
+            <a:avLst/>
+          </a:prstGeom>
+          <a:noFill/>
+          <a:ln/>
+        </p:spPr>
+        <p:txBody>
+          <a:bodyPr wrap="square" lIns="0" tIns="0" rIns="0" bIns="0" rtlCol="0" anchor="ctr"/>
+          <a:lstStyle/>
+          <a:p>
+            <a:pPr indent="0" marL="0">
+              <a:buNone/>
+            </a:pPr>
+            <a:r>
+              <a:rPr lang="en-US" sz="950" b="1" spc="150" kern="0" dirty="0">
                 <a:solidFill>
                   <a:srgbClr val="106B41"/>
                 </a:solidFill>
@@ -11489,14 +11888,14 @@
       </p:sp>
       <p:sp>
         <p:nvSpPr>
-          <p:cNvPr id="121" name="Text 118"/>
-          <p:cNvSpPr/>
-          <p:nvPr/>
-        </p:nvSpPr>
-        <p:spPr>
-          <a:xfrm>
-            <a:off x="786384" y="5367528"/>
-            <a:ext cx="10625328" cy="173736"/>
+          <p:cNvPr id="123" name="Text 120"/>
+          <p:cNvSpPr/>
+          <p:nvPr/>
+        </p:nvSpPr>
+        <p:spPr>
+          <a:xfrm>
+            <a:off x="1243584" y="5367528"/>
+            <a:ext cx="10168128" cy="173736"/>
           </a:xfrm>
           <a:prstGeom prst="rect">
             <a:avLst/>
@@ -11508,7 +11907,7 @@
           <a:bodyPr wrap="square" lIns="0" tIns="0" rIns="0" bIns="0" rtlCol="0" anchor="ctr"/>
           <a:lstStyle/>
           <a:p>
-            <a:pPr marL="0" indent="0">
+            <a:pPr indent="0" marL="0">
               <a:lnSpc>
                 <a:spcPct val="112000"/>
               </a:lnSpc>
@@ -11531,7 +11930,7 @@
       </p:sp>
       <p:sp>
         <p:nvSpPr>
-          <p:cNvPr id="122" name="Shape 119"/>
+          <p:cNvPr id="124" name="Shape 121"/>
           <p:cNvSpPr/>
           <p:nvPr/>
         </p:nvSpPr>
@@ -11558,7 +11957,7 @@
       </p:sp>
       <p:sp>
         <p:nvSpPr>
-          <p:cNvPr id="123" name="Text 120"/>
+          <p:cNvPr id="125" name="Text 122"/>
           <p:cNvSpPr/>
           <p:nvPr/>
         </p:nvSpPr>
@@ -11577,7 +11976,7 @@
           <a:bodyPr wrap="square" lIns="0" tIns="0" rIns="0" bIns="0" rtlCol="0" anchor="ctr"/>
           <a:lstStyle/>
           <a:p>
-            <a:pPr marL="0" indent="0">
+            <a:pPr indent="0" marL="0">
               <a:lnSpc>
                 <a:spcPct val="112000"/>
               </a:lnSpc>
@@ -11600,7 +11999,7 @@
       </p:sp>
       <p:sp>
         <p:nvSpPr>
-          <p:cNvPr id="124" name="Slide Number Placeholder 0"/>
+          <p:cNvPr id="25" name="Slide Number Placeholder 0"/>
           <p:cNvSpPr>
             <a:spLocks noGrp="1"/>
           </p:cNvSpPr>
@@ -11618,7 +12017,7 @@
           </a:prstGeom>
           <a:extLst>
             <a:ext uri="{C572A759-6A51-4108-AA02-DFA0A04FC94B}">
-              <ma14:wrappingTextBoxFlag xmlns:ma14="http://schemas.microsoft.com/office/mac/drawingml/2011/main" xmlns="" val="0"/>
+              <ma14:wrappingTextBoxFlag xmlns:ma14="http://schemas.microsoft.com/office/mac/drawingml/2011/main" val="0"/>
             </a:ext>
           </a:extLst>
         </p:spPr>
@@ -11639,7 +12038,7 @@
           <a:p>
             <a:pPr algn="l"/>
             <a:fld id="{F7021451-1387-4CA6-816F-3879F97B5CBC}" type="slidenum">
-              <a:rPr lang="en-US" b="0"/>
+              <a:rPr b="0" lang="en-US"/>
               <a:t>14</a:t>
             </a:fld>
             <a:endParaRPr lang="en-US"/>
@@ -11714,7 +12113,7 @@
           <a:bodyPr wrap="square" lIns="0" tIns="0" rIns="0" bIns="0" rtlCol="0" anchor="ctr"/>
           <a:lstStyle/>
           <a:p>
-            <a:pPr marL="0" indent="0" algn="l">
+            <a:pPr algn="l" indent="0" marL="0">
               <a:buNone/>
             </a:pPr>
             <a:r>
@@ -11753,7 +12152,7 @@
           <a:bodyPr wrap="square" lIns="0" tIns="0" rIns="0" bIns="0" rtlCol="0" anchor="ctr"/>
           <a:lstStyle/>
           <a:p>
-            <a:pPr marL="0" indent="0">
+            <a:pPr indent="0" marL="0">
               <a:buNone/>
             </a:pPr>
             <a:r>
@@ -11819,11 +12218,11 @@
           <a:bodyPr wrap="square" lIns="0" tIns="0" rIns="0" bIns="0" rtlCol="0" anchor="ctr"/>
           <a:lstStyle/>
           <a:p>
-            <a:pPr marL="0" indent="0" algn="ctr">
-              <a:buNone/>
-            </a:pPr>
-            <a:r>
-              <a:rPr lang="en-US" sz="900" b="1" kern="0" spc="100" dirty="0">
+            <a:pPr algn="ctr" indent="0" marL="0">
+              <a:buNone/>
+            </a:pPr>
+            <a:r>
+              <a:rPr lang="en-US" sz="900" b="1" spc="100" kern="0" dirty="0">
                 <a:solidFill>
                   <a:srgbClr val="5A05F4"/>
                 </a:solidFill>
@@ -11839,14 +12238,14 @@
       </p:sp>
       <p:pic>
         <p:nvPicPr>
-          <p:cNvPr id="7" name="Image 0" descr="preencoded.png"/>
+          <p:cNvPr id="7" name="Image 0" descr="preencoded.png">    </p:cNvPr>
           <p:cNvPicPr>
             <a:picLocks noChangeAspect="1"/>
           </p:cNvPicPr>
           <p:nvPr/>
         </p:nvPicPr>
         <p:blipFill>
-          <a:blip r:embed="rId3"/>
+          <a:blip r:embed="rId1"/>
           <a:stretch>
             <a:fillRect/>
           </a:stretch>
@@ -11869,7 +12268,7 @@
         </p:nvSpPr>
         <p:spPr>
           <a:xfrm>
-            <a:off x="632460" y="1783080"/>
+            <a:off x="566928" y="1783080"/>
             <a:ext cx="3520440" cy="1783080"/>
           </a:xfrm>
           <a:prstGeom prst="roundRect">
@@ -11924,7 +12323,7 @@
           <a:bodyPr wrap="square" lIns="0" tIns="0" rIns="0" bIns="0" rtlCol="0" anchor="ctr"/>
           <a:lstStyle/>
           <a:p>
-            <a:pPr marL="0" indent="0" algn="ctr">
+            <a:pPr algn="ctr" indent="0" marL="0">
               <a:buNone/>
             </a:pPr>
             <a:r>
@@ -11950,7 +12349,7 @@
         </p:nvSpPr>
         <p:spPr>
           <a:xfrm>
-            <a:off x="1345692" y="1938528"/>
+            <a:off x="1280160" y="1938528"/>
             <a:ext cx="2606040" cy="438912"/>
           </a:xfrm>
           <a:prstGeom prst="rect">
@@ -11963,7 +12362,7 @@
           <a:bodyPr wrap="square" lIns="0" tIns="0" rIns="0" bIns="0" rtlCol="0" anchor="ctr"/>
           <a:lstStyle/>
           <a:p>
-            <a:pPr marL="0" indent="0">
+            <a:pPr indent="0" marL="0">
               <a:buNone/>
             </a:pPr>
             <a:r>
@@ -11989,7 +12388,7 @@
         </p:nvSpPr>
         <p:spPr>
           <a:xfrm>
-            <a:off x="833628" y="2468880"/>
+            <a:off x="768096" y="2468880"/>
             <a:ext cx="3118104" cy="941832"/>
           </a:xfrm>
           <a:prstGeom prst="rect">
@@ -12002,7 +12401,7 @@
           <a:bodyPr wrap="square" lIns="0" tIns="0" rIns="0" bIns="0" rtlCol="0" anchor="t"/>
           <a:lstStyle/>
           <a:p>
-            <a:pPr marL="0" indent="0">
+            <a:pPr indent="0" marL="0">
               <a:lnSpc>
                 <a:spcPct val="108000"/>
               </a:lnSpc>
@@ -12031,7 +12430,7 @@
         </p:nvSpPr>
         <p:spPr>
           <a:xfrm>
-            <a:off x="4335780" y="1783080"/>
+            <a:off x="4270248" y="1783080"/>
             <a:ext cx="3520440" cy="1783080"/>
           </a:xfrm>
           <a:prstGeom prst="roundRect">
@@ -12073,7 +12472,7 @@
         </p:nvSpPr>
         <p:spPr>
           <a:xfrm>
-            <a:off x="4536948" y="1965960"/>
+            <a:off x="4471416" y="1965960"/>
             <a:ext cx="384048" cy="384048"/>
           </a:xfrm>
           <a:prstGeom prst="rect">
@@ -12086,7 +12485,7 @@
           <a:bodyPr wrap="square" lIns="0" tIns="0" rIns="0" bIns="0" rtlCol="0" anchor="ctr"/>
           <a:lstStyle/>
           <a:p>
-            <a:pPr marL="0" indent="0" algn="ctr">
+            <a:pPr algn="ctr" indent="0" marL="0">
               <a:buNone/>
             </a:pPr>
             <a:r>
@@ -12112,7 +12511,7 @@
         </p:nvSpPr>
         <p:spPr>
           <a:xfrm>
-            <a:off x="5049012" y="1938528"/>
+            <a:off x="4983480" y="1938528"/>
             <a:ext cx="2606040" cy="438912"/>
           </a:xfrm>
           <a:prstGeom prst="rect">
@@ -12125,7 +12524,7 @@
           <a:bodyPr wrap="square" lIns="0" tIns="0" rIns="0" bIns="0" rtlCol="0" anchor="ctr"/>
           <a:lstStyle/>
           <a:p>
-            <a:pPr marL="0" indent="0">
+            <a:pPr indent="0" marL="0">
               <a:buNone/>
             </a:pPr>
             <a:r>
@@ -12151,7 +12550,7 @@
         </p:nvSpPr>
         <p:spPr>
           <a:xfrm>
-            <a:off x="4536948" y="2468880"/>
+            <a:off x="4471416" y="2468880"/>
             <a:ext cx="3118104" cy="941832"/>
           </a:xfrm>
           <a:prstGeom prst="rect">
@@ -12164,7 +12563,7 @@
           <a:bodyPr wrap="square" lIns="0" tIns="0" rIns="0" bIns="0" rtlCol="0" anchor="t"/>
           <a:lstStyle/>
           <a:p>
-            <a:pPr marL="0" indent="0">
+            <a:pPr indent="0" marL="0">
               <a:lnSpc>
                 <a:spcPct val="108000"/>
               </a:lnSpc>
@@ -12193,7 +12592,7 @@
         </p:nvSpPr>
         <p:spPr>
           <a:xfrm>
-            <a:off x="8039100" y="1783080"/>
+            <a:off x="7973568" y="1783080"/>
             <a:ext cx="3520440" cy="1783080"/>
           </a:xfrm>
           <a:prstGeom prst="roundRect">
@@ -12215,29 +12614,29 @@
         </p:nvSpPr>
         <p:spPr>
           <a:xfrm>
-            <a:off x="8240268" y="1965960"/>
-            <a:ext cx="384048" cy="384048"/>
-          </a:xfrm>
-          <a:prstGeom prst="ellipse">
-            <a:avLst/>
-          </a:prstGeom>
-          <a:solidFill>
-            <a:srgbClr val="5A05F4"/>
-          </a:solidFill>
-          <a:ln/>
-        </p:spPr>
-      </p:sp>
-      <p:sp>
-        <p:nvSpPr>
-          <p:cNvPr id="20" name="Text 17"/>
-          <p:cNvSpPr/>
-          <p:nvPr/>
-        </p:nvSpPr>
-        <p:spPr>
-          <a:xfrm>
             <a:off x="8174736" y="1965960"/>
             <a:ext cx="384048" cy="384048"/>
           </a:xfrm>
+          <a:prstGeom prst="ellipse">
+            <a:avLst/>
+          </a:prstGeom>
+          <a:solidFill>
+            <a:srgbClr val="5A05F4"/>
+          </a:solidFill>
+          <a:ln/>
+        </p:spPr>
+      </p:sp>
+      <p:sp>
+        <p:nvSpPr>
+          <p:cNvPr id="20" name="Text 17"/>
+          <p:cNvSpPr/>
+          <p:nvPr/>
+        </p:nvSpPr>
+        <p:spPr>
+          <a:xfrm>
+            <a:off x="8174736" y="1965960"/>
+            <a:ext cx="384048" cy="384048"/>
+          </a:xfrm>
           <a:prstGeom prst="rect">
             <a:avLst/>
           </a:prstGeom>
@@ -12248,7 +12647,7 @@
           <a:bodyPr wrap="square" lIns="0" tIns="0" rIns="0" bIns="0" rtlCol="0" anchor="ctr"/>
           <a:lstStyle/>
           <a:p>
-            <a:pPr marL="0" indent="0" algn="ctr">
+            <a:pPr algn="ctr" indent="0" marL="0">
               <a:buNone/>
             </a:pPr>
             <a:r>
@@ -12274,7 +12673,7 @@
         </p:nvSpPr>
         <p:spPr>
           <a:xfrm>
-            <a:off x="8752332" y="1938528"/>
+            <a:off x="8686800" y="1938528"/>
             <a:ext cx="2606040" cy="438912"/>
           </a:xfrm>
           <a:prstGeom prst="rect">
@@ -12287,7 +12686,7 @@
           <a:bodyPr wrap="square" lIns="0" tIns="0" rIns="0" bIns="0" rtlCol="0" anchor="ctr"/>
           <a:lstStyle/>
           <a:p>
-            <a:pPr marL="0" indent="0">
+            <a:pPr indent="0" marL="0">
               <a:buNone/>
             </a:pPr>
             <a:r>
@@ -12313,7 +12712,7 @@
         </p:nvSpPr>
         <p:spPr>
           <a:xfrm>
-            <a:off x="8240268" y="2468880"/>
+            <a:off x="8174736" y="2468880"/>
             <a:ext cx="3118104" cy="941832"/>
           </a:xfrm>
           <a:prstGeom prst="rect">
@@ -12326,7 +12725,7 @@
           <a:bodyPr wrap="square" lIns="0" tIns="0" rIns="0" bIns="0" rtlCol="0" anchor="t"/>
           <a:lstStyle/>
           <a:p>
-            <a:pPr marL="0" indent="0">
+            <a:pPr indent="0" marL="0">
               <a:lnSpc>
                 <a:spcPct val="108000"/>
               </a:lnSpc>
@@ -12355,8 +12754,8 @@
         </p:nvSpPr>
         <p:spPr>
           <a:xfrm>
-            <a:off x="632460" y="3931920"/>
-            <a:ext cx="10927080" cy="1234440"/>
+            <a:off x="566928" y="3931920"/>
+            <a:ext cx="11064240" cy="1234440"/>
           </a:xfrm>
           <a:prstGeom prst="roundRect">
             <a:avLst>
@@ -12376,14 +12775,34 @@
       </p:sp>
       <p:sp>
         <p:nvSpPr>
-          <p:cNvPr id="24" name="Text 21"/>
-          <p:cNvSpPr/>
-          <p:nvPr/>
-        </p:nvSpPr>
-        <p:spPr>
-          <a:xfrm>
-            <a:off x="786384" y="4059936"/>
-            <a:ext cx="10625328" cy="219456"/>
+          <p:cNvPr id="24" name="Shape 21"/>
+          <p:cNvSpPr/>
+          <p:nvPr/>
+        </p:nvSpPr>
+        <p:spPr>
+          <a:xfrm>
+            <a:off x="749808" y="4393692"/>
+            <a:ext cx="310896" cy="310896"/>
+          </a:xfrm>
+          <a:prstGeom prst="ellipse">
+            <a:avLst/>
+          </a:prstGeom>
+          <a:solidFill>
+            <a:srgbClr val="B3261E"/>
+          </a:solidFill>
+          <a:ln/>
+        </p:spPr>
+      </p:sp>
+      <p:sp>
+        <p:nvSpPr>
+          <p:cNvPr id="25" name="Text 22"/>
+          <p:cNvSpPr/>
+          <p:nvPr/>
+        </p:nvSpPr>
+        <p:spPr>
+          <a:xfrm>
+            <a:off x="749808" y="4393692"/>
+            <a:ext cx="310896" cy="310896"/>
           </a:xfrm>
           <a:prstGeom prst="rect">
             <a:avLst/>
@@ -12395,11 +12814,50 @@
           <a:bodyPr wrap="square" lIns="0" tIns="0" rIns="0" bIns="0" rtlCol="0" anchor="ctr"/>
           <a:lstStyle/>
           <a:p>
-            <a:pPr marL="0" indent="0">
-              <a:buNone/>
-            </a:pPr>
-            <a:r>
-              <a:rPr lang="en-US" sz="950" b="1" kern="0" spc="150" dirty="0">
+            <a:pPr algn="ctr" indent="0" marL="0">
+              <a:buNone/>
+            </a:pPr>
+            <a:r>
+              <a:rPr lang="en-US" sz="1200" b="1" dirty="0">
+                <a:solidFill>
+                  <a:srgbClr val="FFFFFF"/>
+                </a:solidFill>
+                <a:latin typeface="Arial" pitchFamily="34" charset="0"/>
+                <a:ea typeface="Arial" pitchFamily="34" charset="-122"/>
+                <a:cs typeface="Arial" pitchFamily="34" charset="-120"/>
+              </a:rPr>
+              <a:t>✕</a:t>
+            </a:r>
+            <a:endParaRPr lang="en-US" sz="1200" dirty="0"/>
+          </a:p>
+        </p:txBody>
+      </p:sp>
+      <p:sp>
+        <p:nvSpPr>
+          <p:cNvPr id="26" name="Text 23"/>
+          <p:cNvSpPr/>
+          <p:nvPr/>
+        </p:nvSpPr>
+        <p:spPr>
+          <a:xfrm>
+            <a:off x="1243584" y="4059936"/>
+            <a:ext cx="10168128" cy="219456"/>
+          </a:xfrm>
+          <a:prstGeom prst="rect">
+            <a:avLst/>
+          </a:prstGeom>
+          <a:noFill/>
+          <a:ln/>
+        </p:spPr>
+        <p:txBody>
+          <a:bodyPr wrap="square" lIns="0" tIns="0" rIns="0" bIns="0" rtlCol="0" anchor="ctr"/>
+          <a:lstStyle/>
+          <a:p>
+            <a:pPr indent="0" marL="0">
+              <a:buNone/>
+            </a:pPr>
+            <a:r>
+              <a:rPr lang="en-US" sz="950" b="1" spc="150" kern="0" dirty="0">
                 <a:solidFill>
                   <a:srgbClr val="B3261E"/>
                 </a:solidFill>
@@ -12415,14 +12873,14 @@
       </p:sp>
       <p:sp>
         <p:nvSpPr>
-          <p:cNvPr id="25" name="Text 22"/>
-          <p:cNvSpPr/>
-          <p:nvPr/>
-        </p:nvSpPr>
-        <p:spPr>
-          <a:xfrm>
-            <a:off x="786384" y="4315968"/>
-            <a:ext cx="10625328" cy="722376"/>
+          <p:cNvPr id="27" name="Text 24"/>
+          <p:cNvSpPr/>
+          <p:nvPr/>
+        </p:nvSpPr>
+        <p:spPr>
+          <a:xfrm>
+            <a:off x="1243584" y="4315968"/>
+            <a:ext cx="10168128" cy="722376"/>
           </a:xfrm>
           <a:prstGeom prst="rect">
             <a:avLst/>
@@ -12434,7 +12892,7 @@
           <a:bodyPr wrap="square" lIns="0" tIns="0" rIns="0" bIns="0" rtlCol="0" anchor="ctr"/>
           <a:lstStyle/>
           <a:p>
-            <a:pPr marL="0" indent="0">
+            <a:pPr indent="0" marL="0">
               <a:lnSpc>
                 <a:spcPct val="112000"/>
               </a:lnSpc>
@@ -12457,14 +12915,14 @@
       </p:sp>
       <p:sp>
         <p:nvSpPr>
-          <p:cNvPr id="26" name="Shape 23"/>
-          <p:cNvSpPr/>
-          <p:nvPr/>
-        </p:nvSpPr>
-        <p:spPr>
-          <a:xfrm>
-            <a:off x="632460" y="5303520"/>
-            <a:ext cx="10927080" cy="548640"/>
+          <p:cNvPr id="28" name="Shape 25"/>
+          <p:cNvSpPr/>
+          <p:nvPr/>
+        </p:nvSpPr>
+        <p:spPr>
+          <a:xfrm>
+            <a:off x="566928" y="5303520"/>
+            <a:ext cx="11064240" cy="548640"/>
           </a:xfrm>
           <a:prstGeom prst="roundRect">
             <a:avLst>
@@ -12484,7 +12942,7 @@
       </p:sp>
       <p:sp>
         <p:nvSpPr>
-          <p:cNvPr id="27" name="Text 24"/>
+          <p:cNvPr id="29" name="Text 26"/>
           <p:cNvSpPr/>
           <p:nvPr/>
         </p:nvSpPr>
@@ -12503,7 +12961,7 @@
           <a:bodyPr wrap="square" lIns="0" tIns="0" rIns="0" bIns="0" rtlCol="0" anchor="ctr"/>
           <a:lstStyle/>
           <a:p>
-            <a:pPr marL="0" indent="0">
+            <a:pPr indent="0" marL="0">
               <a:lnSpc>
                 <a:spcPct val="112000"/>
               </a:lnSpc>
@@ -12526,7 +12984,7 @@
       </p:sp>
       <p:sp>
         <p:nvSpPr>
-          <p:cNvPr id="28" name="Slide Number Placeholder 0"/>
+          <p:cNvPr id="25" name="Slide Number Placeholder 0"/>
           <p:cNvSpPr>
             <a:spLocks noGrp="1"/>
           </p:cNvSpPr>
@@ -12544,7 +13002,7 @@
           </a:prstGeom>
           <a:extLst>
             <a:ext uri="{C572A759-6A51-4108-AA02-DFA0A04FC94B}">
-              <ma14:wrappingTextBoxFlag xmlns:ma14="http://schemas.microsoft.com/office/mac/drawingml/2011/main" xmlns="" val="0"/>
+              <ma14:wrappingTextBoxFlag xmlns:ma14="http://schemas.microsoft.com/office/mac/drawingml/2011/main" val="0"/>
             </a:ext>
           </a:extLst>
         </p:spPr>
@@ -12565,7 +13023,7 @@
           <a:p>
             <a:pPr algn="l"/>
             <a:fld id="{F7021451-1387-4CA6-816F-3879F97B5CBC}" type="slidenum">
-              <a:rPr lang="en-US" b="0"/>
+              <a:rPr b="0" lang="en-US"/>
               <a:t>15</a:t>
             </a:fld>
             <a:endParaRPr lang="en-US"/>
@@ -12640,7 +13098,7 @@
           <a:bodyPr wrap="square" lIns="0" tIns="0" rIns="0" bIns="0" rtlCol="0" anchor="ctr"/>
           <a:lstStyle/>
           <a:p>
-            <a:pPr marL="0" indent="0" algn="l">
+            <a:pPr algn="l" indent="0" marL="0">
               <a:buNone/>
             </a:pPr>
             <a:r>
@@ -12679,7 +13137,7 @@
           <a:bodyPr wrap="square" lIns="0" tIns="0" rIns="0" bIns="0" rtlCol="0" anchor="ctr"/>
           <a:lstStyle/>
           <a:p>
-            <a:pPr marL="0" indent="0">
+            <a:pPr indent="0" marL="0">
               <a:buNone/>
             </a:pPr>
             <a:r>
@@ -12745,11 +13203,11 @@
           <a:bodyPr wrap="square" lIns="0" tIns="0" rIns="0" bIns="0" rtlCol="0" anchor="ctr"/>
           <a:lstStyle/>
           <a:p>
-            <a:pPr marL="0" indent="0" algn="ctr">
-              <a:buNone/>
-            </a:pPr>
-            <a:r>
-              <a:rPr lang="en-US" sz="900" b="1" kern="0" spc="100" dirty="0">
+            <a:pPr algn="ctr" indent="0" marL="0">
+              <a:buNone/>
+            </a:pPr>
+            <a:r>
+              <a:rPr lang="en-US" sz="900" b="1" spc="100" kern="0" dirty="0">
                 <a:solidFill>
                   <a:srgbClr val="5A05F4"/>
                 </a:solidFill>
@@ -12811,11 +13269,11 @@
           <a:bodyPr wrap="square" lIns="0" tIns="0" rIns="0" bIns="0" rtlCol="0" anchor="ctr"/>
           <a:lstStyle/>
           <a:p>
-            <a:pPr marL="0" indent="0" algn="ctr">
-              <a:buNone/>
-            </a:pPr>
-            <a:r>
-              <a:rPr lang="en-US" sz="900" b="1" kern="0" spc="100" dirty="0">
+            <a:pPr algn="ctr" indent="0" marL="0">
+              <a:buNone/>
+            </a:pPr>
+            <a:r>
+              <a:rPr lang="en-US" sz="900" b="1" spc="100" kern="0" dirty="0">
                 <a:solidFill>
                   <a:srgbClr val="434343"/>
                 </a:solidFill>
@@ -12831,14 +13289,14 @@
       </p:sp>
       <p:pic>
         <p:nvPicPr>
-          <p:cNvPr id="9" name="Image 0" descr="preencoded.png"/>
+          <p:cNvPr id="9" name="Image 0" descr="preencoded.png">    </p:cNvPr>
           <p:cNvPicPr>
             <a:picLocks noChangeAspect="1"/>
           </p:cNvPicPr>
           <p:nvPr/>
         </p:nvPicPr>
         <p:blipFill>
-          <a:blip r:embed="rId3"/>
+          <a:blip r:embed="rId1"/>
           <a:stretch>
             <a:fillRect/>
           </a:stretch>
@@ -12869,34 +13327,16 @@
         </p:nvGraphicFramePr>
         <p:xfrm>
           <a:off x="566928" y="1920240"/>
-          <a:ext cx="11064240" cy="2048256"/>
+          <a:ext cx="11064240" cy="914400"/>
         </p:xfrm>
         <a:graphic>
           <a:graphicData uri="http://schemas.openxmlformats.org/drawingml/2006/table">
             <a:tbl>
               <a:tblPr/>
               <a:tblGrid>
-                <a:gridCol w="3108960">
-                  <a:extLst>
-                    <a:ext uri="{9D8B030D-6E8A-4147-A177-3AD203B41FA5}">
-                      <a16:colId xmlns:a16="http://schemas.microsoft.com/office/drawing/2014/main" val="20000"/>
-                    </a:ext>
-                  </a:extLst>
-                </a:gridCol>
-                <a:gridCol w="4023360">
-                  <a:extLst>
-                    <a:ext uri="{9D8B030D-6E8A-4147-A177-3AD203B41FA5}">
-                      <a16:colId xmlns:a16="http://schemas.microsoft.com/office/drawing/2014/main" val="20001"/>
-                    </a:ext>
-                  </a:extLst>
-                </a:gridCol>
-                <a:gridCol w="3931920">
-                  <a:extLst>
-                    <a:ext uri="{9D8B030D-6E8A-4147-A177-3AD203B41FA5}">
-                      <a16:colId xmlns:a16="http://schemas.microsoft.com/office/drawing/2014/main" val="20002"/>
-                    </a:ext>
-                  </a:extLst>
-                </a:gridCol>
+                <a:gridCol w="3108960"/>
+                <a:gridCol w="4023360"/>
+                <a:gridCol w="3931920"/>
               </a:tblGrid>
               <a:tr h="512064">
                 <a:tc>
@@ -12904,11 +13344,11 @@
                     <a:bodyPr/>
                     <a:lstStyle/>
                     <a:p>
-                      <a:pPr marL="0" indent="0" algn="ctr">
+                      <a:pPr algn="ctr" indent="0" marL="0">
                         <a:buNone/>
                       </a:pPr>
                       <a:r>
-                        <a:rPr lang="en-US" sz="900" b="1" kern="0" spc="100" dirty="0">
+                        <a:rPr lang="en-US" sz="900" b="1" spc="100" kern="0" dirty="0">
                           <a:solidFill>
                             <a:srgbClr val="FFFFFF"/>
                           </a:solidFill>
@@ -12972,11 +13412,11 @@
                     <a:bodyPr/>
                     <a:lstStyle/>
                     <a:p>
-                      <a:pPr marL="0" indent="0" algn="ctr">
+                      <a:pPr algn="ctr" indent="0" marL="0">
                         <a:buNone/>
                       </a:pPr>
                       <a:r>
-                        <a:rPr lang="en-US" sz="900" b="1" kern="0" spc="100" dirty="0">
+                        <a:rPr lang="en-US" sz="900" b="1" spc="100" kern="0" dirty="0">
                           <a:solidFill>
                             <a:srgbClr val="FFFFFF"/>
                           </a:solidFill>
@@ -13040,11 +13480,11 @@
                     <a:bodyPr/>
                     <a:lstStyle/>
                     <a:p>
-                      <a:pPr marL="0" indent="0" algn="ctr">
+                      <a:pPr algn="ctr" indent="0" marL="0">
                         <a:buNone/>
                       </a:pPr>
                       <a:r>
-                        <a:rPr lang="en-US" sz="900" b="1" kern="0" spc="100" dirty="0">
+                        <a:rPr lang="en-US" sz="900" b="1" spc="100" kern="0" dirty="0">
                           <a:solidFill>
                             <a:srgbClr val="FFFFFF"/>
                           </a:solidFill>
@@ -13103,11 +13543,6 @@
                     </a:solidFill>
                   </a:tcPr>
                 </a:tc>
-                <a:extLst>
-                  <a:ext uri="{0D108BD9-81ED-4DB2-BD59-A6C34878D82A}">
-                    <a16:rowId xmlns:a16="http://schemas.microsoft.com/office/drawing/2014/main" val="10000"/>
-                  </a:ext>
-                </a:extLst>
               </a:tr>
               <a:tr h="512064">
                 <a:tc>
@@ -13115,7 +13550,7 @@
                     <a:bodyPr/>
                     <a:lstStyle/>
                     <a:p>
-                      <a:pPr marL="0" indent="0">
+                      <a:pPr indent="0" marL="0">
                         <a:buNone/>
                       </a:pPr>
                       <a:r>
@@ -13183,7 +13618,7 @@
                     <a:bodyPr/>
                     <a:lstStyle/>
                     <a:p>
-                      <a:pPr marL="0" indent="0">
+                      <a:pPr indent="0" marL="0">
                         <a:buNone/>
                       </a:pPr>
                       <a:r>
@@ -13251,7 +13686,7 @@
                     <a:bodyPr/>
                     <a:lstStyle/>
                     <a:p>
-                      <a:pPr marL="0" indent="0">
+                      <a:pPr indent="0" marL="0">
                         <a:buNone/>
                       </a:pPr>
                       <a:r>
@@ -13314,11 +13749,6 @@
                     </a:solidFill>
                   </a:tcPr>
                 </a:tc>
-                <a:extLst>
-                  <a:ext uri="{0D108BD9-81ED-4DB2-BD59-A6C34878D82A}">
-                    <a16:rowId xmlns:a16="http://schemas.microsoft.com/office/drawing/2014/main" val="10001"/>
-                  </a:ext>
-                </a:extLst>
               </a:tr>
               <a:tr h="512064">
                 <a:tc>
@@ -13326,7 +13756,7 @@
                     <a:bodyPr/>
                     <a:lstStyle/>
                     <a:p>
-                      <a:pPr marL="0" indent="0">
+                      <a:pPr indent="0" marL="0">
                         <a:buNone/>
                       </a:pPr>
                       <a:r>
@@ -13394,7 +13824,7 @@
                     <a:bodyPr/>
                     <a:lstStyle/>
                     <a:p>
-                      <a:pPr marL="0" indent="0">
+                      <a:pPr indent="0" marL="0">
                         <a:buNone/>
                       </a:pPr>
                       <a:r>
@@ -13462,7 +13892,7 @@
                     <a:bodyPr/>
                     <a:lstStyle/>
                     <a:p>
-                      <a:pPr marL="0" indent="0">
+                      <a:pPr indent="0" marL="0">
                         <a:buNone/>
                       </a:pPr>
                       <a:r>
@@ -13525,11 +13955,6 @@
                     </a:solidFill>
                   </a:tcPr>
                 </a:tc>
-                <a:extLst>
-                  <a:ext uri="{0D108BD9-81ED-4DB2-BD59-A6C34878D82A}">
-                    <a16:rowId xmlns:a16="http://schemas.microsoft.com/office/drawing/2014/main" val="10002"/>
-                  </a:ext>
-                </a:extLst>
               </a:tr>
               <a:tr h="512064">
                 <a:tc>
@@ -13537,7 +13962,7 @@
                     <a:bodyPr/>
                     <a:lstStyle/>
                     <a:p>
-                      <a:pPr marL="0" indent="0">
+                      <a:pPr indent="0" marL="0">
                         <a:buNone/>
                       </a:pPr>
                       <a:r>
@@ -13605,7 +14030,7 @@
                     <a:bodyPr/>
                     <a:lstStyle/>
                     <a:p>
-                      <a:pPr marL="0" indent="0">
+                      <a:pPr indent="0" marL="0">
                         <a:buNone/>
                       </a:pPr>
                       <a:r>
@@ -13673,7 +14098,7 @@
                     <a:bodyPr/>
                     <a:lstStyle/>
                     <a:p>
-                      <a:pPr marL="0" indent="0">
+                      <a:pPr indent="0" marL="0">
                         <a:buNone/>
                       </a:pPr>
                       <a:r>
@@ -13736,11 +14161,6 @@
                     </a:solidFill>
                   </a:tcPr>
                 </a:tc>
-                <a:extLst>
-                  <a:ext uri="{0D108BD9-81ED-4DB2-BD59-A6C34878D82A}">
-                    <a16:rowId xmlns:a16="http://schemas.microsoft.com/office/drawing/2014/main" val="10003"/>
-                  </a:ext>
-                </a:extLst>
               </a:tr>
             </a:tbl>
           </a:graphicData>
@@ -13789,7 +14209,7 @@
           <a:bodyPr wrap="square" lIns="0" tIns="0" rIns="0" bIns="0" rtlCol="0" anchor="ctr"/>
           <a:lstStyle/>
           <a:p>
-            <a:pPr marL="0" indent="0">
+            <a:pPr indent="0" marL="0">
               <a:lnSpc>
                 <a:spcPct val="112000"/>
               </a:lnSpc>
@@ -13830,7 +14250,7 @@
           </a:prstGeom>
           <a:extLst>
             <a:ext uri="{C572A759-6A51-4108-AA02-DFA0A04FC94B}">
-              <ma14:wrappingTextBoxFlag xmlns:ma14="http://schemas.microsoft.com/office/mac/drawingml/2011/main" xmlns="" val="0"/>
+              <ma14:wrappingTextBoxFlag xmlns:ma14="http://schemas.microsoft.com/office/mac/drawingml/2011/main" val="0"/>
             </a:ext>
           </a:extLst>
         </p:spPr>
@@ -13851,7 +14271,7 @@
           <a:p>
             <a:pPr algn="l"/>
             <a:fld id="{F7021451-1387-4CA6-816F-3879F97B5CBC}" type="slidenum">
-              <a:rPr lang="en-US" b="0"/>
+              <a:rPr b="0" lang="en-US"/>
               <a:t>16</a:t>
             </a:fld>
             <a:endParaRPr lang="en-US"/>
@@ -13926,7 +14346,7 @@
           <a:bodyPr wrap="square" lIns="0" tIns="0" rIns="0" bIns="0" rtlCol="0" anchor="ctr"/>
           <a:lstStyle/>
           <a:p>
-            <a:pPr marL="0" indent="0" algn="l">
+            <a:pPr algn="l" indent="0" marL="0">
               <a:buNone/>
             </a:pPr>
             <a:r>
@@ -13965,7 +14385,7 @@
           <a:bodyPr wrap="square" lIns="0" tIns="0" rIns="0" bIns="0" rtlCol="0" anchor="ctr"/>
           <a:lstStyle/>
           <a:p>
-            <a:pPr marL="0" indent="0">
+            <a:pPr indent="0" marL="0">
               <a:buNone/>
             </a:pPr>
             <a:r>
@@ -14031,11 +14451,11 @@
           <a:bodyPr wrap="square" lIns="0" tIns="0" rIns="0" bIns="0" rtlCol="0" anchor="ctr"/>
           <a:lstStyle/>
           <a:p>
-            <a:pPr marL="0" indent="0" algn="ctr">
-              <a:buNone/>
-            </a:pPr>
-            <a:r>
-              <a:rPr lang="en-US" sz="900" b="1" kern="0" spc="100" dirty="0">
+            <a:pPr algn="ctr" indent="0" marL="0">
+              <a:buNone/>
+            </a:pPr>
+            <a:r>
+              <a:rPr lang="en-US" sz="900" b="1" spc="100" kern="0" dirty="0">
                 <a:solidFill>
                   <a:srgbClr val="5A05F4"/>
                 </a:solidFill>
@@ -14051,14 +14471,14 @@
       </p:sp>
       <p:pic>
         <p:nvPicPr>
-          <p:cNvPr id="7" name="Image 0" descr="preencoded.png"/>
+          <p:cNvPr id="7" name="Image 0" descr="preencoded.png">    </p:cNvPr>
           <p:cNvPicPr>
             <a:picLocks noChangeAspect="1"/>
           </p:cNvPicPr>
           <p:nvPr/>
         </p:nvPicPr>
         <p:blipFill>
-          <a:blip r:embed="rId3"/>
+          <a:blip r:embed="rId1"/>
           <a:stretch>
             <a:fillRect/>
           </a:stretch>
@@ -14116,7 +14536,7 @@
           <a:bodyPr wrap="square" lIns="0" tIns="0" rIns="0" bIns="0" rtlCol="0" anchor="ctr"/>
           <a:lstStyle/>
           <a:p>
-            <a:pPr marL="0" indent="0" algn="ctr">
+            <a:pPr algn="ctr" indent="0" marL="0">
               <a:buNone/>
             </a:pPr>
             <a:r>
@@ -14220,7 +14640,7 @@
           <a:bodyPr wrap="square" lIns="0" tIns="0" rIns="0" bIns="0" rtlCol="0" anchor="ctr"/>
           <a:lstStyle/>
           <a:p>
-            <a:pPr marL="0" indent="0" algn="ctr">
+            <a:pPr algn="ctr" indent="0" marL="0">
               <a:buNone/>
             </a:pPr>
             <a:r>
@@ -14324,7 +14744,7 @@
           <a:bodyPr wrap="square" lIns="0" tIns="0" rIns="0" bIns="0" rtlCol="0" anchor="ctr"/>
           <a:lstStyle/>
           <a:p>
-            <a:pPr marL="0" indent="0" algn="ctr">
+            <a:pPr algn="ctr" indent="0" marL="0">
               <a:buNone/>
             </a:pPr>
             <a:r>
@@ -14428,7 +14848,7 @@
           <a:bodyPr wrap="square" lIns="0" tIns="0" rIns="0" bIns="0" rtlCol="0" anchor="ctr"/>
           <a:lstStyle/>
           <a:p>
-            <a:pPr marL="0" indent="0" algn="ctr">
+            <a:pPr algn="ctr" indent="0" marL="0">
               <a:buNone/>
             </a:pPr>
             <a:r>
@@ -14509,7 +14929,7 @@
           <a:bodyPr wrap="square" lIns="0" tIns="0" rIns="0" bIns="0" rtlCol="0" anchor="ctr"/>
           <a:lstStyle/>
           <a:p>
-            <a:pPr marL="0" indent="0" algn="ctr">
+            <a:pPr algn="ctr" indent="0" marL="0">
               <a:buNone/>
             </a:pPr>
             <a:r>
@@ -14548,7 +14968,7 @@
           <a:bodyPr wrap="square" lIns="0" tIns="0" rIns="0" bIns="0" rtlCol="0" anchor="ctr"/>
           <a:lstStyle/>
           <a:p>
-            <a:pPr marL="0" indent="0">
+            <a:pPr indent="0" marL="0">
               <a:buNone/>
             </a:pPr>
             <a:r>
@@ -14587,7 +15007,7 @@
           <a:bodyPr wrap="square" lIns="0" tIns="0" rIns="0" bIns="0" rtlCol="0" anchor="t"/>
           <a:lstStyle/>
           <a:p>
-            <a:pPr marL="0" indent="0">
+            <a:pPr indent="0" marL="0">
               <a:lnSpc>
                 <a:spcPct val="108000"/>
               </a:lnSpc>
@@ -14671,7 +15091,7 @@
           <a:bodyPr wrap="square" lIns="0" tIns="0" rIns="0" bIns="0" rtlCol="0" anchor="ctr"/>
           <a:lstStyle/>
           <a:p>
-            <a:pPr marL="0" indent="0" algn="ctr">
+            <a:pPr algn="ctr" indent="0" marL="0">
               <a:buNone/>
             </a:pPr>
             <a:r>
@@ -14710,7 +15130,7 @@
           <a:bodyPr wrap="square" lIns="0" tIns="0" rIns="0" bIns="0" rtlCol="0" anchor="ctr"/>
           <a:lstStyle/>
           <a:p>
-            <a:pPr marL="0" indent="0">
+            <a:pPr indent="0" marL="0">
               <a:buNone/>
             </a:pPr>
             <a:r>
@@ -14749,7 +15169,7 @@
           <a:bodyPr wrap="square" lIns="0" tIns="0" rIns="0" bIns="0" rtlCol="0" anchor="t"/>
           <a:lstStyle/>
           <a:p>
-            <a:pPr marL="0" indent="0">
+            <a:pPr indent="0" marL="0">
               <a:lnSpc>
                 <a:spcPct val="108000"/>
               </a:lnSpc>
@@ -14779,7 +15199,7 @@
         <p:spPr>
           <a:xfrm>
             <a:off x="7973568" y="2926080"/>
-            <a:ext cx="3651504" cy="1600200"/>
+            <a:ext cx="3520440" cy="1600200"/>
           </a:xfrm>
           <a:prstGeom prst="roundRect">
             <a:avLst>
@@ -14833,7 +15253,7 @@
           <a:bodyPr wrap="square" lIns="0" tIns="0" rIns="0" bIns="0" rtlCol="0" anchor="ctr"/>
           <a:lstStyle/>
           <a:p>
-            <a:pPr marL="0" indent="0" algn="ctr">
+            <a:pPr algn="ctr" indent="0" marL="0">
               <a:buNone/>
             </a:pPr>
             <a:r>
@@ -14872,7 +15292,7 @@
           <a:bodyPr wrap="square" lIns="0" tIns="0" rIns="0" bIns="0" rtlCol="0" anchor="ctr"/>
           <a:lstStyle/>
           <a:p>
-            <a:pPr marL="0" indent="0">
+            <a:pPr indent="0" marL="0">
               <a:buNone/>
             </a:pPr>
             <a:r>
@@ -14911,7 +15331,7 @@
           <a:bodyPr wrap="square" lIns="0" tIns="0" rIns="0" bIns="0" rtlCol="0" anchor="t"/>
           <a:lstStyle/>
           <a:p>
-            <a:pPr marL="0" indent="0">
+            <a:pPr indent="0" marL="0">
               <a:lnSpc>
                 <a:spcPct val="108000"/>
               </a:lnSpc>
@@ -14980,11 +15400,11 @@
           <a:bodyPr wrap="square" lIns="0" tIns="0" rIns="0" bIns="0" rtlCol="0" anchor="ctr"/>
           <a:lstStyle/>
           <a:p>
-            <a:pPr marL="0" indent="0">
-              <a:buNone/>
-            </a:pPr>
-            <a:r>
-              <a:rPr lang="en-US" sz="950" b="1" kern="0" spc="150" dirty="0">
+            <a:pPr indent="0" marL="0">
+              <a:buNone/>
+            </a:pPr>
+            <a:r>
+              <a:rPr lang="en-US" sz="950" b="1" spc="150" kern="0" dirty="0">
                 <a:solidFill>
                   <a:srgbClr val="106B41"/>
                 </a:solidFill>
@@ -15019,7 +15439,7 @@
           <a:bodyPr wrap="square" lIns="0" tIns="0" rIns="0" bIns="0" rtlCol="0" anchor="ctr"/>
           <a:lstStyle/>
           <a:p>
-            <a:pPr marL="0" indent="0">
+            <a:pPr indent="0" marL="0">
               <a:lnSpc>
                 <a:spcPct val="112000"/>
               </a:lnSpc>
@@ -15042,7 +15462,7 @@
       </p:sp>
       <p:sp>
         <p:nvSpPr>
-          <p:cNvPr id="40" name="Slide Number Placeholder 0"/>
+          <p:cNvPr id="25" name="Slide Number Placeholder 0"/>
           <p:cNvSpPr>
             <a:spLocks noGrp="1"/>
           </p:cNvSpPr>
@@ -15060,7 +15480,7 @@
           </a:prstGeom>
           <a:extLst>
             <a:ext uri="{C572A759-6A51-4108-AA02-DFA0A04FC94B}">
-              <ma14:wrappingTextBoxFlag xmlns:ma14="http://schemas.microsoft.com/office/mac/drawingml/2011/main" xmlns="" val="0"/>
+              <ma14:wrappingTextBoxFlag xmlns:ma14="http://schemas.microsoft.com/office/mac/drawingml/2011/main" val="0"/>
             </a:ext>
           </a:extLst>
         </p:spPr>
@@ -15081,7 +15501,7 @@
           <a:p>
             <a:pPr algn="l"/>
             <a:fld id="{F7021451-1387-4CA6-816F-3879F97B5CBC}" type="slidenum">
-              <a:rPr lang="en-US" b="0"/>
+              <a:rPr b="0" lang="en-US"/>
               <a:t>17</a:t>
             </a:fld>
             <a:endParaRPr lang="en-US"/>
@@ -15156,7 +15576,7 @@
           <a:bodyPr wrap="square" lIns="0" tIns="0" rIns="0" bIns="0" rtlCol="0" anchor="ctr"/>
           <a:lstStyle/>
           <a:p>
-            <a:pPr marL="0" indent="0" algn="l">
+            <a:pPr algn="l" indent="0" marL="0">
               <a:buNone/>
             </a:pPr>
             <a:r>
@@ -15195,7 +15615,7 @@
           <a:bodyPr wrap="square" lIns="0" tIns="0" rIns="0" bIns="0" rtlCol="0" anchor="ctr"/>
           <a:lstStyle/>
           <a:p>
-            <a:pPr marL="0" indent="0">
+            <a:pPr indent="0" marL="0">
               <a:buNone/>
             </a:pPr>
             <a:r>
@@ -15234,7 +15654,7 @@
           <a:bodyPr wrap="square" lIns="0" tIns="0" rIns="0" bIns="0" rtlCol="0" anchor="t"/>
           <a:lstStyle/>
           <a:p>
-            <a:pPr marL="0" indent="0">
+            <a:pPr indent="0" marL="0">
               <a:lnSpc>
                 <a:spcPct val="100000"/>
               </a:lnSpc>
@@ -15303,11 +15723,11 @@
           <a:bodyPr wrap="square" lIns="0" tIns="0" rIns="0" bIns="0" rtlCol="0" anchor="ctr"/>
           <a:lstStyle/>
           <a:p>
-            <a:pPr marL="0" indent="0" algn="ctr">
-              <a:buNone/>
-            </a:pPr>
-            <a:r>
-              <a:rPr lang="en-US" sz="900" b="1" kern="0" spc="100" dirty="0">
+            <a:pPr algn="ctr" indent="0" marL="0">
+              <a:buNone/>
+            </a:pPr>
+            <a:r>
+              <a:rPr lang="en-US" sz="900" b="1" spc="100" kern="0" dirty="0">
                 <a:solidFill>
                   <a:srgbClr val="5A05F4"/>
                 </a:solidFill>
@@ -15323,14 +15743,14 @@
       </p:sp>
       <p:pic>
         <p:nvPicPr>
-          <p:cNvPr id="8" name="Image 0" descr="preencoded.png"/>
+          <p:cNvPr id="8" name="Image 0" descr="preencoded.png">    </p:cNvPr>
           <p:cNvPicPr>
             <a:picLocks noChangeAspect="1"/>
           </p:cNvPicPr>
           <p:nvPr/>
         </p:nvPicPr>
         <p:blipFill>
-          <a:blip r:embed="rId3"/>
+          <a:blip r:embed="rId1"/>
           <a:stretch>
             <a:fillRect/>
           </a:stretch>
@@ -15408,7 +15828,7 @@
           <a:bodyPr wrap="square" lIns="0" tIns="0" rIns="0" bIns="0" rtlCol="0" anchor="ctr"/>
           <a:lstStyle/>
           <a:p>
-            <a:pPr marL="0" indent="0" algn="ctr">
+            <a:pPr algn="ctr" indent="0" marL="0">
               <a:buNone/>
             </a:pPr>
             <a:r>
@@ -15447,7 +15867,7 @@
           <a:bodyPr wrap="square" lIns="0" tIns="0" rIns="0" bIns="0" rtlCol="0" anchor="ctr"/>
           <a:lstStyle/>
           <a:p>
-            <a:pPr marL="0" indent="0">
+            <a:pPr indent="0" marL="0">
               <a:buNone/>
             </a:pPr>
             <a:r>
@@ -15486,7 +15906,7 @@
           <a:bodyPr wrap="square" lIns="0" tIns="0" rIns="0" bIns="0" rtlCol="0" anchor="t"/>
           <a:lstStyle/>
           <a:p>
-            <a:pPr marL="0" indent="0">
+            <a:pPr indent="0" marL="0">
               <a:lnSpc>
                 <a:spcPct val="108000"/>
               </a:lnSpc>
@@ -15570,7 +15990,7 @@
           <a:bodyPr wrap="square" lIns="0" tIns="0" rIns="0" bIns="0" rtlCol="0" anchor="ctr"/>
           <a:lstStyle/>
           <a:p>
-            <a:pPr marL="0" indent="0" algn="ctr">
+            <a:pPr algn="ctr" indent="0" marL="0">
               <a:buNone/>
             </a:pPr>
             <a:r>
@@ -15609,7 +16029,7 @@
           <a:bodyPr wrap="square" lIns="0" tIns="0" rIns="0" bIns="0" rtlCol="0" anchor="ctr"/>
           <a:lstStyle/>
           <a:p>
-            <a:pPr marL="0" indent="0">
+            <a:pPr indent="0" marL="0">
               <a:buNone/>
             </a:pPr>
             <a:r>
@@ -15648,7 +16068,7 @@
           <a:bodyPr wrap="square" lIns="0" tIns="0" rIns="0" bIns="0" rtlCol="0" anchor="t"/>
           <a:lstStyle/>
           <a:p>
-            <a:pPr marL="0" indent="0">
+            <a:pPr indent="0" marL="0">
               <a:lnSpc>
                 <a:spcPct val="108000"/>
               </a:lnSpc>
@@ -15732,7 +16152,7 @@
           <a:bodyPr wrap="square" lIns="0" tIns="0" rIns="0" bIns="0" rtlCol="0" anchor="ctr"/>
           <a:lstStyle/>
           <a:p>
-            <a:pPr marL="0" indent="0" algn="ctr">
+            <a:pPr algn="ctr" indent="0" marL="0">
               <a:buNone/>
             </a:pPr>
             <a:r>
@@ -15771,7 +16191,7 @@
           <a:bodyPr wrap="square" lIns="0" tIns="0" rIns="0" bIns="0" rtlCol="0" anchor="ctr"/>
           <a:lstStyle/>
           <a:p>
-            <a:pPr marL="0" indent="0">
+            <a:pPr indent="0" marL="0">
               <a:buNone/>
             </a:pPr>
             <a:r>
@@ -15810,7 +16230,7 @@
           <a:bodyPr wrap="square" lIns="0" tIns="0" rIns="0" bIns="0" rtlCol="0" anchor="t"/>
           <a:lstStyle/>
           <a:p>
-            <a:pPr marL="0" indent="0">
+            <a:pPr indent="0" marL="0">
               <a:lnSpc>
                 <a:spcPct val="108000"/>
               </a:lnSpc>
@@ -15879,7 +16299,7 @@
           <a:bodyPr wrap="square" lIns="0" tIns="0" rIns="0" bIns="0" rtlCol="0" anchor="ctr"/>
           <a:lstStyle/>
           <a:p>
-            <a:pPr marL="0" indent="0" algn="ctr">
+            <a:pPr algn="ctr" indent="0" marL="0">
               <a:buNone/>
             </a:pPr>
             <a:r>
@@ -15945,7 +16365,7 @@
           <a:bodyPr wrap="square" lIns="0" tIns="0" rIns="0" bIns="0" rtlCol="0" anchor="ctr"/>
           <a:lstStyle/>
           <a:p>
-            <a:pPr marL="0" indent="0" algn="ctr">
+            <a:pPr algn="ctr" indent="0" marL="0">
               <a:buNone/>
             </a:pPr>
             <a:r>
@@ -16004,7 +16424,7 @@
           <a:bodyPr wrap="square" lIns="0" tIns="0" rIns="0" bIns="0" rtlCol="0" anchor="ctr"/>
           <a:lstStyle/>
           <a:p>
-            <a:pPr marL="0" indent="0" algn="ctr">
+            <a:pPr algn="ctr" indent="0" marL="0">
               <a:buNone/>
             </a:pPr>
             <a:r>
@@ -16063,7 +16483,7 @@
           <a:bodyPr wrap="square" lIns="0" tIns="0" rIns="0" bIns="0" rtlCol="0" anchor="ctr"/>
           <a:lstStyle/>
           <a:p>
-            <a:pPr marL="0" indent="0" algn="ctr">
+            <a:pPr algn="ctr" indent="0" marL="0">
               <a:buNone/>
             </a:pPr>
             <a:r>
@@ -16122,7 +16542,7 @@
           <a:bodyPr wrap="square" lIns="0" tIns="0" rIns="0" bIns="0" rtlCol="0" anchor="ctr"/>
           <a:lstStyle/>
           <a:p>
-            <a:pPr marL="0" indent="0" algn="ctr">
+            <a:pPr algn="ctr" indent="0" marL="0">
               <a:buNone/>
             </a:pPr>
             <a:r>
@@ -16148,8 +16568,8 @@
         </p:nvSpPr>
         <p:spPr>
           <a:xfrm>
-            <a:off x="629072" y="4672584"/>
-            <a:ext cx="10864936" cy="1188720"/>
+            <a:off x="566928" y="4681728"/>
+            <a:ext cx="11064240" cy="1188720"/>
           </a:xfrm>
           <a:prstGeom prst="roundRect">
             <a:avLst>
@@ -16183,11 +16603,11 @@
           <a:bodyPr wrap="square" lIns="0" tIns="0" rIns="0" bIns="0" rtlCol="0" anchor="ctr"/>
           <a:lstStyle/>
           <a:p>
-            <a:pPr marL="0" indent="0">
-              <a:buNone/>
-            </a:pPr>
-            <a:r>
-              <a:rPr lang="en-US" sz="950" b="1" kern="0" spc="150" dirty="0">
+            <a:pPr indent="0" marL="0">
+              <a:buNone/>
+            </a:pPr>
+            <a:r>
+              <a:rPr lang="en-US" sz="950" b="1" spc="150" kern="0" dirty="0">
                 <a:solidFill>
                   <a:srgbClr val="FFFFFF"/>
                 </a:solidFill>
@@ -16222,7 +16642,7 @@
           <a:bodyPr wrap="square" lIns="0" tIns="0" rIns="0" bIns="0" rtlCol="0" anchor="ctr"/>
           <a:lstStyle/>
           <a:p>
-            <a:pPr marL="0" indent="0">
+            <a:pPr indent="0" marL="0">
               <a:lnSpc>
                 <a:spcPct val="112000"/>
               </a:lnSpc>
@@ -16245,7 +16665,7 @@
       </p:sp>
       <p:sp>
         <p:nvSpPr>
-          <p:cNvPr id="37" name="Slide Number Placeholder 0"/>
+          <p:cNvPr id="25" name="Slide Number Placeholder 0"/>
           <p:cNvSpPr>
             <a:spLocks noGrp="1"/>
           </p:cNvSpPr>
@@ -16263,7 +16683,7 @@
           </a:prstGeom>
           <a:extLst>
             <a:ext uri="{C572A759-6A51-4108-AA02-DFA0A04FC94B}">
-              <ma14:wrappingTextBoxFlag xmlns:ma14="http://schemas.microsoft.com/office/mac/drawingml/2011/main" xmlns="" val="0"/>
+              <ma14:wrappingTextBoxFlag xmlns:ma14="http://schemas.microsoft.com/office/mac/drawingml/2011/main" val="0"/>
             </a:ext>
           </a:extLst>
         </p:spPr>
@@ -16284,7 +16704,7 @@
           <a:p>
             <a:pPr algn="l"/>
             <a:fld id="{F7021451-1387-4CA6-816F-3879F97B5CBC}" type="slidenum">
-              <a:rPr lang="en-US" b="0"/>
+              <a:rPr b="0" lang="en-US"/>
               <a:t>18</a:t>
             </a:fld>
             <a:endParaRPr lang="en-US"/>
@@ -16359,7 +16779,7 @@
           <a:bodyPr wrap="square" lIns="0" tIns="0" rIns="0" bIns="0" rtlCol="0" anchor="ctr"/>
           <a:lstStyle/>
           <a:p>
-            <a:pPr marL="0" indent="0" algn="l">
+            <a:pPr algn="l" indent="0" marL="0">
               <a:buNone/>
             </a:pPr>
             <a:r>
@@ -16398,7 +16818,7 @@
           <a:bodyPr wrap="square" lIns="0" tIns="0" rIns="0" bIns="0" rtlCol="0" anchor="ctr"/>
           <a:lstStyle/>
           <a:p>
-            <a:pPr marL="0" indent="0">
+            <a:pPr indent="0" marL="0">
               <a:buNone/>
             </a:pPr>
             <a:r>
@@ -16437,7 +16857,7 @@
           <a:bodyPr wrap="square" lIns="0" tIns="0" rIns="0" bIns="0" rtlCol="0" anchor="t"/>
           <a:lstStyle/>
           <a:p>
-            <a:pPr marL="0" indent="0">
+            <a:pPr indent="0" marL="0">
               <a:lnSpc>
                 <a:spcPct val="100000"/>
               </a:lnSpc>
@@ -16506,11 +16926,11 @@
           <a:bodyPr wrap="square" lIns="0" tIns="0" rIns="0" bIns="0" rtlCol="0" anchor="ctr"/>
           <a:lstStyle/>
           <a:p>
-            <a:pPr marL="0" indent="0" algn="ctr">
-              <a:buNone/>
-            </a:pPr>
-            <a:r>
-              <a:rPr lang="en-US" sz="900" b="1" kern="0" spc="100" dirty="0">
+            <a:pPr algn="ctr" indent="0" marL="0">
+              <a:buNone/>
+            </a:pPr>
+            <a:r>
+              <a:rPr lang="en-US" sz="900" b="1" spc="100" kern="0" dirty="0">
                 <a:solidFill>
                   <a:srgbClr val="5A05F4"/>
                 </a:solidFill>
@@ -16526,14 +16946,14 @@
       </p:sp>
       <p:pic>
         <p:nvPicPr>
-          <p:cNvPr id="8" name="Image 0" descr="preencoded.png"/>
+          <p:cNvPr id="8" name="Image 0" descr="preencoded.png">    </p:cNvPr>
           <p:cNvPicPr>
             <a:picLocks noChangeAspect="1"/>
           </p:cNvPicPr>
           <p:nvPr/>
         </p:nvPicPr>
         <p:blipFill>
-          <a:blip r:embed="rId3"/>
+          <a:blip r:embed="rId1"/>
           <a:stretch>
             <a:fillRect/>
           </a:stretch>
@@ -16611,7 +17031,7 @@
           <a:bodyPr wrap="square" lIns="0" tIns="0" rIns="0" bIns="0" rtlCol="0" anchor="ctr"/>
           <a:lstStyle/>
           <a:p>
-            <a:pPr marL="0" indent="0" algn="ctr">
+            <a:pPr algn="ctr" indent="0" marL="0">
               <a:buNone/>
             </a:pPr>
             <a:r>
@@ -16650,7 +17070,7 @@
           <a:bodyPr wrap="square" lIns="0" tIns="0" rIns="0" bIns="0" rtlCol="0" anchor="ctr"/>
           <a:lstStyle/>
           <a:p>
-            <a:pPr marL="0" indent="0">
+            <a:pPr indent="0" marL="0">
               <a:buNone/>
             </a:pPr>
             <a:r>
@@ -16689,7 +17109,7 @@
           <a:bodyPr wrap="square" lIns="0" tIns="0" rIns="0" bIns="0" rtlCol="0" anchor="t"/>
           <a:lstStyle/>
           <a:p>
-            <a:pPr marL="0" indent="0">
+            <a:pPr indent="0" marL="0">
               <a:lnSpc>
                 <a:spcPct val="108000"/>
               </a:lnSpc>
@@ -16773,7 +17193,7 @@
           <a:bodyPr wrap="square" lIns="0" tIns="0" rIns="0" bIns="0" rtlCol="0" anchor="ctr"/>
           <a:lstStyle/>
           <a:p>
-            <a:pPr marL="0" indent="0" algn="ctr">
+            <a:pPr algn="ctr" indent="0" marL="0">
               <a:buNone/>
             </a:pPr>
             <a:r>
@@ -16812,7 +17232,7 @@
           <a:bodyPr wrap="square" lIns="0" tIns="0" rIns="0" bIns="0" rtlCol="0" anchor="ctr"/>
           <a:lstStyle/>
           <a:p>
-            <a:pPr marL="0" indent="0">
+            <a:pPr indent="0" marL="0">
               <a:buNone/>
             </a:pPr>
             <a:r>
@@ -16851,7 +17271,7 @@
           <a:bodyPr wrap="square" lIns="0" tIns="0" rIns="0" bIns="0" rtlCol="0" anchor="t"/>
           <a:lstStyle/>
           <a:p>
-            <a:pPr marL="0" indent="0">
+            <a:pPr indent="0" marL="0">
               <a:lnSpc>
                 <a:spcPct val="108000"/>
               </a:lnSpc>
@@ -16881,7 +17301,7 @@
         <p:spPr>
           <a:xfrm>
             <a:off x="7973568" y="1920240"/>
-            <a:ext cx="3651504" cy="2103120"/>
+            <a:ext cx="3520440" cy="2103120"/>
           </a:xfrm>
           <a:prstGeom prst="roundRect">
             <a:avLst>
@@ -16935,7 +17355,7 @@
           <a:bodyPr wrap="square" lIns="0" tIns="0" rIns="0" bIns="0" rtlCol="0" anchor="ctr"/>
           <a:lstStyle/>
           <a:p>
-            <a:pPr marL="0" indent="0" algn="ctr">
+            <a:pPr algn="ctr" indent="0" marL="0">
               <a:buNone/>
             </a:pPr>
             <a:r>
@@ -16974,7 +17394,7 @@
           <a:bodyPr wrap="square" lIns="0" tIns="0" rIns="0" bIns="0" rtlCol="0" anchor="ctr"/>
           <a:lstStyle/>
           <a:p>
-            <a:pPr marL="0" indent="0">
+            <a:pPr indent="0" marL="0">
               <a:buNone/>
             </a:pPr>
             <a:r>
@@ -17013,7 +17433,7 @@
           <a:bodyPr wrap="square" lIns="0" tIns="0" rIns="0" bIns="0" rtlCol="0" anchor="t"/>
           <a:lstStyle/>
           <a:p>
-            <a:pPr marL="0" indent="0">
+            <a:pPr indent="0" marL="0">
               <a:lnSpc>
                 <a:spcPct val="108000"/>
               </a:lnSpc>
@@ -17082,11 +17502,11 @@
           <a:bodyPr wrap="square" lIns="0" tIns="0" rIns="0" bIns="0" rtlCol="0" anchor="ctr"/>
           <a:lstStyle/>
           <a:p>
-            <a:pPr marL="0" indent="0">
-              <a:buNone/>
-            </a:pPr>
-            <a:r>
-              <a:rPr lang="en-US" sz="950" b="1" kern="0" spc="150" dirty="0">
+            <a:pPr indent="0" marL="0">
+              <a:buNone/>
+            </a:pPr>
+            <a:r>
+              <a:rPr lang="en-US" sz="950" b="1" spc="150" kern="0" dirty="0">
                 <a:solidFill>
                   <a:srgbClr val="106B41"/>
                 </a:solidFill>
@@ -17121,7 +17541,7 @@
           <a:bodyPr wrap="square" lIns="0" tIns="0" rIns="0" bIns="0" rtlCol="0" anchor="ctr"/>
           <a:lstStyle/>
           <a:p>
-            <a:pPr marL="0" indent="0">
+            <a:pPr indent="0" marL="0">
               <a:lnSpc>
                 <a:spcPct val="112000"/>
               </a:lnSpc>
@@ -17144,7 +17564,7 @@
       </p:sp>
       <p:sp>
         <p:nvSpPr>
-          <p:cNvPr id="27" name="Slide Number Placeholder 0"/>
+          <p:cNvPr id="25" name="Slide Number Placeholder 0"/>
           <p:cNvSpPr>
             <a:spLocks noGrp="1"/>
           </p:cNvSpPr>
@@ -17162,7 +17582,7 @@
           </a:prstGeom>
           <a:extLst>
             <a:ext uri="{C572A759-6A51-4108-AA02-DFA0A04FC94B}">
-              <ma14:wrappingTextBoxFlag xmlns:ma14="http://schemas.microsoft.com/office/mac/drawingml/2011/main" xmlns="" val="0"/>
+              <ma14:wrappingTextBoxFlag xmlns:ma14="http://schemas.microsoft.com/office/mac/drawingml/2011/main" val="0"/>
             </a:ext>
           </a:extLst>
         </p:spPr>
@@ -17183,7 +17603,7 @@
           <a:p>
             <a:pPr algn="l"/>
             <a:fld id="{F7021451-1387-4CA6-816F-3879F97B5CBC}" type="slidenum">
-              <a:rPr lang="en-US" b="0"/>
+              <a:rPr b="0" lang="en-US"/>
               <a:t>19</a:t>
             </a:fld>
             <a:endParaRPr lang="en-US"/>
@@ -17258,7 +17678,7 @@
           <a:bodyPr wrap="square" lIns="0" tIns="0" rIns="0" bIns="0" rtlCol="0" anchor="ctr"/>
           <a:lstStyle/>
           <a:p>
-            <a:pPr marL="0" indent="0">
+            <a:pPr indent="0" marL="0">
               <a:buNone/>
             </a:pPr>
             <a:r>
@@ -17297,7 +17717,7 @@
           <a:bodyPr wrap="square" lIns="0" tIns="0" rIns="0" bIns="0" rtlCol="0" anchor="t"/>
           <a:lstStyle/>
           <a:p>
-            <a:pPr marL="0" indent="0">
+            <a:pPr indent="0" marL="0">
               <a:lnSpc>
                 <a:spcPct val="100000"/>
               </a:lnSpc>
@@ -17366,11 +17786,11 @@
           <a:bodyPr wrap="square" lIns="0" tIns="0" rIns="0" bIns="0" rtlCol="0" anchor="ctr"/>
           <a:lstStyle/>
           <a:p>
-            <a:pPr marL="0" indent="0" algn="ctr">
-              <a:buNone/>
-            </a:pPr>
-            <a:r>
-              <a:rPr lang="en-US" sz="900" b="1" kern="0" spc="100" dirty="0">
+            <a:pPr algn="ctr" indent="0" marL="0">
+              <a:buNone/>
+            </a:pPr>
+            <a:r>
+              <a:rPr lang="en-US" sz="900" b="1" spc="100" kern="0" dirty="0">
                 <a:solidFill>
                   <a:srgbClr val="5A05F4"/>
                 </a:solidFill>
@@ -17386,14 +17806,14 @@
       </p:sp>
       <p:pic>
         <p:nvPicPr>
-          <p:cNvPr id="7" name="Image 0" descr="preencoded.png"/>
+          <p:cNvPr id="7" name="Image 0" descr="preencoded.png">    </p:cNvPr>
           <p:cNvPicPr>
             <a:picLocks noChangeAspect="1"/>
           </p:cNvPicPr>
           <p:nvPr/>
         </p:nvPicPr>
         <p:blipFill>
-          <a:blip r:embed="rId3"/>
+          <a:blip r:embed="rId1"/>
           <a:stretch>
             <a:fillRect/>
           </a:stretch>
@@ -17471,7 +17891,7 @@
           <a:bodyPr wrap="square" lIns="0" tIns="0" rIns="0" bIns="0" rtlCol="0" anchor="ctr"/>
           <a:lstStyle/>
           <a:p>
-            <a:pPr marL="0" indent="0" algn="ctr">
+            <a:pPr algn="ctr" indent="0" marL="0">
               <a:buNone/>
             </a:pPr>
             <a:r>
@@ -17510,7 +17930,7 @@
           <a:bodyPr wrap="square" lIns="0" tIns="0" rIns="0" bIns="0" rtlCol="0" anchor="ctr"/>
           <a:lstStyle/>
           <a:p>
-            <a:pPr marL="0" indent="0">
+            <a:pPr indent="0" marL="0">
               <a:buNone/>
             </a:pPr>
             <a:r>
@@ -17549,7 +17969,7 @@
           <a:bodyPr wrap="square" lIns="0" tIns="0" rIns="0" bIns="0" rtlCol="0" anchor="t"/>
           <a:lstStyle/>
           <a:p>
-            <a:pPr marL="0" indent="0">
+            <a:pPr indent="0" marL="0">
               <a:lnSpc>
                 <a:spcPct val="108000"/>
               </a:lnSpc>
@@ -17633,7 +18053,7 @@
           <a:bodyPr wrap="square" lIns="0" tIns="0" rIns="0" bIns="0" rtlCol="0" anchor="ctr"/>
           <a:lstStyle/>
           <a:p>
-            <a:pPr marL="0" indent="0" algn="ctr">
+            <a:pPr algn="ctr" indent="0" marL="0">
               <a:buNone/>
             </a:pPr>
             <a:r>
@@ -17672,7 +18092,7 @@
           <a:bodyPr wrap="square" lIns="0" tIns="0" rIns="0" bIns="0" rtlCol="0" anchor="ctr"/>
           <a:lstStyle/>
           <a:p>
-            <a:pPr marL="0" indent="0">
+            <a:pPr indent="0" marL="0">
               <a:buNone/>
             </a:pPr>
             <a:r>
@@ -17711,7 +18131,7 @@
           <a:bodyPr wrap="square" lIns="0" tIns="0" rIns="0" bIns="0" rtlCol="0" anchor="t"/>
           <a:lstStyle/>
           <a:p>
-            <a:pPr marL="0" indent="0">
+            <a:pPr indent="0" marL="0">
               <a:lnSpc>
                 <a:spcPct val="108000"/>
               </a:lnSpc>
@@ -17795,7 +18215,7 @@
           <a:bodyPr wrap="square" lIns="0" tIns="0" rIns="0" bIns="0" rtlCol="0" anchor="ctr"/>
           <a:lstStyle/>
           <a:p>
-            <a:pPr marL="0" indent="0" algn="ctr">
+            <a:pPr algn="ctr" indent="0" marL="0">
               <a:buNone/>
             </a:pPr>
             <a:r>
@@ -17834,7 +18254,7 @@
           <a:bodyPr wrap="square" lIns="0" tIns="0" rIns="0" bIns="0" rtlCol="0" anchor="ctr"/>
           <a:lstStyle/>
           <a:p>
-            <a:pPr marL="0" indent="0">
+            <a:pPr indent="0" marL="0">
               <a:buNone/>
             </a:pPr>
             <a:r>
@@ -17873,7 +18293,7 @@
           <a:bodyPr wrap="square" lIns="0" tIns="0" rIns="0" bIns="0" rtlCol="0" anchor="t"/>
           <a:lstStyle/>
           <a:p>
-            <a:pPr marL="0" indent="0">
+            <a:pPr indent="0" marL="0">
               <a:lnSpc>
                 <a:spcPct val="108000"/>
               </a:lnSpc>
@@ -17957,7 +18377,7 @@
           <a:bodyPr wrap="square" lIns="0" tIns="0" rIns="0" bIns="0" rtlCol="0" anchor="ctr"/>
           <a:lstStyle/>
           <a:p>
-            <a:pPr marL="0" indent="0" algn="ctr">
+            <a:pPr algn="ctr" indent="0" marL="0">
               <a:buNone/>
             </a:pPr>
             <a:r>
@@ -17996,7 +18416,7 @@
           <a:bodyPr wrap="square" lIns="0" tIns="0" rIns="0" bIns="0" rtlCol="0" anchor="ctr"/>
           <a:lstStyle/>
           <a:p>
-            <a:pPr marL="0" indent="0">
+            <a:pPr indent="0" marL="0">
               <a:buNone/>
             </a:pPr>
             <a:r>
@@ -18035,7 +18455,7 @@
           <a:bodyPr wrap="square" lIns="0" tIns="0" rIns="0" bIns="0" rtlCol="0" anchor="t"/>
           <a:lstStyle/>
           <a:p>
-            <a:pPr marL="0" indent="0">
+            <a:pPr indent="0" marL="0">
               <a:lnSpc>
                 <a:spcPct val="108000"/>
               </a:lnSpc>
@@ -18119,7 +18539,7 @@
           <a:bodyPr wrap="square" lIns="0" tIns="0" rIns="0" bIns="0" rtlCol="0" anchor="ctr"/>
           <a:lstStyle/>
           <a:p>
-            <a:pPr marL="0" indent="0" algn="ctr">
+            <a:pPr algn="ctr" indent="0" marL="0">
               <a:buNone/>
             </a:pPr>
             <a:r>
@@ -18158,7 +18578,7 @@
           <a:bodyPr wrap="square" lIns="0" tIns="0" rIns="0" bIns="0" rtlCol="0" anchor="ctr"/>
           <a:lstStyle/>
           <a:p>
-            <a:pPr marL="0" indent="0">
+            <a:pPr indent="0" marL="0">
               <a:buNone/>
             </a:pPr>
             <a:r>
@@ -18197,7 +18617,7 @@
           <a:bodyPr wrap="square" lIns="0" tIns="0" rIns="0" bIns="0" rtlCol="0" anchor="t"/>
           <a:lstStyle/>
           <a:p>
-            <a:pPr marL="0" indent="0">
+            <a:pPr indent="0" marL="0">
               <a:lnSpc>
                 <a:spcPct val="108000"/>
               </a:lnSpc>
@@ -18220,7 +18640,7 @@
       </p:sp>
       <p:sp>
         <p:nvSpPr>
-          <p:cNvPr id="33" name="Slide Number Placeholder 0"/>
+          <p:cNvPr id="25" name="Slide Number Placeholder 0"/>
           <p:cNvSpPr>
             <a:spLocks noGrp="1"/>
           </p:cNvSpPr>
@@ -18238,7 +18658,7 @@
           </a:prstGeom>
           <a:extLst>
             <a:ext uri="{C572A759-6A51-4108-AA02-DFA0A04FC94B}">
-              <ma14:wrappingTextBoxFlag xmlns:ma14="http://schemas.microsoft.com/office/mac/drawingml/2011/main" xmlns="" val="0"/>
+              <ma14:wrappingTextBoxFlag xmlns:ma14="http://schemas.microsoft.com/office/mac/drawingml/2011/main" val="0"/>
             </a:ext>
           </a:extLst>
         </p:spPr>
@@ -18259,7 +18679,7 @@
           <a:p>
             <a:pPr algn="l"/>
             <a:fld id="{F7021451-1387-4CA6-816F-3879F97B5CBC}" type="slidenum">
-              <a:rPr lang="en-US" b="0"/>
+              <a:rPr b="0" lang="en-US"/>
               <a:t>2</a:t>
             </a:fld>
             <a:endParaRPr lang="en-US"/>
@@ -18334,7 +18754,7 @@
           <a:bodyPr wrap="square" lIns="0" tIns="0" rIns="0" bIns="0" rtlCol="0" anchor="ctr"/>
           <a:lstStyle/>
           <a:p>
-            <a:pPr marL="0" indent="0" algn="l">
+            <a:pPr algn="l" indent="0" marL="0">
               <a:buNone/>
             </a:pPr>
             <a:r>
@@ -18373,7 +18793,7 @@
           <a:bodyPr wrap="square" lIns="0" tIns="0" rIns="0" bIns="0" rtlCol="0" anchor="ctr"/>
           <a:lstStyle/>
           <a:p>
-            <a:pPr marL="0" indent="0">
+            <a:pPr indent="0" marL="0">
               <a:buNone/>
             </a:pPr>
             <a:r>
@@ -18439,11 +18859,11 @@
           <a:bodyPr wrap="square" lIns="0" tIns="0" rIns="0" bIns="0" rtlCol="0" anchor="ctr"/>
           <a:lstStyle/>
           <a:p>
-            <a:pPr marL="0" indent="0" algn="ctr">
-              <a:buNone/>
-            </a:pPr>
-            <a:r>
-              <a:rPr lang="en-US" sz="900" b="1" kern="0" spc="100" dirty="0">
+            <a:pPr algn="ctr" indent="0" marL="0">
+              <a:buNone/>
+            </a:pPr>
+            <a:r>
+              <a:rPr lang="en-US" sz="900" b="1" spc="100" kern="0" dirty="0">
                 <a:solidFill>
                   <a:srgbClr val="5A05F4"/>
                 </a:solidFill>
@@ -18459,14 +18879,14 @@
       </p:sp>
       <p:pic>
         <p:nvPicPr>
-          <p:cNvPr id="7" name="Image 0" descr="preencoded.png"/>
+          <p:cNvPr id="7" name="Image 0" descr="preencoded.png">    </p:cNvPr>
           <p:cNvPicPr>
             <a:picLocks noChangeAspect="1"/>
           </p:cNvPicPr>
           <p:nvPr/>
         </p:nvPicPr>
         <p:blipFill>
-          <a:blip r:embed="rId3"/>
+          <a:blip r:embed="rId1"/>
           <a:stretch>
             <a:fillRect/>
           </a:stretch>
@@ -18524,7 +18944,7 @@
           <a:bodyPr wrap="square" lIns="0" tIns="0" rIns="0" bIns="0" rtlCol="0" anchor="ctr"/>
           <a:lstStyle/>
           <a:p>
-            <a:pPr marL="0" indent="0">
+            <a:pPr indent="0" marL="0">
               <a:buNone/>
             </a:pPr>
             <a:r>
@@ -18563,7 +18983,7 @@
           <a:bodyPr wrap="square" lIns="0" tIns="0" rIns="0" bIns="0" rtlCol="0" anchor="t"/>
           <a:lstStyle/>
           <a:p>
-            <a:pPr marL="0" indent="0">
+            <a:pPr indent="0" marL="0">
               <a:lnSpc>
                 <a:spcPct val="108000"/>
               </a:lnSpc>
@@ -18627,7 +19047,7 @@
           <a:bodyPr wrap="square" lIns="0" tIns="0" rIns="0" bIns="0" rtlCol="0" anchor="ctr"/>
           <a:lstStyle/>
           <a:p>
-            <a:pPr marL="0" indent="0">
+            <a:pPr indent="0" marL="0">
               <a:buNone/>
             </a:pPr>
             <a:r>
@@ -18666,7 +19086,7 @@
           <a:bodyPr wrap="square" lIns="0" tIns="0" rIns="0" bIns="0" rtlCol="0" anchor="t"/>
           <a:lstStyle/>
           <a:p>
-            <a:pPr marL="0" indent="0">
+            <a:pPr indent="0" marL="0">
               <a:lnSpc>
                 <a:spcPct val="108000"/>
               </a:lnSpc>
@@ -18716,14 +19136,34 @@
       </p:sp>
       <p:sp>
         <p:nvSpPr>
-          <p:cNvPr id="15" name="Text 12"/>
-          <p:cNvSpPr/>
-          <p:nvPr/>
-        </p:nvSpPr>
-        <p:spPr>
-          <a:xfrm>
-            <a:off x="786384" y="4014216"/>
-            <a:ext cx="10625328" cy="219456"/>
+          <p:cNvPr id="15" name="Shape 12"/>
+          <p:cNvSpPr/>
+          <p:nvPr/>
+        </p:nvSpPr>
+        <p:spPr>
+          <a:xfrm>
+            <a:off x="749808" y="4279392"/>
+            <a:ext cx="310896" cy="310896"/>
+          </a:xfrm>
+          <a:prstGeom prst="ellipse">
+            <a:avLst/>
+          </a:prstGeom>
+          <a:solidFill>
+            <a:srgbClr val="1A4FBF"/>
+          </a:solidFill>
+          <a:ln/>
+        </p:spPr>
+      </p:sp>
+      <p:sp>
+        <p:nvSpPr>
+          <p:cNvPr id="16" name="Text 13"/>
+          <p:cNvSpPr/>
+          <p:nvPr/>
+        </p:nvSpPr>
+        <p:spPr>
+          <a:xfrm>
+            <a:off x="749808" y="4279392"/>
+            <a:ext cx="310896" cy="310896"/>
           </a:xfrm>
           <a:prstGeom prst="rect">
             <a:avLst/>
@@ -18735,11 +19175,50 @@
           <a:bodyPr wrap="square" lIns="0" tIns="0" rIns="0" bIns="0" rtlCol="0" anchor="ctr"/>
           <a:lstStyle/>
           <a:p>
-            <a:pPr marL="0" indent="0">
-              <a:buNone/>
-            </a:pPr>
-            <a:r>
-              <a:rPr lang="en-US" sz="950" b="1" kern="0" spc="150" dirty="0">
+            <a:pPr algn="ctr" indent="0" marL="0">
+              <a:buNone/>
+            </a:pPr>
+            <a:r>
+              <a:rPr lang="en-US" sz="1200" b="1" dirty="0">
+                <a:solidFill>
+                  <a:srgbClr val="FFFFFF"/>
+                </a:solidFill>
+                <a:latin typeface="Arial" pitchFamily="34" charset="0"/>
+                <a:ea typeface="Arial" pitchFamily="34" charset="-122"/>
+                <a:cs typeface="Arial" pitchFamily="34" charset="-120"/>
+              </a:rPr>
+              <a:t>★</a:t>
+            </a:r>
+            <a:endParaRPr lang="en-US" sz="1200" dirty="0"/>
+          </a:p>
+        </p:txBody>
+      </p:sp>
+      <p:sp>
+        <p:nvSpPr>
+          <p:cNvPr id="17" name="Text 14"/>
+          <p:cNvSpPr/>
+          <p:nvPr/>
+        </p:nvSpPr>
+        <p:spPr>
+          <a:xfrm>
+            <a:off x="1243584" y="4014216"/>
+            <a:ext cx="10168128" cy="219456"/>
+          </a:xfrm>
+          <a:prstGeom prst="rect">
+            <a:avLst/>
+          </a:prstGeom>
+          <a:noFill/>
+          <a:ln/>
+        </p:spPr>
+        <p:txBody>
+          <a:bodyPr wrap="square" lIns="0" tIns="0" rIns="0" bIns="0" rtlCol="0" anchor="ctr"/>
+          <a:lstStyle/>
+          <a:p>
+            <a:pPr indent="0" marL="0">
+              <a:buNone/>
+            </a:pPr>
+            <a:r>
+              <a:rPr lang="en-US" sz="950" b="1" spc="150" kern="0" dirty="0">
                 <a:solidFill>
                   <a:srgbClr val="1A4FBF"/>
                 </a:solidFill>
@@ -18747,7 +19226,7 @@
                 <a:ea typeface="Courier New" pitchFamily="34" charset="-122"/>
                 <a:cs typeface="Courier New" pitchFamily="34" charset="-120"/>
               </a:rPr>
-              <a:t>ЛАЙФХАК</a:t>
+              <a:t>ПОРАДА</a:t>
             </a:r>
             <a:endParaRPr lang="en-US" sz="950" dirty="0"/>
           </a:p>
@@ -18755,14 +19234,14 @@
       </p:sp>
       <p:sp>
         <p:nvSpPr>
-          <p:cNvPr id="16" name="Text 13"/>
-          <p:cNvSpPr/>
-          <p:nvPr/>
-        </p:nvSpPr>
-        <p:spPr>
-          <a:xfrm>
-            <a:off x="786384" y="4270248"/>
-            <a:ext cx="10625328" cy="585216"/>
+          <p:cNvPr id="18" name="Text 15"/>
+          <p:cNvSpPr/>
+          <p:nvPr/>
+        </p:nvSpPr>
+        <p:spPr>
+          <a:xfrm>
+            <a:off x="1243584" y="4270248"/>
+            <a:ext cx="10168128" cy="585216"/>
           </a:xfrm>
           <a:prstGeom prst="rect">
             <a:avLst/>
@@ -18774,7 +19253,7 @@
           <a:bodyPr wrap="square" lIns="0" tIns="0" rIns="0" bIns="0" rtlCol="0" anchor="ctr"/>
           <a:lstStyle/>
           <a:p>
-            <a:pPr marL="0" indent="0">
+            <a:pPr indent="0" marL="0">
               <a:lnSpc>
                 <a:spcPct val="112000"/>
               </a:lnSpc>
@@ -18797,7 +19276,7 @@
       </p:sp>
       <p:sp>
         <p:nvSpPr>
-          <p:cNvPr id="17" name="Shape 14"/>
+          <p:cNvPr id="19" name="Shape 16"/>
           <p:cNvSpPr/>
           <p:nvPr/>
         </p:nvSpPr>
@@ -18824,7 +19303,7 @@
       </p:sp>
       <p:sp>
         <p:nvSpPr>
-          <p:cNvPr id="18" name="Text 15"/>
+          <p:cNvPr id="20" name="Text 17"/>
           <p:cNvSpPr/>
           <p:nvPr/>
         </p:nvSpPr>
@@ -18843,7 +19322,7 @@
           <a:bodyPr wrap="square" lIns="0" tIns="0" rIns="0" bIns="0" rtlCol="0" anchor="ctr"/>
           <a:lstStyle/>
           <a:p>
-            <a:pPr marL="0" indent="0">
+            <a:pPr indent="0" marL="0">
               <a:lnSpc>
                 <a:spcPct val="112000"/>
               </a:lnSpc>
@@ -18884,7 +19363,7 @@
           </a:prstGeom>
           <a:extLst>
             <a:ext uri="{C572A759-6A51-4108-AA02-DFA0A04FC94B}">
-              <ma14:wrappingTextBoxFlag xmlns:ma14="http://schemas.microsoft.com/office/mac/drawingml/2011/main" xmlns="" val="0"/>
+              <ma14:wrappingTextBoxFlag xmlns:ma14="http://schemas.microsoft.com/office/mac/drawingml/2011/main" val="0"/>
             </a:ext>
           </a:extLst>
         </p:spPr>
@@ -18905,7 +19384,7 @@
           <a:p>
             <a:pPr algn="l"/>
             <a:fld id="{F7021451-1387-4CA6-816F-3879F97B5CBC}" type="slidenum">
-              <a:rPr lang="en-US" b="0"/>
+              <a:rPr b="0" lang="en-US"/>
               <a:t>20</a:t>
             </a:fld>
             <a:endParaRPr lang="en-US"/>
@@ -18958,11 +19437,11 @@
           <a:bodyPr wrap="square" lIns="0" tIns="0" rIns="0" bIns="0" rtlCol="0" anchor="ctr"/>
           <a:lstStyle/>
           <a:p>
-            <a:pPr marL="0" indent="0">
-              <a:buNone/>
-            </a:pPr>
-            <a:r>
-              <a:rPr lang="en-US" sz="1200" b="1" kern="0" spc="400" dirty="0">
+            <a:pPr indent="0" marL="0">
+              <a:buNone/>
+            </a:pPr>
+            <a:r>
+              <a:rPr lang="en-US" sz="1200" b="1" spc="400" kern="0" dirty="0">
                 <a:solidFill>
                   <a:srgbClr val="FFFFFF"/>
                 </a:solidFill>
@@ -18997,7 +19476,7 @@
           <a:bodyPr wrap="square" lIns="0" tIns="0" rIns="0" bIns="0" rtlCol="0" anchor="ctr"/>
           <a:lstStyle/>
           <a:p>
-            <a:pPr marL="0" indent="0">
+            <a:pPr indent="0" marL="0">
               <a:buNone/>
             </a:pPr>
             <a:r>
@@ -19036,7 +19515,7 @@
           <a:bodyPr wrap="square" lIns="0" tIns="0" rIns="0" bIns="0" rtlCol="0" anchor="t"/>
           <a:lstStyle/>
           <a:p>
-            <a:pPr marL="0" indent="0">
+            <a:pPr indent="0" marL="0">
               <a:buNone/>
             </a:pPr>
             <a:r>
@@ -19097,7 +19576,7 @@
           <a:bodyPr wrap="square" lIns="0" tIns="0" rIns="0" bIns="0" rtlCol="0" anchor="ctr"/>
           <a:lstStyle/>
           <a:p>
-            <a:pPr marL="0" indent="0" algn="ctr">
+            <a:pPr algn="ctr" indent="0" marL="0">
               <a:buNone/>
             </a:pPr>
             <a:r>
@@ -19183,7 +19662,7 @@
           <a:bodyPr wrap="square" lIns="0" tIns="0" rIns="0" bIns="0" rtlCol="0" anchor="ctr"/>
           <a:lstStyle/>
           <a:p>
-            <a:pPr marL="0" indent="0">
+            <a:pPr indent="0" marL="0">
               <a:buNone/>
             </a:pPr>
             <a:r>
@@ -19244,11 +19723,11 @@
           <a:bodyPr wrap="square" lIns="0" tIns="0" rIns="0" bIns="0" rtlCol="0" anchor="ctr"/>
           <a:lstStyle/>
           <a:p>
-            <a:pPr marL="0" indent="0" algn="ctr">
-              <a:buNone/>
-            </a:pPr>
-            <a:r>
-              <a:rPr lang="en-US" sz="900" b="1" kern="0" spc="100" dirty="0">
+            <a:pPr algn="ctr" indent="0" marL="0">
+              <a:buNone/>
+            </a:pPr>
+            <a:r>
+              <a:rPr lang="en-US" sz="900" b="1" spc="100" kern="0" dirty="0">
                 <a:solidFill>
                   <a:srgbClr val="FFFFFF"/>
                 </a:solidFill>
@@ -19264,14 +19743,14 @@
       </p:sp>
       <p:pic>
         <p:nvPicPr>
-          <p:cNvPr id="6" name="Image 0" descr="preencoded.png"/>
+          <p:cNvPr id="6" name="Image 0" descr="preencoded.png">    </p:cNvPr>
           <p:cNvPicPr>
             <a:picLocks noChangeAspect="1"/>
           </p:cNvPicPr>
           <p:nvPr/>
         </p:nvPicPr>
         <p:blipFill>
-          <a:blip r:embed="rId3"/>
+          <a:blip r:embed="rId1"/>
           <a:stretch>
             <a:fillRect/>
           </a:stretch>
@@ -19349,7 +19828,7 @@
           <a:bodyPr wrap="square" lIns="0" tIns="0" rIns="0" bIns="0" rtlCol="0" anchor="ctr"/>
           <a:lstStyle/>
           <a:p>
-            <a:pPr marL="0" indent="0" algn="ctr">
+            <a:pPr algn="ctr" indent="0" marL="0">
               <a:buNone/>
             </a:pPr>
             <a:r>
@@ -19388,7 +19867,7 @@
           <a:bodyPr wrap="square" lIns="0" tIns="0" rIns="0" bIns="0" rtlCol="0" anchor="ctr"/>
           <a:lstStyle/>
           <a:p>
-            <a:pPr marL="0" indent="0">
+            <a:pPr indent="0" marL="0">
               <a:buNone/>
             </a:pPr>
             <a:r>
@@ -19427,7 +19906,7 @@
           <a:bodyPr wrap="square" lIns="0" tIns="0" rIns="0" bIns="0" rtlCol="0" anchor="t"/>
           <a:lstStyle/>
           <a:p>
-            <a:pPr marL="0" indent="0">
+            <a:pPr indent="0" marL="0">
               <a:lnSpc>
                 <a:spcPct val="108000"/>
               </a:lnSpc>
@@ -19511,7 +19990,7 @@
           <a:bodyPr wrap="square" lIns="0" tIns="0" rIns="0" bIns="0" rtlCol="0" anchor="ctr"/>
           <a:lstStyle/>
           <a:p>
-            <a:pPr marL="0" indent="0" algn="ctr">
+            <a:pPr algn="ctr" indent="0" marL="0">
               <a:buNone/>
             </a:pPr>
             <a:r>
@@ -19550,7 +20029,7 @@
           <a:bodyPr wrap="square" lIns="0" tIns="0" rIns="0" bIns="0" rtlCol="0" anchor="ctr"/>
           <a:lstStyle/>
           <a:p>
-            <a:pPr marL="0" indent="0">
+            <a:pPr indent="0" marL="0">
               <a:buNone/>
             </a:pPr>
             <a:r>
@@ -19589,7 +20068,7 @@
           <a:bodyPr wrap="square" lIns="0" tIns="0" rIns="0" bIns="0" rtlCol="0" anchor="t"/>
           <a:lstStyle/>
           <a:p>
-            <a:pPr marL="0" indent="0">
+            <a:pPr indent="0" marL="0">
               <a:lnSpc>
                 <a:spcPct val="108000"/>
               </a:lnSpc>
@@ -19673,7 +20152,7 @@
           <a:bodyPr wrap="square" lIns="0" tIns="0" rIns="0" bIns="0" rtlCol="0" anchor="ctr"/>
           <a:lstStyle/>
           <a:p>
-            <a:pPr marL="0" indent="0" algn="ctr">
+            <a:pPr algn="ctr" indent="0" marL="0">
               <a:buNone/>
             </a:pPr>
             <a:r>
@@ -19712,7 +20191,7 @@
           <a:bodyPr wrap="square" lIns="0" tIns="0" rIns="0" bIns="0" rtlCol="0" anchor="ctr"/>
           <a:lstStyle/>
           <a:p>
-            <a:pPr marL="0" indent="0">
+            <a:pPr indent="0" marL="0">
               <a:buNone/>
             </a:pPr>
             <a:r>
@@ -19751,7 +20230,7 @@
           <a:bodyPr wrap="square" lIns="0" tIns="0" rIns="0" bIns="0" rtlCol="0" anchor="t"/>
           <a:lstStyle/>
           <a:p>
-            <a:pPr marL="0" indent="0">
+            <a:pPr indent="0" marL="0">
               <a:lnSpc>
                 <a:spcPct val="108000"/>
               </a:lnSpc>
@@ -19835,7 +20314,7 @@
           <a:bodyPr wrap="square" lIns="0" tIns="0" rIns="0" bIns="0" rtlCol="0" anchor="ctr"/>
           <a:lstStyle/>
           <a:p>
-            <a:pPr marL="0" indent="0" algn="ctr">
+            <a:pPr algn="ctr" indent="0" marL="0">
               <a:buNone/>
             </a:pPr>
             <a:r>
@@ -19874,7 +20353,7 @@
           <a:bodyPr wrap="square" lIns="0" tIns="0" rIns="0" bIns="0" rtlCol="0" anchor="ctr"/>
           <a:lstStyle/>
           <a:p>
-            <a:pPr marL="0" indent="0">
+            <a:pPr indent="0" marL="0">
               <a:buNone/>
             </a:pPr>
             <a:r>
@@ -19913,7 +20392,7 @@
           <a:bodyPr wrap="square" lIns="0" tIns="0" rIns="0" bIns="0" rtlCol="0" anchor="t"/>
           <a:lstStyle/>
           <a:p>
-            <a:pPr marL="0" indent="0">
+            <a:pPr indent="0" marL="0">
               <a:lnSpc>
                 <a:spcPct val="108000"/>
               </a:lnSpc>
@@ -19958,14 +20437,34 @@
       </p:sp>
       <p:sp>
         <p:nvSpPr>
-          <p:cNvPr id="28" name="Text 25"/>
-          <p:cNvSpPr/>
-          <p:nvPr/>
-        </p:nvSpPr>
-        <p:spPr>
-          <a:xfrm>
-            <a:off x="786384" y="5202936"/>
-            <a:ext cx="10625328" cy="219456"/>
+          <p:cNvPr id="28" name="Shape 25"/>
+          <p:cNvSpPr/>
+          <p:nvPr/>
+        </p:nvSpPr>
+        <p:spPr>
+          <a:xfrm>
+            <a:off x="749808" y="5445252"/>
+            <a:ext cx="310896" cy="310896"/>
+          </a:xfrm>
+          <a:prstGeom prst="ellipse">
+            <a:avLst/>
+          </a:prstGeom>
+          <a:solidFill>
+            <a:srgbClr val="FFFFFF"/>
+          </a:solidFill>
+          <a:ln/>
+        </p:spPr>
+      </p:sp>
+      <p:sp>
+        <p:nvSpPr>
+          <p:cNvPr id="29" name="Text 26"/>
+          <p:cNvSpPr/>
+          <p:nvPr/>
+        </p:nvSpPr>
+        <p:spPr>
+          <a:xfrm>
+            <a:off x="749808" y="5445252"/>
+            <a:ext cx="310896" cy="310896"/>
           </a:xfrm>
           <a:prstGeom prst="rect">
             <a:avLst/>
@@ -19977,11 +20476,50 @@
           <a:bodyPr wrap="square" lIns="0" tIns="0" rIns="0" bIns="0" rtlCol="0" anchor="ctr"/>
           <a:lstStyle/>
           <a:p>
-            <a:pPr marL="0" indent="0">
-              <a:buNone/>
-            </a:pPr>
-            <a:r>
-              <a:rPr lang="en-US" sz="950" b="1" kern="0" spc="150" dirty="0">
+            <a:pPr algn="ctr" indent="0" marL="0">
+              <a:buNone/>
+            </a:pPr>
+            <a:r>
+              <a:rPr lang="en-US" sz="1200" b="1" dirty="0">
+                <a:solidFill>
+                  <a:srgbClr val="5A05F4"/>
+                </a:solidFill>
+                <a:latin typeface="Arial" pitchFamily="34" charset="0"/>
+                <a:ea typeface="Arial" pitchFamily="34" charset="-122"/>
+                <a:cs typeface="Arial" pitchFamily="34" charset="-120"/>
+              </a:rPr>
+              <a:t>?</a:t>
+            </a:r>
+            <a:endParaRPr lang="en-US" sz="1200" dirty="0"/>
+          </a:p>
+        </p:txBody>
+      </p:sp>
+      <p:sp>
+        <p:nvSpPr>
+          <p:cNvPr id="30" name="Text 27"/>
+          <p:cNvSpPr/>
+          <p:nvPr/>
+        </p:nvSpPr>
+        <p:spPr>
+          <a:xfrm>
+            <a:off x="1243584" y="5202936"/>
+            <a:ext cx="10168128" cy="219456"/>
+          </a:xfrm>
+          <a:prstGeom prst="rect">
+            <a:avLst/>
+          </a:prstGeom>
+          <a:noFill/>
+          <a:ln/>
+        </p:spPr>
+        <p:txBody>
+          <a:bodyPr wrap="square" lIns="0" tIns="0" rIns="0" bIns="0" rtlCol="0" anchor="ctr"/>
+          <a:lstStyle/>
+          <a:p>
+            <a:pPr indent="0" marL="0">
+              <a:buNone/>
+            </a:pPr>
+            <a:r>
+              <a:rPr lang="en-US" sz="950" b="1" spc="150" kern="0" dirty="0">
                 <a:solidFill>
                   <a:srgbClr val="FFFFFF"/>
                 </a:solidFill>
@@ -19997,14 +20535,14 @@
       </p:sp>
       <p:sp>
         <p:nvSpPr>
-          <p:cNvPr id="29" name="Text 26"/>
-          <p:cNvSpPr/>
-          <p:nvPr/>
-        </p:nvSpPr>
-        <p:spPr>
-          <a:xfrm>
-            <a:off x="786384" y="5458968"/>
-            <a:ext cx="10625328" cy="539496"/>
+          <p:cNvPr id="31" name="Text 28"/>
+          <p:cNvSpPr/>
+          <p:nvPr/>
+        </p:nvSpPr>
+        <p:spPr>
+          <a:xfrm>
+            <a:off x="1243584" y="5458968"/>
+            <a:ext cx="10168128" cy="539496"/>
           </a:xfrm>
           <a:prstGeom prst="rect">
             <a:avLst/>
@@ -20016,7 +20554,7 @@
           <a:bodyPr wrap="square" lIns="0" tIns="0" rIns="0" bIns="0" rtlCol="0" anchor="ctr"/>
           <a:lstStyle/>
           <a:p>
-            <a:pPr marL="0" indent="0">
+            <a:pPr indent="0" marL="0">
               <a:lnSpc>
                 <a:spcPct val="112000"/>
               </a:lnSpc>
@@ -20039,7 +20577,7 @@
       </p:sp>
       <p:sp>
         <p:nvSpPr>
-          <p:cNvPr id="30" name="Slide Number Placeholder 0"/>
+          <p:cNvPr id="25" name="Slide Number Placeholder 0"/>
           <p:cNvSpPr>
             <a:spLocks noGrp="1"/>
           </p:cNvSpPr>
@@ -20057,7 +20595,7 @@
           </a:prstGeom>
           <a:extLst>
             <a:ext uri="{C572A759-6A51-4108-AA02-DFA0A04FC94B}">
-              <ma14:wrappingTextBoxFlag xmlns:ma14="http://schemas.microsoft.com/office/mac/drawingml/2011/main" xmlns="" val="0"/>
+              <ma14:wrappingTextBoxFlag xmlns:ma14="http://schemas.microsoft.com/office/mac/drawingml/2011/main" val="0"/>
             </a:ext>
           </a:extLst>
         </p:spPr>
@@ -20078,7 +20616,7 @@
           <a:p>
             <a:pPr algn="l"/>
             <a:fld id="{F7021451-1387-4CA6-816F-3879F97B5CBC}" type="slidenum">
-              <a:rPr lang="en-US" b="0"/>
+              <a:rPr b="0" lang="en-US"/>
               <a:t>22</a:t>
             </a:fld>
             <a:endParaRPr lang="en-US"/>
@@ -20153,7 +20691,7 @@
           <a:bodyPr wrap="square" lIns="0" tIns="0" rIns="0" bIns="0" rtlCol="0" anchor="ctr"/>
           <a:lstStyle/>
           <a:p>
-            <a:pPr marL="0" indent="0">
+            <a:pPr indent="0" marL="0">
               <a:buNone/>
             </a:pPr>
             <a:r>
@@ -20214,11 +20752,11 @@
           <a:bodyPr wrap="square" lIns="0" tIns="0" rIns="0" bIns="0" rtlCol="0" anchor="ctr"/>
           <a:lstStyle/>
           <a:p>
-            <a:pPr marL="0" indent="0" algn="ctr">
-              <a:buNone/>
-            </a:pPr>
-            <a:r>
-              <a:rPr lang="en-US" sz="900" b="1" kern="0" spc="100" dirty="0">
+            <a:pPr algn="ctr" indent="0" marL="0">
+              <a:buNone/>
+            </a:pPr>
+            <a:r>
+              <a:rPr lang="en-US" sz="900" b="1" spc="100" kern="0" dirty="0">
                 <a:solidFill>
                   <a:srgbClr val="FFFFFF"/>
                 </a:solidFill>
@@ -20234,14 +20772,14 @@
       </p:sp>
       <p:pic>
         <p:nvPicPr>
-          <p:cNvPr id="6" name="Image 0" descr="preencoded.png"/>
+          <p:cNvPr id="6" name="Image 0" descr="preencoded.png">    </p:cNvPr>
           <p:cNvPicPr>
             <a:picLocks noChangeAspect="1"/>
           </p:cNvPicPr>
           <p:nvPr/>
         </p:nvPicPr>
         <p:blipFill>
-          <a:blip r:embed="rId3"/>
+          <a:blip r:embed="rId1"/>
           <a:stretch>
             <a:fillRect/>
           </a:stretch>
@@ -20297,7 +20835,7 @@
           <a:bodyPr wrap="square" lIns="0" tIns="0" rIns="0" bIns="0" rtlCol="0" anchor="ctr"/>
           <a:lstStyle/>
           <a:p>
-            <a:pPr marL="0" indent="0" algn="ctr">
+            <a:pPr algn="ctr" indent="0" marL="0">
               <a:buNone/>
             </a:pPr>
             <a:r>
@@ -20336,7 +20874,7 @@
           <a:bodyPr wrap="square" lIns="0" tIns="0" rIns="0" bIns="0" rtlCol="0" anchor="ctr"/>
           <a:lstStyle/>
           <a:p>
-            <a:pPr marL="0" indent="0">
+            <a:pPr indent="0" marL="0">
               <a:buNone/>
             </a:pPr>
             <a:r>
@@ -20350,6 +20888,9 @@
               </a:rPr>
               <a:t>Порахувати руками  </a:t>
             </a:r>
+            <a:pPr indent="0" marL="0">
+              <a:buNone/>
+            </a:pPr>
             <a:r>
               <a:rPr lang="en-US" sz="1200" dirty="0">
                 <a:solidFill>
@@ -20406,7 +20947,7 @@
           <a:bodyPr wrap="square" lIns="0" tIns="0" rIns="0" bIns="0" rtlCol="0" anchor="ctr"/>
           <a:lstStyle/>
           <a:p>
-            <a:pPr marL="0" indent="0" algn="ctr">
+            <a:pPr algn="ctr" indent="0" marL="0">
               <a:buNone/>
             </a:pPr>
             <a:r>
@@ -20445,7 +20986,7 @@
           <a:bodyPr wrap="square" lIns="0" tIns="0" rIns="0" bIns="0" rtlCol="0" anchor="ctr"/>
           <a:lstStyle/>
           <a:p>
-            <a:pPr marL="0" indent="0">
+            <a:pPr indent="0" marL="0">
               <a:buNone/>
             </a:pPr>
             <a:r>
@@ -20459,6 +21000,9 @@
               </a:rPr>
               <a:t>Оживити /observability  </a:t>
             </a:r>
+            <a:pPr indent="0" marL="0">
+              <a:buNone/>
+            </a:pPr>
             <a:r>
               <a:rPr lang="en-US" sz="1200" dirty="0">
                 <a:solidFill>
@@ -20515,7 +21059,7 @@
           <a:bodyPr wrap="square" lIns="0" tIns="0" rIns="0" bIns="0" rtlCol="0" anchor="ctr"/>
           <a:lstStyle/>
           <a:p>
-            <a:pPr marL="0" indent="0" algn="ctr">
+            <a:pPr algn="ctr" indent="0" marL="0">
               <a:buNone/>
             </a:pPr>
             <a:r>
@@ -20554,7 +21098,7 @@
           <a:bodyPr wrap="square" lIns="0" tIns="0" rIns="0" bIns="0" rtlCol="0" anchor="ctr"/>
           <a:lstStyle/>
           <a:p>
-            <a:pPr marL="0" indent="0">
+            <a:pPr indent="0" marL="0">
               <a:buNone/>
             </a:pPr>
             <a:r>
@@ -20568,6 +21112,9 @@
               </a:rPr>
               <a:t>Звірити плитки з SQL  </a:t>
             </a:r>
+            <a:pPr indent="0" marL="0">
+              <a:buNone/>
+            </a:pPr>
             <a:r>
               <a:rPr lang="en-US" sz="1200" dirty="0">
                 <a:solidFill>
@@ -20624,7 +21171,7 @@
           <a:bodyPr wrap="square" lIns="0" tIns="0" rIns="0" bIns="0" rtlCol="0" anchor="ctr"/>
           <a:lstStyle/>
           <a:p>
-            <a:pPr marL="0" indent="0" algn="ctr">
+            <a:pPr algn="ctr" indent="0" marL="0">
               <a:buNone/>
             </a:pPr>
             <a:r>
@@ -20663,7 +21210,7 @@
           <a:bodyPr wrap="square" lIns="0" tIns="0" rIns="0" bIns="0" rtlCol="0" anchor="ctr"/>
           <a:lstStyle/>
           <a:p>
-            <a:pPr marL="0" indent="0">
+            <a:pPr indent="0" marL="0">
               <a:buNone/>
             </a:pPr>
             <a:r>
@@ -20677,6 +21224,9 @@
               </a:rPr>
               <a:t>Відтворити «детектива»  </a:t>
             </a:r>
+            <a:pPr indent="0" marL="0">
+              <a:buNone/>
+            </a:pPr>
             <a:r>
               <a:rPr lang="en-US" sz="1200" dirty="0">
                 <a:solidFill>
@@ -20733,7 +21283,7 @@
           <a:bodyPr wrap="square" lIns="0" tIns="0" rIns="0" bIns="0" rtlCol="0" anchor="ctr"/>
           <a:lstStyle/>
           <a:p>
-            <a:pPr marL="0" indent="0" algn="ctr">
+            <a:pPr algn="ctr" indent="0" marL="0">
               <a:buNone/>
             </a:pPr>
             <a:r>
@@ -20772,7 +21322,7 @@
           <a:bodyPr wrap="square" lIns="0" tIns="0" rIns="0" bIns="0" rtlCol="0" anchor="ctr"/>
           <a:lstStyle/>
           <a:p>
-            <a:pPr marL="0" indent="0">
+            <a:pPr indent="0" marL="0">
               <a:buNone/>
             </a:pPr>
             <a:r>
@@ -20786,6 +21336,9 @@
               </a:rPr>
               <a:t>Таксономія помилок · опційно  </a:t>
             </a:r>
+            <a:pPr indent="0" marL="0">
+              <a:buNone/>
+            </a:pPr>
             <a:r>
               <a:rPr lang="en-US" sz="1200" dirty="0">
                 <a:solidFill>
@@ -20821,7 +21374,7 @@
           </a:prstGeom>
           <a:extLst>
             <a:ext uri="{C572A759-6A51-4108-AA02-DFA0A04FC94B}">
-              <ma14:wrappingTextBoxFlag xmlns:ma14="http://schemas.microsoft.com/office/mac/drawingml/2011/main" xmlns="" val="0"/>
+              <ma14:wrappingTextBoxFlag xmlns:ma14="http://schemas.microsoft.com/office/mac/drawingml/2011/main" val="0"/>
             </a:ext>
           </a:extLst>
         </p:spPr>
@@ -20842,7 +21395,7 @@
           <a:p>
             <a:pPr algn="l"/>
             <a:fld id="{F7021451-1387-4CA6-816F-3879F97B5CBC}" type="slidenum">
-              <a:rPr lang="en-US" b="0"/>
+              <a:rPr b="0" lang="en-US"/>
               <a:t>23</a:t>
             </a:fld>
             <a:endParaRPr lang="en-US"/>
@@ -20895,11 +21448,11 @@
           <a:bodyPr wrap="square" lIns="0" tIns="0" rIns="0" bIns="0" rtlCol="0" anchor="ctr"/>
           <a:lstStyle/>
           <a:p>
-            <a:pPr marL="0" indent="0">
-              <a:buNone/>
-            </a:pPr>
-            <a:r>
-              <a:rPr lang="en-US" sz="1200" b="1" kern="0" spc="400" dirty="0">
+            <a:pPr indent="0" marL="0">
+              <a:buNone/>
+            </a:pPr>
+            <a:r>
+              <a:rPr lang="en-US" sz="1200" b="1" spc="400" kern="0" dirty="0">
                 <a:solidFill>
                   <a:srgbClr val="FFFFFF"/>
                 </a:solidFill>
@@ -20934,7 +21487,7 @@
           <a:bodyPr wrap="square" lIns="0" tIns="0" rIns="0" bIns="0" rtlCol="0" anchor="ctr"/>
           <a:lstStyle/>
           <a:p>
-            <a:pPr marL="0" indent="0">
+            <a:pPr indent="0" marL="0">
               <a:buNone/>
             </a:pPr>
             <a:r>
@@ -20973,7 +21526,7 @@
           <a:bodyPr wrap="square" lIns="0" tIns="0" rIns="0" bIns="0" rtlCol="0" anchor="t"/>
           <a:lstStyle/>
           <a:p>
-            <a:pPr marL="0" indent="0">
+            <a:pPr indent="0" marL="0">
               <a:buNone/>
             </a:pPr>
             <a:r>
@@ -21059,7 +21612,7 @@
           <a:bodyPr wrap="square" lIns="0" tIns="0" rIns="0" bIns="0" rtlCol="0" anchor="ctr"/>
           <a:lstStyle/>
           <a:p>
-            <a:pPr marL="0" indent="0">
+            <a:pPr indent="0" marL="0">
               <a:buNone/>
             </a:pPr>
             <a:r>
@@ -21125,11 +21678,11 @@
           <a:bodyPr wrap="square" lIns="0" tIns="0" rIns="0" bIns="0" rtlCol="0" anchor="ctr"/>
           <a:lstStyle/>
           <a:p>
-            <a:pPr marL="0" indent="0" algn="ctr">
-              <a:buNone/>
-            </a:pPr>
-            <a:r>
-              <a:rPr lang="en-US" sz="900" b="1" kern="0" spc="100" dirty="0">
+            <a:pPr algn="ctr" indent="0" marL="0">
+              <a:buNone/>
+            </a:pPr>
+            <a:r>
+              <a:rPr lang="en-US" sz="900" b="1" spc="100" kern="0" dirty="0">
                 <a:solidFill>
                   <a:srgbClr val="1A4FBF"/>
                 </a:solidFill>
@@ -21145,14 +21698,14 @@
       </p:sp>
       <p:pic>
         <p:nvPicPr>
-          <p:cNvPr id="6" name="Image 0" descr="preencoded.png"/>
+          <p:cNvPr id="6" name="Image 0" descr="preencoded.png">    </p:cNvPr>
           <p:cNvPicPr>
             <a:picLocks noChangeAspect="1"/>
           </p:cNvPicPr>
           <p:nvPr/>
         </p:nvPicPr>
         <p:blipFill>
-          <a:blip r:embed="rId3"/>
+          <a:blip r:embed="rId1"/>
           <a:stretch>
             <a:fillRect/>
           </a:stretch>
@@ -21210,7 +21763,7 @@
           <a:bodyPr wrap="square" lIns="0" tIns="0" rIns="0" bIns="0" rtlCol="0" anchor="ctr"/>
           <a:lstStyle/>
           <a:p>
-            <a:pPr marL="0" indent="0">
+            <a:pPr indent="0" marL="0">
               <a:buNone/>
             </a:pPr>
             <a:r>
@@ -21249,7 +21802,7 @@
           <a:bodyPr wrap="square" lIns="0" tIns="0" rIns="0" bIns="0" rtlCol="0" anchor="t"/>
           <a:lstStyle/>
           <a:p>
-            <a:pPr marL="0" indent="0">
+            <a:pPr indent="0" marL="0">
               <a:lnSpc>
                 <a:spcPct val="108000"/>
               </a:lnSpc>
@@ -21313,7 +21866,7 @@
           <a:bodyPr wrap="square" lIns="0" tIns="0" rIns="0" bIns="0" rtlCol="0" anchor="ctr"/>
           <a:lstStyle/>
           <a:p>
-            <a:pPr marL="0" indent="0">
+            <a:pPr indent="0" marL="0">
               <a:buNone/>
             </a:pPr>
             <a:r>
@@ -21352,7 +21905,7 @@
           <a:bodyPr wrap="square" lIns="0" tIns="0" rIns="0" bIns="0" rtlCol="0" anchor="t"/>
           <a:lstStyle/>
           <a:p>
-            <a:pPr marL="0" indent="0">
+            <a:pPr indent="0" marL="0">
               <a:lnSpc>
                 <a:spcPct val="108000"/>
               </a:lnSpc>
@@ -21416,7 +21969,7 @@
           <a:bodyPr wrap="square" lIns="0" tIns="0" rIns="0" bIns="0" rtlCol="0" anchor="ctr"/>
           <a:lstStyle/>
           <a:p>
-            <a:pPr marL="0" indent="0">
+            <a:pPr indent="0" marL="0">
               <a:buNone/>
             </a:pPr>
             <a:r>
@@ -21455,7 +22008,7 @@
           <a:bodyPr wrap="square" lIns="0" tIns="0" rIns="0" bIns="0" rtlCol="0" anchor="t"/>
           <a:lstStyle/>
           <a:p>
-            <a:pPr marL="0" indent="0">
+            <a:pPr indent="0" marL="0">
               <a:lnSpc>
                 <a:spcPct val="108000"/>
               </a:lnSpc>
@@ -21524,7 +22077,7 @@
           <a:bodyPr wrap="square" lIns="0" tIns="0" rIns="0" bIns="0" rtlCol="0" anchor="ctr"/>
           <a:lstStyle/>
           <a:p>
-            <a:pPr marL="0" indent="0">
+            <a:pPr indent="0" marL="0">
               <a:lnSpc>
                 <a:spcPct val="112000"/>
               </a:lnSpc>
@@ -21565,7 +22118,7 @@
           </a:prstGeom>
           <a:extLst>
             <a:ext uri="{C572A759-6A51-4108-AA02-DFA0A04FC94B}">
-              <ma14:wrappingTextBoxFlag xmlns:ma14="http://schemas.microsoft.com/office/mac/drawingml/2011/main" xmlns="" val="0"/>
+              <ma14:wrappingTextBoxFlag xmlns:ma14="http://schemas.microsoft.com/office/mac/drawingml/2011/main" val="0"/>
             </a:ext>
           </a:extLst>
         </p:spPr>
@@ -21586,7 +22139,7 @@
           <a:p>
             <a:pPr algn="l"/>
             <a:fld id="{F7021451-1387-4CA6-816F-3879F97B5CBC}" type="slidenum">
-              <a:rPr lang="en-US" b="0"/>
+              <a:rPr b="0" lang="en-US"/>
               <a:t>25</a:t>
             </a:fld>
             <a:endParaRPr lang="en-US"/>
@@ -21661,7 +22214,7 @@
           <a:bodyPr wrap="square" lIns="0" tIns="0" rIns="0" bIns="0" rtlCol="0" anchor="ctr"/>
           <a:lstStyle/>
           <a:p>
-            <a:pPr marL="0" indent="0">
+            <a:pPr indent="0" marL="0">
               <a:buNone/>
             </a:pPr>
             <a:r>
@@ -21727,11 +22280,11 @@
           <a:bodyPr wrap="square" lIns="0" tIns="0" rIns="0" bIns="0" rtlCol="0" anchor="ctr"/>
           <a:lstStyle/>
           <a:p>
-            <a:pPr marL="0" indent="0" algn="ctr">
-              <a:buNone/>
-            </a:pPr>
-            <a:r>
-              <a:rPr lang="en-US" sz="900" b="1" kern="0" spc="100" dirty="0">
+            <a:pPr algn="ctr" indent="0" marL="0">
+              <a:buNone/>
+            </a:pPr>
+            <a:r>
+              <a:rPr lang="en-US" sz="900" b="1" spc="100" kern="0" dirty="0">
                 <a:solidFill>
                   <a:srgbClr val="1A4FBF"/>
                 </a:solidFill>
@@ -21747,14 +22300,14 @@
       </p:sp>
       <p:pic>
         <p:nvPicPr>
-          <p:cNvPr id="6" name="Image 0" descr="preencoded.png"/>
+          <p:cNvPr id="6" name="Image 0" descr="preencoded.png">    </p:cNvPr>
           <p:cNvPicPr>
             <a:picLocks noChangeAspect="1"/>
           </p:cNvPicPr>
           <p:nvPr/>
         </p:nvPicPr>
         <p:blipFill>
-          <a:blip r:embed="rId3"/>
+          <a:blip r:embed="rId1"/>
           <a:stretch>
             <a:fillRect/>
           </a:stretch>
@@ -21884,7 +22437,7 @@
           <a:bodyPr wrap="square" lIns="0" tIns="0" rIns="0" bIns="0" rtlCol="0" anchor="ctr"/>
           <a:lstStyle/>
           <a:p>
-            <a:pPr marL="0" indent="0">
+            <a:pPr indent="0" marL="0">
               <a:buNone/>
             </a:pPr>
             <a:r>
@@ -21990,7 +22543,7 @@
           <a:bodyPr wrap="square" lIns="0" tIns="0" rIns="0" bIns="0" rtlCol="0" anchor="ctr"/>
           <a:lstStyle/>
           <a:p>
-            <a:pPr marL="0" indent="0">
+            <a:pPr indent="0" marL="0">
               <a:buNone/>
             </a:pPr>
             <a:r>
@@ -22096,7 +22649,7 @@
           <a:bodyPr wrap="square" lIns="0" tIns="0" rIns="0" bIns="0" rtlCol="0" anchor="ctr"/>
           <a:lstStyle/>
           <a:p>
-            <a:pPr marL="0" indent="0">
+            <a:pPr indent="0" marL="0">
               <a:buNone/>
             </a:pPr>
             <a:r>
@@ -22202,7 +22755,7 @@
           <a:bodyPr wrap="square" lIns="0" tIns="0" rIns="0" bIns="0" rtlCol="0" anchor="ctr"/>
           <a:lstStyle/>
           <a:p>
-            <a:pPr marL="0" indent="0">
+            <a:pPr indent="0" marL="0">
               <a:buNone/>
             </a:pPr>
             <a:r>
@@ -22241,7 +22794,7 @@
           <a:bodyPr wrap="square" lIns="0" tIns="0" rIns="0" bIns="0" rtlCol="0" anchor="ctr"/>
           <a:lstStyle/>
           <a:p>
-            <a:pPr marL="0" indent="0">
+            <a:pPr indent="0" marL="0">
               <a:buNone/>
             </a:pPr>
             <a:r>
@@ -22279,7 +22832,7 @@
           </a:prstGeom>
           <a:extLst>
             <a:ext uri="{C572A759-6A51-4108-AA02-DFA0A04FC94B}">
-              <ma14:wrappingTextBoxFlag xmlns:ma14="http://schemas.microsoft.com/office/mac/drawingml/2011/main" xmlns="" val="0"/>
+              <ma14:wrappingTextBoxFlag xmlns:ma14="http://schemas.microsoft.com/office/mac/drawingml/2011/main" val="0"/>
             </a:ext>
           </a:extLst>
         </p:spPr>
@@ -22300,7 +22853,7 @@
           <a:p>
             <a:pPr algn="l"/>
             <a:fld id="{F7021451-1387-4CA6-816F-3879F97B5CBC}" type="slidenum">
-              <a:rPr lang="en-US" b="0"/>
+              <a:rPr b="0" lang="en-US"/>
               <a:t>26</a:t>
             </a:fld>
             <a:endParaRPr lang="en-US"/>
@@ -22375,7 +22928,7 @@
           <a:bodyPr wrap="square" lIns="0" tIns="0" rIns="0" bIns="0" rtlCol="0" anchor="ctr"/>
           <a:lstStyle/>
           <a:p>
-            <a:pPr marL="0" indent="0">
+            <a:pPr indent="0" marL="0">
               <a:buNone/>
             </a:pPr>
             <a:r>
@@ -22441,11 +22994,11 @@
           <a:bodyPr wrap="square" lIns="0" tIns="0" rIns="0" bIns="0" rtlCol="0" anchor="ctr"/>
           <a:lstStyle/>
           <a:p>
-            <a:pPr marL="0" indent="0" algn="ctr">
-              <a:buNone/>
-            </a:pPr>
-            <a:r>
-              <a:rPr lang="en-US" sz="900" b="1" kern="0" spc="100" dirty="0">
+            <a:pPr algn="ctr" indent="0" marL="0">
+              <a:buNone/>
+            </a:pPr>
+            <a:r>
+              <a:rPr lang="en-US" sz="900" b="1" spc="100" kern="0" dirty="0">
                 <a:solidFill>
                   <a:srgbClr val="1A4FBF"/>
                 </a:solidFill>
@@ -22461,14 +23014,14 @@
       </p:sp>
       <p:pic>
         <p:nvPicPr>
-          <p:cNvPr id="6" name="Image 0" descr="preencoded.png"/>
+          <p:cNvPr id="6" name="Image 0" descr="preencoded.png">    </p:cNvPr>
           <p:cNvPicPr>
             <a:picLocks noChangeAspect="1"/>
           </p:cNvPicPr>
           <p:nvPr/>
         </p:nvPicPr>
         <p:blipFill>
-          <a:blip r:embed="rId3"/>
+          <a:blip r:embed="rId1"/>
           <a:stretch>
             <a:fillRect/>
           </a:stretch>
@@ -22596,7 +23149,7 @@
           <a:bodyPr wrap="square" lIns="0" tIns="0" rIns="0" bIns="0" rtlCol="0" anchor="ctr"/>
           <a:lstStyle/>
           <a:p>
-            <a:pPr marL="0" indent="0">
+            <a:pPr indent="0" marL="0">
               <a:buNone/>
             </a:pPr>
             <a:r>
@@ -22610,6 +23163,9 @@
               </a:rPr>
               <a:t>Алерт на середню latency   </a:t>
             </a:r>
+            <a:pPr indent="0" marL="0">
+              <a:buNone/>
+            </a:pPr>
             <a:r>
               <a:rPr lang="en-US" sz="1150" dirty="0">
                 <a:solidFill>
@@ -22738,7 +23294,7 @@
           <a:bodyPr wrap="square" lIns="0" tIns="0" rIns="0" bIns="0" rtlCol="0" anchor="ctr"/>
           <a:lstStyle/>
           <a:p>
-            <a:pPr marL="0" indent="0">
+            <a:pPr indent="0" marL="0">
               <a:buNone/>
             </a:pPr>
             <a:r>
@@ -22752,6 +23308,9 @@
               </a:rPr>
               <a:t>Алерт на кожну помилку   </a:t>
             </a:r>
+            <a:pPr indent="0" marL="0">
+              <a:buNone/>
+            </a:pPr>
             <a:r>
               <a:rPr lang="en-US" sz="1150" dirty="0">
                 <a:solidFill>
@@ -22880,7 +23439,7 @@
           <a:bodyPr wrap="square" lIns="0" tIns="0" rIns="0" bIns="0" rtlCol="0" anchor="ctr"/>
           <a:lstStyle/>
           <a:p>
-            <a:pPr marL="0" indent="0">
+            <a:pPr indent="0" marL="0">
               <a:buNone/>
             </a:pPr>
             <a:r>
@@ -22894,6 +23453,9 @@
               </a:rPr>
               <a:t>Плитка без питання   </a:t>
             </a:r>
+            <a:pPr indent="0" marL="0">
+              <a:buNone/>
+            </a:pPr>
             <a:r>
               <a:rPr lang="en-US" sz="1150" dirty="0">
                 <a:solidFill>
@@ -23022,7 +23584,7 @@
           <a:bodyPr wrap="square" lIns="0" tIns="0" rIns="0" bIns="0" rtlCol="0" anchor="ctr"/>
           <a:lstStyle/>
           <a:p>
-            <a:pPr marL="0" indent="0">
+            <a:pPr indent="0" marL="0">
               <a:buNone/>
             </a:pPr>
             <a:r>
@@ -23036,6 +23598,9 @@
               </a:rPr>
               <a:t>Статус провайдера прибитий до «ok»   </a:t>
             </a:r>
+            <a:pPr indent="0" marL="0">
+              <a:buNone/>
+            </a:pPr>
             <a:r>
               <a:rPr lang="en-US" sz="1150" dirty="0">
                 <a:solidFill>
@@ -23164,7 +23729,7 @@
           <a:bodyPr wrap="square" lIns="0" tIns="0" rIns="0" bIns="0" rtlCol="0" anchor="ctr"/>
           <a:lstStyle/>
           <a:p>
-            <a:pPr marL="0" indent="0">
+            <a:pPr indent="0" marL="0">
               <a:buNone/>
             </a:pPr>
             <a:r>
@@ -23178,6 +23743,9 @@
               </a:rPr>
               <a:t>User_id у мітках метрик   </a:t>
             </a:r>
+            <a:pPr indent="0" marL="0">
+              <a:buNone/>
+            </a:pPr>
             <a:r>
               <a:rPr lang="en-US" sz="1150" dirty="0">
                 <a:solidFill>
@@ -23195,7 +23763,7 @@
       </p:sp>
       <p:sp>
         <p:nvSpPr>
-          <p:cNvPr id="32" name="Slide Number Placeholder 0"/>
+          <p:cNvPr id="25" name="Slide Number Placeholder 0"/>
           <p:cNvSpPr>
             <a:spLocks noGrp="1"/>
           </p:cNvSpPr>
@@ -23213,7 +23781,7 @@
           </a:prstGeom>
           <a:extLst>
             <a:ext uri="{C572A759-6A51-4108-AA02-DFA0A04FC94B}">
-              <ma14:wrappingTextBoxFlag xmlns:ma14="http://schemas.microsoft.com/office/mac/drawingml/2011/main" xmlns="" val="0"/>
+              <ma14:wrappingTextBoxFlag xmlns:ma14="http://schemas.microsoft.com/office/mac/drawingml/2011/main" val="0"/>
             </a:ext>
           </a:extLst>
         </p:spPr>
@@ -23234,7 +23802,7 @@
           <a:p>
             <a:pPr algn="l"/>
             <a:fld id="{F7021451-1387-4CA6-816F-3879F97B5CBC}" type="slidenum">
-              <a:rPr lang="en-US" b="0"/>
+              <a:rPr b="0" lang="en-US"/>
               <a:t>27</a:t>
             </a:fld>
             <a:endParaRPr lang="en-US"/>
@@ -23309,7 +23877,7 @@
           <a:bodyPr wrap="square" lIns="0" tIns="0" rIns="0" bIns="0" rtlCol="0" anchor="ctr"/>
           <a:lstStyle/>
           <a:p>
-            <a:pPr marL="0" indent="0">
+            <a:pPr indent="0" marL="0">
               <a:buNone/>
             </a:pPr>
             <a:r>
@@ -23370,11 +23938,11 @@
           <a:bodyPr wrap="square" lIns="0" tIns="0" rIns="0" bIns="0" rtlCol="0" anchor="ctr"/>
           <a:lstStyle/>
           <a:p>
-            <a:pPr marL="0" indent="0" algn="ctr">
-              <a:buNone/>
-            </a:pPr>
-            <a:r>
-              <a:rPr lang="en-US" sz="900" b="1" kern="0" spc="100" dirty="0">
+            <a:pPr algn="ctr" indent="0" marL="0">
+              <a:buNone/>
+            </a:pPr>
+            <a:r>
+              <a:rPr lang="en-US" sz="900" b="1" spc="100" kern="0" dirty="0">
                 <a:solidFill>
                   <a:srgbClr val="FFFFFF"/>
                 </a:solidFill>
@@ -23390,14 +23958,14 @@
       </p:sp>
       <p:pic>
         <p:nvPicPr>
-          <p:cNvPr id="6" name="Image 0" descr="preencoded.png"/>
+          <p:cNvPr id="6" name="Image 0" descr="preencoded.png">    </p:cNvPr>
           <p:cNvPicPr>
             <a:picLocks noChangeAspect="1"/>
           </p:cNvPicPr>
           <p:nvPr/>
         </p:nvPicPr>
         <p:blipFill>
-          <a:blip r:embed="rId3"/>
+          <a:blip r:embed="rId1"/>
           <a:stretch>
             <a:fillRect/>
           </a:stretch>
@@ -23455,7 +24023,7 @@
           <a:bodyPr wrap="square" lIns="0" tIns="0" rIns="0" bIns="0" rtlCol="0" anchor="ctr"/>
           <a:lstStyle/>
           <a:p>
-            <a:pPr marL="0" indent="0">
+            <a:pPr indent="0" marL="0">
               <a:buNone/>
             </a:pPr>
             <a:r>
@@ -23494,7 +24062,7 @@
           <a:bodyPr wrap="square" lIns="0" tIns="0" rIns="0" bIns="0" rtlCol="0" anchor="t"/>
           <a:lstStyle/>
           <a:p>
-            <a:pPr marL="0" indent="0">
+            <a:pPr indent="0" marL="0">
               <a:lnSpc>
                 <a:spcPct val="108000"/>
               </a:lnSpc>
@@ -23514,7 +24082,7 @@
             <a:endParaRPr lang="en-US" sz="1200" dirty="0"/>
           </a:p>
           <a:p>
-            <a:pPr marL="0" indent="0">
+            <a:pPr indent="0" marL="0">
               <a:lnSpc>
                 <a:spcPct val="108000"/>
               </a:lnSpc>
@@ -23523,7 +24091,7 @@
             <a:endParaRPr lang="en-US" sz="1200" dirty="0"/>
           </a:p>
           <a:p>
-            <a:pPr marL="0" indent="0">
+            <a:pPr indent="0" marL="0">
               <a:lnSpc>
                 <a:spcPct val="108000"/>
               </a:lnSpc>
@@ -23543,7 +24111,7 @@
             <a:endParaRPr lang="en-US" sz="1200" dirty="0"/>
           </a:p>
           <a:p>
-            <a:pPr marL="0" indent="0">
+            <a:pPr indent="0" marL="0">
               <a:lnSpc>
                 <a:spcPct val="108000"/>
               </a:lnSpc>
@@ -23552,7 +24120,7 @@
             <a:endParaRPr lang="en-US" sz="1200" dirty="0"/>
           </a:p>
           <a:p>
-            <a:pPr marL="0" indent="0">
+            <a:pPr indent="0" marL="0">
               <a:lnSpc>
                 <a:spcPct val="108000"/>
               </a:lnSpc>
@@ -23616,7 +24184,7 @@
           <a:bodyPr wrap="square" lIns="0" tIns="0" rIns="0" bIns="0" rtlCol="0" anchor="ctr"/>
           <a:lstStyle/>
           <a:p>
-            <a:pPr marL="0" indent="0">
+            <a:pPr indent="0" marL="0">
               <a:buNone/>
             </a:pPr>
             <a:r>
@@ -23655,7 +24223,7 @@
           <a:bodyPr wrap="square" lIns="0" tIns="0" rIns="0" bIns="0" rtlCol="0" anchor="t"/>
           <a:lstStyle/>
           <a:p>
-            <a:pPr marL="0" indent="0">
+            <a:pPr indent="0" marL="0">
               <a:lnSpc>
                 <a:spcPct val="108000"/>
               </a:lnSpc>
@@ -23724,7 +24292,7 @@
           <a:bodyPr wrap="square" lIns="0" tIns="0" rIns="0" bIns="0" rtlCol="0" anchor="ctr"/>
           <a:lstStyle/>
           <a:p>
-            <a:pPr marL="0" indent="0">
+            <a:pPr indent="0" marL="0">
               <a:buNone/>
             </a:pPr>
             <a:r>
@@ -23763,7 +24331,7 @@
           <a:bodyPr wrap="square" lIns="0" tIns="0" rIns="0" bIns="0" rtlCol="0" anchor="t"/>
           <a:lstStyle/>
           <a:p>
-            <a:pPr marL="0" indent="0">
+            <a:pPr indent="0" marL="0">
               <a:buNone/>
             </a:pPr>
             <a:r>
@@ -23801,7 +24369,7 @@
           </a:prstGeom>
           <a:extLst>
             <a:ext uri="{C572A759-6A51-4108-AA02-DFA0A04FC94B}">
-              <ma14:wrappingTextBoxFlag xmlns:ma14="http://schemas.microsoft.com/office/mac/drawingml/2011/main" xmlns="" val="0"/>
+              <ma14:wrappingTextBoxFlag xmlns:ma14="http://schemas.microsoft.com/office/mac/drawingml/2011/main" val="0"/>
             </a:ext>
           </a:extLst>
         </p:spPr>
@@ -23822,7 +24390,7 @@
           <a:p>
             <a:pPr algn="l"/>
             <a:fld id="{F7021451-1387-4CA6-816F-3879F97B5CBC}" type="slidenum">
-              <a:rPr lang="en-US" b="0"/>
+              <a:rPr b="0" lang="en-US"/>
               <a:t>28</a:t>
             </a:fld>
             <a:endParaRPr lang="en-US"/>
@@ -23875,11 +24443,11 @@
           <a:bodyPr wrap="square" lIns="0" tIns="0" rIns="0" bIns="0" rtlCol="0" anchor="ctr"/>
           <a:lstStyle/>
           <a:p>
-            <a:pPr marL="0" indent="0">
-              <a:buNone/>
-            </a:pPr>
-            <a:r>
-              <a:rPr lang="en-US" sz="1200" b="1" kern="0" spc="400" dirty="0">
+            <a:pPr indent="0" marL="0">
+              <a:buNone/>
+            </a:pPr>
+            <a:r>
+              <a:rPr lang="en-US" sz="1200" b="1" spc="400" kern="0" dirty="0">
                 <a:solidFill>
                   <a:srgbClr val="FFFFFF"/>
                 </a:solidFill>
@@ -23914,11 +24482,11 @@
           <a:bodyPr wrap="square" lIns="0" tIns="0" rIns="0" bIns="0" rtlCol="0" anchor="ctr"/>
           <a:lstStyle/>
           <a:p>
-            <a:pPr marL="0" indent="0">
-              <a:buNone/>
-            </a:pPr>
-            <a:r>
-              <a:rPr lang="en-US" sz="1100" b="1" kern="0" spc="300" dirty="0">
+            <a:pPr indent="0" marL="0">
+              <a:buNone/>
+            </a:pPr>
+            <a:r>
+              <a:rPr lang="en-US" sz="1100" b="1" spc="300" kern="0" dirty="0">
                 <a:solidFill>
                   <a:srgbClr val="C4B3F5"/>
                 </a:solidFill>
@@ -23973,7 +24541,7 @@
           <a:bodyPr wrap="square" lIns="0" tIns="0" rIns="0" bIns="0" rtlCol="0" anchor="t"/>
           <a:lstStyle/>
           <a:p>
-            <a:pPr marL="0" indent="0">
+            <a:pPr indent="0" marL="0">
               <a:lnSpc>
                 <a:spcPct val="110000"/>
               </a:lnSpc>
@@ -24035,7 +24603,7 @@
           <a:bodyPr wrap="square" lIns="0" tIns="0" rIns="0" bIns="0" rtlCol="0" anchor="t"/>
           <a:lstStyle/>
           <a:p>
-            <a:pPr marL="0" indent="0">
+            <a:pPr indent="0" marL="0">
               <a:lnSpc>
                 <a:spcPct val="110000"/>
               </a:lnSpc>
@@ -24097,7 +24665,7 @@
           <a:bodyPr wrap="square" lIns="0" tIns="0" rIns="0" bIns="0" rtlCol="0" anchor="t"/>
           <a:lstStyle/>
           <a:p>
-            <a:pPr marL="0" indent="0">
+            <a:pPr indent="0" marL="0">
               <a:lnSpc>
                 <a:spcPct val="110000"/>
               </a:lnSpc>
@@ -24159,7 +24727,7 @@
           <a:bodyPr wrap="square" lIns="0" tIns="0" rIns="0" bIns="0" rtlCol="0" anchor="t"/>
           <a:lstStyle/>
           <a:p>
-            <a:pPr marL="0" indent="0">
+            <a:pPr indent="0" marL="0">
               <a:lnSpc>
                 <a:spcPct val="110000"/>
               </a:lnSpc>
@@ -24221,7 +24789,7 @@
           <a:bodyPr wrap="square" lIns="0" tIns="0" rIns="0" bIns="0" rtlCol="0" anchor="t"/>
           <a:lstStyle/>
           <a:p>
-            <a:pPr marL="0" indent="0">
+            <a:pPr indent="0" marL="0">
               <a:lnSpc>
                 <a:spcPct val="110000"/>
               </a:lnSpc>
@@ -24290,7 +24858,7 @@
           <a:bodyPr wrap="square" lIns="0" tIns="0" rIns="0" bIns="0" rtlCol="0" anchor="ctr"/>
           <a:lstStyle/>
           <a:p>
-            <a:pPr marL="0" indent="0">
+            <a:pPr indent="0" marL="0">
               <a:buNone/>
             </a:pPr>
             <a:r>
@@ -24329,7 +24897,7 @@
           <a:bodyPr wrap="square" lIns="0" tIns="0" rIns="0" bIns="0" rtlCol="0" anchor="t"/>
           <a:lstStyle/>
           <a:p>
-            <a:pPr marL="0" indent="0">
+            <a:pPr indent="0" marL="0">
               <a:lnSpc>
                 <a:spcPct val="115000"/>
               </a:lnSpc>
@@ -24418,7 +24986,7 @@
           <a:bodyPr wrap="square" lIns="0" tIns="0" rIns="0" bIns="0" rtlCol="0" anchor="ctr"/>
           <a:lstStyle/>
           <a:p>
-            <a:pPr marL="0" indent="0">
+            <a:pPr indent="0" marL="0">
               <a:buNone/>
             </a:pPr>
             <a:r>
@@ -24484,11 +25052,11 @@
           <a:bodyPr wrap="square" lIns="0" tIns="0" rIns="0" bIns="0" rtlCol="0" anchor="ctr"/>
           <a:lstStyle/>
           <a:p>
-            <a:pPr marL="0" indent="0" algn="ctr">
-              <a:buNone/>
-            </a:pPr>
-            <a:r>
-              <a:rPr lang="en-US" sz="900" b="1" kern="0" spc="100" dirty="0">
+            <a:pPr algn="ctr" indent="0" marL="0">
+              <a:buNone/>
+            </a:pPr>
+            <a:r>
+              <a:rPr lang="en-US" sz="900" b="1" spc="100" kern="0" dirty="0">
                 <a:solidFill>
                   <a:srgbClr val="5A05F4"/>
                 </a:solidFill>
@@ -24504,14 +25072,14 @@
       </p:sp>
       <p:pic>
         <p:nvPicPr>
-          <p:cNvPr id="6" name="Image 0" descr="preencoded.png"/>
+          <p:cNvPr id="6" name="Image 0" descr="preencoded.png">    </p:cNvPr>
           <p:cNvPicPr>
             <a:picLocks noChangeAspect="1"/>
           </p:cNvPicPr>
           <p:nvPr/>
         </p:nvPicPr>
         <p:blipFill>
-          <a:blip r:embed="rId3"/>
+          <a:blip r:embed="rId1"/>
           <a:stretch>
             <a:fillRect/>
           </a:stretch>
@@ -24589,7 +25157,7 @@
           <a:bodyPr wrap="square" lIns="0" tIns="0" rIns="0" bIns="0" rtlCol="0" anchor="ctr"/>
           <a:lstStyle/>
           <a:p>
-            <a:pPr marL="0" indent="0" algn="ctr">
+            <a:pPr algn="ctr" indent="0" marL="0">
               <a:buNone/>
             </a:pPr>
             <a:r>
@@ -24628,7 +25196,7 @@
           <a:bodyPr wrap="square" lIns="0" tIns="0" rIns="0" bIns="0" rtlCol="0" anchor="ctr"/>
           <a:lstStyle/>
           <a:p>
-            <a:pPr marL="0" indent="0">
+            <a:pPr indent="0" marL="0">
               <a:buNone/>
             </a:pPr>
             <a:r>
@@ -24709,7 +25277,7 @@
           <a:bodyPr wrap="square" lIns="0" tIns="0" rIns="0" bIns="0" rtlCol="0" anchor="ctr"/>
           <a:lstStyle/>
           <a:p>
-            <a:pPr marL="0" indent="0" algn="ctr">
+            <a:pPr algn="ctr" indent="0" marL="0">
               <a:buNone/>
             </a:pPr>
             <a:r>
@@ -24748,7 +25316,7 @@
           <a:bodyPr wrap="square" lIns="0" tIns="0" rIns="0" bIns="0" rtlCol="0" anchor="ctr"/>
           <a:lstStyle/>
           <a:p>
-            <a:pPr marL="0" indent="0">
+            <a:pPr indent="0" marL="0">
               <a:buNone/>
             </a:pPr>
             <a:r>
@@ -24829,7 +25397,7 @@
           <a:bodyPr wrap="square" lIns="0" tIns="0" rIns="0" bIns="0" rtlCol="0" anchor="ctr"/>
           <a:lstStyle/>
           <a:p>
-            <a:pPr marL="0" indent="0" algn="ctr">
+            <a:pPr algn="ctr" indent="0" marL="0">
               <a:buNone/>
             </a:pPr>
             <a:r>
@@ -24868,7 +25436,7 @@
           <a:bodyPr wrap="square" lIns="0" tIns="0" rIns="0" bIns="0" rtlCol="0" anchor="ctr"/>
           <a:lstStyle/>
           <a:p>
-            <a:pPr marL="0" indent="0">
+            <a:pPr indent="0" marL="0">
               <a:buNone/>
             </a:pPr>
             <a:r>
@@ -24949,7 +25517,7 @@
           <a:bodyPr wrap="square" lIns="0" tIns="0" rIns="0" bIns="0" rtlCol="0" anchor="ctr"/>
           <a:lstStyle/>
           <a:p>
-            <a:pPr marL="0" indent="0" algn="ctr">
+            <a:pPr algn="ctr" indent="0" marL="0">
               <a:buNone/>
             </a:pPr>
             <a:r>
@@ -24988,7 +25556,7 @@
           <a:bodyPr wrap="square" lIns="0" tIns="0" rIns="0" bIns="0" rtlCol="0" anchor="ctr"/>
           <a:lstStyle/>
           <a:p>
-            <a:pPr marL="0" indent="0">
+            <a:pPr indent="0" marL="0">
               <a:buNone/>
             </a:pPr>
             <a:r>
@@ -25069,7 +25637,7 @@
           <a:bodyPr wrap="square" lIns="0" tIns="0" rIns="0" bIns="0" rtlCol="0" anchor="ctr"/>
           <a:lstStyle/>
           <a:p>
-            <a:pPr marL="0" indent="0" algn="ctr">
+            <a:pPr algn="ctr" indent="0" marL="0">
               <a:buNone/>
             </a:pPr>
             <a:r>
@@ -25108,7 +25676,7 @@
           <a:bodyPr wrap="square" lIns="0" tIns="0" rIns="0" bIns="0" rtlCol="0" anchor="ctr"/>
           <a:lstStyle/>
           <a:p>
-            <a:pPr marL="0" indent="0">
+            <a:pPr indent="0" marL="0">
               <a:buNone/>
             </a:pPr>
             <a:r>
@@ -25189,7 +25757,7 @@
           <a:bodyPr wrap="square" lIns="0" tIns="0" rIns="0" bIns="0" rtlCol="0" anchor="ctr"/>
           <a:lstStyle/>
           <a:p>
-            <a:pPr marL="0" indent="0" algn="ctr">
+            <a:pPr algn="ctr" indent="0" marL="0">
               <a:buNone/>
             </a:pPr>
             <a:r>
@@ -25228,7 +25796,7 @@
           <a:bodyPr wrap="square" lIns="0" tIns="0" rIns="0" bIns="0" rtlCol="0" anchor="ctr"/>
           <a:lstStyle/>
           <a:p>
-            <a:pPr marL="0" indent="0">
+            <a:pPr indent="0" marL="0">
               <a:buNone/>
             </a:pPr>
             <a:r>
@@ -25309,7 +25877,7 @@
           <a:bodyPr wrap="square" lIns="0" tIns="0" rIns="0" bIns="0" rtlCol="0" anchor="ctr"/>
           <a:lstStyle/>
           <a:p>
-            <a:pPr marL="0" indent="0" algn="ctr">
+            <a:pPr algn="ctr" indent="0" marL="0">
               <a:buNone/>
             </a:pPr>
             <a:r>
@@ -25348,7 +25916,7 @@
           <a:bodyPr wrap="square" lIns="0" tIns="0" rIns="0" bIns="0" rtlCol="0" anchor="ctr"/>
           <a:lstStyle/>
           <a:p>
-            <a:pPr marL="0" indent="0">
+            <a:pPr indent="0" marL="0">
               <a:buNone/>
             </a:pPr>
             <a:r>
@@ -25429,7 +25997,7 @@
           <a:bodyPr wrap="square" lIns="0" tIns="0" rIns="0" bIns="0" rtlCol="0" anchor="ctr"/>
           <a:lstStyle/>
           <a:p>
-            <a:pPr marL="0" indent="0" algn="ctr">
+            <a:pPr algn="ctr" indent="0" marL="0">
               <a:buNone/>
             </a:pPr>
             <a:r>
@@ -25468,7 +26036,7 @@
           <a:bodyPr wrap="square" lIns="0" tIns="0" rIns="0" bIns="0" rtlCol="0" anchor="ctr"/>
           <a:lstStyle/>
           <a:p>
-            <a:pPr marL="0" indent="0">
+            <a:pPr indent="0" marL="0">
               <a:buNone/>
             </a:pPr>
             <a:r>
@@ -25549,7 +26117,7 @@
           <a:bodyPr wrap="square" lIns="0" tIns="0" rIns="0" bIns="0" rtlCol="0" anchor="ctr"/>
           <a:lstStyle/>
           <a:p>
-            <a:pPr marL="0" indent="0" algn="ctr">
+            <a:pPr algn="ctr" indent="0" marL="0">
               <a:buNone/>
             </a:pPr>
             <a:r>
@@ -25588,7 +26156,7 @@
           <a:bodyPr wrap="square" lIns="0" tIns="0" rIns="0" bIns="0" rtlCol="0" anchor="ctr"/>
           <a:lstStyle/>
           <a:p>
-            <a:pPr marL="0" indent="0">
+            <a:pPr indent="0" marL="0">
               <a:buNone/>
             </a:pPr>
             <a:r>
@@ -25669,7 +26237,7 @@
           <a:bodyPr wrap="square" lIns="0" tIns="0" rIns="0" bIns="0" rtlCol="0" anchor="ctr"/>
           <a:lstStyle/>
           <a:p>
-            <a:pPr marL="0" indent="0" algn="ctr">
+            <a:pPr algn="ctr" indent="0" marL="0">
               <a:buNone/>
             </a:pPr>
             <a:r>
@@ -25708,7 +26276,7 @@
           <a:bodyPr wrap="square" lIns="0" tIns="0" rIns="0" bIns="0" rtlCol="0" anchor="ctr"/>
           <a:lstStyle/>
           <a:p>
-            <a:pPr marL="0" indent="0">
+            <a:pPr indent="0" marL="0">
               <a:buNone/>
             </a:pPr>
             <a:r>
@@ -25789,7 +26357,7 @@
           <a:bodyPr wrap="square" lIns="0" tIns="0" rIns="0" bIns="0" rtlCol="0" anchor="ctr"/>
           <a:lstStyle/>
           <a:p>
-            <a:pPr marL="0" indent="0" algn="ctr">
+            <a:pPr algn="ctr" indent="0" marL="0">
               <a:buNone/>
             </a:pPr>
             <a:r>
@@ -25828,7 +26396,7 @@
           <a:bodyPr wrap="square" lIns="0" tIns="0" rIns="0" bIns="0" rtlCol="0" anchor="ctr"/>
           <a:lstStyle/>
           <a:p>
-            <a:pPr marL="0" indent="0">
+            <a:pPr indent="0" marL="0">
               <a:buNone/>
             </a:pPr>
             <a:r>
@@ -25909,7 +26477,7 @@
           <a:bodyPr wrap="square" lIns="0" tIns="0" rIns="0" bIns="0" rtlCol="0" anchor="ctr"/>
           <a:lstStyle/>
           <a:p>
-            <a:pPr marL="0" indent="0" algn="ctr">
+            <a:pPr algn="ctr" indent="0" marL="0">
               <a:buNone/>
             </a:pPr>
             <a:r>
@@ -25948,7 +26516,7 @@
           <a:bodyPr wrap="square" lIns="0" tIns="0" rIns="0" bIns="0" rtlCol="0" anchor="ctr"/>
           <a:lstStyle/>
           <a:p>
-            <a:pPr marL="0" indent="0">
+            <a:pPr indent="0" marL="0">
               <a:buNone/>
             </a:pPr>
             <a:r>
@@ -25975,7 +26543,7 @@
         <p:spPr>
           <a:xfrm>
             <a:off x="566928" y="5779008"/>
-            <a:ext cx="10927080" cy="402336"/>
+            <a:ext cx="11064240" cy="402336"/>
           </a:xfrm>
           <a:prstGeom prst="roundRect">
             <a:avLst>
@@ -26014,7 +26582,7 @@
           <a:bodyPr wrap="square" lIns="0" tIns="0" rIns="0" bIns="0" rtlCol="0" anchor="ctr"/>
           <a:lstStyle/>
           <a:p>
-            <a:pPr marL="0" indent="0">
+            <a:pPr indent="0" marL="0">
               <a:lnSpc>
                 <a:spcPct val="112000"/>
               </a:lnSpc>
@@ -26037,7 +26605,7 @@
       </p:sp>
       <p:sp>
         <p:nvSpPr>
-          <p:cNvPr id="57" name="Slide Number Placeholder 0"/>
+          <p:cNvPr id="25" name="Slide Number Placeholder 0"/>
           <p:cNvSpPr>
             <a:spLocks noGrp="1"/>
           </p:cNvSpPr>
@@ -26055,7 +26623,7 @@
           </a:prstGeom>
           <a:extLst>
             <a:ext uri="{C572A759-6A51-4108-AA02-DFA0A04FC94B}">
-              <ma14:wrappingTextBoxFlag xmlns:ma14="http://schemas.microsoft.com/office/mac/drawingml/2011/main" xmlns="" val="0"/>
+              <ma14:wrappingTextBoxFlag xmlns:ma14="http://schemas.microsoft.com/office/mac/drawingml/2011/main" val="0"/>
             </a:ext>
           </a:extLst>
         </p:spPr>
@@ -26076,7 +26644,7 @@
           <a:p>
             <a:pPr algn="l"/>
             <a:fld id="{F7021451-1387-4CA6-816F-3879F97B5CBC}" type="slidenum">
-              <a:rPr lang="en-US" b="0"/>
+              <a:rPr b="0" lang="en-US"/>
               <a:t>3</a:t>
             </a:fld>
             <a:endParaRPr lang="en-US"/>
@@ -26129,11 +26697,11 @@
           <a:bodyPr wrap="square" lIns="0" tIns="0" rIns="0" bIns="0" rtlCol="0" anchor="ctr"/>
           <a:lstStyle/>
           <a:p>
-            <a:pPr marL="0" indent="0">
-              <a:buNone/>
-            </a:pPr>
-            <a:r>
-              <a:rPr lang="en-US" sz="1200" b="1" kern="0" spc="400" dirty="0">
+            <a:pPr indent="0" marL="0">
+              <a:buNone/>
+            </a:pPr>
+            <a:r>
+              <a:rPr lang="en-US" sz="1200" b="1" spc="400" kern="0" dirty="0">
                 <a:solidFill>
                   <a:srgbClr val="FFFFFF"/>
                 </a:solidFill>
@@ -26168,7 +26736,7 @@
           <a:bodyPr wrap="square" lIns="0" tIns="0" rIns="0" bIns="0" rtlCol="0" anchor="ctr"/>
           <a:lstStyle/>
           <a:p>
-            <a:pPr marL="0" indent="0">
+            <a:pPr indent="0" marL="0">
               <a:buNone/>
             </a:pPr>
             <a:r>
@@ -26254,7 +26822,7 @@
           <a:bodyPr wrap="square" lIns="0" tIns="0" rIns="0" bIns="0" rtlCol="0" anchor="ctr"/>
           <a:lstStyle/>
           <a:p>
-            <a:pPr marL="0" indent="0">
+            <a:pPr indent="0" marL="0">
               <a:buNone/>
             </a:pPr>
             <a:r>
@@ -26293,7 +26861,7 @@
           <a:bodyPr wrap="square" lIns="0" tIns="0" rIns="0" bIns="0" rtlCol="0" anchor="t"/>
           <a:lstStyle/>
           <a:p>
-            <a:pPr marL="0" indent="0">
+            <a:pPr indent="0" marL="0">
               <a:lnSpc>
                 <a:spcPct val="100000"/>
               </a:lnSpc>
@@ -26362,11 +26930,11 @@
           <a:bodyPr wrap="square" lIns="0" tIns="0" rIns="0" bIns="0" rtlCol="0" anchor="ctr"/>
           <a:lstStyle/>
           <a:p>
-            <a:pPr marL="0" indent="0" algn="ctr">
-              <a:buNone/>
-            </a:pPr>
-            <a:r>
-              <a:rPr lang="en-US" sz="900" b="1" kern="0" spc="100" dirty="0">
+            <a:pPr algn="ctr" indent="0" marL="0">
+              <a:buNone/>
+            </a:pPr>
+            <a:r>
+              <a:rPr lang="en-US" sz="900" b="1" spc="100" kern="0" dirty="0">
                 <a:solidFill>
                   <a:srgbClr val="5A05F4"/>
                 </a:solidFill>
@@ -26382,14 +26950,14 @@
       </p:sp>
       <p:pic>
         <p:nvPicPr>
-          <p:cNvPr id="7" name="Image 0" descr="preencoded.png"/>
+          <p:cNvPr id="7" name="Image 0" descr="preencoded.png">    </p:cNvPr>
           <p:cNvPicPr>
             <a:picLocks noChangeAspect="1"/>
           </p:cNvPicPr>
           <p:nvPr/>
         </p:nvPicPr>
         <p:blipFill>
-          <a:blip r:embed="rId3"/>
+          <a:blip r:embed="rId1"/>
           <a:stretch>
             <a:fillRect/>
           </a:stretch>
@@ -26452,7 +27020,7 @@
           <a:bodyPr wrap="square" lIns="0" tIns="0" rIns="0" bIns="0" rtlCol="0" anchor="ctr"/>
           <a:lstStyle/>
           <a:p>
-            <a:pPr marL="0" indent="0">
+            <a:pPr indent="0" marL="0">
               <a:buNone/>
             </a:pPr>
             <a:r>
@@ -26491,7 +27059,7 @@
           <a:bodyPr wrap="square" lIns="0" tIns="0" rIns="0" bIns="0" rtlCol="0" anchor="t"/>
           <a:lstStyle/>
           <a:p>
-            <a:pPr marL="0" indent="0">
+            <a:pPr indent="0" marL="0">
               <a:lnSpc>
                 <a:spcPct val="105000"/>
               </a:lnSpc>
@@ -26560,7 +27128,7 @@
           <a:bodyPr wrap="square" lIns="0" tIns="0" rIns="0" bIns="0" rtlCol="0" anchor="ctr"/>
           <a:lstStyle/>
           <a:p>
-            <a:pPr marL="0" indent="0">
+            <a:pPr indent="0" marL="0">
               <a:buNone/>
             </a:pPr>
             <a:r>
@@ -26599,7 +27167,7 @@
           <a:bodyPr wrap="square" lIns="0" tIns="0" rIns="0" bIns="0" rtlCol="0" anchor="t"/>
           <a:lstStyle/>
           <a:p>
-            <a:pPr marL="0" indent="0">
+            <a:pPr indent="0" marL="0">
               <a:lnSpc>
                 <a:spcPct val="105000"/>
               </a:lnSpc>
@@ -26668,7 +27236,7 @@
           <a:bodyPr wrap="square" lIns="0" tIns="0" rIns="0" bIns="0" rtlCol="0" anchor="ctr"/>
           <a:lstStyle/>
           <a:p>
-            <a:pPr marL="0" indent="0">
+            <a:pPr indent="0" marL="0">
               <a:buNone/>
             </a:pPr>
             <a:r>
@@ -26707,7 +27275,7 @@
           <a:bodyPr wrap="square" lIns="0" tIns="0" rIns="0" bIns="0" rtlCol="0" anchor="t"/>
           <a:lstStyle/>
           <a:p>
-            <a:pPr marL="0" indent="0">
+            <a:pPr indent="0" marL="0">
               <a:lnSpc>
                 <a:spcPct val="105000"/>
               </a:lnSpc>
@@ -26776,7 +27344,7 @@
           <a:bodyPr wrap="square" lIns="0" tIns="0" rIns="0" bIns="0" rtlCol="0" anchor="ctr"/>
           <a:lstStyle/>
           <a:p>
-            <a:pPr marL="0" indent="0">
+            <a:pPr indent="0" marL="0">
               <a:buNone/>
             </a:pPr>
             <a:r>
@@ -26815,7 +27383,7 @@
           <a:bodyPr wrap="square" lIns="0" tIns="0" rIns="0" bIns="0" rtlCol="0" anchor="t"/>
           <a:lstStyle/>
           <a:p>
-            <a:pPr marL="0" indent="0">
+            <a:pPr indent="0" marL="0">
               <a:lnSpc>
                 <a:spcPct val="105000"/>
               </a:lnSpc>
@@ -26884,7 +27452,7 @@
           <a:bodyPr wrap="square" lIns="0" tIns="0" rIns="0" bIns="0" rtlCol="0" anchor="ctr"/>
           <a:lstStyle/>
           <a:p>
-            <a:pPr marL="0" indent="0">
+            <a:pPr indent="0" marL="0">
               <a:buNone/>
             </a:pPr>
             <a:r>
@@ -26923,7 +27491,7 @@
           <a:bodyPr wrap="square" lIns="0" tIns="0" rIns="0" bIns="0" rtlCol="0" anchor="t"/>
           <a:lstStyle/>
           <a:p>
-            <a:pPr marL="0" indent="0">
+            <a:pPr indent="0" marL="0">
               <a:lnSpc>
                 <a:spcPct val="105000"/>
               </a:lnSpc>
@@ -26992,7 +27560,7 @@
           <a:bodyPr wrap="square" lIns="0" tIns="0" rIns="0" bIns="0" rtlCol="0" anchor="ctr"/>
           <a:lstStyle/>
           <a:p>
-            <a:pPr marL="0" indent="0">
+            <a:pPr indent="0" marL="0">
               <a:buNone/>
             </a:pPr>
             <a:r>
@@ -27031,7 +27599,7 @@
           <a:bodyPr wrap="square" lIns="0" tIns="0" rIns="0" bIns="0" rtlCol="0" anchor="t"/>
           <a:lstStyle/>
           <a:p>
-            <a:pPr marL="0" indent="0">
+            <a:pPr indent="0" marL="0">
               <a:lnSpc>
                 <a:spcPct val="105000"/>
               </a:lnSpc>
@@ -27100,7 +27668,7 @@
           <a:bodyPr wrap="square" lIns="0" tIns="0" rIns="0" bIns="0" rtlCol="0" anchor="ctr"/>
           <a:lstStyle/>
           <a:p>
-            <a:pPr marL="0" indent="0">
+            <a:pPr indent="0" marL="0">
               <a:lnSpc>
                 <a:spcPct val="112000"/>
               </a:lnSpc>
@@ -27123,7 +27691,7 @@
       </p:sp>
       <p:sp>
         <p:nvSpPr>
-          <p:cNvPr id="28" name="Slide Number Placeholder 0"/>
+          <p:cNvPr id="25" name="Slide Number Placeholder 0"/>
           <p:cNvSpPr>
             <a:spLocks noGrp="1"/>
           </p:cNvSpPr>
@@ -27141,7 +27709,7 @@
           </a:prstGeom>
           <a:extLst>
             <a:ext uri="{C572A759-6A51-4108-AA02-DFA0A04FC94B}">
-              <ma14:wrappingTextBoxFlag xmlns:ma14="http://schemas.microsoft.com/office/mac/drawingml/2011/main" xmlns="" val="0"/>
+              <ma14:wrappingTextBoxFlag xmlns:ma14="http://schemas.microsoft.com/office/mac/drawingml/2011/main" val="0"/>
             </a:ext>
           </a:extLst>
         </p:spPr>
@@ -27162,7 +27730,7 @@
           <a:p>
             <a:pPr algn="l"/>
             <a:fld id="{F7021451-1387-4CA6-816F-3879F97B5CBC}" type="slidenum">
-              <a:rPr lang="en-US" b="0"/>
+              <a:rPr b="0" lang="en-US"/>
               <a:t>4</a:t>
             </a:fld>
             <a:endParaRPr lang="en-US"/>
@@ -27215,11 +27783,11 @@
           <a:bodyPr wrap="square" lIns="0" tIns="0" rIns="0" bIns="0" rtlCol="0" anchor="ctr"/>
           <a:lstStyle/>
           <a:p>
-            <a:pPr marL="0" indent="0">
-              <a:buNone/>
-            </a:pPr>
-            <a:r>
-              <a:rPr lang="en-US" sz="1200" b="1" kern="0" spc="400" dirty="0">
+            <a:pPr indent="0" marL="0">
+              <a:buNone/>
+            </a:pPr>
+            <a:r>
+              <a:rPr lang="en-US" sz="1200" b="1" spc="400" kern="0" dirty="0">
                 <a:solidFill>
                   <a:srgbClr val="FFFFFF"/>
                 </a:solidFill>
@@ -27254,7 +27822,7 @@
           <a:bodyPr wrap="square" lIns="0" tIns="0" rIns="0" bIns="0" rtlCol="0" anchor="ctr"/>
           <a:lstStyle/>
           <a:p>
-            <a:pPr marL="0" indent="0">
+            <a:pPr indent="0" marL="0">
               <a:buNone/>
             </a:pPr>
             <a:r>
@@ -27293,7 +27861,7 @@
           <a:bodyPr wrap="square" lIns="0" tIns="0" rIns="0" bIns="0" rtlCol="0" anchor="t"/>
           <a:lstStyle/>
           <a:p>
-            <a:pPr marL="0" indent="0">
+            <a:pPr indent="0" marL="0">
               <a:buNone/>
             </a:pPr>
             <a:r>
@@ -27379,7 +27947,7 @@
           <a:bodyPr wrap="square" lIns="0" tIns="0" rIns="0" bIns="0" rtlCol="0" anchor="ctr"/>
           <a:lstStyle/>
           <a:p>
-            <a:pPr marL="0" indent="0" algn="l">
+            <a:pPr algn="l" indent="0" marL="0">
               <a:buNone/>
             </a:pPr>
             <a:r>
@@ -27418,7 +27986,7 @@
           <a:bodyPr wrap="square" lIns="0" tIns="0" rIns="0" bIns="0" rtlCol="0" anchor="ctr"/>
           <a:lstStyle/>
           <a:p>
-            <a:pPr marL="0" indent="0">
+            <a:pPr indent="0" marL="0">
               <a:buNone/>
             </a:pPr>
             <a:r>
@@ -27484,11 +28052,11 @@
           <a:bodyPr wrap="square" lIns="0" tIns="0" rIns="0" bIns="0" rtlCol="0" anchor="ctr"/>
           <a:lstStyle/>
           <a:p>
-            <a:pPr marL="0" indent="0" algn="ctr">
-              <a:buNone/>
-            </a:pPr>
-            <a:r>
-              <a:rPr lang="en-US" sz="900" b="1" kern="0" spc="100" dirty="0">
+            <a:pPr algn="ctr" indent="0" marL="0">
+              <a:buNone/>
+            </a:pPr>
+            <a:r>
+              <a:rPr lang="en-US" sz="900" b="1" spc="100" kern="0" dirty="0">
                 <a:solidFill>
                   <a:srgbClr val="5A05F4"/>
                 </a:solidFill>
@@ -27504,14 +28072,14 @@
       </p:sp>
       <p:pic>
         <p:nvPicPr>
-          <p:cNvPr id="7" name="Image 0" descr="preencoded.png"/>
+          <p:cNvPr id="7" name="Image 0" descr="preencoded.png">    </p:cNvPr>
           <p:cNvPicPr>
             <a:picLocks noChangeAspect="1"/>
           </p:cNvPicPr>
           <p:nvPr/>
         </p:nvPicPr>
         <p:blipFill>
-          <a:blip r:embed="rId3"/>
+          <a:blip r:embed="rId1"/>
           <a:stretch>
             <a:fillRect/>
           </a:stretch>
@@ -27589,7 +28157,7 @@
           <a:bodyPr wrap="square" lIns="0" tIns="0" rIns="0" bIns="0" rtlCol="0" anchor="ctr"/>
           <a:lstStyle/>
           <a:p>
-            <a:pPr marL="0" indent="0" algn="ctr">
+            <a:pPr algn="ctr" indent="0" marL="0">
               <a:buNone/>
             </a:pPr>
             <a:r>
@@ -27628,7 +28196,7 @@
           <a:bodyPr wrap="square" lIns="0" tIns="0" rIns="0" bIns="0" rtlCol="0" anchor="ctr"/>
           <a:lstStyle/>
           <a:p>
-            <a:pPr marL="0" indent="0">
+            <a:pPr indent="0" marL="0">
               <a:buNone/>
             </a:pPr>
             <a:r>
@@ -27667,7 +28235,7 @@
           <a:bodyPr wrap="square" lIns="0" tIns="0" rIns="0" bIns="0" rtlCol="0" anchor="t"/>
           <a:lstStyle/>
           <a:p>
-            <a:pPr marL="0" indent="0">
+            <a:pPr indent="0" marL="0">
               <a:lnSpc>
                 <a:spcPct val="108000"/>
               </a:lnSpc>
@@ -27751,7 +28319,7 @@
           <a:bodyPr wrap="square" lIns="0" tIns="0" rIns="0" bIns="0" rtlCol="0" anchor="ctr"/>
           <a:lstStyle/>
           <a:p>
-            <a:pPr marL="0" indent="0" algn="ctr">
+            <a:pPr algn="ctr" indent="0" marL="0">
               <a:buNone/>
             </a:pPr>
             <a:r>
@@ -27790,7 +28358,7 @@
           <a:bodyPr wrap="square" lIns="0" tIns="0" rIns="0" bIns="0" rtlCol="0" anchor="ctr"/>
           <a:lstStyle/>
           <a:p>
-            <a:pPr marL="0" indent="0">
+            <a:pPr indent="0" marL="0">
               <a:buNone/>
             </a:pPr>
             <a:r>
@@ -27829,7 +28397,7 @@
           <a:bodyPr wrap="square" lIns="0" tIns="0" rIns="0" bIns="0" rtlCol="0" anchor="t"/>
           <a:lstStyle/>
           <a:p>
-            <a:pPr marL="0" indent="0">
+            <a:pPr indent="0" marL="0">
               <a:lnSpc>
                 <a:spcPct val="108000"/>
               </a:lnSpc>
@@ -27913,7 +28481,7 @@
           <a:bodyPr wrap="square" lIns="0" tIns="0" rIns="0" bIns="0" rtlCol="0" anchor="ctr"/>
           <a:lstStyle/>
           <a:p>
-            <a:pPr marL="0" indent="0" algn="ctr">
+            <a:pPr algn="ctr" indent="0" marL="0">
               <a:buNone/>
             </a:pPr>
             <a:r>
@@ -27952,7 +28520,7 @@
           <a:bodyPr wrap="square" lIns="0" tIns="0" rIns="0" bIns="0" rtlCol="0" anchor="ctr"/>
           <a:lstStyle/>
           <a:p>
-            <a:pPr marL="0" indent="0">
+            <a:pPr indent="0" marL="0">
               <a:buNone/>
             </a:pPr>
             <a:r>
@@ -27964,7 +28532,7 @@
                 <a:ea typeface="Montserrat" pitchFamily="34" charset="-122"/>
                 <a:cs typeface="Montserrat" pitchFamily="34" charset="-120"/>
               </a:rPr>
-              <a:t>Трафік поповз на слабшу</a:t>
+              <a:t>Трафік змістився на слабшу</a:t>
             </a:r>
             <a:endParaRPr lang="en-US" sz="1450" dirty="0"/>
           </a:p>
@@ -27991,7 +28559,7 @@
           <a:bodyPr wrap="square" lIns="0" tIns="0" rIns="0" bIns="0" rtlCol="0" anchor="t"/>
           <a:lstStyle/>
           <a:p>
-            <a:pPr marL="0" indent="0">
+            <a:pPr indent="0" marL="0">
               <a:lnSpc>
                 <a:spcPct val="108000"/>
               </a:lnSpc>
@@ -28055,7 +28623,7 @@
           <a:bodyPr wrap="square" lIns="0" tIns="0" rIns="0" bIns="0" rtlCol="0" anchor="ctr"/>
           <a:lstStyle/>
           <a:p>
-            <a:pPr marL="0" indent="0" algn="ctr">
+            <a:pPr algn="ctr" indent="0" marL="0">
               <a:buNone/>
             </a:pPr>
             <a:r>
@@ -28159,7 +28727,7 @@
           <a:bodyPr wrap="square" lIns="0" tIns="0" rIns="0" bIns="0" rtlCol="0" anchor="ctr"/>
           <a:lstStyle/>
           <a:p>
-            <a:pPr marL="0" indent="0" algn="ctr">
+            <a:pPr algn="ctr" indent="0" marL="0">
               <a:buNone/>
             </a:pPr>
             <a:r>
@@ -28263,7 +28831,7 @@
           <a:bodyPr wrap="square" lIns="0" tIns="0" rIns="0" bIns="0" rtlCol="0" anchor="ctr"/>
           <a:lstStyle/>
           <a:p>
-            <a:pPr marL="0" indent="0" algn="ctr">
+            <a:pPr algn="ctr" indent="0" marL="0">
               <a:buNone/>
             </a:pPr>
             <a:r>
@@ -28367,7 +28935,7 @@
           <a:bodyPr wrap="square" lIns="0" tIns="0" rIns="0" bIns="0" rtlCol="0" anchor="ctr"/>
           <a:lstStyle/>
           <a:p>
-            <a:pPr marL="0" indent="0" algn="ctr">
+            <a:pPr algn="ctr" indent="0" marL="0">
               <a:buNone/>
             </a:pPr>
             <a:r>
@@ -28406,7 +28974,7 @@
           <a:bodyPr wrap="square" lIns="0" tIns="0" rIns="0" bIns="0" rtlCol="0" anchor="ctr"/>
           <a:lstStyle/>
           <a:p>
-            <a:pPr marL="0" indent="0">
+            <a:pPr indent="0" marL="0">
               <a:buNone/>
             </a:pPr>
             <a:r>
@@ -28448,14 +29016,34 @@
       </p:sp>
       <p:sp>
         <p:nvSpPr>
-          <p:cNvPr id="39" name="Text 36"/>
-          <p:cNvSpPr/>
-          <p:nvPr/>
-        </p:nvSpPr>
-        <p:spPr>
-          <a:xfrm>
-            <a:off x="786384" y="4928616"/>
-            <a:ext cx="10625328" cy="219456"/>
+          <p:cNvPr id="39" name="Shape 36"/>
+          <p:cNvSpPr/>
+          <p:nvPr/>
+        </p:nvSpPr>
+        <p:spPr>
+          <a:xfrm>
+            <a:off x="749808" y="5170932"/>
+            <a:ext cx="310896" cy="310896"/>
+          </a:xfrm>
+          <a:prstGeom prst="ellipse">
+            <a:avLst/>
+          </a:prstGeom>
+          <a:solidFill>
+            <a:srgbClr val="FFFFFF"/>
+          </a:solidFill>
+          <a:ln/>
+        </p:spPr>
+      </p:sp>
+      <p:sp>
+        <p:nvSpPr>
+          <p:cNvPr id="40" name="Text 37"/>
+          <p:cNvSpPr/>
+          <p:nvPr/>
+        </p:nvSpPr>
+        <p:spPr>
+          <a:xfrm>
+            <a:off x="749808" y="5170932"/>
+            <a:ext cx="310896" cy="310896"/>
           </a:xfrm>
           <a:prstGeom prst="rect">
             <a:avLst/>
@@ -28467,11 +29055,50 @@
           <a:bodyPr wrap="square" lIns="0" tIns="0" rIns="0" bIns="0" rtlCol="0" anchor="ctr"/>
           <a:lstStyle/>
           <a:p>
-            <a:pPr marL="0" indent="0">
-              <a:buNone/>
-            </a:pPr>
-            <a:r>
-              <a:rPr lang="en-US" sz="950" b="1" kern="0" spc="150" dirty="0">
+            <a:pPr algn="ctr" indent="0" marL="0">
+              <a:buNone/>
+            </a:pPr>
+            <a:r>
+              <a:rPr lang="en-US" sz="1200" b="1" dirty="0">
+                <a:solidFill>
+                  <a:srgbClr val="5A05F4"/>
+                </a:solidFill>
+                <a:latin typeface="Arial" pitchFamily="34" charset="0"/>
+                <a:ea typeface="Arial" pitchFamily="34" charset="-122"/>
+                <a:cs typeface="Arial" pitchFamily="34" charset="-120"/>
+              </a:rPr>
+              <a:t>?</a:t>
+            </a:r>
+            <a:endParaRPr lang="en-US" sz="1200" dirty="0"/>
+          </a:p>
+        </p:txBody>
+      </p:sp>
+      <p:sp>
+        <p:nvSpPr>
+          <p:cNvPr id="41" name="Text 38"/>
+          <p:cNvSpPr/>
+          <p:nvPr/>
+        </p:nvSpPr>
+        <p:spPr>
+          <a:xfrm>
+            <a:off x="1243584" y="4928616"/>
+            <a:ext cx="10168128" cy="219456"/>
+          </a:xfrm>
+          <a:prstGeom prst="rect">
+            <a:avLst/>
+          </a:prstGeom>
+          <a:noFill/>
+          <a:ln/>
+        </p:spPr>
+        <p:txBody>
+          <a:bodyPr wrap="square" lIns="0" tIns="0" rIns="0" bIns="0" rtlCol="0" anchor="ctr"/>
+          <a:lstStyle/>
+          <a:p>
+            <a:pPr indent="0" marL="0">
+              <a:buNone/>
+            </a:pPr>
+            <a:r>
+              <a:rPr lang="en-US" sz="950" b="1" spc="150" kern="0" dirty="0">
                 <a:solidFill>
                   <a:srgbClr val="FFFFFF"/>
                 </a:solidFill>
@@ -28487,14 +29114,14 @@
       </p:sp>
       <p:sp>
         <p:nvSpPr>
-          <p:cNvPr id="40" name="Text 37"/>
-          <p:cNvSpPr/>
-          <p:nvPr/>
-        </p:nvSpPr>
-        <p:spPr>
-          <a:xfrm>
-            <a:off x="786384" y="5184648"/>
-            <a:ext cx="10625328" cy="539496"/>
+          <p:cNvPr id="42" name="Text 39"/>
+          <p:cNvSpPr/>
+          <p:nvPr/>
+        </p:nvSpPr>
+        <p:spPr>
+          <a:xfrm>
+            <a:off x="1243584" y="5184648"/>
+            <a:ext cx="10168128" cy="539496"/>
           </a:xfrm>
           <a:prstGeom prst="rect">
             <a:avLst/>
@@ -28506,7 +29133,7 @@
           <a:bodyPr wrap="square" lIns="0" tIns="0" rIns="0" bIns="0" rtlCol="0" anchor="ctr"/>
           <a:lstStyle/>
           <a:p>
-            <a:pPr marL="0" indent="0">
+            <a:pPr indent="0" marL="0">
               <a:lnSpc>
                 <a:spcPct val="112000"/>
               </a:lnSpc>
@@ -28529,7 +29156,7 @@
       </p:sp>
       <p:sp>
         <p:nvSpPr>
-          <p:cNvPr id="41" name="Slide Number Placeholder 0"/>
+          <p:cNvPr id="25" name="Slide Number Placeholder 0"/>
           <p:cNvSpPr>
             <a:spLocks noGrp="1"/>
           </p:cNvSpPr>
@@ -28547,7 +29174,7 @@
           </a:prstGeom>
           <a:extLst>
             <a:ext uri="{C572A759-6A51-4108-AA02-DFA0A04FC94B}">
-              <ma14:wrappingTextBoxFlag xmlns:ma14="http://schemas.microsoft.com/office/mac/drawingml/2011/main" xmlns="" val="0"/>
+              <ma14:wrappingTextBoxFlag xmlns:ma14="http://schemas.microsoft.com/office/mac/drawingml/2011/main" val="0"/>
             </a:ext>
           </a:extLst>
         </p:spPr>
@@ -28568,7 +29195,7 @@
           <a:p>
             <a:pPr algn="l"/>
             <a:fld id="{F7021451-1387-4CA6-816F-3879F97B5CBC}" type="slidenum">
-              <a:rPr lang="en-US" b="0"/>
+              <a:rPr b="0" lang="en-US"/>
               <a:t>6</a:t>
             </a:fld>
             <a:endParaRPr lang="en-US"/>
@@ -28643,7 +29270,7 @@
           <a:bodyPr wrap="square" lIns="0" tIns="0" rIns="0" bIns="0" rtlCol="0" anchor="ctr"/>
           <a:lstStyle/>
           <a:p>
-            <a:pPr marL="0" indent="0" algn="l">
+            <a:pPr algn="l" indent="0" marL="0">
               <a:buNone/>
             </a:pPr>
             <a:r>
@@ -28682,7 +29309,7 @@
           <a:bodyPr wrap="square" lIns="0" tIns="0" rIns="0" bIns="0" rtlCol="0" anchor="ctr"/>
           <a:lstStyle/>
           <a:p>
-            <a:pPr marL="0" indent="0">
+            <a:pPr indent="0" marL="0">
               <a:buNone/>
             </a:pPr>
             <a:r>
@@ -28748,11 +29375,11 @@
           <a:bodyPr wrap="square" lIns="0" tIns="0" rIns="0" bIns="0" rtlCol="0" anchor="ctr"/>
           <a:lstStyle/>
           <a:p>
-            <a:pPr marL="0" indent="0" algn="ctr">
-              <a:buNone/>
-            </a:pPr>
-            <a:r>
-              <a:rPr lang="en-US" sz="900" b="1" kern="0" spc="100" dirty="0">
+            <a:pPr algn="ctr" indent="0" marL="0">
+              <a:buNone/>
+            </a:pPr>
+            <a:r>
+              <a:rPr lang="en-US" sz="900" b="1" spc="100" kern="0" dirty="0">
                 <a:solidFill>
                   <a:srgbClr val="5A05F4"/>
                 </a:solidFill>
@@ -28768,14 +29395,14 @@
       </p:sp>
       <p:pic>
         <p:nvPicPr>
-          <p:cNvPr id="7" name="Image 0" descr="preencoded.png"/>
+          <p:cNvPr id="7" name="Image 0" descr="preencoded.png">    </p:cNvPr>
           <p:cNvPicPr>
             <a:picLocks noChangeAspect="1"/>
           </p:cNvPicPr>
           <p:nvPr/>
         </p:nvPicPr>
         <p:blipFill>
-          <a:blip r:embed="rId3"/>
+          <a:blip r:embed="rId1"/>
           <a:stretch>
             <a:fillRect/>
           </a:stretch>
@@ -28799,7 +29426,7 @@
         <p:spPr>
           <a:xfrm>
             <a:off x="566928" y="1737360"/>
-            <a:ext cx="11030407" cy="777240"/>
+            <a:ext cx="11064240" cy="777240"/>
           </a:xfrm>
           <a:prstGeom prst="roundRect">
             <a:avLst>
@@ -28838,7 +29465,7 @@
           <a:bodyPr wrap="square" lIns="0" tIns="0" rIns="0" bIns="0" rtlCol="0" anchor="t"/>
           <a:lstStyle/>
           <a:p>
-            <a:pPr marL="0" indent="0">
+            <a:pPr indent="0" marL="0">
               <a:lnSpc>
                 <a:spcPct val="130000"/>
               </a:lnSpc>
@@ -28922,7 +29549,7 @@
           <a:bodyPr wrap="square" lIns="0" tIns="0" rIns="0" bIns="0" rtlCol="0" anchor="ctr"/>
           <a:lstStyle/>
           <a:p>
-            <a:pPr marL="0" indent="0" algn="ctr">
+            <a:pPr algn="ctr" indent="0" marL="0">
               <a:buNone/>
             </a:pPr>
             <a:r>
@@ -28961,7 +29588,7 @@
           <a:bodyPr wrap="square" lIns="0" tIns="0" rIns="0" bIns="0" rtlCol="0" anchor="ctr"/>
           <a:lstStyle/>
           <a:p>
-            <a:pPr marL="0" indent="0">
+            <a:pPr indent="0" marL="0">
               <a:buNone/>
             </a:pPr>
             <a:r>
@@ -29000,7 +29627,7 @@
           <a:bodyPr wrap="square" lIns="0" tIns="0" rIns="0" bIns="0" rtlCol="0" anchor="t"/>
           <a:lstStyle/>
           <a:p>
-            <a:pPr marL="0" indent="0">
+            <a:pPr indent="0" marL="0">
               <a:lnSpc>
                 <a:spcPct val="108000"/>
               </a:lnSpc>
@@ -29029,7 +29656,7 @@
         </p:nvSpPr>
         <p:spPr>
           <a:xfrm>
-            <a:off x="4335780" y="2834640"/>
+            <a:off x="4270248" y="2834640"/>
             <a:ext cx="3520440" cy="1600200"/>
           </a:xfrm>
           <a:prstGeom prst="roundRect">
@@ -29051,29 +29678,29 @@
         </p:nvSpPr>
         <p:spPr>
           <a:xfrm>
-            <a:off x="4536948" y="3017520"/>
-            <a:ext cx="384048" cy="384048"/>
-          </a:xfrm>
-          <a:prstGeom prst="ellipse">
-            <a:avLst/>
-          </a:prstGeom>
-          <a:solidFill>
-            <a:srgbClr val="5A05F4"/>
-          </a:solidFill>
-          <a:ln/>
-        </p:spPr>
-      </p:sp>
-      <p:sp>
-        <p:nvSpPr>
-          <p:cNvPr id="17" name="Text 14"/>
-          <p:cNvSpPr/>
-          <p:nvPr/>
-        </p:nvSpPr>
-        <p:spPr>
-          <a:xfrm>
             <a:off x="4471416" y="3017520"/>
             <a:ext cx="384048" cy="384048"/>
           </a:xfrm>
+          <a:prstGeom prst="ellipse">
+            <a:avLst/>
+          </a:prstGeom>
+          <a:solidFill>
+            <a:srgbClr val="5A05F4"/>
+          </a:solidFill>
+          <a:ln/>
+        </p:spPr>
+      </p:sp>
+      <p:sp>
+        <p:nvSpPr>
+          <p:cNvPr id="17" name="Text 14"/>
+          <p:cNvSpPr/>
+          <p:nvPr/>
+        </p:nvSpPr>
+        <p:spPr>
+          <a:xfrm>
+            <a:off x="4471416" y="3017520"/>
+            <a:ext cx="384048" cy="384048"/>
+          </a:xfrm>
           <a:prstGeom prst="rect">
             <a:avLst/>
           </a:prstGeom>
@@ -29084,7 +29711,7 @@
           <a:bodyPr wrap="square" lIns="0" tIns="0" rIns="0" bIns="0" rtlCol="0" anchor="ctr"/>
           <a:lstStyle/>
           <a:p>
-            <a:pPr marL="0" indent="0" algn="ctr">
+            <a:pPr algn="ctr" indent="0" marL="0">
               <a:buNone/>
             </a:pPr>
             <a:r>
@@ -29110,7 +29737,7 @@
         </p:nvSpPr>
         <p:spPr>
           <a:xfrm>
-            <a:off x="5049012" y="2990088"/>
+            <a:off x="4983480" y="2990088"/>
             <a:ext cx="2606040" cy="438912"/>
           </a:xfrm>
           <a:prstGeom prst="rect">
@@ -29123,7 +29750,7 @@
           <a:bodyPr wrap="square" lIns="0" tIns="0" rIns="0" bIns="0" rtlCol="0" anchor="ctr"/>
           <a:lstStyle/>
           <a:p>
-            <a:pPr marL="0" indent="0">
+            <a:pPr indent="0" marL="0">
               <a:buNone/>
             </a:pPr>
             <a:r>
@@ -29149,7 +29776,7 @@
         </p:nvSpPr>
         <p:spPr>
           <a:xfrm>
-            <a:off x="4536948" y="3520440"/>
+            <a:off x="4471416" y="3520440"/>
             <a:ext cx="3118104" cy="758952"/>
           </a:xfrm>
           <a:prstGeom prst="rect">
@@ -29162,7 +29789,7 @@
           <a:bodyPr wrap="square" lIns="0" tIns="0" rIns="0" bIns="0" rtlCol="0" anchor="t"/>
           <a:lstStyle/>
           <a:p>
-            <a:pPr marL="0" indent="0">
+            <a:pPr indent="0" marL="0">
               <a:lnSpc>
                 <a:spcPct val="108000"/>
               </a:lnSpc>
@@ -29191,7 +29818,7 @@
         </p:nvSpPr>
         <p:spPr>
           <a:xfrm>
-            <a:off x="8076895" y="2820347"/>
+            <a:off x="7973568" y="2834640"/>
             <a:ext cx="3520440" cy="1600200"/>
           </a:xfrm>
           <a:prstGeom prst="roundRect">
@@ -29213,29 +29840,29 @@
         </p:nvSpPr>
         <p:spPr>
           <a:xfrm>
-            <a:off x="8278063" y="3003227"/>
-            <a:ext cx="384048" cy="384048"/>
-          </a:xfrm>
-          <a:prstGeom prst="ellipse">
-            <a:avLst/>
-          </a:prstGeom>
-          <a:solidFill>
-            <a:srgbClr val="5A05F4"/>
-          </a:solidFill>
-          <a:ln/>
-        </p:spPr>
-      </p:sp>
-      <p:sp>
-        <p:nvSpPr>
-          <p:cNvPr id="22" name="Text 19"/>
-          <p:cNvSpPr/>
-          <p:nvPr/>
-        </p:nvSpPr>
-        <p:spPr>
-          <a:xfrm>
             <a:off x="8174736" y="3017520"/>
             <a:ext cx="384048" cy="384048"/>
           </a:xfrm>
+          <a:prstGeom prst="ellipse">
+            <a:avLst/>
+          </a:prstGeom>
+          <a:solidFill>
+            <a:srgbClr val="5A05F4"/>
+          </a:solidFill>
+          <a:ln/>
+        </p:spPr>
+      </p:sp>
+      <p:sp>
+        <p:nvSpPr>
+          <p:cNvPr id="22" name="Text 19"/>
+          <p:cNvSpPr/>
+          <p:nvPr/>
+        </p:nvSpPr>
+        <p:spPr>
+          <a:xfrm>
+            <a:off x="8174736" y="3017520"/>
+            <a:ext cx="384048" cy="384048"/>
+          </a:xfrm>
           <a:prstGeom prst="rect">
             <a:avLst/>
           </a:prstGeom>
@@ -29246,7 +29873,7 @@
           <a:bodyPr wrap="square" lIns="0" tIns="0" rIns="0" bIns="0" rtlCol="0" anchor="ctr"/>
           <a:lstStyle/>
           <a:p>
-            <a:pPr marL="0" indent="0" algn="ctr">
+            <a:pPr algn="ctr" indent="0" marL="0">
               <a:buNone/>
             </a:pPr>
             <a:r>
@@ -29272,7 +29899,7 @@
         </p:nvSpPr>
         <p:spPr>
           <a:xfrm>
-            <a:off x="8790127" y="2975795"/>
+            <a:off x="8686800" y="2990088"/>
             <a:ext cx="2606040" cy="438912"/>
           </a:xfrm>
           <a:prstGeom prst="rect">
@@ -29285,7 +29912,7 @@
           <a:bodyPr wrap="square" lIns="0" tIns="0" rIns="0" bIns="0" rtlCol="0" anchor="ctr"/>
           <a:lstStyle/>
           <a:p>
-            <a:pPr marL="0" indent="0">
+            <a:pPr indent="0" marL="0">
               <a:buNone/>
             </a:pPr>
             <a:r>
@@ -29311,7 +29938,7 @@
         </p:nvSpPr>
         <p:spPr>
           <a:xfrm>
-            <a:off x="8278063" y="3506147"/>
+            <a:off x="8174736" y="3520440"/>
             <a:ext cx="3118104" cy="758952"/>
           </a:xfrm>
           <a:prstGeom prst="rect">
@@ -29324,7 +29951,7 @@
           <a:bodyPr wrap="square" lIns="0" tIns="0" rIns="0" bIns="0" rtlCol="0" anchor="t"/>
           <a:lstStyle/>
           <a:p>
-            <a:pPr marL="0" indent="0">
+            <a:pPr indent="0" marL="0">
               <a:lnSpc>
                 <a:spcPct val="108000"/>
               </a:lnSpc>
@@ -29354,7 +29981,7 @@
         <p:spPr>
           <a:xfrm>
             <a:off x="566928" y="4617720"/>
-            <a:ext cx="11030407" cy="1234440"/>
+            <a:ext cx="11064240" cy="1234440"/>
           </a:xfrm>
           <a:prstGeom prst="roundRect">
             <a:avLst>
@@ -29393,7 +30020,7 @@
           <a:bodyPr wrap="square" lIns="0" tIns="0" rIns="0" bIns="0" rtlCol="0" anchor="ctr"/>
           <a:lstStyle/>
           <a:p>
-            <a:pPr marL="0" indent="0">
+            <a:pPr indent="0" marL="0">
               <a:lnSpc>
                 <a:spcPct val="112000"/>
               </a:lnSpc>
@@ -29416,7 +30043,7 @@
       </p:sp>
       <p:sp>
         <p:nvSpPr>
-          <p:cNvPr id="27" name="Slide Number Placeholder 0"/>
+          <p:cNvPr id="25" name="Slide Number Placeholder 0"/>
           <p:cNvSpPr>
             <a:spLocks noGrp="1"/>
           </p:cNvSpPr>
@@ -29434,7 +30061,7 @@
           </a:prstGeom>
           <a:extLst>
             <a:ext uri="{C572A759-6A51-4108-AA02-DFA0A04FC94B}">
-              <ma14:wrappingTextBoxFlag xmlns:ma14="http://schemas.microsoft.com/office/mac/drawingml/2011/main" xmlns="" val="0"/>
+              <ma14:wrappingTextBoxFlag xmlns:ma14="http://schemas.microsoft.com/office/mac/drawingml/2011/main" val="0"/>
             </a:ext>
           </a:extLst>
         </p:spPr>
@@ -29455,7 +30082,7 @@
           <a:p>
             <a:pPr algn="l"/>
             <a:fld id="{F7021451-1387-4CA6-816F-3879F97B5CBC}" type="slidenum">
-              <a:rPr lang="en-US" b="0"/>
+              <a:rPr b="0" lang="en-US"/>
               <a:t>7</a:t>
             </a:fld>
             <a:endParaRPr lang="en-US"/>
@@ -29530,7 +30157,7 @@
           <a:bodyPr wrap="square" lIns="0" tIns="0" rIns="0" bIns="0" rtlCol="0" anchor="ctr"/>
           <a:lstStyle/>
           <a:p>
-            <a:pPr marL="0" indent="0" algn="l">
+            <a:pPr algn="l" indent="0" marL="0">
               <a:buNone/>
             </a:pPr>
             <a:r>
@@ -29569,7 +30196,7 @@
           <a:bodyPr wrap="square" lIns="0" tIns="0" rIns="0" bIns="0" rtlCol="0" anchor="ctr"/>
           <a:lstStyle/>
           <a:p>
-            <a:pPr marL="0" indent="0">
+            <a:pPr indent="0" marL="0">
               <a:buNone/>
             </a:pPr>
             <a:r>
@@ -29635,11 +30262,11 @@
           <a:bodyPr wrap="square" lIns="0" tIns="0" rIns="0" bIns="0" rtlCol="0" anchor="ctr"/>
           <a:lstStyle/>
           <a:p>
-            <a:pPr marL="0" indent="0" algn="ctr">
-              <a:buNone/>
-            </a:pPr>
-            <a:r>
-              <a:rPr lang="en-US" sz="900" b="1" kern="0" spc="100" dirty="0">
+            <a:pPr algn="ctr" indent="0" marL="0">
+              <a:buNone/>
+            </a:pPr>
+            <a:r>
+              <a:rPr lang="en-US" sz="900" b="1" spc="100" kern="0" dirty="0">
                 <a:solidFill>
                   <a:srgbClr val="5A05F4"/>
                 </a:solidFill>
@@ -29655,14 +30282,14 @@
       </p:sp>
       <p:pic>
         <p:nvPicPr>
-          <p:cNvPr id="7" name="Image 0" descr="preencoded.png"/>
+          <p:cNvPr id="7" name="Image 0" descr="preencoded.png">    </p:cNvPr>
           <p:cNvPicPr>
             <a:picLocks noChangeAspect="1"/>
           </p:cNvPicPr>
           <p:nvPr/>
         </p:nvPicPr>
         <p:blipFill>
-          <a:blip r:embed="rId3"/>
+          <a:blip r:embed="rId1"/>
           <a:stretch>
             <a:fillRect/>
           </a:stretch>
@@ -29693,34 +30320,16 @@
         </p:nvGraphicFramePr>
         <p:xfrm>
           <a:off x="566928" y="1737360"/>
-          <a:ext cx="6766560" cy="2743200"/>
+          <a:ext cx="6766560" cy="914400"/>
         </p:xfrm>
         <a:graphic>
           <a:graphicData uri="http://schemas.openxmlformats.org/drawingml/2006/table">
             <a:tbl>
               <a:tblPr/>
               <a:tblGrid>
-                <a:gridCol w="2377440">
-                  <a:extLst>
-                    <a:ext uri="{9D8B030D-6E8A-4147-A177-3AD203B41FA5}">
-                      <a16:colId xmlns:a16="http://schemas.microsoft.com/office/drawing/2014/main" val="20000"/>
-                    </a:ext>
-                  </a:extLst>
-                </a:gridCol>
-                <a:gridCol w="2194560">
-                  <a:extLst>
-                    <a:ext uri="{9D8B030D-6E8A-4147-A177-3AD203B41FA5}">
-                      <a16:colId xmlns:a16="http://schemas.microsoft.com/office/drawing/2014/main" val="20001"/>
-                    </a:ext>
-                  </a:extLst>
-                </a:gridCol>
-                <a:gridCol w="2194560">
-                  <a:extLst>
-                    <a:ext uri="{9D8B030D-6E8A-4147-A177-3AD203B41FA5}">
-                      <a16:colId xmlns:a16="http://schemas.microsoft.com/office/drawing/2014/main" val="20002"/>
-                    </a:ext>
-                  </a:extLst>
-                </a:gridCol>
+                <a:gridCol w="2377440"/>
+                <a:gridCol w="2194560"/>
+                <a:gridCol w="2194560"/>
               </a:tblGrid>
               <a:tr h="548640">
                 <a:tc>
@@ -29728,11 +30337,11 @@
                     <a:bodyPr/>
                     <a:lstStyle/>
                     <a:p>
-                      <a:pPr marL="0" indent="0" algn="ctr">
+                      <a:pPr algn="ctr" indent="0" marL="0">
                         <a:buNone/>
                       </a:pPr>
                       <a:r>
-                        <a:rPr lang="en-US" sz="900" b="1" kern="0" spc="100" dirty="0">
+                        <a:rPr lang="en-US" sz="900" b="1" spc="100" kern="0" dirty="0">
                           <a:solidFill>
                             <a:srgbClr val="FFFFFF"/>
                           </a:solidFill>
@@ -29796,11 +30405,11 @@
                     <a:bodyPr/>
                     <a:lstStyle/>
                     <a:p>
-                      <a:pPr marL="0" indent="0" algn="ctr">
+                      <a:pPr algn="ctr" indent="0" marL="0">
                         <a:buNone/>
                       </a:pPr>
                       <a:r>
-                        <a:rPr lang="en-US" sz="900" b="1" kern="0" spc="100" dirty="0">
+                        <a:rPr lang="en-US" sz="900" b="1" spc="100" kern="0" dirty="0">
                           <a:solidFill>
                             <a:srgbClr val="FFFFFF"/>
                           </a:solidFill>
@@ -29864,11 +30473,11 @@
                     <a:bodyPr/>
                     <a:lstStyle/>
                     <a:p>
-                      <a:pPr marL="0" indent="0" algn="ctr">
+                      <a:pPr algn="ctr" indent="0" marL="0">
                         <a:buNone/>
                       </a:pPr>
                       <a:r>
-                        <a:rPr lang="en-US" sz="900" b="1" kern="0" spc="100" dirty="0">
+                        <a:rPr lang="en-US" sz="900" b="1" spc="100" kern="0" dirty="0">
                           <a:solidFill>
                             <a:srgbClr val="FFFFFF"/>
                           </a:solidFill>
@@ -29927,11 +30536,6 @@
                     </a:solidFill>
                   </a:tcPr>
                 </a:tc>
-                <a:extLst>
-                  <a:ext uri="{0D108BD9-81ED-4DB2-BD59-A6C34878D82A}">
-                    <a16:rowId xmlns:a16="http://schemas.microsoft.com/office/drawing/2014/main" val="10000"/>
-                  </a:ext>
-                </a:extLst>
               </a:tr>
               <a:tr h="548640">
                 <a:tc>
@@ -29939,7 +30543,7 @@
                     <a:bodyPr/>
                     <a:lstStyle/>
                     <a:p>
-                      <a:pPr marL="0" indent="0">
+                      <a:pPr indent="0" marL="0">
                         <a:buNone/>
                       </a:pPr>
                       <a:r>
@@ -30007,7 +30611,7 @@
                     <a:bodyPr/>
                     <a:lstStyle/>
                     <a:p>
-                      <a:pPr marL="0" indent="0">
+                      <a:pPr indent="0" marL="0">
                         <a:buNone/>
                       </a:pPr>
                       <a:r>
@@ -30075,7 +30679,7 @@
                     <a:bodyPr/>
                     <a:lstStyle/>
                     <a:p>
-                      <a:pPr marL="0" indent="0">
+                      <a:pPr indent="0" marL="0">
                         <a:buNone/>
                       </a:pPr>
                       <a:r>
@@ -30138,11 +30742,6 @@
                     </a:solidFill>
                   </a:tcPr>
                 </a:tc>
-                <a:extLst>
-                  <a:ext uri="{0D108BD9-81ED-4DB2-BD59-A6C34878D82A}">
-                    <a16:rowId xmlns:a16="http://schemas.microsoft.com/office/drawing/2014/main" val="10001"/>
-                  </a:ext>
-                </a:extLst>
               </a:tr>
               <a:tr h="548640">
                 <a:tc>
@@ -30150,7 +30749,7 @@
                     <a:bodyPr/>
                     <a:lstStyle/>
                     <a:p>
-                      <a:pPr marL="0" indent="0">
+                      <a:pPr indent="0" marL="0">
                         <a:buNone/>
                       </a:pPr>
                       <a:r>
@@ -30218,7 +30817,7 @@
                     <a:bodyPr/>
                     <a:lstStyle/>
                     <a:p>
-                      <a:pPr marL="0" indent="0">
+                      <a:pPr indent="0" marL="0">
                         <a:buNone/>
                       </a:pPr>
                       <a:r>
@@ -30286,7 +30885,7 @@
                     <a:bodyPr/>
                     <a:lstStyle/>
                     <a:p>
-                      <a:pPr marL="0" indent="0">
+                      <a:pPr indent="0" marL="0">
                         <a:buNone/>
                       </a:pPr>
                       <a:r>
@@ -30349,11 +30948,6 @@
                     </a:solidFill>
                   </a:tcPr>
                 </a:tc>
-                <a:extLst>
-                  <a:ext uri="{0D108BD9-81ED-4DB2-BD59-A6C34878D82A}">
-                    <a16:rowId xmlns:a16="http://schemas.microsoft.com/office/drawing/2014/main" val="10002"/>
-                  </a:ext>
-                </a:extLst>
               </a:tr>
               <a:tr h="548640">
                 <a:tc>
@@ -30361,7 +30955,7 @@
                     <a:bodyPr/>
                     <a:lstStyle/>
                     <a:p>
-                      <a:pPr marL="0" indent="0">
+                      <a:pPr indent="0" marL="0">
                         <a:buNone/>
                       </a:pPr>
                       <a:r>
@@ -30429,7 +31023,7 @@
                     <a:bodyPr/>
                     <a:lstStyle/>
                     <a:p>
-                      <a:pPr marL="0" indent="0">
+                      <a:pPr indent="0" marL="0">
                         <a:buNone/>
                       </a:pPr>
                       <a:r>
@@ -30497,7 +31091,7 @@
                     <a:bodyPr/>
                     <a:lstStyle/>
                     <a:p>
-                      <a:pPr marL="0" indent="0">
+                      <a:pPr indent="0" marL="0">
                         <a:buNone/>
                       </a:pPr>
                       <a:r>
@@ -30560,11 +31154,6 @@
                     </a:solidFill>
                   </a:tcPr>
                 </a:tc>
-                <a:extLst>
-                  <a:ext uri="{0D108BD9-81ED-4DB2-BD59-A6C34878D82A}">
-                    <a16:rowId xmlns:a16="http://schemas.microsoft.com/office/drawing/2014/main" val="10003"/>
-                  </a:ext>
-                </a:extLst>
               </a:tr>
               <a:tr h="548640">
                 <a:tc>
@@ -30572,7 +31161,7 @@
                     <a:bodyPr/>
                     <a:lstStyle/>
                     <a:p>
-                      <a:pPr marL="0" indent="0">
+                      <a:pPr indent="0" marL="0">
                         <a:buNone/>
                       </a:pPr>
                       <a:r>
@@ -30640,7 +31229,7 @@
                     <a:bodyPr/>
                     <a:lstStyle/>
                     <a:p>
-                      <a:pPr marL="0" indent="0">
+                      <a:pPr indent="0" marL="0">
                         <a:buNone/>
                       </a:pPr>
                       <a:r>
@@ -30708,7 +31297,7 @@
                     <a:bodyPr/>
                     <a:lstStyle/>
                     <a:p>
-                      <a:pPr marL="0" indent="0">
+                      <a:pPr indent="0" marL="0">
                         <a:buNone/>
                       </a:pPr>
                       <a:r>
@@ -30771,11 +31360,6 @@
                     </a:solidFill>
                   </a:tcPr>
                 </a:tc>
-                <a:extLst>
-                  <a:ext uri="{0D108BD9-81ED-4DB2-BD59-A6C34878D82A}">
-                    <a16:rowId xmlns:a16="http://schemas.microsoft.com/office/drawing/2014/main" val="10004"/>
-                  </a:ext>
-                </a:extLst>
               </a:tr>
             </a:tbl>
           </a:graphicData>
@@ -30783,7 +31367,7 @@
       </p:graphicFrame>
       <p:sp>
         <p:nvSpPr>
-          <p:cNvPr id="8" name="Shape 5"/>
+          <p:cNvPr id="9" name="Shape 5"/>
           <p:cNvSpPr/>
           <p:nvPr/>
         </p:nvSpPr>
@@ -30810,14 +31394,34 @@
       </p:sp>
       <p:sp>
         <p:nvSpPr>
-          <p:cNvPr id="10" name="Text 6"/>
-          <p:cNvSpPr/>
-          <p:nvPr/>
-        </p:nvSpPr>
-        <p:spPr>
-          <a:xfrm>
-            <a:off x="7854696" y="1865376"/>
-            <a:ext cx="3557016" cy="219456"/>
+          <p:cNvPr id="10" name="Shape 6"/>
+          <p:cNvSpPr/>
+          <p:nvPr/>
+        </p:nvSpPr>
+        <p:spPr>
+          <a:xfrm>
+            <a:off x="7818120" y="2953512"/>
+            <a:ext cx="310896" cy="310896"/>
+          </a:xfrm>
+          <a:prstGeom prst="ellipse">
+            <a:avLst/>
+          </a:prstGeom>
+          <a:solidFill>
+            <a:srgbClr val="106B41"/>
+          </a:solidFill>
+          <a:ln/>
+        </p:spPr>
+      </p:sp>
+      <p:sp>
+        <p:nvSpPr>
+          <p:cNvPr id="11" name="Text 7"/>
+          <p:cNvSpPr/>
+          <p:nvPr/>
+        </p:nvSpPr>
+        <p:spPr>
+          <a:xfrm>
+            <a:off x="7818120" y="2953512"/>
+            <a:ext cx="310896" cy="310896"/>
           </a:xfrm>
           <a:prstGeom prst="rect">
             <a:avLst/>
@@ -30829,11 +31433,50 @@
           <a:bodyPr wrap="square" lIns="0" tIns="0" rIns="0" bIns="0" rtlCol="0" anchor="ctr"/>
           <a:lstStyle/>
           <a:p>
-            <a:pPr marL="0" indent="0">
-              <a:buNone/>
-            </a:pPr>
-            <a:r>
-              <a:rPr lang="en-US" sz="950" b="1" kern="0" spc="150" dirty="0">
+            <a:pPr algn="ctr" indent="0" marL="0">
+              <a:buNone/>
+            </a:pPr>
+            <a:r>
+              <a:rPr lang="en-US" sz="1200" b="1" dirty="0">
+                <a:solidFill>
+                  <a:srgbClr val="FFFFFF"/>
+                </a:solidFill>
+                <a:latin typeface="Arial" pitchFamily="34" charset="0"/>
+                <a:ea typeface="Arial" pitchFamily="34" charset="-122"/>
+                <a:cs typeface="Arial" pitchFamily="34" charset="-120"/>
+              </a:rPr>
+              <a:t>◆</a:t>
+            </a:r>
+            <a:endParaRPr lang="en-US" sz="1200" dirty="0"/>
+          </a:p>
+        </p:txBody>
+      </p:sp>
+      <p:sp>
+        <p:nvSpPr>
+          <p:cNvPr id="12" name="Text 8"/>
+          <p:cNvSpPr/>
+          <p:nvPr/>
+        </p:nvSpPr>
+        <p:spPr>
+          <a:xfrm>
+            <a:off x="8311896" y="1865376"/>
+            <a:ext cx="3099816" cy="219456"/>
+          </a:xfrm>
+          <a:prstGeom prst="rect">
+            <a:avLst/>
+          </a:prstGeom>
+          <a:noFill/>
+          <a:ln/>
+        </p:spPr>
+        <p:txBody>
+          <a:bodyPr wrap="square" lIns="0" tIns="0" rIns="0" bIns="0" rtlCol="0" anchor="ctr"/>
+          <a:lstStyle/>
+          <a:p>
+            <a:pPr indent="0" marL="0">
+              <a:buNone/>
+            </a:pPr>
+            <a:r>
+              <a:rPr lang="en-US" sz="950" b="1" spc="150" kern="0" dirty="0">
                 <a:solidFill>
                   <a:srgbClr val="106B41"/>
                 </a:solidFill>
@@ -30849,14 +31492,14 @@
       </p:sp>
       <p:sp>
         <p:nvSpPr>
-          <p:cNvPr id="11" name="Text 7"/>
-          <p:cNvSpPr/>
-          <p:nvPr/>
-        </p:nvSpPr>
-        <p:spPr>
-          <a:xfrm>
-            <a:off x="7854696" y="2121408"/>
-            <a:ext cx="3557016" cy="2231136"/>
+          <p:cNvPr id="13" name="Text 9"/>
+          <p:cNvSpPr/>
+          <p:nvPr/>
+        </p:nvSpPr>
+        <p:spPr>
+          <a:xfrm>
+            <a:off x="8311896" y="2121408"/>
+            <a:ext cx="3099816" cy="2231136"/>
           </a:xfrm>
           <a:prstGeom prst="rect">
             <a:avLst/>
@@ -30868,7 +31511,7 @@
           <a:bodyPr wrap="square" lIns="0" tIns="0" rIns="0" bIns="0" rtlCol="0" anchor="ctr"/>
           <a:lstStyle/>
           <a:p>
-            <a:pPr marL="0" indent="0">
+            <a:pPr indent="0" marL="0">
               <a:lnSpc>
                 <a:spcPct val="112000"/>
               </a:lnSpc>
@@ -30891,7 +31534,7 @@
       </p:sp>
       <p:sp>
         <p:nvSpPr>
-          <p:cNvPr id="12" name="Shape 8"/>
+          <p:cNvPr id="14" name="Shape 10"/>
           <p:cNvSpPr/>
           <p:nvPr/>
         </p:nvSpPr>
@@ -30918,7 +31561,7 @@
       </p:sp>
       <p:sp>
         <p:nvSpPr>
-          <p:cNvPr id="13" name="Text 9"/>
+          <p:cNvPr id="15" name="Text 11"/>
           <p:cNvSpPr/>
           <p:nvPr/>
         </p:nvSpPr>
@@ -30937,7 +31580,7 @@
           <a:bodyPr wrap="square" lIns="0" tIns="0" rIns="0" bIns="0" rtlCol="0" anchor="ctr"/>
           <a:lstStyle/>
           <a:p>
-            <a:pPr marL="0" indent="0">
+            <a:pPr indent="0" marL="0">
               <a:lnSpc>
                 <a:spcPct val="112000"/>
               </a:lnSpc>
@@ -30978,7 +31621,7 @@
           </a:prstGeom>
           <a:extLst>
             <a:ext uri="{C572A759-6A51-4108-AA02-DFA0A04FC94B}">
-              <ma14:wrappingTextBoxFlag xmlns:ma14="http://schemas.microsoft.com/office/mac/drawingml/2011/main" xmlns="" val="0"/>
+              <ma14:wrappingTextBoxFlag xmlns:ma14="http://schemas.microsoft.com/office/mac/drawingml/2011/main" val="0"/>
             </a:ext>
           </a:extLst>
         </p:spPr>
@@ -30999,7 +31642,7 @@
           <a:p>
             <a:pPr algn="l"/>
             <a:fld id="{F7021451-1387-4CA6-816F-3879F97B5CBC}" type="slidenum">
-              <a:rPr lang="en-US" b="0"/>
+              <a:rPr b="0" lang="en-US"/>
               <a:t>8</a:t>
             </a:fld>
             <a:endParaRPr lang="en-US"/>
@@ -31074,7 +31717,7 @@
           <a:bodyPr wrap="square" lIns="0" tIns="0" rIns="0" bIns="0" rtlCol="0" anchor="ctr"/>
           <a:lstStyle/>
           <a:p>
-            <a:pPr marL="0" indent="0" algn="l">
+            <a:pPr algn="l" indent="0" marL="0">
               <a:buNone/>
             </a:pPr>
             <a:r>
@@ -31113,7 +31756,7 @@
           <a:bodyPr wrap="square" lIns="0" tIns="0" rIns="0" bIns="0" rtlCol="0" anchor="ctr"/>
           <a:lstStyle/>
           <a:p>
-            <a:pPr marL="0" indent="0">
+            <a:pPr indent="0" marL="0">
               <a:buNone/>
             </a:pPr>
             <a:r>
@@ -31179,11 +31822,11 @@
           <a:bodyPr wrap="square" lIns="0" tIns="0" rIns="0" bIns="0" rtlCol="0" anchor="ctr"/>
           <a:lstStyle/>
           <a:p>
-            <a:pPr marL="0" indent="0" algn="ctr">
-              <a:buNone/>
-            </a:pPr>
-            <a:r>
-              <a:rPr lang="en-US" sz="900" b="1" kern="0" spc="100" dirty="0">
+            <a:pPr algn="ctr" indent="0" marL="0">
+              <a:buNone/>
+            </a:pPr>
+            <a:r>
+              <a:rPr lang="en-US" sz="900" b="1" spc="100" kern="0" dirty="0">
                 <a:solidFill>
                   <a:srgbClr val="5A05F4"/>
                 </a:solidFill>
@@ -31199,14 +31842,14 @@
       </p:sp>
       <p:pic>
         <p:nvPicPr>
-          <p:cNvPr id="7" name="Image 0" descr="preencoded.png"/>
+          <p:cNvPr id="7" name="Image 0" descr="preencoded.png">    </p:cNvPr>
           <p:cNvPicPr>
             <a:picLocks noChangeAspect="1"/>
           </p:cNvPicPr>
           <p:nvPr/>
         </p:nvPicPr>
         <p:blipFill>
-          <a:blip r:embed="rId3"/>
+          <a:blip r:embed="rId1"/>
           <a:stretch>
             <a:fillRect/>
           </a:stretch>
@@ -31264,7 +31907,7 @@
           <a:bodyPr wrap="square" lIns="0" tIns="0" rIns="0" bIns="0" rtlCol="0" anchor="ctr"/>
           <a:lstStyle/>
           <a:p>
-            <a:pPr marL="0" indent="0">
+            <a:pPr indent="0" marL="0">
               <a:buNone/>
             </a:pPr>
             <a:r>
@@ -31303,7 +31946,7 @@
           <a:bodyPr wrap="square" lIns="0" tIns="0" rIns="0" bIns="0" rtlCol="0" anchor="t"/>
           <a:lstStyle/>
           <a:p>
-            <a:pPr marL="0" indent="0">
+            <a:pPr indent="0" marL="0">
               <a:buNone/>
             </a:pPr>
             <a:r>
@@ -31364,7 +32007,7 @@
           <a:bodyPr wrap="square" lIns="0" tIns="0" rIns="0" bIns="0" rtlCol="0" anchor="ctr"/>
           <a:lstStyle/>
           <a:p>
-            <a:pPr marL="0" indent="0">
+            <a:pPr indent="0" marL="0">
               <a:buNone/>
             </a:pPr>
             <a:r>
@@ -31403,7 +32046,7 @@
           <a:bodyPr wrap="square" lIns="0" tIns="0" rIns="0" bIns="0" rtlCol="0" anchor="t"/>
           <a:lstStyle/>
           <a:p>
-            <a:pPr marL="0" indent="0">
+            <a:pPr indent="0" marL="0">
               <a:buNone/>
             </a:pPr>
             <a:r>
@@ -31464,7 +32107,7 @@
           <a:bodyPr wrap="square" lIns="0" tIns="0" rIns="0" bIns="0" rtlCol="0" anchor="ctr"/>
           <a:lstStyle/>
           <a:p>
-            <a:pPr marL="0" indent="0">
+            <a:pPr indent="0" marL="0">
               <a:buNone/>
             </a:pPr>
             <a:r>
@@ -31503,7 +32146,7 @@
           <a:bodyPr wrap="square" lIns="0" tIns="0" rIns="0" bIns="0" rtlCol="0" anchor="t"/>
           <a:lstStyle/>
           <a:p>
-            <a:pPr marL="0" indent="0">
+            <a:pPr indent="0" marL="0">
               <a:buNone/>
             </a:pPr>
             <a:r>
@@ -32085,7 +32728,7 @@
           <a:bodyPr wrap="square" lIns="0" tIns="0" rIns="0" bIns="0" rtlCol="0" anchor="ctr"/>
           <a:lstStyle/>
           <a:p>
-            <a:pPr marL="0" indent="0" algn="ctr">
+            <a:pPr algn="ctr" indent="0" marL="0">
               <a:buNone/>
             </a:pPr>
             <a:r>
@@ -32147,7 +32790,7 @@
           <a:bodyPr wrap="square" lIns="0" tIns="0" rIns="0" bIns="0" rtlCol="0" anchor="ctr"/>
           <a:lstStyle/>
           <a:p>
-            <a:pPr marL="0" indent="0" algn="ctr">
+            <a:pPr algn="ctr" indent="0" marL="0">
               <a:buNone/>
             </a:pPr>
             <a:r>
@@ -32186,11 +32829,11 @@
           <a:bodyPr wrap="square" lIns="0" tIns="0" rIns="0" bIns="0" rtlCol="0" anchor="ctr"/>
           <a:lstStyle/>
           <a:p>
-            <a:pPr marL="0" indent="0">
-              <a:buNone/>
-            </a:pPr>
-            <a:r>
-              <a:rPr lang="en-US" sz="850" kern="0" spc="100" dirty="0">
+            <a:pPr indent="0" marL="0">
+              <a:buNone/>
+            </a:pPr>
+            <a:r>
+              <a:rPr lang="en-US" sz="850" spc="100" kern="0" dirty="0">
                 <a:solidFill>
                   <a:srgbClr val="6B6B6B"/>
                 </a:solidFill>
@@ -32233,14 +32876,34 @@
       </p:sp>
       <p:sp>
         <p:nvSpPr>
-          <p:cNvPr id="49" name="Text 46"/>
-          <p:cNvSpPr/>
-          <p:nvPr/>
-        </p:nvSpPr>
-        <p:spPr>
-          <a:xfrm>
-            <a:off x="786384" y="4681728"/>
-            <a:ext cx="10625328" cy="219456"/>
+          <p:cNvPr id="49" name="Shape 46"/>
+          <p:cNvSpPr/>
+          <p:nvPr/>
+        </p:nvSpPr>
+        <p:spPr>
+          <a:xfrm>
+            <a:off x="749808" y="4754880"/>
+            <a:ext cx="310896" cy="310896"/>
+          </a:xfrm>
+          <a:prstGeom prst="ellipse">
+            <a:avLst/>
+          </a:prstGeom>
+          <a:solidFill>
+            <a:srgbClr val="B3261E"/>
+          </a:solidFill>
+          <a:ln/>
+        </p:spPr>
+      </p:sp>
+      <p:sp>
+        <p:nvSpPr>
+          <p:cNvPr id="50" name="Text 47"/>
+          <p:cNvSpPr/>
+          <p:nvPr/>
+        </p:nvSpPr>
+        <p:spPr>
+          <a:xfrm>
+            <a:off x="749808" y="4754880"/>
+            <a:ext cx="310896" cy="310896"/>
           </a:xfrm>
           <a:prstGeom prst="rect">
             <a:avLst/>
@@ -32252,11 +32915,50 @@
           <a:bodyPr wrap="square" lIns="0" tIns="0" rIns="0" bIns="0" rtlCol="0" anchor="ctr"/>
           <a:lstStyle/>
           <a:p>
-            <a:pPr marL="0" indent="0">
-              <a:buNone/>
-            </a:pPr>
-            <a:r>
-              <a:rPr lang="en-US" sz="950" b="1" kern="0" spc="150" dirty="0">
+            <a:pPr algn="ctr" indent="0" marL="0">
+              <a:buNone/>
+            </a:pPr>
+            <a:r>
+              <a:rPr lang="en-US" sz="1200" b="1" dirty="0">
+                <a:solidFill>
+                  <a:srgbClr val="FFFFFF"/>
+                </a:solidFill>
+                <a:latin typeface="Arial" pitchFamily="34" charset="0"/>
+                <a:ea typeface="Arial" pitchFamily="34" charset="-122"/>
+                <a:cs typeface="Arial" pitchFamily="34" charset="-120"/>
+              </a:rPr>
+              <a:t>✕</a:t>
+            </a:r>
+            <a:endParaRPr lang="en-US" sz="1200" dirty="0"/>
+          </a:p>
+        </p:txBody>
+      </p:sp>
+      <p:sp>
+        <p:nvSpPr>
+          <p:cNvPr id="51" name="Text 48"/>
+          <p:cNvSpPr/>
+          <p:nvPr/>
+        </p:nvSpPr>
+        <p:spPr>
+          <a:xfrm>
+            <a:off x="1243584" y="4681728"/>
+            <a:ext cx="10168128" cy="219456"/>
+          </a:xfrm>
+          <a:prstGeom prst="rect">
+            <a:avLst/>
+          </a:prstGeom>
+          <a:noFill/>
+          <a:ln/>
+        </p:spPr>
+        <p:txBody>
+          <a:bodyPr wrap="square" lIns="0" tIns="0" rIns="0" bIns="0" rtlCol="0" anchor="ctr"/>
+          <a:lstStyle/>
+          <a:p>
+            <a:pPr indent="0" marL="0">
+              <a:buNone/>
+            </a:pPr>
+            <a:r>
+              <a:rPr lang="en-US" sz="950" b="1" spc="150" kern="0" dirty="0">
                 <a:solidFill>
                   <a:srgbClr val="B3261E"/>
                 </a:solidFill>
@@ -32272,14 +32974,14 @@
       </p:sp>
       <p:sp>
         <p:nvSpPr>
-          <p:cNvPr id="50" name="Text 47"/>
-          <p:cNvSpPr/>
-          <p:nvPr/>
-        </p:nvSpPr>
-        <p:spPr>
-          <a:xfrm>
-            <a:off x="786384" y="4937760"/>
-            <a:ext cx="10625328" cy="201168"/>
+          <p:cNvPr id="52" name="Text 49"/>
+          <p:cNvSpPr/>
+          <p:nvPr/>
+        </p:nvSpPr>
+        <p:spPr>
+          <a:xfrm>
+            <a:off x="1243584" y="4937760"/>
+            <a:ext cx="10168128" cy="201168"/>
           </a:xfrm>
           <a:prstGeom prst="rect">
             <a:avLst/>
@@ -32291,7 +32993,7 @@
           <a:bodyPr wrap="square" lIns="0" tIns="0" rIns="0" bIns="0" rtlCol="0" anchor="ctr"/>
           <a:lstStyle/>
           <a:p>
-            <a:pPr marL="0" indent="0">
+            <a:pPr indent="0" marL="0">
               <a:lnSpc>
                 <a:spcPct val="112000"/>
               </a:lnSpc>
@@ -32314,7 +33016,7 @@
       </p:sp>
       <p:sp>
         <p:nvSpPr>
-          <p:cNvPr id="51" name="Shape 48"/>
+          <p:cNvPr id="53" name="Shape 50"/>
           <p:cNvSpPr/>
           <p:nvPr/>
         </p:nvSpPr>
@@ -32336,7 +33038,7 @@
       </p:sp>
       <p:sp>
         <p:nvSpPr>
-          <p:cNvPr id="52" name="Text 49"/>
+          <p:cNvPr id="54" name="Text 51"/>
           <p:cNvSpPr/>
           <p:nvPr/>
         </p:nvSpPr>
@@ -32355,7 +33057,7 @@
           <a:bodyPr wrap="square" lIns="0" tIns="0" rIns="0" bIns="0" rtlCol="0" anchor="ctr"/>
           <a:lstStyle/>
           <a:p>
-            <a:pPr marL="0" indent="0">
+            <a:pPr indent="0" marL="0">
               <a:lnSpc>
                 <a:spcPct val="112000"/>
               </a:lnSpc>
@@ -32378,7 +33080,7 @@
       </p:sp>
       <p:sp>
         <p:nvSpPr>
-          <p:cNvPr id="53" name="Slide Number Placeholder 0"/>
+          <p:cNvPr id="25" name="Slide Number Placeholder 0"/>
           <p:cNvSpPr>
             <a:spLocks noGrp="1"/>
           </p:cNvSpPr>
@@ -32396,7 +33098,7 @@
           </a:prstGeom>
           <a:extLst>
             <a:ext uri="{C572A759-6A51-4108-AA02-DFA0A04FC94B}">
-              <ma14:wrappingTextBoxFlag xmlns:ma14="http://schemas.microsoft.com/office/mac/drawingml/2011/main" xmlns="" val="0"/>
+              <ma14:wrappingTextBoxFlag xmlns:ma14="http://schemas.microsoft.com/office/mac/drawingml/2011/main" val="0"/>
             </a:ext>
           </a:extLst>
         </p:spPr>
@@ -32417,7 +33119,7 @@
           <a:p>
             <a:pPr algn="l"/>
             <a:fld id="{F7021451-1387-4CA6-816F-3879F97B5CBC}" type="slidenum">
-              <a:rPr lang="en-US" b="0"/>
+              <a:rPr b="0" lang="en-US"/>
               <a:t>9</a:t>
             </a:fld>
             <a:endParaRPr lang="en-US"/>
@@ -32725,299 +33427,4 @@
     </a:ext>
   </a:extLst>
 </a:theme>
-</file>
-
-<file path=ppt/theme/theme2.xml><?xml version="1.0" encoding="utf-8"?>
-<a:theme xmlns:a="http://schemas.openxmlformats.org/drawingml/2006/main" name="Office Theme">
-  <a:themeElements>
-    <a:clrScheme name="Office">
-      <a:dk1>
-        <a:sysClr val="windowText" lastClr="000000"/>
-      </a:dk1>
-      <a:lt1>
-        <a:sysClr val="window" lastClr="FFFFFF"/>
-      </a:lt1>
-      <a:dk2>
-        <a:srgbClr val="44546A"/>
-      </a:dk2>
-      <a:lt2>
-        <a:srgbClr val="E7E6E6"/>
-      </a:lt2>
-      <a:accent1>
-        <a:srgbClr val="4472C4"/>
-      </a:accent1>
-      <a:accent2>
-        <a:srgbClr val="ED7D31"/>
-      </a:accent2>
-      <a:accent3>
-        <a:srgbClr val="A5A5A5"/>
-      </a:accent3>
-      <a:accent4>
-        <a:srgbClr val="FFC000"/>
-      </a:accent4>
-      <a:accent5>
-        <a:srgbClr val="5B9BD5"/>
-      </a:accent5>
-      <a:accent6>
-        <a:srgbClr val="70AD47"/>
-      </a:accent6>
-      <a:hlink>
-        <a:srgbClr val="0563C1"/>
-      </a:hlink>
-      <a:folHlink>
-        <a:srgbClr val="954F72"/>
-      </a:folHlink>
-    </a:clrScheme>
-    <a:fontScheme name="Office">
-      <a:majorFont>
-        <a:latin typeface="Calibri Light" panose="020F0302020204030204"/>
-        <a:ea typeface=""/>
-        <a:cs typeface=""/>
-        <a:font script="Jpan" typeface="游ゴシック Light"/>
-        <a:font script="Hang" typeface="맑은 고딕"/>
-        <a:font script="Hans" typeface="等线 Light"/>
-        <a:font script="Hant" typeface="新細明體"/>
-        <a:font script="Arab" typeface="Times New Roman"/>
-        <a:font script="Hebr" typeface="Times New Roman"/>
-        <a:font script="Thai" typeface="Angsana New"/>
-        <a:font script="Ethi" typeface="Nyala"/>
-        <a:font script="Beng" typeface="Vrinda"/>
-        <a:font script="Gujr" typeface="Shruti"/>
-        <a:font script="Khmr" typeface="MoolBoran"/>
-        <a:font script="Knda" typeface="Tunga"/>
-        <a:font script="Guru" typeface="Raavi"/>
-        <a:font script="Cans" typeface="Euphemia"/>
-        <a:font script="Cher" typeface="Plantagenet Cherokee"/>
-        <a:font script="Yiii" typeface="Microsoft Yi Baiti"/>
-        <a:font script="Tibt" typeface="Microsoft Himalaya"/>
-        <a:font script="Thaa" typeface="MV Boli"/>
-        <a:font script="Deva" typeface="Mangal"/>
-        <a:font script="Telu" typeface="Gautami"/>
-        <a:font script="Taml" typeface="Latha"/>
-        <a:font script="Syrc" typeface="Estrangelo Edessa"/>
-        <a:font script="Orya" typeface="Kalinga"/>
-        <a:font script="Mlym" typeface="Kartika"/>
-        <a:font script="Laoo" typeface="DokChampa"/>
-        <a:font script="Sinh" typeface="Iskoola Pota"/>
-        <a:font script="Mong" typeface="Mongolian Baiti"/>
-        <a:font script="Viet" typeface="Times New Roman"/>
-        <a:font script="Uigh" typeface="Microsoft Uighur"/>
-        <a:font script="Geor" typeface="Sylfaen"/>
-        <a:font script="Armn" typeface="Arial"/>
-        <a:font script="Bugi" typeface="Leelawadee UI"/>
-        <a:font script="Bopo" typeface="Microsoft JhengHei"/>
-        <a:font script="Java" typeface="Javanese Text"/>
-        <a:font script="Lisu" typeface="Segoe UI"/>
-        <a:font script="Mymr" typeface="Myanmar Text"/>
-        <a:font script="Nkoo" typeface="Ebrima"/>
-        <a:font script="Olck" typeface="Nirmala UI"/>
-        <a:font script="Osma" typeface="Ebrima"/>
-        <a:font script="Phag" typeface="Phagspa"/>
-        <a:font script="Syrn" typeface="Estrangelo Edessa"/>
-        <a:font script="Syrj" typeface="Estrangelo Edessa"/>
-        <a:font script="Syre" typeface="Estrangelo Edessa"/>
-        <a:font script="Sora" typeface="Nirmala UI"/>
-        <a:font script="Tale" typeface="Microsoft Tai Le"/>
-        <a:font script="Talu" typeface="Microsoft New Tai Lue"/>
-        <a:font script="Tfng" typeface="Ebrima"/>
-      </a:majorFont>
-      <a:minorFont>
-        <a:latin typeface="Calibri" panose="020F0502020204030204"/>
-        <a:ea typeface=""/>
-        <a:cs typeface=""/>
-        <a:font script="Jpan" typeface="游ゴシック"/>
-        <a:font script="Hang" typeface="맑은 고딕"/>
-        <a:font script="Hans" typeface="等线"/>
-        <a:font script="Hant" typeface="新細明體"/>
-        <a:font script="Arab" typeface="Arial"/>
-        <a:font script="Hebr" typeface="Arial"/>
-        <a:font script="Thai" typeface="Cordia New"/>
-        <a:font script="Ethi" typeface="Nyala"/>
-        <a:font script="Beng" typeface="Vrinda"/>
-        <a:font script="Gujr" typeface="Shruti"/>
-        <a:font script="Khmr" typeface="DaunPenh"/>
-        <a:font script="Knda" typeface="Tunga"/>
-        <a:font script="Guru" typeface="Raavi"/>
-        <a:font script="Cans" typeface="Euphemia"/>
-        <a:font script="Cher" typeface="Plantagenet Cherokee"/>
-        <a:font script="Yiii" typeface="Microsoft Yi Baiti"/>
-        <a:font script="Tibt" typeface="Microsoft Himalaya"/>
-        <a:font script="Thaa" typeface="MV Boli"/>
-        <a:font script="Deva" typeface="Mangal"/>
-        <a:font script="Telu" typeface="Gautami"/>
-        <a:font script="Taml" typeface="Latha"/>
-        <a:font script="Syrc" typeface="Estrangelo Edessa"/>
-        <a:font script="Orya" typeface="Kalinga"/>
-        <a:font script="Mlym" typeface="Kartika"/>
-        <a:font script="Laoo" typeface="DokChampa"/>
-        <a:font script="Sinh" typeface="Iskoola Pota"/>
-        <a:font script="Mong" typeface="Mongolian Baiti"/>
-        <a:font script="Viet" typeface="Arial"/>
-        <a:font script="Uigh" typeface="Microsoft Uighur"/>
-        <a:font script="Geor" typeface="Sylfaen"/>
-        <a:font script="Armn" typeface="Arial"/>
-        <a:font script="Bugi" typeface="Leelawadee UI"/>
-        <a:font script="Bopo" typeface="Microsoft JhengHei"/>
-        <a:font script="Java" typeface="Javanese Text"/>
-        <a:font script="Lisu" typeface="Segoe UI"/>
-        <a:font script="Mymr" typeface="Myanmar Text"/>
-        <a:font script="Nkoo" typeface="Ebrima"/>
-        <a:font script="Olck" typeface="Nirmala UI"/>
-        <a:font script="Osma" typeface="Ebrima"/>
-        <a:font script="Phag" typeface="Phagspa"/>
-        <a:font script="Syrn" typeface="Estrangelo Edessa"/>
-        <a:font script="Syrj" typeface="Estrangelo Edessa"/>
-        <a:font script="Syre" typeface="Estrangelo Edessa"/>
-        <a:font script="Sora" typeface="Nirmala UI"/>
-        <a:font script="Tale" typeface="Microsoft Tai Le"/>
-        <a:font script="Talu" typeface="Microsoft New Tai Lue"/>
-        <a:font script="Tfng" typeface="Ebrima"/>
-      </a:minorFont>
-    </a:fontScheme>
-    <a:fmtScheme name="Office">
-      <a:fillStyleLst>
-        <a:solidFill>
-          <a:schemeClr val="phClr"/>
-        </a:solidFill>
-        <a:gradFill rotWithShape="1">
-          <a:gsLst>
-            <a:gs pos="0">
-              <a:schemeClr val="phClr">
-                <a:lumMod val="110000"/>
-                <a:satMod val="105000"/>
-                <a:tint val="67000"/>
-              </a:schemeClr>
-            </a:gs>
-            <a:gs pos="50000">
-              <a:schemeClr val="phClr">
-                <a:lumMod val="105000"/>
-                <a:satMod val="103000"/>
-                <a:tint val="73000"/>
-              </a:schemeClr>
-            </a:gs>
-            <a:gs pos="100000">
-              <a:schemeClr val="phClr">
-                <a:lumMod val="105000"/>
-                <a:satMod val="109000"/>
-                <a:tint val="81000"/>
-              </a:schemeClr>
-            </a:gs>
-          </a:gsLst>
-          <a:lin ang="5400000" scaled="0"/>
-        </a:gradFill>
-        <a:gradFill rotWithShape="1">
-          <a:gsLst>
-            <a:gs pos="0">
-              <a:schemeClr val="phClr">
-                <a:satMod val="103000"/>
-                <a:lumMod val="102000"/>
-                <a:tint val="94000"/>
-              </a:schemeClr>
-            </a:gs>
-            <a:gs pos="50000">
-              <a:schemeClr val="phClr">
-                <a:satMod val="110000"/>
-                <a:lumMod val="100000"/>
-                <a:shade val="100000"/>
-              </a:schemeClr>
-            </a:gs>
-            <a:gs pos="100000">
-              <a:schemeClr val="phClr">
-                <a:lumMod val="99000"/>
-                <a:satMod val="120000"/>
-                <a:shade val="78000"/>
-              </a:schemeClr>
-            </a:gs>
-          </a:gsLst>
-          <a:lin ang="5400000" scaled="0"/>
-        </a:gradFill>
-      </a:fillStyleLst>
-      <a:lnStyleLst>
-        <a:ln w="6350" cap="flat" cmpd="sng" algn="ctr">
-          <a:solidFill>
-            <a:schemeClr val="phClr"/>
-          </a:solidFill>
-          <a:prstDash val="solid"/>
-          <a:miter lim="800000"/>
-        </a:ln>
-        <a:ln w="12700" cap="flat" cmpd="sng" algn="ctr">
-          <a:solidFill>
-            <a:schemeClr val="phClr"/>
-          </a:solidFill>
-          <a:prstDash val="solid"/>
-          <a:miter lim="800000"/>
-        </a:ln>
-        <a:ln w="19050" cap="flat" cmpd="sng" algn="ctr">
-          <a:solidFill>
-            <a:schemeClr val="phClr"/>
-          </a:solidFill>
-          <a:prstDash val="solid"/>
-          <a:miter lim="800000"/>
-        </a:ln>
-      </a:lnStyleLst>
-      <a:effectStyleLst>
-        <a:effectStyle>
-          <a:effectLst/>
-        </a:effectStyle>
-        <a:effectStyle>
-          <a:effectLst/>
-        </a:effectStyle>
-        <a:effectStyle>
-          <a:effectLst>
-            <a:outerShdw blurRad="57150" dist="19050" dir="5400000" algn="ctr" rotWithShape="0">
-              <a:srgbClr val="000000">
-                <a:alpha val="63000"/>
-              </a:srgbClr>
-            </a:outerShdw>
-          </a:effectLst>
-        </a:effectStyle>
-      </a:effectStyleLst>
-      <a:bgFillStyleLst>
-        <a:solidFill>
-          <a:schemeClr val="phClr"/>
-        </a:solidFill>
-        <a:solidFill>
-          <a:schemeClr val="phClr">
-            <a:tint val="95000"/>
-            <a:satMod val="170000"/>
-          </a:schemeClr>
-        </a:solidFill>
-        <a:gradFill rotWithShape="1">
-          <a:gsLst>
-            <a:gs pos="0">
-              <a:schemeClr val="phClr">
-                <a:tint val="93000"/>
-                <a:satMod val="150000"/>
-                <a:shade val="98000"/>
-                <a:lumMod val="102000"/>
-              </a:schemeClr>
-            </a:gs>
-            <a:gs pos="50000">
-              <a:schemeClr val="phClr">
-                <a:tint val="98000"/>
-                <a:satMod val="130000"/>
-                <a:shade val="90000"/>
-                <a:lumMod val="103000"/>
-              </a:schemeClr>
-            </a:gs>
-            <a:gs pos="100000">
-              <a:schemeClr val="phClr">
-                <a:shade val="63000"/>
-                <a:satMod val="120000"/>
-              </a:schemeClr>
-            </a:gs>
-          </a:gsLst>
-          <a:lin ang="5400000" scaled="0"/>
-        </a:gradFill>
-      </a:bgFillStyleLst>
-    </a:fmtScheme>
-  </a:themeElements>
-  <a:objectDefaults/>
-  <a:extraClrSchemeLst/>
-  <a:extLst>
-    <a:ext uri="{05A4C25C-085E-4340-85A3-A5531E510DB2}">
-      <thm15:themeFamily xmlns:thm15="http://schemas.microsoft.com/office/thememl/2012/main" name="Office Theme" id="{62F939B6-93AF-4DB8-9C6B-D6C7DFDC589F}" vid="{4A3C46E8-61CC-4603-A589-7422A47A8E4A}"/>
-    </a:ext>
-  </a:extLst>
-</a:theme>
 </file>
--- a/docs/decks/L09.pptx
+++ b/docs/decks/L09.pptx
@@ -19774,7 +19774,7 @@
         <p:spPr>
           <a:xfrm>
             <a:off x="566928" y="1737360"/>
-            <a:ext cx="5532120" cy="1463040"/>
+            <a:ext cx="3611880" cy="1463040"/>
           </a:xfrm>
           <a:prstGeom prst="roundRect">
             <a:avLst>
@@ -19855,7 +19855,7 @@
         <p:spPr>
           <a:xfrm>
             <a:off x="1280160" y="1892808"/>
-            <a:ext cx="4617720" cy="438912"/>
+            <a:ext cx="2697480" cy="438912"/>
           </a:xfrm>
           <a:prstGeom prst="rect">
             <a:avLst/>
@@ -19894,7 +19894,7 @@
         <p:spPr>
           <a:xfrm>
             <a:off x="768096" y="2423160"/>
-            <a:ext cx="5129784" cy="621792"/>
+            <a:ext cx="3209544" cy="621792"/>
           </a:xfrm>
           <a:prstGeom prst="rect">
             <a:avLst/>
@@ -19935,8 +19935,8 @@
         </p:nvSpPr>
         <p:spPr>
           <a:xfrm>
-            <a:off x="6281928" y="1737360"/>
-            <a:ext cx="5532120" cy="1463040"/>
+            <a:off x="4361688" y="1737360"/>
+            <a:ext cx="3611880" cy="1463040"/>
           </a:xfrm>
           <a:prstGeom prst="roundRect">
             <a:avLst>
@@ -19957,7 +19957,7 @@
         </p:nvSpPr>
         <p:spPr>
           <a:xfrm>
-            <a:off x="6483096" y="1920240"/>
+            <a:off x="4562856" y="1920240"/>
             <a:ext cx="384048" cy="384048"/>
           </a:xfrm>
           <a:prstGeom prst="ellipse">
@@ -19977,7 +19977,7 @@
         </p:nvSpPr>
         <p:spPr>
           <a:xfrm>
-            <a:off x="6483096" y="1920240"/>
+            <a:off x="4562856" y="1920240"/>
             <a:ext cx="384048" cy="384048"/>
           </a:xfrm>
           <a:prstGeom prst="rect">
@@ -20016,8 +20016,8 @@
         </p:nvSpPr>
         <p:spPr>
           <a:xfrm>
-            <a:off x="6995160" y="1892808"/>
-            <a:ext cx="4617720" cy="438912"/>
+            <a:off x="5074920" y="1892808"/>
+            <a:ext cx="2697480" cy="438912"/>
           </a:xfrm>
           <a:prstGeom prst="rect">
             <a:avLst/>
@@ -20055,8 +20055,8 @@
         </p:nvSpPr>
         <p:spPr>
           <a:xfrm>
-            <a:off x="6483096" y="2423160"/>
-            <a:ext cx="5129784" cy="621792"/>
+            <a:off x="4562856" y="2423160"/>
+            <a:ext cx="3209544" cy="621792"/>
           </a:xfrm>
           <a:prstGeom prst="rect">
             <a:avLst/>
@@ -20098,7 +20098,7 @@
         <p:spPr>
           <a:xfrm>
             <a:off x="566928" y="3383280"/>
-            <a:ext cx="5532120" cy="1463040"/>
+            <a:ext cx="3611880" cy="1463040"/>
           </a:xfrm>
           <a:prstGeom prst="roundRect">
             <a:avLst>
@@ -20179,7 +20179,7 @@
         <p:spPr>
           <a:xfrm>
             <a:off x="1280160" y="3538728"/>
-            <a:ext cx="4617720" cy="438912"/>
+            <a:ext cx="2697480" cy="438912"/>
           </a:xfrm>
           <a:prstGeom prst="rect">
             <a:avLst/>
@@ -20218,7 +20218,7 @@
         <p:spPr>
           <a:xfrm>
             <a:off x="768096" y="4069080"/>
-            <a:ext cx="5129784" cy="621792"/>
+            <a:ext cx="3209544" cy="621792"/>
           </a:xfrm>
           <a:prstGeom prst="rect">
             <a:avLst/>
@@ -20259,8 +20259,8 @@
         </p:nvSpPr>
         <p:spPr>
           <a:xfrm>
-            <a:off x="6281928" y="3383280"/>
-            <a:ext cx="5532120" cy="1463040"/>
+            <a:off x="4361688" y="3383280"/>
+            <a:ext cx="3611880" cy="1463040"/>
           </a:xfrm>
           <a:prstGeom prst="roundRect">
             <a:avLst>
@@ -20281,7 +20281,7 @@
         </p:nvSpPr>
         <p:spPr>
           <a:xfrm>
-            <a:off x="6483096" y="3566160"/>
+            <a:off x="4562856" y="3566160"/>
             <a:ext cx="384048" cy="384048"/>
           </a:xfrm>
           <a:prstGeom prst="ellipse">
@@ -20301,7 +20301,7 @@
         </p:nvSpPr>
         <p:spPr>
           <a:xfrm>
-            <a:off x="6483096" y="3566160"/>
+            <a:off x="4562856" y="3566160"/>
             <a:ext cx="384048" cy="384048"/>
           </a:xfrm>
           <a:prstGeom prst="rect">
@@ -20340,8 +20340,8 @@
         </p:nvSpPr>
         <p:spPr>
           <a:xfrm>
-            <a:off x="6995160" y="3538728"/>
-            <a:ext cx="4617720" cy="438912"/>
+            <a:off x="5074920" y="3538728"/>
+            <a:ext cx="2697480" cy="438912"/>
           </a:xfrm>
           <a:prstGeom prst="rect">
             <a:avLst/>
@@ -20379,8 +20379,8 @@
         </p:nvSpPr>
         <p:spPr>
           <a:xfrm>
-            <a:off x="6483096" y="4069080"/>
-            <a:ext cx="5129784" cy="621792"/>
+            <a:off x="4562856" y="4069080"/>
+            <a:ext cx="3209544" cy="621792"/>
           </a:xfrm>
           <a:prstGeom prst="rect">
             <a:avLst/>
@@ -20421,6 +20421,785 @@
         </p:nvSpPr>
         <p:spPr>
           <a:xfrm>
+            <a:off x="8156448" y="1737360"/>
+            <a:ext cx="3474720" cy="3108960"/>
+          </a:xfrm>
+          <a:prstGeom prst="roundRect">
+            <a:avLst>
+              <a:gd name="adj" fmla="val 2353"/>
+            </a:avLst>
+          </a:prstGeom>
+          <a:solidFill>
+            <a:srgbClr val="0A0810"/>
+          </a:solidFill>
+          <a:ln w="12700">
+            <a:solidFill>
+              <a:srgbClr val="D9D9D9"/>
+            </a:solidFill>
+            <a:prstDash val="solid"/>
+          </a:ln>
+        </p:spPr>
+      </p:sp>
+      <p:sp>
+        <p:nvSpPr>
+          <p:cNvPr id="28" name="Shape 25"/>
+          <p:cNvSpPr/>
+          <p:nvPr/>
+        </p:nvSpPr>
+        <p:spPr>
+          <a:xfrm>
+            <a:off x="8284464" y="1856232"/>
+            <a:ext cx="73152" cy="73152"/>
+          </a:xfrm>
+          <a:prstGeom prst="ellipse">
+            <a:avLst/>
+          </a:prstGeom>
+          <a:solidFill>
+            <a:srgbClr val="FF6B6B"/>
+          </a:solidFill>
+          <a:ln/>
+        </p:spPr>
+      </p:sp>
+      <p:sp>
+        <p:nvSpPr>
+          <p:cNvPr id="29" name="Shape 26"/>
+          <p:cNvSpPr/>
+          <p:nvPr/>
+        </p:nvSpPr>
+        <p:spPr>
+          <a:xfrm>
+            <a:off x="8430768" y="1856232"/>
+            <a:ext cx="73152" cy="73152"/>
+          </a:xfrm>
+          <a:prstGeom prst="ellipse">
+            <a:avLst/>
+          </a:prstGeom>
+          <a:solidFill>
+            <a:srgbClr val="6BA0F8"/>
+          </a:solidFill>
+          <a:ln/>
+        </p:spPr>
+      </p:sp>
+      <p:sp>
+        <p:nvSpPr>
+          <p:cNvPr id="30" name="Shape 27"/>
+          <p:cNvSpPr/>
+          <p:nvPr/>
+        </p:nvSpPr>
+        <p:spPr>
+          <a:xfrm>
+            <a:off x="8577072" y="1856232"/>
+            <a:ext cx="73152" cy="73152"/>
+          </a:xfrm>
+          <a:prstGeom prst="ellipse">
+            <a:avLst/>
+          </a:prstGeom>
+          <a:solidFill>
+            <a:srgbClr val="3FCF8E"/>
+          </a:solidFill>
+          <a:ln/>
+        </p:spPr>
+      </p:sp>
+      <p:sp>
+        <p:nvSpPr>
+          <p:cNvPr id="31" name="Text 28"/>
+          <p:cNvSpPr/>
+          <p:nvPr/>
+        </p:nvSpPr>
+        <p:spPr>
+          <a:xfrm>
+            <a:off x="8759952" y="1737360"/>
+            <a:ext cx="2761488" cy="310896"/>
+          </a:xfrm>
+          <a:prstGeom prst="rect">
+            <a:avLst/>
+          </a:prstGeom>
+          <a:noFill/>
+          <a:ln/>
+        </p:spPr>
+        <p:txBody>
+          <a:bodyPr wrap="square" lIns="0" tIns="0" rIns="0" bIns="0" rtlCol="0" anchor="ctr"/>
+          <a:lstStyle/>
+          <a:p>
+            <a:pPr indent="0" marL="0">
+              <a:buNone/>
+            </a:pPr>
+            <a:r>
+              <a:rPr lang="en-US" sz="800" dirty="0">
+                <a:solidFill>
+                  <a:srgbClr val="9A94AA"/>
+                </a:solidFill>
+                <a:latin typeface="Courier New" pitchFamily="34" charset="0"/>
+                <a:ea typeface="Courier New" pitchFamily="34" charset="-122"/>
+                <a:cs typeface="Courier New" pitchFamily="34" charset="-120"/>
+              </a:rPr>
+              <a:t>консоль · всі плитки живі</a:t>
+            </a:r>
+            <a:endParaRPr lang="en-US" sz="800" dirty="0"/>
+          </a:p>
+        </p:txBody>
+      </p:sp>
+      <p:sp>
+        <p:nvSpPr>
+          <p:cNvPr id="32" name="Shape 29"/>
+          <p:cNvSpPr/>
+          <p:nvPr/>
+        </p:nvSpPr>
+        <p:spPr>
+          <a:xfrm>
+            <a:off x="8156448" y="2048256"/>
+            <a:ext cx="3474720" cy="0"/>
+          </a:xfrm>
+          <a:prstGeom prst="line">
+            <a:avLst/>
+          </a:prstGeom>
+          <a:noFill/>
+          <a:ln w="9525">
+            <a:solidFill>
+              <a:srgbClr val="2A2438"/>
+            </a:solidFill>
+            <a:prstDash val="solid"/>
+          </a:ln>
+        </p:spPr>
+      </p:sp>
+      <p:sp>
+        <p:nvSpPr>
+          <p:cNvPr id="33" name="Shape 30"/>
+          <p:cNvSpPr/>
+          <p:nvPr/>
+        </p:nvSpPr>
+        <p:spPr>
+          <a:xfrm>
+            <a:off x="8266176" y="2139696"/>
+            <a:ext cx="1011936" cy="1261872"/>
+          </a:xfrm>
+          <a:prstGeom prst="roundRect">
+            <a:avLst>
+              <a:gd name="adj" fmla="val 4518"/>
+            </a:avLst>
+          </a:prstGeom>
+          <a:solidFill>
+            <a:srgbClr val="0A0810"/>
+          </a:solidFill>
+          <a:ln w="12700">
+            <a:solidFill>
+              <a:srgbClr val="2A2438"/>
+            </a:solidFill>
+            <a:prstDash val="solid"/>
+          </a:ln>
+        </p:spPr>
+      </p:sp>
+      <p:sp>
+        <p:nvSpPr>
+          <p:cNvPr id="34" name="Text 31"/>
+          <p:cNvSpPr/>
+          <p:nvPr/>
+        </p:nvSpPr>
+        <p:spPr>
+          <a:xfrm>
+            <a:off x="8339328" y="2176272"/>
+            <a:ext cx="865632" cy="328087"/>
+          </a:xfrm>
+          <a:prstGeom prst="rect">
+            <a:avLst/>
+          </a:prstGeom>
+          <a:noFill/>
+          <a:ln/>
+        </p:spPr>
+        <p:txBody>
+          <a:bodyPr wrap="square" lIns="0" tIns="0" rIns="0" bIns="0" rtlCol="0" anchor="t"/>
+          <a:lstStyle/>
+          <a:p>
+            <a:pPr indent="0" marL="0">
+              <a:buNone/>
+            </a:pPr>
+            <a:r>
+              <a:rPr lang="en-US" sz="750" dirty="0">
+                <a:solidFill>
+                  <a:srgbClr val="9A94AA"/>
+                </a:solidFill>
+                <a:latin typeface="Courier New" pitchFamily="34" charset="0"/>
+                <a:ea typeface="Courier New" pitchFamily="34" charset="-122"/>
+                <a:cs typeface="Courier New" pitchFamily="34" charset="-120"/>
+              </a:rPr>
+              <a:t>requests</a:t>
+            </a:r>
+            <a:endParaRPr lang="en-US" sz="750" dirty="0"/>
+          </a:p>
+        </p:txBody>
+      </p:sp>
+      <p:sp>
+        <p:nvSpPr>
+          <p:cNvPr id="35" name="Text 32"/>
+          <p:cNvSpPr/>
+          <p:nvPr/>
+        </p:nvSpPr>
+        <p:spPr>
+          <a:xfrm>
+            <a:off x="8339328" y="2568732"/>
+            <a:ext cx="865632" cy="731886"/>
+          </a:xfrm>
+          <a:prstGeom prst="rect">
+            <a:avLst/>
+          </a:prstGeom>
+          <a:noFill/>
+          <a:ln/>
+        </p:spPr>
+        <p:txBody>
+          <a:bodyPr wrap="square" lIns="0" tIns="0" rIns="0" bIns="0" rtlCol="0" anchor="ctr"/>
+          <a:lstStyle/>
+          <a:p>
+            <a:pPr indent="0" marL="0">
+              <a:buNone/>
+            </a:pPr>
+            <a:r>
+              <a:rPr lang="en-US" sz="1300" b="1" dirty="0">
+                <a:solidFill>
+                  <a:srgbClr val="D8D4E4"/>
+                </a:solidFill>
+                <a:latin typeface="Courier New" pitchFamily="34" charset="0"/>
+                <a:ea typeface="Courier New" pitchFamily="34" charset="-122"/>
+                <a:cs typeface="Courier New" pitchFamily="34" charset="-120"/>
+              </a:rPr>
+              <a:t>128</a:t>
+            </a:r>
+            <a:endParaRPr lang="en-US" sz="1300" dirty="0"/>
+          </a:p>
+        </p:txBody>
+      </p:sp>
+      <p:sp>
+        <p:nvSpPr>
+          <p:cNvPr id="36" name="Shape 33"/>
+          <p:cNvSpPr/>
+          <p:nvPr/>
+        </p:nvSpPr>
+        <p:spPr>
+          <a:xfrm>
+            <a:off x="9387840" y="2139696"/>
+            <a:ext cx="1011936" cy="1261872"/>
+          </a:xfrm>
+          <a:prstGeom prst="roundRect">
+            <a:avLst>
+              <a:gd name="adj" fmla="val 4518"/>
+            </a:avLst>
+          </a:prstGeom>
+          <a:solidFill>
+            <a:srgbClr val="0A0810"/>
+          </a:solidFill>
+          <a:ln w="12700">
+            <a:solidFill>
+              <a:srgbClr val="2A2438"/>
+            </a:solidFill>
+            <a:prstDash val="solid"/>
+          </a:ln>
+        </p:spPr>
+      </p:sp>
+      <p:sp>
+        <p:nvSpPr>
+          <p:cNvPr id="37" name="Text 34"/>
+          <p:cNvSpPr/>
+          <p:nvPr/>
+        </p:nvSpPr>
+        <p:spPr>
+          <a:xfrm>
+            <a:off x="9460992" y="2176272"/>
+            <a:ext cx="865632" cy="328087"/>
+          </a:xfrm>
+          <a:prstGeom prst="rect">
+            <a:avLst/>
+          </a:prstGeom>
+          <a:noFill/>
+          <a:ln/>
+        </p:spPr>
+        <p:txBody>
+          <a:bodyPr wrap="square" lIns="0" tIns="0" rIns="0" bIns="0" rtlCol="0" anchor="t"/>
+          <a:lstStyle/>
+          <a:p>
+            <a:pPr indent="0" marL="0">
+              <a:buNone/>
+            </a:pPr>
+            <a:r>
+              <a:rPr lang="en-US" sz="750" dirty="0">
+                <a:solidFill>
+                  <a:srgbClr val="9A94AA"/>
+                </a:solidFill>
+                <a:latin typeface="Courier New" pitchFamily="34" charset="0"/>
+                <a:ea typeface="Courier New" pitchFamily="34" charset="-122"/>
+                <a:cs typeface="Courier New" pitchFamily="34" charset="-120"/>
+              </a:rPr>
+              <a:t>cost</a:t>
+            </a:r>
+            <a:endParaRPr lang="en-US" sz="750" dirty="0"/>
+          </a:p>
+        </p:txBody>
+      </p:sp>
+      <p:sp>
+        <p:nvSpPr>
+          <p:cNvPr id="38" name="Text 35"/>
+          <p:cNvSpPr/>
+          <p:nvPr/>
+        </p:nvSpPr>
+        <p:spPr>
+          <a:xfrm>
+            <a:off x="9460992" y="2568732"/>
+            <a:ext cx="865632" cy="731886"/>
+          </a:xfrm>
+          <a:prstGeom prst="rect">
+            <a:avLst/>
+          </a:prstGeom>
+          <a:noFill/>
+          <a:ln/>
+        </p:spPr>
+        <p:txBody>
+          <a:bodyPr wrap="square" lIns="0" tIns="0" rIns="0" bIns="0" rtlCol="0" anchor="ctr"/>
+          <a:lstStyle/>
+          <a:p>
+            <a:pPr indent="0" marL="0">
+              <a:buNone/>
+            </a:pPr>
+            <a:r>
+              <a:rPr lang="en-US" sz="1300" b="1" dirty="0">
+                <a:solidFill>
+                  <a:srgbClr val="D8D4E4"/>
+                </a:solidFill>
+                <a:latin typeface="Courier New" pitchFamily="34" charset="0"/>
+                <a:ea typeface="Courier New" pitchFamily="34" charset="-122"/>
+                <a:cs typeface="Courier New" pitchFamily="34" charset="-120"/>
+              </a:rPr>
+              <a:t>$0.42</a:t>
+            </a:r>
+            <a:endParaRPr lang="en-US" sz="1300" dirty="0"/>
+          </a:p>
+        </p:txBody>
+      </p:sp>
+      <p:sp>
+        <p:nvSpPr>
+          <p:cNvPr id="39" name="Shape 36"/>
+          <p:cNvSpPr/>
+          <p:nvPr/>
+        </p:nvSpPr>
+        <p:spPr>
+          <a:xfrm>
+            <a:off x="10509504" y="2139696"/>
+            <a:ext cx="1011936" cy="1261872"/>
+          </a:xfrm>
+          <a:prstGeom prst="roundRect">
+            <a:avLst>
+              <a:gd name="adj" fmla="val 4518"/>
+            </a:avLst>
+          </a:prstGeom>
+          <a:solidFill>
+            <a:srgbClr val="0A0810"/>
+          </a:solidFill>
+          <a:ln w="12700">
+            <a:solidFill>
+              <a:srgbClr val="2A2438"/>
+            </a:solidFill>
+            <a:prstDash val="solid"/>
+          </a:ln>
+        </p:spPr>
+      </p:sp>
+      <p:sp>
+        <p:nvSpPr>
+          <p:cNvPr id="40" name="Text 37"/>
+          <p:cNvSpPr/>
+          <p:nvPr/>
+        </p:nvSpPr>
+        <p:spPr>
+          <a:xfrm>
+            <a:off x="10582656" y="2176272"/>
+            <a:ext cx="865632" cy="328087"/>
+          </a:xfrm>
+          <a:prstGeom prst="rect">
+            <a:avLst/>
+          </a:prstGeom>
+          <a:noFill/>
+          <a:ln/>
+        </p:spPr>
+        <p:txBody>
+          <a:bodyPr wrap="square" lIns="0" tIns="0" rIns="0" bIns="0" rtlCol="0" anchor="t"/>
+          <a:lstStyle/>
+          <a:p>
+            <a:pPr indent="0" marL="0">
+              <a:buNone/>
+            </a:pPr>
+            <a:r>
+              <a:rPr lang="en-US" sz="750" dirty="0">
+                <a:solidFill>
+                  <a:srgbClr val="9A94AA"/>
+                </a:solidFill>
+                <a:latin typeface="Courier New" pitchFamily="34" charset="0"/>
+                <a:ea typeface="Courier New" pitchFamily="34" charset="-122"/>
+                <a:cs typeface="Courier New" pitchFamily="34" charset="-120"/>
+              </a:rPr>
+              <a:t>p95</a:t>
+            </a:r>
+            <a:endParaRPr lang="en-US" sz="750" dirty="0"/>
+          </a:p>
+        </p:txBody>
+      </p:sp>
+      <p:sp>
+        <p:nvSpPr>
+          <p:cNvPr id="41" name="Text 38"/>
+          <p:cNvSpPr/>
+          <p:nvPr/>
+        </p:nvSpPr>
+        <p:spPr>
+          <a:xfrm>
+            <a:off x="10582656" y="2568732"/>
+            <a:ext cx="865632" cy="731886"/>
+          </a:xfrm>
+          <a:prstGeom prst="rect">
+            <a:avLst/>
+          </a:prstGeom>
+          <a:noFill/>
+          <a:ln/>
+        </p:spPr>
+        <p:txBody>
+          <a:bodyPr wrap="square" lIns="0" tIns="0" rIns="0" bIns="0" rtlCol="0" anchor="ctr"/>
+          <a:lstStyle/>
+          <a:p>
+            <a:pPr indent="0" marL="0">
+              <a:buNone/>
+            </a:pPr>
+            <a:r>
+              <a:rPr lang="en-US" sz="1300" b="1" dirty="0">
+                <a:solidFill>
+                  <a:srgbClr val="D8D4E4"/>
+                </a:solidFill>
+                <a:latin typeface="Courier New" pitchFamily="34" charset="0"/>
+                <a:ea typeface="Courier New" pitchFamily="34" charset="-122"/>
+                <a:cs typeface="Courier New" pitchFamily="34" charset="-120"/>
+              </a:rPr>
+              <a:t>1.8 s</a:t>
+            </a:r>
+            <a:endParaRPr lang="en-US" sz="1300" dirty="0"/>
+          </a:p>
+        </p:txBody>
+      </p:sp>
+      <p:sp>
+        <p:nvSpPr>
+          <p:cNvPr id="42" name="Shape 39"/>
+          <p:cNvSpPr/>
+          <p:nvPr/>
+        </p:nvSpPr>
+        <p:spPr>
+          <a:xfrm>
+            <a:off x="8266176" y="3493008"/>
+            <a:ext cx="1011936" cy="1261872"/>
+          </a:xfrm>
+          <a:prstGeom prst="roundRect">
+            <a:avLst>
+              <a:gd name="adj" fmla="val 4518"/>
+            </a:avLst>
+          </a:prstGeom>
+          <a:solidFill>
+            <a:srgbClr val="0A0810"/>
+          </a:solidFill>
+          <a:ln w="12700">
+            <a:solidFill>
+              <a:srgbClr val="2A2438"/>
+            </a:solidFill>
+            <a:prstDash val="solid"/>
+          </a:ln>
+        </p:spPr>
+      </p:sp>
+      <p:sp>
+        <p:nvSpPr>
+          <p:cNvPr id="43" name="Text 40"/>
+          <p:cNvSpPr/>
+          <p:nvPr/>
+        </p:nvSpPr>
+        <p:spPr>
+          <a:xfrm>
+            <a:off x="8339328" y="3529584"/>
+            <a:ext cx="865632" cy="328087"/>
+          </a:xfrm>
+          <a:prstGeom prst="rect">
+            <a:avLst/>
+          </a:prstGeom>
+          <a:noFill/>
+          <a:ln/>
+        </p:spPr>
+        <p:txBody>
+          <a:bodyPr wrap="square" lIns="0" tIns="0" rIns="0" bIns="0" rtlCol="0" anchor="t"/>
+          <a:lstStyle/>
+          <a:p>
+            <a:pPr indent="0" marL="0">
+              <a:buNone/>
+            </a:pPr>
+            <a:r>
+              <a:rPr lang="en-US" sz="750" dirty="0">
+                <a:solidFill>
+                  <a:srgbClr val="9A94AA"/>
+                </a:solidFill>
+                <a:latin typeface="Courier New" pitchFamily="34" charset="0"/>
+                <a:ea typeface="Courier New" pitchFamily="34" charset="-122"/>
+                <a:cs typeface="Courier New" pitchFamily="34" charset="-120"/>
+              </a:rPr>
+              <a:t>error</a:t>
+            </a:r>
+            <a:endParaRPr lang="en-US" sz="750" dirty="0"/>
+          </a:p>
+        </p:txBody>
+      </p:sp>
+      <p:sp>
+        <p:nvSpPr>
+          <p:cNvPr id="44" name="Text 41"/>
+          <p:cNvSpPr/>
+          <p:nvPr/>
+        </p:nvSpPr>
+        <p:spPr>
+          <a:xfrm>
+            <a:off x="8339328" y="3922044"/>
+            <a:ext cx="865632" cy="731886"/>
+          </a:xfrm>
+          <a:prstGeom prst="rect">
+            <a:avLst/>
+          </a:prstGeom>
+          <a:noFill/>
+          <a:ln/>
+        </p:spPr>
+        <p:txBody>
+          <a:bodyPr wrap="square" lIns="0" tIns="0" rIns="0" bIns="0" rtlCol="0" anchor="ctr"/>
+          <a:lstStyle/>
+          <a:p>
+            <a:pPr indent="0" marL="0">
+              <a:buNone/>
+            </a:pPr>
+            <a:r>
+              <a:rPr lang="en-US" sz="1300" b="1" dirty="0">
+                <a:solidFill>
+                  <a:srgbClr val="D8D4E4"/>
+                </a:solidFill>
+                <a:latin typeface="Courier New" pitchFamily="34" charset="0"/>
+                <a:ea typeface="Courier New" pitchFamily="34" charset="-122"/>
+                <a:cs typeface="Courier New" pitchFamily="34" charset="-120"/>
+              </a:rPr>
+              <a:t>1.4%</a:t>
+            </a:r>
+            <a:endParaRPr lang="en-US" sz="1300" dirty="0"/>
+          </a:p>
+        </p:txBody>
+      </p:sp>
+      <p:sp>
+        <p:nvSpPr>
+          <p:cNvPr id="45" name="Shape 42"/>
+          <p:cNvSpPr/>
+          <p:nvPr/>
+        </p:nvSpPr>
+        <p:spPr>
+          <a:xfrm>
+            <a:off x="9387840" y="3493008"/>
+            <a:ext cx="1011936" cy="1261872"/>
+          </a:xfrm>
+          <a:prstGeom prst="roundRect">
+            <a:avLst>
+              <a:gd name="adj" fmla="val 4518"/>
+            </a:avLst>
+          </a:prstGeom>
+          <a:solidFill>
+            <a:srgbClr val="0A0810"/>
+          </a:solidFill>
+          <a:ln w="12700">
+            <a:solidFill>
+              <a:srgbClr val="2A2438"/>
+            </a:solidFill>
+            <a:prstDash val="solid"/>
+          </a:ln>
+        </p:spPr>
+      </p:sp>
+      <p:sp>
+        <p:nvSpPr>
+          <p:cNvPr id="46" name="Text 43"/>
+          <p:cNvSpPr/>
+          <p:nvPr/>
+        </p:nvSpPr>
+        <p:spPr>
+          <a:xfrm>
+            <a:off x="9460992" y="3529584"/>
+            <a:ext cx="865632" cy="328087"/>
+          </a:xfrm>
+          <a:prstGeom prst="rect">
+            <a:avLst/>
+          </a:prstGeom>
+          <a:noFill/>
+          <a:ln/>
+        </p:spPr>
+        <p:txBody>
+          <a:bodyPr wrap="square" lIns="0" tIns="0" rIns="0" bIns="0" rtlCol="0" anchor="t"/>
+          <a:lstStyle/>
+          <a:p>
+            <a:pPr indent="0" marL="0">
+              <a:buNone/>
+            </a:pPr>
+            <a:r>
+              <a:rPr lang="en-US" sz="750" dirty="0">
+                <a:solidFill>
+                  <a:srgbClr val="9A94AA"/>
+                </a:solidFill>
+                <a:latin typeface="Courier New" pitchFamily="34" charset="0"/>
+                <a:ea typeface="Courier New" pitchFamily="34" charset="-122"/>
+                <a:cs typeface="Courier New" pitchFamily="34" charset="-120"/>
+              </a:rPr>
+              <a:t>cache-hit</a:t>
+            </a:r>
+            <a:endParaRPr lang="en-US" sz="750" dirty="0"/>
+          </a:p>
+        </p:txBody>
+      </p:sp>
+      <p:sp>
+        <p:nvSpPr>
+          <p:cNvPr id="47" name="Text 44"/>
+          <p:cNvSpPr/>
+          <p:nvPr/>
+        </p:nvSpPr>
+        <p:spPr>
+          <a:xfrm>
+            <a:off x="9460992" y="3922044"/>
+            <a:ext cx="865632" cy="731886"/>
+          </a:xfrm>
+          <a:prstGeom prst="rect">
+            <a:avLst/>
+          </a:prstGeom>
+          <a:noFill/>
+          <a:ln/>
+        </p:spPr>
+        <p:txBody>
+          <a:bodyPr wrap="square" lIns="0" tIns="0" rIns="0" bIns="0" rtlCol="0" anchor="ctr"/>
+          <a:lstStyle/>
+          <a:p>
+            <a:pPr indent="0" marL="0">
+              <a:buNone/>
+            </a:pPr>
+            <a:r>
+              <a:rPr lang="en-US" sz="1300" b="1" dirty="0">
+                <a:solidFill>
+                  <a:srgbClr val="D8D4E4"/>
+                </a:solidFill>
+                <a:latin typeface="Courier New" pitchFamily="34" charset="0"/>
+                <a:ea typeface="Courier New" pitchFamily="34" charset="-122"/>
+                <a:cs typeface="Courier New" pitchFamily="34" charset="-120"/>
+              </a:rPr>
+              <a:t>31%</a:t>
+            </a:r>
+            <a:endParaRPr lang="en-US" sz="1300" dirty="0"/>
+          </a:p>
+        </p:txBody>
+      </p:sp>
+      <p:sp>
+        <p:nvSpPr>
+          <p:cNvPr id="48" name="Shape 45"/>
+          <p:cNvSpPr/>
+          <p:nvPr/>
+        </p:nvSpPr>
+        <p:spPr>
+          <a:xfrm>
+            <a:off x="10509504" y="3493008"/>
+            <a:ext cx="1011936" cy="1261872"/>
+          </a:xfrm>
+          <a:prstGeom prst="roundRect">
+            <a:avLst>
+              <a:gd name="adj" fmla="val 4518"/>
+            </a:avLst>
+          </a:prstGeom>
+          <a:solidFill>
+            <a:srgbClr val="0A0810"/>
+          </a:solidFill>
+          <a:ln w="12700">
+            <a:solidFill>
+              <a:srgbClr val="2A2438"/>
+            </a:solidFill>
+            <a:prstDash val="solid"/>
+          </a:ln>
+        </p:spPr>
+      </p:sp>
+      <p:sp>
+        <p:nvSpPr>
+          <p:cNvPr id="49" name="Text 46"/>
+          <p:cNvSpPr/>
+          <p:nvPr/>
+        </p:nvSpPr>
+        <p:spPr>
+          <a:xfrm>
+            <a:off x="10582656" y="3529584"/>
+            <a:ext cx="865632" cy="328087"/>
+          </a:xfrm>
+          <a:prstGeom prst="rect">
+            <a:avLst/>
+          </a:prstGeom>
+          <a:noFill/>
+          <a:ln/>
+        </p:spPr>
+        <p:txBody>
+          <a:bodyPr wrap="square" lIns="0" tIns="0" rIns="0" bIns="0" rtlCol="0" anchor="t"/>
+          <a:lstStyle/>
+          <a:p>
+            <a:pPr indent="0" marL="0">
+              <a:buNone/>
+            </a:pPr>
+            <a:r>
+              <a:rPr lang="en-US" sz="750" dirty="0">
+                <a:solidFill>
+                  <a:srgbClr val="9A94AA"/>
+                </a:solidFill>
+                <a:latin typeface="Courier New" pitchFamily="34" charset="0"/>
+                <a:ea typeface="Courier New" pitchFamily="34" charset="-122"/>
+                <a:cs typeface="Courier New" pitchFamily="34" charset="-120"/>
+              </a:rPr>
+              <a:t>fallback</a:t>
+            </a:r>
+            <a:endParaRPr lang="en-US" sz="750" dirty="0"/>
+          </a:p>
+        </p:txBody>
+      </p:sp>
+      <p:sp>
+        <p:nvSpPr>
+          <p:cNvPr id="50" name="Text 47"/>
+          <p:cNvSpPr/>
+          <p:nvPr/>
+        </p:nvSpPr>
+        <p:spPr>
+          <a:xfrm>
+            <a:off x="10582656" y="3922044"/>
+            <a:ext cx="865632" cy="731886"/>
+          </a:xfrm>
+          <a:prstGeom prst="rect">
+            <a:avLst/>
+          </a:prstGeom>
+          <a:noFill/>
+          <a:ln/>
+        </p:spPr>
+        <p:txBody>
+          <a:bodyPr wrap="square" lIns="0" tIns="0" rIns="0" bIns="0" rtlCol="0" anchor="ctr"/>
+          <a:lstStyle/>
+          <a:p>
+            <a:pPr indent="0" marL="0">
+              <a:buNone/>
+            </a:pPr>
+            <a:r>
+              <a:rPr lang="en-US" sz="1300" b="1" dirty="0">
+                <a:solidFill>
+                  <a:srgbClr val="D8D4E4"/>
+                </a:solidFill>
+                <a:latin typeface="Courier New" pitchFamily="34" charset="0"/>
+                <a:ea typeface="Courier New" pitchFamily="34" charset="-122"/>
+                <a:cs typeface="Courier New" pitchFamily="34" charset="-120"/>
+              </a:rPr>
+              <a:t>3</a:t>
+            </a:r>
+            <a:endParaRPr lang="en-US" sz="1300" dirty="0"/>
+          </a:p>
+        </p:txBody>
+      </p:sp>
+      <p:sp>
+        <p:nvSpPr>
+          <p:cNvPr id="51" name="Shape 48"/>
+          <p:cNvSpPr/>
+          <p:nvPr/>
+        </p:nvSpPr>
+        <p:spPr>
+          <a:xfrm>
             <a:off x="566928" y="5074920"/>
             <a:ext cx="11064240" cy="1051560"/>
           </a:xfrm>
@@ -20437,7 +21216,7 @@
       </p:sp>
       <p:sp>
         <p:nvSpPr>
-          <p:cNvPr id="28" name="Shape 25"/>
+          <p:cNvPr id="52" name="Shape 49"/>
           <p:cNvSpPr/>
           <p:nvPr/>
         </p:nvSpPr>
@@ -20457,7 +21236,7 @@
       </p:sp>
       <p:sp>
         <p:nvSpPr>
-          <p:cNvPr id="29" name="Text 26"/>
+          <p:cNvPr id="53" name="Text 50"/>
           <p:cNvSpPr/>
           <p:nvPr/>
         </p:nvSpPr>
@@ -20496,7 +21275,7 @@
       </p:sp>
       <p:sp>
         <p:nvSpPr>
-          <p:cNvPr id="30" name="Text 27"/>
+          <p:cNvPr id="54" name="Text 51"/>
           <p:cNvSpPr/>
           <p:nvPr/>
         </p:nvSpPr>
@@ -20535,7 +21314,7 @@
       </p:sp>
       <p:sp>
         <p:nvSpPr>
-          <p:cNvPr id="31" name="Text 28"/>
+          <p:cNvPr id="55" name="Text 52"/>
           <p:cNvSpPr/>
           <p:nvPr/>
         </p:nvSpPr>

--- a/docs/decks/L09.pptx
+++ b/docs/decks/L09.pptx
@@ -3788,7 +3788,7 @@
                 <a:ea typeface="Courier New" pitchFamily="34" charset="-122"/>
                 <a:cs typeface="Courier New" pitchFamily="34" charset="-120"/>
               </a:rPr>
-              <a:t>ТИЖДЕНЬ 5 · УРОК 9 З 12</a:t>
+              <a:t>ТИЖДЕНЬ 5 · ТЕМА 9 З 12</a:t>
             </a:r>
             <a:endParaRPr lang="en-US" sz="1200" dirty="0"/>
           </a:p>
@@ -5729,7 +5729,7 @@
                           <a:ea typeface="Montserrat" pitchFamily="34" charset="-122"/>
                           <a:cs typeface="Montserrat" pitchFamily="34" charset="-120"/>
                         </a:rPr>
-                        <a:t>сума cost_usd (урок 4)</a:t>
+                        <a:t>сума cost_usd (Тема 4)</a:t>
                       </a:r>
                       <a:endParaRPr lang="en-US" sz="1150" dirty="0">
                         <a:latin typeface="Montserrat" charset="0"/>
@@ -6347,7 +6347,7 @@
                           <a:ea typeface="Montserrat" pitchFamily="34" charset="-122"/>
                           <a:cs typeface="Montserrat" pitchFamily="34" charset="-120"/>
                         </a:rPr>
-                        <a:t>лічильники (урок 5)</a:t>
+                        <a:t>лічильники (Тема 5)</a:t>
                       </a:r>
                       <a:endParaRPr lang="en-US" sz="1150" dirty="0">
                         <a:latin typeface="Montserrat" charset="0"/>
@@ -6553,7 +6553,7 @@
                           <a:ea typeface="Montserrat" pitchFamily="34" charset="-122"/>
                           <a:cs typeface="Montserrat" pitchFamily="34" charset="-120"/>
                         </a:rPr>
-                        <a:t>лічильник (урок 7)</a:t>
+                        <a:t>лічильник (Тема 7)</a:t>
                       </a:r>
                       <a:endParaRPr lang="en-US" sz="1150" dirty="0">
                         <a:latin typeface="Montserrat" charset="0"/>
@@ -8016,7 +8016,7 @@
                 <a:ea typeface="Montserrat" pitchFamily="34" charset="-122"/>
                 <a:cs typeface="Montserrat" pitchFamily="34" charset="-120"/>
               </a:rPr>
-              <a:t>основна модель деградує, а ви «не бачите» — відповіді ж ідуть</a:t>
+              <a:t>основна модель деградує, а Ви «не бачите» — відповіді ж ідуть</a:t>
             </a:r>
             <a:endParaRPr lang="en-US" sz="1200" dirty="0"/>
           </a:p>
@@ -9463,7 +9463,7 @@
                 <a:ea typeface="Montserrat" pitchFamily="34" charset="-122"/>
                 <a:cs typeface="Montserrat" pitchFamily="34" charset="-120"/>
               </a:rPr>
-              <a:t>показник, який ви міряєте: частка успішних відповідей, p95 latency</a:t>
+              <a:t>показник, який Ви міряєте: частка успішних відповідей, p95 latency</a:t>
             </a:r>
             <a:endParaRPr lang="en-US" sz="1150" dirty="0"/>
           </a:p>
@@ -11716,7 +11716,7 @@
                 <a:ea typeface="Montserrat" pitchFamily="34" charset="-122"/>
                 <a:cs typeface="Montserrat" pitchFamily="34" charset="-120"/>
               </a:rPr>
-              <a:t>  ·  один червоний квадрат — увесь ваш тижневий бюджет невдач</a:t>
+              <a:t>  ·  один червоний квадрат — увесь Ваш тижневий бюджет невдач</a:t>
             </a:r>
             <a:endParaRPr lang="en-US" sz="1250" dirty="0"/>
           </a:p>
@@ -12740,7 +12740,7 @@
                 <a:ea typeface="Montserrat" pitchFamily="34" charset="-122"/>
                 <a:cs typeface="Montserrat" pitchFamily="34" charset="-120"/>
               </a:rPr>
-              <a:t>спрацював — що робити першим? Це runbook останнього уроку</a:t>
+              <a:t>спрацював — що робити першим? Це runbook останньої теми</a:t>
             </a:r>
             <a:endParaRPr lang="en-US" sz="1200" dirty="0"/>
           </a:p>
@@ -17556,7 +17556,7 @@
                 <a:ea typeface="Montserrat" pitchFamily="34" charset="-122"/>
                 <a:cs typeface="Montserrat" pitchFamily="34" charset="-120"/>
               </a:rPr>
-              <a:t>Усе залоговане ви зобов'язані захищати: лог — база даних, не блокнот.</a:t>
+              <a:t>Усе залоговане Ви зобов'язані захищати: лог — база даних, не блокнот.</a:t>
             </a:r>
             <a:endParaRPr lang="en-US" sz="1300" dirty="0"/>
           </a:p>
@@ -17690,7 +17690,7 @@
                 <a:ea typeface="Unbounded" pitchFamily="34" charset="-122"/>
                 <a:cs typeface="Unbounded" pitchFamily="34" charset="-120"/>
               </a:rPr>
-              <a:t>Що ви зможете після уроку</a:t>
+              <a:t>Що Ви зможете після теми</a:t>
             </a:r>
             <a:endParaRPr lang="en-US" sz="2400" dirty="0"/>
           </a:p>
@@ -19268,7 +19268,7 @@
                 <a:ea typeface="Montserrat" pitchFamily="34" charset="-122"/>
                 <a:cs typeface="Montserrat" pitchFamily="34" charset="-120"/>
               </a:rPr>
-              <a:t>Раз на тиждень звіряйте плитку з SQL руками. Розбіжність — це або баг агрегації, або зміна, про яку ви не знали.</a:t>
+              <a:t>Раз на тиждень звіряйте плитку з SQL руками. Розбіжність — це або баг агрегації, або зміна, про яку Ви не знали.</a:t>
             </a:r>
             <a:endParaRPr lang="en-US" sz="1300" dirty="0"/>
           </a:p>
@@ -19674,7 +19674,7 @@
                 <a:ea typeface="Unbounded" pitchFamily="34" charset="-122"/>
                 <a:cs typeface="Unbounded" pitchFamily="34" charset="-120"/>
               </a:rPr>
-              <a:t>Зараз ви побачите — і навіщо</a:t>
+              <a:t>Зараз Ви побачите — і навіщо</a:t>
             </a:r>
             <a:endParaRPr lang="en-US" sz="2400" dirty="0"/>
           </a:p>
@@ -22554,7 +22554,7 @@
                 <a:ea typeface="Montserrat" pitchFamily="34" charset="-122"/>
                 <a:cs typeface="Montserrat" pitchFamily="34" charset="-120"/>
               </a:rPr>
-              <a:t>Моніторинг — це ваш лог</a:t>
+              <a:t>Моніторинг — це Ваш лог</a:t>
             </a:r>
             <a:endParaRPr lang="en-US" sz="1450" dirty="0"/>
           </a:p>
@@ -22596,7 +22596,7 @@
                 <a:ea typeface="Montserrat" pitchFamily="34" charset="-122"/>
                 <a:cs typeface="Montserrat" pitchFamily="34" charset="-120"/>
               </a:rPr>
-              <a:t>SQL по таблиці, яку ви писали з першого уроку</a:t>
+              <a:t>SQL по таблиці, яку Ви писали з першої теми</a:t>
             </a:r>
             <a:endParaRPr lang="en-US" sz="1200" dirty="0"/>
           </a:p>
@@ -22871,7 +22871,7 @@
                 <a:ea typeface="Montserrat" pitchFamily="34" charset="-122"/>
                 <a:cs typeface="Montserrat" pitchFamily="34" charset="-120"/>
               </a:rPr>
-              <a:t>Видимість є. Наступного уроку до неї додається судження: не «скільки запитів», а «чи стали відповіді гіршими» — і це вже перевірки якості.</a:t>
+              <a:t>Видимість є. У наступній темі до неї додається судження: не «скільки запитів», а «чи стали відповіді гіршими» — і це вже перевірки якості.</a:t>
             </a:r>
             <a:endParaRPr lang="en-US" sz="1300" dirty="0"/>
           </a:p>
@@ -25083,7 +25083,7 @@
                 <a:ea typeface="Montserrat" pitchFamily="34" charset="-122"/>
                 <a:cs typeface="Montserrat" pitchFamily="34" charset="-120"/>
               </a:rPr>
-              <a:t>ДЗ тижня 5 — після наступного уроку</a:t>
+              <a:t>ДЗ тижня 5 — після наступної теми</a:t>
             </a:r>
             <a:endParaRPr lang="en-US" sz="1500" dirty="0"/>
           </a:p>
@@ -25122,7 +25122,7 @@
                 <a:ea typeface="Montserrat" pitchFamily="34" charset="-122"/>
                 <a:cs typeface="Montserrat" pitchFamily="34" charset="-120"/>
               </a:rPr>
-              <a:t>Воно об'єднує спостережуваність і evals: сьогоднішні ендпоінти вже у вас в руках; після наступного уроку додадуться власні eval-кейси в golden dataset — і тиждень здається одним PR.</a:t>
+              <a:t>Воно об'єднує спостережуваність і evals: сьогоднішні ендпоінти вже у Вас в руках; після наступної теми додадуться власні eval-кейси в golden dataset — і тиждень здається одним PR.</a:t>
             </a:r>
             <a:endParaRPr lang="en-US" sz="1250" dirty="0"/>
           </a:p>
@@ -25273,7 +25273,7 @@
                 <a:ea typeface="Courier New" pitchFamily="34" charset="-122"/>
                 <a:cs typeface="Courier New" pitchFamily="34" charset="-120"/>
               </a:rPr>
-              <a:t>ПІДСУМОК УРОКУ 9</a:t>
+              <a:t>ПІДСУМОК ТЕМИ 9</a:t>
             </a:r>
             <a:endParaRPr lang="en-US" sz="1100" dirty="0"/>
           </a:p>
@@ -25649,7 +25649,7 @@
                 <a:ea typeface="Montserrat" pitchFamily="34" charset="-122"/>
                 <a:cs typeface="Montserrat" pitchFamily="34" charset="-120"/>
               </a:rPr>
-              <a:t>Наступний крок → Урок 10 · Golden dataset і eval suite</a:t>
+              <a:t>Наступний крок → Тема 10 · Golden dataset і eval suite</a:t>
             </a:r>
             <a:endParaRPr lang="en-US" sz="1500" dirty="0"/>
           </a:p>
@@ -25691,7 +25691,7 @@
                 <a:ea typeface="Montserrat" pitchFamily="34" charset="-122"/>
                 <a:cs typeface="Montserrat" pitchFamily="34" charset="-120"/>
               </a:rPr>
-              <a:t>Ви бачите, що система робить. Але «відповіді стали гіршими» жодна з шести плиток не покаже. Наступний урок дає якості число: golden dataset, grader, поріг і exit code — той самий, що на тижні 6 стане гейтом у CI.</a:t>
+              <a:t>Ви бачите, що система робить. Але «відповіді стали гіршими» жодна з шести плиток не покаже. Наступна тема дає якості число: golden dataset, grader, поріг і exit code — той самий, що на тижні 6 стане гейтом у CI.</a:t>
             </a:r>
             <a:endParaRPr lang="en-US" sz="1250" dirty="0"/>
           </a:p>
@@ -27655,7 +27655,7 @@
                 <a:ea typeface="Montserrat" pitchFamily="34" charset="-122"/>
                 <a:cs typeface="Montserrat" pitchFamily="34" charset="-120"/>
               </a:rPr>
-              <a:t>Шість слів сьогоднішнього уроку</a:t>
+              <a:t>Шість слів сьогоднішньої теми</a:t>
             </a:r>
             <a:endParaRPr lang="en-US" sz="1300" dirty="0"/>
           </a:p>
@@ -28069,7 +28069,7 @@
                 <a:ea typeface="Montserrat" pitchFamily="34" charset="-122"/>
                 <a:cs typeface="Montserrat" pitchFamily="34" charset="-120"/>
               </a:rPr>
-              <a:t>власні лічильники з уроків 5 і 7</a:t>
+              <a:t>власні лічильники з Тем 5 і 7</a:t>
             </a:r>
             <a:endParaRPr lang="en-US" sz="1150" dirty="0"/>
           </a:p>
@@ -30814,7 +30814,7 @@
                 <a:ea typeface="Montserrat" pitchFamily="34" charset="-122"/>
                 <a:cs typeface="Montserrat" pitchFamily="34" charset="-120"/>
               </a:rPr>
-              <a:t>Ніякої магії: жодного окремого «стека спостережуваності» для ядра — SQL по таблиці, яку ви й так пишете. Лог, закладений заздалегідь, — різниця між «подивімось» і «даних немає».</a:t>
+              <a:t>Ніякої магії: жодного окремого «стека спостережуваності» для ядра — SQL по таблиці, яку Ви й так пишете. Лог, закладений заздалегідь, — різниця між «подивімось» і «даних немає».</a:t>
             </a:r>
             <a:endParaRPr lang="en-US" sz="1300" dirty="0"/>
           </a:p>

--- a/docs/decks/L09.pptx
+++ b/docs/decks/L09.pptx
@@ -12269,11 +12269,11 @@
         <p:spPr>
           <a:xfrm>
             <a:off x="566928" y="1783080"/>
-            <a:ext cx="3520440" cy="1783080"/>
+            <a:ext cx="3520440" cy="1645920"/>
           </a:xfrm>
           <a:prstGeom prst="roundRect">
             <a:avLst>
-              <a:gd name="adj" fmla="val 6154"/>
+              <a:gd name="adj" fmla="val 6667"/>
             </a:avLst>
           </a:prstGeom>
           <a:solidFill>
@@ -12389,7 +12389,7 @@
         <p:spPr>
           <a:xfrm>
             <a:off x="768096" y="2468880"/>
-            <a:ext cx="3118104" cy="941832"/>
+            <a:ext cx="3118104" cy="804672"/>
           </a:xfrm>
           <a:prstGeom prst="rect">
             <a:avLst/>
@@ -12431,11 +12431,11 @@
         <p:spPr>
           <a:xfrm>
             <a:off x="4270248" y="1783080"/>
-            <a:ext cx="3520440" cy="1783080"/>
+            <a:ext cx="3520440" cy="1645920"/>
           </a:xfrm>
           <a:prstGeom prst="roundRect">
             <a:avLst>
-              <a:gd name="adj" fmla="val 6154"/>
+              <a:gd name="adj" fmla="val 6667"/>
             </a:avLst>
           </a:prstGeom>
           <a:solidFill>
@@ -12551,7 +12551,7 @@
         <p:spPr>
           <a:xfrm>
             <a:off x="4471416" y="2468880"/>
-            <a:ext cx="3118104" cy="941832"/>
+            <a:ext cx="3118104" cy="804672"/>
           </a:xfrm>
           <a:prstGeom prst="rect">
             <a:avLst/>
@@ -12593,11 +12593,11 @@
         <p:spPr>
           <a:xfrm>
             <a:off x="7973568" y="1783080"/>
-            <a:ext cx="3520440" cy="1783080"/>
+            <a:ext cx="3520440" cy="1645920"/>
           </a:xfrm>
           <a:prstGeom prst="roundRect">
             <a:avLst>
-              <a:gd name="adj" fmla="val 6154"/>
+              <a:gd name="adj" fmla="val 6667"/>
             </a:avLst>
           </a:prstGeom>
           <a:solidFill>
@@ -12713,7 +12713,7 @@
         <p:spPr>
           <a:xfrm>
             <a:off x="8174736" y="2468880"/>
-            <a:ext cx="3118104" cy="941832"/>
+            <a:ext cx="3118104" cy="804672"/>
           </a:xfrm>
           <a:prstGeom prst="rect">
             <a:avLst/>
@@ -12754,12 +12754,427 @@
         </p:nvSpPr>
         <p:spPr>
           <a:xfrm>
-            <a:off x="566928" y="3931920"/>
-            <a:ext cx="11064240" cy="1234440"/>
+            <a:off x="1389888" y="4069080"/>
+            <a:ext cx="9418320" cy="0"/>
+          </a:xfrm>
+          <a:prstGeom prst="line">
+            <a:avLst/>
+          </a:prstGeom>
+          <a:noFill/>
+          <a:ln w="25400">
+            <a:solidFill>
+              <a:srgbClr val="5A05F4"/>
+            </a:solidFill>
+            <a:prstDash val="solid"/>
+          </a:ln>
+        </p:spPr>
+      </p:sp>
+      <p:sp>
+        <p:nvSpPr>
+          <p:cNvPr id="24" name="Shape 21"/>
+          <p:cNvSpPr/>
+          <p:nvPr/>
+        </p:nvSpPr>
+        <p:spPr>
+          <a:xfrm>
+            <a:off x="1307592" y="3986784"/>
+            <a:ext cx="164592" cy="164592"/>
+          </a:xfrm>
+          <a:prstGeom prst="ellipse">
+            <a:avLst/>
+          </a:prstGeom>
+          <a:solidFill>
+            <a:srgbClr val="106B41"/>
+          </a:solidFill>
+          <a:ln/>
+        </p:spPr>
+      </p:sp>
+      <p:sp>
+        <p:nvSpPr>
+          <p:cNvPr id="25" name="Text 22"/>
+          <p:cNvSpPr/>
+          <p:nvPr/>
+        </p:nvSpPr>
+        <p:spPr>
+          <a:xfrm>
+            <a:off x="704088" y="3502152"/>
+            <a:ext cx="1371600" cy="274320"/>
+          </a:xfrm>
+          <a:prstGeom prst="rect">
+            <a:avLst/>
+          </a:prstGeom>
+          <a:noFill/>
+          <a:ln/>
+        </p:spPr>
+        <p:txBody>
+          <a:bodyPr wrap="square" lIns="0" tIns="0" rIns="0" bIns="0" rtlCol="0" anchor="ctr"/>
+          <a:lstStyle/>
+          <a:p>
+            <a:pPr algn="ctr" indent="0" marL="0">
+              <a:buNone/>
+            </a:pPr>
+            <a:r>
+              <a:rPr lang="en-US" sz="1050" b="1" dirty="0">
+                <a:solidFill>
+                  <a:srgbClr val="106B41"/>
+                </a:solidFill>
+                <a:latin typeface="Courier New" pitchFamily="34" charset="0"/>
+                <a:ea typeface="Courier New" pitchFamily="34" charset="-122"/>
+                <a:cs typeface="Courier New" pitchFamily="34" charset="-120"/>
+              </a:rPr>
+              <a:t>10:00</a:t>
+            </a:r>
+            <a:endParaRPr lang="en-US" sz="1050" dirty="0"/>
+          </a:p>
+        </p:txBody>
+      </p:sp>
+      <p:sp>
+        <p:nvSpPr>
+          <p:cNvPr id="26" name="Text 23"/>
+          <p:cNvSpPr/>
+          <p:nvPr/>
+        </p:nvSpPr>
+        <p:spPr>
+          <a:xfrm>
+            <a:off x="521208" y="4251960"/>
+            <a:ext cx="1737360" cy="640080"/>
+          </a:xfrm>
+          <a:prstGeom prst="rect">
+            <a:avLst/>
+          </a:prstGeom>
+          <a:noFill/>
+          <a:ln/>
+        </p:spPr>
+        <p:txBody>
+          <a:bodyPr wrap="square" lIns="0" tIns="0" rIns="0" bIns="0" rtlCol="0" anchor="t"/>
+          <a:lstStyle/>
+          <a:p>
+            <a:pPr algn="ctr" indent="0" marL="0">
+              <a:buNone/>
+            </a:pPr>
+            <a:r>
+              <a:rPr lang="en-US" sz="1100" dirty="0">
+                <a:solidFill>
+                  <a:srgbClr val="434343"/>
+                </a:solidFill>
+                <a:latin typeface="Montserrat" pitchFamily="34" charset="0"/>
+                <a:ea typeface="Montserrat" pitchFamily="34" charset="-122"/>
+                <a:cs typeface="Montserrat" pitchFamily="34" charset="-120"/>
+              </a:rPr>
+              <a:t>поодинокі 5xx — фон, не алерт</a:t>
+            </a:r>
+            <a:endParaRPr lang="en-US" sz="1100" dirty="0"/>
+          </a:p>
+        </p:txBody>
+      </p:sp>
+      <p:sp>
+        <p:nvSpPr>
+          <p:cNvPr id="27" name="Shape 24"/>
+          <p:cNvSpPr/>
+          <p:nvPr/>
+        </p:nvSpPr>
+        <p:spPr>
+          <a:xfrm>
+            <a:off x="4447032" y="3986784"/>
+            <a:ext cx="164592" cy="164592"/>
+          </a:xfrm>
+          <a:prstGeom prst="ellipse">
+            <a:avLst/>
+          </a:prstGeom>
+          <a:solidFill>
+            <a:srgbClr val="B3261E"/>
+          </a:solidFill>
+          <a:ln/>
+        </p:spPr>
+      </p:sp>
+      <p:sp>
+        <p:nvSpPr>
+          <p:cNvPr id="28" name="Text 25"/>
+          <p:cNvSpPr/>
+          <p:nvPr/>
+        </p:nvSpPr>
+        <p:spPr>
+          <a:xfrm>
+            <a:off x="3843528" y="3502152"/>
+            <a:ext cx="1371600" cy="274320"/>
+          </a:xfrm>
+          <a:prstGeom prst="rect">
+            <a:avLst/>
+          </a:prstGeom>
+          <a:noFill/>
+          <a:ln/>
+        </p:spPr>
+        <p:txBody>
+          <a:bodyPr wrap="square" lIns="0" tIns="0" rIns="0" bIns="0" rtlCol="0" anchor="ctr"/>
+          <a:lstStyle/>
+          <a:p>
+            <a:pPr algn="ctr" indent="0" marL="0">
+              <a:buNone/>
+            </a:pPr>
+            <a:r>
+              <a:rPr lang="en-US" sz="1050" b="1" dirty="0">
+                <a:solidFill>
+                  <a:srgbClr val="B3261E"/>
+                </a:solidFill>
+                <a:latin typeface="Courier New" pitchFamily="34" charset="0"/>
+                <a:ea typeface="Courier New" pitchFamily="34" charset="-122"/>
+                <a:cs typeface="Courier New" pitchFamily="34" charset="-120"/>
+              </a:rPr>
+              <a:t>10:10</a:t>
+            </a:r>
+            <a:endParaRPr lang="en-US" sz="1050" dirty="0"/>
+          </a:p>
+        </p:txBody>
+      </p:sp>
+      <p:sp>
+        <p:nvSpPr>
+          <p:cNvPr id="29" name="Text 26"/>
+          <p:cNvSpPr/>
+          <p:nvPr/>
+        </p:nvSpPr>
+        <p:spPr>
+          <a:xfrm>
+            <a:off x="3660648" y="4251960"/>
+            <a:ext cx="1737360" cy="640080"/>
+          </a:xfrm>
+          <a:prstGeom prst="rect">
+            <a:avLst/>
+          </a:prstGeom>
+          <a:noFill/>
+          <a:ln/>
+        </p:spPr>
+        <p:txBody>
+          <a:bodyPr wrap="square" lIns="0" tIns="0" rIns="0" bIns="0" rtlCol="0" anchor="t"/>
+          <a:lstStyle/>
+          <a:p>
+            <a:pPr algn="ctr" indent="0" marL="0">
+              <a:buNone/>
+            </a:pPr>
+            <a:r>
+              <a:rPr lang="en-US" sz="1100" dirty="0">
+                <a:solidFill>
+                  <a:srgbClr val="434343"/>
+                </a:solidFill>
+                <a:latin typeface="Montserrat" pitchFamily="34" charset="0"/>
+                <a:ea typeface="Montserrat" pitchFamily="34" charset="-122"/>
+                <a:cs typeface="Montserrat" pitchFamily="34" charset="-120"/>
+              </a:rPr>
+              <a:t>частка успішних падає 3 хв поспіль</a:t>
+            </a:r>
+            <a:endParaRPr lang="en-US" sz="1100" dirty="0"/>
+          </a:p>
+        </p:txBody>
+      </p:sp>
+      <p:sp>
+        <p:nvSpPr>
+          <p:cNvPr id="30" name="Shape 27"/>
+          <p:cNvSpPr/>
+          <p:nvPr/>
+        </p:nvSpPr>
+        <p:spPr>
+          <a:xfrm>
+            <a:off x="7586472" y="3986784"/>
+            <a:ext cx="164592" cy="164592"/>
+          </a:xfrm>
+          <a:prstGeom prst="ellipse">
+            <a:avLst/>
+          </a:prstGeom>
+          <a:solidFill>
+            <a:srgbClr val="B3261E"/>
+          </a:solidFill>
+          <a:ln/>
+        </p:spPr>
+      </p:sp>
+      <p:sp>
+        <p:nvSpPr>
+          <p:cNvPr id="31" name="Text 28"/>
+          <p:cNvSpPr/>
+          <p:nvPr/>
+        </p:nvSpPr>
+        <p:spPr>
+          <a:xfrm>
+            <a:off x="6982968" y="3502152"/>
+            <a:ext cx="1371600" cy="274320"/>
+          </a:xfrm>
+          <a:prstGeom prst="rect">
+            <a:avLst/>
+          </a:prstGeom>
+          <a:noFill/>
+          <a:ln/>
+        </p:spPr>
+        <p:txBody>
+          <a:bodyPr wrap="square" lIns="0" tIns="0" rIns="0" bIns="0" rtlCol="0" anchor="ctr"/>
+          <a:lstStyle/>
+          <a:p>
+            <a:pPr algn="ctr" indent="0" marL="0">
+              <a:buNone/>
+            </a:pPr>
+            <a:r>
+              <a:rPr lang="en-US" sz="1050" b="1" dirty="0">
+                <a:solidFill>
+                  <a:srgbClr val="B3261E"/>
+                </a:solidFill>
+                <a:latin typeface="Courier New" pitchFamily="34" charset="0"/>
+                <a:ea typeface="Courier New" pitchFamily="34" charset="-122"/>
+                <a:cs typeface="Courier New" pitchFamily="34" charset="-120"/>
+              </a:rPr>
+              <a:t>10:11</a:t>
+            </a:r>
+            <a:endParaRPr lang="en-US" sz="1050" dirty="0"/>
+          </a:p>
+        </p:txBody>
+      </p:sp>
+      <p:sp>
+        <p:nvSpPr>
+          <p:cNvPr id="32" name="Text 29"/>
+          <p:cNvSpPr/>
+          <p:nvPr/>
+        </p:nvSpPr>
+        <p:spPr>
+          <a:xfrm>
+            <a:off x="6800088" y="4251960"/>
+            <a:ext cx="1737360" cy="640080"/>
+          </a:xfrm>
+          <a:prstGeom prst="rect">
+            <a:avLst/>
+          </a:prstGeom>
+          <a:noFill/>
+          <a:ln/>
+        </p:spPr>
+        <p:txBody>
+          <a:bodyPr wrap="square" lIns="0" tIns="0" rIns="0" bIns="0" rtlCol="0" anchor="t"/>
+          <a:lstStyle/>
+          <a:p>
+            <a:pPr algn="ctr" indent="0" marL="0">
+              <a:buNone/>
+            </a:pPr>
+            <a:r>
+              <a:rPr lang="en-US" sz="1100" dirty="0">
+                <a:solidFill>
+                  <a:srgbClr val="434343"/>
+                </a:solidFill>
+                <a:latin typeface="Montserrat" pitchFamily="34" charset="0"/>
+                <a:ea typeface="Montserrat" pitchFamily="34" charset="-122"/>
+                <a:cs typeface="Montserrat" pitchFamily="34" charset="-120"/>
+              </a:rPr>
+              <a:t>алерт: симптом, не причина</a:t>
+            </a:r>
+            <a:endParaRPr lang="en-US" sz="1100" dirty="0"/>
+          </a:p>
+        </p:txBody>
+      </p:sp>
+      <p:sp>
+        <p:nvSpPr>
+          <p:cNvPr id="33" name="Shape 30"/>
+          <p:cNvSpPr/>
+          <p:nvPr/>
+        </p:nvSpPr>
+        <p:spPr>
+          <a:xfrm>
+            <a:off x="10725912" y="3986784"/>
+            <a:ext cx="164592" cy="164592"/>
+          </a:xfrm>
+          <a:prstGeom prst="ellipse">
+            <a:avLst/>
+          </a:prstGeom>
+          <a:solidFill>
+            <a:srgbClr val="5A05F4"/>
+          </a:solidFill>
+          <a:ln/>
+        </p:spPr>
+      </p:sp>
+      <p:sp>
+        <p:nvSpPr>
+          <p:cNvPr id="34" name="Text 31"/>
+          <p:cNvSpPr/>
+          <p:nvPr/>
+        </p:nvSpPr>
+        <p:spPr>
+          <a:xfrm>
+            <a:off x="10122408" y="3502152"/>
+            <a:ext cx="1371600" cy="274320"/>
+          </a:xfrm>
+          <a:prstGeom prst="rect">
+            <a:avLst/>
+          </a:prstGeom>
+          <a:noFill/>
+          <a:ln/>
+        </p:spPr>
+        <p:txBody>
+          <a:bodyPr wrap="square" lIns="0" tIns="0" rIns="0" bIns="0" rtlCol="0" anchor="ctr"/>
+          <a:lstStyle/>
+          <a:p>
+            <a:pPr algn="ctr" indent="0" marL="0">
+              <a:buNone/>
+            </a:pPr>
+            <a:r>
+              <a:rPr lang="en-US" sz="1050" b="1" dirty="0">
+                <a:solidFill>
+                  <a:srgbClr val="5A05F4"/>
+                </a:solidFill>
+                <a:latin typeface="Courier New" pitchFamily="34" charset="0"/>
+                <a:ea typeface="Courier New" pitchFamily="34" charset="-122"/>
+                <a:cs typeface="Courier New" pitchFamily="34" charset="-120"/>
+              </a:rPr>
+              <a:t>10:12</a:t>
+            </a:r>
+            <a:endParaRPr lang="en-US" sz="1050" dirty="0"/>
+          </a:p>
+        </p:txBody>
+      </p:sp>
+      <p:sp>
+        <p:nvSpPr>
+          <p:cNvPr id="35" name="Text 32"/>
+          <p:cNvSpPr/>
+          <p:nvPr/>
+        </p:nvSpPr>
+        <p:spPr>
+          <a:xfrm>
+            <a:off x="9939528" y="4251960"/>
+            <a:ext cx="1737360" cy="640080"/>
+          </a:xfrm>
+          <a:prstGeom prst="rect">
+            <a:avLst/>
+          </a:prstGeom>
+          <a:noFill/>
+          <a:ln/>
+        </p:spPr>
+        <p:txBody>
+          <a:bodyPr wrap="square" lIns="0" tIns="0" rIns="0" bIns="0" rtlCol="0" anchor="t"/>
+          <a:lstStyle/>
+          <a:p>
+            <a:pPr algn="ctr" indent="0" marL="0">
+              <a:buNone/>
+            </a:pPr>
+            <a:r>
+              <a:rPr lang="en-US" sz="1100" dirty="0">
+                <a:solidFill>
+                  <a:srgbClr val="434343"/>
+                </a:solidFill>
+                <a:latin typeface="Montserrat" pitchFamily="34" charset="0"/>
+                <a:ea typeface="Montserrat" pitchFamily="34" charset="-122"/>
+                <a:cs typeface="Montserrat" pitchFamily="34" charset="-120"/>
+              </a:rPr>
+              <a:t>runbook: що робити першим</a:t>
+            </a:r>
+            <a:endParaRPr lang="en-US" sz="1100" dirty="0"/>
+          </a:p>
+        </p:txBody>
+      </p:sp>
+      <p:sp>
+        <p:nvSpPr>
+          <p:cNvPr id="36" name="Shape 33"/>
+          <p:cNvSpPr/>
+          <p:nvPr/>
+        </p:nvSpPr>
+        <p:spPr>
+          <a:xfrm>
+            <a:off x="566928" y="5029200"/>
+            <a:ext cx="11064240" cy="1051560"/>
           </a:xfrm>
           <a:prstGeom prst="roundRect">
             <a:avLst>
-              <a:gd name="adj" fmla="val 8889"/>
+              <a:gd name="adj" fmla="val 10435"/>
             </a:avLst>
           </a:prstGeom>
           <a:solidFill>
@@ -12775,13 +13190,13 @@
       </p:sp>
       <p:sp>
         <p:nvSpPr>
-          <p:cNvPr id="24" name="Shape 21"/>
-          <p:cNvSpPr/>
-          <p:nvPr/>
-        </p:nvSpPr>
-        <p:spPr>
-          <a:xfrm>
-            <a:off x="749808" y="4393692"/>
+          <p:cNvPr id="37" name="Shape 34"/>
+          <p:cNvSpPr/>
+          <p:nvPr/>
+        </p:nvSpPr>
+        <p:spPr>
+          <a:xfrm>
+            <a:off x="749808" y="5399532"/>
             <a:ext cx="310896" cy="310896"/>
           </a:xfrm>
           <a:prstGeom prst="ellipse">
@@ -12795,13 +13210,13 @@
       </p:sp>
       <p:sp>
         <p:nvSpPr>
-          <p:cNvPr id="25" name="Text 22"/>
-          <p:cNvSpPr/>
-          <p:nvPr/>
-        </p:nvSpPr>
-        <p:spPr>
-          <a:xfrm>
-            <a:off x="749808" y="4393692"/>
+          <p:cNvPr id="38" name="Text 35"/>
+          <p:cNvSpPr/>
+          <p:nvPr/>
+        </p:nvSpPr>
+        <p:spPr>
+          <a:xfrm>
+            <a:off x="749808" y="5399532"/>
             <a:ext cx="310896" cy="310896"/>
           </a:xfrm>
           <a:prstGeom prst="rect">
@@ -12834,13 +13249,13 @@
       </p:sp>
       <p:sp>
         <p:nvSpPr>
-          <p:cNvPr id="26" name="Text 23"/>
-          <p:cNvSpPr/>
-          <p:nvPr/>
-        </p:nvSpPr>
-        <p:spPr>
-          <a:xfrm>
-            <a:off x="1243584" y="4059936"/>
+          <p:cNvPr id="39" name="Text 36"/>
+          <p:cNvSpPr/>
+          <p:nvPr/>
+        </p:nvSpPr>
+        <p:spPr>
+          <a:xfrm>
+            <a:off x="1243584" y="5157216"/>
             <a:ext cx="10168128" cy="219456"/>
           </a:xfrm>
           <a:prstGeom prst="rect">
@@ -12873,14 +13288,14 @@
       </p:sp>
       <p:sp>
         <p:nvSpPr>
-          <p:cNvPr id="27" name="Text 24"/>
-          <p:cNvSpPr/>
-          <p:nvPr/>
-        </p:nvSpPr>
-        <p:spPr>
-          <a:xfrm>
-            <a:off x="1243584" y="4315968"/>
-            <a:ext cx="10168128" cy="722376"/>
+          <p:cNvPr id="40" name="Text 37"/>
+          <p:cNvSpPr/>
+          <p:nvPr/>
+        </p:nvSpPr>
+        <p:spPr>
+          <a:xfrm>
+            <a:off x="1243584" y="5413248"/>
+            <a:ext cx="10168128" cy="539496"/>
           </a:xfrm>
           <a:prstGeom prst="rect">
             <a:avLst/>
@@ -12907,76 +13322,7 @@
                 <a:ea typeface="Montserrat" pitchFamily="34" charset="-122"/>
                 <a:cs typeface="Montserrat" pitchFamily="34" charset="-120"/>
               </a:rPr>
-              <a:t>Окремі 5xx і таймаути — нормальний фон. Алерт — на відхилення в часі.</a:t>
-            </a:r>
-            <a:endParaRPr lang="en-US" sz="1300" dirty="0"/>
-          </a:p>
-        </p:txBody>
-      </p:sp>
-      <p:sp>
-        <p:nvSpPr>
-          <p:cNvPr id="28" name="Shape 25"/>
-          <p:cNvSpPr/>
-          <p:nvPr/>
-        </p:nvSpPr>
-        <p:spPr>
-          <a:xfrm>
-            <a:off x="566928" y="5303520"/>
-            <a:ext cx="11064240" cy="548640"/>
-          </a:xfrm>
-          <a:prstGeom prst="roundRect">
-            <a:avLst>
-              <a:gd name="adj" fmla="val 20000"/>
-            </a:avLst>
-          </a:prstGeom>
-          <a:solidFill>
-            <a:srgbClr val="FFFFFF"/>
-          </a:solidFill>
-          <a:ln w="12700">
-            <a:solidFill>
-              <a:srgbClr val="D9D9D9"/>
-            </a:solidFill>
-            <a:prstDash val="solid"/>
-          </a:ln>
-        </p:spPr>
-      </p:sp>
-      <p:sp>
-        <p:nvSpPr>
-          <p:cNvPr id="29" name="Text 26"/>
-          <p:cNvSpPr/>
-          <p:nvPr/>
-        </p:nvSpPr>
-        <p:spPr>
-          <a:xfrm>
-            <a:off x="786384" y="5449824"/>
-            <a:ext cx="10625328" cy="256032"/>
-          </a:xfrm>
-          <a:prstGeom prst="rect">
-            <a:avLst/>
-          </a:prstGeom>
-          <a:noFill/>
-          <a:ln/>
-        </p:spPr>
-        <p:txBody>
-          <a:bodyPr wrap="square" lIns="0" tIns="0" rIns="0" bIns="0" rtlCol="0" anchor="ctr"/>
-          <a:lstStyle/>
-          <a:p>
-            <a:pPr indent="0" marL="0">
-              <a:lnSpc>
-                <a:spcPct val="112000"/>
-              </a:lnSpc>
-              <a:buNone/>
-            </a:pPr>
-            <a:r>
-              <a:rPr lang="en-US" sz="1300" dirty="0">
-                <a:solidFill>
-                  <a:srgbClr val="000000"/>
-                </a:solidFill>
-                <a:latin typeface="Montserrat" pitchFamily="34" charset="0"/>
-                <a:ea typeface="Montserrat" pitchFamily="34" charset="-122"/>
-                <a:cs typeface="Montserrat" pitchFamily="34" charset="-120"/>
-              </a:rPr>
-              <a:t>Мітки — тільки осяжні. User_id живе в лозі, не в метриках.</a:t>
+              <a:t>Окремі 5xx і таймаути — нормальний фон. Алерт — на відхилення в часі. Мітки — тільки осяжні: user_id живе в лозі, не в метриках.</a:t>
             </a:r>
             <a:endParaRPr lang="en-US" sz="1300" dirty="0"/>
           </a:p>
@@ -16977,11 +17323,11 @@
         <p:spPr>
           <a:xfrm>
             <a:off x="566928" y="1920240"/>
-            <a:ext cx="3520440" cy="2103120"/>
+            <a:ext cx="3520440" cy="1737360"/>
           </a:xfrm>
           <a:prstGeom prst="roundRect">
             <a:avLst>
-              <a:gd name="adj" fmla="val 5217"/>
+              <a:gd name="adj" fmla="val 6316"/>
             </a:avLst>
           </a:prstGeom>
           <a:solidFill>
@@ -17097,7 +17443,7 @@
         <p:spPr>
           <a:xfrm>
             <a:off x="768096" y="2606040"/>
-            <a:ext cx="3118104" cy="1261872"/>
+            <a:ext cx="3118104" cy="896112"/>
           </a:xfrm>
           <a:prstGeom prst="rect">
             <a:avLst/>
@@ -17139,11 +17485,11 @@
         <p:spPr>
           <a:xfrm>
             <a:off x="4270248" y="1920240"/>
-            <a:ext cx="3520440" cy="2103120"/>
+            <a:ext cx="3520440" cy="1737360"/>
           </a:xfrm>
           <a:prstGeom prst="roundRect">
             <a:avLst>
-              <a:gd name="adj" fmla="val 5217"/>
+              <a:gd name="adj" fmla="val 6316"/>
             </a:avLst>
           </a:prstGeom>
           <a:solidFill>
@@ -17259,7 +17605,7 @@
         <p:spPr>
           <a:xfrm>
             <a:off x="4471416" y="2606040"/>
-            <a:ext cx="3118104" cy="1261872"/>
+            <a:ext cx="3118104" cy="896112"/>
           </a:xfrm>
           <a:prstGeom prst="rect">
             <a:avLst/>
@@ -17301,11 +17647,11 @@
         <p:spPr>
           <a:xfrm>
             <a:off x="7973568" y="1920240"/>
-            <a:ext cx="3520440" cy="2103120"/>
+            <a:ext cx="3520440" cy="1737360"/>
           </a:xfrm>
           <a:prstGeom prst="roundRect">
             <a:avLst>
-              <a:gd name="adj" fmla="val 5217"/>
+              <a:gd name="adj" fmla="val 6316"/>
             </a:avLst>
           </a:prstGeom>
           <a:solidFill>
@@ -17421,7 +17767,7 @@
         <p:spPr>
           <a:xfrm>
             <a:off x="8174736" y="2606040"/>
-            <a:ext cx="3118104" cy="1261872"/>
+            <a:ext cx="3118104" cy="896112"/>
           </a:xfrm>
           <a:prstGeom prst="rect">
             <a:avLst/>
@@ -17462,12 +17808,502 @@
         </p:nvSpPr>
         <p:spPr>
           <a:xfrm>
-            <a:off x="566928" y="4297680"/>
-            <a:ext cx="11064240" cy="1600200"/>
+            <a:off x="566928" y="3886200"/>
+            <a:ext cx="2423160" cy="512064"/>
           </a:xfrm>
           <a:prstGeom prst="roundRect">
             <a:avLst>
-              <a:gd name="adj" fmla="val 6857"/>
+              <a:gd name="adj" fmla="val 17857"/>
+            </a:avLst>
+          </a:prstGeom>
+          <a:solidFill>
+            <a:srgbClr val="000000"/>
+          </a:solidFill>
+          <a:ln/>
+        </p:spPr>
+      </p:sp>
+      <p:sp>
+        <p:nvSpPr>
+          <p:cNvPr id="25" name="Text 22"/>
+          <p:cNvSpPr/>
+          <p:nvPr/>
+        </p:nvSpPr>
+        <p:spPr>
+          <a:xfrm>
+            <a:off x="621792" y="3886200"/>
+            <a:ext cx="2313432" cy="512064"/>
+          </a:xfrm>
+          <a:prstGeom prst="rect">
+            <a:avLst/>
+          </a:prstGeom>
+          <a:noFill/>
+          <a:ln/>
+        </p:spPr>
+        <p:txBody>
+          <a:bodyPr wrap="square" lIns="0" tIns="0" rIns="0" bIns="0" rtlCol="0" anchor="ctr"/>
+          <a:lstStyle/>
+          <a:p>
+            <a:pPr algn="ctr" indent="0" marL="0">
+              <a:buNone/>
+            </a:pPr>
+            <a:r>
+              <a:rPr lang="en-US" sz="1050" dirty="0">
+                <a:solidFill>
+                  <a:srgbClr val="FFFFFF"/>
+                </a:solidFill>
+                <a:latin typeface="Courier New" pitchFamily="34" charset="0"/>
+                <a:ea typeface="Courier New" pitchFamily="34" charset="-122"/>
+                <a:cs typeface="Courier New" pitchFamily="34" charset="-120"/>
+              </a:rPr>
+              <a:t>запит користувача</a:t>
+            </a:r>
+            <a:endParaRPr lang="en-US" sz="1050" dirty="0"/>
+          </a:p>
+        </p:txBody>
+      </p:sp>
+      <p:sp>
+        <p:nvSpPr>
+          <p:cNvPr id="26" name="Shape 23"/>
+          <p:cNvSpPr/>
+          <p:nvPr/>
+        </p:nvSpPr>
+        <p:spPr>
+          <a:xfrm>
+            <a:off x="3081528" y="4142232"/>
+            <a:ext cx="164592" cy="0"/>
+          </a:xfrm>
+          <a:prstGeom prst="line">
+            <a:avLst/>
+          </a:prstGeom>
+          <a:noFill/>
+          <a:ln w="15875">
+            <a:solidFill>
+              <a:srgbClr val="5A05F4"/>
+            </a:solidFill>
+            <a:prstDash val="solid"/>
+          </a:ln>
+        </p:spPr>
+      </p:sp>
+      <p:sp>
+        <p:nvSpPr>
+          <p:cNvPr id="27" name="Shape 24"/>
+          <p:cNvSpPr/>
+          <p:nvPr/>
+        </p:nvSpPr>
+        <p:spPr>
+          <a:xfrm rot="5400000">
+            <a:off x="3209544" y="4073652"/>
+            <a:ext cx="146304" cy="137160"/>
+          </a:xfrm>
+          <a:prstGeom prst="triangle">
+            <a:avLst/>
+          </a:prstGeom>
+          <a:solidFill>
+            <a:srgbClr val="5A05F4"/>
+          </a:solidFill>
+          <a:ln/>
+        </p:spPr>
+      </p:sp>
+      <p:sp>
+        <p:nvSpPr>
+          <p:cNvPr id="28" name="Shape 25"/>
+          <p:cNvSpPr/>
+          <p:nvPr/>
+        </p:nvSpPr>
+        <p:spPr>
+          <a:xfrm>
+            <a:off x="3447288" y="3886200"/>
+            <a:ext cx="2423160" cy="512064"/>
+          </a:xfrm>
+          <a:prstGeom prst=